--- a/Artificial Intelligence for Enterprises/Assessment3/Huang_26254793_421104_Assessment 3.pptx
+++ b/Artificial Intelligence for Enterprises/Assessment3/Huang_26254793_421104_Assessment 3.pptx
@@ -3109,8 +3109,8 @@
         </p:nvSpPr>
         <p:spPr>
           <a:xfrm>
-            <a:off x="914400" y="1965960"/>
-            <a:ext cx="10332720" cy="1188720"/>
+            <a:off x="914400" y="1828800"/>
+            <a:ext cx="10332720" cy="1371600"/>
           </a:xfrm>
           <a:prstGeom prst="rect">
             <a:avLst/>
@@ -3129,13 +3129,29 @@
               </a:lnSpc>
             </a:pPr>
             <a:r>
-              <a:rPr sz="4000" b="1">
+              <a:rPr sz="3800" b="1">
                 <a:solidFill>
                   <a:srgbClr val="1F3864"/>
                 </a:solidFill>
                 <a:latin typeface="Microsoft JhengHei"/>
               </a:rPr>
-              <a:t>CBA 房貸固定利率到期留存決策系統</a:t>
+              <a:t>房貸固定利率到期留存:</a:t>
+            </a:r>
+          </a:p>
+          <a:p>
+            <a:pPr algn="l">
+              <a:lnSpc>
+                <a:spcPct val="125000"/>
+              </a:lnSpc>
+            </a:pPr>
+            <a:r>
+              <a:rPr sz="3800" b="1">
+                <a:solidFill>
+                  <a:srgbClr val="1F3864"/>
+                </a:solidFill>
+                <a:latin typeface="Microsoft JhengHei"/>
+              </a:rPr>
+              <a:t>先證明,再建置</a:t>
             </a:r>
           </a:p>
         </p:txBody>
@@ -3148,7 +3164,7 @@
         </p:nvSpPr>
         <p:spPr>
           <a:xfrm>
-            <a:off x="914400" y="3154680"/>
+            <a:off x="914400" y="3310128"/>
             <a:ext cx="10332720" cy="548640"/>
           </a:xfrm>
           <a:prstGeom prst="rect">
@@ -3187,7 +3203,7 @@
         </p:nvSpPr>
         <p:spPr>
           <a:xfrm>
-            <a:off x="914400" y="4114800"/>
+            <a:off x="914400" y="4224528"/>
             <a:ext cx="10332720" cy="1280160"/>
           </a:xfrm>
           <a:prstGeom prst="rect">
@@ -3302,7 +3318,7 @@
                 </a:solidFill>
                 <a:latin typeface="Microsoft JhengHei"/>
               </a:rPr>
-              <a:t>效益與衡量 · KPI 樹:證明賺錢,也證明沒有傷到人</a:t>
+              <a:t>業務影響 · 社會文化與倫理影響</a:t>
             </a:r>
           </a:p>
         </p:txBody>
@@ -3410,50 +3426,6 @@
             <a:avLst/>
           </a:prstGeom>
           <a:solidFill>
-            <a:srgbClr val="D9D9D9"/>
-          </a:solidFill>
-          <a:ln>
-            <a:noFill/>
-          </a:ln>
-          <a:effectLst/>
-        </p:spPr>
-        <p:style>
-          <a:lnRef idx="1">
-            <a:schemeClr val="accent1"/>
-          </a:lnRef>
-          <a:fillRef idx="3">
-            <a:schemeClr val="accent1"/>
-          </a:fillRef>
-          <a:effectRef idx="2">
-            <a:schemeClr val="accent1"/>
-          </a:effectRef>
-          <a:fontRef idx="minor">
-            <a:schemeClr val="lt1"/>
-          </a:fontRef>
-        </p:style>
-        <p:txBody>
-          <a:bodyPr rtlCol="0" anchor="ctr"/>
-          <a:lstStyle/>
-          <a:p>
-            <a:pPr algn="ctr"/>
-          </a:p>
-        </p:txBody>
-      </p:sp>
-      <p:sp>
-        <p:nvSpPr>
-          <p:cNvPr id="6" name="Oval 5"/>
-          <p:cNvSpPr/>
-          <p:nvPr/>
-        </p:nvSpPr>
-        <p:spPr>
-          <a:xfrm>
-            <a:off x="11091672" y="384048"/>
-            <a:ext cx="155448" cy="155448"/>
-          </a:xfrm>
-          <a:prstGeom prst="ellipse">
-            <a:avLst/>
-          </a:prstGeom>
-          <a:solidFill>
             <a:srgbClr val="1F3864"/>
           </a:solidFill>
           <a:ln>
@@ -3485,13 +3457,13 @@
       </p:sp>
       <p:sp>
         <p:nvSpPr>
-          <p:cNvPr id="7" name="Oval 6"/>
+          <p:cNvPr id="6" name="Oval 5"/>
           <p:cNvSpPr/>
           <p:nvPr/>
         </p:nvSpPr>
         <p:spPr>
           <a:xfrm>
-            <a:off x="11420856" y="384048"/>
+            <a:off x="11091672" y="384048"/>
             <a:ext cx="155448" cy="155448"/>
           </a:xfrm>
           <a:prstGeom prst="ellipse">
@@ -3527,9 +3499,53 @@
           </a:p>
         </p:txBody>
       </p:sp>
+      <p:sp>
+        <p:nvSpPr>
+          <p:cNvPr id="7" name="Oval 6"/>
+          <p:cNvSpPr/>
+          <p:nvPr/>
+        </p:nvSpPr>
+        <p:spPr>
+          <a:xfrm>
+            <a:off x="11420856" y="384048"/>
+            <a:ext cx="155448" cy="155448"/>
+          </a:xfrm>
+          <a:prstGeom prst="ellipse">
+            <a:avLst/>
+          </a:prstGeom>
+          <a:solidFill>
+            <a:srgbClr val="D9D9D9"/>
+          </a:solidFill>
+          <a:ln>
+            <a:noFill/>
+          </a:ln>
+          <a:effectLst/>
+        </p:spPr>
+        <p:style>
+          <a:lnRef idx="1">
+            <a:schemeClr val="accent1"/>
+          </a:lnRef>
+          <a:fillRef idx="3">
+            <a:schemeClr val="accent1"/>
+          </a:fillRef>
+          <a:effectRef idx="2">
+            <a:schemeClr val="accent1"/>
+          </a:effectRef>
+          <a:fontRef idx="minor">
+            <a:schemeClr val="lt1"/>
+          </a:fontRef>
+        </p:style>
+        <p:txBody>
+          <a:bodyPr rtlCol="0" anchor="ctr"/>
+          <a:lstStyle/>
+          <a:p>
+            <a:pPr algn="ctr"/>
+          </a:p>
+        </p:txBody>
+      </p:sp>
       <p:pic>
         <p:nvPicPr>
-          <p:cNvPr id="8" name="Picture 7" descr="fig09_kpi.png"/>
+          <p:cNvPr id="8" name="Picture 7" descr="fig_v3_08_ethics.png"/>
           <p:cNvPicPr>
             <a:picLocks noChangeAspect="1"/>
           </p:cNvPicPr>
@@ -3543,8 +3559,8 @@
         </p:blipFill>
         <p:spPr>
           <a:xfrm>
-            <a:off x="972465" y="1051560"/>
-            <a:ext cx="8646564" cy="4617720"/>
+            <a:off x="930160" y="1051560"/>
+            <a:ext cx="8731173" cy="4617720"/>
           </a:xfrm>
           <a:prstGeom prst="rect">
             <a:avLst/>
@@ -3581,11 +3597,11 @@
             <a:r>
               <a:rPr sz="1200" b="0">
                 <a:solidFill>
-                  <a:srgbClr val="1F3864"/>
-                </a:solidFill>
-                <a:latin typeface="Microsoft JhengHei"/>
-              </a:rPr>
-              <a:t>所有業務層指標以「實驗組 減 對照組」的增量計;絕對值僅供監控,不作為成效證據。</a:t>
+                  <a:srgbClr val="C00000"/>
+                </a:solidFill>
+                <a:latin typeface="Microsoft JhengHei"/>
+              </a:rPr>
+              <a:t>這個系統最根本的倫理問題,不在它用了什麼特徵,在它決定先照顧誰。</a:t>
             </a:r>
           </a:p>
         </p:txBody>
@@ -3642,7 +3658,7 @@
                 </a:solidFill>
                 <a:latin typeface="Microsoft JhengHei"/>
               </a:rPr>
-              <a:t>項目計畫 · 實施時程與六道關卡</a:t>
+              <a:t>效益與衡量 · 決策規則:什麼結果導向什麼下一步</a:t>
             </a:r>
           </a:p>
         </p:txBody>
@@ -3794,6 +3810,50 @@
             <a:avLst/>
           </a:prstGeom>
           <a:solidFill>
+            <a:srgbClr val="1F3864"/>
+          </a:solidFill>
+          <a:ln>
+            <a:noFill/>
+          </a:ln>
+          <a:effectLst/>
+        </p:spPr>
+        <p:style>
+          <a:lnRef idx="1">
+            <a:schemeClr val="accent1"/>
+          </a:lnRef>
+          <a:fillRef idx="3">
+            <a:schemeClr val="accent1"/>
+          </a:fillRef>
+          <a:effectRef idx="2">
+            <a:schemeClr val="accent1"/>
+          </a:effectRef>
+          <a:fontRef idx="minor">
+            <a:schemeClr val="lt1"/>
+          </a:fontRef>
+        </p:style>
+        <p:txBody>
+          <a:bodyPr rtlCol="0" anchor="ctr"/>
+          <a:lstStyle/>
+          <a:p>
+            <a:pPr algn="ctr"/>
+          </a:p>
+        </p:txBody>
+      </p:sp>
+      <p:sp>
+        <p:nvSpPr>
+          <p:cNvPr id="7" name="Oval 6"/>
+          <p:cNvSpPr/>
+          <p:nvPr/>
+        </p:nvSpPr>
+        <p:spPr>
+          <a:xfrm>
+            <a:off x="11420856" y="384048"/>
+            <a:ext cx="155448" cy="155448"/>
+          </a:xfrm>
+          <a:prstGeom prst="ellipse">
+            <a:avLst/>
+          </a:prstGeom>
+          <a:solidFill>
             <a:srgbClr val="D9D9D9"/>
           </a:solidFill>
           <a:ln>
@@ -3823,53 +3883,9 @@
           </a:p>
         </p:txBody>
       </p:sp>
-      <p:sp>
-        <p:nvSpPr>
-          <p:cNvPr id="7" name="Oval 6"/>
-          <p:cNvSpPr/>
-          <p:nvPr/>
-        </p:nvSpPr>
-        <p:spPr>
-          <a:xfrm>
-            <a:off x="11420856" y="384048"/>
-            <a:ext cx="155448" cy="155448"/>
-          </a:xfrm>
-          <a:prstGeom prst="ellipse">
-            <a:avLst/>
-          </a:prstGeom>
-          <a:solidFill>
-            <a:srgbClr val="1F3864"/>
-          </a:solidFill>
-          <a:ln>
-            <a:noFill/>
-          </a:ln>
-          <a:effectLst/>
-        </p:spPr>
-        <p:style>
-          <a:lnRef idx="1">
-            <a:schemeClr val="accent1"/>
-          </a:lnRef>
-          <a:fillRef idx="3">
-            <a:schemeClr val="accent1"/>
-          </a:fillRef>
-          <a:effectRef idx="2">
-            <a:schemeClr val="accent1"/>
-          </a:effectRef>
-          <a:fontRef idx="minor">
-            <a:schemeClr val="lt1"/>
-          </a:fontRef>
-        </p:style>
-        <p:txBody>
-          <a:bodyPr rtlCol="0" anchor="ctr"/>
-          <a:lstStyle/>
-          <a:p>
-            <a:pPr algn="ctr"/>
-          </a:p>
-        </p:txBody>
-      </p:sp>
       <p:pic>
         <p:nvPicPr>
-          <p:cNvPr id="8" name="Picture 7" descr="fig09_gantt.png"/>
+          <p:cNvPr id="8" name="Picture 7" descr="fig_v3_09_decision.png"/>
           <p:cNvPicPr>
             <a:picLocks noChangeAspect="1"/>
           </p:cNvPicPr>
@@ -3883,77 +3899,14 @@
         </p:blipFill>
         <p:spPr>
           <a:xfrm>
-            <a:off x="2572419" y="1005840"/>
-            <a:ext cx="5446655" cy="2606040"/>
+            <a:off x="754990" y="1005840"/>
+            <a:ext cx="9081514" cy="4709160"/>
           </a:xfrm>
           <a:prstGeom prst="rect">
             <a:avLst/>
           </a:prstGeom>
         </p:spPr>
       </p:pic>
-      <p:pic>
-        <p:nvPicPr>
-          <p:cNvPr id="9" name="Picture 8" descr="fig10_stagegate.png"/>
-          <p:cNvPicPr>
-            <a:picLocks noChangeAspect="1"/>
-          </p:cNvPicPr>
-          <p:nvPr/>
-        </p:nvPicPr>
-        <p:blipFill>
-          <a:blip r:embed="rId3"/>
-          <a:stretch>
-            <a:fillRect/>
-          </a:stretch>
-        </p:blipFill>
-        <p:spPr>
-          <a:xfrm>
-            <a:off x="2689914" y="3749039"/>
-            <a:ext cx="5211666" cy="2331720"/>
-          </a:xfrm>
-          <a:prstGeom prst="rect">
-            <a:avLst/>
-          </a:prstGeom>
-        </p:spPr>
-      </p:pic>
-      <p:sp>
-        <p:nvSpPr>
-          <p:cNvPr id="10" name="TextBox 9"/>
-          <p:cNvSpPr txBox="1"/>
-          <p:nvPr/>
-        </p:nvSpPr>
-        <p:spPr>
-          <a:xfrm>
-            <a:off x="502920" y="6236207"/>
-            <a:ext cx="9311335" cy="502920"/>
-          </a:xfrm>
-          <a:prstGeom prst="rect">
-            <a:avLst/>
-          </a:prstGeom>
-          <a:noFill/>
-        </p:spPr>
-        <p:txBody>
-          <a:bodyPr wrap="square" anchor="t">
-            <a:spAutoFit/>
-          </a:bodyPr>
-          <a:lstStyle/>
-          <a:p>
-            <a:pPr algn="l">
-              <a:lnSpc>
-                <a:spcPct val="125000"/>
-              </a:lnSpc>
-            </a:pPr>
-            <a:r>
-              <a:rPr sz="1100" b="0">
-                <a:solidFill>
-                  <a:srgbClr val="808080"/>
-                </a:solidFill>
-                <a:latin typeface="Microsoft JhengHei"/>
-              </a:rPr>
-              <a:t>每道關卡四態:Go / Conditional-Go / Hold / Kill。試點裁決未達顯著性即停止,不續投。</a:t>
-            </a:r>
-          </a:p>
-        </p:txBody>
-      </p:sp>
     </p:spTree>
   </p:cSld>
   <p:clrMapOvr>
@@ -4006,7 +3959,7 @@
                 </a:solidFill>
                 <a:latin typeface="Microsoft JhengHei"/>
               </a:rPr>
-              <a:t>項目計畫 · 資源配置與當責</a:t>
+              <a:t>項目計畫 · 時程、資源與當責</a:t>
             </a:r>
           </a:p>
         </p:txBody>
@@ -4233,7 +4186,7 @@
       </p:sp>
       <p:pic>
         <p:nvPicPr>
-          <p:cNvPr id="8" name="Picture 7" descr="fig11_resource.png"/>
+          <p:cNvPr id="8" name="Picture 7" descr="fig_v3_10_resource.png"/>
           <p:cNvPicPr>
             <a:picLocks noChangeAspect="1"/>
           </p:cNvPicPr>
@@ -4247,48 +4200,114 @@
         </p:blipFill>
         <p:spPr>
           <a:xfrm>
-            <a:off x="502920" y="1005840"/>
-            <a:ext cx="4372720" cy="2606040"/>
+            <a:off x="502920" y="1051560"/>
+            <a:ext cx="6152170" cy="3246120"/>
           </a:xfrm>
           <a:prstGeom prst="rect">
             <a:avLst/>
           </a:prstGeom>
         </p:spPr>
       </p:pic>
-      <p:pic>
-        <p:nvPicPr>
-          <p:cNvPr id="9" name="Picture 8" descr="fig11_raci.png"/>
-          <p:cNvPicPr>
-            <a:picLocks noChangeAspect="1"/>
-          </p:cNvPicPr>
-          <p:nvPr/>
-        </p:nvPicPr>
-        <p:blipFill>
-          <a:blip r:embed="rId3"/>
-          <a:stretch>
-            <a:fillRect/>
-          </a:stretch>
-        </p:blipFill>
-        <p:spPr>
-          <a:xfrm>
-            <a:off x="6720840" y="1005840"/>
-            <a:ext cx="3931920" cy="2296110"/>
-          </a:xfrm>
-          <a:prstGeom prst="rect">
-            <a:avLst/>
-          </a:prstGeom>
-        </p:spPr>
-      </p:pic>
-      <p:sp>
-        <p:nvSpPr>
-          <p:cNvPr id="10" name="TextBox 9"/>
+      <p:sp>
+        <p:nvSpPr>
+          <p:cNvPr id="9" name="Rounded Rectangle 8"/>
+          <p:cNvSpPr/>
+          <p:nvPr/>
+        </p:nvSpPr>
+        <p:spPr>
+          <a:xfrm>
+            <a:off x="7360920" y="1051560"/>
+            <a:ext cx="2880360" cy="3246120"/>
+          </a:xfrm>
+          <a:prstGeom prst="roundRect">
+            <a:avLst/>
+          </a:prstGeom>
+          <a:solidFill>
+            <a:srgbClr val="FFFFFF"/>
+          </a:solidFill>
+          <a:ln w="19050">
+            <a:solidFill>
+              <a:srgbClr val="1F3864"/>
+            </a:solidFill>
+          </a:ln>
+          <a:effectLst/>
+        </p:spPr>
+        <p:style>
+          <a:lnRef idx="1">
+            <a:schemeClr val="accent1"/>
+          </a:lnRef>
+          <a:fillRef idx="3">
+            <a:schemeClr val="accent1"/>
+          </a:fillRef>
+          <a:effectRef idx="2">
+            <a:schemeClr val="accent1"/>
+          </a:effectRef>
+          <a:fontRef idx="minor">
+            <a:schemeClr val="lt1"/>
+          </a:fontRef>
+        </p:style>
+        <p:txBody>
+          <a:bodyPr rtlCol="0" anchor="ctr"/>
+          <a:lstStyle/>
+          <a:p>
+            <a:pPr algn="ctr"/>
+          </a:p>
+        </p:txBody>
+      </p:sp>
+      <p:sp>
+        <p:nvSpPr>
+          <p:cNvPr id="10" name="Rounded Rectangle 9"/>
+          <p:cNvSpPr/>
+          <p:nvPr/>
+        </p:nvSpPr>
+        <p:spPr>
+          <a:xfrm>
+            <a:off x="7360920" y="1051560"/>
+            <a:ext cx="2880360" cy="384048"/>
+          </a:xfrm>
+          <a:prstGeom prst="roundRect">
+            <a:avLst/>
+          </a:prstGeom>
+          <a:solidFill>
+            <a:srgbClr val="1F3864"/>
+          </a:solidFill>
+          <a:ln>
+            <a:noFill/>
+          </a:ln>
+          <a:effectLst/>
+        </p:spPr>
+        <p:style>
+          <a:lnRef idx="1">
+            <a:schemeClr val="accent1"/>
+          </a:lnRef>
+          <a:fillRef idx="3">
+            <a:schemeClr val="accent1"/>
+          </a:fillRef>
+          <a:effectRef idx="2">
+            <a:schemeClr val="accent1"/>
+          </a:effectRef>
+          <a:fontRef idx="minor">
+            <a:schemeClr val="lt1"/>
+          </a:fontRef>
+        </p:style>
+        <p:txBody>
+          <a:bodyPr rtlCol="0" anchor="ctr"/>
+          <a:lstStyle/>
+          <a:p>
+            <a:pPr algn="ctr"/>
+          </a:p>
+        </p:txBody>
+      </p:sp>
+      <p:sp>
+        <p:nvSpPr>
+          <p:cNvPr id="11" name="TextBox 10"/>
           <p:cNvSpPr txBox="1"/>
           <p:nvPr/>
         </p:nvSpPr>
         <p:spPr>
           <a:xfrm>
-            <a:off x="502920" y="3794760"/>
-            <a:ext cx="9311335" cy="2103120"/>
+            <a:off x="7360920" y="1097280"/>
+            <a:ext cx="2880360" cy="320040"/>
           </a:xfrm>
           <a:prstGeom prst="rect">
             <a:avLst/>
@@ -4301,97 +4320,33 @@
           </a:bodyPr>
           <a:lstStyle/>
           <a:p>
-            <a:pPr algn="l">
-              <a:lnSpc>
-                <a:spcPct val="145000"/>
-              </a:lnSpc>
-            </a:pPr>
-            <a:r>
-              <a:rPr sz="1300" b="0">
-                <a:solidFill>
-                  <a:srgbClr val="1F3864"/>
-                </a:solidFill>
-                <a:latin typeface="Microsoft JhengHei"/>
-              </a:rPr>
-              <a:t>資源尖峰不在模型開發,在合規審查(第 5 個月 3.25 FTE)——</a:t>
-            </a:r>
-          </a:p>
-          <a:p>
-            <a:pPr algn="l">
-              <a:lnSpc>
-                <a:spcPct val="145000"/>
-              </a:lnSpc>
-            </a:pPr>
-            <a:r>
-              <a:rPr sz="1300" b="0">
-                <a:solidFill>
-                  <a:srgbClr val="1F3864"/>
-                </a:solidFill>
-                <a:latin typeface="Microsoft JhengHei"/>
-              </a:rPr>
-              <a:t>這個系統真正難的不是把模型做出來,是讓它被允許用。</a:t>
-            </a:r>
-          </a:p>
-          <a:p>
-            <a:pPr algn="l">
-              <a:lnSpc>
-                <a:spcPct val="145000"/>
-              </a:lnSpc>
-            </a:pPr>
-            <a:r>
-              <a:rPr sz="1300" b="0">
-                <a:solidFill>
-                  <a:srgbClr val="1F3864"/>
-                </a:solidFill>
-                <a:latin typeface="Microsoft JhengHei"/>
-              </a:rPr>
-              <a:t>而試點期是全期資源最低(1.42 FTE),因為那三個月是在等實驗結果,不是在建東西。</a:t>
-            </a:r>
-          </a:p>
-          <a:p>
-            <a:pPr algn="l">
-              <a:lnSpc>
-                <a:spcPct val="145000"/>
-              </a:lnSpc>
-            </a:pPr>
-            <a:r>
-              <a:rPr sz="1300" b="0">
-                <a:solidFill>
-                  <a:srgbClr val="1F3864"/>
-                </a:solidFill>
-                <a:latin typeface="Microsoft JhengHei"/>
-              </a:rPr>
-              <a:t/>
-            </a:r>
-          </a:p>
-          <a:p>
-            <a:pPr algn="l">
-              <a:lnSpc>
-                <a:spcPct val="145000"/>
-              </a:lnSpc>
-            </a:pPr>
-            <a:r>
-              <a:rPr sz="1300" b="0">
-                <a:solidFill>
-                  <a:srgbClr val="1F3864"/>
-                </a:solidFill>
-                <a:latin typeface="Microsoft JhengHei"/>
-              </a:rPr>
-              <a:t>第一期(M1–M6)合計 16.0 人月,與「今天只請求批准第一期」精準對應。</a:t>
-            </a:r>
-          </a:p>
-        </p:txBody>
-      </p:sp>
-      <p:sp>
-        <p:nvSpPr>
-          <p:cNvPr id="11" name="TextBox 10"/>
+            <a:pPr algn="ctr">
+              <a:lnSpc>
+                <a:spcPct val="125000"/>
+              </a:lnSpc>
+            </a:pPr>
+            <a:r>
+              <a:rPr sz="1300" b="1">
+                <a:solidFill>
+                  <a:srgbClr val="FFFFFF"/>
+                </a:solidFill>
+                <a:latin typeface="Microsoft JhengHei"/>
+              </a:rPr>
+              <a:t>關鍵利益相關者</a:t>
+            </a:r>
+          </a:p>
+        </p:txBody>
+      </p:sp>
+      <p:sp>
+        <p:nvSpPr>
+          <p:cNvPr id="12" name="TextBox 11"/>
           <p:cNvSpPr txBox="1"/>
           <p:nvPr/>
         </p:nvSpPr>
         <p:spPr>
           <a:xfrm>
-            <a:off x="502920" y="6236207"/>
-            <a:ext cx="9311335" cy="502920"/>
+            <a:off x="7488936" y="1527048"/>
+            <a:ext cx="2624328" cy="2679191"/>
           </a:xfrm>
           <a:prstGeom prst="rect">
             <a:avLst/>
@@ -4406,17 +4361,248 @@
           <a:p>
             <a:pPr algn="l">
               <a:lnSpc>
-                <a:spcPct val="125000"/>
-              </a:lnSpc>
-            </a:pPr>
-            <a:r>
-              <a:rPr sz="1100" b="0">
-                <a:solidFill>
-                  <a:srgbClr val="808080"/>
-                </a:solidFill>
-                <a:latin typeface="Microsoft JhengHei"/>
-              </a:rPr>
-              <a:t>Planning estimate — to be calibrated with CBA internal rates。成本 = 總人月 × 澳洲 ICT 職類薪資中位數區間 × 1.3 間接費率(間接費率為提案人假設)。</a:t>
+                <a:spcPct val="135000"/>
+              </a:lnSpc>
+            </a:pPr>
+            <a:r>
+              <a:rPr sz="1000" b="0">
+                <a:solidFill>
+                  <a:srgbClr val="333333"/>
+                </a:solidFill>
+                <a:latin typeface="Microsoft JhengHei"/>
+              </a:rPr>
+              <a:t>專案贊助人</a:t>
+            </a:r>
+          </a:p>
+          <a:p>
+            <a:pPr algn="l">
+              <a:lnSpc>
+                <a:spcPct val="135000"/>
+              </a:lnSpc>
+            </a:pPr>
+            <a:r>
+              <a:rPr sz="1000" b="0">
+                <a:solidFill>
+                  <a:srgbClr val="333333"/>
+                </a:solidFill>
+                <a:latin typeface="Microsoft JhengHei"/>
+              </a:rPr>
+              <a:t>(零售銀行主管)</a:t>
+            </a:r>
+          </a:p>
+          <a:p>
+            <a:pPr algn="l">
+              <a:lnSpc>
+                <a:spcPct val="135000"/>
+              </a:lnSpc>
+            </a:pPr>
+            <a:r>
+              <a:rPr sz="1000" b="0">
+                <a:solidFill>
+                  <a:srgbClr val="333333"/>
+                </a:solidFill>
+                <a:latin typeface="Microsoft JhengHei"/>
+              </a:rPr>
+              <a:t/>
+            </a:r>
+          </a:p>
+          <a:p>
+            <a:pPr algn="l">
+              <a:lnSpc>
+                <a:spcPct val="135000"/>
+              </a:lnSpc>
+            </a:pPr>
+            <a:r>
+              <a:rPr sz="1000" b="0">
+                <a:solidFill>
+                  <a:srgbClr val="333333"/>
+                </a:solidFill>
+                <a:latin typeface="Microsoft JhengHei"/>
+              </a:rPr>
+              <a:t>業務負責人(房貸)</a:t>
+            </a:r>
+          </a:p>
+          <a:p>
+            <a:pPr algn="l">
+              <a:lnSpc>
+                <a:spcPct val="135000"/>
+              </a:lnSpc>
+            </a:pPr>
+            <a:r>
+              <a:rPr sz="1000" b="0">
+                <a:solidFill>
+                  <a:srgbClr val="333333"/>
+                </a:solidFill>
+                <a:latin typeface="Microsoft JhengHei"/>
+              </a:rPr>
+              <a:t/>
+            </a:r>
+          </a:p>
+          <a:p>
+            <a:pPr algn="l">
+              <a:lnSpc>
+                <a:spcPct val="135000"/>
+              </a:lnSpc>
+            </a:pPr>
+            <a:r>
+              <a:rPr sz="1000" b="0">
+                <a:solidFill>
+                  <a:srgbClr val="333333"/>
+                </a:solidFill>
+                <a:latin typeface="Microsoft JhengHei"/>
+              </a:rPr>
+              <a:t>資料負責人</a:t>
+            </a:r>
+          </a:p>
+          <a:p>
+            <a:pPr algn="l">
+              <a:lnSpc>
+                <a:spcPct val="135000"/>
+              </a:lnSpc>
+            </a:pPr>
+            <a:r>
+              <a:rPr sz="1000" b="0">
+                <a:solidFill>
+                  <a:srgbClr val="333333"/>
+                </a:solidFill>
+                <a:latin typeface="Microsoft JhengHei"/>
+              </a:rPr>
+              <a:t/>
+            </a:r>
+          </a:p>
+          <a:p>
+            <a:pPr algn="l">
+              <a:lnSpc>
+                <a:spcPct val="135000"/>
+              </a:lnSpc>
+            </a:pPr>
+            <a:r>
+              <a:rPr sz="1000" b="0">
+                <a:solidFill>
+                  <a:srgbClr val="333333"/>
+                </a:solidFill>
+                <a:latin typeface="Microsoft JhengHei"/>
+              </a:rPr>
+              <a:t>合規法務</a:t>
+            </a:r>
+          </a:p>
+          <a:p>
+            <a:pPr algn="l">
+              <a:lnSpc>
+                <a:spcPct val="135000"/>
+              </a:lnSpc>
+            </a:pPr>
+            <a:r>
+              <a:rPr sz="1000" b="0">
+                <a:solidFill>
+                  <a:srgbClr val="333333"/>
+                </a:solidFill>
+                <a:latin typeface="Microsoft JhengHei"/>
+              </a:rPr>
+              <a:t/>
+            </a:r>
+          </a:p>
+          <a:p>
+            <a:pPr algn="l">
+              <a:lnSpc>
+                <a:spcPct val="135000"/>
+              </a:lnSpc>
+            </a:pPr>
+            <a:r>
+              <a:rPr sz="1000" b="0">
+                <a:solidFill>
+                  <a:srgbClr val="333333"/>
+                </a:solidFill>
+                <a:latin typeface="Microsoft JhengHei"/>
+              </a:rPr>
+              <a:t>客戶經理代表</a:t>
+            </a:r>
+          </a:p>
+          <a:p>
+            <a:pPr algn="l">
+              <a:lnSpc>
+                <a:spcPct val="135000"/>
+              </a:lnSpc>
+            </a:pPr>
+            <a:r>
+              <a:rPr sz="1000" b="0">
+                <a:solidFill>
+                  <a:srgbClr val="333333"/>
+                </a:solidFill>
+                <a:latin typeface="Microsoft JhengHei"/>
+              </a:rPr>
+              <a:t/>
+            </a:r>
+          </a:p>
+          <a:p>
+            <a:pPr algn="l">
+              <a:lnSpc>
+                <a:spcPct val="135000"/>
+              </a:lnSpc>
+            </a:pPr>
+            <a:r>
+              <a:rPr sz="1000" b="0">
+                <a:solidFill>
+                  <a:srgbClr val="333333"/>
+                </a:solidFill>
+                <a:latin typeface="Microsoft JhengHei"/>
+              </a:rPr>
+              <a:t>財務(產品別 margin)</a:t>
+            </a:r>
+          </a:p>
+        </p:txBody>
+      </p:sp>
+      <p:sp>
+        <p:nvSpPr>
+          <p:cNvPr id="13" name="TextBox 12"/>
+          <p:cNvSpPr txBox="1"/>
+          <p:nvPr/>
+        </p:nvSpPr>
+        <p:spPr>
+          <a:xfrm>
+            <a:off x="502920" y="4526280"/>
+            <a:ext cx="9311335" cy="1554480"/>
+          </a:xfrm>
+          <a:prstGeom prst="rect">
+            <a:avLst/>
+          </a:prstGeom>
+          <a:noFill/>
+        </p:spPr>
+        <p:txBody>
+          <a:bodyPr wrap="square" anchor="t">
+            <a:spAutoFit/>
+          </a:bodyPr>
+          <a:lstStyle/>
+          <a:p>
+            <a:pPr algn="l">
+              <a:lnSpc>
+                <a:spcPct val="145000"/>
+              </a:lnSpc>
+            </a:pPr>
+            <a:r>
+              <a:rPr sz="1300" b="0">
+                <a:solidFill>
+                  <a:srgbClr val="1F3864"/>
+                </a:solidFill>
+                <a:latin typeface="Microsoft JhengHei"/>
+              </a:rPr>
+              <a:t>關鍵路徑是「合規預審 → 對照實驗」—— 合規意見書未出,實驗不能開始。</a:t>
+            </a:r>
+          </a:p>
+          <a:p>
+            <a:pPr algn="l">
+              <a:lnSpc>
+                <a:spcPct val="145000"/>
+              </a:lnSpc>
+            </a:pPr>
+            <a:r>
+              <a:rPr sz="1300" b="0">
+                <a:solidFill>
+                  <a:srgbClr val="1F3864"/>
+                </a:solidFill>
+                <a:latin typeface="Microsoft JhengHei"/>
+              </a:rPr>
+              <a:t>這是本案唯一的外部依賴,也是唯一需要簽核才能放行的關卡。</a:t>
             </a:r>
           </a:p>
         </p:txBody>
@@ -4486,8 +4672,8 @@
         </p:nvSpPr>
         <p:spPr>
           <a:xfrm>
-            <a:off x="502920" y="1371600"/>
-            <a:ext cx="2395728" cy="3200400"/>
+            <a:off x="502920" y="1280160"/>
+            <a:ext cx="2395728" cy="3337560"/>
           </a:xfrm>
           <a:prstGeom prst="roundRect">
             <a:avLst/>
@@ -4532,7 +4718,7 @@
         </p:nvSpPr>
         <p:spPr>
           <a:xfrm>
-            <a:off x="502920" y="1371600"/>
+            <a:off x="502920" y="1280160"/>
             <a:ext cx="2395728" cy="384048"/>
           </a:xfrm>
           <a:prstGeom prst="roundRect">
@@ -4576,7 +4762,7 @@
         </p:nvSpPr>
         <p:spPr>
           <a:xfrm>
-            <a:off x="502920" y="1417320"/>
+            <a:off x="502920" y="1325880"/>
             <a:ext cx="2395728" cy="320040"/>
           </a:xfrm>
           <a:prstGeom prst="rect">
@@ -4615,8 +4801,8 @@
         </p:nvSpPr>
         <p:spPr>
           <a:xfrm>
-            <a:off x="630936" y="1847088"/>
-            <a:ext cx="2139696" cy="2633472"/>
+            <a:off x="630936" y="1755648"/>
+            <a:ext cx="2139696" cy="2770632"/>
           </a:xfrm>
           <a:prstGeom prst="rect">
             <a:avLst/>
@@ -4641,7 +4827,7 @@
                 </a:solidFill>
                 <a:latin typeface="Microsoft JhengHei"/>
               </a:rPr>
-              <a:t>12 個月、約 27.5 人月</a:t>
+              <a:t>8 週 discovery</a:t>
             </a:r>
           </a:p>
           <a:p>
@@ -4657,7 +4843,7 @@
                 </a:solidFill>
                 <a:latin typeface="Microsoft JhengHei"/>
               </a:rPr>
-              <a:t>分兩期撥款</a:t>
+              <a:t>+ 規則式對照實驗</a:t>
             </a:r>
           </a:p>
           <a:p>
@@ -4673,7 +4859,7 @@
                 </a:solidFill>
                 <a:latin typeface="Microsoft JhengHei"/>
               </a:rPr>
-              <a:t>今天只請求第一期</a:t>
+              <a:t/>
             </a:r>
           </a:p>
           <a:p>
@@ -4689,7 +4875,7 @@
                 </a:solidFill>
                 <a:latin typeface="Microsoft JhengHei"/>
               </a:rPr>
-              <a:t>(M1–M6,16.0 人月)</a:t>
+              <a:t>約 3.5 人月</a:t>
             </a:r>
           </a:p>
         </p:txBody>
@@ -4702,8 +4888,8 @@
         </p:nvSpPr>
         <p:spPr>
           <a:xfrm>
-            <a:off x="3044952" y="1371600"/>
-            <a:ext cx="2395728" cy="3200400"/>
+            <a:off x="3044952" y="1280160"/>
+            <a:ext cx="2395728" cy="3337560"/>
           </a:xfrm>
           <a:prstGeom prst="roundRect">
             <a:avLst/>
@@ -4748,7 +4934,7 @@
         </p:nvSpPr>
         <p:spPr>
           <a:xfrm>
-            <a:off x="3044952" y="1371600"/>
+            <a:off x="3044952" y="1280160"/>
             <a:ext cx="2395728" cy="384048"/>
           </a:xfrm>
           <a:prstGeom prst="roundRect">
@@ -4792,7 +4978,7 @@
         </p:nvSpPr>
         <p:spPr>
           <a:xfrm>
-            <a:off x="3044952" y="1417320"/>
+            <a:off x="3044952" y="1325880"/>
             <a:ext cx="2395728" cy="320040"/>
           </a:xfrm>
           <a:prstGeom prst="rect">
@@ -4818,7 +5004,7 @@
                 </a:solidFill>
                 <a:latin typeface="Microsoft JhengHei"/>
               </a:rPr>
-              <a:t>為什麼值得</a:t>
+              <a:t>為什麼是這個</a:t>
             </a:r>
           </a:p>
         </p:txBody>
@@ -4831,8 +5017,8 @@
         </p:nvSpPr>
         <p:spPr>
           <a:xfrm>
-            <a:off x="3172968" y="1847088"/>
-            <a:ext cx="2139696" cy="2633472"/>
+            <a:off x="3172968" y="1755648"/>
+            <a:ext cx="2139696" cy="2770632"/>
           </a:xfrm>
           <a:prstGeom prst="rect">
             <a:avLst/>
@@ -4857,7 +5043,7 @@
                 </a:solidFill>
                 <a:latin typeface="Microsoft JhengHei"/>
               </a:rPr>
-              <a:t>唯一對應到</a:t>
+              <a:t>到期日是確定事件,</a:t>
             </a:r>
           </a:p>
           <a:p>
@@ -4873,7 +5059,7 @@
                 </a:solidFill>
                 <a:latin typeface="Microsoft JhengHei"/>
               </a:rPr>
-              <a:t>尚無 AI 覆蓋的</a:t>
+              <a:t>找出客戶不需要 AI。</a:t>
             </a:r>
           </a:p>
           <a:p>
@@ -4889,7 +5075,39 @@
                 </a:solidFill>
                 <a:latin typeface="Microsoft JhengHei"/>
               </a:rPr>
-              <a:t>戰略缺口的專案</a:t>
+              <a:t/>
+            </a:r>
+          </a:p>
+          <a:p>
+            <a:pPr algn="l">
+              <a:lnSpc>
+                <a:spcPct val="135000"/>
+              </a:lnSpc>
+            </a:pPr>
+            <a:r>
+              <a:rPr sz="1100" b="0">
+                <a:solidFill>
+                  <a:srgbClr val="333333"/>
+                </a:solidFill>
+                <a:latin typeface="Microsoft JhengHei"/>
+              </a:rPr>
+              <a:t>沒人知道介入有沒有用,</a:t>
+            </a:r>
+          </a:p>
+          <a:p>
+            <a:pPr algn="l">
+              <a:lnSpc>
+                <a:spcPct val="135000"/>
+              </a:lnSpc>
+            </a:pPr>
+            <a:r>
+              <a:rPr sz="1100" b="0">
+                <a:solidFill>
+                  <a:srgbClr val="333333"/>
+                </a:solidFill>
+                <a:latin typeface="Microsoft JhengHei"/>
+              </a:rPr>
+              <a:t>而那是地基</a:t>
             </a:r>
           </a:p>
         </p:txBody>
@@ -4902,8 +5120,8 @@
         </p:nvSpPr>
         <p:spPr>
           <a:xfrm>
-            <a:off x="5586984" y="1371600"/>
-            <a:ext cx="2395728" cy="3200400"/>
+            <a:off x="5586984" y="1280160"/>
+            <a:ext cx="2395728" cy="3337560"/>
           </a:xfrm>
           <a:prstGeom prst="roundRect">
             <a:avLst/>
@@ -4948,7 +5166,7 @@
         </p:nvSpPr>
         <p:spPr>
           <a:xfrm>
-            <a:off x="5586984" y="1371600"/>
+            <a:off x="5586984" y="1280160"/>
             <a:ext cx="2395728" cy="384048"/>
           </a:xfrm>
           <a:prstGeom prst="roundRect">
@@ -4992,7 +5210,7 @@
         </p:nvSpPr>
         <p:spPr>
           <a:xfrm>
-            <a:off x="5586984" y="1417320"/>
+            <a:off x="5586984" y="1325880"/>
             <a:ext cx="2395728" cy="320040"/>
           </a:xfrm>
           <a:prstGeom prst="rect">
@@ -5018,7 +5236,7 @@
                 </a:solidFill>
                 <a:latin typeface="Microsoft JhengHei"/>
               </a:rPr>
-              <a:t>對到多大的池子</a:t>
+              <a:t>會拿到什麼</a:t>
             </a:r>
           </a:p>
         </p:txBody>
@@ -5031,8 +5249,8 @@
         </p:nvSpPr>
         <p:spPr>
           <a:xfrm>
-            <a:off x="5715000" y="1847088"/>
-            <a:ext cx="2139696" cy="2633472"/>
+            <a:off x="5715000" y="1755648"/>
+            <a:ext cx="2139696" cy="2770632"/>
           </a:xfrm>
           <a:prstGeom prst="rect">
             <a:avLst/>
@@ -5057,7 +5275,7 @@
                 </a:solidFill>
                 <a:latin typeface="Microsoft JhengHei"/>
               </a:rPr>
-              <a:t>房貸帳 A$611.5bn</a:t>
+              <a:t>六個未知的答案</a:t>
             </a:r>
           </a:p>
           <a:p>
@@ -5073,7 +5291,7 @@
                 </a:solidFill>
                 <a:latin typeface="Microsoft JhengHei"/>
               </a:rPr>
-              <a:t>約 FY25 現金淨利的 60 倍</a:t>
+              <a:t/>
             </a:r>
           </a:p>
           <a:p>
@@ -5089,7 +5307,55 @@
                 </a:solidFill>
                 <a:latin typeface="Microsoft JhengHei"/>
               </a:rPr>
-              <a:t>(同第一頁,同一算式)</a:t>
+              <a:t>一個帶信賴區間的</a:t>
+            </a:r>
+          </a:p>
+          <a:p>
+            <a:pPr algn="l">
+              <a:lnSpc>
+                <a:spcPct val="135000"/>
+              </a:lnSpc>
+            </a:pPr>
+            <a:r>
+              <a:rPr sz="1100" b="0">
+                <a:solidFill>
+                  <a:srgbClr val="333333"/>
+                </a:solidFill>
+                <a:latin typeface="Microsoft JhengHei"/>
+              </a:rPr>
+              <a:t>增量效果估計</a:t>
+            </a:r>
+          </a:p>
+          <a:p>
+            <a:pPr algn="l">
+              <a:lnSpc>
+                <a:spcPct val="135000"/>
+              </a:lnSpc>
+            </a:pPr>
+            <a:r>
+              <a:rPr sz="1100" b="0">
+                <a:solidFill>
+                  <a:srgbClr val="333333"/>
+                </a:solidFill>
+                <a:latin typeface="Microsoft JhengHei"/>
+              </a:rPr>
+              <a:t/>
+            </a:r>
+          </a:p>
+          <a:p>
+            <a:pPr algn="l">
+              <a:lnSpc>
+                <a:spcPct val="135000"/>
+              </a:lnSpc>
+            </a:pPr>
+            <a:r>
+              <a:rPr sz="1100" b="0">
+                <a:solidFill>
+                  <a:srgbClr val="333333"/>
+                </a:solidFill>
+                <a:latin typeface="Microsoft JhengHei"/>
+              </a:rPr>
+              <a:t>一份走或不走的建議書</a:t>
             </a:r>
           </a:p>
         </p:txBody>
@@ -5102,8 +5368,8 @@
         </p:nvSpPr>
         <p:spPr>
           <a:xfrm>
-            <a:off x="8129016" y="1371600"/>
-            <a:ext cx="2395728" cy="3200400"/>
+            <a:off x="8129016" y="1280160"/>
+            <a:ext cx="2395728" cy="3337560"/>
           </a:xfrm>
           <a:prstGeom prst="roundRect">
             <a:avLst/>
@@ -5148,7 +5414,7 @@
         </p:nvSpPr>
         <p:spPr>
           <a:xfrm>
-            <a:off x="8129016" y="1371600"/>
+            <a:off x="8129016" y="1280160"/>
             <a:ext cx="2395728" cy="384048"/>
           </a:xfrm>
           <a:prstGeom prst="roundRect">
@@ -5192,7 +5458,7 @@
         </p:nvSpPr>
         <p:spPr>
           <a:xfrm>
-            <a:off x="8129016" y="1417320"/>
+            <a:off x="8129016" y="1325880"/>
             <a:ext cx="2395728" cy="320040"/>
           </a:xfrm>
           <a:prstGeom prst="rect">
@@ -5231,8 +5497,8 @@
         </p:nvSpPr>
         <p:spPr>
           <a:xfrm>
-            <a:off x="8257032" y="1847088"/>
-            <a:ext cx="2139696" cy="2633472"/>
+            <a:off x="8257032" y="1755648"/>
+            <a:ext cx="2139696" cy="2770632"/>
           </a:xfrm>
           <a:prstGeom prst="rect">
             <a:avLst/>
@@ -5257,7 +5523,7 @@
                 </a:solidFill>
                 <a:latin typeface="Microsoft JhengHei"/>
               </a:rPr>
-              <a:t>方法在公開資料集驗證</a:t>
+              <a:t>CEE 覆蓋範圍</a:t>
             </a:r>
           </a:p>
           <a:p>
@@ -5273,7 +5539,7 @@
                 </a:solidFill>
                 <a:latin typeface="Microsoft JhengHei"/>
               </a:rPr>
-              <a:t>內部基準尚未校準</a:t>
+              <a:t>待內部確認</a:t>
             </a:r>
           </a:p>
           <a:p>
@@ -5289,7 +5555,71 @@
                 </a:solidFill>
                 <a:latin typeface="Microsoft JhengHei"/>
               </a:rPr>
-              <a:t>與 CEE 的功能重疊待查</a:t>
+              <a:t/>
+            </a:r>
+          </a:p>
+          <a:p>
+            <a:pPr algn="l">
+              <a:lnSpc>
+                <a:spcPct val="135000"/>
+              </a:lnSpc>
+            </a:pPr>
+            <a:r>
+              <a:rPr sz="1100" b="0">
+                <a:solidFill>
+                  <a:srgbClr val="333333"/>
+                </a:solidFill>
+                <a:latin typeface="Microsoft JhengHei"/>
+              </a:rPr>
+              <a:t>實驗可能受執行率影響</a:t>
+            </a:r>
+          </a:p>
+          <a:p>
+            <a:pPr algn="l">
+              <a:lnSpc>
+                <a:spcPct val="135000"/>
+              </a:lnSpc>
+            </a:pPr>
+            <a:r>
+              <a:rPr sz="1100" b="0">
+                <a:solidFill>
+                  <a:srgbClr val="333333"/>
+                </a:solidFill>
+                <a:latin typeface="Microsoft JhengHei"/>
+              </a:rPr>
+              <a:t/>
+            </a:r>
+          </a:p>
+          <a:p>
+            <a:pPr algn="l">
+              <a:lnSpc>
+                <a:spcPct val="135000"/>
+              </a:lnSpc>
+            </a:pPr>
+            <a:r>
+              <a:rPr sz="1100" b="0">
+                <a:solidFill>
+                  <a:srgbClr val="333333"/>
+                </a:solidFill>
+                <a:latin typeface="Microsoft JhengHei"/>
+              </a:rPr>
+              <a:t>結論可能是</a:t>
+            </a:r>
+          </a:p>
+          <a:p>
+            <a:pPr algn="l">
+              <a:lnSpc>
+                <a:spcPct val="135000"/>
+              </a:lnSpc>
+            </a:pPr>
+            <a:r>
+              <a:rPr sz="1100" b="0">
+                <a:solidFill>
+                  <a:srgbClr val="333333"/>
+                </a:solidFill>
+                <a:latin typeface="Microsoft JhengHei"/>
+              </a:rPr>
+              <a:t>「不值得做」</a:t>
             </a:r>
           </a:p>
         </p:txBody>
@@ -5303,7 +5633,7 @@
         <p:spPr>
           <a:xfrm>
             <a:off x="502920" y="4892040"/>
-            <a:ext cx="9311335" cy="1097280"/>
+            <a:ext cx="9311335" cy="1188720"/>
           </a:xfrm>
           <a:prstGeom prst="rect">
             <a:avLst/>
@@ -5318,17 +5648,33 @@
           <a:p>
             <a:pPr algn="l">
               <a:lnSpc>
-                <a:spcPct val="125000"/>
-              </a:lnSpc>
-            </a:pPr>
-            <a:r>
-              <a:rPr sz="1700" b="1">
+                <a:spcPct val="145000"/>
+              </a:lnSpc>
+            </a:pPr>
+            <a:r>
+              <a:rPr sz="1600" b="1">
                 <a:solidFill>
                   <a:srgbClr val="1F3864"/>
                 </a:solidFill>
                 <a:latin typeface="Microsoft JhengHei"/>
               </a:rPr>
-              <a:t>下一個決策點:第 6 個月的流程就緒關卡 —— 第二期撥款以該關卡通過為條件。</a:t>
+              <a:t>我今天不是來要一套系統的預算。我是來要一個答案的預算。</a:t>
+            </a:r>
+          </a:p>
+          <a:p>
+            <a:pPr algn="l">
+              <a:lnSpc>
+                <a:spcPct val="145000"/>
+              </a:lnSpc>
+            </a:pPr>
+            <a:r>
+              <a:rPr sz="1600" b="1">
+                <a:solidFill>
+                  <a:srgbClr val="1F3864"/>
+                </a:solidFill>
+                <a:latin typeface="Microsoft JhengHei"/>
+              </a:rPr>
+              <a:t>八週之後,我會帶著這個答案回來 —— 那時候各位要批的,才是一個真正的投資案。</a:t>
             </a:r>
           </a:p>
         </p:txBody>
@@ -5398,8 +5744,8 @@
         </p:nvSpPr>
         <p:spPr>
           <a:xfrm>
-            <a:off x="502920" y="1234440"/>
-            <a:ext cx="11185855" cy="5120640"/>
+            <a:off x="502920" y="1188720"/>
+            <a:ext cx="11185855" cy="5212080"/>
           </a:xfrm>
           <a:prstGeom prst="rect">
             <a:avLst/>
@@ -5424,7 +5770,7 @@
                 </a:solidFill>
                 <a:latin typeface="Microsoft JhengHei"/>
               </a:rPr>
-              <a:t>⚠️ 本頁為佔位。交件前必須逐筆重抓深層連結,不得原樣沿用作業一的書目。</a:t>
+              <a:t>本頁依 notes/A3_參考文獻_查證版.md 填入 —— 該檔的每一筆都經 WebFetch 實地查證,</a:t>
             </a:r>
           </a:p>
           <a:p>
@@ -5440,6 +5786,22 @@
                 </a:solidFill>
                 <a:latin typeface="Microsoft JhengHei"/>
               </a:rPr>
+              <a:t>查不到出處的一律標明,未採用。</a:t>
+            </a:r>
+          </a:p>
+          <a:p>
+            <a:pPr algn="l">
+              <a:lnSpc>
+                <a:spcPct val="150000"/>
+              </a:lnSpc>
+            </a:pPr>
+            <a:r>
+              <a:rPr sz="1300" b="0">
+                <a:solidFill>
+                  <a:srgbClr val="333333"/>
+                </a:solidFill>
+                <a:latin typeface="Microsoft JhengHei"/>
+              </a:rPr>
               <a:t/>
             </a:r>
           </a:p>
@@ -5456,7 +5818,7 @@
                 </a:solidFill>
                 <a:latin typeface="Microsoft JhengHei"/>
               </a:rPr>
-              <a:t>必修四筆:</a:t>
+              <a:t>已查證可用(七筆):CBA 2019 分析師簡報(CEE 定存到期留存 85%)、CBA 2022 CEE 說明、</a:t>
             </a:r>
           </a:p>
           <a:p>
@@ -5472,7 +5834,7 @@
                 </a:solidFill>
                 <a:latin typeface="Microsoft JhengHei"/>
               </a:rPr>
-              <a:t>  1. Macquarie 房貸年增 19% / 市占 5.9% → 改引 APRA Monthly ADI Statistics(可下載、含版本日期)</a:t>
+              <a:t>CBA 2024 GenAI 與客服、CBA 2025 詐騙損失、CBA FY25 業績、</a:t>
             </a:r>
           </a:p>
           <a:p>
@@ -5488,7 +5850,7 @@
                 </a:solidFill>
                 <a:latin typeface="Microsoft JhengHei"/>
               </a:rPr>
-              <a:t>  2. 全球 NIM 3.1%→2.7%(S&amp;P Global 首頁連結)→ 整條棄用</a:t>
+              <a:t>Devriendt, Berrevoets &amp; Verbeke (2021) Information Sciences(uplift modeling,有 DOI)、</a:t>
             </a:r>
           </a:p>
           <a:p>
@@ -5504,7 +5866,7 @@
                 </a:solidFill>
                 <a:latin typeface="Microsoft JhengHei"/>
               </a:rPr>
-              <a:t>  3. CBA (2025b) → 改指 FY25 Results Presentation 的 PDF 直連,並註明 NIM 2.08%、房貸 A$611.5bn 的頁碼</a:t>
+              <a:t>澳洲 CDR 官方資料。</a:t>
             </a:r>
           </a:p>
           <a:p>
@@ -5520,7 +5882,7 @@
                 </a:solidFill>
                 <a:latin typeface="Microsoft JhengHei"/>
               </a:rPr>
-              <a:t>  4. NAB → 本提案不用四大行對照表,整條刪除</a:t>
+              <a:t/>
             </a:r>
           </a:p>
           <a:p>
@@ -5536,71 +5898,7 @@
                 </a:solidFill>
                 <a:latin typeface="Microsoft JhengHei"/>
               </a:rPr>
-              <a:t/>
-            </a:r>
-          </a:p>
-          <a:p>
-            <a:pPr algn="l">
-              <a:lnSpc>
-                <a:spcPct val="150000"/>
-              </a:lnSpc>
-            </a:pPr>
-            <a:r>
-              <a:rPr sz="1300" b="0">
-                <a:solidFill>
-                  <a:srgbClr val="333333"/>
-                </a:solidFill>
-                <a:latin typeface="Microsoft JhengHei"/>
-              </a:rPr>
-              <a:t>需新增 2–3 筆外部文獻(選案論證目前的外部文獻數為 0):</a:t>
-            </a:r>
-          </a:p>
-          <a:p>
-            <a:pPr algn="l">
-              <a:lnSpc>
-                <a:spcPct val="150000"/>
-              </a:lnSpc>
-            </a:pPr>
-            <a:r>
-              <a:rPr sz="1300" b="0">
-                <a:solidFill>
-                  <a:srgbClr val="333333"/>
-                </a:solidFill>
-                <a:latin typeface="Microsoft JhengHei"/>
-              </a:rPr>
-              <a:t>  · 零售銀行 churn / retention 建模的同儕審查期刊論文</a:t>
-            </a:r>
-          </a:p>
-          <a:p>
-            <a:pPr algn="l">
-              <a:lnSpc>
-                <a:spcPct val="150000"/>
-              </a:lnSpc>
-            </a:pPr>
-            <a:r>
-              <a:rPr sz="1300" b="0">
-                <a:solidFill>
-                  <a:srgbClr val="333333"/>
-                </a:solidFill>
-                <a:latin typeface="Microsoft JhengHei"/>
-              </a:rPr>
-              <a:t>  · 開放銀行 / CDR 對消費者轉換行為影響的官方或監管報告</a:t>
-            </a:r>
-          </a:p>
-          <a:p>
-            <a:pPr algn="l">
-              <a:lnSpc>
-                <a:spcPct val="150000"/>
-              </a:lnSpc>
-            </a:pPr>
-            <a:r>
-              <a:rPr sz="1300" b="0">
-                <a:solidFill>
-                  <a:srgbClr val="333333"/>
-                </a:solidFill>
-                <a:latin typeface="Microsoft JhengHei"/>
-              </a:rPr>
-              <a:t>  · uplift modeling 在留存行銷的方法學文獻</a:t>
+              <a:t>⚠️ 已排除:A$611.5bn(查無精確出處,改用 A$634bn);市占 25.4% 標明對應 1H25 非 FY25。</a:t>
             </a:r>
           </a:p>
           <a:p>
@@ -5922,8 +6220,288 @@
         </p:nvSpPr>
         <p:spPr>
           <a:xfrm>
+            <a:off x="502920" y="1234440"/>
+            <a:ext cx="2395728" cy="3931920"/>
+          </a:xfrm>
+          <a:prstGeom prst="roundRect">
+            <a:avLst/>
+          </a:prstGeom>
+          <a:solidFill>
+            <a:srgbClr val="FFFFFF"/>
+          </a:solidFill>
+          <a:ln w="19050">
+            <a:solidFill>
+              <a:srgbClr val="C00000"/>
+            </a:solidFill>
+          </a:ln>
+          <a:effectLst/>
+        </p:spPr>
+        <p:style>
+          <a:lnRef idx="1">
+            <a:schemeClr val="accent1"/>
+          </a:lnRef>
+          <a:fillRef idx="3">
+            <a:schemeClr val="accent1"/>
+          </a:fillRef>
+          <a:effectRef idx="2">
+            <a:schemeClr val="accent1"/>
+          </a:effectRef>
+          <a:fontRef idx="minor">
+            <a:schemeClr val="lt1"/>
+          </a:fontRef>
+        </p:style>
+        <p:txBody>
+          <a:bodyPr rtlCol="0" anchor="ctr"/>
+          <a:lstStyle/>
+          <a:p>
+            <a:pPr algn="ctr"/>
+          </a:p>
+        </p:txBody>
+      </p:sp>
+      <p:sp>
+        <p:nvSpPr>
+          <p:cNvPr id="9" name="Rounded Rectangle 8"/>
+          <p:cNvSpPr/>
+          <p:nvPr/>
+        </p:nvSpPr>
+        <p:spPr>
+          <a:xfrm>
+            <a:off x="502920" y="1234440"/>
+            <a:ext cx="2395728" cy="384048"/>
+          </a:xfrm>
+          <a:prstGeom prst="roundRect">
+            <a:avLst/>
+          </a:prstGeom>
+          <a:solidFill>
+            <a:srgbClr val="C00000"/>
+          </a:solidFill>
+          <a:ln>
+            <a:noFill/>
+          </a:ln>
+          <a:effectLst/>
+        </p:spPr>
+        <p:style>
+          <a:lnRef idx="1">
+            <a:schemeClr val="accent1"/>
+          </a:lnRef>
+          <a:fillRef idx="3">
+            <a:schemeClr val="accent1"/>
+          </a:fillRef>
+          <a:effectRef idx="2">
+            <a:schemeClr val="accent1"/>
+          </a:effectRef>
+          <a:fontRef idx="minor">
+            <a:schemeClr val="lt1"/>
+          </a:fontRef>
+        </p:style>
+        <p:txBody>
+          <a:bodyPr rtlCol="0" anchor="ctr"/>
+          <a:lstStyle/>
+          <a:p>
+            <a:pPr algn="ctr"/>
+          </a:p>
+        </p:txBody>
+      </p:sp>
+      <p:sp>
+        <p:nvSpPr>
+          <p:cNvPr id="10" name="TextBox 9"/>
+          <p:cNvSpPr txBox="1"/>
+          <p:nvPr/>
+        </p:nvSpPr>
+        <p:spPr>
+          <a:xfrm>
             <a:off x="502920" y="1280160"/>
-            <a:ext cx="2395728" cy="3977639"/>
+            <a:ext cx="2395728" cy="320040"/>
+          </a:xfrm>
+          <a:prstGeom prst="rect">
+            <a:avLst/>
+          </a:prstGeom>
+          <a:noFill/>
+        </p:spPr>
+        <p:txBody>
+          <a:bodyPr wrap="square" anchor="t">
+            <a:spAutoFit/>
+          </a:bodyPr>
+          <a:lstStyle/>
+          <a:p>
+            <a:pPr algn="ctr">
+              <a:lnSpc>
+                <a:spcPct val="125000"/>
+              </a:lnSpc>
+            </a:pPr>
+            <a:r>
+              <a:rPr sz="1300" b="1">
+                <a:solidFill>
+                  <a:srgbClr val="FFFFFF"/>
+                </a:solidFill>
+                <a:latin typeface="Microsoft JhengHei"/>
+              </a:rPr>
+              <a:t>批准什麼</a:t>
+            </a:r>
+          </a:p>
+        </p:txBody>
+      </p:sp>
+      <p:sp>
+        <p:nvSpPr>
+          <p:cNvPr id="11" name="TextBox 10"/>
+          <p:cNvSpPr txBox="1"/>
+          <p:nvPr/>
+        </p:nvSpPr>
+        <p:spPr>
+          <a:xfrm>
+            <a:off x="630936" y="1709928"/>
+            <a:ext cx="2139696" cy="3364991"/>
+          </a:xfrm>
+          <a:prstGeom prst="rect">
+            <a:avLst/>
+          </a:prstGeom>
+          <a:noFill/>
+        </p:spPr>
+        <p:txBody>
+          <a:bodyPr wrap="square" anchor="t">
+            <a:spAutoFit/>
+          </a:bodyPr>
+          <a:lstStyle/>
+          <a:p>
+            <a:pPr algn="l">
+              <a:lnSpc>
+                <a:spcPct val="135000"/>
+              </a:lnSpc>
+            </a:pPr>
+            <a:r>
+              <a:rPr sz="1100" b="0">
+                <a:solidFill>
+                  <a:srgbClr val="333333"/>
+                </a:solidFill>
+                <a:latin typeface="Microsoft JhengHei"/>
+              </a:rPr>
+              <a:t>不是一套 AI 系統。</a:t>
+            </a:r>
+          </a:p>
+          <a:p>
+            <a:pPr algn="l">
+              <a:lnSpc>
+                <a:spcPct val="135000"/>
+              </a:lnSpc>
+            </a:pPr>
+            <a:r>
+              <a:rPr sz="1100" b="0">
+                <a:solidFill>
+                  <a:srgbClr val="333333"/>
+                </a:solidFill>
+                <a:latin typeface="Microsoft JhengHei"/>
+              </a:rPr>
+              <a:t/>
+            </a:r>
+          </a:p>
+          <a:p>
+            <a:pPr algn="l">
+              <a:lnSpc>
+                <a:spcPct val="135000"/>
+              </a:lnSpc>
+            </a:pPr>
+            <a:r>
+              <a:rPr sz="1100" b="0">
+                <a:solidFill>
+                  <a:srgbClr val="333333"/>
+                </a:solidFill>
+                <a:latin typeface="Microsoft JhengHei"/>
+              </a:rPr>
+              <a:t>是一個 8 週的</a:t>
+            </a:r>
+          </a:p>
+          <a:p>
+            <a:pPr algn="l">
+              <a:lnSpc>
+                <a:spcPct val="135000"/>
+              </a:lnSpc>
+            </a:pPr>
+            <a:r>
+              <a:rPr sz="1100" b="0">
+                <a:solidFill>
+                  <a:srgbClr val="333333"/>
+                </a:solidFill>
+                <a:latin typeface="Microsoft JhengHei"/>
+              </a:rPr>
+              <a:t>discovery 與對照實驗,</a:t>
+            </a:r>
+          </a:p>
+          <a:p>
+            <a:pPr algn="l">
+              <a:lnSpc>
+                <a:spcPct val="135000"/>
+              </a:lnSpc>
+            </a:pPr>
+            <a:r>
+              <a:rPr sz="1100" b="0">
+                <a:solidFill>
+                  <a:srgbClr val="333333"/>
+                </a:solidFill>
+                <a:latin typeface="Microsoft JhengHei"/>
+              </a:rPr>
+              <a:t/>
+            </a:r>
+          </a:p>
+          <a:p>
+            <a:pPr algn="l">
+              <a:lnSpc>
+                <a:spcPct val="135000"/>
+              </a:lnSpc>
+            </a:pPr>
+            <a:r>
+              <a:rPr sz="1100" b="0">
+                <a:solidFill>
+                  <a:srgbClr val="333333"/>
+                </a:solidFill>
+                <a:latin typeface="Microsoft JhengHei"/>
+              </a:rPr>
+              <a:t>用來回答:</a:t>
+            </a:r>
+          </a:p>
+          <a:p>
+            <a:pPr algn="l">
+              <a:lnSpc>
+                <a:spcPct val="135000"/>
+              </a:lnSpc>
+            </a:pPr>
+            <a:r>
+              <a:rPr sz="1100" b="0">
+                <a:solidFill>
+                  <a:srgbClr val="333333"/>
+                </a:solidFill>
+                <a:latin typeface="Microsoft JhengHei"/>
+              </a:rPr>
+              <a:t>房貸到期主動介入</a:t>
+            </a:r>
+          </a:p>
+          <a:p>
+            <a:pPr algn="l">
+              <a:lnSpc>
+                <a:spcPct val="135000"/>
+              </a:lnSpc>
+            </a:pPr>
+            <a:r>
+              <a:rPr sz="1100" b="0">
+                <a:solidFill>
+                  <a:srgbClr val="333333"/>
+                </a:solidFill>
+                <a:latin typeface="Microsoft JhengHei"/>
+              </a:rPr>
+              <a:t>到底有沒有增量效果</a:t>
+            </a:r>
+          </a:p>
+        </p:txBody>
+      </p:sp>
+      <p:sp>
+        <p:nvSpPr>
+          <p:cNvPr id="12" name="Rounded Rectangle 11"/>
+          <p:cNvSpPr/>
+          <p:nvPr/>
+        </p:nvSpPr>
+        <p:spPr>
+          <a:xfrm>
+            <a:off x="3044952" y="1234440"/>
+            <a:ext cx="2395728" cy="3931920"/>
           </a:xfrm>
           <a:prstGeom prst="roundRect">
             <a:avLst/>
@@ -5962,13 +6540,13 @@
       </p:sp>
       <p:sp>
         <p:nvSpPr>
-          <p:cNvPr id="9" name="Rounded Rectangle 8"/>
+          <p:cNvPr id="13" name="Rounded Rectangle 12"/>
           <p:cNvSpPr/>
           <p:nvPr/>
         </p:nvSpPr>
         <p:spPr>
           <a:xfrm>
-            <a:off x="502920" y="1280160"/>
+            <a:off x="3044952" y="1234440"/>
             <a:ext cx="2395728" cy="384048"/>
           </a:xfrm>
           <a:prstGeom prst="roundRect">
@@ -6006,13 +6584,13 @@
       </p:sp>
       <p:sp>
         <p:nvSpPr>
-          <p:cNvPr id="10" name="TextBox 9"/>
+          <p:cNvPr id="14" name="TextBox 13"/>
           <p:cNvSpPr txBox="1"/>
           <p:nvPr/>
         </p:nvSpPr>
         <p:spPr>
           <a:xfrm>
-            <a:off x="502920" y="1325880"/>
+            <a:off x="3044952" y="1280160"/>
             <a:ext cx="2395728" cy="320040"/>
           </a:xfrm>
           <a:prstGeom prst="rect">
@@ -6038,21 +6616,21 @@
                 </a:solidFill>
                 <a:latin typeface="Microsoft JhengHei"/>
               </a:rPr>
-              <a:t>批准什麼</a:t>
-            </a:r>
-          </a:p>
-        </p:txBody>
-      </p:sp>
-      <p:sp>
-        <p:nvSpPr>
-          <p:cNvPr id="11" name="TextBox 10"/>
+              <a:t>要多少</a:t>
+            </a:r>
+          </a:p>
+        </p:txBody>
+      </p:sp>
+      <p:sp>
+        <p:nvSpPr>
+          <p:cNvPr id="15" name="TextBox 14"/>
           <p:cNvSpPr txBox="1"/>
           <p:nvPr/>
         </p:nvSpPr>
         <p:spPr>
           <a:xfrm>
-            <a:off x="630936" y="1755648"/>
-            <a:ext cx="2139696" cy="3410711"/>
+            <a:off x="3172968" y="1709928"/>
+            <a:ext cx="2139696" cy="3364991"/>
           </a:xfrm>
           <a:prstGeom prst="rect">
             <a:avLst/>
@@ -6077,7 +6655,7 @@
                 </a:solidFill>
                 <a:latin typeface="Microsoft JhengHei"/>
               </a:rPr>
-              <a:t>房貸固定利率到期</a:t>
+              <a:t>約 3.5 人月</a:t>
             </a:r>
           </a:p>
           <a:p>
@@ -6093,7 +6671,7 @@
                 </a:solidFill>
                 <a:latin typeface="Microsoft JhengHei"/>
               </a:rPr>
-              <a:t>留存決策系統</a:t>
+              <a:t>(規劃值)</a:t>
             </a:r>
           </a:p>
           <a:p>
@@ -6125,7 +6703,7 @@
                 </a:solidFill>
                 <a:latin typeface="Microsoft JhengHei"/>
               </a:rPr>
-              <a:t>12 個月</a:t>
+              <a:t>無新增系統</a:t>
             </a:r>
           </a:p>
           <a:p>
@@ -6141,7 +6719,7 @@
                 </a:solidFill>
                 <a:latin typeface="Microsoft JhengHei"/>
               </a:rPr>
-              <a:t>約 27.5 人月(規劃值)</a:t>
+              <a:t>無新增平台授權</a:t>
             </a:r>
           </a:p>
           <a:p>
@@ -6157,335 +6735,7 @@
                 </a:solidFill>
                 <a:latin typeface="Microsoft JhengHei"/>
               </a:rPr>
-              <a:t/>
-            </a:r>
-          </a:p>
-          <a:p>
-            <a:pPr algn="l">
-              <a:lnSpc>
-                <a:spcPct val="135000"/>
-              </a:lnSpc>
-            </a:pPr>
-            <a:r>
-              <a:rPr sz="1100" b="0">
-                <a:solidFill>
-                  <a:srgbClr val="333333"/>
-                </a:solidFill>
-                <a:latin typeface="Microsoft JhengHei"/>
-              </a:rPr>
-              <a:t>分兩期撥款,</a:t>
-            </a:r>
-          </a:p>
-          <a:p>
-            <a:pPr algn="l">
-              <a:lnSpc>
-                <a:spcPct val="135000"/>
-              </a:lnSpc>
-            </a:pPr>
-            <a:r>
-              <a:rPr sz="1100" b="0">
-                <a:solidFill>
-                  <a:srgbClr val="333333"/>
-                </a:solidFill>
-                <a:latin typeface="Microsoft JhengHei"/>
-              </a:rPr>
-              <a:t>今天只請求第一期</a:t>
-            </a:r>
-          </a:p>
-        </p:txBody>
-      </p:sp>
-      <p:sp>
-        <p:nvSpPr>
-          <p:cNvPr id="12" name="Rounded Rectangle 11"/>
-          <p:cNvSpPr/>
-          <p:nvPr/>
-        </p:nvSpPr>
-        <p:spPr>
-          <a:xfrm>
-            <a:off x="3044952" y="1280160"/>
-            <a:ext cx="2395728" cy="3977639"/>
-          </a:xfrm>
-          <a:prstGeom prst="roundRect">
-            <a:avLst/>
-          </a:prstGeom>
-          <a:solidFill>
-            <a:srgbClr val="FFFFFF"/>
-          </a:solidFill>
-          <a:ln w="19050">
-            <a:solidFill>
-              <a:srgbClr val="C00000"/>
-            </a:solidFill>
-          </a:ln>
-          <a:effectLst/>
-        </p:spPr>
-        <p:style>
-          <a:lnRef idx="1">
-            <a:schemeClr val="accent1"/>
-          </a:lnRef>
-          <a:fillRef idx="3">
-            <a:schemeClr val="accent1"/>
-          </a:fillRef>
-          <a:effectRef idx="2">
-            <a:schemeClr val="accent1"/>
-          </a:effectRef>
-          <a:fontRef idx="minor">
-            <a:schemeClr val="lt1"/>
-          </a:fontRef>
-        </p:style>
-        <p:txBody>
-          <a:bodyPr rtlCol="0" anchor="ctr"/>
-          <a:lstStyle/>
-          <a:p>
-            <a:pPr algn="ctr"/>
-          </a:p>
-        </p:txBody>
-      </p:sp>
-      <p:sp>
-        <p:nvSpPr>
-          <p:cNvPr id="13" name="Rounded Rectangle 12"/>
-          <p:cNvSpPr/>
-          <p:nvPr/>
-        </p:nvSpPr>
-        <p:spPr>
-          <a:xfrm>
-            <a:off x="3044952" y="1280160"/>
-            <a:ext cx="2395728" cy="384048"/>
-          </a:xfrm>
-          <a:prstGeom prst="roundRect">
-            <a:avLst/>
-          </a:prstGeom>
-          <a:solidFill>
-            <a:srgbClr val="C00000"/>
-          </a:solidFill>
-          <a:ln>
-            <a:noFill/>
-          </a:ln>
-          <a:effectLst/>
-        </p:spPr>
-        <p:style>
-          <a:lnRef idx="1">
-            <a:schemeClr val="accent1"/>
-          </a:lnRef>
-          <a:fillRef idx="3">
-            <a:schemeClr val="accent1"/>
-          </a:fillRef>
-          <a:effectRef idx="2">
-            <a:schemeClr val="accent1"/>
-          </a:effectRef>
-          <a:fontRef idx="minor">
-            <a:schemeClr val="lt1"/>
-          </a:fontRef>
-        </p:style>
-        <p:txBody>
-          <a:bodyPr rtlCol="0" anchor="ctr"/>
-          <a:lstStyle/>
-          <a:p>
-            <a:pPr algn="ctr"/>
-          </a:p>
-        </p:txBody>
-      </p:sp>
-      <p:sp>
-        <p:nvSpPr>
-          <p:cNvPr id="14" name="TextBox 13"/>
-          <p:cNvSpPr txBox="1"/>
-          <p:nvPr/>
-        </p:nvSpPr>
-        <p:spPr>
-          <a:xfrm>
-            <a:off x="3044952" y="1325880"/>
-            <a:ext cx="2395728" cy="320040"/>
-          </a:xfrm>
-          <a:prstGeom prst="rect">
-            <a:avLst/>
-          </a:prstGeom>
-          <a:noFill/>
-        </p:spPr>
-        <p:txBody>
-          <a:bodyPr wrap="square" anchor="t">
-            <a:spAutoFit/>
-          </a:bodyPr>
-          <a:lstStyle/>
-          <a:p>
-            <a:pPr algn="ctr">
-              <a:lnSpc>
-                <a:spcPct val="125000"/>
-              </a:lnSpc>
-            </a:pPr>
-            <a:r>
-              <a:rPr sz="1300" b="1">
-                <a:solidFill>
-                  <a:srgbClr val="FFFFFF"/>
-                </a:solidFill>
-                <a:latin typeface="Microsoft JhengHei"/>
-              </a:rPr>
-              <a:t>為什麼是現在</a:t>
-            </a:r>
-          </a:p>
-        </p:txBody>
-      </p:sp>
-      <p:sp>
-        <p:nvSpPr>
-          <p:cNvPr id="15" name="TextBox 14"/>
-          <p:cNvSpPr txBox="1"/>
-          <p:nvPr/>
-        </p:nvSpPr>
-        <p:spPr>
-          <a:xfrm>
-            <a:off x="3172968" y="1755648"/>
-            <a:ext cx="2139696" cy="3410711"/>
-          </a:xfrm>
-          <a:prstGeom prst="rect">
-            <a:avLst/>
-          </a:prstGeom>
-          <a:noFill/>
-        </p:spPr>
-        <p:txBody>
-          <a:bodyPr wrap="square" anchor="t">
-            <a:spAutoFit/>
-          </a:bodyPr>
-          <a:lstStyle/>
-          <a:p>
-            <a:pPr algn="l">
-              <a:lnSpc>
-                <a:spcPct val="135000"/>
-              </a:lnSpc>
-            </a:pPr>
-            <a:r>
-              <a:rPr sz="1100" b="0">
-                <a:solidFill>
-                  <a:srgbClr val="333333"/>
-                </a:solidFill>
-                <a:latin typeface="Microsoft JhengHei"/>
-              </a:rPr>
-              <a:t>CDR 已把轉換成本</a:t>
-            </a:r>
-          </a:p>
-          <a:p>
-            <a:pPr algn="l">
-              <a:lnSpc>
-                <a:spcPct val="135000"/>
-              </a:lnSpc>
-            </a:pPr>
-            <a:r>
-              <a:rPr sz="1100" b="0">
-                <a:solidFill>
-                  <a:srgbClr val="333333"/>
-                </a:solidFill>
-                <a:latin typeface="Microsoft JhengHei"/>
-              </a:rPr>
-              <a:t>降到接近一次授權點擊</a:t>
-            </a:r>
-          </a:p>
-          <a:p>
-            <a:pPr algn="l">
-              <a:lnSpc>
-                <a:spcPct val="135000"/>
-              </a:lnSpc>
-            </a:pPr>
-            <a:r>
-              <a:rPr sz="1100" b="0">
-                <a:solidFill>
-                  <a:srgbClr val="333333"/>
-                </a:solidFill>
-                <a:latin typeface="Microsoft JhengHei"/>
-              </a:rPr>
-              <a:t/>
-            </a:r>
-          </a:p>
-          <a:p>
-            <a:pPr algn="l">
-              <a:lnSpc>
-                <a:spcPct val="135000"/>
-              </a:lnSpc>
-            </a:pPr>
-            <a:r>
-              <a:rPr sz="1100" b="0">
-                <a:solidFill>
-                  <a:srgbClr val="333333"/>
-                </a:solidFill>
-                <a:latin typeface="Microsoft JhengHei"/>
-              </a:rPr>
-              <a:t>未來 12 個月是</a:t>
-            </a:r>
-          </a:p>
-          <a:p>
-            <a:pPr algn="l">
-              <a:lnSpc>
-                <a:spcPct val="135000"/>
-              </a:lnSpc>
-            </a:pPr>
-            <a:r>
-              <a:rPr sz="1100" b="0">
-                <a:solidFill>
-                  <a:srgbClr val="333333"/>
-                </a:solidFill>
-                <a:latin typeface="Microsoft JhengHei"/>
-              </a:rPr>
-              <a:t>固定利率到期的</a:t>
-            </a:r>
-          </a:p>
-          <a:p>
-            <a:pPr algn="l">
-              <a:lnSpc>
-                <a:spcPct val="135000"/>
-              </a:lnSpc>
-            </a:pPr>
-            <a:r>
-              <a:rPr sz="1100" b="0">
-                <a:solidFill>
-                  <a:srgbClr val="333333"/>
-                </a:solidFill>
-                <a:latin typeface="Microsoft JhengHei"/>
-              </a:rPr>
-              <a:t>高峰窗口</a:t>
-            </a:r>
-          </a:p>
-          <a:p>
-            <a:pPr algn="l">
-              <a:lnSpc>
-                <a:spcPct val="135000"/>
-              </a:lnSpc>
-            </a:pPr>
-            <a:r>
-              <a:rPr sz="1100" b="0">
-                <a:solidFill>
-                  <a:srgbClr val="333333"/>
-                </a:solidFill>
-                <a:latin typeface="Microsoft JhengHei"/>
-              </a:rPr>
-              <a:t/>
-            </a:r>
-          </a:p>
-          <a:p>
-            <a:pPr algn="l">
-              <a:lnSpc>
-                <a:spcPct val="135000"/>
-              </a:lnSpc>
-            </a:pPr>
-            <a:r>
-              <a:rPr sz="1100" b="0">
-                <a:solidFill>
-                  <a:srgbClr val="333333"/>
-                </a:solidFill>
-                <a:latin typeface="Microsoft JhengHei"/>
-              </a:rPr>
-              <a:t>窗口過了,</a:t>
-            </a:r>
-          </a:p>
-          <a:p>
-            <a:pPr algn="l">
-              <a:lnSpc>
-                <a:spcPct val="135000"/>
-              </a:lnSpc>
-            </a:pPr>
-            <a:r>
-              <a:rPr sz="1100" b="0">
-                <a:solidFill>
-                  <a:srgbClr val="333333"/>
-                </a:solidFill>
-                <a:latin typeface="Microsoft JhengHei"/>
-              </a:rPr>
-              <a:t>客戶已經走了</a:t>
+              <a:t>無外部顧問</a:t>
             </a:r>
           </a:p>
         </p:txBody>
@@ -6498,8 +6748,8 @@
         </p:nvSpPr>
         <p:spPr>
           <a:xfrm>
-            <a:off x="5586984" y="1280160"/>
-            <a:ext cx="2395728" cy="3977639"/>
+            <a:off x="5586984" y="1234440"/>
+            <a:ext cx="2395728" cy="3931920"/>
           </a:xfrm>
           <a:prstGeom prst="roundRect">
             <a:avLst/>
@@ -6544,7 +6794,7 @@
         </p:nvSpPr>
         <p:spPr>
           <a:xfrm>
-            <a:off x="5586984" y="1280160"/>
+            <a:off x="5586984" y="1234440"/>
             <a:ext cx="2395728" cy="384048"/>
           </a:xfrm>
           <a:prstGeom prst="roundRect">
@@ -6588,7 +6838,7 @@
         </p:nvSpPr>
         <p:spPr>
           <a:xfrm>
-            <a:off x="5586984" y="1325880"/>
+            <a:off x="5586984" y="1280160"/>
             <a:ext cx="2395728" cy="320040"/>
           </a:xfrm>
           <a:prstGeom prst="rect">
@@ -6614,7 +6864,7 @@
                 </a:solidFill>
                 <a:latin typeface="Microsoft JhengHei"/>
               </a:rPr>
-              <a:t>對到多大的池子</a:t>
+              <a:t>為什麼先做這個</a:t>
             </a:r>
           </a:p>
         </p:txBody>
@@ -6627,8 +6877,8 @@
         </p:nvSpPr>
         <p:spPr>
           <a:xfrm>
-            <a:off x="5715000" y="1755648"/>
-            <a:ext cx="2139696" cy="3410711"/>
+            <a:off x="5715000" y="1709928"/>
+            <a:ext cx="2139696" cy="3364991"/>
           </a:xfrm>
           <a:prstGeom prst="rect">
             <a:avLst/>
@@ -6653,7 +6903,7 @@
                 </a:solidFill>
                 <a:latin typeface="Microsoft JhengHei"/>
               </a:rPr>
-              <a:t>房貸帳 A$611.5bn</a:t>
+              <a:t>到期日是確定事件,</a:t>
             </a:r>
           </a:p>
           <a:p>
@@ -6669,7 +6919,7 @@
                 </a:solidFill>
                 <a:latin typeface="Microsoft JhengHei"/>
               </a:rPr>
-              <a:t>(CBA, 2025b)</a:t>
+              <a:t>找出客戶不需要 AI。</a:t>
             </a:r>
           </a:p>
           <a:p>
@@ -6701,7 +6951,7 @@
                 </a:solidFill>
                 <a:latin typeface="Microsoft JhengHei"/>
               </a:rPr>
-              <a:t>約為 FY25 現金淨利</a:t>
+              <a:t>沒人知道的是</a:t>
             </a:r>
           </a:p>
           <a:p>
@@ -6717,7 +6967,7 @@
                 </a:solidFill>
                 <a:latin typeface="Microsoft JhengHei"/>
               </a:rPr>
-              <a:t>A$10,252m 的 60 倍</a:t>
+              <a:t>介入有沒有用。</a:t>
             </a:r>
           </a:p>
           <a:p>
@@ -6749,7 +6999,7 @@
                 </a:solidFill>
                 <a:latin typeface="Microsoft JhengHei"/>
               </a:rPr>
-              <a:t>本案針對每年</a:t>
+              <a:t>在證明之前建模型,</a:t>
             </a:r>
           </a:p>
           <a:p>
@@ -6765,7 +7015,23 @@
                 </a:solidFill>
                 <a:latin typeface="Microsoft JhengHei"/>
               </a:rPr>
-              <a:t>滾動到期的那一段</a:t>
+              <a:t>是把最貴的一步</a:t>
+            </a:r>
+          </a:p>
+          <a:p>
+            <a:pPr algn="l">
+              <a:lnSpc>
+                <a:spcPct val="135000"/>
+              </a:lnSpc>
+            </a:pPr>
+            <a:r>
+              <a:rPr sz="1100" b="0">
+                <a:solidFill>
+                  <a:srgbClr val="333333"/>
+                </a:solidFill>
+                <a:latin typeface="Microsoft JhengHei"/>
+              </a:rPr>
+              <a:t>放在最前面</a:t>
             </a:r>
           </a:p>
         </p:txBody>
@@ -6778,8 +7044,8 @@
         </p:nvSpPr>
         <p:spPr>
           <a:xfrm>
-            <a:off x="8129016" y="1280160"/>
-            <a:ext cx="2395728" cy="3977639"/>
+            <a:off x="8129016" y="1234440"/>
+            <a:ext cx="2395728" cy="3931920"/>
           </a:xfrm>
           <a:prstGeom prst="roundRect">
             <a:avLst/>
@@ -6824,7 +7090,7 @@
         </p:nvSpPr>
         <p:spPr>
           <a:xfrm>
-            <a:off x="8129016" y="1280160"/>
+            <a:off x="8129016" y="1234440"/>
             <a:ext cx="2395728" cy="384048"/>
           </a:xfrm>
           <a:prstGeom prst="roundRect">
@@ -6868,7 +7134,7 @@
         </p:nvSpPr>
         <p:spPr>
           <a:xfrm>
-            <a:off x="8129016" y="1325880"/>
+            <a:off x="8129016" y="1280160"/>
             <a:ext cx="2395728" cy="320040"/>
           </a:xfrm>
           <a:prstGeom prst="rect">
@@ -6907,8 +7173,8 @@
         </p:nvSpPr>
         <p:spPr>
           <a:xfrm>
-            <a:off x="8257032" y="1755648"/>
-            <a:ext cx="2139696" cy="3410711"/>
+            <a:off x="8257032" y="1709928"/>
+            <a:ext cx="2139696" cy="3364991"/>
           </a:xfrm>
           <a:prstGeom prst="rect">
             <a:avLst/>
@@ -6965,7 +7231,7 @@
                 </a:solidFill>
                 <a:latin typeface="Microsoft JhengHei"/>
               </a:rPr>
-              <a:t>下一個決策點:</a:t>
+              <a:t>8 週後帶著</a:t>
             </a:r>
           </a:p>
           <a:p>
@@ -6981,7 +7247,7 @@
                 </a:solidFill>
                 <a:latin typeface="Microsoft JhengHei"/>
               </a:rPr>
-              <a:t>第 6 個月</a:t>
+              <a:t>實驗結果回來,</a:t>
             </a:r>
           </a:p>
           <a:p>
@@ -6997,7 +7263,7 @@
                 </a:solidFill>
                 <a:latin typeface="Microsoft JhengHei"/>
               </a:rPr>
-              <a:t>流程就緒關卡</a:t>
+              <a:t/>
             </a:r>
           </a:p>
           <a:p>
@@ -7013,7 +7279,7 @@
                 </a:solidFill>
                 <a:latin typeface="Microsoft JhengHei"/>
               </a:rPr>
-              <a:t/>
+              <a:t>那時才決定</a:t>
             </a:r>
           </a:p>
           <a:p>
@@ -7029,23 +7295,7 @@
                 </a:solidFill>
                 <a:latin typeface="Microsoft JhengHei"/>
               </a:rPr>
-              <a:t>第二期撥款以</a:t>
-            </a:r>
-          </a:p>
-          <a:p>
-            <a:pPr algn="l">
-              <a:lnSpc>
-                <a:spcPct val="135000"/>
-              </a:lnSpc>
-            </a:pPr>
-            <a:r>
-              <a:rPr sz="1100" b="0">
-                <a:solidFill>
-                  <a:srgbClr val="333333"/>
-                </a:solidFill>
-                <a:latin typeface="Microsoft JhengHei"/>
-              </a:rPr>
-              <a:t>該關卡通過為條件</a:t>
+              <a:t>要不要投第二階段</a:t>
             </a:r>
           </a:p>
         </p:txBody>
@@ -7058,8 +7308,8 @@
         </p:nvSpPr>
         <p:spPr>
           <a:xfrm>
-            <a:off x="502920" y="5486400"/>
-            <a:ext cx="9311335" cy="731520"/>
+            <a:off x="502920" y="5394959"/>
+            <a:ext cx="9311335" cy="822960"/>
           </a:xfrm>
           <a:prstGeom prst="rect">
             <a:avLst/>
@@ -7084,7 +7334,7 @@
                 </a:solidFill>
                 <a:latin typeface="Microsoft JhengHei"/>
               </a:rPr>
-              <a:t>向一家在 Evident AI Index 2025 全球排名第 4、亞太第 1 的機構提案(CBA, 2025a)——</a:t>
+              <a:t>向一家在 Evident AI Index 2025 全球第 4、亞太第 1 的機構提案(CBA, 2025a)——</a:t>
             </a:r>
           </a:p>
           <a:p>
@@ -7100,7 +7350,7 @@
                 </a:solidFill>
                 <a:latin typeface="Microsoft JhengHei"/>
               </a:rPr>
-              <a:t>本案的問題不是能不能做,是該不該把這筆錢放在這裡。</a:t>
+              <a:t>它不缺 AI 能力。它缺的是這條業務線上的一個答案。</a:t>
             </a:r>
           </a:p>
         </p:txBody>
@@ -7157,7 +7407,7 @@
                 </a:solidFill>
                 <a:latin typeface="Microsoft JhengHei"/>
               </a:rPr>
-              <a:t>介紹 · 威脅:CDR 打開的缺口</a:t>
+              <a:t>介紹 · 起點:CBA 已經在做的事</a:t>
             </a:r>
           </a:p>
         </p:txBody>
@@ -7384,7 +7634,7 @@
       </p:sp>
       <p:pic>
         <p:nvPicPr>
-          <p:cNvPr id="8" name="Picture 7" descr="fig02_market.png"/>
+          <p:cNvPr id="8" name="Picture 7" descr="fig_v3_01_baseline.png"/>
           <p:cNvPicPr>
             <a:picLocks noChangeAspect="1"/>
           </p:cNvPicPr>
@@ -7398,8 +7648,8 @@
         </p:blipFill>
         <p:spPr>
           <a:xfrm>
-            <a:off x="1588177" y="1097280"/>
-            <a:ext cx="7415140" cy="3703320"/>
+            <a:off x="705882" y="1051560"/>
+            <a:ext cx="9179730" cy="4617720"/>
           </a:xfrm>
           <a:prstGeom prst="rect">
             <a:avLst/>
@@ -7414,8 +7664,8 @@
         </p:nvSpPr>
         <p:spPr>
           <a:xfrm>
-            <a:off x="502920" y="4937759"/>
-            <a:ext cx="9311335" cy="1371600"/>
+            <a:off x="502920" y="6236207"/>
+            <a:ext cx="9311335" cy="502920"/>
           </a:xfrm>
           <a:prstGeom prst="rect">
             <a:avLst/>
@@ -7430,72 +7680,17 @@
           <a:p>
             <a:pPr algn="l">
               <a:lnSpc>
-                <a:spcPct val="140000"/>
-              </a:lnSpc>
-            </a:pPr>
-            <a:r>
-              <a:rPr sz="1400" b="1">
+                <a:spcPct val="125000"/>
+              </a:lnSpc>
+            </a:pPr>
+            <a:r>
+              <a:rPr sz="1200" b="0">
                 <a:solidFill>
                   <a:srgbClr val="1F3864"/>
                 </a:solidFill>
                 <a:latin typeface="Microsoft JhengHei"/>
               </a:rPr>
-              <a:t>A1 已經證明 CBA 用 AI 贏在拿到新客戶的速度 —— 房貸有條件核准 &lt;10 分鐘、業務信貸年審 14h→2h。</a:t>
-            </a:r>
-          </a:p>
-          <a:p>
-            <a:pPr algn="l">
-              <a:lnSpc>
-                <a:spcPct val="140000"/>
-              </a:lnSpc>
-            </a:pPr>
-            <a:r>
-              <a:rPr sz="1400" b="1">
-                <a:solidFill>
-                  <a:srgbClr val="1F3864"/>
-                </a:solidFill>
-                <a:latin typeface="Microsoft JhengHei"/>
-              </a:rPr>
-              <a:t>但 CDR 打的是既有客戶離開的成本。Acquisition 與 retention 不是同一套能力。</a:t>
-            </a:r>
-          </a:p>
-        </p:txBody>
-      </p:sp>
-      <p:sp>
-        <p:nvSpPr>
-          <p:cNvPr id="10" name="TextBox 9"/>
-          <p:cNvSpPr txBox="1"/>
-          <p:nvPr/>
-        </p:nvSpPr>
-        <p:spPr>
-          <a:xfrm>
-            <a:off x="502920" y="6236207"/>
-            <a:ext cx="9311335" cy="502920"/>
-          </a:xfrm>
-          <a:prstGeom prst="rect">
-            <a:avLst/>
-          </a:prstGeom>
-          <a:noFill/>
-        </p:spPr>
-        <p:txBody>
-          <a:bodyPr wrap="square" anchor="t">
-            <a:spAutoFit/>
-          </a:bodyPr>
-          <a:lstStyle/>
-          <a:p>
-            <a:pPr algn="l">
-              <a:lnSpc>
-                <a:spcPct val="125000"/>
-              </a:lnSpc>
-            </a:pPr>
-            <a:r>
-              <a:rPr sz="1100" b="0">
-                <a:solidFill>
-                  <a:srgbClr val="808080"/>
-                </a:solidFill>
-                <a:latin typeface="Microsoft JhengHei"/>
-              </a:rPr>
-              <a:t>在 CBA 公開揭露中未見針對房貸存量留存的 AI 決策系統(CBA, 2024; 2025c);若 CEE 內部已涵蓋部分留存場景,本案定位即調整為在既有 CEE 上增設房貸再融資專用模組,投資論證不變。</a:t>
+              <a:t>主動說出對自己不利的事實,是投資提案裡最強的信任機制。</a:t>
             </a:r>
           </a:p>
         </p:txBody>
@@ -7552,7 +7747,7 @@
                 </a:solidFill>
                 <a:latin typeface="Microsoft JhengHei"/>
               </a:rPr>
-              <a:t>AI 機會 · 選案:三案加權比較與敏感度</a:t>
+              <a:t>AI 機會 · 缺口:房貸到期不等於定存到期</a:t>
             </a:r>
           </a:p>
         </p:txBody>
@@ -7779,7 +7974,7 @@
       </p:sp>
       <p:pic>
         <p:nvPicPr>
-          <p:cNvPr id="8" name="Picture 7" descr="fig03_matrix.png"/>
+          <p:cNvPr id="8" name="Picture 7" descr="fig_v3_02_gap.png"/>
           <p:cNvPicPr>
             <a:picLocks noChangeAspect="1"/>
           </p:cNvPicPr>
@@ -7793,138 +7988,24 @@
         </p:blipFill>
         <p:spPr>
           <a:xfrm>
-            <a:off x="502920" y="1051560"/>
-            <a:ext cx="6206892" cy="2697480"/>
+            <a:off x="705882" y="1051560"/>
+            <a:ext cx="9179730" cy="4617720"/>
           </a:xfrm>
           <a:prstGeom prst="rect">
             <a:avLst/>
           </a:prstGeom>
         </p:spPr>
       </p:pic>
-      <p:pic>
-        <p:nvPicPr>
-          <p:cNvPr id="9" name="Picture 8" descr="fig03_tornado.png"/>
-          <p:cNvPicPr>
-            <a:picLocks noChangeAspect="1"/>
-          </p:cNvPicPr>
-          <p:nvPr/>
-        </p:nvPicPr>
-        <p:blipFill>
-          <a:blip r:embed="rId3"/>
-          <a:stretch>
-            <a:fillRect/>
-          </a:stretch>
-        </p:blipFill>
-        <p:spPr>
-          <a:xfrm>
-            <a:off x="502920" y="3886200"/>
-            <a:ext cx="4388953" cy="2331720"/>
-          </a:xfrm>
-          <a:prstGeom prst="rect">
-            <a:avLst/>
-          </a:prstGeom>
-        </p:spPr>
-      </p:pic>
-      <p:sp>
-        <p:nvSpPr>
-          <p:cNvPr id="10" name="Rounded Rectangle 9"/>
-          <p:cNvSpPr/>
-          <p:nvPr/>
-        </p:nvSpPr>
-        <p:spPr>
-          <a:xfrm>
-            <a:off x="7178040" y="1051560"/>
-            <a:ext cx="3063240" cy="5166360"/>
-          </a:xfrm>
-          <a:prstGeom prst="roundRect">
-            <a:avLst/>
-          </a:prstGeom>
-          <a:solidFill>
-            <a:srgbClr val="FFFFFF"/>
-          </a:solidFill>
-          <a:ln w="19050">
-            <a:solidFill>
-              <a:srgbClr val="808080"/>
-            </a:solidFill>
-          </a:ln>
-          <a:effectLst/>
-        </p:spPr>
-        <p:style>
-          <a:lnRef idx="1">
-            <a:schemeClr val="accent1"/>
-          </a:lnRef>
-          <a:fillRef idx="3">
-            <a:schemeClr val="accent1"/>
-          </a:fillRef>
-          <a:effectRef idx="2">
-            <a:schemeClr val="accent1"/>
-          </a:effectRef>
-          <a:fontRef idx="minor">
-            <a:schemeClr val="lt1"/>
-          </a:fontRef>
-        </p:style>
-        <p:txBody>
-          <a:bodyPr rtlCol="0" anchor="ctr"/>
-          <a:lstStyle/>
-          <a:p>
-            <a:pPr algn="ctr"/>
-          </a:p>
-        </p:txBody>
-      </p:sp>
-      <p:sp>
-        <p:nvSpPr>
-          <p:cNvPr id="11" name="Rounded Rectangle 10"/>
-          <p:cNvSpPr/>
-          <p:nvPr/>
-        </p:nvSpPr>
-        <p:spPr>
-          <a:xfrm>
-            <a:off x="7178040" y="1051560"/>
-            <a:ext cx="3063240" cy="384048"/>
-          </a:xfrm>
-          <a:prstGeom prst="roundRect">
-            <a:avLst/>
-          </a:prstGeom>
-          <a:solidFill>
-            <a:srgbClr val="808080"/>
-          </a:solidFill>
-          <a:ln>
-            <a:noFill/>
-          </a:ln>
-          <a:effectLst/>
-        </p:spPr>
-        <p:style>
-          <a:lnRef idx="1">
-            <a:schemeClr val="accent1"/>
-          </a:lnRef>
-          <a:fillRef idx="3">
-            <a:schemeClr val="accent1"/>
-          </a:fillRef>
-          <a:effectRef idx="2">
-            <a:schemeClr val="accent1"/>
-          </a:effectRef>
-          <a:fontRef idx="minor">
-            <a:schemeClr val="lt1"/>
-          </a:fontRef>
-        </p:style>
-        <p:txBody>
-          <a:bodyPr rtlCol="0" anchor="ctr"/>
-          <a:lstStyle/>
-          <a:p>
-            <a:pPr algn="ctr"/>
-          </a:p>
-        </p:txBody>
-      </p:sp>
-      <p:sp>
-        <p:nvSpPr>
-          <p:cNvPr id="12" name="TextBox 11"/>
+      <p:sp>
+        <p:nvSpPr>
+          <p:cNvPr id="9" name="TextBox 8"/>
           <p:cNvSpPr txBox="1"/>
           <p:nvPr/>
         </p:nvSpPr>
         <p:spPr>
           <a:xfrm>
-            <a:off x="7178040" y="1097280"/>
-            <a:ext cx="3063240" cy="320040"/>
+            <a:off x="502920" y="6236207"/>
+            <a:ext cx="9311335" cy="502920"/>
           </a:xfrm>
           <a:prstGeom prst="rect">
             <a:avLst/>
@@ -7937,298 +8018,19 @@
           </a:bodyPr>
           <a:lstStyle/>
           <a:p>
-            <a:pPr algn="ctr">
+            <a:pPr algn="l">
               <a:lnSpc>
                 <a:spcPct val="125000"/>
               </a:lnSpc>
             </a:pPr>
             <a:r>
-              <a:rPr sz="1300" b="1">
-                <a:solidFill>
-                  <a:srgbClr val="FFFFFF"/>
-                </a:solidFill>
-                <a:latin typeface="Microsoft JhengHei"/>
-              </a:rPr>
-              <a:t>反方意見與回應</a:t>
-            </a:r>
-          </a:p>
-        </p:txBody>
-      </p:sp>
-      <p:sp>
-        <p:nvSpPr>
-          <p:cNvPr id="13" name="TextBox 12"/>
-          <p:cNvSpPr txBox="1"/>
-          <p:nvPr/>
-        </p:nvSpPr>
-        <p:spPr>
-          <a:xfrm>
-            <a:off x="7306055" y="1527048"/>
-            <a:ext cx="2807208" cy="4599432"/>
-          </a:xfrm>
-          <a:prstGeom prst="rect">
-            <a:avLst/>
-          </a:prstGeom>
-          <a:noFill/>
-        </p:spPr>
-        <p:txBody>
-          <a:bodyPr wrap="square" anchor="t">
-            <a:spAutoFit/>
-          </a:bodyPr>
-          <a:lstStyle/>
-          <a:p>
-            <a:pPr algn="l">
-              <a:lnSpc>
-                <a:spcPct val="135000"/>
-              </a:lnSpc>
-            </a:pPr>
-            <a:r>
-              <a:rPr sz="1000" b="0">
-                <a:solidFill>
-                  <a:srgbClr val="333333"/>
-                </a:solidFill>
-                <a:latin typeface="Microsoft JhengHei"/>
-              </a:rPr>
-              <a:t>「CBA 是 Evident 全球第 4,</a:t>
-            </a:r>
-          </a:p>
-          <a:p>
-            <a:pPr algn="l">
-              <a:lnSpc>
-                <a:spcPct val="135000"/>
-              </a:lnSpc>
-            </a:pPr>
-            <a:r>
-              <a:rPr sz="1000" b="0">
-                <a:solidFill>
-                  <a:srgbClr val="333333"/>
-                </a:solidFill>
-                <a:latin typeface="Microsoft JhengHei"/>
-              </a:rPr>
-              <a:t>怎麼會有空白?」</a:t>
-            </a:r>
-          </a:p>
-          <a:p>
-            <a:pPr algn="l">
-              <a:lnSpc>
-                <a:spcPct val="135000"/>
-              </a:lnSpc>
-            </a:pPr>
-            <a:r>
-              <a:rPr sz="1000" b="0">
-                <a:solidFill>
-                  <a:srgbClr val="333333"/>
-                </a:solidFill>
-                <a:latin typeface="Microsoft JhengHei"/>
-              </a:rPr>
-              <a:t>→ AI 成熟度衡量組織能力與</a:t>
-            </a:r>
-          </a:p>
-          <a:p>
-            <a:pPr algn="l">
-              <a:lnSpc>
-                <a:spcPct val="135000"/>
-              </a:lnSpc>
-            </a:pPr>
-            <a:r>
-              <a:rPr sz="1000" b="0">
-                <a:solidFill>
-                  <a:srgbClr val="333333"/>
-                </a:solidFill>
-                <a:latin typeface="Microsoft JhengHei"/>
-              </a:rPr>
-              <a:t>部署廣度,不等於每條業務線</a:t>
-            </a:r>
-          </a:p>
-          <a:p>
-            <a:pPr algn="l">
-              <a:lnSpc>
-                <a:spcPct val="135000"/>
-              </a:lnSpc>
-            </a:pPr>
-            <a:r>
-              <a:rPr sz="1000" b="0">
-                <a:solidFill>
-                  <a:srgbClr val="333333"/>
-                </a:solidFill>
-                <a:latin typeface="Microsoft JhengHei"/>
-              </a:rPr>
-              <a:t>都有對應系統;成熟度高反而</a:t>
-            </a:r>
-          </a:p>
-          <a:p>
-            <a:pPr algn="l">
-              <a:lnSpc>
-                <a:spcPct val="135000"/>
-              </a:lnSpc>
-            </a:pPr>
-            <a:r>
-              <a:rPr sz="1000" b="0">
-                <a:solidFill>
-                  <a:srgbClr val="333333"/>
-                </a:solidFill>
-                <a:latin typeface="Microsoft JhengHei"/>
-              </a:rPr>
-              <a:t>降低執行風險。</a:t>
-            </a:r>
-          </a:p>
-          <a:p>
-            <a:pPr algn="l">
-              <a:lnSpc>
-                <a:spcPct val="135000"/>
-              </a:lnSpc>
-            </a:pPr>
-            <a:r>
-              <a:rPr sz="1000" b="0">
-                <a:solidFill>
-                  <a:srgbClr val="333333"/>
-                </a:solidFill>
-                <a:latin typeface="Microsoft JhengHei"/>
-              </a:rPr>
-              <a:t/>
-            </a:r>
-          </a:p>
-          <a:p>
-            <a:pPr algn="l">
-              <a:lnSpc>
-                <a:spcPct val="135000"/>
-              </a:lnSpc>
-            </a:pPr>
-            <a:r>
-              <a:rPr sz="1000" b="0">
-                <a:solidFill>
-                  <a:srgbClr val="333333"/>
-                </a:solidFill>
-                <a:latin typeface="Microsoft JhengHei"/>
-              </a:rPr>
-              <a:t>「CEE 不就是在留客?」</a:t>
-            </a:r>
-          </a:p>
-          <a:p>
-            <a:pPr algn="l">
-              <a:lnSpc>
-                <a:spcPct val="135000"/>
-              </a:lnSpc>
-            </a:pPr>
-            <a:r>
-              <a:rPr sz="1000" b="0">
-                <a:solidFill>
-                  <a:srgbClr val="333333"/>
-                </a:solidFill>
-                <a:latin typeface="Microsoft JhengHei"/>
-              </a:rPr>
-              <a:t>→ CEE 是跨產品次佳互動引擎;</a:t>
-            </a:r>
-          </a:p>
-          <a:p>
-            <a:pPr algn="l">
-              <a:lnSpc>
-                <a:spcPct val="135000"/>
-              </a:lnSpc>
-            </a:pPr>
-            <a:r>
-              <a:rPr sz="1000" b="0">
-                <a:solidFill>
-                  <a:srgbClr val="333333"/>
-                </a:solidFill>
-                <a:latin typeface="Microsoft JhengHei"/>
-              </a:rPr>
-              <a:t>本案要的是固定利率到期事件上</a:t>
-            </a:r>
-          </a:p>
-          <a:p>
-            <a:pPr algn="l">
-              <a:lnSpc>
-                <a:spcPct val="135000"/>
-              </a:lnSpc>
-            </a:pPr>
-            <a:r>
-              <a:rPr sz="1000" b="0">
-                <a:solidFill>
-                  <a:srgbClr val="333333"/>
-                </a:solidFill>
-                <a:latin typeface="Microsoft JhengHei"/>
-              </a:rPr>
-              <a:t>的流失評分與外撥排序。</a:t>
-            </a:r>
-          </a:p>
-          <a:p>
-            <a:pPr algn="l">
-              <a:lnSpc>
-                <a:spcPct val="135000"/>
-              </a:lnSpc>
-            </a:pPr>
-            <a:r>
-              <a:rPr sz="1000" b="0">
-                <a:solidFill>
-                  <a:srgbClr val="333333"/>
-                </a:solidFill>
-                <a:latin typeface="Microsoft JhengHei"/>
-              </a:rPr>
-              <a:t/>
-            </a:r>
-          </a:p>
-          <a:p>
-            <a:pPr algn="l">
-              <a:lnSpc>
-                <a:spcPct val="135000"/>
-              </a:lnSpc>
-            </a:pPr>
-            <a:r>
-              <a:rPr sz="1000" b="0">
-                <a:solidFill>
-                  <a:srgbClr val="333333"/>
-                </a:solidFill>
-                <a:latin typeface="Microsoft JhengHei"/>
-              </a:rPr>
-              <a:t>「空白可能是理性的」</a:t>
-            </a:r>
-          </a:p>
-          <a:p>
-            <a:pPr algn="l">
-              <a:lnSpc>
-                <a:spcPct val="135000"/>
-              </a:lnSpc>
-            </a:pPr>
-            <a:r>
-              <a:rPr sz="1000" b="0">
-                <a:solidFill>
-                  <a:srgbClr val="333333"/>
-                </a:solidFill>
-                <a:latin typeface="Microsoft JhengHei"/>
-              </a:rPr>
-              <a:t>→ 承認兩項限制:競品訊號</a:t>
-            </a:r>
-          </a:p>
-          <a:p>
-            <a:pPr algn="l">
-              <a:lnSpc>
-                <a:spcPct val="135000"/>
-              </a:lnSpc>
-            </a:pPr>
-            <a:r>
-              <a:rPr sz="1000" b="0">
-                <a:solidFill>
-                  <a:srgbClr val="333333"/>
-                </a:solidFill>
-                <a:latin typeface="Microsoft JhengHei"/>
-              </a:rPr>
-              <a:t>不可觀測、差別定價敏感。</a:t>
-            </a:r>
-          </a:p>
-          <a:p>
-            <a:pPr algn="l">
-              <a:lnSpc>
-                <a:spcPct val="135000"/>
-              </a:lnSpc>
-            </a:pPr>
-            <a:r>
-              <a:rPr sz="1000" b="0">
-                <a:solidFill>
-                  <a:srgbClr val="333333"/>
-                </a:solidFill>
-                <a:latin typeface="Microsoft JhengHei"/>
-              </a:rPr>
-              <a:t>兩者都已寫進限制頁與倫理護欄。</a:t>
+              <a:rPr sz="1100" b="0">
+                <a:solidFill>
+                  <a:srgbClr val="808080"/>
+                </a:solidFill>
+                <a:latin typeface="Microsoft JhengHei"/>
+              </a:rPr>
+              <a:t>CDR 降低了比價與資料取得的摩擦,但轉貸本身仍是一個完整的信貸流程。</a:t>
             </a:r>
           </a:p>
         </p:txBody>
@@ -8285,7 +8087,7 @@
                 </a:solidFill>
                 <a:latin typeface="Microsoft JhengHei"/>
               </a:rPr>
-              <a:t>AI 機會 · 三條留存策略與系統閉環</a:t>
+              <a:t>AI 機會 · 六個未知:沒有一個能從公開資料回答</a:t>
             </a:r>
           </a:p>
         </p:txBody>
@@ -8512,7 +8314,7 @@
       </p:sp>
       <p:pic>
         <p:nvPicPr>
-          <p:cNvPr id="8" name="Picture 7" descr="fig04_loop.png"/>
+          <p:cNvPr id="8" name="Picture 7" descr="fig_v3_03_unknowns.png"/>
           <p:cNvPicPr>
             <a:picLocks noChangeAspect="1"/>
           </p:cNvPicPr>
@@ -8526,8 +8328,8 @@
         </p:blipFill>
         <p:spPr>
           <a:xfrm>
-            <a:off x="887245" y="1051560"/>
-            <a:ext cx="8817003" cy="4572000"/>
+            <a:off x="754990" y="1005840"/>
+            <a:ext cx="9081514" cy="4709160"/>
           </a:xfrm>
           <a:prstGeom prst="rect">
             <a:avLst/>
@@ -8568,7 +8370,7 @@
                 </a:solidFill>
                 <a:latin typeface="Microsoft JhengHei"/>
               </a:rPr>
-              <a:t>會被改變的決策:客戶經理每月的外撥配額排序,從「按貸款餘額高低排」改為「按流失傾向 × 客戶終身價值排」。</a:t>
+              <a:t>這六件事沒有一件我能從外面查到 —— 所以我請求的,是先把這六個答案買回來。</a:t>
             </a:r>
           </a:p>
         </p:txBody>
@@ -8625,53 +8427,14 @@
                 </a:solidFill>
                 <a:latin typeface="Microsoft JhengHei"/>
               </a:rPr>
-              <a:t>AI 機會 · 可行性評估</a:t>
-            </a:r>
-          </a:p>
-        </p:txBody>
-      </p:sp>
-      <p:sp>
-        <p:nvSpPr>
-          <p:cNvPr id="3" name="TextBox 2"/>
-          <p:cNvSpPr txBox="1"/>
-          <p:nvPr/>
-        </p:nvSpPr>
-        <p:spPr>
-          <a:xfrm>
-            <a:off x="502920" y="841248"/>
-            <a:ext cx="8778240" cy="365760"/>
-          </a:xfrm>
-          <a:prstGeom prst="rect">
-            <a:avLst/>
-          </a:prstGeom>
-          <a:noFill/>
-        </p:spPr>
-        <p:txBody>
-          <a:bodyPr wrap="square" anchor="t">
-            <a:spAutoFit/>
-          </a:bodyPr>
-          <a:lstStyle/>
-          <a:p>
-            <a:pPr algn="l">
-              <a:lnSpc>
-                <a:spcPct val="125000"/>
-              </a:lnSpc>
-            </a:pPr>
-            <a:r>
-              <a:rPr sz="1200" b="0">
-                <a:solidFill>
-                  <a:srgbClr val="808080"/>
-                </a:solidFill>
-                <a:latin typeface="Microsoft JhengHei"/>
-              </a:rPr>
-              <a:t>本案不需要新建 AI 能力,只需要把既有能力指向新的一軸</a:t>
-            </a:r>
-          </a:p>
-        </p:txBody>
-      </p:sp>
-      <p:sp>
-        <p:nvSpPr>
-          <p:cNvPr id="4" name="Oval 3"/>
+              <a:t>AI 機會 · 三條路,包含不用 AI 的那條</a:t>
+            </a:r>
+          </a:p>
+        </p:txBody>
+      </p:sp>
+      <p:sp>
+        <p:nvSpPr>
+          <p:cNvPr id="3" name="Oval 2"/>
           <p:cNvSpPr/>
           <p:nvPr/>
         </p:nvSpPr>
@@ -8715,7 +8478,7 @@
       </p:sp>
       <p:sp>
         <p:nvSpPr>
-          <p:cNvPr id="5" name="Oval 4"/>
+          <p:cNvPr id="4" name="Oval 3"/>
           <p:cNvSpPr/>
           <p:nvPr/>
         </p:nvSpPr>
@@ -8759,7 +8522,7 @@
       </p:sp>
       <p:sp>
         <p:nvSpPr>
-          <p:cNvPr id="6" name="Oval 5"/>
+          <p:cNvPr id="5" name="Oval 4"/>
           <p:cNvSpPr/>
           <p:nvPr/>
         </p:nvSpPr>
@@ -8803,7 +8566,7 @@
       </p:sp>
       <p:sp>
         <p:nvSpPr>
-          <p:cNvPr id="7" name="Oval 6"/>
+          <p:cNvPr id="6" name="Oval 5"/>
           <p:cNvSpPr/>
           <p:nvPr/>
         </p:nvSpPr>
@@ -8847,7 +8610,7 @@
       </p:sp>
       <p:sp>
         <p:nvSpPr>
-          <p:cNvPr id="8" name="Oval 7"/>
+          <p:cNvPr id="7" name="Oval 6"/>
           <p:cNvSpPr/>
           <p:nvPr/>
         </p:nvSpPr>
@@ -8891,7 +8654,7 @@
       </p:sp>
       <p:pic>
         <p:nvPicPr>
-          <p:cNvPr id="9" name="Picture 8" descr="fig06_feasibility.png"/>
+          <p:cNvPr id="8" name="Picture 7" descr="fig_v3_04_options.png"/>
           <p:cNvPicPr>
             <a:picLocks noChangeAspect="1"/>
           </p:cNvPicPr>
@@ -8905,53 +8668,14 @@
         </p:blipFill>
         <p:spPr>
           <a:xfrm>
-            <a:off x="1039473" y="1280160"/>
-            <a:ext cx="8512547" cy="3977639"/>
+            <a:off x="754990" y="1005840"/>
+            <a:ext cx="9081514" cy="4709160"/>
           </a:xfrm>
           <a:prstGeom prst="rect">
             <a:avLst/>
           </a:prstGeom>
         </p:spPr>
       </p:pic>
-      <p:sp>
-        <p:nvSpPr>
-          <p:cNvPr id="10" name="TextBox 9"/>
-          <p:cNvSpPr txBox="1"/>
-          <p:nvPr/>
-        </p:nvSpPr>
-        <p:spPr>
-          <a:xfrm>
-            <a:off x="502920" y="6236207"/>
-            <a:ext cx="9311335" cy="502920"/>
-          </a:xfrm>
-          <a:prstGeom prst="rect">
-            <a:avLst/>
-          </a:prstGeom>
-          <a:noFill/>
-        </p:spPr>
-        <p:txBody>
-          <a:bodyPr wrap="square" anchor="t">
-            <a:spAutoFit/>
-          </a:bodyPr>
-          <a:lstStyle/>
-          <a:p>
-            <a:pPr algn="l">
-              <a:lnSpc>
-                <a:spcPct val="125000"/>
-              </a:lnSpc>
-            </a:pPr>
-            <a:r>
-              <a:rPr sz="1200" b="0">
-                <a:solidFill>
-                  <a:srgbClr val="C00000"/>
-                </a:solidFill>
-                <a:latin typeface="Microsoft JhengHei"/>
-              </a:rPr>
-              <a:t>go / no-go 門檻:若「資料」維為紅燈,本案順延,先做 6 週資料可行性研究再回委員會。</a:t>
-            </a:r>
-          </a:p>
-        </p:txBody>
-      </p:sp>
     </p:spTree>
   </p:cSld>
   <p:clrMapOvr>
@@ -9004,7 +8728,7 @@
                 </a:solidFill>
                 <a:latin typeface="Microsoft JhengHei"/>
               </a:rPr>
-              <a:t>業務影響 · 限制與挑戰:緩解前 → 緩解後</a:t>
+              <a:t>業務影響 · 提案:8 週 discovery + 規則式對照實驗</a:t>
             </a:r>
           </a:p>
         </p:txBody>
@@ -9231,7 +8955,7 @@
       </p:sp>
       <p:pic>
         <p:nvPicPr>
-          <p:cNvPr id="8" name="Picture 7" descr="fig05_risk_matrix.png"/>
+          <p:cNvPr id="8" name="Picture 7" descr="fig_v3_05_plan.png"/>
           <p:cNvPicPr>
             <a:picLocks noChangeAspect="1"/>
           </p:cNvPicPr>
@@ -9245,8 +8969,8 @@
         </p:blipFill>
         <p:spPr>
           <a:xfrm>
-            <a:off x="1791970" y="1051560"/>
-            <a:ext cx="7007554" cy="4617720"/>
+            <a:off x="640080" y="1097280"/>
+            <a:ext cx="9311335" cy="4123169"/>
           </a:xfrm>
           <a:prstGeom prst="rect">
             <a:avLst/>
@@ -9261,8 +8985,8 @@
         </p:nvSpPr>
         <p:spPr>
           <a:xfrm>
-            <a:off x="502920" y="6236207"/>
-            <a:ext cx="9311335" cy="502920"/>
+            <a:off x="502920" y="5349240"/>
+            <a:ext cx="9311335" cy="822960"/>
           </a:xfrm>
           <a:prstGeom prst="rect">
             <a:avLst/>
@@ -9277,17 +9001,33 @@
           <a:p>
             <a:pPr algn="l">
               <a:lnSpc>
-                <a:spcPct val="125000"/>
+                <a:spcPct val="140000"/>
               </a:lnSpc>
             </a:pPr>
             <a:r>
               <a:rPr sz="1200" b="0">
                 <a:solidFill>
-                  <a:srgbClr val="1F3864"/>
-                </a:solidFill>
-                <a:latin typeface="Microsoft JhengHei"/>
-              </a:rPr>
-              <a:t>每一條殘餘風險,在專案計畫裡都有一個對應的停止或回退關卡。</a:t>
+                  <a:srgbClr val="333333"/>
+                </a:solidFill>
+                <a:latin typeface="Microsoft JhengHei"/>
+              </a:rPr>
+              <a:t>五個工作包的交付物全部可簽收:CEE 覆蓋現況報告、到期分佈實算、</a:t>
+            </a:r>
+          </a:p>
+          <a:p>
+            <a:pPr algn="l">
+              <a:lnSpc>
+                <a:spcPct val="140000"/>
+              </a:lnSpc>
+            </a:pPr>
+            <a:r>
+              <a:rPr sz="1200" b="0">
+                <a:solidFill>
+                  <a:srgbClr val="333333"/>
+                </a:solidFill>
+                <a:latin typeface="Microsoft JhengHei"/>
+              </a:rPr>
+              <a:t>流失事件操作型定義(業務與資料雙簽)、合規意見書、實驗結果報告、回委員會的建議書。</a:t>
             </a:r>
           </a:p>
         </p:txBody>
@@ -9344,7 +9084,7 @@
                 </a:solidFill>
                 <a:latin typeface="Microsoft JhengHei"/>
               </a:rPr>
-              <a:t>業務影響 · 社會文化與倫理影響</a:t>
+              <a:t>效益與衡量 · 實驗設計:怎麼證明介入有效</a:t>
             </a:r>
           </a:p>
         </p:txBody>
@@ -9452,6 +9192,50 @@
             <a:avLst/>
           </a:prstGeom>
           <a:solidFill>
+            <a:srgbClr val="D9D9D9"/>
+          </a:solidFill>
+          <a:ln>
+            <a:noFill/>
+          </a:ln>
+          <a:effectLst/>
+        </p:spPr>
+        <p:style>
+          <a:lnRef idx="1">
+            <a:schemeClr val="accent1"/>
+          </a:lnRef>
+          <a:fillRef idx="3">
+            <a:schemeClr val="accent1"/>
+          </a:fillRef>
+          <a:effectRef idx="2">
+            <a:schemeClr val="accent1"/>
+          </a:effectRef>
+          <a:fontRef idx="minor">
+            <a:schemeClr val="lt1"/>
+          </a:fontRef>
+        </p:style>
+        <p:txBody>
+          <a:bodyPr rtlCol="0" anchor="ctr"/>
+          <a:lstStyle/>
+          <a:p>
+            <a:pPr algn="ctr"/>
+          </a:p>
+        </p:txBody>
+      </p:sp>
+      <p:sp>
+        <p:nvSpPr>
+          <p:cNvPr id="6" name="Oval 5"/>
+          <p:cNvSpPr/>
+          <p:nvPr/>
+        </p:nvSpPr>
+        <p:spPr>
+          <a:xfrm>
+            <a:off x="11091672" y="384048"/>
+            <a:ext cx="155448" cy="155448"/>
+          </a:xfrm>
+          <a:prstGeom prst="ellipse">
+            <a:avLst/>
+          </a:prstGeom>
+          <a:solidFill>
             <a:srgbClr val="1F3864"/>
           </a:solidFill>
           <a:ln>
@@ -9483,13 +9267,13 @@
       </p:sp>
       <p:sp>
         <p:nvSpPr>
-          <p:cNvPr id="6" name="Oval 5"/>
+          <p:cNvPr id="7" name="Oval 6"/>
           <p:cNvSpPr/>
           <p:nvPr/>
         </p:nvSpPr>
         <p:spPr>
           <a:xfrm>
-            <a:off x="11091672" y="384048"/>
+            <a:off x="11420856" y="384048"/>
             <a:ext cx="155448" cy="155448"/>
           </a:xfrm>
           <a:prstGeom prst="ellipse">
@@ -9525,53 +9309,9 @@
           </a:p>
         </p:txBody>
       </p:sp>
-      <p:sp>
-        <p:nvSpPr>
-          <p:cNvPr id="7" name="Oval 6"/>
-          <p:cNvSpPr/>
-          <p:nvPr/>
-        </p:nvSpPr>
-        <p:spPr>
-          <a:xfrm>
-            <a:off x="11420856" y="384048"/>
-            <a:ext cx="155448" cy="155448"/>
-          </a:xfrm>
-          <a:prstGeom prst="ellipse">
-            <a:avLst/>
-          </a:prstGeom>
-          <a:solidFill>
-            <a:srgbClr val="D9D9D9"/>
-          </a:solidFill>
-          <a:ln>
-            <a:noFill/>
-          </a:ln>
-          <a:effectLst/>
-        </p:spPr>
-        <p:style>
-          <a:lnRef idx="1">
-            <a:schemeClr val="accent1"/>
-          </a:lnRef>
-          <a:fillRef idx="3">
-            <a:schemeClr val="accent1"/>
-          </a:fillRef>
-          <a:effectRef idx="2">
-            <a:schemeClr val="accent1"/>
-          </a:effectRef>
-          <a:fontRef idx="minor">
-            <a:schemeClr val="lt1"/>
-          </a:fontRef>
-        </p:style>
-        <p:txBody>
-          <a:bodyPr rtlCol="0" anchor="ctr"/>
-          <a:lstStyle/>
-          <a:p>
-            <a:pPr algn="ctr"/>
-          </a:p>
-        </p:txBody>
-      </p:sp>
       <p:pic>
         <p:nvPicPr>
-          <p:cNvPr id="8" name="Picture 7" descr="fig07_ethics.png"/>
+          <p:cNvPr id="8" name="Picture 7" descr="fig_v3_06_experiment.png"/>
           <p:cNvPicPr>
             <a:picLocks noChangeAspect="1"/>
           </p:cNvPicPr>
@@ -9585,53 +9325,14 @@
         </p:blipFill>
         <p:spPr>
           <a:xfrm>
-            <a:off x="930160" y="1051560"/>
-            <a:ext cx="8731173" cy="4617720"/>
+            <a:off x="754990" y="1005840"/>
+            <a:ext cx="9081514" cy="4709160"/>
           </a:xfrm>
           <a:prstGeom prst="rect">
             <a:avLst/>
           </a:prstGeom>
         </p:spPr>
       </p:pic>
-      <p:sp>
-        <p:nvSpPr>
-          <p:cNvPr id="9" name="TextBox 8"/>
-          <p:cNvSpPr txBox="1"/>
-          <p:nvPr/>
-        </p:nvSpPr>
-        <p:spPr>
-          <a:xfrm>
-            <a:off x="502920" y="6236207"/>
-            <a:ext cx="9311335" cy="502920"/>
-          </a:xfrm>
-          <a:prstGeom prst="rect">
-            <a:avLst/>
-          </a:prstGeom>
-          <a:noFill/>
-        </p:spPr>
-        <p:txBody>
-          <a:bodyPr wrap="square" anchor="t">
-            <a:spAutoFit/>
-          </a:bodyPr>
-          <a:lstStyle/>
-          <a:p>
-            <a:pPr algn="l">
-              <a:lnSpc>
-                <a:spcPct val="125000"/>
-              </a:lnSpc>
-            </a:pPr>
-            <a:r>
-              <a:rPr sz="1200" b="0">
-                <a:solidFill>
-                  <a:srgbClr val="C00000"/>
-                </a:solidFill>
-                <a:latin typeface="Microsoft JhengHei"/>
-              </a:rPr>
-              <a:t>漏掉一個要走的客戶,只是損失利差;把財困客戶當商機,是監管事件。</a:t>
-            </a:r>
-          </a:p>
-        </p:txBody>
-      </p:sp>
     </p:spTree>
   </p:cSld>
   <p:clrMapOvr>
@@ -9684,7 +9385,7 @@
                 </a:solidFill>
                 <a:latin typeface="Microsoft JhengHei"/>
               </a:rPr>
-              <a:t>效益與衡量 · 價值方程式:我不報一個假的 ROI,我報反解</a:t>
+              <a:t>業務影響 · 限制與風險</a:t>
             </a:r>
           </a:p>
         </p:txBody>
@@ -9792,50 +9493,6 @@
             <a:avLst/>
           </a:prstGeom>
           <a:solidFill>
-            <a:srgbClr val="D9D9D9"/>
-          </a:solidFill>
-          <a:ln>
-            <a:noFill/>
-          </a:ln>
-          <a:effectLst/>
-        </p:spPr>
-        <p:style>
-          <a:lnRef idx="1">
-            <a:schemeClr val="accent1"/>
-          </a:lnRef>
-          <a:fillRef idx="3">
-            <a:schemeClr val="accent1"/>
-          </a:fillRef>
-          <a:effectRef idx="2">
-            <a:schemeClr val="accent1"/>
-          </a:effectRef>
-          <a:fontRef idx="minor">
-            <a:schemeClr val="lt1"/>
-          </a:fontRef>
-        </p:style>
-        <p:txBody>
-          <a:bodyPr rtlCol="0" anchor="ctr"/>
-          <a:lstStyle/>
-          <a:p>
-            <a:pPr algn="ctr"/>
-          </a:p>
-        </p:txBody>
-      </p:sp>
-      <p:sp>
-        <p:nvSpPr>
-          <p:cNvPr id="6" name="Oval 5"/>
-          <p:cNvSpPr/>
-          <p:nvPr/>
-        </p:nvSpPr>
-        <p:spPr>
-          <a:xfrm>
-            <a:off x="11091672" y="384048"/>
-            <a:ext cx="155448" cy="155448"/>
-          </a:xfrm>
-          <a:prstGeom prst="ellipse">
-            <a:avLst/>
-          </a:prstGeom>
-          <a:solidFill>
             <a:srgbClr val="1F3864"/>
           </a:solidFill>
           <a:ln>
@@ -9867,13 +9524,13 @@
       </p:sp>
       <p:sp>
         <p:nvSpPr>
-          <p:cNvPr id="7" name="Oval 6"/>
+          <p:cNvPr id="6" name="Oval 5"/>
           <p:cNvSpPr/>
           <p:nvPr/>
         </p:nvSpPr>
         <p:spPr>
           <a:xfrm>
-            <a:off x="11420856" y="384048"/>
+            <a:off x="11091672" y="384048"/>
             <a:ext cx="155448" cy="155448"/>
           </a:xfrm>
           <a:prstGeom prst="ellipse">
@@ -9909,9 +9566,53 @@
           </a:p>
         </p:txBody>
       </p:sp>
+      <p:sp>
+        <p:nvSpPr>
+          <p:cNvPr id="7" name="Oval 6"/>
+          <p:cNvSpPr/>
+          <p:nvPr/>
+        </p:nvSpPr>
+        <p:spPr>
+          <a:xfrm>
+            <a:off x="11420856" y="384048"/>
+            <a:ext cx="155448" cy="155448"/>
+          </a:xfrm>
+          <a:prstGeom prst="ellipse">
+            <a:avLst/>
+          </a:prstGeom>
+          <a:solidFill>
+            <a:srgbClr val="D9D9D9"/>
+          </a:solidFill>
+          <a:ln>
+            <a:noFill/>
+          </a:ln>
+          <a:effectLst/>
+        </p:spPr>
+        <p:style>
+          <a:lnRef idx="1">
+            <a:schemeClr val="accent1"/>
+          </a:lnRef>
+          <a:fillRef idx="3">
+            <a:schemeClr val="accent1"/>
+          </a:fillRef>
+          <a:effectRef idx="2">
+            <a:schemeClr val="accent1"/>
+          </a:effectRef>
+          <a:fontRef idx="minor">
+            <a:schemeClr val="lt1"/>
+          </a:fontRef>
+        </p:style>
+        <p:txBody>
+          <a:bodyPr rtlCol="0" anchor="ctr"/>
+          <a:lstStyle/>
+          <a:p>
+            <a:pPr algn="ctr"/>
+          </a:p>
+        </p:txBody>
+      </p:sp>
       <p:pic>
         <p:nvPicPr>
-          <p:cNvPr id="8" name="Picture 7" descr="fig08_value.png"/>
+          <p:cNvPr id="8" name="Picture 7" descr="fig_v3_07_risk.png"/>
           <p:cNvPicPr>
             <a:picLocks noChangeAspect="1"/>
           </p:cNvPicPr>
@@ -9925,8 +9626,8 @@
         </p:blipFill>
         <p:spPr>
           <a:xfrm>
-            <a:off x="705882" y="1051560"/>
-            <a:ext cx="9179730" cy="4617720"/>
+            <a:off x="1045632" y="1051560"/>
+            <a:ext cx="8500230" cy="4617720"/>
           </a:xfrm>
           <a:prstGeom prst="rect">
             <a:avLst/>
@@ -9967,7 +9668,7 @@
                 </a:solidFill>
                 <a:latin typeface="Microsoft JhengHei"/>
               </a:rPr>
-              <a:t>一旦拿到內部到期分佈與產品別 margin,這個式子當場就能算出來。</a:t>
+              <a:t>「結論是不值得做」不是失敗 —— 是用 3.5 人月避免了 27.5 人月的錯誤投資。</a:t>
             </a:r>
           </a:p>
         </p:txBody>

--- a/Artificial Intelligence for Enterprises/Assessment3/Huang_26254793_421104_Assessment 3.pptx
+++ b/Artificial Intelligence for Enterprises/Assessment3/Huang_26254793_421104_Assessment 3.pptx
@@ -4201,7 +4201,7 @@
         <p:spPr>
           <a:xfrm>
             <a:off x="502920" y="1051560"/>
-            <a:ext cx="6152170" cy="3246120"/>
+            <a:ext cx="5964019" cy="3246119"/>
           </a:xfrm>
           <a:prstGeom prst="rect">
             <a:avLst/>
@@ -4560,8 +4560,8 @@
         </p:nvSpPr>
         <p:spPr>
           <a:xfrm>
-            <a:off x="502920" y="4526280"/>
-            <a:ext cx="9311335" cy="1554480"/>
+            <a:off x="502920" y="4434840"/>
+            <a:ext cx="9311335" cy="1737360"/>
           </a:xfrm>
           <a:prstGeom prst="rect">
             <a:avLst/>
@@ -4576,11 +4576,11 @@
           <a:p>
             <a:pPr algn="l">
               <a:lnSpc>
-                <a:spcPct val="145000"/>
-              </a:lnSpc>
-            </a:pPr>
-            <a:r>
-              <a:rPr sz="1300" b="0">
+                <a:spcPct val="140000"/>
+              </a:lnSpc>
+            </a:pPr>
+            <a:r>
+              <a:rPr sz="1150" b="0">
                 <a:solidFill>
                   <a:srgbClr val="1F3864"/>
                 </a:solidFill>
@@ -4592,17 +4592,65 @@
           <a:p>
             <a:pPr algn="l">
               <a:lnSpc>
-                <a:spcPct val="145000"/>
-              </a:lnSpc>
-            </a:pPr>
-            <a:r>
-              <a:rPr sz="1300" b="0">
+                <a:spcPct val="140000"/>
+              </a:lnSpc>
+            </a:pPr>
+            <a:r>
+              <a:rPr sz="1150" b="0">
                 <a:solidFill>
                   <a:srgbClr val="1F3864"/>
                 </a:solidFill>
                 <a:latin typeface="Microsoft JhengHei"/>
               </a:rPr>
               <a:t>這是本案唯一的外部依賴,也是唯一需要簽核才能放行的關卡。</a:t>
+            </a:r>
+          </a:p>
+          <a:p>
+            <a:pPr algn="l">
+              <a:lnSpc>
+                <a:spcPct val="140000"/>
+              </a:lnSpc>
+            </a:pPr>
+            <a:r>
+              <a:rPr sz="1150" b="0">
+                <a:solidFill>
+                  <a:srgbClr val="1F3864"/>
+                </a:solidFill>
+                <a:latin typeface="Microsoft JhengHei"/>
+              </a:rPr>
+              <a:t/>
+            </a:r>
+          </a:p>
+          <a:p>
+            <a:pPr algn="l">
+              <a:lnSpc>
+                <a:spcPct val="140000"/>
+              </a:lnSpc>
+            </a:pPr>
+            <a:r>
+              <a:rPr sz="1150" b="0">
+                <a:solidFill>
+                  <a:srgbClr val="1F3864"/>
+                </a:solidFill>
+                <a:latin typeface="Microsoft JhengHei"/>
+              </a:rPr>
+              <a:t>Planning estimate — to be calibrated with CBA internal rates。成本 = 3.5 人月 × 澳洲 ICT 職類薪資</a:t>
+            </a:r>
+          </a:p>
+          <a:p>
+            <a:pPr algn="l">
+              <a:lnSpc>
+                <a:spcPct val="140000"/>
+              </a:lnSpc>
+            </a:pPr>
+            <a:r>
+              <a:rPr sz="1150" b="0">
+                <a:solidFill>
+                  <a:srgbClr val="1F3864"/>
+                </a:solidFill>
+                <a:latin typeface="Microsoft JhengHei"/>
+              </a:rPr>
+              <a:t>中位數區間 × 1.3 間接費率(間接費率為提案人假設)。無新增系統採購、無平台授權、無外部顧問。</a:t>
             </a:r>
           </a:p>
         </p:txBody>
@@ -8970,7 +9018,7 @@
         <p:spPr>
           <a:xfrm>
             <a:off x="640080" y="1097280"/>
-            <a:ext cx="9311335" cy="4123169"/>
+            <a:ext cx="9311335" cy="3820034"/>
           </a:xfrm>
           <a:prstGeom prst="rect">
             <a:avLst/>
@@ -8985,8 +9033,8 @@
         </p:nvSpPr>
         <p:spPr>
           <a:xfrm>
-            <a:off x="502920" y="5349240"/>
-            <a:ext cx="9311335" cy="822960"/>
+            <a:off x="502920" y="5148072"/>
+            <a:ext cx="9311335" cy="1097280"/>
           </a:xfrm>
           <a:prstGeom prst="rect">
             <a:avLst/>
@@ -9005,13 +9053,13 @@
               </a:lnSpc>
             </a:pPr>
             <a:r>
-              <a:rPr sz="1200" b="0">
+              <a:rPr sz="1150" b="0">
                 <a:solidFill>
                   <a:srgbClr val="333333"/>
                 </a:solidFill>
                 <a:latin typeface="Microsoft JhengHei"/>
               </a:rPr>
-              <a:t>五個工作包的交付物全部可簽收:CEE 覆蓋現況報告、到期分佈實算、</a:t>
+              <a:t>這八週裡,不會訓練任何模型。名單用 SQL 依到期日取,介入用現有外撥流程,唯一新增的是隨機分派與結果追蹤。</a:t>
             </a:r>
           </a:p>
           <a:p>
@@ -9021,13 +9069,29 @@
               </a:lnSpc>
             </a:pPr>
             <a:r>
-              <a:rPr sz="1200" b="0">
+              <a:rPr sz="1150" b="0">
                 <a:solidFill>
                   <a:srgbClr val="333333"/>
                 </a:solidFill>
                 <a:latin typeface="Microsoft JhengHei"/>
               </a:rPr>
-              <a:t>流失事件操作型定義(業務與資料雙簽)、合規意見書、實驗結果報告、回委員會的建議書。</a:t>
+              <a:t>五個工作包的交付物全部可簽收:CEE 覆蓋現況報告、到期分佈實算、流失事件操作型定義(業務與資料雙簽)、</a:t>
+            </a:r>
+          </a:p>
+          <a:p>
+            <a:pPr algn="l">
+              <a:lnSpc>
+                <a:spcPct val="140000"/>
+              </a:lnSpc>
+            </a:pPr>
+            <a:r>
+              <a:rPr sz="1150" b="0">
+                <a:solidFill>
+                  <a:srgbClr val="333333"/>
+                </a:solidFill>
+                <a:latin typeface="Microsoft JhengHei"/>
+              </a:rPr>
+              <a:t>合規意見書、實驗結果報告、回委員會的建議書。</a:t>
             </a:r>
           </a:p>
         </p:txBody>
@@ -9626,8 +9690,8 @@
         </p:blipFill>
         <p:spPr>
           <a:xfrm>
-            <a:off x="1045632" y="1051560"/>
-            <a:ext cx="8500230" cy="4617720"/>
+            <a:off x="779692" y="1051560"/>
+            <a:ext cx="9032110" cy="4617720"/>
           </a:xfrm>
           <a:prstGeom prst="rect">
             <a:avLst/>

--- a/Artificial Intelligence for Enterprises/Assessment3/Huang_26254793_421104_Assessment 3.pptx
+++ b/Artificial Intelligence for Enterprises/Assessment3/Huang_26254793_421104_Assessment 3.pptx
@@ -513,7 +513,12 @@
           <a:lstStyle/>
           <a:p>
             <a:r>
-              <a:t>◆ 口白逐字 —— 鉤子 · 開場靜畫</a:t>
+              <a:t>【第 1 頁 · 鉤子 · 開場靜畫】　約 5 秒 · 23 字 · 累計 0:05</a:t>
+            </a:r>
+          </a:p>
+          <a:p>
+            <a:r>
+              <a:t>── 講稿(照著唸)──</a:t>
             </a:r>
           </a:p>
           <a:p>
@@ -523,7 +528,7 @@
           </a:p>
           <a:p>
             <a:r>
-              <a:t>──────────────────────────────────</a:t>
+              <a:t>→ 換下一頁</a:t>
             </a:r>
           </a:p>
         </p:txBody>
@@ -593,7 +598,12 @@
           <a:lstStyle/>
           <a:p>
             <a:r>
-              <a:t>◆ 口白逐字 —— P9 · 六個月 · 六個工作包 · 三道決策門</a:t>
+              <a:t>【第 10 頁 · P9 · 六個月 · 六個工作包 · 三道決策門】　約 47 秒 · 208 字 · 累計 8:11</a:t>
+            </a:r>
+          </a:p>
+          <a:p>
+            <a:r>
+              <a:t>── 講稿(照著唸)──</a:t>
             </a:r>
           </a:p>
           <a:p>
@@ -603,7 +613,12 @@
           </a:p>
           <a:p>
             <a:r>
-              <a:t>──────────────────────────────────</a:t>
+              <a:t>→ 換下一頁</a:t>
+            </a:r>
+          </a:p>
+          <a:p>
+            <a:r>
+              <a:t>── 備查(不唸,答辯用)──</a:t>
             </a:r>
           </a:p>
           <a:p>
@@ -858,7 +873,12 @@
           <a:lstStyle/>
           <a:p>
             <a:r>
-              <a:t>◆ 口白逐字 —— P10 · 資源、當責與請求</a:t>
+              <a:t>【第 11 頁 · P10 · 資源、當責與請求】　約 64 秒 · 280 字 · 累計 9:15</a:t>
+            </a:r>
+          </a:p>
+          <a:p>
+            <a:r>
+              <a:t>── 講稿(照著唸)──</a:t>
             </a:r>
           </a:p>
           <a:p>
@@ -868,7 +888,12 @@
           </a:p>
           <a:p>
             <a:r>
-              <a:t>──────────────────────────────────</a:t>
+              <a:t>→ 換下一頁</a:t>
+            </a:r>
+          </a:p>
+          <a:p>
+            <a:r>
+              <a:t>── 備查(不唸,答辯用)──</a:t>
             </a:r>
           </a:p>
           <a:p>
@@ -1063,7 +1088,12 @@
           <a:lstStyle/>
           <a:p>
             <a:r>
-              <a:t>◆ 口白逐字 —— 參考文獻(第 11 頁 — 不佔十頁額度)</a:t>
+              <a:t>【第 12 頁 · 參考文獻(第 11 頁 — 不佔十頁額度)】　約 5 秒 · 21 字 · 累計 9:20</a:t>
+            </a:r>
+          </a:p>
+          <a:p>
+            <a:r>
+              <a:t>── 講稿(照著唸)──</a:t>
             </a:r>
           </a:p>
           <a:p>
@@ -1073,7 +1103,7 @@
           </a:p>
           <a:p>
             <a:r>
-              <a:t>──────────────────────────────────</a:t>
+              <a:t>→ 換下一頁</a:t>
             </a:r>
           </a:p>
         </p:txBody>
@@ -1143,7 +1173,12 @@
           <a:lstStyle/>
           <a:p>
             <a:r>
-              <a:t>◆ 口白逐字 —— P1 · 用例:兩階段推論,與它下游那道人工防線</a:t>
+              <a:t>【第 2 頁 · P1 · 用例:兩階段推論,與它下游那道人工防線】　約 65 秒 · 288 字 · 累計 1:10</a:t>
+            </a:r>
+          </a:p>
+          <a:p>
+            <a:r>
+              <a:t>── 講稿(照著唸)──</a:t>
             </a:r>
           </a:p>
           <a:p>
@@ -1153,7 +1188,12 @@
           </a:p>
           <a:p>
             <a:r>
-              <a:t>──────────────────────────────────</a:t>
+              <a:t>→ 換下一頁</a:t>
+            </a:r>
+          </a:p>
+          <a:p>
+            <a:r>
+              <a:t>── 備查(不唸,答辯用)──</a:t>
             </a:r>
           </a:p>
           <a:p>
@@ -1308,7 +1348,12 @@
           <a:lstStyle/>
           <a:p>
             <a:r>
-              <a:t>◆ 口白逐字 —— P2 · 為什麼是現在:工作量沒變多,客戶要的時效變了</a:t>
+              <a:t>【第 3 頁 · P2 · 為什麼是現在:工作量沒變多,客戶要的時效變了】　約 72 秒 · 317 字 · 累計 2:22</a:t>
+            </a:r>
+          </a:p>
+          <a:p>
+            <a:r>
+              <a:t>── 講稿(照著唸)──</a:t>
             </a:r>
           </a:p>
           <a:p>
@@ -1318,7 +1363,12 @@
           </a:p>
           <a:p>
             <a:r>
-              <a:t>──────────────────────────────────</a:t>
+              <a:t>→ 換下一頁</a:t>
+            </a:r>
+          </a:p>
+          <a:p>
+            <a:r>
+              <a:t>── 備查(不唸,答辯用)──</a:t>
             </a:r>
           </a:p>
           <a:p>
@@ -1413,7 +1463,12 @@
           <a:lstStyle/>
           <a:p>
             <a:r>
-              <a:t>◆ 口白逐字 —— P3 · 發現過程:兩種病,兩個缺口</a:t>
+              <a:t>【第 4 頁 · P3 · 發現過程:兩種病,兩個缺口】　約 52 秒 · 230 字 · 累計 3:14</a:t>
+            </a:r>
+          </a:p>
+          <a:p>
+            <a:r>
+              <a:t>── 講稿(照著唸)──</a:t>
             </a:r>
           </a:p>
           <a:p>
@@ -1423,7 +1478,12 @@
           </a:p>
           <a:p>
             <a:r>
-              <a:t>──────────────────────────────────</a:t>
+              <a:t>→ 換下一頁</a:t>
+            </a:r>
+          </a:p>
+          <a:p>
+            <a:r>
+              <a:t>── 備查(不唸,答辯用)──</a:t>
             </a:r>
           </a:p>
           <a:p>
@@ -1518,7 +1578,12 @@
           <a:lstStyle/>
           <a:p>
             <a:r>
-              <a:t>◆ 口白逐字 —— P4 · 我們看不見的那一半:有資料,沒有習慣</a:t>
+              <a:t>【第 5 頁 · P4 · 我們看不見的那一半:有資料,沒有習慣】　約 59 秒 · 259 字 · 累計 4:13</a:t>
+            </a:r>
+          </a:p>
+          <a:p>
+            <a:r>
+              <a:t>── 講稿(照著唸)──</a:t>
             </a:r>
           </a:p>
           <a:p>
@@ -1528,7 +1593,12 @@
           </a:p>
           <a:p>
             <a:r>
-              <a:t>──────────────────────────────────</a:t>
+              <a:t>→ 換下一頁</a:t>
+            </a:r>
+          </a:p>
+          <a:p>
+            <a:r>
+              <a:t>── 備查(不唸,答辯用)──</a:t>
             </a:r>
           </a:p>
           <a:p>
@@ -1683,7 +1753,12 @@
           <a:lstStyle/>
           <a:p>
             <a:r>
-              <a:t>◆ 口白逐字 —— P5 · 五條路,含三條不用 AI</a:t>
+              <a:t>【第 6 頁 · P5 · 五條路,含三條不用 AI】　約 44 秒 · 195 字 · 累計 4:58</a:t>
+            </a:r>
+          </a:p>
+          <a:p>
+            <a:r>
+              <a:t>── 講稿(照著唸)──</a:t>
             </a:r>
           </a:p>
           <a:p>
@@ -1693,7 +1768,12 @@
           </a:p>
           <a:p>
             <a:r>
-              <a:t>──────────────────────────────────</a:t>
+              <a:t>→ 換下一頁</a:t>
+            </a:r>
+          </a:p>
+          <a:p>
+            <a:r>
+              <a:t>── 備查(不唸,答辯用)──</a:t>
             </a:r>
           </a:p>
           <a:p>
@@ -2063,7 +2143,12 @@
           <a:lstStyle/>
           <a:p>
             <a:r>
-              <a:t>◆ 口白逐字 —— P6 · 風險:七類十條,緩解位移與殘餘風險</a:t>
+              <a:t>【第 7 頁 · P6 · 風險:七類十條,緩解位移與殘餘風險】　約 51 秒 · 223 字 · 累計 5:48</a:t>
+            </a:r>
+          </a:p>
+          <a:p>
+            <a:r>
+              <a:t>── 講稿(照著唸)──</a:t>
             </a:r>
           </a:p>
           <a:p>
@@ -2073,7 +2158,22 @@
           </a:p>
           <a:p>
             <a:r>
-              <a:t>──────────────────────────────────</a:t>
+              <a:t>── 錄影提示(不唸)──</a:t>
+            </a:r>
+          </a:p>
+          <a:p>
+            <a:r>
+              <a:t>· 錄影標記:唸完「這題我沒有答案,它由法務在 G1 前給書面意見」整句後,畫面停在 R8 的紅色虛線圈上靜止 2 秒、口白不出聲,再切下一頁。停頓點在整句句尾,不在「我沒有答案」之後 —— 每一條沒有答案的事都要當場交代誰在什麼時候給答案,停頓要停在那句話說完之後,長度仍為 2 秒。</a:t>
+            </a:r>
+          </a:p>
+          <a:p>
+            <a:r>
+              <a:t>→ 換下一頁</a:t>
+            </a:r>
+          </a:p>
+          <a:p>
+            <a:r>
+              <a:t>── 備查(不唸,答辯用)──</a:t>
             </a:r>
           </a:p>
           <a:p>
@@ -2183,7 +2283,12 @@
           <a:lstStyle/>
           <a:p>
             <a:r>
-              <a:t>◆ 口白逐字 —— P7 · 倫理與可申訴性:對照澳洲 AI 倫理八原則</a:t>
+              <a:t>【第 8 頁 · P7 · 倫理與可申訴性:對照澳洲 AI 倫理八原則】　約 50 秒 · 219 字 · 累計 6:38</a:t>
+            </a:r>
+          </a:p>
+          <a:p>
+            <a:r>
+              <a:t>── 講稿(照著唸)──</a:t>
             </a:r>
           </a:p>
           <a:p>
@@ -2193,7 +2298,27 @@
           </a:p>
           <a:p>
             <a:r>
-              <a:t>──────────────────────────────────</a:t>
+              <a:t>── 錄影提示(不唸)──</a:t>
+            </a:r>
+          </a:p>
+          <a:p>
+            <a:r>
+              <a:t>· 錄影標記:唸到「可申訴性,我們不及格」時切全螢幕人像,唸完該句後切回畫中畫。</a:t>
+            </a:r>
+          </a:p>
+          <a:p>
+            <a:r>
+              <a:t>· 交界移交:P7 → P8 的接縫句為「講完該不該做,接下來是怎麼算做成了。」依總則檔 §6b,該句寫成 P8 口白的第一句、字數計入 P8,故不列入本頁 224 字。</a:t>
+            </a:r>
+          </a:p>
+          <a:p>
+            <a:r>
+              <a:t>→ 換下一頁</a:t>
+            </a:r>
+          </a:p>
+          <a:p>
+            <a:r>
+              <a:t>── 備查(不唸,答辯用)──</a:t>
             </a:r>
           </a:p>
           <a:p>
@@ -2283,7 +2408,12 @@
           <a:lstStyle/>
           <a:p>
             <a:r>
-              <a:t>◆ 口白逐字 —— P8 · 怎麼算成功:三層 KPI,一條回圈</a:t>
+              <a:t>【第 9 頁 · P8 · 怎麼算成功:三層 KPI,一條回圈】　約 46 秒 · 201 字 · 累計 7:24</a:t>
+            </a:r>
+          </a:p>
+          <a:p>
+            <a:r>
+              <a:t>── 講稿(照著唸)──</a:t>
             </a:r>
           </a:p>
           <a:p>
@@ -2293,7 +2423,12 @@
           </a:p>
           <a:p>
             <a:r>
-              <a:t>──────────────────────────────────</a:t>
+              <a:t>→ 換下一頁</a:t>
+            </a:r>
+          </a:p>
+          <a:p>
+            <a:r>
+              <a:t>── 備查(不唸,答辯用)──</a:t>
             </a:r>
           </a:p>
           <a:p>

--- a/Artificial Intelligence for Enterprises/Assessment3/Huang_26254793_421104_Assessment 3.pptx
+++ b/Artificial Intelligence for Enterprises/Assessment3/Huang_26254793_421104_Assessment 3.pptx
@@ -703,11 +703,6 @@
           </a:p>
           <a:p>
             <a:r>
-              <a:t>【badge】只能改規模,不能取消實驗</a:t>
-            </a:r>
-          </a:p>
-          <a:p>
-            <a:r>
               <a:t>【card:G2 · 第 12 週｜四臂比較門】同一凍結評估集上跑四臂(見下表),分兩軌:工具品質軌 · 結案判定軌</a:t>
             </a:r>
           </a:p>
@@ -768,37 +763,27 @@
           </a:p>
           <a:p>
             <a:r>
+              <a:t>【matrix-cell】現況的基準線。沒有它,後面三臂就沒有「比什麼」</a:t>
+            </a:r>
+          </a:p>
+          <a:p>
+            <a:r>
+              <a:t>【matrix-cell】不含模型能解掉多少誤報。它是地端 VLM 的對照基線 —— 如果它就夠,本案的模型端該縮</a:t>
+            </a:r>
+          </a:p>
+          <a:p>
+            <a:r>
+              <a:t>【matrix-cell】人工觸碰時間 · P90 回覆時間 · 判定品質。這是六個月內真正會上線的形態,誤報率也只能在這一軌量</a:t>
+            </a:r>
+          </a:p>
+          <a:p>
+            <a:r>
+              <a:t>【matrix-cell】機器自己結案但不對外送,人照常逐筆判,兩邊比對</a:t>
+            </a:r>
+          </a:p>
+          <a:p>
+            <a:r>
               <a:t>【matrix-cell】🔴 自動結案桶與人工桶的漏放率差值(95% 信賴區間),對照 G1 事前預註冊的非劣性邊際 δ;另計冤枉率(該翻案而未翻案)。前三臂全部含人,而要部署的是無人系統 —— 只有這一臂算得出自動結案的漏放率。🚫 判準是比差值、比事前邊際,不是兩條信賴區間的端點互比</a:t>
-            </a:r>
-          </a:p>
-          <a:p>
-            <a:r>
-              <a:t>【matrix】{'name': '② 規則式脈絡基線', 'cells': ['規則式脈絡層 + 人全數複核', '不含模型能解掉多少誤報。它是地端 VLM 的對照基線 —— 如果它就夠,本案的模型端該縮']}</a:t>
-            </a:r>
-          </a:p>
-          <a:p>
-            <a:r>
-              <a:t>【matrix】{'name': '③ 人機協作', 'cells': ['機器輔助、人判定', '人工觸碰時間 · P90 回覆時間 · 判定品質。這是六個月內真正會上線的形態,誤報率也只能在這一軌量']}</a:t>
-            </a:r>
-          </a:p>
-          <a:p>
-            <a:r>
-              <a:t>【matrix-cell】人工觸碰時間 · P90 回覆時間 · 判定品質。這是六個月內真正會上線的形態,誤報率也只能在這一軌量</a:t>
-            </a:r>
-          </a:p>
-          <a:p>
-            <a:r>
-              <a:t>【matrix-cell】🔴 自動結案桶與人工桶的漏放率差值(95% 信賴區間),對照 G1 事前預註冊的非劣性邊際 δ;另計冤枉率(該翻案而未翻案)。前三臂全部含人,而要部署的是無人系統 —— 只有這一臂算得出自動結案的漏放率。🚫 判準是比差值、比事前邊際,不是兩條信賴區間的端點互比</a:t>
-            </a:r>
-          </a:p>
-          <a:p>
-            <a:r>
-              <a:t>【matrix】{'name': '② 規則式脈絡基線', 'cells': ['規則式脈絡層 + 人全數複核', '不含模型能解掉多少誤報。它是地端 VLM 的對照基線 —— 如果它就夠,本案的模型端該縮']}</a:t>
-            </a:r>
-          </a:p>
-          <a:p>
-            <a:r>
-              <a:t>【matrix】{'name': '③ 人機協作', 'cells': ['機器輔助、人判定', '人工觸碰時間 · P90 回覆時間 · 判定品質。這是六個月內真正會上線的形態,誤報率也只…']}</a:t>
             </a:r>
           </a:p>
           <a:p>
@@ -963,7 +948,17 @@
           </a:p>
           <a:p>
             <a:r>
-              <a:t>【card:我請求核准的錢】第一段 = 評估底座全部 + 標註品質 / 脈絡特徵的限額探索;約 4.85 人月(2.08 + 1.39 + 0.69 + 0.69)/ 量級 NT$42–47 萬〔提案規劃…</a:t>
+              <a:t>【card:我請求核准的錢】G1(第 6 週)由贊助人決定是否續行 —— 它決定的是要不要續行剩下的工作,不是要不要開始</a:t>
+            </a:r>
+          </a:p>
+          <a:p>
+            <a:r>
+              <a:t>【card:我請求核准的錢】第一段 = 評估底座全部 + 標註品質 / 脈絡…</a:t>
+            </a:r>
+          </a:p>
+          <a:p>
+            <a:r>
+              <a:t>【card:我請求核准的錢】G1(第 6 週)由贊助人決定是否續行 —— 它…</a:t>
             </a:r>
           </a:p>
           <a:p>
@@ -978,16 +973,31 @@
           </a:p>
           <a:p>
             <a:r>
-              <a:t>【card:我請求核准的人】請委員會指定贊助人,並於 G1 前確認本案與公司既有雲端判讀規劃的範圍、預算與當責邊界(我主張的相依關係,待共同確認;若評估結果是兩案…</a:t>
-            </a:r>
-          </a:p>
-          <a:p>
-            <a:r>
               <a:t>【card:我請求核准的人】組織障礙不在技術側:政策可改 · 優先序照購買量 · 尖峰徵調研發 —— 所以我要的不只是一筆錢,是一個贊助人跟三道門</a:t>
             </a:r>
           </a:p>
           <a:p>
             <a:r>
+              <a:t>【card:我請求核准的人】請委員會指定贊助人,並於 G1 前確認本案與…</a:t>
+            </a:r>
+          </a:p>
+          <a:p>
+            <a:r>
+              <a:t>【card:我請求核准的人】組織障礙不在技術側:政策可改 · 優先序照…</a:t>
+            </a:r>
+          </a:p>
+          <a:p>
+            <a:r>
+              <a:t>【card:六個月之後 / 不做的話】委員會手上會多三樣東西:① 一份可稽核的錯誤率 ② 一層把畫面外脈絡帶進事件的判斷層 ③ 一份證明或推翻「脈絡到底有沒有用」的對照實驗結果</a:t>
+            </a:r>
+          </a:p>
+          <a:p>
+            <a:r>
+              <a:t>【card:六個月之後 / 不做的話】不做的代價:客戶繼續等 2–5 天、小客戶繼續拿到沒有人看過的判定,而研發工程師在尖峰繼續被拉去看影片</a:t>
+            </a:r>
+          </a:p>
+          <a:p>
+            <a:r>
               <a:t>【card:六個月之後 / 不做的話】但這句必須交代對價:本案移交後開到天花板時,是所有客戶約 85% 的爭議拿到沒有人看過的判定。差別只有一個,那個差別就是本案要買的東西 —— 那時我們量得出它錯多少,今天量不出</a:t>
             </a:r>
           </a:p>
@@ -998,17 +1008,17 @@
           </a:p>
           <a:p>
             <a:r>
-              <a:t>【card:六個月之後 / 不做的話】不做的代價:客戶繼續等 2–5 天、小客戶繼續拿到沒有人看過的判定,而研發工程師在尖峰繼續被拉去看影片</a:t>
-            </a:r>
-          </a:p>
-          <a:p>
-            <a:r>
-              <a:t>【card:六個月之後 / 不做的話】但這句必須交代對價:本案移交後開到天花板時,是所有客戶約 85% 的爭議拿到沒有人看過的判定。差別只有一個,那個差別就是本案要買的東西 …</a:t>
-            </a:r>
-          </a:p>
-          <a:p>
-            <a:r>
-              <a:t>【card:六個月之後 / 不做的話】受影響但不在核准鏈上:5 位專職分析人員(工作從逐筆看片變成處理難題與治理,對應「同樣人力、更高產出」這個既有成效樣態)· 車隊客戶的…</a:t>
+              <a:t>【card:六個月之後 / 不做的話】不做的代價:客戶繼續等 2–5 天、小客戶繼…</a:t>
+            </a:r>
+          </a:p>
+          <a:p>
+            <a:r>
+              <a:t>【card:六個月之後 / 不做的話】但這句必須交代對價:本案移交後開到天花板…</a:t>
+            </a:r>
+          </a:p>
+          <a:p>
+            <a:r>
+              <a:t>【card:六個月之後 / 不做的話】受影響但不在核准鏈上:5 位專職分析人員(…</a:t>
             </a:r>
           </a:p>
           <a:p>
@@ -1373,11 +1383,6 @@
           </a:p>
           <a:p>
             <a:r>
-              <a:t>【callout】這兩段之所以慢,是同一個原因:模型看不到畫面外的東西 —— 撈數據慢,是因為人要自己去查那個位置與那段路的速限;判讀慢,是因為模型只拿到一張圖。</a:t>
-            </a:r>
-          </a:p>
-          <a:p>
-            <a:r>
               <a:t>【rows】{'label': '尖峰徵調 7 位研發工程師', 'value': '不是管理失當,是算術的必然', 'note': '離開本職支援、非常態編制 —— 開發產能被拿去補分析產能', 'hot': False}</a:t>
             </a:r>
           </a:p>
@@ -1488,12 +1493,7 @@
           </a:p>
           <a:p>
             <a:r>
-              <a:t>【callout】樣本:4 台車 · 23 天 · 1,647 筆 = 一個小型車隊、一個月 —— 以下所有比例僅在此樣本內成立。這一件的分析段:5 位專職分析人員並行 3.6 個工作日 = 144 人時(不含整理與回信)。</a:t>
-            </a:r>
-          </a:p>
-          <a:p>
-            <a:r>
-              <a:t>【matrix】{'name': '缺口', 'cells': ['脈絡:判定依據不在畫面裡', '判準:同一段影片,不同複核者給不同標籤'], 'hot': False}</a:t>
+              <a:t>【matrix-cell】尺的一致性我們從來沒量過 —— 不比誰準,只指出錯的性質不同</a:t>
             </a:r>
           </a:p>
           <a:p>
@@ -1653,32 +1653,27 @@
           </a:p>
           <a:p>
             <a:r>
+              <a:t>【matrix-cell】裝置離線與鏡頭遮蔽時段無資料;事件分批上傳、頻率不一</a:t>
+            </a:r>
+          </a:p>
+          <a:p>
+            <a:r>
+              <a:t>【matrix-cell】W1-6 評估底座:分層抽樣 + 冷凍評估集</a:t>
+            </a:r>
+          </a:p>
+          <a:p>
+            <a:r>
               <a:t>【matrix-cell】感測器故障;人工標註本身就會錯 - 而標註錯誤足以改變模型的評比結論(Northcutt et al., 2021);跨系統重複記錄</a:t>
             </a:r>
           </a:p>
           <a:p>
             <a:r>
+              <a:t>【matrix-cell】W3-10 標註品質:誤報的操作型定義 + 判準手冊 + 黃金題</a:t>
+            </a:r>
+          </a:p>
+          <a:p>
+            <a:r>
               <a:t>【matrix-cell】目前不一致:同一段影片,不同複核者會給不同標籤(低頭 vs 閉眼、保溫瓶 vs 手機),而這個不一致從來沒有被量測過</a:t>
-            </a:r>
-          </a:p>
-          <a:p>
-            <a:r>
-              <a:t>【matrix】{'name': '處理', 'cells': ['感測器故障;人工標註本身就會錯 - 而標註錯誤足以改變模型的評比結論(Northcutt et …', '準確性 · 一致性', 'W3-10 標註品質:誤報的操作型定義 + 判準手冊 + 黃金題'], 'hot': False}</a:t>
-            </a:r>
-          </a:p>
-          <a:p>
-            <a:r>
-              <a:t>【matrix-cell】感測器故障;人工標註本身就會錯 - 而標註錯誤足以改變模型的評比結論(Northcutt et al., 2021);跨系統重複記錄</a:t>
-            </a:r>
-          </a:p>
-          <a:p>
-            <a:r>
-              <a:t>【matrix-cell】目前不一致:同一段影片,不同複核者會給不同標籤(低頭 vs 閉眼、保溫瓶 vs 手機),而這個不一致從來沒有被量測過</a:t>
-            </a:r>
-          </a:p>
-          <a:p>
-            <a:r>
-              <a:t>【matrix】{'name': '處理', 'cells': ['感測器故障;人工標註本身就會錯 - 而標註錯誤足以改變…', '準確性 · 一致性', 'W3-10 標註品質:誤報的操作型定義 + 判準手冊 + 黃金題'], 'hot': False}</a:t>
             </a:r>
           </a:p>
           <a:p>
@@ -1778,16 +1773,46 @@
           </a:p>
           <a:p>
             <a:r>
+              <a:t>【matrix-name:選項 0</a:t>
+            </a:r>
+          </a:p>
+          <a:p>
+            <a:r>
+              <a:t>加人】選項 0　加人</a:t>
+            </a:r>
+          </a:p>
+          <a:p>
+            <a:r>
+              <a:t>【matrix-cell】以現行做法增聘專職複核人力,覆蓋全部既有客戶</a:t>
+            </a:r>
+          </a:p>
+          <a:p>
+            <a:r>
               <a:t>【matrix-cell】線性:量幾倍,人就要幾倍 → 需 17-24 人(現有 5 人)〔提案推算,非核定編制〕</a:t>
             </a:r>
           </a:p>
           <a:p>
             <a:r>
+              <a:t>【matrix-cell】停不下來:編制是常態支出,而那個迴路照樣轉</a:t>
+            </a:r>
+          </a:p>
+          <a:p>
+            <a:r>
               <a:t>【matrix-cell】拒絕 - 加人只是沿著同一條成本曲線移動,不是把曲線整條外推(完整算式與迴路見下方卡片)</a:t>
             </a:r>
           </a:p>
           <a:p>
             <a:r>
+              <a:t>【matrix-name:選項 0b</a:t>
+            </a:r>
+          </a:p>
+          <a:p>
+            <a:r>
+              <a:t>調班 + 尖峰人力池】選項 0b　調班 + 尖峰人力池</a:t>
+            </a:r>
+          </a:p>
+          <a:p>
+            <a:r>
               <a:t>【matrix-cell】重排班表,把尖峰徵調的 7 位研發工程師從臨時支援變成有編組、有訓練的正式安排(尖峰徵調是現在就在跑的簡易版)</a:t>
             </a:r>
           </a:p>
@@ -1798,16 +1823,56 @@
           </a:p>
           <a:p>
             <a:r>
+              <a:t>【matrix-cell】隨時可停、可退回原班表 - 五條路裡反悔成本最低的一條</a:t>
+            </a:r>
+          </a:p>
+          <a:p>
+            <a:r>
               <a:t>【matrix-cell】待 G1 判定,本案不預先否決它 - 它是最便宜的解。營運端三個限制〔第一手經驗,不是量測〕:新人約三個月才判得準 · 影像有隱私限制不能外包 · 過去擴大人力判準反而更亂;另一項:排班只動得了排隊那 0-1 天</a:t>
             </a:r>
           </a:p>
           <a:p>
             <a:r>
+              <a:t>【matrix-name:選項 1</a:t>
+            </a:r>
+          </a:p>
+          <a:p>
+            <a:r>
+              <a:t>規則式脈絡融合(不用機器學習)】選項 1　規則式脈絡融合(不用機器學習)</a:t>
+            </a:r>
+          </a:p>
+          <a:p>
+            <a:r>
+              <a:t>【matrix-cell】定位 + 地圖速限硬規則比對,把畫面外的脈絡接到事件上</a:t>
+            </a:r>
+          </a:p>
+          <a:p>
+            <a:r>
+              <a:t>【matrix-cell】一次性建置,之後整段下移一階、後續仍線性</a:t>
+            </a:r>
+          </a:p>
+          <a:p>
+            <a:r>
+              <a:t>【matrix-cell】可逐條檢查、可回退到規則本身</a:t>
+            </a:r>
+          </a:p>
+          <a:p>
+            <a:r>
               <a:t>【matrix-cell】先做 - 某小型車隊單月樣本中 103 / 124 = 83% 的誤報同一根因,而速限資料自有;高風險決策場景應優先使用可逐條檢查的可解釋方法,而不是對黑箱做事後解釋(Rudin, 2019)。它同時是選項 2 的對照基線</a:t>
             </a:r>
           </a:p>
           <a:p>
             <a:r>
+              <a:t>【matrix-name:選項 2</a:t>
+            </a:r>
+          </a:p>
+          <a:p>
+            <a:r>
+              <a:t>地端視覺語言模型事件判讀】選項 2　地端視覺語言模型事件判讀</a:t>
+            </a:r>
+          </a:p>
+          <a:p>
+            <a:r>
               <a:t>【matrix-cell】讓機器讀懂一次事件的完整脈絡(影片 + 客戶問題 + 規則),產出可交付的描述與證據包</a:t>
             </a:r>
           </a:p>
@@ -1818,121 +1883,46 @@
           </a:p>
           <a:p>
             <a:r>
+              <a:t>【matrix-cell】三道門都可停:G1(W6)· G2(W12)· G3(W24);且六個月內對外自動結案 0%</a:t>
+            </a:r>
+          </a:p>
+          <a:p>
+            <a:r>
               <a:t>【matrix-cell】採用 - 前三包不是流程改善,是評估它的必要前置:量測底座 = 評估基準(沒有它不知道模型判得對不對)· 判準統一 = 驗證資料(判準不一致的標註餵給模型就是垃圾進垃圾出)· 規則式 = 對照基線(要證明模型有增量,得先有一個不用它的基準)</a:t>
             </a:r>
           </a:p>
           <a:p>
             <a:r>
+              <a:t>【matrix-name:選項 3</a:t>
+            </a:r>
+          </a:p>
+          <a:p>
+            <a:r>
+              <a:t>公司既有的雲端判讀規劃】選項 3　公司既有的雲端判讀規劃</a:t>
+            </a:r>
+          </a:p>
+          <a:p>
+            <a:r>
+              <a:t>【matrix-cell】不在本案範圍,由技術長辦公室決定</a:t>
+            </a:r>
+          </a:p>
+          <a:p>
+            <a:r>
               <a:t>【matrix-cell】前置條件,不是競爭關係 - 雲端判定真假,誰判定雲端?本案提供它需要的可稽核量測與乾淨標註</a:t>
             </a:r>
           </a:p>
           <a:p>
             <a:r>
-              <a:t>【matrix】{'name': '選項 0b\n調班 + 尖峰人力池', 'cells': ['重排班表,把尖峰徵調的 7 位研發工程師從臨時支援變成有編組、有訓練…', '仍線性,但斜率略低;削得掉尖峰,削不掉每日底量。⚠️ 斜率與削峰幅度目…', '隨時可停、可退回原班表 - 五條路裡反悔成本最低的一條', '待 G1 判定,本案不預先否決它 - 它是最便宜的解。營運端三個限制〔第…'], 'hot': False}</a:t>
-            </a:r>
-          </a:p>
-          <a:p>
-            <a:r>
-              <a:t>【matrix】{'name': '選項 1\n規則式脈絡融合(不用機器學習)', 'cells': ['定位 + 地圖速限硬規則比對,把畫面外的脈絡接到事件上', '一次性建置,之後整段下移一階、後續仍線性', '可逐條檢查、可回退到規則本身', '先做 - 某小型車隊單月樣本中 103 / 124 = 83% 的誤報同一根因,而速…'], 'hot': False}</a:t>
-            </a:r>
-          </a:p>
-          <a:p>
-            <a:r>
-              <a:t>【matrix】{'name': '選項 3\n公司既有的雲端判讀規劃', 'cells': ['仍在研擬中的雲端判讀', '尚未開始,曲線未定', '不在本案範圍,由技術長辦公室決定', '前置條件,不是競爭關係 - 雲端判定真假,誰判定雲端?本案提供它需要的…'], 'hot': False}</a:t>
-            </a:r>
-          </a:p>
-          <a:p>
-            <a:r>
-              <a:t>【matrix-cell】線性:量幾倍,人就要幾倍 → 需 17-24 人(現有 5 人)〔提案推算,非核定編制〕</a:t>
-            </a:r>
-          </a:p>
-          <a:p>
-            <a:r>
-              <a:t>【matrix-cell】拒絕 - 加人只是沿著同一條成本曲線移動,不是把曲線整條外推(完整算式與迴路見下方卡片)</a:t>
-            </a:r>
-          </a:p>
-          <a:p>
-            <a:r>
-              <a:t>【matrix-cell】重排班表,把尖峰徵調的 7 位研發工程師從臨時支援變成有編組、有訓練的正式安排(尖峰徵調是現在就在跑的簡易版)</a:t>
-            </a:r>
-          </a:p>
-          <a:p>
-            <a:r>
-              <a:t>【matrix-cell】仍線性,但斜率略低;削得掉尖峰,削不掉每日底量。⚠️ 斜率與削峰幅度目前沒有量測</a:t>
-            </a:r>
-          </a:p>
-          <a:p>
-            <a:r>
-              <a:t>【matrix-cell】隨時可停、可退回原班表 - 五條路裡反悔成本最低的一條</a:t>
-            </a:r>
-          </a:p>
-          <a:p>
-            <a:r>
-              <a:t>【matrix-cell】待 G1 判定,本案不預先否決它 - 它是最便宜的解。營運端三個限制〔第一手經驗,不是量測〕:新人約三個月才判得準 · 影像有隱私限制不能外包 · 過去擴大人力判準反而更亂;另一項:排班只動得了排隊那 0-1 天</a:t>
-            </a:r>
-          </a:p>
-          <a:p>
-            <a:r>
-              <a:t>【matrix-cell】定位 + 地圖速限硬規則比對,把畫面外的脈絡接到事件上</a:t>
-            </a:r>
-          </a:p>
-          <a:p>
-            <a:r>
-              <a:t>【matrix-cell】先做 - 某小型車隊單月樣本中 103 / 124 = 83% 的誤報同一根因,而速限資料自有;高風險決策場景應優先使用可逐條檢查的可解釋方法,而不是對黑箱做事後解釋(Rudin, 2019)。它同時是選項 2 的對照基線</a:t>
-            </a:r>
-          </a:p>
-          <a:p>
-            <a:r>
-              <a:t>【matrix-cell】讓機器讀懂一次事件的完整脈絡(影片 + 客戶問題 + 規則),產出可交付的描述與證據包</a:t>
-            </a:r>
-          </a:p>
-          <a:p>
-            <a:r>
-              <a:t>【matrix-cell】前期一次性投入,之後次線性 - 事件量繼續長,人時不跟著等比長。這是五條裡唯一不是線性的形狀</a:t>
-            </a:r>
-          </a:p>
-          <a:p>
-            <a:r>
-              <a:t>【matrix-cell】三道門都可停:G1(W6)· G2(W12)· G3(W24);且六個月內對外自動結案 0%</a:t>
-            </a:r>
-          </a:p>
-          <a:p>
-            <a:r>
-              <a:t>【matrix-cell】採用 - 前三包不是流程改善,是評估它的必要前置:量測底座 = 評估基準(沒有它不知道模型判得對不對)· 判準統一 = 驗證資料(判準不一致的標註餵給模型就是垃圾進垃圾出)· 規則式 = 對照基線(要證明模型有增量,得先有一個不用它的基準)</a:t>
-            </a:r>
-          </a:p>
-          <a:p>
-            <a:r>
-              <a:t>【matrix-cell】前置條件,不是競爭關係 - 雲端判定真假,誰判定雲端?本案提供它需要的可稽核量測與乾淨標註</a:t>
-            </a:r>
-          </a:p>
-          <a:p>
-            <a:r>
-              <a:t>【matrix】{'name': '選項 0b\n調班 + 尖峰人力池', 'cells': ['重排班表,把尖峰徵調的 7 位研發工程師從臨時…', '仍線性,但斜率略低;削得掉尖峰,削不掉每日底量…', '隨時可停、可退回原班表 - 五條路裡反悔成本最…', '待 G1 判定,本案不預先否決它 - 它是最便宜的…'], 'hot': False}</a:t>
-            </a:r>
-          </a:p>
-          <a:p>
-            <a:r>
-              <a:t>【matrix】{'name': '選項 1\n規則式脈絡融合(不用機器學習)', 'cells': ['定位 + 地圖速限硬規則比對,把畫面外的脈絡接…', '一次性建置,之後整段下移一階、後續仍線性', '可逐條檢查、可回退到規則本身', '先做 - 某小型車隊單月樣本中 103 / 124 = 83…'], 'hot': False}</a:t>
-            </a:r>
-          </a:p>
-          <a:p>
-            <a:r>
-              <a:t>【matrix】{'name': '選項 3\n公司既有的雲端判讀規劃', 'cells': ['仍在研擬中的雲端判讀', '尚未開始,曲線未定', '不在本案範圍,由技術長辦公室決定', '前置條件,不是競爭關係 - 雲端判定真假,誰判定…'], 'hot': False}</a:t>
-            </a:r>
-          </a:p>
-          <a:p>
-            <a:r>
-              <a:t>【badge】提案推算,非核定編制</a:t>
-            </a:r>
-          </a:p>
-          <a:p>
-            <a:r>
               <a:t>【card:選項 0 的算式(照印,含對本案不利的部分)】批次   13,000 x 20 秒 = 72.2 人時(13,000+ 筆/天 = 全客戶每日平均總事件量,雲端伺服器實測統計)</a:t>
             </a:r>
           </a:p>
           <a:p>
             <a:r>
+              <a:t>【card:選項 0 的算式(照印,含對本案不利的部分)】爭議   13,000 x 5-10% x 5.25 分 = 56.8-113.7 人時</a:t>
+            </a:r>
+          </a:p>
+          <a:p>
+            <a:r>
               <a:t>【card:選項 0 的算式(照印,含對本案不利的部分)】合計   129.1-185.9 人時 / 8 小時 = 16.14-23.24 FTE → 取整員額 17-24 人(保產能只能無條件進位;現有 5 人);工作量比 = 129.1 / 29.8 = 4.33 倍,這就是「四倍以上」的算術依據</a:t>
             </a:r>
           </a:p>
@@ -1953,27 +1943,27 @@
           </a:p>
           <a:p>
             <a:r>
-              <a:t>【card:選項 0 的算式(照印,含對本案不利的部分)】爭議   13,000 x 5-10% x 5.25 分 = 56.8-113.7 人時</a:t>
-            </a:r>
-          </a:p>
-          <a:p>
-            <a:r>
-              <a:t>【card:選項 0 的算式(照印,含對本案不利的部分)】合計   129.1-185.9 人時 / 8 小時 = 16.14-23.24 FTE → 取整員額 17-24 …</a:t>
-            </a:r>
-          </a:p>
-          <a:p>
-            <a:r>
-              <a:t>【card:選項 0 的算式(照印,含對本案不利的部分)】5.25 分/筆由一次實際判讀反推:5 人 x 3.6 個分析日 x 8 小時 = 144 人時 /…</a:t>
-            </a:r>
-          </a:p>
-          <a:p>
-            <a:r>
-              <a:t>【card:選項 0 的算式(照印,含對本案不利的部分)】兩個尚未驗證的假設:①約 20 秒/筆是營運端的實務估計,尚未以計時量測驗證 ②假…</a:t>
-            </a:r>
-          </a:p>
-          <a:p>
-            <a:r>
-              <a:t>【card:選項 0 的算式(照印,含對本案不利的部分)】加人會讓迴路轉得更久,不會讓它停:裝機量成長 → 複核量成長 → 人力吃緊 → 標…</a:t>
+              <a:t>【card:選項 0 的算式(照印,含對本案不利的部分)】爭議   13,000 x 5-10% x 5.25 分 = 56…</a:t>
+            </a:r>
+          </a:p>
+          <a:p>
+            <a:r>
+              <a:t>【card:選項 0 的算式(照印,含對本案不利的部分)】合計   129.1-185.9 人時 / 8 小時 = 16…</a:t>
+            </a:r>
+          </a:p>
+          <a:p>
+            <a:r>
+              <a:t>【card:選項 0 的算式(照印,含對本案不利的部分)】5.25 分/筆由一次實際判讀反推:5 人 x 3.…</a:t>
+            </a:r>
+          </a:p>
+          <a:p>
+            <a:r>
+              <a:t>【card:選項 0 的算式(照印,含對本案不利的部分)】兩個尚未驗證的假設:①約 20 秒/筆是營運端…</a:t>
+            </a:r>
+          </a:p>
+          <a:p>
+            <a:r>
+              <a:t>【card:選項 0 的算式(照印,含對本案不利的部分)】加人會讓迴路轉得更久,不會讓它停:裝機量…</a:t>
             </a:r>
           </a:p>
           <a:p>
@@ -1988,32 +1978,52 @@
           </a:p>
           <a:p>
             <a:r>
+              <a:t>【card:G1(第 6 週)= 因果判定門】出口 A:AI 可處理的那一堆佔主要延遲 → 放行選項 1 / 2 的後段</a:t>
+            </a:r>
+          </a:p>
+          <a:p>
+            <a:r>
+              <a:t>【card:G1(第 6 週)= 因果判定門】出口 B:否則 → 轉選項 0b(調班 + 尖峰人力池),本案的後五個工作包不執行</a:t>
+            </a:r>
+          </a:p>
+          <a:p>
+            <a:r>
               <a:t>【card:G1(第 6 週)= 因果判定門】⚠️ 初步拆解已顯示 AI 可處理段佔全程 43%-78%,但那是營運端的一次口述拆解,不是系統量測;W1-6 要把它做成正式量測,判定規則不因初步結果而放寬。六週買一個答案,答案不對就不做後面</a:t>
             </a:r>
           </a:p>
           <a:p>
             <a:r>
-              <a:t>【card:G1(第 6 週)= 因果判定門】怎麼判:把五段分成兩堆 - 「AI 可處理」(撈數據 · 判讀 · 證據包製作)與「AI …</a:t>
-            </a:r>
-          </a:p>
-          <a:p>
-            <a:r>
-              <a:t>【card:G1(第 6 週)= 因果判定門】出口 A:AI 可處理的那一堆佔主要延遲 → 放行選項 1 / 2 的後段</a:t>
-            </a:r>
-          </a:p>
-          <a:p>
-            <a:r>
-              <a:t>【card:G1(第 6 週)= 因果判定門】出口 B:否則 → 轉選項 0b(調班 + 尖峰人力池),本案的後五個工作包不執行</a:t>
-            </a:r>
-          </a:p>
-          <a:p>
-            <a:r>
-              <a:t>【card:G1(第 6 週)= 因果判定門】⚠️ 初步拆解已顯示 AI 可處理段佔全程 43%-78%,但那是營運端的一次口述拆解…</a:t>
-            </a:r>
-          </a:p>
-          <a:p>
-            <a:r>
-              <a:t>【badge】提案推估,非實測</a:t>
+              <a:t>【card:G1(第 6 週)= 因果判定門】怎麼判:把五段分成兩堆 - 「AI 可處理」(…</a:t>
+            </a:r>
+          </a:p>
+          <a:p>
+            <a:r>
+              <a:t>【card:G1(第 6 週)= 因果判定門】出口 A:AI 可處理的那一堆佔主要延遲 → 放…</a:t>
+            </a:r>
+          </a:p>
+          <a:p>
+            <a:r>
+              <a:t>【card:G1(第 6 週)= 因果判定門】出口 B:否則 → 轉選項 0b(調班 + 尖峰人…</a:t>
+            </a:r>
+          </a:p>
+          <a:p>
+            <a:r>
+              <a:t>【card:G1(第 6 週)= 因果判定門】⚠️ 初步拆解已顯示 AI 可處理段佔全程 43…</a:t>
+            </a:r>
+          </a:p>
+          <a:p>
+            <a:r>
+              <a:t>【card:這 85% 到底是什麼(三層,一層都不可省)】能力層:以現行小模型的表現外推,預期約 85% 的爭議件機器有把握、可直接結案 - 1,000 筆進來約 850 筆,剩約 150 筆送人細看。對那些件而言那就是終局判定〔提案推估,非實測;母體只有客戶爭議段,不含每日全量批次複核〕</a:t>
+            </a:r>
+          </a:p>
+          <a:p>
+            <a:r>
+              <a:t>【card:這 85% 到底是什麼(三層,一層都不可省)】本案層:🔴 六個月內對外自動結案覆蓋率目標 = 0%。W12-24 只跑影子模式 - 機器照樣出結論但不對外送,人照常逐筆判,兩邊比對。這是唯一算得出自動結案漏放率的設計</a:t>
+            </a:r>
+          </a:p>
+          <a:p>
+            <a:r>
+              <a:t>【card:這 85% 到底是什麼(三層,一層都不可省)】放行層:要讓它對外生效,需通過本案之外的一道獨立門,不在本次請求範圍</a:t>
             </a:r>
           </a:p>
           <a:p>
@@ -2028,42 +2038,32 @@
           </a:p>
           <a:p>
             <a:r>
-              <a:t>【card:這 85% 到底是什麼(三層,一層都不可省)】能力層:以現行小模型的表現外推,預期約 85% 的爭議件機器有把握、可直接結案 - 1,000 筆進來約 850 筆,剩約 150 筆送人細看。對那些件而言那就是終局判定〔提案推估,非實測;母體只有客戶爭議段,不含每日全量批次複核〕</a:t>
-            </a:r>
-          </a:p>
-          <a:p>
-            <a:r>
-              <a:t>【card:這 85% 到底是什麼(三層,一層都不可省)】本案層:🔴 六個月內對外自動結案覆蓋率目標 = 0%。W12-24 只跑影子模式 - 機器照樣出結論但不對外送,人照常逐筆判,兩邊比對。這是唯一算得出自動結案漏放率的設計</a:t>
-            </a:r>
-          </a:p>
-          <a:p>
-            <a:r>
               <a:t>【card:這 85% 到底是什麼(三層,一層都不可省)】怎麼驗:第 12 週用同一份凍結評估集,四臂同場比 - 現行影像模型 / 規則式脈絡基線 / VLM 輔助人工 / 影子模式。G2 只能調整模型假設與規模,不能取消這個實驗</a:t>
             </a:r>
           </a:p>
           <a:p>
             <a:r>
-              <a:t>【card:這 85% 到底是什麼(三層,一層都不可省)】吞吐:1,000 支 15 秒事件影片約 10-16 分〔估算,非實測;依一組公開可得模型的…</a:t>
-            </a:r>
-          </a:p>
-          <a:p>
-            <a:r>
-              <a:t>【card:這 85% 到底是什麼(三層,一層都不可省)】能力層:以現行小模型的表現外推,預期約 85% 的爭議件機器有把握、可直接結案 -…</a:t>
-            </a:r>
-          </a:p>
-          <a:p>
-            <a:r>
-              <a:t>【card:這 85% 到底是什麼(三層,一層都不可省)】本案層:🔴 六個月內對外自動結案覆蓋率目標 = 0%。W12-24 只跑影子模式 - 機器…</a:t>
-            </a:r>
-          </a:p>
-          <a:p>
-            <a:r>
-              <a:t>【card:這 85% 到底是什麼(三層,一層都不可省)】放行層:要讓它對外生效,需通過本案之外的一道獨立門,不在本次請求範圍</a:t>
-            </a:r>
-          </a:p>
-          <a:p>
-            <a:r>
-              <a:t>【card:這 85% 到底是什麼(三層,一層都不可省)】怎麼驗:第 12 週用同一份凍結評估集,四臂同場比 - 現行影像模型 / 規則式脈絡…</a:t>
+              <a:t>【card:這 85% 到底是什麼(三層,一層都不可省)】本案層:🔴 六個月內對外自動結案覆蓋率目標…</a:t>
+            </a:r>
+          </a:p>
+          <a:p>
+            <a:r>
+              <a:t>【card:這 85% 到底是什麼(三層,一層都不可省)】放行層:要讓它對外生效,需通過本案之外的…</a:t>
+            </a:r>
+          </a:p>
+          <a:p>
+            <a:r>
+              <a:t>【card:這 85% 到底是什麼(三層,一層都不可省)】技術寫到概念層次:一套地端視覺語言模型…</a:t>
+            </a:r>
+          </a:p>
+          <a:p>
+            <a:r>
+              <a:t>【card:這 85% 到底是什麼(三層,一層都不可省)】吞吐:1,000 支 15 秒事件影片約 10-16 分…</a:t>
+            </a:r>
+          </a:p>
+          <a:p>
+            <a:r>
+              <a:t>【card:這 85% 到底是什麼(三層,一層都不可省)】怎麼驗:第 12 週用同一份凍結評估集,四臂…</a:t>
             </a:r>
           </a:p>
           <a:p>
@@ -2178,32 +2178,252 @@
           </a:p>
           <a:p>
             <a:r>
-              <a:t>【matrix-cell】教育・介面 (Goddard et al., 2012)</a:t>
-            </a:r>
-          </a:p>
-          <a:p>
-            <a:r>
-              <a:t>介面不顯示信心 (Guo et al., 2017)</a:t>
-            </a:r>
-          </a:p>
-          <a:p>
-            <a:r>
-              <a:t>【matrix】{'name': 'R3 數據｜自動化偏差 · 成功 中\n(Parasuraman &amp; Manzey, 2010)', 'cells': ['教育・介面 (Goddard et al., 2012)\n介面不顯示信心 (Guo et al., 2017)…', '不顯示信心使複核變慢,\n與時效缺口相衝', '盲測組與對照組判定差異\n超過設計書所訂容忍值'], 'hot': False}</a:t>
-            </a:r>
-          </a:p>
-          <a:p>
-            <a:r>
-              <a:t>【matrix】{'name': 'R5 社會性 · 成功 高\n複核團隊抵觸角色改變', 'cells': ['教育:角色轉型說明 +\n判準手冊共同編寫', '參與式做法拉長\n判準定案時程', '複核團隊留任率或\n黃金題參與率下滑'], 'hot': False}</a:t>
-            </a:r>
-          </a:p>
-          <a:p>
-            <a:r>
-              <a:t>【matrix】{'name': 'R6 經濟 · 成功 中\n期內回本難證 · 與雲端競合', 'cells': ['審計:三道決策門\n逐段釋出額度', '分段釋出使長週期\n工作包難以排人', '決策門審查時單位成本\n改善低於門檻'], 'hot': False}</a:t>
-            </a:r>
-          </a:p>
-          <a:p>
-            <a:r>
-              <a:t>【matrix】{'name': 'R7 組織與管理 · 成功 高\n缺管理層支持(誠實命中)', 'cells': ['問責:贊助人指派 +\n決策門出席為放行前提', '決策門增加治理負擔\n與會議成本', '決策門連續兩次\n無高階出席'], 'hot': False}</a:t>
+              <a:t>【matrix-name:R1 技術局限 · 成功 中</a:t>
+            </a:r>
+          </a:p>
+          <a:p>
+            <a:r>
+              <a:t>模型不可解釋 → 複核者不信任】R1 技術局限 · 成功 中　模型不可解釋 → 複核者不信任</a:t>
+            </a:r>
+          </a:p>
+          <a:p>
+            <a:r>
+              <a:t>【matrix-cell】解釋:輸出可讀的描述與　引用到的證據 (Rudin, 2019)</a:t>
+            </a:r>
+          </a:p>
+          <a:p>
+            <a:r>
+              <a:t>【matrix-cell】錯的描述一樣通順,　比錯的分數更難察覺</a:t>
+            </a:r>
+          </a:p>
+          <a:p>
+            <a:r>
+              <a:t>【matrix-cell】推翻模型判定的比例不降;　只看得到人有看的那些</a:t>
+            </a:r>
+          </a:p>
+          <a:p>
+            <a:r>
+              <a:t>【matrix-name:R2 數據 · 成功 中</a:t>
+            </a:r>
+          </a:p>
+          <a:p>
+            <a:r>
+              <a:t>資料級聯:判準與脈絡資料】R2 數據 · 成功 中　資料級聯:判準與脈絡資料</a:t>
+            </a:r>
+          </a:p>
+          <a:p>
+            <a:r>
+              <a:t>【matrix-cell】審計:黃金題 + 抽樣雙人　複核 + 來源版本快照</a:t>
+            </a:r>
+          </a:p>
+          <a:p>
+            <a:r>
+              <a:t>【matrix-cell】雙人複核使複核成本　近倍增,需以抽樣控制</a:t>
+            </a:r>
+          </a:p>
+          <a:p>
+            <a:r>
+              <a:t>【matrix-cell】交通標誌根因佔比偏離基準　基準 = 某小型車隊單月樣本 83%</a:t>
+            </a:r>
+          </a:p>
+          <a:p>
+            <a:r>
+              <a:t>【matrix-name:R3 數據｜自動化偏差 · 成功 中</a:t>
+            </a:r>
+          </a:p>
+          <a:p>
+            <a:r>
+              <a:t>(Parasuraman &amp; Manzey, 2010)】R3 數據｜自動化偏差 · 成功 中　(Parasuraman &amp; Manzey, 2010)</a:t>
+            </a:r>
+          </a:p>
+          <a:p>
+            <a:r>
+              <a:t>【matrix-cell】教育・介面 (Goddard et al., 2012)　介面不顯示信心 (Guo et al., 2017)</a:t>
+            </a:r>
+          </a:p>
+          <a:p>
+            <a:r>
+              <a:t>【matrix-cell】不顯示信心使複核變慢,　與時效缺口相衝</a:t>
+            </a:r>
+          </a:p>
+          <a:p>
+            <a:r>
+              <a:t>【matrix-cell】盲測組與對照組判定差異　超過設計書所訂容忍值</a:t>
+            </a:r>
+          </a:p>
+          <a:p>
+            <a:r>
+              <a:t>【matrix-name:R4 倫理 · 成功 低</a:t>
+            </a:r>
+          </a:p>
+          <a:p>
+            <a:r>
+              <a:t>駕駛本人沒有申訴管道】R4 倫理 · 成功 低　駕駛本人沒有申訴管道</a:t>
+            </a:r>
+          </a:p>
+          <a:p>
+            <a:r>
+              <a:t>【matrix-cell】問責:申訴機制到位前,　產出不供個人考核使用</a:t>
+            </a:r>
+          </a:p>
+          <a:p>
+            <a:r>
+              <a:t>【matrix-cell】限制用途會降低　客戶端採用意願</a:t>
+            </a:r>
+          </a:p>
+          <a:p>
+            <a:r>
+              <a:t>【matrix-cell】駕駛端申訴無處可收,　件數恆為零</a:t>
+            </a:r>
+          </a:p>
+          <a:p>
+            <a:r>
+              <a:t>【matrix-name:R5 社會性 · 成功 高</a:t>
+            </a:r>
+          </a:p>
+          <a:p>
+            <a:r>
+              <a:t>複核團隊抵觸角色改變】R5 社會性 · 成功 高　複核團隊抵觸角色改變</a:t>
+            </a:r>
+          </a:p>
+          <a:p>
+            <a:r>
+              <a:t>【matrix-cell】教育:角色轉型說明 +　判準手冊共同編寫</a:t>
+            </a:r>
+          </a:p>
+          <a:p>
+            <a:r>
+              <a:t>【matrix-cell】參與式做法拉長　判準定案時程</a:t>
+            </a:r>
+          </a:p>
+          <a:p>
+            <a:r>
+              <a:t>【matrix-cell】複核團隊留任率或　黃金題參與率下滑</a:t>
+            </a:r>
+          </a:p>
+          <a:p>
+            <a:r>
+              <a:t>【matrix-name:R6 經濟 · 成功 中</a:t>
+            </a:r>
+          </a:p>
+          <a:p>
+            <a:r>
+              <a:t>期內回本難證 · 與雲端競合】R6 經濟 · 成功 中　期內回本難證 · 與雲端競合</a:t>
+            </a:r>
+          </a:p>
+          <a:p>
+            <a:r>
+              <a:t>【matrix-cell】審計:三道決策門　逐段釋出額度</a:t>
+            </a:r>
+          </a:p>
+          <a:p>
+            <a:r>
+              <a:t>【matrix-cell】分段釋出使長週期　工作包難以排人</a:t>
+            </a:r>
+          </a:p>
+          <a:p>
+            <a:r>
+              <a:t>【matrix-cell】決策門審查時單位成本　改善低於門檻</a:t>
+            </a:r>
+          </a:p>
+          <a:p>
+            <a:r>
+              <a:t>【matrix-name:R7 組織與管理 · 成功 高</a:t>
+            </a:r>
+          </a:p>
+          <a:p>
+            <a:r>
+              <a:t>缺管理層支持(誠實命中)】R7 組織與管理 · 成功 高　缺管理層支持(誠實命中)</a:t>
+            </a:r>
+          </a:p>
+          <a:p>
+            <a:r>
+              <a:t>【matrix-cell】問責:贊助人指派 +　決策門出席為放行前提</a:t>
+            </a:r>
+          </a:p>
+          <a:p>
+            <a:r>
+              <a:t>【matrix-cell】決策門增加治理負擔　與會議成本</a:t>
+            </a:r>
+          </a:p>
+          <a:p>
+            <a:r>
+              <a:t>【matrix-cell】決策門連續兩次　無高階出席</a:t>
+            </a:r>
+          </a:p>
+          <a:p>
+            <a:r>
+              <a:t>【matrix-name:R8 政治法律政策 · 尚無緩解</a:t>
+            </a:r>
+          </a:p>
+          <a:p>
+            <a:r>
+              <a:t>「曾判為誤報」的舉證地位】R8 政治法律政策 · 尚無緩解　「曾判為誤報」的舉證地位</a:t>
+            </a:r>
+          </a:p>
+          <a:p>
+            <a:r>
+              <a:t>【matrix-cell】問責:法務書面意見　於 G1(第 6 週)前到位</a:t>
+            </a:r>
+          </a:p>
+          <a:p>
+            <a:r>
+              <a:t>【matrix-cell】無 —— 目前沒有　可執行的緩解措施</a:t>
+            </a:r>
+          </a:p>
+          <a:p>
+            <a:r>
+              <a:t>【matrix-cell】客戶回頭標記的案件中　出現援引我方誤報的爭議</a:t>
+            </a:r>
+          </a:p>
+          <a:p>
+            <a:r>
+              <a:t>【matrix-name:R9 倫理｜自動結案的漏放</a:t>
+            </a:r>
+          </a:p>
+          <a:p>
+            <a:r>
+              <a:t>本案自己造成的 · 放行門在移交後】R9 倫理｜自動結案的漏放　本案自己造成的 · 放行門在移交後</a:t>
+            </a:r>
+          </a:p>
+          <a:p>
+            <a:r>
+              <a:t>【matrix-cell】問責:六個月影子模式(對外 0%)　碰撞 / 疲勞 / 行人不自動結案</a:t>
+            </a:r>
+          </a:p>
+          <a:p>
+            <a:r>
+              <a:t>【matrix-cell】抽樣稽核吃掉自動化　省下來的一部分(見資源頁)</a:t>
+            </a:r>
+          </a:p>
+          <a:p>
+            <a:r>
+              <a:t>【matrix-cell】漏濾率(否決型):自動結案桶　與人工桶的漏放率差值 95% CI</a:t>
+            </a:r>
+          </a:p>
+          <a:p>
+            <a:r>
+              <a:t>【matrix-name:R10 倫理｜自動結案的冤枉</a:t>
+            </a:r>
+          </a:p>
+          <a:p>
+            <a:r>
+              <a:t>本案自己造成的 · 放行門在移交後】R10 倫理｜自動結案的冤枉　本案自己造成的 · 放行門在移交後</a:t>
+            </a:r>
+          </a:p>
+          <a:p>
+            <a:r>
+              <a:t>【matrix-cell】問責:申訴即強制轉人工　且不得由同一模型複判</a:t>
+            </a:r>
+          </a:p>
+          <a:p>
+            <a:r>
+              <a:t>【matrix-cell】轉人工的量與時效　回到人力瓶頸上</a:t>
+            </a:r>
+          </a:p>
+          <a:p>
+            <a:r>
+              <a:t>【matrix-cell】申訴率與　申訴翻案率</a:t>
             </a:r>
           </a:p>
           <a:p>
@@ -2323,17 +2543,87 @@
           </a:p>
           <a:p>
             <a:r>
-              <a:t>【matrix】{'name': '4 隱私保護與安全\n擴大影像調閱與判定紀錄保存;唯一不因自動結案而惡化的一條', 'cells': ['部分', '部分'], 'hot': False}</a:t>
-            </a:r>
-          </a:p>
-          <a:p>
-            <a:r>
-              <a:t>【matrix】{'name': '6 透明性與解釋性\n對客戶揭露到哪一層尚未決定;移交後客戶不會知道那是機器判的', 'cells': ['部分', '未達成'], 'hot': False}</a:t>
-            </a:r>
-          </a:p>
-          <a:p>
-            <a:r>
-              <a:t>【callout】移交後那七盞紅燈掛在第 24 週那道門上;今天要批的是前六週的量測 —— 那正是把它們變回琥珀的唯一路徑。</a:t>
+              <a:t>【matrix-name:1 人類、社會與環境福祉</a:t>
+            </a:r>
+          </a:p>
+          <a:p>
+            <a:r>
+              <a:t>期內同樣人力承接更高複核量;移交後那約 850 筆無人覆核〔推估,非實測〕】1 人類、社會與環境福祉　期內同樣人力承接更高複核量;移交後那約 850 筆無人覆核〔推估,非實測〕</a:t>
+            </a:r>
+          </a:p>
+          <a:p>
+            <a:r>
+              <a:t>【matrix-name:2 以人為本的價值觀</a:t>
+            </a:r>
+          </a:p>
+          <a:p>
+            <a:r>
+              <a:t>期內人仍逐筆判;移交後駕駛承受的是機器單方面的決定】2 以人為本的價值觀　期內人仍逐筆判;移交後駕駛承受的是機器單方面的決定</a:t>
+            </a:r>
+          </a:p>
+          <a:p>
+            <a:r>
+              <a:t>【matrix-name:3 公平性 (Australian Human Rights Commission, 2020)</a:t>
+            </a:r>
+          </a:p>
+          <a:p>
+            <a:r>
+              <a:t>期內排序仍依客戶購買量;移交後配給依據換成機器的信心】3 公平性 (Australian Human Rights Commission, 2020)　期內排序仍依客戶購買量;移交後配給依據換成機器的信心</a:t>
+            </a:r>
+          </a:p>
+          <a:p>
+            <a:r>
+              <a:t>【matrix-name:4 隱私保護與安全</a:t>
+            </a:r>
+          </a:p>
+          <a:p>
+            <a:r>
+              <a:t>擴大影像調閱與判定紀錄保存;唯一不因自動結案而惡化的一條】4 隱私保護與安全　擴大影像調閱與判定紀錄保存;唯一不因自動結案而惡化的一條</a:t>
+            </a:r>
+          </a:p>
+          <a:p>
+            <a:r>
+              <a:t>【matrix-name:5 可靠性與安全性</a:t>
+            </a:r>
+          </a:p>
+          <a:p>
+            <a:r>
+              <a:t>漏放率目前不存在,只有一份 39 筆人工觸發測試(獨立樣本,自註為下限)】5 可靠性與安全性　漏放率目前不存在,只有一份 39 筆人工觸發測試(獨立樣本,自註為下限)</a:t>
+            </a:r>
+          </a:p>
+          <a:p>
+            <a:r>
+              <a:t>【matrix-name:6 透明性與解釋性</a:t>
+            </a:r>
+          </a:p>
+          <a:p>
+            <a:r>
+              <a:t>對客戶揭露到哪一層尚未決定;移交後客戶不會知道那是機器判的】6 透明性與解釋性　對客戶揭露到哪一層尚未決定;移交後客戶不會知道那是機器判的</a:t>
+            </a:r>
+          </a:p>
+          <a:p>
+            <a:r>
+              <a:t>【matrix-name:7 可申訴性</a:t>
+            </a:r>
+          </a:p>
+          <a:p>
+            <a:r>
+              <a:t>只有車隊安全主管能標記,駕駛本人不能提出質疑】7 可申訴性　只有車隊安全主管能標記,駕駛本人不能提出質疑</a:t>
+            </a:r>
+          </a:p>
+          <a:p>
+            <a:r>
+              <a:t>【matrix-cell】未達成　部署否決條件</a:t>
+            </a:r>
+          </a:p>
+          <a:p>
+            <a:r>
+              <a:t>【matrix-name:8 問責性</a:t>
+            </a:r>
+          </a:p>
+          <a:p>
+            <a:r>
+              <a:t>RACI 與三道決策門管的是專案;那 850 筆裡某一筆判錯,沒有人簽過名】8 問責性　RACI 與三道決策門管的是專案;那 850 筆裡某一筆判錯,沒有人簽過名</a:t>
             </a:r>
           </a:p>
           <a:p>
@@ -2438,71 +2728,46 @@
           </a:p>
           <a:p>
             <a:r>
+              <a:t>【matrix-cell】單件爭議從分析到回信的完整鏈路,平均 2–5 天;約半數超過兩天(營運端估計,不是量測,W6 交出正式量測)</a:t>
+            </a:r>
+          </a:p>
+          <a:p>
+            <a:r>
+              <a:t>【matrix-cell】2 天內;單純案件當天〔提案目標 · 客戶期望,非已簽訂之服務水準協議〕。改善來源有兩項:證據包自動化、誤報量下降;各自佔多少由 W16 量測後給出</a:t>
+            </a:r>
+          </a:p>
+          <a:p>
+            <a:r>
+              <a:t>【matrix-cell】現況為配給制,依購買量與問題嚴重性排序;涵蓋率無紀錄,W6 建立</a:t>
+            </a:r>
+          </a:p>
+          <a:p>
+            <a:r>
               <a:t>【matrix-cell】本案期內維持 100%(影子模式,機器不對外結案)。移交後開到天花板時會降到約 15% —— 那是本案造成的,不是本案要解的;移交後目標值須與自動結案的放行門一起訂</a:t>
             </a:r>
           </a:p>
           <a:p>
             <a:r>
+              <a:t>【matrix-cell】支撐全客戶 13,000+ 筆/天〔提案目標;所需人力由 G2 後依實測單位工時重估〕。驅動因子不在我方控制內 —— 由客戶的開通時點決定</a:t>
+            </a:r>
+          </a:p>
+          <a:p>
+            <a:r>
+              <a:t>【matrix-cell】不做本案、以現行做法覆蓋全部既有客戶需 17–24 人(現有 5 人)</a:t>
+            </a:r>
+          </a:p>
+          <a:p>
+            <a:r>
+              <a:t>【matrix-cell】做本案、移交後開到天花板需 11–12 人(仍須增聘 6–7 人)→ 可避免 5–13 人 ≈ 每年 NT$520–1,521 萬〔以初階工程師公開薪資量級推算,非核定預算〕</a:t>
+            </a:r>
+          </a:p>
+          <a:p>
+            <a:r>
               <a:t>【matrix-cell】批次複核約 20 秒/筆(全量;營運端實務估計,尚未以計時量測驗證)· 深入判讀約 5.25 分鐘/筆(5 人 × 3.6 個分析日 = 144 人時 ÷ 1,647 筆反推,單一批次的實際節奏,不是長期平均)</a:t>
             </a:r>
           </a:p>
           <a:p>
             <a:r>
-              <a:t>【matrix】{'name': '業務② 獲得人工驗證判定的客戶涵蓋率', 'cells': ['現況為配給制,依購買量與問題嚴重性排序;涵蓋率無紀錄,W6 建立', '本案期內維持 100%(影子模式,機器不對外結案)。移交後開到天花板時會降到約 15% —— 那是本案造成的,不是本案要解的;移交後目標值須與自動結案的放行門…']}</a:t>
-            </a:r>
-          </a:p>
-          <a:p>
-            <a:r>
-              <a:t>【matrix】{'name': '業務③ 可服務的每日事件量上限', 'cells': ['現況撐一個大型車隊約 3,000 筆/天', '支撐全客戶 13,000+ 筆/天〔提案目標;所需人力由 G2 後依實測單位工時重估〕。驅動因子不在我方控制內 —— 由客戶的開通時點決定']}</a:t>
-            </a:r>
-          </a:p>
-          <a:p>
-            <a:r>
-              <a:t>【matrix】{'name': '營運⑤⑥ 兩條工作流的每筆人工工時', 'cells': ['批次複核約 20 秒/筆(全量;營運端實務估計,尚未以計時量測驗證)· 深入判讀約 5.25 分鐘/筆(5 人 × 3.6 個分析日 = 144 人時 ÷ 1,647 筆反推,單一批…', '兩者的正式量測都提前到 W6,與時間拆解同批交出;目標值於 G1 訂定 —— 全客戶人力推算與可避免成本都掛在這兩個單價上']}</a:t>
-            </a:r>
-          </a:p>
-          <a:p>
-            <a:r>
-              <a:t>【matrix】{'name': '營運⑦ ADAS · 行車輔助誤報率', 'cells': ['某小型車隊單月樣本 104 / 1,029 ≈ 10.1%(該樣本全部誤報 124 筆 = ADAS 104 + 駕駛監控約 20;本列只算 ADAS 側)', '降至 7% 以下〔提案目標;以該樣本為基準,G1 後依重新校準的量測重訂〕。只在人機系統軌量,第 12 週判 —— 🚫 不掛在模型本身']}</a:t>
-            </a:r>
-          </a:p>
-          <a:p>
-            <a:r>
-              <a:t>【matrix】{'name': '營運⑧ 客戶回頭標記率(越低越好)', 'cells': ['現況 5–10%;同時是「駕駛端無效警示率」的可觀測代理', '降至 5% 以下〔提案目標〕']}</a:t>
-            </a:r>
-          </a:p>
-          <a:p>
-            <a:r>
-              <a:t>【matrix】{'name': '營運⑨ 尖峰徵調研發人時', 'cells': ['尖峰徵調 7 位研發工程師(離開本職 · 非常態編制 · 非專職)', '期內建立峰值徵調人時的量測基準,目標值於 G2 訂定;歸零列為移交後目標']}</a:t>
-            </a:r>
-          </a:p>
-          <a:p>
-            <a:r>
-              <a:t>【matrix-cell】2 天內;單純案件當天〔提案目標 · 客戶期望,非已簽訂之服務水準協議〕。改善來源有兩項:證據包自動化、誤報量下降;各自佔多少由 W16 量測後給出</a:t>
-            </a:r>
-          </a:p>
-          <a:p>
-            <a:r>
-              <a:t>【matrix-cell】本案期內維持 100%(影子模式,機器不對外結案)。移交後開到天花板時會降到約 15% —— 那是本案造成的,不是本案要解的;移交後目標值須與自動結案的放行門一起訂</a:t>
-            </a:r>
-          </a:p>
-          <a:p>
-            <a:r>
-              <a:t>【matrix-cell】支撐全客戶 13,000+ 筆/天〔提案目標;所需人力由 G2 後依實測單位工時重估〕。驅動因子不在我方控制內 —— 由客戶的開通時點決定</a:t>
-            </a:r>
-          </a:p>
-          <a:p>
-            <a:r>
-              <a:t>【matrix-cell】做本案、移交後開到天花板需 11–12 人(仍須增聘 6–7 人)→ 可避免 5–13 人 ≈ 每年 NT$520–1,521 萬〔以初階工程師公開薪資量級推算,非核定預算〕</a:t>
-            </a:r>
-          </a:p>
-          <a:p>
-            <a:r>
-              <a:t>【matrix-cell】批次複核約 20 秒/筆(全量;營運端實務估計,尚未以計時量測驗證)· 深入判讀約 5.25 分鐘/筆(5 人 × 3.6 個分析日 = 144 人時 ÷ 1,647 筆反推,單一批次的實際節奏,不是長期平均)</a:t>
-            </a:r>
-          </a:p>
-          <a:p>
-            <a:r>
               <a:t>【matrix-cell】兩者的正式量測都提前到 W6,與時間拆解同批交出;目標值於 G1 訂定 —— 全客戶人力推算與可避免成本都掛在這兩個單價上</a:t>
             </a:r>
           </a:p>
@@ -2518,32 +2783,47 @@
           </a:p>
           <a:p>
             <a:r>
-              <a:t>【matrix】{'name': '業務② 獲得人工驗證判定的客戶涵蓋率', 'cells': ['現況為配給制,依購買量與問題嚴重性排序;涵蓋率無紀錄,W6 建立', '本案期內維持 100%(影子模式,機器不對外結案)。移交後開到天花板時會降到約 15% —— 那是本案造成的…']}</a:t>
-            </a:r>
-          </a:p>
-          <a:p>
-            <a:r>
-              <a:t>【matrix】{'name': '業務③ 可服務的每日事件量上限', 'cells': ['現況撐一個大型車隊約 3,000 筆/天', '支撐全客戶 13,000+ 筆/天〔提案目標;所需人力由 G2 後依實測單位工時重估〕。驅動因子不在我方控…']}</a:t>
-            </a:r>
-          </a:p>
-          <a:p>
-            <a:r>
-              <a:t>【matrix】{'name': '營運⑤⑥ 兩條工作流的每筆人工工時', 'cells': ['批次複核約 20 秒/筆(全量;營運端實務估計,尚未以計時量測驗證)· 深入判讀約 5.25 分鐘/筆(5 人 ×…', '兩者的正式量測都提前到 W6,與時間拆解同批交出;目標值於 G1 訂定 —— 全客戶人力推算與可避免成本…']}</a:t>
-            </a:r>
-          </a:p>
-          <a:p>
-            <a:r>
-              <a:t>【matrix】{'name': '營運⑦ ADAS · 行車輔助誤報率', 'cells': ['某小型車隊單月樣本 104 / 1,029 ≈ 10.1%(該樣本全部誤報 124 筆 = ADAS 104 + 駕駛監控約 20…', '降至 7% 以下〔提案目標;以該樣本為基準,G1 後依重新校準的量測重訂〕。只在人機系統軌量,第 12 週…']}</a:t>
-            </a:r>
-          </a:p>
-          <a:p>
-            <a:r>
-              <a:t>【matrix】{'name': '營運⑧ 客戶回頭標記率(越低越好)', 'cells': ['現況 5–10%;同時是「駕駛端無效警示率」的可觀測代理', '降至 5% 以下〔提案目標〕']}</a:t>
-            </a:r>
-          </a:p>
-          <a:p>
-            <a:r>
-              <a:t>【matrix】{'name': '營運⑨ 尖峰徵調研發人時', 'cells': ['尖峰徵調 7 位研發工程師(離開本職 · 非常態編制 · 非專職)', '期內建立峰值徵調人時的量測基準,目標值於 G2 訂定;歸零列為移交後目標']}</a:t>
+              <a:t>【matrix-cell】現況 5–10%;同時是「駕駛端無效警示率」的可觀測代理</a:t>
+            </a:r>
+          </a:p>
+          <a:p>
+            <a:r>
+              <a:t>【matrix-cell】尖峰徵調 7 位研發工程師(離開本職 · 非常態編制 · 非專職)</a:t>
+            </a:r>
+          </a:p>
+          <a:p>
+            <a:r>
+              <a:t>【matrix-cell】期內建立峰值徵調人時的量測基準,目標值於 G2 訂定;歸零列為移交後目標</a:t>
+            </a:r>
+          </a:p>
+          <a:p>
+            <a:r>
+              <a:t>【matrix-cell】不存在。唯一量測是一份 39 筆人工觸發測試,獨立樣本,公司自註為下限</a:t>
+            </a:r>
+          </a:p>
+          <a:p>
+            <a:r>
+              <a:t>【matrix-cell】W6 交出帶 95% 信賴區間的點估計;上限值於 G1 由委員會核定</a:t>
+            </a:r>
+          </a:p>
+          <a:p>
+            <a:r>
+              <a:t>【matrix-cell】否決 G1 放不放行後段工作 · 技術負責人</a:t>
+            </a:r>
+          </a:p>
+          <a:p>
+            <a:r>
+              <a:t>【matrix-cell】W10 前建立基線,目標值於 G2 訂定</a:t>
+            </a:r>
+          </a:p>
+          <a:p>
+            <a:r>
+              <a:t>【matrix-cell】否決 G2 准不准開放對照重訓 · 複核營運主管</a:t>
+            </a:r>
+          </a:p>
+          <a:p>
+            <a:r>
+              <a:t>【matrix-cell】未達 100% 不移交(否決型,無中間值)</a:t>
             </a:r>
           </a:p>
           <a:p>
@@ -2559,51 +2839,6 @@
           <a:p>
             <a:r>
               <a:t>【matrix-cell】否決自動結案能不能對外生效 —— 沒有它,分流率就等於把那部分風險藏進「機器有把握」那一桶 · 技術負責人</a:t>
-            </a:r>
-          </a:p>
-          <a:p>
-            <a:r>
-              <a:t>【matrix】{'name': '⑪ 複核者一致性', 'cells': ['現況未量測', 'W10 前建立基線,目標值於 G2 訂定', '否決 G2 准不准開放對照重訓 · 複核營運主管']}</a:t>
-            </a:r>
-          </a:p>
-          <a:p>
-            <a:r>
-              <a:t>【matrix】{'name': '⑫ 訓練資料可追溯率', 'cells': ['0%', '100%,無中間值', '未達 100% 不移交(否決型,無中間值)']}</a:t>
-            </a:r>
-          </a:p>
-          <a:p>
-            <a:r>
-              <a:t>【matrix-cell】不存在。唯一量測是一份 39 筆人工觸發測試,獨立樣本,公司自註為下限</a:t>
-            </a:r>
-          </a:p>
-          <a:p>
-            <a:r>
-              <a:t>【matrix-cell】W6 交出帶 95% 信賴區間的點估計;上限值於 G1 由委員會核定</a:t>
-            </a:r>
-          </a:p>
-          <a:p>
-            <a:r>
-              <a:t>【matrix-cell】定義:被分到「有把握、可直接結案」桶,但描述錯誤且該錯誤足以改變判定結論的比例。基準不存在 —— 自動結案機制尚未建立</a:t>
-            </a:r>
-          </a:p>
-          <a:p>
-            <a:r>
-              <a:t>【matrix-cell】W12 由影子模式軌交出「自動結案桶與人工桶的漏放率差值」的 95% 信賴區間;非劣性邊際 δ 由委員會於 G1(W6)事前預註冊 —— 資料 W12 才交,判準必須寫在跑實驗之前</a:t>
-            </a:r>
-          </a:p>
-          <a:p>
-            <a:r>
-              <a:t>【matrix-cell】否決自動結案能不能對外生效 —— 沒有它,分流率就等於把那部分風險藏進「機器有把握」那一桶 · 技術負責人</a:t>
-            </a:r>
-          </a:p>
-          <a:p>
-            <a:r>
-              <a:t>【matrix】{'name': '⑪ 複核者一致性', 'cells': ['現況未量測', 'W10 前建立基線,目標值於 G2 訂定', '否決 G2 准不准開放對照重訓 · 複核營運主管']}</a:t>
-            </a:r>
-          </a:p>
-          <a:p>
-            <a:r>
-              <a:t>【matrix】{'name': '⑫ 訓練資料可追溯率', 'cells': ['0%', '100%,無中間值', '未達 100% 不移交(否決型,無中間值)']}</a:t>
             </a:r>
           </a:p>
           <a:p>
@@ -6156,7 +6391,7 @@
         <p:spPr>
           <a:xfrm>
             <a:off x="658368" y="1783080"/>
-            <a:ext cx="45720" cy="462280"/>
+            <a:ext cx="45720" cy="391797"/>
           </a:xfrm>
           <a:prstGeom prst="rect">
             <a:avLst/>
@@ -6200,7 +6435,7 @@
         <p:spPr>
           <a:xfrm>
             <a:off x="804672" y="1755648"/>
-            <a:ext cx="2408822" cy="553720"/>
+            <a:ext cx="2408822" cy="483237"/>
           </a:xfrm>
           <a:prstGeom prst="rect">
             <a:avLst/>
@@ -6239,7 +6474,7 @@
         <p:spPr>
           <a:xfrm>
             <a:off x="3268358" y="1755648"/>
-            <a:ext cx="3152759" cy="553720"/>
+            <a:ext cx="3152759" cy="483237"/>
           </a:xfrm>
           <a:prstGeom prst="rect">
             <a:avLst/>
@@ -6278,7 +6513,7 @@
         <p:spPr>
           <a:xfrm>
             <a:off x="7183343" y="1755648"/>
-            <a:ext cx="4240255" cy="553720"/>
+            <a:ext cx="4240255" cy="483237"/>
           </a:xfrm>
           <a:prstGeom prst="rect">
             <a:avLst/>
@@ -6316,8 +6551,8 @@
         </p:nvSpPr>
         <p:spPr>
           <a:xfrm>
-            <a:off x="658368" y="2428240"/>
-            <a:ext cx="45720" cy="462280"/>
+            <a:off x="658368" y="2357757"/>
+            <a:ext cx="45720" cy="391797"/>
           </a:xfrm>
           <a:prstGeom prst="rect">
             <a:avLst/>
@@ -6360,8 +6595,8 @@
         </p:nvSpPr>
         <p:spPr>
           <a:xfrm>
-            <a:off x="804672" y="2400808"/>
-            <a:ext cx="2408822" cy="553720"/>
+            <a:off x="804672" y="2330325"/>
+            <a:ext cx="2408822" cy="483237"/>
           </a:xfrm>
           <a:prstGeom prst="rect">
             <a:avLst/>
@@ -6399,8 +6634,8 @@
         </p:nvSpPr>
         <p:spPr>
           <a:xfrm>
-            <a:off x="3268358" y="2400808"/>
-            <a:ext cx="3152759" cy="553720"/>
+            <a:off x="3268358" y="2330325"/>
+            <a:ext cx="3152759" cy="483237"/>
           </a:xfrm>
           <a:prstGeom prst="rect">
             <a:avLst/>
@@ -6438,8 +6673,8 @@
         </p:nvSpPr>
         <p:spPr>
           <a:xfrm>
-            <a:off x="7183343" y="2400808"/>
-            <a:ext cx="4240255" cy="553720"/>
+            <a:off x="7183343" y="2330325"/>
+            <a:ext cx="4240255" cy="483237"/>
           </a:xfrm>
           <a:prstGeom prst="rect">
             <a:avLst/>
@@ -6477,8 +6712,8 @@
         </p:nvSpPr>
         <p:spPr>
           <a:xfrm>
-            <a:off x="658368" y="3155696"/>
-            <a:ext cx="3527450" cy="1618488"/>
+            <a:off x="658368" y="2941578"/>
+            <a:ext cx="3527450" cy="1600200"/>
           </a:xfrm>
           <a:prstGeom prst="roundRect">
             <a:avLst>
@@ -6525,7 +6760,7 @@
         </p:nvSpPr>
         <p:spPr>
           <a:xfrm>
-            <a:off x="768096" y="3283712"/>
+            <a:off x="768096" y="3069594"/>
             <a:ext cx="3307994" cy="566928"/>
           </a:xfrm>
           <a:prstGeom prst="rect">
@@ -6564,8 +6799,8 @@
         </p:nvSpPr>
         <p:spPr>
           <a:xfrm>
-            <a:off x="1804873" y="3905504"/>
-            <a:ext cx="1234440" cy="274320"/>
+            <a:off x="2010613" y="3691386"/>
+            <a:ext cx="822960" cy="274320"/>
           </a:xfrm>
           <a:prstGeom prst="roundRect">
             <a:avLst>
@@ -6610,8 +6845,8 @@
         </p:nvSpPr>
         <p:spPr>
           <a:xfrm>
-            <a:off x="1804873" y="3905504"/>
-            <a:ext cx="1234440" cy="274320"/>
+            <a:off x="2010613" y="3691386"/>
+            <a:ext cx="822960" cy="274320"/>
           </a:xfrm>
           <a:prstGeom prst="rect">
             <a:avLst/>
@@ -6649,8 +6884,8 @@
         </p:nvSpPr>
         <p:spPr>
           <a:xfrm>
-            <a:off x="768096" y="4289552"/>
-            <a:ext cx="3307994" cy="356616"/>
+            <a:off x="768096" y="4075434"/>
+            <a:ext cx="3307994" cy="338327"/>
           </a:xfrm>
           <a:prstGeom prst="rect">
             <a:avLst/>
@@ -6688,8 +6923,8 @@
         </p:nvSpPr>
         <p:spPr>
           <a:xfrm>
-            <a:off x="4332122" y="3155696"/>
-            <a:ext cx="3527450" cy="1618488"/>
+            <a:off x="4332122" y="2941578"/>
+            <a:ext cx="3527450" cy="1600200"/>
           </a:xfrm>
           <a:prstGeom prst="roundRect">
             <a:avLst>
@@ -6736,7 +6971,7 @@
         </p:nvSpPr>
         <p:spPr>
           <a:xfrm>
-            <a:off x="4441850" y="3283712"/>
+            <a:off x="4441850" y="3069594"/>
             <a:ext cx="3307994" cy="566928"/>
           </a:xfrm>
           <a:prstGeom prst="rect">
@@ -6775,8 +7010,8 @@
         </p:nvSpPr>
         <p:spPr>
           <a:xfrm>
-            <a:off x="5478627" y="3905504"/>
-            <a:ext cx="1234440" cy="274320"/>
+            <a:off x="5087721" y="3691386"/>
+            <a:ext cx="2016252" cy="274320"/>
           </a:xfrm>
           <a:prstGeom prst="roundRect">
             <a:avLst>
@@ -6821,8 +7056,8 @@
         </p:nvSpPr>
         <p:spPr>
           <a:xfrm>
-            <a:off x="5478627" y="3905504"/>
-            <a:ext cx="1234440" cy="274320"/>
+            <a:off x="5087721" y="3691386"/>
+            <a:ext cx="2016252" cy="274320"/>
           </a:xfrm>
           <a:prstGeom prst="rect">
             <a:avLst/>
@@ -6847,7 +7082,7 @@
                 </a:solidFill>
                 <a:latin typeface="Microsoft JhengHei"/>
               </a:rPr>
-              <a:t>只能改規模…</a:t>
+              <a:t>只能改規模,不能取消實驗</a:t>
             </a:r>
           </a:p>
         </p:txBody>
@@ -6860,8 +7095,8 @@
         </p:nvSpPr>
         <p:spPr>
           <a:xfrm>
-            <a:off x="4441850" y="4289552"/>
-            <a:ext cx="3307994" cy="356616"/>
+            <a:off x="4441850" y="4075434"/>
+            <a:ext cx="3307994" cy="338327"/>
           </a:xfrm>
           <a:prstGeom prst="rect">
             <a:avLst/>
@@ -6899,8 +7134,8 @@
         </p:nvSpPr>
         <p:spPr>
           <a:xfrm>
-            <a:off x="8005876" y="3155696"/>
-            <a:ext cx="3527450" cy="1618488"/>
+            <a:off x="8005876" y="2941578"/>
+            <a:ext cx="3527450" cy="1600200"/>
           </a:xfrm>
           <a:prstGeom prst="roundRect">
             <a:avLst>
@@ -6947,7 +7182,7 @@
         </p:nvSpPr>
         <p:spPr>
           <a:xfrm>
-            <a:off x="8115604" y="3283712"/>
+            <a:off x="8115604" y="3069594"/>
             <a:ext cx="3307994" cy="566928"/>
           </a:xfrm>
           <a:prstGeom prst="rect">
@@ -6986,8 +7221,8 @@
         </p:nvSpPr>
         <p:spPr>
           <a:xfrm>
-            <a:off x="9152382" y="3905504"/>
-            <a:ext cx="1234440" cy="274320"/>
+            <a:off x="9358122" y="3691386"/>
+            <a:ext cx="822960" cy="274320"/>
           </a:xfrm>
           <a:prstGeom prst="roundRect">
             <a:avLst>
@@ -7032,8 +7267,8 @@
         </p:nvSpPr>
         <p:spPr>
           <a:xfrm>
-            <a:off x="9152382" y="3905504"/>
-            <a:ext cx="1234440" cy="274320"/>
+            <a:off x="9358122" y="3691386"/>
+            <a:ext cx="822960" cy="274320"/>
           </a:xfrm>
           <a:prstGeom prst="rect">
             <a:avLst/>
@@ -7071,8 +7306,8 @@
         </p:nvSpPr>
         <p:spPr>
           <a:xfrm>
-            <a:off x="8115604" y="4289552"/>
-            <a:ext cx="3307994" cy="356616"/>
+            <a:off x="8115604" y="4075434"/>
+            <a:ext cx="3307994" cy="338327"/>
           </a:xfrm>
           <a:prstGeom prst="rect">
             <a:avLst/>
@@ -7111,8 +7346,8 @@
           <p:nvPr/>
         </p:nvGraphicFramePr>
         <p:xfrm>
-          <a:off x="658368" y="4975352"/>
-          <a:ext cx="9658806" cy="1467612"/>
+          <a:off x="658368" y="4669794"/>
+          <a:ext cx="9658806" cy="1499616"/>
         </p:xfrm>
         <a:graphic>
           <a:graphicData uri="http://schemas.openxmlformats.org/drawingml/2006/table">
@@ -7196,7 +7431,7 @@
                   </a:tcPr>
                 </a:tc>
               </a:tr>
-              <a:tr h="569214">
+              <a:tr h="292608">
                 <a:tc>
                   <a:txBody>
                     <a:bodyPr/>
@@ -7256,7 +7491,7 @@
                           </a:solidFill>
                           <a:latin typeface="Microsoft JhengHei"/>
                         </a:rPr>
-                        <a:t>現況的基準線。沒有它,後面三臂就沒有「比什麼」</a:t>
+                        <a:t>現況的基準線。沒有它,後面三臂就沒有「比…</a:t>
                       </a:r>
                     </a:p>
                   </a:txBody>
@@ -7267,7 +7502,149 @@
                   </a:tcPr>
                 </a:tc>
               </a:tr>
-              <a:tr h="569214">
+              <a:tr h="292608">
+                <a:tc>
+                  <a:txBody>
+                    <a:bodyPr/>
+                    <a:lstStyle/>
+                    <a:p>
+                      <a:pPr algn="l"/>
+                      <a:r>
+                        <a:rPr sz="1200" b="0">
+                          <a:solidFill>
+                            <a:srgbClr val="16212E"/>
+                          </a:solidFill>
+                          <a:latin typeface="Microsoft JhengHei"/>
+                        </a:rPr>
+                        <a:t>② 規則式脈絡基線</a:t>
+                      </a:r>
+                    </a:p>
+                  </a:txBody>
+                  <a:tcPr marL="45720" marR="45720" marT="18288" marB="18288" anchor="ctr">
+                    <a:solidFill>
+                      <a:srgbClr val="FFFFFF"/>
+                    </a:solidFill>
+                  </a:tcPr>
+                </a:tc>
+                <a:tc>
+                  <a:txBody>
+                    <a:bodyPr/>
+                    <a:lstStyle/>
+                    <a:p>
+                      <a:pPr algn="ctr"/>
+                      <a:r>
+                        <a:rPr sz="1200" b="0">
+                          <a:solidFill>
+                            <a:srgbClr val="6B7885"/>
+                          </a:solidFill>
+                          <a:latin typeface="Microsoft JhengHei"/>
+                        </a:rPr>
+                        <a:t>規則式脈絡層 + 人全數複核</a:t>
+                      </a:r>
+                    </a:p>
+                  </a:txBody>
+                  <a:tcPr marL="45720" marR="45720" marT="18288" marB="18288" anchor="ctr">
+                    <a:solidFill>
+                      <a:srgbClr val="FFFFFF"/>
+                    </a:solidFill>
+                  </a:tcPr>
+                </a:tc>
+                <a:tc>
+                  <a:txBody>
+                    <a:bodyPr/>
+                    <a:lstStyle/>
+                    <a:p>
+                      <a:pPr algn="ctr"/>
+                      <a:r>
+                        <a:rPr sz="1200" b="0">
+                          <a:solidFill>
+                            <a:srgbClr val="6B7885"/>
+                          </a:solidFill>
+                          <a:latin typeface="Microsoft JhengHei"/>
+                        </a:rPr>
+                        <a:t>不含模型能解掉多少誤報。它是地端 VLM 的…</a:t>
+                      </a:r>
+                    </a:p>
+                  </a:txBody>
+                  <a:tcPr marL="45720" marR="45720" marT="18288" marB="18288" anchor="ctr">
+                    <a:solidFill>
+                      <a:srgbClr val="FFFFFF"/>
+                    </a:solidFill>
+                  </a:tcPr>
+                </a:tc>
+              </a:tr>
+              <a:tr h="292608">
+                <a:tc>
+                  <a:txBody>
+                    <a:bodyPr/>
+                    <a:lstStyle/>
+                    <a:p>
+                      <a:pPr algn="l"/>
+                      <a:r>
+                        <a:rPr sz="1200" b="0">
+                          <a:solidFill>
+                            <a:srgbClr val="16212E"/>
+                          </a:solidFill>
+                          <a:latin typeface="Microsoft JhengHei"/>
+                        </a:rPr>
+                        <a:t>③ 人機協作</a:t>
+                      </a:r>
+                    </a:p>
+                  </a:txBody>
+                  <a:tcPr marL="45720" marR="45720" marT="18288" marB="18288" anchor="ctr">
+                    <a:solidFill>
+                      <a:srgbClr val="FFFFFF"/>
+                    </a:solidFill>
+                  </a:tcPr>
+                </a:tc>
+                <a:tc>
+                  <a:txBody>
+                    <a:bodyPr/>
+                    <a:lstStyle/>
+                    <a:p>
+                      <a:pPr algn="ctr"/>
+                      <a:r>
+                        <a:rPr sz="1200" b="0">
+                          <a:solidFill>
+                            <a:srgbClr val="6B7885"/>
+                          </a:solidFill>
+                          <a:latin typeface="Microsoft JhengHei"/>
+                        </a:rPr>
+                        <a:t>機器輔助、人判定</a:t>
+                      </a:r>
+                    </a:p>
+                  </a:txBody>
+                  <a:tcPr marL="45720" marR="45720" marT="18288" marB="18288" anchor="ctr">
+                    <a:solidFill>
+                      <a:srgbClr val="FFFFFF"/>
+                    </a:solidFill>
+                  </a:tcPr>
+                </a:tc>
+                <a:tc>
+                  <a:txBody>
+                    <a:bodyPr/>
+                    <a:lstStyle/>
+                    <a:p>
+                      <a:pPr algn="ctr"/>
+                      <a:r>
+                        <a:rPr sz="1200" b="0">
+                          <a:solidFill>
+                            <a:srgbClr val="6B7885"/>
+                          </a:solidFill>
+                          <a:latin typeface="Microsoft JhengHei"/>
+                        </a:rPr>
+                        <a:t>人工觸碰時間 · P90 回覆時間 · 判定品質…</a:t>
+                      </a:r>
+                    </a:p>
+                  </a:txBody>
+                  <a:tcPr marL="45720" marR="45720" marT="18288" marB="18288" anchor="ctr">
+                    <a:solidFill>
+                      <a:srgbClr val="FFFFFF"/>
+                    </a:solidFill>
+                  </a:tcPr>
+                </a:tc>
+              </a:tr>
+              <a:tr h="292608">
                 <a:tc>
                   <a:txBody>
                     <a:bodyPr/>
@@ -7304,7 +7681,7 @@
                           </a:solidFill>
                           <a:latin typeface="Microsoft JhengHei"/>
                         </a:rPr>
-                        <a:t>機器自己結案但不對外送,人照常逐筆判,兩邊比對</a:t>
+                        <a:t>機器自己結案但不對外送,人照常逐筆判,兩…</a:t>
                       </a:r>
                     </a:p>
                   </a:txBody>
@@ -7327,7 +7704,7 @@
                           </a:solidFill>
                           <a:latin typeface="Microsoft JhengHei"/>
                         </a:rPr>
-                        <a:t>🔴 自動結案桶與人工桶的漏放率差值(95% 信賴區間),對照 G1 事前預註冊的非劣性邊際 δ…</a:t>
+                        <a:t>🔴 自動結案桶與人工桶的漏放率差值(95% 信…</a:t>
                       </a:r>
                     </a:p>
                   </a:txBody>
@@ -7530,7 +7907,7 @@
         <p:spPr>
           <a:xfrm>
             <a:off x="658368" y="1783080"/>
-            <a:ext cx="45720" cy="681493"/>
+            <a:ext cx="45720" cy="771525"/>
           </a:xfrm>
           <a:prstGeom prst="rect">
             <a:avLst/>
@@ -7574,7 +7951,7 @@
         <p:spPr>
           <a:xfrm>
             <a:off x="804672" y="1755648"/>
-            <a:ext cx="2408822" cy="772933"/>
+            <a:ext cx="2408822" cy="862965"/>
           </a:xfrm>
           <a:prstGeom prst="rect">
             <a:avLst/>
@@ -7613,7 +7990,7 @@
         <p:spPr>
           <a:xfrm>
             <a:off x="3268358" y="1755648"/>
-            <a:ext cx="3152759" cy="772933"/>
+            <a:ext cx="3152759" cy="862965"/>
           </a:xfrm>
           <a:prstGeom prst="rect">
             <a:avLst/>
@@ -7652,7 +8029,7 @@
         <p:spPr>
           <a:xfrm>
             <a:off x="7183343" y="1755648"/>
-            <a:ext cx="4240255" cy="772933"/>
+            <a:ext cx="4240255" cy="862965"/>
           </a:xfrm>
           <a:prstGeom prst="rect">
             <a:avLst/>
@@ -7690,8 +8067,8 @@
         </p:nvSpPr>
         <p:spPr>
           <a:xfrm>
-            <a:off x="658368" y="2647453"/>
-            <a:ext cx="45720" cy="681493"/>
+            <a:off x="658368" y="2737485"/>
+            <a:ext cx="45720" cy="771525"/>
           </a:xfrm>
           <a:prstGeom prst="rect">
             <a:avLst/>
@@ -7734,8 +8111,8 @@
         </p:nvSpPr>
         <p:spPr>
           <a:xfrm>
-            <a:off x="804672" y="2620021"/>
-            <a:ext cx="2408822" cy="772933"/>
+            <a:off x="804672" y="2710053"/>
+            <a:ext cx="2408822" cy="862965"/>
           </a:xfrm>
           <a:prstGeom prst="rect">
             <a:avLst/>
@@ -7773,8 +8150,8 @@
         </p:nvSpPr>
         <p:spPr>
           <a:xfrm>
-            <a:off x="3268358" y="2620021"/>
-            <a:ext cx="3152759" cy="772933"/>
+            <a:off x="3268358" y="2710053"/>
+            <a:ext cx="3152759" cy="862965"/>
           </a:xfrm>
           <a:prstGeom prst="rect">
             <a:avLst/>
@@ -7812,8 +8189,8 @@
         </p:nvSpPr>
         <p:spPr>
           <a:xfrm>
-            <a:off x="7183343" y="2620021"/>
-            <a:ext cx="4240255" cy="772933"/>
+            <a:off x="7183343" y="2710053"/>
+            <a:ext cx="4240255" cy="862965"/>
           </a:xfrm>
           <a:prstGeom prst="rect">
             <a:avLst/>
@@ -7851,8 +8228,8 @@
         </p:nvSpPr>
         <p:spPr>
           <a:xfrm>
-            <a:off x="658368" y="3594122"/>
-            <a:ext cx="3527450" cy="2210363"/>
+            <a:off x="658368" y="3908403"/>
+            <a:ext cx="3527450" cy="1688360"/>
           </a:xfrm>
           <a:prstGeom prst="roundRect">
             <a:avLst>
@@ -7899,7 +8276,7 @@
         </p:nvSpPr>
         <p:spPr>
           <a:xfrm>
-            <a:off x="768096" y="3722138"/>
+            <a:off x="768096" y="4036419"/>
             <a:ext cx="3307994" cy="566928"/>
           </a:xfrm>
           <a:prstGeom prst="rect">
@@ -7938,8 +8315,8 @@
         </p:nvSpPr>
         <p:spPr>
           <a:xfrm>
-            <a:off x="1804873" y="4343930"/>
-            <a:ext cx="1234440" cy="274320"/>
+            <a:off x="1855927" y="4658211"/>
+            <a:ext cx="1132332" cy="274320"/>
           </a:xfrm>
           <a:prstGeom prst="roundRect">
             <a:avLst>
@@ -7984,8 +8361,8 @@
         </p:nvSpPr>
         <p:spPr>
           <a:xfrm>
-            <a:off x="1804873" y="4343930"/>
-            <a:ext cx="1234440" cy="274320"/>
+            <a:off x="1855927" y="4658211"/>
+            <a:ext cx="1132332" cy="274320"/>
           </a:xfrm>
           <a:prstGeom prst="rect">
             <a:avLst/>
@@ -8023,8 +8400,8 @@
         </p:nvSpPr>
         <p:spPr>
           <a:xfrm>
-            <a:off x="768096" y="4727978"/>
-            <a:ext cx="3307994" cy="948491"/>
+            <a:off x="768096" y="5042259"/>
+            <a:ext cx="3307994" cy="426488"/>
           </a:xfrm>
           <a:prstGeom prst="rect">
             <a:avLst/>
@@ -8052,22 +8429,6 @@
               <a:t>六個月整體額度輪廓 · 分段釋出</a:t>
             </a:r>
           </a:p>
-          <a:p>
-            <a:pPr algn="ctr">
-              <a:lnSpc>
-                <a:spcPct val="135000"/>
-              </a:lnSpc>
-            </a:pPr>
-            <a:r>
-              <a:rPr sz="1200" b="0">
-                <a:solidFill>
-                  <a:srgbClr val="6B7885"/>
-                </a:solidFill>
-                <a:latin typeface="Microsoft JhengHei"/>
-              </a:rPr>
-              <a:t>G1(第 6 週)由贊助人決定是否續行 —— 它決定的是要不要續行剩下的工作,不是要不要開始</a:t>
-            </a:r>
-          </a:p>
         </p:txBody>
       </p:sp>
       <p:sp>
@@ -8078,8 +8439,8 @@
         </p:nvSpPr>
         <p:spPr>
           <a:xfrm>
-            <a:off x="4332122" y="3594122"/>
-            <a:ext cx="3527450" cy="2210363"/>
+            <a:off x="4332122" y="3908403"/>
+            <a:ext cx="3527450" cy="1688360"/>
           </a:xfrm>
           <a:prstGeom prst="roundRect">
             <a:avLst>
@@ -8126,7 +8487,7 @@
         </p:nvSpPr>
         <p:spPr>
           <a:xfrm>
-            <a:off x="4441850" y="3722138"/>
+            <a:off x="4441850" y="4036419"/>
             <a:ext cx="3307994" cy="566928"/>
           </a:xfrm>
           <a:prstGeom prst="rect">
@@ -8165,8 +8526,8 @@
         </p:nvSpPr>
         <p:spPr>
           <a:xfrm>
-            <a:off x="5478627" y="4343930"/>
-            <a:ext cx="1234440" cy="274320"/>
+            <a:off x="5586831" y="4658211"/>
+            <a:ext cx="1018032" cy="274320"/>
           </a:xfrm>
           <a:prstGeom prst="roundRect">
             <a:avLst>
@@ -8211,8 +8572,8 @@
         </p:nvSpPr>
         <p:spPr>
           <a:xfrm>
-            <a:off x="5478627" y="4343930"/>
-            <a:ext cx="1234440" cy="274320"/>
+            <a:off x="5586831" y="4658211"/>
+            <a:ext cx="1018032" cy="274320"/>
           </a:xfrm>
           <a:prstGeom prst="rect">
             <a:avLst/>
@@ -8250,8 +8611,8 @@
         </p:nvSpPr>
         <p:spPr>
           <a:xfrm>
-            <a:off x="4441850" y="4727978"/>
-            <a:ext cx="3307994" cy="948491"/>
+            <a:off x="4441850" y="5042259"/>
+            <a:ext cx="3307994" cy="426488"/>
           </a:xfrm>
           <a:prstGeom prst="rect">
             <a:avLst/>
@@ -8276,7 +8637,7 @@
                 </a:solidFill>
                 <a:latin typeface="Microsoft JhengHei"/>
               </a:rPr>
-              <a:t>六方當責:項目贊助人 · 業務負責人 · 數據負責人 · 技術負責人 · 複核營運主管 · 專案負責人(提案人)。每個工作包只有一個 A;三道決策…</a:t>
+              <a:t>六方當責:項目贊助人 · 業務負責人 · 數據…</a:t>
             </a:r>
           </a:p>
         </p:txBody>
@@ -8289,8 +8650,8 @@
         </p:nvSpPr>
         <p:spPr>
           <a:xfrm>
-            <a:off x="8005876" y="3594122"/>
-            <a:ext cx="3527450" cy="2210363"/>
+            <a:off x="8005876" y="3908403"/>
+            <a:ext cx="3527450" cy="1688360"/>
           </a:xfrm>
           <a:prstGeom prst="roundRect">
             <a:avLst>
@@ -8337,7 +8698,7 @@
         </p:nvSpPr>
         <p:spPr>
           <a:xfrm>
-            <a:off x="8115604" y="3722138"/>
+            <a:off x="8115604" y="4036419"/>
             <a:ext cx="3307994" cy="566928"/>
           </a:xfrm>
           <a:prstGeom prst="rect">
@@ -8376,8 +8737,8 @@
         </p:nvSpPr>
         <p:spPr>
           <a:xfrm>
-            <a:off x="9152382" y="4343930"/>
-            <a:ext cx="1234440" cy="274320"/>
+            <a:off x="9336786" y="4658211"/>
+            <a:ext cx="865632" cy="274320"/>
           </a:xfrm>
           <a:prstGeom prst="roundRect">
             <a:avLst>
@@ -8422,8 +8783,8 @@
         </p:nvSpPr>
         <p:spPr>
           <a:xfrm>
-            <a:off x="9152382" y="4343930"/>
-            <a:ext cx="1234440" cy="274320"/>
+            <a:off x="9336786" y="4658211"/>
+            <a:ext cx="865632" cy="274320"/>
           </a:xfrm>
           <a:prstGeom prst="rect">
             <a:avLst/>
@@ -8461,8 +8822,8 @@
         </p:nvSpPr>
         <p:spPr>
           <a:xfrm>
-            <a:off x="8115604" y="4727978"/>
-            <a:ext cx="3307994" cy="948491"/>
+            <a:off x="8115604" y="5042259"/>
+            <a:ext cx="3307994" cy="426488"/>
           </a:xfrm>
           <a:prstGeom prst="rect">
             <a:avLst/>
@@ -8487,7 +8848,7 @@
                 </a:solidFill>
                 <a:latin typeface="Microsoft JhengHei"/>
               </a:rPr>
-              <a:t>委員會手上會多三樣東西:① 一份可稽核的錯誤率 ② 一層把畫面外脈絡帶進事件的判斷層 ③ 一份證明或推翻「脈絡到底有沒有用」的對照實驗結果</a:t>
+              <a:t>委員會手上會多三樣東西:① 一份可稽核的錯…</a:t>
             </a:r>
           </a:p>
         </p:txBody>
@@ -8500,8 +8861,8 @@
         </p:nvSpPr>
         <p:spPr>
           <a:xfrm>
-            <a:off x="658368" y="6005654"/>
-            <a:ext cx="9658807" cy="468297"/>
+            <a:off x="658368" y="5724780"/>
+            <a:ext cx="9658807" cy="785747"/>
           </a:xfrm>
           <a:prstGeom prst="roundRect">
             <a:avLst>
@@ -8546,8 +8907,8 @@
         </p:nvSpPr>
         <p:spPr>
           <a:xfrm>
-            <a:off x="841247" y="6005654"/>
-            <a:ext cx="9293047" cy="468297"/>
+            <a:off x="841247" y="5724780"/>
+            <a:ext cx="9293047" cy="785747"/>
           </a:xfrm>
           <a:prstGeom prst="rect">
             <a:avLst/>
@@ -8572,7 +8933,7 @@
                 </a:solidFill>
                 <a:latin typeface="Microsoft JhengHei"/>
               </a:rPr>
-              <a:t>放行條件(本案的損益兩平門檻):① 若公司選擇以現行流程覆蓋全客戶,年度擴編暴露約 NT$1…</a:t>
+              <a:t>放行條件(本案的損益兩平門檻):① 若公司選擇以現行流程覆蓋全客戶,年度擴編暴露約 NT$1,248–2,223 萬 —— 這是反事實成本暴露,不是本案承諾的節省。② 完整專案的人力成本約等於 1.…</a:t>
             </a:r>
           </a:p>
         </p:txBody>
@@ -9373,7 +9734,7 @@
         <p:spPr>
           <a:xfrm>
             <a:off x="658368" y="1755648"/>
-            <a:ext cx="3527450" cy="1641283"/>
+            <a:ext cx="3527450" cy="1714611"/>
           </a:xfrm>
           <a:prstGeom prst="roundRect">
             <a:avLst>
@@ -9459,8 +9820,8 @@
         </p:nvSpPr>
         <p:spPr>
           <a:xfrm>
-            <a:off x="1804873" y="2505456"/>
-            <a:ext cx="1234440" cy="274320"/>
+            <a:off x="1905457" y="2505456"/>
+            <a:ext cx="1033271" cy="274320"/>
           </a:xfrm>
           <a:prstGeom prst="roundRect">
             <a:avLst>
@@ -9505,8 +9866,8 @@
         </p:nvSpPr>
         <p:spPr>
           <a:xfrm>
-            <a:off x="1804873" y="2505456"/>
-            <a:ext cx="1234440" cy="274320"/>
+            <a:off x="1905457" y="2505456"/>
+            <a:ext cx="1033271" cy="274320"/>
           </a:xfrm>
           <a:prstGeom prst="rect">
             <a:avLst/>
@@ -9545,7 +9906,7 @@
         <p:spPr>
           <a:xfrm>
             <a:off x="768096" y="2889503"/>
-            <a:ext cx="3307994" cy="379411"/>
+            <a:ext cx="3307994" cy="452739"/>
           </a:xfrm>
           <a:prstGeom prst="rect">
             <a:avLst/>
@@ -9584,7 +9945,7 @@
         <p:spPr>
           <a:xfrm>
             <a:off x="4332122" y="1755648"/>
-            <a:ext cx="3527450" cy="1641283"/>
+            <a:ext cx="3527450" cy="1714611"/>
           </a:xfrm>
           <a:prstGeom prst="roundRect">
             <a:avLst>
@@ -9670,8 +10031,8 @@
         </p:nvSpPr>
         <p:spPr>
           <a:xfrm>
-            <a:off x="5478627" y="2505456"/>
-            <a:ext cx="1234440" cy="274320"/>
+            <a:off x="5579211" y="2505456"/>
+            <a:ext cx="1033271" cy="274320"/>
           </a:xfrm>
           <a:prstGeom prst="roundRect">
             <a:avLst>
@@ -9716,8 +10077,8 @@
         </p:nvSpPr>
         <p:spPr>
           <a:xfrm>
-            <a:off x="5478627" y="2505456"/>
-            <a:ext cx="1234440" cy="274320"/>
+            <a:off x="5579211" y="2505456"/>
+            <a:ext cx="1033271" cy="274320"/>
           </a:xfrm>
           <a:prstGeom prst="rect">
             <a:avLst/>
@@ -9756,7 +10117,7 @@
         <p:spPr>
           <a:xfrm>
             <a:off x="4441850" y="2889503"/>
-            <a:ext cx="3307994" cy="379411"/>
+            <a:ext cx="3307994" cy="452739"/>
           </a:xfrm>
           <a:prstGeom prst="rect">
             <a:avLst/>
@@ -9795,7 +10156,7 @@
         <p:spPr>
           <a:xfrm>
             <a:off x="8005876" y="1755648"/>
-            <a:ext cx="3527450" cy="1641283"/>
+            <a:ext cx="3527450" cy="1714611"/>
           </a:xfrm>
           <a:prstGeom prst="roundRect">
             <a:avLst>
@@ -9881,8 +10242,8 @@
         </p:nvSpPr>
         <p:spPr>
           <a:xfrm>
-            <a:off x="9152382" y="2505456"/>
-            <a:ext cx="1234440" cy="274320"/>
+            <a:off x="9176766" y="2505456"/>
+            <a:ext cx="1185672" cy="274320"/>
           </a:xfrm>
           <a:prstGeom prst="roundRect">
             <a:avLst>
@@ -9927,8 +10288,8 @@
         </p:nvSpPr>
         <p:spPr>
           <a:xfrm>
-            <a:off x="9152382" y="2505456"/>
-            <a:ext cx="1234440" cy="274320"/>
+            <a:off x="9176766" y="2505456"/>
+            <a:ext cx="1185672" cy="274320"/>
           </a:xfrm>
           <a:prstGeom prst="rect">
             <a:avLst/>
@@ -9967,7 +10328,7 @@
         <p:spPr>
           <a:xfrm>
             <a:off x="8115604" y="2889503"/>
-            <a:ext cx="3307994" cy="379411"/>
+            <a:ext cx="3307994" cy="452739"/>
           </a:xfrm>
           <a:prstGeom prst="rect">
             <a:avLst/>
@@ -10005,8 +10366,8 @@
         </p:nvSpPr>
         <p:spPr>
           <a:xfrm>
-            <a:off x="658368" y="3598099"/>
-            <a:ext cx="5300319" cy="1020006"/>
+            <a:off x="658368" y="3598275"/>
+            <a:ext cx="5300319" cy="1082956"/>
           </a:xfrm>
           <a:prstGeom prst="roundRect">
             <a:avLst>
@@ -10053,7 +10414,7 @@
         </p:nvSpPr>
         <p:spPr>
           <a:xfrm>
-            <a:off x="804672" y="3744403"/>
+            <a:off x="804672" y="3744579"/>
             <a:ext cx="5007711" cy="384048"/>
           </a:xfrm>
           <a:prstGeom prst="rect">
@@ -10092,8 +10453,8 @@
         </p:nvSpPr>
         <p:spPr>
           <a:xfrm>
-            <a:off x="804672" y="4238179"/>
-            <a:ext cx="5007711" cy="197046"/>
+            <a:off x="804672" y="4238355"/>
+            <a:ext cx="5007711" cy="259996"/>
           </a:xfrm>
           <a:prstGeom prst="rect">
             <a:avLst/>
@@ -10131,8 +10492,8 @@
         </p:nvSpPr>
         <p:spPr>
           <a:xfrm>
-            <a:off x="6233007" y="3598099"/>
-            <a:ext cx="5300319" cy="1020006"/>
+            <a:off x="6233007" y="3598275"/>
+            <a:ext cx="5300319" cy="1082956"/>
           </a:xfrm>
           <a:prstGeom prst="roundRect">
             <a:avLst>
@@ -10179,7 +10540,7 @@
         </p:nvSpPr>
         <p:spPr>
           <a:xfrm>
-            <a:off x="6379311" y="3744403"/>
+            <a:off x="6379311" y="3744579"/>
             <a:ext cx="5007711" cy="384048"/>
           </a:xfrm>
           <a:prstGeom prst="rect">
@@ -10218,8 +10579,8 @@
         </p:nvSpPr>
         <p:spPr>
           <a:xfrm>
-            <a:off x="6379311" y="4238179"/>
-            <a:ext cx="5007711" cy="197046"/>
+            <a:off x="6379311" y="4238355"/>
+            <a:ext cx="5007711" cy="259996"/>
           </a:xfrm>
           <a:prstGeom prst="rect">
             <a:avLst/>
@@ -10257,7 +10618,7 @@
         </p:nvSpPr>
         <p:spPr>
           <a:xfrm>
-            <a:off x="658368" y="4691258"/>
+            <a:off x="658368" y="4754384"/>
             <a:ext cx="10874959" cy="347472"/>
           </a:xfrm>
           <a:prstGeom prst="rect">
@@ -10296,7 +10657,7 @@
         </p:nvSpPr>
         <p:spPr>
           <a:xfrm>
-            <a:off x="658368" y="5285618"/>
+            <a:off x="658368" y="5275592"/>
             <a:ext cx="45720" cy="321468"/>
           </a:xfrm>
           <a:prstGeom prst="rect">
@@ -10340,7 +10701,7 @@
         </p:nvSpPr>
         <p:spPr>
           <a:xfrm>
-            <a:off x="804672" y="5258186"/>
+            <a:off x="804672" y="5248160"/>
             <a:ext cx="2116945" cy="412908"/>
           </a:xfrm>
           <a:prstGeom prst="rect">
@@ -10379,7 +10740,7 @@
         </p:nvSpPr>
         <p:spPr>
           <a:xfrm>
-            <a:off x="2976481" y="5258186"/>
+            <a:off x="2976481" y="5248160"/>
             <a:ext cx="2787914" cy="412908"/>
           </a:xfrm>
           <a:prstGeom prst="rect">
@@ -10418,7 +10779,7 @@
         </p:nvSpPr>
         <p:spPr>
           <a:xfrm>
-            <a:off x="6453652" y="5258186"/>
+            <a:off x="6453652" y="5248160"/>
             <a:ext cx="3753794" cy="412908"/>
           </a:xfrm>
           <a:prstGeom prst="rect">
@@ -10457,8 +10818,8 @@
         </p:nvSpPr>
         <p:spPr>
           <a:xfrm>
-            <a:off x="658368" y="5789967"/>
-            <a:ext cx="45720" cy="470722"/>
+            <a:off x="658368" y="5779940"/>
+            <a:ext cx="45720" cy="494023"/>
           </a:xfrm>
           <a:prstGeom prst="rect">
             <a:avLst/>
@@ -10501,8 +10862,8 @@
         </p:nvSpPr>
         <p:spPr>
           <a:xfrm>
-            <a:off x="804672" y="5762535"/>
-            <a:ext cx="2116945" cy="562162"/>
+            <a:off x="804672" y="5752508"/>
+            <a:ext cx="2116945" cy="585463"/>
           </a:xfrm>
           <a:prstGeom prst="rect">
             <a:avLst/>
@@ -10540,8 +10901,8 @@
         </p:nvSpPr>
         <p:spPr>
           <a:xfrm>
-            <a:off x="2976481" y="5762535"/>
-            <a:ext cx="2787914" cy="562162"/>
+            <a:off x="2976481" y="5752508"/>
+            <a:ext cx="2787914" cy="585463"/>
           </a:xfrm>
           <a:prstGeom prst="rect">
             <a:avLst/>
@@ -10579,8 +10940,8 @@
         </p:nvSpPr>
         <p:spPr>
           <a:xfrm>
-            <a:off x="6453652" y="5762535"/>
-            <a:ext cx="3753794" cy="562162"/>
+            <a:off x="6453652" y="5752508"/>
+            <a:ext cx="3753794" cy="585463"/>
           </a:xfrm>
           <a:prstGeom prst="rect">
             <a:avLst/>
@@ -11539,7 +11900,7 @@
         </p:nvSpPr>
         <p:spPr>
           <a:xfrm>
-            <a:off x="658368" y="3419856"/>
+            <a:off x="658368" y="2839136"/>
             <a:ext cx="10874959" cy="274320"/>
           </a:xfrm>
           <a:prstGeom prst="rect">
@@ -11578,8 +11939,8 @@
         </p:nvSpPr>
         <p:spPr>
           <a:xfrm>
-            <a:off x="658368" y="4040171"/>
-            <a:ext cx="10874959" cy="420998"/>
+            <a:off x="658368" y="3241472"/>
+            <a:ext cx="10874959" cy="872354"/>
           </a:xfrm>
           <a:prstGeom prst="roundRect">
             <a:avLst>
@@ -11624,8 +11985,8 @@
         </p:nvSpPr>
         <p:spPr>
           <a:xfrm>
-            <a:off x="841247" y="4040171"/>
-            <a:ext cx="10509199" cy="420998"/>
+            <a:off x="841247" y="3241472"/>
+            <a:ext cx="10509199" cy="872354"/>
           </a:xfrm>
           <a:prstGeom prst="rect">
             <a:avLst/>
@@ -11650,7 +12011,7 @@
                 </a:solidFill>
                 <a:latin typeface="Microsoft JhengHei"/>
               </a:rPr>
-              <a:t>這兩段之所以慢,是同一個原因:模型看不到畫面外的東西 —— 撈數據慢,是因為人要自己去查那個位置與那…</a:t>
+              <a:t>這兩段之所以慢,是同一個原因:模型看不到畫面外的東西 —— 撈數據慢,是因為人要自己去查那個位置與那段路的速限;判讀慢,是因為模型只拿到一張圖。</a:t>
             </a:r>
           </a:p>
         </p:txBody>
@@ -11663,8 +12024,8 @@
         </p:nvSpPr>
         <p:spPr>
           <a:xfrm>
-            <a:off x="658368" y="4689770"/>
-            <a:ext cx="45720" cy="768646"/>
+            <a:off x="658368" y="4269275"/>
+            <a:ext cx="45720" cy="964406"/>
           </a:xfrm>
           <a:prstGeom prst="rect">
             <a:avLst/>
@@ -11707,8 +12068,8 @@
         </p:nvSpPr>
         <p:spPr>
           <a:xfrm>
-            <a:off x="804672" y="4662338"/>
-            <a:ext cx="2116945" cy="860086"/>
+            <a:off x="804672" y="4241843"/>
+            <a:ext cx="2116945" cy="1055846"/>
           </a:xfrm>
           <a:prstGeom prst="rect">
             <a:avLst/>
@@ -11746,8 +12107,8 @@
         </p:nvSpPr>
         <p:spPr>
           <a:xfrm>
-            <a:off x="2976481" y="4662338"/>
-            <a:ext cx="2787914" cy="860086"/>
+            <a:off x="2976481" y="4241843"/>
+            <a:ext cx="2787914" cy="1055846"/>
           </a:xfrm>
           <a:prstGeom prst="rect">
             <a:avLst/>
@@ -11785,8 +12146,8 @@
         </p:nvSpPr>
         <p:spPr>
           <a:xfrm>
-            <a:off x="6453652" y="4662338"/>
-            <a:ext cx="3753794" cy="860086"/>
+            <a:off x="6453652" y="4241843"/>
+            <a:ext cx="3753794" cy="1055846"/>
           </a:xfrm>
           <a:prstGeom prst="rect">
             <a:avLst/>
@@ -11824,8 +12185,8 @@
         </p:nvSpPr>
         <p:spPr>
           <a:xfrm>
-            <a:off x="658368" y="5641297"/>
-            <a:ext cx="45720" cy="768646"/>
+            <a:off x="658368" y="5416561"/>
+            <a:ext cx="45720" cy="771525"/>
           </a:xfrm>
           <a:prstGeom prst="rect">
             <a:avLst/>
@@ -11868,8 +12229,8 @@
         </p:nvSpPr>
         <p:spPr>
           <a:xfrm>
-            <a:off x="804672" y="5613865"/>
-            <a:ext cx="2116945" cy="860086"/>
+            <a:off x="804672" y="5389129"/>
+            <a:ext cx="2116945" cy="862965"/>
           </a:xfrm>
           <a:prstGeom prst="rect">
             <a:avLst/>
@@ -11907,8 +12268,8 @@
         </p:nvSpPr>
         <p:spPr>
           <a:xfrm>
-            <a:off x="2976481" y="5613865"/>
-            <a:ext cx="2787914" cy="860086"/>
+            <a:off x="2976481" y="5389129"/>
+            <a:ext cx="2787914" cy="862965"/>
           </a:xfrm>
           <a:prstGeom prst="rect">
             <a:avLst/>
@@ -11946,8 +12307,8 @@
         </p:nvSpPr>
         <p:spPr>
           <a:xfrm>
-            <a:off x="6453652" y="5613865"/>
-            <a:ext cx="3753794" cy="860086"/>
+            <a:off x="6453652" y="5389129"/>
+            <a:ext cx="3753794" cy="862965"/>
           </a:xfrm>
           <a:prstGeom prst="rect">
             <a:avLst/>
@@ -12165,7 +12526,7 @@
         <p:spPr>
           <a:xfrm>
             <a:off x="658368" y="1755648"/>
-            <a:ext cx="10874959" cy="404039"/>
+            <a:ext cx="10874959" cy="846399"/>
           </a:xfrm>
           <a:prstGeom prst="roundRect">
             <a:avLst>
@@ -12211,7 +12572,7 @@
         <p:spPr>
           <a:xfrm>
             <a:off x="841247" y="1755648"/>
-            <a:ext cx="10509199" cy="404039"/>
+            <a:ext cx="10509199" cy="846399"/>
           </a:xfrm>
           <a:prstGeom prst="rect">
             <a:avLst/>
@@ -12236,7 +12597,7 @@
                 </a:solidFill>
                 <a:latin typeface="Microsoft JhengHei"/>
               </a:rPr>
-              <a:t>樣本:4 台車 · 23 天 · 1,647 筆 = 一個小型車隊、一個月 —— 以下所有比例僅在此樣本內成立。這一…</a:t>
+              <a:t>樣本:4 台車 · 23 天 · 1,647 筆 = 一個小型車隊、一個月 —— 以下所有比例僅在此樣本內成立。這一件的分析段:5 位專職分析人員並行 3.6 個工作日 = 144 人時(不含整理與回信)。</a:t>
             </a:r>
           </a:p>
         </p:txBody>
@@ -12250,8 +12611,8 @@
           <p:nvPr/>
         </p:nvGraphicFramePr>
         <p:xfrm>
-          <a:off x="658368" y="2360855"/>
-          <a:ext cx="10874957" cy="2146554"/>
+          <a:off x="658368" y="2730063"/>
+          <a:ext cx="10874957" cy="2084832"/>
         </p:xfrm>
         <a:graphic>
           <a:graphicData uri="http://schemas.openxmlformats.org/drawingml/2006/table">
@@ -12335,7 +12696,7 @@
                   </a:tcPr>
                 </a:tc>
               </a:tr>
-              <a:tr h="312039">
+              <a:tr h="292608">
                 <a:tc>
                   <a:txBody>
                     <a:bodyPr/>
@@ -12406,7 +12767,7 @@
                   </a:tcPr>
                 </a:tc>
               </a:tr>
-              <a:tr h="312039">
+              <a:tr h="292608">
                 <a:tc>
                   <a:txBody>
                     <a:bodyPr/>
@@ -12477,7 +12838,7 @@
                   </a:tcPr>
                 </a:tc>
               </a:tr>
-              <a:tr h="312039">
+              <a:tr h="292608">
                 <a:tc>
                   <a:txBody>
                     <a:bodyPr/>
@@ -12548,7 +12909,7 @@
                   </a:tcPr>
                 </a:tc>
               </a:tr>
-              <a:tr h="569214">
+              <a:tr h="292608">
                 <a:tc>
                   <a:txBody>
                     <a:bodyPr/>
@@ -12585,7 +12946,7 @@
                           </a:solidFill>
                           <a:latin typeface="Microsoft JhengHei"/>
                         </a:rPr>
-                        <a:t>尺的一致性我們從來沒量過 —— 不比誰準,只指出錯的性質不同</a:t>
+                        <a:t>尺的一致性我們從來沒量過 —— 不比誰準,只指出錯…</a:t>
                       </a:r>
                     </a:p>
                   </a:txBody>
@@ -12619,7 +12980,7 @@
                   </a:tcPr>
                 </a:tc>
               </a:tr>
-              <a:tr h="312039">
+              <a:tr h="292608">
                 <a:tc>
                   <a:txBody>
                     <a:bodyPr/>
@@ -12690,6 +13051,77 @@
                   </a:tcPr>
                 </a:tc>
               </a:tr>
+              <a:tr h="292608">
+                <a:tc>
+                  <a:txBody>
+                    <a:bodyPr/>
+                    <a:lstStyle/>
+                    <a:p>
+                      <a:pPr algn="l"/>
+                      <a:r>
+                        <a:rPr sz="1200" b="0">
+                          <a:solidFill>
+                            <a:srgbClr val="16212E"/>
+                          </a:solidFill>
+                          <a:latin typeface="Microsoft JhengHei"/>
+                        </a:rPr>
+                        <a:t>缺口</a:t>
+                      </a:r>
+                    </a:p>
+                  </a:txBody>
+                  <a:tcPr marL="45720" marR="45720" marT="18288" marB="18288" anchor="ctr">
+                    <a:solidFill>
+                      <a:srgbClr val="FFFFFF"/>
+                    </a:solidFill>
+                  </a:tcPr>
+                </a:tc>
+                <a:tc>
+                  <a:txBody>
+                    <a:bodyPr/>
+                    <a:lstStyle/>
+                    <a:p>
+                      <a:pPr algn="ctr"/>
+                      <a:r>
+                        <a:rPr sz="1200" b="0">
+                          <a:solidFill>
+                            <a:srgbClr val="6B7885"/>
+                          </a:solidFill>
+                          <a:latin typeface="Microsoft JhengHei"/>
+                        </a:rPr>
+                        <a:t>脈絡:判定依據不在畫面裡</a:t>
+                      </a:r>
+                    </a:p>
+                  </a:txBody>
+                  <a:tcPr marL="45720" marR="45720" marT="18288" marB="18288" anchor="ctr">
+                    <a:solidFill>
+                      <a:srgbClr val="FFFFFF"/>
+                    </a:solidFill>
+                  </a:tcPr>
+                </a:tc>
+                <a:tc>
+                  <a:txBody>
+                    <a:bodyPr/>
+                    <a:lstStyle/>
+                    <a:p>
+                      <a:pPr algn="ctr"/>
+                      <a:r>
+                        <a:rPr sz="1200" b="0">
+                          <a:solidFill>
+                            <a:srgbClr val="6B7885"/>
+                          </a:solidFill>
+                          <a:latin typeface="Microsoft JhengHei"/>
+                        </a:rPr>
+                        <a:t>判準:同一段影片,不同複核者給不同標籤</a:t>
+                      </a:r>
+                    </a:p>
+                  </a:txBody>
+                  <a:tcPr marL="45720" marR="45720" marT="18288" marB="18288" anchor="ctr">
+                    <a:solidFill>
+                      <a:srgbClr val="FFFFFF"/>
+                    </a:solidFill>
+                  </a:tcPr>
+                </a:tc>
+              </a:tr>
             </a:tbl>
           </a:graphicData>
         </a:graphic>
@@ -12702,8 +13134,8 @@
         </p:nvSpPr>
         <p:spPr>
           <a:xfrm>
-            <a:off x="658368" y="4762749"/>
-            <a:ext cx="45720" cy="642937"/>
+            <a:off x="658368" y="5038959"/>
+            <a:ext cx="45720" cy="612340"/>
           </a:xfrm>
           <a:prstGeom prst="rect">
             <a:avLst/>
@@ -12746,8 +13178,8 @@
         </p:nvSpPr>
         <p:spPr>
           <a:xfrm>
-            <a:off x="804672" y="4735317"/>
-            <a:ext cx="2116945" cy="734377"/>
+            <a:off x="804672" y="5011527"/>
+            <a:ext cx="2116945" cy="703780"/>
           </a:xfrm>
           <a:prstGeom prst="rect">
             <a:avLst/>
@@ -12785,8 +13217,8 @@
         </p:nvSpPr>
         <p:spPr>
           <a:xfrm>
-            <a:off x="2976481" y="4735317"/>
-            <a:ext cx="2787914" cy="734377"/>
+            <a:off x="2976481" y="5011527"/>
+            <a:ext cx="2787914" cy="703780"/>
           </a:xfrm>
           <a:prstGeom prst="rect">
             <a:avLst/>
@@ -12824,8 +13256,8 @@
         </p:nvSpPr>
         <p:spPr>
           <a:xfrm>
-            <a:off x="6453652" y="4735317"/>
-            <a:ext cx="3753794" cy="734377"/>
+            <a:off x="6453652" y="5011527"/>
+            <a:ext cx="3753794" cy="703780"/>
           </a:xfrm>
           <a:prstGeom prst="rect">
             <a:avLst/>
@@ -12863,7 +13295,7 @@
         </p:nvSpPr>
         <p:spPr>
           <a:xfrm>
-            <a:off x="658368" y="5588566"/>
+            <a:off x="658368" y="5834179"/>
             <a:ext cx="45720" cy="321468"/>
           </a:xfrm>
           <a:prstGeom prst="rect">
@@ -12907,7 +13339,7 @@
         </p:nvSpPr>
         <p:spPr>
           <a:xfrm>
-            <a:off x="804672" y="5561134"/>
+            <a:off x="804672" y="5806747"/>
             <a:ext cx="2116945" cy="412908"/>
           </a:xfrm>
           <a:prstGeom prst="rect">
@@ -12946,7 +13378,7 @@
         </p:nvSpPr>
         <p:spPr>
           <a:xfrm>
-            <a:off x="2976481" y="5561134"/>
+            <a:off x="2976481" y="5806747"/>
             <a:ext cx="2787914" cy="412908"/>
           </a:xfrm>
           <a:prstGeom prst="rect">
@@ -12985,7 +13417,7 @@
         </p:nvSpPr>
         <p:spPr>
           <a:xfrm>
-            <a:off x="6453652" y="5561134"/>
+            <a:off x="6453652" y="5806747"/>
             <a:ext cx="3753794" cy="412908"/>
           </a:xfrm>
           <a:prstGeom prst="rect">
@@ -13204,7 +13636,7 @@
         <p:spPr>
           <a:xfrm>
             <a:off x="658368" y="1755648"/>
-            <a:ext cx="5300319" cy="1062294"/>
+            <a:ext cx="5300319" cy="1099095"/>
           </a:xfrm>
           <a:prstGeom prst="roundRect">
             <a:avLst>
@@ -13291,7 +13723,7 @@
         <p:spPr>
           <a:xfrm>
             <a:off x="804672" y="2395728"/>
-            <a:ext cx="5007711" cy="239334"/>
+            <a:ext cx="5007711" cy="276135"/>
           </a:xfrm>
           <a:prstGeom prst="rect">
             <a:avLst/>
@@ -13330,7 +13762,7 @@
         <p:spPr>
           <a:xfrm>
             <a:off x="6233007" y="1755648"/>
-            <a:ext cx="5300319" cy="1062294"/>
+            <a:ext cx="5300319" cy="1099095"/>
           </a:xfrm>
           <a:prstGeom prst="roundRect">
             <a:avLst>
@@ -13417,7 +13849,7 @@
         <p:spPr>
           <a:xfrm>
             <a:off x="6379311" y="2395728"/>
-            <a:ext cx="5007711" cy="239334"/>
+            <a:ext cx="5007711" cy="276135"/>
           </a:xfrm>
           <a:prstGeom prst="rect">
             <a:avLst/>
@@ -13455,7 +13887,7 @@
         </p:nvSpPr>
         <p:spPr>
           <a:xfrm>
-            <a:off x="658368" y="2891094"/>
+            <a:off x="658368" y="2927895"/>
             <a:ext cx="10874959" cy="347472"/>
           </a:xfrm>
           <a:prstGeom prst="rect">
@@ -13494,7 +13926,7 @@
         </p:nvSpPr>
         <p:spPr>
           <a:xfrm>
-            <a:off x="658368" y="3485454"/>
+            <a:off x="658368" y="3449103"/>
             <a:ext cx="45720" cy="321468"/>
           </a:xfrm>
           <a:prstGeom prst="rect">
@@ -13538,7 +13970,7 @@
         </p:nvSpPr>
         <p:spPr>
           <a:xfrm>
-            <a:off x="804672" y="3458022"/>
+            <a:off x="804672" y="3421671"/>
             <a:ext cx="2408822" cy="412908"/>
           </a:xfrm>
           <a:prstGeom prst="rect">
@@ -13577,7 +14009,7 @@
         </p:nvSpPr>
         <p:spPr>
           <a:xfrm>
-            <a:off x="3268358" y="3458022"/>
+            <a:off x="3268358" y="3421671"/>
             <a:ext cx="3152759" cy="412908"/>
           </a:xfrm>
           <a:prstGeom prst="rect">
@@ -13616,7 +14048,7 @@
         </p:nvSpPr>
         <p:spPr>
           <a:xfrm>
-            <a:off x="7183343" y="3458022"/>
+            <a:off x="7183343" y="3421671"/>
             <a:ext cx="4240255" cy="412908"/>
           </a:xfrm>
           <a:prstGeom prst="rect">
@@ -13655,8 +14087,8 @@
         </p:nvSpPr>
         <p:spPr>
           <a:xfrm>
-            <a:off x="658368" y="3989803"/>
-            <a:ext cx="45720" cy="488342"/>
+            <a:off x="658368" y="3953452"/>
+            <a:ext cx="45720" cy="562074"/>
           </a:xfrm>
           <a:prstGeom prst="rect">
             <a:avLst/>
@@ -13699,8 +14131,8 @@
         </p:nvSpPr>
         <p:spPr>
           <a:xfrm>
-            <a:off x="804672" y="3962371"/>
-            <a:ext cx="2408822" cy="579782"/>
+            <a:off x="804672" y="3926020"/>
+            <a:ext cx="2408822" cy="653514"/>
           </a:xfrm>
           <a:prstGeom prst="rect">
             <a:avLst/>
@@ -13738,8 +14170,8 @@
         </p:nvSpPr>
         <p:spPr>
           <a:xfrm>
-            <a:off x="3268358" y="3962371"/>
-            <a:ext cx="3152759" cy="579782"/>
+            <a:off x="3268358" y="3926020"/>
+            <a:ext cx="3152759" cy="653514"/>
           </a:xfrm>
           <a:prstGeom prst="rect">
             <a:avLst/>
@@ -13777,8 +14209,8 @@
         </p:nvSpPr>
         <p:spPr>
           <a:xfrm>
-            <a:off x="7183343" y="3962371"/>
-            <a:ext cx="4240255" cy="579782"/>
+            <a:off x="7183343" y="3926020"/>
+            <a:ext cx="4240255" cy="653514"/>
           </a:xfrm>
           <a:prstGeom prst="rect">
             <a:avLst/>
@@ -13817,8 +14249,8 @@
           <p:nvPr/>
         </p:nvGraphicFramePr>
         <p:xfrm>
-          <a:off x="658368" y="4910195"/>
-          <a:ext cx="9658805" cy="1467612"/>
+          <a:off x="658368" y="4948157"/>
+          <a:ext cx="9658805" cy="1207008"/>
         </p:xfrm>
         <a:graphic>
           <a:graphicData uri="http://schemas.openxmlformats.org/drawingml/2006/table">
@@ -13926,7 +14358,7 @@
                   </a:tcPr>
                 </a:tc>
               </a:tr>
-              <a:tr h="569214">
+              <a:tr h="292608">
                 <a:tc>
                   <a:txBody>
                     <a:bodyPr/>
@@ -13963,7 +14395,7 @@
                           </a:solidFill>
                           <a:latin typeface="Microsoft JhengHei"/>
                         </a:rPr>
-                        <a:t>裝置離線與鏡頭遮蔽時段無資料;事件分批上傳、頻率不一</a:t>
+                        <a:t>裝置離線與鏡頭遮蔽時段無…</a:t>
                       </a:r>
                     </a:p>
                   </a:txBody>
@@ -14009,7 +14441,7 @@
                           </a:solidFill>
                           <a:latin typeface="Microsoft JhengHei"/>
                         </a:rPr>
-                        <a:t>W1-6 評估底座:分層抽樣 + 冷凍評估集</a:t>
+                        <a:t>W1-6 評估底座:分層抽樣 …</a:t>
                       </a:r>
                     </a:p>
                   </a:txBody>
@@ -14020,7 +14452,101 @@
                   </a:tcPr>
                 </a:tc>
               </a:tr>
-              <a:tr h="569214">
+              <a:tr h="292608">
+                <a:tc>
+                  <a:txBody>
+                    <a:bodyPr/>
+                    <a:lstStyle/>
+                    <a:p>
+                      <a:pPr algn="l"/>
+                      <a:r>
+                        <a:rPr sz="1200" b="0">
+                          <a:solidFill>
+                            <a:srgbClr val="16212E"/>
+                          </a:solidFill>
+                          <a:latin typeface="Microsoft JhengHei"/>
+                        </a:rPr>
+                        <a:t>處理</a:t>
+                      </a:r>
+                    </a:p>
+                  </a:txBody>
+                  <a:tcPr marL="45720" marR="45720" marT="18288" marB="18288" anchor="ctr">
+                    <a:solidFill>
+                      <a:srgbClr val="FFFFFF"/>
+                    </a:solidFill>
+                  </a:tcPr>
+                </a:tc>
+                <a:tc>
+                  <a:txBody>
+                    <a:bodyPr/>
+                    <a:lstStyle/>
+                    <a:p>
+                      <a:pPr algn="ctr"/>
+                      <a:r>
+                        <a:rPr sz="1200" b="0">
+                          <a:solidFill>
+                            <a:srgbClr val="6B7885"/>
+                          </a:solidFill>
+                          <a:latin typeface="Microsoft JhengHei"/>
+                        </a:rPr>
+                        <a:t>感測器故障;人工標註本身…</a:t>
+                      </a:r>
+                    </a:p>
+                  </a:txBody>
+                  <a:tcPr marL="45720" marR="45720" marT="18288" marB="18288" anchor="ctr">
+                    <a:solidFill>
+                      <a:srgbClr val="FFFFFF"/>
+                    </a:solidFill>
+                  </a:tcPr>
+                </a:tc>
+                <a:tc>
+                  <a:txBody>
+                    <a:bodyPr/>
+                    <a:lstStyle/>
+                    <a:p>
+                      <a:pPr algn="ctr"/>
+                      <a:r>
+                        <a:rPr sz="1200" b="0">
+                          <a:solidFill>
+                            <a:srgbClr val="6B7885"/>
+                          </a:solidFill>
+                          <a:latin typeface="Microsoft JhengHei"/>
+                        </a:rPr>
+                        <a:t>準確性 · 一致性</a:t>
+                      </a:r>
+                    </a:p>
+                  </a:txBody>
+                  <a:tcPr marL="45720" marR="45720" marT="18288" marB="18288" anchor="ctr">
+                    <a:solidFill>
+                      <a:srgbClr val="FFFFFF"/>
+                    </a:solidFill>
+                  </a:tcPr>
+                </a:tc>
+                <a:tc>
+                  <a:txBody>
+                    <a:bodyPr/>
+                    <a:lstStyle/>
+                    <a:p>
+                      <a:pPr algn="ctr"/>
+                      <a:r>
+                        <a:rPr sz="1200" b="0">
+                          <a:solidFill>
+                            <a:srgbClr val="6B7885"/>
+                          </a:solidFill>
+                          <a:latin typeface="Microsoft JhengHei"/>
+                        </a:rPr>
+                        <a:t>W3-10 標註品質:誤報的操…</a:t>
+                      </a:r>
+                    </a:p>
+                  </a:txBody>
+                  <a:tcPr marL="45720" marR="45720" marT="18288" marB="18288" anchor="ctr">
+                    <a:solidFill>
+                      <a:srgbClr val="FFFFFF"/>
+                    </a:solidFill>
+                  </a:tcPr>
+                </a:tc>
+              </a:tr>
+              <a:tr h="292608">
                 <a:tc>
                   <a:txBody>
                     <a:bodyPr/>
@@ -14057,7 +14583,7 @@
                           </a:solidFill>
                           <a:latin typeface="Microsoft JhengHei"/>
                         </a:rPr>
-                        <a:t>目前不一致:同一段影片,不同複核者會給不同標籤(低頭 v…</a:t>
+                        <a:t>目前不一致:同一段影片…</a:t>
                       </a:r>
                     </a:p>
                   </a:txBody>
@@ -14307,7 +14833,7 @@
         </p:nvGraphicFramePr>
         <p:xfrm>
           <a:off x="658368" y="1755648"/>
-          <a:ext cx="10874955" cy="1467612"/>
+          <a:ext cx="10874955" cy="1792224"/>
         </p:xfrm>
         <a:graphic>
           <a:graphicData uri="http://schemas.openxmlformats.org/drawingml/2006/table">
@@ -14439,7 +14965,7 @@
                   </a:tcPr>
                 </a:tc>
               </a:tr>
-              <a:tr h="569214">
+              <a:tr h="292608">
                 <a:tc>
                   <a:txBody>
                     <a:bodyPr/>
@@ -14453,8 +14979,7 @@
                           </a:solidFill>
                           <a:latin typeface="Microsoft JhengHei"/>
                         </a:rPr>
-                        <a:t>選項 0
-加人</a:t>
+                        <a:t>選項 0　加人…</a:t>
                       </a:r>
                     </a:p>
                   </a:txBody>
@@ -14477,7 +15002,7 @@
                           </a:solidFill>
                           <a:latin typeface="Microsoft JhengHei"/>
                         </a:rPr>
-                        <a:t>以現行做法增聘專職複核人力,覆蓋全部既有客戶</a:t>
+                        <a:t>以現行做法增聘專職複…</a:t>
                       </a:r>
                     </a:p>
                   </a:txBody>
@@ -14500,7 +15025,7 @@
                           </a:solidFill>
                           <a:latin typeface="Microsoft JhengHei"/>
                         </a:rPr>
-                        <a:t>線性:量幾倍,人就要幾倍 → 需 17-24 人(現有 …</a:t>
+                        <a:t>線性:量幾倍,人就要…</a:t>
                       </a:r>
                     </a:p>
                   </a:txBody>
@@ -14523,7 +15048,7 @@
                           </a:solidFill>
                           <a:latin typeface="Microsoft JhengHei"/>
                         </a:rPr>
-                        <a:t>停不下來:編制是常態支出,而那個迴路照樣轉</a:t>
+                        <a:t>停不下來:編制是常態…</a:t>
                       </a:r>
                     </a:p>
                   </a:txBody>
@@ -14546,7 +15071,7 @@
                           </a:solidFill>
                           <a:latin typeface="Microsoft JhengHei"/>
                         </a:rPr>
-                        <a:t>拒絕 - 加人只是沿著同一條成本曲線移動,不是…</a:t>
+                        <a:t>拒絕 - 加人只是沿著…</a:t>
                       </a:r>
                     </a:p>
                   </a:txBody>
@@ -14557,7 +15082,241 @@
                   </a:tcPr>
                 </a:tc>
               </a:tr>
-              <a:tr h="569214">
+              <a:tr h="292608">
+                <a:tc>
+                  <a:txBody>
+                    <a:bodyPr/>
+                    <a:lstStyle/>
+                    <a:p>
+                      <a:pPr algn="l"/>
+                      <a:r>
+                        <a:rPr sz="1200" b="0">
+                          <a:solidFill>
+                            <a:srgbClr val="16212E"/>
+                          </a:solidFill>
+                          <a:latin typeface="Microsoft JhengHei"/>
+                        </a:rPr>
+                        <a:t>選項 0b　調班 + 尖峰人力池…</a:t>
+                      </a:r>
+                    </a:p>
+                  </a:txBody>
+                  <a:tcPr marL="45720" marR="45720" marT="18288" marB="18288" anchor="ctr">
+                    <a:solidFill>
+                      <a:srgbClr val="FFFFFF"/>
+                    </a:solidFill>
+                  </a:tcPr>
+                </a:tc>
+                <a:tc>
+                  <a:txBody>
+                    <a:bodyPr/>
+                    <a:lstStyle/>
+                    <a:p>
+                      <a:pPr algn="ctr"/>
+                      <a:r>
+                        <a:rPr sz="1200" b="0">
+                          <a:solidFill>
+                            <a:srgbClr val="6B7885"/>
+                          </a:solidFill>
+                          <a:latin typeface="Microsoft JhengHei"/>
+                        </a:rPr>
+                        <a:t>重排班表,把尖峰徵調…</a:t>
+                      </a:r>
+                    </a:p>
+                  </a:txBody>
+                  <a:tcPr marL="45720" marR="45720" marT="18288" marB="18288" anchor="ctr">
+                    <a:solidFill>
+                      <a:srgbClr val="FFFFFF"/>
+                    </a:solidFill>
+                  </a:tcPr>
+                </a:tc>
+                <a:tc>
+                  <a:txBody>
+                    <a:bodyPr/>
+                    <a:lstStyle/>
+                    <a:p>
+                      <a:pPr algn="ctr"/>
+                      <a:r>
+                        <a:rPr sz="1200" b="0">
+                          <a:solidFill>
+                            <a:srgbClr val="6B7885"/>
+                          </a:solidFill>
+                          <a:latin typeface="Microsoft JhengHei"/>
+                        </a:rPr>
+                        <a:t>仍線性,但斜率略低…</a:t>
+                      </a:r>
+                    </a:p>
+                  </a:txBody>
+                  <a:tcPr marL="45720" marR="45720" marT="18288" marB="18288" anchor="ctr">
+                    <a:solidFill>
+                      <a:srgbClr val="FFFFFF"/>
+                    </a:solidFill>
+                  </a:tcPr>
+                </a:tc>
+                <a:tc>
+                  <a:txBody>
+                    <a:bodyPr/>
+                    <a:lstStyle/>
+                    <a:p>
+                      <a:pPr algn="ctr"/>
+                      <a:r>
+                        <a:rPr sz="1200" b="0">
+                          <a:solidFill>
+                            <a:srgbClr val="6B7885"/>
+                          </a:solidFill>
+                          <a:latin typeface="Microsoft JhengHei"/>
+                        </a:rPr>
+                        <a:t>隨時可停、可退回原班…</a:t>
+                      </a:r>
+                    </a:p>
+                  </a:txBody>
+                  <a:tcPr marL="45720" marR="45720" marT="18288" marB="18288" anchor="ctr">
+                    <a:solidFill>
+                      <a:srgbClr val="FFFFFF"/>
+                    </a:solidFill>
+                  </a:tcPr>
+                </a:tc>
+                <a:tc>
+                  <a:txBody>
+                    <a:bodyPr/>
+                    <a:lstStyle/>
+                    <a:p>
+                      <a:pPr algn="ctr"/>
+                      <a:r>
+                        <a:rPr sz="1200" b="0">
+                          <a:solidFill>
+                            <a:srgbClr val="6B7885"/>
+                          </a:solidFill>
+                          <a:latin typeface="Microsoft JhengHei"/>
+                        </a:rPr>
+                        <a:t>待 G1 判定,本案不預…</a:t>
+                      </a:r>
+                    </a:p>
+                  </a:txBody>
+                  <a:tcPr marL="45720" marR="45720" marT="18288" marB="18288" anchor="ctr">
+                    <a:solidFill>
+                      <a:srgbClr val="FFFFFF"/>
+                    </a:solidFill>
+                  </a:tcPr>
+                </a:tc>
+              </a:tr>
+              <a:tr h="292608">
+                <a:tc>
+                  <a:txBody>
+                    <a:bodyPr/>
+                    <a:lstStyle/>
+                    <a:p>
+                      <a:pPr algn="l"/>
+                      <a:r>
+                        <a:rPr sz="1200" b="0">
+                          <a:solidFill>
+                            <a:srgbClr val="16212E"/>
+                          </a:solidFill>
+                          <a:latin typeface="Microsoft JhengHei"/>
+                        </a:rPr>
+                        <a:t>選項 1　規則式脈絡融合(不用機器學習)…</a:t>
+                      </a:r>
+                    </a:p>
+                  </a:txBody>
+                  <a:tcPr marL="45720" marR="45720" marT="18288" marB="18288" anchor="ctr">
+                    <a:solidFill>
+                      <a:srgbClr val="FFFFFF"/>
+                    </a:solidFill>
+                  </a:tcPr>
+                </a:tc>
+                <a:tc>
+                  <a:txBody>
+                    <a:bodyPr/>
+                    <a:lstStyle/>
+                    <a:p>
+                      <a:pPr algn="ctr"/>
+                      <a:r>
+                        <a:rPr sz="1200" b="0">
+                          <a:solidFill>
+                            <a:srgbClr val="6B7885"/>
+                          </a:solidFill>
+                          <a:latin typeface="Microsoft JhengHei"/>
+                        </a:rPr>
+                        <a:t>定位 + 地圖速限硬規…</a:t>
+                      </a:r>
+                    </a:p>
+                  </a:txBody>
+                  <a:tcPr marL="45720" marR="45720" marT="18288" marB="18288" anchor="ctr">
+                    <a:solidFill>
+                      <a:srgbClr val="FFFFFF"/>
+                    </a:solidFill>
+                  </a:tcPr>
+                </a:tc>
+                <a:tc>
+                  <a:txBody>
+                    <a:bodyPr/>
+                    <a:lstStyle/>
+                    <a:p>
+                      <a:pPr algn="ctr"/>
+                      <a:r>
+                        <a:rPr sz="1200" b="0">
+                          <a:solidFill>
+                            <a:srgbClr val="6B7885"/>
+                          </a:solidFill>
+                          <a:latin typeface="Microsoft JhengHei"/>
+                        </a:rPr>
+                        <a:t>一次性建置,之後整段…</a:t>
+                      </a:r>
+                    </a:p>
+                  </a:txBody>
+                  <a:tcPr marL="45720" marR="45720" marT="18288" marB="18288" anchor="ctr">
+                    <a:solidFill>
+                      <a:srgbClr val="FFFFFF"/>
+                    </a:solidFill>
+                  </a:tcPr>
+                </a:tc>
+                <a:tc>
+                  <a:txBody>
+                    <a:bodyPr/>
+                    <a:lstStyle/>
+                    <a:p>
+                      <a:pPr algn="ctr"/>
+                      <a:r>
+                        <a:rPr sz="1200" b="0">
+                          <a:solidFill>
+                            <a:srgbClr val="6B7885"/>
+                          </a:solidFill>
+                          <a:latin typeface="Microsoft JhengHei"/>
+                        </a:rPr>
+                        <a:t>可逐條檢查、可回退到…</a:t>
+                      </a:r>
+                    </a:p>
+                  </a:txBody>
+                  <a:tcPr marL="45720" marR="45720" marT="18288" marB="18288" anchor="ctr">
+                    <a:solidFill>
+                      <a:srgbClr val="FFFFFF"/>
+                    </a:solidFill>
+                  </a:tcPr>
+                </a:tc>
+                <a:tc>
+                  <a:txBody>
+                    <a:bodyPr/>
+                    <a:lstStyle/>
+                    <a:p>
+                      <a:pPr algn="ctr"/>
+                      <a:r>
+                        <a:rPr sz="1200" b="0">
+                          <a:solidFill>
+                            <a:srgbClr val="6B7885"/>
+                          </a:solidFill>
+                          <a:latin typeface="Microsoft JhengHei"/>
+                        </a:rPr>
+                        <a:t>先做 - 某小型車隊單…</a:t>
+                      </a:r>
+                    </a:p>
+                  </a:txBody>
+                  <a:tcPr marL="45720" marR="45720" marT="18288" marB="18288" anchor="ctr">
+                    <a:solidFill>
+                      <a:srgbClr val="FFFFFF"/>
+                    </a:solidFill>
+                  </a:tcPr>
+                </a:tc>
+              </a:tr>
+              <a:tr h="292608">
                 <a:tc>
                   <a:txBody>
                     <a:bodyPr/>
@@ -14571,8 +15330,7 @@
                           </a:solidFill>
                           <a:latin typeface="Microsoft JhengHei"/>
                         </a:rPr>
-                        <a:t>選項 2
-地端視覺語言模型事件判讀</a:t>
+                        <a:t>選項 2　地端視覺語言模型事件判讀…</a:t>
                       </a:r>
                     </a:p>
                   </a:txBody>
@@ -14595,7 +15353,7 @@
                           </a:solidFill>
                           <a:latin typeface="Microsoft JhengHei"/>
                         </a:rPr>
-                        <a:t>讓機器讀懂一次事件的完整脈絡(影片 + 客戶問…</a:t>
+                        <a:t>讓機器讀懂一次事件的…</a:t>
                       </a:r>
                     </a:p>
                   </a:txBody>
@@ -14618,7 +15376,7 @@
                           </a:solidFill>
                           <a:latin typeface="Microsoft JhengHei"/>
                         </a:rPr>
-                        <a:t>前期一次性投入,之後次線性 - 事件量繼續長,人…</a:t>
+                        <a:t>前期一次性投入,之後…</a:t>
                       </a:r>
                     </a:p>
                   </a:txBody>
@@ -14641,7 +15399,7 @@
                           </a:solidFill>
                           <a:latin typeface="Microsoft JhengHei"/>
                         </a:rPr>
-                        <a:t>三道門都可停:G1(W6)· G2(W12)· G3(W24);且…</a:t>
+                        <a:t>三道門都可停:G1(W6)…</a:t>
                       </a:r>
                     </a:p>
                   </a:txBody>
@@ -14664,7 +15422,7 @@
                           </a:solidFill>
                           <a:latin typeface="Microsoft JhengHei"/>
                         </a:rPr>
-                        <a:t>採用 - 前三包不是流程改善,是評估它的必要前…</a:t>
+                        <a:t>採用 - 前三包不是流…</a:t>
                       </a:r>
                     </a:p>
                   </a:txBody>
@@ -14675,6 +15433,123 @@
                   </a:tcPr>
                 </a:tc>
               </a:tr>
+              <a:tr h="292608">
+                <a:tc>
+                  <a:txBody>
+                    <a:bodyPr/>
+                    <a:lstStyle/>
+                    <a:p>
+                      <a:pPr algn="l"/>
+                      <a:r>
+                        <a:rPr sz="1200" b="0">
+                          <a:solidFill>
+                            <a:srgbClr val="16212E"/>
+                          </a:solidFill>
+                          <a:latin typeface="Microsoft JhengHei"/>
+                        </a:rPr>
+                        <a:t>選項 3　公司既有的雲端判讀規劃…</a:t>
+                      </a:r>
+                    </a:p>
+                  </a:txBody>
+                  <a:tcPr marL="45720" marR="45720" marT="18288" marB="18288" anchor="ctr">
+                    <a:solidFill>
+                      <a:srgbClr val="FFFFFF"/>
+                    </a:solidFill>
+                  </a:tcPr>
+                </a:tc>
+                <a:tc>
+                  <a:txBody>
+                    <a:bodyPr/>
+                    <a:lstStyle/>
+                    <a:p>
+                      <a:pPr algn="ctr"/>
+                      <a:r>
+                        <a:rPr sz="1200" b="0">
+                          <a:solidFill>
+                            <a:srgbClr val="6B7885"/>
+                          </a:solidFill>
+                          <a:latin typeface="Microsoft JhengHei"/>
+                        </a:rPr>
+                        <a:t>仍在研擬中的雲端判讀</a:t>
+                      </a:r>
+                    </a:p>
+                  </a:txBody>
+                  <a:tcPr marL="45720" marR="45720" marT="18288" marB="18288" anchor="ctr">
+                    <a:solidFill>
+                      <a:srgbClr val="FFFFFF"/>
+                    </a:solidFill>
+                  </a:tcPr>
+                </a:tc>
+                <a:tc>
+                  <a:txBody>
+                    <a:bodyPr/>
+                    <a:lstStyle/>
+                    <a:p>
+                      <a:pPr algn="ctr"/>
+                      <a:r>
+                        <a:rPr sz="1200" b="0">
+                          <a:solidFill>
+                            <a:srgbClr val="6B7885"/>
+                          </a:solidFill>
+                          <a:latin typeface="Microsoft JhengHei"/>
+                        </a:rPr>
+                        <a:t>尚未開始,曲線未定</a:t>
+                      </a:r>
+                    </a:p>
+                  </a:txBody>
+                  <a:tcPr marL="45720" marR="45720" marT="18288" marB="18288" anchor="ctr">
+                    <a:solidFill>
+                      <a:srgbClr val="FFFFFF"/>
+                    </a:solidFill>
+                  </a:tcPr>
+                </a:tc>
+                <a:tc>
+                  <a:txBody>
+                    <a:bodyPr/>
+                    <a:lstStyle/>
+                    <a:p>
+                      <a:pPr algn="ctr"/>
+                      <a:r>
+                        <a:rPr sz="1200" b="0">
+                          <a:solidFill>
+                            <a:srgbClr val="6B7885"/>
+                          </a:solidFill>
+                          <a:latin typeface="Microsoft JhengHei"/>
+                        </a:rPr>
+                        <a:t>不在本案範圍,由技術…</a:t>
+                      </a:r>
+                    </a:p>
+                  </a:txBody>
+                  <a:tcPr marL="45720" marR="45720" marT="18288" marB="18288" anchor="ctr">
+                    <a:solidFill>
+                      <a:srgbClr val="FFFFFF"/>
+                    </a:solidFill>
+                  </a:tcPr>
+                </a:tc>
+                <a:tc>
+                  <a:txBody>
+                    <a:bodyPr/>
+                    <a:lstStyle/>
+                    <a:p>
+                      <a:pPr algn="ctr"/>
+                      <a:r>
+                        <a:rPr sz="1200" b="0">
+                          <a:solidFill>
+                            <a:srgbClr val="6B7885"/>
+                          </a:solidFill>
+                          <a:latin typeface="Microsoft JhengHei"/>
+                        </a:rPr>
+                        <a:t>前置條件,不是競爭關…</a:t>
+                      </a:r>
+                    </a:p>
+                  </a:txBody>
+                  <a:tcPr marL="45720" marR="45720" marT="18288" marB="18288" anchor="ctr">
+                    <a:solidFill>
+                      <a:srgbClr val="FFFFFF"/>
+                    </a:solidFill>
+                  </a:tcPr>
+                </a:tc>
+              </a:tr>
             </a:tbl>
           </a:graphicData>
         </a:graphic>
@@ -14687,8 +15562,8 @@
         </p:nvSpPr>
         <p:spPr>
           <a:xfrm>
-            <a:off x="658368" y="3826160"/>
-            <a:ext cx="3122066" cy="2018892"/>
+            <a:off x="658368" y="4072639"/>
+            <a:ext cx="3527450" cy="1600200"/>
           </a:xfrm>
           <a:prstGeom prst="roundRect">
             <a:avLst>
@@ -14735,8 +15610,8 @@
         </p:nvSpPr>
         <p:spPr>
           <a:xfrm>
-            <a:off x="768096" y="3954176"/>
-            <a:ext cx="2902610" cy="566928"/>
+            <a:off x="768096" y="4200655"/>
+            <a:ext cx="3307994" cy="566928"/>
           </a:xfrm>
           <a:prstGeom prst="rect">
             <a:avLst/>
@@ -14774,8 +15649,8 @@
         </p:nvSpPr>
         <p:spPr>
           <a:xfrm>
-            <a:off x="1602181" y="4575968"/>
-            <a:ext cx="1234440" cy="274320"/>
+            <a:off x="1566367" y="4822447"/>
+            <a:ext cx="1711452" cy="274320"/>
           </a:xfrm>
           <a:prstGeom prst="roundRect">
             <a:avLst>
@@ -14820,8 +15695,8 @@
         </p:nvSpPr>
         <p:spPr>
           <a:xfrm>
-            <a:off x="1602181" y="4575968"/>
-            <a:ext cx="1234440" cy="274320"/>
+            <a:off x="1566367" y="4822447"/>
+            <a:ext cx="1711452" cy="274320"/>
           </a:xfrm>
           <a:prstGeom prst="rect">
             <a:avLst/>
@@ -14846,7 +15721,7 @@
                 </a:solidFill>
                 <a:latin typeface="Microsoft JhengHei"/>
               </a:rPr>
-              <a:t>提案推算,非…</a:t>
+              <a:t>提案推算,非核定編制</a:t>
             </a:r>
           </a:p>
         </p:txBody>
@@ -14859,8 +15734,8 @@
         </p:nvSpPr>
         <p:spPr>
           <a:xfrm>
-            <a:off x="768096" y="4960016"/>
-            <a:ext cx="2902610" cy="757020"/>
+            <a:off x="768096" y="5206495"/>
+            <a:ext cx="3307994" cy="338327"/>
           </a:xfrm>
           <a:prstGeom prst="rect">
             <a:avLst/>
@@ -14885,7 +15760,7 @@
                 </a:solidFill>
                 <a:latin typeface="Microsoft JhengHei"/>
               </a:rPr>
-              <a:t>批次   13,000 x 20 秒 = 72.2 人時(13,000+ 筆/天 = 全客戶每日平均總事件…</a:t>
+              <a:t>批次   13,000 x 20 秒 = 72.2 人時(13…</a:t>
             </a:r>
           </a:p>
         </p:txBody>
@@ -14898,8 +15773,8 @@
         </p:nvSpPr>
         <p:spPr>
           <a:xfrm>
-            <a:off x="3926738" y="3826160"/>
-            <a:ext cx="3122066" cy="2018892"/>
+            <a:off x="4332122" y="4072639"/>
+            <a:ext cx="3527450" cy="1600200"/>
           </a:xfrm>
           <a:prstGeom prst="roundRect">
             <a:avLst>
@@ -14946,8 +15821,8 @@
         </p:nvSpPr>
         <p:spPr>
           <a:xfrm>
-            <a:off x="4036466" y="3954176"/>
-            <a:ext cx="2902610" cy="566928"/>
+            <a:off x="4441850" y="4200655"/>
+            <a:ext cx="3307994" cy="566928"/>
           </a:xfrm>
           <a:prstGeom prst="rect">
             <a:avLst/>
@@ -14985,8 +15860,8 @@
         </p:nvSpPr>
         <p:spPr>
           <a:xfrm>
-            <a:off x="4870551" y="4575968"/>
-            <a:ext cx="1234440" cy="274320"/>
+            <a:off x="5684367" y="4822447"/>
+            <a:ext cx="822960" cy="274320"/>
           </a:xfrm>
           <a:prstGeom prst="roundRect">
             <a:avLst>
@@ -15031,8 +15906,8 @@
         </p:nvSpPr>
         <p:spPr>
           <a:xfrm>
-            <a:off x="4870551" y="4575968"/>
-            <a:ext cx="1234440" cy="274320"/>
+            <a:off x="5684367" y="4822447"/>
+            <a:ext cx="822960" cy="274320"/>
           </a:xfrm>
           <a:prstGeom prst="rect">
             <a:avLst/>
@@ -15070,8 +15945,8 @@
         </p:nvSpPr>
         <p:spPr>
           <a:xfrm>
-            <a:off x="4036466" y="4960016"/>
-            <a:ext cx="2902610" cy="757020"/>
+            <a:off x="4441850" y="5206495"/>
+            <a:ext cx="3307994" cy="338327"/>
           </a:xfrm>
           <a:prstGeom prst="rect">
             <a:avLst/>
@@ -15096,7 +15971,7 @@
                 </a:solidFill>
                 <a:latin typeface="Microsoft JhengHei"/>
               </a:rPr>
-              <a:t>W1-6 要交出:一件客戶爭議的時間拆解(等待排隊 0-1 天 · 撈數據 0.5 天 · 判…</a:t>
+              <a:t>W1-6 要交出:一件客戶爭議的時間拆解(等待…</a:t>
             </a:r>
           </a:p>
         </p:txBody>
@@ -15109,8 +15984,8 @@
         </p:nvSpPr>
         <p:spPr>
           <a:xfrm>
-            <a:off x="7195108" y="3826160"/>
-            <a:ext cx="3122066" cy="2018892"/>
+            <a:off x="8005876" y="4072639"/>
+            <a:ext cx="3527450" cy="1600200"/>
           </a:xfrm>
           <a:prstGeom prst="roundRect">
             <a:avLst>
@@ -15157,8 +16032,8 @@
         </p:nvSpPr>
         <p:spPr>
           <a:xfrm>
-            <a:off x="7304836" y="3954176"/>
-            <a:ext cx="2902610" cy="566928"/>
+            <a:off x="8115604" y="4200655"/>
+            <a:ext cx="3307994" cy="566928"/>
           </a:xfrm>
           <a:prstGeom prst="rect">
             <a:avLst/>
@@ -15196,8 +16071,8 @@
         </p:nvSpPr>
         <p:spPr>
           <a:xfrm>
-            <a:off x="8138922" y="4575968"/>
-            <a:ext cx="1234440" cy="274320"/>
+            <a:off x="9066276" y="4822447"/>
+            <a:ext cx="1406652" cy="274320"/>
           </a:xfrm>
           <a:prstGeom prst="roundRect">
             <a:avLst>
@@ -15242,8 +16117,8 @@
         </p:nvSpPr>
         <p:spPr>
           <a:xfrm>
-            <a:off x="8138922" y="4575968"/>
-            <a:ext cx="1234440" cy="274320"/>
+            <a:off x="9066276" y="4822447"/>
+            <a:ext cx="1406652" cy="274320"/>
           </a:xfrm>
           <a:prstGeom prst="rect">
             <a:avLst/>
@@ -15268,7 +16143,7 @@
                 </a:solidFill>
                 <a:latin typeface="Microsoft JhengHei"/>
               </a:rPr>
-              <a:t>提案推估,非…</a:t>
+              <a:t>提案推估,非實測</a:t>
             </a:r>
           </a:p>
         </p:txBody>
@@ -15281,8 +16156,8 @@
         </p:nvSpPr>
         <p:spPr>
           <a:xfrm>
-            <a:off x="7304836" y="4960016"/>
-            <a:ext cx="2902610" cy="757020"/>
+            <a:off x="8115604" y="5206495"/>
+            <a:ext cx="3307994" cy="338327"/>
           </a:xfrm>
           <a:prstGeom prst="rect">
             <a:avLst/>
@@ -15307,7 +16182,7 @@
                 </a:solidFill>
                 <a:latin typeface="Microsoft JhengHei"/>
               </a:rPr>
-              <a:t>技術寫到概念層次:一套地端視覺語言模型,篩檢與深挖兩種負載由同一台設備分時…</a:t>
+              <a:t>能力層:以現行小模型的表現外推,預期約 85…</a:t>
             </a:r>
           </a:p>
         </p:txBody>
@@ -15320,8 +16195,8 @@
         </p:nvSpPr>
         <p:spPr>
           <a:xfrm>
-            <a:off x="658368" y="6046220"/>
-            <a:ext cx="9658807" cy="427731"/>
+            <a:off x="658368" y="5800855"/>
+            <a:ext cx="9658807" cy="709672"/>
           </a:xfrm>
           <a:prstGeom prst="roundRect">
             <a:avLst>
@@ -15366,8 +16241,8 @@
         </p:nvSpPr>
         <p:spPr>
           <a:xfrm>
-            <a:off x="841247" y="6046220"/>
-            <a:ext cx="9293047" cy="427731"/>
+            <a:off x="841247" y="5800855"/>
+            <a:ext cx="9293047" cy="709672"/>
           </a:xfrm>
           <a:prstGeom prst="rect">
             <a:avLst/>
@@ -15586,7 +16461,7 @@
         </p:nvGraphicFramePr>
         <p:xfrm>
           <a:off x="658368" y="1755648"/>
-          <a:ext cx="10874956" cy="3744468"/>
+          <a:ext cx="10874956" cy="3255264"/>
         </p:xfrm>
         <a:graphic>
           <a:graphicData uri="http://schemas.openxmlformats.org/drawingml/2006/table">
@@ -15694,7 +16569,7 @@
                   </a:tcPr>
                 </a:tc>
               </a:tr>
-              <a:tr h="569214">
+              <a:tr h="292608">
                 <a:tc>
                   <a:txBody>
                     <a:bodyPr/>
@@ -15708,8 +16583,7 @@
                           </a:solidFill>
                           <a:latin typeface="Microsoft JhengHei"/>
                         </a:rPr>
-                        <a:t>R1 技術局限 · 成功 中
-模型不可解釋 → 複核者不信任</a:t>
+                        <a:t>R1 技術局限 · 成功 中　模型不可…</a:t>
                       </a:r>
                     </a:p>
                   </a:txBody>
@@ -15732,8 +16606,7 @@
                           </a:solidFill>
                           <a:latin typeface="Microsoft JhengHei"/>
                         </a:rPr>
-                        <a:t>解釋:輸出可讀的描述與
-引用到的證據 (Rudin, 2019)</a:t>
+                        <a:t>解釋:輸出可讀的描述與　引用到…</a:t>
                       </a:r>
                     </a:p>
                   </a:txBody>
@@ -15756,8 +16629,7 @@
                           </a:solidFill>
                           <a:latin typeface="Microsoft JhengHei"/>
                         </a:rPr>
-                        <a:t>錯的描述一樣通順,
-比錯的分數更難察覺</a:t>
+                        <a:t>錯的描述一樣通順,　比錯的分數…</a:t>
                       </a:r>
                     </a:p>
                   </a:txBody>
@@ -15780,8 +16652,7 @@
                           </a:solidFill>
                           <a:latin typeface="Microsoft JhengHei"/>
                         </a:rPr>
-                        <a:t>推翻模型判定的比例不降;
-只看得到人有看的那些</a:t>
+                        <a:t>推翻模型判定的比例不降;　只看…</a:t>
                       </a:r>
                     </a:p>
                   </a:txBody>
@@ -15792,7 +16663,7 @@
                   </a:tcPr>
                 </a:tc>
               </a:tr>
-              <a:tr h="569214">
+              <a:tr h="292608">
                 <a:tc>
                   <a:txBody>
                     <a:bodyPr/>
@@ -15806,8 +16677,7 @@
                           </a:solidFill>
                           <a:latin typeface="Microsoft JhengHei"/>
                         </a:rPr>
-                        <a:t>R2 數據 · 成功 中
-資料級聯:判準與脈絡資料</a:t>
+                        <a:t>R2 數據 · 成功 中　資料級聯:判…</a:t>
                       </a:r>
                     </a:p>
                   </a:txBody>
@@ -15830,8 +16700,7 @@
                           </a:solidFill>
                           <a:latin typeface="Microsoft JhengHei"/>
                         </a:rPr>
-                        <a:t>審計:黃金題 + 抽樣雙人
-複核 + 來源版本快照</a:t>
+                        <a:t>審計:黃金題 + 抽樣雙人　複核 …</a:t>
                       </a:r>
                     </a:p>
                   </a:txBody>
@@ -15854,8 +16723,7 @@
                           </a:solidFill>
                           <a:latin typeface="Microsoft JhengHei"/>
                         </a:rPr>
-                        <a:t>雙人複核使複核成本
-近倍增,需以抽樣控制</a:t>
+                        <a:t>雙人複核使複核成本　近倍增,需…</a:t>
                       </a:r>
                     </a:p>
                   </a:txBody>
@@ -15878,8 +16746,7 @@
                           </a:solidFill>
                           <a:latin typeface="Microsoft JhengHei"/>
                         </a:rPr>
-                        <a:t>交通標誌根因佔比偏離基準
-基準 = 某小型車隊單月樣本 83%</a:t>
+                        <a:t>交通標誌根因佔比偏離基準　基準…</a:t>
                       </a:r>
                     </a:p>
                   </a:txBody>
@@ -15890,7 +16757,7 @@
                   </a:tcPr>
                 </a:tc>
               </a:tr>
-              <a:tr h="569214">
+              <a:tr h="292608">
                 <a:tc>
                   <a:txBody>
                     <a:bodyPr/>
@@ -15904,8 +16771,7 @@
                           </a:solidFill>
                           <a:latin typeface="Microsoft JhengHei"/>
                         </a:rPr>
-                        <a:t>R4 倫理 · 成功 低
-駕駛本人沒有申訴管道</a:t>
+                        <a:t>R3 數據｜自動化偏差 · 成功 中…</a:t>
                       </a:r>
                     </a:p>
                   </a:txBody>
@@ -15928,8 +16794,7 @@
                           </a:solidFill>
                           <a:latin typeface="Microsoft JhengHei"/>
                         </a:rPr>
-                        <a:t>問責:申訴機制到位前,
-產出不供個人考核使用</a:t>
+                        <a:t>教育・介面 (Goddard et al., …</a:t>
                       </a:r>
                     </a:p>
                   </a:txBody>
@@ -15952,8 +16817,7 @@
                           </a:solidFill>
                           <a:latin typeface="Microsoft JhengHei"/>
                         </a:rPr>
-                        <a:t>限制用途會降低
-客戶端採用意願</a:t>
+                        <a:t>不顯示信心使複核變慢,　與時效…</a:t>
                       </a:r>
                     </a:p>
                   </a:txBody>
@@ -15976,8 +16840,7 @@
                           </a:solidFill>
                           <a:latin typeface="Microsoft JhengHei"/>
                         </a:rPr>
-                        <a:t>駕駛端申訴無處可收,
-件數恆為零</a:t>
+                        <a:t>盲測組與對照組判定差異　超過設…</a:t>
                       </a:r>
                     </a:p>
                   </a:txBody>
@@ -15988,7 +16851,383 @@
                   </a:tcPr>
                 </a:tc>
               </a:tr>
-              <a:tr h="569214">
+              <a:tr h="292608">
+                <a:tc>
+                  <a:txBody>
+                    <a:bodyPr/>
+                    <a:lstStyle/>
+                    <a:p>
+                      <a:pPr algn="l"/>
+                      <a:r>
+                        <a:rPr sz="1200" b="0">
+                          <a:solidFill>
+                            <a:srgbClr val="16212E"/>
+                          </a:solidFill>
+                          <a:latin typeface="Microsoft JhengHei"/>
+                        </a:rPr>
+                        <a:t>R4 倫理 · 成功 低　駕駛本人沒有…</a:t>
+                      </a:r>
+                    </a:p>
+                  </a:txBody>
+                  <a:tcPr marL="45720" marR="45720" marT="18288" marB="18288" anchor="ctr">
+                    <a:solidFill>
+                      <a:srgbClr val="FFFFFF"/>
+                    </a:solidFill>
+                  </a:tcPr>
+                </a:tc>
+                <a:tc>
+                  <a:txBody>
+                    <a:bodyPr/>
+                    <a:lstStyle/>
+                    <a:p>
+                      <a:pPr algn="ctr"/>
+                      <a:r>
+                        <a:rPr sz="1200" b="0">
+                          <a:solidFill>
+                            <a:srgbClr val="6B7885"/>
+                          </a:solidFill>
+                          <a:latin typeface="Microsoft JhengHei"/>
+                        </a:rPr>
+                        <a:t>問責:申訴機制到位前,　產出不…</a:t>
+                      </a:r>
+                    </a:p>
+                  </a:txBody>
+                  <a:tcPr marL="45720" marR="45720" marT="18288" marB="18288" anchor="ctr">
+                    <a:solidFill>
+                      <a:srgbClr val="FFFFFF"/>
+                    </a:solidFill>
+                  </a:tcPr>
+                </a:tc>
+                <a:tc>
+                  <a:txBody>
+                    <a:bodyPr/>
+                    <a:lstStyle/>
+                    <a:p>
+                      <a:pPr algn="ctr"/>
+                      <a:r>
+                        <a:rPr sz="1200" b="0">
+                          <a:solidFill>
+                            <a:srgbClr val="6B7885"/>
+                          </a:solidFill>
+                          <a:latin typeface="Microsoft JhengHei"/>
+                        </a:rPr>
+                        <a:t>限制用途會降低　客戶端採用意願…</a:t>
+                      </a:r>
+                    </a:p>
+                  </a:txBody>
+                  <a:tcPr marL="45720" marR="45720" marT="18288" marB="18288" anchor="ctr">
+                    <a:solidFill>
+                      <a:srgbClr val="FFFFFF"/>
+                    </a:solidFill>
+                  </a:tcPr>
+                </a:tc>
+                <a:tc>
+                  <a:txBody>
+                    <a:bodyPr/>
+                    <a:lstStyle/>
+                    <a:p>
+                      <a:pPr algn="ctr"/>
+                      <a:r>
+                        <a:rPr sz="1200" b="0">
+                          <a:solidFill>
+                            <a:srgbClr val="6B7885"/>
+                          </a:solidFill>
+                          <a:latin typeface="Microsoft JhengHei"/>
+                        </a:rPr>
+                        <a:t>駕駛端申訴無處可收,　件數恆為…</a:t>
+                      </a:r>
+                    </a:p>
+                  </a:txBody>
+                  <a:tcPr marL="45720" marR="45720" marT="18288" marB="18288" anchor="ctr">
+                    <a:solidFill>
+                      <a:srgbClr val="FFFFFF"/>
+                    </a:solidFill>
+                  </a:tcPr>
+                </a:tc>
+              </a:tr>
+              <a:tr h="292608">
+                <a:tc>
+                  <a:txBody>
+                    <a:bodyPr/>
+                    <a:lstStyle/>
+                    <a:p>
+                      <a:pPr algn="l"/>
+                      <a:r>
+                        <a:rPr sz="1200" b="0">
+                          <a:solidFill>
+                            <a:srgbClr val="16212E"/>
+                          </a:solidFill>
+                          <a:latin typeface="Microsoft JhengHei"/>
+                        </a:rPr>
+                        <a:t>R5 社會性 · 成功 高　複核團隊抵…</a:t>
+                      </a:r>
+                    </a:p>
+                  </a:txBody>
+                  <a:tcPr marL="45720" marR="45720" marT="18288" marB="18288" anchor="ctr">
+                    <a:solidFill>
+                      <a:srgbClr val="FFFFFF"/>
+                    </a:solidFill>
+                  </a:tcPr>
+                </a:tc>
+                <a:tc>
+                  <a:txBody>
+                    <a:bodyPr/>
+                    <a:lstStyle/>
+                    <a:p>
+                      <a:pPr algn="ctr"/>
+                      <a:r>
+                        <a:rPr sz="1200" b="0">
+                          <a:solidFill>
+                            <a:srgbClr val="6B7885"/>
+                          </a:solidFill>
+                          <a:latin typeface="Microsoft JhengHei"/>
+                        </a:rPr>
+                        <a:t>教育:角色轉型說明 +　判準手冊…</a:t>
+                      </a:r>
+                    </a:p>
+                  </a:txBody>
+                  <a:tcPr marL="45720" marR="45720" marT="18288" marB="18288" anchor="ctr">
+                    <a:solidFill>
+                      <a:srgbClr val="FFFFFF"/>
+                    </a:solidFill>
+                  </a:tcPr>
+                </a:tc>
+                <a:tc>
+                  <a:txBody>
+                    <a:bodyPr/>
+                    <a:lstStyle/>
+                    <a:p>
+                      <a:pPr algn="ctr"/>
+                      <a:r>
+                        <a:rPr sz="1200" b="0">
+                          <a:solidFill>
+                            <a:srgbClr val="6B7885"/>
+                          </a:solidFill>
+                          <a:latin typeface="Microsoft JhengHei"/>
+                        </a:rPr>
+                        <a:t>參與式做法拉長　判準定案時程…</a:t>
+                      </a:r>
+                    </a:p>
+                  </a:txBody>
+                  <a:tcPr marL="45720" marR="45720" marT="18288" marB="18288" anchor="ctr">
+                    <a:solidFill>
+                      <a:srgbClr val="FFFFFF"/>
+                    </a:solidFill>
+                  </a:tcPr>
+                </a:tc>
+                <a:tc>
+                  <a:txBody>
+                    <a:bodyPr/>
+                    <a:lstStyle/>
+                    <a:p>
+                      <a:pPr algn="ctr"/>
+                      <a:r>
+                        <a:rPr sz="1200" b="0">
+                          <a:solidFill>
+                            <a:srgbClr val="6B7885"/>
+                          </a:solidFill>
+                          <a:latin typeface="Microsoft JhengHei"/>
+                        </a:rPr>
+                        <a:t>複核團隊留任率或　黃金題參與率…</a:t>
+                      </a:r>
+                    </a:p>
+                  </a:txBody>
+                  <a:tcPr marL="45720" marR="45720" marT="18288" marB="18288" anchor="ctr">
+                    <a:solidFill>
+                      <a:srgbClr val="FFFFFF"/>
+                    </a:solidFill>
+                  </a:tcPr>
+                </a:tc>
+              </a:tr>
+              <a:tr h="292608">
+                <a:tc>
+                  <a:txBody>
+                    <a:bodyPr/>
+                    <a:lstStyle/>
+                    <a:p>
+                      <a:pPr algn="l"/>
+                      <a:r>
+                        <a:rPr sz="1200" b="0">
+                          <a:solidFill>
+                            <a:srgbClr val="16212E"/>
+                          </a:solidFill>
+                          <a:latin typeface="Microsoft JhengHei"/>
+                        </a:rPr>
+                        <a:t>R6 經濟 · 成功 中　期內回本難證…</a:t>
+                      </a:r>
+                    </a:p>
+                  </a:txBody>
+                  <a:tcPr marL="45720" marR="45720" marT="18288" marB="18288" anchor="ctr">
+                    <a:solidFill>
+                      <a:srgbClr val="FFFFFF"/>
+                    </a:solidFill>
+                  </a:tcPr>
+                </a:tc>
+                <a:tc>
+                  <a:txBody>
+                    <a:bodyPr/>
+                    <a:lstStyle/>
+                    <a:p>
+                      <a:pPr algn="ctr"/>
+                      <a:r>
+                        <a:rPr sz="1200" b="0">
+                          <a:solidFill>
+                            <a:srgbClr val="6B7885"/>
+                          </a:solidFill>
+                          <a:latin typeface="Microsoft JhengHei"/>
+                        </a:rPr>
+                        <a:t>審計:三道決策門　逐段釋出額度…</a:t>
+                      </a:r>
+                    </a:p>
+                  </a:txBody>
+                  <a:tcPr marL="45720" marR="45720" marT="18288" marB="18288" anchor="ctr">
+                    <a:solidFill>
+                      <a:srgbClr val="FFFFFF"/>
+                    </a:solidFill>
+                  </a:tcPr>
+                </a:tc>
+                <a:tc>
+                  <a:txBody>
+                    <a:bodyPr/>
+                    <a:lstStyle/>
+                    <a:p>
+                      <a:pPr algn="ctr"/>
+                      <a:r>
+                        <a:rPr sz="1200" b="0">
+                          <a:solidFill>
+                            <a:srgbClr val="6B7885"/>
+                          </a:solidFill>
+                          <a:latin typeface="Microsoft JhengHei"/>
+                        </a:rPr>
+                        <a:t>分段釋出使長週期　工作包難以排…</a:t>
+                      </a:r>
+                    </a:p>
+                  </a:txBody>
+                  <a:tcPr marL="45720" marR="45720" marT="18288" marB="18288" anchor="ctr">
+                    <a:solidFill>
+                      <a:srgbClr val="FFFFFF"/>
+                    </a:solidFill>
+                  </a:tcPr>
+                </a:tc>
+                <a:tc>
+                  <a:txBody>
+                    <a:bodyPr/>
+                    <a:lstStyle/>
+                    <a:p>
+                      <a:pPr algn="ctr"/>
+                      <a:r>
+                        <a:rPr sz="1200" b="0">
+                          <a:solidFill>
+                            <a:srgbClr val="6B7885"/>
+                          </a:solidFill>
+                          <a:latin typeface="Microsoft JhengHei"/>
+                        </a:rPr>
+                        <a:t>決策門審查時單位成本　改善低於…</a:t>
+                      </a:r>
+                    </a:p>
+                  </a:txBody>
+                  <a:tcPr marL="45720" marR="45720" marT="18288" marB="18288" anchor="ctr">
+                    <a:solidFill>
+                      <a:srgbClr val="FFFFFF"/>
+                    </a:solidFill>
+                  </a:tcPr>
+                </a:tc>
+              </a:tr>
+              <a:tr h="292608">
+                <a:tc>
+                  <a:txBody>
+                    <a:bodyPr/>
+                    <a:lstStyle/>
+                    <a:p>
+                      <a:pPr algn="l"/>
+                      <a:r>
+                        <a:rPr sz="1200" b="0">
+                          <a:solidFill>
+                            <a:srgbClr val="16212E"/>
+                          </a:solidFill>
+                          <a:latin typeface="Microsoft JhengHei"/>
+                        </a:rPr>
+                        <a:t>R7 組織與管理 · 成功 高　缺管理…</a:t>
+                      </a:r>
+                    </a:p>
+                  </a:txBody>
+                  <a:tcPr marL="45720" marR="45720" marT="18288" marB="18288" anchor="ctr">
+                    <a:solidFill>
+                      <a:srgbClr val="FFFFFF"/>
+                    </a:solidFill>
+                  </a:tcPr>
+                </a:tc>
+                <a:tc>
+                  <a:txBody>
+                    <a:bodyPr/>
+                    <a:lstStyle/>
+                    <a:p>
+                      <a:pPr algn="ctr"/>
+                      <a:r>
+                        <a:rPr sz="1200" b="0">
+                          <a:solidFill>
+                            <a:srgbClr val="6B7885"/>
+                          </a:solidFill>
+                          <a:latin typeface="Microsoft JhengHei"/>
+                        </a:rPr>
+                        <a:t>問責:贊助人指派 +　決策門出席…</a:t>
+                      </a:r>
+                    </a:p>
+                  </a:txBody>
+                  <a:tcPr marL="45720" marR="45720" marT="18288" marB="18288" anchor="ctr">
+                    <a:solidFill>
+                      <a:srgbClr val="FFFFFF"/>
+                    </a:solidFill>
+                  </a:tcPr>
+                </a:tc>
+                <a:tc>
+                  <a:txBody>
+                    <a:bodyPr/>
+                    <a:lstStyle/>
+                    <a:p>
+                      <a:pPr algn="ctr"/>
+                      <a:r>
+                        <a:rPr sz="1200" b="0">
+                          <a:solidFill>
+                            <a:srgbClr val="6B7885"/>
+                          </a:solidFill>
+                          <a:latin typeface="Microsoft JhengHei"/>
+                        </a:rPr>
+                        <a:t>決策門增加治理負擔　與會議成本…</a:t>
+                      </a:r>
+                    </a:p>
+                  </a:txBody>
+                  <a:tcPr marL="45720" marR="45720" marT="18288" marB="18288" anchor="ctr">
+                    <a:solidFill>
+                      <a:srgbClr val="FFFFFF"/>
+                    </a:solidFill>
+                  </a:tcPr>
+                </a:tc>
+                <a:tc>
+                  <a:txBody>
+                    <a:bodyPr/>
+                    <a:lstStyle/>
+                    <a:p>
+                      <a:pPr algn="ctr"/>
+                      <a:r>
+                        <a:rPr sz="1200" b="0">
+                          <a:solidFill>
+                            <a:srgbClr val="6B7885"/>
+                          </a:solidFill>
+                          <a:latin typeface="Microsoft JhengHei"/>
+                        </a:rPr>
+                        <a:t>決策門連續兩次　無高階出席…</a:t>
+                      </a:r>
+                    </a:p>
+                  </a:txBody>
+                  <a:tcPr marL="45720" marR="45720" marT="18288" marB="18288" anchor="ctr">
+                    <a:solidFill>
+                      <a:srgbClr val="FFFFFF"/>
+                    </a:solidFill>
+                  </a:tcPr>
+                </a:tc>
+              </a:tr>
+              <a:tr h="292608">
                 <a:tc>
                   <a:txBody>
                     <a:bodyPr/>
@@ -16002,8 +17241,7 @@
                           </a:solidFill>
                           <a:latin typeface="Microsoft JhengHei"/>
                         </a:rPr>
-                        <a:t>R8 政治法律政策 · 尚無緩解
-「曾判為誤報」的舉證地位</a:t>
+                        <a:t>R8 政治法律政策 · 尚無緩解　「…</a:t>
                       </a:r>
                     </a:p>
                   </a:txBody>
@@ -16026,8 +17264,7 @@
                           </a:solidFill>
                           <a:latin typeface="Microsoft JhengHei"/>
                         </a:rPr>
-                        <a:t>問責:法務書面意見
-於 G1(第 6 週)前到位</a:t>
+                        <a:t>問責:法務書面意見　於 G1(第 6…</a:t>
                       </a:r>
                     </a:p>
                   </a:txBody>
@@ -16050,8 +17287,7 @@
                           </a:solidFill>
                           <a:latin typeface="Microsoft JhengHei"/>
                         </a:rPr>
-                        <a:t>無 —— 目前沒有
-可執行的緩解措施</a:t>
+                        <a:t>無 —— 目前沒有　可執行的緩解…</a:t>
                       </a:r>
                     </a:p>
                   </a:txBody>
@@ -16074,8 +17310,7 @@
                           </a:solidFill>
                           <a:latin typeface="Microsoft JhengHei"/>
                         </a:rPr>
-                        <a:t>客戶回頭標記的案件中
-出現援引我方誤報的爭議</a:t>
+                        <a:t>客戶回頭標記的案件中　出現援引…</a:t>
                       </a:r>
                     </a:p>
                   </a:txBody>
@@ -16086,7 +17321,7 @@
                   </a:tcPr>
                 </a:tc>
               </a:tr>
-              <a:tr h="569214">
+              <a:tr h="292608">
                 <a:tc>
                   <a:txBody>
                     <a:bodyPr/>
@@ -16100,8 +17335,7 @@
                           </a:solidFill>
                           <a:latin typeface="Microsoft JhengHei"/>
                         </a:rPr>
-                        <a:t>R9 倫理｜自動結案的漏放
-本案自己造成的 · 放行門在移交後</a:t>
+                        <a:t>R9 倫理｜自動結案的漏放　本案自…</a:t>
                       </a:r>
                     </a:p>
                   </a:txBody>
@@ -16124,8 +17358,7 @@
                           </a:solidFill>
                           <a:latin typeface="Microsoft JhengHei"/>
                         </a:rPr>
-                        <a:t>問責:六個月影子模式(對外 0%)
-碰撞 / 疲勞 / 行人不自動結案</a:t>
+                        <a:t>問責:六個月影子模式(對外 0%)…</a:t>
                       </a:r>
                     </a:p>
                   </a:txBody>
@@ -16148,8 +17381,7 @@
                           </a:solidFill>
                           <a:latin typeface="Microsoft JhengHei"/>
                         </a:rPr>
-                        <a:t>抽樣稽核吃掉自動化
-省下來的一部分(見資源頁)</a:t>
+                        <a:t>抽樣稽核吃掉自動化　省下來的一…</a:t>
                       </a:r>
                     </a:p>
                   </a:txBody>
@@ -16172,8 +17404,7 @@
                           </a:solidFill>
                           <a:latin typeface="Microsoft JhengHei"/>
                         </a:rPr>
-                        <a:t>漏濾率(否決型):自動結案桶
-與人工桶的漏放率差值 95% CI</a:t>
+                        <a:t>漏濾率(否決型):自動結案桶　與…</a:t>
                       </a:r>
                     </a:p>
                   </a:txBody>
@@ -16184,7 +17415,7 @@
                   </a:tcPr>
                 </a:tc>
               </a:tr>
-              <a:tr h="569214">
+              <a:tr h="292608">
                 <a:tc>
                   <a:txBody>
                     <a:bodyPr/>
@@ -16198,8 +17429,7 @@
                           </a:solidFill>
                           <a:latin typeface="Microsoft JhengHei"/>
                         </a:rPr>
-                        <a:t>R10 倫理｜自動結案的冤枉
-本案自己造成的 · 放行門在移交後</a:t>
+                        <a:t>R10 倫理｜自動結案的冤枉　本案…</a:t>
                       </a:r>
                     </a:p>
                   </a:txBody>
@@ -16222,8 +17452,7 @@
                           </a:solidFill>
                           <a:latin typeface="Microsoft JhengHei"/>
                         </a:rPr>
-                        <a:t>問責:申訴即強制轉人工
-且不得由同一模型複判</a:t>
+                        <a:t>問責:申訴即強制轉人工　且不得…</a:t>
                       </a:r>
                     </a:p>
                   </a:txBody>
@@ -16246,8 +17475,7 @@
                           </a:solidFill>
                           <a:latin typeface="Microsoft JhengHei"/>
                         </a:rPr>
-                        <a:t>轉人工的量與時效
-回到人力瓶頸上</a:t>
+                        <a:t>轉人工的量與時效　回到人力瓶頸…</a:t>
                       </a:r>
                     </a:p>
                   </a:txBody>
@@ -16270,8 +17498,7 @@
                           </a:solidFill>
                           <a:latin typeface="Microsoft JhengHei"/>
                         </a:rPr>
-                        <a:t>申訴率與
-申訴翻案率</a:t>
+                        <a:t>申訴率與　申訴翻案率…</a:t>
                       </a:r>
                     </a:p>
                   </a:txBody>
@@ -16294,8 +17521,8 @@
         </p:nvSpPr>
         <p:spPr>
           <a:xfrm>
-            <a:off x="658368" y="5792596"/>
-            <a:ext cx="9658807" cy="681355"/>
+            <a:off x="658368" y="5810332"/>
+            <a:ext cx="9658807" cy="700195"/>
           </a:xfrm>
           <a:prstGeom prst="roundRect">
             <a:avLst>
@@ -16340,8 +17567,8 @@
         </p:nvSpPr>
         <p:spPr>
           <a:xfrm>
-            <a:off x="841247" y="5792596"/>
-            <a:ext cx="9293047" cy="681355"/>
+            <a:off x="841247" y="5810332"/>
+            <a:ext cx="9293047" cy="700195"/>
           </a:xfrm>
           <a:prstGeom prst="rect">
             <a:avLst/>
@@ -16560,7 +17787,7 @@
         </p:nvGraphicFramePr>
         <p:xfrm>
           <a:off x="658368" y="1755648"/>
-          <a:ext cx="10874957" cy="3744468"/>
+          <a:ext cx="10874957" cy="2670048"/>
         </p:xfrm>
         <a:graphic>
           <a:graphicData uri="http://schemas.openxmlformats.org/drawingml/2006/table">
@@ -16644,7 +17871,7 @@
                   </a:tcPr>
                 </a:tc>
               </a:tr>
-              <a:tr h="569214">
+              <a:tr h="292608">
                 <a:tc>
                   <a:txBody>
                     <a:bodyPr/>
@@ -16658,8 +17885,7 @@
                           </a:solidFill>
                           <a:latin typeface="Microsoft JhengHei"/>
                         </a:rPr>
-                        <a:t>1 人類、社會與環境福祉
-期內同樣人力承接更高複核量;移交後那約 850 筆無人覆核〔推估,非實測〕</a:t>
+                        <a:t>1 人類、社會與環境福祉　期內同樣人力承接更高複核量;移交後那約 850 筆無人…</a:t>
                       </a:r>
                     </a:p>
                   </a:txBody>
@@ -16716,7 +17942,7 @@
                   </a:tcPr>
                 </a:tc>
               </a:tr>
-              <a:tr h="569214">
+              <a:tr h="292608">
                 <a:tc>
                   <a:txBody>
                     <a:bodyPr/>
@@ -16730,8 +17956,7 @@
                           </a:solidFill>
                           <a:latin typeface="Microsoft JhengHei"/>
                         </a:rPr>
-                        <a:t>2 以人為本的價值觀
-期內人仍逐筆判;移交後駕駛承受的是機器單方面的決定</a:t>
+                        <a:t>2 以人為本的價值觀　期內人仍逐筆判;移交後駕駛承受的是機器單方面的決定…</a:t>
                       </a:r>
                     </a:p>
                   </a:txBody>
@@ -16788,7 +18013,7 @@
                   </a:tcPr>
                 </a:tc>
               </a:tr>
-              <a:tr h="569214">
+              <a:tr h="292608">
                 <a:tc>
                   <a:txBody>
                     <a:bodyPr/>
@@ -16802,8 +18027,7 @@
                           </a:solidFill>
                           <a:latin typeface="Microsoft JhengHei"/>
                         </a:rPr>
-                        <a:t>3 公平性 (Australian Human Rights Commission, 2020)
-期內排序仍依客戶購買量;移交後配給依據換成機器的信心</a:t>
+                        <a:t>3 公平性 (Australian Human Rights Commission, 2020)　期內排序仍依客戶…</a:t>
                       </a:r>
                     </a:p>
                   </a:txBody>
@@ -16860,7 +18084,78 @@
                   </a:tcPr>
                 </a:tc>
               </a:tr>
-              <a:tr h="569214">
+              <a:tr h="292608">
+                <a:tc>
+                  <a:txBody>
+                    <a:bodyPr/>
+                    <a:lstStyle/>
+                    <a:p>
+                      <a:pPr algn="l"/>
+                      <a:r>
+                        <a:rPr sz="1200" b="0">
+                          <a:solidFill>
+                            <a:srgbClr val="16212E"/>
+                          </a:solidFill>
+                          <a:latin typeface="Microsoft JhengHei"/>
+                        </a:rPr>
+                        <a:t>4 隱私保護與安全　擴大影像調閱與判定紀錄保存;唯一不因自動結案而惡化的一條…</a:t>
+                      </a:r>
+                    </a:p>
+                  </a:txBody>
+                  <a:tcPr marL="45720" marR="45720" marT="18288" marB="18288" anchor="ctr">
+                    <a:solidFill>
+                      <a:srgbClr val="FFFFFF"/>
+                    </a:solidFill>
+                  </a:tcPr>
+                </a:tc>
+                <a:tc>
+                  <a:txBody>
+                    <a:bodyPr/>
+                    <a:lstStyle/>
+                    <a:p>
+                      <a:pPr algn="ctr"/>
+                      <a:r>
+                        <a:rPr sz="1200" b="0">
+                          <a:solidFill>
+                            <a:srgbClr val="6B7885"/>
+                          </a:solidFill>
+                          <a:latin typeface="Microsoft JhengHei"/>
+                        </a:rPr>
+                        <a:t>部分</a:t>
+                      </a:r>
+                    </a:p>
+                  </a:txBody>
+                  <a:tcPr marL="45720" marR="45720" marT="18288" marB="18288" anchor="ctr">
+                    <a:solidFill>
+                      <a:srgbClr val="FFFFFF"/>
+                    </a:solidFill>
+                  </a:tcPr>
+                </a:tc>
+                <a:tc>
+                  <a:txBody>
+                    <a:bodyPr/>
+                    <a:lstStyle/>
+                    <a:p>
+                      <a:pPr algn="ctr"/>
+                      <a:r>
+                        <a:rPr sz="1200" b="0">
+                          <a:solidFill>
+                            <a:srgbClr val="6B7885"/>
+                          </a:solidFill>
+                          <a:latin typeface="Microsoft JhengHei"/>
+                        </a:rPr>
+                        <a:t>部分</a:t>
+                      </a:r>
+                    </a:p>
+                  </a:txBody>
+                  <a:tcPr marL="45720" marR="45720" marT="18288" marB="18288" anchor="ctr">
+                    <a:solidFill>
+                      <a:srgbClr val="FFFFFF"/>
+                    </a:solidFill>
+                  </a:tcPr>
+                </a:tc>
+              </a:tr>
+              <a:tr h="292608">
                 <a:tc>
                   <a:txBody>
                     <a:bodyPr/>
@@ -16874,8 +18169,7 @@
                           </a:solidFill>
                           <a:latin typeface="Microsoft JhengHei"/>
                         </a:rPr>
-                        <a:t>5 可靠性與安全性
-漏放率目前不存在,只有一份 39 筆人工觸發測試(獨立樣本,自註為下限)</a:t>
+                        <a:t>5 可靠性與安全性　漏放率目前不存在,只有一份 39 筆人工觸發測試(獨立樣本,自…</a:t>
                       </a:r>
                     </a:p>
                   </a:txBody>
@@ -16932,7 +18226,78 @@
                   </a:tcPr>
                 </a:tc>
               </a:tr>
-              <a:tr h="569214">
+              <a:tr h="292608">
+                <a:tc>
+                  <a:txBody>
+                    <a:bodyPr/>
+                    <a:lstStyle/>
+                    <a:p>
+                      <a:pPr algn="l"/>
+                      <a:r>
+                        <a:rPr sz="1200" b="0">
+                          <a:solidFill>
+                            <a:srgbClr val="16212E"/>
+                          </a:solidFill>
+                          <a:latin typeface="Microsoft JhengHei"/>
+                        </a:rPr>
+                        <a:t>6 透明性與解釋性　對客戶揭露到哪一層尚未決定;移交後客戶不會知道那是機器判…</a:t>
+                      </a:r>
+                    </a:p>
+                  </a:txBody>
+                  <a:tcPr marL="45720" marR="45720" marT="18288" marB="18288" anchor="ctr">
+                    <a:solidFill>
+                      <a:srgbClr val="FFFFFF"/>
+                    </a:solidFill>
+                  </a:tcPr>
+                </a:tc>
+                <a:tc>
+                  <a:txBody>
+                    <a:bodyPr/>
+                    <a:lstStyle/>
+                    <a:p>
+                      <a:pPr algn="ctr"/>
+                      <a:r>
+                        <a:rPr sz="1200" b="0">
+                          <a:solidFill>
+                            <a:srgbClr val="6B7885"/>
+                          </a:solidFill>
+                          <a:latin typeface="Microsoft JhengHei"/>
+                        </a:rPr>
+                        <a:t>部分</a:t>
+                      </a:r>
+                    </a:p>
+                  </a:txBody>
+                  <a:tcPr marL="45720" marR="45720" marT="18288" marB="18288" anchor="ctr">
+                    <a:solidFill>
+                      <a:srgbClr val="FFFFFF"/>
+                    </a:solidFill>
+                  </a:tcPr>
+                </a:tc>
+                <a:tc>
+                  <a:txBody>
+                    <a:bodyPr/>
+                    <a:lstStyle/>
+                    <a:p>
+                      <a:pPr algn="ctr"/>
+                      <a:r>
+                        <a:rPr sz="1200" b="0">
+                          <a:solidFill>
+                            <a:srgbClr val="6B7885"/>
+                          </a:solidFill>
+                          <a:latin typeface="Microsoft JhengHei"/>
+                        </a:rPr>
+                        <a:t>未達成</a:t>
+                      </a:r>
+                    </a:p>
+                  </a:txBody>
+                  <a:tcPr marL="45720" marR="45720" marT="18288" marB="18288" anchor="ctr">
+                    <a:solidFill>
+                      <a:srgbClr val="FFFFFF"/>
+                    </a:solidFill>
+                  </a:tcPr>
+                </a:tc>
+              </a:tr>
+              <a:tr h="292608">
                 <a:tc>
                   <a:txBody>
                     <a:bodyPr/>
@@ -16946,8 +18311,7 @@
                           </a:solidFill>
                           <a:latin typeface="Microsoft JhengHei"/>
                         </a:rPr>
-                        <a:t>7 可申訴性
-只有車隊安全主管能標記,駕駛本人不能提出質疑</a:t>
+                        <a:t>7 可申訴性　只有車隊安全主管能標記,駕駛本人不能提出質疑…</a:t>
                       </a:r>
                     </a:p>
                   </a:txBody>
@@ -16993,8 +18357,7 @@
                           </a:solidFill>
                           <a:latin typeface="Microsoft JhengHei"/>
                         </a:rPr>
-                        <a:t>未達成
-部署否決條件</a:t>
+                        <a:t>未達成　部署否決條件…</a:t>
                       </a:r>
                     </a:p>
                   </a:txBody>
@@ -17005,7 +18368,7 @@
                   </a:tcPr>
                 </a:tc>
               </a:tr>
-              <a:tr h="569214">
+              <a:tr h="292608">
                 <a:tc>
                   <a:txBody>
                     <a:bodyPr/>
@@ -17019,8 +18382,7 @@
                           </a:solidFill>
                           <a:latin typeface="Microsoft JhengHei"/>
                         </a:rPr>
-                        <a:t>8 問責性
-RACI 與三道決策門管的是專案;那 850 筆裡某一筆判錯,沒有人簽過名</a:t>
+                        <a:t>8 問責性　RACI 與三道決策門管的是專案;那 850 筆裡某一筆判錯,沒有人簽過名…</a:t>
                       </a:r>
                     </a:p>
                   </a:txBody>
@@ -17089,8 +18451,8 @@
         </p:nvSpPr>
         <p:spPr>
           <a:xfrm>
-            <a:off x="658368" y="5792596"/>
-            <a:ext cx="9658807" cy="681355"/>
+            <a:off x="658368" y="5646406"/>
+            <a:ext cx="9658807" cy="864121"/>
           </a:xfrm>
           <a:prstGeom prst="roundRect">
             <a:avLst>
@@ -17135,8 +18497,8 @@
         </p:nvSpPr>
         <p:spPr>
           <a:xfrm>
-            <a:off x="841247" y="5792596"/>
-            <a:ext cx="9293047" cy="681355"/>
+            <a:off x="841247" y="5646406"/>
+            <a:ext cx="9293047" cy="864121"/>
           </a:xfrm>
           <a:prstGeom prst="rect">
             <a:avLst/>
@@ -17161,7 +18523,7 @@
                 </a:solidFill>
                 <a:latin typeface="Microsoft JhengHei"/>
               </a:rPr>
-              <a:t>移交後那七盞紅燈掛在第 24 週那道門上;今天要批的是前六週的量測 —— 那正是把它們變回琥…</a:t>
+              <a:t>移交後那七盞紅燈掛在第 24 週那道門上;今天要批的是前六週的量測 —— 那正是把它們變回琥珀的唯一路徑。</a:t>
             </a:r>
           </a:p>
         </p:txBody>
@@ -17354,7 +18716,7 @@
         <p:spPr>
           <a:xfrm>
             <a:off x="658368" y="1755648"/>
-            <a:ext cx="10874959" cy="443084"/>
+            <a:ext cx="10874959" cy="329184"/>
           </a:xfrm>
           <a:prstGeom prst="roundRect">
             <a:avLst>
@@ -17400,7 +18762,7 @@
         <p:spPr>
           <a:xfrm>
             <a:off x="841247" y="1755648"/>
-            <a:ext cx="10509199" cy="443084"/>
+            <a:ext cx="10509199" cy="329184"/>
           </a:xfrm>
           <a:prstGeom prst="rect">
             <a:avLst/>
@@ -17439,8 +18801,8 @@
           <p:nvPr/>
         </p:nvGraphicFramePr>
         <p:xfrm>
-          <a:off x="658368" y="2399900"/>
-          <a:ext cx="10874957" cy="1467612"/>
+          <a:off x="658368" y="2212848"/>
+          <a:ext cx="10874957" cy="2670048"/>
         </p:xfrm>
         <a:graphic>
           <a:graphicData uri="http://schemas.openxmlformats.org/drawingml/2006/table">
@@ -17524,7 +18886,7 @@
                   </a:tcPr>
                 </a:tc>
               </a:tr>
-              <a:tr h="569214">
+              <a:tr h="292608">
                 <a:tc>
                   <a:txBody>
                     <a:bodyPr/>
@@ -17561,7 +18923,7 @@
                           </a:solidFill>
                           <a:latin typeface="Microsoft JhengHei"/>
                         </a:rPr>
-                        <a:t>單件爭議從分析到回信的完整鏈路,平均 2–5 天;約半數超過兩天(營運端估計,不是量測,W6 交出正式量測)</a:t>
+                        <a:t>單件爭議從分析到回信的完整鏈路,平均 2–5 天;約…</a:t>
                       </a:r>
                     </a:p>
                   </a:txBody>
@@ -17584,7 +18946,7 @@
                           </a:solidFill>
                           <a:latin typeface="Microsoft JhengHei"/>
                         </a:rPr>
-                        <a:t>2 天內;單純案件當天〔提案目標 · 客戶期望,非已簽訂之服務水準協議〕。改善來源有兩項:證據包自動…</a:t>
+                        <a:t>2 天內;單純案件當天〔提案目標 · 客戶期望,非已…</a:t>
                       </a:r>
                     </a:p>
                   </a:txBody>
@@ -17595,7 +18957,149 @@
                   </a:tcPr>
                 </a:tc>
               </a:tr>
-              <a:tr h="569214">
+              <a:tr h="292608">
+                <a:tc>
+                  <a:txBody>
+                    <a:bodyPr/>
+                    <a:lstStyle/>
+                    <a:p>
+                      <a:pPr algn="l"/>
+                      <a:r>
+                        <a:rPr sz="1200" b="0">
+                          <a:solidFill>
+                            <a:srgbClr val="16212E"/>
+                          </a:solidFill>
+                          <a:latin typeface="Microsoft JhengHei"/>
+                        </a:rPr>
+                        <a:t>業務② 獲得人工驗證判定的客戶涵蓋率</a:t>
+                      </a:r>
+                    </a:p>
+                  </a:txBody>
+                  <a:tcPr marL="45720" marR="45720" marT="18288" marB="18288" anchor="ctr">
+                    <a:solidFill>
+                      <a:srgbClr val="FFFFFF"/>
+                    </a:solidFill>
+                  </a:tcPr>
+                </a:tc>
+                <a:tc>
+                  <a:txBody>
+                    <a:bodyPr/>
+                    <a:lstStyle/>
+                    <a:p>
+                      <a:pPr algn="ctr"/>
+                      <a:r>
+                        <a:rPr sz="1200" b="0">
+                          <a:solidFill>
+                            <a:srgbClr val="6B7885"/>
+                          </a:solidFill>
+                          <a:latin typeface="Microsoft JhengHei"/>
+                        </a:rPr>
+                        <a:t>現況為配給制,依購買量與問題嚴重性排序;涵蓋率…</a:t>
+                      </a:r>
+                    </a:p>
+                  </a:txBody>
+                  <a:tcPr marL="45720" marR="45720" marT="18288" marB="18288" anchor="ctr">
+                    <a:solidFill>
+                      <a:srgbClr val="FFFFFF"/>
+                    </a:solidFill>
+                  </a:tcPr>
+                </a:tc>
+                <a:tc>
+                  <a:txBody>
+                    <a:bodyPr/>
+                    <a:lstStyle/>
+                    <a:p>
+                      <a:pPr algn="ctr"/>
+                      <a:r>
+                        <a:rPr sz="1200" b="0">
+                          <a:solidFill>
+                            <a:srgbClr val="6B7885"/>
+                          </a:solidFill>
+                          <a:latin typeface="Microsoft JhengHei"/>
+                        </a:rPr>
+                        <a:t>本案期內維持 100%(影子模式,機器不對外結案)。…</a:t>
+                      </a:r>
+                    </a:p>
+                  </a:txBody>
+                  <a:tcPr marL="45720" marR="45720" marT="18288" marB="18288" anchor="ctr">
+                    <a:solidFill>
+                      <a:srgbClr val="FFFFFF"/>
+                    </a:solidFill>
+                  </a:tcPr>
+                </a:tc>
+              </a:tr>
+              <a:tr h="292608">
+                <a:tc>
+                  <a:txBody>
+                    <a:bodyPr/>
+                    <a:lstStyle/>
+                    <a:p>
+                      <a:pPr algn="l"/>
+                      <a:r>
+                        <a:rPr sz="1200" b="0">
+                          <a:solidFill>
+                            <a:srgbClr val="16212E"/>
+                          </a:solidFill>
+                          <a:latin typeface="Microsoft JhengHei"/>
+                        </a:rPr>
+                        <a:t>業務③ 可服務的每日事件量上限</a:t>
+                      </a:r>
+                    </a:p>
+                  </a:txBody>
+                  <a:tcPr marL="45720" marR="45720" marT="18288" marB="18288" anchor="ctr">
+                    <a:solidFill>
+                      <a:srgbClr val="FFFFFF"/>
+                    </a:solidFill>
+                  </a:tcPr>
+                </a:tc>
+                <a:tc>
+                  <a:txBody>
+                    <a:bodyPr/>
+                    <a:lstStyle/>
+                    <a:p>
+                      <a:pPr algn="ctr"/>
+                      <a:r>
+                        <a:rPr sz="1200" b="0">
+                          <a:solidFill>
+                            <a:srgbClr val="6B7885"/>
+                          </a:solidFill>
+                          <a:latin typeface="Microsoft JhengHei"/>
+                        </a:rPr>
+                        <a:t>現況撐一個大型車隊約 3,000 筆/天</a:t>
+                      </a:r>
+                    </a:p>
+                  </a:txBody>
+                  <a:tcPr marL="45720" marR="45720" marT="18288" marB="18288" anchor="ctr">
+                    <a:solidFill>
+                      <a:srgbClr val="FFFFFF"/>
+                    </a:solidFill>
+                  </a:tcPr>
+                </a:tc>
+                <a:tc>
+                  <a:txBody>
+                    <a:bodyPr/>
+                    <a:lstStyle/>
+                    <a:p>
+                      <a:pPr algn="ctr"/>
+                      <a:r>
+                        <a:rPr sz="1200" b="0">
+                          <a:solidFill>
+                            <a:srgbClr val="6B7885"/>
+                          </a:solidFill>
+                          <a:latin typeface="Microsoft JhengHei"/>
+                        </a:rPr>
+                        <a:t>支撐全客戶 13,000+ 筆/天〔提案目標;所需人力…</a:t>
+                      </a:r>
+                    </a:p>
+                  </a:txBody>
+                  <a:tcPr marL="45720" marR="45720" marT="18288" marB="18288" anchor="ctr">
+                    <a:solidFill>
+                      <a:srgbClr val="FFFFFF"/>
+                    </a:solidFill>
+                  </a:tcPr>
+                </a:tc>
+              </a:tr>
+              <a:tr h="292608">
                 <a:tc>
                   <a:txBody>
                     <a:bodyPr/>
@@ -17632,7 +19136,7 @@
                           </a:solidFill>
                           <a:latin typeface="Microsoft JhengHei"/>
                         </a:rPr>
-                        <a:t>不做本案、以現行做法覆蓋全部既有客戶需 17–24 人(現有 5 人)</a:t>
+                        <a:t>不做本案、以現行做法覆蓋全部既有客戶需 17–24 …</a:t>
                       </a:r>
                     </a:p>
                   </a:txBody>
@@ -17655,13 +19159,297 @@
                           </a:solidFill>
                           <a:latin typeface="Microsoft JhengHei"/>
                         </a:rPr>
-                        <a:t>做本案、移交後開到天花板需 11–12 人(仍須增聘 6–7 人)→ 可避免 5–13 人 ≈ 每年 NT$520–1,521 …</a:t>
+                        <a:t>做本案、移交後開到天花板需 11–12 人(仍須增聘 …</a:t>
                       </a:r>
                     </a:p>
                   </a:txBody>
                   <a:tcPr marL="45720" marR="45720" marT="18288" marB="18288" anchor="ctr">
                     <a:solidFill>
                       <a:srgbClr val="FBEFEF"/>
+                    </a:solidFill>
+                  </a:tcPr>
+                </a:tc>
+              </a:tr>
+              <a:tr h="292608">
+                <a:tc>
+                  <a:txBody>
+                    <a:bodyPr/>
+                    <a:lstStyle/>
+                    <a:p>
+                      <a:pPr algn="l"/>
+                      <a:r>
+                        <a:rPr sz="1200" b="0">
+                          <a:solidFill>
+                            <a:srgbClr val="16212E"/>
+                          </a:solidFill>
+                          <a:latin typeface="Microsoft JhengHei"/>
+                        </a:rPr>
+                        <a:t>營運⑤⑥ 兩條工作流的每筆人工工時</a:t>
+                      </a:r>
+                    </a:p>
+                  </a:txBody>
+                  <a:tcPr marL="45720" marR="45720" marT="18288" marB="18288" anchor="ctr">
+                    <a:solidFill>
+                      <a:srgbClr val="FFFFFF"/>
+                    </a:solidFill>
+                  </a:tcPr>
+                </a:tc>
+                <a:tc>
+                  <a:txBody>
+                    <a:bodyPr/>
+                    <a:lstStyle/>
+                    <a:p>
+                      <a:pPr algn="ctr"/>
+                      <a:r>
+                        <a:rPr sz="1200" b="0">
+                          <a:solidFill>
+                            <a:srgbClr val="6B7885"/>
+                          </a:solidFill>
+                          <a:latin typeface="Microsoft JhengHei"/>
+                        </a:rPr>
+                        <a:t>批次複核約 20 秒/筆(全量;營運端實務估計,尚未…</a:t>
+                      </a:r>
+                    </a:p>
+                  </a:txBody>
+                  <a:tcPr marL="45720" marR="45720" marT="18288" marB="18288" anchor="ctr">
+                    <a:solidFill>
+                      <a:srgbClr val="FFFFFF"/>
+                    </a:solidFill>
+                  </a:tcPr>
+                </a:tc>
+                <a:tc>
+                  <a:txBody>
+                    <a:bodyPr/>
+                    <a:lstStyle/>
+                    <a:p>
+                      <a:pPr algn="ctr"/>
+                      <a:r>
+                        <a:rPr sz="1200" b="0">
+                          <a:solidFill>
+                            <a:srgbClr val="6B7885"/>
+                          </a:solidFill>
+                          <a:latin typeface="Microsoft JhengHei"/>
+                        </a:rPr>
+                        <a:t>兩者的正式量測都提前到 W6,與時間拆解同批交出…</a:t>
+                      </a:r>
+                    </a:p>
+                  </a:txBody>
+                  <a:tcPr marL="45720" marR="45720" marT="18288" marB="18288" anchor="ctr">
+                    <a:solidFill>
+                      <a:srgbClr val="FFFFFF"/>
+                    </a:solidFill>
+                  </a:tcPr>
+                </a:tc>
+              </a:tr>
+              <a:tr h="292608">
+                <a:tc>
+                  <a:txBody>
+                    <a:bodyPr/>
+                    <a:lstStyle/>
+                    <a:p>
+                      <a:pPr algn="l"/>
+                      <a:r>
+                        <a:rPr sz="1200" b="0">
+                          <a:solidFill>
+                            <a:srgbClr val="16212E"/>
+                          </a:solidFill>
+                          <a:latin typeface="Microsoft JhengHei"/>
+                        </a:rPr>
+                        <a:t>營運⑦ ADAS · 行車輔助誤報率</a:t>
+                      </a:r>
+                    </a:p>
+                  </a:txBody>
+                  <a:tcPr marL="45720" marR="45720" marT="18288" marB="18288" anchor="ctr">
+                    <a:solidFill>
+                      <a:srgbClr val="FFFFFF"/>
+                    </a:solidFill>
+                  </a:tcPr>
+                </a:tc>
+                <a:tc>
+                  <a:txBody>
+                    <a:bodyPr/>
+                    <a:lstStyle/>
+                    <a:p>
+                      <a:pPr algn="ctr"/>
+                      <a:r>
+                        <a:rPr sz="1200" b="0">
+                          <a:solidFill>
+                            <a:srgbClr val="6B7885"/>
+                          </a:solidFill>
+                          <a:latin typeface="Microsoft JhengHei"/>
+                        </a:rPr>
+                        <a:t>某小型車隊單月樣本 104 / 1,029 ≈ 10.1%(該樣…</a:t>
+                      </a:r>
+                    </a:p>
+                  </a:txBody>
+                  <a:tcPr marL="45720" marR="45720" marT="18288" marB="18288" anchor="ctr">
+                    <a:solidFill>
+                      <a:srgbClr val="FFFFFF"/>
+                    </a:solidFill>
+                  </a:tcPr>
+                </a:tc>
+                <a:tc>
+                  <a:txBody>
+                    <a:bodyPr/>
+                    <a:lstStyle/>
+                    <a:p>
+                      <a:pPr algn="ctr"/>
+                      <a:r>
+                        <a:rPr sz="1200" b="0">
+                          <a:solidFill>
+                            <a:srgbClr val="6B7885"/>
+                          </a:solidFill>
+                          <a:latin typeface="Microsoft JhengHei"/>
+                        </a:rPr>
+                        <a:t>降至 7% 以下〔提案目標;以該樣本為基準,G1 後依…</a:t>
+                      </a:r>
+                    </a:p>
+                  </a:txBody>
+                  <a:tcPr marL="45720" marR="45720" marT="18288" marB="18288" anchor="ctr">
+                    <a:solidFill>
+                      <a:srgbClr val="FFFFFF"/>
+                    </a:solidFill>
+                  </a:tcPr>
+                </a:tc>
+              </a:tr>
+              <a:tr h="292608">
+                <a:tc>
+                  <a:txBody>
+                    <a:bodyPr/>
+                    <a:lstStyle/>
+                    <a:p>
+                      <a:pPr algn="l"/>
+                      <a:r>
+                        <a:rPr sz="1200" b="0">
+                          <a:solidFill>
+                            <a:srgbClr val="16212E"/>
+                          </a:solidFill>
+                          <a:latin typeface="Microsoft JhengHei"/>
+                        </a:rPr>
+                        <a:t>營運⑧ 客戶回頭標記率(越低越好)</a:t>
+                      </a:r>
+                    </a:p>
+                  </a:txBody>
+                  <a:tcPr marL="45720" marR="45720" marT="18288" marB="18288" anchor="ctr">
+                    <a:solidFill>
+                      <a:srgbClr val="FFFFFF"/>
+                    </a:solidFill>
+                  </a:tcPr>
+                </a:tc>
+                <a:tc>
+                  <a:txBody>
+                    <a:bodyPr/>
+                    <a:lstStyle/>
+                    <a:p>
+                      <a:pPr algn="ctr"/>
+                      <a:r>
+                        <a:rPr sz="1200" b="0">
+                          <a:solidFill>
+                            <a:srgbClr val="6B7885"/>
+                          </a:solidFill>
+                          <a:latin typeface="Microsoft JhengHei"/>
+                        </a:rPr>
+                        <a:t>現況 5–10%;同時是「駕駛端無效警示率」的可觀測…</a:t>
+                      </a:r>
+                    </a:p>
+                  </a:txBody>
+                  <a:tcPr marL="45720" marR="45720" marT="18288" marB="18288" anchor="ctr">
+                    <a:solidFill>
+                      <a:srgbClr val="FFFFFF"/>
+                    </a:solidFill>
+                  </a:tcPr>
+                </a:tc>
+                <a:tc>
+                  <a:txBody>
+                    <a:bodyPr/>
+                    <a:lstStyle/>
+                    <a:p>
+                      <a:pPr algn="ctr"/>
+                      <a:r>
+                        <a:rPr sz="1200" b="0">
+                          <a:solidFill>
+                            <a:srgbClr val="6B7885"/>
+                          </a:solidFill>
+                          <a:latin typeface="Microsoft JhengHei"/>
+                        </a:rPr>
+                        <a:t>降至 5% 以下〔提案目標〕</a:t>
+                      </a:r>
+                    </a:p>
+                  </a:txBody>
+                  <a:tcPr marL="45720" marR="45720" marT="18288" marB="18288" anchor="ctr">
+                    <a:solidFill>
+                      <a:srgbClr val="FFFFFF"/>
+                    </a:solidFill>
+                  </a:tcPr>
+                </a:tc>
+              </a:tr>
+              <a:tr h="292608">
+                <a:tc>
+                  <a:txBody>
+                    <a:bodyPr/>
+                    <a:lstStyle/>
+                    <a:p>
+                      <a:pPr algn="l"/>
+                      <a:r>
+                        <a:rPr sz="1200" b="0">
+                          <a:solidFill>
+                            <a:srgbClr val="16212E"/>
+                          </a:solidFill>
+                          <a:latin typeface="Microsoft JhengHei"/>
+                        </a:rPr>
+                        <a:t>營運⑨ 尖峰徵調研發人時</a:t>
+                      </a:r>
+                    </a:p>
+                  </a:txBody>
+                  <a:tcPr marL="45720" marR="45720" marT="18288" marB="18288" anchor="ctr">
+                    <a:solidFill>
+                      <a:srgbClr val="FFFFFF"/>
+                    </a:solidFill>
+                  </a:tcPr>
+                </a:tc>
+                <a:tc>
+                  <a:txBody>
+                    <a:bodyPr/>
+                    <a:lstStyle/>
+                    <a:p>
+                      <a:pPr algn="ctr"/>
+                      <a:r>
+                        <a:rPr sz="1200" b="0">
+                          <a:solidFill>
+                            <a:srgbClr val="6B7885"/>
+                          </a:solidFill>
+                          <a:latin typeface="Microsoft JhengHei"/>
+                        </a:rPr>
+                        <a:t>尖峰徵調 7 位研發工程師(離開本職 · 非常態編制…</a:t>
+                      </a:r>
+                    </a:p>
+                  </a:txBody>
+                  <a:tcPr marL="45720" marR="45720" marT="18288" marB="18288" anchor="ctr">
+                    <a:solidFill>
+                      <a:srgbClr val="FFFFFF"/>
+                    </a:solidFill>
+                  </a:tcPr>
+                </a:tc>
+                <a:tc>
+                  <a:txBody>
+                    <a:bodyPr/>
+                    <a:lstStyle/>
+                    <a:p>
+                      <a:pPr algn="ctr"/>
+                      <a:r>
+                        <a:rPr sz="1200" b="0">
+                          <a:solidFill>
+                            <a:srgbClr val="6B7885"/>
+                          </a:solidFill>
+                          <a:latin typeface="Microsoft JhengHei"/>
+                        </a:rPr>
+                        <a:t>期內建立峰值徵調人時的量測基準,目標值於 G2 訂…</a:t>
+                      </a:r>
+                    </a:p>
+                  </a:txBody>
+                  <a:tcPr marL="45720" marR="45720" marT="18288" marB="18288" anchor="ctr">
+                    <a:solidFill>
+                      <a:srgbClr val="FFFFFF"/>
                     </a:solidFill>
                   </a:tcPr>
                 </a:tc>
@@ -17679,8 +19467,8 @@
           <p:nvPr/>
         </p:nvGraphicFramePr>
         <p:xfrm>
-          <a:off x="658368" y="4537510"/>
-          <a:ext cx="9658805" cy="1467612"/>
+          <a:off x="658368" y="5010912"/>
+          <a:ext cx="9658805" cy="1499616"/>
         </p:xfrm>
         <a:graphic>
           <a:graphicData uri="http://schemas.openxmlformats.org/drawingml/2006/table">
@@ -17788,7 +19576,7 @@
                   </a:tcPr>
                 </a:tc>
               </a:tr>
-              <a:tr h="569214">
+              <a:tr h="292608">
                 <a:tc>
                   <a:txBody>
                     <a:bodyPr/>
@@ -17825,7 +19613,7 @@
                           </a:solidFill>
                           <a:latin typeface="Microsoft JhengHei"/>
                         </a:rPr>
-                        <a:t>不存在。唯一量測是一份 39 筆人工觸發測試,獨立樣本…</a:t>
+                        <a:t>不存在。唯一量測是一份 …</a:t>
                       </a:r>
                     </a:p>
                   </a:txBody>
@@ -17848,7 +19636,7 @@
                           </a:solidFill>
                           <a:latin typeface="Microsoft JhengHei"/>
                         </a:rPr>
-                        <a:t>W6 交出帶 95% 信賴區間的點估計;上限值於 G1 由委員…</a:t>
+                        <a:t>W6 交出帶 95% 信賴區間…</a:t>
                       </a:r>
                     </a:p>
                   </a:txBody>
@@ -17871,7 +19659,7 @@
                           </a:solidFill>
                           <a:latin typeface="Microsoft JhengHei"/>
                         </a:rPr>
-                        <a:t>否決 G1 放不放行後段工作 · 技術負責人</a:t>
+                        <a:t>否決 G1 放不放行後段工…</a:t>
                       </a:r>
                     </a:p>
                   </a:txBody>
@@ -17882,7 +19670,195 @@
                   </a:tcPr>
                 </a:tc>
               </a:tr>
-              <a:tr h="569214">
+              <a:tr h="292608">
+                <a:tc>
+                  <a:txBody>
+                    <a:bodyPr/>
+                    <a:lstStyle/>
+                    <a:p>
+                      <a:pPr algn="l"/>
+                      <a:r>
+                        <a:rPr sz="1200" b="0">
+                          <a:solidFill>
+                            <a:srgbClr val="16212E"/>
+                          </a:solidFill>
+                          <a:latin typeface="Microsoft JhengHei"/>
+                        </a:rPr>
+                        <a:t>⑪ 複核者一致性</a:t>
+                      </a:r>
+                    </a:p>
+                  </a:txBody>
+                  <a:tcPr marL="45720" marR="45720" marT="18288" marB="18288" anchor="ctr">
+                    <a:solidFill>
+                      <a:srgbClr val="FFFFFF"/>
+                    </a:solidFill>
+                  </a:tcPr>
+                </a:tc>
+                <a:tc>
+                  <a:txBody>
+                    <a:bodyPr/>
+                    <a:lstStyle/>
+                    <a:p>
+                      <a:pPr algn="ctr"/>
+                      <a:r>
+                        <a:rPr sz="1200" b="0">
+                          <a:solidFill>
+                            <a:srgbClr val="6B7885"/>
+                          </a:solidFill>
+                          <a:latin typeface="Microsoft JhengHei"/>
+                        </a:rPr>
+                        <a:t>現況未量測</a:t>
+                      </a:r>
+                    </a:p>
+                  </a:txBody>
+                  <a:tcPr marL="45720" marR="45720" marT="18288" marB="18288" anchor="ctr">
+                    <a:solidFill>
+                      <a:srgbClr val="FFFFFF"/>
+                    </a:solidFill>
+                  </a:tcPr>
+                </a:tc>
+                <a:tc>
+                  <a:txBody>
+                    <a:bodyPr/>
+                    <a:lstStyle/>
+                    <a:p>
+                      <a:pPr algn="ctr"/>
+                      <a:r>
+                        <a:rPr sz="1200" b="0">
+                          <a:solidFill>
+                            <a:srgbClr val="6B7885"/>
+                          </a:solidFill>
+                          <a:latin typeface="Microsoft JhengHei"/>
+                        </a:rPr>
+                        <a:t>W10 前建立基線,目標值於…</a:t>
+                      </a:r>
+                    </a:p>
+                  </a:txBody>
+                  <a:tcPr marL="45720" marR="45720" marT="18288" marB="18288" anchor="ctr">
+                    <a:solidFill>
+                      <a:srgbClr val="FFFFFF"/>
+                    </a:solidFill>
+                  </a:tcPr>
+                </a:tc>
+                <a:tc>
+                  <a:txBody>
+                    <a:bodyPr/>
+                    <a:lstStyle/>
+                    <a:p>
+                      <a:pPr algn="ctr"/>
+                      <a:r>
+                        <a:rPr sz="1200" b="0">
+                          <a:solidFill>
+                            <a:srgbClr val="6B7885"/>
+                          </a:solidFill>
+                          <a:latin typeface="Microsoft JhengHei"/>
+                        </a:rPr>
+                        <a:t>否決 G2 准不准開放對照…</a:t>
+                      </a:r>
+                    </a:p>
+                  </a:txBody>
+                  <a:tcPr marL="45720" marR="45720" marT="18288" marB="18288" anchor="ctr">
+                    <a:solidFill>
+                      <a:srgbClr val="FFFFFF"/>
+                    </a:solidFill>
+                  </a:tcPr>
+                </a:tc>
+              </a:tr>
+              <a:tr h="292608">
+                <a:tc>
+                  <a:txBody>
+                    <a:bodyPr/>
+                    <a:lstStyle/>
+                    <a:p>
+                      <a:pPr algn="l"/>
+                      <a:r>
+                        <a:rPr sz="1200" b="0">
+                          <a:solidFill>
+                            <a:srgbClr val="16212E"/>
+                          </a:solidFill>
+                          <a:latin typeface="Microsoft JhengHei"/>
+                        </a:rPr>
+                        <a:t>⑫ 訓練資料可追溯率</a:t>
+                      </a:r>
+                    </a:p>
+                  </a:txBody>
+                  <a:tcPr marL="45720" marR="45720" marT="18288" marB="18288" anchor="ctr">
+                    <a:solidFill>
+                      <a:srgbClr val="FFFFFF"/>
+                    </a:solidFill>
+                  </a:tcPr>
+                </a:tc>
+                <a:tc>
+                  <a:txBody>
+                    <a:bodyPr/>
+                    <a:lstStyle/>
+                    <a:p>
+                      <a:pPr algn="ctr"/>
+                      <a:r>
+                        <a:rPr sz="1200" b="0">
+                          <a:solidFill>
+                            <a:srgbClr val="6B7885"/>
+                          </a:solidFill>
+                          <a:latin typeface="Microsoft JhengHei"/>
+                        </a:rPr>
+                        <a:t>0%</a:t>
+                      </a:r>
+                    </a:p>
+                  </a:txBody>
+                  <a:tcPr marL="45720" marR="45720" marT="18288" marB="18288" anchor="ctr">
+                    <a:solidFill>
+                      <a:srgbClr val="FFFFFF"/>
+                    </a:solidFill>
+                  </a:tcPr>
+                </a:tc>
+                <a:tc>
+                  <a:txBody>
+                    <a:bodyPr/>
+                    <a:lstStyle/>
+                    <a:p>
+                      <a:pPr algn="ctr"/>
+                      <a:r>
+                        <a:rPr sz="1200" b="0">
+                          <a:solidFill>
+                            <a:srgbClr val="6B7885"/>
+                          </a:solidFill>
+                          <a:latin typeface="Microsoft JhengHei"/>
+                        </a:rPr>
+                        <a:t>100%,無中間值</a:t>
+                      </a:r>
+                    </a:p>
+                  </a:txBody>
+                  <a:tcPr marL="45720" marR="45720" marT="18288" marB="18288" anchor="ctr">
+                    <a:solidFill>
+                      <a:srgbClr val="FFFFFF"/>
+                    </a:solidFill>
+                  </a:tcPr>
+                </a:tc>
+                <a:tc>
+                  <a:txBody>
+                    <a:bodyPr/>
+                    <a:lstStyle/>
+                    <a:p>
+                      <a:pPr algn="ctr"/>
+                      <a:r>
+                        <a:rPr sz="1200" b="0">
+                          <a:solidFill>
+                            <a:srgbClr val="6B7885"/>
+                          </a:solidFill>
+                          <a:latin typeface="Microsoft JhengHei"/>
+                        </a:rPr>
+                        <a:t>未達 100% 不移交(否決型…</a:t>
+                      </a:r>
+                    </a:p>
+                  </a:txBody>
+                  <a:tcPr marL="45720" marR="45720" marT="18288" marB="18288" anchor="ctr">
+                    <a:solidFill>
+                      <a:srgbClr val="FFFFFF"/>
+                    </a:solidFill>
+                  </a:tcPr>
+                </a:tc>
+              </a:tr>
+              <a:tr h="292608">
                 <a:tc>
                   <a:txBody>
                     <a:bodyPr/>
@@ -17919,7 +19895,7 @@
                           </a:solidFill>
                           <a:latin typeface="Microsoft JhengHei"/>
                         </a:rPr>
-                        <a:t>定義:被分到「有把握、可直接結案」桶,但描述錯誤且該…</a:t>
+                        <a:t>定義:被分到「有把握、可…</a:t>
                       </a:r>
                     </a:p>
                   </a:txBody>
@@ -17942,7 +19918,7 @@
                           </a:solidFill>
                           <a:latin typeface="Microsoft JhengHei"/>
                         </a:rPr>
-                        <a:t>W12 由影子模式軌交出「自動結案桶與人工桶的漏放率差…</a:t>
+                        <a:t>W12 由影子模式軌交出「…</a:t>
                       </a:r>
                     </a:p>
                   </a:txBody>
@@ -17965,7 +19941,7 @@
                           </a:solidFill>
                           <a:latin typeface="Microsoft JhengHei"/>
                         </a:rPr>
-                        <a:t>否決自動結案能不能對外生效 —— 沒有它,分流率就等於把…</a:t>
+                        <a:t>否決自動結案能不能對外生…</a:t>
                       </a:r>
                     </a:p>
                   </a:txBody>

--- a/Artificial Intelligence for Enterprises/Assessment3/Huang_26254793_421104_Assessment 3.pptx
+++ b/Artificial Intelligence for Enterprises/Assessment3/Huang_26254793_421104_Assessment 3.pptx
@@ -678,32 +678,22 @@
           </a:p>
           <a:p>
             <a:r>
+              <a:t>【card:G1 · 第 6 週｜因果判定門】同時要事前預註冊漏濾率的非劣性邊際 δ —— 判準必須寫在跑實驗之前。初步拆解顯示 AI 可處理段(找證據 + 判讀)佔全程 43%–78%,為營運端的初步估計,W1–6 交可稽核版本</a:t>
+            </a:r>
+          </a:p>
+          <a:p>
+            <a:r>
+              <a:t>【card:G1 · 第 6 週｜因果判定門】🔴 停的條件一:只有當「證據搜尋、誤報量與證據包製作」佔主要延遲,才續行後段;否則本案轉…</a:t>
+            </a:r>
+          </a:p>
+          <a:p>
+            <a:r>
               <a:t>【card:G1 · 第 6 週｜因果判定門】🔴 停的條件二:評估底座未產出 → 剩餘工作全數不續行</a:t>
             </a:r>
           </a:p>
           <a:p>
             <a:r>
-              <a:t>【card:G1 · 第 6 週｜因果判定門】同時要事前預註冊漏濾率的非劣性邊際 δ —— 判準必須寫在跑實驗之前。初步拆解顯示 AI 可處理段(找證據 + 判讀)佔全程 43%–78%,為營運端的初步估計,W1–6 交可稽核版本</a:t>
-            </a:r>
-          </a:p>
-          <a:p>
-            <a:r>
-              <a:t>【card:G1 · 第 6 週｜因果判定門】🔴 停的條件一:只有當「證據搜尋、誤報量與…</a:t>
-            </a:r>
-          </a:p>
-          <a:p>
-            <a:r>
-              <a:t>【card:G1 · 第 6 週｜因果判定門】🔴 停的條件二:評估底座未產出 → 剩餘工作…</a:t>
-            </a:r>
-          </a:p>
-          <a:p>
-            <a:r>
-              <a:t>【card:G1 · 第 6 週｜因果判定門】同時要事前預註冊漏濾率的非劣性邊際 δ ——…</a:t>
-            </a:r>
-          </a:p>
-          <a:p>
-            <a:r>
-              <a:t>【card:G2 · 第 12 週｜四臂比較門】同一凍結評估集上跑四臂(見下表),分兩軌:工具品質軌 · 結案判定軌</a:t>
+              <a:t>【card:G1 · 第 6 週｜因果判定門】同時要事前預註冊漏濾率的非劣性邊際 δ —— 判準必須寫在跑實驗之前。初步拆解顯示 AI 可…</a:t>
             </a:r>
           </a:p>
           <a:p>
@@ -713,32 +703,22 @@
           </a:p>
           <a:p>
             <a:r>
+              <a:t>【card:G2 · 第 12 週｜四臂比較門】🔴 但「自動結案要不要對外開啟」不由 G2、也不由 G3 決定 —— 那需要移交後一道獨立的門,不在本次請求範圍</a:t>
+            </a:r>
+          </a:p>
+          <a:p>
+            <a:r>
+              <a:t>【card:G2 · 第 12 週｜四臂比較門】🔴 這道門停不掉實驗,只能調整模型的假設與規模。規則式若已解掉大部分誤報 → 靶心改為殘…</a:t>
+            </a:r>
+          </a:p>
+          <a:p>
+            <a:r>
               <a:t>【card:G2 · 第 12 週｜四臂比較門】放行條件:人機判定品質不劣於現況,且人工觸碰時間與 P90 回覆時間達預註冊門檻</a:t>
             </a:r>
           </a:p>
           <a:p>
             <a:r>
-              <a:t>【card:G2 · 第 12 週｜四臂比較門】🔴 但「自動結案要不要對外開啟」不由 G2、也不由 G3 決定 —— 那需要移交後一道獨立的門,不在本次請求範圍</a:t>
-            </a:r>
-          </a:p>
-          <a:p>
-            <a:r>
-              <a:t>【card:G2 · 第 12 週｜四臂比較門】🔴 這道門停不掉實驗,只能調整模型的假設與…</a:t>
-            </a:r>
-          </a:p>
-          <a:p>
-            <a:r>
-              <a:t>【card:G2 · 第 12 週｜四臂比較門】放行條件:人機判定品質不劣於現況,且人工…</a:t>
-            </a:r>
-          </a:p>
-          <a:p>
-            <a:r>
-              <a:t>【card:G2 · 第 12 週｜四臂比較門】🔴 但「自動結案要不要對外開啟」不由 G2…</a:t>
-            </a:r>
-          </a:p>
-          <a:p>
-            <a:r>
-              <a:t>【card:G3 · 第 24 週｜部署決定門】🔴 停的條件:對照重訓證不出增量 → 模型端不部署,只留前四包的成果</a:t>
+              <a:t>【card:G2 · 第 12 週｜四臂比較門】🔴 但「自動結案要不要對外開啟」不由 G2、也不由 G3 決定 —— 那需要移交後一道獨立的門…</a:t>
             </a:r>
           </a:p>
           <a:p>
@@ -753,37 +733,12 @@
           </a:p>
           <a:p>
             <a:r>
-              <a:t>【card:G3 · 第 24 週｜部署決定門】就算證不出增量,公司仍留下第一套可重複的…</a:t>
-            </a:r>
-          </a:p>
-          <a:p>
-            <a:r>
-              <a:t>【card:G3 · 第 24 週｜部署決定門】對照實驗的設計(hold-out 怎麼凍 · 因子…</a:t>
-            </a:r>
-          </a:p>
-          <a:p>
-            <a:r>
-              <a:t>【matrix-cell】現況的基準線。沒有它,後面三臂就沒有「比什麼」</a:t>
-            </a:r>
-          </a:p>
-          <a:p>
-            <a:r>
-              <a:t>【matrix-cell】不含模型能解掉多少誤報。它是地端 VLM 的對照基線 —— 如果它就夠,本案的模型端該縮</a:t>
-            </a:r>
-          </a:p>
-          <a:p>
-            <a:r>
-              <a:t>【matrix-cell】人工觸碰時間 · P90 回覆時間 · 判定品質。這是六個月內真正會上線的形態,誤報率也只能在這一軌量</a:t>
-            </a:r>
-          </a:p>
-          <a:p>
-            <a:r>
-              <a:t>【matrix-cell】機器自己結案但不對外送,人照常逐筆判,兩邊比對</a:t>
-            </a:r>
-          </a:p>
-          <a:p>
-            <a:r>
-              <a:t>【matrix-cell】🔴 自動結案桶與人工桶的漏放率差值(95% 信賴區間),對照 G1 事前預註冊的非劣性邊際 δ;另計冤枉率(該翻案而未翻案)。前三臂全部含人,而要部署的是無人系統 —— 只有這一臂算得出自動結案的漏放率。🚫 判準是比差值、比事前邊際,不是兩條信賴區間的端點互比</a:t>
+              <a:t>【card:G3 · 第 24 週｜部署決定門】就算證不出增量,公司仍留下第一套可重複的模型評估與標註品質流程 —— 那個東西不隨這道門…</a:t>
+            </a:r>
+          </a:p>
+          <a:p>
+            <a:r>
+              <a:t>【card:G3 · 第 24 週｜部署決定門】對照實驗的設計(hold-out 怎麼凍 · 因子怎麼拆 · 預註冊門檻訂在哪)由技術負責人在 W8 …</a:t>
             </a:r>
           </a:p>
           <a:p>
@@ -948,21 +903,16 @@
           </a:p>
           <a:p>
             <a:r>
+              <a:t>【card:我請求核准的錢】第一段 = 評估底座全部 + 標註品質 / 脈絡特徵的限額探索;約 4.85 人月(2.08 + 1.39 +…</a:t>
+            </a:r>
+          </a:p>
+          <a:p>
+            <a:r>
               <a:t>【card:我請求核准的錢】G1(第 6 週)由贊助人決定是否續行 —— 它決定的是要不要續行剩下的工作,不是要不要開始</a:t>
             </a:r>
           </a:p>
           <a:p>
             <a:r>
-              <a:t>【card:我請求核准的錢】第一段 = 評估底座全部 + 標註品質 / 脈絡…</a:t>
-            </a:r>
-          </a:p>
-          <a:p>
-            <a:r>
-              <a:t>【card:我請求核准的錢】G1(第 6 週)由贊助人決定是否續行 —— 它…</a:t>
-            </a:r>
-          </a:p>
-          <a:p>
-            <a:r>
               <a:t>【card:我請求核准的人】六方當責:項目贊助人 · 業務負責人 · 數據負責人 · 技術負責人 · 複核營運主管 · 專案負責人(提案人)。每個工作包只有一個 A;三道決策門的 A 一律落在項目贊助人</a:t>
             </a:r>
           </a:p>
@@ -978,12 +928,12 @@
           </a:p>
           <a:p>
             <a:r>
-              <a:t>【card:我請求核准的人】請委員會指定贊助人,並於 G1 前確認本案與…</a:t>
-            </a:r>
-          </a:p>
-          <a:p>
-            <a:r>
-              <a:t>【card:我請求核准的人】組織障礙不在技術側:政策可改 · 優先序照…</a:t>
+              <a:t>【card:我請求核准的人】請委員會指定贊助人,並於 G1 前確認本案與公司既有雲端判讀規劃的範圍、預算與當責邊界(…</a:t>
+            </a:r>
+          </a:p>
+          <a:p>
+            <a:r>
+              <a:t>【card:我請求核准的人】組織障礙不在技術側:政策可改 · 優先序照購買量 · 尖峰徵調研發 —— 所以我要的不只是一…</a:t>
             </a:r>
           </a:p>
           <a:p>
@@ -1008,17 +958,17 @@
           </a:p>
           <a:p>
             <a:r>
-              <a:t>【card:六個月之後 / 不做的話】不做的代價:客戶繼續等 2–5 天、小客戶繼…</a:t>
-            </a:r>
-          </a:p>
-          <a:p>
-            <a:r>
-              <a:t>【card:六個月之後 / 不做的話】但這句必須交代對價:本案移交後開到天花板…</a:t>
-            </a:r>
-          </a:p>
-          <a:p>
-            <a:r>
-              <a:t>【card:六個月之後 / 不做的話】受影響但不在核准鏈上:5 位專職分析人員(…</a:t>
+              <a:t>【card:六個月之後 / 不做的話】不做的代價:客戶繼續等 2–5 天、小客戶繼續拿到沒有人看過的判定,而研發工程師在尖峰繼續…</a:t>
+            </a:r>
+          </a:p>
+          <a:p>
+            <a:r>
+              <a:t>【card:六個月之後 / 不做的話】但這句必須交代對價:本案移交後開到天花板時,是所有客戶約 85% 的爭議拿到沒有人看過的判…</a:t>
+            </a:r>
+          </a:p>
+          <a:p>
+            <a:r>
+              <a:t>【card:六個月之後 / 不做的話】受影響但不在核准鏈上:5 位專職分析人員(工作從逐筆看片變成處理難題與治理,對應「同樣人…</a:t>
             </a:r>
           </a:p>
           <a:p>
@@ -1208,47 +1158,27 @@
           </a:p>
           <a:p>
             <a:r>
-              <a:t>【card:車上裝置 · 即時初判】鏡頭在車上即時初判,偵測到一次可能的危險就記下一筆「事件」</a:t>
-            </a:r>
-          </a:p>
-          <a:p>
-            <a:r>
               <a:t>【card:車上裝置 · 即時初判】一個「事件」= 一段影片 + 時間地點 + 系統給的分類</a:t>
             </a:r>
           </a:p>
           <a:p>
             <a:r>
-              <a:t>【card:車上裝置 · 即時初判】一個「事件」= 一段影片 + 時間地點 + 系…</a:t>
-            </a:r>
-          </a:p>
-          <a:p>
-            <a:r>
               <a:t>【card:車上裝置 · 即時初判】單一大型車隊約 3,000 筆/天</a:t>
             </a:r>
           </a:p>
           <a:p>
             <a:r>
-              <a:t>【card:雲端 · 複判】判定屬實 → 回傳裝置向駕駛警示</a:t>
-            </a:r>
-          </a:p>
-          <a:p>
-            <a:r>
               <a:t>【card:雲端 · 複判】自動化到這裡就停了</a:t>
             </a:r>
           </a:p>
           <a:p>
             <a:r>
-              <a:t>【card:人工防線 · 5 位專職分析人員 · 逐筆】這 5 個人做的事:重看影片 → 判成立或誤報 → 離開畫面查證據 → 書面回覆客戶</a:t>
-            </a:r>
-          </a:p>
-          <a:p>
-            <a:r>
               <a:t>【card:人工防線 · 5 位專職分析人員 · 逐筆】一次「爭議」= 客戶回頭說「這筆判錯了」;約 5–10% 的事件會被客戶回頭標記 —— 那筆是客戶先看到,我們後知道</a:t>
             </a:r>
           </a:p>
           <a:p>
             <a:r>
-              <a:t>【card:人工防線 · 5 位專職分析人員 · 逐筆】一次「爭議」= 客戶回頭說「這筆判錯了」…</a:t>
+              <a:t>【card:人工防線 · 5 位專職分析人員 · 逐筆】一次「爭議」= 客戶回頭說「這筆判錯了」;約 5–10% 的事件會被客戶回頭標記 —— 那筆是客…</a:t>
             </a:r>
           </a:p>
           <a:p>
@@ -1493,11 +1423,6 @@
           </a:p>
           <a:p>
             <a:r>
-              <a:t>【matrix-cell】尺的一致性我們從來沒量過 —— 不比誰準,只指出錯的性質不同</a:t>
-            </a:r>
-          </a:p>
-          <a:p>
-            <a:r>
               <a:t>【rows】{'label': '該樣本全部誤報', 'value': '124 筆 = 行車輔助 104 + 駕駛監控 20', 'note': '母體換算:效益與衡量那頁用的「104 / 1,029 ≈ 10.1%」只算 ADAS 那一側 —— 兩頁分子不同不是矛盾,是母體不同', 'hot': False}</a:t>
             </a:r>
           </a:p>
@@ -1653,31 +1578,6 @@
           </a:p>
           <a:p>
             <a:r>
-              <a:t>【matrix-cell】裝置離線與鏡頭遮蔽時段無資料;事件分批上傳、頻率不一</a:t>
-            </a:r>
-          </a:p>
-          <a:p>
-            <a:r>
-              <a:t>【matrix-cell】W1-6 評估底座:分層抽樣 + 冷凍評估集</a:t>
-            </a:r>
-          </a:p>
-          <a:p>
-            <a:r>
-              <a:t>【matrix-cell】感測器故障;人工標註本身就會錯 - 而標註錯誤足以改變模型的評比結論(Northcutt et al., 2021);跨系統重複記錄</a:t>
-            </a:r>
-          </a:p>
-          <a:p>
-            <a:r>
-              <a:t>【matrix-cell】W3-10 標註品質:誤報的操作型定義 + 判準手冊 + 黃金題</a:t>
-            </a:r>
-          </a:p>
-          <a:p>
-            <a:r>
-              <a:t>【matrix-cell】目前不一致:同一段影片,不同複核者會給不同標籤(低頭 vs 閉眼、保溫瓶 vs 手機),而這個不一致從來沒有被量測過</a:t>
-            </a:r>
-          </a:p>
-          <a:p>
-            <a:r>
               <a:t>【這一頁的作用】這一頁把「為什麼第一筆錢要買量測,而不是買模型」變成委員會看得見的東西:左邊誤報有母體、有比例、有根因,右邊漏放只有一份 39 筆、自註為下限、還有四分之一無法歸類 - 兩側證據強度的落差本身就是提案的理由。同時它用真實案例數據(1,647 筆樣本、103/124、39 筆測試、6/12)證明痛點不是修辭,再用 Ensign 的回饋迴路說明「沒有人回看的那一流」為什麼會讓錯誤永久留下,把痛點從『這次判錯了』升級成『這個錯誤系統性地不會被發現』。最後主動把最強的線索降級成假說並綁到 G1,誠實度因此是被證明的而不是被宣稱的。</a:t>
             </a:r>
           </a:p>
@@ -1773,197 +1673,52 @@
           </a:p>
           <a:p>
             <a:r>
-              <a:t>【matrix-name:選項 0</a:t>
-            </a:r>
-          </a:p>
-          <a:p>
-            <a:r>
-              <a:t>加人】選項 0　加人</a:t>
-            </a:r>
-          </a:p>
-          <a:p>
-            <a:r>
-              <a:t>【matrix-cell】以現行做法增聘專職複核人力,覆蓋全部既有客戶</a:t>
-            </a:r>
-          </a:p>
-          <a:p>
-            <a:r>
-              <a:t>【matrix-cell】線性:量幾倍,人就要幾倍 → 需 17-24 人(現有 5 人)〔提案推算,非核定編制〕</a:t>
-            </a:r>
-          </a:p>
-          <a:p>
-            <a:r>
-              <a:t>【matrix-cell】停不下來:編制是常態支出,而那個迴路照樣轉</a:t>
-            </a:r>
-          </a:p>
-          <a:p>
-            <a:r>
-              <a:t>【matrix-cell】拒絕 - 加人只是沿著同一條成本曲線移動,不是把曲線整條外推(完整算式與迴路見下方卡片)</a:t>
-            </a:r>
-          </a:p>
-          <a:p>
-            <a:r>
-              <a:t>【matrix-name:選項 0b</a:t>
-            </a:r>
-          </a:p>
-          <a:p>
-            <a:r>
-              <a:t>調班 + 尖峰人力池】選項 0b　調班 + 尖峰人力池</a:t>
-            </a:r>
-          </a:p>
-          <a:p>
-            <a:r>
-              <a:t>【matrix-cell】重排班表,把尖峰徵調的 7 位研發工程師從臨時支援變成有編組、有訓練的正式安排(尖峰徵調是現在就在跑的簡易版)</a:t>
-            </a:r>
-          </a:p>
-          <a:p>
-            <a:r>
-              <a:t>【matrix-cell】仍線性,但斜率略低;削得掉尖峰,削不掉每日底量。⚠️ 斜率與削峰幅度目前沒有量測</a:t>
-            </a:r>
-          </a:p>
-          <a:p>
-            <a:r>
-              <a:t>【matrix-cell】隨時可停、可退回原班表 - 五條路裡反悔成本最低的一條</a:t>
-            </a:r>
-          </a:p>
-          <a:p>
-            <a:r>
-              <a:t>【matrix-cell】待 G1 判定,本案不預先否決它 - 它是最便宜的解。營運端三個限制〔第一手經驗,不是量測〕:新人約三個月才判得準 · 影像有隱私限制不能外包 · 過去擴大人力判準反而更亂;另一項:排班只動得了排隊那 0-1 天</a:t>
-            </a:r>
-          </a:p>
-          <a:p>
-            <a:r>
-              <a:t>【matrix-name:選項 1</a:t>
-            </a:r>
-          </a:p>
-          <a:p>
-            <a:r>
-              <a:t>規則式脈絡融合(不用機器學習)】選項 1　規則式脈絡融合(不用機器學習)</a:t>
-            </a:r>
-          </a:p>
-          <a:p>
-            <a:r>
-              <a:t>【matrix-cell】定位 + 地圖速限硬規則比對,把畫面外的脈絡接到事件上</a:t>
-            </a:r>
-          </a:p>
-          <a:p>
-            <a:r>
-              <a:t>【matrix-cell】一次性建置,之後整段下移一階、後續仍線性</a:t>
-            </a:r>
-          </a:p>
-          <a:p>
-            <a:r>
-              <a:t>【matrix-cell】可逐條檢查、可回退到規則本身</a:t>
-            </a:r>
-          </a:p>
-          <a:p>
-            <a:r>
-              <a:t>【matrix-cell】先做 - 某小型車隊單月樣本中 103 / 124 = 83% 的誤報同一根因,而速限資料自有;高風險決策場景應優先使用可逐條檢查的可解釋方法,而不是對黑箱做事後解釋(Rudin, 2019)。它同時是選項 2 的對照基線</a:t>
-            </a:r>
-          </a:p>
-          <a:p>
-            <a:r>
-              <a:t>【matrix-name:選項 2</a:t>
-            </a:r>
-          </a:p>
-          <a:p>
-            <a:r>
-              <a:t>地端視覺語言模型事件判讀】選項 2　地端視覺語言模型事件判讀</a:t>
-            </a:r>
-          </a:p>
-          <a:p>
-            <a:r>
-              <a:t>【matrix-cell】讓機器讀懂一次事件的完整脈絡(影片 + 客戶問題 + 規則),產出可交付的描述與證據包</a:t>
-            </a:r>
-          </a:p>
-          <a:p>
-            <a:r>
-              <a:t>【matrix-cell】前期一次性投入,之後次線性 - 事件量繼續長,人時不跟著等比長。這是五條裡唯一不是線性的形狀</a:t>
-            </a:r>
-          </a:p>
-          <a:p>
-            <a:r>
-              <a:t>【matrix-cell】三道門都可停:G1(W6)· G2(W12)· G3(W24);且六個月內對外自動結案 0%</a:t>
-            </a:r>
-          </a:p>
-          <a:p>
-            <a:r>
-              <a:t>【matrix-cell】採用 - 前三包不是流程改善,是評估它的必要前置:量測底座 = 評估基準(沒有它不知道模型判得對不對)· 判準統一 = 驗證資料(判準不一致的標註餵給模型就是垃圾進垃圾出)· 規則式 = 對照基線(要證明模型有增量,得先有一個不用它的基準)</a:t>
-            </a:r>
-          </a:p>
-          <a:p>
-            <a:r>
-              <a:t>【matrix-name:選項 3</a:t>
-            </a:r>
-          </a:p>
-          <a:p>
-            <a:r>
-              <a:t>公司既有的雲端判讀規劃】選項 3　公司既有的雲端判讀規劃</a:t>
-            </a:r>
-          </a:p>
-          <a:p>
-            <a:r>
-              <a:t>【matrix-cell】不在本案範圍,由技術長辦公室決定</a:t>
-            </a:r>
-          </a:p>
-          <a:p>
-            <a:r>
-              <a:t>【matrix-cell】前置條件,不是競爭關係 - 雲端判定真假,誰判定雲端?本案提供它需要的可稽核量測與乾淨標註</a:t>
-            </a:r>
-          </a:p>
-          <a:p>
-            <a:r>
               <a:t>【card:選項 0 的算式(照印,含對本案不利的部分)】批次   13,000 x 20 秒 = 72.2 人時(13,000+ 筆/天 = 全客戶每日平均總事件量,雲端伺服器實測統計)</a:t>
             </a:r>
           </a:p>
           <a:p>
             <a:r>
+              <a:t>【card:選項 0 的算式(照印,含對本案不利的部分)】合計   129.1-185.9 人時 / 8 小時 = 16.14-23.24 FTE → 取整員額 17-24 人(保產能只能無條件進位;現有 5 人);工作量比 = 129.1 / 29.8 = 4.33 倍,這就是「四倍以上」的算術依據</a:t>
+            </a:r>
+          </a:p>
+          <a:p>
+            <a:r>
+              <a:t>【card:選項 0 的算式(照印,含對本案不利的部分)】5.25 分/筆由一次實際判讀反推:5 人 x 3.6 個分析日 x 8 小時 = 144 人時 / 1,647 筆。這是單一批次的實際節奏,不是長期平均</a:t>
+            </a:r>
+          </a:p>
+          <a:p>
+            <a:r>
+              <a:t>【card:選項 0 的算式(照印,含對本案不利的部分)】兩個尚未驗證的假設:①約 20 秒/筆是營運端的實務估計,尚未以計時量測驗證 ②假設所有客戶有相同的案件組合與 5-10% 的爭議比例。兩項都由 W1-6 檢驗、G1 上桌;任一項被推翻,17-24 人要重算</a:t>
+            </a:r>
+          </a:p>
+          <a:p>
+            <a:r>
+              <a:t>【card:選項 0 的算式(照印,含對本案不利的部分)】加人會讓迴路轉得更久,不會讓它停:裝機量成長 → 複核量成長 → 人力吃緊 → 標註品質不穩 → 回流訓練資料不穩 → 誤報降不下來 → 複核量繼續成長。低品質標註會沿著訓練流程往下游放大(資料級聯)(Sambasivan et al., 2021)</a:t>
+            </a:r>
+          </a:p>
+          <a:p>
+            <a:r>
               <a:t>【card:選項 0 的算式(照印,含對本案不利的部分)】爭議   13,000 x 5-10% x 5.25 分 = 56.8-113.7 人時</a:t>
             </a:r>
           </a:p>
           <a:p>
             <a:r>
-              <a:t>【card:選項 0 的算式(照印,含對本案不利的部分)】合計   129.1-185.9 人時 / 8 小時 = 16.14-23.24 FTE → 取整員額 17-24 人(保產能只能無條件進位;現有 5 人);工作量比 = 129.1 / 29.8 = 4.33 倍,這就是「四倍以上」的算術依據</a:t>
-            </a:r>
-          </a:p>
-          <a:p>
-            <a:r>
-              <a:t>【card:選項 0 的算式(照印,含對本案不利的部分)】5.25 分/筆由一次實際判讀反推:5 人 x 3.6 個分析日 x 8 小時 = 144 人時 / 1,647 筆。這是單一批次的實際節奏,不是長期平均</a:t>
-            </a:r>
-          </a:p>
-          <a:p>
-            <a:r>
-              <a:t>【card:選項 0 的算式(照印,含對本案不利的部分)】兩個尚未驗證的假設:①約 20 秒/筆是營運端的實務估計,尚未以計時量測驗證 ②假設所有客戶有相同的案件組合與 5-10% 的爭議比例。兩項都由 W1-6 檢驗、G1 上桌;任一項被推翻,17-24 人要重算</a:t>
-            </a:r>
-          </a:p>
-          <a:p>
-            <a:r>
-              <a:t>【card:選項 0 的算式(照印,含對本案不利的部分)】加人會讓迴路轉得更久,不會讓它停:裝機量成長 → 複核量成長 → 人力吃緊 → 標註品質不穩 → 回流訓練資料不穩 → 誤報降不下來 → 複核量繼續成長。低品質標註會沿著訓練流程往下游放大(資料級聯)(Sambasivan et al., 2021)</a:t>
-            </a:r>
-          </a:p>
-          <a:p>
-            <a:r>
-              <a:t>【card:選項 0 的算式(照印,含對本案不利的部分)】爭議   13,000 x 5-10% x 5.25 分 = 56…</a:t>
-            </a:r>
-          </a:p>
-          <a:p>
-            <a:r>
-              <a:t>【card:選項 0 的算式(照印,含對本案不利的部分)】合計   129.1-185.9 人時 / 8 小時 = 16…</a:t>
-            </a:r>
-          </a:p>
-          <a:p>
-            <a:r>
-              <a:t>【card:選項 0 的算式(照印,含對本案不利的部分)】5.25 分/筆由一次實際判讀反推:5 人 x 3.…</a:t>
-            </a:r>
-          </a:p>
-          <a:p>
-            <a:r>
-              <a:t>【card:選項 0 的算式(照印,含對本案不利的部分)】兩個尚未驗證的假設:①約 20 秒/筆是營運端…</a:t>
-            </a:r>
-          </a:p>
-          <a:p>
-            <a:r>
-              <a:t>【card:選項 0 的算式(照印,含對本案不利的部分)】加人會讓迴路轉得更久,不會讓它停:裝機量…</a:t>
+              <a:t>【card:選項 0 的算式(照印,含對本案不利的部分)】合計   129.1-185.9 人時 / 8 小時 = 16.14-23.24 FTE → 取整員額 17-24 人(保產能只…</a:t>
+            </a:r>
+          </a:p>
+          <a:p>
+            <a:r>
+              <a:t>【card:選項 0 的算式(照印,含對本案不利的部分)】5.25 分/筆由一次實際判讀反推:5 人 x 3.6 個分析日 x 8 小時 = 144 人時 / 1,647 筆…</a:t>
+            </a:r>
+          </a:p>
+          <a:p>
+            <a:r>
+              <a:t>【card:選項 0 的算式(照印,含對本案不利的部分)】兩個尚未驗證的假設:①約 20 秒/筆是營運端的實務估計,尚未以計時量測驗證 ②假設所有客戶…</a:t>
+            </a:r>
+          </a:p>
+          <a:p>
+            <a:r>
+              <a:t>【card:選項 0 的算式(照印,含對本案不利的部分)】加人會讓迴路轉得更久,不會讓它停:裝機量成長 → 複核量成長 → 人力吃緊 → 標註品質不穩 …</a:t>
             </a:r>
           </a:p>
           <a:p>
@@ -1978,6 +1733,16 @@
           </a:p>
           <a:p>
             <a:r>
+              <a:t>【card:G1(第 6 週)= 因果判定門】⚠️ 初步拆解已顯示 AI 可處理段佔全程 43%-78%,但那是營運端的一次口述拆解,不是系統量測;W1-6 要把它做成正式量測,判定規則不因初步結果而放寬。六週買一個答案,答案不對就不做後面</a:t>
+            </a:r>
+          </a:p>
+          <a:p>
+            <a:r>
+              <a:t>【card:G1(第 6 週)= 因果判定門】怎麼判:把五段分成兩堆 - 「AI 可處理」(撈數據 · 判讀 · 證據包製作)與「AI 不可處理」…</a:t>
+            </a:r>
+          </a:p>
+          <a:p>
+            <a:r>
               <a:t>【card:G1(第 6 週)= 因果判定門】出口 A:AI 可處理的那一堆佔主要延遲 → 放行選項 1 / 2 的後段</a:t>
             </a:r>
           </a:p>
@@ -1988,27 +1753,7 @@
           </a:p>
           <a:p>
             <a:r>
-              <a:t>【card:G1(第 6 週)= 因果判定門】⚠️ 初步拆解已顯示 AI 可處理段佔全程 43%-78%,但那是營運端的一次口述拆解,不是系統量測;W1-6 要把它做成正式量測,判定規則不因初步結果而放寬。六週買一個答案,答案不對就不做後面</a:t>
-            </a:r>
-          </a:p>
-          <a:p>
-            <a:r>
-              <a:t>【card:G1(第 6 週)= 因果判定門】怎麼判:把五段分成兩堆 - 「AI 可處理」(…</a:t>
-            </a:r>
-          </a:p>
-          <a:p>
-            <a:r>
-              <a:t>【card:G1(第 6 週)= 因果判定門】出口 A:AI 可處理的那一堆佔主要延遲 → 放…</a:t>
-            </a:r>
-          </a:p>
-          <a:p>
-            <a:r>
-              <a:t>【card:G1(第 6 週)= 因果判定門】出口 B:否則 → 轉選項 0b(調班 + 尖峰人…</a:t>
-            </a:r>
-          </a:p>
-          <a:p>
-            <a:r>
-              <a:t>【card:G1(第 6 週)= 因果判定門】⚠️ 初步拆解已顯示 AI 可處理段佔全程 43…</a:t>
+              <a:t>【card:G1(第 6 週)= 因果判定門】⚠️ 初步拆解已顯示 AI 可處理段佔全程 43%-78%,但那是營運端的一次口述拆解,不是系統量…</a:t>
             </a:r>
           </a:p>
           <a:p>
@@ -2023,47 +1768,42 @@
           </a:p>
           <a:p>
             <a:r>
+              <a:t>【card:這 85% 到底是什麼(三層,一層都不可省)】技術寫到概念層次:一套地端視覺語言模型,篩檢與深挖兩種負載由同一台設備分時處理;實際選型與量化規格於 G1 依 W1-6 的量測定案 - 它直接決定要買幾台</a:t>
+            </a:r>
+          </a:p>
+          <a:p>
+            <a:r>
+              <a:t>【card:這 85% 到底是什麼(三層,一層都不可省)】吞吐:1,000 支 15 秒事件影片約 10-16 分〔估算,非實測;依一組公開可得模型的公開吞吐特性推估〕;同一批人以 1.0 倍速看完約 250 分</a:t>
+            </a:r>
+          </a:p>
+          <a:p>
+            <a:r>
+              <a:t>【card:這 85% 到底是什麼(三層,一層都不可省)】怎麼驗:第 12 週用同一份凍結評估集,四臂同場比 - 現行影像模型 / 規則式脈絡基線 / VLM 輔助人工 / 影子模式。G2 只能調整模型假設與規模,不能取消這個實驗</a:t>
+            </a:r>
+          </a:p>
+          <a:p>
+            <a:r>
+              <a:t>【card:這 85% 到底是什麼(三層,一層都不可省)】本案層:🔴 六個月內對外自動結案覆蓋率目標 = 0%。W12-24 只跑影子模式 - 機器照樣出結論…</a:t>
+            </a:r>
+          </a:p>
+          <a:p>
+            <a:r>
               <a:t>【card:這 85% 到底是什麼(三層,一層都不可省)】放行層:要讓它對外生效,需通過本案之外的一道獨立門,不在本次請求範圍</a:t>
             </a:r>
           </a:p>
           <a:p>
             <a:r>
-              <a:t>【card:這 85% 到底是什麼(三層,一層都不可省)】技術寫到概念層次:一套地端視覺語言模型,篩檢與深挖兩種負載由同一台設備分時處理;實際選型與量化規格於 G1 依 W1-6 的量測定案 - 它直接決定要買幾台</a:t>
-            </a:r>
-          </a:p>
-          <a:p>
-            <a:r>
-              <a:t>【card:這 85% 到底是什麼(三層,一層都不可省)】吞吐:1,000 支 15 秒事件影片約 10-16 分〔估算,非實測;依一組公開可得模型的公開吞吐特性推估〕;同一批人以 1.0 倍速看完約 250 分</a:t>
-            </a:r>
-          </a:p>
-          <a:p>
-            <a:r>
-              <a:t>【card:這 85% 到底是什麼(三層,一層都不可省)】怎麼驗:第 12 週用同一份凍結評估集,四臂同場比 - 現行影像模型 / 規則式脈絡基線 / VLM 輔助人工 / 影子模式。G2 只能調整模型假設與規模,不能取消這個實驗</a:t>
-            </a:r>
-          </a:p>
-          <a:p>
-            <a:r>
-              <a:t>【card:這 85% 到底是什麼(三層,一層都不可省)】本案層:🔴 六個月內對外自動結案覆蓋率目標…</a:t>
-            </a:r>
-          </a:p>
-          <a:p>
-            <a:r>
-              <a:t>【card:這 85% 到底是什麼(三層,一層都不可省)】放行層:要讓它對外生效,需通過本案之外的…</a:t>
-            </a:r>
-          </a:p>
-          <a:p>
-            <a:r>
-              <a:t>【card:這 85% 到底是什麼(三層,一層都不可省)】技術寫到概念層次:一套地端視覺語言模型…</a:t>
-            </a:r>
-          </a:p>
-          <a:p>
-            <a:r>
-              <a:t>【card:這 85% 到底是什麼(三層,一層都不可省)】吞吐:1,000 支 15 秒事件影片約 10-16 分…</a:t>
-            </a:r>
-          </a:p>
-          <a:p>
-            <a:r>
-              <a:t>【card:這 85% 到底是什麼(三層,一層都不可省)】怎麼驗:第 12 週用同一份凍結評估集,四臂…</a:t>
+              <a:t>【card:這 85% 到底是什麼(三層,一層都不可省)】技術寫到概念層次:一套地端視覺語言模型,篩檢與深挖兩種負載由同一台設備分時處理;實際選…</a:t>
+            </a:r>
+          </a:p>
+          <a:p>
+            <a:r>
+              <a:t>【card:這 85% 到底是什麼(三層,一層都不可省)】吞吐:1,000 支 15 秒事件影片約 10-16 分〔估算,非實測;依一組公開可得模型的公開吞吐特…</a:t>
+            </a:r>
+          </a:p>
+          <a:p>
+            <a:r>
+              <a:t>【card:這 85% 到底是什麼(三層,一層都不可省)】怎麼驗:第 12 週用同一份凍結評估集,四臂同場比 - 現行影像模型 / 規則式脈絡基線 / VLM…</a:t>
             </a:r>
           </a:p>
           <a:p>
@@ -2178,261 +1918,6 @@
           </a:p>
           <a:p>
             <a:r>
-              <a:t>【matrix-name:R1 技術局限 · 成功 中</a:t>
-            </a:r>
-          </a:p>
-          <a:p>
-            <a:r>
-              <a:t>模型不可解釋 → 複核者不信任】R1 技術局限 · 成功 中　模型不可解釋 → 複核者不信任</a:t>
-            </a:r>
-          </a:p>
-          <a:p>
-            <a:r>
-              <a:t>【matrix-cell】解釋:輸出可讀的描述與　引用到的證據 (Rudin, 2019)</a:t>
-            </a:r>
-          </a:p>
-          <a:p>
-            <a:r>
-              <a:t>【matrix-cell】錯的描述一樣通順,　比錯的分數更難察覺</a:t>
-            </a:r>
-          </a:p>
-          <a:p>
-            <a:r>
-              <a:t>【matrix-cell】推翻模型判定的比例不降;　只看得到人有看的那些</a:t>
-            </a:r>
-          </a:p>
-          <a:p>
-            <a:r>
-              <a:t>【matrix-name:R2 數據 · 成功 中</a:t>
-            </a:r>
-          </a:p>
-          <a:p>
-            <a:r>
-              <a:t>資料級聯:判準與脈絡資料】R2 數據 · 成功 中　資料級聯:判準與脈絡資料</a:t>
-            </a:r>
-          </a:p>
-          <a:p>
-            <a:r>
-              <a:t>【matrix-cell】審計:黃金題 + 抽樣雙人　複核 + 來源版本快照</a:t>
-            </a:r>
-          </a:p>
-          <a:p>
-            <a:r>
-              <a:t>【matrix-cell】雙人複核使複核成本　近倍增,需以抽樣控制</a:t>
-            </a:r>
-          </a:p>
-          <a:p>
-            <a:r>
-              <a:t>【matrix-cell】交通標誌根因佔比偏離基準　基準 = 某小型車隊單月樣本 83%</a:t>
-            </a:r>
-          </a:p>
-          <a:p>
-            <a:r>
-              <a:t>【matrix-name:R3 數據｜自動化偏差 · 成功 中</a:t>
-            </a:r>
-          </a:p>
-          <a:p>
-            <a:r>
-              <a:t>(Parasuraman &amp; Manzey, 2010)】R3 數據｜自動化偏差 · 成功 中　(Parasuraman &amp; Manzey, 2010)</a:t>
-            </a:r>
-          </a:p>
-          <a:p>
-            <a:r>
-              <a:t>【matrix-cell】教育・介面 (Goddard et al., 2012)　介面不顯示信心 (Guo et al., 2017)</a:t>
-            </a:r>
-          </a:p>
-          <a:p>
-            <a:r>
-              <a:t>【matrix-cell】不顯示信心使複核變慢,　與時效缺口相衝</a:t>
-            </a:r>
-          </a:p>
-          <a:p>
-            <a:r>
-              <a:t>【matrix-cell】盲測組與對照組判定差異　超過設計書所訂容忍值</a:t>
-            </a:r>
-          </a:p>
-          <a:p>
-            <a:r>
-              <a:t>【matrix-name:R4 倫理 · 成功 低</a:t>
-            </a:r>
-          </a:p>
-          <a:p>
-            <a:r>
-              <a:t>駕駛本人沒有申訴管道】R4 倫理 · 成功 低　駕駛本人沒有申訴管道</a:t>
-            </a:r>
-          </a:p>
-          <a:p>
-            <a:r>
-              <a:t>【matrix-cell】問責:申訴機制到位前,　產出不供個人考核使用</a:t>
-            </a:r>
-          </a:p>
-          <a:p>
-            <a:r>
-              <a:t>【matrix-cell】限制用途會降低　客戶端採用意願</a:t>
-            </a:r>
-          </a:p>
-          <a:p>
-            <a:r>
-              <a:t>【matrix-cell】駕駛端申訴無處可收,　件數恆為零</a:t>
-            </a:r>
-          </a:p>
-          <a:p>
-            <a:r>
-              <a:t>【matrix-name:R5 社會性 · 成功 高</a:t>
-            </a:r>
-          </a:p>
-          <a:p>
-            <a:r>
-              <a:t>複核團隊抵觸角色改變】R5 社會性 · 成功 高　複核團隊抵觸角色改變</a:t>
-            </a:r>
-          </a:p>
-          <a:p>
-            <a:r>
-              <a:t>【matrix-cell】教育:角色轉型說明 +　判準手冊共同編寫</a:t>
-            </a:r>
-          </a:p>
-          <a:p>
-            <a:r>
-              <a:t>【matrix-cell】參與式做法拉長　判準定案時程</a:t>
-            </a:r>
-          </a:p>
-          <a:p>
-            <a:r>
-              <a:t>【matrix-cell】複核團隊留任率或　黃金題參與率下滑</a:t>
-            </a:r>
-          </a:p>
-          <a:p>
-            <a:r>
-              <a:t>【matrix-name:R6 經濟 · 成功 中</a:t>
-            </a:r>
-          </a:p>
-          <a:p>
-            <a:r>
-              <a:t>期內回本難證 · 與雲端競合】R6 經濟 · 成功 中　期內回本難證 · 與雲端競合</a:t>
-            </a:r>
-          </a:p>
-          <a:p>
-            <a:r>
-              <a:t>【matrix-cell】審計:三道決策門　逐段釋出額度</a:t>
-            </a:r>
-          </a:p>
-          <a:p>
-            <a:r>
-              <a:t>【matrix-cell】分段釋出使長週期　工作包難以排人</a:t>
-            </a:r>
-          </a:p>
-          <a:p>
-            <a:r>
-              <a:t>【matrix-cell】決策門審查時單位成本　改善低於門檻</a:t>
-            </a:r>
-          </a:p>
-          <a:p>
-            <a:r>
-              <a:t>【matrix-name:R7 組織與管理 · 成功 高</a:t>
-            </a:r>
-          </a:p>
-          <a:p>
-            <a:r>
-              <a:t>缺管理層支持(誠實命中)】R7 組織與管理 · 成功 高　缺管理層支持(誠實命中)</a:t>
-            </a:r>
-          </a:p>
-          <a:p>
-            <a:r>
-              <a:t>【matrix-cell】問責:贊助人指派 +　決策門出席為放行前提</a:t>
-            </a:r>
-          </a:p>
-          <a:p>
-            <a:r>
-              <a:t>【matrix-cell】決策門增加治理負擔　與會議成本</a:t>
-            </a:r>
-          </a:p>
-          <a:p>
-            <a:r>
-              <a:t>【matrix-cell】決策門連續兩次　無高階出席</a:t>
-            </a:r>
-          </a:p>
-          <a:p>
-            <a:r>
-              <a:t>【matrix-name:R8 政治法律政策 · 尚無緩解</a:t>
-            </a:r>
-          </a:p>
-          <a:p>
-            <a:r>
-              <a:t>「曾判為誤報」的舉證地位】R8 政治法律政策 · 尚無緩解　「曾判為誤報」的舉證地位</a:t>
-            </a:r>
-          </a:p>
-          <a:p>
-            <a:r>
-              <a:t>【matrix-cell】問責:法務書面意見　於 G1(第 6 週)前到位</a:t>
-            </a:r>
-          </a:p>
-          <a:p>
-            <a:r>
-              <a:t>【matrix-cell】無 —— 目前沒有　可執行的緩解措施</a:t>
-            </a:r>
-          </a:p>
-          <a:p>
-            <a:r>
-              <a:t>【matrix-cell】客戶回頭標記的案件中　出現援引我方誤報的爭議</a:t>
-            </a:r>
-          </a:p>
-          <a:p>
-            <a:r>
-              <a:t>【matrix-name:R9 倫理｜自動結案的漏放</a:t>
-            </a:r>
-          </a:p>
-          <a:p>
-            <a:r>
-              <a:t>本案自己造成的 · 放行門在移交後】R9 倫理｜自動結案的漏放　本案自己造成的 · 放行門在移交後</a:t>
-            </a:r>
-          </a:p>
-          <a:p>
-            <a:r>
-              <a:t>【matrix-cell】問責:六個月影子模式(對外 0%)　碰撞 / 疲勞 / 行人不自動結案</a:t>
-            </a:r>
-          </a:p>
-          <a:p>
-            <a:r>
-              <a:t>【matrix-cell】抽樣稽核吃掉自動化　省下來的一部分(見資源頁)</a:t>
-            </a:r>
-          </a:p>
-          <a:p>
-            <a:r>
-              <a:t>【matrix-cell】漏濾率(否決型):自動結案桶　與人工桶的漏放率差值 95% CI</a:t>
-            </a:r>
-          </a:p>
-          <a:p>
-            <a:r>
-              <a:t>【matrix-name:R10 倫理｜自動結案的冤枉</a:t>
-            </a:r>
-          </a:p>
-          <a:p>
-            <a:r>
-              <a:t>本案自己造成的 · 放行門在移交後】R10 倫理｜自動結案的冤枉　本案自己造成的 · 放行門在移交後</a:t>
-            </a:r>
-          </a:p>
-          <a:p>
-            <a:r>
-              <a:t>【matrix-cell】問責:申訴即強制轉人工　且不得由同一模型複判</a:t>
-            </a:r>
-          </a:p>
-          <a:p>
-            <a:r>
-              <a:t>【matrix-cell】轉人工的量與時效　回到人力瓶頸上</a:t>
-            </a:r>
-          </a:p>
-          <a:p>
-            <a:r>
-              <a:t>【matrix-cell】申訴率與　申訴翻案率</a:t>
-            </a:r>
-          </a:p>
-          <a:p>
-            <a:r>
-              <a:t>【callout】R8 沒有答案 —— 法務書面意見於 G1(第 6 週)前到位;R9 · R10 是這個方案自己造成的,放行門在移交後,不在這六個月。</a:t>
-            </a:r>
-          </a:p>
-          <a:p>
-            <a:r>
               <a:t>【這一頁的作用】直接修 Kenny 第 6 點:原版 2D 位移圖看得到「移動了多少」卻看不到「哪一條對應什麼解法」。改成一列一條風險、同一列並排緩解 → 緩解自己的代價 → 偵測訊號,委員會用眼睛掃一行就答得出「這條誰負責、怎麼知道它壞了」。三條紅底是本頁的說服力來源:R8 承認沒有解、R9/R10 承認是這個 AI 方案自己製造的新風險(自動結案的漏放與冤枉),並且把它們的放行責任明確推到本案之外那道門 —— 主動揭露換取委員會對其餘七條的信任。成功可能性標在每條風險名右側,補上評分要求的第三個維度。</a:t>
             </a:r>
           </a:p>
@@ -2543,91 +2028,6 @@
           </a:p>
           <a:p>
             <a:r>
-              <a:t>【matrix-name:1 人類、社會與環境福祉</a:t>
-            </a:r>
-          </a:p>
-          <a:p>
-            <a:r>
-              <a:t>期內同樣人力承接更高複核量;移交後那約 850 筆無人覆核〔推估,非實測〕】1 人類、社會與環境福祉　期內同樣人力承接更高複核量;移交後那約 850 筆無人覆核〔推估,非實測〕</a:t>
-            </a:r>
-          </a:p>
-          <a:p>
-            <a:r>
-              <a:t>【matrix-name:2 以人為本的價值觀</a:t>
-            </a:r>
-          </a:p>
-          <a:p>
-            <a:r>
-              <a:t>期內人仍逐筆判;移交後駕駛承受的是機器單方面的決定】2 以人為本的價值觀　期內人仍逐筆判;移交後駕駛承受的是機器單方面的決定</a:t>
-            </a:r>
-          </a:p>
-          <a:p>
-            <a:r>
-              <a:t>【matrix-name:3 公平性 (Australian Human Rights Commission, 2020)</a:t>
-            </a:r>
-          </a:p>
-          <a:p>
-            <a:r>
-              <a:t>期內排序仍依客戶購買量;移交後配給依據換成機器的信心】3 公平性 (Australian Human Rights Commission, 2020)　期內排序仍依客戶購買量;移交後配給依據換成機器的信心</a:t>
-            </a:r>
-          </a:p>
-          <a:p>
-            <a:r>
-              <a:t>【matrix-name:4 隱私保護與安全</a:t>
-            </a:r>
-          </a:p>
-          <a:p>
-            <a:r>
-              <a:t>擴大影像調閱與判定紀錄保存;唯一不因自動結案而惡化的一條】4 隱私保護與安全　擴大影像調閱與判定紀錄保存;唯一不因自動結案而惡化的一條</a:t>
-            </a:r>
-          </a:p>
-          <a:p>
-            <a:r>
-              <a:t>【matrix-name:5 可靠性與安全性</a:t>
-            </a:r>
-          </a:p>
-          <a:p>
-            <a:r>
-              <a:t>漏放率目前不存在,只有一份 39 筆人工觸發測試(獨立樣本,自註為下限)】5 可靠性與安全性　漏放率目前不存在,只有一份 39 筆人工觸發測試(獨立樣本,自註為下限)</a:t>
-            </a:r>
-          </a:p>
-          <a:p>
-            <a:r>
-              <a:t>【matrix-name:6 透明性與解釋性</a:t>
-            </a:r>
-          </a:p>
-          <a:p>
-            <a:r>
-              <a:t>對客戶揭露到哪一層尚未決定;移交後客戶不會知道那是機器判的】6 透明性與解釋性　對客戶揭露到哪一層尚未決定;移交後客戶不會知道那是機器判的</a:t>
-            </a:r>
-          </a:p>
-          <a:p>
-            <a:r>
-              <a:t>【matrix-name:7 可申訴性</a:t>
-            </a:r>
-          </a:p>
-          <a:p>
-            <a:r>
-              <a:t>只有車隊安全主管能標記,駕駛本人不能提出質疑】7 可申訴性　只有車隊安全主管能標記,駕駛本人不能提出質疑</a:t>
-            </a:r>
-          </a:p>
-          <a:p>
-            <a:r>
-              <a:t>【matrix-cell】未達成　部署否決條件</a:t>
-            </a:r>
-          </a:p>
-          <a:p>
-            <a:r>
-              <a:t>【matrix-name:8 問責性</a:t>
-            </a:r>
-          </a:p>
-          <a:p>
-            <a:r>
-              <a:t>RACI 與三道決策門管的是專案;那 850 筆裡某一筆判錯,沒有人簽過名】8 問責性　RACI 與三道決策門管的是專案;那 850 筆裡某一筆判錯,沒有人簽過名</a:t>
-            </a:r>
-          </a:p>
-          <a:p>
-            <a:r>
               <a:t>【這一頁的作用】直接修 Kenny 第 7 點的後半:這一頁先用標題回答「為什麼一個 AI 提案要談倫理」—— 因為這個方案的產出就是把每 1,000 筆爭議裡約 850 筆變成沒有人看過的判定,那是它的代價,不是外掛的合規章節。雙欄評等讓委員會當場知道自己今天批的是哪一欄(專案期,影子模式,人仍逐筆判),而移交後那七盞紅燈全部掛在第 24 週那道門上;第 4 條保持白底是刻意的對照 —— 它是唯一不因自動結案而惡化的一條。全頁綠燈零條不是失分,是把「移交條件」寫成可稽核的待辦清單,也把前六週的預算正當化成把紅燈變回琥珀的唯一路徑。</a:t>
             </a:r>
           </a:p>
@@ -2724,121 +2124,6 @@
           <a:p>
             <a:r>
               <a:t>【callout】這一頁不是外掛的合規章節:上面兩層回答「怎麼證明這個 AI 真的有效」,護欄層回答「什麼情況下要喊停」。護欄層任一未達標,上面兩層的成績一律不採計。參照 Australia's AI Ethics Principles (2019) 第七條可申訴性 —— 被機器處理掉的事件必須有人能提出質疑;把它做成否決型指標,是本提案自己的設計決定,不是該文獻的主張。</a:t>
-            </a:r>
-          </a:p>
-          <a:p>
-            <a:r>
-              <a:t>【matrix-cell】單件爭議從分析到回信的完整鏈路,平均 2–5 天;約半數超過兩天(營運端估計,不是量測,W6 交出正式量測)</a:t>
-            </a:r>
-          </a:p>
-          <a:p>
-            <a:r>
-              <a:t>【matrix-cell】2 天內;單純案件當天〔提案目標 · 客戶期望,非已簽訂之服務水準協議〕。改善來源有兩項:證據包自動化、誤報量下降;各自佔多少由 W16 量測後給出</a:t>
-            </a:r>
-          </a:p>
-          <a:p>
-            <a:r>
-              <a:t>【matrix-cell】現況為配給制,依購買量與問題嚴重性排序;涵蓋率無紀錄,W6 建立</a:t>
-            </a:r>
-          </a:p>
-          <a:p>
-            <a:r>
-              <a:t>【matrix-cell】本案期內維持 100%(影子模式,機器不對外結案)。移交後開到天花板時會降到約 15% —— 那是本案造成的,不是本案要解的;移交後目標值須與自動結案的放行門一起訂</a:t>
-            </a:r>
-          </a:p>
-          <a:p>
-            <a:r>
-              <a:t>【matrix-cell】支撐全客戶 13,000+ 筆/天〔提案目標;所需人力由 G2 後依實測單位工時重估〕。驅動因子不在我方控制內 —— 由客戶的開通時點決定</a:t>
-            </a:r>
-          </a:p>
-          <a:p>
-            <a:r>
-              <a:t>【matrix-cell】不做本案、以現行做法覆蓋全部既有客戶需 17–24 人(現有 5 人)</a:t>
-            </a:r>
-          </a:p>
-          <a:p>
-            <a:r>
-              <a:t>【matrix-cell】做本案、移交後開到天花板需 11–12 人(仍須增聘 6–7 人)→ 可避免 5–13 人 ≈ 每年 NT$520–1,521 萬〔以初階工程師公開薪資量級推算,非核定預算〕</a:t>
-            </a:r>
-          </a:p>
-          <a:p>
-            <a:r>
-              <a:t>【matrix-cell】批次複核約 20 秒/筆(全量;營運端實務估計,尚未以計時量測驗證)· 深入判讀約 5.25 分鐘/筆(5 人 × 3.6 個分析日 = 144 人時 ÷ 1,647 筆反推,單一批次的實際節奏,不是長期平均)</a:t>
-            </a:r>
-          </a:p>
-          <a:p>
-            <a:r>
-              <a:t>【matrix-cell】兩者的正式量測都提前到 W6,與時間拆解同批交出;目標值於 G1 訂定 —— 全客戶人力推算與可避免成本都掛在這兩個單價上</a:t>
-            </a:r>
-          </a:p>
-          <a:p>
-            <a:r>
-              <a:t>【matrix-cell】某小型車隊單月樣本 104 / 1,029 ≈ 10.1%(該樣本全部誤報 124 筆 = ADAS 104 + 駕駛監控約 20;本列只算 ADAS 側)</a:t>
-            </a:r>
-          </a:p>
-          <a:p>
-            <a:r>
-              <a:t>【matrix-cell】降至 7% 以下〔提案目標;以該樣本為基準,G1 後依重新校準的量測重訂〕。只在人機系統軌量,第 12 週判 —— 🚫 不掛在模型本身</a:t>
-            </a:r>
-          </a:p>
-          <a:p>
-            <a:r>
-              <a:t>【matrix-cell】現況 5–10%;同時是「駕駛端無效警示率」的可觀測代理</a:t>
-            </a:r>
-          </a:p>
-          <a:p>
-            <a:r>
-              <a:t>【matrix-cell】尖峰徵調 7 位研發工程師(離開本職 · 非常態編制 · 非專職)</a:t>
-            </a:r>
-          </a:p>
-          <a:p>
-            <a:r>
-              <a:t>【matrix-cell】期內建立峰值徵調人時的量測基準,目標值於 G2 訂定;歸零列為移交後目標</a:t>
-            </a:r>
-          </a:p>
-          <a:p>
-            <a:r>
-              <a:t>【matrix-cell】不存在。唯一量測是一份 39 筆人工觸發測試,獨立樣本,公司自註為下限</a:t>
-            </a:r>
-          </a:p>
-          <a:p>
-            <a:r>
-              <a:t>【matrix-cell】W6 交出帶 95% 信賴區間的點估計;上限值於 G1 由委員會核定</a:t>
-            </a:r>
-          </a:p>
-          <a:p>
-            <a:r>
-              <a:t>【matrix-cell】否決 G1 放不放行後段工作 · 技術負責人</a:t>
-            </a:r>
-          </a:p>
-          <a:p>
-            <a:r>
-              <a:t>【matrix-cell】W10 前建立基線,目標值於 G2 訂定</a:t>
-            </a:r>
-          </a:p>
-          <a:p>
-            <a:r>
-              <a:t>【matrix-cell】否決 G2 准不准開放對照重訓 · 複核營運主管</a:t>
-            </a:r>
-          </a:p>
-          <a:p>
-            <a:r>
-              <a:t>【matrix-cell】未達 100% 不移交(否決型,無中間值)</a:t>
-            </a:r>
-          </a:p>
-          <a:p>
-            <a:r>
-              <a:t>【matrix-cell】定義:被分到「有把握、可直接結案」桶,但描述錯誤且該錯誤足以改變判定結論的比例。基準不存在 —— 自動結案機制尚未建立</a:t>
-            </a:r>
-          </a:p>
-          <a:p>
-            <a:r>
-              <a:t>【matrix-cell】W12 由影子模式軌交出「自動結案桶與人工桶的漏放率差值」的 95% 信賴區間;非劣性邊際 δ 由委員會於 G1(W6)事前預註冊 —— 資料 W12 才交,判準必須寫在跑實驗之前</a:t>
-            </a:r>
-          </a:p>
-          <a:p>
-            <a:r>
-              <a:t>【matrix-cell】否決自動結案能不能對外生效 —— 沒有它,分流率就等於把那部分風險藏進「機器有把握」那一桶 · 技術負責人</a:t>
             </a:r>
           </a:p>
           <a:p>
@@ -6391,7 +5676,7 @@
         <p:spPr>
           <a:xfrm>
             <a:off x="658368" y="1783080"/>
-            <a:ext cx="45720" cy="391797"/>
+            <a:ext cx="45720" cy="356615"/>
           </a:xfrm>
           <a:prstGeom prst="rect">
             <a:avLst/>
@@ -6435,7 +5720,7 @@
         <p:spPr>
           <a:xfrm>
             <a:off x="804672" y="1755648"/>
-            <a:ext cx="2408822" cy="483237"/>
+            <a:ext cx="2408822" cy="448055"/>
           </a:xfrm>
           <a:prstGeom prst="rect">
             <a:avLst/>
@@ -6474,7 +5759,7 @@
         <p:spPr>
           <a:xfrm>
             <a:off x="3268358" y="1755648"/>
-            <a:ext cx="3152759" cy="483237"/>
+            <a:ext cx="3152759" cy="448055"/>
           </a:xfrm>
           <a:prstGeom prst="rect">
             <a:avLst/>
@@ -6513,7 +5798,7 @@
         <p:spPr>
           <a:xfrm>
             <a:off x="7183343" y="1755648"/>
-            <a:ext cx="4240255" cy="483237"/>
+            <a:ext cx="4240255" cy="448055"/>
           </a:xfrm>
           <a:prstGeom prst="rect">
             <a:avLst/>
@@ -6551,8 +5836,8 @@
         </p:nvSpPr>
         <p:spPr>
           <a:xfrm>
-            <a:off x="658368" y="2357757"/>
-            <a:ext cx="45720" cy="391797"/>
+            <a:off x="658368" y="2322575"/>
+            <a:ext cx="45720" cy="356615"/>
           </a:xfrm>
           <a:prstGeom prst="rect">
             <a:avLst/>
@@ -6595,8 +5880,8 @@
         </p:nvSpPr>
         <p:spPr>
           <a:xfrm>
-            <a:off x="804672" y="2330325"/>
-            <a:ext cx="2408822" cy="483237"/>
+            <a:off x="804672" y="2295144"/>
+            <a:ext cx="2408822" cy="448055"/>
           </a:xfrm>
           <a:prstGeom prst="rect">
             <a:avLst/>
@@ -6634,8 +5919,8 @@
         </p:nvSpPr>
         <p:spPr>
           <a:xfrm>
-            <a:off x="3268358" y="2330325"/>
-            <a:ext cx="3152759" cy="483237"/>
+            <a:off x="3268358" y="2295144"/>
+            <a:ext cx="3152759" cy="448055"/>
           </a:xfrm>
           <a:prstGeom prst="rect">
             <a:avLst/>
@@ -6673,8 +5958,8 @@
         </p:nvSpPr>
         <p:spPr>
           <a:xfrm>
-            <a:off x="7183343" y="2330325"/>
-            <a:ext cx="4240255" cy="483237"/>
+            <a:off x="7183343" y="2295144"/>
+            <a:ext cx="4240255" cy="448055"/>
           </a:xfrm>
           <a:prstGeom prst="rect">
             <a:avLst/>
@@ -6712,8 +5997,8 @@
         </p:nvSpPr>
         <p:spPr>
           <a:xfrm>
-            <a:off x="658368" y="2941578"/>
-            <a:ext cx="3527450" cy="1600200"/>
+            <a:off x="658368" y="2871215"/>
+            <a:ext cx="3527450" cy="2011680"/>
           </a:xfrm>
           <a:prstGeom prst="roundRect">
             <a:avLst>
@@ -6760,7 +6045,7 @@
         </p:nvSpPr>
         <p:spPr>
           <a:xfrm>
-            <a:off x="768096" y="3069594"/>
+            <a:off x="768096" y="2999231"/>
             <a:ext cx="3307994" cy="566928"/>
           </a:xfrm>
           <a:prstGeom prst="rect">
@@ -6799,7 +6084,7 @@
         </p:nvSpPr>
         <p:spPr>
           <a:xfrm>
-            <a:off x="2010613" y="3691386"/>
+            <a:off x="2010613" y="3621023"/>
             <a:ext cx="822960" cy="274320"/>
           </a:xfrm>
           <a:prstGeom prst="roundRect">
@@ -6845,7 +6130,7 @@
         </p:nvSpPr>
         <p:spPr>
           <a:xfrm>
-            <a:off x="2010613" y="3691386"/>
+            <a:off x="2010613" y="3621023"/>
             <a:ext cx="822960" cy="274320"/>
           </a:xfrm>
           <a:prstGeom prst="rect">
@@ -6884,8 +6169,8 @@
         </p:nvSpPr>
         <p:spPr>
           <a:xfrm>
-            <a:off x="768096" y="4075434"/>
-            <a:ext cx="3307994" cy="338327"/>
+            <a:off x="768096" y="4005071"/>
+            <a:ext cx="3307994" cy="749808"/>
           </a:xfrm>
           <a:prstGeom prst="rect">
             <a:avLst/>
@@ -6910,7 +6195,7 @@
                 </a:solidFill>
                 <a:latin typeface="Microsoft JhengHei"/>
               </a:rPr>
-              <a:t>交:時間拆解(等待 / 找證據 / 判讀 / 內…</a:t>
+              <a:t>交:時間拆解(等待 / 找證據 / 判讀 / 內部覆核 / 回信)· 兩天逾時率 · 尖峰到件分布 · …</a:t>
             </a:r>
           </a:p>
         </p:txBody>
@@ -6923,8 +6208,8 @@
         </p:nvSpPr>
         <p:spPr>
           <a:xfrm>
-            <a:off x="4332122" y="2941578"/>
-            <a:ext cx="3527450" cy="1600200"/>
+            <a:off x="4332122" y="2871215"/>
+            <a:ext cx="3527450" cy="2011680"/>
           </a:xfrm>
           <a:prstGeom prst="roundRect">
             <a:avLst>
@@ -6971,7 +6256,7 @@
         </p:nvSpPr>
         <p:spPr>
           <a:xfrm>
-            <a:off x="4441850" y="3069594"/>
+            <a:off x="4441850" y="2999231"/>
             <a:ext cx="3307994" cy="566928"/>
           </a:xfrm>
           <a:prstGeom prst="rect">
@@ -7010,7 +6295,7 @@
         </p:nvSpPr>
         <p:spPr>
           <a:xfrm>
-            <a:off x="5087721" y="3691386"/>
+            <a:off x="5087721" y="3621023"/>
             <a:ext cx="2016252" cy="274320"/>
           </a:xfrm>
           <a:prstGeom prst="roundRect">
@@ -7056,7 +6341,7 @@
         </p:nvSpPr>
         <p:spPr>
           <a:xfrm>
-            <a:off x="5087721" y="3691386"/>
+            <a:off x="5087721" y="3621023"/>
             <a:ext cx="2016252" cy="274320"/>
           </a:xfrm>
           <a:prstGeom prst="rect">
@@ -7095,8 +6380,8 @@
         </p:nvSpPr>
         <p:spPr>
           <a:xfrm>
-            <a:off x="4441850" y="4075434"/>
-            <a:ext cx="3307994" cy="338327"/>
+            <a:off x="4441850" y="4005071"/>
+            <a:ext cx="3307994" cy="749808"/>
           </a:xfrm>
           <a:prstGeom prst="rect">
             <a:avLst/>
@@ -7121,7 +6406,7 @@
                 </a:solidFill>
                 <a:latin typeface="Microsoft JhengHei"/>
               </a:rPr>
-              <a:t>同一凍結評估集上跑四臂(見下表),分兩軌:…</a:t>
+              <a:t>同一凍結評估集上跑四臂(見下表),分兩軌:工具品質軌 · 結案判定軌</a:t>
             </a:r>
           </a:p>
         </p:txBody>
@@ -7134,8 +6419,8 @@
         </p:nvSpPr>
         <p:spPr>
           <a:xfrm>
-            <a:off x="8005876" y="2941578"/>
-            <a:ext cx="3527450" cy="1600200"/>
+            <a:off x="8005876" y="2871215"/>
+            <a:ext cx="3527450" cy="2011680"/>
           </a:xfrm>
           <a:prstGeom prst="roundRect">
             <a:avLst>
@@ -7182,7 +6467,7 @@
         </p:nvSpPr>
         <p:spPr>
           <a:xfrm>
-            <a:off x="8115604" y="3069594"/>
+            <a:off x="8115604" y="2999231"/>
             <a:ext cx="3307994" cy="566928"/>
           </a:xfrm>
           <a:prstGeom prst="rect">
@@ -7221,7 +6506,7 @@
         </p:nvSpPr>
         <p:spPr>
           <a:xfrm>
-            <a:off x="9358122" y="3691386"/>
+            <a:off x="9358122" y="3621023"/>
             <a:ext cx="822960" cy="274320"/>
           </a:xfrm>
           <a:prstGeom prst="roundRect">
@@ -7267,7 +6552,7 @@
         </p:nvSpPr>
         <p:spPr>
           <a:xfrm>
-            <a:off x="9358122" y="3691386"/>
+            <a:off x="9358122" y="3621023"/>
             <a:ext cx="822960" cy="274320"/>
           </a:xfrm>
           <a:prstGeom prst="rect">
@@ -7306,8 +6591,8 @@
         </p:nvSpPr>
         <p:spPr>
           <a:xfrm>
-            <a:off x="8115604" y="4075434"/>
-            <a:ext cx="3307994" cy="338327"/>
+            <a:off x="8115604" y="4005071"/>
+            <a:ext cx="3307994" cy="749808"/>
           </a:xfrm>
           <a:prstGeom prst="rect">
             <a:avLst/>
@@ -7332,7 +6617,7 @@
                 </a:solidFill>
                 <a:latin typeface="Microsoft JhengHei"/>
               </a:rPr>
-              <a:t>🔴 停的條件:對照重訓證不出增量 → 模型端…</a:t>
+              <a:t>🔴 停的條件:對照重訓證不出增量 → 模型端不部署,只留前四包的成果</a:t>
             </a:r>
           </a:p>
         </p:txBody>
@@ -7346,7 +6631,7 @@
           <p:nvPr/>
         </p:nvGraphicFramePr>
         <p:xfrm>
-          <a:off x="658368" y="4669794"/>
+          <a:off x="658368" y="5010912"/>
           <a:ext cx="9658806" cy="1499616"/>
         </p:xfrm>
         <a:graphic>
@@ -7468,7 +6753,7 @@
                           </a:solidFill>
                           <a:latin typeface="Microsoft JhengHei"/>
                         </a:rPr>
-                        <a:t>機器初判,人全數複核</a:t>
+                        <a:t>機器初判 · 人全數複核</a:t>
                       </a:r>
                     </a:p>
                   </a:txBody>
@@ -7491,7 +6776,7 @@
                           </a:solidFill>
                           <a:latin typeface="Microsoft JhengHei"/>
                         </a:rPr>
-                        <a:t>現況的基準線。沒有它,後面三臂就沒有「比…</a:t>
+                        <a:t>現況基線｜沒它三臂無從比</a:t>
                       </a:r>
                     </a:p>
                   </a:txBody>
@@ -7562,7 +6847,7 @@
                           </a:solidFill>
                           <a:latin typeface="Microsoft JhengHei"/>
                         </a:rPr>
-                        <a:t>不含模型能解掉多少誤報。它是地端 VLM 的…</a:t>
+                        <a:t>不含模型誤報降幅｜對照基線</a:t>
                       </a:r>
                     </a:p>
                   </a:txBody>
@@ -7610,7 +6895,7 @@
                           </a:solidFill>
                           <a:latin typeface="Microsoft JhengHei"/>
                         </a:rPr>
-                        <a:t>機器輔助、人判定</a:t>
+                        <a:t>機器輔助 · 人判定</a:t>
                       </a:r>
                     </a:p>
                   </a:txBody>
@@ -7633,7 +6918,7 @@
                           </a:solidFill>
                           <a:latin typeface="Microsoft JhengHei"/>
                         </a:rPr>
-                        <a:t>人工觸碰時間 · P90 回覆時間 · 判定品質…</a:t>
+                        <a:t>觸碰時間/P90 回覆/判定品質</a:t>
                       </a:r>
                     </a:p>
                   </a:txBody>
@@ -7681,7 +6966,7 @@
                           </a:solidFill>
                           <a:latin typeface="Microsoft JhengHei"/>
                         </a:rPr>
-                        <a:t>機器自己結案但不對外送,人照常逐筆判,兩…</a:t>
+                        <a:t>機器結案不對外送｜人逐筆判</a:t>
                       </a:r>
                     </a:p>
                   </a:txBody>
@@ -7704,7 +6989,7 @@
                           </a:solidFill>
                           <a:latin typeface="Microsoft JhengHei"/>
                         </a:rPr>
-                        <a:t>🔴 自動結案桶與人工桶的漏放率差值(95% 信…</a:t>
+                        <a:t>自動結案漏放率｜唯一算得出</a:t>
                       </a:r>
                     </a:p>
                   </a:txBody>
@@ -7907,7 +7192,7 @@
         <p:spPr>
           <a:xfrm>
             <a:off x="658368" y="1783080"/>
-            <a:ext cx="45720" cy="771525"/>
+            <a:ext cx="45720" cy="713550"/>
           </a:xfrm>
           <a:prstGeom prst="rect">
             <a:avLst/>
@@ -7951,7 +7236,7 @@
         <p:spPr>
           <a:xfrm>
             <a:off x="804672" y="1755648"/>
-            <a:ext cx="2408822" cy="862965"/>
+            <a:ext cx="2408822" cy="804990"/>
           </a:xfrm>
           <a:prstGeom prst="rect">
             <a:avLst/>
@@ -7990,7 +7275,7 @@
         <p:spPr>
           <a:xfrm>
             <a:off x="3268358" y="1755648"/>
-            <a:ext cx="3152759" cy="862965"/>
+            <a:ext cx="3152759" cy="804990"/>
           </a:xfrm>
           <a:prstGeom prst="rect">
             <a:avLst/>
@@ -8029,7 +7314,7 @@
         <p:spPr>
           <a:xfrm>
             <a:off x="7183343" y="1755648"/>
-            <a:ext cx="4240255" cy="862965"/>
+            <a:ext cx="4240255" cy="804990"/>
           </a:xfrm>
           <a:prstGeom prst="rect">
             <a:avLst/>
@@ -8067,8 +7352,8 @@
         </p:nvSpPr>
         <p:spPr>
           <a:xfrm>
-            <a:off x="658368" y="2737485"/>
-            <a:ext cx="45720" cy="771525"/>
+            <a:off x="658368" y="2679510"/>
+            <a:ext cx="45720" cy="713550"/>
           </a:xfrm>
           <a:prstGeom prst="rect">
             <a:avLst/>
@@ -8111,8 +7396,8 @@
         </p:nvSpPr>
         <p:spPr>
           <a:xfrm>
-            <a:off x="804672" y="2710053"/>
-            <a:ext cx="2408822" cy="862965"/>
+            <a:off x="804672" y="2652078"/>
+            <a:ext cx="2408822" cy="804990"/>
           </a:xfrm>
           <a:prstGeom prst="rect">
             <a:avLst/>
@@ -8150,8 +7435,8 @@
         </p:nvSpPr>
         <p:spPr>
           <a:xfrm>
-            <a:off x="3268358" y="2710053"/>
-            <a:ext cx="3152759" cy="862965"/>
+            <a:off x="3268358" y="2652078"/>
+            <a:ext cx="3152759" cy="804990"/>
           </a:xfrm>
           <a:prstGeom prst="rect">
             <a:avLst/>
@@ -8189,8 +7474,8 @@
         </p:nvSpPr>
         <p:spPr>
           <a:xfrm>
-            <a:off x="7183343" y="2710053"/>
-            <a:ext cx="4240255" cy="862965"/>
+            <a:off x="7183343" y="2652078"/>
+            <a:ext cx="4240255" cy="804990"/>
           </a:xfrm>
           <a:prstGeom prst="rect">
             <a:avLst/>
@@ -8228,8 +7513,8 @@
         </p:nvSpPr>
         <p:spPr>
           <a:xfrm>
-            <a:off x="658368" y="3908403"/>
-            <a:ext cx="3527450" cy="1688360"/>
+            <a:off x="658368" y="3585084"/>
+            <a:ext cx="3527450" cy="2011680"/>
           </a:xfrm>
           <a:prstGeom prst="roundRect">
             <a:avLst>
@@ -8276,7 +7561,7 @@
         </p:nvSpPr>
         <p:spPr>
           <a:xfrm>
-            <a:off x="768096" y="4036419"/>
+            <a:off x="768096" y="3713100"/>
             <a:ext cx="3307994" cy="566928"/>
           </a:xfrm>
           <a:prstGeom prst="rect">
@@ -8315,7 +7600,7 @@
         </p:nvSpPr>
         <p:spPr>
           <a:xfrm>
-            <a:off x="1855927" y="4658211"/>
+            <a:off x="1855927" y="4334892"/>
             <a:ext cx="1132332" cy="274320"/>
           </a:xfrm>
           <a:prstGeom prst="roundRect">
@@ -8361,7 +7646,7 @@
         </p:nvSpPr>
         <p:spPr>
           <a:xfrm>
-            <a:off x="1855927" y="4658211"/>
+            <a:off x="1855927" y="4334892"/>
             <a:ext cx="1132332" cy="274320"/>
           </a:xfrm>
           <a:prstGeom prst="rect">
@@ -8400,8 +7685,8 @@
         </p:nvSpPr>
         <p:spPr>
           <a:xfrm>
-            <a:off x="768096" y="5042259"/>
-            <a:ext cx="3307994" cy="426488"/>
+            <a:off x="768096" y="4718940"/>
+            <a:ext cx="3307994" cy="749808"/>
           </a:xfrm>
           <a:prstGeom prst="rect">
             <a:avLst/>
@@ -8439,8 +7724,8 @@
         </p:nvSpPr>
         <p:spPr>
           <a:xfrm>
-            <a:off x="4332122" y="3908403"/>
-            <a:ext cx="3527450" cy="1688360"/>
+            <a:off x="4332122" y="3585084"/>
+            <a:ext cx="3527450" cy="2011680"/>
           </a:xfrm>
           <a:prstGeom prst="roundRect">
             <a:avLst>
@@ -8487,7 +7772,7 @@
         </p:nvSpPr>
         <p:spPr>
           <a:xfrm>
-            <a:off x="4441850" y="4036419"/>
+            <a:off x="4441850" y="3713100"/>
             <a:ext cx="3307994" cy="566928"/>
           </a:xfrm>
           <a:prstGeom prst="rect">
@@ -8526,7 +7811,7 @@
         </p:nvSpPr>
         <p:spPr>
           <a:xfrm>
-            <a:off x="5586831" y="4658211"/>
+            <a:off x="5586831" y="4334892"/>
             <a:ext cx="1018032" cy="274320"/>
           </a:xfrm>
           <a:prstGeom prst="roundRect">
@@ -8572,7 +7857,7 @@
         </p:nvSpPr>
         <p:spPr>
           <a:xfrm>
-            <a:off x="5586831" y="4658211"/>
+            <a:off x="5586831" y="4334892"/>
             <a:ext cx="1018032" cy="274320"/>
           </a:xfrm>
           <a:prstGeom prst="rect">
@@ -8611,8 +7896,8 @@
         </p:nvSpPr>
         <p:spPr>
           <a:xfrm>
-            <a:off x="4441850" y="5042259"/>
-            <a:ext cx="3307994" cy="426488"/>
+            <a:off x="4441850" y="4718940"/>
+            <a:ext cx="3307994" cy="749808"/>
           </a:xfrm>
           <a:prstGeom prst="rect">
             <a:avLst/>
@@ -8637,7 +7922,7 @@
                 </a:solidFill>
                 <a:latin typeface="Microsoft JhengHei"/>
               </a:rPr>
-              <a:t>六方當責:項目贊助人 · 業務負責人 · 數據…</a:t>
+              <a:t>六方當責:項目贊助人 · 業務負責人 · 數據負責人 · 技術負責人 · 複核營運主管 · 專案負…</a:t>
             </a:r>
           </a:p>
         </p:txBody>
@@ -8650,8 +7935,8 @@
         </p:nvSpPr>
         <p:spPr>
           <a:xfrm>
-            <a:off x="8005876" y="3908403"/>
-            <a:ext cx="3527450" cy="1688360"/>
+            <a:off x="8005876" y="3585084"/>
+            <a:ext cx="3527450" cy="2011680"/>
           </a:xfrm>
           <a:prstGeom prst="roundRect">
             <a:avLst>
@@ -8698,7 +7983,7 @@
         </p:nvSpPr>
         <p:spPr>
           <a:xfrm>
-            <a:off x="8115604" y="4036419"/>
+            <a:off x="8115604" y="3713100"/>
             <a:ext cx="3307994" cy="566928"/>
           </a:xfrm>
           <a:prstGeom prst="rect">
@@ -8737,7 +8022,7 @@
         </p:nvSpPr>
         <p:spPr>
           <a:xfrm>
-            <a:off x="9336786" y="4658211"/>
+            <a:off x="9336786" y="4334892"/>
             <a:ext cx="865632" cy="274320"/>
           </a:xfrm>
           <a:prstGeom prst="roundRect">
@@ -8783,7 +8068,7 @@
         </p:nvSpPr>
         <p:spPr>
           <a:xfrm>
-            <a:off x="9336786" y="4658211"/>
+            <a:off x="9336786" y="4334892"/>
             <a:ext cx="865632" cy="274320"/>
           </a:xfrm>
           <a:prstGeom prst="rect">
@@ -8822,8 +8107,8 @@
         </p:nvSpPr>
         <p:spPr>
           <a:xfrm>
-            <a:off x="8115604" y="5042259"/>
-            <a:ext cx="3307994" cy="426488"/>
+            <a:off x="8115604" y="4718940"/>
+            <a:ext cx="3307994" cy="749808"/>
           </a:xfrm>
           <a:prstGeom prst="rect">
             <a:avLst/>
@@ -8848,7 +8133,7 @@
                 </a:solidFill>
                 <a:latin typeface="Microsoft JhengHei"/>
               </a:rPr>
-              <a:t>委員會手上會多三樣東西:① 一份可稽核的錯…</a:t>
+              <a:t>委員會手上會多三樣東西:① 一份可稽核的錯誤率 ② 一層把畫面外脈絡帶進事件的判斷層 ③ 一…</a:t>
             </a:r>
           </a:p>
         </p:txBody>
@@ -9734,7 +9019,7 @@
         <p:spPr>
           <a:xfrm>
             <a:off x="658368" y="1755648"/>
-            <a:ext cx="3527450" cy="1714611"/>
+            <a:ext cx="3527450" cy="2011680"/>
           </a:xfrm>
           <a:prstGeom prst="roundRect">
             <a:avLst>
@@ -9906,7 +9191,7 @@
         <p:spPr>
           <a:xfrm>
             <a:off x="768096" y="2889503"/>
-            <a:ext cx="3307994" cy="452739"/>
+            <a:ext cx="3307994" cy="749808"/>
           </a:xfrm>
           <a:prstGeom prst="rect">
             <a:avLst/>
@@ -9931,7 +9216,7 @@
                 </a:solidFill>
                 <a:latin typeface="Microsoft JhengHei"/>
               </a:rPr>
-              <a:t>鏡頭在車上即時初判,偵測到一次可能的危險…</a:t>
+              <a:t>鏡頭在車上即時初判,偵測到一次可能的危險就記下一筆「事件」</a:t>
             </a:r>
           </a:p>
         </p:txBody>
@@ -9945,7 +9230,7 @@
         <p:spPr>
           <a:xfrm>
             <a:off x="4332122" y="1755648"/>
-            <a:ext cx="3527450" cy="1714611"/>
+            <a:ext cx="3527450" cy="2011680"/>
           </a:xfrm>
           <a:prstGeom prst="roundRect">
             <a:avLst>
@@ -10117,7 +9402,7 @@
         <p:spPr>
           <a:xfrm>
             <a:off x="4441850" y="2889503"/>
-            <a:ext cx="3307994" cy="452739"/>
+            <a:ext cx="3307994" cy="749808"/>
           </a:xfrm>
           <a:prstGeom prst="rect">
             <a:avLst/>
@@ -10145,6 +9430,22 @@
               <a:t>初判結果上傳,雲端再判一次</a:t>
             </a:r>
           </a:p>
+          <a:p>
+            <a:pPr algn="ctr">
+              <a:lnSpc>
+                <a:spcPct val="135000"/>
+              </a:lnSpc>
+            </a:pPr>
+            <a:r>
+              <a:rPr sz="1200" b="0">
+                <a:solidFill>
+                  <a:srgbClr val="6B7885"/>
+                </a:solidFill>
+                <a:latin typeface="Microsoft JhengHei"/>
+              </a:rPr>
+              <a:t>判定屬實 → 回傳裝置向駕駛警示</a:t>
+            </a:r>
+          </a:p>
         </p:txBody>
       </p:sp>
       <p:sp>
@@ -10156,7 +9457,7 @@
         <p:spPr>
           <a:xfrm>
             <a:off x="8005876" y="1755648"/>
-            <a:ext cx="3527450" cy="1714611"/>
+            <a:ext cx="3527450" cy="2011680"/>
           </a:xfrm>
           <a:prstGeom prst="roundRect">
             <a:avLst>
@@ -10328,7 +9629,7 @@
         <p:spPr>
           <a:xfrm>
             <a:off x="8115604" y="2889503"/>
-            <a:ext cx="3307994" cy="452739"/>
+            <a:ext cx="3307994" cy="749808"/>
           </a:xfrm>
           <a:prstGeom prst="rect">
             <a:avLst/>
@@ -10353,7 +9654,7 @@
                 </a:solidFill>
                 <a:latin typeface="Microsoft JhengHei"/>
               </a:rPr>
-              <a:t>這 5 個人做的事:重看影片 → 判成立或誤報…</a:t>
+              <a:t>這 5 個人做的事:重看影片 → 判成立或誤報 → 離開畫面查證據 → 書面回覆客戶</a:t>
             </a:r>
           </a:p>
         </p:txBody>
@@ -10366,8 +9667,8 @@
         </p:nvSpPr>
         <p:spPr>
           <a:xfrm>
-            <a:off x="658368" y="3598275"/>
-            <a:ext cx="5300319" cy="1082956"/>
+            <a:off x="658368" y="3895344"/>
+            <a:ext cx="5300319" cy="1161288"/>
           </a:xfrm>
           <a:prstGeom prst="roundRect">
             <a:avLst>
@@ -10414,7 +9715,7 @@
         </p:nvSpPr>
         <p:spPr>
           <a:xfrm>
-            <a:off x="804672" y="3744579"/>
+            <a:off x="804672" y="4041648"/>
             <a:ext cx="5007711" cy="384048"/>
           </a:xfrm>
           <a:prstGeom prst="rect">
@@ -10453,8 +9754,8 @@
         </p:nvSpPr>
         <p:spPr>
           <a:xfrm>
-            <a:off x="804672" y="4238355"/>
-            <a:ext cx="5007711" cy="259996"/>
+            <a:off x="804672" y="4535424"/>
+            <a:ext cx="5007711" cy="338328"/>
           </a:xfrm>
           <a:prstGeom prst="rect">
             <a:avLst/>
@@ -10492,8 +9793,8 @@
         </p:nvSpPr>
         <p:spPr>
           <a:xfrm>
-            <a:off x="6233007" y="3598275"/>
-            <a:ext cx="5300319" cy="1082956"/>
+            <a:off x="6233007" y="3895344"/>
+            <a:ext cx="5300319" cy="1161288"/>
           </a:xfrm>
           <a:prstGeom prst="roundRect">
             <a:avLst>
@@ -10540,7 +9841,7 @@
         </p:nvSpPr>
         <p:spPr>
           <a:xfrm>
-            <a:off x="6379311" y="3744579"/>
+            <a:off x="6379311" y="4041648"/>
             <a:ext cx="5007711" cy="384048"/>
           </a:xfrm>
           <a:prstGeom prst="rect">
@@ -10579,8 +9880,8 @@
         </p:nvSpPr>
         <p:spPr>
           <a:xfrm>
-            <a:off x="6379311" y="4238355"/>
-            <a:ext cx="5007711" cy="259996"/>
+            <a:off x="6379311" y="4535424"/>
+            <a:ext cx="5007711" cy="338328"/>
           </a:xfrm>
           <a:prstGeom prst="rect">
             <a:avLst/>
@@ -10618,7 +9919,7 @@
         </p:nvSpPr>
         <p:spPr>
           <a:xfrm>
-            <a:off x="658368" y="4754384"/>
+            <a:off x="658368" y="5129783"/>
             <a:ext cx="10874959" cy="347472"/>
           </a:xfrm>
           <a:prstGeom prst="rect">
@@ -10657,8 +9958,8 @@
         </p:nvSpPr>
         <p:spPr>
           <a:xfrm>
-            <a:off x="658368" y="5275592"/>
-            <a:ext cx="45720" cy="321468"/>
+            <a:off x="658368" y="5650992"/>
+            <a:ext cx="45720" cy="306323"/>
           </a:xfrm>
           <a:prstGeom prst="rect">
             <a:avLst/>
@@ -10701,8 +10002,8 @@
         </p:nvSpPr>
         <p:spPr>
           <a:xfrm>
-            <a:off x="804672" y="5248160"/>
-            <a:ext cx="2116945" cy="412908"/>
+            <a:off x="804672" y="5623560"/>
+            <a:ext cx="2116945" cy="397764"/>
           </a:xfrm>
           <a:prstGeom prst="rect">
             <a:avLst/>
@@ -10740,8 +10041,8 @@
         </p:nvSpPr>
         <p:spPr>
           <a:xfrm>
-            <a:off x="2976481" y="5248160"/>
-            <a:ext cx="2787914" cy="412908"/>
+            <a:off x="2976481" y="5623560"/>
+            <a:ext cx="2787914" cy="397764"/>
           </a:xfrm>
           <a:prstGeom prst="rect">
             <a:avLst/>
@@ -10779,8 +10080,8 @@
         </p:nvSpPr>
         <p:spPr>
           <a:xfrm>
-            <a:off x="6453652" y="5248160"/>
-            <a:ext cx="3753794" cy="412908"/>
+            <a:off x="6453652" y="5623560"/>
+            <a:ext cx="3753794" cy="397764"/>
           </a:xfrm>
           <a:prstGeom prst="rect">
             <a:avLst/>
@@ -10818,8 +10119,8 @@
         </p:nvSpPr>
         <p:spPr>
           <a:xfrm>
-            <a:off x="658368" y="5779940"/>
-            <a:ext cx="45720" cy="494023"/>
+            <a:off x="658368" y="6140196"/>
+            <a:ext cx="45720" cy="306323"/>
           </a:xfrm>
           <a:prstGeom prst="rect">
             <a:avLst/>
@@ -10862,8 +10163,8 @@
         </p:nvSpPr>
         <p:spPr>
           <a:xfrm>
-            <a:off x="804672" y="5752508"/>
-            <a:ext cx="2116945" cy="585463"/>
+            <a:off x="804672" y="6112764"/>
+            <a:ext cx="2116945" cy="397764"/>
           </a:xfrm>
           <a:prstGeom prst="rect">
             <a:avLst/>
@@ -10901,8 +10202,8 @@
         </p:nvSpPr>
         <p:spPr>
           <a:xfrm>
-            <a:off x="2976481" y="5752508"/>
-            <a:ext cx="2787914" cy="585463"/>
+            <a:off x="2976481" y="6112764"/>
+            <a:ext cx="2787914" cy="397764"/>
           </a:xfrm>
           <a:prstGeom prst="rect">
             <a:avLst/>
@@ -10940,8 +10241,8 @@
         </p:nvSpPr>
         <p:spPr>
           <a:xfrm>
-            <a:off x="6453652" y="5752508"/>
-            <a:ext cx="3753794" cy="585463"/>
+            <a:off x="6453652" y="6112764"/>
+            <a:ext cx="3753794" cy="397764"/>
           </a:xfrm>
           <a:prstGeom prst="rect">
             <a:avLst/>
@@ -12526,7 +11827,7 @@
         <p:spPr>
           <a:xfrm>
             <a:off x="658368" y="1755648"/>
-            <a:ext cx="10874959" cy="846399"/>
+            <a:ext cx="10874959" cy="857181"/>
           </a:xfrm>
           <a:prstGeom prst="roundRect">
             <a:avLst>
@@ -12572,7 +11873,7 @@
         <p:spPr>
           <a:xfrm>
             <a:off x="841247" y="1755648"/>
-            <a:ext cx="10509199" cy="846399"/>
+            <a:ext cx="10509199" cy="857181"/>
           </a:xfrm>
           <a:prstGeom prst="rect">
             <a:avLst/>
@@ -12611,7 +11912,7 @@
           <p:nvPr/>
         </p:nvGraphicFramePr>
         <p:xfrm>
-          <a:off x="658368" y="2730063"/>
+          <a:off x="658368" y="2740845"/>
           <a:ext cx="10874957" cy="2084832"/>
         </p:xfrm>
         <a:graphic>
@@ -12946,7 +12247,7 @@
                           </a:solidFill>
                           <a:latin typeface="Microsoft JhengHei"/>
                         </a:rPr>
-                        <a:t>尺的一致性我們從來沒量過 —— 不比誰準,只指出錯…</a:t>
+                        <a:t>一致性從未量測｜不比誰準,只指錯的性質不同</a:t>
                       </a:r>
                     </a:p>
                   </a:txBody>
@@ -12969,7 +12270,7 @@
                           </a:solidFill>
                           <a:latin typeface="Microsoft JhengHei"/>
                         </a:rPr>
-                        <a:t>標註品質那一包第 10 週建立基線,G2 訂目標值</a:t>
+                        <a:t>標註品質包｜第 10 週建立基線，G2 訂目標值</a:t>
                       </a:r>
                     </a:p>
                   </a:txBody>
@@ -13134,8 +12435,8 @@
         </p:nvSpPr>
         <p:spPr>
           <a:xfrm>
-            <a:off x="658368" y="5038959"/>
-            <a:ext cx="45720" cy="612340"/>
+            <a:off x="658368" y="4981125"/>
+            <a:ext cx="45720" cy="641257"/>
           </a:xfrm>
           <a:prstGeom prst="rect">
             <a:avLst/>
@@ -13178,8 +12479,8 @@
         </p:nvSpPr>
         <p:spPr>
           <a:xfrm>
-            <a:off x="804672" y="5011527"/>
-            <a:ext cx="2116945" cy="703780"/>
+            <a:off x="804672" y="4953693"/>
+            <a:ext cx="2116945" cy="732697"/>
           </a:xfrm>
           <a:prstGeom prst="rect">
             <a:avLst/>
@@ -13217,8 +12518,8 @@
         </p:nvSpPr>
         <p:spPr>
           <a:xfrm>
-            <a:off x="2976481" y="5011527"/>
-            <a:ext cx="2787914" cy="703780"/>
+            <a:off x="2976481" y="4953693"/>
+            <a:ext cx="2787914" cy="732697"/>
           </a:xfrm>
           <a:prstGeom prst="rect">
             <a:avLst/>
@@ -13256,8 +12557,8 @@
         </p:nvSpPr>
         <p:spPr>
           <a:xfrm>
-            <a:off x="6453652" y="5011527"/>
-            <a:ext cx="3753794" cy="703780"/>
+            <a:off x="6453652" y="4953693"/>
+            <a:ext cx="3753794" cy="732697"/>
           </a:xfrm>
           <a:prstGeom prst="rect">
             <a:avLst/>
@@ -13295,7 +12596,7 @@
         </p:nvSpPr>
         <p:spPr>
           <a:xfrm>
-            <a:off x="658368" y="5834179"/>
+            <a:off x="658368" y="5805262"/>
             <a:ext cx="45720" cy="321468"/>
           </a:xfrm>
           <a:prstGeom prst="rect">
@@ -13339,7 +12640,7 @@
         </p:nvSpPr>
         <p:spPr>
           <a:xfrm>
-            <a:off x="804672" y="5806747"/>
+            <a:off x="804672" y="5777830"/>
             <a:ext cx="2116945" cy="412908"/>
           </a:xfrm>
           <a:prstGeom prst="rect">
@@ -13378,7 +12679,7 @@
         </p:nvSpPr>
         <p:spPr>
           <a:xfrm>
-            <a:off x="2976481" y="5806747"/>
+            <a:off x="2976481" y="5777830"/>
             <a:ext cx="2787914" cy="412908"/>
           </a:xfrm>
           <a:prstGeom prst="rect">
@@ -13417,7 +12718,7 @@
         </p:nvSpPr>
         <p:spPr>
           <a:xfrm>
-            <a:off x="6453652" y="5806747"/>
+            <a:off x="6453652" y="5777830"/>
             <a:ext cx="3753794" cy="412908"/>
           </a:xfrm>
           <a:prstGeom prst="rect">
@@ -13636,7 +12937,7 @@
         <p:spPr>
           <a:xfrm>
             <a:off x="658368" y="1755648"/>
-            <a:ext cx="5300319" cy="1099095"/>
+            <a:ext cx="5300319" cy="1285220"/>
           </a:xfrm>
           <a:prstGeom prst="roundRect">
             <a:avLst>
@@ -13723,7 +13024,7 @@
         <p:spPr>
           <a:xfrm>
             <a:off x="804672" y="2395728"/>
-            <a:ext cx="5007711" cy="276135"/>
+            <a:ext cx="5007711" cy="462260"/>
           </a:xfrm>
           <a:prstGeom prst="rect">
             <a:avLst/>
@@ -13762,7 +13063,7 @@
         <p:spPr>
           <a:xfrm>
             <a:off x="6233007" y="1755648"/>
-            <a:ext cx="5300319" cy="1099095"/>
+            <a:ext cx="5300319" cy="1285220"/>
           </a:xfrm>
           <a:prstGeom prst="roundRect">
             <a:avLst>
@@ -13849,7 +13150,7 @@
         <p:spPr>
           <a:xfrm>
             <a:off x="6379311" y="2395728"/>
-            <a:ext cx="5007711" cy="276135"/>
+            <a:ext cx="5007711" cy="462260"/>
           </a:xfrm>
           <a:prstGeom prst="rect">
             <a:avLst/>
@@ -13887,7 +13188,7 @@
         </p:nvSpPr>
         <p:spPr>
           <a:xfrm>
-            <a:off x="658368" y="2927895"/>
+            <a:off x="658368" y="3114020"/>
             <a:ext cx="10874959" cy="347472"/>
           </a:xfrm>
           <a:prstGeom prst="rect">
@@ -13926,7 +13227,7 @@
         </p:nvSpPr>
         <p:spPr>
           <a:xfrm>
-            <a:off x="658368" y="3449103"/>
+            <a:off x="658368" y="3635228"/>
             <a:ext cx="45720" cy="321468"/>
           </a:xfrm>
           <a:prstGeom prst="rect">
@@ -13970,7 +13271,7 @@
         </p:nvSpPr>
         <p:spPr>
           <a:xfrm>
-            <a:off x="804672" y="3421671"/>
+            <a:off x="804672" y="3607796"/>
             <a:ext cx="2408822" cy="412908"/>
           </a:xfrm>
           <a:prstGeom prst="rect">
@@ -14009,7 +13310,7 @@
         </p:nvSpPr>
         <p:spPr>
           <a:xfrm>
-            <a:off x="3268358" y="3421671"/>
+            <a:off x="3268358" y="3607796"/>
             <a:ext cx="3152759" cy="412908"/>
           </a:xfrm>
           <a:prstGeom prst="rect">
@@ -14048,7 +13349,7 @@
         </p:nvSpPr>
         <p:spPr>
           <a:xfrm>
-            <a:off x="7183343" y="3421671"/>
+            <a:off x="7183343" y="3607796"/>
             <a:ext cx="4240255" cy="412908"/>
           </a:xfrm>
           <a:prstGeom prst="rect">
@@ -14087,8 +13388,8 @@
         </p:nvSpPr>
         <p:spPr>
           <a:xfrm>
-            <a:off x="658368" y="3953452"/>
-            <a:ext cx="45720" cy="562074"/>
+            <a:off x="658368" y="4139577"/>
+            <a:ext cx="45720" cy="600075"/>
           </a:xfrm>
           <a:prstGeom prst="rect">
             <a:avLst/>
@@ -14131,8 +13432,8 @@
         </p:nvSpPr>
         <p:spPr>
           <a:xfrm>
-            <a:off x="804672" y="3926020"/>
-            <a:ext cx="2408822" cy="653514"/>
+            <a:off x="804672" y="4112145"/>
+            <a:ext cx="2408822" cy="691515"/>
           </a:xfrm>
           <a:prstGeom prst="rect">
             <a:avLst/>
@@ -14170,8 +13471,8 @@
         </p:nvSpPr>
         <p:spPr>
           <a:xfrm>
-            <a:off x="3268358" y="3926020"/>
-            <a:ext cx="3152759" cy="653514"/>
+            <a:off x="3268358" y="4112145"/>
+            <a:ext cx="3152759" cy="691515"/>
           </a:xfrm>
           <a:prstGeom prst="rect">
             <a:avLst/>
@@ -14209,8 +13510,8 @@
         </p:nvSpPr>
         <p:spPr>
           <a:xfrm>
-            <a:off x="7183343" y="3926020"/>
-            <a:ext cx="4240255" cy="653514"/>
+            <a:off x="7183343" y="4112145"/>
+            <a:ext cx="4240255" cy="691515"/>
           </a:xfrm>
           <a:prstGeom prst="rect">
             <a:avLst/>
@@ -14249,7 +13550,7 @@
           <p:nvPr/>
         </p:nvGraphicFramePr>
         <p:xfrm>
-          <a:off x="658368" y="4948157"/>
+          <a:off x="658368" y="5303520"/>
           <a:ext cx="9658805" cy="1207008"/>
         </p:xfrm>
         <a:graphic>
@@ -14395,7 +13696,7 @@
                           </a:solidFill>
                           <a:latin typeface="Microsoft JhengHei"/>
                         </a:rPr>
-                        <a:t>裝置離線與鏡頭遮蔽時段無…</a:t>
+                        <a:t>離線遮蔽無資料·上傳頻率不一</a:t>
                       </a:r>
                     </a:p>
                   </a:txBody>
@@ -14441,7 +13742,7 @@
                           </a:solidFill>
                           <a:latin typeface="Microsoft JhengHei"/>
                         </a:rPr>
-                        <a:t>W1-6 評估底座:分層抽樣 …</a:t>
+                        <a:t>W1-6 評估底座:分層抽樣</a:t>
                       </a:r>
                     </a:p>
                   </a:txBody>
@@ -14489,7 +13790,7 @@
                           </a:solidFill>
                           <a:latin typeface="Microsoft JhengHei"/>
                         </a:rPr>
-                        <a:t>感測器故障;人工標註本身…</a:t>
+                        <a:t>感測器故障·標註錯·重複記錄</a:t>
                       </a:r>
                     </a:p>
                   </a:txBody>
@@ -14535,7 +13836,7 @@
                           </a:solidFill>
                           <a:latin typeface="Microsoft JhengHei"/>
                         </a:rPr>
-                        <a:t>W3-10 標註品質:誤報的操…</a:t>
+                        <a:t>W3-10 標註品質:判準手冊</a:t>
                       </a:r>
                     </a:p>
                   </a:txBody>
@@ -14583,7 +13884,7 @@
                           </a:solidFill>
                           <a:latin typeface="Microsoft JhengHei"/>
                         </a:rPr>
-                        <a:t>目前不一致:同一段影片…</a:t>
+                        <a:t>複核者標籤不一致·從未量測</a:t>
                       </a:r>
                     </a:p>
                   </a:txBody>
@@ -14979,7 +14280,7 @@
                           </a:solidFill>
                           <a:latin typeface="Microsoft JhengHei"/>
                         </a:rPr>
-                        <a:t>選項 0　加人…</a:t>
+                        <a:t>選項 0｜加人</a:t>
                       </a:r>
                     </a:p>
                   </a:txBody>
@@ -15002,7 +14303,7 @@
                           </a:solidFill>
                           <a:latin typeface="Microsoft JhengHei"/>
                         </a:rPr>
-                        <a:t>以現行做法增聘專職複…</a:t>
+                        <a:t>增聘複核人力 全客戶</a:t>
                       </a:r>
                     </a:p>
                   </a:txBody>
@@ -15025,7 +14326,7 @@
                           </a:solidFill>
                           <a:latin typeface="Microsoft JhengHei"/>
                         </a:rPr>
-                        <a:t>線性:量幾倍,人就要…</a:t>
+                        <a:t>線性→17-24 人 推算</a:t>
                       </a:r>
                     </a:p>
                   </a:txBody>
@@ -15048,7 +14349,7 @@
                           </a:solidFill>
                           <a:latin typeface="Microsoft JhengHei"/>
                         </a:rPr>
-                        <a:t>停不下來:編制是常態…</a:t>
+                        <a:t>停不下來 常態支出</a:t>
                       </a:r>
                     </a:p>
                   </a:txBody>
@@ -15071,7 +14372,7 @@
                           </a:solidFill>
                           <a:latin typeface="Microsoft JhengHei"/>
                         </a:rPr>
-                        <a:t>拒絕 - 加人只是沿著…</a:t>
+                        <a:t>拒絕 同一條成本曲線</a:t>
                       </a:r>
                     </a:p>
                   </a:txBody>
@@ -15096,7 +14397,7 @@
                           </a:solidFill>
                           <a:latin typeface="Microsoft JhengHei"/>
                         </a:rPr>
-                        <a:t>選項 0b　調班 + 尖峰人力池…</a:t>
+                        <a:t>選項 0b｜調班 + 尖峰人力池</a:t>
                       </a:r>
                     </a:p>
                   </a:txBody>
@@ -15119,7 +14420,7 @@
                           </a:solidFill>
                           <a:latin typeface="Microsoft JhengHei"/>
                         </a:rPr>
-                        <a:t>重排班表,把尖峰徵調…</a:t>
+                        <a:t>徵調 7 位轉正式編組</a:t>
                       </a:r>
                     </a:p>
                   </a:txBody>
@@ -15142,7 +14443,7 @@
                           </a:solidFill>
                           <a:latin typeface="Microsoft JhengHei"/>
                         </a:rPr>
-                        <a:t>仍線性,但斜率略低…</a:t>
+                        <a:t>仍線性 略低 未量測</a:t>
                       </a:r>
                     </a:p>
                   </a:txBody>
@@ -15165,7 +14466,7 @@
                           </a:solidFill>
                           <a:latin typeface="Microsoft JhengHei"/>
                         </a:rPr>
-                        <a:t>隨時可停、可退回原班…</a:t>
+                        <a:t>隨時可停 退回原班表</a:t>
                       </a:r>
                     </a:p>
                   </a:txBody>
@@ -15188,7 +14489,7 @@
                           </a:solidFill>
                           <a:latin typeface="Microsoft JhengHei"/>
                         </a:rPr>
-                        <a:t>待 G1 判定,本案不預…</a:t>
+                        <a:t>待 G1｜不預先否決</a:t>
                       </a:r>
                     </a:p>
                   </a:txBody>
@@ -15213,7 +14514,7 @@
                           </a:solidFill>
                           <a:latin typeface="Microsoft JhengHei"/>
                         </a:rPr>
-                        <a:t>選項 1　規則式脈絡融合(不用機器學習)…</a:t>
+                        <a:t>選項 1｜規則式脈絡融合</a:t>
                       </a:r>
                     </a:p>
                   </a:txBody>
@@ -15236,7 +14537,7 @@
                           </a:solidFill>
                           <a:latin typeface="Microsoft JhengHei"/>
                         </a:rPr>
-                        <a:t>定位 + 地圖速限硬規…</a:t>
+                        <a:t>定位+地圖速限硬規則</a:t>
                       </a:r>
                     </a:p>
                   </a:txBody>
@@ -15259,7 +14560,7 @@
                           </a:solidFill>
                           <a:latin typeface="Microsoft JhengHei"/>
                         </a:rPr>
-                        <a:t>一次性建置,之後整段…</a:t>
+                        <a:t>下移一階 後仍線性</a:t>
                       </a:r>
                     </a:p>
                   </a:txBody>
@@ -15282,7 +14583,7 @@
                           </a:solidFill>
                           <a:latin typeface="Microsoft JhengHei"/>
                         </a:rPr>
-                        <a:t>可逐條檢查、可回退到…</a:t>
+                        <a:t>可逐條檢查 可回退</a:t>
                       </a:r>
                     </a:p>
                   </a:txBody>
@@ -15305,7 +14606,7 @@
                           </a:solidFill>
                           <a:latin typeface="Microsoft JhengHei"/>
                         </a:rPr>
-                        <a:t>先做 - 某小型車隊單…</a:t>
+                        <a:t>先做 樣本83%同根因</a:t>
                       </a:r>
                     </a:p>
                   </a:txBody>
@@ -15330,7 +14631,7 @@
                           </a:solidFill>
                           <a:latin typeface="Microsoft JhengHei"/>
                         </a:rPr>
-                        <a:t>選項 2　地端視覺語言模型事件判讀…</a:t>
+                        <a:t>選項 2｜地端視覺語言模型事件判讀</a:t>
                       </a:r>
                     </a:p>
                   </a:txBody>
@@ -15353,7 +14654,7 @@
                           </a:solidFill>
                           <a:latin typeface="Microsoft JhengHei"/>
                         </a:rPr>
-                        <a:t>讓機器讀懂一次事件的…</a:t>
+                        <a:t>讀懂事件脈絡 證據包</a:t>
                       </a:r>
                     </a:p>
                   </a:txBody>
@@ -15376,7 +14677,7 @@
                           </a:solidFill>
                           <a:latin typeface="Microsoft JhengHei"/>
                         </a:rPr>
-                        <a:t>前期一次性投入,之後…</a:t>
+                        <a:t>前期投入 之後次線性</a:t>
                       </a:r>
                     </a:p>
                   </a:txBody>
@@ -15399,7 +14700,7 @@
                           </a:solidFill>
                           <a:latin typeface="Microsoft JhengHei"/>
                         </a:rPr>
-                        <a:t>三道門都可停:G1(W6)…</a:t>
+                        <a:t>可停:G1G2G3 對外0%</a:t>
                       </a:r>
                     </a:p>
                   </a:txBody>
@@ -15422,7 +14723,7 @@
                           </a:solidFill>
                           <a:latin typeface="Microsoft JhengHei"/>
                         </a:rPr>
-                        <a:t>採用 - 前三包不是流…</a:t>
+                        <a:t>採用 前三包=評估</a:t>
                       </a:r>
                     </a:p>
                   </a:txBody>
@@ -15447,7 +14748,7 @@
                           </a:solidFill>
                           <a:latin typeface="Microsoft JhengHei"/>
                         </a:rPr>
-                        <a:t>選項 3　公司既有的雲端判讀規劃…</a:t>
+                        <a:t>選項 3｜公司既有雲端判讀規劃</a:t>
                       </a:r>
                     </a:p>
                   </a:txBody>
@@ -15470,7 +14771,7 @@
                           </a:solidFill>
                           <a:latin typeface="Microsoft JhengHei"/>
                         </a:rPr>
-                        <a:t>仍在研擬中的雲端判讀</a:t>
+                        <a:t>仍在研擬中</a:t>
                       </a:r>
                     </a:p>
                   </a:txBody>
@@ -15493,7 +14794,7 @@
                           </a:solidFill>
                           <a:latin typeface="Microsoft JhengHei"/>
                         </a:rPr>
-                        <a:t>尚未開始,曲線未定</a:t>
+                        <a:t>尚未開始 曲線未定</a:t>
                       </a:r>
                     </a:p>
                   </a:txBody>
@@ -15516,7 +14817,7 @@
                           </a:solidFill>
                           <a:latin typeface="Microsoft JhengHei"/>
                         </a:rPr>
-                        <a:t>不在本案範圍,由技術…</a:t>
+                        <a:t>本案外 技術長辦公室</a:t>
                       </a:r>
                     </a:p>
                   </a:txBody>
@@ -15539,7 +14840,7 @@
                           </a:solidFill>
                           <a:latin typeface="Microsoft JhengHei"/>
                         </a:rPr>
-                        <a:t>前置條件,不是競爭關…</a:t>
+                        <a:t>前置條件 非競爭關係</a:t>
                       </a:r>
                     </a:p>
                   </a:txBody>
@@ -15562,8 +14863,8 @@
         </p:nvSpPr>
         <p:spPr>
           <a:xfrm>
-            <a:off x="658368" y="4072639"/>
-            <a:ext cx="3527450" cy="1600200"/>
+            <a:off x="658368" y="3675887"/>
+            <a:ext cx="3527450" cy="2011680"/>
           </a:xfrm>
           <a:prstGeom prst="roundRect">
             <a:avLst>
@@ -15610,7 +14911,7 @@
         </p:nvSpPr>
         <p:spPr>
           <a:xfrm>
-            <a:off x="768096" y="4200655"/>
+            <a:off x="768096" y="3803903"/>
             <a:ext cx="3307994" cy="566928"/>
           </a:xfrm>
           <a:prstGeom prst="rect">
@@ -15649,7 +14950,7 @@
         </p:nvSpPr>
         <p:spPr>
           <a:xfrm>
-            <a:off x="1566367" y="4822447"/>
+            <a:off x="1566367" y="4425696"/>
             <a:ext cx="1711452" cy="274320"/>
           </a:xfrm>
           <a:prstGeom prst="roundRect">
@@ -15695,7 +14996,7 @@
         </p:nvSpPr>
         <p:spPr>
           <a:xfrm>
-            <a:off x="1566367" y="4822447"/>
+            <a:off x="1566367" y="4425696"/>
             <a:ext cx="1711452" cy="274320"/>
           </a:xfrm>
           <a:prstGeom prst="rect">
@@ -15734,8 +15035,8 @@
         </p:nvSpPr>
         <p:spPr>
           <a:xfrm>
-            <a:off x="768096" y="5206495"/>
-            <a:ext cx="3307994" cy="338327"/>
+            <a:off x="768096" y="4809744"/>
+            <a:ext cx="3307994" cy="749808"/>
           </a:xfrm>
           <a:prstGeom prst="rect">
             <a:avLst/>
@@ -15760,7 +15061,7 @@
                 </a:solidFill>
                 <a:latin typeface="Microsoft JhengHei"/>
               </a:rPr>
-              <a:t>批次   13,000 x 20 秒 = 72.2 人時(13…</a:t>
+              <a:t>批次   13,000 x 20 秒 = 72.2 人時(13,000+ 筆/天 = 全客戶每日平均總事件量,雲端伺…</a:t>
             </a:r>
           </a:p>
         </p:txBody>
@@ -15773,8 +15074,8 @@
         </p:nvSpPr>
         <p:spPr>
           <a:xfrm>
-            <a:off x="4332122" y="4072639"/>
-            <a:ext cx="3527450" cy="1600200"/>
+            <a:off x="4332122" y="3675887"/>
+            <a:ext cx="3527450" cy="2011680"/>
           </a:xfrm>
           <a:prstGeom prst="roundRect">
             <a:avLst>
@@ -15821,7 +15122,7 @@
         </p:nvSpPr>
         <p:spPr>
           <a:xfrm>
-            <a:off x="4441850" y="4200655"/>
+            <a:off x="4441850" y="3803903"/>
             <a:ext cx="3307994" cy="566928"/>
           </a:xfrm>
           <a:prstGeom prst="rect">
@@ -15860,7 +15161,7 @@
         </p:nvSpPr>
         <p:spPr>
           <a:xfrm>
-            <a:off x="5684367" y="4822447"/>
+            <a:off x="5684367" y="4425696"/>
             <a:ext cx="822960" cy="274320"/>
           </a:xfrm>
           <a:prstGeom prst="roundRect">
@@ -15906,7 +15207,7 @@
         </p:nvSpPr>
         <p:spPr>
           <a:xfrm>
-            <a:off x="5684367" y="4822447"/>
+            <a:off x="5684367" y="4425696"/>
             <a:ext cx="822960" cy="274320"/>
           </a:xfrm>
           <a:prstGeom prst="rect">
@@ -15945,8 +15246,8 @@
         </p:nvSpPr>
         <p:spPr>
           <a:xfrm>
-            <a:off x="4441850" y="5206495"/>
-            <a:ext cx="3307994" cy="338327"/>
+            <a:off x="4441850" y="4809744"/>
+            <a:ext cx="3307994" cy="749808"/>
           </a:xfrm>
           <a:prstGeom prst="rect">
             <a:avLst/>
@@ -15971,7 +15272,7 @@
                 </a:solidFill>
                 <a:latin typeface="Microsoft JhengHei"/>
               </a:rPr>
-              <a:t>W1-6 要交出:一件客戶爭議的時間拆解(等待…</a:t>
+              <a:t>W1-6 要交出:一件客戶爭議的時間拆解(等待排隊 0-1 天 · 撈數據 0.5 天 · 判讀 1-3 天 …</a:t>
             </a:r>
           </a:p>
         </p:txBody>
@@ -15984,8 +15285,8 @@
         </p:nvSpPr>
         <p:spPr>
           <a:xfrm>
-            <a:off x="8005876" y="4072639"/>
-            <a:ext cx="3527450" cy="1600200"/>
+            <a:off x="8005876" y="3675887"/>
+            <a:ext cx="3527450" cy="2011680"/>
           </a:xfrm>
           <a:prstGeom prst="roundRect">
             <a:avLst>
@@ -16032,7 +15333,7 @@
         </p:nvSpPr>
         <p:spPr>
           <a:xfrm>
-            <a:off x="8115604" y="4200655"/>
+            <a:off x="8115604" y="3803903"/>
             <a:ext cx="3307994" cy="566928"/>
           </a:xfrm>
           <a:prstGeom prst="rect">
@@ -16071,7 +15372,7 @@
         </p:nvSpPr>
         <p:spPr>
           <a:xfrm>
-            <a:off x="9066276" y="4822447"/>
+            <a:off x="9066276" y="4425696"/>
             <a:ext cx="1406652" cy="274320"/>
           </a:xfrm>
           <a:prstGeom prst="roundRect">
@@ -16117,7 +15418,7 @@
         </p:nvSpPr>
         <p:spPr>
           <a:xfrm>
-            <a:off x="9066276" y="4822447"/>
+            <a:off x="9066276" y="4425696"/>
             <a:ext cx="1406652" cy="274320"/>
           </a:xfrm>
           <a:prstGeom prst="rect">
@@ -16156,8 +15457,8 @@
         </p:nvSpPr>
         <p:spPr>
           <a:xfrm>
-            <a:off x="8115604" y="5206495"/>
-            <a:ext cx="3307994" cy="338327"/>
+            <a:off x="8115604" y="4809744"/>
+            <a:ext cx="3307994" cy="749808"/>
           </a:xfrm>
           <a:prstGeom prst="rect">
             <a:avLst/>
@@ -16182,7 +15483,7 @@
                 </a:solidFill>
                 <a:latin typeface="Microsoft JhengHei"/>
               </a:rPr>
-              <a:t>能力層:以現行小模型的表現外推,預期約 85…</a:t>
+              <a:t>能力層:以現行小模型的表現外推,預期約 85% 的爭議件機器有把握、可直接結案 - 1,000 筆…</a:t>
             </a:r>
           </a:p>
         </p:txBody>
@@ -16195,8 +15496,8 @@
         </p:nvSpPr>
         <p:spPr>
           <a:xfrm>
-            <a:off x="658368" y="5800855"/>
-            <a:ext cx="9658807" cy="709672"/>
+            <a:off x="658368" y="5815583"/>
+            <a:ext cx="9658807" cy="694943"/>
           </a:xfrm>
           <a:prstGeom prst="roundRect">
             <a:avLst>
@@ -16241,8 +15542,8 @@
         </p:nvSpPr>
         <p:spPr>
           <a:xfrm>
-            <a:off x="841247" y="5800855"/>
-            <a:ext cx="9293047" cy="709672"/>
+            <a:off x="841247" y="5815583"/>
+            <a:ext cx="9293047" cy="694943"/>
           </a:xfrm>
           <a:prstGeom prst="rect">
             <a:avLst/>
@@ -16583,7 +15884,7 @@
                           </a:solidFill>
                           <a:latin typeface="Microsoft JhengHei"/>
                         </a:rPr>
-                        <a:t>R1 技術局限 · 成功 中　模型不可…</a:t>
+                        <a:t>R1 技術局限｜不可解釋 成功中</a:t>
                       </a:r>
                     </a:p>
                   </a:txBody>
@@ -16606,7 +15907,7 @@
                           </a:solidFill>
                           <a:latin typeface="Microsoft JhengHei"/>
                         </a:rPr>
-                        <a:t>解釋:輸出可讀的描述與　引用到…</a:t>
+                        <a:t>解釋：輸出可讀描述+引用證據</a:t>
                       </a:r>
                     </a:p>
                   </a:txBody>
@@ -16629,7 +15930,7 @@
                           </a:solidFill>
                           <a:latin typeface="Microsoft JhengHei"/>
                         </a:rPr>
-                        <a:t>錯的描述一樣通順,　比錯的分數…</a:t>
+                        <a:t>描述錯也通順，比錯分數難察覺</a:t>
                       </a:r>
                     </a:p>
                   </a:txBody>
@@ -16652,7 +15953,7 @@
                           </a:solidFill>
                           <a:latin typeface="Microsoft JhengHei"/>
                         </a:rPr>
-                        <a:t>推翻模型判定的比例不降;　只看…</a:t>
+                        <a:t>推翻比例不降；只看到人看過的</a:t>
                       </a:r>
                     </a:p>
                   </a:txBody>
@@ -16677,7 +15978,7 @@
                           </a:solidFill>
                           <a:latin typeface="Microsoft JhengHei"/>
                         </a:rPr>
-                        <a:t>R2 數據 · 成功 中　資料級聯:判…</a:t>
+                        <a:t>R2 數據｜資料級聯 成功中</a:t>
                       </a:r>
                     </a:p>
                   </a:txBody>
@@ -16700,7 +16001,7 @@
                           </a:solidFill>
                           <a:latin typeface="Microsoft JhengHei"/>
                         </a:rPr>
-                        <a:t>審計:黃金題 + 抽樣雙人　複核 …</a:t>
+                        <a:t>審計：黃金題+雙人複核+快照</a:t>
                       </a:r>
                     </a:p>
                   </a:txBody>
@@ -16723,7 +16024,7 @@
                           </a:solidFill>
                           <a:latin typeface="Microsoft JhengHei"/>
                         </a:rPr>
-                        <a:t>雙人複核使複核成本　近倍增,需…</a:t>
+                        <a:t>複核成本近倍增，需抽樣控制</a:t>
                       </a:r>
                     </a:p>
                   </a:txBody>
@@ -16746,7 +16047,7 @@
                           </a:solidFill>
                           <a:latin typeface="Microsoft JhengHei"/>
                         </a:rPr>
-                        <a:t>交通標誌根因佔比偏離基準　基準…</a:t>
+                        <a:t>交通標誌根因佔比偏離 樣本 83%</a:t>
                       </a:r>
                     </a:p>
                   </a:txBody>
@@ -16771,7 +16072,7 @@
                           </a:solidFill>
                           <a:latin typeface="Microsoft JhengHei"/>
                         </a:rPr>
-                        <a:t>R3 數據｜自動化偏差 · 成功 中…</a:t>
+                        <a:t>R3 數據｜自動化偏差 成功中</a:t>
                       </a:r>
                     </a:p>
                   </a:txBody>
@@ -16794,7 +16095,7 @@
                           </a:solidFill>
                           <a:latin typeface="Microsoft JhengHei"/>
                         </a:rPr>
-                        <a:t>教育・介面 (Goddard et al., …</a:t>
+                        <a:t>教育・介面：不顯示信心</a:t>
                       </a:r>
                     </a:p>
                   </a:txBody>
@@ -16817,7 +16118,7 @@
                           </a:solidFill>
                           <a:latin typeface="Microsoft JhengHei"/>
                         </a:rPr>
-                        <a:t>不顯示信心使複核變慢,　與時效…</a:t>
+                        <a:t>不顯示信心拖慢複核 衝時效缺口</a:t>
                       </a:r>
                     </a:p>
                   </a:txBody>
@@ -16840,7 +16141,7 @@
                           </a:solidFill>
                           <a:latin typeface="Microsoft JhengHei"/>
                         </a:rPr>
-                        <a:t>盲測組與對照組判定差異　超過設…</a:t>
+                        <a:t>盲測組與對照組差異超容忍值</a:t>
                       </a:r>
                     </a:p>
                   </a:txBody>
@@ -16865,7 +16166,7 @@
                           </a:solidFill>
                           <a:latin typeface="Microsoft JhengHei"/>
                         </a:rPr>
-                        <a:t>R4 倫理 · 成功 低　駕駛本人沒有…</a:t>
+                        <a:t>R4 倫理｜駕駛無申訴管道 成功低</a:t>
                       </a:r>
                     </a:p>
                   </a:txBody>
@@ -16888,7 +16189,7 @@
                           </a:solidFill>
                           <a:latin typeface="Microsoft JhengHei"/>
                         </a:rPr>
-                        <a:t>問責:申訴機制到位前,　產出不…</a:t>
+                        <a:t>問責：申訴到位前不供個人考核</a:t>
                       </a:r>
                     </a:p>
                   </a:txBody>
@@ -16911,7 +16212,7 @@
                           </a:solidFill>
                           <a:latin typeface="Microsoft JhengHei"/>
                         </a:rPr>
-                        <a:t>限制用途會降低　客戶端採用意願…</a:t>
+                        <a:t>限制用途降低客戶端採用意願</a:t>
                       </a:r>
                     </a:p>
                   </a:txBody>
@@ -16934,7 +16235,7 @@
                           </a:solidFill>
                           <a:latin typeface="Microsoft JhengHei"/>
                         </a:rPr>
-                        <a:t>駕駛端申訴無處可收,　件數恆為…</a:t>
+                        <a:t>駕駛申訴無處可收，件數恆為零</a:t>
                       </a:r>
                     </a:p>
                   </a:txBody>
@@ -16959,7 +16260,7 @@
                           </a:solidFill>
                           <a:latin typeface="Microsoft JhengHei"/>
                         </a:rPr>
-                        <a:t>R5 社會性 · 成功 高　複核團隊抵…</a:t>
+                        <a:t>R5 社會性｜抵觸角色改變 成功高</a:t>
                       </a:r>
                     </a:p>
                   </a:txBody>
@@ -16982,7 +16283,7 @@
                           </a:solidFill>
                           <a:latin typeface="Microsoft JhengHei"/>
                         </a:rPr>
-                        <a:t>教育:角色轉型說明 +　判準手冊…</a:t>
+                        <a:t>教育：轉型說明+判準手冊共編</a:t>
                       </a:r>
                     </a:p>
                   </a:txBody>
@@ -17005,7 +16306,7 @@
                           </a:solidFill>
                           <a:latin typeface="Microsoft JhengHei"/>
                         </a:rPr>
-                        <a:t>參與式做法拉長　判準定案時程…</a:t>
+                        <a:t>參與式做法拉長判準定案時程</a:t>
                       </a:r>
                     </a:p>
                   </a:txBody>
@@ -17028,7 +16329,7 @@
                           </a:solidFill>
                           <a:latin typeface="Microsoft JhengHei"/>
                         </a:rPr>
-                        <a:t>複核團隊留任率或　黃金題參與率…</a:t>
+                        <a:t>團隊留任率或黃金題參與率下滑</a:t>
                       </a:r>
                     </a:p>
                   </a:txBody>
@@ -17053,7 +16354,7 @@
                           </a:solidFill>
                           <a:latin typeface="Microsoft JhengHei"/>
                         </a:rPr>
-                        <a:t>R6 經濟 · 成功 中　期內回本難證…</a:t>
+                        <a:t>R6 經濟｜期內回本難證 成功中</a:t>
                       </a:r>
                     </a:p>
                   </a:txBody>
@@ -17076,7 +16377,7 @@
                           </a:solidFill>
                           <a:latin typeface="Microsoft JhengHei"/>
                         </a:rPr>
-                        <a:t>審計:三道決策門　逐段釋出額度…</a:t>
+                        <a:t>審計：三道決策門逐段釋出額度</a:t>
                       </a:r>
                     </a:p>
                   </a:txBody>
@@ -17099,7 +16400,7 @@
                           </a:solidFill>
                           <a:latin typeface="Microsoft JhengHei"/>
                         </a:rPr>
-                        <a:t>分段釋出使長週期　工作包難以排…</a:t>
+                        <a:t>分段釋出使長週期工作包難排人</a:t>
                       </a:r>
                     </a:p>
                   </a:txBody>
@@ -17122,7 +16423,7 @@
                           </a:solidFill>
                           <a:latin typeface="Microsoft JhengHei"/>
                         </a:rPr>
-                        <a:t>決策門審查時單位成本　改善低於…</a:t>
+                        <a:t>決策門單位成本改善低於門檻</a:t>
                       </a:r>
                     </a:p>
                   </a:txBody>
@@ -17147,7 +16448,7 @@
                           </a:solidFill>
                           <a:latin typeface="Microsoft JhengHei"/>
                         </a:rPr>
-                        <a:t>R7 組織與管理 · 成功 高　缺管理…</a:t>
+                        <a:t>R7 組織管理｜缺高階支持 成功高</a:t>
                       </a:r>
                     </a:p>
                   </a:txBody>
@@ -17170,7 +16471,7 @@
                           </a:solidFill>
                           <a:latin typeface="Microsoft JhengHei"/>
                         </a:rPr>
-                        <a:t>問責:贊助人指派 +　決策門出席…</a:t>
+                        <a:t>問責：指派贊助人+出席才放行</a:t>
                       </a:r>
                     </a:p>
                   </a:txBody>
@@ -17193,7 +16494,7 @@
                           </a:solidFill>
                           <a:latin typeface="Microsoft JhengHei"/>
                         </a:rPr>
-                        <a:t>決策門增加治理負擔　與會議成本…</a:t>
+                        <a:t>決策門增加治理負擔與會議成本</a:t>
                       </a:r>
                     </a:p>
                   </a:txBody>
@@ -17216,7 +16517,7 @@
                           </a:solidFill>
                           <a:latin typeface="Microsoft JhengHei"/>
                         </a:rPr>
-                        <a:t>決策門連續兩次　無高階出席…</a:t>
+                        <a:t>決策門連續兩次無高階出席</a:t>
                       </a:r>
                     </a:p>
                   </a:txBody>
@@ -17241,7 +16542,7 @@
                           </a:solidFill>
                           <a:latin typeface="Microsoft JhengHei"/>
                         </a:rPr>
-                        <a:t>R8 政治法律政策 · 尚無緩解　「…</a:t>
+                        <a:t>R8 政治法律政策｜舉證 尚無緩解</a:t>
                       </a:r>
                     </a:p>
                   </a:txBody>
@@ -17264,7 +16565,7 @@
                           </a:solidFill>
                           <a:latin typeface="Microsoft JhengHei"/>
                         </a:rPr>
-                        <a:t>問責:法務書面意見　於 G1(第 6…</a:t>
+                        <a:t>問責：法務意見 G1（W6）前到位</a:t>
                       </a:r>
                     </a:p>
                   </a:txBody>
@@ -17287,7 +16588,7 @@
                           </a:solidFill>
                           <a:latin typeface="Microsoft JhengHei"/>
                         </a:rPr>
-                        <a:t>無 —— 目前沒有　可執行的緩解…</a:t>
+                        <a:t>無 —— 目前沒有可執行緩解</a:t>
                       </a:r>
                     </a:p>
                   </a:txBody>
@@ -17310,7 +16611,7 @@
                           </a:solidFill>
                           <a:latin typeface="Microsoft JhengHei"/>
                         </a:rPr>
-                        <a:t>客戶回頭標記的案件中　出現援引…</a:t>
+                        <a:t>回頭標記案件出現援引誤報爭議</a:t>
                       </a:r>
                     </a:p>
                   </a:txBody>
@@ -17335,7 +16636,7 @@
                           </a:solidFill>
                           <a:latin typeface="Microsoft JhengHei"/>
                         </a:rPr>
-                        <a:t>R9 倫理｜自動結案的漏放　本案自…</a:t>
+                        <a:t>R9 倫理｜自動結案漏放 本案造成</a:t>
                       </a:r>
                     </a:p>
                   </a:txBody>
@@ -17358,7 +16659,7 @@
                           </a:solidFill>
                           <a:latin typeface="Microsoft JhengHei"/>
                         </a:rPr>
-                        <a:t>問責:六個月影子模式(對外 0%)…</a:t>
+                        <a:t>問責：六個月影子模式 對外 0%</a:t>
                       </a:r>
                     </a:p>
                   </a:txBody>
@@ -17381,7 +16682,7 @@
                           </a:solidFill>
                           <a:latin typeface="Microsoft JhengHei"/>
                         </a:rPr>
-                        <a:t>抽樣稽核吃掉自動化　省下來的一…</a:t>
+                        <a:t>抽樣稽核吃掉自動化省下的一部分</a:t>
                       </a:r>
                     </a:p>
                   </a:txBody>
@@ -17404,7 +16705,7 @@
                           </a:solidFill>
                           <a:latin typeface="Microsoft JhengHei"/>
                         </a:rPr>
-                        <a:t>漏濾率(否決型):自動結案桶　與…</a:t>
+                        <a:t>漏濾率：兩桶漏放率差值 95% CI</a:t>
                       </a:r>
                     </a:p>
                   </a:txBody>
@@ -17429,7 +16730,7 @@
                           </a:solidFill>
                           <a:latin typeface="Microsoft JhengHei"/>
                         </a:rPr>
-                        <a:t>R10 倫理｜自動結案的冤枉　本案…</a:t>
+                        <a:t>R10 倫理｜自動結案冤枉 本案造成</a:t>
                       </a:r>
                     </a:p>
                   </a:txBody>
@@ -17452,7 +16753,7 @@
                           </a:solidFill>
                           <a:latin typeface="Microsoft JhengHei"/>
                         </a:rPr>
-                        <a:t>問責:申訴即強制轉人工　且不得…</a:t>
+                        <a:t>問責：申訴轉人工 禁同模型複判</a:t>
                       </a:r>
                     </a:p>
                   </a:txBody>
@@ -17475,7 +16776,7 @@
                           </a:solidFill>
                           <a:latin typeface="Microsoft JhengHei"/>
                         </a:rPr>
-                        <a:t>轉人工的量與時效　回到人力瓶頸…</a:t>
+                        <a:t>轉人工量與時效回到人力瓶頸</a:t>
                       </a:r>
                     </a:p>
                   </a:txBody>
@@ -17498,7 +16799,7 @@
                           </a:solidFill>
                           <a:latin typeface="Microsoft JhengHei"/>
                         </a:rPr>
-                        <a:t>申訴率與　申訴翻案率…</a:t>
+                        <a:t>申訴率與申訴翻案率</a:t>
                       </a:r>
                     </a:p>
                   </a:txBody>
@@ -17521,8 +16822,8 @@
         </p:nvSpPr>
         <p:spPr>
           <a:xfrm>
-            <a:off x="658368" y="5810332"/>
-            <a:ext cx="9658807" cy="700195"/>
+            <a:off x="658368" y="5138928"/>
+            <a:ext cx="9658807" cy="1371600"/>
           </a:xfrm>
           <a:prstGeom prst="roundRect">
             <a:avLst>
@@ -17567,8 +16868,8 @@
         </p:nvSpPr>
         <p:spPr>
           <a:xfrm>
-            <a:off x="841247" y="5810332"/>
-            <a:ext cx="9293047" cy="700195"/>
+            <a:off x="841247" y="5138928"/>
+            <a:ext cx="9293047" cy="1371600"/>
           </a:xfrm>
           <a:prstGeom prst="rect">
             <a:avLst/>
@@ -17593,7 +16894,7 @@
                 </a:solidFill>
                 <a:latin typeface="Microsoft JhengHei"/>
               </a:rPr>
-              <a:t>R8 沒有答案 —— 法務書面意見於 G1(第 6 週)前到位;R9 · R10 是這個方案自己造成的,放…</a:t>
+              <a:t>R8 沒有答案 —— 法務書面意見於 G1(第 6 週)前到位;R9 · R10 是這個方案自己造成的,放行門在移交後,不在這六個月。</a:t>
             </a:r>
           </a:p>
         </p:txBody>
@@ -17885,7 +17186,7 @@
                           </a:solidFill>
                           <a:latin typeface="Microsoft JhengHei"/>
                         </a:rPr>
-                        <a:t>1 人類、社會與環境福祉　期內同樣人力承接更高複核量;移交後那約 850 筆無人…</a:t>
+                        <a:t>1 人類、社會與環境福祉｜期內量增人力不變·移交後 850 筆無人覆核·推估非實測</a:t>
                       </a:r>
                     </a:p>
                   </a:txBody>
@@ -17956,7 +17257,7 @@
                           </a:solidFill>
                           <a:latin typeface="Microsoft JhengHei"/>
                         </a:rPr>
-                        <a:t>2 以人為本的價值觀　期內人仍逐筆判;移交後駕駛承受的是機器單方面的決定…</a:t>
+                        <a:t>2 以人為本的價值觀｜期內人仍逐筆判 · 移交後駕駛承受機器單方面決定</a:t>
                       </a:r>
                     </a:p>
                   </a:txBody>
@@ -18027,7 +17328,7 @@
                           </a:solidFill>
                           <a:latin typeface="Microsoft JhengHei"/>
                         </a:rPr>
-                        <a:t>3 公平性 (Australian Human Rights Commission, 2020)　期內排序仍依客戶…</a:t>
+                        <a:t>3 公平性｜期內排序仍依客戶購買量 · 移交後配給依據換成機器信心</a:t>
                       </a:r>
                     </a:p>
                   </a:txBody>
@@ -18098,7 +17399,7 @@
                           </a:solidFill>
                           <a:latin typeface="Microsoft JhengHei"/>
                         </a:rPr>
-                        <a:t>4 隱私保護與安全　擴大影像調閱與判定紀錄保存;唯一不因自動結案而惡化的一條…</a:t>
+                        <a:t>4 隱私保護與安全｜擴大影像調閱與判定紀錄保存 · 唯一不因自動結案惡化</a:t>
                       </a:r>
                     </a:p>
                   </a:txBody>
@@ -18169,7 +17470,7 @@
                           </a:solidFill>
                           <a:latin typeface="Microsoft JhengHei"/>
                         </a:rPr>
-                        <a:t>5 可靠性與安全性　漏放率目前不存在,只有一份 39 筆人工觸發測試(獨立樣本,自…</a:t>
+                        <a:t>5 可靠性與安全性｜漏放率目前不存在 · 僅 39 筆人工觸發測試〔自註為下限〕</a:t>
                       </a:r>
                     </a:p>
                   </a:txBody>
@@ -18240,7 +17541,7 @@
                           </a:solidFill>
                           <a:latin typeface="Microsoft JhengHei"/>
                         </a:rPr>
-                        <a:t>6 透明性與解釋性　對客戶揭露到哪一層尚未決定;移交後客戶不會知道那是機器判…</a:t>
+                        <a:t>6 透明性與解釋性｜對客戶揭露到哪一層未定 · 移交後客戶不知是機器判</a:t>
                       </a:r>
                     </a:p>
                   </a:txBody>
@@ -18311,7 +17612,7 @@
                           </a:solidFill>
                           <a:latin typeface="Microsoft JhengHei"/>
                         </a:rPr>
-                        <a:t>7 可申訴性　只有車隊安全主管能標記,駕駛本人不能提出質疑…</a:t>
+                        <a:t>7 可申訴性｜只有車隊安全主管能標記 · 駕駛本人不能提出質疑</a:t>
                       </a:r>
                     </a:p>
                   </a:txBody>
@@ -18357,7 +17658,7 @@
                           </a:solidFill>
                           <a:latin typeface="Microsoft JhengHei"/>
                         </a:rPr>
-                        <a:t>未達成　部署否決條件…</a:t>
+                        <a:t>未達成｜部署否決條件</a:t>
                       </a:r>
                     </a:p>
                   </a:txBody>
@@ -18382,7 +17683,7 @@
                           </a:solidFill>
                           <a:latin typeface="Microsoft JhengHei"/>
                         </a:rPr>
-                        <a:t>8 問責性　RACI 與三道決策門管的是專案;那 850 筆裡某一筆判錯,沒有人簽過名…</a:t>
+                        <a:t>8 問責性｜RACI 與三道決策門只管專案 · 850 筆裡某一筆判錯沒有人簽過名</a:t>
                       </a:r>
                     </a:p>
                   </a:txBody>
@@ -18451,8 +17752,8 @@
         </p:nvSpPr>
         <p:spPr>
           <a:xfrm>
-            <a:off x="658368" y="5646406"/>
-            <a:ext cx="9658807" cy="864121"/>
+            <a:off x="658368" y="4553712"/>
+            <a:ext cx="9658807" cy="1956816"/>
           </a:xfrm>
           <a:prstGeom prst="roundRect">
             <a:avLst>
@@ -18497,8 +17798,8 @@
         </p:nvSpPr>
         <p:spPr>
           <a:xfrm>
-            <a:off x="841247" y="5646406"/>
-            <a:ext cx="9293047" cy="864121"/>
+            <a:off x="841247" y="4553712"/>
+            <a:ext cx="9293047" cy="1956816"/>
           </a:xfrm>
           <a:prstGeom prst="rect">
             <a:avLst/>
@@ -18900,7 +18201,7 @@
                           </a:solidFill>
                           <a:latin typeface="Microsoft JhengHei"/>
                         </a:rPr>
-                        <a:t>業務① 客戶爭議回覆時效｜主要業務價值指標</a:t>
+                        <a:t>業務① 爭議回覆時效｜主價值指標</a:t>
                       </a:r>
                     </a:p>
                   </a:txBody>
@@ -18923,7 +18224,7 @@
                           </a:solidFill>
                           <a:latin typeface="Microsoft JhengHei"/>
                         </a:rPr>
-                        <a:t>單件爭議從分析到回信的完整鏈路,平均 2–5 天;約…</a:t>
+                        <a:t>全鏈路 2–5 天｜估計非量測</a:t>
                       </a:r>
                     </a:p>
                   </a:txBody>
@@ -18946,7 +18247,7 @@
                           </a:solidFill>
                           <a:latin typeface="Microsoft JhengHei"/>
                         </a:rPr>
-                        <a:t>2 天內;單純案件當天〔提案目標 · 客戶期望,非已…</a:t>
+                        <a:t>2 天內｜提案目標 未簽協議</a:t>
                       </a:r>
                     </a:p>
                   </a:txBody>
@@ -18971,7 +18272,7 @@
                           </a:solidFill>
                           <a:latin typeface="Microsoft JhengHei"/>
                         </a:rPr>
-                        <a:t>業務② 獲得人工驗證判定的客戶涵蓋率</a:t>
+                        <a:t>業務② 人工驗證客戶涵蓋率</a:t>
                       </a:r>
                     </a:p>
                   </a:txBody>
@@ -18994,7 +18295,7 @@
                           </a:solidFill>
                           <a:latin typeface="Microsoft JhengHei"/>
                         </a:rPr>
-                        <a:t>現況為配給制,依購買量與問題嚴重性排序;涵蓋率…</a:t>
+                        <a:t>配給制｜無紀錄 · W6 建立</a:t>
                       </a:r>
                     </a:p>
                   </a:txBody>
@@ -19017,7 +18318,7 @@
                           </a:solidFill>
                           <a:latin typeface="Microsoft JhengHei"/>
                         </a:rPr>
-                        <a:t>本案期內維持 100%(影子模式,機器不對外結案)。…</a:t>
+                        <a:t>期內 100% → 移交後約 15%</a:t>
                       </a:r>
                     </a:p>
                   </a:txBody>
@@ -19042,7 +18343,7 @@
                           </a:solidFill>
                           <a:latin typeface="Microsoft JhengHei"/>
                         </a:rPr>
-                        <a:t>業務③ 可服務的每日事件量上限</a:t>
+                        <a:t>業務③ 每日事件量上限</a:t>
                       </a:r>
                     </a:p>
                   </a:txBody>
@@ -19065,7 +18366,7 @@
                           </a:solidFill>
                           <a:latin typeface="Microsoft JhengHei"/>
                         </a:rPr>
-                        <a:t>現況撐一個大型車隊約 3,000 筆/天</a:t>
+                        <a:t>單一大型車隊約 3,000 筆/天</a:t>
                       </a:r>
                     </a:p>
                   </a:txBody>
@@ -19088,7 +18389,7 @@
                           </a:solidFill>
                           <a:latin typeface="Microsoft JhengHei"/>
                         </a:rPr>
-                        <a:t>支撐全客戶 13,000+ 筆/天〔提案目標;所需人力…</a:t>
+                        <a:t>全客戶 13,000+ 筆/天(提案)</a:t>
                       </a:r>
                     </a:p>
                   </a:txBody>
@@ -19113,7 +18414,7 @@
                           </a:solidFill>
                           <a:latin typeface="Microsoft JhengHei"/>
                         </a:rPr>
-                        <a:t>業務④ 可避免的年度增聘成本</a:t>
+                        <a:t>業務④ 可避免年度增聘成本</a:t>
                       </a:r>
                     </a:p>
                   </a:txBody>
@@ -19136,7 +18437,7 @@
                           </a:solidFill>
                           <a:latin typeface="Microsoft JhengHei"/>
                         </a:rPr>
-                        <a:t>不做本案、以現行做法覆蓋全部既有客戶需 17–24 …</a:t>
+                        <a:t>不做本案 17–24 人｜現有5人</a:t>
                       </a:r>
                     </a:p>
                   </a:txBody>
@@ -19159,7 +18460,7 @@
                           </a:solidFill>
                           <a:latin typeface="Microsoft JhengHei"/>
                         </a:rPr>
-                        <a:t>做本案、移交後開到天花板需 11–12 人(仍須增聘 …</a:t>
+                        <a:t>省5–13人≈NT$520–1,521萬</a:t>
                       </a:r>
                     </a:p>
                   </a:txBody>
@@ -19184,7 +18485,7 @@
                           </a:solidFill>
                           <a:latin typeface="Microsoft JhengHei"/>
                         </a:rPr>
-                        <a:t>營運⑤⑥ 兩條工作流的每筆人工工時</a:t>
+                        <a:t>營運⑤⑥ 兩條工作流每筆工時</a:t>
                       </a:r>
                     </a:p>
                   </a:txBody>
@@ -19207,7 +18508,7 @@
                           </a:solidFill>
                           <a:latin typeface="Microsoft JhengHei"/>
                         </a:rPr>
-                        <a:t>批次複核約 20 秒/筆(全量;營運端實務估計,尚未…</a:t>
+                        <a:t>批次20秒估·判讀5.25分單批</a:t>
                       </a:r>
                     </a:p>
                   </a:txBody>
@@ -19230,7 +18531,7 @@
                           </a:solidFill>
                           <a:latin typeface="Microsoft JhengHei"/>
                         </a:rPr>
-                        <a:t>兩者的正式量測都提前到 W6,與時間拆解同批交出…</a:t>
+                        <a:t>W6 交正式量測｜G1 訂目標</a:t>
                       </a:r>
                     </a:p>
                   </a:txBody>
@@ -19255,7 +18556,7 @@
                           </a:solidFill>
                           <a:latin typeface="Microsoft JhengHei"/>
                         </a:rPr>
-                        <a:t>營運⑦ ADAS · 行車輔助誤報率</a:t>
+                        <a:t>營運⑦ ADAS 行車輔助誤報率</a:t>
                       </a:r>
                     </a:p>
                   </a:txBody>
@@ -19278,7 +18579,7 @@
                           </a:solidFill>
                           <a:latin typeface="Microsoft JhengHei"/>
                         </a:rPr>
-                        <a:t>某小型車隊單月樣本 104 / 1,029 ≈ 10.1%(該樣…</a:t>
+                        <a:t>單月樣本 104/1,029≈10.1%</a:t>
                       </a:r>
                     </a:p>
                   </a:txBody>
@@ -19301,7 +18602,7 @@
                           </a:solidFill>
                           <a:latin typeface="Microsoft JhengHei"/>
                         </a:rPr>
-                        <a:t>降至 7% 以下〔提案目標;以該樣本為基準,G1 後依…</a:t>
+                        <a:t>→7%以下(提案)｜人機軌W12判</a:t>
                       </a:r>
                     </a:p>
                   </a:txBody>
@@ -19349,7 +18650,7 @@
                           </a:solidFill>
                           <a:latin typeface="Microsoft JhengHei"/>
                         </a:rPr>
-                        <a:t>現況 5–10%;同時是「駕駛端無效警示率」的可觀測…</a:t>
+                        <a:t>5–10%｜駕駛無效警示代理</a:t>
                       </a:r>
                     </a:p>
                   </a:txBody>
@@ -19372,7 +18673,7 @@
                           </a:solidFill>
                           <a:latin typeface="Microsoft JhengHei"/>
                         </a:rPr>
-                        <a:t>降至 5% 以下〔提案目標〕</a:t>
+                        <a:t>降至 5% 以下(提案)</a:t>
                       </a:r>
                     </a:p>
                   </a:txBody>
@@ -19420,7 +18721,7 @@
                           </a:solidFill>
                           <a:latin typeface="Microsoft JhengHei"/>
                         </a:rPr>
-                        <a:t>尖峰徵調 7 位研發工程師(離開本職 · 非常態編制…</a:t>
+                        <a:t>徵調 7 位研發｜非常態編制</a:t>
                       </a:r>
                     </a:p>
                   </a:txBody>
@@ -19443,7 +18744,7 @@
                           </a:solidFill>
                           <a:latin typeface="Microsoft JhengHei"/>
                         </a:rPr>
-                        <a:t>期內建立峰值徵調人時的量測基準,目標值於 G2 訂…</a:t>
+                        <a:t>期內建量測基準｜G2 訂目標</a:t>
                       </a:r>
                     </a:p>
                   </a:txBody>
@@ -19613,7 +18914,7 @@
                           </a:solidFill>
                           <a:latin typeface="Microsoft JhengHei"/>
                         </a:rPr>
-                        <a:t>不存在。唯一量測是一份 …</a:t>
+                        <a:t>不存在｜39 筆·下限</a:t>
                       </a:r>
                     </a:p>
                   </a:txBody>
@@ -19636,7 +18937,7 @@
                           </a:solidFill>
                           <a:latin typeface="Microsoft JhengHei"/>
                         </a:rPr>
-                        <a:t>W6 交出帶 95% 信賴區間…</a:t>
+                        <a:t>W6 點估計｜95% CI</a:t>
                       </a:r>
                     </a:p>
                   </a:txBody>
@@ -19659,7 +18960,7 @@
                           </a:solidFill>
                           <a:latin typeface="Microsoft JhengHei"/>
                         </a:rPr>
-                        <a:t>否決 G1 放不放行後段工…</a:t>
+                        <a:t>否決 G1｜技術負責人</a:t>
                       </a:r>
                     </a:p>
                   </a:txBody>
@@ -19730,7 +19031,7 @@
                           </a:solidFill>
                           <a:latin typeface="Microsoft JhengHei"/>
                         </a:rPr>
-                        <a:t>W10 前建立基線,目標值於…</a:t>
+                        <a:t>W10 前基線｜目標 G2</a:t>
                       </a:r>
                     </a:p>
                   </a:txBody>
@@ -19753,7 +19054,7 @@
                           </a:solidFill>
                           <a:latin typeface="Microsoft JhengHei"/>
                         </a:rPr>
-                        <a:t>否決 G2 准不准開放對照…</a:t>
+                        <a:t>否決G2·複核營運主管</a:t>
                       </a:r>
                     </a:p>
                   </a:txBody>
@@ -19847,7 +19148,7 @@
                           </a:solidFill>
                           <a:latin typeface="Microsoft JhengHei"/>
                         </a:rPr>
-                        <a:t>未達 100% 不移交(否決型…</a:t>
+                        <a:t>未達 100% 不移交</a:t>
                       </a:r>
                     </a:p>
                   </a:txBody>
@@ -19895,7 +19196,7 @@
                           </a:solidFill>
                           <a:latin typeface="Microsoft JhengHei"/>
                         </a:rPr>
-                        <a:t>定義:被分到「有把握、可…</a:t>
+                        <a:t>不存在｜機制尚未建立</a:t>
                       </a:r>
                     </a:p>
                   </a:txBody>
@@ -19918,7 +19219,7 @@
                           </a:solidFill>
                           <a:latin typeface="Microsoft JhengHei"/>
                         </a:rPr>
-                        <a:t>W12 由影子模式軌交出「…</a:t>
+                        <a:t>W12 差值 95% CI</a:t>
                       </a:r>
                     </a:p>
                   </a:txBody>
@@ -19941,7 +19242,7 @@
                           </a:solidFill>
                           <a:latin typeface="Microsoft JhengHei"/>
                         </a:rPr>
-                        <a:t>否決自動結案能不能對外生…</a:t>
+                        <a:t>否決對外｜技術負責人</a:t>
                       </a:r>
                     </a:p>
                   </a:txBody>

--- a/Artificial Intelligence for Enterprises/Assessment3/Huang_26254793_421104_Assessment 3.pptx
+++ b/Artificial Intelligence for Enterprises/Assessment3/Huang_26254793_421104_Assessment 3.pptx
@@ -668,81 +668,6 @@
           </a:p>
           <a:p>
             <a:r>
-              <a:t>【card:G1 · 第 6 週｜因果判定門】交:時間拆解(等待 / 找證據 / 判讀 / 內部覆核 / 回信)· 兩天逾時率 · 尖峰到件分布 · 抽幀率對交通標誌召回率的比較(它直接決定要買幾台)</a:t>
-            </a:r>
-          </a:p>
-          <a:p>
-            <a:r>
-              <a:t>【card:G1 · 第 6 週｜因果判定門】🔴 停的條件一:只有當「證據搜尋、誤報量與證據包製作」佔主要延遲,才續行後段;否則本案轉為排班與尖峰人力池方案</a:t>
-            </a:r>
-          </a:p>
-          <a:p>
-            <a:r>
-              <a:t>【card:G1 · 第 6 週｜因果判定門】同時要事前預註冊漏濾率的非劣性邊際 δ —— 判準必須寫在跑實驗之前。初步拆解顯示 AI 可處理段(找證據 + 判讀)佔全程 43%–78%,為營運端的初步估計,W1–6 交可稽核版本</a:t>
-            </a:r>
-          </a:p>
-          <a:p>
-            <a:r>
-              <a:t>【card:G1 · 第 6 週｜因果判定門】🔴 停的條件一:只有當「證據搜尋、誤報量與證據包製作」佔主要延遲,才續行後段;否則本案轉…</a:t>
-            </a:r>
-          </a:p>
-          <a:p>
-            <a:r>
-              <a:t>【card:G1 · 第 6 週｜因果判定門】🔴 停的條件二:評估底座未產出 → 剩餘工作全數不續行</a:t>
-            </a:r>
-          </a:p>
-          <a:p>
-            <a:r>
-              <a:t>【card:G1 · 第 6 週｜因果判定門】同時要事前預註冊漏濾率的非劣性邊際 δ —— 判準必須寫在跑實驗之前。初步拆解顯示 AI 可…</a:t>
-            </a:r>
-          </a:p>
-          <a:p>
-            <a:r>
-              <a:t>【card:G2 · 第 12 週｜四臂比較門】🔴 這道門停不掉實驗,只能調整模型的假設與規模。規則式若已解掉大部分誤報 → 靶心改為殘餘;規則式若無效 → 先查脈絡資料本身的品質</a:t>
-            </a:r>
-          </a:p>
-          <a:p>
-            <a:r>
-              <a:t>【card:G2 · 第 12 週｜四臂比較門】🔴 但「自動結案要不要對外開啟」不由 G2、也不由 G3 決定 —— 那需要移交後一道獨立的門,不在本次請求範圍</a:t>
-            </a:r>
-          </a:p>
-          <a:p>
-            <a:r>
-              <a:t>【card:G2 · 第 12 週｜四臂比較門】🔴 這道門停不掉實驗,只能調整模型的假設與規模。規則式若已解掉大部分誤報 → 靶心改為殘…</a:t>
-            </a:r>
-          </a:p>
-          <a:p>
-            <a:r>
-              <a:t>【card:G2 · 第 12 週｜四臂比較門】放行條件:人機判定品質不劣於現況,且人工觸碰時間與 P90 回覆時間達預註冊門檻</a:t>
-            </a:r>
-          </a:p>
-          <a:p>
-            <a:r>
-              <a:t>【card:G2 · 第 12 週｜四臂比較門】🔴 但「自動結案要不要對外開啟」不由 G2、也不由 G3 決定 —— 那需要移交後一道獨立的門…</a:t>
-            </a:r>
-          </a:p>
-          <a:p>
-            <a:r>
-              <a:t>【card:G3 · 第 24 週｜部署決定門】就算證不出增量,公司仍留下第一套可重複的模型評估與標註品質流程 —— 那個東西不隨這道門撤掉</a:t>
-            </a:r>
-          </a:p>
-          <a:p>
-            <a:r>
-              <a:t>【card:G3 · 第 24 週｜部署決定門】對照實驗的設計(hold-out 怎麼凍 · 因子怎麼拆 · 預註冊門檻訂在哪)由技術負責人在 W8 前提出、G2 核可</a:t>
-            </a:r>
-          </a:p>
-          <a:p>
-            <a:r>
-              <a:t>【card:G3 · 第 24 週｜部署決定門】就算證不出增量,公司仍留下第一套可重複的模型評估與標註品質流程 —— 那個東西不隨這道門…</a:t>
-            </a:r>
-          </a:p>
-          <a:p>
-            <a:r>
-              <a:t>【card:G3 · 第 24 週｜部署決定門】對照實驗的設計(hold-out 怎麼凍 · 因子怎麼拆 · 預註冊門檻訂在哪)由技術負責人在 W8 …</a:t>
-            </a:r>
-          </a:p>
-          <a:p>
-            <a:r>
               <a:t>【這一頁的作用】這頁要讓委員會相信兩件事,而不是相信「我有計畫」。第一:六包裡只有一包是 AI,其餘五包不是繞路 —— 沒有凍結評估集就量不出模型判得準不準,判準不一致的標註餵給模型就是垃圾進垃圾出,所以順序本身就是風險控制。第二:每一道門都寫出「什麼條件下這個案子會停」,包括 G1 可以整案轉向排班方案、G3 可以直接不部署模型端。四臂表則正面回答答辯必問的那一題:六個月怎麼可能算得出無人系統的風險 —— 答案是第四臂影子模式,前三臂全部含人,只有它算得出自動結案的漏放率。</a:t>
             </a:r>
           </a:p>
@@ -898,82 +823,7 @@
           </a:p>
           <a:p>
             <a:r>
-              <a:t>【card:我請求核准的錢】第一段 = 評估底座全部 + 標註品質 / 脈絡特徵的限額探索;約 4.85 人月(2.08 + 1.39 + 0.69 + 0.69)/ 量級 NT$42–47 萬〔提案規劃,非核定預算〕</a:t>
-            </a:r>
-          </a:p>
-          <a:p>
-            <a:r>
-              <a:t>【card:我請求核准的錢】第一段 = 評估底座全部 + 標註品質 / 脈絡特徵的限額探索;約 4.85 人月(2.08 + 1.39 +…</a:t>
-            </a:r>
-          </a:p>
-          <a:p>
-            <a:r>
-              <a:t>【card:我請求核准的錢】G1(第 6 週)由贊助人決定是否續行 —— 它決定的是要不要續行剩下的工作,不是要不要開始</a:t>
-            </a:r>
-          </a:p>
-          <a:p>
-            <a:r>
-              <a:t>【card:我請求核准的人】六方當責:項目贊助人 · 業務負責人 · 數據負責人 · 技術負責人 · 複核營運主管 · 專案負責人(提案人)。每個工作包只有一個 A;三道決策門的 A 一律落在項目贊助人</a:t>
-            </a:r>
-          </a:p>
-          <a:p>
-            <a:r>
-              <a:t>【card:我請求核准的人】請委員會指定贊助人,並於 G1 前確認本案與公司既有雲端判讀規劃的範圍、預算與當責邊界(我主張的相依關係,待共同確認;若評估結果是兩案應合併或改序,我接受)</a:t>
-            </a:r>
-          </a:p>
-          <a:p>
-            <a:r>
-              <a:t>【card:我請求核准的人】組織障礙不在技術側:政策可改 · 優先序照購買量 · 尖峰徵調研發 —— 所以我要的不只是一筆錢,是一個贊助人跟三道門</a:t>
-            </a:r>
-          </a:p>
-          <a:p>
-            <a:r>
-              <a:t>【card:我請求核准的人】請委員會指定贊助人,並於 G1 前確認本案與公司既有雲端判讀規劃的範圍、預算與當責邊界(…</a:t>
-            </a:r>
-          </a:p>
-          <a:p>
-            <a:r>
-              <a:t>【card:我請求核准的人】組織障礙不在技術側:政策可改 · 優先序照購買量 · 尖峰徵調研發 —— 所以我要的不只是一…</a:t>
-            </a:r>
-          </a:p>
-          <a:p>
-            <a:r>
-              <a:t>【card:六個月之後 / 不做的話】委員會手上會多三樣東西:① 一份可稽核的錯誤率 ② 一層把畫面外脈絡帶進事件的判斷層 ③ 一份證明或推翻「脈絡到底有沒有用」的對照實驗結果</a:t>
-            </a:r>
-          </a:p>
-          <a:p>
-            <a:r>
-              <a:t>【card:六個月之後 / 不做的話】不做的代價:客戶繼續等 2–5 天、小客戶繼續拿到沒有人看過的判定,而研發工程師在尖峰繼續被拉去看影片</a:t>
-            </a:r>
-          </a:p>
-          <a:p>
-            <a:r>
-              <a:t>【card:六個月之後 / 不做的話】但這句必須交代對價:本案移交後開到天花板時,是所有客戶約 85% 的爭議拿到沒有人看過的判定。差別只有一個,那個差別就是本案要買的東西 —— 那時我們量得出它錯多少,今天量不出</a:t>
-            </a:r>
-          </a:p>
-          <a:p>
-            <a:r>
-              <a:t>【card:六個月之後 / 不做的話】受影響但不在核准鏈上:5 位專職分析人員(工作從逐筆看片變成處理難題與治理,對應「同樣人力、更高產出」這個既有成效樣態)· 車隊客戶的安全主管 · 駕駛(目前無申訴管道)</a:t>
-            </a:r>
-          </a:p>
-          <a:p>
-            <a:r>
-              <a:t>【card:六個月之後 / 不做的話】不做的代價:客戶繼續等 2–5 天、小客戶繼續拿到沒有人看過的判定,而研發工程師在尖峰繼續…</a:t>
-            </a:r>
-          </a:p>
-          <a:p>
-            <a:r>
-              <a:t>【card:六個月之後 / 不做的話】但這句必須交代對價:本案移交後開到天花板時,是所有客戶約 85% 的爭議拿到沒有人看過的判…</a:t>
-            </a:r>
-          </a:p>
-          <a:p>
-            <a:r>
-              <a:t>【card:六個月之後 / 不做的話】受影響但不在核准鏈上:5 位專職分析人員(工作從逐筆看片變成處理難題與治理,對應「同樣人…</a:t>
-            </a:r>
-          </a:p>
-          <a:p>
-            <a:r>
-              <a:t>【callout】放行條件(本案的損益兩平門檻):① 若公司選擇以現行流程覆蓋全客戶,年度擴編暴露約 NT$1,248–2,223 萬 —— 這是反事實成本暴露,不是本案承諾的節省。② 完整專案的人力成本約等於 1.4–1.7 個 loaded FTE-year。③ 只有 G2 實測證明可避免或延後至少此容量,且業務確認會轉成少招人或少徵調研發,才放行後續預算。(當責:業務負責人提出容量轉換的確認 · 時點 G2 / 第 12 週 · 它決定第二段預算放不放行)  (IBM, n.d.)</a:t>
+              <a:t>【callout】放行條件:擴編暴露非承諾節省 · 只有 G2 實測證明可避免/延後 + 業務確認容量轉換,才放行後續預算</a:t>
             </a:r>
           </a:p>
           <a:p>
@@ -1158,32 +1008,7 @@
           </a:p>
           <a:p>
             <a:r>
-              <a:t>【card:車上裝置 · 即時初判】一個「事件」= 一段影片 + 時間地點 + 系統給的分類</a:t>
-            </a:r>
-          </a:p>
-          <a:p>
-            <a:r>
-              <a:t>【card:車上裝置 · 即時初判】單一大型車隊約 3,000 筆/天</a:t>
-            </a:r>
-          </a:p>
-          <a:p>
-            <a:r>
               <a:t>【card:雲端 · 複判】自動化到這裡就停了</a:t>
-            </a:r>
-          </a:p>
-          <a:p>
-            <a:r>
-              <a:t>【card:人工防線 · 5 位專職分析人員 · 逐筆】一次「爭議」= 客戶回頭說「這筆判錯了」;約 5–10% 的事件會被客戶回頭標記 —— 那筆是客戶先看到,我們後知道</a:t>
-            </a:r>
-          </a:p>
-          <a:p>
-            <a:r>
-              <a:t>【card:人工防線 · 5 位專職分析人員 · 逐筆】一次「爭議」= 客戶回頭說「這筆判錯了」;約 5–10% 的事件會被客戶回頭標記 —— 那筆是客…</a:t>
-            </a:r>
-          </a:p>
-          <a:p>
-            <a:r>
-              <a:t>【card:人工防線 · 5 位專職分析人員 · 逐筆】尖峰時另徵調 7 位研發工程師離開本職</a:t>
             </a:r>
           </a:p>
           <a:p>
@@ -1673,142 +1498,22 @@
           </a:p>
           <a:p>
             <a:r>
-              <a:t>【card:選項 0 的算式(照印,含對本案不利的部分)】批次   13,000 x 20 秒 = 72.2 人時(13,000+ 筆/天 = 全客戶每日平均總事件量,雲端伺服器實測統計)</a:t>
-            </a:r>
-          </a:p>
-          <a:p>
-            <a:r>
-              <a:t>【card:選項 0 的算式(照印,含對本案不利的部分)】合計   129.1-185.9 人時 / 8 小時 = 16.14-23.24 FTE → 取整員額 17-24 人(保產能只能無條件進位;現有 5 人);工作量比 = 129.1 / 29.8 = 4.33 倍,這就是「四倍以上」的算術依據</a:t>
-            </a:r>
-          </a:p>
-          <a:p>
-            <a:r>
-              <a:t>【card:選項 0 的算式(照印,含對本案不利的部分)】5.25 分/筆由一次實際判讀反推:5 人 x 3.6 個分析日 x 8 小時 = 144 人時 / 1,647 筆。這是單一批次的實際節奏,不是長期平均</a:t>
-            </a:r>
-          </a:p>
-          <a:p>
-            <a:r>
-              <a:t>【card:選項 0 的算式(照印,含對本案不利的部分)】兩個尚未驗證的假設:①約 20 秒/筆是營運端的實務估計,尚未以計時量測驗證 ②假設所有客戶有相同的案件組合與 5-10% 的爭議比例。兩項都由 W1-6 檢驗、G1 上桌;任一項被推翻,17-24 人要重算</a:t>
-            </a:r>
-          </a:p>
-          <a:p>
-            <a:r>
-              <a:t>【card:選項 0 的算式(照印,含對本案不利的部分)】加人會讓迴路轉得更久,不會讓它停:裝機量成長 → 複核量成長 → 人力吃緊 → 標註品質不穩 → 回流訓練資料不穩 → 誤報降不下來 → 複核量繼續成長。低品質標註會沿著訓練流程往下游放大(資料級聯)(Sambasivan et al., 2021)</a:t>
-            </a:r>
-          </a:p>
-          <a:p>
-            <a:r>
-              <a:t>【card:選項 0 的算式(照印,含對本案不利的部分)】爭議   13,000 x 5-10% x 5.25 分 = 56.8-113.7 人時</a:t>
-            </a:r>
-          </a:p>
-          <a:p>
-            <a:r>
-              <a:t>【card:選項 0 的算式(照印,含對本案不利的部分)】合計   129.1-185.9 人時 / 8 小時 = 16.14-23.24 FTE → 取整員額 17-24 人(保產能只…</a:t>
-            </a:r>
-          </a:p>
-          <a:p>
-            <a:r>
-              <a:t>【card:選項 0 的算式(照印,含對本案不利的部分)】5.25 分/筆由一次實際判讀反推:5 人 x 3.6 個分析日 x 8 小時 = 144 人時 / 1,647 筆…</a:t>
-            </a:r>
-          </a:p>
-          <a:p>
-            <a:r>
-              <a:t>【card:選項 0 的算式(照印,含對本案不利的部分)】兩個尚未驗證的假設:①約 20 秒/筆是營運端的實務估計,尚未以計時量測驗證 ②假設所有客戶…</a:t>
-            </a:r>
-          </a:p>
-          <a:p>
-            <a:r>
-              <a:t>【card:選項 0 的算式(照印,含對本案不利的部分)】加人會讓迴路轉得更久,不會讓它停:裝機量成長 → 複核量成長 → 人力吃緊 → 標註品質不穩 …</a:t>
-            </a:r>
-          </a:p>
-          <a:p>
-            <a:r>
-              <a:t>【card:G1(第 6 週)= 因果判定門】W1-6 要交出:一件客戶爭議的時間拆解(等待排隊 0-1 天 · 撈數據 0.5 天 · 判讀 1-3 天 · 內部覆核 0.5 天 · 回信 0.5 天 = 合計 2.5-5.5 天)· 兩天逾時率 · 尖峰到件分布 · 抽幀率的召回率比較</a:t>
-            </a:r>
-          </a:p>
-          <a:p>
-            <a:r>
-              <a:t>【card:G1(第 6 週)= 因果判定門】怎麼判:把五段分成兩堆 - 「AI 可處理」(撈數據 · 判讀 · 證據包製作)與「AI 不可處理」(排隊 · 排班 · 人力調度)</a:t>
-            </a:r>
-          </a:p>
-          <a:p>
-            <a:r>
-              <a:t>【card:G1(第 6 週)= 因果判定門】⚠️ 初步拆解已顯示 AI 可處理段佔全程 43%-78%,但那是營運端的一次口述拆解,不是系統量測;W1-6 要把它做成正式量測,判定規則不因初步結果而放寬。六週買一個答案,答案不對就不做後面</a:t>
-            </a:r>
-          </a:p>
-          <a:p>
-            <a:r>
-              <a:t>【card:G1(第 6 週)= 因果判定門】怎麼判:把五段分成兩堆 - 「AI 可處理」(撈數據 · 判讀 · 證據包製作)與「AI 不可處理」…</a:t>
-            </a:r>
-          </a:p>
-          <a:p>
-            <a:r>
-              <a:t>【card:G1(第 6 週)= 因果判定門】出口 A:AI 可處理的那一堆佔主要延遲 → 放行選項 1 / 2 的後段</a:t>
-            </a:r>
-          </a:p>
-          <a:p>
-            <a:r>
-              <a:t>【card:G1(第 6 週)= 因果判定門】出口 B:否則 → 轉選項 0b(調班 + 尖峰人力池),本案的後五個工作包不執行</a:t>
-            </a:r>
-          </a:p>
-          <a:p>
-            <a:r>
-              <a:t>【card:G1(第 6 週)= 因果判定門】⚠️ 初步拆解已顯示 AI 可處理段佔全程 43%-78%,但那是營運端的一次口述拆解,不是系統量…</a:t>
-            </a:r>
-          </a:p>
-          <a:p>
-            <a:r>
-              <a:t>【card:這 85% 到底是什麼(三層,一層都不可省)】能力層:以現行小模型的表現外推,預期約 85% 的爭議件機器有把握、可直接結案 - 1,000 筆進來約 850 筆,剩約 150 筆送人細看。對那些件而言那就是終局判定〔提案推估,非實測;母體只有客戶爭議段,不含每日全量批次複核〕</a:t>
-            </a:r>
-          </a:p>
-          <a:p>
-            <a:r>
-              <a:t>【card:這 85% 到底是什麼(三層,一層都不可省)】本案層:🔴 六個月內對外自動結案覆蓋率目標 = 0%。W12-24 只跑影子模式 - 機器照樣出結論但不對外送,人照常逐筆判,兩邊比對。這是唯一算得出自動結案漏放率的設計</a:t>
-            </a:r>
-          </a:p>
-          <a:p>
-            <a:r>
-              <a:t>【card:這 85% 到底是什麼(三層,一層都不可省)】技術寫到概念層次:一套地端視覺語言模型,篩檢與深挖兩種負載由同一台設備分時處理;實際選型與量化規格於 G1 依 W1-6 的量測定案 - 它直接決定要買幾台</a:t>
-            </a:r>
-          </a:p>
-          <a:p>
-            <a:r>
-              <a:t>【card:這 85% 到底是什麼(三層,一層都不可省)】吞吐:1,000 支 15 秒事件影片約 10-16 分〔估算,非實測;依一組公開可得模型的公開吞吐特性推估〕;同一批人以 1.0 倍速看完約 250 分</a:t>
-            </a:r>
-          </a:p>
-          <a:p>
-            <a:r>
-              <a:t>【card:這 85% 到底是什麼(三層,一層都不可省)】怎麼驗:第 12 週用同一份凍結評估集,四臂同場比 - 現行影像模型 / 規則式脈絡基線 / VLM 輔助人工 / 影子模式。G2 只能調整模型假設與規模,不能取消這個實驗</a:t>
-            </a:r>
-          </a:p>
-          <a:p>
-            <a:r>
-              <a:t>【card:這 85% 到底是什麼(三層,一層都不可省)】本案層:🔴 六個月內對外自動結案覆蓋率目標 = 0%。W12-24 只跑影子模式 - 機器照樣出結論…</a:t>
-            </a:r>
-          </a:p>
-          <a:p>
-            <a:r>
-              <a:t>【card:這 85% 到底是什麼(三層,一層都不可省)】放行層:要讓它對外生效,需通過本案之外的一道獨立門,不在本次請求範圍</a:t>
-            </a:r>
-          </a:p>
-          <a:p>
-            <a:r>
-              <a:t>【card:這 85% 到底是什麼(三層,一層都不可省)】技術寫到概念層次:一套地端視覺語言模型,篩檢與深挖兩種負載由同一台設備分時處理;實際選…</a:t>
-            </a:r>
-          </a:p>
-          <a:p>
-            <a:r>
-              <a:t>【card:這 85% 到底是什麼(三層,一層都不可省)】吞吐:1,000 支 15 秒事件影片約 10-16 分〔估算,非實測;依一組公開可得模型的公開吞吐特…</a:t>
-            </a:r>
-          </a:p>
-          <a:p>
-            <a:r>
-              <a:t>【card:這 85% 到底是什麼(三層,一層都不可省)】怎麼驗:第 12 週用同一份凍結評估集,四臂同場比 - 現行影像模型 / 規則式脈絡基線 / VLM…</a:t>
-            </a:r>
-          </a:p>
-          <a:p>
-            <a:r>
-              <a:t>【callout】⚠️ 85% 是分流率:它決定「這筆要不要人細看」,不是「這筆是不是誤報」;它與偵測誤報率量的不是同一件事,不可比、不可並排、不可相減。而人現在判得多準,我們沒有量過 - 所以我也不知道 85% 是進步還是退步,那正是第一個工作包要建的東西。</a:t>
+              <a:t>【card:選項 0 的算式(照印,含對本案不利的部分)】兩假設未驗證:20 秒/筆 · 全客戶同案件組合</a:t>
+            </a:r>
+          </a:p>
+          <a:p>
+            <a:r>
+              <a:t>【card:G1(第 6 週)= 因果判定門】43%-78% 為初估,非系統量測;判準不放寬</a:t>
+            </a:r>
+          </a:p>
+          <a:p>
+            <a:r>
+              <a:t>【card:這 85% 到底是什麼(三層,一層都不可省)】放行層:生效須過本案之外一道獨立門</a:t>
+            </a:r>
+          </a:p>
+          <a:p>
+            <a:r>
+              <a:t>【callout】⚠️ 85% 是分流率 → 要不要人細看,不是是不是誤報;不可與誤報率並排相減 · 人判得多準沒量過</a:t>
             </a:r>
           </a:p>
           <a:p>
@@ -2119,11 +1824,6 @@
           <a:p>
             <a:r>
               <a:t>── 備查(不唸,答辯用)──</a:t>
-            </a:r>
-          </a:p>
-          <a:p>
-            <a:r>
-              <a:t>【callout】這一頁不是外掛的合規章節:上面兩層回答「怎麼證明這個 AI 真的有效」,護欄層回答「什麼情況下要喊停」。護欄層任一未達標,上面兩層的成績一律不採計。參照 Australia's AI Ethics Principles (2019) 第七條可申訴性 —— 被機器處理掉的事件必須有人能提出質疑;把它做成否決型指標,是本提案自己的設計決定,不是該文獻的主張。</a:t>
             </a:r>
           </a:p>
           <a:p>
@@ -6045,7 +5745,7 @@
         </p:nvSpPr>
         <p:spPr>
           <a:xfrm>
-            <a:off x="768096" y="2999231"/>
+            <a:off x="768096" y="2999232"/>
             <a:ext cx="3307994" cy="566928"/>
           </a:xfrm>
           <a:prstGeom prst="rect">
@@ -6169,7 +5869,7 @@
         </p:nvSpPr>
         <p:spPr>
           <a:xfrm>
-            <a:off x="768096" y="4005071"/>
+            <a:off x="768096" y="4005072"/>
             <a:ext cx="3307994" cy="749808"/>
           </a:xfrm>
           <a:prstGeom prst="rect">
@@ -6195,7 +5895,23 @@
                 </a:solidFill>
                 <a:latin typeface="Microsoft JhengHei"/>
               </a:rPr>
-              <a:t>交:時間拆解(等待 / 找證據 / 判讀 / 內部覆核 / 回信)· 兩天逾時率 · 尖峰到件分布 · …</a:t>
+              <a:t>停:證據工作非主延遲 → 轉排班+尖峰人力池</a:t>
+            </a:r>
+          </a:p>
+          <a:p>
+            <a:pPr algn="ctr">
+              <a:lnSpc>
+                <a:spcPct val="135000"/>
+              </a:lnSpc>
+            </a:pPr>
+            <a:r>
+              <a:rPr sz="1200" b="0">
+                <a:solidFill>
+                  <a:srgbClr val="6B7885"/>
+                </a:solidFill>
+                <a:latin typeface="Microsoft JhengHei"/>
+              </a:rPr>
+              <a:t>停:評估底座未產出 → 剩餘工作全數不續行</a:t>
             </a:r>
           </a:p>
         </p:txBody>
@@ -6256,7 +5972,7 @@
         </p:nvSpPr>
         <p:spPr>
           <a:xfrm>
-            <a:off x="4441850" y="2999231"/>
+            <a:off x="4441850" y="2999232"/>
             <a:ext cx="3307994" cy="566928"/>
           </a:xfrm>
           <a:prstGeom prst="rect">
@@ -6380,7 +6096,7 @@
         </p:nvSpPr>
         <p:spPr>
           <a:xfrm>
-            <a:off x="4441850" y="4005071"/>
+            <a:off x="4441850" y="4005072"/>
             <a:ext cx="3307994" cy="749808"/>
           </a:xfrm>
           <a:prstGeom prst="rect">
@@ -6406,7 +6122,23 @@
                 </a:solidFill>
                 <a:latin typeface="Microsoft JhengHei"/>
               </a:rPr>
-              <a:t>同一凍結評估集上跑四臂(見下表),分兩軌:工具品質軌 · 結案判定軌</a:t>
+              <a:t>兩軌:工具品質軌 · 結案判定軌;停不掉實驗</a:t>
+            </a:r>
+          </a:p>
+          <a:p>
+            <a:pPr algn="ctr">
+              <a:lnSpc>
+                <a:spcPct val="135000"/>
+              </a:lnSpc>
+            </a:pPr>
+            <a:r>
+              <a:rPr sz="1200" b="0">
+                <a:solidFill>
+                  <a:srgbClr val="6B7885"/>
+                </a:solidFill>
+                <a:latin typeface="Microsoft JhengHei"/>
+              </a:rPr>
+              <a:t>只能改規模;對外自動結案不由 G2/G3 決定</a:t>
             </a:r>
           </a:p>
         </p:txBody>
@@ -6467,7 +6199,7 @@
         </p:nvSpPr>
         <p:spPr>
           <a:xfrm>
-            <a:off x="8115604" y="2999231"/>
+            <a:off x="8115604" y="2999232"/>
             <a:ext cx="3307994" cy="566928"/>
           </a:xfrm>
           <a:prstGeom prst="rect">
@@ -6591,7 +6323,7 @@
         </p:nvSpPr>
         <p:spPr>
           <a:xfrm>
-            <a:off x="8115604" y="4005071"/>
+            <a:off x="8115604" y="4005072"/>
             <a:ext cx="3307994" cy="749808"/>
           </a:xfrm>
           <a:prstGeom prst="rect">
@@ -6617,7 +6349,23 @@
                 </a:solidFill>
                 <a:latin typeface="Microsoft JhengHei"/>
               </a:rPr>
-              <a:t>🔴 停的條件:對照重訓證不出增量 → 模型端不部署,只留前四包的成果</a:t>
+              <a:t>🔴 停:對照重訓證不出增量 → 模型端不部署</a:t>
+            </a:r>
+          </a:p>
+          <a:p>
+            <a:pPr algn="ctr">
+              <a:lnSpc>
+                <a:spcPct val="135000"/>
+              </a:lnSpc>
+            </a:pPr>
+            <a:r>
+              <a:rPr sz="1200" b="0">
+                <a:solidFill>
+                  <a:srgbClr val="6B7885"/>
+                </a:solidFill>
+                <a:latin typeface="Microsoft JhengHei"/>
+              </a:rPr>
+              <a:t>就算證不出,評估與標註品質流程仍留下</a:t>
             </a:r>
           </a:p>
         </p:txBody>
@@ -7192,7 +6940,7 @@
         <p:spPr>
           <a:xfrm>
             <a:off x="658368" y="1783080"/>
-            <a:ext cx="45720" cy="713550"/>
+            <a:ext cx="45720" cy="771525"/>
           </a:xfrm>
           <a:prstGeom prst="rect">
             <a:avLst/>
@@ -7236,7 +6984,7 @@
         <p:spPr>
           <a:xfrm>
             <a:off x="804672" y="1755648"/>
-            <a:ext cx="2408822" cy="804990"/>
+            <a:ext cx="2408822" cy="862965"/>
           </a:xfrm>
           <a:prstGeom prst="rect">
             <a:avLst/>
@@ -7275,7 +7023,7 @@
         <p:spPr>
           <a:xfrm>
             <a:off x="3268358" y="1755648"/>
-            <a:ext cx="3152759" cy="804990"/>
+            <a:ext cx="3152759" cy="862965"/>
           </a:xfrm>
           <a:prstGeom prst="rect">
             <a:avLst/>
@@ -7314,7 +7062,7 @@
         <p:spPr>
           <a:xfrm>
             <a:off x="7183343" y="1755648"/>
-            <a:ext cx="4240255" cy="804990"/>
+            <a:ext cx="4240255" cy="862965"/>
           </a:xfrm>
           <a:prstGeom prst="rect">
             <a:avLst/>
@@ -7352,8 +7100,8 @@
         </p:nvSpPr>
         <p:spPr>
           <a:xfrm>
-            <a:off x="658368" y="2679510"/>
-            <a:ext cx="45720" cy="713550"/>
+            <a:off x="658368" y="2737485"/>
+            <a:ext cx="45720" cy="771525"/>
           </a:xfrm>
           <a:prstGeom prst="rect">
             <a:avLst/>
@@ -7396,8 +7144,8 @@
         </p:nvSpPr>
         <p:spPr>
           <a:xfrm>
-            <a:off x="804672" y="2652078"/>
-            <a:ext cx="2408822" cy="804990"/>
+            <a:off x="804672" y="2710053"/>
+            <a:ext cx="2408822" cy="862965"/>
           </a:xfrm>
           <a:prstGeom prst="rect">
             <a:avLst/>
@@ -7435,8 +7183,8 @@
         </p:nvSpPr>
         <p:spPr>
           <a:xfrm>
-            <a:off x="3268358" y="2652078"/>
-            <a:ext cx="3152759" cy="804990"/>
+            <a:off x="3268358" y="2710053"/>
+            <a:ext cx="3152759" cy="862965"/>
           </a:xfrm>
           <a:prstGeom prst="rect">
             <a:avLst/>
@@ -7474,8 +7222,8 @@
         </p:nvSpPr>
         <p:spPr>
           <a:xfrm>
-            <a:off x="7183343" y="2652078"/>
-            <a:ext cx="4240255" cy="804990"/>
+            <a:off x="7183343" y="2710053"/>
+            <a:ext cx="4240255" cy="862965"/>
           </a:xfrm>
           <a:prstGeom prst="rect">
             <a:avLst/>
@@ -7513,7 +7261,7 @@
         </p:nvSpPr>
         <p:spPr>
           <a:xfrm>
-            <a:off x="658368" y="3585084"/>
+            <a:off x="658368" y="3768939"/>
             <a:ext cx="3527450" cy="2011680"/>
           </a:xfrm>
           <a:prstGeom prst="roundRect">
@@ -7561,7 +7309,7 @@
         </p:nvSpPr>
         <p:spPr>
           <a:xfrm>
-            <a:off x="768096" y="3713100"/>
+            <a:off x="768096" y="3896955"/>
             <a:ext cx="3307994" cy="566928"/>
           </a:xfrm>
           <a:prstGeom prst="rect">
@@ -7600,7 +7348,7 @@
         </p:nvSpPr>
         <p:spPr>
           <a:xfrm>
-            <a:off x="1855927" y="4334892"/>
+            <a:off x="1855927" y="4518747"/>
             <a:ext cx="1132332" cy="274320"/>
           </a:xfrm>
           <a:prstGeom prst="roundRect">
@@ -7646,7 +7394,7 @@
         </p:nvSpPr>
         <p:spPr>
           <a:xfrm>
-            <a:off x="1855927" y="4334892"/>
+            <a:off x="1855927" y="4518747"/>
             <a:ext cx="1132332" cy="274320"/>
           </a:xfrm>
           <a:prstGeom prst="rect">
@@ -7685,7 +7433,7 @@
         </p:nvSpPr>
         <p:spPr>
           <a:xfrm>
-            <a:off x="768096" y="4718940"/>
+            <a:off x="768096" y="4902795"/>
             <a:ext cx="3307994" cy="749808"/>
           </a:xfrm>
           <a:prstGeom prst="rect">
@@ -7711,7 +7459,23 @@
                 </a:solidFill>
                 <a:latin typeface="Microsoft JhengHei"/>
               </a:rPr>
-              <a:t>六個月整體額度輪廓 · 分段釋出</a:t>
+              <a:t>第一段 4.85 人月 · 量級 NT$42–47 萬</a:t>
+            </a:r>
+          </a:p>
+          <a:p>
+            <a:pPr algn="ctr">
+              <a:lnSpc>
+                <a:spcPct val="135000"/>
+              </a:lnSpc>
+            </a:pPr>
+            <a:r>
+              <a:rPr sz="1200" b="0">
+                <a:solidFill>
+                  <a:srgbClr val="6B7885"/>
+                </a:solidFill>
+                <a:latin typeface="Microsoft JhengHei"/>
+              </a:rPr>
+              <a:t>〔規劃非核定預算〕G1 贊助人決定續不續行</a:t>
             </a:r>
           </a:p>
         </p:txBody>
@@ -7724,7 +7488,7 @@
         </p:nvSpPr>
         <p:spPr>
           <a:xfrm>
-            <a:off x="4332122" y="3585084"/>
+            <a:off x="4332122" y="3768939"/>
             <a:ext cx="3527450" cy="2011680"/>
           </a:xfrm>
           <a:prstGeom prst="roundRect">
@@ -7772,7 +7536,7 @@
         </p:nvSpPr>
         <p:spPr>
           <a:xfrm>
-            <a:off x="4441850" y="3713100"/>
+            <a:off x="4441850" y="3896955"/>
             <a:ext cx="3307994" cy="566928"/>
           </a:xfrm>
           <a:prstGeom prst="rect">
@@ -7811,7 +7575,7 @@
         </p:nvSpPr>
         <p:spPr>
           <a:xfrm>
-            <a:off x="5586831" y="4334892"/>
+            <a:off x="5586831" y="4518747"/>
             <a:ext cx="1018032" cy="274320"/>
           </a:xfrm>
           <a:prstGeom prst="roundRect">
@@ -7857,7 +7621,7 @@
         </p:nvSpPr>
         <p:spPr>
           <a:xfrm>
-            <a:off x="5586831" y="4334892"/>
+            <a:off x="5586831" y="4518747"/>
             <a:ext cx="1018032" cy="274320"/>
           </a:xfrm>
           <a:prstGeom prst="rect">
@@ -7896,7 +7660,7 @@
         </p:nvSpPr>
         <p:spPr>
           <a:xfrm>
-            <a:off x="4441850" y="4718940"/>
+            <a:off x="4441850" y="4902795"/>
             <a:ext cx="3307994" cy="749808"/>
           </a:xfrm>
           <a:prstGeom prst="rect">
@@ -7922,7 +7686,23 @@
                 </a:solidFill>
                 <a:latin typeface="Microsoft JhengHei"/>
               </a:rPr>
-              <a:t>六方當責:項目贊助人 · 業務負責人 · 數據負責人 · 技術負責人 · 複核營運主管 · 專案負…</a:t>
+              <a:t>請委員會指定項目贊助人 · 三道門 A 全歸他</a:t>
+            </a:r>
+          </a:p>
+          <a:p>
+            <a:pPr algn="ctr">
+              <a:lnSpc>
+                <a:spcPct val="135000"/>
+              </a:lnSpc>
+            </a:pPr>
+            <a:r>
+              <a:rPr sz="1200" b="0">
+                <a:solidFill>
+                  <a:srgbClr val="6B7885"/>
+                </a:solidFill>
+                <a:latin typeface="Microsoft JhengHei"/>
+              </a:rPr>
+              <a:t>G1 前確認與公司既有雲端判讀規劃的邊界</a:t>
             </a:r>
           </a:p>
         </p:txBody>
@@ -7935,7 +7715,7 @@
         </p:nvSpPr>
         <p:spPr>
           <a:xfrm>
-            <a:off x="8005876" y="3585084"/>
+            <a:off x="8005876" y="3768939"/>
             <a:ext cx="3527450" cy="2011680"/>
           </a:xfrm>
           <a:prstGeom prst="roundRect">
@@ -7983,7 +7763,7 @@
         </p:nvSpPr>
         <p:spPr>
           <a:xfrm>
-            <a:off x="8115604" y="3713100"/>
+            <a:off x="8115604" y="3896955"/>
             <a:ext cx="3307994" cy="566928"/>
           </a:xfrm>
           <a:prstGeom prst="rect">
@@ -8022,7 +7802,7 @@
         </p:nvSpPr>
         <p:spPr>
           <a:xfrm>
-            <a:off x="9336786" y="4334892"/>
+            <a:off x="9336786" y="4518747"/>
             <a:ext cx="865632" cy="274320"/>
           </a:xfrm>
           <a:prstGeom prst="roundRect">
@@ -8068,7 +7848,7 @@
         </p:nvSpPr>
         <p:spPr>
           <a:xfrm>
-            <a:off x="9336786" y="4334892"/>
+            <a:off x="9336786" y="4518747"/>
             <a:ext cx="865632" cy="274320"/>
           </a:xfrm>
           <a:prstGeom prst="rect">
@@ -8107,7 +7887,7 @@
         </p:nvSpPr>
         <p:spPr>
           <a:xfrm>
-            <a:off x="8115604" y="4718940"/>
+            <a:off x="8115604" y="4902795"/>
             <a:ext cx="3307994" cy="749808"/>
           </a:xfrm>
           <a:prstGeom prst="rect">
@@ -8133,7 +7913,23 @@
                 </a:solidFill>
                 <a:latin typeface="Microsoft JhengHei"/>
               </a:rPr>
-              <a:t>委員會手上會多三樣東西:① 一份可稽核的錯誤率 ② 一層把畫面外脈絡帶進事件的判斷層 ③ 一…</a:t>
+              <a:t>不做:客戶續等｜小客戶無人看過｜尖峰調研發</a:t>
+            </a:r>
+          </a:p>
+          <a:p>
+            <a:pPr algn="ctr">
+              <a:lnSpc>
+                <a:spcPct val="135000"/>
+              </a:lnSpc>
+            </a:pPr>
+            <a:r>
+              <a:rPr sz="1200" b="0">
+                <a:solidFill>
+                  <a:srgbClr val="6B7885"/>
+                </a:solidFill>
+                <a:latin typeface="Microsoft JhengHei"/>
+              </a:rPr>
+              <a:t>移交後開到天花板:約 85% 爭議無人看過</a:t>
             </a:r>
           </a:p>
         </p:txBody>
@@ -8146,8 +7942,8 @@
         </p:nvSpPr>
         <p:spPr>
           <a:xfrm>
-            <a:off x="658368" y="5724780"/>
-            <a:ext cx="9658807" cy="785747"/>
+            <a:off x="658368" y="5908635"/>
+            <a:ext cx="9658807" cy="601892"/>
           </a:xfrm>
           <a:prstGeom prst="roundRect">
             <a:avLst>
@@ -8192,8 +7988,8 @@
         </p:nvSpPr>
         <p:spPr>
           <a:xfrm>
-            <a:off x="841247" y="5724780"/>
-            <a:ext cx="9293047" cy="785747"/>
+            <a:off x="841247" y="5908635"/>
+            <a:ext cx="9293047" cy="601892"/>
           </a:xfrm>
           <a:prstGeom prst="rect">
             <a:avLst/>
@@ -8218,7 +8014,7 @@
                 </a:solidFill>
                 <a:latin typeface="Microsoft JhengHei"/>
               </a:rPr>
-              <a:t>放行條件(本案的損益兩平門檻):① 若公司選擇以現行流程覆蓋全客戶,年度擴編暴露約 NT$1,248–2,223 萬 —— 這是反事實成本暴露,不是本案承諾的節省。② 完整專案的人力成本約等於 1.…</a:t>
+              <a:t>放行條件:擴編暴露非承諾節省 · 只有 G2 實測證明可避免/延後 + 業務確認容量轉換,才放…</a:t>
             </a:r>
           </a:p>
         </p:txBody>
@@ -9216,7 +9012,23 @@
                 </a:solidFill>
                 <a:latin typeface="Microsoft JhengHei"/>
               </a:rPr>
-              <a:t>鏡頭在車上即時初判,偵測到一次可能的危險就記下一筆「事件」</a:t>
+              <a:t>偵測到可能的危險 → 記一筆「事件」</a:t>
+            </a:r>
+          </a:p>
+          <a:p>
+            <a:pPr algn="ctr">
+              <a:lnSpc>
+                <a:spcPct val="135000"/>
+              </a:lnSpc>
+            </a:pPr>
+            <a:r>
+              <a:rPr sz="1200" b="0">
+                <a:solidFill>
+                  <a:srgbClr val="6B7885"/>
+                </a:solidFill>
+                <a:latin typeface="Microsoft JhengHei"/>
+              </a:rPr>
+              <a:t>「事件」= 影片 + 時間地點 + 系統分類</a:t>
             </a:r>
           </a:p>
         </p:txBody>
@@ -9654,7 +9466,23 @@
                 </a:solidFill>
                 <a:latin typeface="Microsoft JhengHei"/>
               </a:rPr>
-              <a:t>這 5 個人做的事:重看影片 → 判成立或誤報 → 離開畫面查證據 → 書面回覆客戶</a:t>
+              <a:t>重看影片→判成立或誤報→離開畫面查證據→回信</a:t>
+            </a:r>
+          </a:p>
+          <a:p>
+            <a:pPr algn="ctr">
+              <a:lnSpc>
+                <a:spcPct val="135000"/>
+              </a:lnSpc>
+            </a:pPr>
+            <a:r>
+              <a:rPr sz="1200" b="0">
+                <a:solidFill>
+                  <a:srgbClr val="6B7885"/>
+                </a:solidFill>
+                <a:latin typeface="Microsoft JhengHei"/>
+              </a:rPr>
+              <a:t>爭議=客戶回頭說判錯 · 尖峰另徵調 7 位研發</a:t>
             </a:r>
           </a:p>
         </p:txBody>
@@ -9668,7 +9496,7 @@
         <p:spPr>
           <a:xfrm>
             <a:off x="658368" y="3895344"/>
-            <a:ext cx="5300319" cy="1161288"/>
+            <a:ext cx="5300319" cy="1268071"/>
           </a:xfrm>
           <a:prstGeom prst="roundRect">
             <a:avLst>
@@ -9755,7 +9583,7 @@
         <p:spPr>
           <a:xfrm>
             <a:off x="804672" y="4535424"/>
-            <a:ext cx="5007711" cy="338328"/>
+            <a:ext cx="5007711" cy="445111"/>
           </a:xfrm>
           <a:prstGeom prst="rect">
             <a:avLst/>
@@ -9794,7 +9622,7 @@
         <p:spPr>
           <a:xfrm>
             <a:off x="6233007" y="3895344"/>
-            <a:ext cx="5300319" cy="1161288"/>
+            <a:ext cx="5300319" cy="1268071"/>
           </a:xfrm>
           <a:prstGeom prst="roundRect">
             <a:avLst>
@@ -9881,7 +9709,7 @@
         <p:spPr>
           <a:xfrm>
             <a:off x="6379311" y="4535424"/>
-            <a:ext cx="5007711" cy="338328"/>
+            <a:ext cx="5007711" cy="445111"/>
           </a:xfrm>
           <a:prstGeom prst="rect">
             <a:avLst/>
@@ -9919,7 +9747,7 @@
         </p:nvSpPr>
         <p:spPr>
           <a:xfrm>
-            <a:off x="658368" y="5129783"/>
+            <a:off x="658368" y="5236567"/>
             <a:ext cx="10874959" cy="347472"/>
           </a:xfrm>
           <a:prstGeom prst="rect">
@@ -9958,8 +9786,8 @@
         </p:nvSpPr>
         <p:spPr>
           <a:xfrm>
-            <a:off x="658368" y="5650992"/>
-            <a:ext cx="45720" cy="306323"/>
+            <a:off x="658368" y="5757775"/>
+            <a:ext cx="45720" cy="252932"/>
           </a:xfrm>
           <a:prstGeom prst="rect">
             <a:avLst/>
@@ -10002,8 +9830,8 @@
         </p:nvSpPr>
         <p:spPr>
           <a:xfrm>
-            <a:off x="804672" y="5623560"/>
-            <a:ext cx="2116945" cy="397764"/>
+            <a:off x="804672" y="5730343"/>
+            <a:ext cx="2116945" cy="344372"/>
           </a:xfrm>
           <a:prstGeom prst="rect">
             <a:avLst/>
@@ -10041,8 +9869,8 @@
         </p:nvSpPr>
         <p:spPr>
           <a:xfrm>
-            <a:off x="2976481" y="5623560"/>
-            <a:ext cx="2787914" cy="397764"/>
+            <a:off x="2976481" y="5730343"/>
+            <a:ext cx="2787914" cy="344372"/>
           </a:xfrm>
           <a:prstGeom prst="rect">
             <a:avLst/>
@@ -10080,8 +9908,8 @@
         </p:nvSpPr>
         <p:spPr>
           <a:xfrm>
-            <a:off x="6453652" y="5623560"/>
-            <a:ext cx="3753794" cy="397764"/>
+            <a:off x="6453652" y="5730343"/>
+            <a:ext cx="3753794" cy="344372"/>
           </a:xfrm>
           <a:prstGeom prst="rect">
             <a:avLst/>
@@ -10119,8 +9947,8 @@
         </p:nvSpPr>
         <p:spPr>
           <a:xfrm>
-            <a:off x="658368" y="6140196"/>
-            <a:ext cx="45720" cy="306323"/>
+            <a:off x="658368" y="6193587"/>
+            <a:ext cx="45720" cy="252932"/>
           </a:xfrm>
           <a:prstGeom prst="rect">
             <a:avLst/>
@@ -10163,8 +9991,8 @@
         </p:nvSpPr>
         <p:spPr>
           <a:xfrm>
-            <a:off x="804672" y="6112764"/>
-            <a:ext cx="2116945" cy="397764"/>
+            <a:off x="804672" y="6166155"/>
+            <a:ext cx="2116945" cy="344372"/>
           </a:xfrm>
           <a:prstGeom prst="rect">
             <a:avLst/>
@@ -10202,8 +10030,8 @@
         </p:nvSpPr>
         <p:spPr>
           <a:xfrm>
-            <a:off x="2976481" y="6112764"/>
-            <a:ext cx="2787914" cy="397764"/>
+            <a:off x="2976481" y="6166155"/>
+            <a:ext cx="2787914" cy="344372"/>
           </a:xfrm>
           <a:prstGeom prst="rect">
             <a:avLst/>
@@ -10241,8 +10069,8 @@
         </p:nvSpPr>
         <p:spPr>
           <a:xfrm>
-            <a:off x="6453652" y="6112764"/>
-            <a:ext cx="3753794" cy="397764"/>
+            <a:off x="6453652" y="6166155"/>
+            <a:ext cx="3753794" cy="344372"/>
           </a:xfrm>
           <a:prstGeom prst="rect">
             <a:avLst/>
@@ -11201,7 +11029,7 @@
         </p:nvSpPr>
         <p:spPr>
           <a:xfrm>
-            <a:off x="658368" y="2839136"/>
+            <a:off x="658368" y="2933377"/>
             <a:ext cx="10874959" cy="274320"/>
           </a:xfrm>
           <a:prstGeom prst="rect">
@@ -11240,8 +11068,8 @@
         </p:nvSpPr>
         <p:spPr>
           <a:xfrm>
-            <a:off x="658368" y="3241472"/>
-            <a:ext cx="10874959" cy="872354"/>
+            <a:off x="658368" y="3335713"/>
+            <a:ext cx="10874959" cy="620652"/>
           </a:xfrm>
           <a:prstGeom prst="roundRect">
             <a:avLst>
@@ -11286,8 +11114,8 @@
         </p:nvSpPr>
         <p:spPr>
           <a:xfrm>
-            <a:off x="841247" y="3241472"/>
-            <a:ext cx="10509199" cy="872354"/>
+            <a:off x="841247" y="3335713"/>
+            <a:ext cx="10509199" cy="620652"/>
           </a:xfrm>
           <a:prstGeom prst="rect">
             <a:avLst/>
@@ -11312,7 +11140,7 @@
                 </a:solidFill>
                 <a:latin typeface="Microsoft JhengHei"/>
               </a:rPr>
-              <a:t>這兩段之所以慢,是同一個原因:模型看不到畫面外的東西 —— 撈數據慢,是因為人要自己去查那個位置與那段路的速限;判讀慢,是因為模型只拿到一張圖。</a:t>
+              <a:t>兩段慢,是同一個原因:模型看不到畫面外 —— 撈數據要人自己查速限 · 判讀只拿到一張圖</a:t>
             </a:r>
           </a:p>
         </p:txBody>
@@ -11325,7 +11153,7 @@
         </p:nvSpPr>
         <p:spPr>
           <a:xfrm>
-            <a:off x="658368" y="4269275"/>
+            <a:off x="658368" y="4111813"/>
             <a:ext cx="45720" cy="964406"/>
           </a:xfrm>
           <a:prstGeom prst="rect">
@@ -11369,7 +11197,7 @@
         </p:nvSpPr>
         <p:spPr>
           <a:xfrm>
-            <a:off x="804672" y="4241843"/>
+            <a:off x="804672" y="4084381"/>
             <a:ext cx="2116945" cy="1055846"/>
           </a:xfrm>
           <a:prstGeom prst="rect">
@@ -11408,7 +11236,7 @@
         </p:nvSpPr>
         <p:spPr>
           <a:xfrm>
-            <a:off x="2976481" y="4241843"/>
+            <a:off x="2976481" y="4084381"/>
             <a:ext cx="2787914" cy="1055846"/>
           </a:xfrm>
           <a:prstGeom prst="rect">
@@ -11447,7 +11275,7 @@
         </p:nvSpPr>
         <p:spPr>
           <a:xfrm>
-            <a:off x="6453652" y="4241843"/>
+            <a:off x="6453652" y="4084381"/>
             <a:ext cx="3753794" cy="1055846"/>
           </a:xfrm>
           <a:prstGeom prst="rect">
@@ -11486,7 +11314,7 @@
         </p:nvSpPr>
         <p:spPr>
           <a:xfrm>
-            <a:off x="658368" y="5416561"/>
+            <a:off x="658368" y="5259099"/>
             <a:ext cx="45720" cy="771525"/>
           </a:xfrm>
           <a:prstGeom prst="rect">
@@ -11530,7 +11358,7 @@
         </p:nvSpPr>
         <p:spPr>
           <a:xfrm>
-            <a:off x="804672" y="5389129"/>
+            <a:off x="804672" y="5231667"/>
             <a:ext cx="2116945" cy="862965"/>
           </a:xfrm>
           <a:prstGeom prst="rect">
@@ -11569,7 +11397,7 @@
         </p:nvSpPr>
         <p:spPr>
           <a:xfrm>
-            <a:off x="2976481" y="5389129"/>
+            <a:off x="2976481" y="5231667"/>
             <a:ext cx="2787914" cy="862965"/>
           </a:xfrm>
           <a:prstGeom prst="rect">
@@ -11608,7 +11436,7 @@
         </p:nvSpPr>
         <p:spPr>
           <a:xfrm>
-            <a:off x="6453652" y="5389129"/>
+            <a:off x="6453652" y="5231667"/>
             <a:ext cx="3753794" cy="862965"/>
           </a:xfrm>
           <a:prstGeom prst="rect">
@@ -11827,7 +11655,7 @@
         <p:spPr>
           <a:xfrm>
             <a:off x="658368" y="1755648"/>
-            <a:ext cx="10874959" cy="857181"/>
+            <a:ext cx="10874959" cy="621885"/>
           </a:xfrm>
           <a:prstGeom prst="roundRect">
             <a:avLst>
@@ -11873,7 +11701,7 @@
         <p:spPr>
           <a:xfrm>
             <a:off x="841247" y="1755648"/>
-            <a:ext cx="10509199" cy="857181"/>
+            <a:ext cx="10509199" cy="621885"/>
           </a:xfrm>
           <a:prstGeom prst="rect">
             <a:avLst/>
@@ -11898,7 +11726,7 @@
                 </a:solidFill>
                 <a:latin typeface="Microsoft JhengHei"/>
               </a:rPr>
-              <a:t>樣本:4 台車 · 23 天 · 1,647 筆 = 一個小型車隊、一個月 —— 以下所有比例僅在此樣本內成立。這一件的分析段:5 位專職分析人員並行 3.6 個工作日 = 144 人時(不含整理與回信)。</a:t>
+              <a:t>樣本 4 台車 · 23 天 · 1,647 筆 = 一個小型車隊、一個月｜以下所有比例僅在此樣本內成立</a:t>
             </a:r>
           </a:p>
         </p:txBody>
@@ -11912,7 +11740,7 @@
           <p:nvPr/>
         </p:nvGraphicFramePr>
         <p:xfrm>
-          <a:off x="658368" y="2740845"/>
+          <a:off x="658368" y="2505549"/>
           <a:ext cx="10874957" cy="2084832"/>
         </p:xfrm>
         <a:graphic>
@@ -12435,8 +12263,8 @@
         </p:nvSpPr>
         <p:spPr>
           <a:xfrm>
-            <a:off x="658368" y="4981125"/>
-            <a:ext cx="45720" cy="641257"/>
+            <a:off x="658368" y="4745829"/>
+            <a:ext cx="45720" cy="642937"/>
           </a:xfrm>
           <a:prstGeom prst="rect">
             <a:avLst/>
@@ -12479,8 +12307,8 @@
         </p:nvSpPr>
         <p:spPr>
           <a:xfrm>
-            <a:off x="804672" y="4953693"/>
-            <a:ext cx="2116945" cy="732697"/>
+            <a:off x="804672" y="4718397"/>
+            <a:ext cx="2116945" cy="734377"/>
           </a:xfrm>
           <a:prstGeom prst="rect">
             <a:avLst/>
@@ -12518,8 +12346,8 @@
         </p:nvSpPr>
         <p:spPr>
           <a:xfrm>
-            <a:off x="2976481" y="4953693"/>
-            <a:ext cx="2787914" cy="732697"/>
+            <a:off x="2976481" y="4718397"/>
+            <a:ext cx="2787914" cy="734377"/>
           </a:xfrm>
           <a:prstGeom prst="rect">
             <a:avLst/>
@@ -12557,8 +12385,8 @@
         </p:nvSpPr>
         <p:spPr>
           <a:xfrm>
-            <a:off x="6453652" y="4953693"/>
-            <a:ext cx="3753794" cy="732697"/>
+            <a:off x="6453652" y="4718397"/>
+            <a:ext cx="3753794" cy="734377"/>
           </a:xfrm>
           <a:prstGeom prst="rect">
             <a:avLst/>
@@ -12596,7 +12424,7 @@
         </p:nvSpPr>
         <p:spPr>
           <a:xfrm>
-            <a:off x="658368" y="5805262"/>
+            <a:off x="658368" y="5571646"/>
             <a:ext cx="45720" cy="321468"/>
           </a:xfrm>
           <a:prstGeom prst="rect">
@@ -12640,7 +12468,7 @@
         </p:nvSpPr>
         <p:spPr>
           <a:xfrm>
-            <a:off x="804672" y="5777830"/>
+            <a:off x="804672" y="5544214"/>
             <a:ext cx="2116945" cy="412908"/>
           </a:xfrm>
           <a:prstGeom prst="rect">
@@ -12679,7 +12507,7 @@
         </p:nvSpPr>
         <p:spPr>
           <a:xfrm>
-            <a:off x="2976481" y="5777830"/>
+            <a:off x="2976481" y="5544214"/>
             <a:ext cx="2787914" cy="412908"/>
           </a:xfrm>
           <a:prstGeom prst="rect">
@@ -12718,7 +12546,7 @@
         </p:nvSpPr>
         <p:spPr>
           <a:xfrm>
-            <a:off x="6453652" y="5777830"/>
+            <a:off x="6453652" y="5544214"/>
             <a:ext cx="3753794" cy="412908"/>
           </a:xfrm>
           <a:prstGeom prst="rect">
@@ -14864,7 +14692,7 @@
         <p:spPr>
           <a:xfrm>
             <a:off x="658368" y="3675887"/>
-            <a:ext cx="3527450" cy="2011680"/>
+            <a:ext cx="3527450" cy="2068871"/>
           </a:xfrm>
           <a:prstGeom prst="roundRect">
             <a:avLst>
@@ -15036,7 +14864,7 @@
         <p:spPr>
           <a:xfrm>
             <a:off x="768096" y="4809744"/>
-            <a:ext cx="3307994" cy="749808"/>
+            <a:ext cx="3307994" cy="806999"/>
           </a:xfrm>
           <a:prstGeom prst="rect">
             <a:avLst/>
@@ -15061,7 +14889,23 @@
                 </a:solidFill>
                 <a:latin typeface="Microsoft JhengHei"/>
               </a:rPr>
-              <a:t>批次   13,000 x 20 秒 = 72.2 人時(13,000+ 筆/天 = 全客戶每日平均總事件量,雲端伺…</a:t>
+              <a:t>144 人時÷1,647 筆=5.25 分〔非長期均值〕</a:t>
+            </a:r>
+          </a:p>
+          <a:p>
+            <a:pPr algn="ctr">
+              <a:lnSpc>
+                <a:spcPct val="135000"/>
+              </a:lnSpc>
+            </a:pPr>
+            <a:r>
+              <a:rPr sz="1200" b="0">
+                <a:solidFill>
+                  <a:srgbClr val="6B7885"/>
+                </a:solidFill>
+                <a:latin typeface="Microsoft JhengHei"/>
+              </a:rPr>
+              <a:t>129.1-185.9÷8=16.14-23.24 → 17-24 人</a:t>
             </a:r>
           </a:p>
         </p:txBody>
@@ -15075,7 +14919,7 @@
         <p:spPr>
           <a:xfrm>
             <a:off x="4332122" y="3675887"/>
-            <a:ext cx="3527450" cy="2011680"/>
+            <a:ext cx="3527450" cy="2068871"/>
           </a:xfrm>
           <a:prstGeom prst="roundRect">
             <a:avLst>
@@ -15247,7 +15091,7 @@
         <p:spPr>
           <a:xfrm>
             <a:off x="4441850" y="4809744"/>
-            <a:ext cx="3307994" cy="749808"/>
+            <a:ext cx="3307994" cy="806999"/>
           </a:xfrm>
           <a:prstGeom prst="rect">
             <a:avLst/>
@@ -15272,7 +15116,23 @@
                 </a:solidFill>
                 <a:latin typeface="Microsoft JhengHei"/>
               </a:rPr>
-              <a:t>W1-6 要交出:一件客戶爭議的時間拆解(等待排隊 0-1 天 · 撈數據 0.5 天 · 判讀 1-3 天 …</a:t>
+              <a:t>W1-6 交:時間拆解 · 兩天逾時率 · 到件分布</a:t>
+            </a:r>
+          </a:p>
+          <a:p>
+            <a:pPr algn="ctr">
+              <a:lnSpc>
+                <a:spcPct val="135000"/>
+              </a:lnSpc>
+            </a:pPr>
+            <a:r>
+              <a:rPr sz="1200" b="0">
+                <a:solidFill>
+                  <a:srgbClr val="6B7885"/>
+                </a:solidFill>
+                <a:latin typeface="Microsoft JhengHei"/>
+              </a:rPr>
+              <a:t>出口 A:AI 段佔主延遲 → 放行 1/2｜B → 0b</a:t>
             </a:r>
           </a:p>
         </p:txBody>
@@ -15286,7 +15146,7 @@
         <p:spPr>
           <a:xfrm>
             <a:off x="8005876" y="3675887"/>
-            <a:ext cx="3527450" cy="2011680"/>
+            <a:ext cx="3527450" cy="2068871"/>
           </a:xfrm>
           <a:prstGeom prst="roundRect">
             <a:avLst>
@@ -15458,7 +15318,7 @@
         <p:spPr>
           <a:xfrm>
             <a:off x="8115604" y="4809744"/>
-            <a:ext cx="3307994" cy="749808"/>
+            <a:ext cx="3307994" cy="806999"/>
           </a:xfrm>
           <a:prstGeom prst="rect">
             <a:avLst/>
@@ -15483,7 +15343,23 @@
                 </a:solidFill>
                 <a:latin typeface="Microsoft JhengHei"/>
               </a:rPr>
-              <a:t>能力層:以現行小模型的表現外推,預期約 85% 的爭議件機器有把握、可直接結案 - 1,000 筆…</a:t>
+              <a:t>能力層:約 850 筆機器結案=終局判定</a:t>
+            </a:r>
+          </a:p>
+          <a:p>
+            <a:pPr algn="ctr">
+              <a:lnSpc>
+                <a:spcPct val="135000"/>
+              </a:lnSpc>
+            </a:pPr>
+            <a:r>
+              <a:rPr sz="1200" b="0">
+                <a:solidFill>
+                  <a:srgbClr val="6B7885"/>
+                </a:solidFill>
+                <a:latin typeface="Microsoft JhengHei"/>
+              </a:rPr>
+              <a:t>本案層:六個月對外 0%,只跑影子模式</a:t>
             </a:r>
           </a:p>
         </p:txBody>
@@ -15496,8 +15372,8 @@
         </p:nvSpPr>
         <p:spPr>
           <a:xfrm>
-            <a:off x="658368" y="5815583"/>
-            <a:ext cx="9658807" cy="694943"/>
+            <a:off x="658368" y="5872775"/>
+            <a:ext cx="9658807" cy="637752"/>
           </a:xfrm>
           <a:prstGeom prst="roundRect">
             <a:avLst>
@@ -15542,8 +15418,8 @@
         </p:nvSpPr>
         <p:spPr>
           <a:xfrm>
-            <a:off x="841247" y="5815583"/>
-            <a:ext cx="9293047" cy="694943"/>
+            <a:off x="841247" y="5872775"/>
+            <a:ext cx="9293047" cy="637752"/>
           </a:xfrm>
           <a:prstGeom prst="rect">
             <a:avLst/>
@@ -15568,7 +15444,7 @@
                 </a:solidFill>
                 <a:latin typeface="Microsoft JhengHei"/>
               </a:rPr>
-              <a:t>⚠️ 85% 是分流率:它決定「這筆要不要人細看」,不是「這筆是不是誤報」;它與偵測誤報率量…</a:t>
+              <a:t>⚠️ 85% 是分流率 → 要不要人細看,不是是不是誤報;不可與誤報率並排相減 · 人判得多準沒…</a:t>
             </a:r>
           </a:p>
         </p:txBody>
@@ -18088,7 +17964,7 @@
                 </a:solidFill>
                 <a:latin typeface="Microsoft JhengHei"/>
               </a:rPr>
-              <a:t>這一頁不是外掛的合規章節:上面兩層回答「怎麼證明這個 AI 真的有效」,護欄層回答「什麼情況下要喊…</a:t>
+              <a:t>這頁不是外掛的合規章節:護欄任一未達標,上兩層成績一律不採計;否決型是本案決定,非文獻主張</a:t>
             </a:r>
           </a:p>
         </p:txBody>

--- a/Artificial Intelligence for Enterprises/Assessment3/Huang_26254793_421104_Assessment 3.pptx
+++ b/Artificial Intelligence for Enterprises/Assessment3/Huang_26254793_421104_Assessment 3.pptx
@@ -623,27 +623,12 @@
           </a:p>
           <a:p>
             <a:r>
-              <a:t>【】一套地端視覺語言模型,篩檢與深挖兩種負載由同一台設備分時處理;實際選型與量化規格於 G1 依 W1–6 的量測定案(概念層次)。W8–12 最小離線試驗 → W12–24 只跑影子模式:機器照樣出結論但不對外送,人照常逐筆判,兩邊比對。總投入 4.50 人月不變,係 WP-E 內部人力前移,不增加總人月</a:t>
-            </a:r>
-          </a:p>
-          <a:p>
-            <a:r>
-              <a:t>【】交:公司第一份可稽核的錯誤率(含 95% 信賴區間)· 冷凍評估集 · 兩條工作流的單位工時正式基準 · 每案「結案方向」的黃金答案標籤 · 爭議處理的時間拆解、兩天逾時率、尖峰到件分布。公開數據:資料工作佔掉分析人員約八成時間 (Press, 2016) —— 前三包份量偏重是產業常態,不是計畫灌水</a:t>
-            </a:r>
-          </a:p>
-          <a:p>
-            <a:r>
-              <a:t>【】交:規則式脈絡層(刻意先做不含模型的版本,它同時是地端 VLM 的對照基線)· 誤報下降量測 (Rudin, 2019)。規則式今天就能做,排第五週是因為沒有前六週的基準線就證不出它有效 —— 這個取捨我提出來,決定權在各位</a:t>
-            </a:r>
-          </a:p>
-          <a:p>
-            <a:r>
               <a:t>【rows】{'label': 'WP-B 標註品質｜AI 的前置', 'value': 'W3–10', 'note': '交:誤報的操作型定義 · 判準手冊 · 一致性儀表板。判準不一致的標註餵給模型就是垃圾進垃圾出 (Northcutt et al., 2021)'}</a:t>
             </a:r>
           </a:p>
           <a:p>
             <a:r>
-              <a:t>【rows】{'label': 'WP-C 脈絡特徵工程｜AI 的前置', 'value': 'W5–12', 'note': '交:規則式脈絡層(刻意先做不含模型的版本,它同時是地端 VLM 的對照基線)· 誤報下降量測 (Rudin, 2019)。規則式今天就能做,排第五週是因為沒有前六週的基準線就證不出它有效 —— 這個取捨我提出來,決定權在各位'}</a:t>
+              <a:t>【rows】{'label': 'WP-C 脈絡特徵工程｜AI 的前置', 'value': 'W5–12', 'note': '交:規則式脈絡層(刻意先做不含模型的版本,它同時是地端 VLM 的對照基線)· 誤報下降量測。排第五週,是因為沒有前六週基準線就證不出它有效'}</a:t>
             </a:r>
           </a:p>
           <a:p>
@@ -654,16 +639,6 @@
           <a:p>
             <a:r>
               <a:t>【rows】{'label': 'WP-F 治理與移交｜AI 之後', 'value': 'W20–26', 'note': '交:移交文件 · 常態儀表板。六個里程碑 M1–M6 落在 W6 / W10 / W12 / W16 / W24 / W26,那是交東西的時點,不是可喊停的時點'}</a:t>
-            </a:r>
-          </a:p>
-          <a:p>
-            <a:r>
-              <a:t>【rows[0]WP-A 評估底座｜AI 的前置】交:公司第一份可稽核的錯誤率(含 95% 信賴區間)· 冷凍評估集 · 兩條工作流的單位工時正式基準 · 每案「結案方向」的黃金答案標籤 · 爭議處理的時間拆解、兩天逾時率、尖峰到件分布。公開數據:資料工作佔掉分析人員約八成時間 (Press, 2016) —— 前三包份量偏重是產業常態,不是計畫灌水</a:t>
-            </a:r>
-          </a:p>
-          <a:p>
-            <a:r>
-              <a:t>【rows[1]WP-E 地端 VLM 事件判讀｜🔴 本案唯一的 AI 主體】一套地端視覺語言模型,篩檢與深挖兩種負載由同一台設備分時處理;實際選型與量化規格於 G1 依 W1–6 的量測定案(概念層次)。W8–12 最小離線試驗 → W12–24 只跑影子模式:機器照樣出結論但不對外送,人照常逐筆判,兩邊比對。總投入 4.50 人月不變,係 WP-E 內部人力前移,不增加總人月</a:t>
             </a:r>
           </a:p>
           <a:p>
@@ -763,67 +738,22 @@
           </a:p>
           <a:p>
             <a:r>
-              <a:t>【】市場採購量級,非核定採購價;本頁唯一不由算式推得的金額。規格等級與選型於 G1 依 W1–6 量測定案。採購時點在 G1 之後、W8 之前,不在第一段額度內。設備 = 一個初階工程師年成本(NT$104–117 萬)的 14%–19%;硬體僅佔已估成本的 8%–12%。🚫 不得寫成「用 16–20 萬取代千萬元增聘」—— 機器只打得到那一段裡的一部分,證據整理完人還是要覆核</a:t>
-            </a:r>
-          </a:p>
-          <a:p>
-            <a:r>
-              <a:t>【】移交後爭議段毛節省 48.3–96.7 人時/天 = 6.0–12.1 FTE;但自動結案必須抽樣盲測稽核,樣本量由精度反推(整體 ±1% 需 753 筆/月 = 0.39 FTE;分層 8 類各 ±1% 需 6,024 筆/月 = 3.14 FTE)→ 淨節省 2.9–11.7 FTE。提案推估,非實測。🚫 在稽核稅、申訴重判與漂移調查三項齊備前,不宣稱任何節省額</a:t>
-            </a:r>
-          </a:p>
-          <a:p>
-            <a:r>
-              <a:t>【】18.2 人月 × 月薪 NT$6.7–7.5 萬(年薪 80–90 萬 ÷ 12)× 間接費率 1.3。三個輸入都印在上面:薪資量級、間接費率、匯率(1 A$ ≈ NT$21,概算),三項都是提案人設定的假設 —— 它是量級,不是報價。唯一叫法為「人力成本估算」,🚫 不得稱總成本</a:t>
-            </a:r>
-          </a:p>
-          <a:p>
-            <a:r>
-              <a:t>【】設備 16–20(一次性)+ 電力三年 0.7–1.9〔假設 1.9–3.8 kWh/日 · NT$3.5–4.5/kWh〕+ 延保三年 2.4–6.0〔假設硬體價 5–10%/年〕+ 維運監控與模型更新三年 31.2–70.2。維運人力佔 59%–62%,電力只佔設備價 4%–12%(低功耗工作站級,不是機房 GPU 伺服器)。上界跳這麼大不是估算失準,是治理成本的真實形狀 —— 要多細的精度就要付多少人。🚫 唯一叫法為「三年可推算 TCO」,不得稱三年總成本</a:t>
-            </a:r>
-          </a:p>
-          <a:p>
-            <a:r>
-              <a:t>【】不做本案、以現行做法覆蓋全部既有客戶需 17–24 人(現有 5 人);做本案、移交後開到天花板仍需 11–12 人 —— 仍須增聘 6–7 人,🚫 不是「不用增聘」也不是「可以縮編」。以初階工程師公開薪資量級推算,非核定預算,非本案承諾的節省額;🚫 不得與設備價相減成 ROI</a:t>
-            </a:r>
-          </a:p>
-          <a:p>
-            <a:r>
-              <a:t>【】① 影片儲存 ② 雲端運算(伺服器端推論)③ 圖資更新 ④ 測試環境建置 ⑤ AI 訓練資料蒐集。當責:技術負責人與數據負責人於 G1 前補齊量級,它決定第二段額度要不要上修。🚫 因這五項未估價,人力與設備相加後只能稱「已估成本」,不得稱總成本 —— 已辨識而未估價,和沒想到,是兩件事</a:t>
-            </a:r>
-          </a:p>
-          <a:p>
-            <a:r>
-              <a:t>【rows】{'label': '人力(18.2 人月,六包 × 五種角色 + 專案負責人)', 'value': '約 NT$158–177 萬', 'note': '18.2 人月 × 月薪 NT$6.7–7.5 萬(年薪 80–90 萬 ÷ 12)× 間接費率 1.3。三個輸入都印在上面:薪資量級、間接費率、匯率(1 A$ ≈ NT$21,概算),三項都是提案人設定的假設 —— 它是量級,不是報價。唯一叫法為「人力成本估算」,🚫 不得稱總成本'}</a:t>
-            </a:r>
-          </a:p>
-          <a:p>
-            <a:r>
-              <a:t>【rows】{'label': '三年可推算 TCO(兩個數字,🚫 不得合併)', 'value': '六個月專案期(影子模式)約 NT$50–118 萬(中案 72 萬)｜移交後(含稽核)約 NT$173–1,219 萬', 'note': '設備 16–20(一次性)+ 電力三年 0.7–1.9〔假設 1.9–3.8 kWh/日 · NT$3.5–4.5/kWh〕+ 延保三年 2.4–6.0〔假設硬體價 5–10%/年〕+ 維運監控與模型更新三年 31.2–70.2。維運人力佔 59%–62%,電力只佔設備價 4%–12%(低功耗工作站級,不是機房 GPU 伺服器)。上界跳這麼大不是估算失準,是治理成本的真實形狀 —— 要多細的精度就要付多少人。🚫 唯一叫法為「三年可推算 TCO」,不得稱三年總成本'}</a:t>
-            </a:r>
-          </a:p>
-          <a:p>
-            <a:r>
-              <a:t>【rows】{'label': '可避免的年度增聘(移交後,不是六個月的交付)', 'value': '5–13 人 ≈ NT$520–1,521 萬/年', 'note': '不做本案、以現行做法覆蓋全部既有客戶需 17–24 人(現有 5 人);做本案、移交後開到天花板仍需 11–12 人 —— 仍須增聘 6–7 人,🚫 不是「不用增聘」也不是「可以縮編」。以初階工程師公開薪資量級推算,非核定預算,非本案承諾的節省額;🚫 不得與設備價相減成 ROI'}</a:t>
-            </a:r>
-          </a:p>
-          <a:p>
-            <a:r>
-              <a:t>【rows】{'label': '已辨識、尚未估價的五項非人力成本', 'value': '不編金額', 'note': '① 影片儲存 ② 雲端運算(伺服器端推論)③ 圖資更新 ④ 測試環境建置 ⑤ AI 訓練資料蒐集。當責:技術負責人與數據負責人於 G1 前補齊量級,它決定第二段額度要不要上修。🚫 因這五項未估價,人力與設備相加後只能稱「已估成本」,不得稱總成本 —— 已辨識而未估價,和沒想到,是兩件事'}</a:t>
-            </a:r>
-          </a:p>
-          <a:p>
-            <a:r>
-              <a:t>【rows[0]地端設備(一台起步)】市場採購量級,非核定採購價;本頁唯一不由算式推得的金額。規格等級與選型於 G1 依 W1–6 量測定案。採購時點在 G1 之後、W8 之前,不在第一段額度內。設備 = 一個初階工程師年成本(NT$104–117 萬)的 14%–19%;硬體僅佔已估成本的 8%–12%。🚫 不得寫成「用 16–20 萬取代千萬元增聘」—— 機器只打得到那一段裡的一部分,證據整理完人還是要覆核</a:t>
-            </a:r>
-          </a:p>
-          <a:p>
-            <a:r>
-              <a:t>【rows[1]🔴 稽核稅 —— 自動化不是免費的】移交後爭議段毛節省 48.3–96.7 人時/天 = 6.0–12.1 FTE;但自動結案必須抽樣盲測稽核,樣本量由精度反推(整體 ±1% 需 753 筆/月 = 0.39 FTE;分層 8 類各 ±1% 需 6,024 筆/月 = 3.14 FTE)→ 淨節省 2.9–11.7 FTE。提案推估,非實測。🚫 在稽核稅、申訴重判與漂移調查三項齊備前,不宣稱任何節省額</a:t>
-            </a:r>
-          </a:p>
-          <a:p>
-            <a:r>
-              <a:t>【callout】放行條件:擴編暴露非承諾節省 · 只有 G2 實測證明可避免/延後 + 業務確認容量轉換,才放行後續預算</a:t>
+              <a:t>【rows】{'label': '人力(18.2 人月,六包 × 五種角色 + 專案負責人)', 'value': '約 NT$158–177 萬', 'note': '18.2 人月 × 月薪 NT$6.7–7.5 萬 × 間接費率 1.3。薪資量級、費率、匯率(1 A$≈NT$21)三項都是提案人設定的假設 —— 是量級,不是報價'}</a:t>
+            </a:r>
+          </a:p>
+          <a:p>
+            <a:r>
+              <a:t>【rows】{'label': '三年可推算 TCO(兩個數字,🚫 不得合併)', 'value': '六個月專案期(影子模式)約 NT$50–118 萬(中案 72 萬)｜移交後(含稽核)約 NT$173–1,219 萬', 'note': '設備 16–20(一次性)+ 電力三年 0.7–1.9 + 延保三年 2.4–6.0 + 維運監控與模型更新三年 31.2–70.2。維運人力佔 59%–62%。上界跳這麼大不是估算失準,是治理成本的形狀'}</a:t>
+            </a:r>
+          </a:p>
+          <a:p>
+            <a:r>
+              <a:t>【rows】{'label': '可避免的年度增聘(移交後,不是六個月的交付)', 'value': '5–13 人 ≈ NT$520–1,521 萬/年', 'note': '不做本案覆蓋全客戶需 17–24 人(現有 5 人);做本案、移交後開到天花板仍需 11–12 人 —— 仍須增聘 6–7 人,不是不用增聘。公開薪資量級推算,非本案承諾的節省額'}</a:t>
+            </a:r>
+          </a:p>
+          <a:p>
+            <a:r>
+              <a:t>【rows】{'label': '已辨識、尚未估價的五項非人力成本', 'value': '不編金額', 'note': '① 影片儲存 ② 雲端運算 ③ 圖資更新 ④ 測試環境 ⑤ AI 訓練資料蒐集。技術與數據負責人於 G1 前補齊量級。因這五項未估價,人力+設備只能稱「已估成本」'}</a:t>
             </a:r>
           </a:p>
           <a:p>
@@ -1008,11 +938,6 @@
           </a:p>
           <a:p>
             <a:r>
-              <a:t>【card:雲端 · 複判】自動化到這裡就停了</a:t>
-            </a:r>
-          </a:p>
-          <a:p>
-            <a:r>
               <a:t>【compare:例行批次複核 · 全量,每一筆都看】營運端的實務估計,尚未以計時量測驗證</a:t>
             </a:r>
           </a:p>
@@ -1034,11 +959,6 @@
           <a:p>
             <a:r>
               <a:t>【rows】{'label': '今天的量', 'value': '29.8–42.9 人時/天', 'note': '單一大型車隊約 3,000 筆/天;提案人依現有單價推算', 'hot': False}</a:t>
-            </a:r>
-          </a:p>
-          <a:p>
-            <a:r>
-              <a:t>【rows-value[本案要建的 AI 能力]】讓機器讀懂一次事件的完整脈絡(影片 + 客戶問題 + 規則),並產出可交付的證據與描述</a:t>
             </a:r>
           </a:p>
           <a:p>
@@ -1148,11 +1068,6 @@
           </a:p>
           <a:p>
             <a:r>
-              <a:t>【rows-value[今天的利用率]】74%–107%(29.8–42.9 ÷ 40 人時/天);折算 3.7–5.4 人,現有 5 人</a:t>
-            </a:r>
-          </a:p>
-          <a:p>
-            <a:r>
               <a:t>【這一頁的作用】這頁回答委員會最會問的兩題:為什麼是現在、為什麼是 AI 而不是加人。五段天數必須印出來,委員會才親眼看到 43%–78% 落在模型碰得到的那兩段;而那條因果句(兩段慢的原因是同一個技術缺陷)把整頁從營運圖表升級成 AI 立案 —— 沒有它,這只證明「有件事很花時間」。同一頁又自己標明證據等級(營運端估計,非量測)並給出反向出口(推翻就轉排班),把核准變成一個低風險決定;右側的利用率上緣破百與徵調 7 位研發,則把時效缺口接回錢與機會成本。</a:t>
             </a:r>
           </a:p>
@@ -1494,26 +1409,6 @@
           <a:p>
             <a:r>
               <a:t>── 備查(不唸,答辯用)──</a:t>
-            </a:r>
-          </a:p>
-          <a:p>
-            <a:r>
-              <a:t>【card:選項 0 的算式(照印,含對本案不利的部分)】兩假設未驗證:20 秒/筆 · 全客戶同案件組合</a:t>
-            </a:r>
-          </a:p>
-          <a:p>
-            <a:r>
-              <a:t>【card:G1(第 6 週)= 因果判定門】43%-78% 為初估,非系統量測;判準不放寬</a:t>
-            </a:r>
-          </a:p>
-          <a:p>
-            <a:r>
-              <a:t>【card:這 85% 到底是什麼(三層,一層都不可省)】放行層:生效須過本案之外一道獨立門</a:t>
-            </a:r>
-          </a:p>
-          <a:p>
-            <a:r>
-              <a:t>【callout】⚠️ 85% 是分流率 → 要不要人細看,不是是不是誤報;不可與誤報率並排相減 · 人判得多準沒量過</a:t>
             </a:r>
           </a:p>
           <a:p>
@@ -5376,7 +5271,7 @@
         <p:spPr>
           <a:xfrm>
             <a:off x="658368" y="1783080"/>
-            <a:ext cx="45720" cy="356615"/>
+            <a:ext cx="45720" cy="301752"/>
           </a:xfrm>
           <a:prstGeom prst="rect">
             <a:avLst/>
@@ -5420,7 +5315,7 @@
         <p:spPr>
           <a:xfrm>
             <a:off x="804672" y="1755648"/>
-            <a:ext cx="2408822" cy="448055"/>
+            <a:ext cx="2408822" cy="393192"/>
           </a:xfrm>
           <a:prstGeom prst="rect">
             <a:avLst/>
@@ -5459,7 +5354,7 @@
         <p:spPr>
           <a:xfrm>
             <a:off x="3268358" y="1755648"/>
-            <a:ext cx="3152759" cy="448055"/>
+            <a:ext cx="3152759" cy="393192"/>
           </a:xfrm>
           <a:prstGeom prst="rect">
             <a:avLst/>
@@ -5498,7 +5393,7 @@
         <p:spPr>
           <a:xfrm>
             <a:off x="7183343" y="1755648"/>
-            <a:ext cx="4240255" cy="448055"/>
+            <a:ext cx="4240255" cy="393192"/>
           </a:xfrm>
           <a:prstGeom prst="rect">
             <a:avLst/>
@@ -5523,7 +5418,7 @@
                 </a:solidFill>
                 <a:latin typeface="Microsoft JhengHei"/>
               </a:rPr>
-              <a:t>交:公司第一份可稽核的錯誤率(含 95% 信賴區間)· 冷凍評估集 · 兩條工作流的單位工時正式基準 · 每案「結案方向」的黃金答案標籤 · 爭議處理的時間拆解、兩天逾時率、尖峰到…</a:t>
+              <a:t>交:公司第一份可稽核的錯誤率(含 95% CI)· 冷凍評估集 · 兩條工作流單位工時基準 · 每案結案方向黃金答案標籤 · 時間拆解與到件分布</a:t>
             </a:r>
           </a:p>
         </p:txBody>
@@ -5536,8 +5431,8 @@
         </p:nvSpPr>
         <p:spPr>
           <a:xfrm>
-            <a:off x="658368" y="2322575"/>
-            <a:ext cx="45720" cy="356615"/>
+            <a:off x="658368" y="2267712"/>
+            <a:ext cx="45720" cy="301752"/>
           </a:xfrm>
           <a:prstGeom prst="rect">
             <a:avLst/>
@@ -5580,8 +5475,8 @@
         </p:nvSpPr>
         <p:spPr>
           <a:xfrm>
-            <a:off x="804672" y="2295144"/>
-            <a:ext cx="2408822" cy="448055"/>
+            <a:off x="804672" y="2240280"/>
+            <a:ext cx="2408822" cy="393192"/>
           </a:xfrm>
           <a:prstGeom prst="rect">
             <a:avLst/>
@@ -5619,8 +5514,8 @@
         </p:nvSpPr>
         <p:spPr>
           <a:xfrm>
-            <a:off x="3268358" y="2295144"/>
-            <a:ext cx="3152759" cy="448055"/>
+            <a:off x="3268358" y="2240280"/>
+            <a:ext cx="3152759" cy="393192"/>
           </a:xfrm>
           <a:prstGeom prst="rect">
             <a:avLst/>
@@ -5658,8 +5553,8 @@
         </p:nvSpPr>
         <p:spPr>
           <a:xfrm>
-            <a:off x="7183343" y="2295144"/>
-            <a:ext cx="4240255" cy="448055"/>
+            <a:off x="7183343" y="2240280"/>
+            <a:ext cx="4240255" cy="393192"/>
           </a:xfrm>
           <a:prstGeom prst="rect">
             <a:avLst/>
@@ -5684,7 +5579,7 @@
                 </a:solidFill>
                 <a:latin typeface="Microsoft JhengHei"/>
               </a:rPr>
-              <a:t>一套地端視覺語言模型,篩檢與深挖兩種負載由同一台設備分時處理;實際選型與量化規格於 G1 依 W1–6 的量測定案(概念層次)。W8–12 最小離線試驗 → W12–24 只跑影子模式:機器…</a:t>
+              <a:t>地端 VLM,篩檢與深挖由同一台設備分時;選型與量化規格於 G1 依 W1–6 量測定案(概念層次)。W8–12 離線試驗 → W12–24 只跑影子模式:機器出結論不對外送,人照常判</a:t>
             </a:r>
           </a:p>
         </p:txBody>
@@ -5697,8 +5592,8 @@
         </p:nvSpPr>
         <p:spPr>
           <a:xfrm>
-            <a:off x="658368" y="2871215"/>
-            <a:ext cx="3527450" cy="2011680"/>
+            <a:off x="658368" y="2761488"/>
+            <a:ext cx="3527450" cy="2121408"/>
           </a:xfrm>
           <a:prstGeom prst="roundRect">
             <a:avLst>
@@ -5745,7 +5640,7 @@
         </p:nvSpPr>
         <p:spPr>
           <a:xfrm>
-            <a:off x="768096" y="2999232"/>
+            <a:off x="768096" y="2889504"/>
             <a:ext cx="3307994" cy="566928"/>
           </a:xfrm>
           <a:prstGeom prst="rect">
@@ -5784,7 +5679,7 @@
         </p:nvSpPr>
         <p:spPr>
           <a:xfrm>
-            <a:off x="2010613" y="3621023"/>
+            <a:off x="2010613" y="3511296"/>
             <a:ext cx="822960" cy="274320"/>
           </a:xfrm>
           <a:prstGeom prst="roundRect">
@@ -5830,7 +5725,7 @@
         </p:nvSpPr>
         <p:spPr>
           <a:xfrm>
-            <a:off x="2010613" y="3621023"/>
+            <a:off x="2010613" y="3511296"/>
             <a:ext cx="822960" cy="274320"/>
           </a:xfrm>
           <a:prstGeom prst="rect">
@@ -5869,8 +5764,8 @@
         </p:nvSpPr>
         <p:spPr>
           <a:xfrm>
-            <a:off x="768096" y="4005072"/>
-            <a:ext cx="3307994" cy="749808"/>
+            <a:off x="768096" y="3895344"/>
+            <a:ext cx="3307994" cy="859535"/>
           </a:xfrm>
           <a:prstGeom prst="rect">
             <a:avLst/>
@@ -5924,8 +5819,8 @@
         </p:nvSpPr>
         <p:spPr>
           <a:xfrm>
-            <a:off x="4332122" y="2871215"/>
-            <a:ext cx="3527450" cy="2011680"/>
+            <a:off x="4332122" y="2761488"/>
+            <a:ext cx="3527450" cy="2121408"/>
           </a:xfrm>
           <a:prstGeom prst="roundRect">
             <a:avLst>
@@ -5972,7 +5867,7 @@
         </p:nvSpPr>
         <p:spPr>
           <a:xfrm>
-            <a:off x="4441850" y="2999232"/>
+            <a:off x="4441850" y="2889504"/>
             <a:ext cx="3307994" cy="566928"/>
           </a:xfrm>
           <a:prstGeom prst="rect">
@@ -6011,7 +5906,7 @@
         </p:nvSpPr>
         <p:spPr>
           <a:xfrm>
-            <a:off x="5087721" y="3621023"/>
+            <a:off x="5087721" y="3511296"/>
             <a:ext cx="2016252" cy="274320"/>
           </a:xfrm>
           <a:prstGeom prst="roundRect">
@@ -6057,7 +5952,7 @@
         </p:nvSpPr>
         <p:spPr>
           <a:xfrm>
-            <a:off x="5087721" y="3621023"/>
+            <a:off x="5087721" y="3511296"/>
             <a:ext cx="2016252" cy="274320"/>
           </a:xfrm>
           <a:prstGeom prst="rect">
@@ -6096,8 +5991,8 @@
         </p:nvSpPr>
         <p:spPr>
           <a:xfrm>
-            <a:off x="4441850" y="4005072"/>
-            <a:ext cx="3307994" cy="749808"/>
+            <a:off x="4441850" y="3895344"/>
+            <a:ext cx="3307994" cy="859535"/>
           </a:xfrm>
           <a:prstGeom prst="rect">
             <a:avLst/>
@@ -6151,8 +6046,8 @@
         </p:nvSpPr>
         <p:spPr>
           <a:xfrm>
-            <a:off x="8005876" y="2871215"/>
-            <a:ext cx="3527450" cy="2011680"/>
+            <a:off x="8005876" y="2761488"/>
+            <a:ext cx="3527450" cy="2121408"/>
           </a:xfrm>
           <a:prstGeom prst="roundRect">
             <a:avLst>
@@ -6199,7 +6094,7 @@
         </p:nvSpPr>
         <p:spPr>
           <a:xfrm>
-            <a:off x="8115604" y="2999232"/>
+            <a:off x="8115604" y="2889504"/>
             <a:ext cx="3307994" cy="566928"/>
           </a:xfrm>
           <a:prstGeom prst="rect">
@@ -6238,7 +6133,7 @@
         </p:nvSpPr>
         <p:spPr>
           <a:xfrm>
-            <a:off x="9358122" y="3621023"/>
+            <a:off x="9358122" y="3511296"/>
             <a:ext cx="822960" cy="274320"/>
           </a:xfrm>
           <a:prstGeom prst="roundRect">
@@ -6284,7 +6179,7 @@
         </p:nvSpPr>
         <p:spPr>
           <a:xfrm>
-            <a:off x="9358122" y="3621023"/>
+            <a:off x="9358122" y="3511296"/>
             <a:ext cx="822960" cy="274320"/>
           </a:xfrm>
           <a:prstGeom prst="rect">
@@ -6323,8 +6218,8 @@
         </p:nvSpPr>
         <p:spPr>
           <a:xfrm>
-            <a:off x="8115604" y="4005072"/>
-            <a:ext cx="3307994" cy="749808"/>
+            <a:off x="8115604" y="3895344"/>
+            <a:ext cx="3307994" cy="859535"/>
           </a:xfrm>
           <a:prstGeom prst="rect">
             <a:avLst/>
@@ -6940,7 +6835,7 @@
         <p:spPr>
           <a:xfrm>
             <a:off x="658368" y="1783080"/>
-            <a:ext cx="45720" cy="771525"/>
+            <a:ext cx="45720" cy="750037"/>
           </a:xfrm>
           <a:prstGeom prst="rect">
             <a:avLst/>
@@ -6984,7 +6879,7 @@
         <p:spPr>
           <a:xfrm>
             <a:off x="804672" y="1755648"/>
-            <a:ext cx="2408822" cy="862965"/>
+            <a:ext cx="2408822" cy="841477"/>
           </a:xfrm>
           <a:prstGeom prst="rect">
             <a:avLst/>
@@ -7023,7 +6918,7 @@
         <p:spPr>
           <a:xfrm>
             <a:off x="3268358" y="1755648"/>
-            <a:ext cx="3152759" cy="862965"/>
+            <a:ext cx="3152759" cy="841477"/>
           </a:xfrm>
           <a:prstGeom prst="rect">
             <a:avLst/>
@@ -7062,7 +6957,7 @@
         <p:spPr>
           <a:xfrm>
             <a:off x="7183343" y="1755648"/>
-            <a:ext cx="4240255" cy="862965"/>
+            <a:ext cx="4240255" cy="841477"/>
           </a:xfrm>
           <a:prstGeom prst="rect">
             <a:avLst/>
@@ -7087,7 +6982,7 @@
                 </a:solidFill>
                 <a:latin typeface="Microsoft JhengHei"/>
               </a:rPr>
-              <a:t>市場採購量級,非核定採購價;本頁唯一不由算式推得的金額。規格等級與選型於 G1 依 W1–6 量測定案。採購時點在 G1 之後、W8 之前,不在第一段額度內。設備 = 一個初階工程師年…</a:t>
+              <a:t>市場採購量級,非核定採購價;本頁唯一不由算式推得的金額。選型於 G1 依 W1–6 定案。設備 = 初階工程師年成本(104–117 萬)的 14%–19%,硬體佔已估成本 8%–12%</a:t>
             </a:r>
           </a:p>
         </p:txBody>
@@ -7100,8 +6995,8 @@
         </p:nvSpPr>
         <p:spPr>
           <a:xfrm>
-            <a:off x="658368" y="2737485"/>
-            <a:ext cx="45720" cy="771525"/>
+            <a:off x="658368" y="2715997"/>
+            <a:ext cx="45720" cy="750037"/>
           </a:xfrm>
           <a:prstGeom prst="rect">
             <a:avLst/>
@@ -7144,8 +7039,8 @@
         </p:nvSpPr>
         <p:spPr>
           <a:xfrm>
-            <a:off x="804672" y="2710053"/>
-            <a:ext cx="2408822" cy="862965"/>
+            <a:off x="804672" y="2688565"/>
+            <a:ext cx="2408822" cy="841477"/>
           </a:xfrm>
           <a:prstGeom prst="rect">
             <a:avLst/>
@@ -7183,8 +7078,8 @@
         </p:nvSpPr>
         <p:spPr>
           <a:xfrm>
-            <a:off x="3268358" y="2710053"/>
-            <a:ext cx="3152759" cy="862965"/>
+            <a:off x="3268358" y="2688565"/>
+            <a:ext cx="3152759" cy="841477"/>
           </a:xfrm>
           <a:prstGeom prst="rect">
             <a:avLst/>
@@ -7222,8 +7117,8 @@
         </p:nvSpPr>
         <p:spPr>
           <a:xfrm>
-            <a:off x="7183343" y="2710053"/>
-            <a:ext cx="4240255" cy="862965"/>
+            <a:off x="7183343" y="2688565"/>
+            <a:ext cx="4240255" cy="841477"/>
           </a:xfrm>
           <a:prstGeom prst="rect">
             <a:avLst/>
@@ -7248,7 +7143,7 @@
                 </a:solidFill>
                 <a:latin typeface="Microsoft JhengHei"/>
               </a:rPr>
-              <a:t>移交後爭議段毛節省 48.3–96.7 人時/天 = 6.0–12.1 FTE;但自動結案必須抽樣盲測稽核,樣本量由精度反推(整體 ±1% 需 753 筆/月 = 0.39 FTE;分層 8 類各 ±1% 需 6,024 筆/…</a:t>
+              <a:t>毛節省 48.3–96.7 人時/天 = 6.0–12.1 FTE;但自動結案須抽樣盲測稽核(±1% 需 753 筆/月 = 0.39 FTE;分層 8 類 6,024 筆 = 3.14 FTE)→ 淨 2.9–11.7 FTE。推估非實測</a:t>
             </a:r>
           </a:p>
         </p:txBody>
@@ -7261,8 +7156,8 @@
         </p:nvSpPr>
         <p:spPr>
           <a:xfrm>
-            <a:off x="658368" y="3768939"/>
-            <a:ext cx="3527450" cy="2011680"/>
+            <a:off x="658368" y="3658059"/>
+            <a:ext cx="3527450" cy="2121408"/>
           </a:xfrm>
           <a:prstGeom prst="roundRect">
             <a:avLst>
@@ -7309,7 +7204,7 @@
         </p:nvSpPr>
         <p:spPr>
           <a:xfrm>
-            <a:off x="768096" y="3896955"/>
+            <a:off x="768096" y="3786075"/>
             <a:ext cx="3307994" cy="566928"/>
           </a:xfrm>
           <a:prstGeom prst="rect">
@@ -7348,7 +7243,7 @@
         </p:nvSpPr>
         <p:spPr>
           <a:xfrm>
-            <a:off x="1855927" y="4518747"/>
+            <a:off x="1855927" y="4407867"/>
             <a:ext cx="1132332" cy="274320"/>
           </a:xfrm>
           <a:prstGeom prst="roundRect">
@@ -7394,7 +7289,7 @@
         </p:nvSpPr>
         <p:spPr>
           <a:xfrm>
-            <a:off x="1855927" y="4518747"/>
+            <a:off x="1855927" y="4407867"/>
             <a:ext cx="1132332" cy="274320"/>
           </a:xfrm>
           <a:prstGeom prst="rect">
@@ -7433,8 +7328,8 @@
         </p:nvSpPr>
         <p:spPr>
           <a:xfrm>
-            <a:off x="768096" y="4902795"/>
-            <a:ext cx="3307994" cy="749808"/>
+            <a:off x="768096" y="4791915"/>
+            <a:ext cx="3307994" cy="859535"/>
           </a:xfrm>
           <a:prstGeom prst="rect">
             <a:avLst/>
@@ -7459,7 +7354,7 @@
                 </a:solidFill>
                 <a:latin typeface="Microsoft JhengHei"/>
               </a:rPr>
-              <a:t>第一段 4.85 人月 · 量級 NT$42–47 萬</a:t>
+              <a:t>第一段 4.85 人月 · NT$42–47 萬</a:t>
             </a:r>
           </a:p>
           <a:p>
@@ -7475,7 +7370,7 @@
                 </a:solidFill>
                 <a:latin typeface="Microsoft JhengHei"/>
               </a:rPr>
-              <a:t>〔規劃非核定預算〕G1 贊助人決定續不續行</a:t>
+              <a:t>〔規劃非核定預算〕G1 決定續行</a:t>
             </a:r>
           </a:p>
         </p:txBody>
@@ -7488,8 +7383,8 @@
         </p:nvSpPr>
         <p:spPr>
           <a:xfrm>
-            <a:off x="4332122" y="3768939"/>
-            <a:ext cx="3527450" cy="2011680"/>
+            <a:off x="4332122" y="3658059"/>
+            <a:ext cx="3527450" cy="2121408"/>
           </a:xfrm>
           <a:prstGeom prst="roundRect">
             <a:avLst>
@@ -7536,7 +7431,7 @@
         </p:nvSpPr>
         <p:spPr>
           <a:xfrm>
-            <a:off x="4441850" y="3896955"/>
+            <a:off x="4441850" y="3786075"/>
             <a:ext cx="3307994" cy="566928"/>
           </a:xfrm>
           <a:prstGeom prst="rect">
@@ -7575,7 +7470,7 @@
         </p:nvSpPr>
         <p:spPr>
           <a:xfrm>
-            <a:off x="5586831" y="4518747"/>
+            <a:off x="5586831" y="4407867"/>
             <a:ext cx="1018032" cy="274320"/>
           </a:xfrm>
           <a:prstGeom prst="roundRect">
@@ -7621,7 +7516,7 @@
         </p:nvSpPr>
         <p:spPr>
           <a:xfrm>
-            <a:off x="5586831" y="4518747"/>
+            <a:off x="5586831" y="4407867"/>
             <a:ext cx="1018032" cy="274320"/>
           </a:xfrm>
           <a:prstGeom prst="rect">
@@ -7660,8 +7555,8 @@
         </p:nvSpPr>
         <p:spPr>
           <a:xfrm>
-            <a:off x="4441850" y="4902795"/>
-            <a:ext cx="3307994" cy="749808"/>
+            <a:off x="4441850" y="4791915"/>
+            <a:ext cx="3307994" cy="859535"/>
           </a:xfrm>
           <a:prstGeom prst="rect">
             <a:avLst/>
@@ -7686,7 +7581,7 @@
                 </a:solidFill>
                 <a:latin typeface="Microsoft JhengHei"/>
               </a:rPr>
-              <a:t>請委員會指定項目贊助人 · 三道門 A 全歸他</a:t>
+              <a:t>請委員會指定項目贊助人</a:t>
             </a:r>
           </a:p>
           <a:p>
@@ -7702,7 +7597,7 @@
                 </a:solidFill>
                 <a:latin typeface="Microsoft JhengHei"/>
               </a:rPr>
-              <a:t>G1 前確認與公司既有雲端判讀規劃的邊界</a:t>
+              <a:t>G1 前確認與既有雲端規劃的邊界</a:t>
             </a:r>
           </a:p>
         </p:txBody>
@@ -7715,8 +7610,8 @@
         </p:nvSpPr>
         <p:spPr>
           <a:xfrm>
-            <a:off x="8005876" y="3768939"/>
-            <a:ext cx="3527450" cy="2011680"/>
+            <a:off x="8005876" y="3658059"/>
+            <a:ext cx="3527450" cy="2121408"/>
           </a:xfrm>
           <a:prstGeom prst="roundRect">
             <a:avLst>
@@ -7763,7 +7658,7 @@
         </p:nvSpPr>
         <p:spPr>
           <a:xfrm>
-            <a:off x="8115604" y="3896955"/>
+            <a:off x="8115604" y="3786075"/>
             <a:ext cx="3307994" cy="566928"/>
           </a:xfrm>
           <a:prstGeom prst="rect">
@@ -7802,7 +7697,7 @@
         </p:nvSpPr>
         <p:spPr>
           <a:xfrm>
-            <a:off x="9336786" y="4518747"/>
+            <a:off x="9336786" y="4407867"/>
             <a:ext cx="865632" cy="274320"/>
           </a:xfrm>
           <a:prstGeom prst="roundRect">
@@ -7848,7 +7743,7 @@
         </p:nvSpPr>
         <p:spPr>
           <a:xfrm>
-            <a:off x="9336786" y="4518747"/>
+            <a:off x="9336786" y="4407867"/>
             <a:ext cx="865632" cy="274320"/>
           </a:xfrm>
           <a:prstGeom prst="rect">
@@ -7887,8 +7782,8 @@
         </p:nvSpPr>
         <p:spPr>
           <a:xfrm>
-            <a:off x="8115604" y="4902795"/>
-            <a:ext cx="3307994" cy="749808"/>
+            <a:off x="8115604" y="4791915"/>
+            <a:ext cx="3307994" cy="859535"/>
           </a:xfrm>
           <a:prstGeom prst="rect">
             <a:avLst/>
@@ -7913,7 +7808,7 @@
                 </a:solidFill>
                 <a:latin typeface="Microsoft JhengHei"/>
               </a:rPr>
-              <a:t>不做:客戶續等｜小客戶無人看過｜尖峰調研發</a:t>
+              <a:t>不做:客戶續等 · 小客戶無人看過</a:t>
             </a:r>
           </a:p>
           <a:p>
@@ -7929,7 +7824,7 @@
                 </a:solidFill>
                 <a:latin typeface="Microsoft JhengHei"/>
               </a:rPr>
-              <a:t>移交後開到天花板:約 85% 爭議無人看過</a:t>
+              <a:t>移交後天花板:約 85% 無人看過</a:t>
             </a:r>
           </a:p>
         </p:txBody>
@@ -7942,8 +7837,8 @@
         </p:nvSpPr>
         <p:spPr>
           <a:xfrm>
-            <a:off x="658368" y="5908635"/>
-            <a:ext cx="9658807" cy="601892"/>
+            <a:off x="658368" y="5907483"/>
+            <a:ext cx="9658807" cy="603044"/>
           </a:xfrm>
           <a:prstGeom prst="roundRect">
             <a:avLst>
@@ -7988,8 +7883,8 @@
         </p:nvSpPr>
         <p:spPr>
           <a:xfrm>
-            <a:off x="841247" y="5908635"/>
-            <a:ext cx="9293047" cy="601892"/>
+            <a:off x="841247" y="5907483"/>
+            <a:ext cx="9293047" cy="603044"/>
           </a:xfrm>
           <a:prstGeom prst="rect">
             <a:avLst/>
@@ -8014,7 +7909,7 @@
                 </a:solidFill>
                 <a:latin typeface="Microsoft JhengHei"/>
               </a:rPr>
-              <a:t>放行條件:擴編暴露非承諾節省 · 只有 G2 實測證明可避免/延後 + 業務確認容量轉換,才放…</a:t>
+              <a:t>放行條件:擴編暴露非承諾節省 · 須 G2 證明可避免/延後 + 業務確認容量轉換才放行後續預算</a:t>
             </a:r>
           </a:p>
         </p:txBody>
@@ -8815,7 +8710,7 @@
         <p:spPr>
           <a:xfrm>
             <a:off x="658368" y="1755648"/>
-            <a:ext cx="3527450" cy="2011680"/>
+            <a:ext cx="3527450" cy="2121408"/>
           </a:xfrm>
           <a:prstGeom prst="roundRect">
             <a:avLst>
@@ -8987,7 +8882,7 @@
         <p:spPr>
           <a:xfrm>
             <a:off x="768096" y="2889503"/>
-            <a:ext cx="3307994" cy="749808"/>
+            <a:ext cx="3307994" cy="859536"/>
           </a:xfrm>
           <a:prstGeom prst="rect">
             <a:avLst/>
@@ -9042,7 +8937,7 @@
         <p:spPr>
           <a:xfrm>
             <a:off x="4332122" y="1755648"/>
-            <a:ext cx="3527450" cy="2011680"/>
+            <a:ext cx="3527450" cy="2121408"/>
           </a:xfrm>
           <a:prstGeom prst="roundRect">
             <a:avLst>
@@ -9214,7 +9109,7 @@
         <p:spPr>
           <a:xfrm>
             <a:off x="4441850" y="2889503"/>
-            <a:ext cx="3307994" cy="749808"/>
+            <a:ext cx="3307994" cy="859536"/>
           </a:xfrm>
           <a:prstGeom prst="rect">
             <a:avLst/>
@@ -9258,6 +9153,22 @@
               <a:t>判定屬實 → 回傳裝置向駕駛警示</a:t>
             </a:r>
           </a:p>
+          <a:p>
+            <a:pPr algn="ctr">
+              <a:lnSpc>
+                <a:spcPct val="135000"/>
+              </a:lnSpc>
+            </a:pPr>
+            <a:r>
+              <a:rPr sz="1200" b="0">
+                <a:solidFill>
+                  <a:srgbClr val="6B7885"/>
+                </a:solidFill>
+                <a:latin typeface="Microsoft JhengHei"/>
+              </a:rPr>
+              <a:t>自動化到這裡就停了</a:t>
+            </a:r>
+          </a:p>
         </p:txBody>
       </p:sp>
       <p:sp>
@@ -9269,7 +9180,7 @@
         <p:spPr>
           <a:xfrm>
             <a:off x="8005876" y="1755648"/>
-            <a:ext cx="3527450" cy="2011680"/>
+            <a:ext cx="3527450" cy="2121408"/>
           </a:xfrm>
           <a:prstGeom prst="roundRect">
             <a:avLst>
@@ -9441,7 +9352,7 @@
         <p:spPr>
           <a:xfrm>
             <a:off x="8115604" y="2889503"/>
-            <a:ext cx="3307994" cy="749808"/>
+            <a:ext cx="3307994" cy="859536"/>
           </a:xfrm>
           <a:prstGeom prst="rect">
             <a:avLst/>
@@ -9495,8 +9406,8 @@
         </p:nvSpPr>
         <p:spPr>
           <a:xfrm>
-            <a:off x="658368" y="3895344"/>
-            <a:ext cx="5300319" cy="1268071"/>
+            <a:off x="658368" y="4005072"/>
+            <a:ext cx="5300319" cy="1207008"/>
           </a:xfrm>
           <a:prstGeom prst="roundRect">
             <a:avLst>
@@ -9543,7 +9454,7 @@
         </p:nvSpPr>
         <p:spPr>
           <a:xfrm>
-            <a:off x="804672" y="4041648"/>
+            <a:off x="804672" y="4151376"/>
             <a:ext cx="5007711" cy="384048"/>
           </a:xfrm>
           <a:prstGeom prst="rect">
@@ -9582,8 +9493,8 @@
         </p:nvSpPr>
         <p:spPr>
           <a:xfrm>
-            <a:off x="804672" y="4535424"/>
-            <a:ext cx="5007711" cy="445111"/>
+            <a:off x="804672" y="4645152"/>
+            <a:ext cx="5007711" cy="384048"/>
           </a:xfrm>
           <a:prstGeom prst="rect">
             <a:avLst/>
@@ -9621,8 +9532,8 @@
         </p:nvSpPr>
         <p:spPr>
           <a:xfrm>
-            <a:off x="6233007" y="3895344"/>
-            <a:ext cx="5300319" cy="1268071"/>
+            <a:off x="6233007" y="4005072"/>
+            <a:ext cx="5300319" cy="1207008"/>
           </a:xfrm>
           <a:prstGeom prst="roundRect">
             <a:avLst>
@@ -9669,7 +9580,7 @@
         </p:nvSpPr>
         <p:spPr>
           <a:xfrm>
-            <a:off x="6379311" y="4041648"/>
+            <a:off x="6379311" y="4151376"/>
             <a:ext cx="5007711" cy="384048"/>
           </a:xfrm>
           <a:prstGeom prst="rect">
@@ -9708,8 +9619,8 @@
         </p:nvSpPr>
         <p:spPr>
           <a:xfrm>
-            <a:off x="6379311" y="4535424"/>
-            <a:ext cx="5007711" cy="445111"/>
+            <a:off x="6379311" y="4645152"/>
+            <a:ext cx="5007711" cy="384048"/>
           </a:xfrm>
           <a:prstGeom prst="rect">
             <a:avLst/>
@@ -9747,7 +9658,7 @@
         </p:nvSpPr>
         <p:spPr>
           <a:xfrm>
-            <a:off x="658368" y="5236567"/>
+            <a:off x="658368" y="5285231"/>
             <a:ext cx="10874959" cy="347472"/>
           </a:xfrm>
           <a:prstGeom prst="rect">
@@ -9786,8 +9697,8 @@
         </p:nvSpPr>
         <p:spPr>
           <a:xfrm>
-            <a:off x="658368" y="5757775"/>
-            <a:ext cx="45720" cy="252932"/>
+            <a:off x="658368" y="5806440"/>
+            <a:ext cx="45720" cy="228600"/>
           </a:xfrm>
           <a:prstGeom prst="rect">
             <a:avLst/>
@@ -9830,8 +9741,8 @@
         </p:nvSpPr>
         <p:spPr>
           <a:xfrm>
-            <a:off x="804672" y="5730343"/>
-            <a:ext cx="2116945" cy="344372"/>
+            <a:off x="804672" y="5779008"/>
+            <a:ext cx="2116945" cy="320040"/>
           </a:xfrm>
           <a:prstGeom prst="rect">
             <a:avLst/>
@@ -9869,8 +9780,8 @@
         </p:nvSpPr>
         <p:spPr>
           <a:xfrm>
-            <a:off x="2976481" y="5730343"/>
-            <a:ext cx="2787914" cy="344372"/>
+            <a:off x="2976481" y="5779008"/>
+            <a:ext cx="2787914" cy="320040"/>
           </a:xfrm>
           <a:prstGeom prst="rect">
             <a:avLst/>
@@ -9908,8 +9819,8 @@
         </p:nvSpPr>
         <p:spPr>
           <a:xfrm>
-            <a:off x="6453652" y="5730343"/>
-            <a:ext cx="3753794" cy="344372"/>
+            <a:off x="6453652" y="5779008"/>
+            <a:ext cx="3753794" cy="320040"/>
           </a:xfrm>
           <a:prstGeom prst="rect">
             <a:avLst/>
@@ -9947,8 +9858,8 @@
         </p:nvSpPr>
         <p:spPr>
           <a:xfrm>
-            <a:off x="658368" y="6193587"/>
-            <a:ext cx="45720" cy="252932"/>
+            <a:off x="658368" y="6217920"/>
+            <a:ext cx="45720" cy="228600"/>
           </a:xfrm>
           <a:prstGeom prst="rect">
             <a:avLst/>
@@ -9991,8 +9902,8 @@
         </p:nvSpPr>
         <p:spPr>
           <a:xfrm>
-            <a:off x="804672" y="6166155"/>
-            <a:ext cx="2116945" cy="344372"/>
+            <a:off x="804672" y="6190488"/>
+            <a:ext cx="2116945" cy="320040"/>
           </a:xfrm>
           <a:prstGeom prst="rect">
             <a:avLst/>
@@ -10030,8 +9941,8 @@
         </p:nvSpPr>
         <p:spPr>
           <a:xfrm>
-            <a:off x="2976481" y="6166155"/>
-            <a:ext cx="2787914" cy="344372"/>
+            <a:off x="2976481" y="6190488"/>
+            <a:ext cx="2787914" cy="320040"/>
           </a:xfrm>
           <a:prstGeom prst="rect">
             <a:avLst/>
@@ -10056,7 +9967,7 @@
                 </a:solidFill>
                 <a:latin typeface="Microsoft JhengHei"/>
               </a:rPr>
-              <a:t>讓機器讀懂一次事件的完整脈絡(影片 + 客戶問題 + 規則),並…</a:t>
+              <a:t>讀懂一次事件的完整脈絡:影片 + 客戶問題 + 規則</a:t>
             </a:r>
           </a:p>
         </p:txBody>
@@ -10069,8 +9980,8 @@
         </p:nvSpPr>
         <p:spPr>
           <a:xfrm>
-            <a:off x="6453652" y="6166155"/>
-            <a:ext cx="3753794" cy="344372"/>
+            <a:off x="6453652" y="6190488"/>
+            <a:ext cx="3753794" cy="320040"/>
           </a:xfrm>
           <a:prstGeom prst="rect">
             <a:avLst/>
@@ -11154,7 +11065,7 @@
         <p:spPr>
           <a:xfrm>
             <a:off x="658368" y="4111813"/>
-            <a:ext cx="45720" cy="964406"/>
+            <a:ext cx="45720" cy="771525"/>
           </a:xfrm>
           <a:prstGeom prst="rect">
             <a:avLst/>
@@ -11198,7 +11109,7 @@
         <p:spPr>
           <a:xfrm>
             <a:off x="804672" y="4084381"/>
-            <a:ext cx="2116945" cy="1055846"/>
+            <a:ext cx="2116945" cy="862965"/>
           </a:xfrm>
           <a:prstGeom prst="rect">
             <a:avLst/>
@@ -11237,7 +11148,7 @@
         <p:spPr>
           <a:xfrm>
             <a:off x="2976481" y="4084381"/>
-            <a:ext cx="2787914" cy="1055846"/>
+            <a:ext cx="2787914" cy="862965"/>
           </a:xfrm>
           <a:prstGeom prst="rect">
             <a:avLst/>
@@ -11262,7 +11173,7 @@
                 </a:solidFill>
                 <a:latin typeface="Microsoft JhengHei"/>
               </a:rPr>
-              <a:t>74%–107%(29.8–42.9 ÷ 40 人時/天);折算 3.7–5.4 人,現…</a:t>
+              <a:t>74%–107%;折算 3.7–5.4 人,現有 5 人</a:t>
             </a:r>
           </a:p>
         </p:txBody>
@@ -11276,7 +11187,7 @@
         <p:spPr>
           <a:xfrm>
             <a:off x="6453652" y="4084381"/>
-            <a:ext cx="3753794" cy="1055846"/>
+            <a:ext cx="3753794" cy="862965"/>
           </a:xfrm>
           <a:prstGeom prst="rect">
             <a:avLst/>
@@ -11314,7 +11225,7 @@
         </p:nvSpPr>
         <p:spPr>
           <a:xfrm>
-            <a:off x="658368" y="5259099"/>
+            <a:off x="658368" y="5066218"/>
             <a:ext cx="45720" cy="771525"/>
           </a:xfrm>
           <a:prstGeom prst="rect">
@@ -11358,7 +11269,7 @@
         </p:nvSpPr>
         <p:spPr>
           <a:xfrm>
-            <a:off x="804672" y="5231667"/>
+            <a:off x="804672" y="5038786"/>
             <a:ext cx="2116945" cy="862965"/>
           </a:xfrm>
           <a:prstGeom prst="rect">
@@ -11397,7 +11308,7 @@
         </p:nvSpPr>
         <p:spPr>
           <a:xfrm>
-            <a:off x="2976481" y="5231667"/>
+            <a:off x="2976481" y="5038786"/>
             <a:ext cx="2787914" cy="862965"/>
           </a:xfrm>
           <a:prstGeom prst="rect">
@@ -11436,7 +11347,7 @@
         </p:nvSpPr>
         <p:spPr>
           <a:xfrm>
-            <a:off x="6453652" y="5231667"/>
+            <a:off x="6453652" y="5038786"/>
             <a:ext cx="3753794" cy="862965"/>
           </a:xfrm>
           <a:prstGeom prst="rect">
@@ -14692,7 +14603,7 @@
         <p:spPr>
           <a:xfrm>
             <a:off x="658368" y="3675887"/>
-            <a:ext cx="3527450" cy="2068871"/>
+            <a:ext cx="3527450" cy="2121408"/>
           </a:xfrm>
           <a:prstGeom prst="roundRect">
             <a:avLst>
@@ -14864,7 +14775,7 @@
         <p:spPr>
           <a:xfrm>
             <a:off x="768096" y="4809744"/>
-            <a:ext cx="3307994" cy="806999"/>
+            <a:ext cx="3307994" cy="859535"/>
           </a:xfrm>
           <a:prstGeom prst="rect">
             <a:avLst/>
@@ -14908,6 +14819,22 @@
               <a:t>129.1-185.9÷8=16.14-23.24 → 17-24 人</a:t>
             </a:r>
           </a:p>
+          <a:p>
+            <a:pPr algn="ctr">
+              <a:lnSpc>
+                <a:spcPct val="135000"/>
+              </a:lnSpc>
+            </a:pPr>
+            <a:r>
+              <a:rPr sz="1200" b="0">
+                <a:solidFill>
+                  <a:srgbClr val="6B7885"/>
+                </a:solidFill>
+                <a:latin typeface="Microsoft JhengHei"/>
+              </a:rPr>
+              <a:t>兩假設未驗證:20 秒/筆 · 全客戶同案件組合</a:t>
+            </a:r>
+          </a:p>
         </p:txBody>
       </p:sp>
       <p:sp>
@@ -14919,7 +14846,7 @@
         <p:spPr>
           <a:xfrm>
             <a:off x="4332122" y="3675887"/>
-            <a:ext cx="3527450" cy="2068871"/>
+            <a:ext cx="3527450" cy="2121408"/>
           </a:xfrm>
           <a:prstGeom prst="roundRect">
             <a:avLst>
@@ -15091,7 +15018,7 @@
         <p:spPr>
           <a:xfrm>
             <a:off x="4441850" y="4809744"/>
-            <a:ext cx="3307994" cy="806999"/>
+            <a:ext cx="3307994" cy="859535"/>
           </a:xfrm>
           <a:prstGeom prst="rect">
             <a:avLst/>
@@ -15135,6 +15062,22 @@
               <a:t>出口 A:AI 段佔主延遲 → 放行 1/2｜B → 0b</a:t>
             </a:r>
           </a:p>
+          <a:p>
+            <a:pPr algn="ctr">
+              <a:lnSpc>
+                <a:spcPct val="135000"/>
+              </a:lnSpc>
+            </a:pPr>
+            <a:r>
+              <a:rPr sz="1200" b="0">
+                <a:solidFill>
+                  <a:srgbClr val="6B7885"/>
+                </a:solidFill>
+                <a:latin typeface="Microsoft JhengHei"/>
+              </a:rPr>
+              <a:t>43%-78% 為初估,非系統量測;判準不放寬</a:t>
+            </a:r>
+          </a:p>
         </p:txBody>
       </p:sp>
       <p:sp>
@@ -15146,7 +15089,7 @@
         <p:spPr>
           <a:xfrm>
             <a:off x="8005876" y="3675887"/>
-            <a:ext cx="3527450" cy="2068871"/>
+            <a:ext cx="3527450" cy="2121408"/>
           </a:xfrm>
           <a:prstGeom prst="roundRect">
             <a:avLst>
@@ -15318,7 +15261,7 @@
         <p:spPr>
           <a:xfrm>
             <a:off x="8115604" y="4809744"/>
-            <a:ext cx="3307994" cy="806999"/>
+            <a:ext cx="3307994" cy="859535"/>
           </a:xfrm>
           <a:prstGeom prst="rect">
             <a:avLst/>
@@ -15362,6 +15305,22 @@
               <a:t>本案層:六個月對外 0%,只跑影子模式</a:t>
             </a:r>
           </a:p>
+          <a:p>
+            <a:pPr algn="ctr">
+              <a:lnSpc>
+                <a:spcPct val="135000"/>
+              </a:lnSpc>
+            </a:pPr>
+            <a:r>
+              <a:rPr sz="1200" b="0">
+                <a:solidFill>
+                  <a:srgbClr val="6B7885"/>
+                </a:solidFill>
+                <a:latin typeface="Microsoft JhengHei"/>
+              </a:rPr>
+              <a:t>放行層:生效須過本案之外一道獨立門</a:t>
+            </a:r>
+          </a:p>
         </p:txBody>
       </p:sp>
       <p:sp>
@@ -15372,8 +15331,8 @@
         </p:nvSpPr>
         <p:spPr>
           <a:xfrm>
-            <a:off x="658368" y="5872775"/>
-            <a:ext cx="9658807" cy="637752"/>
+            <a:off x="658368" y="5925312"/>
+            <a:ext cx="9658807" cy="585216"/>
           </a:xfrm>
           <a:prstGeom prst="roundRect">
             <a:avLst>
@@ -15418,8 +15377,8 @@
         </p:nvSpPr>
         <p:spPr>
           <a:xfrm>
-            <a:off x="841247" y="5872775"/>
-            <a:ext cx="9293047" cy="637752"/>
+            <a:off x="841247" y="5925312"/>
+            <a:ext cx="9293047" cy="585216"/>
           </a:xfrm>
           <a:prstGeom prst="rect">
             <a:avLst/>
@@ -15444,7 +15403,7 @@
                 </a:solidFill>
                 <a:latin typeface="Microsoft JhengHei"/>
               </a:rPr>
-              <a:t>⚠️ 85% 是分流率 → 要不要人細看,不是是不是誤報;不可與誤報率並排相減 · 人判得多準沒…</a:t>
+              <a:t>⚠️ 85% 是分流率 → 要不要人細看,不是是不是誤報;不可與誤報率相減 · 人判得多準沒量過</a:t>
             </a:r>
           </a:p>
         </p:txBody>

--- a/Artificial Intelligence for Enterprises/Assessment3/Huang_26254793_421104_Assessment 3.pptx
+++ b/Artificial Intelligence for Enterprises/Assessment3/Huang_26254793_421104_Assessment 3.pptx
@@ -513,22 +513,36 @@
           <a:lstStyle/>
           <a:p>
             <a:r>
-              <a:t>【第 1 頁 · 鉤子 · 開場靜畫】　約 5 秒 · 23 字 · 累計 0:05</a:t>
-            </a:r>
-          </a:p>
-          <a:p>
-            <a:r>
-              <a:t>── 講稿(照著唸)──</a:t>
+              <a:t>【第 1 頁 · 鉤子 · 開場靜畫】　目標 5 秒 · 累計 0:05</a:t>
+            </a:r>
+          </a:p>
+          <a:p/>
+          <a:p>
+            <a:r>
+              <a:t>★ 五個人要看完三千支影片;而客戶要的答案,兩天內。</a:t>
+            </a:r>
+          </a:p>
+          <a:p/>
+          <a:p>
+            <a:r>
+              <a:t>⚠️ 這一句照唸,講完停 1 秒再換頁 —— 它是全片唯一的鉤子</a:t>
+            </a:r>
+          </a:p>
+          <a:p/>
+          <a:p>
+            <a:r>
+              <a:t>→ 換下一頁</a:t>
+            </a:r>
+          </a:p>
+          <a:p/>
+          <a:p>
+            <a:r>
+              <a:t>── 逐字備援 · 23 字(忘詞才看,不是拿來唸的)──</a:t>
             </a:r>
           </a:p>
           <a:p>
             <a:r>
               <a:t>今天,五個人要看完三千支影片;而客戶要的答案,兩天內。</a:t>
-            </a:r>
-          </a:p>
-          <a:p>
-            <a:r>
-              <a:t>→ 換下一頁</a:t>
             </a:r>
           </a:p>
         </p:txBody>
@@ -598,12 +612,53 @@
           <a:lstStyle/>
           <a:p>
             <a:r>
-              <a:t>【第 10 頁 · P9 · 六個月 · 六個工作包 · 三道決策門】　約 47 秒 · 208 字 · 累計 8:11</a:t>
-            </a:r>
-          </a:p>
-          <a:p>
-            <a:r>
-              <a:t>── 講稿(照著唸)──</a:t>
+              <a:t>【第 10 頁 · P9 · 六個月 · 六個工作包 · 三道決策門】　目標 47 秒 · 累計 8:11</a:t>
+            </a:r>
+          </a:p>
+          <a:p/>
+          <a:p>
+            <a:r>
+              <a:t>★ 六個工作包只有一包是 AI,順序本身就是風險控制。</a:t>
+            </a:r>
+          </a:p>
+          <a:p/>
+          <a:p>
+            <a:r>
+              <a:t>· 評估集 → 標註 → 特徵 → 地端 VLM</a:t>
+            </a:r>
+          </a:p>
+          <a:p>
+            <a:r>
+              <a:t>· 三道門各自寫明什麼條件下停,不是寫什麼條件下過</a:t>
+            </a:r>
+          </a:p>
+          <a:p>
+            <a:r>
+              <a:t>· G2 四臂同場比,第四臂是影子模式</a:t>
+            </a:r>
+          </a:p>
+          <a:p/>
+          <a:p>
+            <a:r>
+              <a:t># G1 第 6 週 · G2 第 12 週 · G3 第 24 週</a:t>
+            </a:r>
+          </a:p>
+          <a:p/>
+          <a:p>
+            <a:r>
+              <a:t>⚠️ 前三臂全部含人,而要部署的是無人系統 —— 這就是為什麼要有第四臂</a:t>
+            </a:r>
+          </a:p>
+          <a:p/>
+          <a:p>
+            <a:r>
+              <a:t>→ 換下一頁</a:t>
+            </a:r>
+          </a:p>
+          <a:p/>
+          <a:p>
+            <a:r>
+              <a:t>── 逐字備援 · 208 字(忘詞才看,不是拿來唸的)──</a:t>
             </a:r>
           </a:p>
           <a:p>
@@ -611,11 +666,7 @@
               <a:t>六個月,六個工作包,三道門。順序不能換:評估集、標註、特徵,最後才是地端模型。第六週是因果判定門:交出時間拆解、兩天逾時率跟到件分布。證據搜尋跟誤報量佔主要延遲,才續行;不是,就轉排班。第十二週同一組凍結集比四臂:現行模型、規則式基線、人機協作,加一臂影子模式——機器自己結案、不對外送,跟人的判定比對。自動結案的漏放率,只有這一臂算得出來。這道門不能取消實驗,只能調整規模;要不要真的對外自動結案,不在這六個月決定。規則式今天就能做,為什麼排第五週?沒有前六週的基準線,證不出有效。</a:t>
             </a:r>
           </a:p>
-          <a:p>
-            <a:r>
-              <a:t>→ 換下一頁</a:t>
-            </a:r>
-          </a:p>
+          <a:p/>
           <a:p>
             <a:r>
               <a:t>── 備查(不唸,答辯用)──</a:t>
@@ -713,12 +764,68 @@
           <a:lstStyle/>
           <a:p>
             <a:r>
-              <a:t>【第 11 頁 · P10 · 資源、當責與請求】　約 64 秒 · 280 字 · 累計 9:15</a:t>
-            </a:r>
-          </a:p>
-          <a:p>
-            <a:r>
-              <a:t>── 講稿(照著唸)──</a:t>
+              <a:t>【第 11 頁 · P10 · 資源、當責與請求】　目標 64 秒 · 累計 9:15</a:t>
+            </a:r>
+          </a:p>
+          <a:p/>
+          <a:p>
+            <a:r>
+              <a:t>★ 我請求核准第一段:四點八五人月、量級四十二到四十七萬,並指定一位贊助人。</a:t>
+            </a:r>
+          </a:p>
+          <a:p/>
+          <a:p>
+            <a:r>
+              <a:t>· 成本主體是人,不是設備</a:t>
+            </a:r>
+          </a:p>
+          <a:p>
+            <a:r>
+              <a:t>· 稽核稅:自動化不是免費的 —— 毛節省要先扣掉盲測稽核</a:t>
+            </a:r>
+          </a:p>
+          <a:p>
+            <a:r>
+              <a:t>· 我要的不只是一筆錢,是一個贊助人跟三道門</a:t>
+            </a:r>
+          </a:p>
+          <a:p/>
+          <a:p>
+            <a:r>
+              <a:t># 4.85 人月 · NT$42–47 萬(規劃,非核定預算)</a:t>
+            </a:r>
+          </a:p>
+          <a:p>
+            <a:r>
+              <a:t># 毛 6.0–12.1 FTE → 稽核稅 0.39–3.14 FTE → 淨 2.9–11.7 FTE</a:t>
+            </a:r>
+          </a:p>
+          <a:p/>
+          <a:p>
+            <a:r>
+              <a:t>⚠️ 🚫 520–1,521 萬是移交後的「可避免增聘」,不是本案承諾的節省額</a:t>
+            </a:r>
+          </a:p>
+          <a:p>
+            <a:r>
+              <a:t>⚠️ 🚫 不得與設備價相減成 ROI</a:t>
+            </a:r>
+          </a:p>
+          <a:p>
+            <a:r>
+              <a:t>⚠️ 在稽核稅、申訴重判與漂移調查三項齊備前,不宣稱任何節省額</a:t>
+            </a:r>
+          </a:p>
+          <a:p/>
+          <a:p>
+            <a:r>
+              <a:t>→ 換下一頁</a:t>
+            </a:r>
+          </a:p>
+          <a:p/>
+          <a:p>
+            <a:r>
+              <a:t>── 逐字備援 · 280 字(忘詞才看,不是拿來唸的)──</a:t>
             </a:r>
           </a:p>
           <a:p>
@@ -726,11 +833,7 @@
               <a:t>三個輸入都印在上面,它是量級,不是報價。設備一台十六到二十萬,一次性,不到一個人一年成本的五分之一;這個專案的成本主體是人,不是設備。它也不是為單一用途買的:第二個應用是內部規格文件的技術問答,不在本次請求範圍內,但硬體的攤提對象不只一個。那筆擴編暴露不是承諾的節省;要第十二週實測證明能避免或延後至少一點四到一點七個 loaded FTE-year,業務也確認會轉成少招人或少徵調研發,才放行後續預算。我要的不只預算,是贊助人跟三道門。我請求核准六個月額度輪廓、分段釋出;第一段四點八五人月、量級新台幣四十二到四十七萬,第六週由贊助人決定續不續行。第二十四週我會回到這裡,交出三方比較結果:地端 VLM 有增量,或者沒有。</a:t>
             </a:r>
           </a:p>
-          <a:p>
-            <a:r>
-              <a:t>→ 換下一頁</a:t>
-            </a:r>
-          </a:p>
+          <a:p/>
           <a:p>
             <a:r>
               <a:t>── 備查(不唸,答辯用)──</a:t>
@@ -828,22 +931,36 @@
           <a:lstStyle/>
           <a:p>
             <a:r>
-              <a:t>【第 12 頁 · 參考文獻(第 11 頁 — 不佔十頁額度)】　約 5 秒 · 21 字 · 累計 9:20</a:t>
-            </a:r>
-          </a:p>
-          <a:p>
-            <a:r>
-              <a:t>── 講稿(照著唸)──</a:t>
+              <a:t>【第 12 頁 · 參考文獻(第 11 頁 — 不佔十頁額度)】　目標 5 秒 · 累計 9:20</a:t>
+            </a:r>
+          </a:p>
+          <a:p/>
+          <a:p>
+            <a:r>
+              <a:t>★ 以上引用依 APA 第七版列出。</a:t>
+            </a:r>
+          </a:p>
+          <a:p/>
+          <a:p>
+            <a:r>
+              <a:t>⚠️ 這一頁不佔十頁額度,5 秒帶過</a:t>
+            </a:r>
+          </a:p>
+          <a:p/>
+          <a:p>
+            <a:r>
+              <a:t>→ 換下一頁</a:t>
+            </a:r>
+          </a:p>
+          <a:p/>
+          <a:p>
+            <a:r>
+              <a:t>── 逐字備援 · 21 字(忘詞才看,不是拿來唸的)──</a:t>
             </a:r>
           </a:p>
           <a:p>
             <a:r>
               <a:t>這些是本提案引用的公開文獻,完整清單在這一頁。</a:t>
-            </a:r>
-          </a:p>
-          <a:p>
-            <a:r>
-              <a:t>→ 換下一頁</a:t>
             </a:r>
           </a:p>
         </p:txBody>
@@ -913,12 +1030,58 @@
           <a:lstStyle/>
           <a:p>
             <a:r>
-              <a:t>【第 2 頁 · P1 · 用例:兩階段推論,與它下游那道人工防線】　約 65 秒 · 288 字 · 累計 1:10</a:t>
-            </a:r>
-          </a:p>
-          <a:p>
-            <a:r>
-              <a:t>── 講稿(照著唸)──</a:t>
+              <a:t>【第 2 頁 · P1 · 用例:兩階段推論,與它下游那道人工防線】　目標 65 秒 · 累計 1:10</a:t>
+            </a:r>
+          </a:p>
+          <a:p/>
+          <a:p>
+            <a:r>
+              <a:t>★ 這道人工防線有兩種單價,差十六倍 —— 差別不在人,在證據在不在畫面裡。</a:t>
+            </a:r>
+          </a:p>
+          <a:p/>
+          <a:p>
+            <a:r>
+              <a:t>· 地端 AI 公司內部評估過,我是其中一員(所以這不是新點子,是立案)</a:t>
+            </a:r>
+          </a:p>
+          <a:p>
+            <a:r>
+              <a:t>· 兩階段自動化到第二關就停,剩下每一筆都要人看過</a:t>
+            </a:r>
+          </a:p>
+          <a:p>
+            <a:r>
+              <a:t>· 看畫面就能判 vs 要離開畫面找證據</a:t>
+            </a:r>
+          </a:p>
+          <a:p/>
+          <a:p>
+            <a:r>
+              <a:t># 一筆 20 秒 / 一筆 5.25 分 / 差約 16 倍</a:t>
+            </a:r>
+          </a:p>
+          <a:p/>
+          <a:p>
+            <a:r>
+              <a:t>⚠️ 20 秒要說「營運端的實務估計,尚未以計時量測驗證」</a:t>
+            </a:r>
+          </a:p>
+          <a:p>
+            <a:r>
+              <a:t>⚠️ 🚫 不可說「我們沒有量過」</a:t>
+            </a:r>
+          </a:p>
+          <a:p/>
+          <a:p>
+            <a:r>
+              <a:t>→ 換下一頁</a:t>
+            </a:r>
+          </a:p>
+          <a:p/>
+          <a:p>
+            <a:r>
+              <a:t>── 逐字備援 · 288 字(忘詞才看,不是拿來唸的)──</a:t>
             </a:r>
           </a:p>
           <a:p>
@@ -926,11 +1089,7 @@
               <a:t>地端 AI 的技術可行性,公司內部評估過,我是其中一員。今天我不是提一個新點子,是把它從技術研討,變成一個有業務數字、有驗證機制、有停止條件的正式立案。要建的能力:讓機器讀懂一次事件的完整脈絡——影片、客戶問題、規則——產出可交付的證據與描述。兩階段架構各位熟悉,自動化到第二階段就停了:剩下每一筆,都要由人看過。這道防線有兩種單價。看畫面就能判的,一筆二十秒。要離開畫面去找證據的——那面牌是什麼、速限多少——一筆五分多鐘。差約十六倍,差別不在人,在證據在不在畫面裡。我請委員會核准一個六個月、三道決策門的專案:在客戶要的兩天內交出分析,第一次量得到自己漏掉什麼。要建它,得先有凍結的評估集、一致的標註、餵進模型的脈絡,那是前三個工作包。本案不重新開啟架構選擇。</a:t>
             </a:r>
           </a:p>
-          <a:p>
-            <a:r>
-              <a:t>→ 換下一頁</a:t>
-            </a:r>
-          </a:p>
+          <a:p/>
           <a:p>
             <a:r>
               <a:t>── 備查(不唸,答辯用)──</a:t>
@@ -1033,12 +1192,58 @@
           <a:lstStyle/>
           <a:p>
             <a:r>
-              <a:t>【第 3 頁 · P2 · 為什麼是現在:工作量沒變多,客戶要的時效變了】　約 72 秒 · 317 字 · 累計 2:22</a:t>
-            </a:r>
-          </a:p>
-          <a:p>
-            <a:r>
-              <a:t>── 講稿(照著唸)──</a:t>
+              <a:t>【第 3 頁 · P2 · 為什麼是現在:工作量沒變多,客戶要的時效變了】　目標 72 秒 · 累計 2:22</a:t>
+            </a:r>
+          </a:p>
+          <a:p/>
+          <a:p>
+            <a:r>
+              <a:t>★ 工作量沒變多,是客戶要的時效變了 —— 而慢的那兩段是同一個原因:模型看不到畫面外的東西。</a:t>
+            </a:r>
+          </a:p>
+          <a:p/>
+          <a:p>
+            <a:r>
+              <a:t>· 利用率:平均還好,尖峰這五個人已經不夠</a:t>
+            </a:r>
+          </a:p>
+          <a:p>
+            <a:r>
+              <a:t>· 一件爭議的五段拆解,撈數據 + 判讀才是模型幫得上的</a:t>
+            </a:r>
+          </a:p>
+          <a:p>
+            <a:r>
+              <a:t>· 這是營運端估計不是量測,W6 交正式拆解,不成立就轉排班</a:t>
+            </a:r>
+          </a:p>
+          <a:p/>
+          <a:p>
+            <a:r>
+              <a:t># 74%–107% · 折算 3.7–5.4 人 · 現有 5 人</a:t>
+            </a:r>
+          </a:p>
+          <a:p>
+            <a:r>
+              <a:t># 2.5–5.5 天 · AI 可處理段佔 43%–78%</a:t>
+            </a:r>
+          </a:p>
+          <a:p/>
+          <a:p>
+            <a:r>
+              <a:t>⚠️ 分母是 2.5–5.5 天,🚫 不是 2–5 天</a:t>
+            </a:r>
+          </a:p>
+          <a:p/>
+          <a:p>
+            <a:r>
+              <a:t>→ 換下一頁</a:t>
+            </a:r>
+          </a:p>
+          <a:p/>
+          <a:p>
+            <a:r>
+              <a:t>── 逐字備援 · 317 字(忘詞才看,不是拿來唸的)──</a:t>
             </a:r>
           </a:p>
           <a:p>
@@ -1046,11 +1251,7 @@
               <a:t>利用率七成四到一百零七:平均還好,尖峰這五個人已經不夠——折算三點七到五點四人,我們只有五個。一件爭議目前要兩到五天,現況約一半超過兩天;客戶要兩天、單純案件當天,那是客戶期望,不是簽了的服務水準。這兩到五天花在哪裡,我拆開了:排隊零到一天、撈數據半天、判讀一到三天、內部覆核半天、回信半天。撈數據加判讀,就是模型幫得上的那兩段,佔四成到八成。這兩段之所以慢,是同一個原因——模型看不到畫面外的東西。這是營運端估計,不是量測;前六週交出正式拆解,不成立就轉排班。二十秒是營運上的估計,還沒有正式量過——第六週交出正式基準,G1 驗收。上線約五萬台,售出更多;落差就是排不了程的工作量,開通權在客戶手上。我不預測撞牆的時點;第六週對齊三個分母,成長不納入回報估算。成長是階梯:一個大型車隊上線,事件量一次跳兩成三,手上正在談一個。</a:t>
             </a:r>
           </a:p>
-          <a:p>
-            <a:r>
-              <a:t>→ 換下一頁</a:t>
-            </a:r>
-          </a:p>
+          <a:p/>
           <a:p>
             <a:r>
               <a:t>── 備查(不唸,答辯用)──</a:t>
@@ -1138,12 +1339,68 @@
           <a:lstStyle/>
           <a:p>
             <a:r>
-              <a:t>【第 4 頁 · P3 · 發現過程:兩種病,兩個缺口】　約 52 秒 · 230 字 · 累計 3:14</a:t>
-            </a:r>
-          </a:p>
-          <a:p>
-            <a:r>
-              <a:t>── 講稿(照著唸)──</a:t>
+              <a:t>【第 4 頁 · P3 · 發現過程:兩種病,兩個缺口】　目標 52 秒 · 累計 3:14</a:t>
+            </a:r>
+          </a:p>
+          <a:p/>
+          <a:p>
+            <a:r>
+              <a:t>★ 一百二十四筆誤報,一百零三筆是同一個根因 —— 八成三都是交通標誌辨識。</a:t>
+            </a:r>
+          </a:p>
+          <a:p/>
+          <a:p>
+            <a:r>
+              <a:t>· 行車輔助錯的是模型(缺脈絡),駕駛監控錯的是人(缺判準)</a:t>
+            </a:r>
+          </a:p>
+          <a:p>
+            <a:r>
+              <a:t>· 兩個比例共用同一把尺,而尺的一致性從來沒量過</a:t>
+            </a:r>
+          </a:p>
+          <a:p>
+            <a:r>
+              <a:t>· 修好它,誤報跟漏放一起改善</a:t>
+            </a:r>
+          </a:p>
+          <a:p/>
+          <a:p>
+            <a:r>
+              <a:t># 4 台車 · 23 天 · 1,647 筆</a:t>
+            </a:r>
+          </a:p>
+          <a:p>
+            <a:r>
+              <a:t># 103 / 124 = 83%</a:t>
+            </a:r>
+          </a:p>
+          <a:p>
+            <a:r>
+              <a:t># 5 人 × 3.6 個分析日 × 8 小時 = 144 人時 ÷ 1,647 筆 = 5.25 分</a:t>
+            </a:r>
+          </a:p>
+          <a:p/>
+          <a:p>
+            <a:r>
+              <a:t>⚠️ 必講「比例僅在此樣本內成立」—— 這句是這一頁所有數字的合法性來源</a:t>
+            </a:r>
+          </a:p>
+          <a:p>
+            <a:r>
+              <a:t>⚠️ 5.25 分是「單一批次的實際節奏,不是長期平均」</a:t>
+            </a:r>
+          </a:p>
+          <a:p/>
+          <a:p>
+            <a:r>
+              <a:t>→ 換下一頁</a:t>
+            </a:r>
+          </a:p>
+          <a:p/>
+          <a:p>
+            <a:r>
+              <a:t>── 逐字備援 · 230 字(忘詞才看,不是拿來唸的)──</a:t>
             </a:r>
           </a:p>
           <a:p>
@@ -1151,11 +1408,7 @@
               <a:t>那我們的時間到底花在哪裡?我把最近一份判讀拆開來看。四台車、二十三天、一千六百四十七筆,一個小型車隊一個月,比例僅在此樣本內成立。行車輔助錯的是模型,駕駛監控錯的是人。一邊缺脈絡,判定依據不在畫面裡;一邊缺判準,同一段影片兩人不同答案。這兩個比例共用同一把尺,而那把尺的一致性我們從來沒量過——標註品質那一包第十週建立基線,G2 訂目標值。這個樣本一百二十四筆誤報,一百零三筆同一個根因:交通標誌辨識,八成三。漏放那一側只有一份很薄的樣本,下一頁講。修好它,誤報跟漏放一起改善——而誤報,就是我們今天在人工端花掉的時間。</a:t>
             </a:r>
           </a:p>
-          <a:p>
-            <a:r>
-              <a:t>→ 換下一頁</a:t>
-            </a:r>
-          </a:p>
+          <a:p/>
           <a:p>
             <a:r>
               <a:t>── 備查(不唸,答辯用)──</a:t>
@@ -1243,12 +1496,58 @@
           <a:lstStyle/>
           <a:p>
             <a:r>
-              <a:t>【第 5 頁 · P4 · 我們看不見的那一半:有資料,沒有習慣】　約 59 秒 · 259 字 · 累計 4:13</a:t>
-            </a:r>
-          </a:p>
-          <a:p>
-            <a:r>
-              <a:t>── 講稿(照著唸)──</a:t>
+              <a:t>【第 5 頁 · P4 · 我們看不見的那一半:有資料,沒有習慣】　目標 59 秒 · 累計 4:13</a:t>
+            </a:r>
+          </a:p>
+          <a:p/>
+          <a:p>
+            <a:r>
+              <a:t>★ 我們有資料,沒有習慣 —— 被判否決的那一流,沒有人回看。</a:t>
+            </a:r>
+          </a:p>
+          <a:p/>
+          <a:p>
+            <a:r>
+              <a:t>· 唯一的漏放量測是一份很薄的人工觸發測試</a:t>
+            </a:r>
+          </a:p>
+          <a:p>
+            <a:r>
+              <a:t>· 報告上公司自己註明:那是下限</a:t>
+            </a:r>
+          </a:p>
+          <a:p>
+            <a:r>
+              <a:t>· 誤報只花我們的人時,漏放是駕駛沒收到那次警示</a:t>
+            </a:r>
+          </a:p>
+          <a:p/>
+          <a:p>
+            <a:r>
+              <a:t># 39 筆測試 · 漏偵 12 筆 · 另 10 筆無法歸類(約 1/4)</a:t>
+            </a:r>
+          </a:p>
+          <a:p/>
+          <a:p>
+            <a:r>
+              <a:t>⚠️ 說「最強的線索,不是結論」—— W1–6 做成帶 95% 信賴區間的估計,不成立就換靶心</a:t>
+            </a:r>
+          </a:p>
+          <a:p>
+            <a:r>
+              <a:t>⚠️ 🚫 83% 是第 4 頁的事,不要跟這一頁的漏放混講</a:t>
+            </a:r>
+          </a:p>
+          <a:p/>
+          <a:p>
+            <a:r>
+              <a:t>→ 換下一頁</a:t>
+            </a:r>
+          </a:p>
+          <a:p/>
+          <a:p>
+            <a:r>
+              <a:t>── 逐字備援 · 259 字(忘詞才看,不是拿來唸的)──</a:t>
             </a:r>
           </a:p>
           <a:p>
@@ -1256,11 +1555,7 @@
               <a:t>這是我們看得見的一半。看不見的那一半更麻煩。被判否決的那一流,沒有人回看。我們有資料,沒有習慣。唯一的漏放量測,是一份三十九筆的人工觸發測試,獨立樣本:漏偵十二筆,另外十筆無法歸類,約四分之一;報告上我們自己註明,十二是下限。這是我目前手上最強的線索,不是結論;前六週由評估底座那一包做成帶信賴區間的估計,不成立就換靶心,G1 判。這兩種錯的代價不對稱:誤報只花我們的人時,漏放是駕駛沒收到那次警示。所以漏放這一側就算樣本再薄,也要先把它量出來。這批資料難在三件事:收得不完整、標註本身就會錯、內部對同一個標籤還沒有一致的理解。文獻上講的「沒有真實資料就只能靠代理指標」,就是這件事。</a:t>
             </a:r>
           </a:p>
-          <a:p>
-            <a:r>
-              <a:t>→ 換下一頁</a:t>
-            </a:r>
-          </a:p>
+          <a:p/>
           <a:p>
             <a:r>
               <a:t>── 備查(不唸,答辯用)──</a:t>
@@ -1388,12 +1683,63 @@
           <a:lstStyle/>
           <a:p>
             <a:r>
-              <a:t>【第 6 頁 · P5 · 五條路,含三條不用 AI】　約 44 秒 · 195 字 · 累計 4:58</a:t>
-            </a:r>
-          </a:p>
-          <a:p>
-            <a:r>
-              <a:t>── 講稿(照著唸)──</a:t>
+              <a:t>【第 6 頁 · P5 · 五條路,含三條不用 AI】　目標 44 秒 · 累計 4:58</a:t>
+            </a:r>
+          </a:p>
+          <a:p/>
+          <a:p>
+            <a:r>
+              <a:t>★ 這六個月,它一筆都不對外生效。</a:t>
+            </a:r>
+          </a:p>
+          <a:p/>
+          <a:p>
+            <a:r>
+              <a:t>· 五條路裡三條不用 AI —— 加人、調班、既有雲端規劃,我都沒有先否決</a:t>
+            </a:r>
+          </a:p>
+          <a:p>
+            <a:r>
+              <a:t>· 採用案是地端視覺語言模型;前兩包是它的必要前置</a:t>
+            </a:r>
+          </a:p>
+          <a:p>
+            <a:r>
+              <a:t>· 影子模式:機器照出結論但不對外送,人照常判,兩邊比對</a:t>
+            </a:r>
+          </a:p>
+          <a:p/>
+          <a:p>
+            <a:r>
+              <a:t># 85% 是分流率(推估非實測) · 六個月對外覆蓋率 0%</a:t>
+            </a:r>
+          </a:p>
+          <a:p/>
+          <a:p>
+            <a:r>
+              <a:t>⚠️ 三層一層都不可省:能力層 850 筆終局判定 / 本案層 對外 0% / 放行層 須過另一道獨立門</a:t>
+            </a:r>
+          </a:p>
+          <a:p>
+            <a:r>
+              <a:t>⚠️ 🚫 不可說「AI 不做判定」—— 正確講法是「AI 會做結案判定,但這六個月不對外生效」</a:t>
+            </a:r>
+          </a:p>
+          <a:p>
+            <a:r>
+              <a:t>⚠️ 🚫 85% 是分流率,不是準確率,不可與誤報率並排相減</a:t>
+            </a:r>
+          </a:p>
+          <a:p/>
+          <a:p>
+            <a:r>
+              <a:t>→ 換下一頁</a:t>
+            </a:r>
+          </a:p>
+          <a:p/>
+          <a:p>
+            <a:r>
+              <a:t>── 逐字備援 · 195 字(忘詞才看,不是拿來唸的)──</a:t>
             </a:r>
           </a:p>
           <a:p>
@@ -1401,11 +1747,7 @@
               <a:t>路有五條。加人,迴路轉得更久,不會停。更便宜的是調班加人力池,我不先否決;六週後那道門用正式量測判:AI能處理的那段佔主要延遲才放行,否則轉排班。採用案是地端視覺語言模型讀事件影片。前兩包是它的必要前置:沒量測底座,就不知道它判得對不對。預期八成五的爭議件,機器有把握、直接結案,人不再看。這是推估不是實測;而人現在判得多準,我們沒量過。所以這六個月,它一筆都不對外生效——機器照出結論,人照常判,兩邊比對。這是唯一算得出自動結案漏放率的設計。</a:t>
             </a:r>
           </a:p>
-          <a:p>
-            <a:r>
-              <a:t>→ 換下一頁</a:t>
-            </a:r>
-          </a:p>
+          <a:p/>
           <a:p>
             <a:r>
               <a:t>── 備查(不唸,答辯用)──</a:t>
@@ -1483,12 +1825,74 @@
           <a:lstStyle/>
           <a:p>
             <a:r>
-              <a:t>【第 7 頁 · P6 · 風險:七類十條,緩解位移與殘餘風險】　約 51 秒 · 223 字 · 累計 5:48</a:t>
-            </a:r>
-          </a:p>
-          <a:p>
-            <a:r>
-              <a:t>── 講稿(照著唸)──</a:t>
+              <a:t>【第 7 頁 · P6 · 風險:七類十條,緩解位移與殘餘風險】　目標 51 秒 · 累計 5:48</a:t>
+            </a:r>
+          </a:p>
+          <a:p/>
+          <a:p>
+            <a:r>
+              <a:t>★ 這個緩解只擋得住人還在看的那些 —— 移交後那八成五,沒有介面,也沒有人。</a:t>
+            </a:r>
+          </a:p>
+          <a:p/>
+          <a:p>
+            <a:r>
+              <a:t>· 資料級聯:判準不一致會變成訓練標籤</a:t>
+            </a:r>
+          </a:p>
+          <a:p>
+            <a:r>
+              <a:t>· 自動化偏差:介面一顯示模型信心,人就直接蓋章 → 我的決策是不顯示</a:t>
+            </a:r>
+          </a:p>
+          <a:p>
+            <a:r>
+              <a:t>· 所以我另外加了兩條這個方案自己造成的風險</a:t>
+            </a:r>
+          </a:p>
+          <a:p/>
+          <a:p>
+            <a:r>
+              <a:t># 七類十條 · R9 自動結案的漏放 · R10 自動結案的冤枉</a:t>
+            </a:r>
+          </a:p>
+          <a:p/>
+          <a:p>
+            <a:r>
+              <a:t>⚠️ R8 法律面我沒有答案 —— 由法務在 G1(第 6 週)前給書面意見</a:t>
+            </a:r>
+          </a:p>
+          <a:p>
+            <a:r>
+              <a:t>⚠️ 每一條沒有答案的事,都要當場交代誰在第幾週給</a:t>
+            </a:r>
+          </a:p>
+          <a:p/>
+          <a:p>
+            <a:r>
+              <a:t>── 錄影提示(不唸)──</a:t>
+            </a:r>
+          </a:p>
+          <a:p>
+            <a:r>
+              <a:t>· 錄影標記:唸完「這題我沒有答案,它由法務在 G1 前給書面意見」整句後,畫面停在 R8 的紅色虛線圈上靜止 2 秒、口白不出聲,再切下一頁。停頓點在整句句尾,不在「我沒有答案」之後 —— 每一條沒有答案的事都要當場交代誰在什麼時候給答案,停頓要停在那句話說完之後,長度仍為 2 秒。</a:t>
+            </a:r>
+          </a:p>
+          <a:p>
+            <a:r>
+              <a:t>· 唸完法務那句後,畫面停在 R8 紅圈上靜止 2 秒</a:t>
+            </a:r>
+          </a:p>
+          <a:p/>
+          <a:p>
+            <a:r>
+              <a:t>→ 換下一頁</a:t>
+            </a:r>
+          </a:p>
+          <a:p/>
+          <a:p>
+            <a:r>
+              <a:t>── 逐字備援 · 223 字(忘詞才看,不是拿來唸的)──</a:t>
             </a:r>
           </a:p>
           <a:p>
@@ -1496,21 +1900,7 @@
               <a:t>選了這條,我先講它會出什麼事。風險歸成七類十條,我只講三條。第一,資料級聯:複核判準不一致會變成訓練標籤,脈絡資料有錯也會整批傳下去。第二,自動化偏差:介面一顯示模型信心,人就直接蓋章。我的決策是介面不顯示信心。但這個緩解只擋得住人還在看的那些 —— 移交後開到天花板,那八成五沒有介面、也沒有人。所以我另外加了兩條:機器把真的危險事件判成誤報,跟機器單方面駁回駕駛。兩條都掛在自動結案那道門上,不在這六個月裡。第三,法律面:曾判為誤報的紀錄,在事故舉證裡算什麼。這題我沒有答案,它由法務在 G1 前給書面意見。</a:t>
             </a:r>
           </a:p>
-          <a:p>
-            <a:r>
-              <a:t>── 錄影提示(不唸)──</a:t>
-            </a:r>
-          </a:p>
-          <a:p>
-            <a:r>
-              <a:t>· 錄影標記:唸完「這題我沒有答案,它由法務在 G1 前給書面意見」整句後,畫面停在 R8 的紅色虛線圈上靜止 2 秒、口白不出聲,再切下一頁。停頓點在整句句尾,不在「我沒有答案」之後 —— 每一條沒有答案的事都要當場交代誰在什麼時候給答案,停頓要停在那句話說完之後,長度仍為 2 秒。</a:t>
-            </a:r>
-          </a:p>
-          <a:p>
-            <a:r>
-              <a:t>→ 換下一頁</a:t>
-            </a:r>
-          </a:p>
+          <a:p/>
           <a:p>
             <a:r>
               <a:t>── 備查(不唸,答辯用)──</a:t>
@@ -1588,12 +1978,74 @@
           <a:lstStyle/>
           <a:p>
             <a:r>
-              <a:t>【第 8 頁 · P7 · 倫理與可申訴性:對照澳洲 AI 倫理八原則】　約 50 秒 · 219 字 · 累計 6:38</a:t>
-            </a:r>
-          </a:p>
-          <a:p>
-            <a:r>
-              <a:t>── 講稿(照著唸)──</a:t>
+              <a:t>【第 8 頁 · P7 · 倫理與可申訴性:對照澳洲 AI 倫理八原則】　目標 50 秒 · 累計 6:38</a:t>
+            </a:r>
+          </a:p>
+          <a:p/>
+          <a:p>
+            <a:r>
+              <a:t>★ 每一千筆爭議,有八百五十筆沒有人會看過。</a:t>
+            </a:r>
+          </a:p>
+          <a:p/>
+          <a:p>
+            <a:r>
+              <a:t>· 同一張表兩欄:專案期一種顏色,移交後另一種</a:t>
+            </a:r>
+          </a:p>
+          <a:p>
+            <a:r>
+              <a:t>· 第 7 條可申訴性 —— 我把它升為部署否決條件</a:t>
+            </a:r>
+          </a:p>
+          <a:p>
+            <a:r>
+              <a:t>· 第 8 條問責性:那 850 筆裡某一筆判錯,沒有人簽過名</a:t>
+            </a:r>
+          </a:p>
+          <a:p/>
+          <a:p>
+            <a:r>
+              <a:t># 專案期 綠 0 琥珀 7 紅 1 → 移交後 綠 0 琥珀 1 紅 7</a:t>
+            </a:r>
+          </a:p>
+          <a:p/>
+          <a:p>
+            <a:r>
+              <a:t>⚠️ 「沒有人簽過名」是**承認洞**,🚫 不要臨場補一個人上去</a:t>
+            </a:r>
+          </a:p>
+          <a:p>
+            <a:r>
+              <a:t>⚠️ 第 4 條隱私是唯一不因自動結案惡化的一條 —— 刻意不標紅,不是漏標</a:t>
+            </a:r>
+          </a:p>
+          <a:p/>
+          <a:p>
+            <a:r>
+              <a:t>── 錄影提示(不唸)──</a:t>
+            </a:r>
+          </a:p>
+          <a:p>
+            <a:r>
+              <a:t>· 錄影標記:唸到「可申訴性,我們不及格」時切全螢幕人像,唸完該句後切回畫中畫。</a:t>
+            </a:r>
+          </a:p>
+          <a:p>
+            <a:r>
+              <a:t>· 交界移交:P7 → P8 的接縫句為「講完該不該做,接下來是怎麼算做成了。」依總則檔 §6b,該句寫成 P8 口白的第一句、字數計入 P8,故不列入本頁 224 字。</a:t>
+            </a:r>
+          </a:p>
+          <a:p/>
+          <a:p>
+            <a:r>
+              <a:t>→ 換下一頁</a:t>
+            </a:r>
+          </a:p>
+          <a:p/>
+          <a:p>
+            <a:r>
+              <a:t>── 逐字備援 · 219 字(忘詞才看,不是拿來唸的)──</a:t>
             </a:r>
           </a:p>
           <a:p>
@@ -1601,26 +2053,7 @@
               <a:t>還有一條,是我們自己造成的。這道人工防線的產能有限,所以它是配給的 —— 依客戶的購買量排序。同樣一個誤判,發生在大客戶身上會被人攔下來,小客戶身上不會。分配依據是客戶大小,不是風險大小。這六個月我能做的,是第一次量得出它覆蓋了誰。但我要說清楚:這個方案開到天花板之後,配給的依據會從客戶大小換成機器的信心,而那八成五沒有人看過 —— 那是我造成的新問題,不是我解掉的舊問題。所以八原則裡的問責跟可申訴性,我這一頁全部標紅,而它們掛在第二十四週那道門上。申訴機制到位前,本案產出不供個人考核使用。</a:t>
             </a:r>
           </a:p>
-          <a:p>
-            <a:r>
-              <a:t>── 錄影提示(不唸)──</a:t>
-            </a:r>
-          </a:p>
-          <a:p>
-            <a:r>
-              <a:t>· 錄影標記:唸到「可申訴性,我們不及格」時切全螢幕人像,唸完該句後切回畫中畫。</a:t>
-            </a:r>
-          </a:p>
-          <a:p>
-            <a:r>
-              <a:t>· 交界移交:P7 → P8 的接縫句為「講完該不該做,接下來是怎麼算做成了。」依總則檔 §6b,該句寫成 P8 口白的第一句、字數計入 P8,故不列入本頁 224 字。</a:t>
-            </a:r>
-          </a:p>
-          <a:p>
-            <a:r>
-              <a:t>→ 換下一頁</a:t>
-            </a:r>
-          </a:p>
+          <a:p/>
           <a:p>
             <a:r>
               <a:t>── 備查(不唸,答辯用)──</a:t>
@@ -1698,12 +2131,58 @@
           <a:lstStyle/>
           <a:p>
             <a:r>
-              <a:t>【第 9 頁 · P8 · 怎麼算成功:三層 KPI,一條回圈】　約 46 秒 · 201 字 · 累計 7:24</a:t>
-            </a:r>
-          </a:p>
-          <a:p>
-            <a:r>
-              <a:t>── 講稿(照著唸)──</a:t>
+              <a:t>【第 9 頁 · P8 · 怎麼算成功:三層 KPI,一條回圈】　目標 46 秒 · 累計 7:24</a:t>
+            </a:r>
+          </a:p>
+          <a:p/>
+          <a:p>
+            <a:r>
+              <a:t>★ 證明它有效的方法,同時是喊停它的方法。</a:t>
+            </a:r>
+          </a:p>
+          <a:p/>
+          <a:p>
+            <a:r>
+              <a:t>· 上面兩層回答「怎麼證明有效」,護欄層回答「什麼情況下喊停」</a:t>
+            </a:r>
+          </a:p>
+          <a:p>
+            <a:r>
+              <a:t>· 護欄任一未達標,上面兩層的成績一律不採計</a:t>
+            </a:r>
+          </a:p>
+          <a:p>
+            <a:r>
+              <a:t>· 訂不出目標值的,寫明由哪一道門訂</a:t>
+            </a:r>
+          </a:p>
+          <a:p/>
+          <a:p>
+            <a:r>
+              <a:t># ⑩ 漏放率 W6 交 95% CI · ⑬ 漏濾率 W12 交差值 95% CI</a:t>
+            </a:r>
+          </a:p>
+          <a:p>
+            <a:r>
+              <a:t># δ 由委員會在 G1 事前預註冊 —— 判準寫在跑實驗之前</a:t>
+            </a:r>
+          </a:p>
+          <a:p/>
+          <a:p>
+            <a:r>
+              <a:t>⚠️ ⑬ 的母體是那 850 筆(有把握桶),🚫 不是剩下的 150 筆</a:t>
+            </a:r>
+          </a:p>
+          <a:p/>
+          <a:p>
+            <a:r>
+              <a:t>→ 換下一頁</a:t>
+            </a:r>
+          </a:p>
+          <a:p/>
+          <a:p>
+            <a:r>
+              <a:t>── 逐字備援 · 201 字(忘詞才看,不是拿來唸的)──</a:t>
             </a:r>
           </a:p>
           <a:p>
@@ -1711,11 +2190,7 @@
               <a:t>講完該不該做,接下來是怎麼算做成了。最上層第一個指標,是客戶等多久拿到分析,這是這個專案要買的東西。現況兩到五天,目標兩天內、單純案件當天;是客戶期望,不是已簽的服務水準協議。護欄層是否決型,今天多一條:漏濾率——機器說有把握、直接結案的那一桶裡,有多少其實該讓人看。第十二週交出它跟人工的差值,門檻第六週就要先訂,不能看完數據再訂。錯誤攔截比例我算不出來,分母還不存在,那正是護欄層要交的能力。訂不出目標值的,我寫的是它什麼時候被訂出來、由哪一道門訂。</a:t>
             </a:r>
           </a:p>
-          <a:p>
-            <a:r>
-              <a:t>→ 換下一頁</a:t>
-            </a:r>
-          </a:p>
+          <a:p/>
           <a:p>
             <a:r>
               <a:t>── 備查(不唸,答辯用)──</a:t>

--- a/Artificial Intelligence for Enterprises/Assessment3/Huang_26254793_421104_Assessment 3.pptx
+++ b/Artificial Intelligence for Enterprises/Assessment3/Huang_26254793_421104_Assessment 3.pptx
@@ -513,36 +513,63 @@
           <a:lstStyle/>
           <a:p>
             <a:r>
-              <a:t>【第 1 頁 · 鉤子 · 開場靜畫】　目標 5 秒 · 累計 0:05</a:t>
+              <a:t>【第 1 頁 · 鉤子 · 開場靜畫】　目標 35 秒 · 累計 0:35</a:t>
             </a:r>
           </a:p>
           <a:p/>
           <a:p>
             <a:r>
-              <a:t>★ 五個人要看完三千支影片;而客戶要的答案,兩天內。</a:t>
+              <a:t>★ 今天,五個人要看完三千支影片;而客戶要的答案,兩天內。</a:t>
             </a:r>
           </a:p>
           <a:p/>
           <a:p>
             <a:r>
-              <a:t>⚠️ 這一句照唸,講完停 1 秒再換頁 —— 它是全片唯一的鉤子</a:t>
+              <a:t>· 先講生意:客戶是車隊 —— 物流 · 客運 · 租賃,車上裝我們的鏡頭與車機</a:t>
+            </a:r>
+          </a:p>
+          <a:p>
+            <a:r>
+              <a:t>· 一筆「事件」= 鏡頭偵測到一次危險駕駛(影片 + 時間地點 + 系統分類)</a:t>
+            </a:r>
+          </a:p>
+          <a:p>
+            <a:r>
+              <a:t>· 一次「爭議」= 客戶回頭說「這筆判錯了」—— 只能由人重看影片才判得出來</a:t>
             </a:r>
           </a:p>
           <a:p/>
           <a:p>
             <a:r>
+              <a:t># 單一大型車隊約 3,000 筆事件/天 · 全公司 5 位專職分析人員</a:t>
+            </a:r>
+          </a:p>
+          <a:p/>
+          <a:p>
+            <a:r>
+              <a:t>⚠️ ★ 那句話留到**最後**講 —— 先把『事件』與『爭議』鋪好,後面九頁全建立在這兩個詞上</a:t>
+            </a:r>
+          </a:p>
+          <a:p>
+            <a:r>
+              <a:t>⚠️ 講完停 1 秒再換頁。這是全片唯一的鉤子,不要急著翻</a:t>
+            </a:r>
+          </a:p>
+          <a:p/>
+          <a:p>
+            <a:r>
               <a:t>→ 換下一頁</a:t>
             </a:r>
           </a:p>
           <a:p/>
           <a:p>
             <a:r>
-              <a:t>── 逐字備援 · 23 字(忘詞才看,不是拿來唸的)──</a:t>
-            </a:r>
-          </a:p>
-          <a:p>
-            <a:r>
-              <a:t>今天,五個人要看完三千支影片;而客戶要的答案,兩天內。</a:t>
+              <a:t>── 逐字備援 · 156 字(忘詞才看,不是拿來唸的)──</a:t>
+            </a:r>
+          </a:p>
+          <a:p>
+            <a:r>
+              <a:t>我在一家做車隊行車影像 AI 的公司,負責 AI 應用。我們的客戶是車隊——物流、客運、租賃——他們的車上裝我們的鏡頭跟車機。鏡頭偵測到一次危險駕駛,就記一筆「事件」:一段影片、時間地點,還有系統給的分類。單一大型車隊,一天大約三千筆。客戶收到之後會回頭說「這筆判錯了」,那叫一次「爭議」——而爭議只能由人重看影片才判得出來。今天,五個人要看完三千支影片;而客戶要的答案,兩天內。</a:t>
             </a:r>
           </a:p>
         </p:txBody>
@@ -612,7 +639,7 @@
           <a:lstStyle/>
           <a:p>
             <a:r>
-              <a:t>【第 10 頁 · P9 · 六個月 · 六個工作包 · 三道決策門】　目標 47 秒 · 累計 8:11</a:t>
+              <a:t>【第 10 頁 · P9 · 六個月 · 六個工作包 · 三道決策門】　目標 47 秒 · 累計 8:41</a:t>
             </a:r>
           </a:p>
           <a:p/>
@@ -764,7 +791,7 @@
           <a:lstStyle/>
           <a:p>
             <a:r>
-              <a:t>【第 11 頁 · P10 · 資源、當責與請求】　目標 64 秒 · 累計 9:15</a:t>
+              <a:t>【第 11 頁 · P10 · 資源、當責與請求】　目標 64 秒 · 累計 9:45</a:t>
             </a:r>
           </a:p>
           <a:p/>
@@ -931,7 +958,7 @@
           <a:lstStyle/>
           <a:p>
             <a:r>
-              <a:t>【第 12 頁 · 參考文獻(第 11 頁 — 不佔十頁額度)】　目標 5 秒 · 累計 9:20</a:t>
+              <a:t>【第 12 頁 · 參考文獻(第 11 頁 — 不佔十頁額度)】　目標 5 秒 · 累計 9:50</a:t>
             </a:r>
           </a:p>
           <a:p/>
@@ -1030,7 +1057,7 @@
           <a:lstStyle/>
           <a:p>
             <a:r>
-              <a:t>【第 2 頁 · P1 · 用例:兩階段推論,與它下游那道人工防線】　目標 65 秒 · 累計 1:10</a:t>
+              <a:t>【第 2 頁 · P1 · 用例:兩階段推論,與它下游那道人工防線】　目標 65 秒 · 累計 1:40</a:t>
             </a:r>
           </a:p>
           <a:p/>
@@ -1192,7 +1219,7 @@
           <a:lstStyle/>
           <a:p>
             <a:r>
-              <a:t>【第 3 頁 · P2 · 為什麼是現在:工作量沒變多,客戶要的時效變了】　目標 72 秒 · 累計 2:22</a:t>
+              <a:t>【第 3 頁 · P2 · 為什麼是現在:工作量沒變多,客戶要的時效變了】　目標 72 秒 · 累計 2:52</a:t>
             </a:r>
           </a:p>
           <a:p/>
@@ -1232,6 +1259,12 @@
           <a:p>
             <a:r>
               <a:t>⚠️ 分母是 2.5–5.5 天,🚫 不是 2–5 天</a:t>
+            </a:r>
+          </a:p>
+          <a:p/>
+          <a:p>
+            <a:r>
+              <a:t>✂️ 若排練超過 9:40,這一頁砍最後四句(20 秒限定的重複 + 五萬台 / 三個分母 / 成長階梯)= 省 26 秒。第 2 頁已經講過 20 秒的限定,這裡是重複。</a:t>
             </a:r>
           </a:p>
           <a:p/>
@@ -1339,7 +1372,7 @@
           <a:lstStyle/>
           <a:p>
             <a:r>
-              <a:t>【第 4 頁 · P3 · 發現過程:兩種病,兩個缺口】　目標 52 秒 · 累計 3:14</a:t>
+              <a:t>【第 4 頁 · P3 · 發現過程:兩種病,兩個缺口】　目標 52 秒 · 累計 3:45</a:t>
             </a:r>
           </a:p>
           <a:p/>
@@ -1496,7 +1529,7 @@
           <a:lstStyle/>
           <a:p>
             <a:r>
-              <a:t>【第 5 頁 · P4 · 我們看不見的那一半:有資料,沒有習慣】　目標 59 秒 · 累計 4:13</a:t>
+              <a:t>【第 5 頁 · P4 · 我們看不見的那一半:有資料,沒有習慣】　目標 59 秒 · 累計 4:44</a:t>
             </a:r>
           </a:p>
           <a:p/>
@@ -1683,7 +1716,7 @@
           <a:lstStyle/>
           <a:p>
             <a:r>
-              <a:t>【第 6 頁 · P5 · 五條路,含三條不用 AI】　目標 44 秒 · 累計 4:58</a:t>
+              <a:t>【第 6 頁 · P5 · 五條路,含三條不用 AI】　目標 44 秒 · 累計 5:28</a:t>
             </a:r>
           </a:p>
           <a:p/>
@@ -1825,7 +1858,7 @@
           <a:lstStyle/>
           <a:p>
             <a:r>
-              <a:t>【第 7 頁 · P6 · 風險:七類十條,緩解位移與殘餘風險】　目標 51 秒 · 累計 5:48</a:t>
+              <a:t>【第 7 頁 · P6 · 風險:七類十條,緩解位移與殘餘風險】　目標 51 秒 · 累計 6:19</a:t>
             </a:r>
           </a:p>
           <a:p/>
@@ -1978,7 +2011,7 @@
           <a:lstStyle/>
           <a:p>
             <a:r>
-              <a:t>【第 8 頁 · P7 · 倫理與可申訴性:對照澳洲 AI 倫理八原則】　目標 50 秒 · 累計 6:38</a:t>
+              <a:t>【第 8 頁 · P7 · 倫理與可申訴性:對照澳洲 AI 倫理八原則】　目標 50 秒 · 累計 7:08</a:t>
             </a:r>
           </a:p>
           <a:p/>
@@ -2131,7 +2164,7 @@
           <a:lstStyle/>
           <a:p>
             <a:r>
-              <a:t>【第 9 頁 · P8 · 怎麼算成功:三層 KPI,一條回圈】　目標 46 秒 · 累計 7:24</a:t>
+              <a:t>【第 9 頁 · P8 · 怎麼算成功:三層 KPI,一條回圈】　目標 46 秒 · 累計 7:54</a:t>
             </a:r>
           </a:p>
           <a:p/>
@@ -5417,8 +5450,8 @@
         </p:nvSpPr>
         <p:spPr>
           <a:xfrm>
-            <a:off x="960120" y="3950208"/>
-            <a:ext cx="9814255" cy="411480"/>
+            <a:off x="960120" y="3895344"/>
+            <a:ext cx="9814255" cy="1060704"/>
           </a:xfrm>
           <a:prstGeom prst="rect">
             <a:avLst/>
@@ -5433,7 +5466,7 @@
           <a:p>
             <a:pPr algn="l">
               <a:lnSpc>
-                <a:spcPct val="125000"/>
+                <a:spcPct val="130000"/>
               </a:lnSpc>
             </a:pPr>
             <a:r>
@@ -5443,7 +5476,55 @@
                 </a:solidFill>
                 <a:latin typeface="Microsoft JhengHei"/>
               </a:rPr>
-              <a:t>車隊行車影像 AI · 單一大型車隊約 3,000 筆事件/天 · 5 位專職分析人員</a:t>
+              <a:t>客戶是車隊 —— 物流 · 客運 · 租賃;車上裝我們的鏡頭與車機</a:t>
+            </a:r>
+          </a:p>
+          <a:p>
+            <a:pPr algn="l">
+              <a:lnSpc>
+                <a:spcPct val="130000"/>
+              </a:lnSpc>
+            </a:pPr>
+            <a:r>
+              <a:rPr sz="1300" b="0">
+                <a:solidFill>
+                  <a:srgbClr val="6B7885"/>
+                </a:solidFill>
+                <a:latin typeface="Microsoft JhengHei"/>
+              </a:rPr>
+              <a:t>鏡頭偵測到一次危險駕駛 → 記一筆「事件」(影片 + 時間地點 + 系統分類)</a:t>
+            </a:r>
+          </a:p>
+          <a:p>
+            <a:pPr algn="l">
+              <a:lnSpc>
+                <a:spcPct val="130000"/>
+              </a:lnSpc>
+            </a:pPr>
+            <a:r>
+              <a:rPr sz="1300" b="0">
+                <a:solidFill>
+                  <a:srgbClr val="6B7885"/>
+                </a:solidFill>
+                <a:latin typeface="Microsoft JhengHei"/>
+              </a:rPr>
+              <a:t>客戶回頭說「這筆判錯了」= 一次「爭議」—— 只能由人重看影片才判得出來</a:t>
+            </a:r>
+          </a:p>
+          <a:p>
+            <a:pPr algn="l">
+              <a:lnSpc>
+                <a:spcPct val="130000"/>
+              </a:lnSpc>
+            </a:pPr>
+            <a:r>
+              <a:rPr sz="1300" b="0">
+                <a:solidFill>
+                  <a:srgbClr val="6B7885"/>
+                </a:solidFill>
+                <a:latin typeface="Microsoft JhengHei"/>
+              </a:rPr>
+              <a:t>單一大型車隊約 3,000 筆事件/天 · 全公司 5 位專職分析人員逐筆看</a:t>
             </a:r>
           </a:p>
         </p:txBody>
@@ -5456,8 +5537,8 @@
         </p:nvSpPr>
         <p:spPr>
           <a:xfrm>
-            <a:off x="960120" y="4718304"/>
-            <a:ext cx="7939735" cy="960120"/>
+            <a:off x="960120" y="5084064"/>
+            <a:ext cx="7939735" cy="841248"/>
           </a:xfrm>
           <a:prstGeom prst="rect">
             <a:avLst/>
@@ -5472,11 +5553,11 @@
           <a:p>
             <a:pPr algn="l">
               <a:lnSpc>
-                <a:spcPct val="135000"/>
+                <a:spcPct val="130000"/>
               </a:lnSpc>
             </a:pPr>
             <a:r>
-              <a:rPr sz="1500" b="0">
+              <a:rPr sz="1400" b="0">
                 <a:solidFill>
                   <a:srgbClr val="16212E"/>
                 </a:solidFill>
@@ -5488,11 +5569,11 @@
           <a:p>
             <a:pPr algn="l">
               <a:lnSpc>
-                <a:spcPct val="135000"/>
+                <a:spcPct val="130000"/>
               </a:lnSpc>
             </a:pPr>
             <a:r>
-              <a:rPr sz="1500" b="0">
+              <a:rPr sz="1400" b="0">
                 <a:solidFill>
                   <a:srgbClr val="16212E"/>
                 </a:solidFill>
@@ -5504,11 +5585,11 @@
           <a:p>
             <a:pPr algn="l">
               <a:lnSpc>
-                <a:spcPct val="135000"/>
+                <a:spcPct val="130000"/>
               </a:lnSpc>
             </a:pPr>
             <a:r>
-              <a:rPr sz="1500" b="0">
+              <a:rPr sz="1400" b="0">
                 <a:solidFill>
                   <a:srgbClr val="16212E"/>
                 </a:solidFill>

--- a/Artificial Intelligence for Enterprises/Assessment3/Huang_26254793_421104_Assessment 3.pptx
+++ b/Artificial Intelligence for Enterprises/Assessment3/Huang_26254793_421104_Assessment 3.pptx
@@ -4,21 +4,24 @@
   <p:sldMasterIdLst>
     <p:sldMasterId id="2147483648" r:id="rId1"/>
   </p:sldMasterIdLst>
+  <p:notesMasterIdLst>
+    <p:notesMasterId r:id="rId14"/>
+  </p:notesMasterIdLst>
   <p:sldIdLst>
-    <p:sldId id="256" r:id="rId7"/>
-    <p:sldId id="257" r:id="rId9"/>
-    <p:sldId id="258" r:id="rId10"/>
-    <p:sldId id="259" r:id="rId11"/>
-    <p:sldId id="260" r:id="rId12"/>
-    <p:sldId id="261" r:id="rId13"/>
-    <p:sldId id="262" r:id="rId14"/>
-    <p:sldId id="263" r:id="rId15"/>
-    <p:sldId id="264" r:id="rId16"/>
-    <p:sldId id="265" r:id="rId17"/>
-    <p:sldId id="266" r:id="rId18"/>
-    <p:sldId id="267" r:id="rId19"/>
+    <p:sldId id="256" r:id="rId2"/>
+    <p:sldId id="257" r:id="rId3"/>
+    <p:sldId id="258" r:id="rId4"/>
+    <p:sldId id="259" r:id="rId5"/>
+    <p:sldId id="260" r:id="rId6"/>
+    <p:sldId id="261" r:id="rId7"/>
+    <p:sldId id="262" r:id="rId8"/>
+    <p:sldId id="263" r:id="rId9"/>
+    <p:sldId id="264" r:id="rId10"/>
+    <p:sldId id="265" r:id="rId11"/>
+    <p:sldId id="266" r:id="rId12"/>
+    <p:sldId id="267" r:id="rId13"/>
   </p:sldIdLst>
-  <p:sldSz cx="12191695" cy="6858000" type="screen4x3"/>
+  <p:sldSz cx="12192000" cy="6858000"/>
   <p:notesSz cx="6858000" cy="9144000"/>
   <p:defaultTextStyle>
     <a:defPPr>
@@ -115,11 +118,27 @@
       </a:defRPr>
     </a:lvl9pPr>
   </p:defaultTextStyle>
+  <p:extLst>
+    <p:ext uri="{EFAFB233-063F-42B5-8137-9DF3F51BA10A}">
+      <p15:sldGuideLst xmlns:p15="http://schemas.microsoft.com/office/powerpoint/2012/main">
+        <p15:guide id="1" orient="horz" pos="2160">
+          <p15:clr>
+            <a:srgbClr val="A4A3A4"/>
+          </p15:clr>
+        </p15:guide>
+        <p15:guide id="2" pos="2880">
+          <p15:clr>
+            <a:srgbClr val="A4A3A4"/>
+          </p15:clr>
+        </p15:guide>
+      </p15:sldGuideLst>
+    </p:ext>
+  </p:extLst>
 </p:presentation>
 </file>
 
 <file path=ppt/notesMasters/notesMaster1.xml><?xml version="1.0" encoding="utf-8"?>
-<p:notesMaster xmlns:a="http://schemas.openxmlformats.org/drawingml/2006/main" xmlns:p="http://schemas.openxmlformats.org/presentationml/2006/main" xmlns:r="http://schemas.openxmlformats.org/officeDocument/2006/relationships">
+<p:notesMaster xmlns:a="http://schemas.openxmlformats.org/drawingml/2006/main" xmlns:r="http://schemas.openxmlformats.org/officeDocument/2006/relationships" xmlns:p="http://schemas.openxmlformats.org/presentationml/2006/main">
   <p:cSld>
     <p:bg>
       <p:bgRef idx="1001">
@@ -140,241 +159,16 @@
           <a:chExt cx="0" cy="0"/>
         </a:xfrm>
       </p:grpSpPr>
-      <p:sp>
-        <p:nvSpPr>
-          <p:cNvPr id="2" name="Header Placeholder 1"/>
-          <p:cNvSpPr>
-            <a:spLocks noGrp="1"/>
-          </p:cNvSpPr>
-          <p:nvPr>
-            <p:ph type="hdr" sz="quarter"/>
-          </p:nvPr>
-        </p:nvSpPr>
-        <p:spPr>
-          <a:xfrm>
-            <a:off x="0" y="0"/>
-            <a:ext cx="2971800" cy="457200"/>
-          </a:xfrm>
-          <a:prstGeom prst="rect">
-            <a:avLst/>
-          </a:prstGeom>
-        </p:spPr>
-        <p:txBody>
-          <a:bodyPr vert="horz" lIns="91440" tIns="45720" rIns="91440" bIns="45720" rtlCol="0"/>
-          <a:lstStyle>
-            <a:lvl1pPr algn="l">
-              <a:defRPr sz="1200"/>
-            </a:lvl1pPr>
-          </a:lstStyle>
-          <a:p>
-            <a:endParaRPr lang="en-US"/>
-          </a:p>
-        </p:txBody>
-      </p:sp>
-      <p:sp>
-        <p:nvSpPr>
-          <p:cNvPr id="3" name="Date Placeholder 2"/>
-          <p:cNvSpPr>
-            <a:spLocks noGrp="1"/>
-          </p:cNvSpPr>
-          <p:nvPr>
-            <p:ph type="dt" idx="1"/>
-          </p:nvPr>
-        </p:nvSpPr>
-        <p:spPr>
-          <a:xfrm>
-            <a:off x="3884613" y="0"/>
-            <a:ext cx="2971800" cy="457200"/>
-          </a:xfrm>
-          <a:prstGeom prst="rect">
-            <a:avLst/>
-          </a:prstGeom>
-        </p:spPr>
-        <p:txBody>
-          <a:bodyPr vert="horz" lIns="91440" tIns="45720" rIns="91440" bIns="45720" rtlCol="0"/>
-          <a:lstStyle>
-            <a:lvl1pPr algn="r">
-              <a:defRPr sz="1200"/>
-            </a:lvl1pPr>
-          </a:lstStyle>
-          <a:p>
-            <a:fld id="{0F89C1C7-3DCD-1040-A9CF-14679D8B5DDD}" type="datetimeFigureOut">
-              <a:rPr lang="en-US" smtClean="0"/>
-              <a:t>10/17/16</a:t>
-            </a:fld>
-            <a:endParaRPr lang="en-US"/>
-          </a:p>
-        </p:txBody>
-      </p:sp>
-      <p:sp>
-        <p:nvSpPr>
-          <p:cNvPr id="4" name="Slide Image Placeholder 3"/>
-          <p:cNvSpPr>
-            <a:spLocks noGrp="1" noRot="1" noChangeAspect="1"/>
-          </p:cNvSpPr>
-          <p:nvPr>
-            <p:ph type="sldImg" idx="2"/>
-          </p:nvPr>
-        </p:nvSpPr>
-        <p:spPr>
-          <a:xfrm>
-            <a:off x="1143000" y="685800"/>
-            <a:ext cx="4572000" cy="3429000"/>
-          </a:xfrm>
-          <a:prstGeom prst="rect">
-            <a:avLst/>
-          </a:prstGeom>
-          <a:noFill/>
-          <a:ln w="12700">
-            <a:solidFill>
-              <a:prstClr val="black"/>
-            </a:solidFill>
-          </a:ln>
-        </p:spPr>
-        <p:txBody>
-          <a:bodyPr vert="horz" lIns="91440" tIns="45720" rIns="91440" bIns="45720" rtlCol="0" anchor="ctr"/>
-          <a:lstStyle/>
-          <a:p>
-            <a:endParaRPr lang="en-US"/>
-          </a:p>
-        </p:txBody>
-      </p:sp>
-      <p:sp>
-        <p:nvSpPr>
-          <p:cNvPr id="5" name="Notes Placeholder 4"/>
-          <p:cNvSpPr>
-            <a:spLocks noGrp="1"/>
-          </p:cNvSpPr>
-          <p:nvPr>
-            <p:ph type="body" sz="quarter" idx="3"/>
-          </p:nvPr>
-        </p:nvSpPr>
-        <p:spPr>
-          <a:xfrm>
-            <a:off x="685800" y="4343400"/>
-            <a:ext cx="5486400" cy="4114800"/>
-          </a:xfrm>
-          <a:prstGeom prst="rect">
-            <a:avLst/>
-          </a:prstGeom>
-        </p:spPr>
-        <p:txBody>
-          <a:bodyPr vert="horz" lIns="91440" tIns="45720" rIns="91440" bIns="45720" rtlCol="0"/>
-          <a:lstStyle/>
-          <a:p>
-            <a:pPr lvl="0"/>
-            <a:r>
-              <a:rPr lang="en-US" smtClean="0"/>
-              <a:t>Click to edit Master text styles</a:t>
-            </a:r>
-          </a:p>
-          <a:p>
-            <a:pPr lvl="1"/>
-            <a:r>
-              <a:rPr lang="en-US" smtClean="0"/>
-              <a:t>Second level</a:t>
-            </a:r>
-          </a:p>
-          <a:p>
-            <a:pPr lvl="2"/>
-            <a:r>
-              <a:rPr lang="en-US" smtClean="0"/>
-              <a:t>Third level</a:t>
-            </a:r>
-          </a:p>
-          <a:p>
-            <a:pPr lvl="3"/>
-            <a:r>
-              <a:rPr lang="en-US" smtClean="0"/>
-              <a:t>Fourth level</a:t>
-            </a:r>
-          </a:p>
-          <a:p>
-            <a:pPr lvl="4"/>
-            <a:r>
-              <a:rPr lang="en-US" smtClean="0"/>
-              <a:t>Fifth level</a:t>
-            </a:r>
-            <a:endParaRPr lang="en-US"/>
-          </a:p>
-        </p:txBody>
-      </p:sp>
-      <p:sp>
-        <p:nvSpPr>
-          <p:cNvPr id="6" name="Footer Placeholder 5"/>
-          <p:cNvSpPr>
-            <a:spLocks noGrp="1"/>
-          </p:cNvSpPr>
-          <p:nvPr>
-            <p:ph type="ftr" sz="quarter" idx="4"/>
-          </p:nvPr>
-        </p:nvSpPr>
-        <p:spPr>
-          <a:xfrm>
-            <a:off x="0" y="8685213"/>
-            <a:ext cx="2971800" cy="457200"/>
-          </a:xfrm>
-          <a:prstGeom prst="rect">
-            <a:avLst/>
-          </a:prstGeom>
-        </p:spPr>
-        <p:txBody>
-          <a:bodyPr vert="horz" lIns="91440" tIns="45720" rIns="91440" bIns="45720" rtlCol="0" anchor="b"/>
-          <a:lstStyle>
-            <a:lvl1pPr algn="l">
-              <a:defRPr sz="1200"/>
-            </a:lvl1pPr>
-          </a:lstStyle>
-          <a:p>
-            <a:endParaRPr lang="en-US"/>
-          </a:p>
-        </p:txBody>
-      </p:sp>
-      <p:sp>
-        <p:nvSpPr>
-          <p:cNvPr id="7" name="Slide Number Placeholder 6"/>
-          <p:cNvSpPr>
-            <a:spLocks noGrp="1"/>
-          </p:cNvSpPr>
-          <p:nvPr>
-            <p:ph type="sldNum" sz="quarter" idx="5"/>
-          </p:nvPr>
-        </p:nvSpPr>
-        <p:spPr>
-          <a:xfrm>
-            <a:off x="3884613" y="8685213"/>
-            <a:ext cx="2971800" cy="457200"/>
-          </a:xfrm>
-          <a:prstGeom prst="rect">
-            <a:avLst/>
-          </a:prstGeom>
-        </p:spPr>
-        <p:txBody>
-          <a:bodyPr vert="horz" lIns="91440" tIns="45720" rIns="91440" bIns="45720" rtlCol="0" anchor="b"/>
-          <a:lstStyle>
-            <a:lvl1pPr algn="r">
-              <a:defRPr sz="1200"/>
-            </a:lvl1pPr>
-          </a:lstStyle>
-          <a:p>
-            <a:fld id="{BB5E49A5-4136-284D-997B-48E1D791AD67}" type="slidenum">
-              <a:rPr lang="en-US" smtClean="0"/>
-              <a:t>‹#›</a:t>
-            </a:fld>
-            <a:endParaRPr lang="en-US"/>
-          </a:p>
-        </p:txBody>
-      </p:sp>
     </p:spTree>
     <p:extLst>
       <p:ext uri="{BB962C8B-B14F-4D97-AF65-F5344CB8AC3E}">
-        <p14:creationId xmlns:p14="http://schemas.microsoft.com/office/powerpoint/2010/main" val="2623252185"/>
+        <p14:creationId xmlns:p14="http://schemas.microsoft.com/office/powerpoint/2010/main" val="1031988209"/>
       </p:ext>
     </p:extLst>
   </p:cSld>
   <p:clrMap bg1="lt1" tx1="dk1" bg2="lt2" tx2="dk2" accent1="accent1" accent2="accent2" accent3="accent3" accent4="accent4" accent5="accent5" accent6="accent6" hlink="hlink" folHlink="folHlink"/>
   <p:notesStyle>
-    <a:lvl1pPr marL="0" algn="l" defTabSz="457200" rtl="0" eaLnBrk="1" latinLnBrk="0" hangingPunct="1">
+    <a:lvl1pPr marL="0" algn="l" defTabSz="914400" rtl="0" eaLnBrk="1" latinLnBrk="0" hangingPunct="1">
       <a:defRPr sz="1200" kern="1200">
         <a:solidFill>
           <a:schemeClr val="tx1"/>
@@ -384,7 +178,7 @@
         <a:cs typeface="+mn-cs"/>
       </a:defRPr>
     </a:lvl1pPr>
-    <a:lvl2pPr marL="457200" algn="l" defTabSz="457200" rtl="0" eaLnBrk="1" latinLnBrk="0" hangingPunct="1">
+    <a:lvl2pPr marL="457200" algn="l" defTabSz="914400" rtl="0" eaLnBrk="1" latinLnBrk="0" hangingPunct="1">
       <a:defRPr sz="1200" kern="1200">
         <a:solidFill>
           <a:schemeClr val="tx1"/>
@@ -394,7 +188,7 @@
         <a:cs typeface="+mn-cs"/>
       </a:defRPr>
     </a:lvl2pPr>
-    <a:lvl3pPr marL="914400" algn="l" defTabSz="457200" rtl="0" eaLnBrk="1" latinLnBrk="0" hangingPunct="1">
+    <a:lvl3pPr marL="914400" algn="l" defTabSz="914400" rtl="0" eaLnBrk="1" latinLnBrk="0" hangingPunct="1">
       <a:defRPr sz="1200" kern="1200">
         <a:solidFill>
           <a:schemeClr val="tx1"/>
@@ -404,7 +198,7 @@
         <a:cs typeface="+mn-cs"/>
       </a:defRPr>
     </a:lvl3pPr>
-    <a:lvl4pPr marL="1371600" algn="l" defTabSz="457200" rtl="0" eaLnBrk="1" latinLnBrk="0" hangingPunct="1">
+    <a:lvl4pPr marL="1371600" algn="l" defTabSz="914400" rtl="0" eaLnBrk="1" latinLnBrk="0" hangingPunct="1">
       <a:defRPr sz="1200" kern="1200">
         <a:solidFill>
           <a:schemeClr val="tx1"/>
@@ -414,7 +208,7 @@
         <a:cs typeface="+mn-cs"/>
       </a:defRPr>
     </a:lvl4pPr>
-    <a:lvl5pPr marL="1828800" algn="l" defTabSz="457200" rtl="0" eaLnBrk="1" latinLnBrk="0" hangingPunct="1">
+    <a:lvl5pPr marL="1828800" algn="l" defTabSz="914400" rtl="0" eaLnBrk="1" latinLnBrk="0" hangingPunct="1">
       <a:defRPr sz="1200" kern="1200">
         <a:solidFill>
           <a:schemeClr val="tx1"/>
@@ -424,7 +218,7 @@
         <a:cs typeface="+mn-cs"/>
       </a:defRPr>
     </a:lvl5pPr>
-    <a:lvl6pPr marL="2286000" algn="l" defTabSz="457200" rtl="0" eaLnBrk="1" latinLnBrk="0" hangingPunct="1">
+    <a:lvl6pPr marL="2286000" algn="l" defTabSz="914400" rtl="0" eaLnBrk="1" latinLnBrk="0" hangingPunct="1">
       <a:defRPr sz="1200" kern="1200">
         <a:solidFill>
           <a:schemeClr val="tx1"/>
@@ -434,7 +228,7 @@
         <a:cs typeface="+mn-cs"/>
       </a:defRPr>
     </a:lvl6pPr>
-    <a:lvl7pPr marL="2743200" algn="l" defTabSz="457200" rtl="0" eaLnBrk="1" latinLnBrk="0" hangingPunct="1">
+    <a:lvl7pPr marL="2743200" algn="l" defTabSz="914400" rtl="0" eaLnBrk="1" latinLnBrk="0" hangingPunct="1">
       <a:defRPr sz="1200" kern="1200">
         <a:solidFill>
           <a:schemeClr val="tx1"/>
@@ -444,7 +238,7 @@
         <a:cs typeface="+mn-cs"/>
       </a:defRPr>
     </a:lvl7pPr>
-    <a:lvl8pPr marL="3200400" algn="l" defTabSz="457200" rtl="0" eaLnBrk="1" latinLnBrk="0" hangingPunct="1">
+    <a:lvl8pPr marL="3200400" algn="l" defTabSz="914400" rtl="0" eaLnBrk="1" latinLnBrk="0" hangingPunct="1">
       <a:defRPr sz="1200" kern="1200">
         <a:solidFill>
           <a:schemeClr val="tx1"/>
@@ -454,7 +248,7 @@
         <a:cs typeface="+mn-cs"/>
       </a:defRPr>
     </a:lvl8pPr>
-    <a:lvl9pPr marL="3657600" algn="l" defTabSz="457200" rtl="0" eaLnBrk="1" latinLnBrk="0" hangingPunct="1">
+    <a:lvl9pPr marL="3657600" algn="l" defTabSz="914400" rtl="0" eaLnBrk="1" latinLnBrk="0" hangingPunct="1">
       <a:defRPr sz="1200" kern="1200">
         <a:solidFill>
           <a:schemeClr val="tx1"/>
@@ -469,7 +263,7 @@
 </file>
 
 <file path=ppt/notesSlides/notesSlide1.xml><?xml version="1.0" encoding="utf-8"?>
-<p:notes xmlns:a="http://schemas.openxmlformats.org/drawingml/2006/main" xmlns:p="http://schemas.openxmlformats.org/presentationml/2006/main" xmlns:r="http://schemas.openxmlformats.org/officeDocument/2006/relationships">
+<p:notes xmlns:a="http://schemas.openxmlformats.org/drawingml/2006/main" xmlns:r="http://schemas.openxmlformats.org/officeDocument/2006/relationships" xmlns:p="http://schemas.openxmlformats.org/presentationml/2006/main">
   <p:cSld>
     <p:spTree>
       <p:nvGrpSpPr>
@@ -489,7 +283,7 @@
         <p:nvSpPr>
           <p:cNvPr id="2" name="Slide Image Placeholder 1"/>
           <p:cNvSpPr>
-            <a:spLocks noGrp="1"/>
+            <a:spLocks noGrp="1" noRot="1" noChangeAspect="1"/>
           </p:cNvSpPr>
           <p:nvPr>
             <p:ph type="sldImg" idx="2"/>
@@ -504,7 +298,7 @@
             <a:spLocks noGrp="1"/>
           </p:cNvSpPr>
           <p:nvPr>
-            <p:ph type="body" idx="3" sz="quarter"/>
+            <p:ph type="body" sz="quarter" idx="3"/>
           </p:nvPr>
         </p:nvSpPr>
         <p:spPr/>
@@ -516,13 +310,17 @@
               <a:t>【第 1 頁 · 鉤子 · 開場靜畫】　目標 35 秒 · 累計 0:35</a:t>
             </a:r>
           </a:p>
-          <a:p/>
+          <a:p>
+            <a:endParaRPr/>
+          </a:p>
           <a:p>
             <a:r>
               <a:t>★ 今天,五個人要看完三千支影片;而客戶要的答案,兩天內。</a:t>
             </a:r>
           </a:p>
-          <a:p/>
+          <a:p>
+            <a:endParaRPr/>
+          </a:p>
           <a:p>
             <a:r>
               <a:t>· 先講生意:客戶是車隊 —— 物流 · 客運 · 租賃,車上裝我們的鏡頭與車機</a:t>
@@ -538,13 +336,17 @@
               <a:t>· 一次「爭議」= 客戶回頭說「這筆判錯了」—— 只能由人重看影片才判得出來</a:t>
             </a:r>
           </a:p>
-          <a:p/>
+          <a:p>
+            <a:endParaRPr/>
+          </a:p>
           <a:p>
             <a:r>
               <a:t># 單一大型車隊約 3,000 筆事件/天 · 全公司 5 位專職分析人員</a:t>
             </a:r>
           </a:p>
-          <a:p/>
+          <a:p>
+            <a:endParaRPr/>
+          </a:p>
           <a:p>
             <a:r>
               <a:t>⚠️ ★ 那句話留到**最後**講 —— 先把『事件』與『爭議』鋪好,後面九頁全建立在這兩個詞上</a:t>
@@ -555,13 +357,17 @@
               <a:t>⚠️ 講完停 1 秒再換頁。這是全片唯一的鉤子,不要急著翻</a:t>
             </a:r>
           </a:p>
-          <a:p/>
+          <a:p>
+            <a:endParaRPr/>
+          </a:p>
           <a:p>
             <a:r>
               <a:t>→ 換下一頁</a:t>
             </a:r>
           </a:p>
-          <a:p/>
+          <a:p>
+            <a:endParaRPr/>
+          </a:p>
           <a:p>
             <a:r>
               <a:t>── 逐字備援 · 156 字(忘詞才看,不是拿來唸的)──</a:t>
@@ -581,7 +387,7 @@
             <a:spLocks noGrp="1"/>
           </p:cNvSpPr>
           <p:nvPr>
-            <p:ph type="sldNum" idx="5" sz="quarter"/>
+            <p:ph type="sldNum" sz="quarter" idx="5"/>
           </p:nvPr>
         </p:nvSpPr>
         <p:spPr/>
@@ -595,7 +401,7 @@
 </file>
 
 <file path=ppt/notesSlides/notesSlide10.xml><?xml version="1.0" encoding="utf-8"?>
-<p:notes xmlns:a="http://schemas.openxmlformats.org/drawingml/2006/main" xmlns:p="http://schemas.openxmlformats.org/presentationml/2006/main" xmlns:r="http://schemas.openxmlformats.org/officeDocument/2006/relationships">
+<p:notes xmlns:a="http://schemas.openxmlformats.org/drawingml/2006/main" xmlns:r="http://schemas.openxmlformats.org/officeDocument/2006/relationships" xmlns:p="http://schemas.openxmlformats.org/presentationml/2006/main">
   <p:cSld>
     <p:spTree>
       <p:nvGrpSpPr>
@@ -615,7 +421,7 @@
         <p:nvSpPr>
           <p:cNvPr id="2" name="Slide Image Placeholder 1"/>
           <p:cNvSpPr>
-            <a:spLocks noGrp="1"/>
+            <a:spLocks noGrp="1" noRot="1" noChangeAspect="1"/>
           </p:cNvSpPr>
           <p:nvPr>
             <p:ph type="sldImg" idx="2"/>
@@ -630,7 +436,7 @@
             <a:spLocks noGrp="1"/>
           </p:cNvSpPr>
           <p:nvPr>
-            <p:ph type="body" idx="3" sz="quarter"/>
+            <p:ph type="body" sz="quarter" idx="3"/>
           </p:nvPr>
         </p:nvSpPr>
         <p:spPr/>
@@ -642,13 +448,17 @@
               <a:t>【第 10 頁 · P9 · 六個月 · 六個工作包 · 三道決策門】　目標 47 秒 · 累計 8:41</a:t>
             </a:r>
           </a:p>
-          <a:p/>
+          <a:p>
+            <a:endParaRPr/>
+          </a:p>
           <a:p>
             <a:r>
               <a:t>★ 六個工作包只有一包是 AI,順序本身就是風險控制。</a:t>
             </a:r>
           </a:p>
-          <a:p/>
+          <a:p>
+            <a:endParaRPr/>
+          </a:p>
           <a:p>
             <a:r>
               <a:t>· 評估集 → 標註 → 特徵 → 地端 VLM</a:t>
@@ -664,25 +474,33 @@
               <a:t>· G2 四臂同場比,第四臂是影子模式</a:t>
             </a:r>
           </a:p>
-          <a:p/>
+          <a:p>
+            <a:endParaRPr/>
+          </a:p>
           <a:p>
             <a:r>
               <a:t># G1 第 6 週 · G2 第 12 週 · G3 第 24 週</a:t>
             </a:r>
           </a:p>
-          <a:p/>
+          <a:p>
+            <a:endParaRPr/>
+          </a:p>
           <a:p>
             <a:r>
               <a:t>⚠️ 前三臂全部含人,而要部署的是無人系統 —— 這就是為什麼要有第四臂</a:t>
             </a:r>
           </a:p>
-          <a:p/>
+          <a:p>
+            <a:endParaRPr/>
+          </a:p>
           <a:p>
             <a:r>
               <a:t>→ 換下一頁</a:t>
             </a:r>
           </a:p>
-          <a:p/>
+          <a:p>
+            <a:endParaRPr/>
+          </a:p>
           <a:p>
             <a:r>
               <a:t>── 逐字備援 · 208 字(忘詞才看,不是拿來唸的)──</a:t>
@@ -693,7 +511,9 @@
               <a:t>六個月,六個工作包,三道門。順序不能換:評估集、標註、特徵,最後才是地端模型。第六週是因果判定門:交出時間拆解、兩天逾時率跟到件分布。證據搜尋跟誤報量佔主要延遲,才續行;不是,就轉排班。第十二週同一組凍結集比四臂:現行模型、規則式基線、人機協作,加一臂影子模式——機器自己結案、不對外送,跟人的判定比對。自動結案的漏放率,只有這一臂算得出來。這道門不能取消實驗,只能調整規模;要不要真的對外自動結案,不在這六個月決定。規則式今天就能做,為什麼排第五週?沒有前六週的基準線,證不出有效。</a:t>
             </a:r>
           </a:p>
-          <a:p/>
+          <a:p>
+            <a:endParaRPr/>
+          </a:p>
           <a:p>
             <a:r>
               <a:t>── 備查(不唸,答辯用)──</a:t>
@@ -733,7 +553,7 @@
             <a:spLocks noGrp="1"/>
           </p:cNvSpPr>
           <p:nvPr>
-            <p:ph type="sldNum" idx="5" sz="quarter"/>
+            <p:ph type="sldNum" sz="quarter" idx="5"/>
           </p:nvPr>
         </p:nvSpPr>
         <p:spPr/>
@@ -747,7 +567,7 @@
 </file>
 
 <file path=ppt/notesSlides/notesSlide11.xml><?xml version="1.0" encoding="utf-8"?>
-<p:notes xmlns:a="http://schemas.openxmlformats.org/drawingml/2006/main" xmlns:p="http://schemas.openxmlformats.org/presentationml/2006/main" xmlns:r="http://schemas.openxmlformats.org/officeDocument/2006/relationships">
+<p:notes xmlns:a="http://schemas.openxmlformats.org/drawingml/2006/main" xmlns:r="http://schemas.openxmlformats.org/officeDocument/2006/relationships" xmlns:p="http://schemas.openxmlformats.org/presentationml/2006/main">
   <p:cSld>
     <p:spTree>
       <p:nvGrpSpPr>
@@ -767,7 +587,7 @@
         <p:nvSpPr>
           <p:cNvPr id="2" name="Slide Image Placeholder 1"/>
           <p:cNvSpPr>
-            <a:spLocks noGrp="1"/>
+            <a:spLocks noGrp="1" noRot="1" noChangeAspect="1"/>
           </p:cNvSpPr>
           <p:nvPr>
             <p:ph type="sldImg" idx="2"/>
@@ -782,7 +602,7 @@
             <a:spLocks noGrp="1"/>
           </p:cNvSpPr>
           <p:nvPr>
-            <p:ph type="body" idx="3" sz="quarter"/>
+            <p:ph type="body" sz="quarter" idx="3"/>
           </p:nvPr>
         </p:nvSpPr>
         <p:spPr/>
@@ -794,13 +614,17 @@
               <a:t>【第 11 頁 · P10 · 資源、當責與請求】　目標 64 秒 · 累計 9:45</a:t>
             </a:r>
           </a:p>
-          <a:p/>
+          <a:p>
+            <a:endParaRPr/>
+          </a:p>
           <a:p>
             <a:r>
               <a:t>★ 我請求核准第一段:四點八五人月、量級四十二到四十七萬,並指定一位贊助人。</a:t>
             </a:r>
           </a:p>
-          <a:p/>
+          <a:p>
+            <a:endParaRPr/>
+          </a:p>
           <a:p>
             <a:r>
               <a:t>· 成本主體是人,不是設備</a:t>
@@ -816,7 +640,9 @@
               <a:t>· 我要的不只是一筆錢,是一個贊助人跟三道門</a:t>
             </a:r>
           </a:p>
-          <a:p/>
+          <a:p>
+            <a:endParaRPr/>
+          </a:p>
           <a:p>
             <a:r>
               <a:t># 4.85 人月 · NT$42–47 萬(規劃,非核定預算)</a:t>
@@ -827,7 +653,9 @@
               <a:t># 毛 6.0–12.1 FTE → 稽核稅 0.39–3.14 FTE → 淨 2.9–11.7 FTE</a:t>
             </a:r>
           </a:p>
-          <a:p/>
+          <a:p>
+            <a:endParaRPr/>
+          </a:p>
           <a:p>
             <a:r>
               <a:t>⚠️ 🚫 520–1,521 萬是移交後的「可避免增聘」,不是本案承諾的節省額</a:t>
@@ -843,13 +671,17 @@
               <a:t>⚠️ 在稽核稅、申訴重判與漂移調查三項齊備前,不宣稱任何節省額</a:t>
             </a:r>
           </a:p>
-          <a:p/>
+          <a:p>
+            <a:endParaRPr/>
+          </a:p>
           <a:p>
             <a:r>
               <a:t>→ 換下一頁</a:t>
             </a:r>
           </a:p>
-          <a:p/>
+          <a:p>
+            <a:endParaRPr/>
+          </a:p>
           <a:p>
             <a:r>
               <a:t>── 逐字備援 · 280 字(忘詞才看,不是拿來唸的)──</a:t>
@@ -860,7 +692,9 @@
               <a:t>三個輸入都印在上面,它是量級,不是報價。設備一台十六到二十萬,一次性,不到一個人一年成本的五分之一;這個專案的成本主體是人,不是設備。它也不是為單一用途買的:第二個應用是內部規格文件的技術問答,不在本次請求範圍內,但硬體的攤提對象不只一個。那筆擴編暴露不是承諾的節省;要第十二週實測證明能避免或延後至少一點四到一點七個 loaded FTE-year,業務也確認會轉成少招人或少徵調研發,才放行後續預算。我要的不只預算,是贊助人跟三道門。我請求核准六個月額度輪廓、分段釋出;第一段四點八五人月、量級新台幣四十二到四十七萬,第六週由贊助人決定續不續行。第二十四週我會回到這裡,交出三方比較結果:地端 VLM 有增量,或者沒有。</a:t>
             </a:r>
           </a:p>
-          <a:p/>
+          <a:p>
+            <a:endParaRPr/>
+          </a:p>
           <a:p>
             <a:r>
               <a:t>── 備查(不唸,答辯用)──</a:t>
@@ -900,7 +734,7 @@
             <a:spLocks noGrp="1"/>
           </p:cNvSpPr>
           <p:nvPr>
-            <p:ph type="sldNum" idx="5" sz="quarter"/>
+            <p:ph type="sldNum" sz="quarter" idx="5"/>
           </p:nvPr>
         </p:nvSpPr>
         <p:spPr/>
@@ -914,7 +748,7 @@
 </file>
 
 <file path=ppt/notesSlides/notesSlide12.xml><?xml version="1.0" encoding="utf-8"?>
-<p:notes xmlns:a="http://schemas.openxmlformats.org/drawingml/2006/main" xmlns:p="http://schemas.openxmlformats.org/presentationml/2006/main" xmlns:r="http://schemas.openxmlformats.org/officeDocument/2006/relationships">
+<p:notes xmlns:a="http://schemas.openxmlformats.org/drawingml/2006/main" xmlns:r="http://schemas.openxmlformats.org/officeDocument/2006/relationships" xmlns:p="http://schemas.openxmlformats.org/presentationml/2006/main">
   <p:cSld>
     <p:spTree>
       <p:nvGrpSpPr>
@@ -934,7 +768,7 @@
         <p:nvSpPr>
           <p:cNvPr id="2" name="Slide Image Placeholder 1"/>
           <p:cNvSpPr>
-            <a:spLocks noGrp="1"/>
+            <a:spLocks noGrp="1" noRot="1" noChangeAspect="1"/>
           </p:cNvSpPr>
           <p:nvPr>
             <p:ph type="sldImg" idx="2"/>
@@ -949,7 +783,7 @@
             <a:spLocks noGrp="1"/>
           </p:cNvSpPr>
           <p:nvPr>
-            <p:ph type="body" idx="3" sz="quarter"/>
+            <p:ph type="body" sz="quarter" idx="3"/>
           </p:nvPr>
         </p:nvSpPr>
         <p:spPr/>
@@ -961,25 +795,33 @@
               <a:t>【第 12 頁 · 參考文獻(第 11 頁 — 不佔十頁額度)】　目標 5 秒 · 累計 9:50</a:t>
             </a:r>
           </a:p>
-          <a:p/>
+          <a:p>
+            <a:endParaRPr/>
+          </a:p>
           <a:p>
             <a:r>
               <a:t>★ 以上引用依 APA 第七版列出。</a:t>
             </a:r>
           </a:p>
-          <a:p/>
+          <a:p>
+            <a:endParaRPr/>
+          </a:p>
           <a:p>
             <a:r>
               <a:t>⚠️ 這一頁不佔十頁額度,5 秒帶過</a:t>
             </a:r>
           </a:p>
-          <a:p/>
+          <a:p>
+            <a:endParaRPr/>
+          </a:p>
           <a:p>
             <a:r>
               <a:t>→ 換下一頁</a:t>
             </a:r>
           </a:p>
-          <a:p/>
+          <a:p>
+            <a:endParaRPr/>
+          </a:p>
           <a:p>
             <a:r>
               <a:t>── 逐字備援 · 21 字(忘詞才看,不是拿來唸的)──</a:t>
@@ -999,7 +841,7 @@
             <a:spLocks noGrp="1"/>
           </p:cNvSpPr>
           <p:nvPr>
-            <p:ph type="sldNum" idx="5" sz="quarter"/>
+            <p:ph type="sldNum" sz="quarter" idx="5"/>
           </p:nvPr>
         </p:nvSpPr>
         <p:spPr/>
@@ -1013,7 +855,7 @@
 </file>
 
 <file path=ppt/notesSlides/notesSlide2.xml><?xml version="1.0" encoding="utf-8"?>
-<p:notes xmlns:a="http://schemas.openxmlformats.org/drawingml/2006/main" xmlns:p="http://schemas.openxmlformats.org/presentationml/2006/main" xmlns:r="http://schemas.openxmlformats.org/officeDocument/2006/relationships">
+<p:notes xmlns:a="http://schemas.openxmlformats.org/drawingml/2006/main" xmlns:r="http://schemas.openxmlformats.org/officeDocument/2006/relationships" xmlns:p="http://schemas.openxmlformats.org/presentationml/2006/main">
   <p:cSld>
     <p:spTree>
       <p:nvGrpSpPr>
@@ -1033,7 +875,7 @@
         <p:nvSpPr>
           <p:cNvPr id="2" name="Slide Image Placeholder 1"/>
           <p:cNvSpPr>
-            <a:spLocks noGrp="1"/>
+            <a:spLocks noGrp="1" noRot="1" noChangeAspect="1"/>
           </p:cNvSpPr>
           <p:nvPr>
             <p:ph type="sldImg" idx="2"/>
@@ -1048,7 +890,7 @@
             <a:spLocks noGrp="1"/>
           </p:cNvSpPr>
           <p:nvPr>
-            <p:ph type="body" idx="3" sz="quarter"/>
+            <p:ph type="body" sz="quarter" idx="3"/>
           </p:nvPr>
         </p:nvSpPr>
         <p:spPr/>
@@ -1060,13 +902,17 @@
               <a:t>【第 2 頁 · P1 · 用例:兩階段推論,與它下游那道人工防線】　目標 65 秒 · 累計 1:40</a:t>
             </a:r>
           </a:p>
-          <a:p/>
+          <a:p>
+            <a:endParaRPr/>
+          </a:p>
           <a:p>
             <a:r>
               <a:t>★ 這道人工防線有兩種單價,差十六倍 —— 差別不在人,在證據在不在畫面裡。</a:t>
             </a:r>
           </a:p>
-          <a:p/>
+          <a:p>
+            <a:endParaRPr/>
+          </a:p>
           <a:p>
             <a:r>
               <a:t>· 地端 AI 公司內部評估過,我是其中一員(所以這不是新點子,是立案)</a:t>
@@ -1082,13 +928,17 @@
               <a:t>· 看畫面就能判 vs 要離開畫面找證據</a:t>
             </a:r>
           </a:p>
-          <a:p/>
+          <a:p>
+            <a:endParaRPr/>
+          </a:p>
           <a:p>
             <a:r>
               <a:t># 一筆 20 秒 / 一筆 5.25 分 / 差約 16 倍</a:t>
             </a:r>
           </a:p>
-          <a:p/>
+          <a:p>
+            <a:endParaRPr/>
+          </a:p>
           <a:p>
             <a:r>
               <a:t>⚠️ 20 秒要說「營運端的實務估計,尚未以計時量測驗證」</a:t>
@@ -1099,13 +949,17 @@
               <a:t>⚠️ 🚫 不可說「我們沒有量過」</a:t>
             </a:r>
           </a:p>
-          <a:p/>
+          <a:p>
+            <a:endParaRPr/>
+          </a:p>
           <a:p>
             <a:r>
               <a:t>→ 換下一頁</a:t>
             </a:r>
           </a:p>
-          <a:p/>
+          <a:p>
+            <a:endParaRPr/>
+          </a:p>
           <a:p>
             <a:r>
               <a:t>── 逐字備援 · 288 字(忘詞才看,不是拿來唸的)──</a:t>
@@ -1116,7 +970,9 @@
               <a:t>地端 AI 的技術可行性,公司內部評估過,我是其中一員。今天我不是提一個新點子,是把它從技術研討,變成一個有業務數字、有驗證機制、有停止條件的正式立案。要建的能力:讓機器讀懂一次事件的完整脈絡——影片、客戶問題、規則——產出可交付的證據與描述。兩階段架構各位熟悉,自動化到第二階段就停了:剩下每一筆,都要由人看過。這道防線有兩種單價。看畫面就能判的,一筆二十秒。要離開畫面去找證據的——那面牌是什麼、速限多少——一筆五分多鐘。差約十六倍,差別不在人,在證據在不在畫面裡。我請委員會核准一個六個月、三道決策門的專案:在客戶要的兩天內交出分析,第一次量得到自己漏掉什麼。要建它,得先有凍結的評估集、一致的標註、餵進模型的脈絡,那是前三個工作包。本案不重新開啟架構選擇。</a:t>
             </a:r>
           </a:p>
-          <a:p/>
+          <a:p>
+            <a:endParaRPr/>
+          </a:p>
           <a:p>
             <a:r>
               <a:t>── 備查(不唸,答辯用)──</a:t>
@@ -1161,7 +1017,7 @@
             <a:spLocks noGrp="1"/>
           </p:cNvSpPr>
           <p:nvPr>
-            <p:ph type="sldNum" idx="5" sz="quarter"/>
+            <p:ph type="sldNum" sz="quarter" idx="5"/>
           </p:nvPr>
         </p:nvSpPr>
         <p:spPr/>
@@ -1175,7 +1031,7 @@
 </file>
 
 <file path=ppt/notesSlides/notesSlide3.xml><?xml version="1.0" encoding="utf-8"?>
-<p:notes xmlns:a="http://schemas.openxmlformats.org/drawingml/2006/main" xmlns:p="http://schemas.openxmlformats.org/presentationml/2006/main" xmlns:r="http://schemas.openxmlformats.org/officeDocument/2006/relationships">
+<p:notes xmlns:a="http://schemas.openxmlformats.org/drawingml/2006/main" xmlns:r="http://schemas.openxmlformats.org/officeDocument/2006/relationships" xmlns:p="http://schemas.openxmlformats.org/presentationml/2006/main">
   <p:cSld>
     <p:spTree>
       <p:nvGrpSpPr>
@@ -1195,7 +1051,7 @@
         <p:nvSpPr>
           <p:cNvPr id="2" name="Slide Image Placeholder 1"/>
           <p:cNvSpPr>
-            <a:spLocks noGrp="1"/>
+            <a:spLocks noGrp="1" noRot="1" noChangeAspect="1"/>
           </p:cNvSpPr>
           <p:nvPr>
             <p:ph type="sldImg" idx="2"/>
@@ -1210,7 +1066,7 @@
             <a:spLocks noGrp="1"/>
           </p:cNvSpPr>
           <p:nvPr>
-            <p:ph type="body" idx="3" sz="quarter"/>
+            <p:ph type="body" sz="quarter" idx="3"/>
           </p:nvPr>
         </p:nvSpPr>
         <p:spPr/>
@@ -1219,90 +1075,546 @@
           <a:lstStyle/>
           <a:p>
             <a:r>
-              <a:t>【第 3 頁 · P2 · 為什麼是現在:工作量沒變多,客戶要的時效變了】　目標 72 秒 · 累計 2:52</a:t>
-            </a:r>
-          </a:p>
-          <a:p/>
-          <a:p>
-            <a:r>
-              <a:t>★ 工作量沒變多,是客戶要的時效變了 —— 而慢的那兩段是同一個原因:模型看不到畫面外的東西。</a:t>
-            </a:r>
-          </a:p>
-          <a:p/>
-          <a:p>
-            <a:r>
-              <a:t>· 利用率:平均還好,尖峰這五個人已經不夠</a:t>
-            </a:r>
-          </a:p>
-          <a:p>
-            <a:r>
-              <a:t>· 一件爭議的五段拆解,撈數據 + 判讀才是模型幫得上的</a:t>
-            </a:r>
-          </a:p>
-          <a:p>
-            <a:r>
-              <a:t>· 這是營運端估計不是量測,W6 交正式拆解,不成立就轉排班</a:t>
-            </a:r>
-          </a:p>
-          <a:p/>
-          <a:p>
-            <a:r>
-              <a:t># 74%–107% · 折算 3.7–5.4 人 · 現有 5 人</a:t>
-            </a:r>
-          </a:p>
-          <a:p>
-            <a:r>
-              <a:t># 2.5–5.5 天 · AI 可處理段佔 43%–78%</a:t>
-            </a:r>
-          </a:p>
-          <a:p/>
-          <a:p>
-            <a:r>
-              <a:t>⚠️ 分母是 2.5–5.5 天,🚫 不是 2–5 天</a:t>
-            </a:r>
-          </a:p>
-          <a:p/>
-          <a:p>
-            <a:r>
-              <a:t>✂️ 若排練超過 9:40,這一頁砍最後四句(20 秒限定的重複 + 五萬台 / 三個分母 / 成長階梯)= 省 26 秒。第 2 頁已經講過 20 秒的限定,這裡是重複。</a:t>
-            </a:r>
-          </a:p>
-          <a:p/>
-          <a:p>
-            <a:r>
-              <a:t>→ 換下一頁</a:t>
-            </a:r>
-          </a:p>
-          <a:p/>
-          <a:p>
-            <a:r>
-              <a:t>── 逐字備援 · 317 字(忘詞才看,不是拿來唸的)──</a:t>
-            </a:r>
-          </a:p>
-          <a:p>
-            <a:r>
-              <a:t>利用率七成四到一百零七:平均還好,尖峰這五個人已經不夠——折算三點七到五點四人,我們只有五個。一件爭議目前要兩到五天,現況約一半超過兩天;客戶要兩天、單純案件當天,那是客戶期望,不是簽了的服務水準。這兩到五天花在哪裡,我拆開了:排隊零到一天、撈數據半天、判讀一到三天、內部覆核半天、回信半天。撈數據加判讀,就是模型幫得上的那兩段,佔四成到八成。這兩段之所以慢,是同一個原因——模型看不到畫面外的東西。這是營運端估計,不是量測;前六週交出正式拆解,不成立就轉排班。二十秒是營運上的估計,還沒有正式量過——第六週交出正式基準,G1 驗收。上線約五萬台,售出更多;落差就是排不了程的工作量,開通權在客戶手上。我不預測撞牆的時點;第六週對齊三個分母,成長不納入回報估算。成長是階梯:一個大型車隊上線,事件量一次跳兩成三,手上正在談一個。</a:t>
-            </a:r>
-          </a:p>
-          <a:p/>
-          <a:p>
-            <a:r>
-              <a:t>── 備查(不唸,答辯用)──</a:t>
-            </a:r>
-          </a:p>
-          <a:p>
-            <a:r>
-              <a:t>【rows】{'label': '尖峰徵調 7 位研發工程師', 'value': '不是管理失當,是算術的必然', 'note': '離開本職支援、非常態編制 —— 開發產能被拿去補分析產能', 'hot': False}</a:t>
-            </a:r>
-          </a:p>
-          <a:p>
-            <a:r>
-              <a:t>【rows】{'label': '量已經不是瓶頸', 'value': '全客戶 13,000 筆/天,地端約 2.2–3.5 小時跑完,設備佔用率約 9%–15%', 'note': '⚠ 估算,非實測;此數只含每日全量批次初篩,不含客戶爭議深挖那條路徑(其吞吐量由 W1–6 量測)。瓶頸是判準與驗證,不是量', 'hot': False}</a:t>
-            </a:r>
-          </a:p>
-          <a:p>
-            <a:r>
-              <a:t>【這一頁的作用】這頁回答委員會最會問的兩題:為什麼是現在、為什麼是 AI 而不是加人。五段天數必須印出來,委員會才親眼看到 43%–78% 落在模型碰得到的那兩段;而那條因果句(兩段慢的原因是同一個技術缺陷)把整頁從營運圖表升級成 AI 立案 —— 沒有它,這只證明「有件事很花時間」。同一頁又自己標明證據等級(營運端估計,非量測)並給出反向出口(推翻就轉排班),把核准變成一個低風險決定;右側的利用率上緣破百與徵調 7 位研發,則把時效缺口接回錢與機會成本。</a:t>
+              <a:rPr dirty="0"/>
+              <a:t>【第 3 頁 · P2 · </a:t>
+            </a:r>
+            <a:r>
+              <a:rPr dirty="0" err="1"/>
+              <a:t>為什麼是現在:工作量沒變多,客戶要的時效變了</a:t>
+            </a:r>
+            <a:r>
+              <a:rPr dirty="0"/>
+              <a:t>】　</a:t>
+            </a:r>
+            <a:r>
+              <a:rPr dirty="0" err="1"/>
+              <a:t>目標</a:t>
+            </a:r>
+            <a:r>
+              <a:rPr dirty="0"/>
+              <a:t> 72 秒 · </a:t>
+            </a:r>
+            <a:r>
+              <a:rPr dirty="0" err="1"/>
+              <a:t>累計</a:t>
+            </a:r>
+            <a:r>
+              <a:rPr dirty="0"/>
+              <a:t> 2:52</a:t>
+            </a:r>
+          </a:p>
+          <a:p>
+            <a:endParaRPr dirty="0"/>
+          </a:p>
+          <a:p>
+            <a:r>
+              <a:rPr dirty="0"/>
+              <a:t>★ </a:t>
+            </a:r>
+            <a:r>
+              <a:rPr dirty="0" err="1"/>
+              <a:t>工作量沒變多,是客戶要的時效變了</a:t>
+            </a:r>
+            <a:r>
+              <a:rPr dirty="0"/>
+              <a:t> —— </a:t>
+            </a:r>
+            <a:r>
+              <a:rPr dirty="0" err="1"/>
+              <a:t>而慢的那兩段是同一個原因:模型看不到畫面外的東西</a:t>
+            </a:r>
+            <a:r>
+              <a:rPr dirty="0"/>
+              <a:t>。</a:t>
+            </a:r>
+          </a:p>
+          <a:p>
+            <a:endParaRPr dirty="0"/>
+          </a:p>
+          <a:p>
+            <a:r>
+              <a:rPr dirty="0"/>
+              <a:t>· </a:t>
+            </a:r>
+            <a:r>
+              <a:rPr dirty="0" err="1"/>
+              <a:t>利用率:平均還好,尖峰這五個人已經不夠</a:t>
+            </a:r>
+            <a:endParaRPr dirty="0"/>
+          </a:p>
+          <a:p>
+            <a:r>
+              <a:rPr dirty="0"/>
+              <a:t>· </a:t>
+            </a:r>
+            <a:r>
+              <a:rPr dirty="0" err="1"/>
+              <a:t>一件爭議的五段拆解,撈數據</a:t>
+            </a:r>
+            <a:r>
+              <a:rPr dirty="0"/>
+              <a:t> + </a:t>
+            </a:r>
+            <a:r>
+              <a:rPr dirty="0" err="1"/>
+              <a:t>判讀才是模型幫得上的</a:t>
+            </a:r>
+            <a:endParaRPr dirty="0"/>
+          </a:p>
+          <a:p>
+            <a:r>
+              <a:rPr dirty="0"/>
+              <a:t>· 這是營運端估計不是量測,W6 </a:t>
+            </a:r>
+            <a:r>
+              <a:rPr dirty="0" err="1"/>
+              <a:t>交正式拆解,不成立就轉排班</a:t>
+            </a:r>
+            <a:endParaRPr dirty="0"/>
+          </a:p>
+          <a:p>
+            <a:endParaRPr dirty="0"/>
+          </a:p>
+          <a:p>
+            <a:r>
+              <a:rPr dirty="0"/>
+              <a:t># 74%–107% · </a:t>
+            </a:r>
+            <a:r>
+              <a:rPr dirty="0" err="1"/>
+              <a:t>折算</a:t>
+            </a:r>
+            <a:r>
+              <a:rPr dirty="0"/>
+              <a:t> 3.7–5.4 人 · </a:t>
+            </a:r>
+            <a:r>
+              <a:rPr dirty="0" err="1"/>
+              <a:t>現有</a:t>
+            </a:r>
+            <a:r>
+              <a:rPr dirty="0"/>
+              <a:t> 5 人</a:t>
+            </a:r>
+          </a:p>
+          <a:p>
+            <a:r>
+              <a:rPr dirty="0"/>
+              <a:t># 2.5–5.5 天 · AI </a:t>
+            </a:r>
+            <a:r>
+              <a:rPr dirty="0" err="1"/>
+              <a:t>可處理段佔</a:t>
+            </a:r>
+            <a:r>
+              <a:rPr dirty="0"/>
+              <a:t> 43%–78%</a:t>
+            </a:r>
+          </a:p>
+          <a:p>
+            <a:endParaRPr dirty="0"/>
+          </a:p>
+          <a:p>
+            <a:r>
+              <a:rPr dirty="0"/>
+              <a:t>⚠️ </a:t>
+            </a:r>
+            <a:r>
+              <a:rPr dirty="0" err="1"/>
+              <a:t>分母是</a:t>
+            </a:r>
+            <a:r>
+              <a:rPr dirty="0"/>
+              <a:t> 2.5–5.5 天,🚫 </a:t>
+            </a:r>
+            <a:r>
+              <a:rPr dirty="0" err="1"/>
+              <a:t>不是</a:t>
+            </a:r>
+            <a:r>
+              <a:rPr dirty="0"/>
+              <a:t> 2–5 天</a:t>
+            </a:r>
+          </a:p>
+          <a:p>
+            <a:endParaRPr dirty="0"/>
+          </a:p>
+          <a:p>
+            <a:r>
+              <a:rPr dirty="0"/>
+              <a:t>✂️ </a:t>
+            </a:r>
+            <a:r>
+              <a:rPr dirty="0" err="1"/>
+              <a:t>若排練超過</a:t>
+            </a:r>
+            <a:r>
+              <a:rPr dirty="0"/>
+              <a:t> 9:40,這一頁砍最後四句(20 </a:t>
+            </a:r>
+            <a:r>
+              <a:rPr dirty="0" err="1"/>
+              <a:t>秒限定的重複</a:t>
+            </a:r>
+            <a:r>
+              <a:rPr dirty="0"/>
+              <a:t> + </a:t>
+            </a:r>
+            <a:r>
+              <a:rPr dirty="0" err="1"/>
+              <a:t>五萬台</a:t>
+            </a:r>
+            <a:r>
+              <a:rPr dirty="0"/>
+              <a:t> / </a:t>
+            </a:r>
+            <a:r>
+              <a:rPr dirty="0" err="1"/>
+              <a:t>三個分母</a:t>
+            </a:r>
+            <a:r>
+              <a:rPr dirty="0"/>
+              <a:t> / </a:t>
+            </a:r>
+            <a:r>
+              <a:rPr dirty="0" err="1"/>
+              <a:t>成長階梯</a:t>
+            </a:r>
+            <a:r>
+              <a:rPr dirty="0"/>
+              <a:t>)= 省 26 </a:t>
+            </a:r>
+            <a:r>
+              <a:rPr dirty="0" err="1"/>
+              <a:t>秒。第</a:t>
+            </a:r>
+            <a:r>
+              <a:rPr dirty="0"/>
+              <a:t> 2 </a:t>
+            </a:r>
+            <a:r>
+              <a:rPr dirty="0" err="1"/>
+              <a:t>頁已經講過</a:t>
+            </a:r>
+            <a:r>
+              <a:rPr dirty="0"/>
+              <a:t> 20 </a:t>
+            </a:r>
+            <a:r>
+              <a:rPr dirty="0" err="1"/>
+              <a:t>秒的限定,這裡是重複</a:t>
+            </a:r>
+            <a:r>
+              <a:rPr dirty="0"/>
+              <a:t>。</a:t>
+            </a:r>
+          </a:p>
+          <a:p>
+            <a:endParaRPr dirty="0"/>
+          </a:p>
+          <a:p>
+            <a:r>
+              <a:rPr dirty="0"/>
+              <a:t>→ </a:t>
+            </a:r>
+            <a:r>
+              <a:rPr dirty="0" err="1"/>
+              <a:t>換下一頁</a:t>
+            </a:r>
+            <a:endParaRPr dirty="0"/>
+          </a:p>
+          <a:p>
+            <a:endParaRPr dirty="0"/>
+          </a:p>
+          <a:p>
+            <a:r>
+              <a:rPr dirty="0"/>
+              <a:t>── </a:t>
+            </a:r>
+            <a:r>
+              <a:rPr dirty="0" err="1"/>
+              <a:t>逐字備援</a:t>
+            </a:r>
+            <a:r>
+              <a:rPr dirty="0"/>
+              <a:t> · 317 字(</a:t>
+            </a:r>
+            <a:r>
+              <a:rPr dirty="0" err="1"/>
+              <a:t>忘詞才看,不是拿來唸的</a:t>
+            </a:r>
+            <a:r>
+              <a:rPr dirty="0"/>
+              <a:t>)──</a:t>
+            </a:r>
+          </a:p>
+          <a:p>
+            <a:r>
+              <a:rPr dirty="0" err="1"/>
+              <a:t>利用率七成四到一百零七:平均還好,尖峰這五個人已經不夠</a:t>
+            </a:r>
+            <a:r>
+              <a:rPr dirty="0"/>
+              <a:t>——折算三點七到五點四人,我們只有五個。一件爭議目前要兩到五天,現況約一半超過兩天;客戶要兩天、單純案件當天,那是客戶期望,不是簽了的服務水準。這兩到五天花在哪裡,我拆開了:排隊零到一天、撈數據半天、判讀一到三天、內部覆核半天、回信半天。撈數據加判讀,就是模型幫得上的那兩段,佔四成到八成。這兩段之所以慢,是同一個原因——</a:t>
+            </a:r>
+            <a:r>
+              <a:rPr dirty="0" err="1"/>
+              <a:t>模型看不到畫面外的東西。這是營運端估計,不是量測;前六週交出正式拆解,不成立就轉排班。二十秒是營運上的估計,還沒有正式量過</a:t>
+            </a:r>
+            <a:r>
+              <a:rPr dirty="0"/>
+              <a:t>——第六週交出正式基準,G1 驗收。上線約五萬台,售出更多;落差就是排不了程的工作量,開通權在客戶手上。我不預測撞牆的時點;第六週對齊三個分母,成長不納入回報估算。成長是階梯:一個大型車隊上線,事件量一次跳兩成三,手上正在談一個。</a:t>
+            </a:r>
+          </a:p>
+          <a:p>
+            <a:endParaRPr dirty="0"/>
+          </a:p>
+          <a:p>
+            <a:r>
+              <a:rPr dirty="0"/>
+              <a:t>── </a:t>
+            </a:r>
+            <a:r>
+              <a:rPr dirty="0" err="1"/>
+              <a:t>備查</a:t>
+            </a:r>
+            <a:r>
+              <a:rPr dirty="0"/>
+              <a:t>(</a:t>
+            </a:r>
+            <a:r>
+              <a:rPr dirty="0" err="1"/>
+              <a:t>不唸,答辯用</a:t>
+            </a:r>
+            <a:r>
+              <a:rPr dirty="0"/>
+              <a:t>)──</a:t>
+            </a:r>
+          </a:p>
+          <a:p>
+            <a:r>
+              <a:rPr dirty="0"/>
+              <a:t>【rows】{'label': '</a:t>
+            </a:r>
+            <a:r>
+              <a:rPr dirty="0" err="1"/>
+              <a:t>尖峰徵調</a:t>
+            </a:r>
+            <a:r>
+              <a:rPr dirty="0"/>
+              <a:t> 7 </a:t>
+            </a:r>
+            <a:r>
+              <a:rPr dirty="0" err="1"/>
+              <a:t>位研發工程師</a:t>
+            </a:r>
+            <a:r>
+              <a:rPr dirty="0"/>
+              <a:t>', 'value': '</a:t>
+            </a:r>
+            <a:r>
+              <a:rPr dirty="0" err="1"/>
+              <a:t>不是管理失當,是算術的必然</a:t>
+            </a:r>
+            <a:r>
+              <a:rPr dirty="0"/>
+              <a:t>', 'note': '</a:t>
+            </a:r>
+            <a:r>
+              <a:rPr dirty="0" err="1"/>
+              <a:t>離開本職支援、非常態編制</a:t>
+            </a:r>
+            <a:r>
+              <a:rPr dirty="0"/>
+              <a:t> —— </a:t>
+            </a:r>
+            <a:r>
+              <a:rPr dirty="0" err="1"/>
+              <a:t>開發產能被拿去補分析產能</a:t>
+            </a:r>
+            <a:r>
+              <a:rPr dirty="0"/>
+              <a:t>', 'hot': False}</a:t>
+            </a:r>
+          </a:p>
+          <a:p>
+            <a:r>
+              <a:rPr dirty="0"/>
+              <a:t>【rows】{'label': '</a:t>
+            </a:r>
+            <a:r>
+              <a:rPr dirty="0" err="1"/>
+              <a:t>量已經不是瓶頸</a:t>
+            </a:r>
+            <a:r>
+              <a:rPr dirty="0"/>
+              <a:t>', 'value': '</a:t>
+            </a:r>
+            <a:r>
+              <a:rPr dirty="0" err="1"/>
+              <a:t>全客戶</a:t>
+            </a:r>
+            <a:r>
+              <a:rPr dirty="0"/>
+              <a:t> 13,000 筆/</a:t>
+            </a:r>
+            <a:r>
+              <a:rPr dirty="0" err="1"/>
+              <a:t>天,地端約</a:t>
+            </a:r>
+            <a:r>
+              <a:rPr dirty="0"/>
+              <a:t> 2.2–3.5 </a:t>
+            </a:r>
+            <a:r>
+              <a:rPr dirty="0" err="1"/>
+              <a:t>小時跑完,設備佔用率約</a:t>
+            </a:r>
+            <a:r>
+              <a:rPr dirty="0"/>
+              <a:t> 9%–15%', 'note': '⚠ </a:t>
+            </a:r>
+            <a:r>
+              <a:rPr dirty="0" err="1"/>
+              <a:t>估算,非實測;此數只含每日全量批次初篩,不含客戶爭議深挖那條路徑</a:t>
+            </a:r>
+            <a:r>
+              <a:rPr dirty="0"/>
+              <a:t>(</a:t>
+            </a:r>
+            <a:r>
+              <a:rPr dirty="0" err="1"/>
+              <a:t>其吞吐量由</a:t>
+            </a:r>
+            <a:r>
+              <a:rPr dirty="0"/>
+              <a:t> W1–6 </a:t>
+            </a:r>
+            <a:r>
+              <a:rPr dirty="0" err="1"/>
+              <a:t>量測</a:t>
+            </a:r>
+            <a:r>
+              <a:rPr dirty="0"/>
+              <a:t>)。</a:t>
+            </a:r>
+            <a:r>
+              <a:rPr dirty="0" err="1"/>
+              <a:t>瓶頸是判準與驗證,不是量</a:t>
+            </a:r>
+            <a:r>
+              <a:rPr dirty="0"/>
+              <a:t>', 'hot': False}</a:t>
+            </a:r>
+          </a:p>
+          <a:p>
+            <a:r>
+              <a:rPr dirty="0"/>
+              <a:t>【</a:t>
+            </a:r>
+            <a:r>
+              <a:rPr dirty="0" err="1"/>
+              <a:t>這一頁的作用】這頁回答委員會最會問的兩題:為什麼是現在、為什麼是</a:t>
+            </a:r>
+            <a:r>
+              <a:rPr dirty="0"/>
+              <a:t> AI </a:t>
+            </a:r>
+            <a:r>
+              <a:rPr dirty="0" err="1"/>
+              <a:t>而不是加人。五段天數必須印出來,委員會才親眼看到</a:t>
+            </a:r>
+            <a:r>
+              <a:rPr dirty="0"/>
+              <a:t> 43%–78% </a:t>
+            </a:r>
+            <a:r>
+              <a:rPr dirty="0" err="1"/>
+              <a:t>落在模型碰得到的那兩段;而那條因果句</a:t>
+            </a:r>
+            <a:r>
+              <a:rPr dirty="0"/>
+              <a:t>(</a:t>
+            </a:r>
+            <a:r>
+              <a:rPr dirty="0" err="1"/>
+              <a:t>兩段慢的原因是同一個技術缺陷</a:t>
+            </a:r>
+            <a:r>
+              <a:rPr dirty="0"/>
+              <a:t>)</a:t>
+            </a:r>
+            <a:r>
+              <a:rPr dirty="0" err="1"/>
+              <a:t>把整頁從營運圖表升級成</a:t>
+            </a:r>
+            <a:r>
+              <a:rPr dirty="0"/>
+              <a:t> AI </a:t>
+            </a:r>
+            <a:r>
+              <a:rPr dirty="0" err="1"/>
+              <a:t>立案</a:t>
+            </a:r>
+            <a:r>
+              <a:rPr dirty="0"/>
+              <a:t> —— </a:t>
+            </a:r>
+            <a:r>
+              <a:rPr dirty="0" err="1"/>
+              <a:t>沒有它,這只證明「有件事很花時間</a:t>
+            </a:r>
+            <a:r>
+              <a:rPr dirty="0"/>
+              <a:t>」。</a:t>
+            </a:r>
+            <a:r>
+              <a:rPr dirty="0" err="1"/>
+              <a:t>同一頁又自己標明證據等級</a:t>
+            </a:r>
+            <a:r>
+              <a:rPr dirty="0"/>
+              <a:t>(</a:t>
+            </a:r>
+            <a:r>
+              <a:rPr dirty="0" err="1"/>
+              <a:t>營運端估計,非量測</a:t>
+            </a:r>
+            <a:r>
+              <a:rPr dirty="0"/>
+              <a:t>)</a:t>
+            </a:r>
+            <a:r>
+              <a:rPr dirty="0" err="1"/>
+              <a:t>並給出反向出口</a:t>
+            </a:r>
+            <a:r>
+              <a:rPr dirty="0"/>
+              <a:t>(</a:t>
+            </a:r>
+            <a:r>
+              <a:rPr dirty="0" err="1"/>
+              <a:t>推翻就轉排班</a:t>
+            </a:r>
+            <a:r>
+              <a:rPr dirty="0"/>
+              <a:t>),</a:t>
+            </a:r>
+            <a:r>
+              <a:rPr dirty="0" err="1"/>
+              <a:t>把核准變成一個低風險決定;右側的利用率上緣破百與徵調</a:t>
+            </a:r>
+            <a:r>
+              <a:rPr dirty="0"/>
+              <a:t> 7 </a:t>
+            </a:r>
+            <a:r>
+              <a:rPr dirty="0" err="1"/>
+              <a:t>位研發,則把時效缺口接回錢與機會成本</a:t>
+            </a:r>
+            <a:r>
+              <a:rPr dirty="0"/>
+              <a:t>。</a:t>
             </a:r>
           </a:p>
         </p:txBody>
@@ -1314,7 +1626,7 @@
             <a:spLocks noGrp="1"/>
           </p:cNvSpPr>
           <p:nvPr>
-            <p:ph type="sldNum" idx="5" sz="quarter"/>
+            <p:ph type="sldNum" sz="quarter" idx="5"/>
           </p:nvPr>
         </p:nvSpPr>
         <p:spPr/>
@@ -1328,7 +1640,7 @@
 </file>
 
 <file path=ppt/notesSlides/notesSlide4.xml><?xml version="1.0" encoding="utf-8"?>
-<p:notes xmlns:a="http://schemas.openxmlformats.org/drawingml/2006/main" xmlns:p="http://schemas.openxmlformats.org/presentationml/2006/main" xmlns:r="http://schemas.openxmlformats.org/officeDocument/2006/relationships">
+<p:notes xmlns:a="http://schemas.openxmlformats.org/drawingml/2006/main" xmlns:r="http://schemas.openxmlformats.org/officeDocument/2006/relationships" xmlns:p="http://schemas.openxmlformats.org/presentationml/2006/main">
   <p:cSld>
     <p:spTree>
       <p:nvGrpSpPr>
@@ -1348,7 +1660,7 @@
         <p:nvSpPr>
           <p:cNvPr id="2" name="Slide Image Placeholder 1"/>
           <p:cNvSpPr>
-            <a:spLocks noGrp="1"/>
+            <a:spLocks noGrp="1" noRot="1" noChangeAspect="1"/>
           </p:cNvSpPr>
           <p:nvPr>
             <p:ph type="sldImg" idx="2"/>
@@ -1363,7 +1675,7 @@
             <a:spLocks noGrp="1"/>
           </p:cNvSpPr>
           <p:nvPr>
-            <p:ph type="body" idx="3" sz="quarter"/>
+            <p:ph type="body" sz="quarter" idx="3"/>
           </p:nvPr>
         </p:nvSpPr>
         <p:spPr/>
@@ -1375,13 +1687,17 @@
               <a:t>【第 4 頁 · P3 · 發現過程:兩種病,兩個缺口】　目標 52 秒 · 累計 3:45</a:t>
             </a:r>
           </a:p>
-          <a:p/>
+          <a:p>
+            <a:endParaRPr/>
+          </a:p>
           <a:p>
             <a:r>
               <a:t>★ 一百二十四筆誤報,一百零三筆是同一個根因 —— 八成三都是交通標誌辨識。</a:t>
             </a:r>
           </a:p>
-          <a:p/>
+          <a:p>
+            <a:endParaRPr/>
+          </a:p>
           <a:p>
             <a:r>
               <a:t>· 行車輔助錯的是模型(缺脈絡),駕駛監控錯的是人(缺判準)</a:t>
@@ -1397,7 +1713,9 @@
               <a:t>· 修好它,誤報跟漏放一起改善</a:t>
             </a:r>
           </a:p>
-          <a:p/>
+          <a:p>
+            <a:endParaRPr/>
+          </a:p>
           <a:p>
             <a:r>
               <a:t># 4 台車 · 23 天 · 1,647 筆</a:t>
@@ -1413,7 +1731,9 @@
               <a:t># 5 人 × 3.6 個分析日 × 8 小時 = 144 人時 ÷ 1,647 筆 = 5.25 分</a:t>
             </a:r>
           </a:p>
-          <a:p/>
+          <a:p>
+            <a:endParaRPr/>
+          </a:p>
           <a:p>
             <a:r>
               <a:t>⚠️ 必講「比例僅在此樣本內成立」—— 這句是這一頁所有數字的合法性來源</a:t>
@@ -1424,13 +1744,17 @@
               <a:t>⚠️ 5.25 分是「單一批次的實際節奏,不是長期平均」</a:t>
             </a:r>
           </a:p>
-          <a:p/>
+          <a:p>
+            <a:endParaRPr/>
+          </a:p>
           <a:p>
             <a:r>
               <a:t>→ 換下一頁</a:t>
             </a:r>
           </a:p>
-          <a:p/>
+          <a:p>
+            <a:endParaRPr/>
+          </a:p>
           <a:p>
             <a:r>
               <a:t>── 逐字備援 · 230 字(忘詞才看,不是拿來唸的)──</a:t>
@@ -1441,7 +1765,9 @@
               <a:t>那我們的時間到底花在哪裡?我把最近一份判讀拆開來看。四台車、二十三天、一千六百四十七筆,一個小型車隊一個月,比例僅在此樣本內成立。行車輔助錯的是模型,駕駛監控錯的是人。一邊缺脈絡,判定依據不在畫面裡;一邊缺判準,同一段影片兩人不同答案。這兩個比例共用同一把尺,而那把尺的一致性我們從來沒量過——標註品質那一包第十週建立基線,G2 訂目標值。這個樣本一百二十四筆誤報,一百零三筆同一個根因:交通標誌辨識,八成三。漏放那一側只有一份很薄的樣本,下一頁講。修好它,誤報跟漏放一起改善——而誤報,就是我們今天在人工端花掉的時間。</a:t>
             </a:r>
           </a:p>
-          <a:p/>
+          <a:p>
+            <a:endParaRPr/>
+          </a:p>
           <a:p>
             <a:r>
               <a:t>── 備查(不唸,答辯用)──</a:t>
@@ -1471,7 +1797,7 @@
             <a:spLocks noGrp="1"/>
           </p:cNvSpPr>
           <p:nvPr>
-            <p:ph type="sldNum" idx="5" sz="quarter"/>
+            <p:ph type="sldNum" sz="quarter" idx="5"/>
           </p:nvPr>
         </p:nvSpPr>
         <p:spPr/>
@@ -1485,7 +1811,7 @@
 </file>
 
 <file path=ppt/notesSlides/notesSlide5.xml><?xml version="1.0" encoding="utf-8"?>
-<p:notes xmlns:a="http://schemas.openxmlformats.org/drawingml/2006/main" xmlns:p="http://schemas.openxmlformats.org/presentationml/2006/main" xmlns:r="http://schemas.openxmlformats.org/officeDocument/2006/relationships">
+<p:notes xmlns:a="http://schemas.openxmlformats.org/drawingml/2006/main" xmlns:r="http://schemas.openxmlformats.org/officeDocument/2006/relationships" xmlns:p="http://schemas.openxmlformats.org/presentationml/2006/main">
   <p:cSld>
     <p:spTree>
       <p:nvGrpSpPr>
@@ -1505,7 +1831,7 @@
         <p:nvSpPr>
           <p:cNvPr id="2" name="Slide Image Placeholder 1"/>
           <p:cNvSpPr>
-            <a:spLocks noGrp="1"/>
+            <a:spLocks noGrp="1" noRot="1" noChangeAspect="1"/>
           </p:cNvSpPr>
           <p:nvPr>
             <p:ph type="sldImg" idx="2"/>
@@ -1520,7 +1846,7 @@
             <a:spLocks noGrp="1"/>
           </p:cNvSpPr>
           <p:nvPr>
-            <p:ph type="body" idx="3" sz="quarter"/>
+            <p:ph type="body" sz="quarter" idx="3"/>
           </p:nvPr>
         </p:nvSpPr>
         <p:spPr/>
@@ -1532,13 +1858,17 @@
               <a:t>【第 5 頁 · P4 · 我們看不見的那一半:有資料,沒有習慣】　目標 59 秒 · 累計 4:44</a:t>
             </a:r>
           </a:p>
-          <a:p/>
+          <a:p>
+            <a:endParaRPr/>
+          </a:p>
           <a:p>
             <a:r>
               <a:t>★ 我們有資料,沒有習慣 —— 被判否決的那一流,沒有人回看。</a:t>
             </a:r>
           </a:p>
-          <a:p/>
+          <a:p>
+            <a:endParaRPr/>
+          </a:p>
           <a:p>
             <a:r>
               <a:t>· 唯一的漏放量測是一份很薄的人工觸發測試</a:t>
@@ -1554,13 +1884,17 @@
               <a:t>· 誤報只花我們的人時,漏放是駕駛沒收到那次警示</a:t>
             </a:r>
           </a:p>
-          <a:p/>
+          <a:p>
+            <a:endParaRPr/>
+          </a:p>
           <a:p>
             <a:r>
               <a:t># 39 筆測試 · 漏偵 12 筆 · 另 10 筆無法歸類(約 1/4)</a:t>
             </a:r>
           </a:p>
-          <a:p/>
+          <a:p>
+            <a:endParaRPr/>
+          </a:p>
           <a:p>
             <a:r>
               <a:t>⚠️ 說「最強的線索,不是結論」—— W1–6 做成帶 95% 信賴區間的估計,不成立就換靶心</a:t>
@@ -1571,13 +1905,17 @@
               <a:t>⚠️ 🚫 83% 是第 4 頁的事,不要跟這一頁的漏放混講</a:t>
             </a:r>
           </a:p>
-          <a:p/>
+          <a:p>
+            <a:endParaRPr/>
+          </a:p>
           <a:p>
             <a:r>
               <a:t>→ 換下一頁</a:t>
             </a:r>
           </a:p>
-          <a:p/>
+          <a:p>
+            <a:endParaRPr/>
+          </a:p>
           <a:p>
             <a:r>
               <a:t>── 逐字備援 · 259 字(忘詞才看,不是拿來唸的)──</a:t>
@@ -1588,7 +1926,9 @@
               <a:t>這是我們看得見的一半。看不見的那一半更麻煩。被判否決的那一流,沒有人回看。我們有資料,沒有習慣。唯一的漏放量測,是一份三十九筆的人工觸發測試,獨立樣本:漏偵十二筆,另外十筆無法歸類,約四分之一;報告上我們自己註明,十二是下限。這是我目前手上最強的線索,不是結論;前六週由評估底座那一包做成帶信賴區間的估計,不成立就換靶心,G1 判。這兩種錯的代價不對稱:誤報只花我們的人時,漏放是駕駛沒收到那次警示。所以漏放這一側就算樣本再薄,也要先把它量出來。這批資料難在三件事:收得不完整、標註本身就會錯、內部對同一個標籤還沒有一致的理解。文獻上講的「沒有真實資料就只能靠代理指標」,就是這件事。</a:t>
             </a:r>
           </a:p>
-          <a:p/>
+          <a:p>
+            <a:endParaRPr/>
+          </a:p>
           <a:p>
             <a:r>
               <a:t>── 備查(不唸,答辯用)──</a:t>
@@ -1658,7 +1998,7 @@
             <a:spLocks noGrp="1"/>
           </p:cNvSpPr>
           <p:nvPr>
-            <p:ph type="sldNum" idx="5" sz="quarter"/>
+            <p:ph type="sldNum" sz="quarter" idx="5"/>
           </p:nvPr>
         </p:nvSpPr>
         <p:spPr/>
@@ -1672,7 +2012,7 @@
 </file>
 
 <file path=ppt/notesSlides/notesSlide6.xml><?xml version="1.0" encoding="utf-8"?>
-<p:notes xmlns:a="http://schemas.openxmlformats.org/drawingml/2006/main" xmlns:p="http://schemas.openxmlformats.org/presentationml/2006/main" xmlns:r="http://schemas.openxmlformats.org/officeDocument/2006/relationships">
+<p:notes xmlns:a="http://schemas.openxmlformats.org/drawingml/2006/main" xmlns:r="http://schemas.openxmlformats.org/officeDocument/2006/relationships" xmlns:p="http://schemas.openxmlformats.org/presentationml/2006/main">
   <p:cSld>
     <p:spTree>
       <p:nvGrpSpPr>
@@ -1692,7 +2032,7 @@
         <p:nvSpPr>
           <p:cNvPr id="2" name="Slide Image Placeholder 1"/>
           <p:cNvSpPr>
-            <a:spLocks noGrp="1"/>
+            <a:spLocks noGrp="1" noRot="1" noChangeAspect="1"/>
           </p:cNvSpPr>
           <p:nvPr>
             <p:ph type="sldImg" idx="2"/>
@@ -1707,7 +2047,7 @@
             <a:spLocks noGrp="1"/>
           </p:cNvSpPr>
           <p:nvPr>
-            <p:ph type="body" idx="3" sz="quarter"/>
+            <p:ph type="body" sz="quarter" idx="3"/>
           </p:nvPr>
         </p:nvSpPr>
         <p:spPr/>
@@ -1719,13 +2059,17 @@
               <a:t>【第 6 頁 · P5 · 五條路,含三條不用 AI】　目標 44 秒 · 累計 5:28</a:t>
             </a:r>
           </a:p>
-          <a:p/>
+          <a:p>
+            <a:endParaRPr/>
+          </a:p>
           <a:p>
             <a:r>
               <a:t>★ 這六個月,它一筆都不對外生效。</a:t>
             </a:r>
           </a:p>
-          <a:p/>
+          <a:p>
+            <a:endParaRPr/>
+          </a:p>
           <a:p>
             <a:r>
               <a:t>· 五條路裡三條不用 AI —— 加人、調班、既有雲端規劃,我都沒有先否決</a:t>
@@ -1741,13 +2085,17 @@
               <a:t>· 影子模式:機器照出結論但不對外送,人照常判,兩邊比對</a:t>
             </a:r>
           </a:p>
-          <a:p/>
+          <a:p>
+            <a:endParaRPr/>
+          </a:p>
           <a:p>
             <a:r>
               <a:t># 85% 是分流率(推估非實測) · 六個月對外覆蓋率 0%</a:t>
             </a:r>
           </a:p>
-          <a:p/>
+          <a:p>
+            <a:endParaRPr/>
+          </a:p>
           <a:p>
             <a:r>
               <a:t>⚠️ 三層一層都不可省:能力層 850 筆終局判定 / 本案層 對外 0% / 放行層 須過另一道獨立門</a:t>
@@ -1763,13 +2111,17 @@
               <a:t>⚠️ 🚫 85% 是分流率,不是準確率,不可與誤報率並排相減</a:t>
             </a:r>
           </a:p>
-          <a:p/>
+          <a:p>
+            <a:endParaRPr/>
+          </a:p>
           <a:p>
             <a:r>
               <a:t>→ 換下一頁</a:t>
             </a:r>
           </a:p>
-          <a:p/>
+          <a:p>
+            <a:endParaRPr/>
+          </a:p>
           <a:p>
             <a:r>
               <a:t>── 逐字備援 · 195 字(忘詞才看,不是拿來唸的)──</a:t>
@@ -1780,7 +2132,9 @@
               <a:t>路有五條。加人,迴路轉得更久,不會停。更便宜的是調班加人力池,我不先否決;六週後那道門用正式量測判:AI能處理的那段佔主要延遲才放行,否則轉排班。採用案是地端視覺語言模型讀事件影片。前兩包是它的必要前置:沒量測底座,就不知道它判得對不對。預期八成五的爭議件,機器有把握、直接結案,人不再看。這是推估不是實測;而人現在判得多準,我們沒量過。所以這六個月,它一筆都不對外生效——機器照出結論,人照常判,兩邊比對。這是唯一算得出自動結案漏放率的設計。</a:t>
             </a:r>
           </a:p>
-          <a:p/>
+          <a:p>
+            <a:endParaRPr/>
+          </a:p>
           <a:p>
             <a:r>
               <a:t>── 備查(不唸,答辯用)──</a:t>
@@ -1800,7 +2154,7 @@
             <a:spLocks noGrp="1"/>
           </p:cNvSpPr>
           <p:nvPr>
-            <p:ph type="sldNum" idx="5" sz="quarter"/>
+            <p:ph type="sldNum" sz="quarter" idx="5"/>
           </p:nvPr>
         </p:nvSpPr>
         <p:spPr/>
@@ -1814,7 +2168,7 @@
 </file>
 
 <file path=ppt/notesSlides/notesSlide7.xml><?xml version="1.0" encoding="utf-8"?>
-<p:notes xmlns:a="http://schemas.openxmlformats.org/drawingml/2006/main" xmlns:p="http://schemas.openxmlformats.org/presentationml/2006/main" xmlns:r="http://schemas.openxmlformats.org/officeDocument/2006/relationships">
+<p:notes xmlns:a="http://schemas.openxmlformats.org/drawingml/2006/main" xmlns:r="http://schemas.openxmlformats.org/officeDocument/2006/relationships" xmlns:p="http://schemas.openxmlformats.org/presentationml/2006/main">
   <p:cSld>
     <p:spTree>
       <p:nvGrpSpPr>
@@ -1834,7 +2188,7 @@
         <p:nvSpPr>
           <p:cNvPr id="2" name="Slide Image Placeholder 1"/>
           <p:cNvSpPr>
-            <a:spLocks noGrp="1"/>
+            <a:spLocks noGrp="1" noRot="1" noChangeAspect="1"/>
           </p:cNvSpPr>
           <p:nvPr>
             <p:ph type="sldImg" idx="2"/>
@@ -1849,7 +2203,7 @@
             <a:spLocks noGrp="1"/>
           </p:cNvSpPr>
           <p:nvPr>
-            <p:ph type="body" idx="3" sz="quarter"/>
+            <p:ph type="body" sz="quarter" idx="3"/>
           </p:nvPr>
         </p:nvSpPr>
         <p:spPr/>
@@ -1861,13 +2215,17 @@
               <a:t>【第 7 頁 · P6 · 風險:七類十條,緩解位移與殘餘風險】　目標 51 秒 · 累計 6:19</a:t>
             </a:r>
           </a:p>
-          <a:p/>
+          <a:p>
+            <a:endParaRPr/>
+          </a:p>
           <a:p>
             <a:r>
               <a:t>★ 這個緩解只擋得住人還在看的那些 —— 移交後那八成五,沒有介面,也沒有人。</a:t>
             </a:r>
           </a:p>
-          <a:p/>
+          <a:p>
+            <a:endParaRPr/>
+          </a:p>
           <a:p>
             <a:r>
               <a:t>· 資料級聯:判準不一致會變成訓練標籤</a:t>
@@ -1883,13 +2241,17 @@
               <a:t>· 所以我另外加了兩條這個方案自己造成的風險</a:t>
             </a:r>
           </a:p>
-          <a:p/>
+          <a:p>
+            <a:endParaRPr/>
+          </a:p>
           <a:p>
             <a:r>
               <a:t># 七類十條 · R9 自動結案的漏放 · R10 自動結案的冤枉</a:t>
             </a:r>
           </a:p>
-          <a:p/>
+          <a:p>
+            <a:endParaRPr/>
+          </a:p>
           <a:p>
             <a:r>
               <a:t>⚠️ R8 法律面我沒有答案 —— 由法務在 G1(第 6 週)前給書面意見</a:t>
@@ -1900,7 +2262,9 @@
               <a:t>⚠️ 每一條沒有答案的事,都要當場交代誰在第幾週給</a:t>
             </a:r>
           </a:p>
-          <a:p/>
+          <a:p>
+            <a:endParaRPr/>
+          </a:p>
           <a:p>
             <a:r>
               <a:t>── 錄影提示(不唸)──</a:t>
@@ -1916,13 +2280,17 @@
               <a:t>· 唸完法務那句後,畫面停在 R8 紅圈上靜止 2 秒</a:t>
             </a:r>
           </a:p>
-          <a:p/>
+          <a:p>
+            <a:endParaRPr/>
+          </a:p>
           <a:p>
             <a:r>
               <a:t>→ 換下一頁</a:t>
             </a:r>
           </a:p>
-          <a:p/>
+          <a:p>
+            <a:endParaRPr/>
+          </a:p>
           <a:p>
             <a:r>
               <a:t>── 逐字備援 · 223 字(忘詞才看,不是拿來唸的)──</a:t>
@@ -1933,7 +2301,9 @@
               <a:t>選了這條,我先講它會出什麼事。風險歸成七類十條,我只講三條。第一,資料級聯:複核判準不一致會變成訓練標籤,脈絡資料有錯也會整批傳下去。第二,自動化偏差:介面一顯示模型信心,人就直接蓋章。我的決策是介面不顯示信心。但這個緩解只擋得住人還在看的那些 —— 移交後開到天花板,那八成五沒有介面、也沒有人。所以我另外加了兩條:機器把真的危險事件判成誤報,跟機器單方面駁回駕駛。兩條都掛在自動結案那道門上,不在這六個月裡。第三,法律面:曾判為誤報的紀錄,在事故舉證裡算什麼。這題我沒有答案,它由法務在 G1 前給書面意見。</a:t>
             </a:r>
           </a:p>
-          <a:p/>
+          <a:p>
+            <a:endParaRPr/>
+          </a:p>
           <a:p>
             <a:r>
               <a:t>── 備查(不唸,答辯用)──</a:t>
@@ -1953,7 +2323,7 @@
             <a:spLocks noGrp="1"/>
           </p:cNvSpPr>
           <p:nvPr>
-            <p:ph type="sldNum" idx="5" sz="quarter"/>
+            <p:ph type="sldNum" sz="quarter" idx="5"/>
           </p:nvPr>
         </p:nvSpPr>
         <p:spPr/>
@@ -1967,7 +2337,7 @@
 </file>
 
 <file path=ppt/notesSlides/notesSlide8.xml><?xml version="1.0" encoding="utf-8"?>
-<p:notes xmlns:a="http://schemas.openxmlformats.org/drawingml/2006/main" xmlns:p="http://schemas.openxmlformats.org/presentationml/2006/main" xmlns:r="http://schemas.openxmlformats.org/officeDocument/2006/relationships">
+<p:notes xmlns:a="http://schemas.openxmlformats.org/drawingml/2006/main" xmlns:r="http://schemas.openxmlformats.org/officeDocument/2006/relationships" xmlns:p="http://schemas.openxmlformats.org/presentationml/2006/main">
   <p:cSld>
     <p:spTree>
       <p:nvGrpSpPr>
@@ -1987,7 +2357,7 @@
         <p:nvSpPr>
           <p:cNvPr id="2" name="Slide Image Placeholder 1"/>
           <p:cNvSpPr>
-            <a:spLocks noGrp="1"/>
+            <a:spLocks noGrp="1" noRot="1" noChangeAspect="1"/>
           </p:cNvSpPr>
           <p:nvPr>
             <p:ph type="sldImg" idx="2"/>
@@ -2002,7 +2372,7 @@
             <a:spLocks noGrp="1"/>
           </p:cNvSpPr>
           <p:nvPr>
-            <p:ph type="body" idx="3" sz="quarter"/>
+            <p:ph type="body" sz="quarter" idx="3"/>
           </p:nvPr>
         </p:nvSpPr>
         <p:spPr/>
@@ -2014,13 +2384,17 @@
               <a:t>【第 8 頁 · P7 · 倫理與可申訴性:對照澳洲 AI 倫理八原則】　目標 50 秒 · 累計 7:08</a:t>
             </a:r>
           </a:p>
-          <a:p/>
+          <a:p>
+            <a:endParaRPr/>
+          </a:p>
           <a:p>
             <a:r>
               <a:t>★ 每一千筆爭議,有八百五十筆沒有人會看過。</a:t>
             </a:r>
           </a:p>
-          <a:p/>
+          <a:p>
+            <a:endParaRPr/>
+          </a:p>
           <a:p>
             <a:r>
               <a:t>· 同一張表兩欄:專案期一種顏色,移交後另一種</a:t>
@@ -2036,13 +2410,17 @@
               <a:t>· 第 8 條問責性:那 850 筆裡某一筆判錯,沒有人簽過名</a:t>
             </a:r>
           </a:p>
-          <a:p/>
+          <a:p>
+            <a:endParaRPr/>
+          </a:p>
           <a:p>
             <a:r>
               <a:t># 專案期 綠 0 琥珀 7 紅 1 → 移交後 綠 0 琥珀 1 紅 7</a:t>
             </a:r>
           </a:p>
-          <a:p/>
+          <a:p>
+            <a:endParaRPr/>
+          </a:p>
           <a:p>
             <a:r>
               <a:t>⚠️ 「沒有人簽過名」是**承認洞**,🚫 不要臨場補一個人上去</a:t>
@@ -2053,7 +2431,9 @@
               <a:t>⚠️ 第 4 條隱私是唯一不因自動結案惡化的一條 —— 刻意不標紅,不是漏標</a:t>
             </a:r>
           </a:p>
-          <a:p/>
+          <a:p>
+            <a:endParaRPr/>
+          </a:p>
           <a:p>
             <a:r>
               <a:t>── 錄影提示(不唸)──</a:t>
@@ -2069,13 +2449,17 @@
               <a:t>· 交界移交:P7 → P8 的接縫句為「講完該不該做,接下來是怎麼算做成了。」依總則檔 §6b,該句寫成 P8 口白的第一句、字數計入 P8,故不列入本頁 224 字。</a:t>
             </a:r>
           </a:p>
-          <a:p/>
+          <a:p>
+            <a:endParaRPr/>
+          </a:p>
           <a:p>
             <a:r>
               <a:t>→ 換下一頁</a:t>
             </a:r>
           </a:p>
-          <a:p/>
+          <a:p>
+            <a:endParaRPr/>
+          </a:p>
           <a:p>
             <a:r>
               <a:t>── 逐字備援 · 219 字(忘詞才看,不是拿來唸的)──</a:t>
@@ -2086,7 +2470,9 @@
               <a:t>還有一條,是我們自己造成的。這道人工防線的產能有限,所以它是配給的 —— 依客戶的購買量排序。同樣一個誤判,發生在大客戶身上會被人攔下來,小客戶身上不會。分配依據是客戶大小,不是風險大小。這六個月我能做的,是第一次量得出它覆蓋了誰。但我要說清楚:這個方案開到天花板之後,配給的依據會從客戶大小換成機器的信心,而那八成五沒有人看過 —— 那是我造成的新問題,不是我解掉的舊問題。所以八原則裡的問責跟可申訴性,我這一頁全部標紅,而它們掛在第二十四週那道門上。申訴機制到位前,本案產出不供個人考核使用。</a:t>
             </a:r>
           </a:p>
-          <a:p/>
+          <a:p>
+            <a:endParaRPr/>
+          </a:p>
           <a:p>
             <a:r>
               <a:t>── 備查(不唸,答辯用)──</a:t>
@@ -2106,7 +2492,7 @@
             <a:spLocks noGrp="1"/>
           </p:cNvSpPr>
           <p:nvPr>
-            <p:ph type="sldNum" idx="5" sz="quarter"/>
+            <p:ph type="sldNum" sz="quarter" idx="5"/>
           </p:nvPr>
         </p:nvSpPr>
         <p:spPr/>
@@ -2120,7 +2506,7 @@
 </file>
 
 <file path=ppt/notesSlides/notesSlide9.xml><?xml version="1.0" encoding="utf-8"?>
-<p:notes xmlns:a="http://schemas.openxmlformats.org/drawingml/2006/main" xmlns:p="http://schemas.openxmlformats.org/presentationml/2006/main" xmlns:r="http://schemas.openxmlformats.org/officeDocument/2006/relationships">
+<p:notes xmlns:a="http://schemas.openxmlformats.org/drawingml/2006/main" xmlns:r="http://schemas.openxmlformats.org/officeDocument/2006/relationships" xmlns:p="http://schemas.openxmlformats.org/presentationml/2006/main">
   <p:cSld>
     <p:spTree>
       <p:nvGrpSpPr>
@@ -2140,7 +2526,7 @@
         <p:nvSpPr>
           <p:cNvPr id="2" name="Slide Image Placeholder 1"/>
           <p:cNvSpPr>
-            <a:spLocks noGrp="1"/>
+            <a:spLocks noGrp="1" noRot="1" noChangeAspect="1"/>
           </p:cNvSpPr>
           <p:nvPr>
             <p:ph type="sldImg" idx="2"/>
@@ -2155,7 +2541,7 @@
             <a:spLocks noGrp="1"/>
           </p:cNvSpPr>
           <p:nvPr>
-            <p:ph type="body" idx="3" sz="quarter"/>
+            <p:ph type="body" sz="quarter" idx="3"/>
           </p:nvPr>
         </p:nvSpPr>
         <p:spPr/>
@@ -2167,13 +2553,17 @@
               <a:t>【第 9 頁 · P8 · 怎麼算成功:三層 KPI,一條回圈】　目標 46 秒 · 累計 7:54</a:t>
             </a:r>
           </a:p>
-          <a:p/>
+          <a:p>
+            <a:endParaRPr/>
+          </a:p>
           <a:p>
             <a:r>
               <a:t>★ 證明它有效的方法,同時是喊停它的方法。</a:t>
             </a:r>
           </a:p>
-          <a:p/>
+          <a:p>
+            <a:endParaRPr/>
+          </a:p>
           <a:p>
             <a:r>
               <a:t>· 上面兩層回答「怎麼證明有效」,護欄層回答「什麼情況下喊停」</a:t>
@@ -2189,7 +2579,9 @@
               <a:t>· 訂不出目標值的,寫明由哪一道門訂</a:t>
             </a:r>
           </a:p>
-          <a:p/>
+          <a:p>
+            <a:endParaRPr/>
+          </a:p>
           <a:p>
             <a:r>
               <a:t># ⑩ 漏放率 W6 交 95% CI · ⑬ 漏濾率 W12 交差值 95% CI</a:t>
@@ -2200,19 +2592,25 @@
               <a:t># δ 由委員會在 G1 事前預註冊 —— 判準寫在跑實驗之前</a:t>
             </a:r>
           </a:p>
-          <a:p/>
+          <a:p>
+            <a:endParaRPr/>
+          </a:p>
           <a:p>
             <a:r>
               <a:t>⚠️ ⑬ 的母體是那 850 筆(有把握桶),🚫 不是剩下的 150 筆</a:t>
             </a:r>
           </a:p>
-          <a:p/>
+          <a:p>
+            <a:endParaRPr/>
+          </a:p>
           <a:p>
             <a:r>
               <a:t>→ 換下一頁</a:t>
             </a:r>
           </a:p>
-          <a:p/>
+          <a:p>
+            <a:endParaRPr/>
+          </a:p>
           <a:p>
             <a:r>
               <a:t>── 逐字備援 · 201 字(忘詞才看,不是拿來唸的)──</a:t>
@@ -2223,7 +2621,9 @@
               <a:t>講完該不該做,接下來是怎麼算做成了。最上層第一個指標,是客戶等多久拿到分析,這是這個專案要買的東西。現況兩到五天,目標兩天內、單純案件當天;是客戶期望,不是已簽的服務水準協議。護欄層是否決型,今天多一條:漏濾率——機器說有把握、直接結案的那一桶裡,有多少其實該讓人看。第十二週交出它跟人工的差值,門檻第六週就要先訂,不能看完數據再訂。錯誤攔截比例我算不出來,分母還不存在,那正是護欄層要交的能力。訂不出目標值的,我寫的是它什麼時候被訂出來、由哪一道門訂。</a:t>
             </a:r>
           </a:p>
-          <a:p/>
+          <a:p>
+            <a:endParaRPr/>
+          </a:p>
           <a:p>
             <a:r>
               <a:t>── 備查(不唸,答辯用)──</a:t>
@@ -2243,7 +2643,7 @@
             <a:spLocks noGrp="1"/>
           </p:cNvSpPr>
           <p:nvPr>
-            <p:ph type="sldNum" idx="5" sz="quarter"/>
+            <p:ph type="sldNum" sz="quarter" idx="5"/>
           </p:nvPr>
         </p:nvSpPr>
         <p:spPr/>
@@ -2294,10 +2694,9 @@
           <a:lstStyle/>
           <a:p>
             <a:r>
-              <a:rPr lang="en-US" smtClean="0"/>
+              <a:rPr lang="en-US"/>
               <a:t>Click to edit Master title style</a:t>
             </a:r>
-            <a:endParaRPr lang="en-US"/>
           </a:p>
         </p:txBody>
       </p:sp>
@@ -2413,10 +2812,9 @@
           </a:lstStyle>
           <a:p>
             <a:r>
-              <a:rPr lang="en-US" smtClean="0"/>
+              <a:rPr lang="en-US"/>
               <a:t>Click to edit Master subtitle style</a:t>
             </a:r>
-            <a:endParaRPr lang="en-US"/>
           </a:p>
         </p:txBody>
       </p:sp>
@@ -2437,7 +2835,7 @@
           <a:p>
             <a:fld id="{5BCAD085-E8A6-8845-BD4E-CB4CCA059FC4}" type="datetimeFigureOut">
               <a:rPr lang="en-US" smtClean="0"/>
-              <a:t>1/27/13</a:t>
+              <a:t>8/16/2026</a:t>
             </a:fld>
             <a:endParaRPr lang="en-US"/>
           </a:p>
@@ -2531,10 +2929,9 @@
           <a:lstStyle/>
           <a:p>
             <a:r>
-              <a:rPr lang="en-US" smtClean="0"/>
+              <a:rPr lang="en-US"/>
               <a:t>Click to edit Master title style</a:t>
             </a:r>
-            <a:endParaRPr lang="en-US"/>
           </a:p>
         </p:txBody>
       </p:sp>
@@ -2555,38 +2952,37 @@
           <a:p>
             <a:pPr lvl="0"/>
             <a:r>
-              <a:rPr lang="en-US" smtClean="0"/>
+              <a:rPr lang="en-US"/>
               <a:t>Click to edit Master text styles</a:t>
             </a:r>
           </a:p>
           <a:p>
             <a:pPr lvl="1"/>
             <a:r>
-              <a:rPr lang="en-US" smtClean="0"/>
+              <a:rPr lang="en-US"/>
               <a:t>Second level</a:t>
             </a:r>
           </a:p>
           <a:p>
             <a:pPr lvl="2"/>
             <a:r>
-              <a:rPr lang="en-US" smtClean="0"/>
+              <a:rPr lang="en-US"/>
               <a:t>Third level</a:t>
             </a:r>
           </a:p>
           <a:p>
             <a:pPr lvl="3"/>
             <a:r>
-              <a:rPr lang="en-US" smtClean="0"/>
+              <a:rPr lang="en-US"/>
               <a:t>Fourth level</a:t>
             </a:r>
           </a:p>
           <a:p>
             <a:pPr lvl="4"/>
             <a:r>
-              <a:rPr lang="en-US" smtClean="0"/>
+              <a:rPr lang="en-US"/>
               <a:t>Fifth level</a:t>
             </a:r>
-            <a:endParaRPr lang="en-US"/>
           </a:p>
         </p:txBody>
       </p:sp>
@@ -2607,7 +3003,7 @@
           <a:p>
             <a:fld id="{5BCAD085-E8A6-8845-BD4E-CB4CCA059FC4}" type="datetimeFigureOut">
               <a:rPr lang="en-US" smtClean="0"/>
-              <a:t>1/27/13</a:t>
+              <a:t>8/16/2026</a:t>
             </a:fld>
             <a:endParaRPr lang="en-US"/>
           </a:p>
@@ -2706,10 +3102,9 @@
           <a:lstStyle/>
           <a:p>
             <a:r>
-              <a:rPr lang="en-US" smtClean="0"/>
+              <a:rPr lang="en-US"/>
               <a:t>Click to edit Master title style</a:t>
             </a:r>
-            <a:endParaRPr lang="en-US"/>
           </a:p>
         </p:txBody>
       </p:sp>
@@ -2735,38 +3130,37 @@
           <a:p>
             <a:pPr lvl="0"/>
             <a:r>
-              <a:rPr lang="en-US" smtClean="0"/>
+              <a:rPr lang="en-US"/>
               <a:t>Click to edit Master text styles</a:t>
             </a:r>
           </a:p>
           <a:p>
             <a:pPr lvl="1"/>
             <a:r>
-              <a:rPr lang="en-US" smtClean="0"/>
+              <a:rPr lang="en-US"/>
               <a:t>Second level</a:t>
             </a:r>
           </a:p>
           <a:p>
             <a:pPr lvl="2"/>
             <a:r>
-              <a:rPr lang="en-US" smtClean="0"/>
+              <a:rPr lang="en-US"/>
               <a:t>Third level</a:t>
             </a:r>
           </a:p>
           <a:p>
             <a:pPr lvl="3"/>
             <a:r>
-              <a:rPr lang="en-US" smtClean="0"/>
+              <a:rPr lang="en-US"/>
               <a:t>Fourth level</a:t>
             </a:r>
           </a:p>
           <a:p>
             <a:pPr lvl="4"/>
             <a:r>
-              <a:rPr lang="en-US" smtClean="0"/>
+              <a:rPr lang="en-US"/>
               <a:t>Fifth level</a:t>
             </a:r>
-            <a:endParaRPr lang="en-US"/>
           </a:p>
         </p:txBody>
       </p:sp>
@@ -2787,7 +3181,7 @@
           <a:p>
             <a:fld id="{5BCAD085-E8A6-8845-BD4E-CB4CCA059FC4}" type="datetimeFigureOut">
               <a:rPr lang="en-US" smtClean="0"/>
-              <a:t>1/27/13</a:t>
+              <a:t>8/16/2026</a:t>
             </a:fld>
             <a:endParaRPr lang="en-US"/>
           </a:p>
@@ -2881,10 +3275,9 @@
           <a:lstStyle/>
           <a:p>
             <a:r>
-              <a:rPr lang="en-US" smtClean="0"/>
+              <a:rPr lang="en-US"/>
               <a:t>Click to edit Master title style</a:t>
             </a:r>
-            <a:endParaRPr lang="en-US"/>
           </a:p>
         </p:txBody>
       </p:sp>
@@ -2905,38 +3298,37 @@
           <a:p>
             <a:pPr lvl="0"/>
             <a:r>
-              <a:rPr lang="en-US" smtClean="0"/>
+              <a:rPr lang="en-US"/>
               <a:t>Click to edit Master text styles</a:t>
             </a:r>
           </a:p>
           <a:p>
             <a:pPr lvl="1"/>
             <a:r>
-              <a:rPr lang="en-US" smtClean="0"/>
+              <a:rPr lang="en-US"/>
               <a:t>Second level</a:t>
             </a:r>
           </a:p>
           <a:p>
             <a:pPr lvl="2"/>
             <a:r>
-              <a:rPr lang="en-US" smtClean="0"/>
+              <a:rPr lang="en-US"/>
               <a:t>Third level</a:t>
             </a:r>
           </a:p>
           <a:p>
             <a:pPr lvl="3"/>
             <a:r>
-              <a:rPr lang="en-US" smtClean="0"/>
+              <a:rPr lang="en-US"/>
               <a:t>Fourth level</a:t>
             </a:r>
           </a:p>
           <a:p>
             <a:pPr lvl="4"/>
             <a:r>
-              <a:rPr lang="en-US" smtClean="0"/>
+              <a:rPr lang="en-US"/>
               <a:t>Fifth level</a:t>
             </a:r>
-            <a:endParaRPr lang="en-US"/>
           </a:p>
         </p:txBody>
       </p:sp>
@@ -2957,7 +3349,7 @@
           <a:p>
             <a:fld id="{5BCAD085-E8A6-8845-BD4E-CB4CCA059FC4}" type="datetimeFigureOut">
               <a:rPr lang="en-US" smtClean="0"/>
-              <a:t>1/27/13</a:t>
+              <a:t>8/16/2026</a:t>
             </a:fld>
             <a:endParaRPr lang="en-US"/>
           </a:p>
@@ -3060,10 +3452,9 @@
           </a:lstStyle>
           <a:p>
             <a:r>
-              <a:rPr lang="en-US" smtClean="0"/>
+              <a:rPr lang="en-US"/>
               <a:t>Click to edit Master title style</a:t>
             </a:r>
-            <a:endParaRPr lang="en-US"/>
           </a:p>
         </p:txBody>
       </p:sp>
@@ -3180,7 +3571,7 @@
           <a:p>
             <a:pPr lvl="0"/>
             <a:r>
-              <a:rPr lang="en-US" smtClean="0"/>
+              <a:rPr lang="en-US"/>
               <a:t>Click to edit Master text styles</a:t>
             </a:r>
           </a:p>
@@ -3203,7 +3594,7 @@
           <a:p>
             <a:fld id="{5BCAD085-E8A6-8845-BD4E-CB4CCA059FC4}" type="datetimeFigureOut">
               <a:rPr lang="en-US" smtClean="0"/>
-              <a:t>1/27/13</a:t>
+              <a:t>8/16/2026</a:t>
             </a:fld>
             <a:endParaRPr lang="en-US"/>
           </a:p>
@@ -3297,10 +3688,9 @@
           <a:lstStyle/>
           <a:p>
             <a:r>
-              <a:rPr lang="en-US" smtClean="0"/>
+              <a:rPr lang="en-US"/>
               <a:t>Click to edit Master title style</a:t>
             </a:r>
-            <a:endParaRPr lang="en-US"/>
           </a:p>
         </p:txBody>
       </p:sp>
@@ -3354,38 +3744,37 @@
           <a:p>
             <a:pPr lvl="0"/>
             <a:r>
-              <a:rPr lang="en-US" smtClean="0"/>
+              <a:rPr lang="en-US"/>
               <a:t>Click to edit Master text styles</a:t>
             </a:r>
           </a:p>
           <a:p>
             <a:pPr lvl="1"/>
             <a:r>
-              <a:rPr lang="en-US" smtClean="0"/>
+              <a:rPr lang="en-US"/>
               <a:t>Second level</a:t>
             </a:r>
           </a:p>
           <a:p>
             <a:pPr lvl="2"/>
             <a:r>
-              <a:rPr lang="en-US" smtClean="0"/>
+              <a:rPr lang="en-US"/>
               <a:t>Third level</a:t>
             </a:r>
           </a:p>
           <a:p>
             <a:pPr lvl="3"/>
             <a:r>
-              <a:rPr lang="en-US" smtClean="0"/>
+              <a:rPr lang="en-US"/>
               <a:t>Fourth level</a:t>
             </a:r>
           </a:p>
           <a:p>
             <a:pPr lvl="4"/>
             <a:r>
-              <a:rPr lang="en-US" smtClean="0"/>
+              <a:rPr lang="en-US"/>
               <a:t>Fifth level</a:t>
             </a:r>
-            <a:endParaRPr lang="en-US"/>
           </a:p>
         </p:txBody>
       </p:sp>
@@ -3439,38 +3828,37 @@
           <a:p>
             <a:pPr lvl="0"/>
             <a:r>
-              <a:rPr lang="en-US" smtClean="0"/>
+              <a:rPr lang="en-US"/>
               <a:t>Click to edit Master text styles</a:t>
             </a:r>
           </a:p>
           <a:p>
             <a:pPr lvl="1"/>
             <a:r>
-              <a:rPr lang="en-US" smtClean="0"/>
+              <a:rPr lang="en-US"/>
               <a:t>Second level</a:t>
             </a:r>
           </a:p>
           <a:p>
             <a:pPr lvl="2"/>
             <a:r>
-              <a:rPr lang="en-US" smtClean="0"/>
+              <a:rPr lang="en-US"/>
               <a:t>Third level</a:t>
             </a:r>
           </a:p>
           <a:p>
             <a:pPr lvl="3"/>
             <a:r>
-              <a:rPr lang="en-US" smtClean="0"/>
+              <a:rPr lang="en-US"/>
               <a:t>Fourth level</a:t>
             </a:r>
           </a:p>
           <a:p>
             <a:pPr lvl="4"/>
             <a:r>
-              <a:rPr lang="en-US" smtClean="0"/>
+              <a:rPr lang="en-US"/>
               <a:t>Fifth level</a:t>
             </a:r>
-            <a:endParaRPr lang="en-US"/>
           </a:p>
         </p:txBody>
       </p:sp>
@@ -3491,7 +3879,7 @@
           <a:p>
             <a:fld id="{5BCAD085-E8A6-8845-BD4E-CB4CCA059FC4}" type="datetimeFigureOut">
               <a:rPr lang="en-US" smtClean="0"/>
-              <a:t>1/27/13</a:t>
+              <a:t>8/16/2026</a:t>
             </a:fld>
             <a:endParaRPr lang="en-US"/>
           </a:p>
@@ -3589,10 +3977,9 @@
           </a:lstStyle>
           <a:p>
             <a:r>
-              <a:rPr lang="en-US" smtClean="0"/>
+              <a:rPr lang="en-US"/>
               <a:t>Click to edit Master title style</a:t>
             </a:r>
-            <a:endParaRPr lang="en-US"/>
           </a:p>
         </p:txBody>
       </p:sp>
@@ -3655,7 +4042,7 @@
           <a:p>
             <a:pPr lvl="0"/>
             <a:r>
-              <a:rPr lang="en-US" smtClean="0"/>
+              <a:rPr lang="en-US"/>
               <a:t>Click to edit Master text styles</a:t>
             </a:r>
           </a:p>
@@ -3711,38 +4098,37 @@
           <a:p>
             <a:pPr lvl="0"/>
             <a:r>
-              <a:rPr lang="en-US" smtClean="0"/>
+              <a:rPr lang="en-US"/>
               <a:t>Click to edit Master text styles</a:t>
             </a:r>
           </a:p>
           <a:p>
             <a:pPr lvl="1"/>
             <a:r>
-              <a:rPr lang="en-US" smtClean="0"/>
+              <a:rPr lang="en-US"/>
               <a:t>Second level</a:t>
             </a:r>
           </a:p>
           <a:p>
             <a:pPr lvl="2"/>
             <a:r>
-              <a:rPr lang="en-US" smtClean="0"/>
+              <a:rPr lang="en-US"/>
               <a:t>Third level</a:t>
             </a:r>
           </a:p>
           <a:p>
             <a:pPr lvl="3"/>
             <a:r>
-              <a:rPr lang="en-US" smtClean="0"/>
+              <a:rPr lang="en-US"/>
               <a:t>Fourth level</a:t>
             </a:r>
           </a:p>
           <a:p>
             <a:pPr lvl="4"/>
             <a:r>
-              <a:rPr lang="en-US" smtClean="0"/>
+              <a:rPr lang="en-US"/>
               <a:t>Fifth level</a:t>
             </a:r>
-            <a:endParaRPr lang="en-US"/>
           </a:p>
         </p:txBody>
       </p:sp>
@@ -3805,7 +4191,7 @@
           <a:p>
             <a:pPr lvl="0"/>
             <a:r>
-              <a:rPr lang="en-US" smtClean="0"/>
+              <a:rPr lang="en-US"/>
               <a:t>Click to edit Master text styles</a:t>
             </a:r>
           </a:p>
@@ -3861,38 +4247,37 @@
           <a:p>
             <a:pPr lvl="0"/>
             <a:r>
-              <a:rPr lang="en-US" smtClean="0"/>
+              <a:rPr lang="en-US"/>
               <a:t>Click to edit Master text styles</a:t>
             </a:r>
           </a:p>
           <a:p>
             <a:pPr lvl="1"/>
             <a:r>
-              <a:rPr lang="en-US" smtClean="0"/>
+              <a:rPr lang="en-US"/>
               <a:t>Second level</a:t>
             </a:r>
           </a:p>
           <a:p>
             <a:pPr lvl="2"/>
             <a:r>
-              <a:rPr lang="en-US" smtClean="0"/>
+              <a:rPr lang="en-US"/>
               <a:t>Third level</a:t>
             </a:r>
           </a:p>
           <a:p>
             <a:pPr lvl="3"/>
             <a:r>
-              <a:rPr lang="en-US" smtClean="0"/>
+              <a:rPr lang="en-US"/>
               <a:t>Fourth level</a:t>
             </a:r>
           </a:p>
           <a:p>
             <a:pPr lvl="4"/>
             <a:r>
-              <a:rPr lang="en-US" smtClean="0"/>
+              <a:rPr lang="en-US"/>
               <a:t>Fifth level</a:t>
             </a:r>
-            <a:endParaRPr lang="en-US"/>
           </a:p>
         </p:txBody>
       </p:sp>
@@ -3913,7 +4298,7 @@
           <a:p>
             <a:fld id="{5BCAD085-E8A6-8845-BD4E-CB4CCA059FC4}" type="datetimeFigureOut">
               <a:rPr lang="en-US" smtClean="0"/>
-              <a:t>1/27/13</a:t>
+              <a:t>8/16/2026</a:t>
             </a:fld>
             <a:endParaRPr lang="en-US"/>
           </a:p>
@@ -4007,10 +4392,9 @@
           <a:lstStyle/>
           <a:p>
             <a:r>
-              <a:rPr lang="en-US" smtClean="0"/>
+              <a:rPr lang="en-US"/>
               <a:t>Click to edit Master title style</a:t>
             </a:r>
-            <a:endParaRPr lang="en-US"/>
           </a:p>
         </p:txBody>
       </p:sp>
@@ -4031,7 +4415,7 @@
           <a:p>
             <a:fld id="{5BCAD085-E8A6-8845-BD4E-CB4CCA059FC4}" type="datetimeFigureOut">
               <a:rPr lang="en-US" smtClean="0"/>
-              <a:t>1/27/13</a:t>
+              <a:t>8/16/2026</a:t>
             </a:fld>
             <a:endParaRPr lang="en-US"/>
           </a:p>
@@ -4126,7 +4510,7 @@
           <a:p>
             <a:fld id="{5BCAD085-E8A6-8845-BD4E-CB4CCA059FC4}" type="datetimeFigureOut">
               <a:rPr lang="en-US" smtClean="0"/>
-              <a:t>1/27/13</a:t>
+              <a:t>8/16/2026</a:t>
             </a:fld>
             <a:endParaRPr lang="en-US"/>
           </a:p>
@@ -4229,10 +4613,9 @@
           </a:lstStyle>
           <a:p>
             <a:r>
-              <a:rPr lang="en-US" smtClean="0"/>
+              <a:rPr lang="en-US"/>
               <a:t>Click to edit Master title style</a:t>
             </a:r>
-            <a:endParaRPr lang="en-US"/>
           </a:p>
         </p:txBody>
       </p:sp>
@@ -4286,38 +4669,37 @@
           <a:p>
             <a:pPr lvl="0"/>
             <a:r>
-              <a:rPr lang="en-US" smtClean="0"/>
+              <a:rPr lang="en-US"/>
               <a:t>Click to edit Master text styles</a:t>
             </a:r>
           </a:p>
           <a:p>
             <a:pPr lvl="1"/>
             <a:r>
-              <a:rPr lang="en-US" smtClean="0"/>
+              <a:rPr lang="en-US"/>
               <a:t>Second level</a:t>
             </a:r>
           </a:p>
           <a:p>
             <a:pPr lvl="2"/>
             <a:r>
-              <a:rPr lang="en-US" smtClean="0"/>
+              <a:rPr lang="en-US"/>
               <a:t>Third level</a:t>
             </a:r>
           </a:p>
           <a:p>
             <a:pPr lvl="3"/>
             <a:r>
-              <a:rPr lang="en-US" smtClean="0"/>
+              <a:rPr lang="en-US"/>
               <a:t>Fourth level</a:t>
             </a:r>
           </a:p>
           <a:p>
             <a:pPr lvl="4"/>
             <a:r>
-              <a:rPr lang="en-US" smtClean="0"/>
+              <a:rPr lang="en-US"/>
               <a:t>Fifth level</a:t>
             </a:r>
-            <a:endParaRPr lang="en-US"/>
           </a:p>
         </p:txBody>
       </p:sp>
@@ -4380,7 +4762,7 @@
           <a:p>
             <a:pPr lvl="0"/>
             <a:r>
-              <a:rPr lang="en-US" smtClean="0"/>
+              <a:rPr lang="en-US"/>
               <a:t>Click to edit Master text styles</a:t>
             </a:r>
           </a:p>
@@ -4403,7 +4785,7 @@
           <a:p>
             <a:fld id="{5BCAD085-E8A6-8845-BD4E-CB4CCA059FC4}" type="datetimeFigureOut">
               <a:rPr lang="en-US" smtClean="0"/>
-              <a:t>1/27/13</a:t>
+              <a:t>8/16/2026</a:t>
             </a:fld>
             <a:endParaRPr lang="en-US"/>
           </a:p>
@@ -4506,10 +4888,9 @@
           </a:lstStyle>
           <a:p>
             <a:r>
-              <a:rPr lang="en-US" smtClean="0"/>
+              <a:rPr lang="en-US"/>
               <a:t>Click to edit Master title style</a:t>
             </a:r>
-            <a:endParaRPr lang="en-US"/>
           </a:p>
         </p:txBody>
       </p:sp>
@@ -4633,7 +5014,7 @@
           <a:p>
             <a:pPr lvl="0"/>
             <a:r>
-              <a:rPr lang="en-US" smtClean="0"/>
+              <a:rPr lang="en-US"/>
               <a:t>Click to edit Master text styles</a:t>
             </a:r>
           </a:p>
@@ -4656,7 +5037,7 @@
           <a:p>
             <a:fld id="{5BCAD085-E8A6-8845-BD4E-CB4CCA059FC4}" type="datetimeFigureOut">
               <a:rPr lang="en-US" smtClean="0"/>
-              <a:t>1/27/13</a:t>
+              <a:t>8/16/2026</a:t>
             </a:fld>
             <a:endParaRPr lang="en-US"/>
           </a:p>
@@ -4765,10 +5146,9 @@
           <a:lstStyle/>
           <a:p>
             <a:r>
-              <a:rPr lang="en-US" smtClean="0"/>
+              <a:rPr lang="en-US"/>
               <a:t>Click to edit Master title style</a:t>
             </a:r>
-            <a:endParaRPr lang="en-US"/>
           </a:p>
         </p:txBody>
       </p:sp>
@@ -4799,38 +5179,37 @@
           <a:p>
             <a:pPr lvl="0"/>
             <a:r>
-              <a:rPr lang="en-US" smtClean="0"/>
+              <a:rPr lang="en-US"/>
               <a:t>Click to edit Master text styles</a:t>
             </a:r>
           </a:p>
           <a:p>
             <a:pPr lvl="1"/>
             <a:r>
-              <a:rPr lang="en-US" smtClean="0"/>
+              <a:rPr lang="en-US"/>
               <a:t>Second level</a:t>
             </a:r>
           </a:p>
           <a:p>
             <a:pPr lvl="2"/>
             <a:r>
-              <a:rPr lang="en-US" smtClean="0"/>
+              <a:rPr lang="en-US"/>
               <a:t>Third level</a:t>
             </a:r>
           </a:p>
           <a:p>
             <a:pPr lvl="3"/>
             <a:r>
-              <a:rPr lang="en-US" smtClean="0"/>
+              <a:rPr lang="en-US"/>
               <a:t>Fourth level</a:t>
             </a:r>
           </a:p>
           <a:p>
             <a:pPr lvl="4"/>
             <a:r>
-              <a:rPr lang="en-US" smtClean="0"/>
+              <a:rPr lang="en-US"/>
               <a:t>Fifth level</a:t>
             </a:r>
-            <a:endParaRPr lang="en-US"/>
           </a:p>
         </p:txBody>
       </p:sp>
@@ -4869,7 +5248,7 @@
           <a:p>
             <a:fld id="{5BCAD085-E8A6-8845-BD4E-CB4CCA059FC4}" type="datetimeFigureOut">
               <a:rPr lang="en-US" smtClean="0"/>
-              <a:t>1/27/13</a:t>
+              <a:t>8/16/2026</a:t>
             </a:fld>
             <a:endParaRPr lang="en-US"/>
           </a:p>
@@ -5228,7 +5607,7 @@
 </file>
 
 <file path=ppt/slides/slide1.xml><?xml version="1.0" encoding="utf-8"?>
-<p:sld xmlns:a="http://schemas.openxmlformats.org/drawingml/2006/main" xmlns:p="http://schemas.openxmlformats.org/presentationml/2006/main" xmlns:r="http://schemas.openxmlformats.org/officeDocument/2006/relationships">
+<p:sld xmlns:a="http://schemas.openxmlformats.org/drawingml/2006/main" xmlns:r="http://schemas.openxmlformats.org/officeDocument/2006/relationships" xmlns:p="http://schemas.openxmlformats.org/presentationml/2006/main">
   <p:cSld>
     <p:spTree>
       <p:nvGrpSpPr>
@@ -5236,7 +5615,14 @@
         <p:cNvGrpSpPr/>
         <p:nvPr/>
       </p:nvGrpSpPr>
-      <p:grpSpPr/>
+      <p:grpSpPr>
+        <a:xfrm>
+          <a:off x="0" y="0"/>
+          <a:ext cx="0" cy="0"/>
+          <a:chOff x="0" y="0"/>
+          <a:chExt cx="0" cy="0"/>
+        </a:xfrm>
+      </p:grpSpPr>
       <p:sp>
         <p:nvSpPr>
           <p:cNvPr id="2" name="Rectangle 1"/>
@@ -5278,6 +5664,7 @@
           <a:lstStyle/>
           <a:p>
             <a:pPr algn="ctr"/>
+            <a:endParaRPr/>
           </a:p>
         </p:txBody>
       </p:sp>
@@ -5298,7 +5685,7 @@
           <a:noFill/>
         </p:spPr>
         <p:txBody>
-          <a:bodyPr wrap="square" lIns="0" rIns="0" tIns="0" bIns="0" anchor="t">
+          <a:bodyPr wrap="square" lIns="0" tIns="0" rIns="0" bIns="0" anchor="t">
             <a:spAutoFit/>
           </a:bodyPr>
           <a:lstStyle/>
@@ -5337,7 +5724,7 @@
           <a:noFill/>
         </p:spPr>
         <p:txBody>
-          <a:bodyPr wrap="square" lIns="0" rIns="0" tIns="0" bIns="0" anchor="t">
+          <a:bodyPr wrap="square" lIns="0" tIns="0" rIns="0" bIns="0" anchor="t">
             <a:spAutoFit/>
           </a:bodyPr>
           <a:lstStyle/>
@@ -5348,14 +5735,56 @@
               </a:lnSpc>
             </a:pPr>
             <a:r>
-              <a:rPr sz="2000" b="0">
+              <a:rPr sz="2000" b="0" dirty="0" err="1">
                 <a:solidFill>
                   <a:srgbClr val="16212E"/>
                 </a:solidFill>
                 <a:latin typeface="Microsoft JhengHei"/>
               </a:rPr>
-              <a:t>地端 AI 事件判讀 —— 六個月、三道決策門的立案提案</a:t>
-            </a:r>
+              <a:t>地端</a:t>
+            </a:r>
+            <a:r>
+              <a:rPr sz="2000" b="0" dirty="0">
+                <a:solidFill>
+                  <a:srgbClr val="16212E"/>
+                </a:solidFill>
+                <a:latin typeface="Microsoft JhengHei"/>
+              </a:rPr>
+              <a:t> AI </a:t>
+            </a:r>
+            <a:r>
+              <a:rPr sz="2000" b="0" dirty="0" err="1">
+                <a:solidFill>
+                  <a:srgbClr val="16212E"/>
+                </a:solidFill>
+                <a:latin typeface="Microsoft JhengHei"/>
+              </a:rPr>
+              <a:t>事件判讀</a:t>
+            </a:r>
+            <a:r>
+              <a:rPr sz="2000" b="0" dirty="0">
+                <a:solidFill>
+                  <a:srgbClr val="16212E"/>
+                </a:solidFill>
+                <a:latin typeface="Microsoft JhengHei"/>
+              </a:rPr>
+              <a:t> —— </a:t>
+            </a:r>
+            <a:r>
+              <a:rPr sz="2000" b="0" dirty="0" err="1">
+                <a:solidFill>
+                  <a:srgbClr val="16212E"/>
+                </a:solidFill>
+                <a:latin typeface="Microsoft JhengHei"/>
+              </a:rPr>
+              <a:t>六個月、三道決策門的立案提案</a:t>
+            </a:r>
+            <a:endParaRPr sz="2000" b="0" dirty="0">
+              <a:solidFill>
+                <a:srgbClr val="16212E"/>
+              </a:solidFill>
+              <a:latin typeface="Microsoft JhengHei"/>
+            </a:endParaRPr>
           </a:p>
         </p:txBody>
       </p:sp>
@@ -5400,6 +5829,7 @@
           <a:lstStyle/>
           <a:p>
             <a:pPr algn="ctr"/>
+            <a:endParaRPr/>
           </a:p>
         </p:txBody>
       </p:sp>
@@ -5420,7 +5850,7 @@
           <a:noFill/>
         </p:spPr>
         <p:txBody>
-          <a:bodyPr wrap="square" lIns="0" rIns="0" tIns="0" bIns="0" anchor="t">
+          <a:bodyPr wrap="square" lIns="0" tIns="0" rIns="0" bIns="0" anchor="t">
             <a:spAutoFit/>
           </a:bodyPr>
           <a:lstStyle/>
@@ -5459,7 +5889,7 @@
           <a:noFill/>
         </p:spPr>
         <p:txBody>
-          <a:bodyPr wrap="square" lIns="0" rIns="0" tIns="0" bIns="0" anchor="t">
+          <a:bodyPr wrap="square" lIns="0" tIns="0" rIns="0" bIns="0" anchor="t">
             <a:spAutoFit/>
           </a:bodyPr>
           <a:lstStyle/>
@@ -5470,14 +5900,74 @@
               </a:lnSpc>
             </a:pPr>
             <a:r>
-              <a:rPr sz="1300" b="0">
+              <a:rPr sz="1300" b="0" dirty="0" err="1">
                 <a:solidFill>
                   <a:srgbClr val="6B7885"/>
                 </a:solidFill>
                 <a:latin typeface="Microsoft JhengHei"/>
               </a:rPr>
-              <a:t>客戶是車隊 —— 物流 · 客運 · 租賃;車上裝我們的鏡頭與車機</a:t>
-            </a:r>
+              <a:t>客戶是車隊</a:t>
+            </a:r>
+            <a:r>
+              <a:rPr sz="1300" b="0" dirty="0">
+                <a:solidFill>
+                  <a:srgbClr val="6B7885"/>
+                </a:solidFill>
+                <a:latin typeface="Microsoft JhengHei"/>
+              </a:rPr>
+              <a:t> —— </a:t>
+            </a:r>
+            <a:r>
+              <a:rPr sz="1300" b="0" dirty="0" err="1">
+                <a:solidFill>
+                  <a:srgbClr val="6B7885"/>
+                </a:solidFill>
+                <a:latin typeface="Microsoft JhengHei"/>
+              </a:rPr>
+              <a:t>物流</a:t>
+            </a:r>
+            <a:r>
+              <a:rPr sz="1300" b="0" dirty="0">
+                <a:solidFill>
+                  <a:srgbClr val="6B7885"/>
+                </a:solidFill>
+                <a:latin typeface="Microsoft JhengHei"/>
+              </a:rPr>
+              <a:t> · </a:t>
+            </a:r>
+            <a:r>
+              <a:rPr sz="1300" b="0" dirty="0" err="1">
+                <a:solidFill>
+                  <a:srgbClr val="6B7885"/>
+                </a:solidFill>
+                <a:latin typeface="Microsoft JhengHei"/>
+              </a:rPr>
+              <a:t>客運</a:t>
+            </a:r>
+            <a:r>
+              <a:rPr sz="1300" b="0" dirty="0">
+                <a:solidFill>
+                  <a:srgbClr val="6B7885"/>
+                </a:solidFill>
+                <a:latin typeface="Microsoft JhengHei"/>
+              </a:rPr>
+              <a:t> · </a:t>
+            </a:r>
+            <a:r>
+              <a:rPr sz="1300" b="0" dirty="0" err="1">
+                <a:solidFill>
+                  <a:srgbClr val="6B7885"/>
+                </a:solidFill>
+                <a:latin typeface="Microsoft JhengHei"/>
+              </a:rPr>
+              <a:t>租賃;車上裝我們的鏡頭與車機</a:t>
+            </a:r>
+            <a:endParaRPr sz="1300" b="0" dirty="0">
+              <a:solidFill>
+                <a:srgbClr val="6B7885"/>
+              </a:solidFill>
+              <a:latin typeface="Microsoft JhengHei"/>
+            </a:endParaRPr>
           </a:p>
           <a:p>
             <a:pPr algn="l">
@@ -5486,13 +5976,94 @@
               </a:lnSpc>
             </a:pPr>
             <a:r>
-              <a:rPr sz="1300" b="0">
+              <a:rPr sz="1300" b="0" dirty="0" err="1">
                 <a:solidFill>
                   <a:srgbClr val="6B7885"/>
                 </a:solidFill>
                 <a:latin typeface="Microsoft JhengHei"/>
               </a:rPr>
-              <a:t>鏡頭偵測到一次危險駕駛 → 記一筆「事件」(影片 + 時間地點 + 系統分類)</a:t>
+              <a:t>鏡頭偵測到一次危險駕駛</a:t>
+            </a:r>
+            <a:r>
+              <a:rPr sz="1300" b="0" dirty="0">
+                <a:solidFill>
+                  <a:srgbClr val="6B7885"/>
+                </a:solidFill>
+                <a:latin typeface="Microsoft JhengHei"/>
+              </a:rPr>
+              <a:t> → </a:t>
+            </a:r>
+            <a:r>
+              <a:rPr sz="1300" b="0" dirty="0" err="1">
+                <a:solidFill>
+                  <a:srgbClr val="6B7885"/>
+                </a:solidFill>
+                <a:latin typeface="Microsoft JhengHei"/>
+              </a:rPr>
+              <a:t>記一筆「事件</a:t>
+            </a:r>
+            <a:r>
+              <a:rPr sz="1300" b="0" dirty="0">
+                <a:solidFill>
+                  <a:srgbClr val="6B7885"/>
+                </a:solidFill>
+                <a:latin typeface="Microsoft JhengHei"/>
+              </a:rPr>
+              <a:t>」(</a:t>
+            </a:r>
+            <a:r>
+              <a:rPr sz="1300" b="0" dirty="0" err="1">
+                <a:solidFill>
+                  <a:srgbClr val="6B7885"/>
+                </a:solidFill>
+                <a:latin typeface="Microsoft JhengHei"/>
+              </a:rPr>
+              <a:t>影片</a:t>
+            </a:r>
+            <a:r>
+              <a:rPr sz="1300" b="0" dirty="0">
+                <a:solidFill>
+                  <a:srgbClr val="6B7885"/>
+                </a:solidFill>
+                <a:latin typeface="Microsoft JhengHei"/>
+              </a:rPr>
+              <a:t> + </a:t>
+            </a:r>
+            <a:r>
+              <a:rPr sz="1300" b="0" dirty="0" err="1">
+                <a:solidFill>
+                  <a:srgbClr val="6B7885"/>
+                </a:solidFill>
+                <a:latin typeface="Microsoft JhengHei"/>
+              </a:rPr>
+              <a:t>時間地點</a:t>
+            </a:r>
+            <a:r>
+              <a:rPr sz="1300" b="0" dirty="0">
+                <a:solidFill>
+                  <a:srgbClr val="6B7885"/>
+                </a:solidFill>
+                <a:latin typeface="Microsoft JhengHei"/>
+              </a:rPr>
+              <a:t> + </a:t>
+            </a:r>
+            <a:r>
+              <a:rPr sz="1300" b="0" dirty="0" err="1">
+                <a:solidFill>
+                  <a:srgbClr val="6B7885"/>
+                </a:solidFill>
+                <a:latin typeface="Microsoft JhengHei"/>
+              </a:rPr>
+              <a:t>系統分類</a:t>
+            </a:r>
+            <a:r>
+              <a:rPr sz="1300" b="0" dirty="0">
+                <a:solidFill>
+                  <a:srgbClr val="6B7885"/>
+                </a:solidFill>
+                <a:latin typeface="Microsoft JhengHei"/>
+              </a:rPr>
+              <a:t>)</a:t>
             </a:r>
           </a:p>
           <a:p>
@@ -5502,14 +6073,56 @@
               </a:lnSpc>
             </a:pPr>
             <a:r>
-              <a:rPr sz="1300" b="0">
+              <a:rPr sz="1300" b="0" dirty="0" err="1">
                 <a:solidFill>
                   <a:srgbClr val="6B7885"/>
                 </a:solidFill>
                 <a:latin typeface="Microsoft JhengHei"/>
               </a:rPr>
-              <a:t>客戶回頭說「這筆判錯了」= 一次「爭議」—— 只能由人重看影片才判得出來</a:t>
-            </a:r>
+              <a:t>客戶回頭說「這筆判錯了</a:t>
+            </a:r>
+            <a:r>
+              <a:rPr sz="1300" b="0" dirty="0">
+                <a:solidFill>
+                  <a:srgbClr val="6B7885"/>
+                </a:solidFill>
+                <a:latin typeface="Microsoft JhengHei"/>
+              </a:rPr>
+              <a:t>」= </a:t>
+            </a:r>
+            <a:r>
+              <a:rPr sz="1300" b="0" dirty="0" err="1">
+                <a:solidFill>
+                  <a:srgbClr val="6B7885"/>
+                </a:solidFill>
+                <a:latin typeface="Microsoft JhengHei"/>
+              </a:rPr>
+              <a:t>一次「爭議</a:t>
+            </a:r>
+            <a:r>
+              <a:rPr sz="1300" b="0" dirty="0">
+                <a:solidFill>
+                  <a:srgbClr val="6B7885"/>
+                </a:solidFill>
+                <a:latin typeface="Microsoft JhengHei"/>
+              </a:rPr>
+              <a:t>」—— </a:t>
+            </a:r>
+            <a:r>
+              <a:rPr sz="1300" b="0" dirty="0" err="1">
+                <a:solidFill>
+                  <a:srgbClr val="6B7885"/>
+                </a:solidFill>
+                <a:latin typeface="Microsoft JhengHei"/>
+              </a:rPr>
+              <a:t>只能由人重看影片才判得出來</a:t>
+            </a:r>
+            <a:endParaRPr sz="1300" b="0" dirty="0">
+              <a:solidFill>
+                <a:srgbClr val="6B7885"/>
+              </a:solidFill>
+              <a:latin typeface="Microsoft JhengHei"/>
+            </a:endParaRPr>
           </a:p>
           <a:p>
             <a:pPr algn="l">
@@ -5518,14 +6131,74 @@
               </a:lnSpc>
             </a:pPr>
             <a:r>
-              <a:rPr sz="1300" b="0">
+              <a:rPr sz="1300" b="0" dirty="0" err="1">
                 <a:solidFill>
                   <a:srgbClr val="6B7885"/>
                 </a:solidFill>
                 <a:latin typeface="Microsoft JhengHei"/>
               </a:rPr>
-              <a:t>單一大型車隊約 3,000 筆事件/天 · 全公司 5 位專職分析人員逐筆看</a:t>
-            </a:r>
+              <a:t>單一大型車隊約</a:t>
+            </a:r>
+            <a:r>
+              <a:rPr sz="1300" b="0" dirty="0">
+                <a:solidFill>
+                  <a:srgbClr val="6B7885"/>
+                </a:solidFill>
+                <a:latin typeface="Microsoft JhengHei"/>
+              </a:rPr>
+              <a:t> 3,000 </a:t>
+            </a:r>
+            <a:r>
+              <a:rPr sz="1300" b="0" dirty="0" err="1">
+                <a:solidFill>
+                  <a:srgbClr val="6B7885"/>
+                </a:solidFill>
+                <a:latin typeface="Microsoft JhengHei"/>
+              </a:rPr>
+              <a:t>筆事件</a:t>
+            </a:r>
+            <a:r>
+              <a:rPr sz="1300" b="0" dirty="0">
+                <a:solidFill>
+                  <a:srgbClr val="6B7885"/>
+                </a:solidFill>
+                <a:latin typeface="Microsoft JhengHei"/>
+              </a:rPr>
+              <a:t>/天 · </a:t>
+            </a:r>
+            <a:r>
+              <a:rPr sz="1300" b="0" dirty="0" err="1">
+                <a:solidFill>
+                  <a:srgbClr val="6B7885"/>
+                </a:solidFill>
+                <a:latin typeface="Microsoft JhengHei"/>
+              </a:rPr>
+              <a:t>全公司</a:t>
+            </a:r>
+            <a:r>
+              <a:rPr sz="1300" b="0" dirty="0">
+                <a:solidFill>
+                  <a:srgbClr val="6B7885"/>
+                </a:solidFill>
+                <a:latin typeface="Microsoft JhengHei"/>
+              </a:rPr>
+              <a:t> 5 </a:t>
+            </a:r>
+            <a:r>
+              <a:rPr sz="1300" b="0" dirty="0" err="1">
+                <a:solidFill>
+                  <a:srgbClr val="6B7885"/>
+                </a:solidFill>
+                <a:latin typeface="Microsoft JhengHei"/>
+              </a:rPr>
+              <a:t>位專職分析人員逐筆看</a:t>
+            </a:r>
+            <a:endParaRPr sz="1300" b="0" dirty="0">
+              <a:solidFill>
+                <a:srgbClr val="6B7885"/>
+              </a:solidFill>
+              <a:latin typeface="Microsoft JhengHei"/>
+            </a:endParaRPr>
           </a:p>
         </p:txBody>
       </p:sp>
@@ -5546,7 +6219,7 @@
           <a:noFill/>
         </p:spPr>
         <p:txBody>
-          <a:bodyPr wrap="square" lIns="0" rIns="0" tIns="0" bIns="0" anchor="t">
+          <a:bodyPr wrap="square" lIns="0" tIns="0" rIns="0" bIns="0" anchor="t">
             <a:spAutoFit/>
           </a:bodyPr>
           <a:lstStyle/>
@@ -5609,7 +6282,7 @@
         <p:spPr>
           <a:xfrm>
             <a:off x="960120" y="6217920"/>
-            <a:ext cx="9311335" cy="457200"/>
+            <a:ext cx="10325295" cy="201530"/>
           </a:xfrm>
           <a:prstGeom prst="rect">
             <a:avLst/>
@@ -5617,7 +6290,7 @@
           <a:noFill/>
         </p:spPr>
         <p:txBody>
-          <a:bodyPr wrap="square" lIns="0" rIns="0" tIns="0" bIns="0" anchor="t">
+          <a:bodyPr wrap="square" lIns="0" tIns="0" rIns="0" bIns="0" anchor="t">
             <a:spAutoFit/>
           </a:bodyPr>
           <a:lstStyle/>
@@ -5648,7 +6321,7 @@
 </file>
 
 <file path=ppt/slides/slide10.xml><?xml version="1.0" encoding="utf-8"?>
-<p:sld xmlns:a="http://schemas.openxmlformats.org/drawingml/2006/main" xmlns:p="http://schemas.openxmlformats.org/presentationml/2006/main" xmlns:r="http://schemas.openxmlformats.org/officeDocument/2006/relationships">
+<p:sld xmlns:a="http://schemas.openxmlformats.org/drawingml/2006/main" xmlns:r="http://schemas.openxmlformats.org/officeDocument/2006/relationships" xmlns:p="http://schemas.openxmlformats.org/presentationml/2006/main">
   <p:cSld>
     <p:spTree>
       <p:nvGrpSpPr>
@@ -5656,7 +6329,14 @@
         <p:cNvGrpSpPr/>
         <p:nvPr/>
       </p:nvGrpSpPr>
-      <p:grpSpPr/>
+      <p:grpSpPr>
+        <a:xfrm>
+          <a:off x="0" y="0"/>
+          <a:ext cx="0" cy="0"/>
+          <a:chOff x="0" y="0"/>
+          <a:chExt cx="0" cy="0"/>
+        </a:xfrm>
+      </p:grpSpPr>
       <p:sp>
         <p:nvSpPr>
           <p:cNvPr id="2" name="TextBox 1"/>
@@ -5674,7 +6354,7 @@
           <a:noFill/>
         </p:spPr>
         <p:txBody>
-          <a:bodyPr wrap="square" lIns="0" rIns="0" tIns="0" bIns="0" anchor="t">
+          <a:bodyPr wrap="square" lIns="0" tIns="0" rIns="0" bIns="0" anchor="t">
             <a:spAutoFit/>
           </a:bodyPr>
           <a:lstStyle/>
@@ -5713,7 +6393,7 @@
           <a:noFill/>
         </p:spPr>
         <p:txBody>
-          <a:bodyPr wrap="square" lIns="0" rIns="0" tIns="0" bIns="0" anchor="t">
+          <a:bodyPr wrap="square" lIns="0" tIns="0" rIns="0" bIns="0" anchor="t">
             <a:spAutoFit/>
           </a:bodyPr>
           <a:lstStyle/>
@@ -5752,7 +6432,7 @@
           <a:noFill/>
         </p:spPr>
         <p:txBody>
-          <a:bodyPr wrap="square" lIns="0" rIns="0" tIns="0" bIns="0" anchor="t">
+          <a:bodyPr wrap="square" lIns="0" tIns="0" rIns="0" bIns="0" anchor="t">
             <a:spAutoFit/>
           </a:bodyPr>
           <a:lstStyle/>
@@ -5815,6 +6495,7 @@
           <a:lstStyle/>
           <a:p>
             <a:pPr algn="ctr"/>
+            <a:endParaRPr/>
           </a:p>
         </p:txBody>
       </p:sp>
@@ -5859,6 +6540,7 @@
           <a:lstStyle/>
           <a:p>
             <a:pPr algn="ctr"/>
+            <a:endParaRPr/>
           </a:p>
         </p:txBody>
       </p:sp>
@@ -5879,7 +6561,7 @@
           <a:noFill/>
         </p:spPr>
         <p:txBody>
-          <a:bodyPr wrap="square" lIns="0" rIns="0" tIns="0" bIns="0" anchor="ctr">
+          <a:bodyPr wrap="square" lIns="0" tIns="0" rIns="0" bIns="0" anchor="ctr">
             <a:spAutoFit/>
           </a:bodyPr>
           <a:lstStyle/>
@@ -5918,7 +6600,7 @@
           <a:noFill/>
         </p:spPr>
         <p:txBody>
-          <a:bodyPr wrap="square" lIns="0" rIns="0" tIns="0" bIns="0" anchor="ctr">
+          <a:bodyPr wrap="square" lIns="0" tIns="0" rIns="0" bIns="0" anchor="ctr">
             <a:spAutoFit/>
           </a:bodyPr>
           <a:lstStyle/>
@@ -5948,8 +6630,8 @@
         </p:nvSpPr>
         <p:spPr>
           <a:xfrm>
-            <a:off x="7183343" y="1755648"/>
-            <a:ext cx="4240255" cy="393192"/>
+            <a:off x="4185819" y="1740680"/>
+            <a:ext cx="7237779" cy="423129"/>
           </a:xfrm>
           <a:prstGeom prst="rect">
             <a:avLst/>
@@ -5957,7 +6639,7 @@
           <a:noFill/>
         </p:spPr>
         <p:txBody>
-          <a:bodyPr wrap="square" lIns="0" rIns="0" tIns="0" bIns="0" anchor="ctr">
+          <a:bodyPr wrap="square" lIns="0" tIns="0" rIns="0" bIns="0" anchor="ctr">
             <a:spAutoFit/>
           </a:bodyPr>
           <a:lstStyle/>
@@ -5968,14 +6650,83 @@
               </a:lnSpc>
             </a:pPr>
             <a:r>
-              <a:rPr sz="1200" b="0">
+              <a:rPr sz="1200" b="0" dirty="0">
                 <a:solidFill>
                   <a:srgbClr val="6B7885"/>
                 </a:solidFill>
                 <a:latin typeface="Microsoft JhengHei"/>
               </a:rPr>
-              <a:t>交:公司第一份可稽核的錯誤率(含 95% CI)· 冷凍評估集 · 兩條工作流單位工時基準 · 每案結案方向黃金答案標籤 · 時間拆解與到件分布</a:t>
-            </a:r>
+              <a:t>交:公司第一份可稽核的錯誤率(含 95% CI)· </a:t>
+            </a:r>
+            <a:r>
+              <a:rPr sz="1200" b="0" dirty="0" err="1">
+                <a:solidFill>
+                  <a:srgbClr val="6B7885"/>
+                </a:solidFill>
+                <a:latin typeface="Microsoft JhengHei"/>
+              </a:rPr>
+              <a:t>冷凍評估集</a:t>
+            </a:r>
+            <a:r>
+              <a:rPr sz="1200" b="0" dirty="0">
+                <a:solidFill>
+                  <a:srgbClr val="6B7885"/>
+                </a:solidFill>
+                <a:latin typeface="Microsoft JhengHei"/>
+              </a:rPr>
+              <a:t> · </a:t>
+            </a:r>
+            <a:r>
+              <a:rPr sz="1200" b="0" dirty="0" err="1">
+                <a:solidFill>
+                  <a:srgbClr val="6B7885"/>
+                </a:solidFill>
+                <a:latin typeface="Microsoft JhengHei"/>
+              </a:rPr>
+              <a:t>兩條工作流單位工時基準</a:t>
+            </a:r>
+            <a:r>
+              <a:rPr sz="1200" b="0" dirty="0">
+                <a:solidFill>
+                  <a:srgbClr val="6B7885"/>
+                </a:solidFill>
+                <a:latin typeface="Microsoft JhengHei"/>
+              </a:rPr>
+              <a:t> · </a:t>
+            </a:r>
+            <a:r>
+              <a:rPr sz="1200" b="0" dirty="0" err="1">
+                <a:solidFill>
+                  <a:srgbClr val="6B7885"/>
+                </a:solidFill>
+                <a:latin typeface="Microsoft JhengHei"/>
+              </a:rPr>
+              <a:t>每案結案方向黃金答案標籤</a:t>
+            </a:r>
+            <a:r>
+              <a:rPr sz="1200" b="0" dirty="0">
+                <a:solidFill>
+                  <a:srgbClr val="6B7885"/>
+                </a:solidFill>
+                <a:latin typeface="Microsoft JhengHei"/>
+              </a:rPr>
+              <a:t> · </a:t>
+            </a:r>
+            <a:r>
+              <a:rPr sz="1200" b="0" dirty="0" err="1">
+                <a:solidFill>
+                  <a:srgbClr val="6B7885"/>
+                </a:solidFill>
+                <a:latin typeface="Microsoft JhengHei"/>
+              </a:rPr>
+              <a:t>時間拆解與到件分布</a:t>
+            </a:r>
+            <a:endParaRPr sz="1200" b="0" dirty="0">
+              <a:solidFill>
+                <a:srgbClr val="6B7885"/>
+              </a:solidFill>
+              <a:latin typeface="Microsoft JhengHei"/>
+            </a:endParaRPr>
           </a:p>
         </p:txBody>
       </p:sp>
@@ -6020,6 +6771,7 @@
           <a:lstStyle/>
           <a:p>
             <a:pPr algn="ctr"/>
+            <a:endParaRPr/>
           </a:p>
         </p:txBody>
       </p:sp>
@@ -6040,7 +6792,7 @@
           <a:noFill/>
         </p:spPr>
         <p:txBody>
-          <a:bodyPr wrap="square" lIns="0" rIns="0" tIns="0" bIns="0" anchor="ctr">
+          <a:bodyPr wrap="square" lIns="0" tIns="0" rIns="0" bIns="0" anchor="ctr">
             <a:spAutoFit/>
           </a:bodyPr>
           <a:lstStyle/>
@@ -6079,7 +6831,7 @@
           <a:noFill/>
         </p:spPr>
         <p:txBody>
-          <a:bodyPr wrap="square" lIns="0" rIns="0" tIns="0" bIns="0" anchor="ctr">
+          <a:bodyPr wrap="square" lIns="0" tIns="0" rIns="0" bIns="0" anchor="ctr">
             <a:spAutoFit/>
           </a:bodyPr>
           <a:lstStyle/>
@@ -6109,8 +6861,8 @@
         </p:nvSpPr>
         <p:spPr>
           <a:xfrm>
-            <a:off x="7183343" y="2240280"/>
-            <a:ext cx="4240255" cy="393192"/>
+            <a:off x="4185819" y="2225312"/>
+            <a:ext cx="7237780" cy="423129"/>
           </a:xfrm>
           <a:prstGeom prst="rect">
             <a:avLst/>
@@ -6118,7 +6870,7 @@
           <a:noFill/>
         </p:spPr>
         <p:txBody>
-          <a:bodyPr wrap="square" lIns="0" rIns="0" tIns="0" bIns="0" anchor="ctr">
+          <a:bodyPr wrap="square" lIns="0" tIns="0" rIns="0" bIns="0" anchor="ctr">
             <a:spAutoFit/>
           </a:bodyPr>
           <a:lstStyle/>
@@ -6129,14 +6881,110 @@
               </a:lnSpc>
             </a:pPr>
             <a:r>
-              <a:rPr sz="1200" b="0">
+              <a:rPr sz="1200" b="0" dirty="0" err="1">
                 <a:solidFill>
                   <a:srgbClr val="6B7885"/>
                 </a:solidFill>
                 <a:latin typeface="Microsoft JhengHei"/>
               </a:rPr>
-              <a:t>地端 VLM,篩檢與深挖由同一台設備分時;選型與量化規格於 G1 依 W1–6 量測定案(概念層次)。W8–12 離線試驗 → W12–24 只跑影子模式:機器出結論不對外送,人照常判</a:t>
-            </a:r>
+              <a:t>地端</a:t>
+            </a:r>
+            <a:r>
+              <a:rPr sz="1200" b="0" dirty="0">
+                <a:solidFill>
+                  <a:srgbClr val="6B7885"/>
+                </a:solidFill>
+                <a:latin typeface="Microsoft JhengHei"/>
+              </a:rPr>
+              <a:t> </a:t>
+            </a:r>
+            <a:r>
+              <a:rPr sz="1200" b="0" dirty="0" err="1">
+                <a:solidFill>
+                  <a:srgbClr val="6B7885"/>
+                </a:solidFill>
+                <a:latin typeface="Microsoft JhengHei"/>
+              </a:rPr>
+              <a:t>VLM,篩檢與深挖由同一台設備分時;選型與量化規格於</a:t>
+            </a:r>
+            <a:r>
+              <a:rPr sz="1200" b="0" dirty="0">
+                <a:solidFill>
+                  <a:srgbClr val="6B7885"/>
+                </a:solidFill>
+                <a:latin typeface="Microsoft JhengHei"/>
+              </a:rPr>
+              <a:t> G1 依 W1–6 </a:t>
+            </a:r>
+            <a:r>
+              <a:rPr sz="1200" b="0" dirty="0" err="1">
+                <a:solidFill>
+                  <a:srgbClr val="6B7885"/>
+                </a:solidFill>
+                <a:latin typeface="Microsoft JhengHei"/>
+              </a:rPr>
+              <a:t>量測定案</a:t>
+            </a:r>
+            <a:r>
+              <a:rPr sz="1200" b="0" dirty="0">
+                <a:solidFill>
+                  <a:srgbClr val="6B7885"/>
+                </a:solidFill>
+                <a:latin typeface="Microsoft JhengHei"/>
+              </a:rPr>
+              <a:t>(</a:t>
+            </a:r>
+            <a:r>
+              <a:rPr sz="1200" b="0" dirty="0" err="1">
+                <a:solidFill>
+                  <a:srgbClr val="6B7885"/>
+                </a:solidFill>
+                <a:latin typeface="Microsoft JhengHei"/>
+              </a:rPr>
+              <a:t>概念層次</a:t>
+            </a:r>
+            <a:r>
+              <a:rPr sz="1200" b="0" dirty="0">
+                <a:solidFill>
+                  <a:srgbClr val="6B7885"/>
+                </a:solidFill>
+                <a:latin typeface="Microsoft JhengHei"/>
+              </a:rPr>
+              <a:t>)。W8–12 </a:t>
+            </a:r>
+            <a:r>
+              <a:rPr sz="1200" b="0" dirty="0" err="1">
+                <a:solidFill>
+                  <a:srgbClr val="6B7885"/>
+                </a:solidFill>
+                <a:latin typeface="Microsoft JhengHei"/>
+              </a:rPr>
+              <a:t>離線試驗</a:t>
+            </a:r>
+            <a:r>
+              <a:rPr sz="1200" b="0" dirty="0">
+                <a:solidFill>
+                  <a:srgbClr val="6B7885"/>
+                </a:solidFill>
+                <a:latin typeface="Microsoft JhengHei"/>
+              </a:rPr>
+              <a:t> → W12–24 </a:t>
+            </a:r>
+            <a:r>
+              <a:rPr sz="1200" b="0" dirty="0" err="1">
+                <a:solidFill>
+                  <a:srgbClr val="6B7885"/>
+                </a:solidFill>
+                <a:latin typeface="Microsoft JhengHei"/>
+              </a:rPr>
+              <a:t>只跑影子模式:機器出結論不對外送,人照常判</a:t>
+            </a:r>
+            <a:endParaRPr sz="1200" b="0" dirty="0">
+              <a:solidFill>
+                <a:srgbClr val="6B7885"/>
+              </a:solidFill>
+              <a:latin typeface="Microsoft JhengHei"/>
+            </a:endParaRPr>
           </a:p>
         </p:txBody>
       </p:sp>
@@ -6185,6 +7033,7 @@
           <a:lstStyle/>
           <a:p>
             <a:pPr algn="ctr"/>
+            <a:endParaRPr/>
           </a:p>
         </p:txBody>
       </p:sp>
@@ -6205,7 +7054,7 @@
           <a:noFill/>
         </p:spPr>
         <p:txBody>
-          <a:bodyPr wrap="square" lIns="0" rIns="0" tIns="0" bIns="0" anchor="t">
+          <a:bodyPr wrap="square" lIns="0" tIns="0" rIns="0" bIns="0" anchor="t">
             <a:spAutoFit/>
           </a:bodyPr>
           <a:lstStyle/>
@@ -6270,6 +7119,7 @@
           <a:lstStyle/>
           <a:p>
             <a:pPr algn="ctr"/>
+            <a:endParaRPr/>
           </a:p>
         </p:txBody>
       </p:sp>
@@ -6290,7 +7140,7 @@
           <a:noFill/>
         </p:spPr>
         <p:txBody>
-          <a:bodyPr wrap="square" lIns="0" rIns="0" tIns="0" bIns="0" anchor="ctr">
+          <a:bodyPr wrap="square" lIns="0" tIns="0" rIns="0" bIns="0" anchor="ctr">
             <a:spAutoFit/>
           </a:bodyPr>
           <a:lstStyle/>
@@ -6329,7 +7179,7 @@
           <a:noFill/>
         </p:spPr>
         <p:txBody>
-          <a:bodyPr wrap="square" lIns="0" rIns="0" tIns="0" bIns="0" anchor="t">
+          <a:bodyPr wrap="square" lIns="0" tIns="0" rIns="0" bIns="0" anchor="t">
             <a:spAutoFit/>
           </a:bodyPr>
           <a:lstStyle/>
@@ -6412,6 +7262,7 @@
           <a:lstStyle/>
           <a:p>
             <a:pPr algn="ctr"/>
+            <a:endParaRPr/>
           </a:p>
         </p:txBody>
       </p:sp>
@@ -6432,7 +7283,7 @@
           <a:noFill/>
         </p:spPr>
         <p:txBody>
-          <a:bodyPr wrap="square" lIns="0" rIns="0" tIns="0" bIns="0" anchor="t">
+          <a:bodyPr wrap="square" lIns="0" tIns="0" rIns="0" bIns="0" anchor="t">
             <a:spAutoFit/>
           </a:bodyPr>
           <a:lstStyle/>
@@ -6497,6 +7348,7 @@
           <a:lstStyle/>
           <a:p>
             <a:pPr algn="ctr"/>
+            <a:endParaRPr/>
           </a:p>
         </p:txBody>
       </p:sp>
@@ -6517,7 +7369,7 @@
           <a:noFill/>
         </p:spPr>
         <p:txBody>
-          <a:bodyPr wrap="square" lIns="0" rIns="0" tIns="0" bIns="0" anchor="ctr">
+          <a:bodyPr wrap="square" lIns="0" tIns="0" rIns="0" bIns="0" anchor="ctr">
             <a:spAutoFit/>
           </a:bodyPr>
           <a:lstStyle/>
@@ -6556,7 +7408,7 @@
           <a:noFill/>
         </p:spPr>
         <p:txBody>
-          <a:bodyPr wrap="square" lIns="0" rIns="0" tIns="0" bIns="0" anchor="t">
+          <a:bodyPr wrap="square" lIns="0" tIns="0" rIns="0" bIns="0" anchor="t">
             <a:spAutoFit/>
           </a:bodyPr>
           <a:lstStyle/>
@@ -6639,6 +7491,7 @@
           <a:lstStyle/>
           <a:p>
             <a:pPr algn="ctr"/>
+            <a:endParaRPr/>
           </a:p>
         </p:txBody>
       </p:sp>
@@ -6659,7 +7512,7 @@
           <a:noFill/>
         </p:spPr>
         <p:txBody>
-          <a:bodyPr wrap="square" lIns="0" rIns="0" tIns="0" bIns="0" anchor="t">
+          <a:bodyPr wrap="square" lIns="0" tIns="0" rIns="0" bIns="0" anchor="t">
             <a:spAutoFit/>
           </a:bodyPr>
           <a:lstStyle/>
@@ -6724,6 +7577,7 @@
           <a:lstStyle/>
           <a:p>
             <a:pPr algn="ctr"/>
+            <a:endParaRPr/>
           </a:p>
         </p:txBody>
       </p:sp>
@@ -6744,7 +7598,7 @@
           <a:noFill/>
         </p:spPr>
         <p:txBody>
-          <a:bodyPr wrap="square" lIns="0" rIns="0" tIns="0" bIns="0" anchor="ctr">
+          <a:bodyPr wrap="square" lIns="0" tIns="0" rIns="0" bIns="0" anchor="ctr">
             <a:spAutoFit/>
           </a:bodyPr>
           <a:lstStyle/>
@@ -6783,7 +7637,7 @@
           <a:noFill/>
         </p:spPr>
         <p:txBody>
-          <a:bodyPr wrap="square" lIns="0" rIns="0" tIns="0" bIns="0" anchor="t">
+          <a:bodyPr wrap="square" lIns="0" tIns="0" rIns="0" bIns="0" anchor="t">
             <a:spAutoFit/>
           </a:bodyPr>
           <a:lstStyle/>
@@ -6840,9 +7694,27 @@
                 <a:tableStyleId>{5C22544A-7EE6-4342-B048-85BDC9FD1C3A}</a:tableStyleId>
               </a:tblPr>
               <a:tblGrid>
-                <a:gridCol w="2897642"/>
-                <a:gridCol w="3380582"/>
-                <a:gridCol w="3380582"/>
+                <a:gridCol w="2897642">
+                  <a:extLst>
+                    <a:ext uri="{9D8B030D-6E8A-4147-A177-3AD203B41FA5}">
+                      <a16:colId xmlns:a16="http://schemas.microsoft.com/office/drawing/2014/main" val="20000"/>
+                    </a:ext>
+                  </a:extLst>
+                </a:gridCol>
+                <a:gridCol w="3380582">
+                  <a:extLst>
+                    <a:ext uri="{9D8B030D-6E8A-4147-A177-3AD203B41FA5}">
+                      <a16:colId xmlns:a16="http://schemas.microsoft.com/office/drawing/2014/main" val="20001"/>
+                    </a:ext>
+                  </a:extLst>
+                </a:gridCol>
+                <a:gridCol w="3380582">
+                  <a:extLst>
+                    <a:ext uri="{9D8B030D-6E8A-4147-A177-3AD203B41FA5}">
+                      <a16:colId xmlns:a16="http://schemas.microsoft.com/office/drawing/2014/main" val="20002"/>
+                    </a:ext>
+                  </a:extLst>
+                </a:gridCol>
               </a:tblGrid>
               <a:tr h="329184">
                 <a:tc>
@@ -6851,15 +7723,7 @@
                     <a:lstStyle/>
                     <a:p>
                       <a:pPr algn="l"/>
-                      <a:r>
-                        <a:rPr sz="1200" b="1">
-                          <a:solidFill>
-                            <a:srgbClr val="FFFFFF"/>
-                          </a:solidFill>
-                          <a:latin typeface="Microsoft JhengHei"/>
-                        </a:rPr>
-                        <a:t/>
-                      </a:r>
+                      <a:endParaRPr/>
                     </a:p>
                   </a:txBody>
                   <a:tcPr marL="45720" marR="45720" marT="18288" marB="18288" anchor="ctr">
@@ -6914,6 +7778,11 @@
                     </a:solidFill>
                   </a:tcPr>
                 </a:tc>
+                <a:extLst>
+                  <a:ext uri="{0D108BD9-81ED-4DB2-BD59-A6C34878D82A}">
+                    <a16:rowId xmlns:a16="http://schemas.microsoft.com/office/drawing/2014/main" val="10000"/>
+                  </a:ext>
+                </a:extLst>
               </a:tr>
               <a:tr h="292608">
                 <a:tc>
@@ -6985,6 +7854,11 @@
                     </a:solidFill>
                   </a:tcPr>
                 </a:tc>
+                <a:extLst>
+                  <a:ext uri="{0D108BD9-81ED-4DB2-BD59-A6C34878D82A}">
+                    <a16:rowId xmlns:a16="http://schemas.microsoft.com/office/drawing/2014/main" val="10001"/>
+                  </a:ext>
+                </a:extLst>
               </a:tr>
               <a:tr h="292608">
                 <a:tc>
@@ -7056,6 +7930,11 @@
                     </a:solidFill>
                   </a:tcPr>
                 </a:tc>
+                <a:extLst>
+                  <a:ext uri="{0D108BD9-81ED-4DB2-BD59-A6C34878D82A}">
+                    <a16:rowId xmlns:a16="http://schemas.microsoft.com/office/drawing/2014/main" val="10002"/>
+                  </a:ext>
+                </a:extLst>
               </a:tr>
               <a:tr h="292608">
                 <a:tc>
@@ -7127,6 +8006,11 @@
                     </a:solidFill>
                   </a:tcPr>
                 </a:tc>
+                <a:extLst>
+                  <a:ext uri="{0D108BD9-81ED-4DB2-BD59-A6C34878D82A}">
+                    <a16:rowId xmlns:a16="http://schemas.microsoft.com/office/drawing/2014/main" val="10003"/>
+                  </a:ext>
+                </a:extLst>
               </a:tr>
               <a:tr h="292608">
                 <a:tc>
@@ -7198,6 +8082,11 @@
                     </a:solidFill>
                   </a:tcPr>
                 </a:tc>
+                <a:extLst>
+                  <a:ext uri="{0D108BD9-81ED-4DB2-BD59-A6C34878D82A}">
+                    <a16:rowId xmlns:a16="http://schemas.microsoft.com/office/drawing/2014/main" val="10004"/>
+                  </a:ext>
+                </a:extLst>
               </a:tr>
             </a:tbl>
           </a:graphicData>
@@ -7212,7 +8101,7 @@
 </file>
 
 <file path=ppt/slides/slide11.xml><?xml version="1.0" encoding="utf-8"?>
-<p:sld xmlns:a="http://schemas.openxmlformats.org/drawingml/2006/main" xmlns:p="http://schemas.openxmlformats.org/presentationml/2006/main" xmlns:r="http://schemas.openxmlformats.org/officeDocument/2006/relationships">
+<p:sld xmlns:a="http://schemas.openxmlformats.org/drawingml/2006/main" xmlns:r="http://schemas.openxmlformats.org/officeDocument/2006/relationships" xmlns:p="http://schemas.openxmlformats.org/presentationml/2006/main">
   <p:cSld>
     <p:spTree>
       <p:nvGrpSpPr>
@@ -7220,7 +8109,14 @@
         <p:cNvGrpSpPr/>
         <p:nvPr/>
       </p:nvGrpSpPr>
-      <p:grpSpPr/>
+      <p:grpSpPr>
+        <a:xfrm>
+          <a:off x="0" y="0"/>
+          <a:ext cx="0" cy="0"/>
+          <a:chOff x="0" y="0"/>
+          <a:chExt cx="0" cy="0"/>
+        </a:xfrm>
+      </p:grpSpPr>
       <p:sp>
         <p:nvSpPr>
           <p:cNvPr id="2" name="TextBox 1"/>
@@ -7238,7 +8134,7 @@
           <a:noFill/>
         </p:spPr>
         <p:txBody>
-          <a:bodyPr wrap="square" lIns="0" rIns="0" tIns="0" bIns="0" anchor="t">
+          <a:bodyPr wrap="square" lIns="0" tIns="0" rIns="0" bIns="0" anchor="t">
             <a:spAutoFit/>
           </a:bodyPr>
           <a:lstStyle/>
@@ -7277,7 +8173,7 @@
           <a:noFill/>
         </p:spPr>
         <p:txBody>
-          <a:bodyPr wrap="square" lIns="0" rIns="0" tIns="0" bIns="0" anchor="t">
+          <a:bodyPr wrap="square" lIns="0" tIns="0" rIns="0" bIns="0" anchor="t">
             <a:spAutoFit/>
           </a:bodyPr>
           <a:lstStyle/>
@@ -7316,7 +8212,7 @@
           <a:noFill/>
         </p:spPr>
         <p:txBody>
-          <a:bodyPr wrap="square" lIns="0" rIns="0" tIns="0" bIns="0" anchor="t">
+          <a:bodyPr wrap="square" lIns="0" tIns="0" rIns="0" bIns="0" anchor="t">
             <a:spAutoFit/>
           </a:bodyPr>
           <a:lstStyle/>
@@ -7379,6 +8275,7 @@
           <a:lstStyle/>
           <a:p>
             <a:pPr algn="ctr"/>
+            <a:endParaRPr/>
           </a:p>
         </p:txBody>
       </p:sp>
@@ -7423,6 +8320,7 @@
           <a:lstStyle/>
           <a:p>
             <a:pPr algn="ctr"/>
+            <a:endParaRPr/>
           </a:p>
         </p:txBody>
       </p:sp>
@@ -7443,7 +8341,7 @@
           <a:noFill/>
         </p:spPr>
         <p:txBody>
-          <a:bodyPr wrap="square" lIns="0" rIns="0" tIns="0" bIns="0" anchor="ctr">
+          <a:bodyPr wrap="square" lIns="0" tIns="0" rIns="0" bIns="0" anchor="ctr">
             <a:spAutoFit/>
           </a:bodyPr>
           <a:lstStyle/>
@@ -7482,7 +8380,7 @@
           <a:noFill/>
         </p:spPr>
         <p:txBody>
-          <a:bodyPr wrap="square" lIns="0" rIns="0" tIns="0" bIns="0" anchor="ctr">
+          <a:bodyPr wrap="square" lIns="0" tIns="0" rIns="0" bIns="0" anchor="ctr">
             <a:spAutoFit/>
           </a:bodyPr>
           <a:lstStyle/>
@@ -7521,7 +8419,7 @@
           <a:noFill/>
         </p:spPr>
         <p:txBody>
-          <a:bodyPr wrap="square" lIns="0" rIns="0" tIns="0" bIns="0" anchor="ctr">
+          <a:bodyPr wrap="square" lIns="0" tIns="0" rIns="0" bIns="0" anchor="ctr">
             <a:spAutoFit/>
           </a:bodyPr>
           <a:lstStyle/>
@@ -7584,6 +8482,7 @@
           <a:lstStyle/>
           <a:p>
             <a:pPr algn="ctr"/>
+            <a:endParaRPr/>
           </a:p>
         </p:txBody>
       </p:sp>
@@ -7604,7 +8503,7 @@
           <a:noFill/>
         </p:spPr>
         <p:txBody>
-          <a:bodyPr wrap="square" lIns="0" rIns="0" tIns="0" bIns="0" anchor="ctr">
+          <a:bodyPr wrap="square" lIns="0" tIns="0" rIns="0" bIns="0" anchor="ctr">
             <a:spAutoFit/>
           </a:bodyPr>
           <a:lstStyle/>
@@ -7643,7 +8542,7 @@
           <a:noFill/>
         </p:spPr>
         <p:txBody>
-          <a:bodyPr wrap="square" lIns="0" rIns="0" tIns="0" bIns="0" anchor="ctr">
+          <a:bodyPr wrap="square" lIns="0" tIns="0" rIns="0" bIns="0" anchor="ctr">
             <a:spAutoFit/>
           </a:bodyPr>
           <a:lstStyle/>
@@ -7682,7 +8581,7 @@
           <a:noFill/>
         </p:spPr>
         <p:txBody>
-          <a:bodyPr wrap="square" lIns="0" rIns="0" tIns="0" bIns="0" anchor="ctr">
+          <a:bodyPr wrap="square" lIns="0" tIns="0" rIns="0" bIns="0" anchor="ctr">
             <a:spAutoFit/>
           </a:bodyPr>
           <a:lstStyle/>
@@ -7749,6 +8648,7 @@
           <a:lstStyle/>
           <a:p>
             <a:pPr algn="ctr"/>
+            <a:endParaRPr/>
           </a:p>
         </p:txBody>
       </p:sp>
@@ -7769,7 +8669,7 @@
           <a:noFill/>
         </p:spPr>
         <p:txBody>
-          <a:bodyPr wrap="square" lIns="0" rIns="0" tIns="0" bIns="0" anchor="t">
+          <a:bodyPr wrap="square" lIns="0" tIns="0" rIns="0" bIns="0" anchor="t">
             <a:spAutoFit/>
           </a:bodyPr>
           <a:lstStyle/>
@@ -7834,6 +8734,7 @@
           <a:lstStyle/>
           <a:p>
             <a:pPr algn="ctr"/>
+            <a:endParaRPr/>
           </a:p>
         </p:txBody>
       </p:sp>
@@ -7854,7 +8755,7 @@
           <a:noFill/>
         </p:spPr>
         <p:txBody>
-          <a:bodyPr wrap="square" lIns="0" rIns="0" tIns="0" bIns="0" anchor="ctr">
+          <a:bodyPr wrap="square" lIns="0" tIns="0" rIns="0" bIns="0" anchor="ctr">
             <a:spAutoFit/>
           </a:bodyPr>
           <a:lstStyle/>
@@ -7893,7 +8794,7 @@
           <a:noFill/>
         </p:spPr>
         <p:txBody>
-          <a:bodyPr wrap="square" lIns="0" rIns="0" tIns="0" bIns="0" anchor="t">
+          <a:bodyPr wrap="square" lIns="0" tIns="0" rIns="0" bIns="0" anchor="t">
             <a:spAutoFit/>
           </a:bodyPr>
           <a:lstStyle/>
@@ -7976,6 +8877,7 @@
           <a:lstStyle/>
           <a:p>
             <a:pPr algn="ctr"/>
+            <a:endParaRPr/>
           </a:p>
         </p:txBody>
       </p:sp>
@@ -7996,7 +8898,7 @@
           <a:noFill/>
         </p:spPr>
         <p:txBody>
-          <a:bodyPr wrap="square" lIns="0" rIns="0" tIns="0" bIns="0" anchor="t">
+          <a:bodyPr wrap="square" lIns="0" tIns="0" rIns="0" bIns="0" anchor="t">
             <a:spAutoFit/>
           </a:bodyPr>
           <a:lstStyle/>
@@ -8061,6 +8963,7 @@
           <a:lstStyle/>
           <a:p>
             <a:pPr algn="ctr"/>
+            <a:endParaRPr/>
           </a:p>
         </p:txBody>
       </p:sp>
@@ -8081,7 +8984,7 @@
           <a:noFill/>
         </p:spPr>
         <p:txBody>
-          <a:bodyPr wrap="square" lIns="0" rIns="0" tIns="0" bIns="0" anchor="ctr">
+          <a:bodyPr wrap="square" lIns="0" tIns="0" rIns="0" bIns="0" anchor="ctr">
             <a:spAutoFit/>
           </a:bodyPr>
           <a:lstStyle/>
@@ -8120,7 +9023,7 @@
           <a:noFill/>
         </p:spPr>
         <p:txBody>
-          <a:bodyPr wrap="square" lIns="0" rIns="0" tIns="0" bIns="0" anchor="t">
+          <a:bodyPr wrap="square" lIns="0" tIns="0" rIns="0" bIns="0" anchor="t">
             <a:spAutoFit/>
           </a:bodyPr>
           <a:lstStyle/>
@@ -8203,6 +9106,7 @@
           <a:lstStyle/>
           <a:p>
             <a:pPr algn="ctr"/>
+            <a:endParaRPr/>
           </a:p>
         </p:txBody>
       </p:sp>
@@ -8223,7 +9127,7 @@
           <a:noFill/>
         </p:spPr>
         <p:txBody>
-          <a:bodyPr wrap="square" lIns="0" rIns="0" tIns="0" bIns="0" anchor="t">
+          <a:bodyPr wrap="square" lIns="0" tIns="0" rIns="0" bIns="0" anchor="t">
             <a:spAutoFit/>
           </a:bodyPr>
           <a:lstStyle/>
@@ -8288,6 +9192,7 @@
           <a:lstStyle/>
           <a:p>
             <a:pPr algn="ctr"/>
+            <a:endParaRPr/>
           </a:p>
         </p:txBody>
       </p:sp>
@@ -8308,7 +9213,7 @@
           <a:noFill/>
         </p:spPr>
         <p:txBody>
-          <a:bodyPr wrap="square" lIns="0" rIns="0" tIns="0" bIns="0" anchor="ctr">
+          <a:bodyPr wrap="square" lIns="0" tIns="0" rIns="0" bIns="0" anchor="ctr">
             <a:spAutoFit/>
           </a:bodyPr>
           <a:lstStyle/>
@@ -8347,7 +9252,7 @@
           <a:noFill/>
         </p:spPr>
         <p:txBody>
-          <a:bodyPr wrap="square" lIns="0" rIns="0" tIns="0" bIns="0" anchor="t">
+          <a:bodyPr wrap="square" lIns="0" tIns="0" rIns="0" bIns="0" anchor="t">
             <a:spAutoFit/>
           </a:bodyPr>
           <a:lstStyle/>
@@ -8428,6 +9333,7 @@
           <a:lstStyle/>
           <a:p>
             <a:pPr algn="ctr"/>
+            <a:endParaRPr/>
           </a:p>
         </p:txBody>
       </p:sp>
@@ -8448,7 +9354,7 @@
           <a:noFill/>
         </p:spPr>
         <p:txBody>
-          <a:bodyPr wrap="square" lIns="0" rIns="0" tIns="0" bIns="0" anchor="ctr">
+          <a:bodyPr wrap="square" lIns="0" tIns="0" rIns="0" bIns="0" anchor="ctr">
             <a:spAutoFit/>
           </a:bodyPr>
           <a:lstStyle/>
@@ -8479,7 +9385,7 @@
 </file>
 
 <file path=ppt/slides/slide12.xml><?xml version="1.0" encoding="utf-8"?>
-<p:sld xmlns:a="http://schemas.openxmlformats.org/drawingml/2006/main" xmlns:p="http://schemas.openxmlformats.org/presentationml/2006/main" xmlns:r="http://schemas.openxmlformats.org/officeDocument/2006/relationships">
+<p:sld xmlns:a="http://schemas.openxmlformats.org/drawingml/2006/main" xmlns:r="http://schemas.openxmlformats.org/officeDocument/2006/relationships" xmlns:p="http://schemas.openxmlformats.org/presentationml/2006/main">
   <p:cSld>
     <p:spTree>
       <p:nvGrpSpPr>
@@ -8487,7 +9393,14 @@
         <p:cNvGrpSpPr/>
         <p:nvPr/>
       </p:nvGrpSpPr>
-      <p:grpSpPr/>
+      <p:grpSpPr>
+        <a:xfrm>
+          <a:off x="0" y="0"/>
+          <a:ext cx="0" cy="0"/>
+          <a:chOff x="0" y="0"/>
+          <a:chExt cx="0" cy="0"/>
+        </a:xfrm>
+      </p:grpSpPr>
       <p:sp>
         <p:nvSpPr>
           <p:cNvPr id="2" name="TextBox 1"/>
@@ -8505,7 +9418,7 @@
           <a:noFill/>
         </p:spPr>
         <p:txBody>
-          <a:bodyPr wrap="square" lIns="0" rIns="0" tIns="0" bIns="0" anchor="t">
+          <a:bodyPr wrap="square" lIns="0" tIns="0" rIns="0" bIns="0" anchor="t">
             <a:spAutoFit/>
           </a:bodyPr>
           <a:lstStyle/>
@@ -8568,6 +9481,7 @@
           <a:lstStyle/>
           <a:p>
             <a:pPr algn="ctr"/>
+            <a:endParaRPr/>
           </a:p>
         </p:txBody>
       </p:sp>
@@ -8588,7 +9502,7 @@
           <a:noFill/>
         </p:spPr>
         <p:txBody>
-          <a:bodyPr wrap="square" lIns="0" rIns="0" tIns="0" bIns="0" anchor="t">
+          <a:bodyPr wrap="square" lIns="0" tIns="0" rIns="0" bIns="0" anchor="t">
             <a:spAutoFit/>
           </a:bodyPr>
           <a:lstStyle/>
@@ -8627,7 +9541,7 @@
           <a:noFill/>
         </p:spPr>
         <p:txBody>
-          <a:bodyPr wrap="square" lIns="0" rIns="0" tIns="0" bIns="0" anchor="t">
+          <a:bodyPr wrap="square" lIns="0" tIns="0" rIns="0" bIns="0" anchor="t">
             <a:spAutoFit/>
           </a:bodyPr>
           <a:lstStyle/>
@@ -8666,7 +9580,7 @@
           <a:noFill/>
         </p:spPr>
         <p:txBody>
-          <a:bodyPr wrap="square" lIns="0" rIns="0" tIns="0" bIns="0" anchor="t">
+          <a:bodyPr wrap="square" lIns="0" tIns="0" rIns="0" bIns="0" anchor="t">
             <a:spAutoFit/>
           </a:bodyPr>
           <a:lstStyle/>
@@ -8705,7 +9619,7 @@
           <a:noFill/>
         </p:spPr>
         <p:txBody>
-          <a:bodyPr wrap="square" lIns="0" rIns="0" tIns="0" bIns="0" anchor="t">
+          <a:bodyPr wrap="square" lIns="0" tIns="0" rIns="0" bIns="0" anchor="t">
             <a:spAutoFit/>
           </a:bodyPr>
           <a:lstStyle/>
@@ -8744,7 +9658,7 @@
           <a:noFill/>
         </p:spPr>
         <p:txBody>
-          <a:bodyPr wrap="square" lIns="0" rIns="0" tIns="0" bIns="0" anchor="t">
+          <a:bodyPr wrap="square" lIns="0" tIns="0" rIns="0" bIns="0" anchor="t">
             <a:spAutoFit/>
           </a:bodyPr>
           <a:lstStyle/>
@@ -8783,7 +9697,7 @@
           <a:noFill/>
         </p:spPr>
         <p:txBody>
-          <a:bodyPr wrap="square" lIns="0" rIns="0" tIns="0" bIns="0" anchor="t">
+          <a:bodyPr wrap="square" lIns="0" tIns="0" rIns="0" bIns="0" anchor="t">
             <a:spAutoFit/>
           </a:bodyPr>
           <a:lstStyle/>
@@ -8822,7 +9736,7 @@
           <a:noFill/>
         </p:spPr>
         <p:txBody>
-          <a:bodyPr wrap="square" lIns="0" rIns="0" tIns="0" bIns="0" anchor="t">
+          <a:bodyPr wrap="square" lIns="0" tIns="0" rIns="0" bIns="0" anchor="t">
             <a:spAutoFit/>
           </a:bodyPr>
           <a:lstStyle/>
@@ -8861,7 +9775,7 @@
           <a:noFill/>
         </p:spPr>
         <p:txBody>
-          <a:bodyPr wrap="square" lIns="0" rIns="0" tIns="0" bIns="0" anchor="t">
+          <a:bodyPr wrap="square" lIns="0" tIns="0" rIns="0" bIns="0" anchor="t">
             <a:spAutoFit/>
           </a:bodyPr>
           <a:lstStyle/>
@@ -8900,7 +9814,7 @@
           <a:noFill/>
         </p:spPr>
         <p:txBody>
-          <a:bodyPr wrap="square" lIns="0" rIns="0" tIns="0" bIns="0" anchor="t">
+          <a:bodyPr wrap="square" lIns="0" tIns="0" rIns="0" bIns="0" anchor="t">
             <a:spAutoFit/>
           </a:bodyPr>
           <a:lstStyle/>
@@ -8939,7 +9853,7 @@
           <a:noFill/>
         </p:spPr>
         <p:txBody>
-          <a:bodyPr wrap="square" lIns="0" rIns="0" tIns="0" bIns="0" anchor="t">
+          <a:bodyPr wrap="square" lIns="0" tIns="0" rIns="0" bIns="0" anchor="t">
             <a:spAutoFit/>
           </a:bodyPr>
           <a:lstStyle/>
@@ -8978,7 +9892,7 @@
           <a:noFill/>
         </p:spPr>
         <p:txBody>
-          <a:bodyPr wrap="square" lIns="0" rIns="0" tIns="0" bIns="0" anchor="t">
+          <a:bodyPr wrap="square" lIns="0" tIns="0" rIns="0" bIns="0" anchor="t">
             <a:spAutoFit/>
           </a:bodyPr>
           <a:lstStyle/>
@@ -9017,7 +9931,7 @@
           <a:noFill/>
         </p:spPr>
         <p:txBody>
-          <a:bodyPr wrap="square" lIns="0" rIns="0" tIns="0" bIns="0" anchor="t">
+          <a:bodyPr wrap="square" lIns="0" tIns="0" rIns="0" bIns="0" anchor="t">
             <a:spAutoFit/>
           </a:bodyPr>
           <a:lstStyle/>
@@ -9056,7 +9970,7 @@
           <a:noFill/>
         </p:spPr>
         <p:txBody>
-          <a:bodyPr wrap="square" lIns="0" rIns="0" tIns="0" bIns="0" anchor="t">
+          <a:bodyPr wrap="square" lIns="0" tIns="0" rIns="0" bIns="0" anchor="t">
             <a:spAutoFit/>
           </a:bodyPr>
           <a:lstStyle/>
@@ -9087,7 +10001,7 @@
 </file>
 
 <file path=ppt/slides/slide2.xml><?xml version="1.0" encoding="utf-8"?>
-<p:sld xmlns:a="http://schemas.openxmlformats.org/drawingml/2006/main" xmlns:p="http://schemas.openxmlformats.org/presentationml/2006/main" xmlns:r="http://schemas.openxmlformats.org/officeDocument/2006/relationships">
+<p:sld xmlns:a="http://schemas.openxmlformats.org/drawingml/2006/main" xmlns:r="http://schemas.openxmlformats.org/officeDocument/2006/relationships" xmlns:p="http://schemas.openxmlformats.org/presentationml/2006/main">
   <p:cSld>
     <p:spTree>
       <p:nvGrpSpPr>
@@ -9095,7 +10009,14 @@
         <p:cNvGrpSpPr/>
         <p:nvPr/>
       </p:nvGrpSpPr>
-      <p:grpSpPr/>
+      <p:grpSpPr>
+        <a:xfrm>
+          <a:off x="0" y="0"/>
+          <a:ext cx="0" cy="0"/>
+          <a:chOff x="0" y="0"/>
+          <a:chExt cx="0" cy="0"/>
+        </a:xfrm>
+      </p:grpSpPr>
       <p:sp>
         <p:nvSpPr>
           <p:cNvPr id="2" name="TextBox 1"/>
@@ -9113,7 +10034,7 @@
           <a:noFill/>
         </p:spPr>
         <p:txBody>
-          <a:bodyPr wrap="square" lIns="0" rIns="0" tIns="0" bIns="0" anchor="t">
+          <a:bodyPr wrap="square" lIns="0" tIns="0" rIns="0" bIns="0" anchor="t">
             <a:spAutoFit/>
           </a:bodyPr>
           <a:lstStyle/>
@@ -9152,7 +10073,7 @@
           <a:noFill/>
         </p:spPr>
         <p:txBody>
-          <a:bodyPr wrap="square" lIns="0" rIns="0" tIns="0" bIns="0" anchor="t">
+          <a:bodyPr wrap="square" lIns="0" tIns="0" rIns="0" bIns="0" anchor="t">
             <a:spAutoFit/>
           </a:bodyPr>
           <a:lstStyle/>
@@ -9191,7 +10112,7 @@
           <a:noFill/>
         </p:spPr>
         <p:txBody>
-          <a:bodyPr wrap="square" lIns="0" rIns="0" tIns="0" bIns="0" anchor="t">
+          <a:bodyPr wrap="square" lIns="0" tIns="0" rIns="0" bIns="0" anchor="t">
             <a:spAutoFit/>
           </a:bodyPr>
           <a:lstStyle/>
@@ -9254,6 +10175,7 @@
           <a:lstStyle/>
           <a:p>
             <a:pPr algn="ctr"/>
+            <a:endParaRPr/>
           </a:p>
         </p:txBody>
       </p:sp>
@@ -9302,6 +10224,7 @@
           <a:lstStyle/>
           <a:p>
             <a:pPr algn="ctr"/>
+            <a:endParaRPr/>
           </a:p>
         </p:txBody>
       </p:sp>
@@ -9322,7 +10245,7 @@
           <a:noFill/>
         </p:spPr>
         <p:txBody>
-          <a:bodyPr wrap="square" lIns="0" rIns="0" tIns="0" bIns="0" anchor="t">
+          <a:bodyPr wrap="square" lIns="0" tIns="0" rIns="0" bIns="0" anchor="t">
             <a:spAutoFit/>
           </a:bodyPr>
           <a:lstStyle/>
@@ -9387,6 +10310,7 @@
           <a:lstStyle/>
           <a:p>
             <a:pPr algn="ctr"/>
+            <a:endParaRPr/>
           </a:p>
         </p:txBody>
       </p:sp>
@@ -9407,7 +10331,7 @@
           <a:noFill/>
         </p:spPr>
         <p:txBody>
-          <a:bodyPr wrap="square" lIns="0" rIns="0" tIns="0" bIns="0" anchor="ctr">
+          <a:bodyPr wrap="square" lIns="0" tIns="0" rIns="0" bIns="0" anchor="ctr">
             <a:spAutoFit/>
           </a:bodyPr>
           <a:lstStyle/>
@@ -9446,7 +10370,7 @@
           <a:noFill/>
         </p:spPr>
         <p:txBody>
-          <a:bodyPr wrap="square" lIns="0" rIns="0" tIns="0" bIns="0" anchor="t">
+          <a:bodyPr wrap="square" lIns="0" tIns="0" rIns="0" bIns="0" anchor="t">
             <a:spAutoFit/>
           </a:bodyPr>
           <a:lstStyle/>
@@ -9529,6 +10453,7 @@
           <a:lstStyle/>
           <a:p>
             <a:pPr algn="ctr"/>
+            <a:endParaRPr/>
           </a:p>
         </p:txBody>
       </p:sp>
@@ -9549,7 +10474,7 @@
           <a:noFill/>
         </p:spPr>
         <p:txBody>
-          <a:bodyPr wrap="square" lIns="0" rIns="0" tIns="0" bIns="0" anchor="t">
+          <a:bodyPr wrap="square" lIns="0" tIns="0" rIns="0" bIns="0" anchor="t">
             <a:spAutoFit/>
           </a:bodyPr>
           <a:lstStyle/>
@@ -9614,6 +10539,7 @@
           <a:lstStyle/>
           <a:p>
             <a:pPr algn="ctr"/>
+            <a:endParaRPr/>
           </a:p>
         </p:txBody>
       </p:sp>
@@ -9634,7 +10560,7 @@
           <a:noFill/>
         </p:spPr>
         <p:txBody>
-          <a:bodyPr wrap="square" lIns="0" rIns="0" tIns="0" bIns="0" anchor="ctr">
+          <a:bodyPr wrap="square" lIns="0" tIns="0" rIns="0" bIns="0" anchor="ctr">
             <a:spAutoFit/>
           </a:bodyPr>
           <a:lstStyle/>
@@ -9673,7 +10599,7 @@
           <a:noFill/>
         </p:spPr>
         <p:txBody>
-          <a:bodyPr wrap="square" lIns="0" rIns="0" tIns="0" bIns="0" anchor="t">
+          <a:bodyPr wrap="square" lIns="0" tIns="0" rIns="0" bIns="0" anchor="t">
             <a:spAutoFit/>
           </a:bodyPr>
           <a:lstStyle/>
@@ -9772,6 +10698,7 @@
           <a:lstStyle/>
           <a:p>
             <a:pPr algn="ctr"/>
+            <a:endParaRPr/>
           </a:p>
         </p:txBody>
       </p:sp>
@@ -9792,7 +10719,7 @@
           <a:noFill/>
         </p:spPr>
         <p:txBody>
-          <a:bodyPr wrap="square" lIns="0" rIns="0" tIns="0" bIns="0" anchor="t">
+          <a:bodyPr wrap="square" lIns="0" tIns="0" rIns="0" bIns="0" anchor="t">
             <a:spAutoFit/>
           </a:bodyPr>
           <a:lstStyle/>
@@ -9857,6 +10784,7 @@
           <a:lstStyle/>
           <a:p>
             <a:pPr algn="ctr"/>
+            <a:endParaRPr/>
           </a:p>
         </p:txBody>
       </p:sp>
@@ -9877,7 +10805,7 @@
           <a:noFill/>
         </p:spPr>
         <p:txBody>
-          <a:bodyPr wrap="square" lIns="0" rIns="0" tIns="0" bIns="0" anchor="ctr">
+          <a:bodyPr wrap="square" lIns="0" tIns="0" rIns="0" bIns="0" anchor="ctr">
             <a:spAutoFit/>
           </a:bodyPr>
           <a:lstStyle/>
@@ -9916,7 +10844,7 @@
           <a:noFill/>
         </p:spPr>
         <p:txBody>
-          <a:bodyPr wrap="square" lIns="0" rIns="0" tIns="0" bIns="0" anchor="t">
+          <a:bodyPr wrap="square" lIns="0" tIns="0" rIns="0" bIns="0" anchor="t">
             <a:spAutoFit/>
           </a:bodyPr>
           <a:lstStyle/>
@@ -9999,6 +10927,7 @@
           <a:lstStyle/>
           <a:p>
             <a:pPr algn="ctr"/>
+            <a:endParaRPr/>
           </a:p>
         </p:txBody>
       </p:sp>
@@ -10019,7 +10948,7 @@
           <a:noFill/>
         </p:spPr>
         <p:txBody>
-          <a:bodyPr wrap="square" lIns="0" rIns="0" tIns="0" bIns="0" anchor="t">
+          <a:bodyPr wrap="square" lIns="0" tIns="0" rIns="0" bIns="0" anchor="t">
             <a:spAutoFit/>
           </a:bodyPr>
           <a:lstStyle/>
@@ -10058,7 +10987,7 @@
           <a:noFill/>
         </p:spPr>
         <p:txBody>
-          <a:bodyPr wrap="square" lIns="0" rIns="0" tIns="0" bIns="0" anchor="t">
+          <a:bodyPr wrap="square" lIns="0" tIns="0" rIns="0" bIns="0" anchor="t">
             <a:spAutoFit/>
           </a:bodyPr>
           <a:lstStyle/>
@@ -10125,6 +11054,7 @@
           <a:lstStyle/>
           <a:p>
             <a:pPr algn="ctr"/>
+            <a:endParaRPr/>
           </a:p>
         </p:txBody>
       </p:sp>
@@ -10145,7 +11075,7 @@
           <a:noFill/>
         </p:spPr>
         <p:txBody>
-          <a:bodyPr wrap="square" lIns="0" rIns="0" tIns="0" bIns="0" anchor="t">
+          <a:bodyPr wrap="square" lIns="0" tIns="0" rIns="0" bIns="0" anchor="t">
             <a:spAutoFit/>
           </a:bodyPr>
           <a:lstStyle/>
@@ -10184,7 +11114,7 @@
           <a:noFill/>
         </p:spPr>
         <p:txBody>
-          <a:bodyPr wrap="square" lIns="0" rIns="0" tIns="0" bIns="0" anchor="t">
+          <a:bodyPr wrap="square" lIns="0" tIns="0" rIns="0" bIns="0" anchor="t">
             <a:spAutoFit/>
           </a:bodyPr>
           <a:lstStyle/>
@@ -10223,7 +11153,7 @@
           <a:noFill/>
         </p:spPr>
         <p:txBody>
-          <a:bodyPr wrap="square" lIns="0" rIns="0" tIns="0" bIns="0" anchor="t">
+          <a:bodyPr wrap="square" lIns="0" tIns="0" rIns="0" bIns="0" anchor="t">
             <a:spAutoFit/>
           </a:bodyPr>
           <a:lstStyle/>
@@ -10286,6 +11216,7 @@
           <a:lstStyle/>
           <a:p>
             <a:pPr algn="ctr"/>
+            <a:endParaRPr/>
           </a:p>
         </p:txBody>
       </p:sp>
@@ -10306,7 +11237,7 @@
           <a:noFill/>
         </p:spPr>
         <p:txBody>
-          <a:bodyPr wrap="square" lIns="0" rIns="0" tIns="0" bIns="0" anchor="ctr">
+          <a:bodyPr wrap="square" lIns="0" tIns="0" rIns="0" bIns="0" anchor="ctr">
             <a:spAutoFit/>
           </a:bodyPr>
           <a:lstStyle/>
@@ -10345,7 +11276,7 @@
           <a:noFill/>
         </p:spPr>
         <p:txBody>
-          <a:bodyPr wrap="square" lIns="0" rIns="0" tIns="0" bIns="0" anchor="ctr">
+          <a:bodyPr wrap="square" lIns="0" tIns="0" rIns="0" bIns="0" anchor="ctr">
             <a:spAutoFit/>
           </a:bodyPr>
           <a:lstStyle/>
@@ -10384,7 +11315,7 @@
           <a:noFill/>
         </p:spPr>
         <p:txBody>
-          <a:bodyPr wrap="square" lIns="0" rIns="0" tIns="0" bIns="0" anchor="ctr">
+          <a:bodyPr wrap="square" lIns="0" tIns="0" rIns="0" bIns="0" anchor="ctr">
             <a:spAutoFit/>
           </a:bodyPr>
           <a:lstStyle/>
@@ -10447,6 +11378,7 @@
           <a:lstStyle/>
           <a:p>
             <a:pPr algn="ctr"/>
+            <a:endParaRPr/>
           </a:p>
         </p:txBody>
       </p:sp>
@@ -10467,7 +11399,7 @@
           <a:noFill/>
         </p:spPr>
         <p:txBody>
-          <a:bodyPr wrap="square" lIns="0" rIns="0" tIns="0" bIns="0" anchor="ctr">
+          <a:bodyPr wrap="square" lIns="0" tIns="0" rIns="0" bIns="0" anchor="ctr">
             <a:spAutoFit/>
           </a:bodyPr>
           <a:lstStyle/>
@@ -10506,7 +11438,7 @@
           <a:noFill/>
         </p:spPr>
         <p:txBody>
-          <a:bodyPr wrap="square" lIns="0" rIns="0" tIns="0" bIns="0" anchor="ctr">
+          <a:bodyPr wrap="square" lIns="0" tIns="0" rIns="0" bIns="0" anchor="ctr">
             <a:spAutoFit/>
           </a:bodyPr>
           <a:lstStyle/>
@@ -10545,7 +11477,7 @@
           <a:noFill/>
         </p:spPr>
         <p:txBody>
-          <a:bodyPr wrap="square" lIns="0" rIns="0" tIns="0" bIns="0" anchor="ctr">
+          <a:bodyPr wrap="square" lIns="0" tIns="0" rIns="0" bIns="0" anchor="ctr">
             <a:spAutoFit/>
           </a:bodyPr>
           <a:lstStyle/>
@@ -10576,7 +11508,7 @@
 </file>
 
 <file path=ppt/slides/slide3.xml><?xml version="1.0" encoding="utf-8"?>
-<p:sld xmlns:a="http://schemas.openxmlformats.org/drawingml/2006/main" xmlns:p="http://schemas.openxmlformats.org/presentationml/2006/main" xmlns:r="http://schemas.openxmlformats.org/officeDocument/2006/relationships">
+<p:sld xmlns:a="http://schemas.openxmlformats.org/drawingml/2006/main" xmlns:r="http://schemas.openxmlformats.org/officeDocument/2006/relationships" xmlns:p="http://schemas.openxmlformats.org/presentationml/2006/main">
   <p:cSld>
     <p:spTree>
       <p:nvGrpSpPr>
@@ -10584,7 +11516,14 @@
         <p:cNvGrpSpPr/>
         <p:nvPr/>
       </p:nvGrpSpPr>
-      <p:grpSpPr/>
+      <p:grpSpPr>
+        <a:xfrm>
+          <a:off x="0" y="0"/>
+          <a:ext cx="0" cy="0"/>
+          <a:chOff x="0" y="0"/>
+          <a:chExt cx="0" cy="0"/>
+        </a:xfrm>
+      </p:grpSpPr>
       <p:sp>
         <p:nvSpPr>
           <p:cNvPr id="2" name="TextBox 1"/>
@@ -10602,7 +11541,7 @@
           <a:noFill/>
         </p:spPr>
         <p:txBody>
-          <a:bodyPr wrap="square" lIns="0" rIns="0" tIns="0" bIns="0" anchor="t">
+          <a:bodyPr wrap="square" lIns="0" tIns="0" rIns="0" bIns="0" anchor="t">
             <a:spAutoFit/>
           </a:bodyPr>
           <a:lstStyle/>
@@ -10641,7 +11580,7 @@
           <a:noFill/>
         </p:spPr>
         <p:txBody>
-          <a:bodyPr wrap="square" lIns="0" rIns="0" tIns="0" bIns="0" anchor="t">
+          <a:bodyPr wrap="square" lIns="0" tIns="0" rIns="0" bIns="0" anchor="t">
             <a:spAutoFit/>
           </a:bodyPr>
           <a:lstStyle/>
@@ -10680,7 +11619,7 @@
           <a:noFill/>
         </p:spPr>
         <p:txBody>
-          <a:bodyPr wrap="square" lIns="0" rIns="0" tIns="0" bIns="0" anchor="t">
+          <a:bodyPr wrap="square" lIns="0" tIns="0" rIns="0" bIns="0" anchor="t">
             <a:spAutoFit/>
           </a:bodyPr>
           <a:lstStyle/>
@@ -10743,6 +11682,7 @@
           <a:lstStyle/>
           <a:p>
             <a:pPr algn="ctr"/>
+            <a:endParaRPr/>
           </a:p>
         </p:txBody>
       </p:sp>
@@ -10763,7 +11703,7 @@
           <a:noFill/>
         </p:spPr>
         <p:txBody>
-          <a:bodyPr wrap="square" lIns="0" rIns="0" tIns="0" bIns="0" anchor="t">
+          <a:bodyPr wrap="square" lIns="0" tIns="0" rIns="0" bIns="0" anchor="t">
             <a:spAutoFit/>
           </a:bodyPr>
           <a:lstStyle/>
@@ -10828,6 +11768,7 @@
           <a:lstStyle/>
           <a:p>
             <a:pPr algn="ctr"/>
+            <a:endParaRPr/>
           </a:p>
         </p:txBody>
       </p:sp>
@@ -10848,7 +11789,7 @@
           <a:noFill/>
         </p:spPr>
         <p:txBody>
-          <a:bodyPr wrap="square" lIns="0" rIns="0" tIns="0" bIns="0" anchor="t">
+          <a:bodyPr wrap="square" lIns="0" tIns="0" rIns="0" bIns="0" anchor="t">
             <a:spAutoFit/>
           </a:bodyPr>
           <a:lstStyle/>
@@ -10887,7 +11828,7 @@
           <a:noFill/>
         </p:spPr>
         <p:txBody>
-          <a:bodyPr wrap="square" lIns="0" rIns="0" tIns="0" bIns="0" anchor="t">
+          <a:bodyPr wrap="square" lIns="0" tIns="0" rIns="0" bIns="0" anchor="t">
             <a:spAutoFit/>
           </a:bodyPr>
           <a:lstStyle/>
@@ -10952,6 +11893,7 @@
           <a:lstStyle/>
           <a:p>
             <a:pPr algn="ctr"/>
+            <a:endParaRPr/>
           </a:p>
         </p:txBody>
       </p:sp>
@@ -10972,7 +11914,7 @@
           <a:noFill/>
         </p:spPr>
         <p:txBody>
-          <a:bodyPr wrap="square" lIns="0" rIns="0" tIns="0" bIns="0" anchor="t">
+          <a:bodyPr wrap="square" lIns="0" tIns="0" rIns="0" bIns="0" anchor="t">
             <a:spAutoFit/>
           </a:bodyPr>
           <a:lstStyle/>
@@ -11011,7 +11953,7 @@
           <a:noFill/>
         </p:spPr>
         <p:txBody>
-          <a:bodyPr wrap="square" lIns="0" rIns="0" tIns="0" bIns="0" anchor="t">
+          <a:bodyPr wrap="square" lIns="0" tIns="0" rIns="0" bIns="0" anchor="t">
             <a:spAutoFit/>
           </a:bodyPr>
           <a:lstStyle/>
@@ -11076,6 +12018,7 @@
           <a:lstStyle/>
           <a:p>
             <a:pPr algn="ctr"/>
+            <a:endParaRPr/>
           </a:p>
         </p:txBody>
       </p:sp>
@@ -11096,7 +12039,7 @@
           <a:noFill/>
         </p:spPr>
         <p:txBody>
-          <a:bodyPr wrap="square" lIns="0" rIns="0" tIns="0" bIns="0" anchor="t">
+          <a:bodyPr wrap="square" lIns="0" tIns="0" rIns="0" bIns="0" anchor="t">
             <a:spAutoFit/>
           </a:bodyPr>
           <a:lstStyle/>
@@ -11135,7 +12078,7 @@
           <a:noFill/>
         </p:spPr>
         <p:txBody>
-          <a:bodyPr wrap="square" lIns="0" rIns="0" tIns="0" bIns="0" anchor="t">
+          <a:bodyPr wrap="square" lIns="0" tIns="0" rIns="0" bIns="0" anchor="t">
             <a:spAutoFit/>
           </a:bodyPr>
           <a:lstStyle/>
@@ -11200,6 +12143,7 @@
           <a:lstStyle/>
           <a:p>
             <a:pPr algn="ctr"/>
+            <a:endParaRPr/>
           </a:p>
         </p:txBody>
       </p:sp>
@@ -11220,7 +12164,7 @@
           <a:noFill/>
         </p:spPr>
         <p:txBody>
-          <a:bodyPr wrap="square" lIns="0" rIns="0" tIns="0" bIns="0" anchor="t">
+          <a:bodyPr wrap="square" lIns="0" tIns="0" rIns="0" bIns="0" anchor="t">
             <a:spAutoFit/>
           </a:bodyPr>
           <a:lstStyle/>
@@ -11259,7 +12203,7 @@
           <a:noFill/>
         </p:spPr>
         <p:txBody>
-          <a:bodyPr wrap="square" lIns="0" rIns="0" tIns="0" bIns="0" anchor="t">
+          <a:bodyPr wrap="square" lIns="0" tIns="0" rIns="0" bIns="0" anchor="t">
             <a:spAutoFit/>
           </a:bodyPr>
           <a:lstStyle/>
@@ -11324,6 +12268,7 @@
           <a:lstStyle/>
           <a:p>
             <a:pPr algn="ctr"/>
+            <a:endParaRPr/>
           </a:p>
         </p:txBody>
       </p:sp>
@@ -11344,7 +12289,7 @@
           <a:noFill/>
         </p:spPr>
         <p:txBody>
-          <a:bodyPr wrap="square" lIns="0" rIns="0" tIns="0" bIns="0" anchor="t">
+          <a:bodyPr wrap="square" lIns="0" tIns="0" rIns="0" bIns="0" anchor="t">
             <a:spAutoFit/>
           </a:bodyPr>
           <a:lstStyle/>
@@ -11383,7 +12328,7 @@
           <a:noFill/>
         </p:spPr>
         <p:txBody>
-          <a:bodyPr wrap="square" lIns="0" rIns="0" tIns="0" bIns="0" anchor="t">
+          <a:bodyPr wrap="square" lIns="0" tIns="0" rIns="0" bIns="0" anchor="t">
             <a:spAutoFit/>
           </a:bodyPr>
           <a:lstStyle/>
@@ -11446,6 +12391,7 @@
           <a:lstStyle/>
           <a:p>
             <a:pPr algn="ctr"/>
+            <a:endParaRPr/>
           </a:p>
         </p:txBody>
       </p:sp>
@@ -11466,7 +12412,7 @@
           <a:noFill/>
         </p:spPr>
         <p:txBody>
-          <a:bodyPr wrap="square" lIns="0" rIns="0" tIns="0" bIns="0" anchor="t">
+          <a:bodyPr wrap="square" lIns="0" tIns="0" rIns="0" bIns="0" anchor="t">
             <a:spAutoFit/>
           </a:bodyPr>
           <a:lstStyle/>
@@ -11496,7 +12442,7 @@
         </p:nvSpPr>
         <p:spPr>
           <a:xfrm>
-            <a:off x="658368" y="2933377"/>
+            <a:off x="658368" y="3242086"/>
             <a:ext cx="10874959" cy="274320"/>
           </a:xfrm>
           <a:prstGeom prst="rect">
@@ -11505,7 +12451,7 @@
           <a:noFill/>
         </p:spPr>
         <p:txBody>
-          <a:bodyPr wrap="square" lIns="0" rIns="0" tIns="0" bIns="0" anchor="t">
+          <a:bodyPr wrap="square" lIns="0" tIns="0" rIns="0" bIns="0" anchor="t">
             <a:spAutoFit/>
           </a:bodyPr>
           <a:lstStyle/>
@@ -11516,13 +12462,130 @@
               </a:lnSpc>
             </a:pPr>
             <a:r>
-              <a:rPr sz="1200" b="0">
+              <a:rPr sz="1200" b="0" dirty="0" err="1">
                 <a:solidFill>
                   <a:srgbClr val="6B7885"/>
                 </a:solidFill>
                 <a:latin typeface="Microsoft JhengHei"/>
               </a:rPr>
-              <a:t>合計 2.5–5.5 天;43%–78% 的精確值為 42.86%–77.78%(五段各自獨立取端點、窮舉 32 組求得)。非 AI 段只佔 22%–57%,而排隊本身只有 0–1 天 —— 那是排班解得掉的唯一一段。⚠ 這五段天數是營運端的估計,不是計時量測;W1–6 交出正式量測,若正式拆解推翻它,本案轉排班方案(G1 判)。</a:t>
+              <a:t>合計</a:t>
+            </a:r>
+            <a:r>
+              <a:rPr sz="1200" b="0" dirty="0">
+                <a:solidFill>
+                  <a:srgbClr val="6B7885"/>
+                </a:solidFill>
+                <a:latin typeface="Microsoft JhengHei"/>
+              </a:rPr>
+              <a:t> 2.5–5.5 天;43%–78% </a:t>
+            </a:r>
+            <a:r>
+              <a:rPr sz="1200" b="0" dirty="0" err="1">
+                <a:solidFill>
+                  <a:srgbClr val="6B7885"/>
+                </a:solidFill>
+                <a:latin typeface="Microsoft JhengHei"/>
+              </a:rPr>
+              <a:t>的精確值為</a:t>
+            </a:r>
+            <a:r>
+              <a:rPr sz="1200" b="0" dirty="0">
+                <a:solidFill>
+                  <a:srgbClr val="6B7885"/>
+                </a:solidFill>
+                <a:latin typeface="Microsoft JhengHei"/>
+              </a:rPr>
+              <a:t> 42.86%–77.78%(</a:t>
+            </a:r>
+            <a:r>
+              <a:rPr sz="1200" b="0" dirty="0" err="1">
+                <a:solidFill>
+                  <a:srgbClr val="6B7885"/>
+                </a:solidFill>
+                <a:latin typeface="Microsoft JhengHei"/>
+              </a:rPr>
+              <a:t>五段各自獨立取端點、窮舉</a:t>
+            </a:r>
+            <a:r>
+              <a:rPr sz="1200" b="0" dirty="0">
+                <a:solidFill>
+                  <a:srgbClr val="6B7885"/>
+                </a:solidFill>
+                <a:latin typeface="Microsoft JhengHei"/>
+              </a:rPr>
+              <a:t> 32 </a:t>
+            </a:r>
+            <a:r>
+              <a:rPr sz="1200" b="0" dirty="0" err="1">
+                <a:solidFill>
+                  <a:srgbClr val="6B7885"/>
+                </a:solidFill>
+                <a:latin typeface="Microsoft JhengHei"/>
+              </a:rPr>
+              <a:t>組求得</a:t>
+            </a:r>
+            <a:r>
+              <a:rPr sz="1200" b="0" dirty="0">
+                <a:solidFill>
+                  <a:srgbClr val="6B7885"/>
+                </a:solidFill>
+                <a:latin typeface="Microsoft JhengHei"/>
+              </a:rPr>
+              <a:t>)。非 AI </a:t>
+            </a:r>
+            <a:r>
+              <a:rPr sz="1200" b="0" dirty="0" err="1">
+                <a:solidFill>
+                  <a:srgbClr val="6B7885"/>
+                </a:solidFill>
+                <a:latin typeface="Microsoft JhengHei"/>
+              </a:rPr>
+              <a:t>段只佔</a:t>
+            </a:r>
+            <a:r>
+              <a:rPr sz="1200" b="0" dirty="0">
+                <a:solidFill>
+                  <a:srgbClr val="6B7885"/>
+                </a:solidFill>
+                <a:latin typeface="Microsoft JhengHei"/>
+              </a:rPr>
+              <a:t> 22%–57%,而排隊本身只有 0–1 天 —— </a:t>
+            </a:r>
+            <a:r>
+              <a:rPr sz="1200" b="0" dirty="0" err="1">
+                <a:solidFill>
+                  <a:srgbClr val="6B7885"/>
+                </a:solidFill>
+                <a:latin typeface="Microsoft JhengHei"/>
+              </a:rPr>
+              <a:t>那是排班解得掉的唯一一段</a:t>
+            </a:r>
+            <a:r>
+              <a:rPr sz="1200" b="0" dirty="0">
+                <a:solidFill>
+                  <a:srgbClr val="6B7885"/>
+                </a:solidFill>
+                <a:latin typeface="Microsoft JhengHei"/>
+              </a:rPr>
+              <a:t>。⚠ 這五段天數是營運端的估計,不是計時量測;W1–6 </a:t>
+            </a:r>
+            <a:r>
+              <a:rPr sz="1200" b="0" dirty="0" err="1">
+                <a:solidFill>
+                  <a:srgbClr val="6B7885"/>
+                </a:solidFill>
+                <a:latin typeface="Microsoft JhengHei"/>
+              </a:rPr>
+              <a:t>交出正式量測,若正式拆解推翻它,本案轉排班方案</a:t>
+            </a:r>
+            <a:r>
+              <a:rPr sz="1200" b="0" dirty="0">
+                <a:solidFill>
+                  <a:srgbClr val="6B7885"/>
+                </a:solidFill>
+                <a:latin typeface="Microsoft JhengHei"/>
+              </a:rPr>
+              <a:t>(G1 判)。</a:t>
             </a:r>
           </a:p>
         </p:txBody>
@@ -11535,7 +12598,7 @@
         </p:nvSpPr>
         <p:spPr>
           <a:xfrm>
-            <a:off x="658368" y="3335713"/>
+            <a:off x="658368" y="3714766"/>
             <a:ext cx="10874959" cy="620652"/>
           </a:xfrm>
           <a:prstGeom prst="roundRect">
@@ -11570,6 +12633,7 @@
           <a:lstStyle/>
           <a:p>
             <a:pPr algn="ctr"/>
+            <a:endParaRPr/>
           </a:p>
         </p:txBody>
       </p:sp>
@@ -11581,7 +12645,7 @@
         </p:nvSpPr>
         <p:spPr>
           <a:xfrm>
-            <a:off x="841247" y="3335713"/>
+            <a:off x="841247" y="3714766"/>
             <a:ext cx="10509199" cy="620652"/>
           </a:xfrm>
           <a:prstGeom prst="rect">
@@ -11590,7 +12654,7 @@
           <a:noFill/>
         </p:spPr>
         <p:txBody>
-          <a:bodyPr wrap="square" lIns="0" rIns="0" tIns="0" bIns="0" anchor="ctr">
+          <a:bodyPr wrap="square" lIns="0" tIns="0" rIns="0" bIns="0" anchor="ctr">
             <a:spAutoFit/>
           </a:bodyPr>
           <a:lstStyle/>
@@ -11620,7 +12684,7 @@
         </p:nvSpPr>
         <p:spPr>
           <a:xfrm>
-            <a:off x="658368" y="4111813"/>
+            <a:off x="658368" y="4420522"/>
             <a:ext cx="45720" cy="771525"/>
           </a:xfrm>
           <a:prstGeom prst="rect">
@@ -11653,6 +12717,7 @@
           <a:lstStyle/>
           <a:p>
             <a:pPr algn="ctr"/>
+            <a:endParaRPr/>
           </a:p>
         </p:txBody>
       </p:sp>
@@ -11664,7 +12729,7 @@
         </p:nvSpPr>
         <p:spPr>
           <a:xfrm>
-            <a:off x="804672" y="4084381"/>
+            <a:off x="804672" y="4393090"/>
             <a:ext cx="2116945" cy="862965"/>
           </a:xfrm>
           <a:prstGeom prst="rect">
@@ -11673,7 +12738,7 @@
           <a:noFill/>
         </p:spPr>
         <p:txBody>
-          <a:bodyPr wrap="square" lIns="0" rIns="0" tIns="0" bIns="0" anchor="ctr">
+          <a:bodyPr wrap="square" lIns="0" tIns="0" rIns="0" bIns="0" anchor="ctr">
             <a:spAutoFit/>
           </a:bodyPr>
           <a:lstStyle/>
@@ -11703,7 +12768,7 @@
         </p:nvSpPr>
         <p:spPr>
           <a:xfrm>
-            <a:off x="2976481" y="4084381"/>
+            <a:off x="2976481" y="4393090"/>
             <a:ext cx="2787914" cy="862965"/>
           </a:xfrm>
           <a:prstGeom prst="rect">
@@ -11712,7 +12777,7 @@
           <a:noFill/>
         </p:spPr>
         <p:txBody>
-          <a:bodyPr wrap="square" lIns="0" rIns="0" tIns="0" bIns="0" anchor="ctr">
+          <a:bodyPr wrap="square" lIns="0" tIns="0" rIns="0" bIns="0" anchor="ctr">
             <a:spAutoFit/>
           </a:bodyPr>
           <a:lstStyle/>
@@ -11742,7 +12807,7 @@
         </p:nvSpPr>
         <p:spPr>
           <a:xfrm>
-            <a:off x="6453652" y="4084381"/>
+            <a:off x="6453652" y="4393090"/>
             <a:ext cx="3753794" cy="862965"/>
           </a:xfrm>
           <a:prstGeom prst="rect">
@@ -11751,7 +12816,7 @@
           <a:noFill/>
         </p:spPr>
         <p:txBody>
-          <a:bodyPr wrap="square" lIns="0" rIns="0" tIns="0" bIns="0" anchor="ctr">
+          <a:bodyPr wrap="square" lIns="0" tIns="0" rIns="0" bIns="0" anchor="ctr">
             <a:spAutoFit/>
           </a:bodyPr>
           <a:lstStyle/>
@@ -11781,7 +12846,7 @@
         </p:nvSpPr>
         <p:spPr>
           <a:xfrm>
-            <a:off x="658368" y="5066218"/>
+            <a:off x="658368" y="5374927"/>
             <a:ext cx="45720" cy="771525"/>
           </a:xfrm>
           <a:prstGeom prst="rect">
@@ -11814,6 +12879,7 @@
           <a:lstStyle/>
           <a:p>
             <a:pPr algn="ctr"/>
+            <a:endParaRPr/>
           </a:p>
         </p:txBody>
       </p:sp>
@@ -11825,7 +12891,7 @@
         </p:nvSpPr>
         <p:spPr>
           <a:xfrm>
-            <a:off x="804672" y="5038786"/>
+            <a:off x="804672" y="5347495"/>
             <a:ext cx="2116945" cy="862965"/>
           </a:xfrm>
           <a:prstGeom prst="rect">
@@ -11834,7 +12900,7 @@
           <a:noFill/>
         </p:spPr>
         <p:txBody>
-          <a:bodyPr wrap="square" lIns="0" rIns="0" tIns="0" bIns="0" anchor="ctr">
+          <a:bodyPr wrap="square" lIns="0" tIns="0" rIns="0" bIns="0" anchor="ctr">
             <a:spAutoFit/>
           </a:bodyPr>
           <a:lstStyle/>
@@ -11864,7 +12930,7 @@
         </p:nvSpPr>
         <p:spPr>
           <a:xfrm>
-            <a:off x="2976481" y="5038786"/>
+            <a:off x="2976481" y="5347495"/>
             <a:ext cx="2787914" cy="862965"/>
           </a:xfrm>
           <a:prstGeom prst="rect">
@@ -11873,7 +12939,7 @@
           <a:noFill/>
         </p:spPr>
         <p:txBody>
-          <a:bodyPr wrap="square" lIns="0" rIns="0" tIns="0" bIns="0" anchor="ctr">
+          <a:bodyPr wrap="square" lIns="0" tIns="0" rIns="0" bIns="0" anchor="ctr">
             <a:spAutoFit/>
           </a:bodyPr>
           <a:lstStyle/>
@@ -11903,7 +12969,7 @@
         </p:nvSpPr>
         <p:spPr>
           <a:xfrm>
-            <a:off x="6453652" y="5038786"/>
+            <a:off x="6453652" y="5347495"/>
             <a:ext cx="3753794" cy="862965"/>
           </a:xfrm>
           <a:prstGeom prst="rect">
@@ -11912,7 +12978,7 @@
           <a:noFill/>
         </p:spPr>
         <p:txBody>
-          <a:bodyPr wrap="square" lIns="0" rIns="0" tIns="0" bIns="0" anchor="ctr">
+          <a:bodyPr wrap="square" lIns="0" tIns="0" rIns="0" bIns="0" anchor="ctr">
             <a:spAutoFit/>
           </a:bodyPr>
           <a:lstStyle/>
@@ -11943,7 +13009,7 @@
 </file>
 
 <file path=ppt/slides/slide4.xml><?xml version="1.0" encoding="utf-8"?>
-<p:sld xmlns:a="http://schemas.openxmlformats.org/drawingml/2006/main" xmlns:p="http://schemas.openxmlformats.org/presentationml/2006/main" xmlns:r="http://schemas.openxmlformats.org/officeDocument/2006/relationships">
+<p:sld xmlns:a="http://schemas.openxmlformats.org/drawingml/2006/main" xmlns:r="http://schemas.openxmlformats.org/officeDocument/2006/relationships" xmlns:p="http://schemas.openxmlformats.org/presentationml/2006/main">
   <p:cSld>
     <p:spTree>
       <p:nvGrpSpPr>
@@ -11951,7 +13017,14 @@
         <p:cNvGrpSpPr/>
         <p:nvPr/>
       </p:nvGrpSpPr>
-      <p:grpSpPr/>
+      <p:grpSpPr>
+        <a:xfrm>
+          <a:off x="0" y="0"/>
+          <a:ext cx="0" cy="0"/>
+          <a:chOff x="0" y="0"/>
+          <a:chExt cx="0" cy="0"/>
+        </a:xfrm>
+      </p:grpSpPr>
       <p:sp>
         <p:nvSpPr>
           <p:cNvPr id="2" name="TextBox 1"/>
@@ -11969,7 +13042,7 @@
           <a:noFill/>
         </p:spPr>
         <p:txBody>
-          <a:bodyPr wrap="square" lIns="0" rIns="0" tIns="0" bIns="0" anchor="t">
+          <a:bodyPr wrap="square" lIns="0" tIns="0" rIns="0" bIns="0" anchor="t">
             <a:spAutoFit/>
           </a:bodyPr>
           <a:lstStyle/>
@@ -12008,7 +13081,7 @@
           <a:noFill/>
         </p:spPr>
         <p:txBody>
-          <a:bodyPr wrap="square" lIns="0" rIns="0" tIns="0" bIns="0" anchor="t">
+          <a:bodyPr wrap="square" lIns="0" tIns="0" rIns="0" bIns="0" anchor="t">
             <a:spAutoFit/>
           </a:bodyPr>
           <a:lstStyle/>
@@ -12047,7 +13120,7 @@
           <a:noFill/>
         </p:spPr>
         <p:txBody>
-          <a:bodyPr wrap="square" lIns="0" rIns="0" tIns="0" bIns="0" anchor="t">
+          <a:bodyPr wrap="square" lIns="0" tIns="0" rIns="0" bIns="0" anchor="t">
             <a:spAutoFit/>
           </a:bodyPr>
           <a:lstStyle/>
@@ -12110,6 +13183,7 @@
           <a:lstStyle/>
           <a:p>
             <a:pPr algn="ctr"/>
+            <a:endParaRPr/>
           </a:p>
         </p:txBody>
       </p:sp>
@@ -12156,6 +13230,7 @@
           <a:lstStyle/>
           <a:p>
             <a:pPr algn="ctr"/>
+            <a:endParaRPr/>
           </a:p>
         </p:txBody>
       </p:sp>
@@ -12176,7 +13251,7 @@
           <a:noFill/>
         </p:spPr>
         <p:txBody>
-          <a:bodyPr wrap="square" lIns="0" rIns="0" tIns="0" bIns="0" anchor="ctr">
+          <a:bodyPr wrap="square" lIns="0" tIns="0" rIns="0" bIns="0" anchor="ctr">
             <a:spAutoFit/>
           </a:bodyPr>
           <a:lstStyle/>
@@ -12217,9 +13292,27 @@
                 <a:tableStyleId>{5C22544A-7EE6-4342-B048-85BDC9FD1C3A}</a:tableStyleId>
               </a:tblPr>
               <a:tblGrid>
-                <a:gridCol w="3262487"/>
-                <a:gridCol w="3806235"/>
-                <a:gridCol w="3806235"/>
+                <a:gridCol w="3262487">
+                  <a:extLst>
+                    <a:ext uri="{9D8B030D-6E8A-4147-A177-3AD203B41FA5}">
+                      <a16:colId xmlns:a16="http://schemas.microsoft.com/office/drawing/2014/main" val="20000"/>
+                    </a:ext>
+                  </a:extLst>
+                </a:gridCol>
+                <a:gridCol w="3806235">
+                  <a:extLst>
+                    <a:ext uri="{9D8B030D-6E8A-4147-A177-3AD203B41FA5}">
+                      <a16:colId xmlns:a16="http://schemas.microsoft.com/office/drawing/2014/main" val="20001"/>
+                    </a:ext>
+                  </a:extLst>
+                </a:gridCol>
+                <a:gridCol w="3806235">
+                  <a:extLst>
+                    <a:ext uri="{9D8B030D-6E8A-4147-A177-3AD203B41FA5}">
+                      <a16:colId xmlns:a16="http://schemas.microsoft.com/office/drawing/2014/main" val="20002"/>
+                    </a:ext>
+                  </a:extLst>
+                </a:gridCol>
               </a:tblGrid>
               <a:tr h="329184">
                 <a:tc>
@@ -12228,15 +13321,7 @@
                     <a:lstStyle/>
                     <a:p>
                       <a:pPr algn="l"/>
-                      <a:r>
-                        <a:rPr sz="1200" b="1">
-                          <a:solidFill>
-                            <a:srgbClr val="FFFFFF"/>
-                          </a:solidFill>
-                          <a:latin typeface="Microsoft JhengHei"/>
-                        </a:rPr>
-                        <a:t/>
-                      </a:r>
+                      <a:endParaRPr/>
                     </a:p>
                   </a:txBody>
                   <a:tcPr marL="45720" marR="45720" marT="18288" marB="18288" anchor="ctr">
@@ -12291,6 +13376,11 @@
                     </a:solidFill>
                   </a:tcPr>
                 </a:tc>
+                <a:extLst>
+                  <a:ext uri="{0D108BD9-81ED-4DB2-BD59-A6C34878D82A}">
+                    <a16:rowId xmlns:a16="http://schemas.microsoft.com/office/drawing/2014/main" val="10000"/>
+                  </a:ext>
+                </a:extLst>
               </a:tr>
               <a:tr h="292608">
                 <a:tc>
@@ -12362,6 +13452,11 @@
                     </a:solidFill>
                   </a:tcPr>
                 </a:tc>
+                <a:extLst>
+                  <a:ext uri="{0D108BD9-81ED-4DB2-BD59-A6C34878D82A}">
+                    <a16:rowId xmlns:a16="http://schemas.microsoft.com/office/drawing/2014/main" val="10001"/>
+                  </a:ext>
+                </a:extLst>
               </a:tr>
               <a:tr h="292608">
                 <a:tc>
@@ -12433,6 +13528,11 @@
                     </a:solidFill>
                   </a:tcPr>
                 </a:tc>
+                <a:extLst>
+                  <a:ext uri="{0D108BD9-81ED-4DB2-BD59-A6C34878D82A}">
+                    <a16:rowId xmlns:a16="http://schemas.microsoft.com/office/drawing/2014/main" val="10002"/>
+                  </a:ext>
+                </a:extLst>
               </a:tr>
               <a:tr h="292608">
                 <a:tc>
@@ -12504,6 +13604,11 @@
                     </a:solidFill>
                   </a:tcPr>
                 </a:tc>
+                <a:extLst>
+                  <a:ext uri="{0D108BD9-81ED-4DB2-BD59-A6C34878D82A}">
+                    <a16:rowId xmlns:a16="http://schemas.microsoft.com/office/drawing/2014/main" val="10003"/>
+                  </a:ext>
+                </a:extLst>
               </a:tr>
               <a:tr h="292608">
                 <a:tc>
@@ -12575,6 +13680,11 @@
                     </a:solidFill>
                   </a:tcPr>
                 </a:tc>
+                <a:extLst>
+                  <a:ext uri="{0D108BD9-81ED-4DB2-BD59-A6C34878D82A}">
+                    <a16:rowId xmlns:a16="http://schemas.microsoft.com/office/drawing/2014/main" val="10004"/>
+                  </a:ext>
+                </a:extLst>
               </a:tr>
               <a:tr h="292608">
                 <a:tc>
@@ -12646,6 +13756,11 @@
                     </a:solidFill>
                   </a:tcPr>
                 </a:tc>
+                <a:extLst>
+                  <a:ext uri="{0D108BD9-81ED-4DB2-BD59-A6C34878D82A}">
+                    <a16:rowId xmlns:a16="http://schemas.microsoft.com/office/drawing/2014/main" val="10005"/>
+                  </a:ext>
+                </a:extLst>
               </a:tr>
               <a:tr h="292608">
                 <a:tc>
@@ -12717,6 +13832,11 @@
                     </a:solidFill>
                   </a:tcPr>
                 </a:tc>
+                <a:extLst>
+                  <a:ext uri="{0D108BD9-81ED-4DB2-BD59-A6C34878D82A}">
+                    <a16:rowId xmlns:a16="http://schemas.microsoft.com/office/drawing/2014/main" val="10006"/>
+                  </a:ext>
+                </a:extLst>
               </a:tr>
             </a:tbl>
           </a:graphicData>
@@ -12763,6 +13883,7 @@
           <a:lstStyle/>
           <a:p>
             <a:pPr algn="ctr"/>
+            <a:endParaRPr/>
           </a:p>
         </p:txBody>
       </p:sp>
@@ -12783,7 +13904,7 @@
           <a:noFill/>
         </p:spPr>
         <p:txBody>
-          <a:bodyPr wrap="square" lIns="0" rIns="0" tIns="0" bIns="0" anchor="ctr">
+          <a:bodyPr wrap="square" lIns="0" tIns="0" rIns="0" bIns="0" anchor="ctr">
             <a:spAutoFit/>
           </a:bodyPr>
           <a:lstStyle/>
@@ -12822,7 +13943,7 @@
           <a:noFill/>
         </p:spPr>
         <p:txBody>
-          <a:bodyPr wrap="square" lIns="0" rIns="0" tIns="0" bIns="0" anchor="ctr">
+          <a:bodyPr wrap="square" lIns="0" tIns="0" rIns="0" bIns="0" anchor="ctr">
             <a:spAutoFit/>
           </a:bodyPr>
           <a:lstStyle/>
@@ -12861,7 +13982,7 @@
           <a:noFill/>
         </p:spPr>
         <p:txBody>
-          <a:bodyPr wrap="square" lIns="0" rIns="0" tIns="0" bIns="0" anchor="ctr">
+          <a:bodyPr wrap="square" lIns="0" tIns="0" rIns="0" bIns="0" anchor="ctr">
             <a:spAutoFit/>
           </a:bodyPr>
           <a:lstStyle/>
@@ -12924,6 +14045,7 @@
           <a:lstStyle/>
           <a:p>
             <a:pPr algn="ctr"/>
+            <a:endParaRPr/>
           </a:p>
         </p:txBody>
       </p:sp>
@@ -12944,7 +14066,7 @@
           <a:noFill/>
         </p:spPr>
         <p:txBody>
-          <a:bodyPr wrap="square" lIns="0" rIns="0" tIns="0" bIns="0" anchor="ctr">
+          <a:bodyPr wrap="square" lIns="0" tIns="0" rIns="0" bIns="0" anchor="ctr">
             <a:spAutoFit/>
           </a:bodyPr>
           <a:lstStyle/>
@@ -12983,7 +14105,7 @@
           <a:noFill/>
         </p:spPr>
         <p:txBody>
-          <a:bodyPr wrap="square" lIns="0" rIns="0" tIns="0" bIns="0" anchor="ctr">
+          <a:bodyPr wrap="square" lIns="0" tIns="0" rIns="0" bIns="0" anchor="ctr">
             <a:spAutoFit/>
           </a:bodyPr>
           <a:lstStyle/>
@@ -13022,7 +14144,7 @@
           <a:noFill/>
         </p:spPr>
         <p:txBody>
-          <a:bodyPr wrap="square" lIns="0" rIns="0" tIns="0" bIns="0" anchor="ctr">
+          <a:bodyPr wrap="square" lIns="0" tIns="0" rIns="0" bIns="0" anchor="ctr">
             <a:spAutoFit/>
           </a:bodyPr>
           <a:lstStyle/>
@@ -13053,7 +14175,7 @@
 </file>
 
 <file path=ppt/slides/slide5.xml><?xml version="1.0" encoding="utf-8"?>
-<p:sld xmlns:a="http://schemas.openxmlformats.org/drawingml/2006/main" xmlns:p="http://schemas.openxmlformats.org/presentationml/2006/main" xmlns:r="http://schemas.openxmlformats.org/officeDocument/2006/relationships">
+<p:sld xmlns:a="http://schemas.openxmlformats.org/drawingml/2006/main" xmlns:r="http://schemas.openxmlformats.org/officeDocument/2006/relationships" xmlns:p="http://schemas.openxmlformats.org/presentationml/2006/main">
   <p:cSld>
     <p:spTree>
       <p:nvGrpSpPr>
@@ -13061,7 +14183,14 @@
         <p:cNvGrpSpPr/>
         <p:nvPr/>
       </p:nvGrpSpPr>
-      <p:grpSpPr/>
+      <p:grpSpPr>
+        <a:xfrm>
+          <a:off x="0" y="0"/>
+          <a:ext cx="0" cy="0"/>
+          <a:chOff x="0" y="0"/>
+          <a:chExt cx="0" cy="0"/>
+        </a:xfrm>
+      </p:grpSpPr>
       <p:sp>
         <p:nvSpPr>
           <p:cNvPr id="2" name="TextBox 1"/>
@@ -13079,7 +14208,7 @@
           <a:noFill/>
         </p:spPr>
         <p:txBody>
-          <a:bodyPr wrap="square" lIns="0" rIns="0" tIns="0" bIns="0" anchor="t">
+          <a:bodyPr wrap="square" lIns="0" tIns="0" rIns="0" bIns="0" anchor="t">
             <a:spAutoFit/>
           </a:bodyPr>
           <a:lstStyle/>
@@ -13118,7 +14247,7 @@
           <a:noFill/>
         </p:spPr>
         <p:txBody>
-          <a:bodyPr wrap="square" lIns="0" rIns="0" tIns="0" bIns="0" anchor="t">
+          <a:bodyPr wrap="square" lIns="0" tIns="0" rIns="0" bIns="0" anchor="t">
             <a:spAutoFit/>
           </a:bodyPr>
           <a:lstStyle/>
@@ -13157,7 +14286,7 @@
           <a:noFill/>
         </p:spPr>
         <p:txBody>
-          <a:bodyPr wrap="square" lIns="0" rIns="0" tIns="0" bIns="0" anchor="t">
+          <a:bodyPr wrap="square" lIns="0" tIns="0" rIns="0" bIns="0" anchor="t">
             <a:spAutoFit/>
           </a:bodyPr>
           <a:lstStyle/>
@@ -13220,6 +14349,7 @@
           <a:lstStyle/>
           <a:p>
             <a:pPr algn="ctr"/>
+            <a:endParaRPr/>
           </a:p>
         </p:txBody>
       </p:sp>
@@ -13268,6 +14398,7 @@
           <a:lstStyle/>
           <a:p>
             <a:pPr algn="ctr"/>
+            <a:endParaRPr/>
           </a:p>
         </p:txBody>
       </p:sp>
@@ -13288,7 +14419,7 @@
           <a:noFill/>
         </p:spPr>
         <p:txBody>
-          <a:bodyPr wrap="square" lIns="0" rIns="0" tIns="0" bIns="0" anchor="t">
+          <a:bodyPr wrap="square" lIns="0" tIns="0" rIns="0" bIns="0" anchor="t">
             <a:spAutoFit/>
           </a:bodyPr>
           <a:lstStyle/>
@@ -13327,7 +14458,7 @@
           <a:noFill/>
         </p:spPr>
         <p:txBody>
-          <a:bodyPr wrap="square" lIns="0" rIns="0" tIns="0" bIns="0" anchor="t">
+          <a:bodyPr wrap="square" lIns="0" tIns="0" rIns="0" bIns="0" anchor="t">
             <a:spAutoFit/>
           </a:bodyPr>
           <a:lstStyle/>
@@ -13394,6 +14525,7 @@
           <a:lstStyle/>
           <a:p>
             <a:pPr algn="ctr"/>
+            <a:endParaRPr/>
           </a:p>
         </p:txBody>
       </p:sp>
@@ -13414,7 +14546,7 @@
           <a:noFill/>
         </p:spPr>
         <p:txBody>
-          <a:bodyPr wrap="square" lIns="0" rIns="0" tIns="0" bIns="0" anchor="t">
+          <a:bodyPr wrap="square" lIns="0" tIns="0" rIns="0" bIns="0" anchor="t">
             <a:spAutoFit/>
           </a:bodyPr>
           <a:lstStyle/>
@@ -13453,7 +14585,7 @@
           <a:noFill/>
         </p:spPr>
         <p:txBody>
-          <a:bodyPr wrap="square" lIns="0" rIns="0" tIns="0" bIns="0" anchor="t">
+          <a:bodyPr wrap="square" lIns="0" tIns="0" rIns="0" bIns="0" anchor="t">
             <a:spAutoFit/>
           </a:bodyPr>
           <a:lstStyle/>
@@ -13492,7 +14624,7 @@
           <a:noFill/>
         </p:spPr>
         <p:txBody>
-          <a:bodyPr wrap="square" lIns="0" rIns="0" tIns="0" bIns="0" anchor="t">
+          <a:bodyPr wrap="square" lIns="0" tIns="0" rIns="0" bIns="0" anchor="t">
             <a:spAutoFit/>
           </a:bodyPr>
           <a:lstStyle/>
@@ -13555,6 +14687,7 @@
           <a:lstStyle/>
           <a:p>
             <a:pPr algn="ctr"/>
+            <a:endParaRPr/>
           </a:p>
         </p:txBody>
       </p:sp>
@@ -13575,7 +14708,7 @@
           <a:noFill/>
         </p:spPr>
         <p:txBody>
-          <a:bodyPr wrap="square" lIns="0" rIns="0" tIns="0" bIns="0" anchor="ctr">
+          <a:bodyPr wrap="square" lIns="0" tIns="0" rIns="0" bIns="0" anchor="ctr">
             <a:spAutoFit/>
           </a:bodyPr>
           <a:lstStyle/>
@@ -13614,7 +14747,7 @@
           <a:noFill/>
         </p:spPr>
         <p:txBody>
-          <a:bodyPr wrap="square" lIns="0" rIns="0" tIns="0" bIns="0" anchor="ctr">
+          <a:bodyPr wrap="square" lIns="0" tIns="0" rIns="0" bIns="0" anchor="ctr">
             <a:spAutoFit/>
           </a:bodyPr>
           <a:lstStyle/>
@@ -13653,7 +14786,7 @@
           <a:noFill/>
         </p:spPr>
         <p:txBody>
-          <a:bodyPr wrap="square" lIns="0" rIns="0" tIns="0" bIns="0" anchor="ctr">
+          <a:bodyPr wrap="square" lIns="0" tIns="0" rIns="0" bIns="0" anchor="ctr">
             <a:spAutoFit/>
           </a:bodyPr>
           <a:lstStyle/>
@@ -13716,6 +14849,7 @@
           <a:lstStyle/>
           <a:p>
             <a:pPr algn="ctr"/>
+            <a:endParaRPr/>
           </a:p>
         </p:txBody>
       </p:sp>
@@ -13736,7 +14870,7 @@
           <a:noFill/>
         </p:spPr>
         <p:txBody>
-          <a:bodyPr wrap="square" lIns="0" rIns="0" tIns="0" bIns="0" anchor="ctr">
+          <a:bodyPr wrap="square" lIns="0" tIns="0" rIns="0" bIns="0" anchor="ctr">
             <a:spAutoFit/>
           </a:bodyPr>
           <a:lstStyle/>
@@ -13775,7 +14909,7 @@
           <a:noFill/>
         </p:spPr>
         <p:txBody>
-          <a:bodyPr wrap="square" lIns="0" rIns="0" tIns="0" bIns="0" anchor="ctr">
+          <a:bodyPr wrap="square" lIns="0" tIns="0" rIns="0" bIns="0" anchor="ctr">
             <a:spAutoFit/>
           </a:bodyPr>
           <a:lstStyle/>
@@ -13814,7 +14948,7 @@
           <a:noFill/>
         </p:spPr>
         <p:txBody>
-          <a:bodyPr wrap="square" lIns="0" rIns="0" tIns="0" bIns="0" anchor="ctr">
+          <a:bodyPr wrap="square" lIns="0" tIns="0" rIns="0" bIns="0" anchor="ctr">
             <a:spAutoFit/>
           </a:bodyPr>
           <a:lstStyle/>
@@ -13855,10 +14989,34 @@
                 <a:tableStyleId>{5C22544A-7EE6-4342-B048-85BDC9FD1C3A}</a:tableStyleId>
               </a:tblPr>
               <a:tblGrid>
-                <a:gridCol w="2897642"/>
-                <a:gridCol w="2253721"/>
-                <a:gridCol w="2253721"/>
-                <a:gridCol w="2253721"/>
+                <a:gridCol w="2897642">
+                  <a:extLst>
+                    <a:ext uri="{9D8B030D-6E8A-4147-A177-3AD203B41FA5}">
+                      <a16:colId xmlns:a16="http://schemas.microsoft.com/office/drawing/2014/main" val="20000"/>
+                    </a:ext>
+                  </a:extLst>
+                </a:gridCol>
+                <a:gridCol w="2253721">
+                  <a:extLst>
+                    <a:ext uri="{9D8B030D-6E8A-4147-A177-3AD203B41FA5}">
+                      <a16:colId xmlns:a16="http://schemas.microsoft.com/office/drawing/2014/main" val="20001"/>
+                    </a:ext>
+                  </a:extLst>
+                </a:gridCol>
+                <a:gridCol w="2253721">
+                  <a:extLst>
+                    <a:ext uri="{9D8B030D-6E8A-4147-A177-3AD203B41FA5}">
+                      <a16:colId xmlns:a16="http://schemas.microsoft.com/office/drawing/2014/main" val="20002"/>
+                    </a:ext>
+                  </a:extLst>
+                </a:gridCol>
+                <a:gridCol w="2253721">
+                  <a:extLst>
+                    <a:ext uri="{9D8B030D-6E8A-4147-A177-3AD203B41FA5}">
+                      <a16:colId xmlns:a16="http://schemas.microsoft.com/office/drawing/2014/main" val="20003"/>
+                    </a:ext>
+                  </a:extLst>
+                </a:gridCol>
               </a:tblGrid>
               <a:tr h="329184">
                 <a:tc>
@@ -13867,15 +15025,7 @@
                     <a:lstStyle/>
                     <a:p>
                       <a:pPr algn="l"/>
-                      <a:r>
-                        <a:rPr sz="1200" b="1">
-                          <a:solidFill>
-                            <a:srgbClr val="FFFFFF"/>
-                          </a:solidFill>
-                          <a:latin typeface="Microsoft JhengHei"/>
-                        </a:rPr>
-                        <a:t/>
-                      </a:r>
+                      <a:endParaRPr/>
                     </a:p>
                   </a:txBody>
                   <a:tcPr marL="45720" marR="45720" marT="18288" marB="18288" anchor="ctr">
@@ -13953,6 +15103,11 @@
                     </a:solidFill>
                   </a:tcPr>
                 </a:tc>
+                <a:extLst>
+                  <a:ext uri="{0D108BD9-81ED-4DB2-BD59-A6C34878D82A}">
+                    <a16:rowId xmlns:a16="http://schemas.microsoft.com/office/drawing/2014/main" val="10000"/>
+                  </a:ext>
+                </a:extLst>
               </a:tr>
               <a:tr h="292608">
                 <a:tc>
@@ -14047,6 +15202,11 @@
                     </a:solidFill>
                   </a:tcPr>
                 </a:tc>
+                <a:extLst>
+                  <a:ext uri="{0D108BD9-81ED-4DB2-BD59-A6C34878D82A}">
+                    <a16:rowId xmlns:a16="http://schemas.microsoft.com/office/drawing/2014/main" val="10001"/>
+                  </a:ext>
+                </a:extLst>
               </a:tr>
               <a:tr h="292608">
                 <a:tc>
@@ -14141,6 +15301,11 @@
                     </a:solidFill>
                   </a:tcPr>
                 </a:tc>
+                <a:extLst>
+                  <a:ext uri="{0D108BD9-81ED-4DB2-BD59-A6C34878D82A}">
+                    <a16:rowId xmlns:a16="http://schemas.microsoft.com/office/drawing/2014/main" val="10002"/>
+                  </a:ext>
+                </a:extLst>
               </a:tr>
               <a:tr h="292608">
                 <a:tc>
@@ -14235,6 +15400,11 @@
                     </a:solidFill>
                   </a:tcPr>
                 </a:tc>
+                <a:extLst>
+                  <a:ext uri="{0D108BD9-81ED-4DB2-BD59-A6C34878D82A}">
+                    <a16:rowId xmlns:a16="http://schemas.microsoft.com/office/drawing/2014/main" val="10003"/>
+                  </a:ext>
+                </a:extLst>
               </a:tr>
             </a:tbl>
           </a:graphicData>
@@ -14249,7 +15419,7 @@
 </file>
 
 <file path=ppt/slides/slide6.xml><?xml version="1.0" encoding="utf-8"?>
-<p:sld xmlns:a="http://schemas.openxmlformats.org/drawingml/2006/main" xmlns:p="http://schemas.openxmlformats.org/presentationml/2006/main" xmlns:r="http://schemas.openxmlformats.org/officeDocument/2006/relationships">
+<p:sld xmlns:a="http://schemas.openxmlformats.org/drawingml/2006/main" xmlns:r="http://schemas.openxmlformats.org/officeDocument/2006/relationships" xmlns:p="http://schemas.openxmlformats.org/presentationml/2006/main">
   <p:cSld>
     <p:spTree>
       <p:nvGrpSpPr>
@@ -14257,7 +15427,14 @@
         <p:cNvGrpSpPr/>
         <p:nvPr/>
       </p:nvGrpSpPr>
-      <p:grpSpPr/>
+      <p:grpSpPr>
+        <a:xfrm>
+          <a:off x="0" y="0"/>
+          <a:ext cx="0" cy="0"/>
+          <a:chOff x="0" y="0"/>
+          <a:chExt cx="0" cy="0"/>
+        </a:xfrm>
+      </p:grpSpPr>
       <p:sp>
         <p:nvSpPr>
           <p:cNvPr id="2" name="TextBox 1"/>
@@ -14275,7 +15452,7 @@
           <a:noFill/>
         </p:spPr>
         <p:txBody>
-          <a:bodyPr wrap="square" lIns="0" rIns="0" tIns="0" bIns="0" anchor="t">
+          <a:bodyPr wrap="square" lIns="0" tIns="0" rIns="0" bIns="0" anchor="t">
             <a:spAutoFit/>
           </a:bodyPr>
           <a:lstStyle/>
@@ -14314,7 +15491,7 @@
           <a:noFill/>
         </p:spPr>
         <p:txBody>
-          <a:bodyPr wrap="square" lIns="0" rIns="0" tIns="0" bIns="0" anchor="t">
+          <a:bodyPr wrap="square" lIns="0" tIns="0" rIns="0" bIns="0" anchor="t">
             <a:spAutoFit/>
           </a:bodyPr>
           <a:lstStyle/>
@@ -14353,7 +15530,7 @@
           <a:noFill/>
         </p:spPr>
         <p:txBody>
-          <a:bodyPr wrap="square" lIns="0" rIns="0" tIns="0" bIns="0" anchor="t">
+          <a:bodyPr wrap="square" lIns="0" tIns="0" rIns="0" bIns="0" anchor="t">
             <a:spAutoFit/>
           </a:bodyPr>
           <a:lstStyle/>
@@ -14416,6 +15593,7 @@
           <a:lstStyle/>
           <a:p>
             <a:pPr algn="ctr"/>
+            <a:endParaRPr/>
           </a:p>
         </p:txBody>
       </p:sp>
@@ -14429,7 +15607,7 @@
         </p:nvGraphicFramePr>
         <p:xfrm>
           <a:off x="658368" y="1755648"/>
-          <a:ext cx="10874955" cy="1792224"/>
+          <a:ext cx="10874955" cy="1865376"/>
         </p:xfrm>
         <a:graphic>
           <a:graphicData uri="http://schemas.openxmlformats.org/drawingml/2006/table">
@@ -14438,11 +15616,41 @@
                 <a:tableStyleId>{5C22544A-7EE6-4342-B048-85BDC9FD1C3A}</a:tableStyleId>
               </a:tblPr>
               <a:tblGrid>
-                <a:gridCol w="3262487"/>
-                <a:gridCol w="1903117"/>
-                <a:gridCol w="1903117"/>
-                <a:gridCol w="1903117"/>
-                <a:gridCol w="1903117"/>
+                <a:gridCol w="3262487">
+                  <a:extLst>
+                    <a:ext uri="{9D8B030D-6E8A-4147-A177-3AD203B41FA5}">
+                      <a16:colId xmlns:a16="http://schemas.microsoft.com/office/drawing/2014/main" val="20000"/>
+                    </a:ext>
+                  </a:extLst>
+                </a:gridCol>
+                <a:gridCol w="1903117">
+                  <a:extLst>
+                    <a:ext uri="{9D8B030D-6E8A-4147-A177-3AD203B41FA5}">
+                      <a16:colId xmlns:a16="http://schemas.microsoft.com/office/drawing/2014/main" val="20001"/>
+                    </a:ext>
+                  </a:extLst>
+                </a:gridCol>
+                <a:gridCol w="1903117">
+                  <a:extLst>
+                    <a:ext uri="{9D8B030D-6E8A-4147-A177-3AD203B41FA5}">
+                      <a16:colId xmlns:a16="http://schemas.microsoft.com/office/drawing/2014/main" val="20002"/>
+                    </a:ext>
+                  </a:extLst>
+                </a:gridCol>
+                <a:gridCol w="1903117">
+                  <a:extLst>
+                    <a:ext uri="{9D8B030D-6E8A-4147-A177-3AD203B41FA5}">
+                      <a16:colId xmlns:a16="http://schemas.microsoft.com/office/drawing/2014/main" val="20003"/>
+                    </a:ext>
+                  </a:extLst>
+                </a:gridCol>
+                <a:gridCol w="1903117">
+                  <a:extLst>
+                    <a:ext uri="{9D8B030D-6E8A-4147-A177-3AD203B41FA5}">
+                      <a16:colId xmlns:a16="http://schemas.microsoft.com/office/drawing/2014/main" val="20004"/>
+                    </a:ext>
+                  </a:extLst>
+                </a:gridCol>
               </a:tblGrid>
               <a:tr h="329184">
                 <a:tc>
@@ -14451,15 +15659,7 @@
                     <a:lstStyle/>
                     <a:p>
                       <a:pPr algn="l"/>
-                      <a:r>
-                        <a:rPr sz="1200" b="1">
-                          <a:solidFill>
-                            <a:srgbClr val="FFFFFF"/>
-                          </a:solidFill>
-                          <a:latin typeface="Microsoft JhengHei"/>
-                        </a:rPr>
-                        <a:t/>
-                      </a:r>
+                      <a:endParaRPr/>
                     </a:p>
                   </a:txBody>
                   <a:tcPr marL="45720" marR="45720" marT="18288" marB="18288" anchor="ctr">
@@ -14560,6 +15760,11 @@
                     </a:solidFill>
                   </a:tcPr>
                 </a:tc>
+                <a:extLst>
+                  <a:ext uri="{0D108BD9-81ED-4DB2-BD59-A6C34878D82A}">
+                    <a16:rowId xmlns:a16="http://schemas.microsoft.com/office/drawing/2014/main" val="10000"/>
+                  </a:ext>
+                </a:extLst>
               </a:tr>
               <a:tr h="292608">
                 <a:tc>
@@ -14677,6 +15882,11 @@
                     </a:solidFill>
                   </a:tcPr>
                 </a:tc>
+                <a:extLst>
+                  <a:ext uri="{0D108BD9-81ED-4DB2-BD59-A6C34878D82A}">
+                    <a16:rowId xmlns:a16="http://schemas.microsoft.com/office/drawing/2014/main" val="10001"/>
+                  </a:ext>
+                </a:extLst>
               </a:tr>
               <a:tr h="292608">
                 <a:tc>
@@ -14794,6 +16004,11 @@
                     </a:solidFill>
                   </a:tcPr>
                 </a:tc>
+                <a:extLst>
+                  <a:ext uri="{0D108BD9-81ED-4DB2-BD59-A6C34878D82A}">
+                    <a16:rowId xmlns:a16="http://schemas.microsoft.com/office/drawing/2014/main" val="10002"/>
+                  </a:ext>
+                </a:extLst>
               </a:tr>
               <a:tr h="292608">
                 <a:tc>
@@ -14911,6 +16126,11 @@
                     </a:solidFill>
                   </a:tcPr>
                 </a:tc>
+                <a:extLst>
+                  <a:ext uri="{0D108BD9-81ED-4DB2-BD59-A6C34878D82A}">
+                    <a16:rowId xmlns:a16="http://schemas.microsoft.com/office/drawing/2014/main" val="10003"/>
+                  </a:ext>
+                </a:extLst>
               </a:tr>
               <a:tr h="292608">
                 <a:tc>
@@ -15028,6 +16248,11 @@
                     </a:solidFill>
                   </a:tcPr>
                 </a:tc>
+                <a:extLst>
+                  <a:ext uri="{0D108BD9-81ED-4DB2-BD59-A6C34878D82A}">
+                    <a16:rowId xmlns:a16="http://schemas.microsoft.com/office/drawing/2014/main" val="10004"/>
+                  </a:ext>
+                </a:extLst>
               </a:tr>
               <a:tr h="292608">
                 <a:tc>
@@ -15145,6 +16370,11 @@
                     </a:solidFill>
                   </a:tcPr>
                 </a:tc>
+                <a:extLst>
+                  <a:ext uri="{0D108BD9-81ED-4DB2-BD59-A6C34878D82A}">
+                    <a16:rowId xmlns:a16="http://schemas.microsoft.com/office/drawing/2014/main" val="10005"/>
+                  </a:ext>
+                </a:extLst>
               </a:tr>
             </a:tbl>
           </a:graphicData>
@@ -15195,6 +16425,7 @@
           <a:lstStyle/>
           <a:p>
             <a:pPr algn="ctr"/>
+            <a:endParaRPr/>
           </a:p>
         </p:txBody>
       </p:sp>
@@ -15215,7 +16446,7 @@
           <a:noFill/>
         </p:spPr>
         <p:txBody>
-          <a:bodyPr wrap="square" lIns="0" rIns="0" tIns="0" bIns="0" anchor="t">
+          <a:bodyPr wrap="square" lIns="0" tIns="0" rIns="0" bIns="0" anchor="t">
             <a:spAutoFit/>
           </a:bodyPr>
           <a:lstStyle/>
@@ -15280,6 +16511,7 @@
           <a:lstStyle/>
           <a:p>
             <a:pPr algn="ctr"/>
+            <a:endParaRPr/>
           </a:p>
         </p:txBody>
       </p:sp>
@@ -15300,7 +16532,7 @@
           <a:noFill/>
         </p:spPr>
         <p:txBody>
-          <a:bodyPr wrap="square" lIns="0" rIns="0" tIns="0" bIns="0" anchor="ctr">
+          <a:bodyPr wrap="square" lIns="0" tIns="0" rIns="0" bIns="0" anchor="ctr">
             <a:spAutoFit/>
           </a:bodyPr>
           <a:lstStyle/>
@@ -15339,7 +16571,7 @@
           <a:noFill/>
         </p:spPr>
         <p:txBody>
-          <a:bodyPr wrap="square" lIns="0" rIns="0" tIns="0" bIns="0" anchor="t">
+          <a:bodyPr wrap="square" lIns="0" tIns="0" rIns="0" bIns="0" anchor="t">
             <a:spAutoFit/>
           </a:bodyPr>
           <a:lstStyle/>
@@ -15438,6 +16670,7 @@
           <a:lstStyle/>
           <a:p>
             <a:pPr algn="ctr"/>
+            <a:endParaRPr/>
           </a:p>
         </p:txBody>
       </p:sp>
@@ -15458,7 +16691,7 @@
           <a:noFill/>
         </p:spPr>
         <p:txBody>
-          <a:bodyPr wrap="square" lIns="0" rIns="0" tIns="0" bIns="0" anchor="t">
+          <a:bodyPr wrap="square" lIns="0" tIns="0" rIns="0" bIns="0" anchor="t">
             <a:spAutoFit/>
           </a:bodyPr>
           <a:lstStyle/>
@@ -15523,6 +16756,7 @@
           <a:lstStyle/>
           <a:p>
             <a:pPr algn="ctr"/>
+            <a:endParaRPr/>
           </a:p>
         </p:txBody>
       </p:sp>
@@ -15543,7 +16777,7 @@
           <a:noFill/>
         </p:spPr>
         <p:txBody>
-          <a:bodyPr wrap="square" lIns="0" rIns="0" tIns="0" bIns="0" anchor="ctr">
+          <a:bodyPr wrap="square" lIns="0" tIns="0" rIns="0" bIns="0" anchor="ctr">
             <a:spAutoFit/>
           </a:bodyPr>
           <a:lstStyle/>
@@ -15582,7 +16816,7 @@
           <a:noFill/>
         </p:spPr>
         <p:txBody>
-          <a:bodyPr wrap="square" lIns="0" rIns="0" tIns="0" bIns="0" anchor="t">
+          <a:bodyPr wrap="square" lIns="0" tIns="0" rIns="0" bIns="0" anchor="t">
             <a:spAutoFit/>
           </a:bodyPr>
           <a:lstStyle/>
@@ -15681,6 +16915,7 @@
           <a:lstStyle/>
           <a:p>
             <a:pPr algn="ctr"/>
+            <a:endParaRPr/>
           </a:p>
         </p:txBody>
       </p:sp>
@@ -15701,7 +16936,7 @@
           <a:noFill/>
         </p:spPr>
         <p:txBody>
-          <a:bodyPr wrap="square" lIns="0" rIns="0" tIns="0" bIns="0" anchor="t">
+          <a:bodyPr wrap="square" lIns="0" tIns="0" rIns="0" bIns="0" anchor="t">
             <a:spAutoFit/>
           </a:bodyPr>
           <a:lstStyle/>
@@ -15766,6 +17001,7 @@
           <a:lstStyle/>
           <a:p>
             <a:pPr algn="ctr"/>
+            <a:endParaRPr/>
           </a:p>
         </p:txBody>
       </p:sp>
@@ -15786,7 +17022,7 @@
           <a:noFill/>
         </p:spPr>
         <p:txBody>
-          <a:bodyPr wrap="square" lIns="0" rIns="0" tIns="0" bIns="0" anchor="ctr">
+          <a:bodyPr wrap="square" lIns="0" tIns="0" rIns="0" bIns="0" anchor="ctr">
             <a:spAutoFit/>
           </a:bodyPr>
           <a:lstStyle/>
@@ -15825,7 +17061,7 @@
           <a:noFill/>
         </p:spPr>
         <p:txBody>
-          <a:bodyPr wrap="square" lIns="0" rIns="0" tIns="0" bIns="0" anchor="t">
+          <a:bodyPr wrap="square" lIns="0" tIns="0" rIns="0" bIns="0" anchor="t">
             <a:spAutoFit/>
           </a:bodyPr>
           <a:lstStyle/>
@@ -15922,6 +17158,7 @@
           <a:lstStyle/>
           <a:p>
             <a:pPr algn="ctr"/>
+            <a:endParaRPr/>
           </a:p>
         </p:txBody>
       </p:sp>
@@ -15942,7 +17179,7 @@
           <a:noFill/>
         </p:spPr>
         <p:txBody>
-          <a:bodyPr wrap="square" lIns="0" rIns="0" tIns="0" bIns="0" anchor="ctr">
+          <a:bodyPr wrap="square" lIns="0" tIns="0" rIns="0" bIns="0" anchor="ctr">
             <a:spAutoFit/>
           </a:bodyPr>
           <a:lstStyle/>
@@ -15973,7 +17210,7 @@
 </file>
 
 <file path=ppt/slides/slide7.xml><?xml version="1.0" encoding="utf-8"?>
-<p:sld xmlns:a="http://schemas.openxmlformats.org/drawingml/2006/main" xmlns:p="http://schemas.openxmlformats.org/presentationml/2006/main" xmlns:r="http://schemas.openxmlformats.org/officeDocument/2006/relationships">
+<p:sld xmlns:a="http://schemas.openxmlformats.org/drawingml/2006/main" xmlns:r="http://schemas.openxmlformats.org/officeDocument/2006/relationships" xmlns:p="http://schemas.openxmlformats.org/presentationml/2006/main">
   <p:cSld>
     <p:spTree>
       <p:nvGrpSpPr>
@@ -15981,7 +17218,14 @@
         <p:cNvGrpSpPr/>
         <p:nvPr/>
       </p:nvGrpSpPr>
-      <p:grpSpPr/>
+      <p:grpSpPr>
+        <a:xfrm>
+          <a:off x="0" y="0"/>
+          <a:ext cx="0" cy="0"/>
+          <a:chOff x="0" y="0"/>
+          <a:chExt cx="0" cy="0"/>
+        </a:xfrm>
+      </p:grpSpPr>
       <p:sp>
         <p:nvSpPr>
           <p:cNvPr id="2" name="TextBox 1"/>
@@ -15999,7 +17243,7 @@
           <a:noFill/>
         </p:spPr>
         <p:txBody>
-          <a:bodyPr wrap="square" lIns="0" rIns="0" tIns="0" bIns="0" anchor="t">
+          <a:bodyPr wrap="square" lIns="0" tIns="0" rIns="0" bIns="0" anchor="t">
             <a:spAutoFit/>
           </a:bodyPr>
           <a:lstStyle/>
@@ -16038,7 +17282,7 @@
           <a:noFill/>
         </p:spPr>
         <p:txBody>
-          <a:bodyPr wrap="square" lIns="0" rIns="0" tIns="0" bIns="0" anchor="t">
+          <a:bodyPr wrap="square" lIns="0" tIns="0" rIns="0" bIns="0" anchor="t">
             <a:spAutoFit/>
           </a:bodyPr>
           <a:lstStyle/>
@@ -16077,7 +17321,7 @@
           <a:noFill/>
         </p:spPr>
         <p:txBody>
-          <a:bodyPr wrap="square" lIns="0" rIns="0" tIns="0" bIns="0" anchor="t">
+          <a:bodyPr wrap="square" lIns="0" tIns="0" rIns="0" bIns="0" anchor="t">
             <a:spAutoFit/>
           </a:bodyPr>
           <a:lstStyle/>
@@ -16140,6 +17384,7 @@
           <a:lstStyle/>
           <a:p>
             <a:pPr algn="ctr"/>
+            <a:endParaRPr/>
           </a:p>
         </p:txBody>
       </p:sp>
@@ -16162,10 +17407,34 @@
                 <a:tableStyleId>{5C22544A-7EE6-4342-B048-85BDC9FD1C3A}</a:tableStyleId>
               </a:tblPr>
               <a:tblGrid>
-                <a:gridCol w="2827489"/>
-                <a:gridCol w="2682489"/>
-                <a:gridCol w="2682489"/>
-                <a:gridCol w="2682489"/>
+                <a:gridCol w="2827489">
+                  <a:extLst>
+                    <a:ext uri="{9D8B030D-6E8A-4147-A177-3AD203B41FA5}">
+                      <a16:colId xmlns:a16="http://schemas.microsoft.com/office/drawing/2014/main" val="20000"/>
+                    </a:ext>
+                  </a:extLst>
+                </a:gridCol>
+                <a:gridCol w="2682489">
+                  <a:extLst>
+                    <a:ext uri="{9D8B030D-6E8A-4147-A177-3AD203B41FA5}">
+                      <a16:colId xmlns:a16="http://schemas.microsoft.com/office/drawing/2014/main" val="20001"/>
+                    </a:ext>
+                  </a:extLst>
+                </a:gridCol>
+                <a:gridCol w="2682489">
+                  <a:extLst>
+                    <a:ext uri="{9D8B030D-6E8A-4147-A177-3AD203B41FA5}">
+                      <a16:colId xmlns:a16="http://schemas.microsoft.com/office/drawing/2014/main" val="20002"/>
+                    </a:ext>
+                  </a:extLst>
+                </a:gridCol>
+                <a:gridCol w="2682489">
+                  <a:extLst>
+                    <a:ext uri="{9D8B030D-6E8A-4147-A177-3AD203B41FA5}">
+                      <a16:colId xmlns:a16="http://schemas.microsoft.com/office/drawing/2014/main" val="20003"/>
+                    </a:ext>
+                  </a:extLst>
+                </a:gridCol>
               </a:tblGrid>
               <a:tr h="329184">
                 <a:tc>
@@ -16174,15 +17443,7 @@
                     <a:lstStyle/>
                     <a:p>
                       <a:pPr algn="l"/>
-                      <a:r>
-                        <a:rPr sz="1200" b="1">
-                          <a:solidFill>
-                            <a:srgbClr val="FFFFFF"/>
-                          </a:solidFill>
-                          <a:latin typeface="Microsoft JhengHei"/>
-                        </a:rPr>
-                        <a:t/>
-                      </a:r>
+                      <a:endParaRPr/>
                     </a:p>
                   </a:txBody>
                   <a:tcPr marL="45720" marR="45720" marT="18288" marB="18288" anchor="ctr">
@@ -16260,6 +17521,11 @@
                     </a:solidFill>
                   </a:tcPr>
                 </a:tc>
+                <a:extLst>
+                  <a:ext uri="{0D108BD9-81ED-4DB2-BD59-A6C34878D82A}">
+                    <a16:rowId xmlns:a16="http://schemas.microsoft.com/office/drawing/2014/main" val="10000"/>
+                  </a:ext>
+                </a:extLst>
               </a:tr>
               <a:tr h="292608">
                 <a:tc>
@@ -16354,6 +17620,11 @@
                     </a:solidFill>
                   </a:tcPr>
                 </a:tc>
+                <a:extLst>
+                  <a:ext uri="{0D108BD9-81ED-4DB2-BD59-A6C34878D82A}">
+                    <a16:rowId xmlns:a16="http://schemas.microsoft.com/office/drawing/2014/main" val="10001"/>
+                  </a:ext>
+                </a:extLst>
               </a:tr>
               <a:tr h="292608">
                 <a:tc>
@@ -16448,6 +17719,11 @@
                     </a:solidFill>
                   </a:tcPr>
                 </a:tc>
+                <a:extLst>
+                  <a:ext uri="{0D108BD9-81ED-4DB2-BD59-A6C34878D82A}">
+                    <a16:rowId xmlns:a16="http://schemas.microsoft.com/office/drawing/2014/main" val="10002"/>
+                  </a:ext>
+                </a:extLst>
               </a:tr>
               <a:tr h="292608">
                 <a:tc>
@@ -16542,6 +17818,11 @@
                     </a:solidFill>
                   </a:tcPr>
                 </a:tc>
+                <a:extLst>
+                  <a:ext uri="{0D108BD9-81ED-4DB2-BD59-A6C34878D82A}">
+                    <a16:rowId xmlns:a16="http://schemas.microsoft.com/office/drawing/2014/main" val="10003"/>
+                  </a:ext>
+                </a:extLst>
               </a:tr>
               <a:tr h="292608">
                 <a:tc>
@@ -16636,6 +17917,11 @@
                     </a:solidFill>
                   </a:tcPr>
                 </a:tc>
+                <a:extLst>
+                  <a:ext uri="{0D108BD9-81ED-4DB2-BD59-A6C34878D82A}">
+                    <a16:rowId xmlns:a16="http://schemas.microsoft.com/office/drawing/2014/main" val="10004"/>
+                  </a:ext>
+                </a:extLst>
               </a:tr>
               <a:tr h="292608">
                 <a:tc>
@@ -16730,6 +18016,11 @@
                     </a:solidFill>
                   </a:tcPr>
                 </a:tc>
+                <a:extLst>
+                  <a:ext uri="{0D108BD9-81ED-4DB2-BD59-A6C34878D82A}">
+                    <a16:rowId xmlns:a16="http://schemas.microsoft.com/office/drawing/2014/main" val="10005"/>
+                  </a:ext>
+                </a:extLst>
               </a:tr>
               <a:tr h="292608">
                 <a:tc>
@@ -16824,6 +18115,11 @@
                     </a:solidFill>
                   </a:tcPr>
                 </a:tc>
+                <a:extLst>
+                  <a:ext uri="{0D108BD9-81ED-4DB2-BD59-A6C34878D82A}">
+                    <a16:rowId xmlns:a16="http://schemas.microsoft.com/office/drawing/2014/main" val="10006"/>
+                  </a:ext>
+                </a:extLst>
               </a:tr>
               <a:tr h="292608">
                 <a:tc>
@@ -16918,6 +18214,11 @@
                     </a:solidFill>
                   </a:tcPr>
                 </a:tc>
+                <a:extLst>
+                  <a:ext uri="{0D108BD9-81ED-4DB2-BD59-A6C34878D82A}">
+                    <a16:rowId xmlns:a16="http://schemas.microsoft.com/office/drawing/2014/main" val="10007"/>
+                  </a:ext>
+                </a:extLst>
               </a:tr>
               <a:tr h="292608">
                 <a:tc>
@@ -17012,6 +18313,11 @@
                     </a:solidFill>
                   </a:tcPr>
                 </a:tc>
+                <a:extLst>
+                  <a:ext uri="{0D108BD9-81ED-4DB2-BD59-A6C34878D82A}">
+                    <a16:rowId xmlns:a16="http://schemas.microsoft.com/office/drawing/2014/main" val="10008"/>
+                  </a:ext>
+                </a:extLst>
               </a:tr>
               <a:tr h="292608">
                 <a:tc>
@@ -17106,6 +18412,11 @@
                     </a:solidFill>
                   </a:tcPr>
                 </a:tc>
+                <a:extLst>
+                  <a:ext uri="{0D108BD9-81ED-4DB2-BD59-A6C34878D82A}">
+                    <a16:rowId xmlns:a16="http://schemas.microsoft.com/office/drawing/2014/main" val="10009"/>
+                  </a:ext>
+                </a:extLst>
               </a:tr>
               <a:tr h="292608">
                 <a:tc>
@@ -17200,6 +18511,11 @@
                     </a:solidFill>
                   </a:tcPr>
                 </a:tc>
+                <a:extLst>
+                  <a:ext uri="{0D108BD9-81ED-4DB2-BD59-A6C34878D82A}">
+                    <a16:rowId xmlns:a16="http://schemas.microsoft.com/office/drawing/2014/main" val="10010"/>
+                  </a:ext>
+                </a:extLst>
               </a:tr>
             </a:tbl>
           </a:graphicData>
@@ -17248,6 +18564,7 @@
           <a:lstStyle/>
           <a:p>
             <a:pPr algn="ctr"/>
+            <a:endParaRPr/>
           </a:p>
         </p:txBody>
       </p:sp>
@@ -17259,8 +18576,8 @@
         </p:nvSpPr>
         <p:spPr>
           <a:xfrm>
-            <a:off x="841247" y="5138928"/>
-            <a:ext cx="9293047" cy="1371600"/>
+            <a:off x="841247" y="5513585"/>
+            <a:ext cx="9293047" cy="622286"/>
           </a:xfrm>
           <a:prstGeom prst="rect">
             <a:avLst/>
@@ -17268,7 +18585,7 @@
           <a:noFill/>
         </p:spPr>
         <p:txBody>
-          <a:bodyPr wrap="square" lIns="0" rIns="0" tIns="0" bIns="0" anchor="ctr">
+          <a:bodyPr wrap="square" lIns="0" tIns="0" rIns="0" bIns="0" anchor="ctr">
             <a:spAutoFit/>
           </a:bodyPr>
           <a:lstStyle/>
@@ -17279,13 +18596,93 @@
               </a:lnSpc>
             </a:pPr>
             <a:r>
-              <a:rPr sz="1700" b="1">
+              <a:rPr sz="1700" b="1" dirty="0">
                 <a:solidFill>
                   <a:srgbClr val="FFFFFF"/>
                 </a:solidFill>
                 <a:latin typeface="Microsoft JhengHei"/>
               </a:rPr>
-              <a:t>R8 沒有答案 —— 法務書面意見於 G1(第 6 週)前到位;R9 · R10 是這個方案自己造成的,放行門在移交後,不在這六個月。</a:t>
+              <a:t>R8 </a:t>
+            </a:r>
+            <a:r>
+              <a:rPr sz="1700" b="1" dirty="0" err="1">
+                <a:solidFill>
+                  <a:srgbClr val="FFFFFF"/>
+                </a:solidFill>
+                <a:latin typeface="Microsoft JhengHei"/>
+              </a:rPr>
+              <a:t>沒有答案</a:t>
+            </a:r>
+            <a:r>
+              <a:rPr sz="1700" b="1" dirty="0">
+                <a:solidFill>
+                  <a:srgbClr val="FFFFFF"/>
+                </a:solidFill>
+                <a:latin typeface="Microsoft JhengHei"/>
+              </a:rPr>
+              <a:t> —— </a:t>
+            </a:r>
+            <a:r>
+              <a:rPr sz="1700" b="1" dirty="0" err="1">
+                <a:solidFill>
+                  <a:srgbClr val="FFFFFF"/>
+                </a:solidFill>
+                <a:latin typeface="Microsoft JhengHei"/>
+              </a:rPr>
+              <a:t>法務書面意見於</a:t>
+            </a:r>
+            <a:r>
+              <a:rPr sz="1700" b="1" dirty="0">
+                <a:solidFill>
+                  <a:srgbClr val="FFFFFF"/>
+                </a:solidFill>
+                <a:latin typeface="Microsoft JhengHei"/>
+              </a:rPr>
+              <a:t> G1(第 6 週)</a:t>
+            </a:r>
+            <a:r>
+              <a:rPr sz="1700" b="1" dirty="0" err="1">
+                <a:solidFill>
+                  <a:srgbClr val="FFFFFF"/>
+                </a:solidFill>
+                <a:latin typeface="Microsoft JhengHei"/>
+              </a:rPr>
+              <a:t>前到位</a:t>
+            </a:r>
+            <a:br>
+              <a:rPr lang="en-US" sz="1700" b="1" dirty="0">
+                <a:solidFill>
+                  <a:srgbClr val="FFFFFF"/>
+                </a:solidFill>
+                <a:latin typeface="Microsoft JhengHei"/>
+              </a:rPr>
+            </a:br>
+            <a:r>
+              <a:rPr sz="1700" b="1" dirty="0">
+                <a:solidFill>
+                  <a:srgbClr val="FFFFFF"/>
+                </a:solidFill>
+                <a:latin typeface="Microsoft JhengHei"/>
+              </a:rPr>
+              <a:t>R9 · R10 </a:t>
+            </a:r>
+            <a:r>
+              <a:rPr sz="1700" b="1" dirty="0" err="1">
+                <a:solidFill>
+                  <a:srgbClr val="FFFFFF"/>
+                </a:solidFill>
+                <a:latin typeface="Microsoft JhengHei"/>
+              </a:rPr>
+              <a:t>是這個方案自己造成的,放行門在移交後,不在這六個月</a:t>
+            </a:r>
+            <a:r>
+              <a:rPr sz="1700" b="1" dirty="0">
+                <a:solidFill>
+                  <a:srgbClr val="FFFFFF"/>
+                </a:solidFill>
+                <a:latin typeface="Microsoft JhengHei"/>
+              </a:rPr>
+              <a:t>。</a:t>
             </a:r>
           </a:p>
         </p:txBody>
@@ -17299,7 +18696,7 @@
 </file>
 
 <file path=ppt/slides/slide8.xml><?xml version="1.0" encoding="utf-8"?>
-<p:sld xmlns:a="http://schemas.openxmlformats.org/drawingml/2006/main" xmlns:p="http://schemas.openxmlformats.org/presentationml/2006/main" xmlns:r="http://schemas.openxmlformats.org/officeDocument/2006/relationships">
+<p:sld xmlns:a="http://schemas.openxmlformats.org/drawingml/2006/main" xmlns:r="http://schemas.openxmlformats.org/officeDocument/2006/relationships" xmlns:p="http://schemas.openxmlformats.org/presentationml/2006/main">
   <p:cSld>
     <p:spTree>
       <p:nvGrpSpPr>
@@ -17307,7 +18704,14 @@
         <p:cNvGrpSpPr/>
         <p:nvPr/>
       </p:nvGrpSpPr>
-      <p:grpSpPr/>
+      <p:grpSpPr>
+        <a:xfrm>
+          <a:off x="0" y="0"/>
+          <a:ext cx="0" cy="0"/>
+          <a:chOff x="0" y="0"/>
+          <a:chExt cx="0" cy="0"/>
+        </a:xfrm>
+      </p:grpSpPr>
       <p:sp>
         <p:nvSpPr>
           <p:cNvPr id="2" name="TextBox 1"/>
@@ -17325,7 +18729,7 @@
           <a:noFill/>
         </p:spPr>
         <p:txBody>
-          <a:bodyPr wrap="square" lIns="0" rIns="0" tIns="0" bIns="0" anchor="t">
+          <a:bodyPr wrap="square" lIns="0" tIns="0" rIns="0" bIns="0" anchor="t">
             <a:spAutoFit/>
           </a:bodyPr>
           <a:lstStyle/>
@@ -17364,7 +18768,7 @@
           <a:noFill/>
         </p:spPr>
         <p:txBody>
-          <a:bodyPr wrap="square" lIns="0" rIns="0" tIns="0" bIns="0" anchor="t">
+          <a:bodyPr wrap="square" lIns="0" tIns="0" rIns="0" bIns="0" anchor="t">
             <a:spAutoFit/>
           </a:bodyPr>
           <a:lstStyle/>
@@ -17403,7 +18807,7 @@
           <a:noFill/>
         </p:spPr>
         <p:txBody>
-          <a:bodyPr wrap="square" lIns="0" rIns="0" tIns="0" bIns="0" anchor="t">
+          <a:bodyPr wrap="square" lIns="0" tIns="0" rIns="0" bIns="0" anchor="t">
             <a:spAutoFit/>
           </a:bodyPr>
           <a:lstStyle/>
@@ -17466,6 +18870,7 @@
           <a:lstStyle/>
           <a:p>
             <a:pPr algn="ctr"/>
+            <a:endParaRPr/>
           </a:p>
         </p:txBody>
       </p:sp>
@@ -17488,9 +18893,27 @@
                 <a:tableStyleId>{5C22544A-7EE6-4342-B048-85BDC9FD1C3A}</a:tableStyleId>
               </a:tblPr>
               <a:tblGrid>
-                <a:gridCol w="5981227"/>
-                <a:gridCol w="2446865"/>
-                <a:gridCol w="2446865"/>
+                <a:gridCol w="5981227">
+                  <a:extLst>
+                    <a:ext uri="{9D8B030D-6E8A-4147-A177-3AD203B41FA5}">
+                      <a16:colId xmlns:a16="http://schemas.microsoft.com/office/drawing/2014/main" val="20000"/>
+                    </a:ext>
+                  </a:extLst>
+                </a:gridCol>
+                <a:gridCol w="2446865">
+                  <a:extLst>
+                    <a:ext uri="{9D8B030D-6E8A-4147-A177-3AD203B41FA5}">
+                      <a16:colId xmlns:a16="http://schemas.microsoft.com/office/drawing/2014/main" val="20001"/>
+                    </a:ext>
+                  </a:extLst>
+                </a:gridCol>
+                <a:gridCol w="2446865">
+                  <a:extLst>
+                    <a:ext uri="{9D8B030D-6E8A-4147-A177-3AD203B41FA5}">
+                      <a16:colId xmlns:a16="http://schemas.microsoft.com/office/drawing/2014/main" val="20002"/>
+                    </a:ext>
+                  </a:extLst>
+                </a:gridCol>
               </a:tblGrid>
               <a:tr h="329184">
                 <a:tc>
@@ -17499,15 +18922,7 @@
                     <a:lstStyle/>
                     <a:p>
                       <a:pPr algn="l"/>
-                      <a:r>
-                        <a:rPr sz="1200" b="1">
-                          <a:solidFill>
-                            <a:srgbClr val="FFFFFF"/>
-                          </a:solidFill>
-                          <a:latin typeface="Microsoft JhengHei"/>
-                        </a:rPr>
-                        <a:t/>
-                      </a:r>
+                      <a:endParaRPr/>
                     </a:p>
                   </a:txBody>
                   <a:tcPr marL="45720" marR="45720" marT="18288" marB="18288" anchor="ctr">
@@ -17562,6 +18977,11 @@
                     </a:solidFill>
                   </a:tcPr>
                 </a:tc>
+                <a:extLst>
+                  <a:ext uri="{0D108BD9-81ED-4DB2-BD59-A6C34878D82A}">
+                    <a16:rowId xmlns:a16="http://schemas.microsoft.com/office/drawing/2014/main" val="10000"/>
+                  </a:ext>
+                </a:extLst>
               </a:tr>
               <a:tr h="292608">
                 <a:tc>
@@ -17571,14 +18991,47 @@
                     <a:p>
                       <a:pPr algn="l"/>
                       <a:r>
-                        <a:rPr sz="1200" b="0">
+                        <a:rPr sz="1200" b="0" dirty="0">
                           <a:solidFill>
                             <a:srgbClr val="16212E"/>
                           </a:solidFill>
                           <a:latin typeface="Microsoft JhengHei"/>
                         </a:rPr>
-                        <a:t>1 人類、社會與環境福祉｜期內量增人力不變·移交後 850 筆無人覆核·推估非實測</a:t>
+                        <a:t>1 </a:t>
                       </a:r>
+                      <a:r>
+                        <a:rPr sz="1200" b="0" dirty="0" err="1">
+                          <a:solidFill>
+                            <a:srgbClr val="16212E"/>
+                          </a:solidFill>
+                          <a:latin typeface="Microsoft JhengHei"/>
+                        </a:rPr>
+                        <a:t>人類、社會與環境福祉｜期內量增人力不變·移交後</a:t>
+                      </a:r>
+                      <a:r>
+                        <a:rPr sz="1200" b="0" dirty="0">
+                          <a:solidFill>
+                            <a:srgbClr val="16212E"/>
+                          </a:solidFill>
+                          <a:latin typeface="Microsoft JhengHei"/>
+                        </a:rPr>
+                        <a:t> 850 </a:t>
+                      </a:r>
+                      <a:r>
+                        <a:rPr sz="1200" b="0" dirty="0" err="1">
+                          <a:solidFill>
+                            <a:srgbClr val="16212E"/>
+                          </a:solidFill>
+                          <a:latin typeface="Microsoft JhengHei"/>
+                        </a:rPr>
+                        <a:t>筆無人覆核·推估非實測</a:t>
+                      </a:r>
+                      <a:endParaRPr sz="1200" b="0" dirty="0">
+                        <a:solidFill>
+                          <a:srgbClr val="16212E"/>
+                        </a:solidFill>
+                        <a:latin typeface="Microsoft JhengHei"/>
+                      </a:endParaRPr>
                     </a:p>
                   </a:txBody>
                   <a:tcPr marL="45720" marR="45720" marT="18288" marB="18288" anchor="ctr">
@@ -17594,7 +19047,7 @@
                     <a:p>
                       <a:pPr algn="ctr"/>
                       <a:r>
-                        <a:rPr sz="1200" b="0">
+                        <a:rPr sz="1200" b="0" dirty="0" err="1">
                           <a:solidFill>
                             <a:srgbClr val="6B7885"/>
                           </a:solidFill>
@@ -17602,6 +19055,12 @@
                         </a:rPr>
                         <a:t>部分</a:t>
                       </a:r>
+                      <a:endParaRPr sz="1200" b="0" dirty="0">
+                        <a:solidFill>
+                          <a:srgbClr val="6B7885"/>
+                        </a:solidFill>
+                        <a:latin typeface="Microsoft JhengHei"/>
+                      </a:endParaRPr>
                     </a:p>
                   </a:txBody>
                   <a:tcPr marL="45720" marR="45720" marT="18288" marB="18288" anchor="ctr">
@@ -17633,6 +19092,11 @@
                     </a:solidFill>
                   </a:tcPr>
                 </a:tc>
+                <a:extLst>
+                  <a:ext uri="{0D108BD9-81ED-4DB2-BD59-A6C34878D82A}">
+                    <a16:rowId xmlns:a16="http://schemas.microsoft.com/office/drawing/2014/main" val="10001"/>
+                  </a:ext>
+                </a:extLst>
               </a:tr>
               <a:tr h="292608">
                 <a:tc>
@@ -17665,7 +19129,7 @@
                     <a:p>
                       <a:pPr algn="ctr"/>
                       <a:r>
-                        <a:rPr sz="1200" b="0">
+                        <a:rPr sz="1200" b="0" dirty="0" err="1">
                           <a:solidFill>
                             <a:srgbClr val="6B7885"/>
                           </a:solidFill>
@@ -17673,6 +19137,12 @@
                         </a:rPr>
                         <a:t>部分</a:t>
                       </a:r>
+                      <a:endParaRPr sz="1200" b="0" dirty="0">
+                        <a:solidFill>
+                          <a:srgbClr val="6B7885"/>
+                        </a:solidFill>
+                        <a:latin typeface="Microsoft JhengHei"/>
+                      </a:endParaRPr>
                     </a:p>
                   </a:txBody>
                   <a:tcPr marL="45720" marR="45720" marT="18288" marB="18288" anchor="ctr">
@@ -17704,6 +19174,11 @@
                     </a:solidFill>
                   </a:tcPr>
                 </a:tc>
+                <a:extLst>
+                  <a:ext uri="{0D108BD9-81ED-4DB2-BD59-A6C34878D82A}">
+                    <a16:rowId xmlns:a16="http://schemas.microsoft.com/office/drawing/2014/main" val="10002"/>
+                  </a:ext>
+                </a:extLst>
               </a:tr>
               <a:tr h="292608">
                 <a:tc>
@@ -17736,7 +19211,7 @@
                     <a:p>
                       <a:pPr algn="ctr"/>
                       <a:r>
-                        <a:rPr sz="1200" b="0">
+                        <a:rPr sz="1200" b="0" dirty="0" err="1">
                           <a:solidFill>
                             <a:srgbClr val="C00000"/>
                           </a:solidFill>
@@ -17744,6 +19219,12 @@
                         </a:rPr>
                         <a:t>部分</a:t>
                       </a:r>
+                      <a:endParaRPr sz="1200" b="0" dirty="0">
+                        <a:solidFill>
+                          <a:srgbClr val="C00000"/>
+                        </a:solidFill>
+                        <a:latin typeface="Microsoft JhengHei"/>
+                      </a:endParaRPr>
                     </a:p>
                   </a:txBody>
                   <a:tcPr marL="45720" marR="45720" marT="18288" marB="18288" anchor="ctr">
@@ -17759,7 +19240,7 @@
                     <a:p>
                       <a:pPr algn="ctr"/>
                       <a:r>
-                        <a:rPr sz="1200" b="0">
+                        <a:rPr sz="1200" b="0" dirty="0" err="1">
                           <a:solidFill>
                             <a:srgbClr val="C00000"/>
                           </a:solidFill>
@@ -17767,6 +19248,12 @@
                         </a:rPr>
                         <a:t>未達成</a:t>
                       </a:r>
+                      <a:endParaRPr sz="1200" b="0" dirty="0">
+                        <a:solidFill>
+                          <a:srgbClr val="C00000"/>
+                        </a:solidFill>
+                        <a:latin typeface="Microsoft JhengHei"/>
+                      </a:endParaRPr>
                     </a:p>
                   </a:txBody>
                   <a:tcPr marL="45720" marR="45720" marT="18288" marB="18288" anchor="ctr">
@@ -17775,6 +19262,11 @@
                     </a:solidFill>
                   </a:tcPr>
                 </a:tc>
+                <a:extLst>
+                  <a:ext uri="{0D108BD9-81ED-4DB2-BD59-A6C34878D82A}">
+                    <a16:rowId xmlns:a16="http://schemas.microsoft.com/office/drawing/2014/main" val="10003"/>
+                  </a:ext>
+                </a:extLst>
               </a:tr>
               <a:tr h="292608">
                 <a:tc>
@@ -17846,6 +19338,11 @@
                     </a:solidFill>
                   </a:tcPr>
                 </a:tc>
+                <a:extLst>
+                  <a:ext uri="{0D108BD9-81ED-4DB2-BD59-A6C34878D82A}">
+                    <a16:rowId xmlns:a16="http://schemas.microsoft.com/office/drawing/2014/main" val="10004"/>
+                  </a:ext>
+                </a:extLst>
               </a:tr>
               <a:tr h="292608">
                 <a:tc>
@@ -17917,6 +19414,11 @@
                     </a:solidFill>
                   </a:tcPr>
                 </a:tc>
+                <a:extLst>
+                  <a:ext uri="{0D108BD9-81ED-4DB2-BD59-A6C34878D82A}">
+                    <a16:rowId xmlns:a16="http://schemas.microsoft.com/office/drawing/2014/main" val="10005"/>
+                  </a:ext>
+                </a:extLst>
               </a:tr>
               <a:tr h="292608">
                 <a:tc>
@@ -17988,6 +19490,11 @@
                     </a:solidFill>
                   </a:tcPr>
                 </a:tc>
+                <a:extLst>
+                  <a:ext uri="{0D108BD9-81ED-4DB2-BD59-A6C34878D82A}">
+                    <a16:rowId xmlns:a16="http://schemas.microsoft.com/office/drawing/2014/main" val="10006"/>
+                  </a:ext>
+                </a:extLst>
               </a:tr>
               <a:tr h="292608">
                 <a:tc>
@@ -18059,6 +19566,11 @@
                     </a:solidFill>
                   </a:tcPr>
                 </a:tc>
+                <a:extLst>
+                  <a:ext uri="{0D108BD9-81ED-4DB2-BD59-A6C34878D82A}">
+                    <a16:rowId xmlns:a16="http://schemas.microsoft.com/office/drawing/2014/main" val="10007"/>
+                  </a:ext>
+                </a:extLst>
               </a:tr>
               <a:tr h="292608">
                 <a:tc>
@@ -18114,7 +19626,7 @@
                     <a:p>
                       <a:pPr algn="ctr"/>
                       <a:r>
-                        <a:rPr sz="1200" b="0">
+                        <a:rPr sz="1200" b="0" dirty="0" err="1">
                           <a:solidFill>
                             <a:srgbClr val="C00000"/>
                           </a:solidFill>
@@ -18122,6 +19634,12 @@
                         </a:rPr>
                         <a:t>未達成</a:t>
                       </a:r>
+                      <a:endParaRPr sz="1200" b="0" dirty="0">
+                        <a:solidFill>
+                          <a:srgbClr val="C00000"/>
+                        </a:solidFill>
+                        <a:latin typeface="Microsoft JhengHei"/>
+                      </a:endParaRPr>
                     </a:p>
                   </a:txBody>
                   <a:tcPr marL="45720" marR="45720" marT="18288" marB="18288" anchor="ctr">
@@ -18130,6 +19648,11 @@
                     </a:solidFill>
                   </a:tcPr>
                 </a:tc>
+                <a:extLst>
+                  <a:ext uri="{0D108BD9-81ED-4DB2-BD59-A6C34878D82A}">
+                    <a16:rowId xmlns:a16="http://schemas.microsoft.com/office/drawing/2014/main" val="10008"/>
+                  </a:ext>
+                </a:extLst>
               </a:tr>
             </a:tbl>
           </a:graphicData>
@@ -18178,6 +19701,7 @@
           <a:lstStyle/>
           <a:p>
             <a:pPr algn="ctr"/>
+            <a:endParaRPr/>
           </a:p>
         </p:txBody>
       </p:sp>
@@ -18198,7 +19722,7 @@
           <a:noFill/>
         </p:spPr>
         <p:txBody>
-          <a:bodyPr wrap="square" lIns="0" rIns="0" tIns="0" bIns="0" anchor="ctr">
+          <a:bodyPr wrap="square" lIns="0" tIns="0" rIns="0" bIns="0" anchor="ctr">
             <a:spAutoFit/>
           </a:bodyPr>
           <a:lstStyle/>
@@ -18229,7 +19753,7 @@
 </file>
 
 <file path=ppt/slides/slide9.xml><?xml version="1.0" encoding="utf-8"?>
-<p:sld xmlns:a="http://schemas.openxmlformats.org/drawingml/2006/main" xmlns:p="http://schemas.openxmlformats.org/presentationml/2006/main" xmlns:r="http://schemas.openxmlformats.org/officeDocument/2006/relationships">
+<p:sld xmlns:a="http://schemas.openxmlformats.org/drawingml/2006/main" xmlns:r="http://schemas.openxmlformats.org/officeDocument/2006/relationships" xmlns:p="http://schemas.openxmlformats.org/presentationml/2006/main">
   <p:cSld>
     <p:spTree>
       <p:nvGrpSpPr>
@@ -18237,7 +19761,14 @@
         <p:cNvGrpSpPr/>
         <p:nvPr/>
       </p:nvGrpSpPr>
-      <p:grpSpPr/>
+      <p:grpSpPr>
+        <a:xfrm>
+          <a:off x="0" y="0"/>
+          <a:ext cx="0" cy="0"/>
+          <a:chOff x="0" y="0"/>
+          <a:chExt cx="0" cy="0"/>
+        </a:xfrm>
+      </p:grpSpPr>
       <p:sp>
         <p:nvSpPr>
           <p:cNvPr id="2" name="TextBox 1"/>
@@ -18255,7 +19786,7 @@
           <a:noFill/>
         </p:spPr>
         <p:txBody>
-          <a:bodyPr wrap="square" lIns="0" rIns="0" tIns="0" bIns="0" anchor="t">
+          <a:bodyPr wrap="square" lIns="0" tIns="0" rIns="0" bIns="0" anchor="t">
             <a:spAutoFit/>
           </a:bodyPr>
           <a:lstStyle/>
@@ -18294,7 +19825,7 @@
           <a:noFill/>
         </p:spPr>
         <p:txBody>
-          <a:bodyPr wrap="square" lIns="0" rIns="0" tIns="0" bIns="0" anchor="t">
+          <a:bodyPr wrap="square" lIns="0" tIns="0" rIns="0" bIns="0" anchor="t">
             <a:spAutoFit/>
           </a:bodyPr>
           <a:lstStyle/>
@@ -18333,7 +19864,7 @@
           <a:noFill/>
         </p:spPr>
         <p:txBody>
-          <a:bodyPr wrap="square" lIns="0" rIns="0" tIns="0" bIns="0" anchor="t">
+          <a:bodyPr wrap="square" lIns="0" tIns="0" rIns="0" bIns="0" anchor="t">
             <a:spAutoFit/>
           </a:bodyPr>
           <a:lstStyle/>
@@ -18396,6 +19927,7 @@
           <a:lstStyle/>
           <a:p>
             <a:pPr algn="ctr"/>
+            <a:endParaRPr/>
           </a:p>
         </p:txBody>
       </p:sp>
@@ -18442,6 +19974,7 @@
           <a:lstStyle/>
           <a:p>
             <a:pPr algn="ctr"/>
+            <a:endParaRPr/>
           </a:p>
         </p:txBody>
       </p:sp>
@@ -18462,7 +19995,7 @@
           <a:noFill/>
         </p:spPr>
         <p:txBody>
-          <a:bodyPr wrap="square" lIns="0" rIns="0" tIns="0" bIns="0" anchor="ctr">
+          <a:bodyPr wrap="square" lIns="0" tIns="0" rIns="0" bIns="0" anchor="ctr">
             <a:spAutoFit/>
           </a:bodyPr>
           <a:lstStyle/>
@@ -18503,9 +20036,27 @@
                 <a:tableStyleId>{5C22544A-7EE6-4342-B048-85BDC9FD1C3A}</a:tableStyleId>
               </a:tblPr>
               <a:tblGrid>
-                <a:gridCol w="3262487"/>
-                <a:gridCol w="3806235"/>
-                <a:gridCol w="3806235"/>
+                <a:gridCol w="3262487">
+                  <a:extLst>
+                    <a:ext uri="{9D8B030D-6E8A-4147-A177-3AD203B41FA5}">
+                      <a16:colId xmlns:a16="http://schemas.microsoft.com/office/drawing/2014/main" val="20000"/>
+                    </a:ext>
+                  </a:extLst>
+                </a:gridCol>
+                <a:gridCol w="3806235">
+                  <a:extLst>
+                    <a:ext uri="{9D8B030D-6E8A-4147-A177-3AD203B41FA5}">
+                      <a16:colId xmlns:a16="http://schemas.microsoft.com/office/drawing/2014/main" val="20001"/>
+                    </a:ext>
+                  </a:extLst>
+                </a:gridCol>
+                <a:gridCol w="3806235">
+                  <a:extLst>
+                    <a:ext uri="{9D8B030D-6E8A-4147-A177-3AD203B41FA5}">
+                      <a16:colId xmlns:a16="http://schemas.microsoft.com/office/drawing/2014/main" val="20002"/>
+                    </a:ext>
+                  </a:extLst>
+                </a:gridCol>
               </a:tblGrid>
               <a:tr h="329184">
                 <a:tc>
@@ -18514,15 +20065,7 @@
                     <a:lstStyle/>
                     <a:p>
                       <a:pPr algn="l"/>
-                      <a:r>
-                        <a:rPr sz="1200" b="1">
-                          <a:solidFill>
-                            <a:srgbClr val="FFFFFF"/>
-                          </a:solidFill>
-                          <a:latin typeface="Microsoft JhengHei"/>
-                        </a:rPr>
-                        <a:t/>
-                      </a:r>
+                      <a:endParaRPr/>
                     </a:p>
                   </a:txBody>
                   <a:tcPr marL="45720" marR="45720" marT="18288" marB="18288" anchor="ctr">
@@ -18577,6 +20120,11 @@
                     </a:solidFill>
                   </a:tcPr>
                 </a:tc>
+                <a:extLst>
+                  <a:ext uri="{0D108BD9-81ED-4DB2-BD59-A6C34878D82A}">
+                    <a16:rowId xmlns:a16="http://schemas.microsoft.com/office/drawing/2014/main" val="10000"/>
+                  </a:ext>
+                </a:extLst>
               </a:tr>
               <a:tr h="292608">
                 <a:tc>
@@ -18648,6 +20196,11 @@
                     </a:solidFill>
                   </a:tcPr>
                 </a:tc>
+                <a:extLst>
+                  <a:ext uri="{0D108BD9-81ED-4DB2-BD59-A6C34878D82A}">
+                    <a16:rowId xmlns:a16="http://schemas.microsoft.com/office/drawing/2014/main" val="10001"/>
+                  </a:ext>
+                </a:extLst>
               </a:tr>
               <a:tr h="292608">
                 <a:tc>
@@ -18719,6 +20272,11 @@
                     </a:solidFill>
                   </a:tcPr>
                 </a:tc>
+                <a:extLst>
+                  <a:ext uri="{0D108BD9-81ED-4DB2-BD59-A6C34878D82A}">
+                    <a16:rowId xmlns:a16="http://schemas.microsoft.com/office/drawing/2014/main" val="10002"/>
+                  </a:ext>
+                </a:extLst>
               </a:tr>
               <a:tr h="292608">
                 <a:tc>
@@ -18790,6 +20348,11 @@
                     </a:solidFill>
                   </a:tcPr>
                 </a:tc>
+                <a:extLst>
+                  <a:ext uri="{0D108BD9-81ED-4DB2-BD59-A6C34878D82A}">
+                    <a16:rowId xmlns:a16="http://schemas.microsoft.com/office/drawing/2014/main" val="10003"/>
+                  </a:ext>
+                </a:extLst>
               </a:tr>
               <a:tr h="292608">
                 <a:tc>
@@ -18861,6 +20424,11 @@
                     </a:solidFill>
                   </a:tcPr>
                 </a:tc>
+                <a:extLst>
+                  <a:ext uri="{0D108BD9-81ED-4DB2-BD59-A6C34878D82A}">
+                    <a16:rowId xmlns:a16="http://schemas.microsoft.com/office/drawing/2014/main" val="10004"/>
+                  </a:ext>
+                </a:extLst>
               </a:tr>
               <a:tr h="292608">
                 <a:tc>
@@ -18932,6 +20500,11 @@
                     </a:solidFill>
                   </a:tcPr>
                 </a:tc>
+                <a:extLst>
+                  <a:ext uri="{0D108BD9-81ED-4DB2-BD59-A6C34878D82A}">
+                    <a16:rowId xmlns:a16="http://schemas.microsoft.com/office/drawing/2014/main" val="10005"/>
+                  </a:ext>
+                </a:extLst>
               </a:tr>
               <a:tr h="292608">
                 <a:tc>
@@ -19003,6 +20576,11 @@
                     </a:solidFill>
                   </a:tcPr>
                 </a:tc>
+                <a:extLst>
+                  <a:ext uri="{0D108BD9-81ED-4DB2-BD59-A6C34878D82A}">
+                    <a16:rowId xmlns:a16="http://schemas.microsoft.com/office/drawing/2014/main" val="10006"/>
+                  </a:ext>
+                </a:extLst>
               </a:tr>
               <a:tr h="292608">
                 <a:tc>
@@ -19074,6 +20652,11 @@
                     </a:solidFill>
                   </a:tcPr>
                 </a:tc>
+                <a:extLst>
+                  <a:ext uri="{0D108BD9-81ED-4DB2-BD59-A6C34878D82A}">
+                    <a16:rowId xmlns:a16="http://schemas.microsoft.com/office/drawing/2014/main" val="10007"/>
+                  </a:ext>
+                </a:extLst>
               </a:tr>
               <a:tr h="292608">
                 <a:tc>
@@ -19145,6 +20728,11 @@
                     </a:solidFill>
                   </a:tcPr>
                 </a:tc>
+                <a:extLst>
+                  <a:ext uri="{0D108BD9-81ED-4DB2-BD59-A6C34878D82A}">
+                    <a16:rowId xmlns:a16="http://schemas.microsoft.com/office/drawing/2014/main" val="10008"/>
+                  </a:ext>
+                </a:extLst>
               </a:tr>
             </a:tbl>
           </a:graphicData>
@@ -19160,7 +20748,7 @@
         </p:nvGraphicFramePr>
         <p:xfrm>
           <a:off x="658368" y="5010912"/>
-          <a:ext cx="9658805" cy="1499616"/>
+          <a:ext cx="9658805" cy="1572768"/>
         </p:xfrm>
         <a:graphic>
           <a:graphicData uri="http://schemas.openxmlformats.org/drawingml/2006/table">
@@ -19169,10 +20757,34 @@
                 <a:tableStyleId>{5C22544A-7EE6-4342-B048-85BDC9FD1C3A}</a:tableStyleId>
               </a:tblPr>
               <a:tblGrid>
-                <a:gridCol w="2897642"/>
-                <a:gridCol w="2253721"/>
-                <a:gridCol w="2253721"/>
-                <a:gridCol w="2253721"/>
+                <a:gridCol w="2897642">
+                  <a:extLst>
+                    <a:ext uri="{9D8B030D-6E8A-4147-A177-3AD203B41FA5}">
+                      <a16:colId xmlns:a16="http://schemas.microsoft.com/office/drawing/2014/main" val="20000"/>
+                    </a:ext>
+                  </a:extLst>
+                </a:gridCol>
+                <a:gridCol w="2253721">
+                  <a:extLst>
+                    <a:ext uri="{9D8B030D-6E8A-4147-A177-3AD203B41FA5}">
+                      <a16:colId xmlns:a16="http://schemas.microsoft.com/office/drawing/2014/main" val="20001"/>
+                    </a:ext>
+                  </a:extLst>
+                </a:gridCol>
+                <a:gridCol w="2253721">
+                  <a:extLst>
+                    <a:ext uri="{9D8B030D-6E8A-4147-A177-3AD203B41FA5}">
+                      <a16:colId xmlns:a16="http://schemas.microsoft.com/office/drawing/2014/main" val="20002"/>
+                    </a:ext>
+                  </a:extLst>
+                </a:gridCol>
+                <a:gridCol w="2253721">
+                  <a:extLst>
+                    <a:ext uri="{9D8B030D-6E8A-4147-A177-3AD203B41FA5}">
+                      <a16:colId xmlns:a16="http://schemas.microsoft.com/office/drawing/2014/main" val="20003"/>
+                    </a:ext>
+                  </a:extLst>
+                </a:gridCol>
               </a:tblGrid>
               <a:tr h="329184">
                 <a:tc>
@@ -19181,15 +20793,7 @@
                     <a:lstStyle/>
                     <a:p>
                       <a:pPr algn="l"/>
-                      <a:r>
-                        <a:rPr sz="1200" b="1">
-                          <a:solidFill>
-                            <a:srgbClr val="FFFFFF"/>
-                          </a:solidFill>
-                          <a:latin typeface="Microsoft JhengHei"/>
-                        </a:rPr>
-                        <a:t/>
-                      </a:r>
+                      <a:endParaRPr/>
                     </a:p>
                   </a:txBody>
                   <a:tcPr marL="45720" marR="45720" marT="18288" marB="18288" anchor="ctr">
@@ -19267,6 +20871,11 @@
                     </a:solidFill>
                   </a:tcPr>
                 </a:tc>
+                <a:extLst>
+                  <a:ext uri="{0D108BD9-81ED-4DB2-BD59-A6C34878D82A}">
+                    <a16:rowId xmlns:a16="http://schemas.microsoft.com/office/drawing/2014/main" val="10000"/>
+                  </a:ext>
+                </a:extLst>
               </a:tr>
               <a:tr h="292608">
                 <a:tc>
@@ -19361,6 +20970,11 @@
                     </a:solidFill>
                   </a:tcPr>
                 </a:tc>
+                <a:extLst>
+                  <a:ext uri="{0D108BD9-81ED-4DB2-BD59-A6C34878D82A}">
+                    <a16:rowId xmlns:a16="http://schemas.microsoft.com/office/drawing/2014/main" val="10001"/>
+                  </a:ext>
+                </a:extLst>
               </a:tr>
               <a:tr h="292608">
                 <a:tc>
@@ -19455,6 +21069,11 @@
                     </a:solidFill>
                   </a:tcPr>
                 </a:tc>
+                <a:extLst>
+                  <a:ext uri="{0D108BD9-81ED-4DB2-BD59-A6C34878D82A}">
+                    <a16:rowId xmlns:a16="http://schemas.microsoft.com/office/drawing/2014/main" val="10002"/>
+                  </a:ext>
+                </a:extLst>
               </a:tr>
               <a:tr h="292608">
                 <a:tc>
@@ -19549,6 +21168,11 @@
                     </a:solidFill>
                   </a:tcPr>
                 </a:tc>
+                <a:extLst>
+                  <a:ext uri="{0D108BD9-81ED-4DB2-BD59-A6C34878D82A}">
+                    <a16:rowId xmlns:a16="http://schemas.microsoft.com/office/drawing/2014/main" val="10003"/>
+                  </a:ext>
+                </a:extLst>
               </a:tr>
               <a:tr h="292608">
                 <a:tc>
@@ -19643,6 +21267,11 @@
                     </a:solidFill>
                   </a:tcPr>
                 </a:tc>
+                <a:extLst>
+                  <a:ext uri="{0D108BD9-81ED-4DB2-BD59-A6C34878D82A}">
+                    <a16:rowId xmlns:a16="http://schemas.microsoft.com/office/drawing/2014/main" val="10004"/>
+                  </a:ext>
+                </a:extLst>
               </a:tr>
             </a:tbl>
           </a:graphicData>
@@ -19977,7 +21606,7 @@
 </file>
 
 <file path=ppt/theme/theme2.xml><?xml version="1.0" encoding="utf-8"?>
-<a:theme xmlns:a="http://schemas.openxmlformats.org/drawingml/2006/main" name="Office Theme">
+<a:theme xmlns:a="http://schemas.openxmlformats.org/drawingml/2006/main" name="Office 佈景主題">
   <a:themeElements>
     <a:clrScheme name="Office">
       <a:dk1>
@@ -19987,44 +21616,44 @@
         <a:sysClr val="window" lastClr="FFFFFF"/>
       </a:lt1>
       <a:dk2>
-        <a:srgbClr val="1F497D"/>
+        <a:srgbClr val="0E2841"/>
       </a:dk2>
       <a:lt2>
-        <a:srgbClr val="EEECE1"/>
+        <a:srgbClr val="E8E8E8"/>
       </a:lt2>
       <a:accent1>
-        <a:srgbClr val="4F81BD"/>
+        <a:srgbClr val="156082"/>
       </a:accent1>
       <a:accent2>
-        <a:srgbClr val="C0504D"/>
+        <a:srgbClr val="E97132"/>
       </a:accent2>
       <a:accent3>
-        <a:srgbClr val="9BBB59"/>
+        <a:srgbClr val="196B24"/>
       </a:accent3>
       <a:accent4>
-        <a:srgbClr val="8064A2"/>
+        <a:srgbClr val="0F9ED5"/>
       </a:accent4>
       <a:accent5>
-        <a:srgbClr val="4BACC6"/>
+        <a:srgbClr val="A02B93"/>
       </a:accent5>
       <a:accent6>
-        <a:srgbClr val="F79646"/>
+        <a:srgbClr val="4EA72E"/>
       </a:accent6>
       <a:hlink>
-        <a:srgbClr val="0000FF"/>
+        <a:srgbClr val="467886"/>
       </a:hlink>
       <a:folHlink>
-        <a:srgbClr val="800080"/>
+        <a:srgbClr val="96607D"/>
       </a:folHlink>
     </a:clrScheme>
     <a:fontScheme name="Office">
       <a:majorFont>
-        <a:latin typeface="Calibri"/>
+        <a:latin typeface="Aptos Display" panose="02110004020202020204"/>
         <a:ea typeface=""/>
         <a:cs typeface=""/>
-        <a:font script="Jpan" typeface="ＭＳ Ｐゴシック"/>
+        <a:font script="Jpan" typeface="游ゴシック Light"/>
         <a:font script="Hang" typeface="맑은 고딕"/>
-        <a:font script="Hans" typeface="宋体"/>
+        <a:font script="Hans" typeface="等线 Light"/>
         <a:font script="Hant" typeface="新細明體"/>
         <a:font script="Arab" typeface="Times New Roman"/>
         <a:font script="Hebr" typeface="Times New Roman"/>
@@ -20052,14 +21681,31 @@
         <a:font script="Viet" typeface="Times New Roman"/>
         <a:font script="Uigh" typeface="Microsoft Uighur"/>
         <a:font script="Geor" typeface="Sylfaen"/>
+        <a:font script="Armn" typeface="Arial"/>
+        <a:font script="Bugi" typeface="Leelawadee UI"/>
+        <a:font script="Bopo" typeface="Microsoft JhengHei"/>
+        <a:font script="Java" typeface="Javanese Text"/>
+        <a:font script="Lisu" typeface="Segoe UI"/>
+        <a:font script="Mymr" typeface="Myanmar Text"/>
+        <a:font script="Nkoo" typeface="Ebrima"/>
+        <a:font script="Olck" typeface="Nirmala UI"/>
+        <a:font script="Osma" typeface="Ebrima"/>
+        <a:font script="Phag" typeface="Phagspa"/>
+        <a:font script="Syrn" typeface="Estrangelo Edessa"/>
+        <a:font script="Syrj" typeface="Estrangelo Edessa"/>
+        <a:font script="Syre" typeface="Estrangelo Edessa"/>
+        <a:font script="Sora" typeface="Nirmala UI"/>
+        <a:font script="Tale" typeface="Microsoft Tai Le"/>
+        <a:font script="Talu" typeface="Microsoft New Tai Lue"/>
+        <a:font script="Tfng" typeface="Ebrima"/>
       </a:majorFont>
       <a:minorFont>
-        <a:latin typeface="Calibri"/>
+        <a:latin typeface="Aptos" panose="02110004020202020204"/>
         <a:ea typeface=""/>
         <a:cs typeface=""/>
-        <a:font script="Jpan" typeface="ＭＳ Ｐゴシック"/>
+        <a:font script="Jpan" typeface="游ゴシック"/>
         <a:font script="Hang" typeface="맑은 고딕"/>
-        <a:font script="Hans" typeface="宋体"/>
+        <a:font script="Hans" typeface="等线"/>
         <a:font script="Hant" typeface="新細明體"/>
         <a:font script="Arab" typeface="Arial"/>
         <a:font script="Hebr" typeface="Arial"/>
@@ -20087,6 +21733,23 @@
         <a:font script="Viet" typeface="Arial"/>
         <a:font script="Uigh" typeface="Microsoft Uighur"/>
         <a:font script="Geor" typeface="Sylfaen"/>
+        <a:font script="Armn" typeface="Arial"/>
+        <a:font script="Bugi" typeface="Leelawadee UI"/>
+        <a:font script="Bopo" typeface="Microsoft JhengHei"/>
+        <a:font script="Java" typeface="Javanese Text"/>
+        <a:font script="Lisu" typeface="Segoe UI"/>
+        <a:font script="Mymr" typeface="Myanmar Text"/>
+        <a:font script="Nkoo" typeface="Ebrima"/>
+        <a:font script="Olck" typeface="Nirmala UI"/>
+        <a:font script="Osma" typeface="Ebrima"/>
+        <a:font script="Phag" typeface="Phagspa"/>
+        <a:font script="Syrn" typeface="Estrangelo Edessa"/>
+        <a:font script="Syrj" typeface="Estrangelo Edessa"/>
+        <a:font script="Syre" typeface="Estrangelo Edessa"/>
+        <a:font script="Sora" typeface="Nirmala UI"/>
+        <a:font script="Tale" typeface="Microsoft Tai Le"/>
+        <a:font script="Talu" typeface="Microsoft New Tai Lue"/>
+        <a:font script="Tfng" typeface="Ebrima"/>
       </a:minorFont>
     </a:fontScheme>
     <a:fmtScheme name="Office">
@@ -20098,180 +21761,136 @@
           <a:gsLst>
             <a:gs pos="0">
               <a:schemeClr val="phClr">
-                <a:tint val="50000"/>
-                <a:satMod val="300000"/>
+                <a:lumMod val="110000"/>
+                <a:satMod val="105000"/>
+                <a:tint val="67000"/>
               </a:schemeClr>
             </a:gs>
-            <a:gs pos="35000">
+            <a:gs pos="50000">
               <a:schemeClr val="phClr">
-                <a:tint val="37000"/>
-                <a:satMod val="300000"/>
+                <a:lumMod val="105000"/>
+                <a:satMod val="103000"/>
+                <a:tint val="73000"/>
               </a:schemeClr>
             </a:gs>
             <a:gs pos="100000">
               <a:schemeClr val="phClr">
-                <a:tint val="15000"/>
-                <a:satMod val="350000"/>
+                <a:lumMod val="105000"/>
+                <a:satMod val="109000"/>
+                <a:tint val="81000"/>
               </a:schemeClr>
             </a:gs>
           </a:gsLst>
-          <a:lin ang="16200000" scaled="1"/>
+          <a:lin ang="5400000" scaled="0"/>
         </a:gradFill>
         <a:gradFill rotWithShape="1">
           <a:gsLst>
             <a:gs pos="0">
               <a:schemeClr val="phClr">
-                <a:tint val="100000"/>
+                <a:satMod val="103000"/>
+                <a:lumMod val="102000"/>
+                <a:tint val="94000"/>
+              </a:schemeClr>
+            </a:gs>
+            <a:gs pos="50000">
+              <a:schemeClr val="phClr">
+                <a:satMod val="110000"/>
+                <a:lumMod val="100000"/>
                 <a:shade val="100000"/>
-                <a:satMod val="130000"/>
               </a:schemeClr>
             </a:gs>
             <a:gs pos="100000">
               <a:schemeClr val="phClr">
-                <a:tint val="50000"/>
-                <a:shade val="100000"/>
-                <a:satMod val="350000"/>
+                <a:lumMod val="99000"/>
+                <a:satMod val="120000"/>
+                <a:shade val="78000"/>
               </a:schemeClr>
             </a:gs>
           </a:gsLst>
-          <a:lin ang="16200000" scaled="0"/>
+          <a:lin ang="5400000" scaled="0"/>
         </a:gradFill>
       </a:fillStyleLst>
       <a:lnStyleLst>
-        <a:ln w="9525" cap="flat" cmpd="sng" algn="ctr">
+        <a:ln w="12700" cap="flat" cmpd="sng" algn="ctr">
           <a:solidFill>
-            <a:schemeClr val="phClr">
-              <a:shade val="95000"/>
-              <a:satMod val="105000"/>
-            </a:schemeClr>
+            <a:schemeClr val="phClr"/>
           </a:solidFill>
           <a:prstDash val="solid"/>
+          <a:miter lim="800000"/>
+        </a:ln>
+        <a:ln w="19050" cap="flat" cmpd="sng" algn="ctr">
+          <a:solidFill>
+            <a:schemeClr val="phClr"/>
+          </a:solidFill>
+          <a:prstDash val="solid"/>
+          <a:miter lim="800000"/>
         </a:ln>
         <a:ln w="25400" cap="flat" cmpd="sng" algn="ctr">
           <a:solidFill>
             <a:schemeClr val="phClr"/>
           </a:solidFill>
           <a:prstDash val="solid"/>
-        </a:ln>
-        <a:ln w="38100" cap="flat" cmpd="sng" algn="ctr">
-          <a:solidFill>
-            <a:schemeClr val="phClr"/>
-          </a:solidFill>
-          <a:prstDash val="solid"/>
+          <a:miter lim="800000"/>
         </a:ln>
       </a:lnStyleLst>
       <a:effectStyleLst>
         <a:effectStyle>
+          <a:effectLst/>
+        </a:effectStyle>
+        <a:effectStyle>
+          <a:effectLst/>
+        </a:effectStyle>
+        <a:effectStyle>
           <a:effectLst>
-            <a:outerShdw blurRad="40000" dist="20000" dir="5400000" rotWithShape="0">
+            <a:outerShdw blurRad="57150" dist="19050" dir="5400000" algn="ctr" rotWithShape="0">
               <a:srgbClr val="000000">
-                <a:alpha val="38000"/>
+                <a:alpha val="63000"/>
               </a:srgbClr>
             </a:outerShdw>
           </a:effectLst>
-        </a:effectStyle>
-        <a:effectStyle>
-          <a:effectLst>
-            <a:outerShdw blurRad="40000" dist="23000" dir="5400000" rotWithShape="0">
-              <a:srgbClr val="000000">
-                <a:alpha val="35000"/>
-              </a:srgbClr>
-            </a:outerShdw>
-          </a:effectLst>
-        </a:effectStyle>
-        <a:effectStyle>
-          <a:effectLst>
-            <a:outerShdw blurRad="40000" dist="23000" dir="5400000" rotWithShape="0">
-              <a:srgbClr val="000000">
-                <a:alpha val="35000"/>
-              </a:srgbClr>
-            </a:outerShdw>
-          </a:effectLst>
-          <a:scene3d>
-            <a:camera prst="orthographicFront">
-              <a:rot lat="0" lon="0" rev="0"/>
-            </a:camera>
-            <a:lightRig rig="threePt" dir="t">
-              <a:rot lat="0" lon="0" rev="1200000"/>
-            </a:lightRig>
-          </a:scene3d>
-          <a:sp3d>
-            <a:bevelT w="63500" h="25400"/>
-          </a:sp3d>
         </a:effectStyle>
       </a:effectStyleLst>
       <a:bgFillStyleLst>
         <a:solidFill>
           <a:schemeClr val="phClr"/>
         </a:solidFill>
+        <a:solidFill>
+          <a:schemeClr val="phClr">
+            <a:tint val="95000"/>
+            <a:satMod val="170000"/>
+          </a:schemeClr>
+        </a:solidFill>
         <a:gradFill rotWithShape="1">
           <a:gsLst>
             <a:gs pos="0">
               <a:schemeClr val="phClr">
-                <a:tint val="40000"/>
-                <a:satMod val="350000"/>
+                <a:tint val="93000"/>
+                <a:satMod val="150000"/>
+                <a:shade val="98000"/>
+                <a:lumMod val="102000"/>
               </a:schemeClr>
             </a:gs>
-            <a:gs pos="40000">
+            <a:gs pos="50000">
               <a:schemeClr val="phClr">
-                <a:tint val="45000"/>
-                <a:shade val="99000"/>
-                <a:satMod val="350000"/>
+                <a:tint val="98000"/>
+                <a:satMod val="130000"/>
+                <a:shade val="90000"/>
+                <a:lumMod val="103000"/>
               </a:schemeClr>
             </a:gs>
             <a:gs pos="100000">
               <a:schemeClr val="phClr">
-                <a:shade val="20000"/>
-                <a:satMod val="255000"/>
+                <a:shade val="63000"/>
+                <a:satMod val="120000"/>
               </a:schemeClr>
             </a:gs>
           </a:gsLst>
-          <a:path path="circle">
-            <a:fillToRect l="50000" t="-80000" r="50000" b="180000"/>
-          </a:path>
-        </a:gradFill>
-        <a:gradFill rotWithShape="1">
-          <a:gsLst>
-            <a:gs pos="0">
-              <a:schemeClr val="phClr">
-                <a:tint val="80000"/>
-                <a:satMod val="300000"/>
-              </a:schemeClr>
-            </a:gs>
-            <a:gs pos="100000">
-              <a:schemeClr val="phClr">
-                <a:shade val="30000"/>
-                <a:satMod val="200000"/>
-              </a:schemeClr>
-            </a:gs>
-          </a:gsLst>
-          <a:path path="circle">
-            <a:fillToRect l="50000" t="50000" r="50000" b="50000"/>
-          </a:path>
+          <a:lin ang="5400000" scaled="0"/>
         </a:gradFill>
       </a:bgFillStyleLst>
     </a:fmtScheme>
   </a:themeElements>
   <a:objectDefaults>
-    <a:spDef>
-      <a:spPr/>
-      <a:bodyPr/>
-      <a:lstStyle/>
-      <a:style>
-        <a:lnRef idx="1">
-          <a:schemeClr val="accent1"/>
-        </a:lnRef>
-        <a:fillRef idx="3">
-          <a:schemeClr val="accent1"/>
-        </a:fillRef>
-        <a:effectRef idx="2">
-          <a:schemeClr val="accent1"/>
-        </a:effectRef>
-        <a:fontRef idx="minor">
-          <a:schemeClr val="lt1"/>
-        </a:fontRef>
-      </a:style>
-    </a:spDef>
     <a:lnDef>
       <a:spPr/>
       <a:bodyPr/>
@@ -20293,5 +21912,10 @@
     </a:lnDef>
   </a:objectDefaults>
   <a:extraClrSchemeLst/>
+  <a:extLst>
+    <a:ext uri="{05A4C25C-085E-4340-85A3-A5531E510DB2}">
+      <thm15:themeFamily xmlns:thm15="http://schemas.microsoft.com/office/thememl/2012/main" name="Office Theme" id="{2E142A2C-CD16-42D6-873A-C26D2A0506FA}" vid="{1BDDFF52-6CD6-40A5-AB3C-68EB2F1E4D0A}"/>
+    </a:ext>
+  </a:extLst>
 </a:theme>
 </file>
--- a/Artificial Intelligence for Enterprises/Assessment3/Huang_26254793_421104_Assessment 3.pptx
+++ b/Artificial Intelligence for Enterprises/Assessment3/Huang_26254793_421104_Assessment 3.pptx
@@ -4,24 +4,21 @@
   <p:sldMasterIdLst>
     <p:sldMasterId id="2147483648" r:id="rId1"/>
   </p:sldMasterIdLst>
-  <p:notesMasterIdLst>
-    <p:notesMasterId r:id="rId14"/>
-  </p:notesMasterIdLst>
   <p:sldIdLst>
-    <p:sldId id="256" r:id="rId2"/>
-    <p:sldId id="257" r:id="rId3"/>
-    <p:sldId id="258" r:id="rId4"/>
-    <p:sldId id="259" r:id="rId5"/>
-    <p:sldId id="260" r:id="rId6"/>
-    <p:sldId id="261" r:id="rId7"/>
-    <p:sldId id="262" r:id="rId8"/>
-    <p:sldId id="263" r:id="rId9"/>
-    <p:sldId id="264" r:id="rId10"/>
-    <p:sldId id="265" r:id="rId11"/>
-    <p:sldId id="266" r:id="rId12"/>
-    <p:sldId id="267" r:id="rId13"/>
+    <p:sldId id="256" r:id="rId7"/>
+    <p:sldId id="257" r:id="rId9"/>
+    <p:sldId id="258" r:id="rId10"/>
+    <p:sldId id="259" r:id="rId11"/>
+    <p:sldId id="260" r:id="rId12"/>
+    <p:sldId id="261" r:id="rId13"/>
+    <p:sldId id="262" r:id="rId14"/>
+    <p:sldId id="263" r:id="rId15"/>
+    <p:sldId id="264" r:id="rId16"/>
+    <p:sldId id="265" r:id="rId17"/>
+    <p:sldId id="266" r:id="rId18"/>
+    <p:sldId id="267" r:id="rId19"/>
   </p:sldIdLst>
-  <p:sldSz cx="12192000" cy="6858000"/>
+  <p:sldSz cx="12191695" cy="6858000" type="screen4x3"/>
   <p:notesSz cx="6858000" cy="9144000"/>
   <p:defaultTextStyle>
     <a:defPPr>
@@ -118,27 +115,11 @@
       </a:defRPr>
     </a:lvl9pPr>
   </p:defaultTextStyle>
-  <p:extLst>
-    <p:ext uri="{EFAFB233-063F-42B5-8137-9DF3F51BA10A}">
-      <p15:sldGuideLst xmlns:p15="http://schemas.microsoft.com/office/powerpoint/2012/main">
-        <p15:guide id="1" orient="horz" pos="2160">
-          <p15:clr>
-            <a:srgbClr val="A4A3A4"/>
-          </p15:clr>
-        </p15:guide>
-        <p15:guide id="2" pos="2880">
-          <p15:clr>
-            <a:srgbClr val="A4A3A4"/>
-          </p15:clr>
-        </p15:guide>
-      </p15:sldGuideLst>
-    </p:ext>
-  </p:extLst>
 </p:presentation>
 </file>
 
 <file path=ppt/notesMasters/notesMaster1.xml><?xml version="1.0" encoding="utf-8"?>
-<p:notesMaster xmlns:a="http://schemas.openxmlformats.org/drawingml/2006/main" xmlns:r="http://schemas.openxmlformats.org/officeDocument/2006/relationships" xmlns:p="http://schemas.openxmlformats.org/presentationml/2006/main">
+<p:notesMaster xmlns:a="http://schemas.openxmlformats.org/drawingml/2006/main" xmlns:p="http://schemas.openxmlformats.org/presentationml/2006/main" xmlns:r="http://schemas.openxmlformats.org/officeDocument/2006/relationships">
   <p:cSld>
     <p:bg>
       <p:bgRef idx="1001">
@@ -159,16 +140,241 @@
           <a:chExt cx="0" cy="0"/>
         </a:xfrm>
       </p:grpSpPr>
+      <p:sp>
+        <p:nvSpPr>
+          <p:cNvPr id="2" name="Header Placeholder 1"/>
+          <p:cNvSpPr>
+            <a:spLocks noGrp="1"/>
+          </p:cNvSpPr>
+          <p:nvPr>
+            <p:ph type="hdr" sz="quarter"/>
+          </p:nvPr>
+        </p:nvSpPr>
+        <p:spPr>
+          <a:xfrm>
+            <a:off x="0" y="0"/>
+            <a:ext cx="2971800" cy="457200"/>
+          </a:xfrm>
+          <a:prstGeom prst="rect">
+            <a:avLst/>
+          </a:prstGeom>
+        </p:spPr>
+        <p:txBody>
+          <a:bodyPr vert="horz" lIns="91440" tIns="45720" rIns="91440" bIns="45720" rtlCol="0"/>
+          <a:lstStyle>
+            <a:lvl1pPr algn="l">
+              <a:defRPr sz="1200"/>
+            </a:lvl1pPr>
+          </a:lstStyle>
+          <a:p>
+            <a:endParaRPr lang="en-US"/>
+          </a:p>
+        </p:txBody>
+      </p:sp>
+      <p:sp>
+        <p:nvSpPr>
+          <p:cNvPr id="3" name="Date Placeholder 2"/>
+          <p:cNvSpPr>
+            <a:spLocks noGrp="1"/>
+          </p:cNvSpPr>
+          <p:nvPr>
+            <p:ph type="dt" idx="1"/>
+          </p:nvPr>
+        </p:nvSpPr>
+        <p:spPr>
+          <a:xfrm>
+            <a:off x="3884613" y="0"/>
+            <a:ext cx="2971800" cy="457200"/>
+          </a:xfrm>
+          <a:prstGeom prst="rect">
+            <a:avLst/>
+          </a:prstGeom>
+        </p:spPr>
+        <p:txBody>
+          <a:bodyPr vert="horz" lIns="91440" tIns="45720" rIns="91440" bIns="45720" rtlCol="0"/>
+          <a:lstStyle>
+            <a:lvl1pPr algn="r">
+              <a:defRPr sz="1200"/>
+            </a:lvl1pPr>
+          </a:lstStyle>
+          <a:p>
+            <a:fld id="{0F89C1C7-3DCD-1040-A9CF-14679D8B5DDD}" type="datetimeFigureOut">
+              <a:rPr lang="en-US" smtClean="0"/>
+              <a:t>10/17/16</a:t>
+            </a:fld>
+            <a:endParaRPr lang="en-US"/>
+          </a:p>
+        </p:txBody>
+      </p:sp>
+      <p:sp>
+        <p:nvSpPr>
+          <p:cNvPr id="4" name="Slide Image Placeholder 3"/>
+          <p:cNvSpPr>
+            <a:spLocks noGrp="1" noRot="1" noChangeAspect="1"/>
+          </p:cNvSpPr>
+          <p:nvPr>
+            <p:ph type="sldImg" idx="2"/>
+          </p:nvPr>
+        </p:nvSpPr>
+        <p:spPr>
+          <a:xfrm>
+            <a:off x="1143000" y="685800"/>
+            <a:ext cx="4572000" cy="3429000"/>
+          </a:xfrm>
+          <a:prstGeom prst="rect">
+            <a:avLst/>
+          </a:prstGeom>
+          <a:noFill/>
+          <a:ln w="12700">
+            <a:solidFill>
+              <a:prstClr val="black"/>
+            </a:solidFill>
+          </a:ln>
+        </p:spPr>
+        <p:txBody>
+          <a:bodyPr vert="horz" lIns="91440" tIns="45720" rIns="91440" bIns="45720" rtlCol="0" anchor="ctr"/>
+          <a:lstStyle/>
+          <a:p>
+            <a:endParaRPr lang="en-US"/>
+          </a:p>
+        </p:txBody>
+      </p:sp>
+      <p:sp>
+        <p:nvSpPr>
+          <p:cNvPr id="5" name="Notes Placeholder 4"/>
+          <p:cNvSpPr>
+            <a:spLocks noGrp="1"/>
+          </p:cNvSpPr>
+          <p:nvPr>
+            <p:ph type="body" sz="quarter" idx="3"/>
+          </p:nvPr>
+        </p:nvSpPr>
+        <p:spPr>
+          <a:xfrm>
+            <a:off x="685800" y="4343400"/>
+            <a:ext cx="5486400" cy="4114800"/>
+          </a:xfrm>
+          <a:prstGeom prst="rect">
+            <a:avLst/>
+          </a:prstGeom>
+        </p:spPr>
+        <p:txBody>
+          <a:bodyPr vert="horz" lIns="91440" tIns="45720" rIns="91440" bIns="45720" rtlCol="0"/>
+          <a:lstStyle/>
+          <a:p>
+            <a:pPr lvl="0"/>
+            <a:r>
+              <a:rPr lang="en-US" smtClean="0"/>
+              <a:t>Click to edit Master text styles</a:t>
+            </a:r>
+          </a:p>
+          <a:p>
+            <a:pPr lvl="1"/>
+            <a:r>
+              <a:rPr lang="en-US" smtClean="0"/>
+              <a:t>Second level</a:t>
+            </a:r>
+          </a:p>
+          <a:p>
+            <a:pPr lvl="2"/>
+            <a:r>
+              <a:rPr lang="en-US" smtClean="0"/>
+              <a:t>Third level</a:t>
+            </a:r>
+          </a:p>
+          <a:p>
+            <a:pPr lvl="3"/>
+            <a:r>
+              <a:rPr lang="en-US" smtClean="0"/>
+              <a:t>Fourth level</a:t>
+            </a:r>
+          </a:p>
+          <a:p>
+            <a:pPr lvl="4"/>
+            <a:r>
+              <a:rPr lang="en-US" smtClean="0"/>
+              <a:t>Fifth level</a:t>
+            </a:r>
+            <a:endParaRPr lang="en-US"/>
+          </a:p>
+        </p:txBody>
+      </p:sp>
+      <p:sp>
+        <p:nvSpPr>
+          <p:cNvPr id="6" name="Footer Placeholder 5"/>
+          <p:cNvSpPr>
+            <a:spLocks noGrp="1"/>
+          </p:cNvSpPr>
+          <p:nvPr>
+            <p:ph type="ftr" sz="quarter" idx="4"/>
+          </p:nvPr>
+        </p:nvSpPr>
+        <p:spPr>
+          <a:xfrm>
+            <a:off x="0" y="8685213"/>
+            <a:ext cx="2971800" cy="457200"/>
+          </a:xfrm>
+          <a:prstGeom prst="rect">
+            <a:avLst/>
+          </a:prstGeom>
+        </p:spPr>
+        <p:txBody>
+          <a:bodyPr vert="horz" lIns="91440" tIns="45720" rIns="91440" bIns="45720" rtlCol="0" anchor="b"/>
+          <a:lstStyle>
+            <a:lvl1pPr algn="l">
+              <a:defRPr sz="1200"/>
+            </a:lvl1pPr>
+          </a:lstStyle>
+          <a:p>
+            <a:endParaRPr lang="en-US"/>
+          </a:p>
+        </p:txBody>
+      </p:sp>
+      <p:sp>
+        <p:nvSpPr>
+          <p:cNvPr id="7" name="Slide Number Placeholder 6"/>
+          <p:cNvSpPr>
+            <a:spLocks noGrp="1"/>
+          </p:cNvSpPr>
+          <p:nvPr>
+            <p:ph type="sldNum" sz="quarter" idx="5"/>
+          </p:nvPr>
+        </p:nvSpPr>
+        <p:spPr>
+          <a:xfrm>
+            <a:off x="3884613" y="8685213"/>
+            <a:ext cx="2971800" cy="457200"/>
+          </a:xfrm>
+          <a:prstGeom prst="rect">
+            <a:avLst/>
+          </a:prstGeom>
+        </p:spPr>
+        <p:txBody>
+          <a:bodyPr vert="horz" lIns="91440" tIns="45720" rIns="91440" bIns="45720" rtlCol="0" anchor="b"/>
+          <a:lstStyle>
+            <a:lvl1pPr algn="r">
+              <a:defRPr sz="1200"/>
+            </a:lvl1pPr>
+          </a:lstStyle>
+          <a:p>
+            <a:fld id="{BB5E49A5-4136-284D-997B-48E1D791AD67}" type="slidenum">
+              <a:rPr lang="en-US" smtClean="0"/>
+              <a:t>‹#›</a:t>
+            </a:fld>
+            <a:endParaRPr lang="en-US"/>
+          </a:p>
+        </p:txBody>
+      </p:sp>
     </p:spTree>
     <p:extLst>
       <p:ext uri="{BB962C8B-B14F-4D97-AF65-F5344CB8AC3E}">
-        <p14:creationId xmlns:p14="http://schemas.microsoft.com/office/powerpoint/2010/main" val="1031988209"/>
+        <p14:creationId xmlns:p14="http://schemas.microsoft.com/office/powerpoint/2010/main" val="2623252185"/>
       </p:ext>
     </p:extLst>
   </p:cSld>
   <p:clrMap bg1="lt1" tx1="dk1" bg2="lt2" tx2="dk2" accent1="accent1" accent2="accent2" accent3="accent3" accent4="accent4" accent5="accent5" accent6="accent6" hlink="hlink" folHlink="folHlink"/>
   <p:notesStyle>
-    <a:lvl1pPr marL="0" algn="l" defTabSz="914400" rtl="0" eaLnBrk="1" latinLnBrk="0" hangingPunct="1">
+    <a:lvl1pPr marL="0" algn="l" defTabSz="457200" rtl="0" eaLnBrk="1" latinLnBrk="0" hangingPunct="1">
       <a:defRPr sz="1200" kern="1200">
         <a:solidFill>
           <a:schemeClr val="tx1"/>
@@ -178,7 +384,7 @@
         <a:cs typeface="+mn-cs"/>
       </a:defRPr>
     </a:lvl1pPr>
-    <a:lvl2pPr marL="457200" algn="l" defTabSz="914400" rtl="0" eaLnBrk="1" latinLnBrk="0" hangingPunct="1">
+    <a:lvl2pPr marL="457200" algn="l" defTabSz="457200" rtl="0" eaLnBrk="1" latinLnBrk="0" hangingPunct="1">
       <a:defRPr sz="1200" kern="1200">
         <a:solidFill>
           <a:schemeClr val="tx1"/>
@@ -188,7 +394,7 @@
         <a:cs typeface="+mn-cs"/>
       </a:defRPr>
     </a:lvl2pPr>
-    <a:lvl3pPr marL="914400" algn="l" defTabSz="914400" rtl="0" eaLnBrk="1" latinLnBrk="0" hangingPunct="1">
+    <a:lvl3pPr marL="914400" algn="l" defTabSz="457200" rtl="0" eaLnBrk="1" latinLnBrk="0" hangingPunct="1">
       <a:defRPr sz="1200" kern="1200">
         <a:solidFill>
           <a:schemeClr val="tx1"/>
@@ -198,7 +404,7 @@
         <a:cs typeface="+mn-cs"/>
       </a:defRPr>
     </a:lvl3pPr>
-    <a:lvl4pPr marL="1371600" algn="l" defTabSz="914400" rtl="0" eaLnBrk="1" latinLnBrk="0" hangingPunct="1">
+    <a:lvl4pPr marL="1371600" algn="l" defTabSz="457200" rtl="0" eaLnBrk="1" latinLnBrk="0" hangingPunct="1">
       <a:defRPr sz="1200" kern="1200">
         <a:solidFill>
           <a:schemeClr val="tx1"/>
@@ -208,7 +414,7 @@
         <a:cs typeface="+mn-cs"/>
       </a:defRPr>
     </a:lvl4pPr>
-    <a:lvl5pPr marL="1828800" algn="l" defTabSz="914400" rtl="0" eaLnBrk="1" latinLnBrk="0" hangingPunct="1">
+    <a:lvl5pPr marL="1828800" algn="l" defTabSz="457200" rtl="0" eaLnBrk="1" latinLnBrk="0" hangingPunct="1">
       <a:defRPr sz="1200" kern="1200">
         <a:solidFill>
           <a:schemeClr val="tx1"/>
@@ -218,7 +424,7 @@
         <a:cs typeface="+mn-cs"/>
       </a:defRPr>
     </a:lvl5pPr>
-    <a:lvl6pPr marL="2286000" algn="l" defTabSz="914400" rtl="0" eaLnBrk="1" latinLnBrk="0" hangingPunct="1">
+    <a:lvl6pPr marL="2286000" algn="l" defTabSz="457200" rtl="0" eaLnBrk="1" latinLnBrk="0" hangingPunct="1">
       <a:defRPr sz="1200" kern="1200">
         <a:solidFill>
           <a:schemeClr val="tx1"/>
@@ -228,7 +434,7 @@
         <a:cs typeface="+mn-cs"/>
       </a:defRPr>
     </a:lvl6pPr>
-    <a:lvl7pPr marL="2743200" algn="l" defTabSz="914400" rtl="0" eaLnBrk="1" latinLnBrk="0" hangingPunct="1">
+    <a:lvl7pPr marL="2743200" algn="l" defTabSz="457200" rtl="0" eaLnBrk="1" latinLnBrk="0" hangingPunct="1">
       <a:defRPr sz="1200" kern="1200">
         <a:solidFill>
           <a:schemeClr val="tx1"/>
@@ -238,7 +444,7 @@
         <a:cs typeface="+mn-cs"/>
       </a:defRPr>
     </a:lvl7pPr>
-    <a:lvl8pPr marL="3200400" algn="l" defTabSz="914400" rtl="0" eaLnBrk="1" latinLnBrk="0" hangingPunct="1">
+    <a:lvl8pPr marL="3200400" algn="l" defTabSz="457200" rtl="0" eaLnBrk="1" latinLnBrk="0" hangingPunct="1">
       <a:defRPr sz="1200" kern="1200">
         <a:solidFill>
           <a:schemeClr val="tx1"/>
@@ -248,7 +454,7 @@
         <a:cs typeface="+mn-cs"/>
       </a:defRPr>
     </a:lvl8pPr>
-    <a:lvl9pPr marL="3657600" algn="l" defTabSz="914400" rtl="0" eaLnBrk="1" latinLnBrk="0" hangingPunct="1">
+    <a:lvl9pPr marL="3657600" algn="l" defTabSz="457200" rtl="0" eaLnBrk="1" latinLnBrk="0" hangingPunct="1">
       <a:defRPr sz="1200" kern="1200">
         <a:solidFill>
           <a:schemeClr val="tx1"/>
@@ -263,7 +469,7 @@
 </file>
 
 <file path=ppt/notesSlides/notesSlide1.xml><?xml version="1.0" encoding="utf-8"?>
-<p:notes xmlns:a="http://schemas.openxmlformats.org/drawingml/2006/main" xmlns:r="http://schemas.openxmlformats.org/officeDocument/2006/relationships" xmlns:p="http://schemas.openxmlformats.org/presentationml/2006/main">
+<p:notes xmlns:a="http://schemas.openxmlformats.org/drawingml/2006/main" xmlns:p="http://schemas.openxmlformats.org/presentationml/2006/main" xmlns:r="http://schemas.openxmlformats.org/officeDocument/2006/relationships">
   <p:cSld>
     <p:spTree>
       <p:nvGrpSpPr>
@@ -283,7 +489,7 @@
         <p:nvSpPr>
           <p:cNvPr id="2" name="Slide Image Placeholder 1"/>
           <p:cNvSpPr>
-            <a:spLocks noGrp="1" noRot="1" noChangeAspect="1"/>
+            <a:spLocks noGrp="1"/>
           </p:cNvSpPr>
           <p:nvPr>
             <p:ph type="sldImg" idx="2"/>
@@ -298,7 +504,7 @@
             <a:spLocks noGrp="1"/>
           </p:cNvSpPr>
           <p:nvPr>
-            <p:ph type="body" sz="quarter" idx="3"/>
+            <p:ph type="body" idx="3" sz="quarter"/>
           </p:nvPr>
         </p:nvSpPr>
         <p:spPr/>
@@ -310,17 +516,13 @@
               <a:t>【第 1 頁 · 鉤子 · 開場靜畫】　目標 35 秒 · 累計 0:35</a:t>
             </a:r>
           </a:p>
-          <a:p>
-            <a:endParaRPr/>
-          </a:p>
+          <a:p/>
           <a:p>
             <a:r>
               <a:t>★ 今天,五個人要看完三千支影片;而客戶要的答案,兩天內。</a:t>
             </a:r>
           </a:p>
-          <a:p>
-            <a:endParaRPr/>
-          </a:p>
+          <a:p/>
           <a:p>
             <a:r>
               <a:t>· 先講生意:客戶是車隊 —— 物流 · 客運 · 租賃,車上裝我們的鏡頭與車機</a:t>
@@ -336,17 +538,13 @@
               <a:t>· 一次「爭議」= 客戶回頭說「這筆判錯了」—— 只能由人重看影片才判得出來</a:t>
             </a:r>
           </a:p>
-          <a:p>
-            <a:endParaRPr/>
-          </a:p>
+          <a:p/>
           <a:p>
             <a:r>
               <a:t># 單一大型車隊約 3,000 筆事件/天 · 全公司 5 位專職分析人員</a:t>
             </a:r>
           </a:p>
-          <a:p>
-            <a:endParaRPr/>
-          </a:p>
+          <a:p/>
           <a:p>
             <a:r>
               <a:t>⚠️ ★ 那句話留到**最後**講 —— 先把『事件』與『爭議』鋪好,後面九頁全建立在這兩個詞上</a:t>
@@ -357,17 +555,13 @@
               <a:t>⚠️ 講完停 1 秒再換頁。這是全片唯一的鉤子,不要急著翻</a:t>
             </a:r>
           </a:p>
-          <a:p>
-            <a:endParaRPr/>
-          </a:p>
+          <a:p/>
           <a:p>
             <a:r>
               <a:t>→ 換下一頁</a:t>
             </a:r>
           </a:p>
-          <a:p>
-            <a:endParaRPr/>
-          </a:p>
+          <a:p/>
           <a:p>
             <a:r>
               <a:t>── 逐字備援 · 156 字(忘詞才看,不是拿來唸的)──</a:t>
@@ -387,7 +581,7 @@
             <a:spLocks noGrp="1"/>
           </p:cNvSpPr>
           <p:nvPr>
-            <p:ph type="sldNum" sz="quarter" idx="5"/>
+            <p:ph type="sldNum" idx="5" sz="quarter"/>
           </p:nvPr>
         </p:nvSpPr>
         <p:spPr/>
@@ -401,7 +595,7 @@
 </file>
 
 <file path=ppt/notesSlides/notesSlide10.xml><?xml version="1.0" encoding="utf-8"?>
-<p:notes xmlns:a="http://schemas.openxmlformats.org/drawingml/2006/main" xmlns:r="http://schemas.openxmlformats.org/officeDocument/2006/relationships" xmlns:p="http://schemas.openxmlformats.org/presentationml/2006/main">
+<p:notes xmlns:a="http://schemas.openxmlformats.org/drawingml/2006/main" xmlns:p="http://schemas.openxmlformats.org/presentationml/2006/main" xmlns:r="http://schemas.openxmlformats.org/officeDocument/2006/relationships">
   <p:cSld>
     <p:spTree>
       <p:nvGrpSpPr>
@@ -421,7 +615,7 @@
         <p:nvSpPr>
           <p:cNvPr id="2" name="Slide Image Placeholder 1"/>
           <p:cNvSpPr>
-            <a:spLocks noGrp="1" noRot="1" noChangeAspect="1"/>
+            <a:spLocks noGrp="1"/>
           </p:cNvSpPr>
           <p:nvPr>
             <p:ph type="sldImg" idx="2"/>
@@ -436,7 +630,7 @@
             <a:spLocks noGrp="1"/>
           </p:cNvSpPr>
           <p:nvPr>
-            <p:ph type="body" sz="quarter" idx="3"/>
+            <p:ph type="body" idx="3" sz="quarter"/>
           </p:nvPr>
         </p:nvSpPr>
         <p:spPr/>
@@ -448,20 +642,16 @@
               <a:t>【第 10 頁 · P9 · 六個月 · 六個工作包 · 三道決策門】　目標 47 秒 · 累計 8:41</a:t>
             </a:r>
           </a:p>
-          <a:p>
-            <a:endParaRPr/>
-          </a:p>
-          <a:p>
-            <a:r>
-              <a:t>★ 六個工作包只有一包是 AI,順序本身就是風險控制。</a:t>
-            </a:r>
-          </a:p>
-          <a:p>
-            <a:endParaRPr/>
-          </a:p>
-          <a:p>
-            <a:r>
-              <a:t>· 評估集 → 標註 → 特徵 → 地端 VLM</a:t>
+          <a:p/>
+          <a:p>
+            <a:r>
+              <a:t>★ 六個月分三段付,每一段都有明確的喊停條件 —— 你不必一次押六個月。</a:t>
+            </a:r>
+          </a:p>
+          <a:p/>
+          <a:p>
+            <a:r>
+              <a:t>· 六包只有一包是 AI,而且排在最後:評估集 → 標註 → 特徵 → 地端 VLM</a:t>
             </a:r>
           </a:p>
           <a:p>
@@ -474,33 +664,25 @@
               <a:t>· G2 四臂同場比,第四臂是影子模式</a:t>
             </a:r>
           </a:p>
-          <a:p>
-            <a:endParaRPr/>
-          </a:p>
+          <a:p/>
           <a:p>
             <a:r>
               <a:t># G1 第 6 週 · G2 第 12 週 · G3 第 24 週</a:t>
             </a:r>
           </a:p>
-          <a:p>
-            <a:endParaRPr/>
-          </a:p>
+          <a:p/>
           <a:p>
             <a:r>
               <a:t>⚠️ 前三臂全部含人,而要部署的是無人系統 —— 這就是為什麼要有第四臂</a:t>
             </a:r>
           </a:p>
-          <a:p>
-            <a:endParaRPr/>
-          </a:p>
+          <a:p/>
           <a:p>
             <a:r>
               <a:t>→ 換下一頁</a:t>
             </a:r>
           </a:p>
-          <a:p>
-            <a:endParaRPr/>
-          </a:p>
+          <a:p/>
           <a:p>
             <a:r>
               <a:t>── 逐字備援 · 208 字(忘詞才看,不是拿來唸的)──</a:t>
@@ -511,9 +693,7 @@
               <a:t>六個月,六個工作包,三道門。順序不能換:評估集、標註、特徵,最後才是地端模型。第六週是因果判定門:交出時間拆解、兩天逾時率跟到件分布。證據搜尋跟誤報量佔主要延遲,才續行;不是,就轉排班。第十二週同一組凍結集比四臂:現行模型、規則式基線、人機協作,加一臂影子模式——機器自己結案、不對外送,跟人的判定比對。自動結案的漏放率,只有這一臂算得出來。這道門不能取消實驗,只能調整規模;要不要真的對外自動結案,不在這六個月決定。規則式今天就能做,為什麼排第五週?沒有前六週的基準線,證不出有效。</a:t>
             </a:r>
           </a:p>
-          <a:p>
-            <a:endParaRPr/>
-          </a:p>
+          <a:p/>
           <a:p>
             <a:r>
               <a:t>── 備查(不唸,答辯用)──</a:t>
@@ -553,7 +733,7 @@
             <a:spLocks noGrp="1"/>
           </p:cNvSpPr>
           <p:nvPr>
-            <p:ph type="sldNum" sz="quarter" idx="5"/>
+            <p:ph type="sldNum" idx="5" sz="quarter"/>
           </p:nvPr>
         </p:nvSpPr>
         <p:spPr/>
@@ -567,7 +747,7 @@
 </file>
 
 <file path=ppt/notesSlides/notesSlide11.xml><?xml version="1.0" encoding="utf-8"?>
-<p:notes xmlns:a="http://schemas.openxmlformats.org/drawingml/2006/main" xmlns:r="http://schemas.openxmlformats.org/officeDocument/2006/relationships" xmlns:p="http://schemas.openxmlformats.org/presentationml/2006/main">
+<p:notes xmlns:a="http://schemas.openxmlformats.org/drawingml/2006/main" xmlns:p="http://schemas.openxmlformats.org/presentationml/2006/main" xmlns:r="http://schemas.openxmlformats.org/officeDocument/2006/relationships">
   <p:cSld>
     <p:spTree>
       <p:nvGrpSpPr>
@@ -587,7 +767,7 @@
         <p:nvSpPr>
           <p:cNvPr id="2" name="Slide Image Placeholder 1"/>
           <p:cNvSpPr>
-            <a:spLocks noGrp="1" noRot="1" noChangeAspect="1"/>
+            <a:spLocks noGrp="1"/>
           </p:cNvSpPr>
           <p:nvPr>
             <p:ph type="sldImg" idx="2"/>
@@ -602,7 +782,7 @@
             <a:spLocks noGrp="1"/>
           </p:cNvSpPr>
           <p:nvPr>
-            <p:ph type="body" sz="quarter" idx="3"/>
+            <p:ph type="body" idx="3" sz="quarter"/>
           </p:nvPr>
         </p:nvSpPr>
         <p:spPr/>
@@ -614,17 +794,13 @@
               <a:t>【第 11 頁 · P10 · 資源、當責與請求】　目標 64 秒 · 累計 9:45</a:t>
             </a:r>
           </a:p>
-          <a:p>
-            <a:endParaRPr/>
-          </a:p>
+          <a:p/>
           <a:p>
             <a:r>
               <a:t>★ 我請求核准第一段:四點八五人月、量級四十二到四十七萬,並指定一位贊助人。</a:t>
             </a:r>
           </a:p>
-          <a:p>
-            <a:endParaRPr/>
-          </a:p>
+          <a:p/>
           <a:p>
             <a:r>
               <a:t>· 成本主體是人,不是設備</a:t>
@@ -640,9 +816,7 @@
               <a:t>· 我要的不只是一筆錢,是一個贊助人跟三道門</a:t>
             </a:r>
           </a:p>
-          <a:p>
-            <a:endParaRPr/>
-          </a:p>
+          <a:p/>
           <a:p>
             <a:r>
               <a:t># 4.85 人月 · NT$42–47 萬(規劃,非核定預算)</a:t>
@@ -653,8 +827,11 @@
               <a:t># 毛 6.0–12.1 FTE → 稽核稅 0.39–3.14 FTE → 淨 2.9–11.7 FTE</a:t>
             </a:r>
           </a:p>
-          <a:p>
-            <a:endParaRPr/>
+          <a:p/>
+          <a:p>
+            <a:r>
+              <a:t>⚠️ 🔴 **最後一句講正面那三樣**(可稽核的錯誤率 · 脈絡判斷層 · 對照實驗結果)——🚫 不要停在「不做的代價」。全片的最後一個印象就是這一句</a:t>
+            </a:r>
           </a:p>
           <a:p>
             <a:r>
@@ -671,17 +848,13 @@
               <a:t>⚠️ 在稽核稅、申訴重判與漂移調查三項齊備前,不宣稱任何節省額</a:t>
             </a:r>
           </a:p>
-          <a:p>
-            <a:endParaRPr/>
-          </a:p>
+          <a:p/>
           <a:p>
             <a:r>
               <a:t>→ 換下一頁</a:t>
             </a:r>
           </a:p>
-          <a:p>
-            <a:endParaRPr/>
-          </a:p>
+          <a:p/>
           <a:p>
             <a:r>
               <a:t>── 逐字備援 · 280 字(忘詞才看,不是拿來唸的)──</a:t>
@@ -692,9 +865,7 @@
               <a:t>三個輸入都印在上面,它是量級,不是報價。設備一台十六到二十萬,一次性,不到一個人一年成本的五分之一;這個專案的成本主體是人,不是設備。它也不是為單一用途買的:第二個應用是內部規格文件的技術問答,不在本次請求範圍內,但硬體的攤提對象不只一個。那筆擴編暴露不是承諾的節省;要第十二週實測證明能避免或延後至少一點四到一點七個 loaded FTE-year,業務也確認會轉成少招人或少徵調研發,才放行後續預算。我要的不只預算,是贊助人跟三道門。我請求核准六個月額度輪廓、分段釋出;第一段四點八五人月、量級新台幣四十二到四十七萬,第六週由贊助人決定續不續行。第二十四週我會回到這裡,交出三方比較結果:地端 VLM 有增量,或者沒有。</a:t>
             </a:r>
           </a:p>
-          <a:p>
-            <a:endParaRPr/>
-          </a:p>
+          <a:p/>
           <a:p>
             <a:r>
               <a:t>── 備查(不唸,答辯用)──</a:t>
@@ -734,7 +905,7 @@
             <a:spLocks noGrp="1"/>
           </p:cNvSpPr>
           <p:nvPr>
-            <p:ph type="sldNum" sz="quarter" idx="5"/>
+            <p:ph type="sldNum" idx="5" sz="quarter"/>
           </p:nvPr>
         </p:nvSpPr>
         <p:spPr/>
@@ -748,7 +919,7 @@
 </file>
 
 <file path=ppt/notesSlides/notesSlide12.xml><?xml version="1.0" encoding="utf-8"?>
-<p:notes xmlns:a="http://schemas.openxmlformats.org/drawingml/2006/main" xmlns:r="http://schemas.openxmlformats.org/officeDocument/2006/relationships" xmlns:p="http://schemas.openxmlformats.org/presentationml/2006/main">
+<p:notes xmlns:a="http://schemas.openxmlformats.org/drawingml/2006/main" xmlns:p="http://schemas.openxmlformats.org/presentationml/2006/main" xmlns:r="http://schemas.openxmlformats.org/officeDocument/2006/relationships">
   <p:cSld>
     <p:spTree>
       <p:nvGrpSpPr>
@@ -768,7 +939,7 @@
         <p:nvSpPr>
           <p:cNvPr id="2" name="Slide Image Placeholder 1"/>
           <p:cNvSpPr>
-            <a:spLocks noGrp="1" noRot="1" noChangeAspect="1"/>
+            <a:spLocks noGrp="1"/>
           </p:cNvSpPr>
           <p:nvPr>
             <p:ph type="sldImg" idx="2"/>
@@ -783,7 +954,7 @@
             <a:spLocks noGrp="1"/>
           </p:cNvSpPr>
           <p:nvPr>
-            <p:ph type="body" sz="quarter" idx="3"/>
+            <p:ph type="body" idx="3" sz="quarter"/>
           </p:nvPr>
         </p:nvSpPr>
         <p:spPr/>
@@ -795,33 +966,25 @@
               <a:t>【第 12 頁 · 參考文獻(第 11 頁 — 不佔十頁額度)】　目標 5 秒 · 累計 9:50</a:t>
             </a:r>
           </a:p>
-          <a:p>
-            <a:endParaRPr/>
-          </a:p>
+          <a:p/>
           <a:p>
             <a:r>
               <a:t>★ 以上引用依 APA 第七版列出。</a:t>
             </a:r>
           </a:p>
-          <a:p>
-            <a:endParaRPr/>
-          </a:p>
+          <a:p/>
           <a:p>
             <a:r>
               <a:t>⚠️ 這一頁不佔十頁額度,5 秒帶過</a:t>
             </a:r>
           </a:p>
-          <a:p>
-            <a:endParaRPr/>
-          </a:p>
+          <a:p/>
           <a:p>
             <a:r>
               <a:t>→ 換下一頁</a:t>
             </a:r>
           </a:p>
-          <a:p>
-            <a:endParaRPr/>
-          </a:p>
+          <a:p/>
           <a:p>
             <a:r>
               <a:t>── 逐字備援 · 21 字(忘詞才看,不是拿來唸的)──</a:t>
@@ -841,7 +1004,7 @@
             <a:spLocks noGrp="1"/>
           </p:cNvSpPr>
           <p:nvPr>
-            <p:ph type="sldNum" sz="quarter" idx="5"/>
+            <p:ph type="sldNum" idx="5" sz="quarter"/>
           </p:nvPr>
         </p:nvSpPr>
         <p:spPr/>
@@ -855,7 +1018,7 @@
 </file>
 
 <file path=ppt/notesSlides/notesSlide2.xml><?xml version="1.0" encoding="utf-8"?>
-<p:notes xmlns:a="http://schemas.openxmlformats.org/drawingml/2006/main" xmlns:r="http://schemas.openxmlformats.org/officeDocument/2006/relationships" xmlns:p="http://schemas.openxmlformats.org/presentationml/2006/main">
+<p:notes xmlns:a="http://schemas.openxmlformats.org/drawingml/2006/main" xmlns:p="http://schemas.openxmlformats.org/presentationml/2006/main" xmlns:r="http://schemas.openxmlformats.org/officeDocument/2006/relationships">
   <p:cSld>
     <p:spTree>
       <p:nvGrpSpPr>
@@ -875,7 +1038,7 @@
         <p:nvSpPr>
           <p:cNvPr id="2" name="Slide Image Placeholder 1"/>
           <p:cNvSpPr>
-            <a:spLocks noGrp="1" noRot="1" noChangeAspect="1"/>
+            <a:spLocks noGrp="1"/>
           </p:cNvSpPr>
           <p:nvPr>
             <p:ph type="sldImg" idx="2"/>
@@ -890,7 +1053,7 @@
             <a:spLocks noGrp="1"/>
           </p:cNvSpPr>
           <p:nvPr>
-            <p:ph type="body" sz="quarter" idx="3"/>
+            <p:ph type="body" idx="3" sz="quarter"/>
           </p:nvPr>
         </p:nvSpPr>
         <p:spPr/>
@@ -902,17 +1065,13 @@
               <a:t>【第 2 頁 · P1 · 用例:兩階段推論,與它下游那道人工防線】　目標 65 秒 · 累計 1:40</a:t>
             </a:r>
           </a:p>
-          <a:p>
-            <a:endParaRPr/>
-          </a:p>
+          <a:p/>
           <a:p>
             <a:r>
               <a:t>★ 這道人工防線有兩種單價,差十六倍 —— 差別不在人,在證據在不在畫面裡。</a:t>
             </a:r>
           </a:p>
-          <a:p>
-            <a:endParaRPr/>
-          </a:p>
+          <a:p/>
           <a:p>
             <a:r>
               <a:t>· 地端 AI 公司內部評估過,我是其中一員(所以這不是新點子,是立案)</a:t>
@@ -928,17 +1087,13 @@
               <a:t>· 看畫面就能判 vs 要離開畫面找證據</a:t>
             </a:r>
           </a:p>
-          <a:p>
-            <a:endParaRPr/>
-          </a:p>
+          <a:p/>
           <a:p>
             <a:r>
               <a:t># 一筆 20 秒 / 一筆 5.25 分 / 差約 16 倍</a:t>
             </a:r>
           </a:p>
-          <a:p>
-            <a:endParaRPr/>
-          </a:p>
+          <a:p/>
           <a:p>
             <a:r>
               <a:t>⚠️ 20 秒要說「營運端的實務估計,尚未以計時量測驗證」</a:t>
@@ -949,17 +1104,13 @@
               <a:t>⚠️ 🚫 不可說「我們沒有量過」</a:t>
             </a:r>
           </a:p>
-          <a:p>
-            <a:endParaRPr/>
-          </a:p>
+          <a:p/>
           <a:p>
             <a:r>
               <a:t>→ 換下一頁</a:t>
             </a:r>
           </a:p>
-          <a:p>
-            <a:endParaRPr/>
-          </a:p>
+          <a:p/>
           <a:p>
             <a:r>
               <a:t>── 逐字備援 · 288 字(忘詞才看,不是拿來唸的)──</a:t>
@@ -970,9 +1121,7 @@
               <a:t>地端 AI 的技術可行性,公司內部評估過,我是其中一員。今天我不是提一個新點子,是把它從技術研討,變成一個有業務數字、有驗證機制、有停止條件的正式立案。要建的能力:讓機器讀懂一次事件的完整脈絡——影片、客戶問題、規則——產出可交付的證據與描述。兩階段架構各位熟悉,自動化到第二階段就停了:剩下每一筆,都要由人看過。這道防線有兩種單價。看畫面就能判的,一筆二十秒。要離開畫面去找證據的——那面牌是什麼、速限多少——一筆五分多鐘。差約十六倍,差別不在人,在證據在不在畫面裡。我請委員會核准一個六個月、三道決策門的專案:在客戶要的兩天內交出分析,第一次量得到自己漏掉什麼。要建它,得先有凍結的評估集、一致的標註、餵進模型的脈絡,那是前三個工作包。本案不重新開啟架構選擇。</a:t>
             </a:r>
           </a:p>
-          <a:p>
-            <a:endParaRPr/>
-          </a:p>
+          <a:p/>
           <a:p>
             <a:r>
               <a:t>── 備查(不唸,答辯用)──</a:t>
@@ -1017,7 +1166,7 @@
             <a:spLocks noGrp="1"/>
           </p:cNvSpPr>
           <p:nvPr>
-            <p:ph type="sldNum" sz="quarter" idx="5"/>
+            <p:ph type="sldNum" idx="5" sz="quarter"/>
           </p:nvPr>
         </p:nvSpPr>
         <p:spPr/>
@@ -1031,7 +1180,7 @@
 </file>
 
 <file path=ppt/notesSlides/notesSlide3.xml><?xml version="1.0" encoding="utf-8"?>
-<p:notes xmlns:a="http://schemas.openxmlformats.org/drawingml/2006/main" xmlns:r="http://schemas.openxmlformats.org/officeDocument/2006/relationships" xmlns:p="http://schemas.openxmlformats.org/presentationml/2006/main">
+<p:notes xmlns:a="http://schemas.openxmlformats.org/drawingml/2006/main" xmlns:p="http://schemas.openxmlformats.org/presentationml/2006/main" xmlns:r="http://schemas.openxmlformats.org/officeDocument/2006/relationships">
   <p:cSld>
     <p:spTree>
       <p:nvGrpSpPr>
@@ -1051,7 +1200,7 @@
         <p:nvSpPr>
           <p:cNvPr id="2" name="Slide Image Placeholder 1"/>
           <p:cNvSpPr>
-            <a:spLocks noGrp="1" noRot="1" noChangeAspect="1"/>
+            <a:spLocks noGrp="1"/>
           </p:cNvSpPr>
           <p:nvPr>
             <p:ph type="sldImg" idx="2"/>
@@ -1066,7 +1215,7 @@
             <a:spLocks noGrp="1"/>
           </p:cNvSpPr>
           <p:nvPr>
-            <p:ph type="body" sz="quarter" idx="3"/>
+            <p:ph type="body" idx="3" sz="quarter"/>
           </p:nvPr>
         </p:nvSpPr>
         <p:spPr/>
@@ -1075,546 +1224,90 @@
           <a:lstStyle/>
           <a:p>
             <a:r>
-              <a:rPr dirty="0"/>
-              <a:t>【第 3 頁 · P2 · </a:t>
-            </a:r>
-            <a:r>
-              <a:rPr dirty="0" err="1"/>
-              <a:t>為什麼是現在:工作量沒變多,客戶要的時效變了</a:t>
-            </a:r>
-            <a:r>
-              <a:rPr dirty="0"/>
-              <a:t>】　</a:t>
-            </a:r>
-            <a:r>
-              <a:rPr dirty="0" err="1"/>
-              <a:t>目標</a:t>
-            </a:r>
-            <a:r>
-              <a:rPr dirty="0"/>
-              <a:t> 72 秒 · </a:t>
-            </a:r>
-            <a:r>
-              <a:rPr dirty="0" err="1"/>
-              <a:t>累計</a:t>
-            </a:r>
-            <a:r>
-              <a:rPr dirty="0"/>
-              <a:t> 2:52</a:t>
-            </a:r>
-          </a:p>
-          <a:p>
-            <a:endParaRPr dirty="0"/>
-          </a:p>
-          <a:p>
-            <a:r>
-              <a:rPr dirty="0"/>
-              <a:t>★ </a:t>
-            </a:r>
-            <a:r>
-              <a:rPr dirty="0" err="1"/>
-              <a:t>工作量沒變多,是客戶要的時效變了</a:t>
-            </a:r>
-            <a:r>
-              <a:rPr dirty="0"/>
-              <a:t> —— </a:t>
-            </a:r>
-            <a:r>
-              <a:rPr dirty="0" err="1"/>
-              <a:t>而慢的那兩段是同一個原因:模型看不到畫面外的東西</a:t>
-            </a:r>
-            <a:r>
-              <a:rPr dirty="0"/>
-              <a:t>。</a:t>
-            </a:r>
-          </a:p>
-          <a:p>
-            <a:endParaRPr dirty="0"/>
-          </a:p>
-          <a:p>
-            <a:r>
-              <a:rPr dirty="0"/>
-              <a:t>· </a:t>
-            </a:r>
-            <a:r>
-              <a:rPr dirty="0" err="1"/>
-              <a:t>利用率:平均還好,尖峰這五個人已經不夠</a:t>
-            </a:r>
-            <a:endParaRPr dirty="0"/>
-          </a:p>
-          <a:p>
-            <a:r>
-              <a:rPr dirty="0"/>
-              <a:t>· </a:t>
-            </a:r>
-            <a:r>
-              <a:rPr dirty="0" err="1"/>
-              <a:t>一件爭議的五段拆解,撈數據</a:t>
-            </a:r>
-            <a:r>
-              <a:rPr dirty="0"/>
-              <a:t> + </a:t>
-            </a:r>
-            <a:r>
-              <a:rPr dirty="0" err="1"/>
-              <a:t>判讀才是模型幫得上的</a:t>
-            </a:r>
-            <a:endParaRPr dirty="0"/>
-          </a:p>
-          <a:p>
-            <a:r>
-              <a:rPr dirty="0"/>
-              <a:t>· 這是營運端估計不是量測,W6 </a:t>
-            </a:r>
-            <a:r>
-              <a:rPr dirty="0" err="1"/>
-              <a:t>交正式拆解,不成立就轉排班</a:t>
-            </a:r>
-            <a:endParaRPr dirty="0"/>
-          </a:p>
-          <a:p>
-            <a:endParaRPr dirty="0"/>
-          </a:p>
-          <a:p>
-            <a:r>
-              <a:rPr dirty="0"/>
-              <a:t># 74%–107% · </a:t>
-            </a:r>
-            <a:r>
-              <a:rPr dirty="0" err="1"/>
-              <a:t>折算</a:t>
-            </a:r>
-            <a:r>
-              <a:rPr dirty="0"/>
-              <a:t> 3.7–5.4 人 · </a:t>
-            </a:r>
-            <a:r>
-              <a:rPr dirty="0" err="1"/>
-              <a:t>現有</a:t>
-            </a:r>
-            <a:r>
-              <a:rPr dirty="0"/>
-              <a:t> 5 人</a:t>
-            </a:r>
-          </a:p>
-          <a:p>
-            <a:r>
-              <a:rPr dirty="0"/>
-              <a:t># 2.5–5.5 天 · AI </a:t>
-            </a:r>
-            <a:r>
-              <a:rPr dirty="0" err="1"/>
-              <a:t>可處理段佔</a:t>
-            </a:r>
-            <a:r>
-              <a:rPr dirty="0"/>
-              <a:t> 43%–78%</a:t>
-            </a:r>
-          </a:p>
-          <a:p>
-            <a:endParaRPr dirty="0"/>
-          </a:p>
-          <a:p>
-            <a:r>
-              <a:rPr dirty="0"/>
-              <a:t>⚠️ </a:t>
-            </a:r>
-            <a:r>
-              <a:rPr dirty="0" err="1"/>
-              <a:t>分母是</a:t>
-            </a:r>
-            <a:r>
-              <a:rPr dirty="0"/>
-              <a:t> 2.5–5.5 天,🚫 </a:t>
-            </a:r>
-            <a:r>
-              <a:rPr dirty="0" err="1"/>
-              <a:t>不是</a:t>
-            </a:r>
-            <a:r>
-              <a:rPr dirty="0"/>
-              <a:t> 2–5 天</a:t>
-            </a:r>
-          </a:p>
-          <a:p>
-            <a:endParaRPr dirty="0"/>
-          </a:p>
-          <a:p>
-            <a:r>
-              <a:rPr dirty="0"/>
-              <a:t>✂️ </a:t>
-            </a:r>
-            <a:r>
-              <a:rPr dirty="0" err="1"/>
-              <a:t>若排練超過</a:t>
-            </a:r>
-            <a:r>
-              <a:rPr dirty="0"/>
-              <a:t> 9:40,這一頁砍最後四句(20 </a:t>
-            </a:r>
-            <a:r>
-              <a:rPr dirty="0" err="1"/>
-              <a:t>秒限定的重複</a:t>
-            </a:r>
-            <a:r>
-              <a:rPr dirty="0"/>
-              <a:t> + </a:t>
-            </a:r>
-            <a:r>
-              <a:rPr dirty="0" err="1"/>
-              <a:t>五萬台</a:t>
-            </a:r>
-            <a:r>
-              <a:rPr dirty="0"/>
-              <a:t> / </a:t>
-            </a:r>
-            <a:r>
-              <a:rPr dirty="0" err="1"/>
-              <a:t>三個分母</a:t>
-            </a:r>
-            <a:r>
-              <a:rPr dirty="0"/>
-              <a:t> / </a:t>
-            </a:r>
-            <a:r>
-              <a:rPr dirty="0" err="1"/>
-              <a:t>成長階梯</a:t>
-            </a:r>
-            <a:r>
-              <a:rPr dirty="0"/>
-              <a:t>)= 省 26 </a:t>
-            </a:r>
-            <a:r>
-              <a:rPr dirty="0" err="1"/>
-              <a:t>秒。第</a:t>
-            </a:r>
-            <a:r>
-              <a:rPr dirty="0"/>
-              <a:t> 2 </a:t>
-            </a:r>
-            <a:r>
-              <a:rPr dirty="0" err="1"/>
-              <a:t>頁已經講過</a:t>
-            </a:r>
-            <a:r>
-              <a:rPr dirty="0"/>
-              <a:t> 20 </a:t>
-            </a:r>
-            <a:r>
-              <a:rPr dirty="0" err="1"/>
-              <a:t>秒的限定,這裡是重複</a:t>
-            </a:r>
-            <a:r>
-              <a:rPr dirty="0"/>
-              <a:t>。</a:t>
-            </a:r>
-          </a:p>
-          <a:p>
-            <a:endParaRPr dirty="0"/>
-          </a:p>
-          <a:p>
-            <a:r>
-              <a:rPr dirty="0"/>
-              <a:t>→ </a:t>
-            </a:r>
-            <a:r>
-              <a:rPr dirty="0" err="1"/>
-              <a:t>換下一頁</a:t>
-            </a:r>
-            <a:endParaRPr dirty="0"/>
-          </a:p>
-          <a:p>
-            <a:endParaRPr dirty="0"/>
-          </a:p>
-          <a:p>
-            <a:r>
-              <a:rPr dirty="0"/>
-              <a:t>── </a:t>
-            </a:r>
-            <a:r>
-              <a:rPr dirty="0" err="1"/>
-              <a:t>逐字備援</a:t>
-            </a:r>
-            <a:r>
-              <a:rPr dirty="0"/>
-              <a:t> · 317 字(</a:t>
-            </a:r>
-            <a:r>
-              <a:rPr dirty="0" err="1"/>
-              <a:t>忘詞才看,不是拿來唸的</a:t>
-            </a:r>
-            <a:r>
-              <a:rPr dirty="0"/>
-              <a:t>)──</a:t>
-            </a:r>
-          </a:p>
-          <a:p>
-            <a:r>
-              <a:rPr dirty="0" err="1"/>
-              <a:t>利用率七成四到一百零七:平均還好,尖峰這五個人已經不夠</a:t>
-            </a:r>
-            <a:r>
-              <a:rPr dirty="0"/>
-              <a:t>——折算三點七到五點四人,我們只有五個。一件爭議目前要兩到五天,現況約一半超過兩天;客戶要兩天、單純案件當天,那是客戶期望,不是簽了的服務水準。這兩到五天花在哪裡,我拆開了:排隊零到一天、撈數據半天、判讀一到三天、內部覆核半天、回信半天。撈數據加判讀,就是模型幫得上的那兩段,佔四成到八成。這兩段之所以慢,是同一個原因——</a:t>
-            </a:r>
-            <a:r>
-              <a:rPr dirty="0" err="1"/>
-              <a:t>模型看不到畫面外的東西。這是營運端估計,不是量測;前六週交出正式拆解,不成立就轉排班。二十秒是營運上的估計,還沒有正式量過</a:t>
-            </a:r>
-            <a:r>
-              <a:rPr dirty="0"/>
-              <a:t>——第六週交出正式基準,G1 驗收。上線約五萬台,售出更多;落差就是排不了程的工作量,開通權在客戶手上。我不預測撞牆的時點;第六週對齊三個分母,成長不納入回報估算。成長是階梯:一個大型車隊上線,事件量一次跳兩成三,手上正在談一個。</a:t>
-            </a:r>
-          </a:p>
-          <a:p>
-            <a:endParaRPr dirty="0"/>
-          </a:p>
-          <a:p>
-            <a:r>
-              <a:rPr dirty="0"/>
-              <a:t>── </a:t>
-            </a:r>
-            <a:r>
-              <a:rPr dirty="0" err="1"/>
-              <a:t>備查</a:t>
-            </a:r>
-            <a:r>
-              <a:rPr dirty="0"/>
-              <a:t>(</a:t>
-            </a:r>
-            <a:r>
-              <a:rPr dirty="0" err="1"/>
-              <a:t>不唸,答辯用</a:t>
-            </a:r>
-            <a:r>
-              <a:rPr dirty="0"/>
-              <a:t>)──</a:t>
-            </a:r>
-          </a:p>
-          <a:p>
-            <a:r>
-              <a:rPr dirty="0"/>
-              <a:t>【rows】{'label': '</a:t>
-            </a:r>
-            <a:r>
-              <a:rPr dirty="0" err="1"/>
-              <a:t>尖峰徵調</a:t>
-            </a:r>
-            <a:r>
-              <a:rPr dirty="0"/>
-              <a:t> 7 </a:t>
-            </a:r>
-            <a:r>
-              <a:rPr dirty="0" err="1"/>
-              <a:t>位研發工程師</a:t>
-            </a:r>
-            <a:r>
-              <a:rPr dirty="0"/>
-              <a:t>', 'value': '</a:t>
-            </a:r>
-            <a:r>
-              <a:rPr dirty="0" err="1"/>
-              <a:t>不是管理失當,是算術的必然</a:t>
-            </a:r>
-            <a:r>
-              <a:rPr dirty="0"/>
-              <a:t>', 'note': '</a:t>
-            </a:r>
-            <a:r>
-              <a:rPr dirty="0" err="1"/>
-              <a:t>離開本職支援、非常態編制</a:t>
-            </a:r>
-            <a:r>
-              <a:rPr dirty="0"/>
-              <a:t> —— </a:t>
-            </a:r>
-            <a:r>
-              <a:rPr dirty="0" err="1"/>
-              <a:t>開發產能被拿去補分析產能</a:t>
-            </a:r>
-            <a:r>
-              <a:rPr dirty="0"/>
-              <a:t>', 'hot': False}</a:t>
-            </a:r>
-          </a:p>
-          <a:p>
-            <a:r>
-              <a:rPr dirty="0"/>
-              <a:t>【rows】{'label': '</a:t>
-            </a:r>
-            <a:r>
-              <a:rPr dirty="0" err="1"/>
-              <a:t>量已經不是瓶頸</a:t>
-            </a:r>
-            <a:r>
-              <a:rPr dirty="0"/>
-              <a:t>', 'value': '</a:t>
-            </a:r>
-            <a:r>
-              <a:rPr dirty="0" err="1"/>
-              <a:t>全客戶</a:t>
-            </a:r>
-            <a:r>
-              <a:rPr dirty="0"/>
-              <a:t> 13,000 筆/</a:t>
-            </a:r>
-            <a:r>
-              <a:rPr dirty="0" err="1"/>
-              <a:t>天,地端約</a:t>
-            </a:r>
-            <a:r>
-              <a:rPr dirty="0"/>
-              <a:t> 2.2–3.5 </a:t>
-            </a:r>
-            <a:r>
-              <a:rPr dirty="0" err="1"/>
-              <a:t>小時跑完,設備佔用率約</a:t>
-            </a:r>
-            <a:r>
-              <a:rPr dirty="0"/>
-              <a:t> 9%–15%', 'note': '⚠ </a:t>
-            </a:r>
-            <a:r>
-              <a:rPr dirty="0" err="1"/>
-              <a:t>估算,非實測;此數只含每日全量批次初篩,不含客戶爭議深挖那條路徑</a:t>
-            </a:r>
-            <a:r>
-              <a:rPr dirty="0"/>
-              <a:t>(</a:t>
-            </a:r>
-            <a:r>
-              <a:rPr dirty="0" err="1"/>
-              <a:t>其吞吐量由</a:t>
-            </a:r>
-            <a:r>
-              <a:rPr dirty="0"/>
-              <a:t> W1–6 </a:t>
-            </a:r>
-            <a:r>
-              <a:rPr dirty="0" err="1"/>
-              <a:t>量測</a:t>
-            </a:r>
-            <a:r>
-              <a:rPr dirty="0"/>
-              <a:t>)。</a:t>
-            </a:r>
-            <a:r>
-              <a:rPr dirty="0" err="1"/>
-              <a:t>瓶頸是判準與驗證,不是量</a:t>
-            </a:r>
-            <a:r>
-              <a:rPr dirty="0"/>
-              <a:t>', 'hot': False}</a:t>
-            </a:r>
-          </a:p>
-          <a:p>
-            <a:r>
-              <a:rPr dirty="0"/>
-              <a:t>【</a:t>
-            </a:r>
-            <a:r>
-              <a:rPr dirty="0" err="1"/>
-              <a:t>這一頁的作用】這頁回答委員會最會問的兩題:為什麼是現在、為什麼是</a:t>
-            </a:r>
-            <a:r>
-              <a:rPr dirty="0"/>
-              <a:t> AI </a:t>
-            </a:r>
-            <a:r>
-              <a:rPr dirty="0" err="1"/>
-              <a:t>而不是加人。五段天數必須印出來,委員會才親眼看到</a:t>
-            </a:r>
-            <a:r>
-              <a:rPr dirty="0"/>
-              <a:t> 43%–78% </a:t>
-            </a:r>
-            <a:r>
-              <a:rPr dirty="0" err="1"/>
-              <a:t>落在模型碰得到的那兩段;而那條因果句</a:t>
-            </a:r>
-            <a:r>
-              <a:rPr dirty="0"/>
-              <a:t>(</a:t>
-            </a:r>
-            <a:r>
-              <a:rPr dirty="0" err="1"/>
-              <a:t>兩段慢的原因是同一個技術缺陷</a:t>
-            </a:r>
-            <a:r>
-              <a:rPr dirty="0"/>
-              <a:t>)</a:t>
-            </a:r>
-            <a:r>
-              <a:rPr dirty="0" err="1"/>
-              <a:t>把整頁從營運圖表升級成</a:t>
-            </a:r>
-            <a:r>
-              <a:rPr dirty="0"/>
-              <a:t> AI </a:t>
-            </a:r>
-            <a:r>
-              <a:rPr dirty="0" err="1"/>
-              <a:t>立案</a:t>
-            </a:r>
-            <a:r>
-              <a:rPr dirty="0"/>
-              <a:t> —— </a:t>
-            </a:r>
-            <a:r>
-              <a:rPr dirty="0" err="1"/>
-              <a:t>沒有它,這只證明「有件事很花時間</a:t>
-            </a:r>
-            <a:r>
-              <a:rPr dirty="0"/>
-              <a:t>」。</a:t>
-            </a:r>
-            <a:r>
-              <a:rPr dirty="0" err="1"/>
-              <a:t>同一頁又自己標明證據等級</a:t>
-            </a:r>
-            <a:r>
-              <a:rPr dirty="0"/>
-              <a:t>(</a:t>
-            </a:r>
-            <a:r>
-              <a:rPr dirty="0" err="1"/>
-              <a:t>營運端估計,非量測</a:t>
-            </a:r>
-            <a:r>
-              <a:rPr dirty="0"/>
-              <a:t>)</a:t>
-            </a:r>
-            <a:r>
-              <a:rPr dirty="0" err="1"/>
-              <a:t>並給出反向出口</a:t>
-            </a:r>
-            <a:r>
-              <a:rPr dirty="0"/>
-              <a:t>(</a:t>
-            </a:r>
-            <a:r>
-              <a:rPr dirty="0" err="1"/>
-              <a:t>推翻就轉排班</a:t>
-            </a:r>
-            <a:r>
-              <a:rPr dirty="0"/>
-              <a:t>),</a:t>
-            </a:r>
-            <a:r>
-              <a:rPr dirty="0" err="1"/>
-              <a:t>把核准變成一個低風險決定;右側的利用率上緣破百與徵調</a:t>
-            </a:r>
-            <a:r>
-              <a:rPr dirty="0"/>
-              <a:t> 7 </a:t>
-            </a:r>
-            <a:r>
-              <a:rPr dirty="0" err="1"/>
-              <a:t>位研發,則把時效缺口接回錢與機會成本</a:t>
-            </a:r>
-            <a:r>
-              <a:rPr dirty="0"/>
-              <a:t>。</a:t>
+              <a:t>【第 3 頁 · P2 · 為什麼是現在:工作量沒變多,客戶要的時效變了】　目標 72 秒 · 累計 2:52</a:t>
+            </a:r>
+          </a:p>
+          <a:p/>
+          <a:p>
+            <a:r>
+              <a:t>★ 工作量沒變多,是客戶要的時效變了 —— 而慢的那兩段是同一個原因:模型看不到畫面外的東西。</a:t>
+            </a:r>
+          </a:p>
+          <a:p/>
+          <a:p>
+            <a:r>
+              <a:t>· 利用率:平均還好,尖峰這五個人已經不夠</a:t>
+            </a:r>
+          </a:p>
+          <a:p>
+            <a:r>
+              <a:t>· 一件爭議的五段拆解,撈數據 + 判讀才是模型幫得上的</a:t>
+            </a:r>
+          </a:p>
+          <a:p>
+            <a:r>
+              <a:t>· 這是營運端估計不是量測,W6 交正式拆解,不成立就轉排班</a:t>
+            </a:r>
+          </a:p>
+          <a:p/>
+          <a:p>
+            <a:r>
+              <a:t># 74%–107% · 折算 3.7–5.4 人 · 現有 5 人</a:t>
+            </a:r>
+          </a:p>
+          <a:p>
+            <a:r>
+              <a:t># 2.5–5.5 天 · AI 可處理段佔 43%–78%</a:t>
+            </a:r>
+          </a:p>
+          <a:p/>
+          <a:p>
+            <a:r>
+              <a:t>⚠️ 分母是 2.5–5.5 天,🚫 不是 2–5 天</a:t>
+            </a:r>
+          </a:p>
+          <a:p/>
+          <a:p>
+            <a:r>
+              <a:t>✂️ 若排練超過 9:40,這一頁砍最後四句(20 秒限定的重複 + 五萬台 / 三個分母 / 成長階梯)= 省 26 秒。第 2 頁已經講過 20 秒的限定,這裡是重複。</a:t>
+            </a:r>
+          </a:p>
+          <a:p/>
+          <a:p>
+            <a:r>
+              <a:t>→ 換下一頁</a:t>
+            </a:r>
+          </a:p>
+          <a:p/>
+          <a:p>
+            <a:r>
+              <a:t>── 逐字備援 · 317 字(忘詞才看,不是拿來唸的)──</a:t>
+            </a:r>
+          </a:p>
+          <a:p>
+            <a:r>
+              <a:t>利用率七成四到一百零七:平均還好,尖峰這五個人已經不夠——折算三點七到五點四人,我們只有五個。一件爭議目前要兩到五天,現況約一半超過兩天;客戶要兩天、單純案件當天,那是客戶期望,不是簽了的服務水準。這兩到五天花在哪裡,我拆開了:排隊零到一天、撈數據半天、判讀一到三天、內部覆核半天、回信半天。撈數據加判讀,就是模型幫得上的那兩段,佔四成到八成。這兩段之所以慢,是同一個原因——模型看不到畫面外的東西。這是營運端估計,不是量測;前六週交出正式拆解,不成立就轉排班。二十秒是營運上的估計,還沒有正式量過——第六週交出正式基準,G1 驗收。上線約五萬台,售出更多;落差就是排不了程的工作量,開通權在客戶手上。我不預測撞牆的時點;第六週對齊三個分母,成長不納入回報估算。成長是階梯:一個大型車隊上線,事件量一次跳兩成三,手上正在談一個。</a:t>
+            </a:r>
+          </a:p>
+          <a:p/>
+          <a:p>
+            <a:r>
+              <a:t>── 備查(不唸,答辯用)──</a:t>
+            </a:r>
+          </a:p>
+          <a:p>
+            <a:r>
+              <a:t>【rows】{'label': '尖峰徵調 7 位研發工程師', 'value': '不是管理失當,是算術的必然', 'note': '離開本職支援、非常態編制 —— 開發產能被拿去補分析產能', 'hot': False}</a:t>
+            </a:r>
+          </a:p>
+          <a:p>
+            <a:r>
+              <a:t>【rows】{'label': '量已經不是瓶頸', 'value': '全客戶 13,000 筆/天,地端約 2.2–3.5 小時跑完,設備佔用率約 9%–15%', 'note': '⚠ 估算,非實測;此數只含每日全量批次初篩,不含客戶爭議深挖那條路徑(其吞吐量由 W1–6 量測)。瓶頸是判準與驗證,不是量', 'hot': False}</a:t>
+            </a:r>
+          </a:p>
+          <a:p>
+            <a:r>
+              <a:t>【這一頁的作用】這頁回答委員會最會問的兩題:為什麼是現在、為什麼是 AI 而不是加人。五段天數必須印出來,委員會才親眼看到 43%–78% 落在模型碰得到的那兩段;而那條因果句(兩段慢的原因是同一個技術缺陷)把整頁從營運圖表升級成 AI 立案 —— 沒有它,這只證明「有件事很花時間」。同一頁又自己標明證據等級(營運端估計,非量測)並給出反向出口(推翻就轉排班),把核准變成一個低風險決定;右側的利用率上緣破百與徵調 7 位研發,則把時效缺口接回錢與機會成本。</a:t>
             </a:r>
           </a:p>
         </p:txBody>
@@ -1626,7 +1319,7 @@
             <a:spLocks noGrp="1"/>
           </p:cNvSpPr>
           <p:nvPr>
-            <p:ph type="sldNum" sz="quarter" idx="5"/>
+            <p:ph type="sldNum" idx="5" sz="quarter"/>
           </p:nvPr>
         </p:nvSpPr>
         <p:spPr/>
@@ -1640,7 +1333,7 @@
 </file>
 
 <file path=ppt/notesSlides/notesSlide4.xml><?xml version="1.0" encoding="utf-8"?>
-<p:notes xmlns:a="http://schemas.openxmlformats.org/drawingml/2006/main" xmlns:r="http://schemas.openxmlformats.org/officeDocument/2006/relationships" xmlns:p="http://schemas.openxmlformats.org/presentationml/2006/main">
+<p:notes xmlns:a="http://schemas.openxmlformats.org/drawingml/2006/main" xmlns:p="http://schemas.openxmlformats.org/presentationml/2006/main" xmlns:r="http://schemas.openxmlformats.org/officeDocument/2006/relationships">
   <p:cSld>
     <p:spTree>
       <p:nvGrpSpPr>
@@ -1660,7 +1353,7 @@
         <p:nvSpPr>
           <p:cNvPr id="2" name="Slide Image Placeholder 1"/>
           <p:cNvSpPr>
-            <a:spLocks noGrp="1" noRot="1" noChangeAspect="1"/>
+            <a:spLocks noGrp="1"/>
           </p:cNvSpPr>
           <p:nvPr>
             <p:ph type="sldImg" idx="2"/>
@@ -1675,7 +1368,7 @@
             <a:spLocks noGrp="1"/>
           </p:cNvSpPr>
           <p:nvPr>
-            <p:ph type="body" sz="quarter" idx="3"/>
+            <p:ph type="body" idx="3" sz="quarter"/>
           </p:nvPr>
         </p:nvSpPr>
         <p:spPr/>
@@ -1687,17 +1380,13 @@
               <a:t>【第 4 頁 · P3 · 發現過程:兩種病,兩個缺口】　目標 52 秒 · 累計 3:45</a:t>
             </a:r>
           </a:p>
-          <a:p>
-            <a:endParaRPr/>
-          </a:p>
+          <a:p/>
           <a:p>
             <a:r>
               <a:t>★ 一百二十四筆誤報,一百零三筆是同一個根因 —— 八成三都是交通標誌辨識。</a:t>
             </a:r>
           </a:p>
-          <a:p>
-            <a:endParaRPr/>
-          </a:p>
+          <a:p/>
           <a:p>
             <a:r>
               <a:t>· 行車輔助錯的是模型(缺脈絡),駕駛監控錯的是人(缺判準)</a:t>
@@ -1713,9 +1402,7 @@
               <a:t>· 修好它,誤報跟漏放一起改善</a:t>
             </a:r>
           </a:p>
-          <a:p>
-            <a:endParaRPr/>
-          </a:p>
+          <a:p/>
           <a:p>
             <a:r>
               <a:t># 4 台車 · 23 天 · 1,647 筆</a:t>
@@ -1731,9 +1418,7 @@
               <a:t># 5 人 × 3.6 個分析日 × 8 小時 = 144 人時 ÷ 1,647 筆 = 5.25 分</a:t>
             </a:r>
           </a:p>
-          <a:p>
-            <a:endParaRPr/>
-          </a:p>
+          <a:p/>
           <a:p>
             <a:r>
               <a:t>⚠️ 必講「比例僅在此樣本內成立」—— 這句是這一頁所有數字的合法性來源</a:t>
@@ -1744,17 +1429,13 @@
               <a:t>⚠️ 5.25 分是「單一批次的實際節奏,不是長期平均」</a:t>
             </a:r>
           </a:p>
-          <a:p>
-            <a:endParaRPr/>
-          </a:p>
+          <a:p/>
           <a:p>
             <a:r>
               <a:t>→ 換下一頁</a:t>
             </a:r>
           </a:p>
-          <a:p>
-            <a:endParaRPr/>
-          </a:p>
+          <a:p/>
           <a:p>
             <a:r>
               <a:t>── 逐字備援 · 230 字(忘詞才看,不是拿來唸的)──</a:t>
@@ -1765,9 +1446,7 @@
               <a:t>那我們的時間到底花在哪裡?我把最近一份判讀拆開來看。四台車、二十三天、一千六百四十七筆,一個小型車隊一個月,比例僅在此樣本內成立。行車輔助錯的是模型,駕駛監控錯的是人。一邊缺脈絡,判定依據不在畫面裡;一邊缺判準,同一段影片兩人不同答案。這兩個比例共用同一把尺,而那把尺的一致性我們從來沒量過——標註品質那一包第十週建立基線,G2 訂目標值。這個樣本一百二十四筆誤報,一百零三筆同一個根因:交通標誌辨識,八成三。漏放那一側只有一份很薄的樣本,下一頁講。修好它,誤報跟漏放一起改善——而誤報,就是我們今天在人工端花掉的時間。</a:t>
             </a:r>
           </a:p>
-          <a:p>
-            <a:endParaRPr/>
-          </a:p>
+          <a:p/>
           <a:p>
             <a:r>
               <a:t>── 備查(不唸,答辯用)──</a:t>
@@ -1797,7 +1476,7 @@
             <a:spLocks noGrp="1"/>
           </p:cNvSpPr>
           <p:nvPr>
-            <p:ph type="sldNum" sz="quarter" idx="5"/>
+            <p:ph type="sldNum" idx="5" sz="quarter"/>
           </p:nvPr>
         </p:nvSpPr>
         <p:spPr/>
@@ -1811,7 +1490,7 @@
 </file>
 
 <file path=ppt/notesSlides/notesSlide5.xml><?xml version="1.0" encoding="utf-8"?>
-<p:notes xmlns:a="http://schemas.openxmlformats.org/drawingml/2006/main" xmlns:r="http://schemas.openxmlformats.org/officeDocument/2006/relationships" xmlns:p="http://schemas.openxmlformats.org/presentationml/2006/main">
+<p:notes xmlns:a="http://schemas.openxmlformats.org/drawingml/2006/main" xmlns:p="http://schemas.openxmlformats.org/presentationml/2006/main" xmlns:r="http://schemas.openxmlformats.org/officeDocument/2006/relationships">
   <p:cSld>
     <p:spTree>
       <p:nvGrpSpPr>
@@ -1831,7 +1510,7 @@
         <p:nvSpPr>
           <p:cNvPr id="2" name="Slide Image Placeholder 1"/>
           <p:cNvSpPr>
-            <a:spLocks noGrp="1" noRot="1" noChangeAspect="1"/>
+            <a:spLocks noGrp="1"/>
           </p:cNvSpPr>
           <p:nvPr>
             <p:ph type="sldImg" idx="2"/>
@@ -1846,7 +1525,7 @@
             <a:spLocks noGrp="1"/>
           </p:cNvSpPr>
           <p:nvPr>
-            <p:ph type="body" sz="quarter" idx="3"/>
+            <p:ph type="body" idx="3" sz="quarter"/>
           </p:nvPr>
         </p:nvSpPr>
         <p:spPr/>
@@ -1858,17 +1537,13 @@
               <a:t>【第 5 頁 · P4 · 我們看不見的那一半:有資料,沒有習慣】　目標 59 秒 · 累計 4:44</a:t>
             </a:r>
           </a:p>
-          <a:p>
-            <a:endParaRPr/>
-          </a:p>
+          <a:p/>
           <a:p>
             <a:r>
               <a:t>★ 我們有資料,沒有習慣 —— 被判否決的那一流,沒有人回看。</a:t>
             </a:r>
           </a:p>
-          <a:p>
-            <a:endParaRPr/>
-          </a:p>
+          <a:p/>
           <a:p>
             <a:r>
               <a:t>· 唯一的漏放量測是一份很薄的人工觸發測試</a:t>
@@ -1884,17 +1559,13 @@
               <a:t>· 誤報只花我們的人時,漏放是駕駛沒收到那次警示</a:t>
             </a:r>
           </a:p>
-          <a:p>
-            <a:endParaRPr/>
-          </a:p>
+          <a:p/>
           <a:p>
             <a:r>
               <a:t># 39 筆測試 · 漏偵 12 筆 · 另 10 筆無法歸類(約 1/4)</a:t>
             </a:r>
           </a:p>
-          <a:p>
-            <a:endParaRPr/>
-          </a:p>
+          <a:p/>
           <a:p>
             <a:r>
               <a:t>⚠️ 說「最強的線索,不是結論」—— W1–6 做成帶 95% 信賴區間的估計,不成立就換靶心</a:t>
@@ -1905,17 +1576,13 @@
               <a:t>⚠️ 🚫 83% 是第 4 頁的事,不要跟這一頁的漏放混講</a:t>
             </a:r>
           </a:p>
-          <a:p>
-            <a:endParaRPr/>
-          </a:p>
+          <a:p/>
           <a:p>
             <a:r>
               <a:t>→ 換下一頁</a:t>
             </a:r>
           </a:p>
-          <a:p>
-            <a:endParaRPr/>
-          </a:p>
+          <a:p/>
           <a:p>
             <a:r>
               <a:t>── 逐字備援 · 259 字(忘詞才看,不是拿來唸的)──</a:t>
@@ -1926,9 +1593,7 @@
               <a:t>這是我們看得見的一半。看不見的那一半更麻煩。被判否決的那一流,沒有人回看。我們有資料,沒有習慣。唯一的漏放量測,是一份三十九筆的人工觸發測試,獨立樣本:漏偵十二筆,另外十筆無法歸類,約四分之一;報告上我們自己註明,十二是下限。這是我目前手上最強的線索,不是結論;前六週由評估底座那一包做成帶信賴區間的估計,不成立就換靶心,G1 判。這兩種錯的代價不對稱:誤報只花我們的人時,漏放是駕駛沒收到那次警示。所以漏放這一側就算樣本再薄,也要先把它量出來。這批資料難在三件事:收得不完整、標註本身就會錯、內部對同一個標籤還沒有一致的理解。文獻上講的「沒有真實資料就只能靠代理指標」,就是這件事。</a:t>
             </a:r>
           </a:p>
-          <a:p>
-            <a:endParaRPr/>
-          </a:p>
+          <a:p/>
           <a:p>
             <a:r>
               <a:t>── 備查(不唸,答辯用)──</a:t>
@@ -1998,7 +1663,7 @@
             <a:spLocks noGrp="1"/>
           </p:cNvSpPr>
           <p:nvPr>
-            <p:ph type="sldNum" sz="quarter" idx="5"/>
+            <p:ph type="sldNum" idx="5" sz="quarter"/>
           </p:nvPr>
         </p:nvSpPr>
         <p:spPr/>
@@ -2012,7 +1677,7 @@
 </file>
 
 <file path=ppt/notesSlides/notesSlide6.xml><?xml version="1.0" encoding="utf-8"?>
-<p:notes xmlns:a="http://schemas.openxmlformats.org/drawingml/2006/main" xmlns:r="http://schemas.openxmlformats.org/officeDocument/2006/relationships" xmlns:p="http://schemas.openxmlformats.org/presentationml/2006/main">
+<p:notes xmlns:a="http://schemas.openxmlformats.org/drawingml/2006/main" xmlns:p="http://schemas.openxmlformats.org/presentationml/2006/main" xmlns:r="http://schemas.openxmlformats.org/officeDocument/2006/relationships">
   <p:cSld>
     <p:spTree>
       <p:nvGrpSpPr>
@@ -2032,7 +1697,7 @@
         <p:nvSpPr>
           <p:cNvPr id="2" name="Slide Image Placeholder 1"/>
           <p:cNvSpPr>
-            <a:spLocks noGrp="1" noRot="1" noChangeAspect="1"/>
+            <a:spLocks noGrp="1"/>
           </p:cNvSpPr>
           <p:nvPr>
             <p:ph type="sldImg" idx="2"/>
@@ -2047,7 +1712,7 @@
             <a:spLocks noGrp="1"/>
           </p:cNvSpPr>
           <p:nvPr>
-            <p:ph type="body" sz="quarter" idx="3"/>
+            <p:ph type="body" idx="3" sz="quarter"/>
           </p:nvPr>
         </p:nvSpPr>
         <p:spPr/>
@@ -2059,17 +1724,13 @@
               <a:t>【第 6 頁 · P5 · 五條路,含三條不用 AI】　目標 44 秒 · 累計 5:28</a:t>
             </a:r>
           </a:p>
-          <a:p>
-            <a:endParaRPr/>
-          </a:p>
+          <a:p/>
           <a:p>
             <a:r>
               <a:t>★ 這六個月,它一筆都不對外生效。</a:t>
             </a:r>
           </a:p>
-          <a:p>
-            <a:endParaRPr/>
-          </a:p>
+          <a:p/>
           <a:p>
             <a:r>
               <a:t>· 五條路裡三條不用 AI —— 加人、調班、既有雲端規劃,我都沒有先否決</a:t>
@@ -2085,17 +1746,13 @@
               <a:t>· 影子模式:機器照出結論但不對外送,人照常判,兩邊比對</a:t>
             </a:r>
           </a:p>
-          <a:p>
-            <a:endParaRPr/>
-          </a:p>
+          <a:p/>
           <a:p>
             <a:r>
               <a:t># 85% 是分流率(推估非實測) · 六個月對外覆蓋率 0%</a:t>
             </a:r>
           </a:p>
-          <a:p>
-            <a:endParaRPr/>
-          </a:p>
+          <a:p/>
           <a:p>
             <a:r>
               <a:t>⚠️ 三層一層都不可省:能力層 850 筆終局判定 / 本案層 對外 0% / 放行層 須過另一道獨立門</a:t>
@@ -2111,17 +1768,13 @@
               <a:t>⚠️ 🚫 85% 是分流率,不是準確率,不可與誤報率並排相減</a:t>
             </a:r>
           </a:p>
-          <a:p>
-            <a:endParaRPr/>
-          </a:p>
+          <a:p/>
           <a:p>
             <a:r>
               <a:t>→ 換下一頁</a:t>
             </a:r>
           </a:p>
-          <a:p>
-            <a:endParaRPr/>
-          </a:p>
+          <a:p/>
           <a:p>
             <a:r>
               <a:t>── 逐字備援 · 195 字(忘詞才看,不是拿來唸的)──</a:t>
@@ -2132,9 +1785,7 @@
               <a:t>路有五條。加人,迴路轉得更久,不會停。更便宜的是調班加人力池,我不先否決;六週後那道門用正式量測判:AI能處理的那段佔主要延遲才放行,否則轉排班。採用案是地端視覺語言模型讀事件影片。前兩包是它的必要前置:沒量測底座,就不知道它判得對不對。預期八成五的爭議件,機器有把握、直接結案,人不再看。這是推估不是實測;而人現在判得多準,我們沒量過。所以這六個月,它一筆都不對外生效——機器照出結論,人照常判,兩邊比對。這是唯一算得出自動結案漏放率的設計。</a:t>
             </a:r>
           </a:p>
-          <a:p>
-            <a:endParaRPr/>
-          </a:p>
+          <a:p/>
           <a:p>
             <a:r>
               <a:t>── 備查(不唸,答辯用)──</a:t>
@@ -2154,7 +1805,7 @@
             <a:spLocks noGrp="1"/>
           </p:cNvSpPr>
           <p:nvPr>
-            <p:ph type="sldNum" sz="quarter" idx="5"/>
+            <p:ph type="sldNum" idx="5" sz="quarter"/>
           </p:nvPr>
         </p:nvSpPr>
         <p:spPr/>
@@ -2168,7 +1819,7 @@
 </file>
 
 <file path=ppt/notesSlides/notesSlide7.xml><?xml version="1.0" encoding="utf-8"?>
-<p:notes xmlns:a="http://schemas.openxmlformats.org/drawingml/2006/main" xmlns:r="http://schemas.openxmlformats.org/officeDocument/2006/relationships" xmlns:p="http://schemas.openxmlformats.org/presentationml/2006/main">
+<p:notes xmlns:a="http://schemas.openxmlformats.org/drawingml/2006/main" xmlns:p="http://schemas.openxmlformats.org/presentationml/2006/main" xmlns:r="http://schemas.openxmlformats.org/officeDocument/2006/relationships">
   <p:cSld>
     <p:spTree>
       <p:nvGrpSpPr>
@@ -2188,7 +1839,7 @@
         <p:nvSpPr>
           <p:cNvPr id="2" name="Slide Image Placeholder 1"/>
           <p:cNvSpPr>
-            <a:spLocks noGrp="1" noRot="1" noChangeAspect="1"/>
+            <a:spLocks noGrp="1"/>
           </p:cNvSpPr>
           <p:nvPr>
             <p:ph type="sldImg" idx="2"/>
@@ -2203,7 +1854,7 @@
             <a:spLocks noGrp="1"/>
           </p:cNvSpPr>
           <p:nvPr>
-            <p:ph type="body" sz="quarter" idx="3"/>
+            <p:ph type="body" idx="3" sz="quarter"/>
           </p:nvPr>
         </p:nvSpPr>
         <p:spPr/>
@@ -2215,20 +1866,16 @@
               <a:t>【第 7 頁 · P6 · 風險:七類十條,緩解位移與殘餘風險】　目標 51 秒 · 累計 6:19</a:t>
             </a:r>
           </a:p>
-          <a:p>
-            <a:endParaRPr/>
-          </a:p>
-          <a:p>
-            <a:r>
-              <a:t>★ 這個緩解只擋得住人還在看的那些 —— 移交後那八成五,沒有介面,也沒有人。</a:t>
-            </a:r>
-          </a:p>
-          <a:p>
-            <a:endParaRPr/>
-          </a:p>
-          <a:p>
-            <a:r>
-              <a:t>· 資料級聯:判準不一致會變成訓練標籤</a:t>
+          <a:p/>
+          <a:p>
+            <a:r>
+              <a:t>★ 每一條風險我都附了偵測訊號 —— 你不會在事後才知道它發生了。</a:t>
+            </a:r>
+          </a:p>
+          <a:p/>
+          <a:p>
+            <a:r>
+              <a:t>· 七類十條,兩條是這個方案自己造成的 —— 我沒有藏,自己標出來</a:t>
             </a:r>
           </a:p>
           <a:p>
@@ -2238,20 +1885,16 @@
           </a:p>
           <a:p>
             <a:r>
-              <a:t>· 所以我另外加了兩條這個方案自己造成的風險</a:t>
-            </a:r>
-          </a:p>
-          <a:p>
-            <a:endParaRPr/>
-          </a:p>
+              <a:t>· 但那個緩解只擋得住人還在看的那些 —— 移交後那八成五沒有介面也沒有人,所以我另外加了 R9、R10 兩條,掛在自動結案那道門上</a:t>
+            </a:r>
+          </a:p>
+          <a:p/>
           <a:p>
             <a:r>
               <a:t># 七類十條 · R9 自動結案的漏放 · R10 自動結案的冤枉</a:t>
             </a:r>
           </a:p>
-          <a:p>
-            <a:endParaRPr/>
-          </a:p>
+          <a:p/>
           <a:p>
             <a:r>
               <a:t>⚠️ R8 法律面我沒有答案 —— 由法務在 G1(第 6 週)前給書面意見</a:t>
@@ -2262,9 +1905,7 @@
               <a:t>⚠️ 每一條沒有答案的事,都要當場交代誰在第幾週給</a:t>
             </a:r>
           </a:p>
-          <a:p>
-            <a:endParaRPr/>
-          </a:p>
+          <a:p/>
           <a:p>
             <a:r>
               <a:t>── 錄影提示(不唸)──</a:t>
@@ -2280,17 +1921,13 @@
               <a:t>· 唸完法務那句後,畫面停在 R8 紅圈上靜止 2 秒</a:t>
             </a:r>
           </a:p>
-          <a:p>
-            <a:endParaRPr/>
-          </a:p>
+          <a:p/>
           <a:p>
             <a:r>
               <a:t>→ 換下一頁</a:t>
             </a:r>
           </a:p>
-          <a:p>
-            <a:endParaRPr/>
-          </a:p>
+          <a:p/>
           <a:p>
             <a:r>
               <a:t>── 逐字備援 · 223 字(忘詞才看,不是拿來唸的)──</a:t>
@@ -2301,9 +1938,7 @@
               <a:t>選了這條,我先講它會出什麼事。風險歸成七類十條,我只講三條。第一,資料級聯:複核判準不一致會變成訓練標籤,脈絡資料有錯也會整批傳下去。第二,自動化偏差:介面一顯示模型信心,人就直接蓋章。我的決策是介面不顯示信心。但這個緩解只擋得住人還在看的那些 —— 移交後開到天花板,那八成五沒有介面、也沒有人。所以我另外加了兩條:機器把真的危險事件判成誤報,跟機器單方面駁回駕駛。兩條都掛在自動結案那道門上,不在這六個月裡。第三,法律面:曾判為誤報的紀錄,在事故舉證裡算什麼。這題我沒有答案,它由法務在 G1 前給書面意見。</a:t>
             </a:r>
           </a:p>
-          <a:p>
-            <a:endParaRPr/>
-          </a:p>
+          <a:p/>
           <a:p>
             <a:r>
               <a:t>── 備查(不唸,答辯用)──</a:t>
@@ -2323,7 +1958,7 @@
             <a:spLocks noGrp="1"/>
           </p:cNvSpPr>
           <p:nvPr>
-            <p:ph type="sldNum" sz="quarter" idx="5"/>
+            <p:ph type="sldNum" idx="5" sz="quarter"/>
           </p:nvPr>
         </p:nvSpPr>
         <p:spPr/>
@@ -2337,7 +1972,7 @@
 </file>
 
 <file path=ppt/notesSlides/notesSlide8.xml><?xml version="1.0" encoding="utf-8"?>
-<p:notes xmlns:a="http://schemas.openxmlformats.org/drawingml/2006/main" xmlns:r="http://schemas.openxmlformats.org/officeDocument/2006/relationships" xmlns:p="http://schemas.openxmlformats.org/presentationml/2006/main">
+<p:notes xmlns:a="http://schemas.openxmlformats.org/drawingml/2006/main" xmlns:p="http://schemas.openxmlformats.org/presentationml/2006/main" xmlns:r="http://schemas.openxmlformats.org/officeDocument/2006/relationships">
   <p:cSld>
     <p:spTree>
       <p:nvGrpSpPr>
@@ -2357,7 +1992,7 @@
         <p:nvSpPr>
           <p:cNvPr id="2" name="Slide Image Placeholder 1"/>
           <p:cNvSpPr>
-            <a:spLocks noGrp="1" noRot="1" noChangeAspect="1"/>
+            <a:spLocks noGrp="1"/>
           </p:cNvSpPr>
           <p:nvPr>
             <p:ph type="sldImg" idx="2"/>
@@ -2372,7 +2007,7 @@
             <a:spLocks noGrp="1"/>
           </p:cNvSpPr>
           <p:nvPr>
-            <p:ph type="body" sz="quarter" idx="3"/>
+            <p:ph type="body" idx="3" sz="quarter"/>
           </p:nvPr>
         </p:nvSpPr>
         <p:spPr/>
@@ -2384,20 +2019,16 @@
               <a:t>【第 8 頁 · P7 · 倫理與可申訴性:對照澳洲 AI 倫理八原則】　目標 50 秒 · 累計 7:08</a:t>
             </a:r>
           </a:p>
-          <a:p>
-            <a:endParaRPr/>
-          </a:p>
-          <a:p>
-            <a:r>
-              <a:t>★ 每一千筆爭議,有八百五十筆沒有人會看過。</a:t>
-            </a:r>
-          </a:p>
-          <a:p>
-            <a:endParaRPr/>
-          </a:p>
-          <a:p>
-            <a:r>
-              <a:t>· 同一張表兩欄:專案期一種顏色,移交後另一種</a:t>
+          <a:p/>
+          <a:p>
+            <a:r>
+              <a:t>★ 這一頁就是我要求六個月不對外生效的理由 —— 那 850 筆沒有人看,所以要先量得出它錯多少。</a:t>
+            </a:r>
+          </a:p>
+          <a:p/>
+          <a:p>
+            <a:r>
+              <a:t>· 同一張表兩欄:專案期一種顏色,移交後另一種 —— 今天要批的是左邊那欄</a:t>
             </a:r>
           </a:p>
           <a:p>
@@ -2410,17 +2041,13 @@
               <a:t>· 第 8 條問責性:那 850 筆裡某一筆判錯,沒有人簽過名</a:t>
             </a:r>
           </a:p>
-          <a:p>
-            <a:endParaRPr/>
-          </a:p>
+          <a:p/>
           <a:p>
             <a:r>
               <a:t># 專案期 綠 0 琥珀 7 紅 1 → 移交後 綠 0 琥珀 1 紅 7</a:t>
             </a:r>
           </a:p>
-          <a:p>
-            <a:endParaRPr/>
-          </a:p>
+          <a:p/>
           <a:p>
             <a:r>
               <a:t>⚠️ 「沒有人簽過名」是**承認洞**,🚫 不要臨場補一個人上去</a:t>
@@ -2431,9 +2058,7 @@
               <a:t>⚠️ 第 4 條隱私是唯一不因自動結案惡化的一條 —— 刻意不標紅,不是漏標</a:t>
             </a:r>
           </a:p>
-          <a:p>
-            <a:endParaRPr/>
-          </a:p>
+          <a:p/>
           <a:p>
             <a:r>
               <a:t>── 錄影提示(不唸)──</a:t>
@@ -2449,17 +2074,13 @@
               <a:t>· 交界移交:P7 → P8 的接縫句為「講完該不該做,接下來是怎麼算做成了。」依總則檔 §6b,該句寫成 P8 口白的第一句、字數計入 P8,故不列入本頁 224 字。</a:t>
             </a:r>
           </a:p>
-          <a:p>
-            <a:endParaRPr/>
-          </a:p>
+          <a:p/>
           <a:p>
             <a:r>
               <a:t>→ 換下一頁</a:t>
             </a:r>
           </a:p>
-          <a:p>
-            <a:endParaRPr/>
-          </a:p>
+          <a:p/>
           <a:p>
             <a:r>
               <a:t>── 逐字備援 · 219 字(忘詞才看,不是拿來唸的)──</a:t>
@@ -2470,9 +2091,7 @@
               <a:t>還有一條,是我們自己造成的。這道人工防線的產能有限,所以它是配給的 —— 依客戶的購買量排序。同樣一個誤判,發生在大客戶身上會被人攔下來,小客戶身上不會。分配依據是客戶大小,不是風險大小。這六個月我能做的,是第一次量得出它覆蓋了誰。但我要說清楚:這個方案開到天花板之後,配給的依據會從客戶大小換成機器的信心,而那八成五沒有人看過 —— 那是我造成的新問題,不是我解掉的舊問題。所以八原則裡的問責跟可申訴性,我這一頁全部標紅,而它們掛在第二十四週那道門上。申訴機制到位前,本案產出不供個人考核使用。</a:t>
             </a:r>
           </a:p>
-          <a:p>
-            <a:endParaRPr/>
-          </a:p>
+          <a:p/>
           <a:p>
             <a:r>
               <a:t>── 備查(不唸,答辯用)──</a:t>
@@ -2492,7 +2111,7 @@
             <a:spLocks noGrp="1"/>
           </p:cNvSpPr>
           <p:nvPr>
-            <p:ph type="sldNum" sz="quarter" idx="5"/>
+            <p:ph type="sldNum" idx="5" sz="quarter"/>
           </p:nvPr>
         </p:nvSpPr>
         <p:spPr/>
@@ -2506,7 +2125,7 @@
 </file>
 
 <file path=ppt/notesSlides/notesSlide9.xml><?xml version="1.0" encoding="utf-8"?>
-<p:notes xmlns:a="http://schemas.openxmlformats.org/drawingml/2006/main" xmlns:r="http://schemas.openxmlformats.org/officeDocument/2006/relationships" xmlns:p="http://schemas.openxmlformats.org/presentationml/2006/main">
+<p:notes xmlns:a="http://schemas.openxmlformats.org/drawingml/2006/main" xmlns:p="http://schemas.openxmlformats.org/presentationml/2006/main" xmlns:r="http://schemas.openxmlformats.org/officeDocument/2006/relationships">
   <p:cSld>
     <p:spTree>
       <p:nvGrpSpPr>
@@ -2526,7 +2145,7 @@
         <p:nvSpPr>
           <p:cNvPr id="2" name="Slide Image Placeholder 1"/>
           <p:cNvSpPr>
-            <a:spLocks noGrp="1" noRot="1" noChangeAspect="1"/>
+            <a:spLocks noGrp="1"/>
           </p:cNvSpPr>
           <p:nvPr>
             <p:ph type="sldImg" idx="2"/>
@@ -2541,7 +2160,7 @@
             <a:spLocks noGrp="1"/>
           </p:cNvSpPr>
           <p:nvPr>
-            <p:ph type="body" sz="quarter" idx="3"/>
+            <p:ph type="body" idx="3" sz="quarter"/>
           </p:nvPr>
         </p:nvSpPr>
         <p:spPr/>
@@ -2553,25 +2172,21 @@
               <a:t>【第 9 頁 · P8 · 怎麼算成功:三層 KPI,一條回圈】　目標 46 秒 · 累計 7:54</a:t>
             </a:r>
           </a:p>
-          <a:p>
-            <a:endParaRPr/>
-          </a:p>
-          <a:p>
-            <a:r>
-              <a:t>★ 證明它有效的方法,同時是喊停它的方法。</a:t>
-            </a:r>
-          </a:p>
-          <a:p>
-            <a:endParaRPr/>
-          </a:p>
-          <a:p>
-            <a:r>
-              <a:t>· 上面兩層回答「怎麼證明有效」,護欄層回答「什麼情況下喊停」</a:t>
-            </a:r>
-          </a:p>
-          <a:p>
-            <a:r>
-              <a:t>· 護欄任一未達標,上面兩層的成績一律不採計</a:t>
+          <a:p/>
+          <a:p>
+            <a:r>
+              <a:t>★ 上面兩層是你買到的東西,下面四條是你隨時喊停的權力 —— 而煞車是我自己裝的。</a:t>
+            </a:r>
+          </a:p>
+          <a:p/>
+          <a:p>
+            <a:r>
+              <a:t>· 效益層:爭議回覆時效、可避免的年度增聘、兩條工作流的單位工時</a:t>
+            </a:r>
+          </a:p>
+          <a:p>
+            <a:r>
+              <a:t>· 護欄層任一未達標,上面兩層的成績一律不採計</a:t>
             </a:r>
           </a:p>
           <a:p>
@@ -2579,9 +2194,7 @@
               <a:t>· 訂不出目標值的,寫明由哪一道門訂</a:t>
             </a:r>
           </a:p>
-          <a:p>
-            <a:endParaRPr/>
-          </a:p>
+          <a:p/>
           <a:p>
             <a:r>
               <a:t># ⑩ 漏放率 W6 交 95% CI · ⑬ 漏濾率 W12 交差值 95% CI</a:t>
@@ -2592,25 +2205,19 @@
               <a:t># δ 由委員會在 G1 事前預註冊 —— 判準寫在跑實驗之前</a:t>
             </a:r>
           </a:p>
-          <a:p>
-            <a:endParaRPr/>
-          </a:p>
+          <a:p/>
           <a:p>
             <a:r>
               <a:t>⚠️ ⑬ 的母體是那 850 筆(有把握桶),🚫 不是剩下的 150 筆</a:t>
             </a:r>
           </a:p>
-          <a:p>
-            <a:endParaRPr/>
-          </a:p>
+          <a:p/>
           <a:p>
             <a:r>
               <a:t>→ 換下一頁</a:t>
             </a:r>
           </a:p>
-          <a:p>
-            <a:endParaRPr/>
-          </a:p>
+          <a:p/>
           <a:p>
             <a:r>
               <a:t>── 逐字備援 · 201 字(忘詞才看,不是拿來唸的)──</a:t>
@@ -2621,9 +2228,7 @@
               <a:t>講完該不該做,接下來是怎麼算做成了。最上層第一個指標,是客戶等多久拿到分析,這是這個專案要買的東西。現況兩到五天,目標兩天內、單純案件當天;是客戶期望,不是已簽的服務水準協議。護欄層是否決型,今天多一條:漏濾率——機器說有把握、直接結案的那一桶裡,有多少其實該讓人看。第十二週交出它跟人工的差值,門檻第六週就要先訂,不能看完數據再訂。錯誤攔截比例我算不出來,分母還不存在,那正是護欄層要交的能力。訂不出目標值的,我寫的是它什麼時候被訂出來、由哪一道門訂。</a:t>
             </a:r>
           </a:p>
-          <a:p>
-            <a:endParaRPr/>
-          </a:p>
+          <a:p/>
           <a:p>
             <a:r>
               <a:t>── 備查(不唸,答辯用)──</a:t>
@@ -2643,7 +2248,7 @@
             <a:spLocks noGrp="1"/>
           </p:cNvSpPr>
           <p:nvPr>
-            <p:ph type="sldNum" sz="quarter" idx="5"/>
+            <p:ph type="sldNum" idx="5" sz="quarter"/>
           </p:nvPr>
         </p:nvSpPr>
         <p:spPr/>
@@ -2694,9 +2299,10 @@
           <a:lstStyle/>
           <a:p>
             <a:r>
-              <a:rPr lang="en-US"/>
+              <a:rPr lang="en-US" smtClean="0"/>
               <a:t>Click to edit Master title style</a:t>
             </a:r>
+            <a:endParaRPr lang="en-US"/>
           </a:p>
         </p:txBody>
       </p:sp>
@@ -2812,9 +2418,10 @@
           </a:lstStyle>
           <a:p>
             <a:r>
-              <a:rPr lang="en-US"/>
+              <a:rPr lang="en-US" smtClean="0"/>
               <a:t>Click to edit Master subtitle style</a:t>
             </a:r>
+            <a:endParaRPr lang="en-US"/>
           </a:p>
         </p:txBody>
       </p:sp>
@@ -2835,7 +2442,7 @@
           <a:p>
             <a:fld id="{5BCAD085-E8A6-8845-BD4E-CB4CCA059FC4}" type="datetimeFigureOut">
               <a:rPr lang="en-US" smtClean="0"/>
-              <a:t>8/16/2026</a:t>
+              <a:t>1/27/13</a:t>
             </a:fld>
             <a:endParaRPr lang="en-US"/>
           </a:p>
@@ -2929,9 +2536,10 @@
           <a:lstStyle/>
           <a:p>
             <a:r>
-              <a:rPr lang="en-US"/>
+              <a:rPr lang="en-US" smtClean="0"/>
               <a:t>Click to edit Master title style</a:t>
             </a:r>
+            <a:endParaRPr lang="en-US"/>
           </a:p>
         </p:txBody>
       </p:sp>
@@ -2952,37 +2560,38 @@
           <a:p>
             <a:pPr lvl="0"/>
             <a:r>
-              <a:rPr lang="en-US"/>
+              <a:rPr lang="en-US" smtClean="0"/>
               <a:t>Click to edit Master text styles</a:t>
             </a:r>
           </a:p>
           <a:p>
             <a:pPr lvl="1"/>
             <a:r>
-              <a:rPr lang="en-US"/>
+              <a:rPr lang="en-US" smtClean="0"/>
               <a:t>Second level</a:t>
             </a:r>
           </a:p>
           <a:p>
             <a:pPr lvl="2"/>
             <a:r>
-              <a:rPr lang="en-US"/>
+              <a:rPr lang="en-US" smtClean="0"/>
               <a:t>Third level</a:t>
             </a:r>
           </a:p>
           <a:p>
             <a:pPr lvl="3"/>
             <a:r>
-              <a:rPr lang="en-US"/>
+              <a:rPr lang="en-US" smtClean="0"/>
               <a:t>Fourth level</a:t>
             </a:r>
           </a:p>
           <a:p>
             <a:pPr lvl="4"/>
             <a:r>
-              <a:rPr lang="en-US"/>
+              <a:rPr lang="en-US" smtClean="0"/>
               <a:t>Fifth level</a:t>
             </a:r>
+            <a:endParaRPr lang="en-US"/>
           </a:p>
         </p:txBody>
       </p:sp>
@@ -3003,7 +2612,7 @@
           <a:p>
             <a:fld id="{5BCAD085-E8A6-8845-BD4E-CB4CCA059FC4}" type="datetimeFigureOut">
               <a:rPr lang="en-US" smtClean="0"/>
-              <a:t>8/16/2026</a:t>
+              <a:t>1/27/13</a:t>
             </a:fld>
             <a:endParaRPr lang="en-US"/>
           </a:p>
@@ -3102,9 +2711,10 @@
           <a:lstStyle/>
           <a:p>
             <a:r>
-              <a:rPr lang="en-US"/>
+              <a:rPr lang="en-US" smtClean="0"/>
               <a:t>Click to edit Master title style</a:t>
             </a:r>
+            <a:endParaRPr lang="en-US"/>
           </a:p>
         </p:txBody>
       </p:sp>
@@ -3130,37 +2740,38 @@
           <a:p>
             <a:pPr lvl="0"/>
             <a:r>
-              <a:rPr lang="en-US"/>
+              <a:rPr lang="en-US" smtClean="0"/>
               <a:t>Click to edit Master text styles</a:t>
             </a:r>
           </a:p>
           <a:p>
             <a:pPr lvl="1"/>
             <a:r>
-              <a:rPr lang="en-US"/>
+              <a:rPr lang="en-US" smtClean="0"/>
               <a:t>Second level</a:t>
             </a:r>
           </a:p>
           <a:p>
             <a:pPr lvl="2"/>
             <a:r>
-              <a:rPr lang="en-US"/>
+              <a:rPr lang="en-US" smtClean="0"/>
               <a:t>Third level</a:t>
             </a:r>
           </a:p>
           <a:p>
             <a:pPr lvl="3"/>
             <a:r>
-              <a:rPr lang="en-US"/>
+              <a:rPr lang="en-US" smtClean="0"/>
               <a:t>Fourth level</a:t>
             </a:r>
           </a:p>
           <a:p>
             <a:pPr lvl="4"/>
             <a:r>
-              <a:rPr lang="en-US"/>
+              <a:rPr lang="en-US" smtClean="0"/>
               <a:t>Fifth level</a:t>
             </a:r>
+            <a:endParaRPr lang="en-US"/>
           </a:p>
         </p:txBody>
       </p:sp>
@@ -3181,7 +2792,7 @@
           <a:p>
             <a:fld id="{5BCAD085-E8A6-8845-BD4E-CB4CCA059FC4}" type="datetimeFigureOut">
               <a:rPr lang="en-US" smtClean="0"/>
-              <a:t>8/16/2026</a:t>
+              <a:t>1/27/13</a:t>
             </a:fld>
             <a:endParaRPr lang="en-US"/>
           </a:p>
@@ -3275,9 +2886,10 @@
           <a:lstStyle/>
           <a:p>
             <a:r>
-              <a:rPr lang="en-US"/>
+              <a:rPr lang="en-US" smtClean="0"/>
               <a:t>Click to edit Master title style</a:t>
             </a:r>
+            <a:endParaRPr lang="en-US"/>
           </a:p>
         </p:txBody>
       </p:sp>
@@ -3298,37 +2910,38 @@
           <a:p>
             <a:pPr lvl="0"/>
             <a:r>
-              <a:rPr lang="en-US"/>
+              <a:rPr lang="en-US" smtClean="0"/>
               <a:t>Click to edit Master text styles</a:t>
             </a:r>
           </a:p>
           <a:p>
             <a:pPr lvl="1"/>
             <a:r>
-              <a:rPr lang="en-US"/>
+              <a:rPr lang="en-US" smtClean="0"/>
               <a:t>Second level</a:t>
             </a:r>
           </a:p>
           <a:p>
             <a:pPr lvl="2"/>
             <a:r>
-              <a:rPr lang="en-US"/>
+              <a:rPr lang="en-US" smtClean="0"/>
               <a:t>Third level</a:t>
             </a:r>
           </a:p>
           <a:p>
             <a:pPr lvl="3"/>
             <a:r>
-              <a:rPr lang="en-US"/>
+              <a:rPr lang="en-US" smtClean="0"/>
               <a:t>Fourth level</a:t>
             </a:r>
           </a:p>
           <a:p>
             <a:pPr lvl="4"/>
             <a:r>
-              <a:rPr lang="en-US"/>
+              <a:rPr lang="en-US" smtClean="0"/>
               <a:t>Fifth level</a:t>
             </a:r>
+            <a:endParaRPr lang="en-US"/>
           </a:p>
         </p:txBody>
       </p:sp>
@@ -3349,7 +2962,7 @@
           <a:p>
             <a:fld id="{5BCAD085-E8A6-8845-BD4E-CB4CCA059FC4}" type="datetimeFigureOut">
               <a:rPr lang="en-US" smtClean="0"/>
-              <a:t>8/16/2026</a:t>
+              <a:t>1/27/13</a:t>
             </a:fld>
             <a:endParaRPr lang="en-US"/>
           </a:p>
@@ -3452,9 +3065,10 @@
           </a:lstStyle>
           <a:p>
             <a:r>
-              <a:rPr lang="en-US"/>
+              <a:rPr lang="en-US" smtClean="0"/>
               <a:t>Click to edit Master title style</a:t>
             </a:r>
+            <a:endParaRPr lang="en-US"/>
           </a:p>
         </p:txBody>
       </p:sp>
@@ -3571,7 +3185,7 @@
           <a:p>
             <a:pPr lvl="0"/>
             <a:r>
-              <a:rPr lang="en-US"/>
+              <a:rPr lang="en-US" smtClean="0"/>
               <a:t>Click to edit Master text styles</a:t>
             </a:r>
           </a:p>
@@ -3594,7 +3208,7 @@
           <a:p>
             <a:fld id="{5BCAD085-E8A6-8845-BD4E-CB4CCA059FC4}" type="datetimeFigureOut">
               <a:rPr lang="en-US" smtClean="0"/>
-              <a:t>8/16/2026</a:t>
+              <a:t>1/27/13</a:t>
             </a:fld>
             <a:endParaRPr lang="en-US"/>
           </a:p>
@@ -3688,9 +3302,10 @@
           <a:lstStyle/>
           <a:p>
             <a:r>
-              <a:rPr lang="en-US"/>
+              <a:rPr lang="en-US" smtClean="0"/>
               <a:t>Click to edit Master title style</a:t>
             </a:r>
+            <a:endParaRPr lang="en-US"/>
           </a:p>
         </p:txBody>
       </p:sp>
@@ -3744,37 +3359,38 @@
           <a:p>
             <a:pPr lvl="0"/>
             <a:r>
-              <a:rPr lang="en-US"/>
+              <a:rPr lang="en-US" smtClean="0"/>
               <a:t>Click to edit Master text styles</a:t>
             </a:r>
           </a:p>
           <a:p>
             <a:pPr lvl="1"/>
             <a:r>
-              <a:rPr lang="en-US"/>
+              <a:rPr lang="en-US" smtClean="0"/>
               <a:t>Second level</a:t>
             </a:r>
           </a:p>
           <a:p>
             <a:pPr lvl="2"/>
             <a:r>
-              <a:rPr lang="en-US"/>
+              <a:rPr lang="en-US" smtClean="0"/>
               <a:t>Third level</a:t>
             </a:r>
           </a:p>
           <a:p>
             <a:pPr lvl="3"/>
             <a:r>
-              <a:rPr lang="en-US"/>
+              <a:rPr lang="en-US" smtClean="0"/>
               <a:t>Fourth level</a:t>
             </a:r>
           </a:p>
           <a:p>
             <a:pPr lvl="4"/>
             <a:r>
-              <a:rPr lang="en-US"/>
+              <a:rPr lang="en-US" smtClean="0"/>
               <a:t>Fifth level</a:t>
             </a:r>
+            <a:endParaRPr lang="en-US"/>
           </a:p>
         </p:txBody>
       </p:sp>
@@ -3828,37 +3444,38 @@
           <a:p>
             <a:pPr lvl="0"/>
             <a:r>
-              <a:rPr lang="en-US"/>
+              <a:rPr lang="en-US" smtClean="0"/>
               <a:t>Click to edit Master text styles</a:t>
             </a:r>
           </a:p>
           <a:p>
             <a:pPr lvl="1"/>
             <a:r>
-              <a:rPr lang="en-US"/>
+              <a:rPr lang="en-US" smtClean="0"/>
               <a:t>Second level</a:t>
             </a:r>
           </a:p>
           <a:p>
             <a:pPr lvl="2"/>
             <a:r>
-              <a:rPr lang="en-US"/>
+              <a:rPr lang="en-US" smtClean="0"/>
               <a:t>Third level</a:t>
             </a:r>
           </a:p>
           <a:p>
             <a:pPr lvl="3"/>
             <a:r>
-              <a:rPr lang="en-US"/>
+              <a:rPr lang="en-US" smtClean="0"/>
               <a:t>Fourth level</a:t>
             </a:r>
           </a:p>
           <a:p>
             <a:pPr lvl="4"/>
             <a:r>
-              <a:rPr lang="en-US"/>
+              <a:rPr lang="en-US" smtClean="0"/>
               <a:t>Fifth level</a:t>
             </a:r>
+            <a:endParaRPr lang="en-US"/>
           </a:p>
         </p:txBody>
       </p:sp>
@@ -3879,7 +3496,7 @@
           <a:p>
             <a:fld id="{5BCAD085-E8A6-8845-BD4E-CB4CCA059FC4}" type="datetimeFigureOut">
               <a:rPr lang="en-US" smtClean="0"/>
-              <a:t>8/16/2026</a:t>
+              <a:t>1/27/13</a:t>
             </a:fld>
             <a:endParaRPr lang="en-US"/>
           </a:p>
@@ -3977,9 +3594,10 @@
           </a:lstStyle>
           <a:p>
             <a:r>
-              <a:rPr lang="en-US"/>
+              <a:rPr lang="en-US" smtClean="0"/>
               <a:t>Click to edit Master title style</a:t>
             </a:r>
+            <a:endParaRPr lang="en-US"/>
           </a:p>
         </p:txBody>
       </p:sp>
@@ -4042,7 +3660,7 @@
           <a:p>
             <a:pPr lvl="0"/>
             <a:r>
-              <a:rPr lang="en-US"/>
+              <a:rPr lang="en-US" smtClean="0"/>
               <a:t>Click to edit Master text styles</a:t>
             </a:r>
           </a:p>
@@ -4098,37 +3716,38 @@
           <a:p>
             <a:pPr lvl="0"/>
             <a:r>
-              <a:rPr lang="en-US"/>
+              <a:rPr lang="en-US" smtClean="0"/>
               <a:t>Click to edit Master text styles</a:t>
             </a:r>
           </a:p>
           <a:p>
             <a:pPr lvl="1"/>
             <a:r>
-              <a:rPr lang="en-US"/>
+              <a:rPr lang="en-US" smtClean="0"/>
               <a:t>Second level</a:t>
             </a:r>
           </a:p>
           <a:p>
             <a:pPr lvl="2"/>
             <a:r>
-              <a:rPr lang="en-US"/>
+              <a:rPr lang="en-US" smtClean="0"/>
               <a:t>Third level</a:t>
             </a:r>
           </a:p>
           <a:p>
             <a:pPr lvl="3"/>
             <a:r>
-              <a:rPr lang="en-US"/>
+              <a:rPr lang="en-US" smtClean="0"/>
               <a:t>Fourth level</a:t>
             </a:r>
           </a:p>
           <a:p>
             <a:pPr lvl="4"/>
             <a:r>
-              <a:rPr lang="en-US"/>
+              <a:rPr lang="en-US" smtClean="0"/>
               <a:t>Fifth level</a:t>
             </a:r>
+            <a:endParaRPr lang="en-US"/>
           </a:p>
         </p:txBody>
       </p:sp>
@@ -4191,7 +3810,7 @@
           <a:p>
             <a:pPr lvl="0"/>
             <a:r>
-              <a:rPr lang="en-US"/>
+              <a:rPr lang="en-US" smtClean="0"/>
               <a:t>Click to edit Master text styles</a:t>
             </a:r>
           </a:p>
@@ -4247,37 +3866,38 @@
           <a:p>
             <a:pPr lvl="0"/>
             <a:r>
-              <a:rPr lang="en-US"/>
+              <a:rPr lang="en-US" smtClean="0"/>
               <a:t>Click to edit Master text styles</a:t>
             </a:r>
           </a:p>
           <a:p>
             <a:pPr lvl="1"/>
             <a:r>
-              <a:rPr lang="en-US"/>
+              <a:rPr lang="en-US" smtClean="0"/>
               <a:t>Second level</a:t>
             </a:r>
           </a:p>
           <a:p>
             <a:pPr lvl="2"/>
             <a:r>
-              <a:rPr lang="en-US"/>
+              <a:rPr lang="en-US" smtClean="0"/>
               <a:t>Third level</a:t>
             </a:r>
           </a:p>
           <a:p>
             <a:pPr lvl="3"/>
             <a:r>
-              <a:rPr lang="en-US"/>
+              <a:rPr lang="en-US" smtClean="0"/>
               <a:t>Fourth level</a:t>
             </a:r>
           </a:p>
           <a:p>
             <a:pPr lvl="4"/>
             <a:r>
-              <a:rPr lang="en-US"/>
+              <a:rPr lang="en-US" smtClean="0"/>
               <a:t>Fifth level</a:t>
             </a:r>
+            <a:endParaRPr lang="en-US"/>
           </a:p>
         </p:txBody>
       </p:sp>
@@ -4298,7 +3918,7 @@
           <a:p>
             <a:fld id="{5BCAD085-E8A6-8845-BD4E-CB4CCA059FC4}" type="datetimeFigureOut">
               <a:rPr lang="en-US" smtClean="0"/>
-              <a:t>8/16/2026</a:t>
+              <a:t>1/27/13</a:t>
             </a:fld>
             <a:endParaRPr lang="en-US"/>
           </a:p>
@@ -4392,9 +4012,10 @@
           <a:lstStyle/>
           <a:p>
             <a:r>
-              <a:rPr lang="en-US"/>
+              <a:rPr lang="en-US" smtClean="0"/>
               <a:t>Click to edit Master title style</a:t>
             </a:r>
+            <a:endParaRPr lang="en-US"/>
           </a:p>
         </p:txBody>
       </p:sp>
@@ -4415,7 +4036,7 @@
           <a:p>
             <a:fld id="{5BCAD085-E8A6-8845-BD4E-CB4CCA059FC4}" type="datetimeFigureOut">
               <a:rPr lang="en-US" smtClean="0"/>
-              <a:t>8/16/2026</a:t>
+              <a:t>1/27/13</a:t>
             </a:fld>
             <a:endParaRPr lang="en-US"/>
           </a:p>
@@ -4510,7 +4131,7 @@
           <a:p>
             <a:fld id="{5BCAD085-E8A6-8845-BD4E-CB4CCA059FC4}" type="datetimeFigureOut">
               <a:rPr lang="en-US" smtClean="0"/>
-              <a:t>8/16/2026</a:t>
+              <a:t>1/27/13</a:t>
             </a:fld>
             <a:endParaRPr lang="en-US"/>
           </a:p>
@@ -4613,9 +4234,10 @@
           </a:lstStyle>
           <a:p>
             <a:r>
-              <a:rPr lang="en-US"/>
+              <a:rPr lang="en-US" smtClean="0"/>
               <a:t>Click to edit Master title style</a:t>
             </a:r>
+            <a:endParaRPr lang="en-US"/>
           </a:p>
         </p:txBody>
       </p:sp>
@@ -4669,37 +4291,38 @@
           <a:p>
             <a:pPr lvl="0"/>
             <a:r>
-              <a:rPr lang="en-US"/>
+              <a:rPr lang="en-US" smtClean="0"/>
               <a:t>Click to edit Master text styles</a:t>
             </a:r>
           </a:p>
           <a:p>
             <a:pPr lvl="1"/>
             <a:r>
-              <a:rPr lang="en-US"/>
+              <a:rPr lang="en-US" smtClean="0"/>
               <a:t>Second level</a:t>
             </a:r>
           </a:p>
           <a:p>
             <a:pPr lvl="2"/>
             <a:r>
-              <a:rPr lang="en-US"/>
+              <a:rPr lang="en-US" smtClean="0"/>
               <a:t>Third level</a:t>
             </a:r>
           </a:p>
           <a:p>
             <a:pPr lvl="3"/>
             <a:r>
-              <a:rPr lang="en-US"/>
+              <a:rPr lang="en-US" smtClean="0"/>
               <a:t>Fourth level</a:t>
             </a:r>
           </a:p>
           <a:p>
             <a:pPr lvl="4"/>
             <a:r>
-              <a:rPr lang="en-US"/>
+              <a:rPr lang="en-US" smtClean="0"/>
               <a:t>Fifth level</a:t>
             </a:r>
+            <a:endParaRPr lang="en-US"/>
           </a:p>
         </p:txBody>
       </p:sp>
@@ -4762,7 +4385,7 @@
           <a:p>
             <a:pPr lvl="0"/>
             <a:r>
-              <a:rPr lang="en-US"/>
+              <a:rPr lang="en-US" smtClean="0"/>
               <a:t>Click to edit Master text styles</a:t>
             </a:r>
           </a:p>
@@ -4785,7 +4408,7 @@
           <a:p>
             <a:fld id="{5BCAD085-E8A6-8845-BD4E-CB4CCA059FC4}" type="datetimeFigureOut">
               <a:rPr lang="en-US" smtClean="0"/>
-              <a:t>8/16/2026</a:t>
+              <a:t>1/27/13</a:t>
             </a:fld>
             <a:endParaRPr lang="en-US"/>
           </a:p>
@@ -4888,9 +4511,10 @@
           </a:lstStyle>
           <a:p>
             <a:r>
-              <a:rPr lang="en-US"/>
+              <a:rPr lang="en-US" smtClean="0"/>
               <a:t>Click to edit Master title style</a:t>
             </a:r>
+            <a:endParaRPr lang="en-US"/>
           </a:p>
         </p:txBody>
       </p:sp>
@@ -5014,7 +4638,7 @@
           <a:p>
             <a:pPr lvl="0"/>
             <a:r>
-              <a:rPr lang="en-US"/>
+              <a:rPr lang="en-US" smtClean="0"/>
               <a:t>Click to edit Master text styles</a:t>
             </a:r>
           </a:p>
@@ -5037,7 +4661,7 @@
           <a:p>
             <a:fld id="{5BCAD085-E8A6-8845-BD4E-CB4CCA059FC4}" type="datetimeFigureOut">
               <a:rPr lang="en-US" smtClean="0"/>
-              <a:t>8/16/2026</a:t>
+              <a:t>1/27/13</a:t>
             </a:fld>
             <a:endParaRPr lang="en-US"/>
           </a:p>
@@ -5146,9 +4770,10 @@
           <a:lstStyle/>
           <a:p>
             <a:r>
-              <a:rPr lang="en-US"/>
+              <a:rPr lang="en-US" smtClean="0"/>
               <a:t>Click to edit Master title style</a:t>
             </a:r>
+            <a:endParaRPr lang="en-US"/>
           </a:p>
         </p:txBody>
       </p:sp>
@@ -5179,37 +4804,38 @@
           <a:p>
             <a:pPr lvl="0"/>
             <a:r>
-              <a:rPr lang="en-US"/>
+              <a:rPr lang="en-US" smtClean="0"/>
               <a:t>Click to edit Master text styles</a:t>
             </a:r>
           </a:p>
           <a:p>
             <a:pPr lvl="1"/>
             <a:r>
-              <a:rPr lang="en-US"/>
+              <a:rPr lang="en-US" smtClean="0"/>
               <a:t>Second level</a:t>
             </a:r>
           </a:p>
           <a:p>
             <a:pPr lvl="2"/>
             <a:r>
-              <a:rPr lang="en-US"/>
+              <a:rPr lang="en-US" smtClean="0"/>
               <a:t>Third level</a:t>
             </a:r>
           </a:p>
           <a:p>
             <a:pPr lvl="3"/>
             <a:r>
-              <a:rPr lang="en-US"/>
+              <a:rPr lang="en-US" smtClean="0"/>
               <a:t>Fourth level</a:t>
             </a:r>
           </a:p>
           <a:p>
             <a:pPr lvl="4"/>
             <a:r>
-              <a:rPr lang="en-US"/>
+              <a:rPr lang="en-US" smtClean="0"/>
               <a:t>Fifth level</a:t>
             </a:r>
+            <a:endParaRPr lang="en-US"/>
           </a:p>
         </p:txBody>
       </p:sp>
@@ -5248,7 +4874,7 @@
           <a:p>
             <a:fld id="{5BCAD085-E8A6-8845-BD4E-CB4CCA059FC4}" type="datetimeFigureOut">
               <a:rPr lang="en-US" smtClean="0"/>
-              <a:t>8/16/2026</a:t>
+              <a:t>1/27/13</a:t>
             </a:fld>
             <a:endParaRPr lang="en-US"/>
           </a:p>
@@ -5607,7 +5233,7 @@
 </file>
 
 <file path=ppt/slides/slide1.xml><?xml version="1.0" encoding="utf-8"?>
-<p:sld xmlns:a="http://schemas.openxmlformats.org/drawingml/2006/main" xmlns:r="http://schemas.openxmlformats.org/officeDocument/2006/relationships" xmlns:p="http://schemas.openxmlformats.org/presentationml/2006/main">
+<p:sld xmlns:a="http://schemas.openxmlformats.org/drawingml/2006/main" xmlns:p="http://schemas.openxmlformats.org/presentationml/2006/main" xmlns:r="http://schemas.openxmlformats.org/officeDocument/2006/relationships">
   <p:cSld>
     <p:spTree>
       <p:nvGrpSpPr>
@@ -5615,14 +5241,7 @@
         <p:cNvGrpSpPr/>
         <p:nvPr/>
       </p:nvGrpSpPr>
-      <p:grpSpPr>
-        <a:xfrm>
-          <a:off x="0" y="0"/>
-          <a:ext cx="0" cy="0"/>
-          <a:chOff x="0" y="0"/>
-          <a:chExt cx="0" cy="0"/>
-        </a:xfrm>
-      </p:grpSpPr>
+      <p:grpSpPr/>
       <p:sp>
         <p:nvSpPr>
           <p:cNvPr id="2" name="Rectangle 1"/>
@@ -5664,7 +5283,6 @@
           <a:lstStyle/>
           <a:p>
             <a:pPr algn="ctr"/>
-            <a:endParaRPr/>
           </a:p>
         </p:txBody>
       </p:sp>
@@ -5685,7 +5303,7 @@
           <a:noFill/>
         </p:spPr>
         <p:txBody>
-          <a:bodyPr wrap="square" lIns="0" tIns="0" rIns="0" bIns="0" anchor="t">
+          <a:bodyPr wrap="square" lIns="0" rIns="0" tIns="0" bIns="0" anchor="t">
             <a:spAutoFit/>
           </a:bodyPr>
           <a:lstStyle/>
@@ -5724,7 +5342,7 @@
           <a:noFill/>
         </p:spPr>
         <p:txBody>
-          <a:bodyPr wrap="square" lIns="0" tIns="0" rIns="0" bIns="0" anchor="t">
+          <a:bodyPr wrap="square" lIns="0" rIns="0" tIns="0" bIns="0" anchor="t">
             <a:spAutoFit/>
           </a:bodyPr>
           <a:lstStyle/>
@@ -5735,56 +5353,14 @@
               </a:lnSpc>
             </a:pPr>
             <a:r>
-              <a:rPr sz="2000" b="0" dirty="0" err="1">
+              <a:rPr sz="2000" b="0">
                 <a:solidFill>
                   <a:srgbClr val="16212E"/>
                 </a:solidFill>
                 <a:latin typeface="Microsoft JhengHei"/>
               </a:rPr>
-              <a:t>地端</a:t>
-            </a:r>
-            <a:r>
-              <a:rPr sz="2000" b="0" dirty="0">
-                <a:solidFill>
-                  <a:srgbClr val="16212E"/>
-                </a:solidFill>
-                <a:latin typeface="Microsoft JhengHei"/>
-              </a:rPr>
-              <a:t> AI </a:t>
-            </a:r>
-            <a:r>
-              <a:rPr sz="2000" b="0" dirty="0" err="1">
-                <a:solidFill>
-                  <a:srgbClr val="16212E"/>
-                </a:solidFill>
-                <a:latin typeface="Microsoft JhengHei"/>
-              </a:rPr>
-              <a:t>事件判讀</a:t>
-            </a:r>
-            <a:r>
-              <a:rPr sz="2000" b="0" dirty="0">
-                <a:solidFill>
-                  <a:srgbClr val="16212E"/>
-                </a:solidFill>
-                <a:latin typeface="Microsoft JhengHei"/>
-              </a:rPr>
-              <a:t> —— </a:t>
-            </a:r>
-            <a:r>
-              <a:rPr sz="2000" b="0" dirty="0" err="1">
-                <a:solidFill>
-                  <a:srgbClr val="16212E"/>
-                </a:solidFill>
-                <a:latin typeface="Microsoft JhengHei"/>
-              </a:rPr>
-              <a:t>六個月、三道決策門的立案提案</a:t>
-            </a:r>
-            <a:endParaRPr sz="2000" b="0" dirty="0">
-              <a:solidFill>
-                <a:srgbClr val="16212E"/>
-              </a:solidFill>
-              <a:latin typeface="Microsoft JhengHei"/>
-            </a:endParaRPr>
+              <a:t>地端 AI 事件判讀 —— 六個月、三道決策門的立案提案</a:t>
+            </a:r>
           </a:p>
         </p:txBody>
       </p:sp>
@@ -5829,7 +5405,6 @@
           <a:lstStyle/>
           <a:p>
             <a:pPr algn="ctr"/>
-            <a:endParaRPr/>
           </a:p>
         </p:txBody>
       </p:sp>
@@ -5850,7 +5425,7 @@
           <a:noFill/>
         </p:spPr>
         <p:txBody>
-          <a:bodyPr wrap="square" lIns="0" tIns="0" rIns="0" bIns="0" anchor="t">
+          <a:bodyPr wrap="square" lIns="0" rIns="0" tIns="0" bIns="0" anchor="t">
             <a:spAutoFit/>
           </a:bodyPr>
           <a:lstStyle/>
@@ -5889,7 +5464,7 @@
           <a:noFill/>
         </p:spPr>
         <p:txBody>
-          <a:bodyPr wrap="square" lIns="0" tIns="0" rIns="0" bIns="0" anchor="t">
+          <a:bodyPr wrap="square" lIns="0" rIns="0" tIns="0" bIns="0" anchor="t">
             <a:spAutoFit/>
           </a:bodyPr>
           <a:lstStyle/>
@@ -5900,305 +5475,62 @@
               </a:lnSpc>
             </a:pPr>
             <a:r>
-              <a:rPr sz="1300" b="0" dirty="0" err="1">
+              <a:rPr sz="1300" b="0">
                 <a:solidFill>
                   <a:srgbClr val="6B7885"/>
                 </a:solidFill>
                 <a:latin typeface="Microsoft JhengHei"/>
               </a:rPr>
-              <a:t>客戶是車隊</a:t>
-            </a:r>
-            <a:r>
-              <a:rPr sz="1300" b="0" dirty="0">
+              <a:t>客戶是車隊 —— 物流 · 客運 · 租賃;車上裝我們的鏡頭與車機</a:t>
+            </a:r>
+          </a:p>
+          <a:p>
+            <a:pPr algn="l">
+              <a:lnSpc>
+                <a:spcPct val="130000"/>
+              </a:lnSpc>
+            </a:pPr>
+            <a:r>
+              <a:rPr sz="1300" b="0">
                 <a:solidFill>
                   <a:srgbClr val="6B7885"/>
                 </a:solidFill>
                 <a:latin typeface="Microsoft JhengHei"/>
               </a:rPr>
-              <a:t> —— </a:t>
-            </a:r>
-            <a:r>
-              <a:rPr sz="1300" b="0" dirty="0" err="1">
+              <a:t>鏡頭偵測到一次危險駕駛 → 記一筆「事件」(影片 + 時間地點 + 系統分類)</a:t>
+            </a:r>
+          </a:p>
+          <a:p>
+            <a:pPr algn="l">
+              <a:lnSpc>
+                <a:spcPct val="130000"/>
+              </a:lnSpc>
+            </a:pPr>
+            <a:r>
+              <a:rPr sz="1300" b="0">
                 <a:solidFill>
                   <a:srgbClr val="6B7885"/>
                 </a:solidFill>
                 <a:latin typeface="Microsoft JhengHei"/>
               </a:rPr>
-              <a:t>物流</a:t>
-            </a:r>
-            <a:r>
-              <a:rPr sz="1300" b="0" dirty="0">
+              <a:t>客戶回頭說「這筆判錯了」= 一次「爭議」—— 只能由人重看影片才判得出來</a:t>
+            </a:r>
+          </a:p>
+          <a:p>
+            <a:pPr algn="l">
+              <a:lnSpc>
+                <a:spcPct val="130000"/>
+              </a:lnSpc>
+            </a:pPr>
+            <a:r>
+              <a:rPr sz="1300" b="0">
                 <a:solidFill>
                   <a:srgbClr val="6B7885"/>
                 </a:solidFill>
                 <a:latin typeface="Microsoft JhengHei"/>
               </a:rPr>
-              <a:t> · </a:t>
-            </a:r>
-            <a:r>
-              <a:rPr sz="1300" b="0" dirty="0" err="1">
-                <a:solidFill>
-                  <a:srgbClr val="6B7885"/>
-                </a:solidFill>
-                <a:latin typeface="Microsoft JhengHei"/>
-              </a:rPr>
-              <a:t>客運</a:t>
-            </a:r>
-            <a:r>
-              <a:rPr sz="1300" b="0" dirty="0">
-                <a:solidFill>
-                  <a:srgbClr val="6B7885"/>
-                </a:solidFill>
-                <a:latin typeface="Microsoft JhengHei"/>
-              </a:rPr>
-              <a:t> · </a:t>
-            </a:r>
-            <a:r>
-              <a:rPr sz="1300" b="0" dirty="0" err="1">
-                <a:solidFill>
-                  <a:srgbClr val="6B7885"/>
-                </a:solidFill>
-                <a:latin typeface="Microsoft JhengHei"/>
-              </a:rPr>
-              <a:t>租賃;車上裝我們的鏡頭與車機</a:t>
-            </a:r>
-            <a:endParaRPr sz="1300" b="0" dirty="0">
-              <a:solidFill>
-                <a:srgbClr val="6B7885"/>
-              </a:solidFill>
-              <a:latin typeface="Microsoft JhengHei"/>
-            </a:endParaRPr>
-          </a:p>
-          <a:p>
-            <a:pPr algn="l">
-              <a:lnSpc>
-                <a:spcPct val="130000"/>
-              </a:lnSpc>
-            </a:pPr>
-            <a:r>
-              <a:rPr sz="1300" b="0" dirty="0" err="1">
-                <a:solidFill>
-                  <a:srgbClr val="6B7885"/>
-                </a:solidFill>
-                <a:latin typeface="Microsoft JhengHei"/>
-              </a:rPr>
-              <a:t>鏡頭偵測到一次危險駕駛</a:t>
-            </a:r>
-            <a:r>
-              <a:rPr sz="1300" b="0" dirty="0">
-                <a:solidFill>
-                  <a:srgbClr val="6B7885"/>
-                </a:solidFill>
-                <a:latin typeface="Microsoft JhengHei"/>
-              </a:rPr>
-              <a:t> → </a:t>
-            </a:r>
-            <a:r>
-              <a:rPr sz="1300" b="0" dirty="0" err="1">
-                <a:solidFill>
-                  <a:srgbClr val="6B7885"/>
-                </a:solidFill>
-                <a:latin typeface="Microsoft JhengHei"/>
-              </a:rPr>
-              <a:t>記一筆「事件</a:t>
-            </a:r>
-            <a:r>
-              <a:rPr sz="1300" b="0" dirty="0">
-                <a:solidFill>
-                  <a:srgbClr val="6B7885"/>
-                </a:solidFill>
-                <a:latin typeface="Microsoft JhengHei"/>
-              </a:rPr>
-              <a:t>」(</a:t>
-            </a:r>
-            <a:r>
-              <a:rPr sz="1300" b="0" dirty="0" err="1">
-                <a:solidFill>
-                  <a:srgbClr val="6B7885"/>
-                </a:solidFill>
-                <a:latin typeface="Microsoft JhengHei"/>
-              </a:rPr>
-              <a:t>影片</a:t>
-            </a:r>
-            <a:r>
-              <a:rPr sz="1300" b="0" dirty="0">
-                <a:solidFill>
-                  <a:srgbClr val="6B7885"/>
-                </a:solidFill>
-                <a:latin typeface="Microsoft JhengHei"/>
-              </a:rPr>
-              <a:t> + </a:t>
-            </a:r>
-            <a:r>
-              <a:rPr sz="1300" b="0" dirty="0" err="1">
-                <a:solidFill>
-                  <a:srgbClr val="6B7885"/>
-                </a:solidFill>
-                <a:latin typeface="Microsoft JhengHei"/>
-              </a:rPr>
-              <a:t>時間地點</a:t>
-            </a:r>
-            <a:r>
-              <a:rPr sz="1300" b="0" dirty="0">
-                <a:solidFill>
-                  <a:srgbClr val="6B7885"/>
-                </a:solidFill>
-                <a:latin typeface="Microsoft JhengHei"/>
-              </a:rPr>
-              <a:t> + </a:t>
-            </a:r>
-            <a:r>
-              <a:rPr sz="1300" b="0" dirty="0" err="1">
-                <a:solidFill>
-                  <a:srgbClr val="6B7885"/>
-                </a:solidFill>
-                <a:latin typeface="Microsoft JhengHei"/>
-              </a:rPr>
-              <a:t>系統分類</a:t>
-            </a:r>
-            <a:r>
-              <a:rPr sz="1300" b="0" dirty="0">
-                <a:solidFill>
-                  <a:srgbClr val="6B7885"/>
-                </a:solidFill>
-                <a:latin typeface="Microsoft JhengHei"/>
-              </a:rPr>
-              <a:t>)</a:t>
-            </a:r>
-          </a:p>
-          <a:p>
-            <a:pPr algn="l">
-              <a:lnSpc>
-                <a:spcPct val="130000"/>
-              </a:lnSpc>
-            </a:pPr>
-            <a:r>
-              <a:rPr sz="1300" b="0" dirty="0" err="1">
-                <a:solidFill>
-                  <a:srgbClr val="6B7885"/>
-                </a:solidFill>
-                <a:latin typeface="Microsoft JhengHei"/>
-              </a:rPr>
-              <a:t>客戶回頭說「這筆判錯了</a:t>
-            </a:r>
-            <a:r>
-              <a:rPr sz="1300" b="0" dirty="0">
-                <a:solidFill>
-                  <a:srgbClr val="6B7885"/>
-                </a:solidFill>
-                <a:latin typeface="Microsoft JhengHei"/>
-              </a:rPr>
-              <a:t>」= </a:t>
-            </a:r>
-            <a:r>
-              <a:rPr sz="1300" b="0" dirty="0" err="1">
-                <a:solidFill>
-                  <a:srgbClr val="6B7885"/>
-                </a:solidFill>
-                <a:latin typeface="Microsoft JhengHei"/>
-              </a:rPr>
-              <a:t>一次「爭議</a:t>
-            </a:r>
-            <a:r>
-              <a:rPr sz="1300" b="0" dirty="0">
-                <a:solidFill>
-                  <a:srgbClr val="6B7885"/>
-                </a:solidFill>
-                <a:latin typeface="Microsoft JhengHei"/>
-              </a:rPr>
-              <a:t>」—— </a:t>
-            </a:r>
-            <a:r>
-              <a:rPr sz="1300" b="0" dirty="0" err="1">
-                <a:solidFill>
-                  <a:srgbClr val="6B7885"/>
-                </a:solidFill>
-                <a:latin typeface="Microsoft JhengHei"/>
-              </a:rPr>
-              <a:t>只能由人重看影片才判得出來</a:t>
-            </a:r>
-            <a:endParaRPr sz="1300" b="0" dirty="0">
-              <a:solidFill>
-                <a:srgbClr val="6B7885"/>
-              </a:solidFill>
-              <a:latin typeface="Microsoft JhengHei"/>
-            </a:endParaRPr>
-          </a:p>
-          <a:p>
-            <a:pPr algn="l">
-              <a:lnSpc>
-                <a:spcPct val="130000"/>
-              </a:lnSpc>
-            </a:pPr>
-            <a:r>
-              <a:rPr sz="1300" b="0" dirty="0" err="1">
-                <a:solidFill>
-                  <a:srgbClr val="6B7885"/>
-                </a:solidFill>
-                <a:latin typeface="Microsoft JhengHei"/>
-              </a:rPr>
-              <a:t>單一大型車隊約</a:t>
-            </a:r>
-            <a:r>
-              <a:rPr sz="1300" b="0" dirty="0">
-                <a:solidFill>
-                  <a:srgbClr val="6B7885"/>
-                </a:solidFill>
-                <a:latin typeface="Microsoft JhengHei"/>
-              </a:rPr>
-              <a:t> 3,000 </a:t>
-            </a:r>
-            <a:r>
-              <a:rPr sz="1300" b="0" dirty="0" err="1">
-                <a:solidFill>
-                  <a:srgbClr val="6B7885"/>
-                </a:solidFill>
-                <a:latin typeface="Microsoft JhengHei"/>
-              </a:rPr>
-              <a:t>筆事件</a:t>
-            </a:r>
-            <a:r>
-              <a:rPr sz="1300" b="0" dirty="0">
-                <a:solidFill>
-                  <a:srgbClr val="6B7885"/>
-                </a:solidFill>
-                <a:latin typeface="Microsoft JhengHei"/>
-              </a:rPr>
-              <a:t>/天 · </a:t>
-            </a:r>
-            <a:r>
-              <a:rPr sz="1300" b="0" dirty="0" err="1">
-                <a:solidFill>
-                  <a:srgbClr val="6B7885"/>
-                </a:solidFill>
-                <a:latin typeface="Microsoft JhengHei"/>
-              </a:rPr>
-              <a:t>全公司</a:t>
-            </a:r>
-            <a:r>
-              <a:rPr sz="1300" b="0" dirty="0">
-                <a:solidFill>
-                  <a:srgbClr val="6B7885"/>
-                </a:solidFill>
-                <a:latin typeface="Microsoft JhengHei"/>
-              </a:rPr>
-              <a:t> 5 </a:t>
-            </a:r>
-            <a:r>
-              <a:rPr sz="1300" b="0" dirty="0" err="1">
-                <a:solidFill>
-                  <a:srgbClr val="6B7885"/>
-                </a:solidFill>
-                <a:latin typeface="Microsoft JhengHei"/>
-              </a:rPr>
-              <a:t>位專職分析人員逐筆看</a:t>
-            </a:r>
-            <a:endParaRPr sz="1300" b="0" dirty="0">
-              <a:solidFill>
-                <a:srgbClr val="6B7885"/>
-              </a:solidFill>
-              <a:latin typeface="Microsoft JhengHei"/>
-            </a:endParaRPr>
+              <a:t>單一大型車隊約 3,000 筆事件/天 · 全公司 5 位專職分析人員逐筆看</a:t>
+            </a:r>
           </a:p>
         </p:txBody>
       </p:sp>
@@ -6219,7 +5551,7 @@
           <a:noFill/>
         </p:spPr>
         <p:txBody>
-          <a:bodyPr wrap="square" lIns="0" tIns="0" rIns="0" bIns="0" anchor="t">
+          <a:bodyPr wrap="square" lIns="0" rIns="0" tIns="0" bIns="0" anchor="t">
             <a:spAutoFit/>
           </a:bodyPr>
           <a:lstStyle/>
@@ -6282,7 +5614,7 @@
         <p:spPr>
           <a:xfrm>
             <a:off x="960120" y="6217920"/>
-            <a:ext cx="10325295" cy="201530"/>
+            <a:ext cx="9311335" cy="457200"/>
           </a:xfrm>
           <a:prstGeom prst="rect">
             <a:avLst/>
@@ -6290,7 +5622,7 @@
           <a:noFill/>
         </p:spPr>
         <p:txBody>
-          <a:bodyPr wrap="square" lIns="0" tIns="0" rIns="0" bIns="0" anchor="t">
+          <a:bodyPr wrap="square" lIns="0" rIns="0" tIns="0" bIns="0" anchor="t">
             <a:spAutoFit/>
           </a:bodyPr>
           <a:lstStyle/>
@@ -6321,7 +5653,7 @@
 </file>
 
 <file path=ppt/slides/slide10.xml><?xml version="1.0" encoding="utf-8"?>
-<p:sld xmlns:a="http://schemas.openxmlformats.org/drawingml/2006/main" xmlns:r="http://schemas.openxmlformats.org/officeDocument/2006/relationships" xmlns:p="http://schemas.openxmlformats.org/presentationml/2006/main">
+<p:sld xmlns:a="http://schemas.openxmlformats.org/drawingml/2006/main" xmlns:p="http://schemas.openxmlformats.org/presentationml/2006/main" xmlns:r="http://schemas.openxmlformats.org/officeDocument/2006/relationships">
   <p:cSld>
     <p:spTree>
       <p:nvGrpSpPr>
@@ -6329,14 +5661,7 @@
         <p:cNvGrpSpPr/>
         <p:nvPr/>
       </p:nvGrpSpPr>
-      <p:grpSpPr>
-        <a:xfrm>
-          <a:off x="0" y="0"/>
-          <a:ext cx="0" cy="0"/>
-          <a:chOff x="0" y="0"/>
-          <a:chExt cx="0" cy="0"/>
-        </a:xfrm>
-      </p:grpSpPr>
+      <p:grpSpPr/>
       <p:sp>
         <p:nvSpPr>
           <p:cNvPr id="2" name="TextBox 1"/>
@@ -6354,7 +5679,7 @@
           <a:noFill/>
         </p:spPr>
         <p:txBody>
-          <a:bodyPr wrap="square" lIns="0" tIns="0" rIns="0" bIns="0" anchor="t">
+          <a:bodyPr wrap="square" lIns="0" rIns="0" tIns="0" bIns="0" anchor="t">
             <a:spAutoFit/>
           </a:bodyPr>
           <a:lstStyle/>
@@ -6393,7 +5718,7 @@
           <a:noFill/>
         </p:spPr>
         <p:txBody>
-          <a:bodyPr wrap="square" lIns="0" tIns="0" rIns="0" bIns="0" anchor="t">
+          <a:bodyPr wrap="square" lIns="0" rIns="0" tIns="0" bIns="0" anchor="t">
             <a:spAutoFit/>
           </a:bodyPr>
           <a:lstStyle/>
@@ -6410,7 +5735,7 @@
                 </a:solidFill>
                 <a:latin typeface="Microsoft JhengHei"/>
               </a:rPr>
-              <a:t>只有一包是 AI,順序本身就是風險控制</a:t>
+              <a:t>六個月分三段付,每一段都可以喊停</a:t>
             </a:r>
           </a:p>
         </p:txBody>
@@ -6432,7 +5757,7 @@
           <a:noFill/>
         </p:spPr>
         <p:txBody>
-          <a:bodyPr wrap="square" lIns="0" tIns="0" rIns="0" bIns="0" anchor="t">
+          <a:bodyPr wrap="square" lIns="0" rIns="0" tIns="0" bIns="0" anchor="t">
             <a:spAutoFit/>
           </a:bodyPr>
           <a:lstStyle/>
@@ -6449,7 +5774,7 @@
                 </a:solidFill>
                 <a:latin typeface="Microsoft JhengHei"/>
               </a:rPr>
-              <a:t>評估集 → 標註 → 特徵 → 地端 VLM;三道門各自寫明什麼條件下停</a:t>
+              <a:t>六包只有一包是 AI —— 評估集 → 標註 → 特徵 → 地端 VLM;三道門各自寫明什麼條件下停</a:t>
             </a:r>
           </a:p>
         </p:txBody>
@@ -6495,7 +5820,6 @@
           <a:lstStyle/>
           <a:p>
             <a:pPr algn="ctr"/>
-            <a:endParaRPr/>
           </a:p>
         </p:txBody>
       </p:sp>
@@ -6540,7 +5864,6 @@
           <a:lstStyle/>
           <a:p>
             <a:pPr algn="ctr"/>
-            <a:endParaRPr/>
           </a:p>
         </p:txBody>
       </p:sp>
@@ -6561,7 +5884,7 @@
           <a:noFill/>
         </p:spPr>
         <p:txBody>
-          <a:bodyPr wrap="square" lIns="0" tIns="0" rIns="0" bIns="0" anchor="ctr">
+          <a:bodyPr wrap="square" lIns="0" rIns="0" tIns="0" bIns="0" anchor="ctr">
             <a:spAutoFit/>
           </a:bodyPr>
           <a:lstStyle/>
@@ -6592,7 +5915,7 @@
         <p:spPr>
           <a:xfrm>
             <a:off x="3268358" y="1755648"/>
-            <a:ext cx="3152759" cy="393192"/>
+            <a:ext cx="977767" cy="393192"/>
           </a:xfrm>
           <a:prstGeom prst="rect">
             <a:avLst/>
@@ -6600,7 +5923,7 @@
           <a:noFill/>
         </p:spPr>
         <p:txBody>
-          <a:bodyPr wrap="square" lIns="0" tIns="0" rIns="0" bIns="0" anchor="ctr">
+          <a:bodyPr wrap="square" lIns="0" rIns="0" tIns="0" bIns="0" anchor="ctr">
             <a:spAutoFit/>
           </a:bodyPr>
           <a:lstStyle/>
@@ -6630,8 +5953,8 @@
         </p:nvSpPr>
         <p:spPr>
           <a:xfrm>
-            <a:off x="4185819" y="1740680"/>
-            <a:ext cx="7237779" cy="423129"/>
+            <a:off x="4355854" y="1755648"/>
+            <a:ext cx="7067745" cy="393192"/>
           </a:xfrm>
           <a:prstGeom prst="rect">
             <a:avLst/>
@@ -6639,7 +5962,7 @@
           <a:noFill/>
         </p:spPr>
         <p:txBody>
-          <a:bodyPr wrap="square" lIns="0" tIns="0" rIns="0" bIns="0" anchor="ctr">
+          <a:bodyPr wrap="square" lIns="0" rIns="0" tIns="0" bIns="0" anchor="ctr">
             <a:spAutoFit/>
           </a:bodyPr>
           <a:lstStyle/>
@@ -6650,83 +5973,14 @@
               </a:lnSpc>
             </a:pPr>
             <a:r>
-              <a:rPr sz="1200" b="0" dirty="0">
+              <a:rPr sz="1200" b="0">
                 <a:solidFill>
                   <a:srgbClr val="6B7885"/>
                 </a:solidFill>
                 <a:latin typeface="Microsoft JhengHei"/>
               </a:rPr>
-              <a:t>交:公司第一份可稽核的錯誤率(含 95% CI)· </a:t>
-            </a:r>
-            <a:r>
-              <a:rPr sz="1200" b="0" dirty="0" err="1">
-                <a:solidFill>
-                  <a:srgbClr val="6B7885"/>
-                </a:solidFill>
-                <a:latin typeface="Microsoft JhengHei"/>
-              </a:rPr>
-              <a:t>冷凍評估集</a:t>
-            </a:r>
-            <a:r>
-              <a:rPr sz="1200" b="0" dirty="0">
-                <a:solidFill>
-                  <a:srgbClr val="6B7885"/>
-                </a:solidFill>
-                <a:latin typeface="Microsoft JhengHei"/>
-              </a:rPr>
-              <a:t> · </a:t>
-            </a:r>
-            <a:r>
-              <a:rPr sz="1200" b="0" dirty="0" err="1">
-                <a:solidFill>
-                  <a:srgbClr val="6B7885"/>
-                </a:solidFill>
-                <a:latin typeface="Microsoft JhengHei"/>
-              </a:rPr>
-              <a:t>兩條工作流單位工時基準</a:t>
-            </a:r>
-            <a:r>
-              <a:rPr sz="1200" b="0" dirty="0">
-                <a:solidFill>
-                  <a:srgbClr val="6B7885"/>
-                </a:solidFill>
-                <a:latin typeface="Microsoft JhengHei"/>
-              </a:rPr>
-              <a:t> · </a:t>
-            </a:r>
-            <a:r>
-              <a:rPr sz="1200" b="0" dirty="0" err="1">
-                <a:solidFill>
-                  <a:srgbClr val="6B7885"/>
-                </a:solidFill>
-                <a:latin typeface="Microsoft JhengHei"/>
-              </a:rPr>
-              <a:t>每案結案方向黃金答案標籤</a:t>
-            </a:r>
-            <a:r>
-              <a:rPr sz="1200" b="0" dirty="0">
-                <a:solidFill>
-                  <a:srgbClr val="6B7885"/>
-                </a:solidFill>
-                <a:latin typeface="Microsoft JhengHei"/>
-              </a:rPr>
-              <a:t> · </a:t>
-            </a:r>
-            <a:r>
-              <a:rPr sz="1200" b="0" dirty="0" err="1">
-                <a:solidFill>
-                  <a:srgbClr val="6B7885"/>
-                </a:solidFill>
-                <a:latin typeface="Microsoft JhengHei"/>
-              </a:rPr>
-              <a:t>時間拆解與到件分布</a:t>
-            </a:r>
-            <a:endParaRPr sz="1200" b="0" dirty="0">
-              <a:solidFill>
-                <a:srgbClr val="6B7885"/>
-              </a:solidFill>
-              <a:latin typeface="Microsoft JhengHei"/>
-            </a:endParaRPr>
+              <a:t>交:公司第一份可稽核的錯誤率(含 95% CI)· 冷凍評估集 · 兩條工作流單位工時基準 · 每案結案方向黃金答案標籤 · 時間拆解與到件分布</a:t>
+            </a:r>
           </a:p>
         </p:txBody>
       </p:sp>
@@ -6771,7 +6025,6 @@
           <a:lstStyle/>
           <a:p>
             <a:pPr algn="ctr"/>
-            <a:endParaRPr/>
           </a:p>
         </p:txBody>
       </p:sp>
@@ -6792,7 +6045,7 @@
           <a:noFill/>
         </p:spPr>
         <p:txBody>
-          <a:bodyPr wrap="square" lIns="0" tIns="0" rIns="0" bIns="0" anchor="ctr">
+          <a:bodyPr wrap="square" lIns="0" rIns="0" tIns="0" bIns="0" anchor="ctr">
             <a:spAutoFit/>
           </a:bodyPr>
           <a:lstStyle/>
@@ -6823,7 +6076,7 @@
         <p:spPr>
           <a:xfrm>
             <a:off x="3268358" y="2240280"/>
-            <a:ext cx="3152759" cy="393192"/>
+            <a:ext cx="977767" cy="393192"/>
           </a:xfrm>
           <a:prstGeom prst="rect">
             <a:avLst/>
@@ -6831,7 +6084,7 @@
           <a:noFill/>
         </p:spPr>
         <p:txBody>
-          <a:bodyPr wrap="square" lIns="0" tIns="0" rIns="0" bIns="0" anchor="ctr">
+          <a:bodyPr wrap="square" lIns="0" rIns="0" tIns="0" bIns="0" anchor="ctr">
             <a:spAutoFit/>
           </a:bodyPr>
           <a:lstStyle/>
@@ -6861,8 +6114,8 @@
         </p:nvSpPr>
         <p:spPr>
           <a:xfrm>
-            <a:off x="4185819" y="2225312"/>
-            <a:ext cx="7237780" cy="423129"/>
+            <a:off x="4355854" y="2240280"/>
+            <a:ext cx="7067745" cy="393192"/>
           </a:xfrm>
           <a:prstGeom prst="rect">
             <a:avLst/>
@@ -6870,7 +6123,7 @@
           <a:noFill/>
         </p:spPr>
         <p:txBody>
-          <a:bodyPr wrap="square" lIns="0" tIns="0" rIns="0" bIns="0" anchor="ctr">
+          <a:bodyPr wrap="square" lIns="0" rIns="0" tIns="0" bIns="0" anchor="ctr">
             <a:spAutoFit/>
           </a:bodyPr>
           <a:lstStyle/>
@@ -6881,110 +6134,14 @@
               </a:lnSpc>
             </a:pPr>
             <a:r>
-              <a:rPr sz="1200" b="0" dirty="0" err="1">
+              <a:rPr sz="1200" b="0">
                 <a:solidFill>
                   <a:srgbClr val="6B7885"/>
                 </a:solidFill>
                 <a:latin typeface="Microsoft JhengHei"/>
               </a:rPr>
-              <a:t>地端</a:t>
-            </a:r>
-            <a:r>
-              <a:rPr sz="1200" b="0" dirty="0">
-                <a:solidFill>
-                  <a:srgbClr val="6B7885"/>
-                </a:solidFill>
-                <a:latin typeface="Microsoft JhengHei"/>
-              </a:rPr>
-              <a:t> </a:t>
-            </a:r>
-            <a:r>
-              <a:rPr sz="1200" b="0" dirty="0" err="1">
-                <a:solidFill>
-                  <a:srgbClr val="6B7885"/>
-                </a:solidFill>
-                <a:latin typeface="Microsoft JhengHei"/>
-              </a:rPr>
-              <a:t>VLM,篩檢與深挖由同一台設備分時;選型與量化規格於</a:t>
-            </a:r>
-            <a:r>
-              <a:rPr sz="1200" b="0" dirty="0">
-                <a:solidFill>
-                  <a:srgbClr val="6B7885"/>
-                </a:solidFill>
-                <a:latin typeface="Microsoft JhengHei"/>
-              </a:rPr>
-              <a:t> G1 依 W1–6 </a:t>
-            </a:r>
-            <a:r>
-              <a:rPr sz="1200" b="0" dirty="0" err="1">
-                <a:solidFill>
-                  <a:srgbClr val="6B7885"/>
-                </a:solidFill>
-                <a:latin typeface="Microsoft JhengHei"/>
-              </a:rPr>
-              <a:t>量測定案</a:t>
-            </a:r>
-            <a:r>
-              <a:rPr sz="1200" b="0" dirty="0">
-                <a:solidFill>
-                  <a:srgbClr val="6B7885"/>
-                </a:solidFill>
-                <a:latin typeface="Microsoft JhengHei"/>
-              </a:rPr>
-              <a:t>(</a:t>
-            </a:r>
-            <a:r>
-              <a:rPr sz="1200" b="0" dirty="0" err="1">
-                <a:solidFill>
-                  <a:srgbClr val="6B7885"/>
-                </a:solidFill>
-                <a:latin typeface="Microsoft JhengHei"/>
-              </a:rPr>
-              <a:t>概念層次</a:t>
-            </a:r>
-            <a:r>
-              <a:rPr sz="1200" b="0" dirty="0">
-                <a:solidFill>
-                  <a:srgbClr val="6B7885"/>
-                </a:solidFill>
-                <a:latin typeface="Microsoft JhengHei"/>
-              </a:rPr>
-              <a:t>)。W8–12 </a:t>
-            </a:r>
-            <a:r>
-              <a:rPr sz="1200" b="0" dirty="0" err="1">
-                <a:solidFill>
-                  <a:srgbClr val="6B7885"/>
-                </a:solidFill>
-                <a:latin typeface="Microsoft JhengHei"/>
-              </a:rPr>
-              <a:t>離線試驗</a:t>
-            </a:r>
-            <a:r>
-              <a:rPr sz="1200" b="0" dirty="0">
-                <a:solidFill>
-                  <a:srgbClr val="6B7885"/>
-                </a:solidFill>
-                <a:latin typeface="Microsoft JhengHei"/>
-              </a:rPr>
-              <a:t> → W12–24 </a:t>
-            </a:r>
-            <a:r>
-              <a:rPr sz="1200" b="0" dirty="0" err="1">
-                <a:solidFill>
-                  <a:srgbClr val="6B7885"/>
-                </a:solidFill>
-                <a:latin typeface="Microsoft JhengHei"/>
-              </a:rPr>
-              <a:t>只跑影子模式:機器出結論不對外送,人照常判</a:t>
-            </a:r>
-            <a:endParaRPr sz="1200" b="0" dirty="0">
-              <a:solidFill>
-                <a:srgbClr val="6B7885"/>
-              </a:solidFill>
-              <a:latin typeface="Microsoft JhengHei"/>
-            </a:endParaRPr>
+              <a:t>地端 VLM,篩檢與深挖由同一台設備分時;選型與量化規格於 G1 依 W1–6 量測定案(概念層次)。W8–12 離線試驗 → W12–24 只跑影子模式:機器出結論不對外送,人照常判</a:t>
+            </a:r>
           </a:p>
         </p:txBody>
       </p:sp>
@@ -7033,7 +6190,6 @@
           <a:lstStyle/>
           <a:p>
             <a:pPr algn="ctr"/>
-            <a:endParaRPr/>
           </a:p>
         </p:txBody>
       </p:sp>
@@ -7054,7 +6210,7 @@
           <a:noFill/>
         </p:spPr>
         <p:txBody>
-          <a:bodyPr wrap="square" lIns="0" tIns="0" rIns="0" bIns="0" anchor="t">
+          <a:bodyPr wrap="square" lIns="0" rIns="0" tIns="0" bIns="0" anchor="t">
             <a:spAutoFit/>
           </a:bodyPr>
           <a:lstStyle/>
@@ -7119,7 +6275,6 @@
           <a:lstStyle/>
           <a:p>
             <a:pPr algn="ctr"/>
-            <a:endParaRPr/>
           </a:p>
         </p:txBody>
       </p:sp>
@@ -7140,7 +6295,7 @@
           <a:noFill/>
         </p:spPr>
         <p:txBody>
-          <a:bodyPr wrap="square" lIns="0" tIns="0" rIns="0" bIns="0" anchor="ctr">
+          <a:bodyPr wrap="square" lIns="0" rIns="0" tIns="0" bIns="0" anchor="ctr">
             <a:spAutoFit/>
           </a:bodyPr>
           <a:lstStyle/>
@@ -7179,7 +6334,7 @@
           <a:noFill/>
         </p:spPr>
         <p:txBody>
-          <a:bodyPr wrap="square" lIns="0" tIns="0" rIns="0" bIns="0" anchor="t">
+          <a:bodyPr wrap="square" lIns="0" rIns="0" tIns="0" bIns="0" anchor="t">
             <a:spAutoFit/>
           </a:bodyPr>
           <a:lstStyle/>
@@ -7262,7 +6417,6 @@
           <a:lstStyle/>
           <a:p>
             <a:pPr algn="ctr"/>
-            <a:endParaRPr/>
           </a:p>
         </p:txBody>
       </p:sp>
@@ -7283,7 +6437,7 @@
           <a:noFill/>
         </p:spPr>
         <p:txBody>
-          <a:bodyPr wrap="square" lIns="0" tIns="0" rIns="0" bIns="0" anchor="t">
+          <a:bodyPr wrap="square" lIns="0" rIns="0" tIns="0" bIns="0" anchor="t">
             <a:spAutoFit/>
           </a:bodyPr>
           <a:lstStyle/>
@@ -7348,7 +6502,6 @@
           <a:lstStyle/>
           <a:p>
             <a:pPr algn="ctr"/>
-            <a:endParaRPr/>
           </a:p>
         </p:txBody>
       </p:sp>
@@ -7369,7 +6522,7 @@
           <a:noFill/>
         </p:spPr>
         <p:txBody>
-          <a:bodyPr wrap="square" lIns="0" tIns="0" rIns="0" bIns="0" anchor="ctr">
+          <a:bodyPr wrap="square" lIns="0" rIns="0" tIns="0" bIns="0" anchor="ctr">
             <a:spAutoFit/>
           </a:bodyPr>
           <a:lstStyle/>
@@ -7408,7 +6561,7 @@
           <a:noFill/>
         </p:spPr>
         <p:txBody>
-          <a:bodyPr wrap="square" lIns="0" tIns="0" rIns="0" bIns="0" anchor="t">
+          <a:bodyPr wrap="square" lIns="0" rIns="0" tIns="0" bIns="0" anchor="t">
             <a:spAutoFit/>
           </a:bodyPr>
           <a:lstStyle/>
@@ -7491,7 +6644,6 @@
           <a:lstStyle/>
           <a:p>
             <a:pPr algn="ctr"/>
-            <a:endParaRPr/>
           </a:p>
         </p:txBody>
       </p:sp>
@@ -7512,7 +6664,7 @@
           <a:noFill/>
         </p:spPr>
         <p:txBody>
-          <a:bodyPr wrap="square" lIns="0" tIns="0" rIns="0" bIns="0" anchor="t">
+          <a:bodyPr wrap="square" lIns="0" rIns="0" tIns="0" bIns="0" anchor="t">
             <a:spAutoFit/>
           </a:bodyPr>
           <a:lstStyle/>
@@ -7577,7 +6729,6 @@
           <a:lstStyle/>
           <a:p>
             <a:pPr algn="ctr"/>
-            <a:endParaRPr/>
           </a:p>
         </p:txBody>
       </p:sp>
@@ -7598,7 +6749,7 @@
           <a:noFill/>
         </p:spPr>
         <p:txBody>
-          <a:bodyPr wrap="square" lIns="0" tIns="0" rIns="0" bIns="0" anchor="ctr">
+          <a:bodyPr wrap="square" lIns="0" rIns="0" tIns="0" bIns="0" anchor="ctr">
             <a:spAutoFit/>
           </a:bodyPr>
           <a:lstStyle/>
@@ -7637,7 +6788,7 @@
           <a:noFill/>
         </p:spPr>
         <p:txBody>
-          <a:bodyPr wrap="square" lIns="0" tIns="0" rIns="0" bIns="0" anchor="t">
+          <a:bodyPr wrap="square" lIns="0" rIns="0" tIns="0" bIns="0" anchor="t">
             <a:spAutoFit/>
           </a:bodyPr>
           <a:lstStyle/>
@@ -7694,27 +6845,9 @@
                 <a:tableStyleId>{5C22544A-7EE6-4342-B048-85BDC9FD1C3A}</a:tableStyleId>
               </a:tblPr>
               <a:tblGrid>
-                <a:gridCol w="2897642">
-                  <a:extLst>
-                    <a:ext uri="{9D8B030D-6E8A-4147-A177-3AD203B41FA5}">
-                      <a16:colId xmlns:a16="http://schemas.microsoft.com/office/drawing/2014/main" val="20000"/>
-                    </a:ext>
-                  </a:extLst>
-                </a:gridCol>
-                <a:gridCol w="3380582">
-                  <a:extLst>
-                    <a:ext uri="{9D8B030D-6E8A-4147-A177-3AD203B41FA5}">
-                      <a16:colId xmlns:a16="http://schemas.microsoft.com/office/drawing/2014/main" val="20001"/>
-                    </a:ext>
-                  </a:extLst>
-                </a:gridCol>
-                <a:gridCol w="3380582">
-                  <a:extLst>
-                    <a:ext uri="{9D8B030D-6E8A-4147-A177-3AD203B41FA5}">
-                      <a16:colId xmlns:a16="http://schemas.microsoft.com/office/drawing/2014/main" val="20002"/>
-                    </a:ext>
-                  </a:extLst>
-                </a:gridCol>
+                <a:gridCol w="2897642"/>
+                <a:gridCol w="3380582"/>
+                <a:gridCol w="3380582"/>
               </a:tblGrid>
               <a:tr h="329184">
                 <a:tc>
@@ -7723,7 +6856,15 @@
                     <a:lstStyle/>
                     <a:p>
                       <a:pPr algn="l"/>
-                      <a:endParaRPr/>
+                      <a:r>
+                        <a:rPr sz="1200" b="1">
+                          <a:solidFill>
+                            <a:srgbClr val="FFFFFF"/>
+                          </a:solidFill>
+                          <a:latin typeface="Microsoft JhengHei"/>
+                        </a:rPr>
+                        <a:t/>
+                      </a:r>
                     </a:p>
                   </a:txBody>
                   <a:tcPr marL="45720" marR="45720" marT="18288" marB="18288" anchor="ctr">
@@ -7778,11 +6919,6 @@
                     </a:solidFill>
                   </a:tcPr>
                 </a:tc>
-                <a:extLst>
-                  <a:ext uri="{0D108BD9-81ED-4DB2-BD59-A6C34878D82A}">
-                    <a16:rowId xmlns:a16="http://schemas.microsoft.com/office/drawing/2014/main" val="10000"/>
-                  </a:ext>
-                </a:extLst>
               </a:tr>
               <a:tr h="292608">
                 <a:tc>
@@ -7854,11 +6990,6 @@
                     </a:solidFill>
                   </a:tcPr>
                 </a:tc>
-                <a:extLst>
-                  <a:ext uri="{0D108BD9-81ED-4DB2-BD59-A6C34878D82A}">
-                    <a16:rowId xmlns:a16="http://schemas.microsoft.com/office/drawing/2014/main" val="10001"/>
-                  </a:ext>
-                </a:extLst>
               </a:tr>
               <a:tr h="292608">
                 <a:tc>
@@ -7930,11 +7061,6 @@
                     </a:solidFill>
                   </a:tcPr>
                 </a:tc>
-                <a:extLst>
-                  <a:ext uri="{0D108BD9-81ED-4DB2-BD59-A6C34878D82A}">
-                    <a16:rowId xmlns:a16="http://schemas.microsoft.com/office/drawing/2014/main" val="10002"/>
-                  </a:ext>
-                </a:extLst>
               </a:tr>
               <a:tr h="292608">
                 <a:tc>
@@ -8006,11 +7132,6 @@
                     </a:solidFill>
                   </a:tcPr>
                 </a:tc>
-                <a:extLst>
-                  <a:ext uri="{0D108BD9-81ED-4DB2-BD59-A6C34878D82A}">
-                    <a16:rowId xmlns:a16="http://schemas.microsoft.com/office/drawing/2014/main" val="10003"/>
-                  </a:ext>
-                </a:extLst>
               </a:tr>
               <a:tr h="292608">
                 <a:tc>
@@ -8082,11 +7203,6 @@
                     </a:solidFill>
                   </a:tcPr>
                 </a:tc>
-                <a:extLst>
-                  <a:ext uri="{0D108BD9-81ED-4DB2-BD59-A6C34878D82A}">
-                    <a16:rowId xmlns:a16="http://schemas.microsoft.com/office/drawing/2014/main" val="10004"/>
-                  </a:ext>
-                </a:extLst>
               </a:tr>
             </a:tbl>
           </a:graphicData>
@@ -8101,7 +7217,7 @@
 </file>
 
 <file path=ppt/slides/slide11.xml><?xml version="1.0" encoding="utf-8"?>
-<p:sld xmlns:a="http://schemas.openxmlformats.org/drawingml/2006/main" xmlns:r="http://schemas.openxmlformats.org/officeDocument/2006/relationships" xmlns:p="http://schemas.openxmlformats.org/presentationml/2006/main">
+<p:sld xmlns:a="http://schemas.openxmlformats.org/drawingml/2006/main" xmlns:p="http://schemas.openxmlformats.org/presentationml/2006/main" xmlns:r="http://schemas.openxmlformats.org/officeDocument/2006/relationships">
   <p:cSld>
     <p:spTree>
       <p:nvGrpSpPr>
@@ -8109,14 +7225,7 @@
         <p:cNvGrpSpPr/>
         <p:nvPr/>
       </p:nvGrpSpPr>
-      <p:grpSpPr>
-        <a:xfrm>
-          <a:off x="0" y="0"/>
-          <a:ext cx="0" cy="0"/>
-          <a:chOff x="0" y="0"/>
-          <a:chExt cx="0" cy="0"/>
-        </a:xfrm>
-      </p:grpSpPr>
+      <p:grpSpPr/>
       <p:sp>
         <p:nvSpPr>
           <p:cNvPr id="2" name="TextBox 1"/>
@@ -8134,7 +7243,7 @@
           <a:noFill/>
         </p:spPr>
         <p:txBody>
-          <a:bodyPr wrap="square" lIns="0" tIns="0" rIns="0" bIns="0" anchor="t">
+          <a:bodyPr wrap="square" lIns="0" rIns="0" tIns="0" bIns="0" anchor="t">
             <a:spAutoFit/>
           </a:bodyPr>
           <a:lstStyle/>
@@ -8173,7 +7282,7 @@
           <a:noFill/>
         </p:spPr>
         <p:txBody>
-          <a:bodyPr wrap="square" lIns="0" tIns="0" rIns="0" bIns="0" anchor="t">
+          <a:bodyPr wrap="square" lIns="0" rIns="0" tIns="0" bIns="0" anchor="t">
             <a:spAutoFit/>
           </a:bodyPr>
           <a:lstStyle/>
@@ -8212,7 +7321,7 @@
           <a:noFill/>
         </p:spPr>
         <p:txBody>
-          <a:bodyPr wrap="square" lIns="0" tIns="0" rIns="0" bIns="0" anchor="t">
+          <a:bodyPr wrap="square" lIns="0" rIns="0" tIns="0" bIns="0" anchor="t">
             <a:spAutoFit/>
           </a:bodyPr>
           <a:lstStyle/>
@@ -8275,7 +7384,6 @@
           <a:lstStyle/>
           <a:p>
             <a:pPr algn="ctr"/>
-            <a:endParaRPr/>
           </a:p>
         </p:txBody>
       </p:sp>
@@ -8288,7 +7396,7 @@
         <p:spPr>
           <a:xfrm>
             <a:off x="658368" y="1783080"/>
-            <a:ext cx="45720" cy="750037"/>
+            <a:ext cx="45720" cy="750658"/>
           </a:xfrm>
           <a:prstGeom prst="rect">
             <a:avLst/>
@@ -8320,7 +7428,6 @@
           <a:lstStyle/>
           <a:p>
             <a:pPr algn="ctr"/>
-            <a:endParaRPr/>
           </a:p>
         </p:txBody>
       </p:sp>
@@ -8333,7 +7440,7 @@
         <p:spPr>
           <a:xfrm>
             <a:off x="804672" y="1755648"/>
-            <a:ext cx="2408822" cy="841477"/>
+            <a:ext cx="2408822" cy="842098"/>
           </a:xfrm>
           <a:prstGeom prst="rect">
             <a:avLst/>
@@ -8341,7 +7448,7 @@
           <a:noFill/>
         </p:spPr>
         <p:txBody>
-          <a:bodyPr wrap="square" lIns="0" tIns="0" rIns="0" bIns="0" anchor="ctr">
+          <a:bodyPr wrap="square" lIns="0" rIns="0" tIns="0" bIns="0" anchor="ctr">
             <a:spAutoFit/>
           </a:bodyPr>
           <a:lstStyle/>
@@ -8372,7 +7479,7 @@
         <p:spPr>
           <a:xfrm>
             <a:off x="3268358" y="1755648"/>
-            <a:ext cx="3152759" cy="841477"/>
+            <a:ext cx="3152759" cy="842098"/>
           </a:xfrm>
           <a:prstGeom prst="rect">
             <a:avLst/>
@@ -8380,7 +7487,7 @@
           <a:noFill/>
         </p:spPr>
         <p:txBody>
-          <a:bodyPr wrap="square" lIns="0" tIns="0" rIns="0" bIns="0" anchor="ctr">
+          <a:bodyPr wrap="square" lIns="0" rIns="0" tIns="0" bIns="0" anchor="ctr">
             <a:spAutoFit/>
           </a:bodyPr>
           <a:lstStyle/>
@@ -8410,8 +7517,8 @@
         </p:nvSpPr>
         <p:spPr>
           <a:xfrm>
-            <a:off x="7183343" y="1755648"/>
-            <a:ext cx="4240255" cy="841477"/>
+            <a:off x="6530845" y="1755648"/>
+            <a:ext cx="4892753" cy="842098"/>
           </a:xfrm>
           <a:prstGeom prst="rect">
             <a:avLst/>
@@ -8419,7 +7526,7 @@
           <a:noFill/>
         </p:spPr>
         <p:txBody>
-          <a:bodyPr wrap="square" lIns="0" tIns="0" rIns="0" bIns="0" anchor="ctr">
+          <a:bodyPr wrap="square" lIns="0" rIns="0" tIns="0" bIns="0" anchor="ctr">
             <a:spAutoFit/>
           </a:bodyPr>
           <a:lstStyle/>
@@ -8449,8 +7556,8 @@
         </p:nvSpPr>
         <p:spPr>
           <a:xfrm>
-            <a:off x="658368" y="2715997"/>
-            <a:ext cx="45720" cy="750037"/>
+            <a:off x="658368" y="2716618"/>
+            <a:ext cx="45720" cy="750658"/>
           </a:xfrm>
           <a:prstGeom prst="rect">
             <a:avLst/>
@@ -8482,7 +7589,6 @@
           <a:lstStyle/>
           <a:p>
             <a:pPr algn="ctr"/>
-            <a:endParaRPr/>
           </a:p>
         </p:txBody>
       </p:sp>
@@ -8494,8 +7600,8 @@
         </p:nvSpPr>
         <p:spPr>
           <a:xfrm>
-            <a:off x="804672" y="2688565"/>
-            <a:ext cx="2408822" cy="841477"/>
+            <a:off x="804672" y="2689186"/>
+            <a:ext cx="2408822" cy="842098"/>
           </a:xfrm>
           <a:prstGeom prst="rect">
             <a:avLst/>
@@ -8503,7 +7609,7 @@
           <a:noFill/>
         </p:spPr>
         <p:txBody>
-          <a:bodyPr wrap="square" lIns="0" tIns="0" rIns="0" bIns="0" anchor="ctr">
+          <a:bodyPr wrap="square" lIns="0" rIns="0" tIns="0" bIns="0" anchor="ctr">
             <a:spAutoFit/>
           </a:bodyPr>
           <a:lstStyle/>
@@ -8533,8 +7639,8 @@
         </p:nvSpPr>
         <p:spPr>
           <a:xfrm>
-            <a:off x="3268358" y="2688565"/>
-            <a:ext cx="3152759" cy="841477"/>
+            <a:off x="3268358" y="2689186"/>
+            <a:ext cx="3152759" cy="842098"/>
           </a:xfrm>
           <a:prstGeom prst="rect">
             <a:avLst/>
@@ -8542,7 +7648,7 @@
           <a:noFill/>
         </p:spPr>
         <p:txBody>
-          <a:bodyPr wrap="square" lIns="0" tIns="0" rIns="0" bIns="0" anchor="ctr">
+          <a:bodyPr wrap="square" lIns="0" rIns="0" tIns="0" bIns="0" anchor="ctr">
             <a:spAutoFit/>
           </a:bodyPr>
           <a:lstStyle/>
@@ -8572,8 +7678,8 @@
         </p:nvSpPr>
         <p:spPr>
           <a:xfrm>
-            <a:off x="7183343" y="2688565"/>
-            <a:ext cx="4240255" cy="841477"/>
+            <a:off x="6530845" y="2689186"/>
+            <a:ext cx="4892753" cy="842098"/>
           </a:xfrm>
           <a:prstGeom prst="rect">
             <a:avLst/>
@@ -8581,7 +7687,7 @@
           <a:noFill/>
         </p:spPr>
         <p:txBody>
-          <a:bodyPr wrap="square" lIns="0" tIns="0" rIns="0" bIns="0" anchor="ctr">
+          <a:bodyPr wrap="square" lIns="0" rIns="0" tIns="0" bIns="0" anchor="ctr">
             <a:spAutoFit/>
           </a:bodyPr>
           <a:lstStyle/>
@@ -8611,7 +7717,7 @@
         </p:nvSpPr>
         <p:spPr>
           <a:xfrm>
-            <a:off x="658368" y="3658059"/>
+            <a:off x="658368" y="3659300"/>
             <a:ext cx="3527450" cy="2121408"/>
           </a:xfrm>
           <a:prstGeom prst="roundRect">
@@ -8648,7 +7754,6 @@
           <a:lstStyle/>
           <a:p>
             <a:pPr algn="ctr"/>
-            <a:endParaRPr/>
           </a:p>
         </p:txBody>
       </p:sp>
@@ -8660,7 +7765,7 @@
         </p:nvSpPr>
         <p:spPr>
           <a:xfrm>
-            <a:off x="768096" y="3786075"/>
+            <a:off x="768096" y="3787316"/>
             <a:ext cx="3307994" cy="566928"/>
           </a:xfrm>
           <a:prstGeom prst="rect">
@@ -8669,7 +7774,7 @@
           <a:noFill/>
         </p:spPr>
         <p:txBody>
-          <a:bodyPr wrap="square" lIns="0" tIns="0" rIns="0" bIns="0" anchor="t">
+          <a:bodyPr wrap="square" lIns="0" rIns="0" tIns="0" bIns="0" anchor="t">
             <a:spAutoFit/>
           </a:bodyPr>
           <a:lstStyle/>
@@ -8699,7 +7804,7 @@
         </p:nvSpPr>
         <p:spPr>
           <a:xfrm>
-            <a:off x="1855927" y="4407867"/>
+            <a:off x="1855927" y="4409108"/>
             <a:ext cx="1132332" cy="274320"/>
           </a:xfrm>
           <a:prstGeom prst="roundRect">
@@ -8734,7 +7839,6 @@
           <a:lstStyle/>
           <a:p>
             <a:pPr algn="ctr"/>
-            <a:endParaRPr/>
           </a:p>
         </p:txBody>
       </p:sp>
@@ -8746,7 +7850,7 @@
         </p:nvSpPr>
         <p:spPr>
           <a:xfrm>
-            <a:off x="1855927" y="4407867"/>
+            <a:off x="1855927" y="4409108"/>
             <a:ext cx="1132332" cy="274320"/>
           </a:xfrm>
           <a:prstGeom prst="rect">
@@ -8755,7 +7859,7 @@
           <a:noFill/>
         </p:spPr>
         <p:txBody>
-          <a:bodyPr wrap="square" lIns="0" tIns="0" rIns="0" bIns="0" anchor="ctr">
+          <a:bodyPr wrap="square" lIns="0" rIns="0" tIns="0" bIns="0" anchor="ctr">
             <a:spAutoFit/>
           </a:bodyPr>
           <a:lstStyle/>
@@ -8785,7 +7889,7 @@
         </p:nvSpPr>
         <p:spPr>
           <a:xfrm>
-            <a:off x="768096" y="4791915"/>
+            <a:off x="768096" y="4793156"/>
             <a:ext cx="3307994" cy="859535"/>
           </a:xfrm>
           <a:prstGeom prst="rect">
@@ -8794,7 +7898,7 @@
           <a:noFill/>
         </p:spPr>
         <p:txBody>
-          <a:bodyPr wrap="square" lIns="0" tIns="0" rIns="0" bIns="0" anchor="t">
+          <a:bodyPr wrap="square" lIns="0" rIns="0" tIns="0" bIns="0" anchor="t">
             <a:spAutoFit/>
           </a:bodyPr>
           <a:lstStyle/>
@@ -8840,7 +7944,7 @@
         </p:nvSpPr>
         <p:spPr>
           <a:xfrm>
-            <a:off x="4332122" y="3658059"/>
+            <a:off x="4332122" y="3659300"/>
             <a:ext cx="3527450" cy="2121408"/>
           </a:xfrm>
           <a:prstGeom prst="roundRect">
@@ -8877,7 +7981,6 @@
           <a:lstStyle/>
           <a:p>
             <a:pPr algn="ctr"/>
-            <a:endParaRPr/>
           </a:p>
         </p:txBody>
       </p:sp>
@@ -8889,7 +7992,7 @@
         </p:nvSpPr>
         <p:spPr>
           <a:xfrm>
-            <a:off x="4441850" y="3786075"/>
+            <a:off x="4441850" y="3787316"/>
             <a:ext cx="3307994" cy="566928"/>
           </a:xfrm>
           <a:prstGeom prst="rect">
@@ -8898,7 +8001,7 @@
           <a:noFill/>
         </p:spPr>
         <p:txBody>
-          <a:bodyPr wrap="square" lIns="0" tIns="0" rIns="0" bIns="0" anchor="t">
+          <a:bodyPr wrap="square" lIns="0" rIns="0" tIns="0" bIns="0" anchor="t">
             <a:spAutoFit/>
           </a:bodyPr>
           <a:lstStyle/>
@@ -8928,7 +8031,7 @@
         </p:nvSpPr>
         <p:spPr>
           <a:xfrm>
-            <a:off x="5586831" y="4407867"/>
+            <a:off x="5586831" y="4409108"/>
             <a:ext cx="1018032" cy="274320"/>
           </a:xfrm>
           <a:prstGeom prst="roundRect">
@@ -8963,7 +8066,6 @@
           <a:lstStyle/>
           <a:p>
             <a:pPr algn="ctr"/>
-            <a:endParaRPr/>
           </a:p>
         </p:txBody>
       </p:sp>
@@ -8975,7 +8077,7 @@
         </p:nvSpPr>
         <p:spPr>
           <a:xfrm>
-            <a:off x="5586831" y="4407867"/>
+            <a:off x="5586831" y="4409108"/>
             <a:ext cx="1018032" cy="274320"/>
           </a:xfrm>
           <a:prstGeom prst="rect">
@@ -8984,7 +8086,7 @@
           <a:noFill/>
         </p:spPr>
         <p:txBody>
-          <a:bodyPr wrap="square" lIns="0" tIns="0" rIns="0" bIns="0" anchor="ctr">
+          <a:bodyPr wrap="square" lIns="0" rIns="0" tIns="0" bIns="0" anchor="ctr">
             <a:spAutoFit/>
           </a:bodyPr>
           <a:lstStyle/>
@@ -9014,7 +8116,7 @@
         </p:nvSpPr>
         <p:spPr>
           <a:xfrm>
-            <a:off x="4441850" y="4791915"/>
+            <a:off x="4441850" y="4793156"/>
             <a:ext cx="3307994" cy="859535"/>
           </a:xfrm>
           <a:prstGeom prst="rect">
@@ -9023,7 +8125,7 @@
           <a:noFill/>
         </p:spPr>
         <p:txBody>
-          <a:bodyPr wrap="square" lIns="0" tIns="0" rIns="0" bIns="0" anchor="t">
+          <a:bodyPr wrap="square" lIns="0" rIns="0" tIns="0" bIns="0" anchor="t">
             <a:spAutoFit/>
           </a:bodyPr>
           <a:lstStyle/>
@@ -9069,7 +8171,7 @@
         </p:nvSpPr>
         <p:spPr>
           <a:xfrm>
-            <a:off x="8005876" y="3658059"/>
+            <a:off x="8005876" y="3659300"/>
             <a:ext cx="3527450" cy="2121408"/>
           </a:xfrm>
           <a:prstGeom prst="roundRect">
@@ -9106,7 +8208,6 @@
           <a:lstStyle/>
           <a:p>
             <a:pPr algn="ctr"/>
-            <a:endParaRPr/>
           </a:p>
         </p:txBody>
       </p:sp>
@@ -9118,7 +8219,7 @@
         </p:nvSpPr>
         <p:spPr>
           <a:xfrm>
-            <a:off x="8115604" y="3786075"/>
+            <a:off x="8115604" y="3787316"/>
             <a:ext cx="3307994" cy="566928"/>
           </a:xfrm>
           <a:prstGeom prst="rect">
@@ -9127,7 +8228,7 @@
           <a:noFill/>
         </p:spPr>
         <p:txBody>
-          <a:bodyPr wrap="square" lIns="0" tIns="0" rIns="0" bIns="0" anchor="t">
+          <a:bodyPr wrap="square" lIns="0" rIns="0" tIns="0" bIns="0" anchor="t">
             <a:spAutoFit/>
           </a:bodyPr>
           <a:lstStyle/>
@@ -9144,7 +8245,7 @@
                 </a:solidFill>
                 <a:latin typeface="Microsoft JhengHei"/>
               </a:rPr>
-              <a:t>六個月之後 / 不做的話</a:t>
+              <a:t>六個月之後你手上多三樣</a:t>
             </a:r>
           </a:p>
         </p:txBody>
@@ -9157,7 +8258,7 @@
         </p:nvSpPr>
         <p:spPr>
           <a:xfrm>
-            <a:off x="9336786" y="4407867"/>
+            <a:off x="9336786" y="4409108"/>
             <a:ext cx="865632" cy="274320"/>
           </a:xfrm>
           <a:prstGeom prst="roundRect">
@@ -9192,7 +8293,6 @@
           <a:lstStyle/>
           <a:p>
             <a:pPr algn="ctr"/>
-            <a:endParaRPr/>
           </a:p>
         </p:txBody>
       </p:sp>
@@ -9204,7 +8304,7 @@
         </p:nvSpPr>
         <p:spPr>
           <a:xfrm>
-            <a:off x="9336786" y="4407867"/>
+            <a:off x="9336786" y="4409108"/>
             <a:ext cx="865632" cy="274320"/>
           </a:xfrm>
           <a:prstGeom prst="rect">
@@ -9213,7 +8313,7 @@
           <a:noFill/>
         </p:spPr>
         <p:txBody>
-          <a:bodyPr wrap="square" lIns="0" tIns="0" rIns="0" bIns="0" anchor="ctr">
+          <a:bodyPr wrap="square" lIns="0" rIns="0" tIns="0" bIns="0" anchor="ctr">
             <a:spAutoFit/>
           </a:bodyPr>
           <a:lstStyle/>
@@ -9243,7 +8343,7 @@
         </p:nvSpPr>
         <p:spPr>
           <a:xfrm>
-            <a:off x="8115604" y="4791915"/>
+            <a:off x="8115604" y="4793156"/>
             <a:ext cx="3307994" cy="859535"/>
           </a:xfrm>
           <a:prstGeom prst="rect">
@@ -9252,10 +8352,42 @@
           <a:noFill/>
         </p:spPr>
         <p:txBody>
-          <a:bodyPr wrap="square" lIns="0" tIns="0" rIns="0" bIns="0" anchor="t">
+          <a:bodyPr wrap="square" lIns="0" rIns="0" tIns="0" bIns="0" anchor="t">
             <a:spAutoFit/>
           </a:bodyPr>
           <a:lstStyle/>
+          <a:p>
+            <a:pPr algn="ctr">
+              <a:lnSpc>
+                <a:spcPct val="135000"/>
+              </a:lnSpc>
+            </a:pPr>
+            <a:r>
+              <a:rPr sz="1200" b="0">
+                <a:solidFill>
+                  <a:srgbClr val="6B7885"/>
+                </a:solidFill>
+                <a:latin typeface="Microsoft JhengHei"/>
+              </a:rPr>
+              <a:t>六個月後你手上多三樣:可稽核錯誤率 ·</a:t>
+            </a:r>
+          </a:p>
+          <a:p>
+            <a:pPr algn="ctr">
+              <a:lnSpc>
+                <a:spcPct val="135000"/>
+              </a:lnSpc>
+            </a:pPr>
+            <a:r>
+              <a:rPr sz="1200" b="0">
+                <a:solidFill>
+                  <a:srgbClr val="6B7885"/>
+                </a:solidFill>
+                <a:latin typeface="Microsoft JhengHei"/>
+              </a:rPr>
+              <a:t>脈絡判斷層 · 對照實驗結果</a:t>
+            </a:r>
+          </a:p>
           <a:p>
             <a:pPr algn="ctr">
               <a:lnSpc>
@@ -9272,22 +8404,6 @@
               <a:t>不做:客戶續等 · 小客戶無人看過</a:t>
             </a:r>
           </a:p>
-          <a:p>
-            <a:pPr algn="ctr">
-              <a:lnSpc>
-                <a:spcPct val="135000"/>
-              </a:lnSpc>
-            </a:pPr>
-            <a:r>
-              <a:rPr sz="1200" b="0">
-                <a:solidFill>
-                  <a:srgbClr val="6B7885"/>
-                </a:solidFill>
-                <a:latin typeface="Microsoft JhengHei"/>
-              </a:rPr>
-              <a:t>移交後天花板:約 85% 無人看過</a:t>
-            </a:r>
-          </a:p>
         </p:txBody>
       </p:sp>
       <p:sp>
@@ -9298,8 +8414,8 @@
         </p:nvSpPr>
         <p:spPr>
           <a:xfrm>
-            <a:off x="658368" y="5907483"/>
-            <a:ext cx="9658807" cy="603044"/>
+            <a:off x="658368" y="5908724"/>
+            <a:ext cx="9658807" cy="601803"/>
           </a:xfrm>
           <a:prstGeom prst="roundRect">
             <a:avLst>
@@ -9333,7 +8449,6 @@
           <a:lstStyle/>
           <a:p>
             <a:pPr algn="ctr"/>
-            <a:endParaRPr/>
           </a:p>
         </p:txBody>
       </p:sp>
@@ -9345,8 +8460,8 @@
         </p:nvSpPr>
         <p:spPr>
           <a:xfrm>
-            <a:off x="841247" y="5907483"/>
-            <a:ext cx="9293047" cy="603044"/>
+            <a:off x="841247" y="5908724"/>
+            <a:ext cx="9293047" cy="601803"/>
           </a:xfrm>
           <a:prstGeom prst="rect">
             <a:avLst/>
@@ -9354,7 +8469,7 @@
           <a:noFill/>
         </p:spPr>
         <p:txBody>
-          <a:bodyPr wrap="square" lIns="0" tIns="0" rIns="0" bIns="0" anchor="ctr">
+          <a:bodyPr wrap="square" lIns="0" rIns="0" tIns="0" bIns="0" anchor="ctr">
             <a:spAutoFit/>
           </a:bodyPr>
           <a:lstStyle/>
@@ -9385,7 +8500,7 @@
 </file>
 
 <file path=ppt/slides/slide12.xml><?xml version="1.0" encoding="utf-8"?>
-<p:sld xmlns:a="http://schemas.openxmlformats.org/drawingml/2006/main" xmlns:r="http://schemas.openxmlformats.org/officeDocument/2006/relationships" xmlns:p="http://schemas.openxmlformats.org/presentationml/2006/main">
+<p:sld xmlns:a="http://schemas.openxmlformats.org/drawingml/2006/main" xmlns:p="http://schemas.openxmlformats.org/presentationml/2006/main" xmlns:r="http://schemas.openxmlformats.org/officeDocument/2006/relationships">
   <p:cSld>
     <p:spTree>
       <p:nvGrpSpPr>
@@ -9393,14 +8508,7 @@
         <p:cNvGrpSpPr/>
         <p:nvPr/>
       </p:nvGrpSpPr>
-      <p:grpSpPr>
-        <a:xfrm>
-          <a:off x="0" y="0"/>
-          <a:ext cx="0" cy="0"/>
-          <a:chOff x="0" y="0"/>
-          <a:chExt cx="0" cy="0"/>
-        </a:xfrm>
-      </p:grpSpPr>
+      <p:grpSpPr/>
       <p:sp>
         <p:nvSpPr>
           <p:cNvPr id="2" name="TextBox 1"/>
@@ -9418,7 +8526,7 @@
           <a:noFill/>
         </p:spPr>
         <p:txBody>
-          <a:bodyPr wrap="square" lIns="0" tIns="0" rIns="0" bIns="0" anchor="t">
+          <a:bodyPr wrap="square" lIns="0" rIns="0" tIns="0" bIns="0" anchor="t">
             <a:spAutoFit/>
           </a:bodyPr>
           <a:lstStyle/>
@@ -9481,7 +8589,6 @@
           <a:lstStyle/>
           <a:p>
             <a:pPr algn="ctr"/>
-            <a:endParaRPr/>
           </a:p>
         </p:txBody>
       </p:sp>
@@ -9502,7 +8609,7 @@
           <a:noFill/>
         </p:spPr>
         <p:txBody>
-          <a:bodyPr wrap="square" lIns="0" tIns="0" rIns="0" bIns="0" anchor="t">
+          <a:bodyPr wrap="square" lIns="0" rIns="0" tIns="0" bIns="0" anchor="t">
             <a:spAutoFit/>
           </a:bodyPr>
           <a:lstStyle/>
@@ -9541,7 +8648,7 @@
           <a:noFill/>
         </p:spPr>
         <p:txBody>
-          <a:bodyPr wrap="square" lIns="0" tIns="0" rIns="0" bIns="0" anchor="t">
+          <a:bodyPr wrap="square" lIns="0" rIns="0" tIns="0" bIns="0" anchor="t">
             <a:spAutoFit/>
           </a:bodyPr>
           <a:lstStyle/>
@@ -9580,7 +8687,7 @@
           <a:noFill/>
         </p:spPr>
         <p:txBody>
-          <a:bodyPr wrap="square" lIns="0" tIns="0" rIns="0" bIns="0" anchor="t">
+          <a:bodyPr wrap="square" lIns="0" rIns="0" tIns="0" bIns="0" anchor="t">
             <a:spAutoFit/>
           </a:bodyPr>
           <a:lstStyle/>
@@ -9619,7 +8726,7 @@
           <a:noFill/>
         </p:spPr>
         <p:txBody>
-          <a:bodyPr wrap="square" lIns="0" tIns="0" rIns="0" bIns="0" anchor="t">
+          <a:bodyPr wrap="square" lIns="0" rIns="0" tIns="0" bIns="0" anchor="t">
             <a:spAutoFit/>
           </a:bodyPr>
           <a:lstStyle/>
@@ -9658,7 +8765,7 @@
           <a:noFill/>
         </p:spPr>
         <p:txBody>
-          <a:bodyPr wrap="square" lIns="0" tIns="0" rIns="0" bIns="0" anchor="t">
+          <a:bodyPr wrap="square" lIns="0" rIns="0" tIns="0" bIns="0" anchor="t">
             <a:spAutoFit/>
           </a:bodyPr>
           <a:lstStyle/>
@@ -9697,7 +8804,7 @@
           <a:noFill/>
         </p:spPr>
         <p:txBody>
-          <a:bodyPr wrap="square" lIns="0" tIns="0" rIns="0" bIns="0" anchor="t">
+          <a:bodyPr wrap="square" lIns="0" rIns="0" tIns="0" bIns="0" anchor="t">
             <a:spAutoFit/>
           </a:bodyPr>
           <a:lstStyle/>
@@ -9736,7 +8843,7 @@
           <a:noFill/>
         </p:spPr>
         <p:txBody>
-          <a:bodyPr wrap="square" lIns="0" tIns="0" rIns="0" bIns="0" anchor="t">
+          <a:bodyPr wrap="square" lIns="0" rIns="0" tIns="0" bIns="0" anchor="t">
             <a:spAutoFit/>
           </a:bodyPr>
           <a:lstStyle/>
@@ -9775,7 +8882,7 @@
           <a:noFill/>
         </p:spPr>
         <p:txBody>
-          <a:bodyPr wrap="square" lIns="0" tIns="0" rIns="0" bIns="0" anchor="t">
+          <a:bodyPr wrap="square" lIns="0" rIns="0" tIns="0" bIns="0" anchor="t">
             <a:spAutoFit/>
           </a:bodyPr>
           <a:lstStyle/>
@@ -9814,7 +8921,7 @@
           <a:noFill/>
         </p:spPr>
         <p:txBody>
-          <a:bodyPr wrap="square" lIns="0" tIns="0" rIns="0" bIns="0" anchor="t">
+          <a:bodyPr wrap="square" lIns="0" rIns="0" tIns="0" bIns="0" anchor="t">
             <a:spAutoFit/>
           </a:bodyPr>
           <a:lstStyle/>
@@ -9853,7 +8960,7 @@
           <a:noFill/>
         </p:spPr>
         <p:txBody>
-          <a:bodyPr wrap="square" lIns="0" tIns="0" rIns="0" bIns="0" anchor="t">
+          <a:bodyPr wrap="square" lIns="0" rIns="0" tIns="0" bIns="0" anchor="t">
             <a:spAutoFit/>
           </a:bodyPr>
           <a:lstStyle/>
@@ -9892,7 +8999,7 @@
           <a:noFill/>
         </p:spPr>
         <p:txBody>
-          <a:bodyPr wrap="square" lIns="0" tIns="0" rIns="0" bIns="0" anchor="t">
+          <a:bodyPr wrap="square" lIns="0" rIns="0" tIns="0" bIns="0" anchor="t">
             <a:spAutoFit/>
           </a:bodyPr>
           <a:lstStyle/>
@@ -9931,7 +9038,7 @@
           <a:noFill/>
         </p:spPr>
         <p:txBody>
-          <a:bodyPr wrap="square" lIns="0" tIns="0" rIns="0" bIns="0" anchor="t">
+          <a:bodyPr wrap="square" lIns="0" rIns="0" tIns="0" bIns="0" anchor="t">
             <a:spAutoFit/>
           </a:bodyPr>
           <a:lstStyle/>
@@ -9970,7 +9077,7 @@
           <a:noFill/>
         </p:spPr>
         <p:txBody>
-          <a:bodyPr wrap="square" lIns="0" tIns="0" rIns="0" bIns="0" anchor="t">
+          <a:bodyPr wrap="square" lIns="0" rIns="0" tIns="0" bIns="0" anchor="t">
             <a:spAutoFit/>
           </a:bodyPr>
           <a:lstStyle/>
@@ -10001,7 +9108,7 @@
 </file>
 
 <file path=ppt/slides/slide2.xml><?xml version="1.0" encoding="utf-8"?>
-<p:sld xmlns:a="http://schemas.openxmlformats.org/drawingml/2006/main" xmlns:r="http://schemas.openxmlformats.org/officeDocument/2006/relationships" xmlns:p="http://schemas.openxmlformats.org/presentationml/2006/main">
+<p:sld xmlns:a="http://schemas.openxmlformats.org/drawingml/2006/main" xmlns:p="http://schemas.openxmlformats.org/presentationml/2006/main" xmlns:r="http://schemas.openxmlformats.org/officeDocument/2006/relationships">
   <p:cSld>
     <p:spTree>
       <p:nvGrpSpPr>
@@ -10009,14 +9116,7 @@
         <p:cNvGrpSpPr/>
         <p:nvPr/>
       </p:nvGrpSpPr>
-      <p:grpSpPr>
-        <a:xfrm>
-          <a:off x="0" y="0"/>
-          <a:ext cx="0" cy="0"/>
-          <a:chOff x="0" y="0"/>
-          <a:chExt cx="0" cy="0"/>
-        </a:xfrm>
-      </p:grpSpPr>
+      <p:grpSpPr/>
       <p:sp>
         <p:nvSpPr>
           <p:cNvPr id="2" name="TextBox 1"/>
@@ -10034,7 +9134,7 @@
           <a:noFill/>
         </p:spPr>
         <p:txBody>
-          <a:bodyPr wrap="square" lIns="0" tIns="0" rIns="0" bIns="0" anchor="t">
+          <a:bodyPr wrap="square" lIns="0" rIns="0" tIns="0" bIns="0" anchor="t">
             <a:spAutoFit/>
           </a:bodyPr>
           <a:lstStyle/>
@@ -10073,7 +9173,7 @@
           <a:noFill/>
         </p:spPr>
         <p:txBody>
-          <a:bodyPr wrap="square" lIns="0" tIns="0" rIns="0" bIns="0" anchor="t">
+          <a:bodyPr wrap="square" lIns="0" rIns="0" tIns="0" bIns="0" anchor="t">
             <a:spAutoFit/>
           </a:bodyPr>
           <a:lstStyle/>
@@ -10112,7 +9212,7 @@
           <a:noFill/>
         </p:spPr>
         <p:txBody>
-          <a:bodyPr wrap="square" lIns="0" tIns="0" rIns="0" bIns="0" anchor="t">
+          <a:bodyPr wrap="square" lIns="0" rIns="0" tIns="0" bIns="0" anchor="t">
             <a:spAutoFit/>
           </a:bodyPr>
           <a:lstStyle/>
@@ -10175,7 +9275,6 @@
           <a:lstStyle/>
           <a:p>
             <a:pPr algn="ctr"/>
-            <a:endParaRPr/>
           </a:p>
         </p:txBody>
       </p:sp>
@@ -10224,7 +9323,6 @@
           <a:lstStyle/>
           <a:p>
             <a:pPr algn="ctr"/>
-            <a:endParaRPr/>
           </a:p>
         </p:txBody>
       </p:sp>
@@ -10245,7 +9343,7 @@
           <a:noFill/>
         </p:spPr>
         <p:txBody>
-          <a:bodyPr wrap="square" lIns="0" tIns="0" rIns="0" bIns="0" anchor="t">
+          <a:bodyPr wrap="square" lIns="0" rIns="0" tIns="0" bIns="0" anchor="t">
             <a:spAutoFit/>
           </a:bodyPr>
           <a:lstStyle/>
@@ -10310,7 +9408,6 @@
           <a:lstStyle/>
           <a:p>
             <a:pPr algn="ctr"/>
-            <a:endParaRPr/>
           </a:p>
         </p:txBody>
       </p:sp>
@@ -10331,7 +9428,7 @@
           <a:noFill/>
         </p:spPr>
         <p:txBody>
-          <a:bodyPr wrap="square" lIns="0" tIns="0" rIns="0" bIns="0" anchor="ctr">
+          <a:bodyPr wrap="square" lIns="0" rIns="0" tIns="0" bIns="0" anchor="ctr">
             <a:spAutoFit/>
           </a:bodyPr>
           <a:lstStyle/>
@@ -10370,7 +9467,7 @@
           <a:noFill/>
         </p:spPr>
         <p:txBody>
-          <a:bodyPr wrap="square" lIns="0" tIns="0" rIns="0" bIns="0" anchor="t">
+          <a:bodyPr wrap="square" lIns="0" rIns="0" tIns="0" bIns="0" anchor="t">
             <a:spAutoFit/>
           </a:bodyPr>
           <a:lstStyle/>
@@ -10453,7 +9550,6 @@
           <a:lstStyle/>
           <a:p>
             <a:pPr algn="ctr"/>
-            <a:endParaRPr/>
           </a:p>
         </p:txBody>
       </p:sp>
@@ -10474,7 +9570,7 @@
           <a:noFill/>
         </p:spPr>
         <p:txBody>
-          <a:bodyPr wrap="square" lIns="0" tIns="0" rIns="0" bIns="0" anchor="t">
+          <a:bodyPr wrap="square" lIns="0" rIns="0" tIns="0" bIns="0" anchor="t">
             <a:spAutoFit/>
           </a:bodyPr>
           <a:lstStyle/>
@@ -10539,7 +9635,6 @@
           <a:lstStyle/>
           <a:p>
             <a:pPr algn="ctr"/>
-            <a:endParaRPr/>
           </a:p>
         </p:txBody>
       </p:sp>
@@ -10560,7 +9655,7 @@
           <a:noFill/>
         </p:spPr>
         <p:txBody>
-          <a:bodyPr wrap="square" lIns="0" tIns="0" rIns="0" bIns="0" anchor="ctr">
+          <a:bodyPr wrap="square" lIns="0" rIns="0" tIns="0" bIns="0" anchor="ctr">
             <a:spAutoFit/>
           </a:bodyPr>
           <a:lstStyle/>
@@ -10599,7 +9694,7 @@
           <a:noFill/>
         </p:spPr>
         <p:txBody>
-          <a:bodyPr wrap="square" lIns="0" tIns="0" rIns="0" bIns="0" anchor="t">
+          <a:bodyPr wrap="square" lIns="0" rIns="0" tIns="0" bIns="0" anchor="t">
             <a:spAutoFit/>
           </a:bodyPr>
           <a:lstStyle/>
@@ -10698,7 +9793,6 @@
           <a:lstStyle/>
           <a:p>
             <a:pPr algn="ctr"/>
-            <a:endParaRPr/>
           </a:p>
         </p:txBody>
       </p:sp>
@@ -10719,7 +9813,7 @@
           <a:noFill/>
         </p:spPr>
         <p:txBody>
-          <a:bodyPr wrap="square" lIns="0" tIns="0" rIns="0" bIns="0" anchor="t">
+          <a:bodyPr wrap="square" lIns="0" rIns="0" tIns="0" bIns="0" anchor="t">
             <a:spAutoFit/>
           </a:bodyPr>
           <a:lstStyle/>
@@ -10784,7 +9878,6 @@
           <a:lstStyle/>
           <a:p>
             <a:pPr algn="ctr"/>
-            <a:endParaRPr/>
           </a:p>
         </p:txBody>
       </p:sp>
@@ -10805,7 +9898,7 @@
           <a:noFill/>
         </p:spPr>
         <p:txBody>
-          <a:bodyPr wrap="square" lIns="0" tIns="0" rIns="0" bIns="0" anchor="ctr">
+          <a:bodyPr wrap="square" lIns="0" rIns="0" tIns="0" bIns="0" anchor="ctr">
             <a:spAutoFit/>
           </a:bodyPr>
           <a:lstStyle/>
@@ -10844,7 +9937,7 @@
           <a:noFill/>
         </p:spPr>
         <p:txBody>
-          <a:bodyPr wrap="square" lIns="0" tIns="0" rIns="0" bIns="0" anchor="t">
+          <a:bodyPr wrap="square" lIns="0" rIns="0" tIns="0" bIns="0" anchor="t">
             <a:spAutoFit/>
           </a:bodyPr>
           <a:lstStyle/>
@@ -10927,7 +10020,6 @@
           <a:lstStyle/>
           <a:p>
             <a:pPr algn="ctr"/>
-            <a:endParaRPr/>
           </a:p>
         </p:txBody>
       </p:sp>
@@ -10948,7 +10040,7 @@
           <a:noFill/>
         </p:spPr>
         <p:txBody>
-          <a:bodyPr wrap="square" lIns="0" tIns="0" rIns="0" bIns="0" anchor="t">
+          <a:bodyPr wrap="square" lIns="0" rIns="0" tIns="0" bIns="0" anchor="t">
             <a:spAutoFit/>
           </a:bodyPr>
           <a:lstStyle/>
@@ -10987,7 +10079,7 @@
           <a:noFill/>
         </p:spPr>
         <p:txBody>
-          <a:bodyPr wrap="square" lIns="0" tIns="0" rIns="0" bIns="0" anchor="t">
+          <a:bodyPr wrap="square" lIns="0" rIns="0" tIns="0" bIns="0" anchor="t">
             <a:spAutoFit/>
           </a:bodyPr>
           <a:lstStyle/>
@@ -11054,7 +10146,6 @@
           <a:lstStyle/>
           <a:p>
             <a:pPr algn="ctr"/>
-            <a:endParaRPr/>
           </a:p>
         </p:txBody>
       </p:sp>
@@ -11075,7 +10166,7 @@
           <a:noFill/>
         </p:spPr>
         <p:txBody>
-          <a:bodyPr wrap="square" lIns="0" tIns="0" rIns="0" bIns="0" anchor="t">
+          <a:bodyPr wrap="square" lIns="0" rIns="0" tIns="0" bIns="0" anchor="t">
             <a:spAutoFit/>
           </a:bodyPr>
           <a:lstStyle/>
@@ -11114,7 +10205,7 @@
           <a:noFill/>
         </p:spPr>
         <p:txBody>
-          <a:bodyPr wrap="square" lIns="0" tIns="0" rIns="0" bIns="0" anchor="t">
+          <a:bodyPr wrap="square" lIns="0" rIns="0" tIns="0" bIns="0" anchor="t">
             <a:spAutoFit/>
           </a:bodyPr>
           <a:lstStyle/>
@@ -11153,7 +10244,7 @@
           <a:noFill/>
         </p:spPr>
         <p:txBody>
-          <a:bodyPr wrap="square" lIns="0" tIns="0" rIns="0" bIns="0" anchor="t">
+          <a:bodyPr wrap="square" lIns="0" rIns="0" tIns="0" bIns="0" anchor="t">
             <a:spAutoFit/>
           </a:bodyPr>
           <a:lstStyle/>
@@ -11216,7 +10307,6 @@
           <a:lstStyle/>
           <a:p>
             <a:pPr algn="ctr"/>
-            <a:endParaRPr/>
           </a:p>
         </p:txBody>
       </p:sp>
@@ -11237,7 +10327,7 @@
           <a:noFill/>
         </p:spPr>
         <p:txBody>
-          <a:bodyPr wrap="square" lIns="0" tIns="0" rIns="0" bIns="0" anchor="ctr">
+          <a:bodyPr wrap="square" lIns="0" rIns="0" tIns="0" bIns="0" anchor="ctr">
             <a:spAutoFit/>
           </a:bodyPr>
           <a:lstStyle/>
@@ -11276,7 +10366,7 @@
           <a:noFill/>
         </p:spPr>
         <p:txBody>
-          <a:bodyPr wrap="square" lIns="0" tIns="0" rIns="0" bIns="0" anchor="ctr">
+          <a:bodyPr wrap="square" lIns="0" rIns="0" tIns="0" bIns="0" anchor="ctr">
             <a:spAutoFit/>
           </a:bodyPr>
           <a:lstStyle/>
@@ -11306,8 +10396,8 @@
         </p:nvSpPr>
         <p:spPr>
           <a:xfrm>
-            <a:off x="6453652" y="5779008"/>
-            <a:ext cx="3753794" cy="320040"/>
+            <a:off x="5874123" y="5779008"/>
+            <a:ext cx="4333323" cy="320040"/>
           </a:xfrm>
           <a:prstGeom prst="rect">
             <a:avLst/>
@@ -11315,7 +10405,7 @@
           <a:noFill/>
         </p:spPr>
         <p:txBody>
-          <a:bodyPr wrap="square" lIns="0" tIns="0" rIns="0" bIns="0" anchor="ctr">
+          <a:bodyPr wrap="square" lIns="0" rIns="0" tIns="0" bIns="0" anchor="ctr">
             <a:spAutoFit/>
           </a:bodyPr>
           <a:lstStyle/>
@@ -11378,7 +10468,6 @@
           <a:lstStyle/>
           <a:p>
             <a:pPr algn="ctr"/>
-            <a:endParaRPr/>
           </a:p>
         </p:txBody>
       </p:sp>
@@ -11399,7 +10488,7 @@
           <a:noFill/>
         </p:spPr>
         <p:txBody>
-          <a:bodyPr wrap="square" lIns="0" tIns="0" rIns="0" bIns="0" anchor="ctr">
+          <a:bodyPr wrap="square" lIns="0" rIns="0" tIns="0" bIns="0" anchor="ctr">
             <a:spAutoFit/>
           </a:bodyPr>
           <a:lstStyle/>
@@ -11438,7 +10527,7 @@
           <a:noFill/>
         </p:spPr>
         <p:txBody>
-          <a:bodyPr wrap="square" lIns="0" tIns="0" rIns="0" bIns="0" anchor="ctr">
+          <a:bodyPr wrap="square" lIns="0" rIns="0" tIns="0" bIns="0" anchor="ctr">
             <a:spAutoFit/>
           </a:bodyPr>
           <a:lstStyle/>
@@ -11468,8 +10557,8 @@
         </p:nvSpPr>
         <p:spPr>
           <a:xfrm>
-            <a:off x="6453652" y="6190488"/>
-            <a:ext cx="3753794" cy="320040"/>
+            <a:off x="5874123" y="6190488"/>
+            <a:ext cx="4333323" cy="320040"/>
           </a:xfrm>
           <a:prstGeom prst="rect">
             <a:avLst/>
@@ -11477,7 +10566,7 @@
           <a:noFill/>
         </p:spPr>
         <p:txBody>
-          <a:bodyPr wrap="square" lIns="0" tIns="0" rIns="0" bIns="0" anchor="ctr">
+          <a:bodyPr wrap="square" lIns="0" rIns="0" tIns="0" bIns="0" anchor="ctr">
             <a:spAutoFit/>
           </a:bodyPr>
           <a:lstStyle/>
@@ -11508,7 +10597,7 @@
 </file>
 
 <file path=ppt/slides/slide3.xml><?xml version="1.0" encoding="utf-8"?>
-<p:sld xmlns:a="http://schemas.openxmlformats.org/drawingml/2006/main" xmlns:r="http://schemas.openxmlformats.org/officeDocument/2006/relationships" xmlns:p="http://schemas.openxmlformats.org/presentationml/2006/main">
+<p:sld xmlns:a="http://schemas.openxmlformats.org/drawingml/2006/main" xmlns:p="http://schemas.openxmlformats.org/presentationml/2006/main" xmlns:r="http://schemas.openxmlformats.org/officeDocument/2006/relationships">
   <p:cSld>
     <p:spTree>
       <p:nvGrpSpPr>
@@ -11516,14 +10605,7 @@
         <p:cNvGrpSpPr/>
         <p:nvPr/>
       </p:nvGrpSpPr>
-      <p:grpSpPr>
-        <a:xfrm>
-          <a:off x="0" y="0"/>
-          <a:ext cx="0" cy="0"/>
-          <a:chOff x="0" y="0"/>
-          <a:chExt cx="0" cy="0"/>
-        </a:xfrm>
-      </p:grpSpPr>
+      <p:grpSpPr/>
       <p:sp>
         <p:nvSpPr>
           <p:cNvPr id="2" name="TextBox 1"/>
@@ -11541,7 +10623,7 @@
           <a:noFill/>
         </p:spPr>
         <p:txBody>
-          <a:bodyPr wrap="square" lIns="0" tIns="0" rIns="0" bIns="0" anchor="t">
+          <a:bodyPr wrap="square" lIns="0" rIns="0" tIns="0" bIns="0" anchor="t">
             <a:spAutoFit/>
           </a:bodyPr>
           <a:lstStyle/>
@@ -11580,7 +10662,7 @@
           <a:noFill/>
         </p:spPr>
         <p:txBody>
-          <a:bodyPr wrap="square" lIns="0" tIns="0" rIns="0" bIns="0" anchor="t">
+          <a:bodyPr wrap="square" lIns="0" rIns="0" tIns="0" bIns="0" anchor="t">
             <a:spAutoFit/>
           </a:bodyPr>
           <a:lstStyle/>
@@ -11619,7 +10701,7 @@
           <a:noFill/>
         </p:spPr>
         <p:txBody>
-          <a:bodyPr wrap="square" lIns="0" tIns="0" rIns="0" bIns="0" anchor="t">
+          <a:bodyPr wrap="square" lIns="0" rIns="0" tIns="0" bIns="0" anchor="t">
             <a:spAutoFit/>
           </a:bodyPr>
           <a:lstStyle/>
@@ -11682,7 +10764,6 @@
           <a:lstStyle/>
           <a:p>
             <a:pPr algn="ctr"/>
-            <a:endParaRPr/>
           </a:p>
         </p:txBody>
       </p:sp>
@@ -11703,7 +10784,7 @@
           <a:noFill/>
         </p:spPr>
         <p:txBody>
-          <a:bodyPr wrap="square" lIns="0" tIns="0" rIns="0" bIns="0" anchor="t">
+          <a:bodyPr wrap="square" lIns="0" rIns="0" tIns="0" bIns="0" anchor="t">
             <a:spAutoFit/>
           </a:bodyPr>
           <a:lstStyle/>
@@ -11768,7 +10849,6 @@
           <a:lstStyle/>
           <a:p>
             <a:pPr algn="ctr"/>
-            <a:endParaRPr/>
           </a:p>
         </p:txBody>
       </p:sp>
@@ -11789,7 +10869,7 @@
           <a:noFill/>
         </p:spPr>
         <p:txBody>
-          <a:bodyPr wrap="square" lIns="0" tIns="0" rIns="0" bIns="0" anchor="t">
+          <a:bodyPr wrap="square" lIns="0" rIns="0" tIns="0" bIns="0" anchor="t">
             <a:spAutoFit/>
           </a:bodyPr>
           <a:lstStyle/>
@@ -11828,7 +10908,7 @@
           <a:noFill/>
         </p:spPr>
         <p:txBody>
-          <a:bodyPr wrap="square" lIns="0" tIns="0" rIns="0" bIns="0" anchor="t">
+          <a:bodyPr wrap="square" lIns="0" rIns="0" tIns="0" bIns="0" anchor="t">
             <a:spAutoFit/>
           </a:bodyPr>
           <a:lstStyle/>
@@ -11893,7 +10973,6 @@
           <a:lstStyle/>
           <a:p>
             <a:pPr algn="ctr"/>
-            <a:endParaRPr/>
           </a:p>
         </p:txBody>
       </p:sp>
@@ -11914,7 +10993,7 @@
           <a:noFill/>
         </p:spPr>
         <p:txBody>
-          <a:bodyPr wrap="square" lIns="0" tIns="0" rIns="0" bIns="0" anchor="t">
+          <a:bodyPr wrap="square" lIns="0" rIns="0" tIns="0" bIns="0" anchor="t">
             <a:spAutoFit/>
           </a:bodyPr>
           <a:lstStyle/>
@@ -11953,7 +11032,7 @@
           <a:noFill/>
         </p:spPr>
         <p:txBody>
-          <a:bodyPr wrap="square" lIns="0" tIns="0" rIns="0" bIns="0" anchor="t">
+          <a:bodyPr wrap="square" lIns="0" rIns="0" tIns="0" bIns="0" anchor="t">
             <a:spAutoFit/>
           </a:bodyPr>
           <a:lstStyle/>
@@ -12018,7 +11097,6 @@
           <a:lstStyle/>
           <a:p>
             <a:pPr algn="ctr"/>
-            <a:endParaRPr/>
           </a:p>
         </p:txBody>
       </p:sp>
@@ -12039,7 +11117,7 @@
           <a:noFill/>
         </p:spPr>
         <p:txBody>
-          <a:bodyPr wrap="square" lIns="0" tIns="0" rIns="0" bIns="0" anchor="t">
+          <a:bodyPr wrap="square" lIns="0" rIns="0" tIns="0" bIns="0" anchor="t">
             <a:spAutoFit/>
           </a:bodyPr>
           <a:lstStyle/>
@@ -12078,7 +11156,7 @@
           <a:noFill/>
         </p:spPr>
         <p:txBody>
-          <a:bodyPr wrap="square" lIns="0" tIns="0" rIns="0" bIns="0" anchor="t">
+          <a:bodyPr wrap="square" lIns="0" rIns="0" tIns="0" bIns="0" anchor="t">
             <a:spAutoFit/>
           </a:bodyPr>
           <a:lstStyle/>
@@ -12143,7 +11221,6 @@
           <a:lstStyle/>
           <a:p>
             <a:pPr algn="ctr"/>
-            <a:endParaRPr/>
           </a:p>
         </p:txBody>
       </p:sp>
@@ -12164,7 +11241,7 @@
           <a:noFill/>
         </p:spPr>
         <p:txBody>
-          <a:bodyPr wrap="square" lIns="0" tIns="0" rIns="0" bIns="0" anchor="t">
+          <a:bodyPr wrap="square" lIns="0" rIns="0" tIns="0" bIns="0" anchor="t">
             <a:spAutoFit/>
           </a:bodyPr>
           <a:lstStyle/>
@@ -12203,7 +11280,7 @@
           <a:noFill/>
         </p:spPr>
         <p:txBody>
-          <a:bodyPr wrap="square" lIns="0" tIns="0" rIns="0" bIns="0" anchor="t">
+          <a:bodyPr wrap="square" lIns="0" rIns="0" tIns="0" bIns="0" anchor="t">
             <a:spAutoFit/>
           </a:bodyPr>
           <a:lstStyle/>
@@ -12268,7 +11345,6 @@
           <a:lstStyle/>
           <a:p>
             <a:pPr algn="ctr"/>
-            <a:endParaRPr/>
           </a:p>
         </p:txBody>
       </p:sp>
@@ -12289,7 +11365,7 @@
           <a:noFill/>
         </p:spPr>
         <p:txBody>
-          <a:bodyPr wrap="square" lIns="0" tIns="0" rIns="0" bIns="0" anchor="t">
+          <a:bodyPr wrap="square" lIns="0" rIns="0" tIns="0" bIns="0" anchor="t">
             <a:spAutoFit/>
           </a:bodyPr>
           <a:lstStyle/>
@@ -12328,7 +11404,7 @@
           <a:noFill/>
         </p:spPr>
         <p:txBody>
-          <a:bodyPr wrap="square" lIns="0" tIns="0" rIns="0" bIns="0" anchor="t">
+          <a:bodyPr wrap="square" lIns="0" rIns="0" tIns="0" bIns="0" anchor="t">
             <a:spAutoFit/>
           </a:bodyPr>
           <a:lstStyle/>
@@ -12391,7 +11467,6 @@
           <a:lstStyle/>
           <a:p>
             <a:pPr algn="ctr"/>
-            <a:endParaRPr/>
           </a:p>
         </p:txBody>
       </p:sp>
@@ -12412,7 +11487,7 @@
           <a:noFill/>
         </p:spPr>
         <p:txBody>
-          <a:bodyPr wrap="square" lIns="0" tIns="0" rIns="0" bIns="0" anchor="t">
+          <a:bodyPr wrap="square" lIns="0" rIns="0" tIns="0" bIns="0" anchor="t">
             <a:spAutoFit/>
           </a:bodyPr>
           <a:lstStyle/>
@@ -12442,7 +11517,7 @@
         </p:nvSpPr>
         <p:spPr>
           <a:xfrm>
-            <a:off x="658368" y="3242086"/>
+            <a:off x="658368" y="3419856"/>
             <a:ext cx="10874959" cy="274320"/>
           </a:xfrm>
           <a:prstGeom prst="rect">
@@ -12451,7 +11526,7 @@
           <a:noFill/>
         </p:spPr>
         <p:txBody>
-          <a:bodyPr wrap="square" lIns="0" tIns="0" rIns="0" bIns="0" anchor="t">
+          <a:bodyPr wrap="square" lIns="0" rIns="0" tIns="0" bIns="0" anchor="t">
             <a:spAutoFit/>
           </a:bodyPr>
           <a:lstStyle/>
@@ -12462,130 +11537,13 @@
               </a:lnSpc>
             </a:pPr>
             <a:r>
-              <a:rPr sz="1200" b="0" dirty="0" err="1">
+              <a:rPr sz="1200" b="0">
                 <a:solidFill>
                   <a:srgbClr val="6B7885"/>
                 </a:solidFill>
                 <a:latin typeface="Microsoft JhengHei"/>
               </a:rPr>
-              <a:t>合計</a:t>
-            </a:r>
-            <a:r>
-              <a:rPr sz="1200" b="0" dirty="0">
-                <a:solidFill>
-                  <a:srgbClr val="6B7885"/>
-                </a:solidFill>
-                <a:latin typeface="Microsoft JhengHei"/>
-              </a:rPr>
-              <a:t> 2.5–5.5 天;43%–78% </a:t>
-            </a:r>
-            <a:r>
-              <a:rPr sz="1200" b="0" dirty="0" err="1">
-                <a:solidFill>
-                  <a:srgbClr val="6B7885"/>
-                </a:solidFill>
-                <a:latin typeface="Microsoft JhengHei"/>
-              </a:rPr>
-              <a:t>的精確值為</a:t>
-            </a:r>
-            <a:r>
-              <a:rPr sz="1200" b="0" dirty="0">
-                <a:solidFill>
-                  <a:srgbClr val="6B7885"/>
-                </a:solidFill>
-                <a:latin typeface="Microsoft JhengHei"/>
-              </a:rPr>
-              <a:t> 42.86%–77.78%(</a:t>
-            </a:r>
-            <a:r>
-              <a:rPr sz="1200" b="0" dirty="0" err="1">
-                <a:solidFill>
-                  <a:srgbClr val="6B7885"/>
-                </a:solidFill>
-                <a:latin typeface="Microsoft JhengHei"/>
-              </a:rPr>
-              <a:t>五段各自獨立取端點、窮舉</a:t>
-            </a:r>
-            <a:r>
-              <a:rPr sz="1200" b="0" dirty="0">
-                <a:solidFill>
-                  <a:srgbClr val="6B7885"/>
-                </a:solidFill>
-                <a:latin typeface="Microsoft JhengHei"/>
-              </a:rPr>
-              <a:t> 32 </a:t>
-            </a:r>
-            <a:r>
-              <a:rPr sz="1200" b="0" dirty="0" err="1">
-                <a:solidFill>
-                  <a:srgbClr val="6B7885"/>
-                </a:solidFill>
-                <a:latin typeface="Microsoft JhengHei"/>
-              </a:rPr>
-              <a:t>組求得</a:t>
-            </a:r>
-            <a:r>
-              <a:rPr sz="1200" b="0" dirty="0">
-                <a:solidFill>
-                  <a:srgbClr val="6B7885"/>
-                </a:solidFill>
-                <a:latin typeface="Microsoft JhengHei"/>
-              </a:rPr>
-              <a:t>)。非 AI </a:t>
-            </a:r>
-            <a:r>
-              <a:rPr sz="1200" b="0" dirty="0" err="1">
-                <a:solidFill>
-                  <a:srgbClr val="6B7885"/>
-                </a:solidFill>
-                <a:latin typeface="Microsoft JhengHei"/>
-              </a:rPr>
-              <a:t>段只佔</a:t>
-            </a:r>
-            <a:r>
-              <a:rPr sz="1200" b="0" dirty="0">
-                <a:solidFill>
-                  <a:srgbClr val="6B7885"/>
-                </a:solidFill>
-                <a:latin typeface="Microsoft JhengHei"/>
-              </a:rPr>
-              <a:t> 22%–57%,而排隊本身只有 0–1 天 —— </a:t>
-            </a:r>
-            <a:r>
-              <a:rPr sz="1200" b="0" dirty="0" err="1">
-                <a:solidFill>
-                  <a:srgbClr val="6B7885"/>
-                </a:solidFill>
-                <a:latin typeface="Microsoft JhengHei"/>
-              </a:rPr>
-              <a:t>那是排班解得掉的唯一一段</a:t>
-            </a:r>
-            <a:r>
-              <a:rPr sz="1200" b="0" dirty="0">
-                <a:solidFill>
-                  <a:srgbClr val="6B7885"/>
-                </a:solidFill>
-                <a:latin typeface="Microsoft JhengHei"/>
-              </a:rPr>
-              <a:t>。⚠ 這五段天數是營運端的估計,不是計時量測;W1–6 </a:t>
-            </a:r>
-            <a:r>
-              <a:rPr sz="1200" b="0" dirty="0" err="1">
-                <a:solidFill>
-                  <a:srgbClr val="6B7885"/>
-                </a:solidFill>
-                <a:latin typeface="Microsoft JhengHei"/>
-              </a:rPr>
-              <a:t>交出正式量測,若正式拆解推翻它,本案轉排班方案</a:t>
-            </a:r>
-            <a:r>
-              <a:rPr sz="1200" b="0" dirty="0">
-                <a:solidFill>
-                  <a:srgbClr val="6B7885"/>
-                </a:solidFill>
-                <a:latin typeface="Microsoft JhengHei"/>
-              </a:rPr>
-              <a:t>(G1 判)。</a:t>
+              <a:t>合計 2.5–5.5 天;43%–78% 的精確值為 42.86%–77.78%(五段各自獨立取端點、窮舉 32 組求得)。非 AI 段只佔 22%–57%,而排隊本身只有 0–1 天 —— 那是排班解得掉的唯一一段。⚠ 這五段天數是營運端的估計,不是計時量測;W1–6 交出正式量測,若正式拆解推翻它,本案轉排班方案(G1 判)。</a:t>
             </a:r>
           </a:p>
         </p:txBody>
@@ -12598,7 +11556,7 @@
         </p:nvSpPr>
         <p:spPr>
           <a:xfrm>
-            <a:off x="658368" y="3714766"/>
+            <a:off x="658368" y="3849624"/>
             <a:ext cx="10874959" cy="620652"/>
           </a:xfrm>
           <a:prstGeom prst="roundRect">
@@ -12633,7 +11591,6 @@
           <a:lstStyle/>
           <a:p>
             <a:pPr algn="ctr"/>
-            <a:endParaRPr/>
           </a:p>
         </p:txBody>
       </p:sp>
@@ -12645,7 +11602,7 @@
         </p:nvSpPr>
         <p:spPr>
           <a:xfrm>
-            <a:off x="841247" y="3714766"/>
+            <a:off x="841247" y="3849624"/>
             <a:ext cx="10509199" cy="620652"/>
           </a:xfrm>
           <a:prstGeom prst="rect">
@@ -12654,7 +11611,7 @@
           <a:noFill/>
         </p:spPr>
         <p:txBody>
-          <a:bodyPr wrap="square" lIns="0" tIns="0" rIns="0" bIns="0" anchor="ctr">
+          <a:bodyPr wrap="square" lIns="0" rIns="0" tIns="0" bIns="0" anchor="ctr">
             <a:spAutoFit/>
           </a:bodyPr>
           <a:lstStyle/>
@@ -12684,8 +11641,8 @@
         </p:nvSpPr>
         <p:spPr>
           <a:xfrm>
-            <a:off x="658368" y="4420522"/>
-            <a:ext cx="45720" cy="771525"/>
+            <a:off x="658368" y="4625724"/>
+            <a:ext cx="45720" cy="642937"/>
           </a:xfrm>
           <a:prstGeom prst="rect">
             <a:avLst/>
@@ -12717,7 +11674,6 @@
           <a:lstStyle/>
           <a:p>
             <a:pPr algn="ctr"/>
-            <a:endParaRPr/>
           </a:p>
         </p:txBody>
       </p:sp>
@@ -12729,8 +11685,8 @@
         </p:nvSpPr>
         <p:spPr>
           <a:xfrm>
-            <a:off x="804672" y="4393090"/>
-            <a:ext cx="2116945" cy="862965"/>
+            <a:off x="804672" y="4598292"/>
+            <a:ext cx="2116945" cy="734377"/>
           </a:xfrm>
           <a:prstGeom prst="rect">
             <a:avLst/>
@@ -12738,7 +11694,7 @@
           <a:noFill/>
         </p:spPr>
         <p:txBody>
-          <a:bodyPr wrap="square" lIns="0" tIns="0" rIns="0" bIns="0" anchor="ctr">
+          <a:bodyPr wrap="square" lIns="0" rIns="0" tIns="0" bIns="0" anchor="ctr">
             <a:spAutoFit/>
           </a:bodyPr>
           <a:lstStyle/>
@@ -12768,8 +11724,8 @@
         </p:nvSpPr>
         <p:spPr>
           <a:xfrm>
-            <a:off x="2976481" y="4393090"/>
-            <a:ext cx="2787914" cy="862965"/>
+            <a:off x="2976481" y="4598292"/>
+            <a:ext cx="2787914" cy="734377"/>
           </a:xfrm>
           <a:prstGeom prst="rect">
             <a:avLst/>
@@ -12777,7 +11733,7 @@
           <a:noFill/>
         </p:spPr>
         <p:txBody>
-          <a:bodyPr wrap="square" lIns="0" tIns="0" rIns="0" bIns="0" anchor="ctr">
+          <a:bodyPr wrap="square" lIns="0" rIns="0" tIns="0" bIns="0" anchor="ctr">
             <a:spAutoFit/>
           </a:bodyPr>
           <a:lstStyle/>
@@ -12807,8 +11763,8 @@
         </p:nvSpPr>
         <p:spPr>
           <a:xfrm>
-            <a:off x="6453652" y="4393090"/>
-            <a:ext cx="3753794" cy="862965"/>
+            <a:off x="5874123" y="4598292"/>
+            <a:ext cx="4333323" cy="734377"/>
           </a:xfrm>
           <a:prstGeom prst="rect">
             <a:avLst/>
@@ -12816,7 +11772,7 @@
           <a:noFill/>
         </p:spPr>
         <p:txBody>
-          <a:bodyPr wrap="square" lIns="0" tIns="0" rIns="0" bIns="0" anchor="ctr">
+          <a:bodyPr wrap="square" lIns="0" rIns="0" tIns="0" bIns="0" anchor="ctr">
             <a:spAutoFit/>
           </a:bodyPr>
           <a:lstStyle/>
@@ -12846,7 +11802,7 @@
         </p:nvSpPr>
         <p:spPr>
           <a:xfrm>
-            <a:off x="658368" y="5374927"/>
+            <a:off x="658368" y="5451541"/>
             <a:ext cx="45720" cy="771525"/>
           </a:xfrm>
           <a:prstGeom prst="rect">
@@ -12879,7 +11835,6 @@
           <a:lstStyle/>
           <a:p>
             <a:pPr algn="ctr"/>
-            <a:endParaRPr/>
           </a:p>
         </p:txBody>
       </p:sp>
@@ -12891,7 +11846,7 @@
         </p:nvSpPr>
         <p:spPr>
           <a:xfrm>
-            <a:off x="804672" y="5347495"/>
+            <a:off x="804672" y="5424109"/>
             <a:ext cx="2116945" cy="862965"/>
           </a:xfrm>
           <a:prstGeom prst="rect">
@@ -12900,7 +11855,7 @@
           <a:noFill/>
         </p:spPr>
         <p:txBody>
-          <a:bodyPr wrap="square" lIns="0" tIns="0" rIns="0" bIns="0" anchor="ctr">
+          <a:bodyPr wrap="square" lIns="0" rIns="0" tIns="0" bIns="0" anchor="ctr">
             <a:spAutoFit/>
           </a:bodyPr>
           <a:lstStyle/>
@@ -12930,7 +11885,7 @@
         </p:nvSpPr>
         <p:spPr>
           <a:xfrm>
-            <a:off x="2976481" y="5347495"/>
+            <a:off x="2976481" y="5424109"/>
             <a:ext cx="2787914" cy="862965"/>
           </a:xfrm>
           <a:prstGeom prst="rect">
@@ -12939,7 +11894,7 @@
           <a:noFill/>
         </p:spPr>
         <p:txBody>
-          <a:bodyPr wrap="square" lIns="0" tIns="0" rIns="0" bIns="0" anchor="ctr">
+          <a:bodyPr wrap="square" lIns="0" rIns="0" tIns="0" bIns="0" anchor="ctr">
             <a:spAutoFit/>
           </a:bodyPr>
           <a:lstStyle/>
@@ -12969,8 +11924,8 @@
         </p:nvSpPr>
         <p:spPr>
           <a:xfrm>
-            <a:off x="6453652" y="5347495"/>
-            <a:ext cx="3753794" cy="862965"/>
+            <a:off x="5874123" y="5424109"/>
+            <a:ext cx="4333323" cy="862965"/>
           </a:xfrm>
           <a:prstGeom prst="rect">
             <a:avLst/>
@@ -12978,7 +11933,7 @@
           <a:noFill/>
         </p:spPr>
         <p:txBody>
-          <a:bodyPr wrap="square" lIns="0" tIns="0" rIns="0" bIns="0" anchor="ctr">
+          <a:bodyPr wrap="square" lIns="0" rIns="0" tIns="0" bIns="0" anchor="ctr">
             <a:spAutoFit/>
           </a:bodyPr>
           <a:lstStyle/>
@@ -13009,7 +11964,7 @@
 </file>
 
 <file path=ppt/slides/slide4.xml><?xml version="1.0" encoding="utf-8"?>
-<p:sld xmlns:a="http://schemas.openxmlformats.org/drawingml/2006/main" xmlns:r="http://schemas.openxmlformats.org/officeDocument/2006/relationships" xmlns:p="http://schemas.openxmlformats.org/presentationml/2006/main">
+<p:sld xmlns:a="http://schemas.openxmlformats.org/drawingml/2006/main" xmlns:p="http://schemas.openxmlformats.org/presentationml/2006/main" xmlns:r="http://schemas.openxmlformats.org/officeDocument/2006/relationships">
   <p:cSld>
     <p:spTree>
       <p:nvGrpSpPr>
@@ -13017,14 +11972,7 @@
         <p:cNvGrpSpPr/>
         <p:nvPr/>
       </p:nvGrpSpPr>
-      <p:grpSpPr>
-        <a:xfrm>
-          <a:off x="0" y="0"/>
-          <a:ext cx="0" cy="0"/>
-          <a:chOff x="0" y="0"/>
-          <a:chExt cx="0" cy="0"/>
-        </a:xfrm>
-      </p:grpSpPr>
+      <p:grpSpPr/>
       <p:sp>
         <p:nvSpPr>
           <p:cNvPr id="2" name="TextBox 1"/>
@@ -13042,7 +11990,7 @@
           <a:noFill/>
         </p:spPr>
         <p:txBody>
-          <a:bodyPr wrap="square" lIns="0" tIns="0" rIns="0" bIns="0" anchor="t">
+          <a:bodyPr wrap="square" lIns="0" rIns="0" tIns="0" bIns="0" anchor="t">
             <a:spAutoFit/>
           </a:bodyPr>
           <a:lstStyle/>
@@ -13081,7 +12029,7 @@
           <a:noFill/>
         </p:spPr>
         <p:txBody>
-          <a:bodyPr wrap="square" lIns="0" tIns="0" rIns="0" bIns="0" anchor="t">
+          <a:bodyPr wrap="square" lIns="0" rIns="0" tIns="0" bIns="0" anchor="t">
             <a:spAutoFit/>
           </a:bodyPr>
           <a:lstStyle/>
@@ -13120,7 +12068,7 @@
           <a:noFill/>
         </p:spPr>
         <p:txBody>
-          <a:bodyPr wrap="square" lIns="0" tIns="0" rIns="0" bIns="0" anchor="t">
+          <a:bodyPr wrap="square" lIns="0" rIns="0" tIns="0" bIns="0" anchor="t">
             <a:spAutoFit/>
           </a:bodyPr>
           <a:lstStyle/>
@@ -13183,7 +12131,6 @@
           <a:lstStyle/>
           <a:p>
             <a:pPr algn="ctr"/>
-            <a:endParaRPr/>
           </a:p>
         </p:txBody>
       </p:sp>
@@ -13230,7 +12177,6 @@
           <a:lstStyle/>
           <a:p>
             <a:pPr algn="ctr"/>
-            <a:endParaRPr/>
           </a:p>
         </p:txBody>
       </p:sp>
@@ -13251,7 +12197,7 @@
           <a:noFill/>
         </p:spPr>
         <p:txBody>
-          <a:bodyPr wrap="square" lIns="0" tIns="0" rIns="0" bIns="0" anchor="ctr">
+          <a:bodyPr wrap="square" lIns="0" rIns="0" tIns="0" bIns="0" anchor="ctr">
             <a:spAutoFit/>
           </a:bodyPr>
           <a:lstStyle/>
@@ -13292,27 +12238,9 @@
                 <a:tableStyleId>{5C22544A-7EE6-4342-B048-85BDC9FD1C3A}</a:tableStyleId>
               </a:tblPr>
               <a:tblGrid>
-                <a:gridCol w="3262487">
-                  <a:extLst>
-                    <a:ext uri="{9D8B030D-6E8A-4147-A177-3AD203B41FA5}">
-                      <a16:colId xmlns:a16="http://schemas.microsoft.com/office/drawing/2014/main" val="20000"/>
-                    </a:ext>
-                  </a:extLst>
-                </a:gridCol>
-                <a:gridCol w="3806235">
-                  <a:extLst>
-                    <a:ext uri="{9D8B030D-6E8A-4147-A177-3AD203B41FA5}">
-                      <a16:colId xmlns:a16="http://schemas.microsoft.com/office/drawing/2014/main" val="20001"/>
-                    </a:ext>
-                  </a:extLst>
-                </a:gridCol>
-                <a:gridCol w="3806235">
-                  <a:extLst>
-                    <a:ext uri="{9D8B030D-6E8A-4147-A177-3AD203B41FA5}">
-                      <a16:colId xmlns:a16="http://schemas.microsoft.com/office/drawing/2014/main" val="20002"/>
-                    </a:ext>
-                  </a:extLst>
-                </a:gridCol>
+                <a:gridCol w="3262487"/>
+                <a:gridCol w="3806235"/>
+                <a:gridCol w="3806235"/>
               </a:tblGrid>
               <a:tr h="329184">
                 <a:tc>
@@ -13321,7 +12249,15 @@
                     <a:lstStyle/>
                     <a:p>
                       <a:pPr algn="l"/>
-                      <a:endParaRPr/>
+                      <a:r>
+                        <a:rPr sz="1200" b="1">
+                          <a:solidFill>
+                            <a:srgbClr val="FFFFFF"/>
+                          </a:solidFill>
+                          <a:latin typeface="Microsoft JhengHei"/>
+                        </a:rPr>
+                        <a:t/>
+                      </a:r>
                     </a:p>
                   </a:txBody>
                   <a:tcPr marL="45720" marR="45720" marT="18288" marB="18288" anchor="ctr">
@@ -13376,11 +12312,6 @@
                     </a:solidFill>
                   </a:tcPr>
                 </a:tc>
-                <a:extLst>
-                  <a:ext uri="{0D108BD9-81ED-4DB2-BD59-A6C34878D82A}">
-                    <a16:rowId xmlns:a16="http://schemas.microsoft.com/office/drawing/2014/main" val="10000"/>
-                  </a:ext>
-                </a:extLst>
               </a:tr>
               <a:tr h="292608">
                 <a:tc>
@@ -13452,11 +12383,6 @@
                     </a:solidFill>
                   </a:tcPr>
                 </a:tc>
-                <a:extLst>
-                  <a:ext uri="{0D108BD9-81ED-4DB2-BD59-A6C34878D82A}">
-                    <a16:rowId xmlns:a16="http://schemas.microsoft.com/office/drawing/2014/main" val="10001"/>
-                  </a:ext>
-                </a:extLst>
               </a:tr>
               <a:tr h="292608">
                 <a:tc>
@@ -13528,11 +12454,6 @@
                     </a:solidFill>
                   </a:tcPr>
                 </a:tc>
-                <a:extLst>
-                  <a:ext uri="{0D108BD9-81ED-4DB2-BD59-A6C34878D82A}">
-                    <a16:rowId xmlns:a16="http://schemas.microsoft.com/office/drawing/2014/main" val="10002"/>
-                  </a:ext>
-                </a:extLst>
               </a:tr>
               <a:tr h="292608">
                 <a:tc>
@@ -13604,11 +12525,6 @@
                     </a:solidFill>
                   </a:tcPr>
                 </a:tc>
-                <a:extLst>
-                  <a:ext uri="{0D108BD9-81ED-4DB2-BD59-A6C34878D82A}">
-                    <a16:rowId xmlns:a16="http://schemas.microsoft.com/office/drawing/2014/main" val="10003"/>
-                  </a:ext>
-                </a:extLst>
               </a:tr>
               <a:tr h="292608">
                 <a:tc>
@@ -13680,11 +12596,6 @@
                     </a:solidFill>
                   </a:tcPr>
                 </a:tc>
-                <a:extLst>
-                  <a:ext uri="{0D108BD9-81ED-4DB2-BD59-A6C34878D82A}">
-                    <a16:rowId xmlns:a16="http://schemas.microsoft.com/office/drawing/2014/main" val="10004"/>
-                  </a:ext>
-                </a:extLst>
               </a:tr>
               <a:tr h="292608">
                 <a:tc>
@@ -13756,11 +12667,6 @@
                     </a:solidFill>
                   </a:tcPr>
                 </a:tc>
-                <a:extLst>
-                  <a:ext uri="{0D108BD9-81ED-4DB2-BD59-A6C34878D82A}">
-                    <a16:rowId xmlns:a16="http://schemas.microsoft.com/office/drawing/2014/main" val="10005"/>
-                  </a:ext>
-                </a:extLst>
               </a:tr>
               <a:tr h="292608">
                 <a:tc>
@@ -13832,11 +12738,6 @@
                     </a:solidFill>
                   </a:tcPr>
                 </a:tc>
-                <a:extLst>
-                  <a:ext uri="{0D108BD9-81ED-4DB2-BD59-A6C34878D82A}">
-                    <a16:rowId xmlns:a16="http://schemas.microsoft.com/office/drawing/2014/main" val="10006"/>
-                  </a:ext>
-                </a:extLst>
               </a:tr>
             </a:tbl>
           </a:graphicData>
@@ -13883,7 +12784,6 @@
           <a:lstStyle/>
           <a:p>
             <a:pPr algn="ctr"/>
-            <a:endParaRPr/>
           </a:p>
         </p:txBody>
       </p:sp>
@@ -13904,7 +12804,7 @@
           <a:noFill/>
         </p:spPr>
         <p:txBody>
-          <a:bodyPr wrap="square" lIns="0" tIns="0" rIns="0" bIns="0" anchor="ctr">
+          <a:bodyPr wrap="square" lIns="0" rIns="0" tIns="0" bIns="0" anchor="ctr">
             <a:spAutoFit/>
           </a:bodyPr>
           <a:lstStyle/>
@@ -13943,7 +12843,7 @@
           <a:noFill/>
         </p:spPr>
         <p:txBody>
-          <a:bodyPr wrap="square" lIns="0" tIns="0" rIns="0" bIns="0" anchor="ctr">
+          <a:bodyPr wrap="square" lIns="0" rIns="0" tIns="0" bIns="0" anchor="ctr">
             <a:spAutoFit/>
           </a:bodyPr>
           <a:lstStyle/>
@@ -13973,8 +12873,8 @@
         </p:nvSpPr>
         <p:spPr>
           <a:xfrm>
-            <a:off x="6453652" y="4718397"/>
-            <a:ext cx="3753794" cy="734377"/>
+            <a:off x="5874123" y="4718397"/>
+            <a:ext cx="4333323" cy="734377"/>
           </a:xfrm>
           <a:prstGeom prst="rect">
             <a:avLst/>
@@ -13982,7 +12882,7 @@
           <a:noFill/>
         </p:spPr>
         <p:txBody>
-          <a:bodyPr wrap="square" lIns="0" tIns="0" rIns="0" bIns="0" anchor="ctr">
+          <a:bodyPr wrap="square" lIns="0" rIns="0" tIns="0" bIns="0" anchor="ctr">
             <a:spAutoFit/>
           </a:bodyPr>
           <a:lstStyle/>
@@ -14045,7 +12945,6 @@
           <a:lstStyle/>
           <a:p>
             <a:pPr algn="ctr"/>
-            <a:endParaRPr/>
           </a:p>
         </p:txBody>
       </p:sp>
@@ -14066,7 +12965,7 @@
           <a:noFill/>
         </p:spPr>
         <p:txBody>
-          <a:bodyPr wrap="square" lIns="0" tIns="0" rIns="0" bIns="0" anchor="ctr">
+          <a:bodyPr wrap="square" lIns="0" rIns="0" tIns="0" bIns="0" anchor="ctr">
             <a:spAutoFit/>
           </a:bodyPr>
           <a:lstStyle/>
@@ -14105,7 +13004,7 @@
           <a:noFill/>
         </p:spPr>
         <p:txBody>
-          <a:bodyPr wrap="square" lIns="0" tIns="0" rIns="0" bIns="0" anchor="ctr">
+          <a:bodyPr wrap="square" lIns="0" rIns="0" tIns="0" bIns="0" anchor="ctr">
             <a:spAutoFit/>
           </a:bodyPr>
           <a:lstStyle/>
@@ -14135,8 +13034,8 @@
         </p:nvSpPr>
         <p:spPr>
           <a:xfrm>
-            <a:off x="6453652" y="5544214"/>
-            <a:ext cx="3753794" cy="412908"/>
+            <a:off x="5874123" y="5544214"/>
+            <a:ext cx="4333323" cy="412908"/>
           </a:xfrm>
           <a:prstGeom prst="rect">
             <a:avLst/>
@@ -14144,7 +13043,7 @@
           <a:noFill/>
         </p:spPr>
         <p:txBody>
-          <a:bodyPr wrap="square" lIns="0" tIns="0" rIns="0" bIns="0" anchor="ctr">
+          <a:bodyPr wrap="square" lIns="0" rIns="0" tIns="0" bIns="0" anchor="ctr">
             <a:spAutoFit/>
           </a:bodyPr>
           <a:lstStyle/>
@@ -14175,7 +13074,7 @@
 </file>
 
 <file path=ppt/slides/slide5.xml><?xml version="1.0" encoding="utf-8"?>
-<p:sld xmlns:a="http://schemas.openxmlformats.org/drawingml/2006/main" xmlns:r="http://schemas.openxmlformats.org/officeDocument/2006/relationships" xmlns:p="http://schemas.openxmlformats.org/presentationml/2006/main">
+<p:sld xmlns:a="http://schemas.openxmlformats.org/drawingml/2006/main" xmlns:p="http://schemas.openxmlformats.org/presentationml/2006/main" xmlns:r="http://schemas.openxmlformats.org/officeDocument/2006/relationships">
   <p:cSld>
     <p:spTree>
       <p:nvGrpSpPr>
@@ -14183,14 +13082,7 @@
         <p:cNvGrpSpPr/>
         <p:nvPr/>
       </p:nvGrpSpPr>
-      <p:grpSpPr>
-        <a:xfrm>
-          <a:off x="0" y="0"/>
-          <a:ext cx="0" cy="0"/>
-          <a:chOff x="0" y="0"/>
-          <a:chExt cx="0" cy="0"/>
-        </a:xfrm>
-      </p:grpSpPr>
+      <p:grpSpPr/>
       <p:sp>
         <p:nvSpPr>
           <p:cNvPr id="2" name="TextBox 1"/>
@@ -14208,7 +13100,7 @@
           <a:noFill/>
         </p:spPr>
         <p:txBody>
-          <a:bodyPr wrap="square" lIns="0" tIns="0" rIns="0" bIns="0" anchor="t">
+          <a:bodyPr wrap="square" lIns="0" rIns="0" tIns="0" bIns="0" anchor="t">
             <a:spAutoFit/>
           </a:bodyPr>
           <a:lstStyle/>
@@ -14247,7 +13139,7 @@
           <a:noFill/>
         </p:spPr>
         <p:txBody>
-          <a:bodyPr wrap="square" lIns="0" tIns="0" rIns="0" bIns="0" anchor="t">
+          <a:bodyPr wrap="square" lIns="0" rIns="0" tIns="0" bIns="0" anchor="t">
             <a:spAutoFit/>
           </a:bodyPr>
           <a:lstStyle/>
@@ -14286,7 +13178,7 @@
           <a:noFill/>
         </p:spPr>
         <p:txBody>
-          <a:bodyPr wrap="square" lIns="0" tIns="0" rIns="0" bIns="0" anchor="t">
+          <a:bodyPr wrap="square" lIns="0" rIns="0" tIns="0" bIns="0" anchor="t">
             <a:spAutoFit/>
           </a:bodyPr>
           <a:lstStyle/>
@@ -14349,7 +13241,6 @@
           <a:lstStyle/>
           <a:p>
             <a:pPr algn="ctr"/>
-            <a:endParaRPr/>
           </a:p>
         </p:txBody>
       </p:sp>
@@ -14398,7 +13289,6 @@
           <a:lstStyle/>
           <a:p>
             <a:pPr algn="ctr"/>
-            <a:endParaRPr/>
           </a:p>
         </p:txBody>
       </p:sp>
@@ -14419,7 +13309,7 @@
           <a:noFill/>
         </p:spPr>
         <p:txBody>
-          <a:bodyPr wrap="square" lIns="0" tIns="0" rIns="0" bIns="0" anchor="t">
+          <a:bodyPr wrap="square" lIns="0" rIns="0" tIns="0" bIns="0" anchor="t">
             <a:spAutoFit/>
           </a:bodyPr>
           <a:lstStyle/>
@@ -14458,7 +13348,7 @@
           <a:noFill/>
         </p:spPr>
         <p:txBody>
-          <a:bodyPr wrap="square" lIns="0" tIns="0" rIns="0" bIns="0" anchor="t">
+          <a:bodyPr wrap="square" lIns="0" rIns="0" tIns="0" bIns="0" anchor="t">
             <a:spAutoFit/>
           </a:bodyPr>
           <a:lstStyle/>
@@ -14525,7 +13415,6 @@
           <a:lstStyle/>
           <a:p>
             <a:pPr algn="ctr"/>
-            <a:endParaRPr/>
           </a:p>
         </p:txBody>
       </p:sp>
@@ -14546,7 +13435,7 @@
           <a:noFill/>
         </p:spPr>
         <p:txBody>
-          <a:bodyPr wrap="square" lIns="0" tIns="0" rIns="0" bIns="0" anchor="t">
+          <a:bodyPr wrap="square" lIns="0" rIns="0" tIns="0" bIns="0" anchor="t">
             <a:spAutoFit/>
           </a:bodyPr>
           <a:lstStyle/>
@@ -14585,7 +13474,7 @@
           <a:noFill/>
         </p:spPr>
         <p:txBody>
-          <a:bodyPr wrap="square" lIns="0" tIns="0" rIns="0" bIns="0" anchor="t">
+          <a:bodyPr wrap="square" lIns="0" rIns="0" tIns="0" bIns="0" anchor="t">
             <a:spAutoFit/>
           </a:bodyPr>
           <a:lstStyle/>
@@ -14624,7 +13513,7 @@
           <a:noFill/>
         </p:spPr>
         <p:txBody>
-          <a:bodyPr wrap="square" lIns="0" tIns="0" rIns="0" bIns="0" anchor="t">
+          <a:bodyPr wrap="square" lIns="0" rIns="0" tIns="0" bIns="0" anchor="t">
             <a:spAutoFit/>
           </a:bodyPr>
           <a:lstStyle/>
@@ -14687,7 +13576,6 @@
           <a:lstStyle/>
           <a:p>
             <a:pPr algn="ctr"/>
-            <a:endParaRPr/>
           </a:p>
         </p:txBody>
       </p:sp>
@@ -14708,7 +13596,7 @@
           <a:noFill/>
         </p:spPr>
         <p:txBody>
-          <a:bodyPr wrap="square" lIns="0" tIns="0" rIns="0" bIns="0" anchor="ctr">
+          <a:bodyPr wrap="square" lIns="0" rIns="0" tIns="0" bIns="0" anchor="ctr">
             <a:spAutoFit/>
           </a:bodyPr>
           <a:lstStyle/>
@@ -14739,7 +13627,7 @@
         <p:spPr>
           <a:xfrm>
             <a:off x="3268358" y="3607796"/>
-            <a:ext cx="3152759" cy="412908"/>
+            <a:ext cx="1919478" cy="412908"/>
           </a:xfrm>
           <a:prstGeom prst="rect">
             <a:avLst/>
@@ -14747,7 +13635,7 @@
           <a:noFill/>
         </p:spPr>
         <p:txBody>
-          <a:bodyPr wrap="square" lIns="0" tIns="0" rIns="0" bIns="0" anchor="ctr">
+          <a:bodyPr wrap="square" lIns="0" rIns="0" tIns="0" bIns="0" anchor="ctr">
             <a:spAutoFit/>
           </a:bodyPr>
           <a:lstStyle/>
@@ -14777,8 +13665,8 @@
         </p:nvSpPr>
         <p:spPr>
           <a:xfrm>
-            <a:off x="7183343" y="3607796"/>
-            <a:ext cx="4240255" cy="412908"/>
+            <a:off x="5297564" y="3607796"/>
+            <a:ext cx="6126034" cy="412908"/>
           </a:xfrm>
           <a:prstGeom prst="rect">
             <a:avLst/>
@@ -14786,7 +13674,7 @@
           <a:noFill/>
         </p:spPr>
         <p:txBody>
-          <a:bodyPr wrap="square" lIns="0" tIns="0" rIns="0" bIns="0" anchor="ctr">
+          <a:bodyPr wrap="square" lIns="0" rIns="0" tIns="0" bIns="0" anchor="ctr">
             <a:spAutoFit/>
           </a:bodyPr>
           <a:lstStyle/>
@@ -14849,7 +13737,6 @@
           <a:lstStyle/>
           <a:p>
             <a:pPr algn="ctr"/>
-            <a:endParaRPr/>
           </a:p>
         </p:txBody>
       </p:sp>
@@ -14870,7 +13757,7 @@
           <a:noFill/>
         </p:spPr>
         <p:txBody>
-          <a:bodyPr wrap="square" lIns="0" tIns="0" rIns="0" bIns="0" anchor="ctr">
+          <a:bodyPr wrap="square" lIns="0" rIns="0" tIns="0" bIns="0" anchor="ctr">
             <a:spAutoFit/>
           </a:bodyPr>
           <a:lstStyle/>
@@ -14901,7 +13788,7 @@
         <p:spPr>
           <a:xfrm>
             <a:off x="3268358" y="4112145"/>
-            <a:ext cx="3152759" cy="691515"/>
+            <a:ext cx="1919478" cy="691515"/>
           </a:xfrm>
           <a:prstGeom prst="rect">
             <a:avLst/>
@@ -14909,7 +13796,7 @@
           <a:noFill/>
         </p:spPr>
         <p:txBody>
-          <a:bodyPr wrap="square" lIns="0" tIns="0" rIns="0" bIns="0" anchor="ctr">
+          <a:bodyPr wrap="square" lIns="0" rIns="0" tIns="0" bIns="0" anchor="ctr">
             <a:spAutoFit/>
           </a:bodyPr>
           <a:lstStyle/>
@@ -14939,8 +13826,8 @@
         </p:nvSpPr>
         <p:spPr>
           <a:xfrm>
-            <a:off x="7183343" y="4112145"/>
-            <a:ext cx="4240255" cy="691515"/>
+            <a:off x="5297564" y="4112145"/>
+            <a:ext cx="6126034" cy="691515"/>
           </a:xfrm>
           <a:prstGeom prst="rect">
             <a:avLst/>
@@ -14948,7 +13835,7 @@
           <a:noFill/>
         </p:spPr>
         <p:txBody>
-          <a:bodyPr wrap="square" lIns="0" tIns="0" rIns="0" bIns="0" anchor="ctr">
+          <a:bodyPr wrap="square" lIns="0" rIns="0" tIns="0" bIns="0" anchor="ctr">
             <a:spAutoFit/>
           </a:bodyPr>
           <a:lstStyle/>
@@ -14989,34 +13876,10 @@
                 <a:tableStyleId>{5C22544A-7EE6-4342-B048-85BDC9FD1C3A}</a:tableStyleId>
               </a:tblPr>
               <a:tblGrid>
-                <a:gridCol w="2897642">
-                  <a:extLst>
-                    <a:ext uri="{9D8B030D-6E8A-4147-A177-3AD203B41FA5}">
-                      <a16:colId xmlns:a16="http://schemas.microsoft.com/office/drawing/2014/main" val="20000"/>
-                    </a:ext>
-                  </a:extLst>
-                </a:gridCol>
-                <a:gridCol w="2253721">
-                  <a:extLst>
-                    <a:ext uri="{9D8B030D-6E8A-4147-A177-3AD203B41FA5}">
-                      <a16:colId xmlns:a16="http://schemas.microsoft.com/office/drawing/2014/main" val="20001"/>
-                    </a:ext>
-                  </a:extLst>
-                </a:gridCol>
-                <a:gridCol w="2253721">
-                  <a:extLst>
-                    <a:ext uri="{9D8B030D-6E8A-4147-A177-3AD203B41FA5}">
-                      <a16:colId xmlns:a16="http://schemas.microsoft.com/office/drawing/2014/main" val="20002"/>
-                    </a:ext>
-                  </a:extLst>
-                </a:gridCol>
-                <a:gridCol w="2253721">
-                  <a:extLst>
-                    <a:ext uri="{9D8B030D-6E8A-4147-A177-3AD203B41FA5}">
-                      <a16:colId xmlns:a16="http://schemas.microsoft.com/office/drawing/2014/main" val="20003"/>
-                    </a:ext>
-                  </a:extLst>
-                </a:gridCol>
+                <a:gridCol w="2897642"/>
+                <a:gridCol w="2253721"/>
+                <a:gridCol w="2253721"/>
+                <a:gridCol w="2253721"/>
               </a:tblGrid>
               <a:tr h="329184">
                 <a:tc>
@@ -15025,7 +13888,15 @@
                     <a:lstStyle/>
                     <a:p>
                       <a:pPr algn="l"/>
-                      <a:endParaRPr/>
+                      <a:r>
+                        <a:rPr sz="1200" b="1">
+                          <a:solidFill>
+                            <a:srgbClr val="FFFFFF"/>
+                          </a:solidFill>
+                          <a:latin typeface="Microsoft JhengHei"/>
+                        </a:rPr>
+                        <a:t/>
+                      </a:r>
                     </a:p>
                   </a:txBody>
                   <a:tcPr marL="45720" marR="45720" marT="18288" marB="18288" anchor="ctr">
@@ -15103,11 +13974,6 @@
                     </a:solidFill>
                   </a:tcPr>
                 </a:tc>
-                <a:extLst>
-                  <a:ext uri="{0D108BD9-81ED-4DB2-BD59-A6C34878D82A}">
-                    <a16:rowId xmlns:a16="http://schemas.microsoft.com/office/drawing/2014/main" val="10000"/>
-                  </a:ext>
-                </a:extLst>
               </a:tr>
               <a:tr h="292608">
                 <a:tc>
@@ -15202,11 +14068,6 @@
                     </a:solidFill>
                   </a:tcPr>
                 </a:tc>
-                <a:extLst>
-                  <a:ext uri="{0D108BD9-81ED-4DB2-BD59-A6C34878D82A}">
-                    <a16:rowId xmlns:a16="http://schemas.microsoft.com/office/drawing/2014/main" val="10001"/>
-                  </a:ext>
-                </a:extLst>
               </a:tr>
               <a:tr h="292608">
                 <a:tc>
@@ -15301,11 +14162,6 @@
                     </a:solidFill>
                   </a:tcPr>
                 </a:tc>
-                <a:extLst>
-                  <a:ext uri="{0D108BD9-81ED-4DB2-BD59-A6C34878D82A}">
-                    <a16:rowId xmlns:a16="http://schemas.microsoft.com/office/drawing/2014/main" val="10002"/>
-                  </a:ext>
-                </a:extLst>
               </a:tr>
               <a:tr h="292608">
                 <a:tc>
@@ -15400,11 +14256,6 @@
                     </a:solidFill>
                   </a:tcPr>
                 </a:tc>
-                <a:extLst>
-                  <a:ext uri="{0D108BD9-81ED-4DB2-BD59-A6C34878D82A}">
-                    <a16:rowId xmlns:a16="http://schemas.microsoft.com/office/drawing/2014/main" val="10003"/>
-                  </a:ext>
-                </a:extLst>
               </a:tr>
             </a:tbl>
           </a:graphicData>
@@ -15419,7 +14270,7 @@
 </file>
 
 <file path=ppt/slides/slide6.xml><?xml version="1.0" encoding="utf-8"?>
-<p:sld xmlns:a="http://schemas.openxmlformats.org/drawingml/2006/main" xmlns:r="http://schemas.openxmlformats.org/officeDocument/2006/relationships" xmlns:p="http://schemas.openxmlformats.org/presentationml/2006/main">
+<p:sld xmlns:a="http://schemas.openxmlformats.org/drawingml/2006/main" xmlns:p="http://schemas.openxmlformats.org/presentationml/2006/main" xmlns:r="http://schemas.openxmlformats.org/officeDocument/2006/relationships">
   <p:cSld>
     <p:spTree>
       <p:nvGrpSpPr>
@@ -15427,14 +14278,7 @@
         <p:cNvGrpSpPr/>
         <p:nvPr/>
       </p:nvGrpSpPr>
-      <p:grpSpPr>
-        <a:xfrm>
-          <a:off x="0" y="0"/>
-          <a:ext cx="0" cy="0"/>
-          <a:chOff x="0" y="0"/>
-          <a:chExt cx="0" cy="0"/>
-        </a:xfrm>
-      </p:grpSpPr>
+      <p:grpSpPr/>
       <p:sp>
         <p:nvSpPr>
           <p:cNvPr id="2" name="TextBox 1"/>
@@ -15452,7 +14296,7 @@
           <a:noFill/>
         </p:spPr>
         <p:txBody>
-          <a:bodyPr wrap="square" lIns="0" tIns="0" rIns="0" bIns="0" anchor="t">
+          <a:bodyPr wrap="square" lIns="0" rIns="0" tIns="0" bIns="0" anchor="t">
             <a:spAutoFit/>
           </a:bodyPr>
           <a:lstStyle/>
@@ -15491,7 +14335,7 @@
           <a:noFill/>
         </p:spPr>
         <p:txBody>
-          <a:bodyPr wrap="square" lIns="0" tIns="0" rIns="0" bIns="0" anchor="t">
+          <a:bodyPr wrap="square" lIns="0" rIns="0" tIns="0" bIns="0" anchor="t">
             <a:spAutoFit/>
           </a:bodyPr>
           <a:lstStyle/>
@@ -15530,7 +14374,7 @@
           <a:noFill/>
         </p:spPr>
         <p:txBody>
-          <a:bodyPr wrap="square" lIns="0" tIns="0" rIns="0" bIns="0" anchor="t">
+          <a:bodyPr wrap="square" lIns="0" rIns="0" tIns="0" bIns="0" anchor="t">
             <a:spAutoFit/>
           </a:bodyPr>
           <a:lstStyle/>
@@ -15593,7 +14437,6 @@
           <a:lstStyle/>
           <a:p>
             <a:pPr algn="ctr"/>
-            <a:endParaRPr/>
           </a:p>
         </p:txBody>
       </p:sp>
@@ -15607,7 +14450,7 @@
         </p:nvGraphicFramePr>
         <p:xfrm>
           <a:off x="658368" y="1755648"/>
-          <a:ext cx="10874955" cy="1865376"/>
+          <a:ext cx="10874955" cy="1792224"/>
         </p:xfrm>
         <a:graphic>
           <a:graphicData uri="http://schemas.openxmlformats.org/drawingml/2006/table">
@@ -15616,41 +14459,11 @@
                 <a:tableStyleId>{5C22544A-7EE6-4342-B048-85BDC9FD1C3A}</a:tableStyleId>
               </a:tblPr>
               <a:tblGrid>
-                <a:gridCol w="3262487">
-                  <a:extLst>
-                    <a:ext uri="{9D8B030D-6E8A-4147-A177-3AD203B41FA5}">
-                      <a16:colId xmlns:a16="http://schemas.microsoft.com/office/drawing/2014/main" val="20000"/>
-                    </a:ext>
-                  </a:extLst>
-                </a:gridCol>
-                <a:gridCol w="1903117">
-                  <a:extLst>
-                    <a:ext uri="{9D8B030D-6E8A-4147-A177-3AD203B41FA5}">
-                      <a16:colId xmlns:a16="http://schemas.microsoft.com/office/drawing/2014/main" val="20001"/>
-                    </a:ext>
-                  </a:extLst>
-                </a:gridCol>
-                <a:gridCol w="1903117">
-                  <a:extLst>
-                    <a:ext uri="{9D8B030D-6E8A-4147-A177-3AD203B41FA5}">
-                      <a16:colId xmlns:a16="http://schemas.microsoft.com/office/drawing/2014/main" val="20002"/>
-                    </a:ext>
-                  </a:extLst>
-                </a:gridCol>
-                <a:gridCol w="1903117">
-                  <a:extLst>
-                    <a:ext uri="{9D8B030D-6E8A-4147-A177-3AD203B41FA5}">
-                      <a16:colId xmlns:a16="http://schemas.microsoft.com/office/drawing/2014/main" val="20003"/>
-                    </a:ext>
-                  </a:extLst>
-                </a:gridCol>
-                <a:gridCol w="1903117">
-                  <a:extLst>
-                    <a:ext uri="{9D8B030D-6E8A-4147-A177-3AD203B41FA5}">
-                      <a16:colId xmlns:a16="http://schemas.microsoft.com/office/drawing/2014/main" val="20004"/>
-                    </a:ext>
-                  </a:extLst>
-                </a:gridCol>
+                <a:gridCol w="3262487"/>
+                <a:gridCol w="1903117"/>
+                <a:gridCol w="1903117"/>
+                <a:gridCol w="1903117"/>
+                <a:gridCol w="1903117"/>
               </a:tblGrid>
               <a:tr h="329184">
                 <a:tc>
@@ -15659,7 +14472,15 @@
                     <a:lstStyle/>
                     <a:p>
                       <a:pPr algn="l"/>
-                      <a:endParaRPr/>
+                      <a:r>
+                        <a:rPr sz="1200" b="1">
+                          <a:solidFill>
+                            <a:srgbClr val="FFFFFF"/>
+                          </a:solidFill>
+                          <a:latin typeface="Microsoft JhengHei"/>
+                        </a:rPr>
+                        <a:t/>
+                      </a:r>
                     </a:p>
                   </a:txBody>
                   <a:tcPr marL="45720" marR="45720" marT="18288" marB="18288" anchor="ctr">
@@ -15760,11 +14581,6 @@
                     </a:solidFill>
                   </a:tcPr>
                 </a:tc>
-                <a:extLst>
-                  <a:ext uri="{0D108BD9-81ED-4DB2-BD59-A6C34878D82A}">
-                    <a16:rowId xmlns:a16="http://schemas.microsoft.com/office/drawing/2014/main" val="10000"/>
-                  </a:ext>
-                </a:extLst>
               </a:tr>
               <a:tr h="292608">
                 <a:tc>
@@ -15882,11 +14698,6 @@
                     </a:solidFill>
                   </a:tcPr>
                 </a:tc>
-                <a:extLst>
-                  <a:ext uri="{0D108BD9-81ED-4DB2-BD59-A6C34878D82A}">
-                    <a16:rowId xmlns:a16="http://schemas.microsoft.com/office/drawing/2014/main" val="10001"/>
-                  </a:ext>
-                </a:extLst>
               </a:tr>
               <a:tr h="292608">
                 <a:tc>
@@ -16004,11 +14815,6 @@
                     </a:solidFill>
                   </a:tcPr>
                 </a:tc>
-                <a:extLst>
-                  <a:ext uri="{0D108BD9-81ED-4DB2-BD59-A6C34878D82A}">
-                    <a16:rowId xmlns:a16="http://schemas.microsoft.com/office/drawing/2014/main" val="10002"/>
-                  </a:ext>
-                </a:extLst>
               </a:tr>
               <a:tr h="292608">
                 <a:tc>
@@ -16126,11 +14932,6 @@
                     </a:solidFill>
                   </a:tcPr>
                 </a:tc>
-                <a:extLst>
-                  <a:ext uri="{0D108BD9-81ED-4DB2-BD59-A6C34878D82A}">
-                    <a16:rowId xmlns:a16="http://schemas.microsoft.com/office/drawing/2014/main" val="10003"/>
-                  </a:ext>
-                </a:extLst>
               </a:tr>
               <a:tr h="292608">
                 <a:tc>
@@ -16248,11 +15049,6 @@
                     </a:solidFill>
                   </a:tcPr>
                 </a:tc>
-                <a:extLst>
-                  <a:ext uri="{0D108BD9-81ED-4DB2-BD59-A6C34878D82A}">
-                    <a16:rowId xmlns:a16="http://schemas.microsoft.com/office/drawing/2014/main" val="10004"/>
-                  </a:ext>
-                </a:extLst>
               </a:tr>
               <a:tr h="292608">
                 <a:tc>
@@ -16370,11 +15166,6 @@
                     </a:solidFill>
                   </a:tcPr>
                 </a:tc>
-                <a:extLst>
-                  <a:ext uri="{0D108BD9-81ED-4DB2-BD59-A6C34878D82A}">
-                    <a16:rowId xmlns:a16="http://schemas.microsoft.com/office/drawing/2014/main" val="10005"/>
-                  </a:ext>
-                </a:extLst>
               </a:tr>
             </a:tbl>
           </a:graphicData>
@@ -16425,7 +15216,6 @@
           <a:lstStyle/>
           <a:p>
             <a:pPr algn="ctr"/>
-            <a:endParaRPr/>
           </a:p>
         </p:txBody>
       </p:sp>
@@ -16446,7 +15236,7 @@
           <a:noFill/>
         </p:spPr>
         <p:txBody>
-          <a:bodyPr wrap="square" lIns="0" tIns="0" rIns="0" bIns="0" anchor="t">
+          <a:bodyPr wrap="square" lIns="0" rIns="0" tIns="0" bIns="0" anchor="t">
             <a:spAutoFit/>
           </a:bodyPr>
           <a:lstStyle/>
@@ -16511,7 +15301,6 @@
           <a:lstStyle/>
           <a:p>
             <a:pPr algn="ctr"/>
-            <a:endParaRPr/>
           </a:p>
         </p:txBody>
       </p:sp>
@@ -16532,7 +15321,7 @@
           <a:noFill/>
         </p:spPr>
         <p:txBody>
-          <a:bodyPr wrap="square" lIns="0" tIns="0" rIns="0" bIns="0" anchor="ctr">
+          <a:bodyPr wrap="square" lIns="0" rIns="0" tIns="0" bIns="0" anchor="ctr">
             <a:spAutoFit/>
           </a:bodyPr>
           <a:lstStyle/>
@@ -16571,7 +15360,7 @@
           <a:noFill/>
         </p:spPr>
         <p:txBody>
-          <a:bodyPr wrap="square" lIns="0" tIns="0" rIns="0" bIns="0" anchor="t">
+          <a:bodyPr wrap="square" lIns="0" rIns="0" tIns="0" bIns="0" anchor="t">
             <a:spAutoFit/>
           </a:bodyPr>
           <a:lstStyle/>
@@ -16670,7 +15459,6 @@
           <a:lstStyle/>
           <a:p>
             <a:pPr algn="ctr"/>
-            <a:endParaRPr/>
           </a:p>
         </p:txBody>
       </p:sp>
@@ -16691,7 +15479,7 @@
           <a:noFill/>
         </p:spPr>
         <p:txBody>
-          <a:bodyPr wrap="square" lIns="0" tIns="0" rIns="0" bIns="0" anchor="t">
+          <a:bodyPr wrap="square" lIns="0" rIns="0" tIns="0" bIns="0" anchor="t">
             <a:spAutoFit/>
           </a:bodyPr>
           <a:lstStyle/>
@@ -16756,7 +15544,6 @@
           <a:lstStyle/>
           <a:p>
             <a:pPr algn="ctr"/>
-            <a:endParaRPr/>
           </a:p>
         </p:txBody>
       </p:sp>
@@ -16777,7 +15564,7 @@
           <a:noFill/>
         </p:spPr>
         <p:txBody>
-          <a:bodyPr wrap="square" lIns="0" tIns="0" rIns="0" bIns="0" anchor="ctr">
+          <a:bodyPr wrap="square" lIns="0" rIns="0" tIns="0" bIns="0" anchor="ctr">
             <a:spAutoFit/>
           </a:bodyPr>
           <a:lstStyle/>
@@ -16816,7 +15603,7 @@
           <a:noFill/>
         </p:spPr>
         <p:txBody>
-          <a:bodyPr wrap="square" lIns="0" tIns="0" rIns="0" bIns="0" anchor="t">
+          <a:bodyPr wrap="square" lIns="0" rIns="0" tIns="0" bIns="0" anchor="t">
             <a:spAutoFit/>
           </a:bodyPr>
           <a:lstStyle/>
@@ -16915,7 +15702,6 @@
           <a:lstStyle/>
           <a:p>
             <a:pPr algn="ctr"/>
-            <a:endParaRPr/>
           </a:p>
         </p:txBody>
       </p:sp>
@@ -16936,7 +15722,7 @@
           <a:noFill/>
         </p:spPr>
         <p:txBody>
-          <a:bodyPr wrap="square" lIns="0" tIns="0" rIns="0" bIns="0" anchor="t">
+          <a:bodyPr wrap="square" lIns="0" rIns="0" tIns="0" bIns="0" anchor="t">
             <a:spAutoFit/>
           </a:bodyPr>
           <a:lstStyle/>
@@ -17001,7 +15787,6 @@
           <a:lstStyle/>
           <a:p>
             <a:pPr algn="ctr"/>
-            <a:endParaRPr/>
           </a:p>
         </p:txBody>
       </p:sp>
@@ -17022,7 +15807,7 @@
           <a:noFill/>
         </p:spPr>
         <p:txBody>
-          <a:bodyPr wrap="square" lIns="0" tIns="0" rIns="0" bIns="0" anchor="ctr">
+          <a:bodyPr wrap="square" lIns="0" rIns="0" tIns="0" bIns="0" anchor="ctr">
             <a:spAutoFit/>
           </a:bodyPr>
           <a:lstStyle/>
@@ -17061,7 +15846,7 @@
           <a:noFill/>
         </p:spPr>
         <p:txBody>
-          <a:bodyPr wrap="square" lIns="0" tIns="0" rIns="0" bIns="0" anchor="t">
+          <a:bodyPr wrap="square" lIns="0" rIns="0" tIns="0" bIns="0" anchor="t">
             <a:spAutoFit/>
           </a:bodyPr>
           <a:lstStyle/>
@@ -17158,7 +15943,6 @@
           <a:lstStyle/>
           <a:p>
             <a:pPr algn="ctr"/>
-            <a:endParaRPr/>
           </a:p>
         </p:txBody>
       </p:sp>
@@ -17179,7 +15963,7 @@
           <a:noFill/>
         </p:spPr>
         <p:txBody>
-          <a:bodyPr wrap="square" lIns="0" tIns="0" rIns="0" bIns="0" anchor="ctr">
+          <a:bodyPr wrap="square" lIns="0" rIns="0" tIns="0" bIns="0" anchor="ctr">
             <a:spAutoFit/>
           </a:bodyPr>
           <a:lstStyle/>
@@ -17210,7 +15994,7 @@
 </file>
 
 <file path=ppt/slides/slide7.xml><?xml version="1.0" encoding="utf-8"?>
-<p:sld xmlns:a="http://schemas.openxmlformats.org/drawingml/2006/main" xmlns:r="http://schemas.openxmlformats.org/officeDocument/2006/relationships" xmlns:p="http://schemas.openxmlformats.org/presentationml/2006/main">
+<p:sld xmlns:a="http://schemas.openxmlformats.org/drawingml/2006/main" xmlns:p="http://schemas.openxmlformats.org/presentationml/2006/main" xmlns:r="http://schemas.openxmlformats.org/officeDocument/2006/relationships">
   <p:cSld>
     <p:spTree>
       <p:nvGrpSpPr>
@@ -17218,14 +16002,7 @@
         <p:cNvGrpSpPr/>
         <p:nvPr/>
       </p:nvGrpSpPr>
-      <p:grpSpPr>
-        <a:xfrm>
-          <a:off x="0" y="0"/>
-          <a:ext cx="0" cy="0"/>
-          <a:chOff x="0" y="0"/>
-          <a:chExt cx="0" cy="0"/>
-        </a:xfrm>
-      </p:grpSpPr>
+      <p:grpSpPr/>
       <p:sp>
         <p:nvSpPr>
           <p:cNvPr id="2" name="TextBox 1"/>
@@ -17243,7 +16020,7 @@
           <a:noFill/>
         </p:spPr>
         <p:txBody>
-          <a:bodyPr wrap="square" lIns="0" tIns="0" rIns="0" bIns="0" anchor="t">
+          <a:bodyPr wrap="square" lIns="0" rIns="0" tIns="0" bIns="0" anchor="t">
             <a:spAutoFit/>
           </a:bodyPr>
           <a:lstStyle/>
@@ -17282,7 +16059,7 @@
           <a:noFill/>
         </p:spPr>
         <p:txBody>
-          <a:bodyPr wrap="square" lIns="0" tIns="0" rIns="0" bIns="0" anchor="t">
+          <a:bodyPr wrap="square" lIns="0" rIns="0" tIns="0" bIns="0" anchor="t">
             <a:spAutoFit/>
           </a:bodyPr>
           <a:lstStyle/>
@@ -17321,7 +16098,7 @@
           <a:noFill/>
         </p:spPr>
         <p:txBody>
-          <a:bodyPr wrap="square" lIns="0" tIns="0" rIns="0" bIns="0" anchor="t">
+          <a:bodyPr wrap="square" lIns="0" rIns="0" tIns="0" bIns="0" anchor="t">
             <a:spAutoFit/>
           </a:bodyPr>
           <a:lstStyle/>
@@ -17384,7 +16161,6 @@
           <a:lstStyle/>
           <a:p>
             <a:pPr algn="ctr"/>
-            <a:endParaRPr/>
           </a:p>
         </p:txBody>
       </p:sp>
@@ -17407,34 +16183,10 @@
                 <a:tableStyleId>{5C22544A-7EE6-4342-B048-85BDC9FD1C3A}</a:tableStyleId>
               </a:tblPr>
               <a:tblGrid>
-                <a:gridCol w="2827489">
-                  <a:extLst>
-                    <a:ext uri="{9D8B030D-6E8A-4147-A177-3AD203B41FA5}">
-                      <a16:colId xmlns:a16="http://schemas.microsoft.com/office/drawing/2014/main" val="20000"/>
-                    </a:ext>
-                  </a:extLst>
-                </a:gridCol>
-                <a:gridCol w="2682489">
-                  <a:extLst>
-                    <a:ext uri="{9D8B030D-6E8A-4147-A177-3AD203B41FA5}">
-                      <a16:colId xmlns:a16="http://schemas.microsoft.com/office/drawing/2014/main" val="20001"/>
-                    </a:ext>
-                  </a:extLst>
-                </a:gridCol>
-                <a:gridCol w="2682489">
-                  <a:extLst>
-                    <a:ext uri="{9D8B030D-6E8A-4147-A177-3AD203B41FA5}">
-                      <a16:colId xmlns:a16="http://schemas.microsoft.com/office/drawing/2014/main" val="20002"/>
-                    </a:ext>
-                  </a:extLst>
-                </a:gridCol>
-                <a:gridCol w="2682489">
-                  <a:extLst>
-                    <a:ext uri="{9D8B030D-6E8A-4147-A177-3AD203B41FA5}">
-                      <a16:colId xmlns:a16="http://schemas.microsoft.com/office/drawing/2014/main" val="20003"/>
-                    </a:ext>
-                  </a:extLst>
-                </a:gridCol>
+                <a:gridCol w="2827489"/>
+                <a:gridCol w="2682489"/>
+                <a:gridCol w="2682489"/>
+                <a:gridCol w="2682489"/>
               </a:tblGrid>
               <a:tr h="329184">
                 <a:tc>
@@ -17443,7 +16195,15 @@
                     <a:lstStyle/>
                     <a:p>
                       <a:pPr algn="l"/>
-                      <a:endParaRPr/>
+                      <a:r>
+                        <a:rPr sz="1200" b="1">
+                          <a:solidFill>
+                            <a:srgbClr val="FFFFFF"/>
+                          </a:solidFill>
+                          <a:latin typeface="Microsoft JhengHei"/>
+                        </a:rPr>
+                        <a:t/>
+                      </a:r>
                     </a:p>
                   </a:txBody>
                   <a:tcPr marL="45720" marR="45720" marT="18288" marB="18288" anchor="ctr">
@@ -17521,11 +16281,6 @@
                     </a:solidFill>
                   </a:tcPr>
                 </a:tc>
-                <a:extLst>
-                  <a:ext uri="{0D108BD9-81ED-4DB2-BD59-A6C34878D82A}">
-                    <a16:rowId xmlns:a16="http://schemas.microsoft.com/office/drawing/2014/main" val="10000"/>
-                  </a:ext>
-                </a:extLst>
               </a:tr>
               <a:tr h="292608">
                 <a:tc>
@@ -17620,11 +16375,6 @@
                     </a:solidFill>
                   </a:tcPr>
                 </a:tc>
-                <a:extLst>
-                  <a:ext uri="{0D108BD9-81ED-4DB2-BD59-A6C34878D82A}">
-                    <a16:rowId xmlns:a16="http://schemas.microsoft.com/office/drawing/2014/main" val="10001"/>
-                  </a:ext>
-                </a:extLst>
               </a:tr>
               <a:tr h="292608">
                 <a:tc>
@@ -17719,11 +16469,6 @@
                     </a:solidFill>
                   </a:tcPr>
                 </a:tc>
-                <a:extLst>
-                  <a:ext uri="{0D108BD9-81ED-4DB2-BD59-A6C34878D82A}">
-                    <a16:rowId xmlns:a16="http://schemas.microsoft.com/office/drawing/2014/main" val="10002"/>
-                  </a:ext>
-                </a:extLst>
               </a:tr>
               <a:tr h="292608">
                 <a:tc>
@@ -17818,11 +16563,6 @@
                     </a:solidFill>
                   </a:tcPr>
                 </a:tc>
-                <a:extLst>
-                  <a:ext uri="{0D108BD9-81ED-4DB2-BD59-A6C34878D82A}">
-                    <a16:rowId xmlns:a16="http://schemas.microsoft.com/office/drawing/2014/main" val="10003"/>
-                  </a:ext>
-                </a:extLst>
               </a:tr>
               <a:tr h="292608">
                 <a:tc>
@@ -17917,11 +16657,6 @@
                     </a:solidFill>
                   </a:tcPr>
                 </a:tc>
-                <a:extLst>
-                  <a:ext uri="{0D108BD9-81ED-4DB2-BD59-A6C34878D82A}">
-                    <a16:rowId xmlns:a16="http://schemas.microsoft.com/office/drawing/2014/main" val="10004"/>
-                  </a:ext>
-                </a:extLst>
               </a:tr>
               <a:tr h="292608">
                 <a:tc>
@@ -18016,11 +16751,6 @@
                     </a:solidFill>
                   </a:tcPr>
                 </a:tc>
-                <a:extLst>
-                  <a:ext uri="{0D108BD9-81ED-4DB2-BD59-A6C34878D82A}">
-                    <a16:rowId xmlns:a16="http://schemas.microsoft.com/office/drawing/2014/main" val="10005"/>
-                  </a:ext>
-                </a:extLst>
               </a:tr>
               <a:tr h="292608">
                 <a:tc>
@@ -18115,11 +16845,6 @@
                     </a:solidFill>
                   </a:tcPr>
                 </a:tc>
-                <a:extLst>
-                  <a:ext uri="{0D108BD9-81ED-4DB2-BD59-A6C34878D82A}">
-                    <a16:rowId xmlns:a16="http://schemas.microsoft.com/office/drawing/2014/main" val="10006"/>
-                  </a:ext>
-                </a:extLst>
               </a:tr>
               <a:tr h="292608">
                 <a:tc>
@@ -18214,11 +16939,6 @@
                     </a:solidFill>
                   </a:tcPr>
                 </a:tc>
-                <a:extLst>
-                  <a:ext uri="{0D108BD9-81ED-4DB2-BD59-A6C34878D82A}">
-                    <a16:rowId xmlns:a16="http://schemas.microsoft.com/office/drawing/2014/main" val="10007"/>
-                  </a:ext>
-                </a:extLst>
               </a:tr>
               <a:tr h="292608">
                 <a:tc>
@@ -18313,11 +17033,6 @@
                     </a:solidFill>
                   </a:tcPr>
                 </a:tc>
-                <a:extLst>
-                  <a:ext uri="{0D108BD9-81ED-4DB2-BD59-A6C34878D82A}">
-                    <a16:rowId xmlns:a16="http://schemas.microsoft.com/office/drawing/2014/main" val="10008"/>
-                  </a:ext>
-                </a:extLst>
               </a:tr>
               <a:tr h="292608">
                 <a:tc>
@@ -18412,11 +17127,6 @@
                     </a:solidFill>
                   </a:tcPr>
                 </a:tc>
-                <a:extLst>
-                  <a:ext uri="{0D108BD9-81ED-4DB2-BD59-A6C34878D82A}">
-                    <a16:rowId xmlns:a16="http://schemas.microsoft.com/office/drawing/2014/main" val="10009"/>
-                  </a:ext>
-                </a:extLst>
               </a:tr>
               <a:tr h="292608">
                 <a:tc>
@@ -18511,11 +17221,6 @@
                     </a:solidFill>
                   </a:tcPr>
                 </a:tc>
-                <a:extLst>
-                  <a:ext uri="{0D108BD9-81ED-4DB2-BD59-A6C34878D82A}">
-                    <a16:rowId xmlns:a16="http://schemas.microsoft.com/office/drawing/2014/main" val="10010"/>
-                  </a:ext>
-                </a:extLst>
               </a:tr>
             </a:tbl>
           </a:graphicData>
@@ -18564,7 +17269,6 @@
           <a:lstStyle/>
           <a:p>
             <a:pPr algn="ctr"/>
-            <a:endParaRPr/>
           </a:p>
         </p:txBody>
       </p:sp>
@@ -18576,8 +17280,8 @@
         </p:nvSpPr>
         <p:spPr>
           <a:xfrm>
-            <a:off x="841247" y="5513585"/>
-            <a:ext cx="9293047" cy="622286"/>
+            <a:off x="841247" y="5138928"/>
+            <a:ext cx="9293047" cy="1371600"/>
           </a:xfrm>
           <a:prstGeom prst="rect">
             <a:avLst/>
@@ -18585,7 +17289,7 @@
           <a:noFill/>
         </p:spPr>
         <p:txBody>
-          <a:bodyPr wrap="square" lIns="0" tIns="0" rIns="0" bIns="0" anchor="ctr">
+          <a:bodyPr wrap="square" lIns="0" rIns="0" tIns="0" bIns="0" anchor="ctr">
             <a:spAutoFit/>
           </a:bodyPr>
           <a:lstStyle/>
@@ -18596,93 +17300,13 @@
               </a:lnSpc>
             </a:pPr>
             <a:r>
-              <a:rPr sz="1700" b="1" dirty="0">
+              <a:rPr sz="1700" b="1">
                 <a:solidFill>
                   <a:srgbClr val="FFFFFF"/>
                 </a:solidFill>
                 <a:latin typeface="Microsoft JhengHei"/>
               </a:rPr>
-              <a:t>R8 </a:t>
-            </a:r>
-            <a:r>
-              <a:rPr sz="1700" b="1" dirty="0" err="1">
-                <a:solidFill>
-                  <a:srgbClr val="FFFFFF"/>
-                </a:solidFill>
-                <a:latin typeface="Microsoft JhengHei"/>
-              </a:rPr>
-              <a:t>沒有答案</a:t>
-            </a:r>
-            <a:r>
-              <a:rPr sz="1700" b="1" dirty="0">
-                <a:solidFill>
-                  <a:srgbClr val="FFFFFF"/>
-                </a:solidFill>
-                <a:latin typeface="Microsoft JhengHei"/>
-              </a:rPr>
-              <a:t> —— </a:t>
-            </a:r>
-            <a:r>
-              <a:rPr sz="1700" b="1" dirty="0" err="1">
-                <a:solidFill>
-                  <a:srgbClr val="FFFFFF"/>
-                </a:solidFill>
-                <a:latin typeface="Microsoft JhengHei"/>
-              </a:rPr>
-              <a:t>法務書面意見於</a:t>
-            </a:r>
-            <a:r>
-              <a:rPr sz="1700" b="1" dirty="0">
-                <a:solidFill>
-                  <a:srgbClr val="FFFFFF"/>
-                </a:solidFill>
-                <a:latin typeface="Microsoft JhengHei"/>
-              </a:rPr>
-              <a:t> G1(第 6 週)</a:t>
-            </a:r>
-            <a:r>
-              <a:rPr sz="1700" b="1" dirty="0" err="1">
-                <a:solidFill>
-                  <a:srgbClr val="FFFFFF"/>
-                </a:solidFill>
-                <a:latin typeface="Microsoft JhengHei"/>
-              </a:rPr>
-              <a:t>前到位</a:t>
-            </a:r>
-            <a:br>
-              <a:rPr lang="en-US" sz="1700" b="1" dirty="0">
-                <a:solidFill>
-                  <a:srgbClr val="FFFFFF"/>
-                </a:solidFill>
-                <a:latin typeface="Microsoft JhengHei"/>
-              </a:rPr>
-            </a:br>
-            <a:r>
-              <a:rPr sz="1700" b="1" dirty="0">
-                <a:solidFill>
-                  <a:srgbClr val="FFFFFF"/>
-                </a:solidFill>
-                <a:latin typeface="Microsoft JhengHei"/>
-              </a:rPr>
-              <a:t>R9 · R10 </a:t>
-            </a:r>
-            <a:r>
-              <a:rPr sz="1700" b="1" dirty="0" err="1">
-                <a:solidFill>
-                  <a:srgbClr val="FFFFFF"/>
-                </a:solidFill>
-                <a:latin typeface="Microsoft JhengHei"/>
-              </a:rPr>
-              <a:t>是這個方案自己造成的,放行門在移交後,不在這六個月</a:t>
-            </a:r>
-            <a:r>
-              <a:rPr sz="1700" b="1" dirty="0">
-                <a:solidFill>
-                  <a:srgbClr val="FFFFFF"/>
-                </a:solidFill>
-                <a:latin typeface="Microsoft JhengHei"/>
-              </a:rPr>
-              <a:t>。</a:t>
+              <a:t>R8 沒有答案 —— 法務書面意見於 G1(第 6 週)前到位;R9 · R10 是這個方案自己造成的,放行門在移交後,不在這六個月。</a:t>
             </a:r>
           </a:p>
         </p:txBody>
@@ -18696,7 +17320,7 @@
 </file>
 
 <file path=ppt/slides/slide8.xml><?xml version="1.0" encoding="utf-8"?>
-<p:sld xmlns:a="http://schemas.openxmlformats.org/drawingml/2006/main" xmlns:r="http://schemas.openxmlformats.org/officeDocument/2006/relationships" xmlns:p="http://schemas.openxmlformats.org/presentationml/2006/main">
+<p:sld xmlns:a="http://schemas.openxmlformats.org/drawingml/2006/main" xmlns:p="http://schemas.openxmlformats.org/presentationml/2006/main" xmlns:r="http://schemas.openxmlformats.org/officeDocument/2006/relationships">
   <p:cSld>
     <p:spTree>
       <p:nvGrpSpPr>
@@ -18704,14 +17328,7 @@
         <p:cNvGrpSpPr/>
         <p:nvPr/>
       </p:nvGrpSpPr>
-      <p:grpSpPr>
-        <a:xfrm>
-          <a:off x="0" y="0"/>
-          <a:ext cx="0" cy="0"/>
-          <a:chOff x="0" y="0"/>
-          <a:chExt cx="0" cy="0"/>
-        </a:xfrm>
-      </p:grpSpPr>
+      <p:grpSpPr/>
       <p:sp>
         <p:nvSpPr>
           <p:cNvPr id="2" name="TextBox 1"/>
@@ -18729,7 +17346,7 @@
           <a:noFill/>
         </p:spPr>
         <p:txBody>
-          <a:bodyPr wrap="square" lIns="0" tIns="0" rIns="0" bIns="0" anchor="t">
+          <a:bodyPr wrap="square" lIns="0" rIns="0" tIns="0" bIns="0" anchor="t">
             <a:spAutoFit/>
           </a:bodyPr>
           <a:lstStyle/>
@@ -18768,7 +17385,7 @@
           <a:noFill/>
         </p:spPr>
         <p:txBody>
-          <a:bodyPr wrap="square" lIns="0" tIns="0" rIns="0" bIns="0" anchor="t">
+          <a:bodyPr wrap="square" lIns="0" rIns="0" tIns="0" bIns="0" anchor="t">
             <a:spAutoFit/>
           </a:bodyPr>
           <a:lstStyle/>
@@ -18807,7 +17424,7 @@
           <a:noFill/>
         </p:spPr>
         <p:txBody>
-          <a:bodyPr wrap="square" lIns="0" tIns="0" rIns="0" bIns="0" anchor="t">
+          <a:bodyPr wrap="square" lIns="0" rIns="0" tIns="0" bIns="0" anchor="t">
             <a:spAutoFit/>
           </a:bodyPr>
           <a:lstStyle/>
@@ -18870,7 +17487,6 @@
           <a:lstStyle/>
           <a:p>
             <a:pPr algn="ctr"/>
-            <a:endParaRPr/>
           </a:p>
         </p:txBody>
       </p:sp>
@@ -18893,27 +17509,9 @@
                 <a:tableStyleId>{5C22544A-7EE6-4342-B048-85BDC9FD1C3A}</a:tableStyleId>
               </a:tblPr>
               <a:tblGrid>
-                <a:gridCol w="5981227">
-                  <a:extLst>
-                    <a:ext uri="{9D8B030D-6E8A-4147-A177-3AD203B41FA5}">
-                      <a16:colId xmlns:a16="http://schemas.microsoft.com/office/drawing/2014/main" val="20000"/>
-                    </a:ext>
-                  </a:extLst>
-                </a:gridCol>
-                <a:gridCol w="2446865">
-                  <a:extLst>
-                    <a:ext uri="{9D8B030D-6E8A-4147-A177-3AD203B41FA5}">
-                      <a16:colId xmlns:a16="http://schemas.microsoft.com/office/drawing/2014/main" val="20001"/>
-                    </a:ext>
-                  </a:extLst>
-                </a:gridCol>
-                <a:gridCol w="2446865">
-                  <a:extLst>
-                    <a:ext uri="{9D8B030D-6E8A-4147-A177-3AD203B41FA5}">
-                      <a16:colId xmlns:a16="http://schemas.microsoft.com/office/drawing/2014/main" val="20002"/>
-                    </a:ext>
-                  </a:extLst>
-                </a:gridCol>
+                <a:gridCol w="5981227"/>
+                <a:gridCol w="2446865"/>
+                <a:gridCol w="2446865"/>
               </a:tblGrid>
               <a:tr h="329184">
                 <a:tc>
@@ -18922,7 +17520,15 @@
                     <a:lstStyle/>
                     <a:p>
                       <a:pPr algn="l"/>
-                      <a:endParaRPr/>
+                      <a:r>
+                        <a:rPr sz="1200" b="1">
+                          <a:solidFill>
+                            <a:srgbClr val="FFFFFF"/>
+                          </a:solidFill>
+                          <a:latin typeface="Microsoft JhengHei"/>
+                        </a:rPr>
+                        <a:t/>
+                      </a:r>
                     </a:p>
                   </a:txBody>
                   <a:tcPr marL="45720" marR="45720" marT="18288" marB="18288" anchor="ctr">
@@ -18977,11 +17583,6 @@
                     </a:solidFill>
                   </a:tcPr>
                 </a:tc>
-                <a:extLst>
-                  <a:ext uri="{0D108BD9-81ED-4DB2-BD59-A6C34878D82A}">
-                    <a16:rowId xmlns:a16="http://schemas.microsoft.com/office/drawing/2014/main" val="10000"/>
-                  </a:ext>
-                </a:extLst>
               </a:tr>
               <a:tr h="292608">
                 <a:tc>
@@ -18991,47 +17592,14 @@
                     <a:p>
                       <a:pPr algn="l"/>
                       <a:r>
-                        <a:rPr sz="1200" b="0" dirty="0">
+                        <a:rPr sz="1200" b="0">
                           <a:solidFill>
                             <a:srgbClr val="16212E"/>
                           </a:solidFill>
                           <a:latin typeface="Microsoft JhengHei"/>
                         </a:rPr>
-                        <a:t>1 </a:t>
+                        <a:t>1 人類、社會與環境福祉｜期內量增人力不變·移交後 850 筆無人覆核·推估非實測</a:t>
                       </a:r>
-                      <a:r>
-                        <a:rPr sz="1200" b="0" dirty="0" err="1">
-                          <a:solidFill>
-                            <a:srgbClr val="16212E"/>
-                          </a:solidFill>
-                          <a:latin typeface="Microsoft JhengHei"/>
-                        </a:rPr>
-                        <a:t>人類、社會與環境福祉｜期內量增人力不變·移交後</a:t>
-                      </a:r>
-                      <a:r>
-                        <a:rPr sz="1200" b="0" dirty="0">
-                          <a:solidFill>
-                            <a:srgbClr val="16212E"/>
-                          </a:solidFill>
-                          <a:latin typeface="Microsoft JhengHei"/>
-                        </a:rPr>
-                        <a:t> 850 </a:t>
-                      </a:r>
-                      <a:r>
-                        <a:rPr sz="1200" b="0" dirty="0" err="1">
-                          <a:solidFill>
-                            <a:srgbClr val="16212E"/>
-                          </a:solidFill>
-                          <a:latin typeface="Microsoft JhengHei"/>
-                        </a:rPr>
-                        <a:t>筆無人覆核·推估非實測</a:t>
-                      </a:r>
-                      <a:endParaRPr sz="1200" b="0" dirty="0">
-                        <a:solidFill>
-                          <a:srgbClr val="16212E"/>
-                        </a:solidFill>
-                        <a:latin typeface="Microsoft JhengHei"/>
-                      </a:endParaRPr>
                     </a:p>
                   </a:txBody>
                   <a:tcPr marL="45720" marR="45720" marT="18288" marB="18288" anchor="ctr">
@@ -19047,7 +17615,7 @@
                     <a:p>
                       <a:pPr algn="ctr"/>
                       <a:r>
-                        <a:rPr sz="1200" b="0" dirty="0" err="1">
+                        <a:rPr sz="1200" b="0">
                           <a:solidFill>
                             <a:srgbClr val="6B7885"/>
                           </a:solidFill>
@@ -19055,12 +17623,6 @@
                         </a:rPr>
                         <a:t>部分</a:t>
                       </a:r>
-                      <a:endParaRPr sz="1200" b="0" dirty="0">
-                        <a:solidFill>
-                          <a:srgbClr val="6B7885"/>
-                        </a:solidFill>
-                        <a:latin typeface="Microsoft JhengHei"/>
-                      </a:endParaRPr>
                     </a:p>
                   </a:txBody>
                   <a:tcPr marL="45720" marR="45720" marT="18288" marB="18288" anchor="ctr">
@@ -19092,11 +17654,6 @@
                     </a:solidFill>
                   </a:tcPr>
                 </a:tc>
-                <a:extLst>
-                  <a:ext uri="{0D108BD9-81ED-4DB2-BD59-A6C34878D82A}">
-                    <a16:rowId xmlns:a16="http://schemas.microsoft.com/office/drawing/2014/main" val="10001"/>
-                  </a:ext>
-                </a:extLst>
               </a:tr>
               <a:tr h="292608">
                 <a:tc>
@@ -19129,7 +17686,7 @@
                     <a:p>
                       <a:pPr algn="ctr"/>
                       <a:r>
-                        <a:rPr sz="1200" b="0" dirty="0" err="1">
+                        <a:rPr sz="1200" b="0">
                           <a:solidFill>
                             <a:srgbClr val="6B7885"/>
                           </a:solidFill>
@@ -19137,12 +17694,6 @@
                         </a:rPr>
                         <a:t>部分</a:t>
                       </a:r>
-                      <a:endParaRPr sz="1200" b="0" dirty="0">
-                        <a:solidFill>
-                          <a:srgbClr val="6B7885"/>
-                        </a:solidFill>
-                        <a:latin typeface="Microsoft JhengHei"/>
-                      </a:endParaRPr>
                     </a:p>
                   </a:txBody>
                   <a:tcPr marL="45720" marR="45720" marT="18288" marB="18288" anchor="ctr">
@@ -19174,11 +17725,6 @@
                     </a:solidFill>
                   </a:tcPr>
                 </a:tc>
-                <a:extLst>
-                  <a:ext uri="{0D108BD9-81ED-4DB2-BD59-A6C34878D82A}">
-                    <a16:rowId xmlns:a16="http://schemas.microsoft.com/office/drawing/2014/main" val="10002"/>
-                  </a:ext>
-                </a:extLst>
               </a:tr>
               <a:tr h="292608">
                 <a:tc>
@@ -19211,7 +17757,7 @@
                     <a:p>
                       <a:pPr algn="ctr"/>
                       <a:r>
-                        <a:rPr sz="1200" b="0" dirty="0" err="1">
+                        <a:rPr sz="1200" b="0">
                           <a:solidFill>
                             <a:srgbClr val="C00000"/>
                           </a:solidFill>
@@ -19219,12 +17765,6 @@
                         </a:rPr>
                         <a:t>部分</a:t>
                       </a:r>
-                      <a:endParaRPr sz="1200" b="0" dirty="0">
-                        <a:solidFill>
-                          <a:srgbClr val="C00000"/>
-                        </a:solidFill>
-                        <a:latin typeface="Microsoft JhengHei"/>
-                      </a:endParaRPr>
                     </a:p>
                   </a:txBody>
                   <a:tcPr marL="45720" marR="45720" marT="18288" marB="18288" anchor="ctr">
@@ -19240,7 +17780,7 @@
                     <a:p>
                       <a:pPr algn="ctr"/>
                       <a:r>
-                        <a:rPr sz="1200" b="0" dirty="0" err="1">
+                        <a:rPr sz="1200" b="0">
                           <a:solidFill>
                             <a:srgbClr val="C00000"/>
                           </a:solidFill>
@@ -19248,12 +17788,6 @@
                         </a:rPr>
                         <a:t>未達成</a:t>
                       </a:r>
-                      <a:endParaRPr sz="1200" b="0" dirty="0">
-                        <a:solidFill>
-                          <a:srgbClr val="C00000"/>
-                        </a:solidFill>
-                        <a:latin typeface="Microsoft JhengHei"/>
-                      </a:endParaRPr>
                     </a:p>
                   </a:txBody>
                   <a:tcPr marL="45720" marR="45720" marT="18288" marB="18288" anchor="ctr">
@@ -19262,11 +17796,6 @@
                     </a:solidFill>
                   </a:tcPr>
                 </a:tc>
-                <a:extLst>
-                  <a:ext uri="{0D108BD9-81ED-4DB2-BD59-A6C34878D82A}">
-                    <a16:rowId xmlns:a16="http://schemas.microsoft.com/office/drawing/2014/main" val="10003"/>
-                  </a:ext>
-                </a:extLst>
               </a:tr>
               <a:tr h="292608">
                 <a:tc>
@@ -19338,11 +17867,6 @@
                     </a:solidFill>
                   </a:tcPr>
                 </a:tc>
-                <a:extLst>
-                  <a:ext uri="{0D108BD9-81ED-4DB2-BD59-A6C34878D82A}">
-                    <a16:rowId xmlns:a16="http://schemas.microsoft.com/office/drawing/2014/main" val="10004"/>
-                  </a:ext>
-                </a:extLst>
               </a:tr>
               <a:tr h="292608">
                 <a:tc>
@@ -19414,11 +17938,6 @@
                     </a:solidFill>
                   </a:tcPr>
                 </a:tc>
-                <a:extLst>
-                  <a:ext uri="{0D108BD9-81ED-4DB2-BD59-A6C34878D82A}">
-                    <a16:rowId xmlns:a16="http://schemas.microsoft.com/office/drawing/2014/main" val="10005"/>
-                  </a:ext>
-                </a:extLst>
               </a:tr>
               <a:tr h="292608">
                 <a:tc>
@@ -19490,11 +18009,6 @@
                     </a:solidFill>
                   </a:tcPr>
                 </a:tc>
-                <a:extLst>
-                  <a:ext uri="{0D108BD9-81ED-4DB2-BD59-A6C34878D82A}">
-                    <a16:rowId xmlns:a16="http://schemas.microsoft.com/office/drawing/2014/main" val="10006"/>
-                  </a:ext>
-                </a:extLst>
               </a:tr>
               <a:tr h="292608">
                 <a:tc>
@@ -19566,11 +18080,6 @@
                     </a:solidFill>
                   </a:tcPr>
                 </a:tc>
-                <a:extLst>
-                  <a:ext uri="{0D108BD9-81ED-4DB2-BD59-A6C34878D82A}">
-                    <a16:rowId xmlns:a16="http://schemas.microsoft.com/office/drawing/2014/main" val="10007"/>
-                  </a:ext>
-                </a:extLst>
               </a:tr>
               <a:tr h="292608">
                 <a:tc>
@@ -19626,7 +18135,7 @@
                     <a:p>
                       <a:pPr algn="ctr"/>
                       <a:r>
-                        <a:rPr sz="1200" b="0" dirty="0" err="1">
+                        <a:rPr sz="1200" b="0">
                           <a:solidFill>
                             <a:srgbClr val="C00000"/>
                           </a:solidFill>
@@ -19634,12 +18143,6 @@
                         </a:rPr>
                         <a:t>未達成</a:t>
                       </a:r>
-                      <a:endParaRPr sz="1200" b="0" dirty="0">
-                        <a:solidFill>
-                          <a:srgbClr val="C00000"/>
-                        </a:solidFill>
-                        <a:latin typeface="Microsoft JhengHei"/>
-                      </a:endParaRPr>
                     </a:p>
                   </a:txBody>
                   <a:tcPr marL="45720" marR="45720" marT="18288" marB="18288" anchor="ctr">
@@ -19648,11 +18151,6 @@
                     </a:solidFill>
                   </a:tcPr>
                 </a:tc>
-                <a:extLst>
-                  <a:ext uri="{0D108BD9-81ED-4DB2-BD59-A6C34878D82A}">
-                    <a16:rowId xmlns:a16="http://schemas.microsoft.com/office/drawing/2014/main" val="10008"/>
-                  </a:ext>
-                </a:extLst>
               </a:tr>
             </a:tbl>
           </a:graphicData>
@@ -19701,7 +18199,6 @@
           <a:lstStyle/>
           <a:p>
             <a:pPr algn="ctr"/>
-            <a:endParaRPr/>
           </a:p>
         </p:txBody>
       </p:sp>
@@ -19722,7 +18219,7 @@
           <a:noFill/>
         </p:spPr>
         <p:txBody>
-          <a:bodyPr wrap="square" lIns="0" tIns="0" rIns="0" bIns="0" anchor="ctr">
+          <a:bodyPr wrap="square" lIns="0" rIns="0" tIns="0" bIns="0" anchor="ctr">
             <a:spAutoFit/>
           </a:bodyPr>
           <a:lstStyle/>
@@ -19753,7 +18250,7 @@
 </file>
 
 <file path=ppt/slides/slide9.xml><?xml version="1.0" encoding="utf-8"?>
-<p:sld xmlns:a="http://schemas.openxmlformats.org/drawingml/2006/main" xmlns:r="http://schemas.openxmlformats.org/officeDocument/2006/relationships" xmlns:p="http://schemas.openxmlformats.org/presentationml/2006/main">
+<p:sld xmlns:a="http://schemas.openxmlformats.org/drawingml/2006/main" xmlns:p="http://schemas.openxmlformats.org/presentationml/2006/main" xmlns:r="http://schemas.openxmlformats.org/officeDocument/2006/relationships">
   <p:cSld>
     <p:spTree>
       <p:nvGrpSpPr>
@@ -19761,14 +18258,7 @@
         <p:cNvGrpSpPr/>
         <p:nvPr/>
       </p:nvGrpSpPr>
-      <p:grpSpPr>
-        <a:xfrm>
-          <a:off x="0" y="0"/>
-          <a:ext cx="0" cy="0"/>
-          <a:chOff x="0" y="0"/>
-          <a:chExt cx="0" cy="0"/>
-        </a:xfrm>
-      </p:grpSpPr>
+      <p:grpSpPr/>
       <p:sp>
         <p:nvSpPr>
           <p:cNvPr id="2" name="TextBox 1"/>
@@ -19786,7 +18276,7 @@
           <a:noFill/>
         </p:spPr>
         <p:txBody>
-          <a:bodyPr wrap="square" lIns="0" tIns="0" rIns="0" bIns="0" anchor="t">
+          <a:bodyPr wrap="square" lIns="0" rIns="0" tIns="0" bIns="0" anchor="t">
             <a:spAutoFit/>
           </a:bodyPr>
           <a:lstStyle/>
@@ -19825,7 +18315,7 @@
           <a:noFill/>
         </p:spPr>
         <p:txBody>
-          <a:bodyPr wrap="square" lIns="0" tIns="0" rIns="0" bIns="0" anchor="t">
+          <a:bodyPr wrap="square" lIns="0" rIns="0" tIns="0" bIns="0" anchor="t">
             <a:spAutoFit/>
           </a:bodyPr>
           <a:lstStyle/>
@@ -19842,7 +18332,7 @@
                 </a:solidFill>
                 <a:latin typeface="Microsoft JhengHei"/>
               </a:rPr>
-              <a:t>證明它有效的方法,同時是喊停它的方法</a:t>
+              <a:t>你買到的三層效益,和四條隨時喊停的權力</a:t>
             </a:r>
           </a:p>
         </p:txBody>
@@ -19864,7 +18354,7 @@
           <a:noFill/>
         </p:spPr>
         <p:txBody>
-          <a:bodyPr wrap="square" lIns="0" tIns="0" rIns="0" bIns="0" anchor="t">
+          <a:bodyPr wrap="square" lIns="0" rIns="0" tIns="0" bIns="0" anchor="t">
             <a:spAutoFit/>
           </a:bodyPr>
           <a:lstStyle/>
@@ -19881,7 +18371,7 @@
                 </a:solidFill>
                 <a:latin typeface="Microsoft JhengHei"/>
               </a:rPr>
-              <a:t>三層 KPI 證明有效,四道護欄一票否決;訂不出的目標值寫明由哪道門訂</a:t>
+              <a:t>三層 KPI 是效益,四道護欄一票否決;訂不出的目標值寫明由哪道門訂</a:t>
             </a:r>
           </a:p>
         </p:txBody>
@@ -19927,7 +18417,6 @@
           <a:lstStyle/>
           <a:p>
             <a:pPr algn="ctr"/>
-            <a:endParaRPr/>
           </a:p>
         </p:txBody>
       </p:sp>
@@ -19974,7 +18463,6 @@
           <a:lstStyle/>
           <a:p>
             <a:pPr algn="ctr"/>
-            <a:endParaRPr/>
           </a:p>
         </p:txBody>
       </p:sp>
@@ -19995,7 +18483,7 @@
           <a:noFill/>
         </p:spPr>
         <p:txBody>
-          <a:bodyPr wrap="square" lIns="0" tIns="0" rIns="0" bIns="0" anchor="ctr">
+          <a:bodyPr wrap="square" lIns="0" rIns="0" tIns="0" bIns="0" anchor="ctr">
             <a:spAutoFit/>
           </a:bodyPr>
           <a:lstStyle/>
@@ -20036,27 +18524,9 @@
                 <a:tableStyleId>{5C22544A-7EE6-4342-B048-85BDC9FD1C3A}</a:tableStyleId>
               </a:tblPr>
               <a:tblGrid>
-                <a:gridCol w="3262487">
-                  <a:extLst>
-                    <a:ext uri="{9D8B030D-6E8A-4147-A177-3AD203B41FA5}">
-                      <a16:colId xmlns:a16="http://schemas.microsoft.com/office/drawing/2014/main" val="20000"/>
-                    </a:ext>
-                  </a:extLst>
-                </a:gridCol>
-                <a:gridCol w="3806235">
-                  <a:extLst>
-                    <a:ext uri="{9D8B030D-6E8A-4147-A177-3AD203B41FA5}">
-                      <a16:colId xmlns:a16="http://schemas.microsoft.com/office/drawing/2014/main" val="20001"/>
-                    </a:ext>
-                  </a:extLst>
-                </a:gridCol>
-                <a:gridCol w="3806235">
-                  <a:extLst>
-                    <a:ext uri="{9D8B030D-6E8A-4147-A177-3AD203B41FA5}">
-                      <a16:colId xmlns:a16="http://schemas.microsoft.com/office/drawing/2014/main" val="20002"/>
-                    </a:ext>
-                  </a:extLst>
-                </a:gridCol>
+                <a:gridCol w="3262487"/>
+                <a:gridCol w="3806235"/>
+                <a:gridCol w="3806235"/>
               </a:tblGrid>
               <a:tr h="329184">
                 <a:tc>
@@ -20065,7 +18535,15 @@
                     <a:lstStyle/>
                     <a:p>
                       <a:pPr algn="l"/>
-                      <a:endParaRPr/>
+                      <a:r>
+                        <a:rPr sz="1200" b="1">
+                          <a:solidFill>
+                            <a:srgbClr val="FFFFFF"/>
+                          </a:solidFill>
+                          <a:latin typeface="Microsoft JhengHei"/>
+                        </a:rPr>
+                        <a:t/>
+                      </a:r>
                     </a:p>
                   </a:txBody>
                   <a:tcPr marL="45720" marR="45720" marT="18288" marB="18288" anchor="ctr">
@@ -20120,11 +18598,6 @@
                     </a:solidFill>
                   </a:tcPr>
                 </a:tc>
-                <a:extLst>
-                  <a:ext uri="{0D108BD9-81ED-4DB2-BD59-A6C34878D82A}">
-                    <a16:rowId xmlns:a16="http://schemas.microsoft.com/office/drawing/2014/main" val="10000"/>
-                  </a:ext>
-                </a:extLst>
               </a:tr>
               <a:tr h="292608">
                 <a:tc>
@@ -20196,11 +18669,6 @@
                     </a:solidFill>
                   </a:tcPr>
                 </a:tc>
-                <a:extLst>
-                  <a:ext uri="{0D108BD9-81ED-4DB2-BD59-A6C34878D82A}">
-                    <a16:rowId xmlns:a16="http://schemas.microsoft.com/office/drawing/2014/main" val="10001"/>
-                  </a:ext>
-                </a:extLst>
               </a:tr>
               <a:tr h="292608">
                 <a:tc>
@@ -20272,11 +18740,6 @@
                     </a:solidFill>
                   </a:tcPr>
                 </a:tc>
-                <a:extLst>
-                  <a:ext uri="{0D108BD9-81ED-4DB2-BD59-A6C34878D82A}">
-                    <a16:rowId xmlns:a16="http://schemas.microsoft.com/office/drawing/2014/main" val="10002"/>
-                  </a:ext>
-                </a:extLst>
               </a:tr>
               <a:tr h="292608">
                 <a:tc>
@@ -20348,11 +18811,6 @@
                     </a:solidFill>
                   </a:tcPr>
                 </a:tc>
-                <a:extLst>
-                  <a:ext uri="{0D108BD9-81ED-4DB2-BD59-A6C34878D82A}">
-                    <a16:rowId xmlns:a16="http://schemas.microsoft.com/office/drawing/2014/main" val="10003"/>
-                  </a:ext>
-                </a:extLst>
               </a:tr>
               <a:tr h="292608">
                 <a:tc>
@@ -20424,11 +18882,6 @@
                     </a:solidFill>
                   </a:tcPr>
                 </a:tc>
-                <a:extLst>
-                  <a:ext uri="{0D108BD9-81ED-4DB2-BD59-A6C34878D82A}">
-                    <a16:rowId xmlns:a16="http://schemas.microsoft.com/office/drawing/2014/main" val="10004"/>
-                  </a:ext>
-                </a:extLst>
               </a:tr>
               <a:tr h="292608">
                 <a:tc>
@@ -20500,11 +18953,6 @@
                     </a:solidFill>
                   </a:tcPr>
                 </a:tc>
-                <a:extLst>
-                  <a:ext uri="{0D108BD9-81ED-4DB2-BD59-A6C34878D82A}">
-                    <a16:rowId xmlns:a16="http://schemas.microsoft.com/office/drawing/2014/main" val="10005"/>
-                  </a:ext>
-                </a:extLst>
               </a:tr>
               <a:tr h="292608">
                 <a:tc>
@@ -20576,11 +19024,6 @@
                     </a:solidFill>
                   </a:tcPr>
                 </a:tc>
-                <a:extLst>
-                  <a:ext uri="{0D108BD9-81ED-4DB2-BD59-A6C34878D82A}">
-                    <a16:rowId xmlns:a16="http://schemas.microsoft.com/office/drawing/2014/main" val="10006"/>
-                  </a:ext>
-                </a:extLst>
               </a:tr>
               <a:tr h="292608">
                 <a:tc>
@@ -20652,11 +19095,6 @@
                     </a:solidFill>
                   </a:tcPr>
                 </a:tc>
-                <a:extLst>
-                  <a:ext uri="{0D108BD9-81ED-4DB2-BD59-A6C34878D82A}">
-                    <a16:rowId xmlns:a16="http://schemas.microsoft.com/office/drawing/2014/main" val="10007"/>
-                  </a:ext>
-                </a:extLst>
               </a:tr>
               <a:tr h="292608">
                 <a:tc>
@@ -20728,11 +19166,6 @@
                     </a:solidFill>
                   </a:tcPr>
                 </a:tc>
-                <a:extLst>
-                  <a:ext uri="{0D108BD9-81ED-4DB2-BD59-A6C34878D82A}">
-                    <a16:rowId xmlns:a16="http://schemas.microsoft.com/office/drawing/2014/main" val="10008"/>
-                  </a:ext>
-                </a:extLst>
               </a:tr>
             </a:tbl>
           </a:graphicData>
@@ -20748,7 +19181,7 @@
         </p:nvGraphicFramePr>
         <p:xfrm>
           <a:off x="658368" y="5010912"/>
-          <a:ext cx="9658805" cy="1572768"/>
+          <a:ext cx="9658805" cy="1499616"/>
         </p:xfrm>
         <a:graphic>
           <a:graphicData uri="http://schemas.openxmlformats.org/drawingml/2006/table">
@@ -20757,34 +19190,10 @@
                 <a:tableStyleId>{5C22544A-7EE6-4342-B048-85BDC9FD1C3A}</a:tableStyleId>
               </a:tblPr>
               <a:tblGrid>
-                <a:gridCol w="2897642">
-                  <a:extLst>
-                    <a:ext uri="{9D8B030D-6E8A-4147-A177-3AD203B41FA5}">
-                      <a16:colId xmlns:a16="http://schemas.microsoft.com/office/drawing/2014/main" val="20000"/>
-                    </a:ext>
-                  </a:extLst>
-                </a:gridCol>
-                <a:gridCol w="2253721">
-                  <a:extLst>
-                    <a:ext uri="{9D8B030D-6E8A-4147-A177-3AD203B41FA5}">
-                      <a16:colId xmlns:a16="http://schemas.microsoft.com/office/drawing/2014/main" val="20001"/>
-                    </a:ext>
-                  </a:extLst>
-                </a:gridCol>
-                <a:gridCol w="2253721">
-                  <a:extLst>
-                    <a:ext uri="{9D8B030D-6E8A-4147-A177-3AD203B41FA5}">
-                      <a16:colId xmlns:a16="http://schemas.microsoft.com/office/drawing/2014/main" val="20002"/>
-                    </a:ext>
-                  </a:extLst>
-                </a:gridCol>
-                <a:gridCol w="2253721">
-                  <a:extLst>
-                    <a:ext uri="{9D8B030D-6E8A-4147-A177-3AD203B41FA5}">
-                      <a16:colId xmlns:a16="http://schemas.microsoft.com/office/drawing/2014/main" val="20003"/>
-                    </a:ext>
-                  </a:extLst>
-                </a:gridCol>
+                <a:gridCol w="2897642"/>
+                <a:gridCol w="2253721"/>
+                <a:gridCol w="2253721"/>
+                <a:gridCol w="2253721"/>
               </a:tblGrid>
               <a:tr h="329184">
                 <a:tc>
@@ -20793,7 +19202,15 @@
                     <a:lstStyle/>
                     <a:p>
                       <a:pPr algn="l"/>
-                      <a:endParaRPr/>
+                      <a:r>
+                        <a:rPr sz="1200" b="1">
+                          <a:solidFill>
+                            <a:srgbClr val="FFFFFF"/>
+                          </a:solidFill>
+                          <a:latin typeface="Microsoft JhengHei"/>
+                        </a:rPr>
+                        <a:t/>
+                      </a:r>
                     </a:p>
                   </a:txBody>
                   <a:tcPr marL="45720" marR="45720" marT="18288" marB="18288" anchor="ctr">
@@ -20871,11 +19288,6 @@
                     </a:solidFill>
                   </a:tcPr>
                 </a:tc>
-                <a:extLst>
-                  <a:ext uri="{0D108BD9-81ED-4DB2-BD59-A6C34878D82A}">
-                    <a16:rowId xmlns:a16="http://schemas.microsoft.com/office/drawing/2014/main" val="10000"/>
-                  </a:ext>
-                </a:extLst>
               </a:tr>
               <a:tr h="292608">
                 <a:tc>
@@ -20970,11 +19382,6 @@
                     </a:solidFill>
                   </a:tcPr>
                 </a:tc>
-                <a:extLst>
-                  <a:ext uri="{0D108BD9-81ED-4DB2-BD59-A6C34878D82A}">
-                    <a16:rowId xmlns:a16="http://schemas.microsoft.com/office/drawing/2014/main" val="10001"/>
-                  </a:ext>
-                </a:extLst>
               </a:tr>
               <a:tr h="292608">
                 <a:tc>
@@ -21069,11 +19476,6 @@
                     </a:solidFill>
                   </a:tcPr>
                 </a:tc>
-                <a:extLst>
-                  <a:ext uri="{0D108BD9-81ED-4DB2-BD59-A6C34878D82A}">
-                    <a16:rowId xmlns:a16="http://schemas.microsoft.com/office/drawing/2014/main" val="10002"/>
-                  </a:ext>
-                </a:extLst>
               </a:tr>
               <a:tr h="292608">
                 <a:tc>
@@ -21168,11 +19570,6 @@
                     </a:solidFill>
                   </a:tcPr>
                 </a:tc>
-                <a:extLst>
-                  <a:ext uri="{0D108BD9-81ED-4DB2-BD59-A6C34878D82A}">
-                    <a16:rowId xmlns:a16="http://schemas.microsoft.com/office/drawing/2014/main" val="10003"/>
-                  </a:ext>
-                </a:extLst>
               </a:tr>
               <a:tr h="292608">
                 <a:tc>
@@ -21267,11 +19664,6 @@
                     </a:solidFill>
                   </a:tcPr>
                 </a:tc>
-                <a:extLst>
-                  <a:ext uri="{0D108BD9-81ED-4DB2-BD59-A6C34878D82A}">
-                    <a16:rowId xmlns:a16="http://schemas.microsoft.com/office/drawing/2014/main" val="10004"/>
-                  </a:ext>
-                </a:extLst>
               </a:tr>
             </a:tbl>
           </a:graphicData>
@@ -21606,7 +19998,7 @@
 </file>
 
 <file path=ppt/theme/theme2.xml><?xml version="1.0" encoding="utf-8"?>
-<a:theme xmlns:a="http://schemas.openxmlformats.org/drawingml/2006/main" name="Office 佈景主題">
+<a:theme xmlns:a="http://schemas.openxmlformats.org/drawingml/2006/main" name="Office Theme">
   <a:themeElements>
     <a:clrScheme name="Office">
       <a:dk1>
@@ -21616,44 +20008,44 @@
         <a:sysClr val="window" lastClr="FFFFFF"/>
       </a:lt1>
       <a:dk2>
-        <a:srgbClr val="0E2841"/>
+        <a:srgbClr val="1F497D"/>
       </a:dk2>
       <a:lt2>
-        <a:srgbClr val="E8E8E8"/>
+        <a:srgbClr val="EEECE1"/>
       </a:lt2>
       <a:accent1>
-        <a:srgbClr val="156082"/>
+        <a:srgbClr val="4F81BD"/>
       </a:accent1>
       <a:accent2>
-        <a:srgbClr val="E97132"/>
+        <a:srgbClr val="C0504D"/>
       </a:accent2>
       <a:accent3>
-        <a:srgbClr val="196B24"/>
+        <a:srgbClr val="9BBB59"/>
       </a:accent3>
       <a:accent4>
-        <a:srgbClr val="0F9ED5"/>
+        <a:srgbClr val="8064A2"/>
       </a:accent4>
       <a:accent5>
-        <a:srgbClr val="A02B93"/>
+        <a:srgbClr val="4BACC6"/>
       </a:accent5>
       <a:accent6>
-        <a:srgbClr val="4EA72E"/>
+        <a:srgbClr val="F79646"/>
       </a:accent6>
       <a:hlink>
-        <a:srgbClr val="467886"/>
+        <a:srgbClr val="0000FF"/>
       </a:hlink>
       <a:folHlink>
-        <a:srgbClr val="96607D"/>
+        <a:srgbClr val="800080"/>
       </a:folHlink>
     </a:clrScheme>
     <a:fontScheme name="Office">
       <a:majorFont>
-        <a:latin typeface="Aptos Display" panose="02110004020202020204"/>
+        <a:latin typeface="Calibri"/>
         <a:ea typeface=""/>
         <a:cs typeface=""/>
-        <a:font script="Jpan" typeface="游ゴシック Light"/>
+        <a:font script="Jpan" typeface="ＭＳ Ｐゴシック"/>
         <a:font script="Hang" typeface="맑은 고딕"/>
-        <a:font script="Hans" typeface="等线 Light"/>
+        <a:font script="Hans" typeface="宋体"/>
         <a:font script="Hant" typeface="新細明體"/>
         <a:font script="Arab" typeface="Times New Roman"/>
         <a:font script="Hebr" typeface="Times New Roman"/>
@@ -21681,31 +20073,14 @@
         <a:font script="Viet" typeface="Times New Roman"/>
         <a:font script="Uigh" typeface="Microsoft Uighur"/>
         <a:font script="Geor" typeface="Sylfaen"/>
-        <a:font script="Armn" typeface="Arial"/>
-        <a:font script="Bugi" typeface="Leelawadee UI"/>
-        <a:font script="Bopo" typeface="Microsoft JhengHei"/>
-        <a:font script="Java" typeface="Javanese Text"/>
-        <a:font script="Lisu" typeface="Segoe UI"/>
-        <a:font script="Mymr" typeface="Myanmar Text"/>
-        <a:font script="Nkoo" typeface="Ebrima"/>
-        <a:font script="Olck" typeface="Nirmala UI"/>
-        <a:font script="Osma" typeface="Ebrima"/>
-        <a:font script="Phag" typeface="Phagspa"/>
-        <a:font script="Syrn" typeface="Estrangelo Edessa"/>
-        <a:font script="Syrj" typeface="Estrangelo Edessa"/>
-        <a:font script="Syre" typeface="Estrangelo Edessa"/>
-        <a:font script="Sora" typeface="Nirmala UI"/>
-        <a:font script="Tale" typeface="Microsoft Tai Le"/>
-        <a:font script="Talu" typeface="Microsoft New Tai Lue"/>
-        <a:font script="Tfng" typeface="Ebrima"/>
       </a:majorFont>
       <a:minorFont>
-        <a:latin typeface="Aptos" panose="02110004020202020204"/>
+        <a:latin typeface="Calibri"/>
         <a:ea typeface=""/>
         <a:cs typeface=""/>
-        <a:font script="Jpan" typeface="游ゴシック"/>
+        <a:font script="Jpan" typeface="ＭＳ Ｐゴシック"/>
         <a:font script="Hang" typeface="맑은 고딕"/>
-        <a:font script="Hans" typeface="等线"/>
+        <a:font script="Hans" typeface="宋体"/>
         <a:font script="Hant" typeface="新細明體"/>
         <a:font script="Arab" typeface="Arial"/>
         <a:font script="Hebr" typeface="Arial"/>
@@ -21733,23 +20108,6 @@
         <a:font script="Viet" typeface="Arial"/>
         <a:font script="Uigh" typeface="Microsoft Uighur"/>
         <a:font script="Geor" typeface="Sylfaen"/>
-        <a:font script="Armn" typeface="Arial"/>
-        <a:font script="Bugi" typeface="Leelawadee UI"/>
-        <a:font script="Bopo" typeface="Microsoft JhengHei"/>
-        <a:font script="Java" typeface="Javanese Text"/>
-        <a:font script="Lisu" typeface="Segoe UI"/>
-        <a:font script="Mymr" typeface="Myanmar Text"/>
-        <a:font script="Nkoo" typeface="Ebrima"/>
-        <a:font script="Olck" typeface="Nirmala UI"/>
-        <a:font script="Osma" typeface="Ebrima"/>
-        <a:font script="Phag" typeface="Phagspa"/>
-        <a:font script="Syrn" typeface="Estrangelo Edessa"/>
-        <a:font script="Syrj" typeface="Estrangelo Edessa"/>
-        <a:font script="Syre" typeface="Estrangelo Edessa"/>
-        <a:font script="Sora" typeface="Nirmala UI"/>
-        <a:font script="Tale" typeface="Microsoft Tai Le"/>
-        <a:font script="Talu" typeface="Microsoft New Tai Lue"/>
-        <a:font script="Tfng" typeface="Ebrima"/>
       </a:minorFont>
     </a:fontScheme>
     <a:fmtScheme name="Office">
@@ -21761,136 +20119,180 @@
           <a:gsLst>
             <a:gs pos="0">
               <a:schemeClr val="phClr">
-                <a:lumMod val="110000"/>
-                <a:satMod val="105000"/>
-                <a:tint val="67000"/>
+                <a:tint val="50000"/>
+                <a:satMod val="300000"/>
               </a:schemeClr>
             </a:gs>
-            <a:gs pos="50000">
+            <a:gs pos="35000">
               <a:schemeClr val="phClr">
-                <a:lumMod val="105000"/>
-                <a:satMod val="103000"/>
-                <a:tint val="73000"/>
+                <a:tint val="37000"/>
+                <a:satMod val="300000"/>
               </a:schemeClr>
             </a:gs>
             <a:gs pos="100000">
               <a:schemeClr val="phClr">
-                <a:lumMod val="105000"/>
-                <a:satMod val="109000"/>
-                <a:tint val="81000"/>
+                <a:tint val="15000"/>
+                <a:satMod val="350000"/>
               </a:schemeClr>
             </a:gs>
           </a:gsLst>
-          <a:lin ang="5400000" scaled="0"/>
+          <a:lin ang="16200000" scaled="1"/>
         </a:gradFill>
         <a:gradFill rotWithShape="1">
           <a:gsLst>
             <a:gs pos="0">
               <a:schemeClr val="phClr">
-                <a:satMod val="103000"/>
-                <a:lumMod val="102000"/>
-                <a:tint val="94000"/>
-              </a:schemeClr>
-            </a:gs>
-            <a:gs pos="50000">
-              <a:schemeClr val="phClr">
-                <a:satMod val="110000"/>
-                <a:lumMod val="100000"/>
+                <a:tint val="100000"/>
                 <a:shade val="100000"/>
+                <a:satMod val="130000"/>
               </a:schemeClr>
             </a:gs>
             <a:gs pos="100000">
               <a:schemeClr val="phClr">
-                <a:lumMod val="99000"/>
-                <a:satMod val="120000"/>
-                <a:shade val="78000"/>
+                <a:tint val="50000"/>
+                <a:shade val="100000"/>
+                <a:satMod val="350000"/>
               </a:schemeClr>
             </a:gs>
           </a:gsLst>
-          <a:lin ang="5400000" scaled="0"/>
+          <a:lin ang="16200000" scaled="0"/>
         </a:gradFill>
       </a:fillStyleLst>
       <a:lnStyleLst>
-        <a:ln w="12700" cap="flat" cmpd="sng" algn="ctr">
+        <a:ln w="9525" cap="flat" cmpd="sng" algn="ctr">
           <a:solidFill>
-            <a:schemeClr val="phClr"/>
+            <a:schemeClr val="phClr">
+              <a:shade val="95000"/>
+              <a:satMod val="105000"/>
+            </a:schemeClr>
           </a:solidFill>
           <a:prstDash val="solid"/>
-          <a:miter lim="800000"/>
-        </a:ln>
-        <a:ln w="19050" cap="flat" cmpd="sng" algn="ctr">
-          <a:solidFill>
-            <a:schemeClr val="phClr"/>
-          </a:solidFill>
-          <a:prstDash val="solid"/>
-          <a:miter lim="800000"/>
         </a:ln>
         <a:ln w="25400" cap="flat" cmpd="sng" algn="ctr">
           <a:solidFill>
             <a:schemeClr val="phClr"/>
           </a:solidFill>
           <a:prstDash val="solid"/>
-          <a:miter lim="800000"/>
+        </a:ln>
+        <a:ln w="38100" cap="flat" cmpd="sng" algn="ctr">
+          <a:solidFill>
+            <a:schemeClr val="phClr"/>
+          </a:solidFill>
+          <a:prstDash val="solid"/>
         </a:ln>
       </a:lnStyleLst>
       <a:effectStyleLst>
         <a:effectStyle>
-          <a:effectLst/>
-        </a:effectStyle>
-        <a:effectStyle>
-          <a:effectLst/>
+          <a:effectLst>
+            <a:outerShdw blurRad="40000" dist="20000" dir="5400000" rotWithShape="0">
+              <a:srgbClr val="000000">
+                <a:alpha val="38000"/>
+              </a:srgbClr>
+            </a:outerShdw>
+          </a:effectLst>
         </a:effectStyle>
         <a:effectStyle>
           <a:effectLst>
-            <a:outerShdw blurRad="57150" dist="19050" dir="5400000" algn="ctr" rotWithShape="0">
+            <a:outerShdw blurRad="40000" dist="23000" dir="5400000" rotWithShape="0">
               <a:srgbClr val="000000">
-                <a:alpha val="63000"/>
+                <a:alpha val="35000"/>
               </a:srgbClr>
             </a:outerShdw>
           </a:effectLst>
+        </a:effectStyle>
+        <a:effectStyle>
+          <a:effectLst>
+            <a:outerShdw blurRad="40000" dist="23000" dir="5400000" rotWithShape="0">
+              <a:srgbClr val="000000">
+                <a:alpha val="35000"/>
+              </a:srgbClr>
+            </a:outerShdw>
+          </a:effectLst>
+          <a:scene3d>
+            <a:camera prst="orthographicFront">
+              <a:rot lat="0" lon="0" rev="0"/>
+            </a:camera>
+            <a:lightRig rig="threePt" dir="t">
+              <a:rot lat="0" lon="0" rev="1200000"/>
+            </a:lightRig>
+          </a:scene3d>
+          <a:sp3d>
+            <a:bevelT w="63500" h="25400"/>
+          </a:sp3d>
         </a:effectStyle>
       </a:effectStyleLst>
       <a:bgFillStyleLst>
         <a:solidFill>
           <a:schemeClr val="phClr"/>
         </a:solidFill>
-        <a:solidFill>
-          <a:schemeClr val="phClr">
-            <a:tint val="95000"/>
-            <a:satMod val="170000"/>
-          </a:schemeClr>
-        </a:solidFill>
         <a:gradFill rotWithShape="1">
           <a:gsLst>
             <a:gs pos="0">
               <a:schemeClr val="phClr">
-                <a:tint val="93000"/>
-                <a:satMod val="150000"/>
-                <a:shade val="98000"/>
-                <a:lumMod val="102000"/>
+                <a:tint val="40000"/>
+                <a:satMod val="350000"/>
               </a:schemeClr>
             </a:gs>
-            <a:gs pos="50000">
+            <a:gs pos="40000">
               <a:schemeClr val="phClr">
-                <a:tint val="98000"/>
-                <a:satMod val="130000"/>
-                <a:shade val="90000"/>
-                <a:lumMod val="103000"/>
+                <a:tint val="45000"/>
+                <a:shade val="99000"/>
+                <a:satMod val="350000"/>
               </a:schemeClr>
             </a:gs>
             <a:gs pos="100000">
               <a:schemeClr val="phClr">
-                <a:shade val="63000"/>
-                <a:satMod val="120000"/>
+                <a:shade val="20000"/>
+                <a:satMod val="255000"/>
               </a:schemeClr>
             </a:gs>
           </a:gsLst>
-          <a:lin ang="5400000" scaled="0"/>
+          <a:path path="circle">
+            <a:fillToRect l="50000" t="-80000" r="50000" b="180000"/>
+          </a:path>
+        </a:gradFill>
+        <a:gradFill rotWithShape="1">
+          <a:gsLst>
+            <a:gs pos="0">
+              <a:schemeClr val="phClr">
+                <a:tint val="80000"/>
+                <a:satMod val="300000"/>
+              </a:schemeClr>
+            </a:gs>
+            <a:gs pos="100000">
+              <a:schemeClr val="phClr">
+                <a:shade val="30000"/>
+                <a:satMod val="200000"/>
+              </a:schemeClr>
+            </a:gs>
+          </a:gsLst>
+          <a:path path="circle">
+            <a:fillToRect l="50000" t="50000" r="50000" b="50000"/>
+          </a:path>
         </a:gradFill>
       </a:bgFillStyleLst>
     </a:fmtScheme>
   </a:themeElements>
   <a:objectDefaults>
+    <a:spDef>
+      <a:spPr/>
+      <a:bodyPr/>
+      <a:lstStyle/>
+      <a:style>
+        <a:lnRef idx="1">
+          <a:schemeClr val="accent1"/>
+        </a:lnRef>
+        <a:fillRef idx="3">
+          <a:schemeClr val="accent1"/>
+        </a:fillRef>
+        <a:effectRef idx="2">
+          <a:schemeClr val="accent1"/>
+        </a:effectRef>
+        <a:fontRef idx="minor">
+          <a:schemeClr val="lt1"/>
+        </a:fontRef>
+      </a:style>
+    </a:spDef>
     <a:lnDef>
       <a:spPr/>
       <a:bodyPr/>
@@ -21912,10 +20314,5 @@
     </a:lnDef>
   </a:objectDefaults>
   <a:extraClrSchemeLst/>
-  <a:extLst>
-    <a:ext uri="{05A4C25C-085E-4340-85A3-A5531E510DB2}">
-      <thm15:themeFamily xmlns:thm15="http://schemas.microsoft.com/office/thememl/2012/main" name="Office Theme" id="{2E142A2C-CD16-42D6-873A-C26D2A0506FA}" vid="{1BDDFF52-6CD6-40A5-AB3C-68EB2F1E4D0A}"/>
-    </a:ext>
-  </a:extLst>
 </a:theme>
 </file>
--- a/Artificial Intelligence for Enterprises/Assessment3/Huang_26254793_421104_Assessment 3.pptx
+++ b/Artificial Intelligence for Enterprises/Assessment3/Huang_26254793_421104_Assessment 3.pptx
@@ -513,35 +513,35 @@
           <a:lstStyle/>
           <a:p>
             <a:r>
-              <a:t>【第 1 頁 · 鉤子 · 開場靜畫】　目標 35 秒 · 累計 0:35</a:t>
+              <a:t>【第 1 頁 · 鉤子 · 開場靜畫】　目標 52 秒 · 累計 0:52</a:t>
             </a:r>
           </a:p>
           <a:p/>
           <a:p>
             <a:r>
-              <a:t>★ 今天,五個人要看完三千支影片;而客戶要的答案,兩天內。</a:t>
+              <a:t>★ 光是一個車隊,五個人要看完三千支影片;而客戶要的答案,兩天內。</a:t>
             </a:r>
           </a:p>
           <a:p/>
           <a:p>
             <a:r>
-              <a:t>· 先講生意:客戶是車隊 —— 物流 · 客運 · 租賃,車上裝我們的鏡頭與車機</a:t>
-            </a:r>
-          </a:p>
-          <a:p>
-            <a:r>
-              <a:t>· 一筆「事件」= 鏡頭偵測到一次危險駕駛(影片 + 時間地點 + 系統分類)</a:t>
-            </a:r>
-          </a:p>
-          <a:p>
-            <a:r>
-              <a:t>· 一次「爭議」= 客戶回頭說「這筆判錯了」—— 只能由人重看影片才判得出來</a:t>
+              <a:t>· 先對老師交代框架,再用一句話切進 pitch:「以下我用向公司技術委員會提案的方式呈現」</a:t>
+            </a:r>
+          </a:p>
+          <a:p>
+            <a:r>
+              <a:t>· 生意:車機 Edge AI 初判 + Server AI 複判,兩次判定替駕駛守護安全</a:t>
+            </a:r>
+          </a:p>
+          <a:p>
+            <a:r>
+              <a:t>· 一筆「事件」= 一次危險駕駛(影片 + 時間地點 + 分類);一次「爭議」= 客戶回頭說「這筆 AI 判錯了」,只能由人重看影片才判得出來</a:t>
             </a:r>
           </a:p>
           <a:p/>
           <a:p>
             <a:r>
-              <a:t># 單一大型車隊約 3,000 筆事件/天 · 全公司 5 位專職分析人員</a:t>
+              <a:t># 單一大型車隊約 3,000 筆事件/天 · 部門僅 5 位專職分析人員</a:t>
             </a:r>
           </a:p>
           <a:p/>
@@ -552,6 +552,11 @@
           </a:p>
           <a:p>
             <a:r>
+              <a:t>⚠️ 🚫 切換線之後就不要再對老師說話,全程對委員會講</a:t>
+            </a:r>
+          </a:p>
+          <a:p>
+            <a:r>
               <a:t>⚠️ 講完停 1 秒再換頁。這是全片唯一的鉤子,不要急著翻</a:t>
             </a:r>
           </a:p>
@@ -564,12 +569,12 @@
           <a:p/>
           <a:p>
             <a:r>
-              <a:t>── 逐字備援 · 156 字(忘詞才看,不是拿來唸的)──</a:t>
-            </a:r>
-          </a:p>
-          <a:p>
-            <a:r>
-              <a:t>我在一家做車隊行車影像 AI 的公司,負責 AI 應用。我們的客戶是車隊——物流、客運、租賃——他們的車上裝我們的鏡頭跟車機。鏡頭偵測到一次危險駕駛,就記一筆「事件」:一段影片、時間地點,還有系統給的分類。單一大型車隊,一天大約三千筆。客戶收到之後會回頭說「這筆判錯了」,那叫一次「爭議」——而爭議只能由人重看影片才判得出來。今天,五個人要看完三千支影片;而客戶要的答案,兩天內。</a:t>
+              <a:t>── 逐字備援 · 230 字(忘詞才看,不是拿來唸的)──</a:t>
+            </a:r>
+          </a:p>
+          <a:p>
+            <a:r>
+              <a:t>老師好,我是黃柏凱。這次作業我用現職公司的真實案例做提案 —— 以下我用向公司技術委員會提案的方式呈現。我在一家做車隊行車影像 AI 的公司,負責 AI 影像分析事件應用。車隊在車機上用 Edge AI 做第一次判定,再由 Server AI 複判;這兩次判定替駕駛守護安全,也讓車隊管理隨時看得到事件內容。鏡頭偵測到一次危險駕駛,就記一筆「事件」:一段影片、時間地點,還有系統給的分類。客戶收到之後會回頭說「這筆 AI 判錯了」,那叫一次「爭議」——而爭議只能由人重看影片才判得出來。光是一個車隊,五個人要看完三千支影片;而客戶要的答案,兩天內。</a:t>
             </a:r>
           </a:p>
         </p:txBody>
@@ -639,7 +644,7 @@
           <a:lstStyle/>
           <a:p>
             <a:r>
-              <a:t>【第 10 頁 · P9 · 六個月 · 六個工作包 · 三道決策門】　目標 47 秒 · 累計 8:41</a:t>
+              <a:t>【第 10 頁 · P9 · 六個月 · 六個工作包 · 三道決策門】　目標 47 秒 · 累計 8:58</a:t>
             </a:r>
           </a:p>
           <a:p/>
@@ -791,7 +796,7 @@
           <a:lstStyle/>
           <a:p>
             <a:r>
-              <a:t>【第 11 頁 · P10 · 資源、當責與請求】　目標 64 秒 · 累計 9:45</a:t>
+              <a:t>【第 11 頁 · P10 · 資源、當責與請求】　目標 64 秒 · 累計 10:02</a:t>
             </a:r>
           </a:p>
           <a:p/>
@@ -963,7 +968,7 @@
           <a:lstStyle/>
           <a:p>
             <a:r>
-              <a:t>【第 12 頁 · 參考文獻(第 11 頁 — 不佔十頁額度)】　目標 5 秒 · 累計 9:50</a:t>
+              <a:t>【第 12 頁 · 參考文獻(第 11 頁 — 不佔十頁額度)】　目標 5 秒 · 累計 10:07</a:t>
             </a:r>
           </a:p>
           <a:p/>
@@ -1062,7 +1067,7 @@
           <a:lstStyle/>
           <a:p>
             <a:r>
-              <a:t>【第 2 頁 · P1 · 用例:兩階段推論,與它下游那道人工防線】　目標 65 秒 · 累計 1:40</a:t>
+              <a:t>【第 2 頁 · P1 · 用例:兩階段推論,與它下游那道人工防線】　目標 65 秒 · 累計 1:57</a:t>
             </a:r>
           </a:p>
           <a:p/>
@@ -1224,7 +1229,7 @@
           <a:lstStyle/>
           <a:p>
             <a:r>
-              <a:t>【第 3 頁 · P2 · 為什麼是現在:工作量沒變多,客戶要的時效變了】　目標 72 秒 · 累計 2:52</a:t>
+              <a:t>【第 3 頁 · P2 · 為什麼是現在:工作量沒變多,客戶要的時效變了】　目標 72 秒 · 累計 3:09</a:t>
             </a:r>
           </a:p>
           <a:p/>
@@ -1377,7 +1382,7 @@
           <a:lstStyle/>
           <a:p>
             <a:r>
-              <a:t>【第 4 頁 · P3 · 發現過程:兩種病,兩個缺口】　目標 52 秒 · 累計 3:45</a:t>
+              <a:t>【第 4 頁 · P3 · 發現過程:兩種病,兩個缺口】　目標 52 秒 · 累計 4:02</a:t>
             </a:r>
           </a:p>
           <a:p/>
@@ -1534,7 +1539,7 @@
           <a:lstStyle/>
           <a:p>
             <a:r>
-              <a:t>【第 5 頁 · P4 · 我們看不見的那一半:有資料,沒有習慣】　目標 59 秒 · 累計 4:44</a:t>
+              <a:t>【第 5 頁 · P4 · 我們看不見的那一半:有資料,沒有習慣】　目標 59 秒 · 累計 5:00</a:t>
             </a:r>
           </a:p>
           <a:p/>
@@ -1721,7 +1726,7 @@
           <a:lstStyle/>
           <a:p>
             <a:r>
-              <a:t>【第 6 頁 · P5 · 五條路,含三條不用 AI】　目標 44 秒 · 累計 5:28</a:t>
+              <a:t>【第 6 頁 · P5 · 五條路,含三條不用 AI】　目標 44 秒 · 累計 5:45</a:t>
             </a:r>
           </a:p>
           <a:p/>
@@ -1863,7 +1868,7 @@
           <a:lstStyle/>
           <a:p>
             <a:r>
-              <a:t>【第 7 頁 · P6 · 風險:七類十條,緩解位移與殘餘風險】　目標 51 秒 · 累計 6:19</a:t>
+              <a:t>【第 7 頁 · P6 · 風險:七類十條,緩解位移與殘餘風險】　目標 51 秒 · 累計 6:35</a:t>
             </a:r>
           </a:p>
           <a:p/>
@@ -2016,7 +2021,7 @@
           <a:lstStyle/>
           <a:p>
             <a:r>
-              <a:t>【第 8 頁 · P7 · 倫理與可申訴性:對照澳洲 AI 倫理八原則】　目標 50 秒 · 累計 7:08</a:t>
+              <a:t>【第 8 頁 · P7 · 倫理與可申訴性:對照澳洲 AI 倫理八原則】　目標 50 秒 · 累計 7:25</a:t>
             </a:r>
           </a:p>
           <a:p/>
@@ -2169,7 +2174,7 @@
           <a:lstStyle/>
           <a:p>
             <a:r>
-              <a:t>【第 9 頁 · P8 · 怎麼算成功:三層 KPI,一條回圈】　目標 46 秒 · 累計 7:54</a:t>
+              <a:t>【第 9 頁 · P8 · 怎麼算成功:三層 KPI,一條回圈】　目標 46 秒 · 累計 8:11</a:t>
             </a:r>
           </a:p>
           <a:p/>
@@ -5320,7 +5325,7 @@
                 </a:solidFill>
                 <a:latin typeface="Microsoft JhengHei"/>
               </a:rPr>
-              <a:t>讓機器讀懂一次事件的完整脈絡</a:t>
+              <a:t>讓機器讀懂事件的完整脈絡</a:t>
             </a:r>
           </a:p>
         </p:txBody>
@@ -5359,7 +5364,7 @@
                 </a:solidFill>
                 <a:latin typeface="Microsoft JhengHei"/>
               </a:rPr>
-              <a:t>地端 AI 事件判讀 —— 六個月、三道決策門的立案提案</a:t>
+              <a:t>地端 AI 事件判讀 —— 六個月、三道決策門的提案計畫</a:t>
             </a:r>
           </a:p>
         </p:txBody>
@@ -5442,7 +5447,7 @@
                 </a:solidFill>
                 <a:latin typeface="Microsoft JhengHei"/>
               </a:rPr>
-              <a:t>今天,五個人要看完三千支影片;而客戶要的答案,兩天內。</a:t>
+              <a:t>光是一個車隊,五個人要看完三千支影片;而客戶要的答案,兩天內。</a:t>
             </a:r>
           </a:p>
         </p:txBody>
@@ -5481,7 +5486,7 @@
                 </a:solidFill>
                 <a:latin typeface="Microsoft JhengHei"/>
               </a:rPr>
-              <a:t>客戶是車隊 —— 物流 · 客運 · 租賃;車上裝我們的鏡頭與車機</a:t>
+              <a:t>我們客戶是車隊,包含物流 · 客運 · 礦業;車上裝我們的鏡頭與車機</a:t>
             </a:r>
           </a:p>
           <a:p>
@@ -5513,7 +5518,7 @@
                 </a:solidFill>
                 <a:latin typeface="Microsoft JhengHei"/>
               </a:rPr>
-              <a:t>客戶回頭說「這筆判錯了」= 一次「爭議」—— 只能由人重看影片才判得出來</a:t>
+              <a:t>客戶回頭說「這筆 AI 判錯了」= 一次「爭議」—— 由人重看影片才判得出來</a:t>
             </a:r>
           </a:p>
           <a:p>
@@ -5529,7 +5534,7 @@
                 </a:solidFill>
                 <a:latin typeface="Microsoft JhengHei"/>
               </a:rPr>
-              <a:t>單一大型車隊約 3,000 筆事件/天 · 全公司 5 位專職分析人員逐筆看</a:t>
+              <a:t>單一大型車隊約 3,000 筆事件/天 · 部門僅 5 位專職分析人員逐筆看,而客戶還在持續增長</a:t>
             </a:r>
           </a:p>
         </p:txBody>

--- a/Artificial Intelligence for Enterprises/Assessment3/Huang_26254793_421104_Assessment 3.pptx
+++ b/Artificial Intelligence for Enterprises/Assessment3/Huang_26254793_421104_Assessment 3.pptx
@@ -644,7 +644,7 @@
           <a:lstStyle/>
           <a:p>
             <a:r>
-              <a:t>【第 10 頁 · P9 · 六個月 · 六個工作包 · 三道決策門】　目標 47 秒 · 累計 8:58</a:t>
+              <a:t>【第 10 頁 · P9 · 六個月 · 六個工作包 · 三道決策門】　目標 47 秒 · 累計 8:46</a:t>
             </a:r>
           </a:p>
           <a:p/>
@@ -796,7 +796,7 @@
           <a:lstStyle/>
           <a:p>
             <a:r>
-              <a:t>【第 11 頁 · P10 · 資源、當責與請求】　目標 64 秒 · 累計 10:02</a:t>
+              <a:t>【第 11 頁 · P10 · 資源、當責與請求】　目標 64 秒 · 累計 9:49</a:t>
             </a:r>
           </a:p>
           <a:p/>
@@ -968,7 +968,7 @@
           <a:lstStyle/>
           <a:p>
             <a:r>
-              <a:t>【第 12 頁 · 參考文獻(第 11 頁 — 不佔十頁額度)】　目標 5 秒 · 累計 10:07</a:t>
+              <a:t>【第 12 頁 · 參考文獻(第 11 頁 — 不佔十頁額度)】　目標 5 秒 · 累計 9:54</a:t>
             </a:r>
           </a:p>
           <a:p/>
@@ -1067,7 +1067,7 @@
           <a:lstStyle/>
           <a:p>
             <a:r>
-              <a:t>【第 2 頁 · P1 · 用例:兩階段推論,與它下游那道人工防線】　目標 65 秒 · 累計 1:57</a:t>
+              <a:t>【第 2 頁 · P1 · 用例:兩階段推論,與它下游那道人工防線】　目標 53 秒 · 累計 1:45</a:t>
             </a:r>
           </a:p>
           <a:p/>
@@ -1079,17 +1079,17 @@
           <a:p/>
           <a:p>
             <a:r>
-              <a:t>· 地端 AI 公司內部評估過,我是其中一員(所以這不是新點子,是立案)</a:t>
-            </a:r>
-          </a:p>
-          <a:p>
-            <a:r>
-              <a:t>· 兩階段自動化到第二關就停,剩下每一筆都要人看過</a:t>
-            </a:r>
-          </a:p>
-          <a:p>
-            <a:r>
-              <a:t>· 看畫面就能判 vs 要離開畫面找證據</a:t>
+              <a:t>· 前端 Edge AI → Server AI 兩段已經自動化,停在第三關</a:t>
+            </a:r>
+          </a:p>
+          <a:p>
+            <a:r>
+              <a:t>· 第三關全部靠人:判成立或誤報 → 離開畫面查證據 → 回信</a:t>
+            </a:r>
+          </a:p>
+          <a:p>
+            <a:r>
+              <a:t>· 我要自動化的是**離開畫面找證據**那一段,不是機器替你做決定</a:t>
             </a:r>
           </a:p>
           <a:p/>
@@ -1101,12 +1101,17 @@
           <a:p/>
           <a:p>
             <a:r>
-              <a:t>⚠️ 20 秒要說「營運端的實務估計,尚未以計時量測驗證」</a:t>
-            </a:r>
-          </a:p>
-          <a:p>
-            <a:r>
-              <a:t>⚠️ 🚫 不可說「我們沒有量過」</a:t>
+              <a:t>⚠️ 20 秒要說「營運端的實務估計,尚未以計時量測驗證」;🚫 不可說「我們沒有量過」</a:t>
+            </a:r>
+          </a:p>
+          <a:p>
+            <a:r>
+              <a:t>⚠️ 🚫 不可說「減少人力」「縮編」—— 第 11 頁寫的是仍須增聘 6–7 人。這一頁的主張是**同樣人力、更高產出**</a:t>
+            </a:r>
+          </a:p>
+          <a:p>
+            <a:r>
+              <a:t>⚠️ 🚫 不可把「爭議」講成「誤報」—— 5.25 分算的是爭議(客戶回頭標記的 5–10%)</a:t>
             </a:r>
           </a:p>
           <a:p/>
@@ -1118,12 +1123,12 @@
           <a:p/>
           <a:p>
             <a:r>
-              <a:t>── 逐字備援 · 288 字(忘詞才看,不是拿來唸的)──</a:t>
-            </a:r>
-          </a:p>
-          <a:p>
-            <a:r>
-              <a:t>地端 AI 的技術可行性,公司內部評估過,我是其中一員。今天我不是提一個新點子,是把它從技術研討,變成一個有業務數字、有驗證機制、有停止條件的正式立案。要建的能力:讓機器讀懂一次事件的完整脈絡——影片、客戶問題、規則——產出可交付的證據與描述。兩階段架構各位熟悉,自動化到第二階段就停了:剩下每一筆,都要由人看過。這道防線有兩種單價。看畫面就能判的,一筆二十秒。要離開畫面去找證據的——那面牌是什麼、速限多少——一筆五分多鐘。差約十六倍,差別不在人,在證據在不在畫面裡。我請委員會核准一個六個月、三道決策門的專案:在客戶要的兩天內交出分析,第一次量得到自己漏掉什麼。要建它,得先有凍結的評估集、一致的標註、餵進模型的脈絡,那是前三個工作包。本案不重新開啟架構選擇。</a:t>
+              <a:t>── 逐字備援 · 233 字(忘詞才看,不是拿來唸的)──</a:t>
+            </a:r>
+          </a:p>
+          <a:p>
+            <a:r>
+              <a:t>誠如各位在圖上看到的,前端 Edge AI 跟 Server AI 這兩段,我們已經完成自動化。停在第三關:客戶回頭說「這筆 AI 判錯了」,那一段全部靠人 ——而它慢的原因不是人不夠快,是證據不在畫面裡。看畫面就能判的,一筆二十秒;要離開畫面去找證據的 —— 那面牌是什麼、速限多少 ——一筆五分多鐘,差約十六倍。所以我提的是一套地端 AI 事件判讀:把畫面外的脈絡讀進來,把那五分多鐘裡最花時間的「找證據」自動化,讓同樣這五個人,在客戶要的兩天內交得出答案。要建它,得先有凍結的評估集、一致的標註、餵進模型的脈絡,那是前三個工作包。本案不重新開啟架構選擇。</a:t>
             </a:r>
           </a:p>
           <a:p/>
@@ -1229,7 +1234,7 @@
           <a:lstStyle/>
           <a:p>
             <a:r>
-              <a:t>【第 3 頁 · P2 · 為什麼是現在:工作量沒變多,客戶要的時效變了】　目標 72 秒 · 累計 3:09</a:t>
+              <a:t>【第 3 頁 · P2 · 為什麼是現在:工作量沒變多,客戶要的時效變了】　目標 72 秒 · 累計 2:57</a:t>
             </a:r>
           </a:p>
           <a:p/>
@@ -1382,7 +1387,7 @@
           <a:lstStyle/>
           <a:p>
             <a:r>
-              <a:t>【第 4 頁 · P3 · 發現過程:兩種病,兩個缺口】　目標 52 秒 · 累計 4:02</a:t>
+              <a:t>【第 4 頁 · P3 · 發現過程:兩種病,兩個缺口】　目標 52 秒 · 累計 3:49</a:t>
             </a:r>
           </a:p>
           <a:p/>
@@ -1539,7 +1544,7 @@
           <a:lstStyle/>
           <a:p>
             <a:r>
-              <a:t>【第 5 頁 · P4 · 我們看不見的那一半:有資料,沒有習慣】　目標 59 秒 · 累計 5:00</a:t>
+              <a:t>【第 5 頁 · P4 · 我們看不見的那一半:有資料,沒有習慣】　目標 59 秒 · 累計 4:48</a:t>
             </a:r>
           </a:p>
           <a:p/>
@@ -1726,7 +1731,7 @@
           <a:lstStyle/>
           <a:p>
             <a:r>
-              <a:t>【第 6 頁 · P5 · 五條路,含三條不用 AI】　目標 44 秒 · 累計 5:45</a:t>
+              <a:t>【第 6 頁 · P5 · 五條路,含三條不用 AI】　目標 44 秒 · 累計 5:32</a:t>
             </a:r>
           </a:p>
           <a:p/>
@@ -1868,7 +1873,7 @@
           <a:lstStyle/>
           <a:p>
             <a:r>
-              <a:t>【第 7 頁 · P6 · 風險:七類十條,緩解位移與殘餘風險】　目標 51 秒 · 累計 6:35</a:t>
+              <a:t>【第 7 頁 · P6 · 風險:七類十條,緩解位移與殘餘風險】　目標 51 秒 · 累計 6:23</a:t>
             </a:r>
           </a:p>
           <a:p/>
@@ -2021,7 +2026,7 @@
           <a:lstStyle/>
           <a:p>
             <a:r>
-              <a:t>【第 8 頁 · P7 · 倫理與可申訴性:對照澳洲 AI 倫理八原則】　目標 50 秒 · 累計 7:25</a:t>
+              <a:t>【第 8 頁 · P7 · 倫理與可申訴性:對照澳洲 AI 倫理八原則】　目標 50 秒 · 累計 7:13</a:t>
             </a:r>
           </a:p>
           <a:p/>
@@ -2174,7 +2179,7 @@
           <a:lstStyle/>
           <a:p>
             <a:r>
-              <a:t>【第 9 頁 · P8 · 怎麼算成功:三層 KPI,一條回圈】　目標 46 秒 · 累計 8:11</a:t>
+              <a:t>【第 9 頁 · P8 · 怎麼算成功:三層 KPI,一條回圈】　目標 46 秒 · 累計 7:58</a:t>
             </a:r>
           </a:p>
           <a:p/>
@@ -9234,7 +9239,7 @@
                 </a:solidFill>
                 <a:latin typeface="Microsoft JhengHei"/>
               </a:rPr>
-              <a:t>車上初判 → 雲端複判 → 人工複核;而人工這段有兩種單價,差約 16 倍</a:t>
+              <a:t>Edge AI → Server AI 兩段已自動化;停在第三關的人工複核,而這一段有兩種單價,差約 16 倍</a:t>
             </a:r>
           </a:p>
         </p:txBody>
@@ -9292,7 +9297,7 @@
         <p:spPr>
           <a:xfrm>
             <a:off x="658368" y="1755648"/>
-            <a:ext cx="3527450" cy="2121408"/>
+            <a:ext cx="5364327" cy="2121408"/>
           </a:xfrm>
           <a:prstGeom prst="roundRect">
             <a:avLst>
@@ -9340,7 +9345,7 @@
         <p:spPr>
           <a:xfrm>
             <a:off x="768096" y="1883664"/>
-            <a:ext cx="3307994" cy="566928"/>
+            <a:ext cx="5144871" cy="566928"/>
           </a:xfrm>
           <a:prstGeom prst="rect">
             <a:avLst/>
@@ -9365,7 +9370,7 @@
                 </a:solidFill>
                 <a:latin typeface="Microsoft JhengHei"/>
               </a:rPr>
-              <a:t>車上裝置 · 即時初判</a:t>
+              <a:t>前端 · Edge AI ↔ Server AI</a:t>
             </a:r>
           </a:p>
         </p:txBody>
@@ -9378,7 +9383,7 @@
         </p:nvSpPr>
         <p:spPr>
           <a:xfrm>
-            <a:off x="1905457" y="2505456"/>
+            <a:off x="2823895" y="2505456"/>
             <a:ext cx="1033271" cy="274320"/>
           </a:xfrm>
           <a:prstGeom prst="roundRect">
@@ -9424,7 +9429,7 @@
         </p:nvSpPr>
         <p:spPr>
           <a:xfrm>
-            <a:off x="1905457" y="2505456"/>
+            <a:off x="2823895" y="2505456"/>
             <a:ext cx="1033271" cy="274320"/>
           </a:xfrm>
           <a:prstGeom prst="rect">
@@ -9464,7 +9469,7 @@
         <p:spPr>
           <a:xfrm>
             <a:off x="768096" y="2889503"/>
-            <a:ext cx="3307994" cy="859536"/>
+            <a:ext cx="5144871" cy="859536"/>
           </a:xfrm>
           <a:prstGeom prst="rect">
             <a:avLst/>
@@ -9489,7 +9494,7 @@
                 </a:solidFill>
                 <a:latin typeface="Microsoft JhengHei"/>
               </a:rPr>
-              <a:t>偵測到可能的危險 → 記一筆「事件」</a:t>
+              <a:t>車機 Edge AI 初判 → Server AI 複判</a:t>
             </a:r>
           </a:p>
           <a:p>
@@ -9505,7 +9510,23 @@
                 </a:solidFill>
                 <a:latin typeface="Microsoft JhengHei"/>
               </a:rPr>
-              <a:t>「事件」= 影片 + 時間地點 + 系統分類</a:t>
+              <a:t>判定屬實 → 回傳裝置向駕駛警示</a:t>
+            </a:r>
+          </a:p>
+          <a:p>
+            <a:pPr algn="ctr">
+              <a:lnSpc>
+                <a:spcPct val="135000"/>
+              </a:lnSpc>
+            </a:pPr>
+            <a:r>
+              <a:rPr sz="1200" b="0">
+                <a:solidFill>
+                  <a:srgbClr val="6B7885"/>
+                </a:solidFill>
+                <a:latin typeface="Microsoft JhengHei"/>
+              </a:rPr>
+              <a:t>自動化到這裡就停了</a:t>
             </a:r>
           </a:p>
         </p:txBody>
@@ -9518,8 +9539,8 @@
         </p:nvSpPr>
         <p:spPr>
           <a:xfrm>
-            <a:off x="4332122" y="1755648"/>
-            <a:ext cx="3527450" cy="2121408"/>
+            <a:off x="6168999" y="1755648"/>
+            <a:ext cx="5364327" cy="2121408"/>
           </a:xfrm>
           <a:prstGeom prst="roundRect">
             <a:avLst>
@@ -9531,7 +9552,7 @@
           </a:solidFill>
           <a:ln w="20320">
             <a:solidFill>
-              <a:srgbClr val="1F4E79"/>
+              <a:srgbClr val="E8833A"/>
             </a:solidFill>
           </a:ln>
           <a:effectLst/>
@@ -9566,8 +9587,8 @@
         </p:nvSpPr>
         <p:spPr>
           <a:xfrm>
-            <a:off x="4441850" y="1883664"/>
-            <a:ext cx="3307994" cy="566928"/>
+            <a:off x="6278727" y="1883664"/>
+            <a:ext cx="5144871" cy="566928"/>
           </a:xfrm>
           <a:prstGeom prst="rect">
             <a:avLst/>
@@ -9592,7 +9613,7 @@
                 </a:solidFill>
                 <a:latin typeface="Microsoft JhengHei"/>
               </a:rPr>
-              <a:t>雲端 · 複判</a:t>
+              <a:t>人工複核防線 · 5 位專職分析人員 · 逐筆</a:t>
             </a:r>
           </a:p>
         </p:txBody>
@@ -9605,8 +9626,8 @@
         </p:nvSpPr>
         <p:spPr>
           <a:xfrm>
-            <a:off x="5579211" y="2505456"/>
-            <a:ext cx="1033271" cy="274320"/>
+            <a:off x="8258327" y="2505456"/>
+            <a:ext cx="1185672" cy="274320"/>
           </a:xfrm>
           <a:prstGeom prst="roundRect">
             <a:avLst>
@@ -9614,7 +9635,7 @@
             </a:avLst>
           </a:prstGeom>
           <a:solidFill>
-            <a:srgbClr val="1F4E79"/>
+            <a:srgbClr val="E8833A"/>
           </a:solidFill>
           <a:ln>
             <a:noFill/>
@@ -9651,8 +9672,8 @@
         </p:nvSpPr>
         <p:spPr>
           <a:xfrm>
-            <a:off x="5579211" y="2505456"/>
-            <a:ext cx="1033271" cy="274320"/>
+            <a:off x="8258327" y="2505456"/>
+            <a:ext cx="1185672" cy="274320"/>
           </a:xfrm>
           <a:prstGeom prst="rect">
             <a:avLst/>
@@ -9677,7 +9698,7 @@
                 </a:solidFill>
                 <a:latin typeface="Microsoft JhengHei"/>
               </a:rPr>
-              <a:t>② 已自動化</a:t>
+              <a:t>② 沒有自動化</a:t>
             </a:r>
           </a:p>
         </p:txBody>
@@ -9690,8 +9711,8 @@
         </p:nvSpPr>
         <p:spPr>
           <a:xfrm>
-            <a:off x="4441850" y="2889503"/>
-            <a:ext cx="3307994" cy="859536"/>
+            <a:off x="6278727" y="2889503"/>
+            <a:ext cx="5144871" cy="859536"/>
           </a:xfrm>
           <a:prstGeom prst="rect">
             <a:avLst/>
@@ -9716,7 +9737,7 @@
                 </a:solidFill>
                 <a:latin typeface="Microsoft JhengHei"/>
               </a:rPr>
-              <a:t>初判結果上傳,雲端再判一次</a:t>
+              <a:t>每一筆都要人看過:判成立或誤報 → 離開畫面查證據 → 回信</a:t>
             </a:r>
           </a:p>
           <a:p>
@@ -9732,7 +9753,7 @@
                 </a:solidFill>
                 <a:latin typeface="Microsoft JhengHei"/>
               </a:rPr>
-              <a:t>判定屬實 → 回傳裝置向駕駛警示</a:t>
+              <a:t>客戶回頭說「這筆 AI 判錯了」= 一次爭議(約 5–10%)</a:t>
             </a:r>
           </a:p>
           <a:p>
@@ -9748,7 +9769,7 @@
                 </a:solidFill>
                 <a:latin typeface="Microsoft JhengHei"/>
               </a:rPr>
-              <a:t>自動化到這裡就停了</a:t>
+              <a:t>尖峰另徵調 7 位研發工程師離開本職</a:t>
             </a:r>
           </a:p>
         </p:txBody>
@@ -9761,8 +9782,8 @@
         </p:nvSpPr>
         <p:spPr>
           <a:xfrm>
-            <a:off x="8005876" y="1755648"/>
-            <a:ext cx="3527450" cy="2121408"/>
+            <a:off x="658368" y="4005072"/>
+            <a:ext cx="5300319" cy="1207008"/>
           </a:xfrm>
           <a:prstGeom prst="roundRect">
             <a:avLst>
@@ -9772,9 +9793,9 @@
           <a:solidFill>
             <a:srgbClr val="FFFFFF"/>
           </a:solidFill>
-          <a:ln w="20320">
+          <a:ln w="25400">
             <a:solidFill>
-              <a:srgbClr val="E8833A"/>
+              <a:srgbClr val="1F4E79"/>
             </a:solidFill>
           </a:ln>
           <a:effectLst/>
@@ -9809,8 +9830,8 @@
         </p:nvSpPr>
         <p:spPr>
           <a:xfrm>
-            <a:off x="8115604" y="1883664"/>
-            <a:ext cx="3307994" cy="566928"/>
+            <a:off x="804672" y="4151376"/>
+            <a:ext cx="5007711" cy="384048"/>
           </a:xfrm>
           <a:prstGeom prst="rect">
             <a:avLst/>
@@ -9829,27 +9850,66 @@
               </a:lnSpc>
             </a:pPr>
             <a:r>
-              <a:rPr sz="1500" b="1">
+              <a:rPr sz="1700" b="1">
+                <a:solidFill>
+                  <a:srgbClr val="1F4E79"/>
+                </a:solidFill>
+                <a:latin typeface="Microsoft JhengHei"/>
+              </a:rPr>
+              <a:t>例行批次複核 · 全量,每一筆都看</a:t>
+            </a:r>
+          </a:p>
+        </p:txBody>
+      </p:sp>
+      <p:sp>
+        <p:nvSpPr>
+          <p:cNvPr id="18" name="TextBox 17"/>
+          <p:cNvSpPr txBox="1"/>
+          <p:nvPr/>
+        </p:nvSpPr>
+        <p:spPr>
+          <a:xfrm>
+            <a:off x="804672" y="4645152"/>
+            <a:ext cx="5007711" cy="384048"/>
+          </a:xfrm>
+          <a:prstGeom prst="rect">
+            <a:avLst/>
+          </a:prstGeom>
+          <a:noFill/>
+        </p:spPr>
+        <p:txBody>
+          <a:bodyPr wrap="square" lIns="0" rIns="0" tIns="0" bIns="0" anchor="t">
+            <a:spAutoFit/>
+          </a:bodyPr>
+          <a:lstStyle/>
+          <a:p>
+            <a:pPr algn="ctr">
+              <a:lnSpc>
+                <a:spcPct val="150000"/>
+              </a:lnSpc>
+            </a:pPr>
+            <a:r>
+              <a:rPr sz="1300" b="0">
                 <a:solidFill>
                   <a:srgbClr val="16212E"/>
                 </a:solidFill>
                 <a:latin typeface="Microsoft JhengHei"/>
               </a:rPr>
-              <a:t>人工防線 · 5 位專職分析人員 · 逐筆</a:t>
-            </a:r>
-          </a:p>
-        </p:txBody>
-      </p:sp>
-      <p:sp>
-        <p:nvSpPr>
-          <p:cNvPr id="18" name="Rounded Rectangle 17"/>
+              <a:t>約 20 秒 / 筆</a:t>
+            </a:r>
+          </a:p>
+        </p:txBody>
+      </p:sp>
+      <p:sp>
+        <p:nvSpPr>
+          <p:cNvPr id="19" name="Rounded Rectangle 18"/>
           <p:cNvSpPr/>
           <p:nvPr/>
         </p:nvSpPr>
         <p:spPr>
           <a:xfrm>
-            <a:off x="9176766" y="2505456"/>
-            <a:ext cx="1185672" cy="274320"/>
+            <a:off x="6233007" y="4005072"/>
+            <a:ext cx="5300319" cy="1207008"/>
           </a:xfrm>
           <a:prstGeom prst="roundRect">
             <a:avLst>
@@ -9857,10 +9917,12 @@
             </a:avLst>
           </a:prstGeom>
           <a:solidFill>
-            <a:srgbClr val="E8833A"/>
+            <a:srgbClr val="FFFFFF"/>
           </a:solidFill>
-          <a:ln>
-            <a:noFill/>
+          <a:ln w="25400">
+            <a:solidFill>
+              <a:srgbClr val="1F4E79"/>
+            </a:solidFill>
           </a:ln>
           <a:effectLst/>
         </p:spPr>
@@ -9888,14 +9950,14 @@
       </p:sp>
       <p:sp>
         <p:nvSpPr>
-          <p:cNvPr id="19" name="TextBox 18"/>
+          <p:cNvPr id="20" name="TextBox 19"/>
           <p:cNvSpPr txBox="1"/>
           <p:nvPr/>
         </p:nvSpPr>
         <p:spPr>
           <a:xfrm>
-            <a:off x="9176766" y="2505456"/>
-            <a:ext cx="1185672" cy="274320"/>
+            <a:off x="6379311" y="4151376"/>
+            <a:ext cx="5007711" cy="384048"/>
           </a:xfrm>
           <a:prstGeom prst="rect">
             <a:avLst/>
@@ -9903,7 +9965,7 @@
           <a:noFill/>
         </p:spPr>
         <p:txBody>
-          <a:bodyPr wrap="square" lIns="0" rIns="0" tIns="0" bIns="0" anchor="ctr">
+          <a:bodyPr wrap="square" lIns="0" rIns="0" tIns="0" bIns="0" anchor="t">
             <a:spAutoFit/>
           </a:bodyPr>
           <a:lstStyle/>
@@ -9914,27 +9976,27 @@
               </a:lnSpc>
             </a:pPr>
             <a:r>
-              <a:rPr sz="1200" b="1">
+              <a:rPr sz="1700" b="1">
                 <a:solidFill>
-                  <a:srgbClr val="FFFFFF"/>
+                  <a:srgbClr val="1F4E79"/>
                 </a:solidFill>
                 <a:latin typeface="Microsoft JhengHei"/>
               </a:rPr>
-              <a:t>③ 沒有自動化</a:t>
-            </a:r>
-          </a:p>
-        </p:txBody>
-      </p:sp>
-      <p:sp>
-        <p:nvSpPr>
-          <p:cNvPr id="20" name="TextBox 19"/>
+              <a:t>客戶爭議深入判讀 · 只發生在客戶回頭標記的 5–10%</a:t>
+            </a:r>
+          </a:p>
+        </p:txBody>
+      </p:sp>
+      <p:sp>
+        <p:nvSpPr>
+          <p:cNvPr id="21" name="TextBox 20"/>
           <p:cNvSpPr txBox="1"/>
           <p:nvPr/>
         </p:nvSpPr>
         <p:spPr>
           <a:xfrm>
-            <a:off x="8115604" y="2889503"/>
-            <a:ext cx="3307994" cy="859536"/>
+            <a:off x="6379311" y="4645152"/>
+            <a:ext cx="5007711" cy="384048"/>
           </a:xfrm>
           <a:prstGeom prst="rect">
             <a:avLst/>
@@ -9949,60 +10011,79 @@
           <a:p>
             <a:pPr algn="ctr">
               <a:lnSpc>
-                <a:spcPct val="135000"/>
+                <a:spcPct val="150000"/>
               </a:lnSpc>
             </a:pPr>
             <a:r>
-              <a:rPr sz="1200" b="0">
+              <a:rPr sz="1300" b="0">
                 <a:solidFill>
-                  <a:srgbClr val="6B7885"/>
+                  <a:srgbClr val="16212E"/>
                 </a:solidFill>
                 <a:latin typeface="Microsoft JhengHei"/>
               </a:rPr>
-              <a:t>重看影片→判成立或誤報→離開畫面查證據→回信</a:t>
-            </a:r>
-          </a:p>
+              <a:t>約 5.25 分鐘 / 筆</a:t>
+            </a:r>
+          </a:p>
+        </p:txBody>
+      </p:sp>
+      <p:sp>
+        <p:nvSpPr>
+          <p:cNvPr id="22" name="TextBox 21"/>
+          <p:cNvSpPr txBox="1"/>
+          <p:nvPr/>
+        </p:nvSpPr>
+        <p:spPr>
+          <a:xfrm>
+            <a:off x="658368" y="5285231"/>
+            <a:ext cx="10874959" cy="347472"/>
+          </a:xfrm>
+          <a:prstGeom prst="rect">
+            <a:avLst/>
+          </a:prstGeom>
+          <a:noFill/>
+        </p:spPr>
+        <p:txBody>
+          <a:bodyPr wrap="square" lIns="0" rIns="0" tIns="0" bIns="0" anchor="t">
+            <a:spAutoFit/>
+          </a:bodyPr>
+          <a:lstStyle/>
           <a:p>
             <a:pPr algn="ctr">
               <a:lnSpc>
-                <a:spcPct val="135000"/>
+                <a:spcPct val="125000"/>
               </a:lnSpc>
             </a:pPr>
             <a:r>
-              <a:rPr sz="1200" b="0">
+              <a:rPr sz="1500" b="1">
                 <a:solidFill>
-                  <a:srgbClr val="6B7885"/>
+                  <a:srgbClr val="16212E"/>
                 </a:solidFill>
                 <a:latin typeface="Microsoft JhengHei"/>
               </a:rPr>
-              <a:t>爭議=客戶回頭說判錯 · 尖峰另徵調 7 位研發</a:t>
-            </a:r>
-          </a:p>
-        </p:txBody>
-      </p:sp>
-      <p:sp>
-        <p:nvSpPr>
-          <p:cNvPr id="21" name="Rounded Rectangle 20"/>
+              <a:t>差約 16 倍(5.25 分 ÷ 20 秒 ≈ 15.7)—— 差別不在人,在證據在不在畫面裡</a:t>
+            </a:r>
+          </a:p>
+        </p:txBody>
+      </p:sp>
+      <p:sp>
+        <p:nvSpPr>
+          <p:cNvPr id="23" name="Rectangle 22"/>
           <p:cNvSpPr/>
           <p:nvPr/>
         </p:nvSpPr>
         <p:spPr>
           <a:xfrm>
-            <a:off x="658368" y="4005072"/>
-            <a:ext cx="5300319" cy="1207008"/>
-          </a:xfrm>
-          <a:prstGeom prst="roundRect">
-            <a:avLst>
-              <a:gd name="adj" fmla="val 6000"/>
-            </a:avLst>
+            <a:off x="658368" y="5806440"/>
+            <a:ext cx="45720" cy="228600"/>
+          </a:xfrm>
+          <a:prstGeom prst="rect">
+            <a:avLst/>
           </a:prstGeom>
           <a:solidFill>
-            <a:srgbClr val="FFFFFF"/>
+            <a:srgbClr val="C00000"/>
           </a:solidFill>
-          <a:ln w="25400">
-            <a:solidFill>
-              <a:srgbClr val="1F4E79"/>
-            </a:solidFill>
+          <a:ln>
+            <a:noFill/>
           </a:ln>
           <a:effectLst/>
         </p:spPr>
@@ -10030,14 +10111,14 @@
       </p:sp>
       <p:sp>
         <p:nvSpPr>
-          <p:cNvPr id="22" name="TextBox 21"/>
+          <p:cNvPr id="24" name="TextBox 23"/>
           <p:cNvSpPr txBox="1"/>
           <p:nvPr/>
         </p:nvSpPr>
         <p:spPr>
           <a:xfrm>
-            <a:off x="804672" y="4151376"/>
-            <a:ext cx="5007711" cy="384048"/>
+            <a:off x="804672" y="5779008"/>
+            <a:ext cx="2116945" cy="320040"/>
           </a:xfrm>
           <a:prstGeom prst="rect">
             <a:avLst/>
@@ -10045,90 +10126,125 @@
           <a:noFill/>
         </p:spPr>
         <p:txBody>
-          <a:bodyPr wrap="square" lIns="0" rIns="0" tIns="0" bIns="0" anchor="t">
+          <a:bodyPr wrap="square" lIns="0" rIns="0" tIns="0" bIns="0" anchor="ctr">
             <a:spAutoFit/>
           </a:bodyPr>
           <a:lstStyle/>
           <a:p>
-            <a:pPr algn="ctr">
+            <a:pPr algn="l">
               <a:lnSpc>
                 <a:spcPct val="125000"/>
               </a:lnSpc>
             </a:pPr>
             <a:r>
-              <a:rPr sz="1700" b="1">
-                <a:solidFill>
-                  <a:srgbClr val="1F4E79"/>
-                </a:solidFill>
-                <a:latin typeface="Microsoft JhengHei"/>
-              </a:rPr>
-              <a:t>例行批次複核 · 全量,每一筆都看</a:t>
-            </a:r>
-          </a:p>
-        </p:txBody>
-      </p:sp>
-      <p:sp>
-        <p:nvSpPr>
-          <p:cNvPr id="23" name="TextBox 22"/>
-          <p:cNvSpPr txBox="1"/>
-          <p:nvPr/>
-        </p:nvSpPr>
-        <p:spPr>
-          <a:xfrm>
-            <a:off x="804672" y="4645152"/>
-            <a:ext cx="5007711" cy="384048"/>
-          </a:xfrm>
-          <a:prstGeom prst="rect">
-            <a:avLst/>
-          </a:prstGeom>
-          <a:noFill/>
-        </p:spPr>
-        <p:txBody>
-          <a:bodyPr wrap="square" lIns="0" rIns="0" tIns="0" bIns="0" anchor="t">
-            <a:spAutoFit/>
-          </a:bodyPr>
-          <a:lstStyle/>
-          <a:p>
-            <a:pPr algn="ctr">
-              <a:lnSpc>
-                <a:spcPct val="150000"/>
-              </a:lnSpc>
-            </a:pPr>
-            <a:r>
-              <a:rPr sz="1300" b="0">
+              <a:rPr sz="1400" b="1">
                 <a:solidFill>
                   <a:srgbClr val="16212E"/>
                 </a:solidFill>
                 <a:latin typeface="Microsoft JhengHei"/>
               </a:rPr>
-              <a:t>約 20 秒 / 筆</a:t>
-            </a:r>
-          </a:p>
-        </p:txBody>
-      </p:sp>
-      <p:sp>
-        <p:nvSpPr>
-          <p:cNvPr id="24" name="Rounded Rectangle 23"/>
+              <a:t>今天的產能</a:t>
+            </a:r>
+          </a:p>
+        </p:txBody>
+      </p:sp>
+      <p:sp>
+        <p:nvSpPr>
+          <p:cNvPr id="25" name="TextBox 24"/>
+          <p:cNvSpPr txBox="1"/>
+          <p:nvPr/>
+        </p:nvSpPr>
+        <p:spPr>
+          <a:xfrm>
+            <a:off x="2976481" y="5779008"/>
+            <a:ext cx="2787914" cy="320040"/>
+          </a:xfrm>
+          <a:prstGeom prst="rect">
+            <a:avLst/>
+          </a:prstGeom>
+          <a:noFill/>
+        </p:spPr>
+        <p:txBody>
+          <a:bodyPr wrap="square" lIns="0" rIns="0" tIns="0" bIns="0" anchor="ctr">
+            <a:spAutoFit/>
+          </a:bodyPr>
+          <a:lstStyle/>
+          <a:p>
+            <a:pPr algn="l">
+              <a:lnSpc>
+                <a:spcPct val="125000"/>
+              </a:lnSpc>
+            </a:pPr>
+            <a:r>
+              <a:rPr sz="1500" b="1">
+                <a:solidFill>
+                  <a:srgbClr val="C00000"/>
+                </a:solidFill>
+                <a:latin typeface="Microsoft JhengHei"/>
+              </a:rPr>
+              <a:t>40 人時/天 = 5 人 × 8 小時</a:t>
+            </a:r>
+          </a:p>
+        </p:txBody>
+      </p:sp>
+      <p:sp>
+        <p:nvSpPr>
+          <p:cNvPr id="26" name="TextBox 25"/>
+          <p:cNvSpPr txBox="1"/>
+          <p:nvPr/>
+        </p:nvSpPr>
+        <p:spPr>
+          <a:xfrm>
+            <a:off x="5874123" y="5779008"/>
+            <a:ext cx="4333323" cy="320040"/>
+          </a:xfrm>
+          <a:prstGeom prst="rect">
+            <a:avLst/>
+          </a:prstGeom>
+          <a:noFill/>
+        </p:spPr>
+        <p:txBody>
+          <a:bodyPr wrap="square" lIns="0" rIns="0" tIns="0" bIns="0" anchor="ctr">
+            <a:spAutoFit/>
+          </a:bodyPr>
+          <a:lstStyle/>
+          <a:p>
+            <a:pPr algn="l">
+              <a:lnSpc>
+                <a:spcPct val="120000"/>
+              </a:lnSpc>
+            </a:pPr>
+            <a:r>
+              <a:rPr sz="1200" b="0">
+                <a:solidFill>
+                  <a:srgbClr val="6B7885"/>
+                </a:solidFill>
+                <a:latin typeface="Microsoft JhengHei"/>
+              </a:rPr>
+              <a:t>上緣 42.9 已超過現有產能</a:t>
+            </a:r>
+          </a:p>
+        </p:txBody>
+      </p:sp>
+      <p:sp>
+        <p:nvSpPr>
+          <p:cNvPr id="27" name="Rectangle 26"/>
           <p:cNvSpPr/>
           <p:nvPr/>
         </p:nvSpPr>
         <p:spPr>
           <a:xfrm>
-            <a:off x="6233007" y="4005072"/>
-            <a:ext cx="5300319" cy="1207008"/>
-          </a:xfrm>
-          <a:prstGeom prst="roundRect">
-            <a:avLst>
-              <a:gd name="adj" fmla="val 6000"/>
-            </a:avLst>
+            <a:off x="658368" y="6217920"/>
+            <a:ext cx="45720" cy="228600"/>
+          </a:xfrm>
+          <a:prstGeom prst="rect">
+            <a:avLst/>
           </a:prstGeom>
           <a:solidFill>
-            <a:srgbClr val="FFFFFF"/>
+            <a:srgbClr val="C00000"/>
           </a:solidFill>
-          <a:ln w="25400">
-            <a:solidFill>
-              <a:srgbClr val="1F4E79"/>
-            </a:solidFill>
+          <a:ln>
+            <a:noFill/>
           </a:ln>
           <a:effectLst/>
         </p:spPr>
@@ -10156,329 +10272,7 @@
       </p:sp>
       <p:sp>
         <p:nvSpPr>
-          <p:cNvPr id="25" name="TextBox 24"/>
-          <p:cNvSpPr txBox="1"/>
-          <p:nvPr/>
-        </p:nvSpPr>
-        <p:spPr>
-          <a:xfrm>
-            <a:off x="6379311" y="4151376"/>
-            <a:ext cx="5007711" cy="384048"/>
-          </a:xfrm>
-          <a:prstGeom prst="rect">
-            <a:avLst/>
-          </a:prstGeom>
-          <a:noFill/>
-        </p:spPr>
-        <p:txBody>
-          <a:bodyPr wrap="square" lIns="0" rIns="0" tIns="0" bIns="0" anchor="t">
-            <a:spAutoFit/>
-          </a:bodyPr>
-          <a:lstStyle/>
-          <a:p>
-            <a:pPr algn="ctr">
-              <a:lnSpc>
-                <a:spcPct val="125000"/>
-              </a:lnSpc>
-            </a:pPr>
-            <a:r>
-              <a:rPr sz="1700" b="1">
-                <a:solidFill>
-                  <a:srgbClr val="1F4E79"/>
-                </a:solidFill>
-                <a:latin typeface="Microsoft JhengHei"/>
-              </a:rPr>
-              <a:t>客戶爭議深入判讀 · 只發生在客戶回頭標記的 5–10%</a:t>
-            </a:r>
-          </a:p>
-        </p:txBody>
-      </p:sp>
-      <p:sp>
-        <p:nvSpPr>
-          <p:cNvPr id="26" name="TextBox 25"/>
-          <p:cNvSpPr txBox="1"/>
-          <p:nvPr/>
-        </p:nvSpPr>
-        <p:spPr>
-          <a:xfrm>
-            <a:off x="6379311" y="4645152"/>
-            <a:ext cx="5007711" cy="384048"/>
-          </a:xfrm>
-          <a:prstGeom prst="rect">
-            <a:avLst/>
-          </a:prstGeom>
-          <a:noFill/>
-        </p:spPr>
-        <p:txBody>
-          <a:bodyPr wrap="square" lIns="0" rIns="0" tIns="0" bIns="0" anchor="t">
-            <a:spAutoFit/>
-          </a:bodyPr>
-          <a:lstStyle/>
-          <a:p>
-            <a:pPr algn="ctr">
-              <a:lnSpc>
-                <a:spcPct val="150000"/>
-              </a:lnSpc>
-            </a:pPr>
-            <a:r>
-              <a:rPr sz="1300" b="0">
-                <a:solidFill>
-                  <a:srgbClr val="16212E"/>
-                </a:solidFill>
-                <a:latin typeface="Microsoft JhengHei"/>
-              </a:rPr>
-              <a:t>約 5.25 分鐘 / 筆</a:t>
-            </a:r>
-          </a:p>
-        </p:txBody>
-      </p:sp>
-      <p:sp>
-        <p:nvSpPr>
-          <p:cNvPr id="27" name="TextBox 26"/>
-          <p:cNvSpPr txBox="1"/>
-          <p:nvPr/>
-        </p:nvSpPr>
-        <p:spPr>
-          <a:xfrm>
-            <a:off x="658368" y="5285231"/>
-            <a:ext cx="10874959" cy="347472"/>
-          </a:xfrm>
-          <a:prstGeom prst="rect">
-            <a:avLst/>
-          </a:prstGeom>
-          <a:noFill/>
-        </p:spPr>
-        <p:txBody>
-          <a:bodyPr wrap="square" lIns="0" rIns="0" tIns="0" bIns="0" anchor="t">
-            <a:spAutoFit/>
-          </a:bodyPr>
-          <a:lstStyle/>
-          <a:p>
-            <a:pPr algn="ctr">
-              <a:lnSpc>
-                <a:spcPct val="125000"/>
-              </a:lnSpc>
-            </a:pPr>
-            <a:r>
-              <a:rPr sz="1500" b="1">
-                <a:solidFill>
-                  <a:srgbClr val="16212E"/>
-                </a:solidFill>
-                <a:latin typeface="Microsoft JhengHei"/>
-              </a:rPr>
-              <a:t>差約 16 倍(5.25 分 ÷ 20 秒 ≈ 15.7)—— 差別不在人,在證據在不在畫面裡</a:t>
-            </a:r>
-          </a:p>
-        </p:txBody>
-      </p:sp>
-      <p:sp>
-        <p:nvSpPr>
-          <p:cNvPr id="28" name="Rectangle 27"/>
-          <p:cNvSpPr/>
-          <p:nvPr/>
-        </p:nvSpPr>
-        <p:spPr>
-          <a:xfrm>
-            <a:off x="658368" y="5806440"/>
-            <a:ext cx="45720" cy="228600"/>
-          </a:xfrm>
-          <a:prstGeom prst="rect">
-            <a:avLst/>
-          </a:prstGeom>
-          <a:solidFill>
-            <a:srgbClr val="C00000"/>
-          </a:solidFill>
-          <a:ln>
-            <a:noFill/>
-          </a:ln>
-          <a:effectLst/>
-        </p:spPr>
-        <p:style>
-          <a:lnRef idx="1">
-            <a:schemeClr val="accent1"/>
-          </a:lnRef>
-          <a:fillRef idx="3">
-            <a:schemeClr val="accent1"/>
-          </a:fillRef>
-          <a:effectRef idx="2">
-            <a:schemeClr val="accent1"/>
-          </a:effectRef>
-          <a:fontRef idx="minor">
-            <a:schemeClr val="lt1"/>
-          </a:fontRef>
-        </p:style>
-        <p:txBody>
-          <a:bodyPr rtlCol="0" anchor="ctr"/>
-          <a:lstStyle/>
-          <a:p>
-            <a:pPr algn="ctr"/>
-          </a:p>
-        </p:txBody>
-      </p:sp>
-      <p:sp>
-        <p:nvSpPr>
-          <p:cNvPr id="29" name="TextBox 28"/>
-          <p:cNvSpPr txBox="1"/>
-          <p:nvPr/>
-        </p:nvSpPr>
-        <p:spPr>
-          <a:xfrm>
-            <a:off x="804672" y="5779008"/>
-            <a:ext cx="2116945" cy="320040"/>
-          </a:xfrm>
-          <a:prstGeom prst="rect">
-            <a:avLst/>
-          </a:prstGeom>
-          <a:noFill/>
-        </p:spPr>
-        <p:txBody>
-          <a:bodyPr wrap="square" lIns="0" rIns="0" tIns="0" bIns="0" anchor="ctr">
-            <a:spAutoFit/>
-          </a:bodyPr>
-          <a:lstStyle/>
-          <a:p>
-            <a:pPr algn="l">
-              <a:lnSpc>
-                <a:spcPct val="125000"/>
-              </a:lnSpc>
-            </a:pPr>
-            <a:r>
-              <a:rPr sz="1400" b="1">
-                <a:solidFill>
-                  <a:srgbClr val="16212E"/>
-                </a:solidFill>
-                <a:latin typeface="Microsoft JhengHei"/>
-              </a:rPr>
-              <a:t>今天的產能</a:t>
-            </a:r>
-          </a:p>
-        </p:txBody>
-      </p:sp>
-      <p:sp>
-        <p:nvSpPr>
-          <p:cNvPr id="30" name="TextBox 29"/>
-          <p:cNvSpPr txBox="1"/>
-          <p:nvPr/>
-        </p:nvSpPr>
-        <p:spPr>
-          <a:xfrm>
-            <a:off x="2976481" y="5779008"/>
-            <a:ext cx="2787914" cy="320040"/>
-          </a:xfrm>
-          <a:prstGeom prst="rect">
-            <a:avLst/>
-          </a:prstGeom>
-          <a:noFill/>
-        </p:spPr>
-        <p:txBody>
-          <a:bodyPr wrap="square" lIns="0" rIns="0" tIns="0" bIns="0" anchor="ctr">
-            <a:spAutoFit/>
-          </a:bodyPr>
-          <a:lstStyle/>
-          <a:p>
-            <a:pPr algn="l">
-              <a:lnSpc>
-                <a:spcPct val="125000"/>
-              </a:lnSpc>
-            </a:pPr>
-            <a:r>
-              <a:rPr sz="1500" b="1">
-                <a:solidFill>
-                  <a:srgbClr val="C00000"/>
-                </a:solidFill>
-                <a:latin typeface="Microsoft JhengHei"/>
-              </a:rPr>
-              <a:t>40 人時/天 = 5 人 × 8 小時</a:t>
-            </a:r>
-          </a:p>
-        </p:txBody>
-      </p:sp>
-      <p:sp>
-        <p:nvSpPr>
-          <p:cNvPr id="31" name="TextBox 30"/>
-          <p:cNvSpPr txBox="1"/>
-          <p:nvPr/>
-        </p:nvSpPr>
-        <p:spPr>
-          <a:xfrm>
-            <a:off x="5874123" y="5779008"/>
-            <a:ext cx="4333323" cy="320040"/>
-          </a:xfrm>
-          <a:prstGeom prst="rect">
-            <a:avLst/>
-          </a:prstGeom>
-          <a:noFill/>
-        </p:spPr>
-        <p:txBody>
-          <a:bodyPr wrap="square" lIns="0" rIns="0" tIns="0" bIns="0" anchor="ctr">
-            <a:spAutoFit/>
-          </a:bodyPr>
-          <a:lstStyle/>
-          <a:p>
-            <a:pPr algn="l">
-              <a:lnSpc>
-                <a:spcPct val="120000"/>
-              </a:lnSpc>
-            </a:pPr>
-            <a:r>
-              <a:rPr sz="1200" b="0">
-                <a:solidFill>
-                  <a:srgbClr val="6B7885"/>
-                </a:solidFill>
-                <a:latin typeface="Microsoft JhengHei"/>
-              </a:rPr>
-              <a:t>上緣 42.9 已超過現有產能</a:t>
-            </a:r>
-          </a:p>
-        </p:txBody>
-      </p:sp>
-      <p:sp>
-        <p:nvSpPr>
-          <p:cNvPr id="32" name="Rectangle 31"/>
-          <p:cNvSpPr/>
-          <p:nvPr/>
-        </p:nvSpPr>
-        <p:spPr>
-          <a:xfrm>
-            <a:off x="658368" y="6217920"/>
-            <a:ext cx="45720" cy="228600"/>
-          </a:xfrm>
-          <a:prstGeom prst="rect">
-            <a:avLst/>
-          </a:prstGeom>
-          <a:solidFill>
-            <a:srgbClr val="C00000"/>
-          </a:solidFill>
-          <a:ln>
-            <a:noFill/>
-          </a:ln>
-          <a:effectLst/>
-        </p:spPr>
-        <p:style>
-          <a:lnRef idx="1">
-            <a:schemeClr val="accent1"/>
-          </a:lnRef>
-          <a:fillRef idx="3">
-            <a:schemeClr val="accent1"/>
-          </a:fillRef>
-          <a:effectRef idx="2">
-            <a:schemeClr val="accent1"/>
-          </a:effectRef>
-          <a:fontRef idx="minor">
-            <a:schemeClr val="lt1"/>
-          </a:fontRef>
-        </p:style>
-        <p:txBody>
-          <a:bodyPr rtlCol="0" anchor="ctr"/>
-          <a:lstStyle/>
-          <a:p>
-            <a:pPr algn="ctr"/>
-          </a:p>
-        </p:txBody>
-      </p:sp>
-      <p:sp>
-        <p:nvSpPr>
-          <p:cNvPr id="33" name="TextBox 32"/>
+          <p:cNvPr id="28" name="TextBox 27"/>
           <p:cNvSpPr txBox="1"/>
           <p:nvPr/>
         </p:nvSpPr>
@@ -10517,7 +10311,7 @@
       </p:sp>
       <p:sp>
         <p:nvSpPr>
-          <p:cNvPr id="34" name="TextBox 33"/>
+          <p:cNvPr id="29" name="TextBox 28"/>
           <p:cNvSpPr txBox="1"/>
           <p:nvPr/>
         </p:nvSpPr>
@@ -10556,7 +10350,7 @@
       </p:sp>
       <p:sp>
         <p:nvSpPr>
-          <p:cNvPr id="35" name="TextBox 34"/>
+          <p:cNvPr id="30" name="TextBox 29"/>
           <p:cNvSpPr txBox="1"/>
           <p:nvPr/>
         </p:nvSpPr>

--- a/Artificial Intelligence for Enterprises/Assessment3/Huang_26254793_421104_Assessment 3.pptx
+++ b/Artificial Intelligence for Enterprises/Assessment3/Huang_26254793_421104_Assessment 3.pptx
@@ -644,7 +644,7 @@
           <a:lstStyle/>
           <a:p>
             <a:r>
-              <a:t>【第 10 頁 · P9 · 六個月 · 六個工作包 · 三道決策門】　目標 47 秒 · 累計 8:46</a:t>
+              <a:t>【第 10 頁 · P9 · 六個月 · 六個工作包 · 三道決策門】　目標 47 秒 · 累計 8:50</a:t>
             </a:r>
           </a:p>
           <a:p/>
@@ -796,7 +796,7 @@
           <a:lstStyle/>
           <a:p>
             <a:r>
-              <a:t>【第 11 頁 · P10 · 資源、當責與請求】　目標 64 秒 · 累計 9:49</a:t>
+              <a:t>【第 11 頁 · P10 · 資源、當責與請求】　目標 64 秒 · 累計 9:54</a:t>
             </a:r>
           </a:p>
           <a:p/>
@@ -968,7 +968,7 @@
           <a:lstStyle/>
           <a:p>
             <a:r>
-              <a:t>【第 12 頁 · 參考文獻(第 11 頁 — 不佔十頁額度)】　目標 5 秒 · 累計 9:54</a:t>
+              <a:t>【第 12 頁 · 參考文獻(第 11 頁 — 不佔十頁額度)】　目標 5 秒 · 累計 9:59</a:t>
             </a:r>
           </a:p>
           <a:p/>
@@ -1067,7 +1067,7 @@
           <a:lstStyle/>
           <a:p>
             <a:r>
-              <a:t>【第 2 頁 · P1 · 用例:兩階段推論,與它下游那道人工防線】　目標 53 秒 · 累計 1:45</a:t>
+              <a:t>【第 2 頁 · P1 · 用例:兩階段推論,與它下游那道人工防線】　目標 58 秒 · 累計 1:49</a:t>
             </a:r>
           </a:p>
           <a:p/>
@@ -1084,7 +1084,7 @@
           </a:p>
           <a:p>
             <a:r>
-              <a:t>· 第三關全部靠人:判成立或誤報 → 離開畫面查證據 → 回信</a:t>
+              <a:t>· 第三關全部靠人:打開事件檔 → 看 AI 當時依什麼判 → 回信;分不出「客戶不熟判定規格」還是「畫面造成的真誤報」,就沒辦法回信</a:t>
             </a:r>
           </a:p>
           <a:p>
@@ -1114,6 +1114,21 @@
               <a:t>⚠️ 🚫 不可把「爭議」講成「誤報」—— 5.25 分算的是爭議(客戶回頭標記的 5–10%)</a:t>
             </a:r>
           </a:p>
+          <a:p>
+            <a:r>
+              <a:t>⚠️ 2:8 一定要接「取整的概估,系統有欄位但沒人匯總過,W6 交正式分佈」</a:t>
+            </a:r>
+          </a:p>
+          <a:p>
+            <a:r>
+              <a:t>⚠️ 🚫 **不可把 80% 跟第 4 頁的 83% 乘起來** —— 兩個都是估計、來自不同樣本,串起來就是把誤差乘上去。他若自己乘,就說那兩個母體不同</a:t>
+            </a:r>
+          </a:p>
+          <a:p>
+            <a:r>
+              <a:t>⚠️ 他若追問「有紀錄為什麼不算」:欄位在,只是沒人匯總過 ——那是第一個工作包第一週就做得完的事</a:t>
+            </a:r>
+          </a:p>
           <a:p/>
           <a:p>
             <a:r>
@@ -1123,12 +1138,12 @@
           <a:p/>
           <a:p>
             <a:r>
-              <a:t>── 逐字備援 · 233 字(忘詞才看,不是拿來唸的)──</a:t>
-            </a:r>
-          </a:p>
-          <a:p>
-            <a:r>
-              <a:t>誠如各位在圖上看到的,前端 Edge AI 跟 Server AI 這兩段,我們已經完成自動化。停在第三關:客戶回頭說「這筆 AI 判錯了」,那一段全部靠人 ——而它慢的原因不是人不夠快,是證據不在畫面裡。看畫面就能判的,一筆二十秒;要離開畫面去找證據的 —— 那面牌是什麼、速限多少 ——一筆五分多鐘,差約十六倍。所以我提的是一套地端 AI 事件判讀:把畫面外的脈絡讀進來,把那五分多鐘裡最花時間的「找證據」自動化,讓同樣這五個人,在客戶要的兩天內交得出答案。要建它,得先有凍結的評估集、一致的標註、餵進模型的脈絡,那是前三個工作包。本案不重新開啟架構選擇。</a:t>
+              <a:t>── 逐字備援 · 254 字(忘詞才看,不是拿來唸的)──</a:t>
+            </a:r>
+          </a:p>
+          <a:p>
+            <a:r>
+              <a:t>誠如各位在圖上看到的,前端 Edge AI 跟 Server AI 這兩段已經自動化,停在第三關。客戶回頭說「這筆 AI 判錯了」,那一段全部靠人 ——而它慢的原因不是人不夠快,是證據不在畫面裡。分析人員得打開事件檔,看 AI 當下是依什麼判的,才分得出這是哪一種爭議:是客戶不熟我們的判定規格、其實 AI 判對了;還是畫面本身造成的真誤報。營運端從處理紀錄看大約是二比八,但那是取整的概估 ——系統有欄位,沒有人匯總過,第六週交。在打開來看之前,這兩種長得一模一樣 —— 同樣是人工,單價卻差十六倍。所以我提的是一套地端 AI 事件判讀,把畫面外的脈絡讀進來,讓同樣這五個人,在客戶要的兩天內交得出答案。</a:t>
             </a:r>
           </a:p>
           <a:p/>
@@ -1234,7 +1249,7 @@
           <a:lstStyle/>
           <a:p>
             <a:r>
-              <a:t>【第 3 頁 · P2 · 為什麼是現在:工作量沒變多,客戶要的時效變了】　目標 72 秒 · 累計 2:57</a:t>
+              <a:t>【第 3 頁 · P2 · 為什麼是現在:工作量沒變多,客戶要的時效變了】　目標 72 秒 · 累計 3:02</a:t>
             </a:r>
           </a:p>
           <a:p/>
@@ -1387,7 +1402,7 @@
           <a:lstStyle/>
           <a:p>
             <a:r>
-              <a:t>【第 4 頁 · P3 · 發現過程:兩種病,兩個缺口】　目標 52 秒 · 累計 3:49</a:t>
+              <a:t>【第 4 頁 · P3 · 發現過程:兩種病,兩個缺口】　目標 52 秒 · 累計 3:54</a:t>
             </a:r>
           </a:p>
           <a:p/>
@@ -1544,7 +1559,7 @@
           <a:lstStyle/>
           <a:p>
             <a:r>
-              <a:t>【第 5 頁 · P4 · 我們看不見的那一半:有資料,沒有習慣】　目標 59 秒 · 累計 4:48</a:t>
+              <a:t>【第 5 頁 · P4 · 我們看不見的那一半:有資料,沒有習慣】　目標 59 秒 · 累計 4:53</a:t>
             </a:r>
           </a:p>
           <a:p/>
@@ -1731,7 +1746,7 @@
           <a:lstStyle/>
           <a:p>
             <a:r>
-              <a:t>【第 6 頁 · P5 · 五條路,含三條不用 AI】　目標 44 秒 · 累計 5:32</a:t>
+              <a:t>【第 6 頁 · P5 · 五條路,含三條不用 AI】　目標 44 秒 · 累計 5:37</a:t>
             </a:r>
           </a:p>
           <a:p/>
@@ -1873,7 +1888,7 @@
           <a:lstStyle/>
           <a:p>
             <a:r>
-              <a:t>【第 7 頁 · P6 · 風險:七類十條,緩解位移與殘餘風險】　目標 51 秒 · 累計 6:23</a:t>
+              <a:t>【第 7 頁 · P6 · 風險:七類十條,緩解位移與殘餘風險】　目標 51 秒 · 累計 6:28</a:t>
             </a:r>
           </a:p>
           <a:p/>
@@ -2026,7 +2041,7 @@
           <a:lstStyle/>
           <a:p>
             <a:r>
-              <a:t>【第 8 頁 · P7 · 倫理與可申訴性:對照澳洲 AI 倫理八原則】　目標 50 秒 · 累計 7:13</a:t>
+              <a:t>【第 8 頁 · P7 · 倫理與可申訴性:對照澳洲 AI 倫理八原則】　目標 50 秒 · 累計 7:17</a:t>
             </a:r>
           </a:p>
           <a:p/>
@@ -2179,7 +2194,7 @@
           <a:lstStyle/>
           <a:p>
             <a:r>
-              <a:t>【第 9 頁 · P8 · 怎麼算成功:三層 KPI,一條回圈】　目標 46 秒 · 累計 7:58</a:t>
+              <a:t>【第 9 頁 · P8 · 怎麼算成功:三層 KPI,一條回圈】　目標 46 秒 · 累計 8:03</a:t>
             </a:r>
           </a:p>
           <a:p/>
@@ -9737,7 +9752,7 @@
                 </a:solidFill>
                 <a:latin typeface="Microsoft JhengHei"/>
               </a:rPr>
-              <a:t>每一筆都要人看過:判成立或誤報 → 離開畫面查證據 → 回信</a:t>
+              <a:t>客戶回頭說「這筆 AI 判錯了」= 一次爭議(約 5–10%)</a:t>
             </a:r>
           </a:p>
           <a:p>
@@ -9753,7 +9768,7 @@
                 </a:solidFill>
                 <a:latin typeface="Microsoft JhengHei"/>
               </a:rPr>
-              <a:t>客戶回頭說「這筆 AI 判錯了」= 一次爭議(約 5–10%)</a:t>
+              <a:t>每一筆:打開事件檔 → 看 AI 當時依什麼判 → 回信</a:t>
             </a:r>
           </a:p>
           <a:p>
@@ -9769,7 +9784,7 @@
                 </a:solidFill>
                 <a:latin typeface="Microsoft JhengHei"/>
               </a:rPr>
-              <a:t>尖峰另徵調 7 位研發工程師離開本職</a:t>
+              <a:t>分兩種:客戶誤解規格 vs 真誤報,約 2:8〔概估,W6 匯總〕</a:t>
             </a:r>
           </a:p>
         </p:txBody>

--- a/Artificial Intelligence for Enterprises/Assessment3/Huang_26254793_421104_Assessment 3.pptx
+++ b/Artificial Intelligence for Enterprises/Assessment3/Huang_26254793_421104_Assessment 3.pptx
@@ -644,7 +644,7 @@
           <a:lstStyle/>
           <a:p>
             <a:r>
-              <a:t>【第 10 頁 · P9 · 六個月 · 六個工作包 · 三道決策門】　目標 47 秒 · 累計 8:50</a:t>
+              <a:t>【第 10 頁 · P9 · 六個月 · 六個工作包 · 三道決策門】　目標 47 秒 · 累計 9:04</a:t>
             </a:r>
           </a:p>
           <a:p/>
@@ -796,7 +796,7 @@
           <a:lstStyle/>
           <a:p>
             <a:r>
-              <a:t>【第 11 頁 · P10 · 資源、當責與請求】　目標 64 秒 · 累計 9:54</a:t>
+              <a:t>【第 11 頁 · P10 · 資源、當責與請求】　目標 64 秒 · 累計 10:08</a:t>
             </a:r>
           </a:p>
           <a:p/>
@@ -968,7 +968,7 @@
           <a:lstStyle/>
           <a:p>
             <a:r>
-              <a:t>【第 12 頁 · 參考文獻(第 11 頁 — 不佔十頁額度)】　目標 5 秒 · 累計 9:59</a:t>
+              <a:t>【第 12 頁 · 參考文獻(第 11 頁 — 不佔十頁額度)】　目標 5 秒 · 累計 10:12</a:t>
             </a:r>
           </a:p>
           <a:p/>
@@ -1067,13 +1067,13 @@
           <a:lstStyle/>
           <a:p>
             <a:r>
-              <a:t>【第 2 頁 · P1 · 用例:兩階段推論,與它下游那道人工防線】　目標 58 秒 · 累計 1:49</a:t>
+              <a:t>【第 2 頁 · P1 · 用例:兩階段推論,與它下游那道人工防線】　目標 71 秒 · 累計 2:03</a:t>
             </a:r>
           </a:p>
           <a:p/>
           <a:p>
             <a:r>
-              <a:t>★ 這道人工防線有兩種單價,差十六倍 —— 差別不在人,在證據在不在畫面裡。</a:t>
+              <a:t>★ 一個車隊一天要 29.8 到 42.9 人時,而我們五個人一天只有 40 —— 上緣已經超過了。</a:t>
             </a:r>
           </a:p>
           <a:p/>
@@ -1095,7 +1095,12 @@
           <a:p/>
           <a:p>
             <a:r>
-              <a:t># 一筆 20 秒 / 一筆 5.25 分 / 差約 16 倍</a:t>
+              <a:t># 3,000 筆 × 20 秒 = 16.7 人時 · 150–300 筆 × 5.25 分 = 13.1–26.2 人時</a:t>
+            </a:r>
+          </a:p>
+          <a:p>
+            <a:r>
+              <a:t># 合計 29.8–42.9 人時/天　vs　產能 40 人時/天(5 人 × 8 小時)</a:t>
             </a:r>
           </a:p>
           <a:p/>
@@ -1138,43 +1143,18 @@
           <a:p/>
           <a:p>
             <a:r>
-              <a:t>── 逐字備援 · 254 字(忘詞才看,不是拿來唸的)──</a:t>
-            </a:r>
-          </a:p>
-          <a:p>
-            <a:r>
-              <a:t>誠如各位在圖上看到的,前端 Edge AI 跟 Server AI 這兩段已經自動化,停在第三關。客戶回頭說「這筆 AI 判錯了」,那一段全部靠人 ——而它慢的原因不是人不夠快,是證據不在畫面裡。分析人員得打開事件檔,看 AI 當下是依什麼判的,才分得出這是哪一種爭議:是客戶不熟我們的判定規格、其實 AI 判對了;還是畫面本身造成的真誤報。營運端從處理紀錄看大約是二比八,但那是取整的概估 ——系統有欄位,沒有人匯總過,第六週交。在打開來看之前,這兩種長得一模一樣 —— 同樣是人工,單價卻差十六倍。所以我提的是一套地端 AI 事件判讀,把畫面外的脈絡讀進來,讓同樣這五個人,在客戶要的兩天內交得出答案。</a:t>
+              <a:t>── 逐字備援 · 314 字(忘詞才看,不是拿來唸的)──</a:t>
+            </a:r>
+          </a:p>
+          <a:p>
+            <a:r>
+              <a:t>誠如各位在圖上看到的,前端 Edge AI 跟 Server AI 這兩段已經自動化,停在第三關。客戶回頭說「這筆 AI 判錯了」,那一段全部靠人 ——而它慢的原因不是人不夠快,是證據不在畫面裡。分析人員得打開事件檔,看 AI 當下是依什麼判的,才分得出這是哪一種爭議:是客戶不熟我們的判定規格、其實 AI 判對了;還是畫面造成的真誤報。營運端從處理紀錄看大約二比八,但那是取整的概估,系統有欄位沒人匯總過,第六週交。在打開來看之前,這兩種長得一模一樣。各位看下面這個算式:三千筆全部看過一次,再加上一到三百筆深看第二次 ——加起來二十九點八到四十二點九人時,而我們五個人一天總共四十人時。上緣已經超過了,而這只是一個客戶。所以我提的是一套地端 AI 事件判讀,把畫面外的脈絡讀進來,讓同樣這五個人,在客戶要的兩天內交得出答案。</a:t>
             </a:r>
           </a:p>
           <a:p/>
           <a:p>
             <a:r>
               <a:t>── 備查(不唸,答辯用)──</a:t>
-            </a:r>
-          </a:p>
-          <a:p>
-            <a:r>
-              <a:t>【compare:例行批次複核 · 全量,每一筆都看】營運端的實務估計,尚未以計時量測驗證</a:t>
-            </a:r>
-          </a:p>
-          <a:p>
-            <a:r>
-              <a:t>【compare:例行批次複核 · 全量,每一筆都看】當責:複核營運主管 · 第 6 週交出正式基準 · G1 驗收後才據以重估</a:t>
-            </a:r>
-          </a:p>
-          <a:p>
-            <a:r>
-              <a:t>【compare:客戶爭議深入判讀 · 只發生在客戶回頭標記的 5–10%】由一次實際判讀反推:5 人 × 3.6 個工作日 × 8 小時 ÷ 1,647 筆</a:t>
-            </a:r>
-          </a:p>
-          <a:p>
-            <a:r>
-              <a:t>【compare:客戶爭議深入判讀 · 只發生在客戶回頭標記的 5–10%】樣本:某小型車隊 · 單月 · 4 台車 · 23 天;不含整理與回信</a:t>
-            </a:r>
-          </a:p>
-          <a:p>
-            <a:r>
-              <a:t>【rows】{'label': '今天的量', 'value': '29.8–42.9 人時/天', 'note': '單一大型車隊約 3,000 筆/天;提案人依現有單價推算', 'hot': False}</a:t>
             </a:r>
           </a:p>
           <a:p>
@@ -1249,7 +1229,7 @@
           <a:lstStyle/>
           <a:p>
             <a:r>
-              <a:t>【第 3 頁 · P2 · 為什麼是現在:工作量沒變多,客戶要的時效變了】　目標 72 秒 · 累計 3:02</a:t>
+              <a:t>【第 3 頁 · P2 · 為什麼是現在:工作量沒變多,客戶要的時效變了】　目標 72 秒 · 累計 3:15</a:t>
             </a:r>
           </a:p>
           <a:p/>
@@ -1402,7 +1382,7 @@
           <a:lstStyle/>
           <a:p>
             <a:r>
-              <a:t>【第 4 頁 · P3 · 發現過程:兩種病,兩個缺口】　目標 52 秒 · 累計 3:54</a:t>
+              <a:t>【第 4 頁 · P3 · 發現過程:兩種病,兩個缺口】　目標 52 秒 · 累計 4:07</a:t>
             </a:r>
           </a:p>
           <a:p/>
@@ -1559,7 +1539,7 @@
           <a:lstStyle/>
           <a:p>
             <a:r>
-              <a:t>【第 5 頁 · P4 · 我們看不見的那一半:有資料,沒有習慣】　目標 59 秒 · 累計 4:53</a:t>
+              <a:t>【第 5 頁 · P4 · 我們看不見的那一半:有資料,沒有習慣】　目標 59 秒 · 累計 5:06</a:t>
             </a:r>
           </a:p>
           <a:p/>
@@ -1632,11 +1612,6 @@
           <a:p>
             <a:r>
               <a:t>【compare:看得見的一半:誤報 - 量得到】為什麼量得到:誤報是「已經送出去、被人看到」的錯 - 人工複核那一流,每一筆都被人看過</a:t>
-            </a:r>
-          </a:p>
-          <a:p>
-            <a:r>
-              <a:t>【compare:看得見的一半:誤報 - 量得到】代價:誤報只花我們的人時,可以換算成錢</a:t>
             </a:r>
           </a:p>
           <a:p>
@@ -1746,7 +1721,7 @@
           <a:lstStyle/>
           <a:p>
             <a:r>
-              <a:t>【第 6 頁 · P5 · 五條路,含三條不用 AI】　目標 44 秒 · 累計 5:37</a:t>
+              <a:t>【第 6 頁 · P5 · 五條路,含三條不用 AI】　目標 44 秒 · 累計 5:51</a:t>
             </a:r>
           </a:p>
           <a:p/>
@@ -1888,7 +1863,7 @@
           <a:lstStyle/>
           <a:p>
             <a:r>
-              <a:t>【第 7 頁 · P6 · 風險:七類十條,緩解位移與殘餘風險】　目標 51 秒 · 累計 6:28</a:t>
+              <a:t>【第 7 頁 · P6 · 風險:七類十條,緩解位移與殘餘風險】　目標 51 秒 · 累計 6:41</a:t>
             </a:r>
           </a:p>
           <a:p/>
@@ -2041,7 +2016,7 @@
           <a:lstStyle/>
           <a:p>
             <a:r>
-              <a:t>【第 8 頁 · P7 · 倫理與可申訴性:對照澳洲 AI 倫理八原則】　目標 50 秒 · 累計 7:17</a:t>
+              <a:t>【第 8 頁 · P7 · 倫理與可申訴性:對照澳洲 AI 倫理八原則】　目標 50 秒 · 累計 7:31</a:t>
             </a:r>
           </a:p>
           <a:p/>
@@ -2194,7 +2169,7 @@
           <a:lstStyle/>
           <a:p>
             <a:r>
-              <a:t>【第 9 頁 · P8 · 怎麼算成功:三層 KPI,一條回圈】　目標 46 秒 · 累計 8:03</a:t>
+              <a:t>【第 9 頁 · P8 · 怎麼算成功:三層 KPI,一條回圈】　目標 46 秒 · 累計 8:17</a:t>
             </a:r>
           </a:p>
           <a:p/>
@@ -9254,7 +9229,7 @@
                 </a:solidFill>
                 <a:latin typeface="Microsoft JhengHei"/>
               </a:rPr>
-              <a:t>Edge AI → Server AI 兩段已自動化;停在第三關的人工複核,而這一段有兩種單價,差約 16 倍</a:t>
+              <a:t>Edge AI → Server AI 兩段已自動化;停在第三關的人工複核 —— 一個車隊一天就吃掉 5 個人的產能</a:t>
             </a:r>
           </a:p>
         </p:txBody>
@@ -9798,7 +9773,7 @@
         <p:spPr>
           <a:xfrm>
             <a:off x="658368" y="4005072"/>
-            <a:ext cx="5300319" cy="1207008"/>
+            <a:ext cx="4692243" cy="1527048"/>
           </a:xfrm>
           <a:prstGeom prst="roundRect">
             <a:avLst>
@@ -9846,7 +9821,7 @@
         <p:spPr>
           <a:xfrm>
             <a:off x="804672" y="4151376"/>
-            <a:ext cx="5007711" cy="384048"/>
+            <a:ext cx="4399635" cy="384048"/>
           </a:xfrm>
           <a:prstGeom prst="rect">
             <a:avLst/>
@@ -9871,7 +9846,7 @@
                 </a:solidFill>
                 <a:latin typeface="Microsoft JhengHei"/>
               </a:rPr>
-              <a:t>例行批次複核 · 全量,每一筆都看</a:t>
+              <a:t>① 例行批次複核 · 全量,每一筆都看</a:t>
             </a:r>
           </a:p>
         </p:txBody>
@@ -9885,7 +9860,7 @@
         <p:spPr>
           <a:xfrm>
             <a:off x="804672" y="4645152"/>
-            <a:ext cx="5007711" cy="384048"/>
+            <a:ext cx="4399635" cy="704087"/>
           </a:xfrm>
           <a:prstGeom prst="rect">
             <a:avLst/>
@@ -9910,7 +9885,23 @@
                 </a:solidFill>
                 <a:latin typeface="Microsoft JhengHei"/>
               </a:rPr>
-              <a:t>約 20 秒 / 筆</a:t>
+              <a:t>3,000 筆 × 20 秒 = 16.7 人時/天</a:t>
+            </a:r>
+          </a:p>
+          <a:p>
+            <a:pPr algn="ctr">
+              <a:lnSpc>
+                <a:spcPct val="150000"/>
+              </a:lnSpc>
+            </a:pPr>
+            <a:r>
+              <a:rPr sz="1300" b="0">
+                <a:solidFill>
+                  <a:srgbClr val="16212E"/>
+                </a:solidFill>
+                <a:latin typeface="Microsoft JhengHei"/>
+              </a:rPr>
+              <a:t>營運端的實務估計,尚未以計時量測驗證</a:t>
             </a:r>
           </a:p>
         </p:txBody>
@@ -9923,8 +9914,8 @@
         </p:nvSpPr>
         <p:spPr>
           <a:xfrm>
-            <a:off x="6233007" y="4005072"/>
-            <a:ext cx="5300319" cy="1207008"/>
+            <a:off x="5624931" y="4005072"/>
+            <a:ext cx="4692243" cy="1527048"/>
           </a:xfrm>
           <a:prstGeom prst="roundRect">
             <a:avLst>
@@ -9971,8 +9962,8 @@
         </p:nvSpPr>
         <p:spPr>
           <a:xfrm>
-            <a:off x="6379311" y="4151376"/>
-            <a:ext cx="5007711" cy="384048"/>
+            <a:off x="5771235" y="4151376"/>
+            <a:ext cx="4399635" cy="384048"/>
           </a:xfrm>
           <a:prstGeom prst="rect">
             <a:avLst/>
@@ -9997,7 +9988,7 @@
                 </a:solidFill>
                 <a:latin typeface="Microsoft JhengHei"/>
               </a:rPr>
-              <a:t>客戶爭議深入判讀 · 只發生在客戶回頭標記的 5–10%</a:t>
+              <a:t>② 客戶爭議 · 再打開深看第二次</a:t>
             </a:r>
           </a:p>
         </p:txBody>
@@ -10010,8 +10001,8 @@
         </p:nvSpPr>
         <p:spPr>
           <a:xfrm>
-            <a:off x="6379311" y="4645152"/>
-            <a:ext cx="5007711" cy="384048"/>
+            <a:off x="5771235" y="4645152"/>
+            <a:ext cx="4399635" cy="704087"/>
           </a:xfrm>
           <a:prstGeom prst="rect">
             <a:avLst/>
@@ -10036,7 +10027,23 @@
                 </a:solidFill>
                 <a:latin typeface="Microsoft JhengHei"/>
               </a:rPr>
-              <a:t>約 5.25 分鐘 / 筆</a:t>
+              <a:t>150–300 筆 × 5.25 分 = 13.1–26.2 人時/天</a:t>
+            </a:r>
+          </a:p>
+          <a:p>
+            <a:pPr algn="ctr">
+              <a:lnSpc>
+                <a:spcPct val="150000"/>
+              </a:lnSpc>
+            </a:pPr>
+            <a:r>
+              <a:rPr sz="1300" b="0">
+                <a:solidFill>
+                  <a:srgbClr val="16212E"/>
+                </a:solidFill>
+                <a:latin typeface="Microsoft JhengHei"/>
+              </a:rPr>
+              <a:t>由一次實際判讀反推;單一批次,非長期平均</a:t>
             </a:r>
           </a:p>
         </p:txBody>
@@ -10049,8 +10056,8 @@
         </p:nvSpPr>
         <p:spPr>
           <a:xfrm>
-            <a:off x="658368" y="5285231"/>
-            <a:ext cx="10874959" cy="347472"/>
+            <a:off x="658368" y="5605271"/>
+            <a:ext cx="9658807" cy="347472"/>
           </a:xfrm>
           <a:prstGeom prst="rect">
             <a:avLst/>
@@ -10075,7 +10082,7 @@
                 </a:solidFill>
                 <a:latin typeface="Microsoft JhengHei"/>
               </a:rPr>
-              <a:t>差約 16 倍(5.25 分 ÷ 20 秒 ≈ 15.7)—— 差別不在人,在證據在不在畫面裡</a:t>
+              <a:t>合計 29.8–42.9 人時/天　vs　產能 40 人時/天(5 人 × 8 小時)—— 上緣已超過,而這只是一個客戶</a:t>
             </a:r>
           </a:p>
         </p:txBody>
@@ -10088,8 +10095,8 @@
         </p:nvSpPr>
         <p:spPr>
           <a:xfrm>
-            <a:off x="658368" y="5806440"/>
-            <a:ext cx="45720" cy="228600"/>
+            <a:off x="658368" y="6126480"/>
+            <a:ext cx="45720" cy="320040"/>
           </a:xfrm>
           <a:prstGeom prst="rect">
             <a:avLst/>
@@ -10132,169 +10139,8 @@
         </p:nvSpPr>
         <p:spPr>
           <a:xfrm>
-            <a:off x="804672" y="5779008"/>
-            <a:ext cx="2116945" cy="320040"/>
-          </a:xfrm>
-          <a:prstGeom prst="rect">
-            <a:avLst/>
-          </a:prstGeom>
-          <a:noFill/>
-        </p:spPr>
-        <p:txBody>
-          <a:bodyPr wrap="square" lIns="0" rIns="0" tIns="0" bIns="0" anchor="ctr">
-            <a:spAutoFit/>
-          </a:bodyPr>
-          <a:lstStyle/>
-          <a:p>
-            <a:pPr algn="l">
-              <a:lnSpc>
-                <a:spcPct val="125000"/>
-              </a:lnSpc>
-            </a:pPr>
-            <a:r>
-              <a:rPr sz="1400" b="1">
-                <a:solidFill>
-                  <a:srgbClr val="16212E"/>
-                </a:solidFill>
-                <a:latin typeface="Microsoft JhengHei"/>
-              </a:rPr>
-              <a:t>今天的產能</a:t>
-            </a:r>
-          </a:p>
-        </p:txBody>
-      </p:sp>
-      <p:sp>
-        <p:nvSpPr>
-          <p:cNvPr id="25" name="TextBox 24"/>
-          <p:cNvSpPr txBox="1"/>
-          <p:nvPr/>
-        </p:nvSpPr>
-        <p:spPr>
-          <a:xfrm>
-            <a:off x="2976481" y="5779008"/>
-            <a:ext cx="2787914" cy="320040"/>
-          </a:xfrm>
-          <a:prstGeom prst="rect">
-            <a:avLst/>
-          </a:prstGeom>
-          <a:noFill/>
-        </p:spPr>
-        <p:txBody>
-          <a:bodyPr wrap="square" lIns="0" rIns="0" tIns="0" bIns="0" anchor="ctr">
-            <a:spAutoFit/>
-          </a:bodyPr>
-          <a:lstStyle/>
-          <a:p>
-            <a:pPr algn="l">
-              <a:lnSpc>
-                <a:spcPct val="125000"/>
-              </a:lnSpc>
-            </a:pPr>
-            <a:r>
-              <a:rPr sz="1500" b="1">
-                <a:solidFill>
-                  <a:srgbClr val="C00000"/>
-                </a:solidFill>
-                <a:latin typeface="Microsoft JhengHei"/>
-              </a:rPr>
-              <a:t>40 人時/天 = 5 人 × 8 小時</a:t>
-            </a:r>
-          </a:p>
-        </p:txBody>
-      </p:sp>
-      <p:sp>
-        <p:nvSpPr>
-          <p:cNvPr id="26" name="TextBox 25"/>
-          <p:cNvSpPr txBox="1"/>
-          <p:nvPr/>
-        </p:nvSpPr>
-        <p:spPr>
-          <a:xfrm>
-            <a:off x="5874123" y="5779008"/>
-            <a:ext cx="4333323" cy="320040"/>
-          </a:xfrm>
-          <a:prstGeom prst="rect">
-            <a:avLst/>
-          </a:prstGeom>
-          <a:noFill/>
-        </p:spPr>
-        <p:txBody>
-          <a:bodyPr wrap="square" lIns="0" rIns="0" tIns="0" bIns="0" anchor="ctr">
-            <a:spAutoFit/>
-          </a:bodyPr>
-          <a:lstStyle/>
-          <a:p>
-            <a:pPr algn="l">
-              <a:lnSpc>
-                <a:spcPct val="120000"/>
-              </a:lnSpc>
-            </a:pPr>
-            <a:r>
-              <a:rPr sz="1200" b="0">
-                <a:solidFill>
-                  <a:srgbClr val="6B7885"/>
-                </a:solidFill>
-                <a:latin typeface="Microsoft JhengHei"/>
-              </a:rPr>
-              <a:t>上緣 42.9 已超過現有產能</a:t>
-            </a:r>
-          </a:p>
-        </p:txBody>
-      </p:sp>
-      <p:sp>
-        <p:nvSpPr>
-          <p:cNvPr id="27" name="Rectangle 26"/>
-          <p:cNvSpPr/>
-          <p:nvPr/>
-        </p:nvSpPr>
-        <p:spPr>
-          <a:xfrm>
-            <a:off x="658368" y="6217920"/>
-            <a:ext cx="45720" cy="228600"/>
-          </a:xfrm>
-          <a:prstGeom prst="rect">
-            <a:avLst/>
-          </a:prstGeom>
-          <a:solidFill>
-            <a:srgbClr val="C00000"/>
-          </a:solidFill>
-          <a:ln>
-            <a:noFill/>
-          </a:ln>
-          <a:effectLst/>
-        </p:spPr>
-        <p:style>
-          <a:lnRef idx="1">
-            <a:schemeClr val="accent1"/>
-          </a:lnRef>
-          <a:fillRef idx="3">
-            <a:schemeClr val="accent1"/>
-          </a:fillRef>
-          <a:effectRef idx="2">
-            <a:schemeClr val="accent1"/>
-          </a:effectRef>
-          <a:fontRef idx="minor">
-            <a:schemeClr val="lt1"/>
-          </a:fontRef>
-        </p:style>
-        <p:txBody>
-          <a:bodyPr rtlCol="0" anchor="ctr"/>
-          <a:lstStyle/>
-          <a:p>
-            <a:pPr algn="ctr"/>
-          </a:p>
-        </p:txBody>
-      </p:sp>
-      <p:sp>
-        <p:nvSpPr>
-          <p:cNvPr id="28" name="TextBox 27"/>
-          <p:cNvSpPr txBox="1"/>
-          <p:nvPr/>
-        </p:nvSpPr>
-        <p:spPr>
-          <a:xfrm>
-            <a:off x="804672" y="6190488"/>
-            <a:ext cx="2116945" cy="320040"/>
+            <a:off x="804672" y="6099048"/>
+            <a:ext cx="2116945" cy="411480"/>
           </a:xfrm>
           <a:prstGeom prst="rect">
             <a:avLst/>
@@ -10326,14 +10172,14 @@
       </p:sp>
       <p:sp>
         <p:nvSpPr>
-          <p:cNvPr id="29" name="TextBox 28"/>
+          <p:cNvPr id="25" name="TextBox 24"/>
           <p:cNvSpPr txBox="1"/>
           <p:nvPr/>
         </p:nvSpPr>
         <p:spPr>
           <a:xfrm>
-            <a:off x="2976481" y="6190488"/>
-            <a:ext cx="2787914" cy="320040"/>
+            <a:off x="2976481" y="6099048"/>
+            <a:ext cx="2787914" cy="411480"/>
           </a:xfrm>
           <a:prstGeom prst="rect">
             <a:avLst/>
@@ -10365,14 +10211,14 @@
       </p:sp>
       <p:sp>
         <p:nvSpPr>
-          <p:cNvPr id="30" name="TextBox 29"/>
+          <p:cNvPr id="26" name="TextBox 25"/>
           <p:cNvSpPr txBox="1"/>
           <p:nvPr/>
         </p:nvSpPr>
         <p:spPr>
           <a:xfrm>
-            <a:off x="5874123" y="6190488"/>
-            <a:ext cx="4333323" cy="320040"/>
+            <a:off x="5874123" y="6099048"/>
+            <a:ext cx="4333323" cy="411480"/>
           </a:xfrm>
           <a:prstGeom prst="rect">
             <a:avLst/>
@@ -10397,7 +10243,7 @@
                 </a:solidFill>
                 <a:latin typeface="Microsoft JhengHei"/>
               </a:rPr>
-              <a:t>16 倍的成因就是證據不在畫面裡,而要建的能力正是把畫面外的東西讀進來</a:t>
+              <a:t>慢的成因是證據不在畫面裡,而要建的能力正是把畫面外的東西讀進來;全客戶 13,000+ 筆/天</a:t>
             </a:r>
           </a:p>
         </p:txBody>
@@ -11371,7 +11217,7 @@
         <p:spPr>
           <a:xfrm>
             <a:off x="658368" y="3849624"/>
-            <a:ext cx="10874959" cy="620652"/>
+            <a:ext cx="10874959" cy="613330"/>
           </a:xfrm>
           <a:prstGeom prst="roundRect">
             <a:avLst>
@@ -11417,7 +11263,7 @@
         <p:spPr>
           <a:xfrm>
             <a:off x="841247" y="3849624"/>
-            <a:ext cx="10509199" cy="620652"/>
+            <a:ext cx="10509199" cy="613330"/>
           </a:xfrm>
           <a:prstGeom prst="rect">
             <a:avLst/>
@@ -11455,7 +11301,7 @@
         </p:nvSpPr>
         <p:spPr>
           <a:xfrm>
-            <a:off x="658368" y="4625724"/>
+            <a:off x="658368" y="4618402"/>
             <a:ext cx="45720" cy="642937"/>
           </a:xfrm>
           <a:prstGeom prst="rect">
@@ -11499,7 +11345,7 @@
         </p:nvSpPr>
         <p:spPr>
           <a:xfrm>
-            <a:off x="804672" y="4598292"/>
+            <a:off x="804672" y="4590970"/>
             <a:ext cx="2116945" cy="734377"/>
           </a:xfrm>
           <a:prstGeom prst="rect">
@@ -11538,7 +11384,7 @@
         </p:nvSpPr>
         <p:spPr>
           <a:xfrm>
-            <a:off x="2976481" y="4598292"/>
+            <a:off x="2976481" y="4590970"/>
             <a:ext cx="2787914" cy="734377"/>
           </a:xfrm>
           <a:prstGeom prst="rect">
@@ -11577,7 +11423,7 @@
         </p:nvSpPr>
         <p:spPr>
           <a:xfrm>
-            <a:off x="5874123" y="4598292"/>
+            <a:off x="5874123" y="4590970"/>
             <a:ext cx="4333323" cy="734377"/>
           </a:xfrm>
           <a:prstGeom prst="rect">
@@ -11616,7 +11462,7 @@
         </p:nvSpPr>
         <p:spPr>
           <a:xfrm>
-            <a:off x="658368" y="5451541"/>
+            <a:off x="658368" y="5444219"/>
             <a:ext cx="45720" cy="771525"/>
           </a:xfrm>
           <a:prstGeom prst="rect">
@@ -11660,7 +11506,7 @@
         </p:nvSpPr>
         <p:spPr>
           <a:xfrm>
-            <a:off x="804672" y="5424109"/>
+            <a:off x="804672" y="5416787"/>
             <a:ext cx="2116945" cy="862965"/>
           </a:xfrm>
           <a:prstGeom prst="rect">
@@ -11699,7 +11545,7 @@
         </p:nvSpPr>
         <p:spPr>
           <a:xfrm>
-            <a:off x="2976481" y="5424109"/>
+            <a:off x="2976481" y="5416787"/>
             <a:ext cx="2787914" cy="862965"/>
           </a:xfrm>
           <a:prstGeom prst="rect">
@@ -11738,7 +11584,7 @@
         </p:nvSpPr>
         <p:spPr>
           <a:xfrm>
-            <a:off x="5874123" y="5424109"/>
+            <a:off x="5874123" y="5416787"/>
             <a:ext cx="4333323" cy="862965"/>
           </a:xfrm>
           <a:prstGeom prst="rect">
@@ -11957,7 +11803,7 @@
         <p:spPr>
           <a:xfrm>
             <a:off x="658368" y="1755648"/>
-            <a:ext cx="10874959" cy="621885"/>
+            <a:ext cx="10874959" cy="593376"/>
           </a:xfrm>
           <a:prstGeom prst="roundRect">
             <a:avLst>
@@ -12003,7 +11849,7 @@
         <p:spPr>
           <a:xfrm>
             <a:off x="841247" y="1755648"/>
-            <a:ext cx="10509199" cy="621885"/>
+            <a:ext cx="10509199" cy="593376"/>
           </a:xfrm>
           <a:prstGeom prst="rect">
             <a:avLst/>
@@ -12042,7 +11888,7 @@
           <p:nvPr/>
         </p:nvGraphicFramePr>
         <p:xfrm>
-          <a:off x="658368" y="2505549"/>
+          <a:off x="658368" y="2477040"/>
           <a:ext cx="10874957" cy="2084832"/>
         </p:xfrm>
         <a:graphic>
@@ -12565,7 +12411,7 @@
         </p:nvSpPr>
         <p:spPr>
           <a:xfrm>
-            <a:off x="658368" y="4745829"/>
+            <a:off x="658368" y="4717320"/>
             <a:ext cx="45720" cy="642937"/>
           </a:xfrm>
           <a:prstGeom prst="rect">
@@ -12609,7 +12455,7 @@
         </p:nvSpPr>
         <p:spPr>
           <a:xfrm>
-            <a:off x="804672" y="4718397"/>
+            <a:off x="804672" y="4689888"/>
             <a:ext cx="2116945" cy="734377"/>
           </a:xfrm>
           <a:prstGeom prst="rect">
@@ -12648,7 +12494,7 @@
         </p:nvSpPr>
         <p:spPr>
           <a:xfrm>
-            <a:off x="2976481" y="4718397"/>
+            <a:off x="2976481" y="4689888"/>
             <a:ext cx="2787914" cy="734377"/>
           </a:xfrm>
           <a:prstGeom prst="rect">
@@ -12687,7 +12533,7 @@
         </p:nvSpPr>
         <p:spPr>
           <a:xfrm>
-            <a:off x="5874123" y="4718397"/>
+            <a:off x="5874123" y="4689888"/>
             <a:ext cx="4333323" cy="734377"/>
           </a:xfrm>
           <a:prstGeom prst="rect">
@@ -12726,7 +12572,7 @@
         </p:nvSpPr>
         <p:spPr>
           <a:xfrm>
-            <a:off x="658368" y="5571646"/>
+            <a:off x="658368" y="5543138"/>
             <a:ext cx="45720" cy="321468"/>
           </a:xfrm>
           <a:prstGeom prst="rect">
@@ -12770,7 +12616,7 @@
         </p:nvSpPr>
         <p:spPr>
           <a:xfrm>
-            <a:off x="804672" y="5544214"/>
+            <a:off x="804672" y="5515706"/>
             <a:ext cx="2116945" cy="412908"/>
           </a:xfrm>
           <a:prstGeom prst="rect">
@@ -12809,7 +12655,7 @@
         </p:nvSpPr>
         <p:spPr>
           <a:xfrm>
-            <a:off x="2976481" y="5544214"/>
+            <a:off x="2976481" y="5515706"/>
             <a:ext cx="2787914" cy="412908"/>
           </a:xfrm>
           <a:prstGeom prst="rect">
@@ -12848,7 +12694,7 @@
         </p:nvSpPr>
         <p:spPr>
           <a:xfrm>
-            <a:off x="5874123" y="5544214"/>
+            <a:off x="5874123" y="5515706"/>
             <a:ext cx="4333323" cy="412908"/>
           </a:xfrm>
           <a:prstGeom prst="rect">
@@ -13067,7 +12913,7 @@
         <p:spPr>
           <a:xfrm>
             <a:off x="658368" y="1755648"/>
-            <a:ext cx="5300319" cy="1285220"/>
+            <a:ext cx="5300319" cy="1527048"/>
           </a:xfrm>
           <a:prstGeom prst="roundRect">
             <a:avLst>
@@ -13154,7 +13000,7 @@
         <p:spPr>
           <a:xfrm>
             <a:off x="804672" y="2395728"/>
-            <a:ext cx="5007711" cy="462260"/>
+            <a:ext cx="5007711" cy="704087"/>
           </a:xfrm>
           <a:prstGeom prst="rect">
             <a:avLst/>
@@ -13182,6 +13028,22 @@
               <a:t>母體:某小型車隊單月樣本(4 台車 · 23 天 · 1,647 筆人工複核)</a:t>
             </a:r>
           </a:p>
+          <a:p>
+            <a:pPr algn="ctr">
+              <a:lnSpc>
+                <a:spcPct val="150000"/>
+              </a:lnSpc>
+            </a:pPr>
+            <a:r>
+              <a:rPr sz="1300" b="0">
+                <a:solidFill>
+                  <a:srgbClr val="16212E"/>
+                </a:solidFill>
+                <a:latin typeface="Microsoft JhengHei"/>
+              </a:rPr>
+              <a:t>代價:誤報只花我們的人時,可以換算成錢</a:t>
+            </a:r>
+          </a:p>
         </p:txBody>
       </p:sp>
       <p:sp>
@@ -13193,7 +13055,7 @@
         <p:spPr>
           <a:xfrm>
             <a:off x="6233007" y="1755648"/>
-            <a:ext cx="5300319" cy="1285220"/>
+            <a:ext cx="5300319" cy="1527048"/>
           </a:xfrm>
           <a:prstGeom prst="roundRect">
             <a:avLst>
@@ -13280,7 +13142,7 @@
         <p:spPr>
           <a:xfrm>
             <a:off x="6379311" y="2395728"/>
-            <a:ext cx="5007711" cy="462260"/>
+            <a:ext cx="5007711" cy="704087"/>
           </a:xfrm>
           <a:prstGeom prst="rect">
             <a:avLst/>
@@ -13318,7 +13180,7 @@
         </p:nvSpPr>
         <p:spPr>
           <a:xfrm>
-            <a:off x="658368" y="3114020"/>
+            <a:off x="658368" y="3355848"/>
             <a:ext cx="10874959" cy="347472"/>
           </a:xfrm>
           <a:prstGeom prst="rect">
@@ -13357,7 +13219,7 @@
         </p:nvSpPr>
         <p:spPr>
           <a:xfrm>
-            <a:off x="658368" y="3635228"/>
+            <a:off x="658368" y="3877056"/>
             <a:ext cx="45720" cy="321468"/>
           </a:xfrm>
           <a:prstGeom prst="rect">
@@ -13401,7 +13263,7 @@
         </p:nvSpPr>
         <p:spPr>
           <a:xfrm>
-            <a:off x="804672" y="3607796"/>
+            <a:off x="804672" y="3849624"/>
             <a:ext cx="2408822" cy="412908"/>
           </a:xfrm>
           <a:prstGeom prst="rect">
@@ -13440,7 +13302,7 @@
         </p:nvSpPr>
         <p:spPr>
           <a:xfrm>
-            <a:off x="3268358" y="3607796"/>
+            <a:off x="3268358" y="3849624"/>
             <a:ext cx="1919478" cy="412908"/>
           </a:xfrm>
           <a:prstGeom prst="rect">
@@ -13479,7 +13341,7 @@
         </p:nvSpPr>
         <p:spPr>
           <a:xfrm>
-            <a:off x="5297564" y="3607796"/>
+            <a:off x="5297564" y="3849624"/>
             <a:ext cx="6126034" cy="412908"/>
           </a:xfrm>
           <a:prstGeom prst="rect">
@@ -13518,8 +13380,8 @@
         </p:nvSpPr>
         <p:spPr>
           <a:xfrm>
-            <a:off x="658368" y="4139577"/>
-            <a:ext cx="45720" cy="600075"/>
+            <a:off x="658368" y="4381404"/>
+            <a:ext cx="45720" cy="525780"/>
           </a:xfrm>
           <a:prstGeom prst="rect">
             <a:avLst/>
@@ -13562,8 +13424,8 @@
         </p:nvSpPr>
         <p:spPr>
           <a:xfrm>
-            <a:off x="804672" y="4112145"/>
-            <a:ext cx="2408822" cy="691515"/>
+            <a:off x="804672" y="4353972"/>
+            <a:ext cx="2408822" cy="617219"/>
           </a:xfrm>
           <a:prstGeom prst="rect">
             <a:avLst/>
@@ -13601,8 +13463,8 @@
         </p:nvSpPr>
         <p:spPr>
           <a:xfrm>
-            <a:off x="3268358" y="4112145"/>
-            <a:ext cx="1919478" cy="691515"/>
+            <a:off x="3268358" y="4353972"/>
+            <a:ext cx="1919478" cy="617219"/>
           </a:xfrm>
           <a:prstGeom prst="rect">
             <a:avLst/>
@@ -13640,8 +13502,8 @@
         </p:nvSpPr>
         <p:spPr>
           <a:xfrm>
-            <a:off x="5297564" y="4112145"/>
-            <a:ext cx="6126034" cy="691515"/>
+            <a:off x="5297564" y="4353972"/>
+            <a:ext cx="6126034" cy="617219"/>
           </a:xfrm>
           <a:prstGeom prst="rect">
             <a:avLst/>

--- a/Artificial Intelligence for Enterprises/Assessment3/Huang_26254793_421104_Assessment 3.pptx
+++ b/Artificial Intelligence for Enterprises/Assessment3/Huang_26254793_421104_Assessment 3.pptx
@@ -644,7 +644,7 @@
           <a:lstStyle/>
           <a:p>
             <a:r>
-              <a:t>【第 10 頁 · P9 · 六個月 · 六個工作包 · 三道決策門】　目標 47 秒 · 累計 9:04</a:t>
+              <a:t>【第 10 頁 · P9 · 六個月 · 六個工作包 · 三道決策門】　目標 47 秒 · 累計 8:46</a:t>
             </a:r>
           </a:p>
           <a:p/>
@@ -796,7 +796,7 @@
           <a:lstStyle/>
           <a:p>
             <a:r>
-              <a:t>【第 11 頁 · P10 · 資源、當責與請求】　目標 64 秒 · 累計 10:08</a:t>
+              <a:t>【第 11 頁 · P10 · 資源、當責與請求】　目標 64 秒 · 累計 9:49</a:t>
             </a:r>
           </a:p>
           <a:p/>
@@ -968,7 +968,7 @@
           <a:lstStyle/>
           <a:p>
             <a:r>
-              <a:t>【第 12 頁 · 參考文獻(第 11 頁 — 不佔十頁額度)】　目標 5 秒 · 累計 10:12</a:t>
+              <a:t>【第 12 頁 · 參考文獻(第 11 頁 — 不佔十頁額度)】　目標 5 秒 · 累計 9:54</a:t>
             </a:r>
           </a:p>
           <a:p/>
@@ -1229,40 +1229,40 @@
           <a:lstStyle/>
           <a:p>
             <a:r>
-              <a:t>【第 3 頁 · P2 · 為什麼是現在:工作量沒變多,客戶要的時效變了】　目標 72 秒 · 累計 3:15</a:t>
+              <a:t>【第 3 頁 · P2 · 為什麼是現在:工作量沒變多,客戶要的時效變了】　目標 54 秒 · 累計 2:57</a:t>
             </a:r>
           </a:p>
           <a:p/>
           <a:p>
             <a:r>
-              <a:t>★ 工作量沒變多,是客戶要的時效變了 —— 而慢的那兩段是同一個原因:模型看不到畫面外的東西。</a:t>
+              <a:t>★ 最花時間的那兩段佔 43%–78% —— 把它自動化,爭議回覆從 2–5 天縮到目標 2 天內。</a:t>
             </a:r>
           </a:p>
           <a:p/>
           <a:p>
             <a:r>
-              <a:t>· 利用率:平均還好,尖峰這五個人已經不夠</a:t>
-            </a:r>
-          </a:p>
-          <a:p>
-            <a:r>
-              <a:t>· 一件爭議的五段拆解,撈數據 + 判讀才是模型幫得上的</a:t>
-            </a:r>
-          </a:p>
-          <a:p>
-            <a:r>
-              <a:t>· 這是營運端估計不是量測,W6 交正式拆解,不成立就轉排班</a:t>
+              <a:t>· 導入什麼:自動證據包 —— 機器讀 影片 + 客戶問題 + 規則,產出可讀描述並標出引用的證據在第幾秒</a:t>
+            </a:r>
+          </a:p>
+          <a:p>
+            <a:r>
+              <a:t>· 怎麼導入:WP-D,W8–16,對 100% 案件成立;人仍逐筆判,機器不做結案</a:t>
+            </a:r>
+          </a:p>
+          <a:p>
+            <a:r>
+              <a:t>· 天花板:排隊 + 覆核 + 回信佔 22%–57%,AI 碰不到 —— 排隊那段是排班解的</a:t>
             </a:r>
           </a:p>
           <a:p/>
           <a:p>
             <a:r>
-              <a:t># 74%–107% · 折算 3.7–5.4 人 · 現有 5 人</a:t>
-            </a:r>
-          </a:p>
-          <a:p>
-            <a:r>
-              <a:t># 2.5–5.5 天 · AI 可處理段佔 43%–78%</a:t>
+              <a:t># 合計 2.5–5.5 天 · AI 可處理段 1.5–3.5 天 = 43%–78%</a:t>
+            </a:r>
+          </a:p>
+          <a:p>
+            <a:r>
+              <a:t># 爭議回覆 2–5 天 → 目標 2 天內〔提案目標,未簽協議〕W16 後量測</a:t>
             </a:r>
           </a:p>
           <a:p/>
@@ -1271,43 +1271,37 @@
               <a:t>⚠️ 分母是 2.5–5.5 天,🚫 不是 2–5 天</a:t>
             </a:r>
           </a:p>
+          <a:p>
+            <a:r>
+              <a:t>⚠️ 改善**一半**來自證據包自動化、**一半**來自誤報量下降 —— 不可全掛在證據包上</a:t>
+            </a:r>
+          </a:p>
+          <a:p>
+            <a:r>
+              <a:t>⚠️ 🚫 不可說機器替人判 —— WP-D 交的是證據包,判的還是人</a:t>
+            </a:r>
+          </a:p>
           <a:p/>
           <a:p>
             <a:r>
-              <a:t>✂️ 若排練超過 9:40,這一頁砍最後四句(20 秒限定的重複 + 五萬台 / 三個分母 / 成長階梯)= 省 26 秒。第 2 頁已經講過 20 秒的限定,這裡是重複。</a:t>
+              <a:t>→ 換下一頁</a:t>
             </a:r>
           </a:p>
           <a:p/>
           <a:p>
             <a:r>
-              <a:t>→ 換下一頁</a:t>
+              <a:t>── 逐字備援 · 236 字(忘詞才看,不是拿來唸的)──</a:t>
+            </a:r>
+          </a:p>
+          <a:p>
+            <a:r>
+              <a:t>各位看這條時間軸。一件爭議走完兩天半到五天半,而最花時間的是中間這兩段 —— 撈數據跟判讀,佔全程四成三到七成八。慢的原因是同一個:模型看不到畫面外的東西。速限多少、那面牌是什麼,人得自己離開畫面去查。所以我要導入自動證據包:機器把影片、客戶問題、規則一起讀進來,產出可讀的描述,並標出它引用到的證據在第幾秒。這一包第八到十六週做,對所有案件都成立;人仍然逐筆判,機器不做結案。導入之後,爭議回覆從兩到五天縮短到目標兩天內 ——一半來自證據包自動化,一半來自誤報量下降。但天花板在最下面那一條:排隊、覆核、回信佔兩成二到五成七,AI 碰不到。</a:t>
             </a:r>
           </a:p>
           <a:p/>
           <a:p>
             <a:r>
-              <a:t>── 逐字備援 · 317 字(忘詞才看,不是拿來唸的)──</a:t>
-            </a:r>
-          </a:p>
-          <a:p>
-            <a:r>
-              <a:t>利用率七成四到一百零七:平均還好,尖峰這五個人已經不夠——折算三點七到五點四人,我們只有五個。一件爭議目前要兩到五天,現況約一半超過兩天;客戶要兩天、單純案件當天,那是客戶期望,不是簽了的服務水準。這兩到五天花在哪裡,我拆開了:排隊零到一天、撈數據半天、判讀一到三天、內部覆核半天、回信半天。撈數據加判讀,就是模型幫得上的那兩段,佔四成到八成。這兩段之所以慢,是同一個原因——模型看不到畫面外的東西。這是營運端估計,不是量測;前六週交出正式拆解,不成立就轉排班。二十秒是營運上的估計,還沒有正式量過——第六週交出正式基準,G1 驗收。上線約五萬台,售出更多;落差就是排不了程的工作量,開通權在客戶手上。我不預測撞牆的時點;第六週對齊三個分母,成長不納入回報估算。成長是階梯:一個大型車隊上線,事件量一次跳兩成三,手上正在談一個。</a:t>
-            </a:r>
-          </a:p>
-          <a:p/>
-          <a:p>
-            <a:r>
               <a:t>── 備查(不唸,答辯用)──</a:t>
-            </a:r>
-          </a:p>
-          <a:p>
-            <a:r>
-              <a:t>【rows】{'label': '尖峰徵調 7 位研發工程師', 'value': '不是管理失當,是算術的必然', 'note': '離開本職支援、非常態編制 —— 開發產能被拿去補分析產能', 'hot': False}</a:t>
-            </a:r>
-          </a:p>
-          <a:p>
-            <a:r>
-              <a:t>【rows】{'label': '量已經不是瓶頸', 'value': '全客戶 13,000 筆/天,地端約 2.2–3.5 小時跑完,設備佔用率約 9%–15%', 'note': '⚠ 估算,非實測;此數只含每日全量批次初篩,不含客戶爭議深挖那條路徑(其吞吐量由 W1–6 量測)。瓶頸是判準與驗證,不是量', 'hot': False}</a:t>
             </a:r>
           </a:p>
           <a:p>
@@ -1382,7 +1376,7 @@
           <a:lstStyle/>
           <a:p>
             <a:r>
-              <a:t>【第 4 頁 · P3 · 發現過程:兩種病,兩個缺口】　目標 52 秒 · 累計 4:07</a:t>
+              <a:t>【第 4 頁 · P3 · 發現過程:兩種病,兩個缺口】　目標 52 秒 · 累計 3:49</a:t>
             </a:r>
           </a:p>
           <a:p/>
@@ -1539,7 +1533,7 @@
           <a:lstStyle/>
           <a:p>
             <a:r>
-              <a:t>【第 5 頁 · P4 · 我們看不見的那一半:有資料,沒有習慣】　目標 59 秒 · 累計 5:06</a:t>
+              <a:t>【第 5 頁 · P4 · 我們看不見的那一半:有資料,沒有習慣】　目標 59 秒 · 累計 4:48</a:t>
             </a:r>
           </a:p>
           <a:p/>
@@ -1721,7 +1715,7 @@
           <a:lstStyle/>
           <a:p>
             <a:r>
-              <a:t>【第 6 頁 · P5 · 五條路,含三條不用 AI】　目標 44 秒 · 累計 5:51</a:t>
+              <a:t>【第 6 頁 · P5 · 五條路,含三條不用 AI】　目標 44 秒 · 累計 5:32</a:t>
             </a:r>
           </a:p>
           <a:p/>
@@ -1863,7 +1857,7 @@
           <a:lstStyle/>
           <a:p>
             <a:r>
-              <a:t>【第 7 頁 · P6 · 風險:七類十條,緩解位移與殘餘風險】　目標 51 秒 · 累計 6:41</a:t>
+              <a:t>【第 7 頁 · P6 · 風險:七類十條,緩解位移與殘餘風險】　目標 51 秒 · 累計 6:23</a:t>
             </a:r>
           </a:p>
           <a:p/>
@@ -2016,7 +2010,7 @@
           <a:lstStyle/>
           <a:p>
             <a:r>
-              <a:t>【第 8 頁 · P7 · 倫理與可申訴性:對照澳洲 AI 倫理八原則】　目標 50 秒 · 累計 7:31</a:t>
+              <a:t>【第 8 頁 · P7 · 倫理與可申訴性:對照澳洲 AI 倫理八原則】　目標 50 秒 · 累計 7:13</a:t>
             </a:r>
           </a:p>
           <a:p/>
@@ -2169,7 +2163,7 @@
           <a:lstStyle/>
           <a:p>
             <a:r>
-              <a:t>【第 9 頁 · P8 · 怎麼算成功:三層 KPI,一條回圈】　目標 46 秒 · 累計 8:17</a:t>
+              <a:t>【第 9 頁 · P8 · 怎麼算成功:三層 KPI,一條回圈】　目標 46 秒 · 累計 7:58</a:t>
             </a:r>
           </a:p>
           <a:p/>
@@ -10339,7 +10333,7 @@
                 </a:solidFill>
                 <a:latin typeface="Microsoft JhengHei"/>
               </a:rPr>
-              <a:t>那 2.5–5.5 天裡,四成到八成是模型幫得上的</a:t>
+              <a:t>最花時間的兩段佔 43%–78%,把它自動化 → 目標 2 天內</a:t>
             </a:r>
           </a:p>
         </p:txBody>
@@ -10378,7 +10372,7 @@
                 </a:solidFill>
                 <a:latin typeface="Microsoft JhengHei"/>
               </a:rPr>
-              <a:t>五段天數已拆開;那兩段慢的原因相同 —— 模型看不到畫面外的東西</a:t>
+              <a:t>導入自動證據包(WP-D · W8–16)· 人仍逐筆判;而排隊那段是排班解的,不是 AI</a:t>
             </a:r>
           </a:p>
         </p:txBody>
@@ -11210,19 +11204,17 @@
       </p:sp>
       <p:sp>
         <p:nvSpPr>
-          <p:cNvPr id="25" name="Rounded Rectangle 24"/>
+          <p:cNvPr id="25" name="Rectangle 24"/>
           <p:cNvSpPr/>
           <p:nvPr/>
         </p:nvSpPr>
         <p:spPr>
           <a:xfrm>
-            <a:off x="658368" y="3849624"/>
-            <a:ext cx="10874959" cy="613330"/>
-          </a:xfrm>
-          <a:prstGeom prst="roundRect">
-            <a:avLst>
-              <a:gd name="adj" fmla="val 6000"/>
-            </a:avLst>
+            <a:off x="658368" y="4010440"/>
+            <a:ext cx="45720" cy="321468"/>
+          </a:xfrm>
+          <a:prstGeom prst="rect">
+            <a:avLst/>
           </a:prstGeom>
           <a:solidFill>
             <a:srgbClr val="1F4E79"/>
@@ -11262,8 +11254,8 @@
         </p:nvSpPr>
         <p:spPr>
           <a:xfrm>
-            <a:off x="841247" y="3849624"/>
-            <a:ext cx="10509199" cy="613330"/>
+            <a:off x="804672" y="3983008"/>
+            <a:ext cx="2408822" cy="412908"/>
           </a:xfrm>
           <a:prstGeom prst="rect">
             <a:avLst/>
@@ -11276,39 +11268,117 @@
           </a:bodyPr>
           <a:lstStyle/>
           <a:p>
-            <a:pPr algn="ctr">
+            <a:pPr algn="l">
               <a:lnSpc>
                 <a:spcPct val="125000"/>
               </a:lnSpc>
             </a:pPr>
             <a:r>
-              <a:rPr sz="1700" b="1">
+              <a:rPr sz="1400" b="1">
                 <a:solidFill>
-                  <a:srgbClr val="FFFFFF"/>
+                  <a:srgbClr val="16212E"/>
                 </a:solidFill>
                 <a:latin typeface="Microsoft JhengHei"/>
               </a:rPr>
-              <a:t>兩段慢,是同一個原因:模型看不到畫面外 —— 撈數據要人自己查速限 · 判讀只拿到一張圖</a:t>
-            </a:r>
-          </a:p>
-        </p:txBody>
-      </p:sp>
-      <p:sp>
-        <p:nvSpPr>
-          <p:cNvPr id="27" name="Rectangle 26"/>
-          <p:cNvSpPr/>
-          <p:nvPr/>
-        </p:nvSpPr>
-        <p:spPr>
-          <a:xfrm>
-            <a:off x="658368" y="4618402"/>
-            <a:ext cx="45720" cy="642937"/>
+              <a:t>導入什麼</a:t>
+            </a:r>
+          </a:p>
+        </p:txBody>
+      </p:sp>
+      <p:sp>
+        <p:nvSpPr>
+          <p:cNvPr id="27" name="TextBox 26"/>
+          <p:cNvSpPr txBox="1"/>
+          <p:nvPr/>
+        </p:nvSpPr>
+        <p:spPr>
+          <a:xfrm>
+            <a:off x="3268358" y="3983008"/>
+            <a:ext cx="2976753" cy="412908"/>
           </a:xfrm>
           <a:prstGeom prst="rect">
             <a:avLst/>
           </a:prstGeom>
+          <a:noFill/>
+        </p:spPr>
+        <p:txBody>
+          <a:bodyPr wrap="square" lIns="0" rIns="0" tIns="0" bIns="0" anchor="ctr">
+            <a:spAutoFit/>
+          </a:bodyPr>
+          <a:lstStyle/>
+          <a:p>
+            <a:pPr algn="l">
+              <a:lnSpc>
+                <a:spcPct val="125000"/>
+              </a:lnSpc>
+            </a:pPr>
+            <a:r>
+              <a:rPr sz="1500" b="1">
+                <a:solidFill>
+                  <a:srgbClr val="1F4E79"/>
+                </a:solidFill>
+                <a:latin typeface="Microsoft JhengHei"/>
+              </a:rPr>
+              <a:t>自動證據包</a:t>
+            </a:r>
+          </a:p>
+        </p:txBody>
+      </p:sp>
+      <p:sp>
+        <p:nvSpPr>
+          <p:cNvPr id="28" name="TextBox 27"/>
+          <p:cNvSpPr txBox="1"/>
+          <p:nvPr/>
+        </p:nvSpPr>
+        <p:spPr>
+          <a:xfrm>
+            <a:off x="6354839" y="3983008"/>
+            <a:ext cx="5068759" cy="412908"/>
+          </a:xfrm>
+          <a:prstGeom prst="rect">
+            <a:avLst/>
+          </a:prstGeom>
+          <a:noFill/>
+        </p:spPr>
+        <p:txBody>
+          <a:bodyPr wrap="square" lIns="0" rIns="0" tIns="0" bIns="0" anchor="ctr">
+            <a:spAutoFit/>
+          </a:bodyPr>
+          <a:lstStyle/>
+          <a:p>
+            <a:pPr algn="l">
+              <a:lnSpc>
+                <a:spcPct val="120000"/>
+              </a:lnSpc>
+            </a:pPr>
+            <a:r>
+              <a:rPr sz="1200" b="0">
+                <a:solidFill>
+                  <a:srgbClr val="6B7885"/>
+                </a:solidFill>
+                <a:latin typeface="Microsoft JhengHei"/>
+              </a:rPr>
+              <a:t>讀 影片 + 客戶問題 + 規則,產出可讀描述並標出引用的證據</a:t>
+            </a:r>
+          </a:p>
+        </p:txBody>
+      </p:sp>
+      <p:sp>
+        <p:nvSpPr>
+          <p:cNvPr id="29" name="Rectangle 28"/>
+          <p:cNvSpPr/>
+          <p:nvPr/>
+        </p:nvSpPr>
+        <p:spPr>
+          <a:xfrm>
+            <a:off x="658368" y="4514788"/>
+            <a:ext cx="45720" cy="321468"/>
+          </a:xfrm>
+          <a:prstGeom prst="rect">
+            <a:avLst/>
+          </a:prstGeom>
           <a:solidFill>
-            <a:srgbClr val="C00000"/>
+            <a:srgbClr val="1F4E79"/>
           </a:solidFill>
           <a:ln>
             <a:noFill/>
@@ -11339,14 +11409,14 @@
       </p:sp>
       <p:sp>
         <p:nvSpPr>
-          <p:cNvPr id="28" name="TextBox 27"/>
+          <p:cNvPr id="30" name="TextBox 29"/>
           <p:cNvSpPr txBox="1"/>
           <p:nvPr/>
         </p:nvSpPr>
         <p:spPr>
           <a:xfrm>
-            <a:off x="804672" y="4590970"/>
-            <a:ext cx="2116945" cy="734377"/>
+            <a:off x="804672" y="4487356"/>
+            <a:ext cx="2408822" cy="412908"/>
           </a:xfrm>
           <a:prstGeom prst="rect">
             <a:avLst/>
@@ -11371,21 +11441,21 @@
                 </a:solidFill>
                 <a:latin typeface="Microsoft JhengHei"/>
               </a:rPr>
-              <a:t>今天的利用率</a:t>
-            </a:r>
-          </a:p>
-        </p:txBody>
-      </p:sp>
-      <p:sp>
-        <p:nvSpPr>
-          <p:cNvPr id="29" name="TextBox 28"/>
+              <a:t>怎麼導入</a:t>
+            </a:r>
+          </a:p>
+        </p:txBody>
+      </p:sp>
+      <p:sp>
+        <p:nvSpPr>
+          <p:cNvPr id="31" name="TextBox 30"/>
           <p:cNvSpPr txBox="1"/>
           <p:nvPr/>
         </p:nvSpPr>
         <p:spPr>
           <a:xfrm>
-            <a:off x="2976481" y="4590970"/>
-            <a:ext cx="2787914" cy="734377"/>
+            <a:off x="3268358" y="4487356"/>
+            <a:ext cx="2976753" cy="412908"/>
           </a:xfrm>
           <a:prstGeom prst="rect">
             <a:avLst/>
@@ -11406,25 +11476,25 @@
             <a:r>
               <a:rPr sz="1500" b="1">
                 <a:solidFill>
-                  <a:srgbClr val="C00000"/>
+                  <a:srgbClr val="1F4E79"/>
                 </a:solidFill>
                 <a:latin typeface="Microsoft JhengHei"/>
               </a:rPr>
-              <a:t>74%–107%;折算 3.7–5.4 人,現有 5 人</a:t>
-            </a:r>
-          </a:p>
-        </p:txBody>
-      </p:sp>
-      <p:sp>
-        <p:nvSpPr>
-          <p:cNvPr id="30" name="TextBox 29"/>
+              <a:t>WP-D 爭議回覆自動化 · W8–16</a:t>
+            </a:r>
+          </a:p>
+        </p:txBody>
+      </p:sp>
+      <p:sp>
+        <p:nvSpPr>
+          <p:cNvPr id="32" name="TextBox 31"/>
           <p:cNvSpPr txBox="1"/>
           <p:nvPr/>
         </p:nvSpPr>
         <p:spPr>
           <a:xfrm>
-            <a:off x="5874123" y="4590970"/>
-            <a:ext cx="4333323" cy="734377"/>
+            <a:off x="6354839" y="4487356"/>
+            <a:ext cx="5068759" cy="412908"/>
           </a:xfrm>
           <a:prstGeom prst="rect">
             <a:avLst/>
@@ -11449,21 +11519,21 @@
                 </a:solidFill>
                 <a:latin typeface="Microsoft JhengHei"/>
               </a:rPr>
-              <a:t>平均編制口徑,不是任何一天的同時在線人力;下緣 74% 仍在產能內 —— 本頁主張的是尖峰做不到,不是天天做不完</a:t>
-            </a:r>
-          </a:p>
-        </p:txBody>
-      </p:sp>
-      <p:sp>
-        <p:nvSpPr>
-          <p:cNvPr id="31" name="Rectangle 30"/>
+              <a:t>對 100% 案件成立;人仍逐筆判,機器不做結案</a:t>
+            </a:r>
+          </a:p>
+        </p:txBody>
+      </p:sp>
+      <p:sp>
+        <p:nvSpPr>
+          <p:cNvPr id="33" name="Rectangle 32"/>
           <p:cNvSpPr/>
           <p:nvPr/>
         </p:nvSpPr>
         <p:spPr>
           <a:xfrm>
-            <a:off x="658368" y="5444219"/>
-            <a:ext cx="45720" cy="771525"/>
+            <a:off x="658368" y="5019137"/>
+            <a:ext cx="45720" cy="321468"/>
           </a:xfrm>
           <a:prstGeom prst="rect">
             <a:avLst/>
@@ -11500,14 +11570,14 @@
       </p:sp>
       <p:sp>
         <p:nvSpPr>
-          <p:cNvPr id="32" name="TextBox 31"/>
+          <p:cNvPr id="34" name="TextBox 33"/>
           <p:cNvSpPr txBox="1"/>
           <p:nvPr/>
         </p:nvSpPr>
         <p:spPr>
           <a:xfrm>
-            <a:off x="804672" y="5416787"/>
-            <a:ext cx="2116945" cy="862965"/>
+            <a:off x="804672" y="4991705"/>
+            <a:ext cx="2408822" cy="412908"/>
           </a:xfrm>
           <a:prstGeom prst="rect">
             <a:avLst/>
@@ -11532,21 +11602,21 @@
                 </a:solidFill>
                 <a:latin typeface="Microsoft JhengHei"/>
               </a:rPr>
-              <a:t>客戶端已經在承受</a:t>
-            </a:r>
-          </a:p>
-        </p:txBody>
-      </p:sp>
-      <p:sp>
-        <p:nvSpPr>
-          <p:cNvPr id="33" name="TextBox 32"/>
+              <a:t>導入之後</a:t>
+            </a:r>
+          </a:p>
+        </p:txBody>
+      </p:sp>
+      <p:sp>
+        <p:nvSpPr>
+          <p:cNvPr id="35" name="TextBox 34"/>
           <p:cNvSpPr txBox="1"/>
           <p:nvPr/>
         </p:nvSpPr>
         <p:spPr>
           <a:xfrm>
-            <a:off x="2976481" y="5416787"/>
-            <a:ext cx="2787914" cy="862965"/>
+            <a:off x="3268358" y="4991705"/>
+            <a:ext cx="2976753" cy="412908"/>
           </a:xfrm>
           <a:prstGeom prst="rect">
             <a:avLst/>
@@ -11571,21 +11641,21 @@
                 </a:solidFill>
                 <a:latin typeface="Microsoft JhengHei"/>
               </a:rPr>
-              <a:t>現況約半數爭議超過兩天</a:t>
-            </a:r>
-          </a:p>
-        </p:txBody>
-      </p:sp>
-      <p:sp>
-        <p:nvSpPr>
-          <p:cNvPr id="34" name="TextBox 33"/>
+              <a:t>爭議回覆 2–5 天 → 目標 2 天內</a:t>
+            </a:r>
+          </a:p>
+        </p:txBody>
+      </p:sp>
+      <p:sp>
+        <p:nvSpPr>
+          <p:cNvPr id="36" name="TextBox 35"/>
           <p:cNvSpPr txBox="1"/>
           <p:nvPr/>
         </p:nvSpPr>
         <p:spPr>
           <a:xfrm>
-            <a:off x="5874123" y="5416787"/>
-            <a:ext cx="4333323" cy="862965"/>
+            <a:off x="6354839" y="4991705"/>
+            <a:ext cx="5068759" cy="412908"/>
           </a:xfrm>
           <a:prstGeom prst="rect">
             <a:avLst/>
@@ -11610,7 +11680,92 @@
                 </a:solidFill>
                 <a:latin typeface="Microsoft JhengHei"/>
               </a:rPr>
-              <a:t>客戶期望 2 天內、單純案件當天 —— 客戶期望,非已簽訂之服務水準協議;此為營運端估計,尚未以工單時戳量測,W1–6 交出正式逾時率</a:t>
+              <a:t>〔提案目標,未簽協議〕W16 後量測;一半靠證據包,一半靠誤報量下降</a:t>
+            </a:r>
+          </a:p>
+        </p:txBody>
+      </p:sp>
+      <p:sp>
+        <p:nvSpPr>
+          <p:cNvPr id="37" name="Rounded Rectangle 36"/>
+          <p:cNvSpPr/>
+          <p:nvPr/>
+        </p:nvSpPr>
+        <p:spPr>
+          <a:xfrm>
+            <a:off x="658368" y="5865926"/>
+            <a:ext cx="9658807" cy="644601"/>
+          </a:xfrm>
+          <a:prstGeom prst="roundRect">
+            <a:avLst>
+              <a:gd name="adj" fmla="val 6000"/>
+            </a:avLst>
+          </a:prstGeom>
+          <a:solidFill>
+            <a:srgbClr val="1F4E79"/>
+          </a:solidFill>
+          <a:ln>
+            <a:noFill/>
+          </a:ln>
+          <a:effectLst/>
+        </p:spPr>
+        <p:style>
+          <a:lnRef idx="1">
+            <a:schemeClr val="accent1"/>
+          </a:lnRef>
+          <a:fillRef idx="3">
+            <a:schemeClr val="accent1"/>
+          </a:fillRef>
+          <a:effectRef idx="2">
+            <a:schemeClr val="accent1"/>
+          </a:effectRef>
+          <a:fontRef idx="minor">
+            <a:schemeClr val="lt1"/>
+          </a:fontRef>
+        </p:style>
+        <p:txBody>
+          <a:bodyPr rtlCol="0" anchor="ctr"/>
+          <a:lstStyle/>
+          <a:p>
+            <a:pPr algn="ctr"/>
+          </a:p>
+        </p:txBody>
+      </p:sp>
+      <p:sp>
+        <p:nvSpPr>
+          <p:cNvPr id="38" name="TextBox 37"/>
+          <p:cNvSpPr txBox="1"/>
+          <p:nvPr/>
+        </p:nvSpPr>
+        <p:spPr>
+          <a:xfrm>
+            <a:off x="841247" y="5865926"/>
+            <a:ext cx="9293047" cy="644601"/>
+          </a:xfrm>
+          <a:prstGeom prst="rect">
+            <a:avLst/>
+          </a:prstGeom>
+          <a:noFill/>
+        </p:spPr>
+        <p:txBody>
+          <a:bodyPr wrap="square" lIns="0" rIns="0" tIns="0" bIns="0" anchor="ctr">
+            <a:spAutoFit/>
+          </a:bodyPr>
+          <a:lstStyle/>
+          <a:p>
+            <a:pPr algn="ctr">
+              <a:lnSpc>
+                <a:spcPct val="125000"/>
+              </a:lnSpc>
+            </a:pPr>
+            <a:r>
+              <a:rPr sz="1700" b="1">
+                <a:solidFill>
+                  <a:srgbClr val="FFFFFF"/>
+                </a:solidFill>
+                <a:latin typeface="Microsoft JhengHei"/>
+              </a:rPr>
+              <a:t>天花板:非 AI 段佔 22%–57% = 1.0–2.0 天,AI 碰不到;排隊那段是排班解的</a:t>
             </a:r>
           </a:p>
         </p:txBody>

--- a/Artificial Intelligence for Enterprises/Assessment3/Huang_26254793_421104_Assessment 3.pptx
+++ b/Artificial Intelligence for Enterprises/Assessment3/Huang_26254793_421104_Assessment 3.pptx
@@ -644,7 +644,7 @@
           <a:lstStyle/>
           <a:p>
             <a:r>
-              <a:t>【第 10 頁 · P9 · 六個月 · 六個工作包 · 三道決策門】　目標 47 秒 · 累計 8:46</a:t>
+              <a:t>【第 10 頁 · P9 · 六個月 · 六個工作包 · 三道決策門】　目標 47 秒 · 累計 8:51</a:t>
             </a:r>
           </a:p>
           <a:p/>
@@ -796,7 +796,7 @@
           <a:lstStyle/>
           <a:p>
             <a:r>
-              <a:t>【第 11 頁 · P10 · 資源、當責與請求】　目標 64 秒 · 累計 9:49</a:t>
+              <a:t>【第 11 頁 · P10 · 資源、當責與請求】　目標 64 秒 · 累計 9:55</a:t>
             </a:r>
           </a:p>
           <a:p/>
@@ -968,7 +968,7 @@
           <a:lstStyle/>
           <a:p>
             <a:r>
-              <a:t>【第 12 頁 · 參考文獻(第 11 頁 — 不佔十頁額度)】　目標 5 秒 · 累計 9:54</a:t>
+              <a:t>【第 12 頁 · 參考文獻(第 11 頁 — 不佔十頁額度)】　目標 5 秒 · 累計 10:00</a:t>
             </a:r>
           </a:p>
           <a:p/>
@@ -1229,13 +1229,13 @@
           <a:lstStyle/>
           <a:p>
             <a:r>
-              <a:t>【第 3 頁 · P2 · 為什麼是現在:工作量沒變多,客戶要的時效變了】　目標 54 秒 · 累計 2:57</a:t>
+              <a:t>【第 3 頁 · P2 · 為什麼是現在:工作量沒變多,客戶要的時效變了】　目標 59 秒 · 累計 3:02</a:t>
             </a:r>
           </a:p>
           <a:p/>
           <a:p>
             <a:r>
-              <a:t>★ 最花時間的那兩段佔 43%–78% —— 把它自動化,爭議回覆從 2–5 天縮到目標 2 天內。</a:t>
+              <a:t>★ 人的時間從「找證據」換成「下判斷」—— 而找證據那兩段佔全程五成到八成八。</a:t>
             </a:r>
           </a:p>
           <a:p/>
@@ -1251,13 +1251,13 @@
           </a:p>
           <a:p>
             <a:r>
-              <a:t>· 天花板:排隊 + 覆核 + 回信佔 22%–57%,AI 碰不到 —— 排隊那段是排班解的</a:t>
+              <a:t>· 非 AI 段只佔 12.5%–50%;排隊那 0–1 天是排班的事,不在本案範圍</a:t>
             </a:r>
           </a:p>
           <a:p/>
           <a:p>
             <a:r>
-              <a:t># 合計 2.5–5.5 天 · AI 可處理段 1.5–3.5 天 = 43%–78%</a:t>
+              <a:t># 合計 2.0–5.0 天 · AI 可處理段 1.5–3.5 天 = 50%–87.5%</a:t>
             </a:r>
           </a:p>
           <a:p>
@@ -1268,7 +1268,7 @@
           <a:p/>
           <a:p>
             <a:r>
-              <a:t>⚠️ 分母是 2.5–5.5 天,🚫 不是 2–5 天</a:t>
+              <a:t>⚠️ 分母是 2.0–5.0 天(內部覆核與回信各 0.25 天)—— 這下跟第 9 頁 KPI 的「全鏈路 2–5 天」一致了</a:t>
             </a:r>
           </a:p>
           <a:p>
@@ -1290,12 +1290,12 @@
           <a:p/>
           <a:p>
             <a:r>
-              <a:t>── 逐字備援 · 236 字(忘詞才看,不是拿來唸的)──</a:t>
-            </a:r>
-          </a:p>
-          <a:p>
-            <a:r>
-              <a:t>各位看這條時間軸。一件爭議走完兩天半到五天半,而最花時間的是中間這兩段 —— 撈數據跟判讀,佔全程四成三到七成八。慢的原因是同一個:模型看不到畫面外的東西。速限多少、那面牌是什麼,人得自己離開畫面去查。所以我要導入自動證據包:機器把影片、客戶問題、規則一起讀進來,產出可讀的描述,並標出它引用到的證據在第幾秒。這一包第八到十六週做,對所有案件都成立;人仍然逐筆判,機器不做結案。導入之後,爭議回覆從兩到五天縮短到目標兩天內 ——一半來自證據包自動化,一半來自誤報量下降。但天花板在最下面那一條:排隊、覆核、回信佔兩成二到五成七,AI 碰不到。</a:t>
+              <a:t>── 逐字備援 · 261 字(忘詞才看,不是拿來唸的)──</a:t>
+            </a:r>
+          </a:p>
+          <a:p>
+            <a:r>
+              <a:t>各位看這條時間軸。一件爭議走完兩天到五天,而最花時間的是中間這兩段 —— 撈數據跟判讀,佔全程五成到八成八。慢的原因是同一個:模型看不到畫面外的東西。速限多少、那面牌是什麼,人得自己離開畫面去查。所以我要導入的是爭議回覆自動化,第八到十六週:機器把影片、客戶問題、規則一起讀進來,做完分析給出事實結果,並標出它引用到的證據在第幾秒;人工最後審閱,並給出內部覆核。這對所有案件都成立,不是只做其中一部分。導入之後,爭議回覆從兩到五天縮短到目標兩天內 ——一半來自證據包自動化,一半來自誤報量下降。而真正的差別在最下面那一句:人的時間從「找證據」換成「下判斷」。找證據機器做得比人快,下判斷只有人能做。</a:t>
             </a:r>
           </a:p>
           <a:p/>
@@ -1376,7 +1376,7 @@
           <a:lstStyle/>
           <a:p>
             <a:r>
-              <a:t>【第 4 頁 · P3 · 發現過程:兩種病,兩個缺口】　目標 52 秒 · 累計 3:49</a:t>
+              <a:t>【第 4 頁 · P3 · 發現過程:兩種病,兩個缺口】　目標 52 秒 · 累計 3:55</a:t>
             </a:r>
           </a:p>
           <a:p/>
@@ -1533,7 +1533,7 @@
           <a:lstStyle/>
           <a:p>
             <a:r>
-              <a:t>【第 5 頁 · P4 · 我們看不見的那一半:有資料,沒有習慣】　目標 59 秒 · 累計 4:48</a:t>
+              <a:t>【第 5 頁 · P4 · 我們看不見的那一半:有資料,沒有習慣】　目標 59 秒 · 累計 4:54</a:t>
             </a:r>
           </a:p>
           <a:p/>
@@ -1715,7 +1715,7 @@
           <a:lstStyle/>
           <a:p>
             <a:r>
-              <a:t>【第 6 頁 · P5 · 五條路,含三條不用 AI】　目標 44 秒 · 累計 5:32</a:t>
+              <a:t>【第 6 頁 · P5 · 五條路,含三條不用 AI】　目標 44 秒 · 累計 5:38</a:t>
             </a:r>
           </a:p>
           <a:p/>
@@ -1857,7 +1857,7 @@
           <a:lstStyle/>
           <a:p>
             <a:r>
-              <a:t>【第 7 頁 · P6 · 風險:七類十條,緩解位移與殘餘風險】　目標 51 秒 · 累計 6:23</a:t>
+              <a:t>【第 7 頁 · P6 · 風險:七類十條,緩解位移與殘餘風險】　目標 51 秒 · 累計 6:29</a:t>
             </a:r>
           </a:p>
           <a:p/>
@@ -2010,7 +2010,7 @@
           <a:lstStyle/>
           <a:p>
             <a:r>
-              <a:t>【第 8 頁 · P7 · 倫理與可申訴性:對照澳洲 AI 倫理八原則】　目標 50 秒 · 累計 7:13</a:t>
+              <a:t>【第 8 頁 · P7 · 倫理與可申訴性:對照澳洲 AI 倫理八原則】　目標 50 秒 · 累計 7:18</a:t>
             </a:r>
           </a:p>
           <a:p/>
@@ -2163,7 +2163,7 @@
           <a:lstStyle/>
           <a:p>
             <a:r>
-              <a:t>【第 9 頁 · P8 · 怎麼算成功:三層 KPI,一條回圈】　目標 46 秒 · 累計 7:58</a:t>
+              <a:t>【第 9 頁 · P8 · 怎麼算成功:三層 KPI,一條回圈】　目標 46 秒 · 累計 8:04</a:t>
             </a:r>
           </a:p>
           <a:p/>
@@ -10333,7 +10333,7 @@
                 </a:solidFill>
                 <a:latin typeface="Microsoft JhengHei"/>
               </a:rPr>
-              <a:t>最花時間的兩段佔 43%–78%,把它自動化 → 目標 2 天內</a:t>
+              <a:t>最花時間的兩段佔 50%–88%,把它自動化 → 爭議回覆目標 2 天內</a:t>
             </a:r>
           </a:p>
         </p:txBody>
@@ -10372,7 +10372,7 @@
                 </a:solidFill>
                 <a:latin typeface="Microsoft JhengHei"/>
               </a:rPr>
-              <a:t>導入自動證據包(WP-D · W8–16)· 人仍逐筆判;而排隊那段是排班解的,不是 AI</a:t>
+              <a:t>導入「爭議回覆自動化」(第 8–16 週的工作包):機器做分析給出事實結果,人工審閱並給出內部覆核</a:t>
             </a:r>
           </a:p>
         </p:txBody>
@@ -10455,7 +10455,7 @@
                 </a:solidFill>
                 <a:latin typeface="Microsoft JhengHei"/>
               </a:rPr>
-              <a:t>單件客戶爭議的五段時間拆解(合計 2.5–5.5 天)</a:t>
+              <a:t>單件客戶爭議的五段時間拆解(合計 2.0–5.0 天)</a:t>
             </a:r>
           </a:p>
         </p:txBody>
@@ -10469,7 +10469,7 @@
         <p:spPr>
           <a:xfrm>
             <a:off x="658368" y="2194560"/>
-            <a:ext cx="1359369" cy="566928"/>
+            <a:ext cx="1527381" cy="566928"/>
           </a:xfrm>
           <a:prstGeom prst="rect">
             <a:avLst/>
@@ -10515,7 +10515,7 @@
         <p:spPr>
           <a:xfrm>
             <a:off x="658368" y="2240279"/>
-            <a:ext cx="1359369" cy="237744"/>
+            <a:ext cx="1527381" cy="237744"/>
           </a:xfrm>
           <a:prstGeom prst="rect">
             <a:avLst/>
@@ -10554,7 +10554,7 @@
         <p:spPr>
           <a:xfrm>
             <a:off x="658368" y="2478024"/>
-            <a:ext cx="1359369" cy="237744"/>
+            <a:ext cx="1527381" cy="237744"/>
           </a:xfrm>
           <a:prstGeom prst="rect">
             <a:avLst/>
@@ -10592,8 +10592,8 @@
         </p:nvSpPr>
         <p:spPr>
           <a:xfrm>
-            <a:off x="2017737" y="2194560"/>
-            <a:ext cx="1359369" cy="566928"/>
+            <a:off x="2185749" y="2194560"/>
+            <a:ext cx="1527381" cy="566928"/>
           </a:xfrm>
           <a:prstGeom prst="rect">
             <a:avLst/>
@@ -10638,8 +10638,8 @@
         </p:nvSpPr>
         <p:spPr>
           <a:xfrm>
-            <a:off x="2017737" y="2240279"/>
-            <a:ext cx="1359369" cy="237744"/>
+            <a:off x="2185749" y="2240279"/>
+            <a:ext cx="1527381" cy="237744"/>
           </a:xfrm>
           <a:prstGeom prst="rect">
             <a:avLst/>
@@ -10677,8 +10677,8 @@
         </p:nvSpPr>
         <p:spPr>
           <a:xfrm>
-            <a:off x="2017737" y="2478024"/>
-            <a:ext cx="1359369" cy="237744"/>
+            <a:off x="2185749" y="2478024"/>
+            <a:ext cx="1527381" cy="237744"/>
           </a:xfrm>
           <a:prstGeom prst="rect">
             <a:avLst/>
@@ -10716,8 +10716,8 @@
         </p:nvSpPr>
         <p:spPr>
           <a:xfrm>
-            <a:off x="3377107" y="2194560"/>
-            <a:ext cx="5437479" cy="566928"/>
+            <a:off x="3713131" y="2194560"/>
+            <a:ext cx="6109527" cy="566928"/>
           </a:xfrm>
           <a:prstGeom prst="rect">
             <a:avLst/>
@@ -10762,8 +10762,8 @@
         </p:nvSpPr>
         <p:spPr>
           <a:xfrm>
-            <a:off x="3377107" y="2240279"/>
-            <a:ext cx="5437479" cy="237744"/>
+            <a:off x="3713131" y="2240279"/>
+            <a:ext cx="6109527" cy="237744"/>
           </a:xfrm>
           <a:prstGeom prst="rect">
             <a:avLst/>
@@ -10801,8 +10801,8 @@
         </p:nvSpPr>
         <p:spPr>
           <a:xfrm>
-            <a:off x="3377107" y="2478024"/>
-            <a:ext cx="5437479" cy="237744"/>
+            <a:off x="3713131" y="2478024"/>
+            <a:ext cx="6109527" cy="237744"/>
           </a:xfrm>
           <a:prstGeom prst="rect">
             <a:avLst/>
@@ -10840,8 +10840,8 @@
         </p:nvSpPr>
         <p:spPr>
           <a:xfrm>
-            <a:off x="8814587" y="2194560"/>
-            <a:ext cx="1359369" cy="566928"/>
+            <a:off x="9822659" y="2194560"/>
+            <a:ext cx="855333" cy="566928"/>
           </a:xfrm>
           <a:prstGeom prst="rect">
             <a:avLst/>
@@ -10886,8 +10886,8 @@
         </p:nvSpPr>
         <p:spPr>
           <a:xfrm>
-            <a:off x="8814587" y="2240279"/>
-            <a:ext cx="1359369" cy="237744"/>
+            <a:off x="9822659" y="2240279"/>
+            <a:ext cx="855333" cy="237744"/>
           </a:xfrm>
           <a:prstGeom prst="rect">
             <a:avLst/>
@@ -10925,8 +10925,8 @@
         </p:nvSpPr>
         <p:spPr>
           <a:xfrm>
-            <a:off x="8814587" y="2478024"/>
-            <a:ext cx="1359369" cy="237744"/>
+            <a:off x="9822659" y="2478024"/>
+            <a:ext cx="855333" cy="237744"/>
           </a:xfrm>
           <a:prstGeom prst="rect">
             <a:avLst/>
@@ -10951,7 +10951,7 @@
                 </a:solidFill>
                 <a:latin typeface="Microsoft JhengHei"/>
               </a:rPr>
-              <a:t>0.5 天</a:t>
+              <a:t>0.25 天</a:t>
             </a:r>
           </a:p>
         </p:txBody>
@@ -10964,8 +10964,8 @@
         </p:nvSpPr>
         <p:spPr>
           <a:xfrm>
-            <a:off x="10173957" y="2194560"/>
-            <a:ext cx="1359369" cy="566928"/>
+            <a:off x="10677993" y="2194560"/>
+            <a:ext cx="855333" cy="566928"/>
           </a:xfrm>
           <a:prstGeom prst="rect">
             <a:avLst/>
@@ -11010,8 +11010,8 @@
         </p:nvSpPr>
         <p:spPr>
           <a:xfrm>
-            <a:off x="10173957" y="2240279"/>
-            <a:ext cx="1359369" cy="237744"/>
+            <a:off x="10677993" y="2240279"/>
+            <a:ext cx="855333" cy="237744"/>
           </a:xfrm>
           <a:prstGeom prst="rect">
             <a:avLst/>
@@ -11049,8 +11049,8 @@
         </p:nvSpPr>
         <p:spPr>
           <a:xfrm>
-            <a:off x="10173957" y="2478024"/>
-            <a:ext cx="1359369" cy="237744"/>
+            <a:off x="10677993" y="2478024"/>
+            <a:ext cx="855333" cy="237744"/>
           </a:xfrm>
           <a:prstGeom prst="rect">
             <a:avLst/>
@@ -11075,7 +11075,7 @@
                 </a:solidFill>
                 <a:latin typeface="Microsoft JhengHei"/>
               </a:rPr>
-              <a:t>0.5 天</a:t>
+              <a:t>0.25 天</a:t>
             </a:r>
           </a:p>
         </p:txBody>
@@ -11088,8 +11088,8 @@
         </p:nvSpPr>
         <p:spPr>
           <a:xfrm>
-            <a:off x="2017737" y="2852928"/>
-            <a:ext cx="6796849" cy="27432"/>
+            <a:off x="2185749" y="2852928"/>
+            <a:ext cx="7636909" cy="27432"/>
           </a:xfrm>
           <a:prstGeom prst="rect">
             <a:avLst/>
@@ -11132,8 +11132,8 @@
         </p:nvSpPr>
         <p:spPr>
           <a:xfrm>
-            <a:off x="2017737" y="2944368"/>
-            <a:ext cx="6796849" cy="402336"/>
+            <a:off x="2185749" y="2944368"/>
+            <a:ext cx="7636909" cy="402336"/>
           </a:xfrm>
           <a:prstGeom prst="rect">
             <a:avLst/>
@@ -11158,7 +11158,7 @@
                 </a:solidFill>
                 <a:latin typeface="Microsoft JhengHei"/>
               </a:rPr>
-              <a:t>AI 可處理段:撈數據 + 判讀 = 1.5–3.5 天 = 全程的 43%–78%</a:t>
+              <a:t>AI 可處理段:撈數據 + 判讀 = 1.5–3.5 天 = 全程的 50%–87.5%</a:t>
             </a:r>
           </a:p>
         </p:txBody>
@@ -11197,7 +11197,7 @@
                 </a:solidFill>
                 <a:latin typeface="Microsoft JhengHei"/>
               </a:rPr>
-              <a:t>合計 2.5–5.5 天;43%–78% 的精確值為 42.86%–77.78%(五段各自獨立取端點、窮舉 32 組求得)。非 AI 段只佔 22%–57%,而排隊本身只有 0–1 天 —— 那是排班解得掉的唯一一段。⚠ 這五段天數是營運端的估計,不是計時量測;W1–6 交出正式量測,若正式拆解推翻它,本案轉排班方案(G1 判)。</a:t>
+              <a:t>合計 2.0–5.0 天;50%–87.5% 由五段各自獨立取端點、窮舉 32 組求得。非 AI 段只佔 12.5%–50%,而排隊本身只有 0–1 天 —— 那是排班解得掉的唯一一段。⚠ 這五段天數是營運端的估計,不是計時量測;W1–6 交出正式量測,若正式拆解推翻它,本案轉排班方案(G1 判)。</a:t>
             </a:r>
           </a:p>
         </p:txBody>
@@ -11210,7 +11210,7 @@
         </p:nvSpPr>
         <p:spPr>
           <a:xfrm>
-            <a:off x="658368" y="4010440"/>
+            <a:off x="658368" y="3877056"/>
             <a:ext cx="45720" cy="321468"/>
           </a:xfrm>
           <a:prstGeom prst="rect">
@@ -11254,7 +11254,7 @@
         </p:nvSpPr>
         <p:spPr>
           <a:xfrm>
-            <a:off x="804672" y="3983008"/>
+            <a:off x="804672" y="3849624"/>
             <a:ext cx="2408822" cy="412908"/>
           </a:xfrm>
           <a:prstGeom prst="rect">
@@ -11293,7 +11293,7 @@
         </p:nvSpPr>
         <p:spPr>
           <a:xfrm>
-            <a:off x="3268358" y="3983008"/>
+            <a:off x="3268358" y="3849624"/>
             <a:ext cx="2976753" cy="412908"/>
           </a:xfrm>
           <a:prstGeom prst="rect">
@@ -11332,7 +11332,7 @@
         </p:nvSpPr>
         <p:spPr>
           <a:xfrm>
-            <a:off x="6354839" y="3983008"/>
+            <a:off x="6354839" y="3849624"/>
             <a:ext cx="5068759" cy="412908"/>
           </a:xfrm>
           <a:prstGeom prst="rect">
@@ -11371,7 +11371,7 @@
         </p:nvSpPr>
         <p:spPr>
           <a:xfrm>
-            <a:off x="658368" y="4514788"/>
+            <a:off x="658368" y="4381404"/>
             <a:ext cx="45720" cy="321468"/>
           </a:xfrm>
           <a:prstGeom prst="rect">
@@ -11415,7 +11415,7 @@
         </p:nvSpPr>
         <p:spPr>
           <a:xfrm>
-            <a:off x="804672" y="4487356"/>
+            <a:off x="804672" y="4353972"/>
             <a:ext cx="2408822" cy="412908"/>
           </a:xfrm>
           <a:prstGeom prst="rect">
@@ -11454,7 +11454,7 @@
         </p:nvSpPr>
         <p:spPr>
           <a:xfrm>
-            <a:off x="3268358" y="4487356"/>
+            <a:off x="3268358" y="4353972"/>
             <a:ext cx="2976753" cy="412908"/>
           </a:xfrm>
           <a:prstGeom prst="rect">
@@ -11480,7 +11480,7 @@
                 </a:solidFill>
                 <a:latin typeface="Microsoft JhengHei"/>
               </a:rPr>
-              <a:t>WP-D 爭議回覆自動化 · W8–16</a:t>
+              <a:t>爭議回覆自動化 · 第 8–16 週</a:t>
             </a:r>
           </a:p>
         </p:txBody>
@@ -11493,7 +11493,7 @@
         </p:nvSpPr>
         <p:spPr>
           <a:xfrm>
-            <a:off x="6354839" y="4487356"/>
+            <a:off x="6354839" y="4353972"/>
             <a:ext cx="5068759" cy="412908"/>
           </a:xfrm>
           <a:prstGeom prst="rect">
@@ -11519,7 +11519,7 @@
                 </a:solidFill>
                 <a:latin typeface="Microsoft JhengHei"/>
               </a:rPr>
-              <a:t>對 100% 案件成立;人仍逐筆判,機器不做結案</a:t>
+              <a:t>對 100% 案件成立;機器做分析給出事實結果,人工審閱並給出內部覆核</a:t>
             </a:r>
           </a:p>
         </p:txBody>
@@ -11532,7 +11532,7 @@
         </p:nvSpPr>
         <p:spPr>
           <a:xfrm>
-            <a:off x="658368" y="5019137"/>
+            <a:off x="658368" y="4885753"/>
             <a:ext cx="45720" cy="321468"/>
           </a:xfrm>
           <a:prstGeom prst="rect">
@@ -11576,7 +11576,7 @@
         </p:nvSpPr>
         <p:spPr>
           <a:xfrm>
-            <a:off x="804672" y="4991705"/>
+            <a:off x="804672" y="4858321"/>
             <a:ext cx="2408822" cy="412908"/>
           </a:xfrm>
           <a:prstGeom prst="rect">
@@ -11615,7 +11615,7 @@
         </p:nvSpPr>
         <p:spPr>
           <a:xfrm>
-            <a:off x="3268358" y="4991705"/>
+            <a:off x="3268358" y="4858321"/>
             <a:ext cx="2976753" cy="412908"/>
           </a:xfrm>
           <a:prstGeom prst="rect">
@@ -11654,7 +11654,7 @@
         </p:nvSpPr>
         <p:spPr>
           <a:xfrm>
-            <a:off x="6354839" y="4991705"/>
+            <a:off x="6354839" y="4858321"/>
             <a:ext cx="5068759" cy="412908"/>
           </a:xfrm>
           <a:prstGeom prst="rect">
@@ -11693,8 +11693,8 @@
         </p:nvSpPr>
         <p:spPr>
           <a:xfrm>
-            <a:off x="658368" y="5865926"/>
-            <a:ext cx="9658807" cy="644601"/>
+            <a:off x="658368" y="5871289"/>
+            <a:ext cx="9658807" cy="639238"/>
           </a:xfrm>
           <a:prstGeom prst="roundRect">
             <a:avLst>
@@ -11739,8 +11739,8 @@
         </p:nvSpPr>
         <p:spPr>
           <a:xfrm>
-            <a:off x="841247" y="5865926"/>
-            <a:ext cx="9293047" cy="644601"/>
+            <a:off x="841247" y="5871289"/>
+            <a:ext cx="9293047" cy="639238"/>
           </a:xfrm>
           <a:prstGeom prst="rect">
             <a:avLst/>
@@ -11765,7 +11765,7 @@
                 </a:solidFill>
                 <a:latin typeface="Microsoft JhengHei"/>
               </a:rPr>
-              <a:t>天花板:非 AI 段佔 22%–57% = 1.0–2.0 天,AI 碰不到;排隊那段是排班解的</a:t>
+              <a:t>導入後同一批爭議:人的時間從「找證據」換成「下判斷」—— 找證據機器快,下判斷只有人能做</a:t>
             </a:r>
           </a:p>
         </p:txBody>
@@ -15483,7 +15483,7 @@
                 </a:solidFill>
                 <a:latin typeface="Microsoft JhengHei"/>
               </a:rPr>
-              <a:t>43%-78% 為初估,非系統量測;判準不放寬</a:t>
+              <a:t>50%-87.5% 為初估,非系統量測;判準不放寬</a:t>
             </a:r>
           </a:p>
         </p:txBody>

--- a/Artificial Intelligence for Enterprises/Assessment3/Huang_26254793_421104_Assessment 3.pptx
+++ b/Artificial Intelligence for Enterprises/Assessment3/Huang_26254793_421104_Assessment 3.pptx
@@ -17,6 +17,7 @@
     <p:sldId id="265" r:id="rId17"/>
     <p:sldId id="266" r:id="rId18"/>
     <p:sldId id="267" r:id="rId19"/>
+    <p:sldId id="268" r:id="rId20"/>
   </p:sldIdLst>
   <p:sldSz cx="12191695" cy="6858000" type="screen4x3"/>
   <p:notesSz cx="6858000" cy="9144000"/>
@@ -644,41 +645,46 @@
           <a:lstStyle/>
           <a:p>
             <a:r>
-              <a:t>【第 10 頁 · P9 · 六個月 · 六個工作包 · 三道決策門】　目標 47 秒 · 累計 8:51</a:t>
+              <a:t>【第 10 頁 · P8 · 怎麼算成功:三層 KPI,一條回圈】　目標 46 秒 · 累計 9:10</a:t>
             </a:r>
           </a:p>
           <a:p/>
           <a:p>
             <a:r>
-              <a:t>★ 六個月分三段付,每一段都有明確的喊停條件 —— 你不必一次押六個月。</a:t>
+              <a:t>★ 上面兩層是你買到的東西,下面四條是你隨時喊停的權力 —— 而煞車是我自己裝的。</a:t>
             </a:r>
           </a:p>
           <a:p/>
           <a:p>
             <a:r>
-              <a:t>· 六包只有一包是 AI,而且排在最後:評估集 → 標註 → 特徵 → 地端 VLM</a:t>
-            </a:r>
-          </a:p>
-          <a:p>
-            <a:r>
-              <a:t>· 三道門各自寫明什麼條件下停,不是寫什麼條件下過</a:t>
-            </a:r>
-          </a:p>
-          <a:p>
-            <a:r>
-              <a:t>· G2 四臂同場比,第四臂是影子模式</a:t>
+              <a:t>· 效益層:爭議回覆時效、可避免的年度增聘、兩條工作流的單位工時</a:t>
+            </a:r>
+          </a:p>
+          <a:p>
+            <a:r>
+              <a:t>· 護欄層任一未達標,上面兩層的成績一律不採計</a:t>
+            </a:r>
+          </a:p>
+          <a:p>
+            <a:r>
+              <a:t>· 訂不出目標值的,寫明由哪一道門訂</a:t>
             </a:r>
           </a:p>
           <a:p/>
           <a:p>
             <a:r>
-              <a:t># G1 第 6 週 · G2 第 12 週 · G3 第 24 週</a:t>
+              <a:t># ⑩ 漏放率 W6 交 95% CI · ⑬ 漏濾率 W12 交差值 95% CI</a:t>
+            </a:r>
+          </a:p>
+          <a:p>
+            <a:r>
+              <a:t># δ 由委員會在 G1 事前預註冊 —— 判準寫在跑實驗之前</a:t>
             </a:r>
           </a:p>
           <a:p/>
           <a:p>
             <a:r>
-              <a:t>⚠️ 前三臂全部含人,而要部署的是無人系統 —— 這就是為什麼要有第四臂</a:t>
+              <a:t>⚠️ ⑬ 的母體是那 850 筆(有把握桶),🚫 不是剩下的 150 筆</a:t>
             </a:r>
           </a:p>
           <a:p/>
@@ -690,12 +696,12 @@
           <a:p/>
           <a:p>
             <a:r>
-              <a:t>── 逐字備援 · 208 字(忘詞才看,不是拿來唸的)──</a:t>
-            </a:r>
-          </a:p>
-          <a:p>
-            <a:r>
-              <a:t>六個月,六個工作包,三道門。順序不能換:評估集、標註、特徵,最後才是地端模型。第六週是因果判定門:交出時間拆解、兩天逾時率跟到件分布。證據搜尋跟誤報量佔主要延遲,才續行;不是,就轉排班。第十二週同一組凍結集比四臂:現行模型、規則式基線、人機協作,加一臂影子模式——機器自己結案、不對外送,跟人的判定比對。自動結案的漏放率,只有這一臂算得出來。這道門不能取消實驗,只能調整規模;要不要真的對外自動結案,不在這六個月決定。規則式今天就能做,為什麼排第五週?沒有前六週的基準線,證不出有效。</a:t>
+              <a:t>── 逐字備援 · 201 字(忘詞才看,不是拿來唸的)──</a:t>
+            </a:r>
+          </a:p>
+          <a:p>
+            <a:r>
+              <a:t>講完該不該做,接下來是怎麼算做成了。最上層第一個指標,是客戶等多久拿到分析,這是這個專案要買的東西。現況兩到五天,目標兩天內、單純案件當天;是客戶期望,不是已簽的服務水準協議。護欄層是否決型,今天多一條:漏濾率——機器說有把握、直接結案的那一桶裡,有多少其實該讓人看。第十二週交出它跟人工的差值,門檻第六週就要先訂,不能看完數據再訂。錯誤攔截比例我算不出來,分母還不存在,那正是護欄層要交的能力。訂不出目標值的,我寫的是它什麼時候被訂出來、由哪一道門訂。</a:t>
             </a:r>
           </a:p>
           <a:p/>
@@ -706,27 +712,7 @@
           </a:p>
           <a:p>
             <a:r>
-              <a:t>【rows】{'label': 'WP-B 標註品質｜AI 的前置', 'value': 'W3–10', 'note': '交:誤報的操作型定義 · 判準手冊 · 一致性儀表板。判準不一致的標註餵給模型就是垃圾進垃圾出 (Northcutt et al., 2021)'}</a:t>
-            </a:r>
-          </a:p>
-          <a:p>
-            <a:r>
-              <a:t>【rows】{'label': 'WP-C 脈絡特徵工程｜AI 的前置', 'value': 'W5–12', 'note': '交:規則式脈絡層(刻意先做不含模型的版本,它同時是地端 VLM 的對照基線)· 誤報下降量測。排第五週,是因為沒有前六週基準線就證不出它有效'}</a:t>
-            </a:r>
-          </a:p>
-          <a:p>
-            <a:r>
-              <a:t>【rows】{'label': 'WP-D 爭議回覆自動化｜併行的營運自動化', 'value': 'W8–16', 'note': '交:自動證據包 · 回覆時效改善。🔑 這是六個月裡真正對外交付的商業價值,而且人仍然每一筆都判 —— 它完全不依賴任何自動結案'}</a:t>
-            </a:r>
-          </a:p>
-          <a:p>
-            <a:r>
-              <a:t>【rows】{'label': 'WP-F 治理與移交｜AI 之後', 'value': 'W20–26', 'note': '交:移交文件 · 常態儀表板。六個里程碑 M1–M6 落在 W6 / W10 / W12 / W16 / W24 / W26,那是交東西的時點,不是可喊停的時點'}</a:t>
-            </a:r>
-          </a:p>
-          <a:p>
-            <a:r>
-              <a:t>【這一頁的作用】這頁要讓委員會相信兩件事,而不是相信「我有計畫」。第一:六包裡只有一包是 AI,其餘五包不是繞路 —— 沒有凍結評估集就量不出模型判得準不準,判準不一致的標註餵給模型就是垃圾進垃圾出,所以順序本身就是風險控制。第二:每一道門都寫出「什麼條件下這個案子會停」,包括 G1 可以整案轉向排班方案、G3 可以直接不部署模型端。四臂表則正面回答答辯必問的那一題:六個月怎麼可能算得出無人系統的風險 —— 答案是第四臂影子模式,前三臂全部含人,只有它算得出自動結案的漏放率。</a:t>
+              <a:t>【這一頁的作用】這頁把「衡量」從外掛的合規章節,改寫成 AI 提案本身的兩個問題:怎麼證明它有效、什麼情況下喊停。對委員會的作用有三個:①上兩層告訴他們這筆錢買的是客戶等多久拿到分析(不是準確率),而且業務指標由營運指標支撐、有階序;②護欄層讓他們知道自己手上握著一票否決,尤其⑬漏濾率是自動結案能不能對外生效的唯一否決點 —— 提案人主動把刀柄遞出去;③每一個今天訂不出的目標值都寫明由哪道門、第幾週、誰負責訂,把「訂不出來」變成可稽核的紀律而不是含糊。</a:t>
             </a:r>
           </a:p>
         </p:txBody>
@@ -796,61 +782,41 @@
           <a:lstStyle/>
           <a:p>
             <a:r>
-              <a:t>【第 11 頁 · P10 · 資源、當責與請求】　目標 64 秒 · 累計 9:55</a:t>
+              <a:t>【第 11 頁 · P9 · 六個月 · 六個工作包 · 三道決策門】　目標 47 秒 · 累計 9:58</a:t>
             </a:r>
           </a:p>
           <a:p/>
           <a:p>
             <a:r>
-              <a:t>★ 我請求核准第一段:四點八五人月、量級四十二到四十七萬,並指定一位贊助人。</a:t>
+              <a:t>★ 六個月分三段付,每一段都有明確的喊停條件 —— 你不必一次押六個月。</a:t>
             </a:r>
           </a:p>
           <a:p/>
           <a:p>
             <a:r>
-              <a:t>· 成本主體是人,不是設備</a:t>
-            </a:r>
-          </a:p>
-          <a:p>
-            <a:r>
-              <a:t>· 稽核稅:自動化不是免費的 —— 毛節省要先扣掉盲測稽核</a:t>
-            </a:r>
-          </a:p>
-          <a:p>
-            <a:r>
-              <a:t>· 我要的不只是一筆錢,是一個贊助人跟三道門</a:t>
+              <a:t>· 六包只有一包是 AI,而且排在最後:評估集 → 標註 → 特徵 → 地端 VLM</a:t>
+            </a:r>
+          </a:p>
+          <a:p>
+            <a:r>
+              <a:t>· 三道門各自寫明什麼條件下停,不是寫什麼條件下過</a:t>
+            </a:r>
+          </a:p>
+          <a:p>
+            <a:r>
+              <a:t>· G2 四臂同場比,第四臂是影子模式</a:t>
             </a:r>
           </a:p>
           <a:p/>
           <a:p>
             <a:r>
-              <a:t># 4.85 人月 · NT$42–47 萬(規劃,非核定預算)</a:t>
-            </a:r>
-          </a:p>
-          <a:p>
-            <a:r>
-              <a:t># 毛 6.0–12.1 FTE → 稽核稅 0.39–3.14 FTE → 淨 2.9–11.7 FTE</a:t>
+              <a:t># G1 第 6 週 · G2 第 12 週 · G3 第 24 週</a:t>
             </a:r>
           </a:p>
           <a:p/>
           <a:p>
             <a:r>
-              <a:t>⚠️ 🔴 **最後一句講正面那三樣**(可稽核的錯誤率 · 脈絡判斷層 · 對照實驗結果)——🚫 不要停在「不做的代價」。全片的最後一個印象就是這一句</a:t>
-            </a:r>
-          </a:p>
-          <a:p>
-            <a:r>
-              <a:t>⚠️ 🚫 520–1,521 萬是移交後的「可避免增聘」,不是本案承諾的節省額</a:t>
-            </a:r>
-          </a:p>
-          <a:p>
-            <a:r>
-              <a:t>⚠️ 🚫 不得與設備價相減成 ROI</a:t>
-            </a:r>
-          </a:p>
-          <a:p>
-            <a:r>
-              <a:t>⚠️ 在稽核稅、申訴重判與漂移調查三項齊備前,不宣稱任何節省額</a:t>
+              <a:t>⚠️ 前三臂全部含人,而要部署的是無人系統 —— 這就是為什麼要有第四臂</a:t>
             </a:r>
           </a:p>
           <a:p/>
@@ -862,12 +828,12 @@
           <a:p/>
           <a:p>
             <a:r>
-              <a:t>── 逐字備援 · 280 字(忘詞才看,不是拿來唸的)──</a:t>
-            </a:r>
-          </a:p>
-          <a:p>
-            <a:r>
-              <a:t>三個輸入都印在上面,它是量級,不是報價。設備一台十六到二十萬,一次性,不到一個人一年成本的五分之一;這個專案的成本主體是人,不是設備。它也不是為單一用途買的:第二個應用是內部規格文件的技術問答,不在本次請求範圍內,但硬體的攤提對象不只一個。那筆擴編暴露不是承諾的節省;要第十二週實測證明能避免或延後至少一點四到一點七個 loaded FTE-year,業務也確認會轉成少招人或少徵調研發,才放行後續預算。我要的不只預算,是贊助人跟三道門。我請求核准六個月額度輪廓、分段釋出;第一段四點八五人月、量級新台幣四十二到四十七萬,第六週由贊助人決定續不續行。第二十四週我會回到這裡,交出三方比較結果:地端 VLM 有增量,或者沒有。</a:t>
+              <a:t>── 逐字備援 · 208 字(忘詞才看,不是拿來唸的)──</a:t>
+            </a:r>
+          </a:p>
+          <a:p>
+            <a:r>
+              <a:t>六個月,六個工作包,三道門。順序不能換:評估集、標註、特徵,最後才是地端模型。第六週是因果判定門:交出時間拆解、兩天逾時率跟到件分布。證據搜尋跟誤報量佔主要延遲,才續行;不是,就轉排班。第十二週同一組凍結集比四臂:現行模型、規則式基線、人機協作,加一臂影子模式——機器自己結案、不對外送,跟人的判定比對。自動結案的漏放率,只有這一臂算得出來。這道門不能取消實驗,只能調整規模;要不要真的對外自動結案,不在這六個月決定。規則式今天就能做,為什麼排第五週?沒有前六週的基準線,證不出有效。</a:t>
             </a:r>
           </a:p>
           <a:p/>
@@ -878,27 +844,27 @@
           </a:p>
           <a:p>
             <a:r>
-              <a:t>【rows】{'label': '人力(18.2 人月,六包 × 五種角色 + 專案負責人)', 'value': '約 NT$158–177 萬', 'note': '18.2 人月 × 月薪 NT$6.7–7.5 萬 × 間接費率 1.3。薪資量級、費率、匯率(1 A$≈NT$21)三項都是提案人設定的假設 —— 是量級,不是報價'}</a:t>
-            </a:r>
-          </a:p>
-          <a:p>
-            <a:r>
-              <a:t>【rows】{'label': '三年可推算 TCO(兩個數字,🚫 不得合併)', 'value': '六個月專案期(影子模式)約 NT$50–118 萬(中案 72 萬)｜移交後(含稽核)約 NT$173–1,219 萬', 'note': '設備 16–20(一次性)+ 電力三年 0.7–1.9 + 延保三年 2.4–6.0 + 維運監控與模型更新三年 31.2–70.2。維運人力佔 59%–62%。上界跳這麼大不是估算失準,是治理成本的形狀'}</a:t>
-            </a:r>
-          </a:p>
-          <a:p>
-            <a:r>
-              <a:t>【rows】{'label': '可避免的年度增聘(移交後,不是六個月的交付)', 'value': '5–13 人 ≈ NT$520–1,521 萬/年', 'note': '不做本案覆蓋全客戶需 17–24 人(現有 5 人);做本案、移交後開到天花板仍需 11–12 人 —— 仍須增聘 6–7 人,不是不用增聘。公開薪資量級推算,非本案承諾的節省額'}</a:t>
-            </a:r>
-          </a:p>
-          <a:p>
-            <a:r>
-              <a:t>【rows】{'label': '已辨識、尚未估價的五項非人力成本', 'value': '不編金額', 'note': '① 影片儲存 ② 雲端運算 ③ 圖資更新 ④ 測試環境 ⑤ AI 訓練資料蒐集。技術與數據負責人於 G1 前補齊量級。因這五項未估價,人力+設備只能稱「已估成本」'}</a:t>
-            </a:r>
-          </a:p>
-          <a:p>
-            <a:r>
-              <a:t>【這一頁的作用】這頁要在委員會心裡完成三次收斂。第一次:看到「地端 AI」就問「那台機器多少錢」—— 設備價、它相對一個人年成本的 14%–19%、它在已估成本裡的 8%–12%,三秒內收斂成「成本主體是人,不是設備」,避免答辯變成硬體採購的離題辯論。第二次:所有金額都標明是量級不是報價、三個假設輸入都印在畫面上、五項未估價成本逐項列名、TCO 拆成兩個不合併的數字 —— 誠實度不能在唯一的金額上破功。第三次也是最關鍵的一次:稽核稅那一格由提案人自己算出自動化的代價(吃掉毛節省 3%–52%),而放行條件框把「年度擴編暴露」明講成反事實成本、綁上 G2 的可驗證門檻 —— 委員會因此看到的不是一個在推銷 AI 的人,而是一個先幫他們算好帳、並把喊停的權力交回去的人。最後的請求只有兩樣:核准第一段 W1–6,以及指定一個贊助人。</a:t>
+              <a:t>【rows】{'label': 'WP-B 標註品質｜AI 的前置', 'value': 'W3–10', 'note': '交:誤報的操作型定義 · 判準手冊 · 一致性儀表板。判準不一致的標註餵給模型就是垃圾進垃圾出 (Northcutt et al., 2021)'}</a:t>
+            </a:r>
+          </a:p>
+          <a:p>
+            <a:r>
+              <a:t>【rows】{'label': 'WP-C 脈絡特徵工程｜AI 的前置', 'value': 'W5–12', 'note': '交:規則式脈絡層(刻意先做不含模型的版本,它同時是地端 VLM 的對照基線)· 誤報下降量測。排第五週,是因為沒有前六週基準線就證不出它有效'}</a:t>
+            </a:r>
+          </a:p>
+          <a:p>
+            <a:r>
+              <a:t>【rows】{'label': 'WP-D 爭議回覆自動化｜併行的營運自動化', 'value': 'W8–16', 'note': '交:自動證據包 · 回覆時效改善。🔑 這是六個月裡真正對外交付的商業價值,而且人仍然每一筆都判 —— 它完全不依賴任何自動結案'}</a:t>
+            </a:r>
+          </a:p>
+          <a:p>
+            <a:r>
+              <a:t>【rows】{'label': 'WP-F 治理與移交｜AI 之後', 'value': 'W20–26', 'note': '交:移交文件 · 常態儀表板。六個里程碑 M1–M6 落在 W6 / W10 / W12 / W16 / W24 / W26,那是交東西的時點,不是可喊停的時點'}</a:t>
+            </a:r>
+          </a:p>
+          <a:p>
+            <a:r>
+              <a:t>【這一頁的作用】這頁要讓委員會相信兩件事,而不是相信「我有計畫」。第一:六包裡只有一包是 AI,其餘五包不是繞路 —— 沒有凍結評估集就量不出模型判得準不準,判準不一致的標註餵給模型就是垃圾進垃圾出,所以順序本身就是風險控制。第二:每一道門都寫出「什麼條件下這個案子會停」,包括 G1 可以整案轉向排班方案、G3 可以直接不部署模型端。四臂表則正面回答答辯必問的那一題:六個月怎麼可能算得出無人系統的風險 —— 答案是第四臂影子模式,前三臂全部含人,只有它算得出自動結案的漏放率。</a:t>
             </a:r>
           </a:p>
         </p:txBody>
@@ -968,7 +934,179 @@
           <a:lstStyle/>
           <a:p>
             <a:r>
-              <a:t>【第 12 頁 · 參考文獻(第 11 頁 — 不佔十頁額度)】　目標 5 秒 · 累計 10:00</a:t>
+              <a:t>【第 12 頁 · P10 · 資源、當責與請求】　目標 64 秒 · 累計 11:01</a:t>
+            </a:r>
+          </a:p>
+          <a:p/>
+          <a:p>
+            <a:r>
+              <a:t>★ 我請求核准第一段:四點八五人月、量級四十二到四十七萬,並指定一位贊助人。</a:t>
+            </a:r>
+          </a:p>
+          <a:p/>
+          <a:p>
+            <a:r>
+              <a:t>· 成本主體是人,不是設備</a:t>
+            </a:r>
+          </a:p>
+          <a:p>
+            <a:r>
+              <a:t>· 稽核稅:自動化不是免費的 —— 毛節省要先扣掉盲測稽核</a:t>
+            </a:r>
+          </a:p>
+          <a:p>
+            <a:r>
+              <a:t>· 我要的不只是一筆錢,是一個贊助人跟三道門</a:t>
+            </a:r>
+          </a:p>
+          <a:p/>
+          <a:p>
+            <a:r>
+              <a:t># 4.85 人月 · NT$42–47 萬(規劃,非核定預算)</a:t>
+            </a:r>
+          </a:p>
+          <a:p>
+            <a:r>
+              <a:t># 毛 6.0–12.1 FTE → 稽核稅 0.39–3.14 FTE → 淨 2.9–11.7 FTE</a:t>
+            </a:r>
+          </a:p>
+          <a:p/>
+          <a:p>
+            <a:r>
+              <a:t>⚠️ 🔴 **最後一句講正面那三樣**(可稽核的錯誤率 · 脈絡判斷層 · 對照實驗結果)——🚫 不要停在「不做的代價」。全片的最後一個印象就是這一句</a:t>
+            </a:r>
+          </a:p>
+          <a:p>
+            <a:r>
+              <a:t>⚠️ 🚫 520–1,521 萬是移交後的「可避免增聘」,不是本案承諾的節省額</a:t>
+            </a:r>
+          </a:p>
+          <a:p>
+            <a:r>
+              <a:t>⚠️ 🚫 不得與設備價相減成 ROI</a:t>
+            </a:r>
+          </a:p>
+          <a:p>
+            <a:r>
+              <a:t>⚠️ 在稽核稅、申訴重判與漂移調查三項齊備前,不宣稱任何節省額</a:t>
+            </a:r>
+          </a:p>
+          <a:p/>
+          <a:p>
+            <a:r>
+              <a:t>→ 換下一頁</a:t>
+            </a:r>
+          </a:p>
+          <a:p/>
+          <a:p>
+            <a:r>
+              <a:t>── 逐字備援 · 280 字(忘詞才看,不是拿來唸的)──</a:t>
+            </a:r>
+          </a:p>
+          <a:p>
+            <a:r>
+              <a:t>三個輸入都印在上面,它是量級,不是報價。設備一台十六到二十萬,一次性,不到一個人一年成本的五分之一;這個專案的成本主體是人,不是設備。它也不是為單一用途買的:第二個應用是內部規格文件的技術問答,不在本次請求範圍內,但硬體的攤提對象不只一個。那筆擴編暴露不是承諾的節省;要第十二週實測證明能避免或延後至少一點四到一點七個 loaded FTE-year,業務也確認會轉成少招人或少徵調研發,才放行後續預算。我要的不只預算,是贊助人跟三道門。我請求核准六個月額度輪廓、分段釋出;第一段四點八五人月、量級新台幣四十二到四十七萬,第六週由贊助人決定續不續行。第二十四週我會回到這裡,交出三方比較結果:地端 VLM 有增量,或者沒有。</a:t>
+            </a:r>
+          </a:p>
+          <a:p/>
+          <a:p>
+            <a:r>
+              <a:t>── 備查(不唸,答辯用)──</a:t>
+            </a:r>
+          </a:p>
+          <a:p>
+            <a:r>
+              <a:t>【rows】{'label': '人力(18.2 人月,六包 × 五種角色 + 專案負責人)', 'value': '約 NT$158–177 萬', 'note': '18.2 人月 × 月薪 NT$6.7–7.5 萬 × 間接費率 1.3。薪資量級、費率、匯率(1 A$≈NT$21)三項都是提案人設定的假設 —— 是量級,不是報價'}</a:t>
+            </a:r>
+          </a:p>
+          <a:p>
+            <a:r>
+              <a:t>【rows】{'label': '三年可推算 TCO(兩個數字,🚫 不得合併)', 'value': '六個月專案期(影子模式)約 NT$50–118 萬(中案 72 萬)｜移交後(含稽核)約 NT$173–1,219 萬', 'note': '設備 16–20(一次性)+ 電力三年 0.7–1.9 + 延保三年 2.4–6.0 + 維運監控與模型更新三年 31.2–70.2。維運人力佔 59%–62%。上界跳這麼大不是估算失準,是治理成本的形狀'}</a:t>
+            </a:r>
+          </a:p>
+          <a:p>
+            <a:r>
+              <a:t>【rows】{'label': '可避免的年度增聘(移交後,不是六個月的交付)', 'value': '5–13 人 ≈ NT$520–1,521 萬/年', 'note': '不做本案覆蓋全客戶需 17–24 人(現有 5 人);做本案、移交後開到天花板仍需 11–12 人 —— 仍須增聘 6–7 人,不是不用增聘。公開薪資量級推算,非本案承諾的節省額'}</a:t>
+            </a:r>
+          </a:p>
+          <a:p>
+            <a:r>
+              <a:t>【rows】{'label': '已辨識、尚未估價的五項非人力成本', 'value': '不編金額', 'note': '① 影片儲存 ② 雲端運算 ③ 圖資更新 ④ 測試環境 ⑤ AI 訓練資料蒐集。技術與數據負責人於 G1 前補齊量級。因這五項未估價,人力+設備只能稱「已估成本」'}</a:t>
+            </a:r>
+          </a:p>
+          <a:p>
+            <a:r>
+              <a:t>【這一頁的作用】這頁要在委員會心裡完成三次收斂。第一次:看到「地端 AI」就問「那台機器多少錢」—— 設備價、它相對一個人年成本的 14%–19%、它在已估成本裡的 8%–12%,三秒內收斂成「成本主體是人,不是設備」,避免答辯變成硬體採購的離題辯論。第二次:所有金額都標明是量級不是報價、三個假設輸入都印在畫面上、五項未估價成本逐項列名、TCO 拆成兩個不合併的數字 —— 誠實度不能在唯一的金額上破功。第三次也是最關鍵的一次:稽核稅那一格由提案人自己算出自動化的代價(吃掉毛節省 3%–52%),而放行條件框把「年度擴編暴露」明講成反事實成本、綁上 G2 的可驗證門檻 —— 委員會因此看到的不是一個在推銷 AI 的人,而是一個先幫他們算好帳、並把喊停的權力交回去的人。最後的請求只有兩樣:核准第一段 W1–6,以及指定一個贊助人。</a:t>
+            </a:r>
+          </a:p>
+        </p:txBody>
+      </p:sp>
+      <p:sp>
+        <p:nvSpPr>
+          <p:cNvPr id="4" name="Slide Number Placeholder 3"/>
+          <p:cNvSpPr>
+            <a:spLocks noGrp="1"/>
+          </p:cNvSpPr>
+          <p:nvPr>
+            <p:ph type="sldNum" idx="5" sz="quarter"/>
+          </p:nvPr>
+        </p:nvSpPr>
+        <p:spPr/>
+      </p:sp>
+    </p:spTree>
+  </p:cSld>
+  <p:clrMapOvr>
+    <a:masterClrMapping/>
+  </p:clrMapOvr>
+</p:notes>
+</file>
+
+<file path=ppt/notesSlides/notesSlide13.xml><?xml version="1.0" encoding="utf-8"?>
+<p:notes xmlns:a="http://schemas.openxmlformats.org/drawingml/2006/main" xmlns:p="http://schemas.openxmlformats.org/presentationml/2006/main" xmlns:r="http://schemas.openxmlformats.org/officeDocument/2006/relationships">
+  <p:cSld>
+    <p:spTree>
+      <p:nvGrpSpPr>
+        <p:cNvPr id="1" name=""/>
+        <p:cNvGrpSpPr/>
+        <p:nvPr/>
+      </p:nvGrpSpPr>
+      <p:grpSpPr>
+        <a:xfrm>
+          <a:off x="0" y="0"/>
+          <a:ext cx="0" cy="0"/>
+          <a:chOff x="0" y="0"/>
+          <a:chExt cx="0" cy="0"/>
+        </a:xfrm>
+      </p:grpSpPr>
+      <p:sp>
+        <p:nvSpPr>
+          <p:cNvPr id="2" name="Slide Image Placeholder 1"/>
+          <p:cNvSpPr>
+            <a:spLocks noGrp="1"/>
+          </p:cNvSpPr>
+          <p:nvPr>
+            <p:ph type="sldImg" idx="2"/>
+          </p:nvPr>
+        </p:nvSpPr>
+        <p:spPr/>
+      </p:sp>
+      <p:sp>
+        <p:nvSpPr>
+          <p:cNvPr id="3" name="Notes Placeholder 2"/>
+          <p:cNvSpPr>
+            <a:spLocks noGrp="1"/>
+          </p:cNvSpPr>
+          <p:nvPr>
+            <p:ph type="body" idx="3" sz="quarter"/>
+          </p:nvPr>
+        </p:nvSpPr>
+        <p:spPr/>
+        <p:txBody>
+          <a:bodyPr/>
+          <a:lstStyle/>
+          <a:p>
+            <a:r>
+              <a:t>【第 13 頁 · 參考文獻(第 11 頁 — 不佔十頁額度)】　目標 5 秒 · 累計 11:06</a:t>
             </a:r>
           </a:p>
           <a:p/>
@@ -1111,7 +1249,7 @@
           </a:p>
           <a:p>
             <a:r>
-              <a:t>⚠️ 🚫 不可說「減少人力」「縮編」—— 第 11 頁寫的是仍須增聘 6–7 人。這一頁的主張是**同樣人力、更高產出**</a:t>
+              <a:t>⚠️ 🚫 不可說「減少人力」「縮編」—— 第 12 頁寫的是仍須增聘 6–7 人。這一頁的主張是**同樣人力、更高產出**</a:t>
             </a:r>
           </a:p>
           <a:p>
@@ -1268,7 +1406,7 @@
           <a:p/>
           <a:p>
             <a:r>
-              <a:t>⚠️ 分母是 2.0–5.0 天(內部覆核與回信各 0.25 天)—— 這下跟第 9 頁 KPI 的「全鏈路 2–5 天」一致了</a:t>
+              <a:t>⚠️ 分母是 2.0–5.0 天(內部覆核與回信各 0.25 天)—— 這下跟第 10 頁 KPI 的「全鏈路 2–5 天」一致了</a:t>
             </a:r>
           </a:p>
           <a:p>
@@ -1382,13 +1520,13 @@
           <a:p/>
           <a:p>
             <a:r>
-              <a:t>★ 一百二十四筆誤報,一百零三筆是同一個根因 —— 八成三都是交通標誌辨識。</a:t>
+              <a:t>★ 一百二十四筆誤報,一百零三筆是同一個根因 —— 而修它要的速限資料,公司手上已經有了。</a:t>
             </a:r>
           </a:p>
           <a:p/>
           <a:p>
             <a:r>
-              <a:t>· 行車輔助錯的是模型(缺脈絡),駕駛監控錯的是人(缺判準)</a:t>
+              <a:t>· 行車輔助錯的是模型(缺脈絡),駕駛監控錯的是人(缺判準)—— 兩種病,兩種修法</a:t>
             </a:r>
           </a:p>
           <a:p>
@@ -1398,7 +1536,7 @@
           </a:p>
           <a:p>
             <a:r>
-              <a:t>· 修好它,誤報跟漏放一起改善</a:t>
+              <a:t>· 解它要的東西是速限資料 —— 公司既有資產,不用等新技術也不用買</a:t>
             </a:r>
           </a:p>
           <a:p/>
@@ -1426,6 +1564,11 @@
           <a:p>
             <a:r>
               <a:t>⚠️ 5.25 分是「單一批次的實際節奏,不是長期平均」</a:t>
+            </a:r>
+          </a:p>
+          <a:p>
+            <a:r>
+              <a:t>⚠️ 🚫 不可把 83% 跟第 2 頁的 2:8 相乘 —— 不同樣本、都是估計</a:t>
             </a:r>
           </a:p>
           <a:p/>
@@ -1533,46 +1676,66 @@
           <a:lstStyle/>
           <a:p>
             <a:r>
-              <a:t>【第 5 頁 · P4 · 我們看不見的那一半:有資料,沒有習慣】　目標 59 秒 · 累計 4:54</a:t>
+              <a:t>【第 5 頁 · 選型與部署:兩層模型、一台設備】　目標 66 秒 · 累計 5:01</a:t>
             </a:r>
           </a:p>
           <a:p/>
           <a:p>
             <a:r>
-              <a:t>★ 我們有資料,沒有習慣 —— 被判否決的那一流,沒有人回看。</a:t>
+              <a:t>★ 同一個車隊、同一天:人要 29.8–42.9 人時而產能只有 40,機器一台跑完只用掉三成。</a:t>
             </a:r>
           </a:p>
           <a:p/>
           <a:p>
             <a:r>
-              <a:t>· 唯一的漏放量測是一份很薄的人工觸發測試</a:t>
-            </a:r>
-          </a:p>
-          <a:p>
-            <a:r>
-              <a:t>· 報告上公司自己註明:那是下限</a:t>
-            </a:r>
-          </a:p>
-          <a:p>
-            <a:r>
-              <a:t>· 誤報只花我們的人時,漏放是駕駛沒收到那次警示</a:t>
+              <a:t>· 篩檢層 Qwen3.5 122B-A10B(4-bit,MoE 活化 10B):不讀小字,只決定要不要深看</a:t>
+            </a:r>
+          </a:p>
+          <a:p>
+            <a:r>
+              <a:t>· 深挖層 Qwen2.5-VL 72B(8-bit):讀交通標誌,只跑爭議那 5–10%</a:t>
+            </a:r>
+          </a:p>
+          <a:p>
+            <a:r>
+              <a:t>· 分兩層的理由:讀小字要高解析度,高解析度就慢 —— 全量用高解析度跑不完</a:t>
             </a:r>
           </a:p>
           <a:p/>
           <a:p>
             <a:r>
-              <a:t># 39 筆測試 · 漏偵 12 筆 · 另 10 筆無法歸類(約 1/4)</a:t>
+              <a:t># DGX Spark · 128 GB 統一記憶體 · 273 GB/s · NT$16–20 萬/台</a:t>
+            </a:r>
+          </a:p>
+          <a:p>
+            <a:r>
+              <a:t># 篩檢 3.4 秒/筆 × 3,000 = 2.8 小時 · 深挖 62 秒/筆 × 150–300 = 2.6–5.1 小時</a:t>
+            </a:r>
+          </a:p>
+          <a:p>
+            <a:r>
+              <a:t># 一台合計 5.4–8.0 小時/天(佔用率 23%–33%);全客戶 13,000 筆時才需要第二台</a:t>
             </a:r>
           </a:p>
           <a:p/>
           <a:p>
             <a:r>
-              <a:t>⚠️ 說「最強的線索,不是結論」—— W1–6 做成帶 95% 信賴區間的估計,不成立就換靶心</a:t>
-            </a:r>
-          </a:p>
-          <a:p>
-            <a:r>
-              <a:t>⚠️ 🚫 83% 是第 4 頁的事,不要跟這一頁的漏放混講</a:t>
+              <a:t>⚠️ 🚫 **不可說「8-bit 無損精度」** —— 8-bit 量化是有損的,只是損失小於 4-bit。評分者做 VLM,這句他會當場糾正</a:t>
+            </a:r>
+          </a:p>
+          <a:p>
+            <a:r>
+              <a:t>⚠️ 所有秒數都要說「推算」—— 這些是我依公開實測頻寬算的,不是我們跑過的</a:t>
+            </a:r>
+          </a:p>
+          <a:p>
+            <a:r>
+              <a:t>⚠️ 他若問「為什麼是 Qwen 不是別的」:開源、可地端、原生吃影片;而**選型本身也要 G1 依 W1–6 的量測複核**</a:t>
+            </a:r>
+          </a:p>
+          <a:p>
+            <a:r>
+              <a:t>⚠️ 他若問「4-bit 讀不讀得到小字」:讀不到 —— 所以那是深挖層的工作,篩檢層只做分流</a:t>
             </a:r>
           </a:p>
           <a:p/>
@@ -1584,12 +1747,12 @@
           <a:p/>
           <a:p>
             <a:r>
-              <a:t>── 逐字備援 · 259 字(忘詞才看,不是拿來唸的)──</a:t>
-            </a:r>
-          </a:p>
-          <a:p>
-            <a:r>
-              <a:t>這是我們看得見的一半。看不見的那一半更麻煩。被判否決的那一流,沒有人回看。我們有資料,沒有習慣。唯一的漏放量測,是一份三十九筆的人工觸發測試,獨立樣本:漏偵十二筆,另外十筆無法歸類,約四分之一;報告上我們自己註明,十二是下限。這是我目前手上最強的線索,不是結論;前六週由評估底座那一包做成帶信賴區間的估計,不成立就換靶心,G1 判。這兩種錯的代價不對稱:誤報只花我們的人時,漏放是駕駛沒收到那次警示。所以漏放這一側就算樣本再薄,也要先把它量出來。這批資料難在三件事:收得不完整、標註本身就會錯、內部對同一個標籤還沒有一致的理解。文獻上講的「沒有真實資料就只能靠代理指標」,就是這件事。</a:t>
+              <a:t>── 逐字備援 · 292 字(忘詞才看,不是拿來唸的)──</a:t>
+            </a:r>
+          </a:p>
+          <a:p>
+            <a:r>
+              <a:t>那要用什麼跑?兩個開源的視覺語言模型,都在地端,影像不外傳。篩檢層是 MoE,一百二十二 B 只活化十 B,算得快;它不讀小字,只決定這筆要不要深看。深挖層讀得到交通標誌上的字,只跑客戶回頭爭議的那百分之五到十。分兩層的理由就在這:讀小字要高解析度,而高解析度就慢。設備是 DGX Spark,一百二十八 G 統一記憶體,一台十六到二十萬;它的瓶頸不是算力,是記憶體頻寬 —— 那決定吐字的速度。兩個模型各佔約七十五 G,加起來超過一百二十八,所以分時載入。各位看最下面這一行:同一個車隊、同一天,人要二十九點八到四十二點九人時,而我們的產能只有四十;機器五點四到八小時,一台就跑完,佔用率不到三成。擴到全客戶一萬三千筆的時候一台就不夠了 —— 那時候串第二台,那是第一道門的決定。</a:t>
             </a:r>
           </a:p>
           <a:p/>
@@ -1600,52 +1763,7 @@
           </a:p>
           <a:p>
             <a:r>
-              <a:t>【compare:看得見的一半:誤報 - 量得到】該樣本全部誤報 124 筆中,103 筆根因同一個 = 83%(公司自己的口徑;比例僅在此樣本內成立)</a:t>
-            </a:r>
-          </a:p>
-          <a:p>
-            <a:r>
-              <a:t>【compare:看得見的一半:誤報 - 量得到】為什麼量得到:誤報是「已經送出去、被人看到」的錯 - 人工複核那一流,每一筆都被人看過</a:t>
-            </a:r>
-          </a:p>
-          <a:p>
-            <a:r>
-              <a:t>【compare:看不見的一半:漏放 - 量不到】能力有、流程沒有:記憶卡存整天分段影片,遠端調閱一台裝置一整天約 10-15 分鐘、有流量成本;但沒有任何常設流程去回看被判否決的那一流</a:t>
-            </a:r>
-          </a:p>
-          <a:p>
-            <a:r>
-              <a:t>【compare:看不見的一半:漏放 - 量不到】所以錯誤會留下來:沒有人回看 → 那一區永遠不產生新標註 → 模型在那個區域學不到東西 → 漏放繼續發生,而且不進任何一份報表(Ensign et al., 2018)</a:t>
-            </a:r>
-          </a:p>
-          <a:p>
-            <a:r>
-              <a:t>【compare:看不見的一半:漏放 - 量不到】代價:漏放是駕駛沒收到那次警示 - 落在安全側,不落在報表上</a:t>
-            </a:r>
-          </a:p>
-          <a:p>
-            <a:r>
-              <a:t>【rows】{'label': '這份測試是什麼', 'value': '39 筆人工觸發測試', 'note': '獨立樣本,非 1,647 筆母體;一次性測試,不是常設量測 - 這是公司到今天唯一的漏放數字', 'hot': False}</a:t>
-            </a:r>
-          </a:p>
-          <a:p>
-            <a:r>
-              <a:t>【rows】{'label': '正確偵測', 'value': '17 / 39', 'note': '人工觸發後有被偵測到', 'hot': False}</a:t>
-            </a:r>
-          </a:p>
-          <a:p>
-            <a:r>
-              <a:t>【rows】{'label': '待客戶說明用途,無法歸類', 'value': '10 / 39 ≈ 四分之一', 'note': '四分之一的樣本連歸類都做不到 - 這一列本身就是「樣本有多薄」的證據', 'hot': False}</a:t>
-            </a:r>
-          </a:p>
-          <a:p>
-            <a:r>
-              <a:t>【rows】{'label': '我對這條線索的定性', 'value': '線索,不是結論', 'note': 'W1-6 由評估底座那一包做成帶信賴區間的估計;不成立就換靶心,G1(第 6 週)判', 'hot': True}</a:t>
-            </a:r>
-          </a:p>
-          <a:p>
-            <a:r>
-              <a:t>【這一頁的作用】這一頁把「為什麼第一筆錢要買量測,而不是買模型」變成委員會看得見的東西:左邊誤報有母體、有比例、有根因,右邊漏放只有一份 39 筆、自註為下限、還有四分之一無法歸類 - 兩側證據強度的落差本身就是提案的理由。同時它用真實案例數據(1,647 筆樣本、103/124、39 筆測試、6/12)證明痛點不是修辭,再用 Ensign 的回饋迴路說明「沒有人回看的那一流」為什麼會讓錯誤永久留下,把痛點從『這次判錯了』升級成『這個錯誤系統性地不會被發現』。最後主動把最強的線索降級成假說並綁到 G1,誠實度因此是被證明的而不是被宣稱的。</a:t>
+              <a:t>【這一頁的作用】委員會要的不是「我們很忙」,是「痛點有多嚴重、而且解得掉」。這頁先用一件真的做完的案子把嚴重性量出來(1,647 筆吃掉 5 個人 3.6 個工作日 = 144 人時),再把病拆成兩種(行車輔助錯的是模型、駕駛監控錯的是人),最後匯流到一個可工程化的靶心:八成三的誤報同一個根因,而解它要的速限資料公司已經有、今天就能動。這是整份提案裡投報最可信的一格 —— 靶心明確、資產已備、且母體與證據等級全部自己標了出來,答辯時沒有可攻擊的空隙。</a:t>
             </a:r>
           </a:p>
         </p:txBody>
@@ -1715,51 +1833,46 @@
           <a:lstStyle/>
           <a:p>
             <a:r>
-              <a:t>【第 6 頁 · P5 · 五條路,含三條不用 AI】　目標 44 秒 · 累計 5:38</a:t>
+              <a:t>【第 6 頁 · P4 · 我們看不見的那一半:有資料,沒有習慣】　目標 59 秒 · 累計 6:00</a:t>
             </a:r>
           </a:p>
           <a:p/>
           <a:p>
             <a:r>
-              <a:t>★ 這六個月,它一筆都不對外生效。</a:t>
+              <a:t>★ 我們有資料,沒有習慣 —— 被判否決的那一流,沒有人回看。</a:t>
             </a:r>
           </a:p>
           <a:p/>
           <a:p>
             <a:r>
-              <a:t>· 五條路裡三條不用 AI —— 加人、調班、既有雲端規劃,我都沒有先否決</a:t>
-            </a:r>
-          </a:p>
-          <a:p>
-            <a:r>
-              <a:t>· 採用案是地端視覺語言模型;前兩包是它的必要前置</a:t>
-            </a:r>
-          </a:p>
-          <a:p>
-            <a:r>
-              <a:t>· 影子模式:機器照出結論但不對外送,人照常判,兩邊比對</a:t>
+              <a:t>· 唯一的漏放量測是一份很薄的人工觸發測試</a:t>
+            </a:r>
+          </a:p>
+          <a:p>
+            <a:r>
+              <a:t>· 報告上公司自己註明:那是下限</a:t>
+            </a:r>
+          </a:p>
+          <a:p>
+            <a:r>
+              <a:t>· 誤報只花我們的人時,漏放是駕駛沒收到那次警示</a:t>
             </a:r>
           </a:p>
           <a:p/>
           <a:p>
             <a:r>
-              <a:t># 85% 是分流率(推估非實測) · 六個月對外覆蓋率 0%</a:t>
+              <a:t># 39 筆測試 · 漏偵 12 筆 · 另 10 筆無法歸類(約 1/4)</a:t>
             </a:r>
           </a:p>
           <a:p/>
           <a:p>
             <a:r>
-              <a:t>⚠️ 三層一層都不可省:能力層 850 筆終局判定 / 本案層 對外 0% / 放行層 須過另一道獨立門</a:t>
-            </a:r>
-          </a:p>
-          <a:p>
-            <a:r>
-              <a:t>⚠️ 🚫 不可說「AI 不做判定」—— 正確講法是「AI 會做結案判定,但這六個月不對外生效」</a:t>
-            </a:r>
-          </a:p>
-          <a:p>
-            <a:r>
-              <a:t>⚠️ 🚫 85% 是分流率,不是準確率,不可與誤報率並排相減</a:t>
+              <a:t>⚠️ 說「最強的線索,不是結論」—— W1–6 做成帶 95% 信賴區間的估計,不成立就換靶心</a:t>
+            </a:r>
+          </a:p>
+          <a:p>
+            <a:r>
+              <a:t>⚠️ 🚫 83% 是第 4 頁的事,不要跟這一頁的漏放混講</a:t>
             </a:r>
           </a:p>
           <a:p/>
@@ -1771,12 +1884,12 @@
           <a:p/>
           <a:p>
             <a:r>
-              <a:t>── 逐字備援 · 195 字(忘詞才看,不是拿來唸的)──</a:t>
-            </a:r>
-          </a:p>
-          <a:p>
-            <a:r>
-              <a:t>路有五條。加人,迴路轉得更久,不會停。更便宜的是調班加人力池,我不先否決;六週後那道門用正式量測判:AI能處理的那段佔主要延遲才放行,否則轉排班。採用案是地端視覺語言模型讀事件影片。前兩包是它的必要前置:沒量測底座,就不知道它判得對不對。預期八成五的爭議件,機器有把握、直接結案,人不再看。這是推估不是實測;而人現在判得多準,我們沒量過。所以這六個月,它一筆都不對外生效——機器照出結論,人照常判,兩邊比對。這是唯一算得出自動結案漏放率的設計。</a:t>
+              <a:t>── 逐字備援 · 259 字(忘詞才看,不是拿來唸的)──</a:t>
+            </a:r>
+          </a:p>
+          <a:p>
+            <a:r>
+              <a:t>這是我們看得見的一半。看不見的那一半更麻煩。被判否決的那一流,沒有人回看。我們有資料,沒有習慣。唯一的漏放量測,是一份三十九筆的人工觸發測試,獨立樣本:漏偵十二筆,另外十筆無法歸類,約四分之一;報告上我們自己註明,十二是下限。這是我目前手上最強的線索,不是結論;前六週由評估底座那一包做成帶信賴區間的估計,不成立就換靶心,G1 判。這兩種錯的代價不對稱:誤報只花我們的人時,漏放是駕駛沒收到那次警示。所以漏放這一側就算樣本再薄,也要先把它量出來。這批資料難在三件事:收得不完整、標註本身就會錯、內部對同一個標籤還沒有一致的理解。文獻上講的「沒有真實資料就只能靠代理指標」,就是這件事。</a:t>
             </a:r>
           </a:p>
           <a:p/>
@@ -1787,7 +1900,52 @@
           </a:p>
           <a:p>
             <a:r>
-              <a:t>【這一頁的作用】這一頁要讓委員會相信兩件事。第一,這個 AI 提案是被比較過的:五條路用同一組欄位並排 - 做什麼、成本形狀、能不能停、為什麼 - 差別因此不再是五段等長的描述,而是四種可以一眼分辨的曲線(線性 / 線性但削峰 / 一次性下移一階 / 次線性 / 尚未開始),而唯一不是線性的那一條就是採用案。第二,這個提案是可以被否決的:最便宜的調班沒有被畫醜也沒有被預先否決,選項 0 用最保守、對本案最不利的算法拒絕,G1 有兩個同粗的出口,其中一個出口通向不做本案。最後把 85% 降級成一個要在 W12 被凍結測試集驗、而且六個月內一筆都不對外生效的推估 - 委員會今天核准的是一道可以否決自己的量測,不是一個 85% 的承諾。</a:t>
+              <a:t>【compare:看得見的一半:誤報 - 量得到】該樣本全部誤報 124 筆中,103 筆根因同一個 = 83%(公司自己的口徑;比例僅在此樣本內成立)</a:t>
+            </a:r>
+          </a:p>
+          <a:p>
+            <a:r>
+              <a:t>【compare:看得見的一半:誤報 - 量得到】為什麼量得到:誤報是「已經送出去、被人看到」的錯 - 人工複核那一流,每一筆都被人看過</a:t>
+            </a:r>
+          </a:p>
+          <a:p>
+            <a:r>
+              <a:t>【compare:看不見的一半:漏放 - 量不到】能力有、流程沒有:記憶卡存整天分段影片,遠端調閱一台裝置一整天約 10-15 分鐘、有流量成本;但沒有任何常設流程去回看被判否決的那一流</a:t>
+            </a:r>
+          </a:p>
+          <a:p>
+            <a:r>
+              <a:t>【compare:看不見的一半:漏放 - 量不到】所以錯誤會留下來:沒有人回看 → 那一區永遠不產生新標註 → 模型在那個區域學不到東西 → 漏放繼續發生,而且不進任何一份報表(Ensign et al., 2018)</a:t>
+            </a:r>
+          </a:p>
+          <a:p>
+            <a:r>
+              <a:t>【compare:看不見的一半:漏放 - 量不到】代價:漏放是駕駛沒收到那次警示 - 落在安全側,不落在報表上</a:t>
+            </a:r>
+          </a:p>
+          <a:p>
+            <a:r>
+              <a:t>【rows】{'label': '這份測試是什麼', 'value': '39 筆人工觸發測試', 'note': '獨立樣本,非 1,647 筆母體;一次性測試,不是常設量測 - 這是公司到今天唯一的漏放數字', 'hot': False}</a:t>
+            </a:r>
+          </a:p>
+          <a:p>
+            <a:r>
+              <a:t>【rows】{'label': '正確偵測', 'value': '17 / 39', 'note': '人工觸發後有被偵測到', 'hot': False}</a:t>
+            </a:r>
+          </a:p>
+          <a:p>
+            <a:r>
+              <a:t>【rows】{'label': '待客戶說明用途,無法歸類', 'value': '10 / 39 ≈ 四分之一', 'note': '四分之一的樣本連歸類都做不到 - 這一列本身就是「樣本有多薄」的證據', 'hot': False}</a:t>
+            </a:r>
+          </a:p>
+          <a:p>
+            <a:r>
+              <a:t>【rows】{'label': '我對這條線索的定性', 'value': '線索,不是結論', 'note': 'W1-6 由評估底座那一包做成帶信賴區間的估計;不成立就換靶心,G1(第 6 週)判', 'hot': True}</a:t>
+            </a:r>
+          </a:p>
+          <a:p>
+            <a:r>
+              <a:t>【這一頁的作用】這一頁把「為什麼第一筆錢要買量測,而不是買模型」變成委員會看得見的東西:左邊誤報有母體、有比例、有根因,右邊漏放只有一份 39 筆、自註為下限、還有四分之一無法歸類 - 兩側證據強度的落差本身就是提案的理由。同時它用真實案例數據(1,647 筆樣本、103/124、39 筆測試、6/12)證明痛點不是修辭,再用 Ensign 的回饋迴路說明「沒有人回看的那一流」為什麼會讓錯誤永久留下,把痛點從『這次判錯了』升級成『這個錯誤系統性地不會被發現』。最後主動把最強的線索降級成假說並綁到 G1,誠實度因此是被證明的而不是被宣稱的。</a:t>
             </a:r>
           </a:p>
         </p:txBody>
@@ -1857,90 +2015,79 @@
           <a:lstStyle/>
           <a:p>
             <a:r>
-              <a:t>【第 7 頁 · P6 · 風險:七類十條,緩解位移與殘餘風險】　目標 51 秒 · 累計 6:29</a:t>
+              <a:t>【第 7 頁 · P5 · 五條路,含三條不用 AI】　目標 44 秒 · 累計 6:44</a:t>
             </a:r>
           </a:p>
           <a:p/>
           <a:p>
             <a:r>
-              <a:t>★ 每一條風險我都附了偵測訊號 —— 你不會在事後才知道它發生了。</a:t>
+              <a:t>★ 這六個月,它一筆都不對外生效。</a:t>
             </a:r>
           </a:p>
           <a:p/>
           <a:p>
             <a:r>
-              <a:t>· 七類十條,兩條是這個方案自己造成的 —— 我沒有藏,自己標出來</a:t>
-            </a:r>
-          </a:p>
-          <a:p>
-            <a:r>
-              <a:t>· 自動化偏差:介面一顯示模型信心,人就直接蓋章 → 我的決策是不顯示</a:t>
-            </a:r>
-          </a:p>
-          <a:p>
-            <a:r>
-              <a:t>· 但那個緩解只擋得住人還在看的那些 —— 移交後那八成五沒有介面也沒有人,所以我另外加了 R9、R10 兩條,掛在自動結案那道門上</a:t>
+              <a:t>· 五條路裡三條不用 AI —— 加人、調班、既有雲端規劃,我都沒有先否決</a:t>
+            </a:r>
+          </a:p>
+          <a:p>
+            <a:r>
+              <a:t>· 採用案是地端視覺語言模型;前兩包是它的必要前置</a:t>
+            </a:r>
+          </a:p>
+          <a:p>
+            <a:r>
+              <a:t>· 影子模式:機器照出結論但不對外送,人照常判,兩邊比對</a:t>
             </a:r>
           </a:p>
           <a:p/>
           <a:p>
             <a:r>
-              <a:t># 七類十條 · R9 自動結案的漏放 · R10 自動結案的冤枉</a:t>
+              <a:t># 85% 是分流率(推估非實測) · 六個月對外覆蓋率 0%</a:t>
             </a:r>
           </a:p>
           <a:p/>
           <a:p>
             <a:r>
-              <a:t>⚠️ R8 法律面我沒有答案 —— 由法務在 G1(第 6 週)前給書面意見</a:t>
-            </a:r>
-          </a:p>
-          <a:p>
-            <a:r>
-              <a:t>⚠️ 每一條沒有答案的事,都要當場交代誰在第幾週給</a:t>
+              <a:t>⚠️ 三層一層都不可省:能力層 850 筆終局判定 / 本案層 對外 0% / 放行層 須過另一道獨立門</a:t>
+            </a:r>
+          </a:p>
+          <a:p>
+            <a:r>
+              <a:t>⚠️ 🚫 不可說「AI 不做判定」—— 正確講法是「AI 會做結案判定,但這六個月不對外生效」</a:t>
+            </a:r>
+          </a:p>
+          <a:p>
+            <a:r>
+              <a:t>⚠️ 🚫 85% 是分流率,不是準確率,不可與誤報率並排相減</a:t>
             </a:r>
           </a:p>
           <a:p/>
           <a:p>
             <a:r>
-              <a:t>── 錄影提示(不唸)──</a:t>
-            </a:r>
-          </a:p>
-          <a:p>
-            <a:r>
-              <a:t>· 錄影標記:唸完「這題我沒有答案,它由法務在 G1 前給書面意見」整句後,畫面停在 R8 的紅色虛線圈上靜止 2 秒、口白不出聲,再切下一頁。停頓點在整句句尾,不在「我沒有答案」之後 —— 每一條沒有答案的事都要當場交代誰在什麼時候給答案,停頓要停在那句話說完之後,長度仍為 2 秒。</a:t>
-            </a:r>
-          </a:p>
-          <a:p>
-            <a:r>
-              <a:t>· 唸完法務那句後,畫面停在 R8 紅圈上靜止 2 秒</a:t>
+              <a:t>→ 換下一頁</a:t>
             </a:r>
           </a:p>
           <a:p/>
           <a:p>
             <a:r>
-              <a:t>→ 換下一頁</a:t>
+              <a:t>── 逐字備援 · 195 字(忘詞才看,不是拿來唸的)──</a:t>
+            </a:r>
+          </a:p>
+          <a:p>
+            <a:r>
+              <a:t>路有五條。加人,迴路轉得更久,不會停。更便宜的是調班加人力池,我不先否決;六週後那道門用正式量測判:AI能處理的那段佔主要延遲才放行,否則轉排班。採用案是地端視覺語言模型讀事件影片。前兩包是它的必要前置:沒量測底座,就不知道它判得對不對。預期八成五的爭議件,機器有把握、直接結案,人不再看。這是推估不是實測;而人現在判得多準,我們沒量過。所以這六個月,它一筆都不對外生效——機器照出結論,人照常判,兩邊比對。這是唯一算得出自動結案漏放率的設計。</a:t>
             </a:r>
           </a:p>
           <a:p/>
           <a:p>
             <a:r>
-              <a:t>── 逐字備援 · 223 字(忘詞才看,不是拿來唸的)──</a:t>
-            </a:r>
-          </a:p>
-          <a:p>
-            <a:r>
-              <a:t>選了這條,我先講它會出什麼事。風險歸成七類十條,我只講三條。第一,資料級聯:複核判準不一致會變成訓練標籤,脈絡資料有錯也會整批傳下去。第二,自動化偏差:介面一顯示模型信心,人就直接蓋章。我的決策是介面不顯示信心。但這個緩解只擋得住人還在看的那些 —— 移交後開到天花板,那八成五沒有介面、也沒有人。所以我另外加了兩條:機器把真的危險事件判成誤報,跟機器單方面駁回駕駛。兩條都掛在自動結案那道門上,不在這六個月裡。第三,法律面:曾判為誤報的紀錄,在事故舉證裡算什麼。這題我沒有答案,它由法務在 G1 前給書面意見。</a:t>
-            </a:r>
-          </a:p>
-          <a:p/>
-          <a:p>
-            <a:r>
               <a:t>── 備查(不唸,答辯用)──</a:t>
             </a:r>
           </a:p>
           <a:p>
             <a:r>
-              <a:t>【這一頁的作用】直接修 Kenny 第 6 點:原版 2D 位移圖看得到「移動了多少」卻看不到「哪一條對應什麼解法」。改成一列一條風險、同一列並排緩解 → 緩解自己的代價 → 偵測訊號,委員會用眼睛掃一行就答得出「這條誰負責、怎麼知道它壞了」。三條紅底是本頁的說服力來源:R8 承認沒有解、R9/R10 承認是這個 AI 方案自己製造的新風險(自動結案的漏放與冤枉),並且把它們的放行責任明確推到本案之外那道門 —— 主動揭露換取委員會對其餘七條的信任。成功可能性標在每條風險名右側,補上評分要求的第三個維度。</a:t>
+              <a:t>【這一頁的作用】這一頁要讓委員會相信兩件事。第一,這個 AI 提案是被比較過的:五條路用同一組欄位並排 - 做什麼、成本形狀、能不能停、為什麼 - 差別因此不再是五段等長的描述,而是四種可以一眼分辨的曲線(線性 / 線性但削峰 / 一次性下移一階 / 次線性 / 尚未開始),而唯一不是線性的那一條就是採用案。第二,這個提案是可以被否決的:最便宜的調班沒有被畫醜也沒有被預先否決,選項 0 用最保守、對本案最不利的算法拒絕,G1 有兩個同粗的出口,其中一個出口通向不做本案。最後把 85% 降級成一個要在 W12 被凍結測試集驗、而且六個月內一筆都不對外生效的推估 - 委員會今天核准的是一道可以否決自己的量測,不是一個 85% 的承諾。</a:t>
             </a:r>
           </a:p>
         </p:txBody>
@@ -2010,46 +2157,46 @@
           <a:lstStyle/>
           <a:p>
             <a:r>
-              <a:t>【第 8 頁 · P7 · 倫理與可申訴性:對照澳洲 AI 倫理八原則】　目標 50 秒 · 累計 7:18</a:t>
+              <a:t>【第 8 頁 · P6 · 風險:七類十條,緩解位移與殘餘風險】　目標 51 秒 · 累計 7:35</a:t>
             </a:r>
           </a:p>
           <a:p/>
           <a:p>
             <a:r>
-              <a:t>★ 這一頁就是我要求六個月不對外生效的理由 —— 那 850 筆沒有人看,所以要先量得出它錯多少。</a:t>
+              <a:t>★ 每一條風險我都附了偵測訊號 —— 你不會在事後才知道它發生了。</a:t>
             </a:r>
           </a:p>
           <a:p/>
           <a:p>
             <a:r>
-              <a:t>· 同一張表兩欄:專案期一種顏色,移交後另一種 —— 今天要批的是左邊那欄</a:t>
-            </a:r>
-          </a:p>
-          <a:p>
-            <a:r>
-              <a:t>· 第 7 條可申訴性 —— 我把它升為部署否決條件</a:t>
-            </a:r>
-          </a:p>
-          <a:p>
-            <a:r>
-              <a:t>· 第 8 條問責性:那 850 筆裡某一筆判錯,沒有人簽過名</a:t>
+              <a:t>· 七類十條,兩條是這個方案自己造成的 —— 我沒有藏,自己標出來</a:t>
+            </a:r>
+          </a:p>
+          <a:p>
+            <a:r>
+              <a:t>· 自動化偏差:介面一顯示模型信心,人就直接蓋章 → 我的決策是不顯示</a:t>
+            </a:r>
+          </a:p>
+          <a:p>
+            <a:r>
+              <a:t>· 但那個緩解只擋得住人還在看的那些 —— 移交後那八成五沒有介面也沒有人,所以我另外加了 R9、R10 兩條,掛在自動結案那道門上</a:t>
             </a:r>
           </a:p>
           <a:p/>
           <a:p>
             <a:r>
-              <a:t># 專案期 綠 0 琥珀 7 紅 1 → 移交後 綠 0 琥珀 1 紅 7</a:t>
+              <a:t># 七類十條 · R9 自動結案的漏放 · R10 自動結案的冤枉</a:t>
             </a:r>
           </a:p>
           <a:p/>
           <a:p>
             <a:r>
-              <a:t>⚠️ 「沒有人簽過名」是**承認洞**,🚫 不要臨場補一個人上去</a:t>
-            </a:r>
-          </a:p>
-          <a:p>
-            <a:r>
-              <a:t>⚠️ 第 4 條隱私是唯一不因自動結案惡化的一條 —— 刻意不標紅,不是漏標</a:t>
+              <a:t>⚠️ R8 法律面我沒有答案 —— 由法務在 G1(第 6 週)前給書面意見</a:t>
+            </a:r>
+          </a:p>
+          <a:p>
+            <a:r>
+              <a:t>⚠️ 每一條沒有答案的事,都要當場交代誰在第幾週給</a:t>
             </a:r>
           </a:p>
           <a:p/>
@@ -2060,12 +2207,12 @@
           </a:p>
           <a:p>
             <a:r>
-              <a:t>· 錄影標記:唸到「可申訴性,我們不及格」時切全螢幕人像,唸完該句後切回畫中畫。</a:t>
-            </a:r>
-          </a:p>
-          <a:p>
-            <a:r>
-              <a:t>· 交界移交:P7 → P8 的接縫句為「講完該不該做,接下來是怎麼算做成了。」依總則檔 §6b,該句寫成 P8 口白的第一句、字數計入 P8,故不列入本頁 224 字。</a:t>
+              <a:t>· 錄影標記:唸完「這題我沒有答案,它由法務在 G1 前給書面意見」整句後,畫面停在 R8 的紅色虛線圈上靜止 2 秒、口白不出聲,再切下一頁。停頓點在整句句尾,不在「我沒有答案」之後 —— 每一條沒有答案的事都要當場交代誰在什麼時候給答案,停頓要停在那句話說完之後,長度仍為 2 秒。</a:t>
+            </a:r>
+          </a:p>
+          <a:p>
+            <a:r>
+              <a:t>· 唸完法務那句後,畫面停在 R8 紅圈上靜止 2 秒</a:t>
             </a:r>
           </a:p>
           <a:p/>
@@ -2077,12 +2224,12 @@
           <a:p/>
           <a:p>
             <a:r>
-              <a:t>── 逐字備援 · 219 字(忘詞才看,不是拿來唸的)──</a:t>
-            </a:r>
-          </a:p>
-          <a:p>
-            <a:r>
-              <a:t>還有一條,是我們自己造成的。這道人工防線的產能有限,所以它是配給的 —— 依客戶的購買量排序。同樣一個誤判,發生在大客戶身上會被人攔下來,小客戶身上不會。分配依據是客戶大小,不是風險大小。這六個月我能做的,是第一次量得出它覆蓋了誰。但我要說清楚:這個方案開到天花板之後,配給的依據會從客戶大小換成機器的信心,而那八成五沒有人看過 —— 那是我造成的新問題,不是我解掉的舊問題。所以八原則裡的問責跟可申訴性,我這一頁全部標紅,而它們掛在第二十四週那道門上。申訴機制到位前,本案產出不供個人考核使用。</a:t>
+              <a:t>── 逐字備援 · 223 字(忘詞才看,不是拿來唸的)──</a:t>
+            </a:r>
+          </a:p>
+          <a:p>
+            <a:r>
+              <a:t>選了這條,我先講它會出什麼事。風險歸成七類十條,我只講三條。第一,資料級聯:複核判準不一致會變成訓練標籤,脈絡資料有錯也會整批傳下去。第二,自動化偏差:介面一顯示模型信心,人就直接蓋章。我的決策是介面不顯示信心。但這個緩解只擋得住人還在看的那些 —— 移交後開到天花板,那八成五沒有介面、也沒有人。所以我另外加了兩條:機器把真的危險事件判成誤報,跟機器單方面駁回駕駛。兩條都掛在自動結案那道門上,不在這六個月裡。第三,法律面:曾判為誤報的紀錄,在事故舉證裡算什麼。這題我沒有答案,它由法務在 G1 前給書面意見。</a:t>
             </a:r>
           </a:p>
           <a:p/>
@@ -2093,7 +2240,7 @@
           </a:p>
           <a:p>
             <a:r>
-              <a:t>【這一頁的作用】直接修 Kenny 第 7 點的後半:這一頁先用標題回答「為什麼一個 AI 提案要談倫理」—— 因為這個方案的產出就是把每 1,000 筆爭議裡約 850 筆變成沒有人看過的判定,那是它的代價,不是外掛的合規章節。雙欄評等讓委員會當場知道自己今天批的是哪一欄(專案期,影子模式,人仍逐筆判),而移交後那七盞紅燈全部掛在第 24 週那道門上;第 4 條保持白底是刻意的對照 —— 它是唯一不因自動結案而惡化的一條。全頁綠燈零條不是失分,是把「移交條件」寫成可稽核的待辦清單,也把前六週的預算正當化成把紅燈變回琥珀的唯一路徑。</a:t>
+              <a:t>【這一頁的作用】直接修 Kenny 第 6 點:原版 2D 位移圖看得到「移動了多少」卻看不到「哪一條對應什麼解法」。改成一列一條風險、同一列並排緩解 → 緩解自己的代價 → 偵測訊號,委員會用眼睛掃一行就答得出「這條誰負責、怎麼知道它壞了」。三條紅底是本頁的說服力來源:R8 承認沒有解、R9/R10 承認是這個 AI 方案自己製造的新風險(自動結案的漏放與冤枉),並且把它們的放行責任明確推到本案之外那道門 —— 主動揭露換取委員會對其餘七條的信任。成功可能性標在每條風險名右側,補上評分要求的第三個維度。</a:t>
             </a:r>
           </a:p>
         </p:txBody>
@@ -2163,63 +2310,79 @@
           <a:lstStyle/>
           <a:p>
             <a:r>
-              <a:t>【第 9 頁 · P8 · 怎麼算成功:三層 KPI,一條回圈】　目標 46 秒 · 累計 8:04</a:t>
+              <a:t>【第 9 頁 · P7 · 倫理與可申訴性:對照澳洲 AI 倫理八原則】　目標 50 秒 · 累計 8:25</a:t>
             </a:r>
           </a:p>
           <a:p/>
           <a:p>
             <a:r>
-              <a:t>★ 上面兩層是你買到的東西,下面四條是你隨時喊停的權力 —— 而煞車是我自己裝的。</a:t>
+              <a:t>★ 這一頁就是我要求六個月不對外生效的理由 —— 那 850 筆沒有人看,所以要先量得出它錯多少。</a:t>
             </a:r>
           </a:p>
           <a:p/>
           <a:p>
             <a:r>
-              <a:t>· 效益層:爭議回覆時效、可避免的年度增聘、兩條工作流的單位工時</a:t>
-            </a:r>
-          </a:p>
-          <a:p>
-            <a:r>
-              <a:t>· 護欄層任一未達標,上面兩層的成績一律不採計</a:t>
-            </a:r>
-          </a:p>
-          <a:p>
-            <a:r>
-              <a:t>· 訂不出目標值的,寫明由哪一道門訂</a:t>
+              <a:t>· 同一張表兩欄:專案期一種顏色,移交後另一種 —— 今天要批的是左邊那欄</a:t>
+            </a:r>
+          </a:p>
+          <a:p>
+            <a:r>
+              <a:t>· 第 7 條可申訴性 —— 我把它升為部署否決條件</a:t>
+            </a:r>
+          </a:p>
+          <a:p>
+            <a:r>
+              <a:t>· 第 8 條問責性:那 850 筆裡某一筆判錯,沒有人簽過名</a:t>
             </a:r>
           </a:p>
           <a:p/>
           <a:p>
             <a:r>
-              <a:t># ⑩ 漏放率 W6 交 95% CI · ⑬ 漏濾率 W12 交差值 95% CI</a:t>
-            </a:r>
-          </a:p>
-          <a:p>
-            <a:r>
-              <a:t># δ 由委員會在 G1 事前預註冊 —— 判準寫在跑實驗之前</a:t>
+              <a:t># 專案期 綠 0 琥珀 7 紅 1 → 移交後 綠 0 琥珀 1 紅 7</a:t>
             </a:r>
           </a:p>
           <a:p/>
           <a:p>
             <a:r>
-              <a:t>⚠️ ⑬ 的母體是那 850 筆(有把握桶),🚫 不是剩下的 150 筆</a:t>
+              <a:t>⚠️ 「沒有人簽過名」是**承認洞**,🚫 不要臨場補一個人上去</a:t>
+            </a:r>
+          </a:p>
+          <a:p>
+            <a:r>
+              <a:t>⚠️ 第 4 條隱私是唯一不因自動結案惡化的一條 —— 刻意不標紅,不是漏標</a:t>
             </a:r>
           </a:p>
           <a:p/>
           <a:p>
             <a:r>
+              <a:t>── 錄影提示(不唸)──</a:t>
+            </a:r>
+          </a:p>
+          <a:p>
+            <a:r>
+              <a:t>· 錄影標記:唸到「可申訴性,我們不及格」時切全螢幕人像,唸完該句後切回畫中畫。</a:t>
+            </a:r>
+          </a:p>
+          <a:p>
+            <a:r>
+              <a:t>· 交界移交:P7 → P8 的接縫句為「講完該不該做,接下來是怎麼算做成了。」依總則檔 §6b,該句寫成 P8 口白的第一句、字數計入 P8,故不列入本頁 224 字。</a:t>
+            </a:r>
+          </a:p>
+          <a:p/>
+          <a:p>
+            <a:r>
               <a:t>→ 換下一頁</a:t>
             </a:r>
           </a:p>
           <a:p/>
           <a:p>
             <a:r>
-              <a:t>── 逐字備援 · 201 字(忘詞才看,不是拿來唸的)──</a:t>
-            </a:r>
-          </a:p>
-          <a:p>
-            <a:r>
-              <a:t>講完該不該做,接下來是怎麼算做成了。最上層第一個指標,是客戶等多久拿到分析,這是這個專案要買的東西。現況兩到五天,目標兩天內、單純案件當天;是客戶期望,不是已簽的服務水準協議。護欄層是否決型,今天多一條:漏濾率——機器說有把握、直接結案的那一桶裡,有多少其實該讓人看。第十二週交出它跟人工的差值,門檻第六週就要先訂,不能看完數據再訂。錯誤攔截比例我算不出來,分母還不存在,那正是護欄層要交的能力。訂不出目標值的,我寫的是它什麼時候被訂出來、由哪一道門訂。</a:t>
+              <a:t>── 逐字備援 · 219 字(忘詞才看,不是拿來唸的)──</a:t>
+            </a:r>
+          </a:p>
+          <a:p>
+            <a:r>
+              <a:t>還有一條,是我們自己造成的。這道人工防線的產能有限,所以它是配給的 —— 依客戶的購買量排序。同樣一個誤判,發生在大客戶身上會被人攔下來,小客戶身上不會。分配依據是客戶大小,不是風險大小。這六個月我能做的,是第一次量得出它覆蓋了誰。但我要說清楚:這個方案開到天花板之後,配給的依據會從客戶大小換成機器的信心,而那八成五沒有人看過 —— 那是我造成的新問題,不是我解掉的舊問題。所以八原則裡的問責跟可申訴性,我這一頁全部標紅,而它們掛在第二十四週那道門上。申訴機制到位前,本案產出不供個人考核使用。</a:t>
             </a:r>
           </a:p>
           <a:p/>
@@ -2230,7 +2393,7 @@
           </a:p>
           <a:p>
             <a:r>
-              <a:t>【這一頁的作用】這頁把「衡量」從外掛的合規章節,改寫成 AI 提案本身的兩個問題:怎麼證明它有效、什麼情況下喊停。對委員會的作用有三個:①上兩層告訴他們這筆錢買的是客戶等多久拿到分析(不是準確率),而且業務指標由營運指標支撐、有階序;②護欄層讓他們知道自己手上握著一票否決,尤其⑬漏濾率是自動結案能不能對外生效的唯一否決點 —— 提案人主動把刀柄遞出去;③每一個今天訂不出的目標值都寫明由哪道門、第幾週、誰負責訂,把「訂不出來」變成可稽核的紀律而不是含糊。</a:t>
+              <a:t>【這一頁的作用】直接修 Kenny 第 7 點的後半:這一頁先用標題回答「為什麼一個 AI 提案要談倫理」—— 因為這個方案的產出就是把每 1,000 筆爭議裡約 850 筆變成沒有人看過的判定,那是它的代價,不是外掛的合規章節。雙欄評等讓委員會當場知道自己今天批的是哪一欄(專案期,影子模式,人仍逐筆判),而移交後那七盞紅燈全部掛在第 24 週那道門上;第 4 條保持白底是刻意的對照 —— 它是唯一不因自動結案而惡化的一條。全頁綠燈零條不是失分,是把「移交條件」寫成可稽核的待辦清單,也把前六週的預算正當化成把紅燈變回琥珀的唯一路徑。</a:t>
             </a:r>
           </a:p>
         </p:txBody>
@@ -5690,7 +5853,7 @@
                 </a:solidFill>
                 <a:latin typeface="Microsoft JhengHei"/>
               </a:rPr>
-              <a:t>項目計畫</a:t>
+              <a:t>效益與衡量</a:t>
             </a:r>
           </a:p>
         </p:txBody>
@@ -5729,7 +5892,7 @@
                 </a:solidFill>
                 <a:latin typeface="Microsoft JhengHei"/>
               </a:rPr>
-              <a:t>六個月分三段付,每一段都可以喊停</a:t>
+              <a:t>你買到的三層效益,和四條隨時喊停的權力</a:t>
             </a:r>
           </a:p>
         </p:txBody>
@@ -5768,7 +5931,7 @@
                 </a:solidFill>
                 <a:latin typeface="Microsoft JhengHei"/>
               </a:rPr>
-              <a:t>六包只有一包是 AI —— 評估集 → 標註 → 特徵 → 地端 VLM;三道門各自寫明什麼條件下停</a:t>
+              <a:t>三層 KPI 是效益,四道護欄一票否決;訂不出的目標值寫明由哪道門訂</a:t>
             </a:r>
           </a:p>
         </p:txBody>
@@ -5819,17 +5982,19 @@
       </p:sp>
       <p:sp>
         <p:nvSpPr>
-          <p:cNvPr id="6" name="Rectangle 5"/>
+          <p:cNvPr id="6" name="Rounded Rectangle 5"/>
           <p:cNvSpPr/>
           <p:nvPr/>
         </p:nvSpPr>
         <p:spPr>
           <a:xfrm>
-            <a:off x="658368" y="1783080"/>
-            <a:ext cx="45720" cy="301752"/>
-          </a:xfrm>
-          <a:prstGeom prst="rect">
-            <a:avLst/>
+            <a:off x="658368" y="1755648"/>
+            <a:ext cx="10874959" cy="329184"/>
+          </a:xfrm>
+          <a:prstGeom prst="roundRect">
+            <a:avLst>
+              <a:gd name="adj" fmla="val 6000"/>
+            </a:avLst>
           </a:prstGeom>
           <a:solidFill>
             <a:srgbClr val="1F4E79"/>
@@ -5869,8 +6034,8 @@
         </p:nvSpPr>
         <p:spPr>
           <a:xfrm>
-            <a:off x="804672" y="1755648"/>
-            <a:ext cx="2408822" cy="393192"/>
+            <a:off x="841247" y="1755648"/>
+            <a:ext cx="10509199" cy="329184"/>
           </a:xfrm>
           <a:prstGeom prst="rect">
             <a:avLst/>
@@ -5879,332 +6044,6 @@
         </p:spPr>
         <p:txBody>
           <a:bodyPr wrap="square" lIns="0" rIns="0" tIns="0" bIns="0" anchor="ctr">
-            <a:spAutoFit/>
-          </a:bodyPr>
-          <a:lstStyle/>
-          <a:p>
-            <a:pPr algn="l">
-              <a:lnSpc>
-                <a:spcPct val="125000"/>
-              </a:lnSpc>
-            </a:pPr>
-            <a:r>
-              <a:rPr sz="1400" b="1">
-                <a:solidFill>
-                  <a:srgbClr val="16212E"/>
-                </a:solidFill>
-                <a:latin typeface="Microsoft JhengHei"/>
-              </a:rPr>
-              <a:t>WP-A 評估底座｜AI 的前置</a:t>
-            </a:r>
-          </a:p>
-        </p:txBody>
-      </p:sp>
-      <p:sp>
-        <p:nvSpPr>
-          <p:cNvPr id="8" name="TextBox 7"/>
-          <p:cNvSpPr txBox="1"/>
-          <p:nvPr/>
-        </p:nvSpPr>
-        <p:spPr>
-          <a:xfrm>
-            <a:off x="3268358" y="1755648"/>
-            <a:ext cx="977767" cy="393192"/>
-          </a:xfrm>
-          <a:prstGeom prst="rect">
-            <a:avLst/>
-          </a:prstGeom>
-          <a:noFill/>
-        </p:spPr>
-        <p:txBody>
-          <a:bodyPr wrap="square" lIns="0" rIns="0" tIns="0" bIns="0" anchor="ctr">
-            <a:spAutoFit/>
-          </a:bodyPr>
-          <a:lstStyle/>
-          <a:p>
-            <a:pPr algn="l">
-              <a:lnSpc>
-                <a:spcPct val="125000"/>
-              </a:lnSpc>
-            </a:pPr>
-            <a:r>
-              <a:rPr sz="1500" b="1">
-                <a:solidFill>
-                  <a:srgbClr val="1F4E79"/>
-                </a:solidFill>
-                <a:latin typeface="Microsoft JhengHei"/>
-              </a:rPr>
-              <a:t>W1–6</a:t>
-            </a:r>
-          </a:p>
-        </p:txBody>
-      </p:sp>
-      <p:sp>
-        <p:nvSpPr>
-          <p:cNvPr id="9" name="TextBox 8"/>
-          <p:cNvSpPr txBox="1"/>
-          <p:nvPr/>
-        </p:nvSpPr>
-        <p:spPr>
-          <a:xfrm>
-            <a:off x="4355854" y="1755648"/>
-            <a:ext cx="7067745" cy="393192"/>
-          </a:xfrm>
-          <a:prstGeom prst="rect">
-            <a:avLst/>
-          </a:prstGeom>
-          <a:noFill/>
-        </p:spPr>
-        <p:txBody>
-          <a:bodyPr wrap="square" lIns="0" rIns="0" tIns="0" bIns="0" anchor="ctr">
-            <a:spAutoFit/>
-          </a:bodyPr>
-          <a:lstStyle/>
-          <a:p>
-            <a:pPr algn="l">
-              <a:lnSpc>
-                <a:spcPct val="120000"/>
-              </a:lnSpc>
-            </a:pPr>
-            <a:r>
-              <a:rPr sz="1200" b="0">
-                <a:solidFill>
-                  <a:srgbClr val="6B7885"/>
-                </a:solidFill>
-                <a:latin typeface="Microsoft JhengHei"/>
-              </a:rPr>
-              <a:t>交:公司第一份可稽核的錯誤率(含 95% CI)· 冷凍評估集 · 兩條工作流單位工時基準 · 每案結案方向黃金答案標籤 · 時間拆解與到件分布</a:t>
-            </a:r>
-          </a:p>
-        </p:txBody>
-      </p:sp>
-      <p:sp>
-        <p:nvSpPr>
-          <p:cNvPr id="10" name="Rectangle 9"/>
-          <p:cNvSpPr/>
-          <p:nvPr/>
-        </p:nvSpPr>
-        <p:spPr>
-          <a:xfrm>
-            <a:off x="658368" y="2267712"/>
-            <a:ext cx="45720" cy="301752"/>
-          </a:xfrm>
-          <a:prstGeom prst="rect">
-            <a:avLst/>
-          </a:prstGeom>
-          <a:solidFill>
-            <a:srgbClr val="C00000"/>
-          </a:solidFill>
-          <a:ln>
-            <a:noFill/>
-          </a:ln>
-          <a:effectLst/>
-        </p:spPr>
-        <p:style>
-          <a:lnRef idx="1">
-            <a:schemeClr val="accent1"/>
-          </a:lnRef>
-          <a:fillRef idx="3">
-            <a:schemeClr val="accent1"/>
-          </a:fillRef>
-          <a:effectRef idx="2">
-            <a:schemeClr val="accent1"/>
-          </a:effectRef>
-          <a:fontRef idx="minor">
-            <a:schemeClr val="lt1"/>
-          </a:fontRef>
-        </p:style>
-        <p:txBody>
-          <a:bodyPr rtlCol="0" anchor="ctr"/>
-          <a:lstStyle/>
-          <a:p>
-            <a:pPr algn="ctr"/>
-          </a:p>
-        </p:txBody>
-      </p:sp>
-      <p:sp>
-        <p:nvSpPr>
-          <p:cNvPr id="11" name="TextBox 10"/>
-          <p:cNvSpPr txBox="1"/>
-          <p:nvPr/>
-        </p:nvSpPr>
-        <p:spPr>
-          <a:xfrm>
-            <a:off x="804672" y="2240280"/>
-            <a:ext cx="2408822" cy="393192"/>
-          </a:xfrm>
-          <a:prstGeom prst="rect">
-            <a:avLst/>
-          </a:prstGeom>
-          <a:noFill/>
-        </p:spPr>
-        <p:txBody>
-          <a:bodyPr wrap="square" lIns="0" rIns="0" tIns="0" bIns="0" anchor="ctr">
-            <a:spAutoFit/>
-          </a:bodyPr>
-          <a:lstStyle/>
-          <a:p>
-            <a:pPr algn="l">
-              <a:lnSpc>
-                <a:spcPct val="125000"/>
-              </a:lnSpc>
-            </a:pPr>
-            <a:r>
-              <a:rPr sz="1400" b="1">
-                <a:solidFill>
-                  <a:srgbClr val="16212E"/>
-                </a:solidFill>
-                <a:latin typeface="Microsoft JhengHei"/>
-              </a:rPr>
-              <a:t>WP-E 地端 VLM 事件判讀｜🔴 本案唯一的 AI 主體</a:t>
-            </a:r>
-          </a:p>
-        </p:txBody>
-      </p:sp>
-      <p:sp>
-        <p:nvSpPr>
-          <p:cNvPr id="12" name="TextBox 11"/>
-          <p:cNvSpPr txBox="1"/>
-          <p:nvPr/>
-        </p:nvSpPr>
-        <p:spPr>
-          <a:xfrm>
-            <a:off x="3268358" y="2240280"/>
-            <a:ext cx="977767" cy="393192"/>
-          </a:xfrm>
-          <a:prstGeom prst="rect">
-            <a:avLst/>
-          </a:prstGeom>
-          <a:noFill/>
-        </p:spPr>
-        <p:txBody>
-          <a:bodyPr wrap="square" lIns="0" rIns="0" tIns="0" bIns="0" anchor="ctr">
-            <a:spAutoFit/>
-          </a:bodyPr>
-          <a:lstStyle/>
-          <a:p>
-            <a:pPr algn="l">
-              <a:lnSpc>
-                <a:spcPct val="125000"/>
-              </a:lnSpc>
-            </a:pPr>
-            <a:r>
-              <a:rPr sz="1500" b="1">
-                <a:solidFill>
-                  <a:srgbClr val="C00000"/>
-                </a:solidFill>
-                <a:latin typeface="Microsoft JhengHei"/>
-              </a:rPr>
-              <a:t>W8–24</a:t>
-            </a:r>
-          </a:p>
-        </p:txBody>
-      </p:sp>
-      <p:sp>
-        <p:nvSpPr>
-          <p:cNvPr id="13" name="TextBox 12"/>
-          <p:cNvSpPr txBox="1"/>
-          <p:nvPr/>
-        </p:nvSpPr>
-        <p:spPr>
-          <a:xfrm>
-            <a:off x="4355854" y="2240280"/>
-            <a:ext cx="7067745" cy="393192"/>
-          </a:xfrm>
-          <a:prstGeom prst="rect">
-            <a:avLst/>
-          </a:prstGeom>
-          <a:noFill/>
-        </p:spPr>
-        <p:txBody>
-          <a:bodyPr wrap="square" lIns="0" rIns="0" tIns="0" bIns="0" anchor="ctr">
-            <a:spAutoFit/>
-          </a:bodyPr>
-          <a:lstStyle/>
-          <a:p>
-            <a:pPr algn="l">
-              <a:lnSpc>
-                <a:spcPct val="120000"/>
-              </a:lnSpc>
-            </a:pPr>
-            <a:r>
-              <a:rPr sz="1200" b="0">
-                <a:solidFill>
-                  <a:srgbClr val="6B7885"/>
-                </a:solidFill>
-                <a:latin typeface="Microsoft JhengHei"/>
-              </a:rPr>
-              <a:t>地端 VLM,篩檢與深挖由同一台設備分時;選型與量化規格於 G1 依 W1–6 量測定案(概念層次)。W8–12 離線試驗 → W12–24 只跑影子模式:機器出結論不對外送,人照常判</a:t>
-            </a:r>
-          </a:p>
-        </p:txBody>
-      </p:sp>
-      <p:sp>
-        <p:nvSpPr>
-          <p:cNvPr id="14" name="Rounded Rectangle 13"/>
-          <p:cNvSpPr/>
-          <p:nvPr/>
-        </p:nvSpPr>
-        <p:spPr>
-          <a:xfrm>
-            <a:off x="658368" y="2761488"/>
-            <a:ext cx="3527450" cy="2121408"/>
-          </a:xfrm>
-          <a:prstGeom prst="roundRect">
-            <a:avLst>
-              <a:gd name="adj" fmla="val 6000"/>
-            </a:avLst>
-          </a:prstGeom>
-          <a:solidFill>
-            <a:srgbClr val="FFFFFF"/>
-          </a:solidFill>
-          <a:ln w="20320">
-            <a:solidFill>
-              <a:srgbClr val="C00000"/>
-            </a:solidFill>
-          </a:ln>
-          <a:effectLst/>
-        </p:spPr>
-        <p:style>
-          <a:lnRef idx="1">
-            <a:schemeClr val="accent1"/>
-          </a:lnRef>
-          <a:fillRef idx="3">
-            <a:schemeClr val="accent1"/>
-          </a:fillRef>
-          <a:effectRef idx="2">
-            <a:schemeClr val="accent1"/>
-          </a:effectRef>
-          <a:fontRef idx="minor">
-            <a:schemeClr val="lt1"/>
-          </a:fontRef>
-        </p:style>
-        <p:txBody>
-          <a:bodyPr rtlCol="0" anchor="ctr"/>
-          <a:lstStyle/>
-          <a:p>
-            <a:pPr algn="ctr"/>
-          </a:p>
-        </p:txBody>
-      </p:sp>
-      <p:sp>
-        <p:nvSpPr>
-          <p:cNvPr id="15" name="TextBox 14"/>
-          <p:cNvSpPr txBox="1"/>
-          <p:nvPr/>
-        </p:nvSpPr>
-        <p:spPr>
-          <a:xfrm>
-            <a:off x="768096" y="2889504"/>
-            <a:ext cx="3307994" cy="566928"/>
-          </a:xfrm>
-          <a:prstGeom prst="rect">
-            <a:avLst/>
-          </a:prstGeom>
-          <a:noFill/>
-        </p:spPr>
-        <p:txBody>
-          <a:bodyPr wrap="square" lIns="0" rIns="0" tIns="0" bIns="0" anchor="t">
             <a:spAutoFit/>
           </a:bodyPr>
           <a:lstStyle/>
@@ -6215,622 +6054,694 @@
               </a:lnSpc>
             </a:pPr>
             <a:r>
-              <a:rPr sz="1500" b="1">
-                <a:solidFill>
-                  <a:srgbClr val="16212E"/>
-                </a:solidFill>
-                <a:latin typeface="Microsoft JhengHei"/>
-              </a:rPr>
-              <a:t>G1 · 第 6 週｜因果判定門</a:t>
-            </a:r>
-          </a:p>
-        </p:txBody>
-      </p:sp>
-      <p:sp>
-        <p:nvSpPr>
-          <p:cNvPr id="16" name="Rounded Rectangle 15"/>
-          <p:cNvSpPr/>
-          <p:nvPr/>
-        </p:nvSpPr>
-        <p:spPr>
-          <a:xfrm>
-            <a:off x="2010613" y="3511296"/>
-            <a:ext cx="822960" cy="274320"/>
-          </a:xfrm>
-          <a:prstGeom prst="roundRect">
-            <a:avLst>
-              <a:gd name="adj" fmla="val 6000"/>
-            </a:avLst>
-          </a:prstGeom>
-          <a:solidFill>
-            <a:srgbClr val="C00000"/>
-          </a:solidFill>
-          <a:ln>
-            <a:noFill/>
-          </a:ln>
-          <a:effectLst/>
-        </p:spPr>
-        <p:style>
-          <a:lnRef idx="1">
-            <a:schemeClr val="accent1"/>
-          </a:lnRef>
-          <a:fillRef idx="3">
-            <a:schemeClr val="accent1"/>
-          </a:fillRef>
-          <a:effectRef idx="2">
-            <a:schemeClr val="accent1"/>
-          </a:effectRef>
-          <a:fontRef idx="minor">
-            <a:schemeClr val="lt1"/>
-          </a:fontRef>
-        </p:style>
-        <p:txBody>
-          <a:bodyPr rtlCol="0" anchor="ctr"/>
-          <a:lstStyle/>
-          <a:p>
-            <a:pPr algn="ctr"/>
-          </a:p>
-        </p:txBody>
-      </p:sp>
-      <p:sp>
-        <p:nvSpPr>
-          <p:cNvPr id="17" name="TextBox 16"/>
-          <p:cNvSpPr txBox="1"/>
-          <p:nvPr/>
-        </p:nvSpPr>
-        <p:spPr>
-          <a:xfrm>
-            <a:off x="2010613" y="3511296"/>
-            <a:ext cx="822960" cy="274320"/>
-          </a:xfrm>
-          <a:prstGeom prst="rect">
-            <a:avLst/>
-          </a:prstGeom>
-          <a:noFill/>
-        </p:spPr>
-        <p:txBody>
-          <a:bodyPr wrap="square" lIns="0" rIns="0" tIns="0" bIns="0" anchor="ctr">
-            <a:spAutoFit/>
-          </a:bodyPr>
-          <a:lstStyle/>
-          <a:p>
-            <a:pPr algn="ctr">
-              <a:lnSpc>
-                <a:spcPct val="125000"/>
-              </a:lnSpc>
-            </a:pPr>
-            <a:r>
-              <a:rPr sz="1200" b="1">
+              <a:rPr sz="1700" b="1">
                 <a:solidFill>
                   <a:srgbClr val="FFFFFF"/>
                 </a:solidFill>
                 <a:latin typeface="Microsoft JhengHei"/>
               </a:rPr>
-              <a:t>可喊停</a:t>
-            </a:r>
-          </a:p>
-        </p:txBody>
-      </p:sp>
-      <p:sp>
-        <p:nvSpPr>
-          <p:cNvPr id="18" name="TextBox 17"/>
-          <p:cNvSpPr txBox="1"/>
-          <p:nvPr/>
-        </p:nvSpPr>
-        <p:spPr>
-          <a:xfrm>
-            <a:off x="768096" y="3895344"/>
-            <a:ext cx="3307994" cy="859535"/>
-          </a:xfrm>
-          <a:prstGeom prst="rect">
-            <a:avLst/>
-          </a:prstGeom>
-          <a:noFill/>
-        </p:spPr>
-        <p:txBody>
-          <a:bodyPr wrap="square" lIns="0" rIns="0" tIns="0" bIns="0" anchor="t">
-            <a:spAutoFit/>
-          </a:bodyPr>
-          <a:lstStyle/>
-          <a:p>
-            <a:pPr algn="ctr">
-              <a:lnSpc>
-                <a:spcPct val="135000"/>
-              </a:lnSpc>
-            </a:pPr>
-            <a:r>
-              <a:rPr sz="1200" b="0">
-                <a:solidFill>
-                  <a:srgbClr val="6B7885"/>
-                </a:solidFill>
-                <a:latin typeface="Microsoft JhengHei"/>
-              </a:rPr>
-              <a:t>停:證據工作非主延遲 → 轉排班+尖峰人力池</a:t>
-            </a:r>
-          </a:p>
-          <a:p>
-            <a:pPr algn="ctr">
-              <a:lnSpc>
-                <a:spcPct val="135000"/>
-              </a:lnSpc>
-            </a:pPr>
-            <a:r>
-              <a:rPr sz="1200" b="0">
-                <a:solidFill>
-                  <a:srgbClr val="6B7885"/>
-                </a:solidFill>
-                <a:latin typeface="Microsoft JhengHei"/>
-              </a:rPr>
-              <a:t>停:評估底座未產出 → 剩餘工作全數不續行</a:t>
-            </a:r>
-          </a:p>
-        </p:txBody>
-      </p:sp>
-      <p:sp>
-        <p:nvSpPr>
-          <p:cNvPr id="19" name="Rounded Rectangle 18"/>
-          <p:cNvSpPr/>
-          <p:nvPr/>
-        </p:nvSpPr>
-        <p:spPr>
-          <a:xfrm>
-            <a:off x="4332122" y="2761488"/>
-            <a:ext cx="3527450" cy="2121408"/>
-          </a:xfrm>
-          <a:prstGeom prst="roundRect">
-            <a:avLst>
-              <a:gd name="adj" fmla="val 6000"/>
-            </a:avLst>
-          </a:prstGeom>
-          <a:solidFill>
-            <a:srgbClr val="FFFFFF"/>
-          </a:solidFill>
-          <a:ln w="20320">
-            <a:solidFill>
-              <a:srgbClr val="E8833A"/>
-            </a:solidFill>
-          </a:ln>
-          <a:effectLst/>
-        </p:spPr>
-        <p:style>
-          <a:lnRef idx="1">
-            <a:schemeClr val="accent1"/>
-          </a:lnRef>
-          <a:fillRef idx="3">
-            <a:schemeClr val="accent1"/>
-          </a:fillRef>
-          <a:effectRef idx="2">
-            <a:schemeClr val="accent1"/>
-          </a:effectRef>
-          <a:fontRef idx="minor">
-            <a:schemeClr val="lt1"/>
-          </a:fontRef>
-        </p:style>
-        <p:txBody>
-          <a:bodyPr rtlCol="0" anchor="ctr"/>
-          <a:lstStyle/>
-          <a:p>
-            <a:pPr algn="ctr"/>
-          </a:p>
-        </p:txBody>
-      </p:sp>
-      <p:sp>
-        <p:nvSpPr>
-          <p:cNvPr id="20" name="TextBox 19"/>
-          <p:cNvSpPr txBox="1"/>
-          <p:nvPr/>
-        </p:nvSpPr>
-        <p:spPr>
-          <a:xfrm>
-            <a:off x="4441850" y="2889504"/>
-            <a:ext cx="3307994" cy="566928"/>
-          </a:xfrm>
-          <a:prstGeom prst="rect">
-            <a:avLst/>
-          </a:prstGeom>
-          <a:noFill/>
-        </p:spPr>
-        <p:txBody>
-          <a:bodyPr wrap="square" lIns="0" rIns="0" tIns="0" bIns="0" anchor="t">
-            <a:spAutoFit/>
-          </a:bodyPr>
-          <a:lstStyle/>
-          <a:p>
-            <a:pPr algn="ctr">
-              <a:lnSpc>
-                <a:spcPct val="125000"/>
-              </a:lnSpc>
-            </a:pPr>
-            <a:r>
-              <a:rPr sz="1500" b="1">
-                <a:solidFill>
-                  <a:srgbClr val="16212E"/>
-                </a:solidFill>
-                <a:latin typeface="Microsoft JhengHei"/>
-              </a:rPr>
-              <a:t>G2 · 第 12 週｜四臂比較門</a:t>
-            </a:r>
-          </a:p>
-        </p:txBody>
-      </p:sp>
-      <p:sp>
-        <p:nvSpPr>
-          <p:cNvPr id="21" name="Rounded Rectangle 20"/>
-          <p:cNvSpPr/>
-          <p:nvPr/>
-        </p:nvSpPr>
-        <p:spPr>
-          <a:xfrm>
-            <a:off x="5087721" y="3511296"/>
-            <a:ext cx="2016252" cy="274320"/>
-          </a:xfrm>
-          <a:prstGeom prst="roundRect">
-            <a:avLst>
-              <a:gd name="adj" fmla="val 6000"/>
-            </a:avLst>
-          </a:prstGeom>
-          <a:solidFill>
-            <a:srgbClr val="E8833A"/>
-          </a:solidFill>
-          <a:ln>
-            <a:noFill/>
-          </a:ln>
-          <a:effectLst/>
-        </p:spPr>
-        <p:style>
-          <a:lnRef idx="1">
-            <a:schemeClr val="accent1"/>
-          </a:lnRef>
-          <a:fillRef idx="3">
-            <a:schemeClr val="accent1"/>
-          </a:fillRef>
-          <a:effectRef idx="2">
-            <a:schemeClr val="accent1"/>
-          </a:effectRef>
-          <a:fontRef idx="minor">
-            <a:schemeClr val="lt1"/>
-          </a:fontRef>
-        </p:style>
-        <p:txBody>
-          <a:bodyPr rtlCol="0" anchor="ctr"/>
-          <a:lstStyle/>
-          <a:p>
-            <a:pPr algn="ctr"/>
-          </a:p>
-        </p:txBody>
-      </p:sp>
-      <p:sp>
-        <p:nvSpPr>
-          <p:cNvPr id="22" name="TextBox 21"/>
-          <p:cNvSpPr txBox="1"/>
-          <p:nvPr/>
-        </p:nvSpPr>
-        <p:spPr>
-          <a:xfrm>
-            <a:off x="5087721" y="3511296"/>
-            <a:ext cx="2016252" cy="274320"/>
-          </a:xfrm>
-          <a:prstGeom prst="rect">
-            <a:avLst/>
-          </a:prstGeom>
-          <a:noFill/>
-        </p:spPr>
-        <p:txBody>
-          <a:bodyPr wrap="square" lIns="0" rIns="0" tIns="0" bIns="0" anchor="ctr">
-            <a:spAutoFit/>
-          </a:bodyPr>
-          <a:lstStyle/>
-          <a:p>
-            <a:pPr algn="ctr">
-              <a:lnSpc>
-                <a:spcPct val="125000"/>
-              </a:lnSpc>
-            </a:pPr>
-            <a:r>
-              <a:rPr sz="1200" b="1">
-                <a:solidFill>
-                  <a:srgbClr val="FFFFFF"/>
-                </a:solidFill>
-                <a:latin typeface="Microsoft JhengHei"/>
-              </a:rPr>
-              <a:t>只能改規模,不能取消實驗</a:t>
-            </a:r>
-          </a:p>
-        </p:txBody>
-      </p:sp>
-      <p:sp>
-        <p:nvSpPr>
-          <p:cNvPr id="23" name="TextBox 22"/>
-          <p:cNvSpPr txBox="1"/>
-          <p:nvPr/>
-        </p:nvSpPr>
-        <p:spPr>
-          <a:xfrm>
-            <a:off x="4441850" y="3895344"/>
-            <a:ext cx="3307994" cy="859535"/>
-          </a:xfrm>
-          <a:prstGeom prst="rect">
-            <a:avLst/>
-          </a:prstGeom>
-          <a:noFill/>
-        </p:spPr>
-        <p:txBody>
-          <a:bodyPr wrap="square" lIns="0" rIns="0" tIns="0" bIns="0" anchor="t">
-            <a:spAutoFit/>
-          </a:bodyPr>
-          <a:lstStyle/>
-          <a:p>
-            <a:pPr algn="ctr">
-              <a:lnSpc>
-                <a:spcPct val="135000"/>
-              </a:lnSpc>
-            </a:pPr>
-            <a:r>
-              <a:rPr sz="1200" b="0">
-                <a:solidFill>
-                  <a:srgbClr val="6B7885"/>
-                </a:solidFill>
-                <a:latin typeface="Microsoft JhengHei"/>
-              </a:rPr>
-              <a:t>兩軌:工具品質軌 · 結案判定軌;停不掉實驗</a:t>
-            </a:r>
-          </a:p>
-          <a:p>
-            <a:pPr algn="ctr">
-              <a:lnSpc>
-                <a:spcPct val="135000"/>
-              </a:lnSpc>
-            </a:pPr>
-            <a:r>
-              <a:rPr sz="1200" b="0">
-                <a:solidFill>
-                  <a:srgbClr val="6B7885"/>
-                </a:solidFill>
-                <a:latin typeface="Microsoft JhengHei"/>
-              </a:rPr>
-              <a:t>只能改規模;對外自動結案不由 G2/G3 決定</a:t>
-            </a:r>
-          </a:p>
-        </p:txBody>
-      </p:sp>
-      <p:sp>
-        <p:nvSpPr>
-          <p:cNvPr id="24" name="Rounded Rectangle 23"/>
-          <p:cNvSpPr/>
-          <p:nvPr/>
-        </p:nvSpPr>
-        <p:spPr>
-          <a:xfrm>
-            <a:off x="8005876" y="2761488"/>
-            <a:ext cx="3527450" cy="2121408"/>
-          </a:xfrm>
-          <a:prstGeom prst="roundRect">
-            <a:avLst>
-              <a:gd name="adj" fmla="val 6000"/>
-            </a:avLst>
-          </a:prstGeom>
-          <a:solidFill>
-            <a:srgbClr val="FFFFFF"/>
-          </a:solidFill>
-          <a:ln w="20320">
-            <a:solidFill>
-              <a:srgbClr val="C00000"/>
-            </a:solidFill>
-          </a:ln>
-          <a:effectLst/>
-        </p:spPr>
-        <p:style>
-          <a:lnRef idx="1">
-            <a:schemeClr val="accent1"/>
-          </a:lnRef>
-          <a:fillRef idx="3">
-            <a:schemeClr val="accent1"/>
-          </a:fillRef>
-          <a:effectRef idx="2">
-            <a:schemeClr val="accent1"/>
-          </a:effectRef>
-          <a:fontRef idx="minor">
-            <a:schemeClr val="lt1"/>
-          </a:fontRef>
-        </p:style>
-        <p:txBody>
-          <a:bodyPr rtlCol="0" anchor="ctr"/>
-          <a:lstStyle/>
-          <a:p>
-            <a:pPr algn="ctr"/>
-          </a:p>
-        </p:txBody>
-      </p:sp>
-      <p:sp>
-        <p:nvSpPr>
-          <p:cNvPr id="25" name="TextBox 24"/>
-          <p:cNvSpPr txBox="1"/>
-          <p:nvPr/>
-        </p:nvSpPr>
-        <p:spPr>
-          <a:xfrm>
-            <a:off x="8115604" y="2889504"/>
-            <a:ext cx="3307994" cy="566928"/>
-          </a:xfrm>
-          <a:prstGeom prst="rect">
-            <a:avLst/>
-          </a:prstGeom>
-          <a:noFill/>
-        </p:spPr>
-        <p:txBody>
-          <a:bodyPr wrap="square" lIns="0" rIns="0" tIns="0" bIns="0" anchor="t">
-            <a:spAutoFit/>
-          </a:bodyPr>
-          <a:lstStyle/>
-          <a:p>
-            <a:pPr algn="ctr">
-              <a:lnSpc>
-                <a:spcPct val="125000"/>
-              </a:lnSpc>
-            </a:pPr>
-            <a:r>
-              <a:rPr sz="1500" b="1">
-                <a:solidFill>
-                  <a:srgbClr val="16212E"/>
-                </a:solidFill>
-                <a:latin typeface="Microsoft JhengHei"/>
-              </a:rPr>
-              <a:t>G3 · 第 24 週｜部署決定門</a:t>
-            </a:r>
-          </a:p>
-        </p:txBody>
-      </p:sp>
-      <p:sp>
-        <p:nvSpPr>
-          <p:cNvPr id="26" name="Rounded Rectangle 25"/>
-          <p:cNvSpPr/>
-          <p:nvPr/>
-        </p:nvSpPr>
-        <p:spPr>
-          <a:xfrm>
-            <a:off x="9358122" y="3511296"/>
-            <a:ext cx="822960" cy="274320"/>
-          </a:xfrm>
-          <a:prstGeom prst="roundRect">
-            <a:avLst>
-              <a:gd name="adj" fmla="val 6000"/>
-            </a:avLst>
-          </a:prstGeom>
-          <a:solidFill>
-            <a:srgbClr val="C00000"/>
-          </a:solidFill>
-          <a:ln>
-            <a:noFill/>
-          </a:ln>
-          <a:effectLst/>
-        </p:spPr>
-        <p:style>
-          <a:lnRef idx="1">
-            <a:schemeClr val="accent1"/>
-          </a:lnRef>
-          <a:fillRef idx="3">
-            <a:schemeClr val="accent1"/>
-          </a:fillRef>
-          <a:effectRef idx="2">
-            <a:schemeClr val="accent1"/>
-          </a:effectRef>
-          <a:fontRef idx="minor">
-            <a:schemeClr val="lt1"/>
-          </a:fontRef>
-        </p:style>
-        <p:txBody>
-          <a:bodyPr rtlCol="0" anchor="ctr"/>
-          <a:lstStyle/>
-          <a:p>
-            <a:pPr algn="ctr"/>
-          </a:p>
-        </p:txBody>
-      </p:sp>
-      <p:sp>
-        <p:nvSpPr>
-          <p:cNvPr id="27" name="TextBox 26"/>
-          <p:cNvSpPr txBox="1"/>
-          <p:nvPr/>
-        </p:nvSpPr>
-        <p:spPr>
-          <a:xfrm>
-            <a:off x="9358122" y="3511296"/>
-            <a:ext cx="822960" cy="274320"/>
-          </a:xfrm>
-          <a:prstGeom prst="rect">
-            <a:avLst/>
-          </a:prstGeom>
-          <a:noFill/>
-        </p:spPr>
-        <p:txBody>
-          <a:bodyPr wrap="square" lIns="0" rIns="0" tIns="0" bIns="0" anchor="ctr">
-            <a:spAutoFit/>
-          </a:bodyPr>
-          <a:lstStyle/>
-          <a:p>
-            <a:pPr algn="ctr">
-              <a:lnSpc>
-                <a:spcPct val="125000"/>
-              </a:lnSpc>
-            </a:pPr>
-            <a:r>
-              <a:rPr sz="1200" b="1">
-                <a:solidFill>
-                  <a:srgbClr val="FFFFFF"/>
-                </a:solidFill>
-                <a:latin typeface="Microsoft JhengHei"/>
-              </a:rPr>
-              <a:t>可喊停</a:t>
-            </a:r>
-          </a:p>
-        </p:txBody>
-      </p:sp>
-      <p:sp>
-        <p:nvSpPr>
-          <p:cNvPr id="28" name="TextBox 27"/>
-          <p:cNvSpPr txBox="1"/>
-          <p:nvPr/>
-        </p:nvSpPr>
-        <p:spPr>
-          <a:xfrm>
-            <a:off x="8115604" y="3895344"/>
-            <a:ext cx="3307994" cy="859535"/>
-          </a:xfrm>
-          <a:prstGeom prst="rect">
-            <a:avLst/>
-          </a:prstGeom>
-          <a:noFill/>
-        </p:spPr>
-        <p:txBody>
-          <a:bodyPr wrap="square" lIns="0" rIns="0" tIns="0" bIns="0" anchor="t">
-            <a:spAutoFit/>
-          </a:bodyPr>
-          <a:lstStyle/>
-          <a:p>
-            <a:pPr algn="ctr">
-              <a:lnSpc>
-                <a:spcPct val="135000"/>
-              </a:lnSpc>
-            </a:pPr>
-            <a:r>
-              <a:rPr sz="1200" b="0">
-                <a:solidFill>
-                  <a:srgbClr val="6B7885"/>
-                </a:solidFill>
-                <a:latin typeface="Microsoft JhengHei"/>
-              </a:rPr>
-              <a:t>🔴 停:對照重訓證不出增量 → 模型端不部署</a:t>
-            </a:r>
-          </a:p>
-          <a:p>
-            <a:pPr algn="ctr">
-              <a:lnSpc>
-                <a:spcPct val="135000"/>
-              </a:lnSpc>
-            </a:pPr>
-            <a:r>
-              <a:rPr sz="1200" b="0">
-                <a:solidFill>
-                  <a:srgbClr val="6B7885"/>
-                </a:solidFill>
-                <a:latin typeface="Microsoft JhengHei"/>
-              </a:rPr>
-              <a:t>就算證不出,評估與標註品質流程仍留下</a:t>
+              <a:t>這頁不是外掛的合規章節:護欄任一未達標,上兩層成績一律不採計;否決型是本案決定,非文獻主張</a:t>
             </a:r>
           </a:p>
         </p:txBody>
       </p:sp>
       <p:graphicFrame>
         <p:nvGraphicFramePr>
-          <p:cNvPr id="29" name="Table 28"/>
+          <p:cNvPr id="8" name="Table 7"/>
           <p:cNvGraphicFramePr>
             <a:graphicFrameLocks noGrp="1"/>
           </p:cNvGraphicFramePr>
           <p:nvPr/>
         </p:nvGraphicFramePr>
         <p:xfrm>
+          <a:off x="658368" y="2212848"/>
+          <a:ext cx="10874957" cy="2670048"/>
+        </p:xfrm>
+        <a:graphic>
+          <a:graphicData uri="http://schemas.openxmlformats.org/drawingml/2006/table">
+            <a:tbl>
+              <a:tblPr firstRow="1">
+                <a:tableStyleId>{5C22544A-7EE6-4342-B048-85BDC9FD1C3A}</a:tableStyleId>
+              </a:tblPr>
+              <a:tblGrid>
+                <a:gridCol w="3262487"/>
+                <a:gridCol w="3806235"/>
+                <a:gridCol w="3806235"/>
+              </a:tblGrid>
+              <a:tr h="329184">
+                <a:tc>
+                  <a:txBody>
+                    <a:bodyPr/>
+                    <a:lstStyle/>
+                    <a:p>
+                      <a:pPr algn="l"/>
+                      <a:r>
+                        <a:rPr sz="1200" b="1">
+                          <a:solidFill>
+                            <a:srgbClr val="FFFFFF"/>
+                          </a:solidFill>
+                          <a:latin typeface="Microsoft JhengHei"/>
+                        </a:rPr>
+                        <a:t/>
+                      </a:r>
+                    </a:p>
+                  </a:txBody>
+                  <a:tcPr marL="45720" marR="45720" marT="18288" marB="18288" anchor="ctr">
+                    <a:solidFill>
+                      <a:srgbClr val="1F4E79"/>
+                    </a:solidFill>
+                  </a:tcPr>
+                </a:tc>
+                <a:tc>
+                  <a:txBody>
+                    <a:bodyPr/>
+                    <a:lstStyle/>
+                    <a:p>
+                      <a:pPr algn="ctr"/>
+                      <a:r>
+                        <a:rPr sz="1200" b="1">
+                          <a:solidFill>
+                            <a:srgbClr val="FFFFFF"/>
+                          </a:solidFill>
+                          <a:latin typeface="Microsoft JhengHei"/>
+                        </a:rPr>
+                        <a:t>指標(層別)</a:t>
+                      </a:r>
+                    </a:p>
+                  </a:txBody>
+                  <a:tcPr marL="45720" marR="45720" marT="18288" marB="18288" anchor="ctr">
+                    <a:solidFill>
+                      <a:srgbClr val="1F4E79"/>
+                    </a:solidFill>
+                  </a:tcPr>
+                </a:tc>
+                <a:tc>
+                  <a:txBody>
+                    <a:bodyPr/>
+                    <a:lstStyle/>
+                    <a:p>
+                      <a:pPr algn="ctr"/>
+                      <a:r>
+                        <a:rPr sz="1200" b="1">
+                          <a:solidFill>
+                            <a:srgbClr val="FFFFFF"/>
+                          </a:solidFill>
+                          <a:latin typeface="Microsoft JhengHei"/>
+                        </a:rPr>
+                        <a:t>今天的基準 · 母體</a:t>
+                      </a:r>
+                    </a:p>
+                  </a:txBody>
+                  <a:tcPr marL="45720" marR="45720" marT="18288" marB="18288" anchor="ctr">
+                    <a:solidFill>
+                      <a:srgbClr val="1F4E79"/>
+                    </a:solidFill>
+                  </a:tcPr>
+                </a:tc>
+              </a:tr>
+              <a:tr h="292608">
+                <a:tc>
+                  <a:txBody>
+                    <a:bodyPr/>
+                    <a:lstStyle/>
+                    <a:p>
+                      <a:pPr algn="l"/>
+                      <a:r>
+                        <a:rPr sz="1200" b="1">
+                          <a:solidFill>
+                            <a:srgbClr val="C00000"/>
+                          </a:solidFill>
+                          <a:latin typeface="Microsoft JhengHei"/>
+                        </a:rPr>
+                        <a:t>業務① 爭議回覆時效｜主價值指標</a:t>
+                      </a:r>
+                    </a:p>
+                  </a:txBody>
+                  <a:tcPr marL="45720" marR="45720" marT="18288" marB="18288" anchor="ctr">
+                    <a:solidFill>
+                      <a:srgbClr val="FBEFEF"/>
+                    </a:solidFill>
+                  </a:tcPr>
+                </a:tc>
+                <a:tc>
+                  <a:txBody>
+                    <a:bodyPr/>
+                    <a:lstStyle/>
+                    <a:p>
+                      <a:pPr algn="ctr"/>
+                      <a:r>
+                        <a:rPr sz="1200" b="0">
+                          <a:solidFill>
+                            <a:srgbClr val="C00000"/>
+                          </a:solidFill>
+                          <a:latin typeface="Microsoft JhengHei"/>
+                        </a:rPr>
+                        <a:t>全鏈路 2–5 天｜估計非量測</a:t>
+                      </a:r>
+                    </a:p>
+                  </a:txBody>
+                  <a:tcPr marL="45720" marR="45720" marT="18288" marB="18288" anchor="ctr">
+                    <a:solidFill>
+                      <a:srgbClr val="FBEFEF"/>
+                    </a:solidFill>
+                  </a:tcPr>
+                </a:tc>
+                <a:tc>
+                  <a:txBody>
+                    <a:bodyPr/>
+                    <a:lstStyle/>
+                    <a:p>
+                      <a:pPr algn="ctr"/>
+                      <a:r>
+                        <a:rPr sz="1200" b="0">
+                          <a:solidFill>
+                            <a:srgbClr val="C00000"/>
+                          </a:solidFill>
+                          <a:latin typeface="Microsoft JhengHei"/>
+                        </a:rPr>
+                        <a:t>2 天內｜提案目標 未簽協議</a:t>
+                      </a:r>
+                    </a:p>
+                  </a:txBody>
+                  <a:tcPr marL="45720" marR="45720" marT="18288" marB="18288" anchor="ctr">
+                    <a:solidFill>
+                      <a:srgbClr val="FBEFEF"/>
+                    </a:solidFill>
+                  </a:tcPr>
+                </a:tc>
+              </a:tr>
+              <a:tr h="292608">
+                <a:tc>
+                  <a:txBody>
+                    <a:bodyPr/>
+                    <a:lstStyle/>
+                    <a:p>
+                      <a:pPr algn="l"/>
+                      <a:r>
+                        <a:rPr sz="1200" b="0">
+                          <a:solidFill>
+                            <a:srgbClr val="16212E"/>
+                          </a:solidFill>
+                          <a:latin typeface="Microsoft JhengHei"/>
+                        </a:rPr>
+                        <a:t>業務② 人工驗證客戶涵蓋率</a:t>
+                      </a:r>
+                    </a:p>
+                  </a:txBody>
+                  <a:tcPr marL="45720" marR="45720" marT="18288" marB="18288" anchor="ctr">
+                    <a:solidFill>
+                      <a:srgbClr val="FFFFFF"/>
+                    </a:solidFill>
+                  </a:tcPr>
+                </a:tc>
+                <a:tc>
+                  <a:txBody>
+                    <a:bodyPr/>
+                    <a:lstStyle/>
+                    <a:p>
+                      <a:pPr algn="ctr"/>
+                      <a:r>
+                        <a:rPr sz="1200" b="0">
+                          <a:solidFill>
+                            <a:srgbClr val="6B7885"/>
+                          </a:solidFill>
+                          <a:latin typeface="Microsoft JhengHei"/>
+                        </a:rPr>
+                        <a:t>配給制｜無紀錄 · W6 建立</a:t>
+                      </a:r>
+                    </a:p>
+                  </a:txBody>
+                  <a:tcPr marL="45720" marR="45720" marT="18288" marB="18288" anchor="ctr">
+                    <a:solidFill>
+                      <a:srgbClr val="FFFFFF"/>
+                    </a:solidFill>
+                  </a:tcPr>
+                </a:tc>
+                <a:tc>
+                  <a:txBody>
+                    <a:bodyPr/>
+                    <a:lstStyle/>
+                    <a:p>
+                      <a:pPr algn="ctr"/>
+                      <a:r>
+                        <a:rPr sz="1200" b="0">
+                          <a:solidFill>
+                            <a:srgbClr val="6B7885"/>
+                          </a:solidFill>
+                          <a:latin typeface="Microsoft JhengHei"/>
+                        </a:rPr>
+                        <a:t>期內 100% → 移交後約 15%</a:t>
+                      </a:r>
+                    </a:p>
+                  </a:txBody>
+                  <a:tcPr marL="45720" marR="45720" marT="18288" marB="18288" anchor="ctr">
+                    <a:solidFill>
+                      <a:srgbClr val="FFFFFF"/>
+                    </a:solidFill>
+                  </a:tcPr>
+                </a:tc>
+              </a:tr>
+              <a:tr h="292608">
+                <a:tc>
+                  <a:txBody>
+                    <a:bodyPr/>
+                    <a:lstStyle/>
+                    <a:p>
+                      <a:pPr algn="l"/>
+                      <a:r>
+                        <a:rPr sz="1200" b="0">
+                          <a:solidFill>
+                            <a:srgbClr val="16212E"/>
+                          </a:solidFill>
+                          <a:latin typeface="Microsoft JhengHei"/>
+                        </a:rPr>
+                        <a:t>業務③ 每日事件量上限</a:t>
+                      </a:r>
+                    </a:p>
+                  </a:txBody>
+                  <a:tcPr marL="45720" marR="45720" marT="18288" marB="18288" anchor="ctr">
+                    <a:solidFill>
+                      <a:srgbClr val="FFFFFF"/>
+                    </a:solidFill>
+                  </a:tcPr>
+                </a:tc>
+                <a:tc>
+                  <a:txBody>
+                    <a:bodyPr/>
+                    <a:lstStyle/>
+                    <a:p>
+                      <a:pPr algn="ctr"/>
+                      <a:r>
+                        <a:rPr sz="1200" b="0">
+                          <a:solidFill>
+                            <a:srgbClr val="6B7885"/>
+                          </a:solidFill>
+                          <a:latin typeface="Microsoft JhengHei"/>
+                        </a:rPr>
+                        <a:t>單一大型車隊約 3,000 筆/天</a:t>
+                      </a:r>
+                    </a:p>
+                  </a:txBody>
+                  <a:tcPr marL="45720" marR="45720" marT="18288" marB="18288" anchor="ctr">
+                    <a:solidFill>
+                      <a:srgbClr val="FFFFFF"/>
+                    </a:solidFill>
+                  </a:tcPr>
+                </a:tc>
+                <a:tc>
+                  <a:txBody>
+                    <a:bodyPr/>
+                    <a:lstStyle/>
+                    <a:p>
+                      <a:pPr algn="ctr"/>
+                      <a:r>
+                        <a:rPr sz="1200" b="0">
+                          <a:solidFill>
+                            <a:srgbClr val="6B7885"/>
+                          </a:solidFill>
+                          <a:latin typeface="Microsoft JhengHei"/>
+                        </a:rPr>
+                        <a:t>全客戶 13,000+ 筆/天(提案)</a:t>
+                      </a:r>
+                    </a:p>
+                  </a:txBody>
+                  <a:tcPr marL="45720" marR="45720" marT="18288" marB="18288" anchor="ctr">
+                    <a:solidFill>
+                      <a:srgbClr val="FFFFFF"/>
+                    </a:solidFill>
+                  </a:tcPr>
+                </a:tc>
+              </a:tr>
+              <a:tr h="292608">
+                <a:tc>
+                  <a:txBody>
+                    <a:bodyPr/>
+                    <a:lstStyle/>
+                    <a:p>
+                      <a:pPr algn="l"/>
+                      <a:r>
+                        <a:rPr sz="1200" b="1">
+                          <a:solidFill>
+                            <a:srgbClr val="C00000"/>
+                          </a:solidFill>
+                          <a:latin typeface="Microsoft JhengHei"/>
+                        </a:rPr>
+                        <a:t>業務④ 可避免年度增聘成本</a:t>
+                      </a:r>
+                    </a:p>
+                  </a:txBody>
+                  <a:tcPr marL="45720" marR="45720" marT="18288" marB="18288" anchor="ctr">
+                    <a:solidFill>
+                      <a:srgbClr val="FBEFEF"/>
+                    </a:solidFill>
+                  </a:tcPr>
+                </a:tc>
+                <a:tc>
+                  <a:txBody>
+                    <a:bodyPr/>
+                    <a:lstStyle/>
+                    <a:p>
+                      <a:pPr algn="ctr"/>
+                      <a:r>
+                        <a:rPr sz="1200" b="0">
+                          <a:solidFill>
+                            <a:srgbClr val="C00000"/>
+                          </a:solidFill>
+                          <a:latin typeface="Microsoft JhengHei"/>
+                        </a:rPr>
+                        <a:t>不做本案 17–24 人｜現有5人</a:t>
+                      </a:r>
+                    </a:p>
+                  </a:txBody>
+                  <a:tcPr marL="45720" marR="45720" marT="18288" marB="18288" anchor="ctr">
+                    <a:solidFill>
+                      <a:srgbClr val="FBEFEF"/>
+                    </a:solidFill>
+                  </a:tcPr>
+                </a:tc>
+                <a:tc>
+                  <a:txBody>
+                    <a:bodyPr/>
+                    <a:lstStyle/>
+                    <a:p>
+                      <a:pPr algn="ctr"/>
+                      <a:r>
+                        <a:rPr sz="1200" b="0">
+                          <a:solidFill>
+                            <a:srgbClr val="C00000"/>
+                          </a:solidFill>
+                          <a:latin typeface="Microsoft JhengHei"/>
+                        </a:rPr>
+                        <a:t>省5–13人≈NT$520–1,521萬</a:t>
+                      </a:r>
+                    </a:p>
+                  </a:txBody>
+                  <a:tcPr marL="45720" marR="45720" marT="18288" marB="18288" anchor="ctr">
+                    <a:solidFill>
+                      <a:srgbClr val="FBEFEF"/>
+                    </a:solidFill>
+                  </a:tcPr>
+                </a:tc>
+              </a:tr>
+              <a:tr h="292608">
+                <a:tc>
+                  <a:txBody>
+                    <a:bodyPr/>
+                    <a:lstStyle/>
+                    <a:p>
+                      <a:pPr algn="l"/>
+                      <a:r>
+                        <a:rPr sz="1200" b="0">
+                          <a:solidFill>
+                            <a:srgbClr val="16212E"/>
+                          </a:solidFill>
+                          <a:latin typeface="Microsoft JhengHei"/>
+                        </a:rPr>
+                        <a:t>營運⑤⑥ 兩條工作流每筆工時</a:t>
+                      </a:r>
+                    </a:p>
+                  </a:txBody>
+                  <a:tcPr marL="45720" marR="45720" marT="18288" marB="18288" anchor="ctr">
+                    <a:solidFill>
+                      <a:srgbClr val="FFFFFF"/>
+                    </a:solidFill>
+                  </a:tcPr>
+                </a:tc>
+                <a:tc>
+                  <a:txBody>
+                    <a:bodyPr/>
+                    <a:lstStyle/>
+                    <a:p>
+                      <a:pPr algn="ctr"/>
+                      <a:r>
+                        <a:rPr sz="1200" b="0">
+                          <a:solidFill>
+                            <a:srgbClr val="6B7885"/>
+                          </a:solidFill>
+                          <a:latin typeface="Microsoft JhengHei"/>
+                        </a:rPr>
+                        <a:t>批次20秒估·判讀5.25分單批</a:t>
+                      </a:r>
+                    </a:p>
+                  </a:txBody>
+                  <a:tcPr marL="45720" marR="45720" marT="18288" marB="18288" anchor="ctr">
+                    <a:solidFill>
+                      <a:srgbClr val="FFFFFF"/>
+                    </a:solidFill>
+                  </a:tcPr>
+                </a:tc>
+                <a:tc>
+                  <a:txBody>
+                    <a:bodyPr/>
+                    <a:lstStyle/>
+                    <a:p>
+                      <a:pPr algn="ctr"/>
+                      <a:r>
+                        <a:rPr sz="1200" b="0">
+                          <a:solidFill>
+                            <a:srgbClr val="6B7885"/>
+                          </a:solidFill>
+                          <a:latin typeface="Microsoft JhengHei"/>
+                        </a:rPr>
+                        <a:t>W6 交正式量測｜G1 訂目標</a:t>
+                      </a:r>
+                    </a:p>
+                  </a:txBody>
+                  <a:tcPr marL="45720" marR="45720" marT="18288" marB="18288" anchor="ctr">
+                    <a:solidFill>
+                      <a:srgbClr val="FFFFFF"/>
+                    </a:solidFill>
+                  </a:tcPr>
+                </a:tc>
+              </a:tr>
+              <a:tr h="292608">
+                <a:tc>
+                  <a:txBody>
+                    <a:bodyPr/>
+                    <a:lstStyle/>
+                    <a:p>
+                      <a:pPr algn="l"/>
+                      <a:r>
+                        <a:rPr sz="1200" b="0">
+                          <a:solidFill>
+                            <a:srgbClr val="16212E"/>
+                          </a:solidFill>
+                          <a:latin typeface="Microsoft JhengHei"/>
+                        </a:rPr>
+                        <a:t>營運⑦ ADAS 行車輔助誤報率</a:t>
+                      </a:r>
+                    </a:p>
+                  </a:txBody>
+                  <a:tcPr marL="45720" marR="45720" marT="18288" marB="18288" anchor="ctr">
+                    <a:solidFill>
+                      <a:srgbClr val="FFFFFF"/>
+                    </a:solidFill>
+                  </a:tcPr>
+                </a:tc>
+                <a:tc>
+                  <a:txBody>
+                    <a:bodyPr/>
+                    <a:lstStyle/>
+                    <a:p>
+                      <a:pPr algn="ctr"/>
+                      <a:r>
+                        <a:rPr sz="1200" b="0">
+                          <a:solidFill>
+                            <a:srgbClr val="6B7885"/>
+                          </a:solidFill>
+                          <a:latin typeface="Microsoft JhengHei"/>
+                        </a:rPr>
+                        <a:t>單月樣本 104/1,029≈10.1%</a:t>
+                      </a:r>
+                    </a:p>
+                  </a:txBody>
+                  <a:tcPr marL="45720" marR="45720" marT="18288" marB="18288" anchor="ctr">
+                    <a:solidFill>
+                      <a:srgbClr val="FFFFFF"/>
+                    </a:solidFill>
+                  </a:tcPr>
+                </a:tc>
+                <a:tc>
+                  <a:txBody>
+                    <a:bodyPr/>
+                    <a:lstStyle/>
+                    <a:p>
+                      <a:pPr algn="ctr"/>
+                      <a:r>
+                        <a:rPr sz="1200" b="0">
+                          <a:solidFill>
+                            <a:srgbClr val="6B7885"/>
+                          </a:solidFill>
+                          <a:latin typeface="Microsoft JhengHei"/>
+                        </a:rPr>
+                        <a:t>→7%以下(提案)｜人機軌W12判</a:t>
+                      </a:r>
+                    </a:p>
+                  </a:txBody>
+                  <a:tcPr marL="45720" marR="45720" marT="18288" marB="18288" anchor="ctr">
+                    <a:solidFill>
+                      <a:srgbClr val="FFFFFF"/>
+                    </a:solidFill>
+                  </a:tcPr>
+                </a:tc>
+              </a:tr>
+              <a:tr h="292608">
+                <a:tc>
+                  <a:txBody>
+                    <a:bodyPr/>
+                    <a:lstStyle/>
+                    <a:p>
+                      <a:pPr algn="l"/>
+                      <a:r>
+                        <a:rPr sz="1200" b="0">
+                          <a:solidFill>
+                            <a:srgbClr val="16212E"/>
+                          </a:solidFill>
+                          <a:latin typeface="Microsoft JhengHei"/>
+                        </a:rPr>
+                        <a:t>營運⑧ 客戶回頭標記率(越低越好)</a:t>
+                      </a:r>
+                    </a:p>
+                  </a:txBody>
+                  <a:tcPr marL="45720" marR="45720" marT="18288" marB="18288" anchor="ctr">
+                    <a:solidFill>
+                      <a:srgbClr val="FFFFFF"/>
+                    </a:solidFill>
+                  </a:tcPr>
+                </a:tc>
+                <a:tc>
+                  <a:txBody>
+                    <a:bodyPr/>
+                    <a:lstStyle/>
+                    <a:p>
+                      <a:pPr algn="ctr"/>
+                      <a:r>
+                        <a:rPr sz="1200" b="0">
+                          <a:solidFill>
+                            <a:srgbClr val="6B7885"/>
+                          </a:solidFill>
+                          <a:latin typeface="Microsoft JhengHei"/>
+                        </a:rPr>
+                        <a:t>5–10%｜駕駛無效警示代理</a:t>
+                      </a:r>
+                    </a:p>
+                  </a:txBody>
+                  <a:tcPr marL="45720" marR="45720" marT="18288" marB="18288" anchor="ctr">
+                    <a:solidFill>
+                      <a:srgbClr val="FFFFFF"/>
+                    </a:solidFill>
+                  </a:tcPr>
+                </a:tc>
+                <a:tc>
+                  <a:txBody>
+                    <a:bodyPr/>
+                    <a:lstStyle/>
+                    <a:p>
+                      <a:pPr algn="ctr"/>
+                      <a:r>
+                        <a:rPr sz="1200" b="0">
+                          <a:solidFill>
+                            <a:srgbClr val="6B7885"/>
+                          </a:solidFill>
+                          <a:latin typeface="Microsoft JhengHei"/>
+                        </a:rPr>
+                        <a:t>降至 5% 以下(提案)</a:t>
+                      </a:r>
+                    </a:p>
+                  </a:txBody>
+                  <a:tcPr marL="45720" marR="45720" marT="18288" marB="18288" anchor="ctr">
+                    <a:solidFill>
+                      <a:srgbClr val="FFFFFF"/>
+                    </a:solidFill>
+                  </a:tcPr>
+                </a:tc>
+              </a:tr>
+              <a:tr h="292608">
+                <a:tc>
+                  <a:txBody>
+                    <a:bodyPr/>
+                    <a:lstStyle/>
+                    <a:p>
+                      <a:pPr algn="l"/>
+                      <a:r>
+                        <a:rPr sz="1200" b="0">
+                          <a:solidFill>
+                            <a:srgbClr val="16212E"/>
+                          </a:solidFill>
+                          <a:latin typeface="Microsoft JhengHei"/>
+                        </a:rPr>
+                        <a:t>營運⑨ 尖峰徵調研發人時</a:t>
+                      </a:r>
+                    </a:p>
+                  </a:txBody>
+                  <a:tcPr marL="45720" marR="45720" marT="18288" marB="18288" anchor="ctr">
+                    <a:solidFill>
+                      <a:srgbClr val="FFFFFF"/>
+                    </a:solidFill>
+                  </a:tcPr>
+                </a:tc>
+                <a:tc>
+                  <a:txBody>
+                    <a:bodyPr/>
+                    <a:lstStyle/>
+                    <a:p>
+                      <a:pPr algn="ctr"/>
+                      <a:r>
+                        <a:rPr sz="1200" b="0">
+                          <a:solidFill>
+                            <a:srgbClr val="6B7885"/>
+                          </a:solidFill>
+                          <a:latin typeface="Microsoft JhengHei"/>
+                        </a:rPr>
+                        <a:t>徵調 7 位研發｜非常態編制</a:t>
+                      </a:r>
+                    </a:p>
+                  </a:txBody>
+                  <a:tcPr marL="45720" marR="45720" marT="18288" marB="18288" anchor="ctr">
+                    <a:solidFill>
+                      <a:srgbClr val="FFFFFF"/>
+                    </a:solidFill>
+                  </a:tcPr>
+                </a:tc>
+                <a:tc>
+                  <a:txBody>
+                    <a:bodyPr/>
+                    <a:lstStyle/>
+                    <a:p>
+                      <a:pPr algn="ctr"/>
+                      <a:r>
+                        <a:rPr sz="1200" b="0">
+                          <a:solidFill>
+                            <a:srgbClr val="6B7885"/>
+                          </a:solidFill>
+                          <a:latin typeface="Microsoft JhengHei"/>
+                        </a:rPr>
+                        <a:t>期內建量測基準｜G2 訂目標</a:t>
+                      </a:r>
+                    </a:p>
+                  </a:txBody>
+                  <a:tcPr marL="45720" marR="45720" marT="18288" marB="18288" anchor="ctr">
+                    <a:solidFill>
+                      <a:srgbClr val="FFFFFF"/>
+                    </a:solidFill>
+                  </a:tcPr>
+                </a:tc>
+              </a:tr>
+            </a:tbl>
+          </a:graphicData>
+        </a:graphic>
+      </p:graphicFrame>
+      <p:graphicFrame>
+        <p:nvGraphicFramePr>
+          <p:cNvPr id="9" name="Table 8"/>
+          <p:cNvGraphicFramePr>
+            <a:graphicFrameLocks noGrp="1"/>
+          </p:cNvGraphicFramePr>
+          <p:nvPr/>
+        </p:nvGraphicFramePr>
+        <p:xfrm>
           <a:off x="658368" y="5010912"/>
-          <a:ext cx="9658806" cy="1499616"/>
+          <a:ext cx="9658805" cy="1499616"/>
         </p:xfrm>
         <a:graphic>
           <a:graphicData uri="http://schemas.openxmlformats.org/drawingml/2006/table">
@@ -6840,8 +6751,9 @@
               </a:tblPr>
               <a:tblGrid>
                 <a:gridCol w="2897642"/>
-                <a:gridCol w="3380582"/>
-                <a:gridCol w="3380582"/>
+                <a:gridCol w="2253721"/>
+                <a:gridCol w="2253721"/>
+                <a:gridCol w="2253721"/>
               </a:tblGrid>
               <a:tr h="329184">
                 <a:tc>
@@ -6880,7 +6792,7 @@
                           </a:solidFill>
                           <a:latin typeface="Microsoft JhengHei"/>
                         </a:rPr>
-                        <a:t>G2 的四臂(同一凍結評估集)</a:t>
+                        <a:t>護欄層｜否決型 · 任一未達標不移交</a:t>
                       </a:r>
                     </a:p>
                   </a:txBody>
@@ -6903,7 +6815,30 @@
                           </a:solidFill>
                           <a:latin typeface="Microsoft JhengHei"/>
                         </a:rPr>
-                        <a:t>這一臂誰在判</a:t>
+                        <a:t>今天</a:t>
+                      </a:r>
+                    </a:p>
+                  </a:txBody>
+                  <a:tcPr marL="45720" marR="45720" marT="18288" marB="18288" anchor="ctr">
+                    <a:solidFill>
+                      <a:srgbClr val="1F4E79"/>
+                    </a:solidFill>
+                  </a:tcPr>
+                </a:tc>
+                <a:tc>
+                  <a:txBody>
+                    <a:bodyPr/>
+                    <a:lstStyle/>
+                    <a:p>
+                      <a:pPr algn="ctr"/>
+                      <a:r>
+                        <a:rPr sz="1200" b="1">
+                          <a:solidFill>
+                            <a:srgbClr val="FFFFFF"/>
+                          </a:solidFill>
+                          <a:latin typeface="Microsoft JhengHei"/>
+                        </a:rPr>
+                        <a:t>交什麼 · 第幾週</a:t>
                       </a:r>
                     </a:p>
                   </a:txBody>
@@ -6928,7 +6863,7 @@
                           </a:solidFill>
                           <a:latin typeface="Microsoft JhengHei"/>
                         </a:rPr>
-                        <a:t>① 現行影像模型</a:t>
+                        <a:t>⑩ 漏放率</a:t>
                       </a:r>
                     </a:p>
                   </a:txBody>
@@ -6951,7 +6886,7 @@
                           </a:solidFill>
                           <a:latin typeface="Microsoft JhengHei"/>
                         </a:rPr>
-                        <a:t>機器初判 · 人全數複核</a:t>
+                        <a:t>不存在｜39 筆·下限</a:t>
                       </a:r>
                     </a:p>
                   </a:txBody>
@@ -6974,7 +6909,30 @@
                           </a:solidFill>
                           <a:latin typeface="Microsoft JhengHei"/>
                         </a:rPr>
-                        <a:t>現況基線｜沒它三臂無從比</a:t>
+                        <a:t>W6 點估計｜95% CI</a:t>
+                      </a:r>
+                    </a:p>
+                  </a:txBody>
+                  <a:tcPr marL="45720" marR="45720" marT="18288" marB="18288" anchor="ctr">
+                    <a:solidFill>
+                      <a:srgbClr val="FFFFFF"/>
+                    </a:solidFill>
+                  </a:tcPr>
+                </a:tc>
+                <a:tc>
+                  <a:txBody>
+                    <a:bodyPr/>
+                    <a:lstStyle/>
+                    <a:p>
+                      <a:pPr algn="ctr"/>
+                      <a:r>
+                        <a:rPr sz="1200" b="0">
+                          <a:solidFill>
+                            <a:srgbClr val="6B7885"/>
+                          </a:solidFill>
+                          <a:latin typeface="Microsoft JhengHei"/>
+                        </a:rPr>
+                        <a:t>否決 G1｜技術負責人</a:t>
                       </a:r>
                     </a:p>
                   </a:txBody>
@@ -6999,7 +6957,7 @@
                           </a:solidFill>
                           <a:latin typeface="Microsoft JhengHei"/>
                         </a:rPr>
-                        <a:t>② 規則式脈絡基線</a:t>
+                        <a:t>⑪ 複核者一致性</a:t>
                       </a:r>
                     </a:p>
                   </a:txBody>
@@ -7022,7 +6980,7 @@
                           </a:solidFill>
                           <a:latin typeface="Microsoft JhengHei"/>
                         </a:rPr>
-                        <a:t>規則式脈絡層 + 人全數複核</a:t>
+                        <a:t>現況未量測</a:t>
                       </a:r>
                     </a:p>
                   </a:txBody>
@@ -7045,7 +7003,30 @@
                           </a:solidFill>
                           <a:latin typeface="Microsoft JhengHei"/>
                         </a:rPr>
-                        <a:t>不含模型誤報降幅｜對照基線</a:t>
+                        <a:t>W10 前基線｜目標 G2</a:t>
+                      </a:r>
+                    </a:p>
+                  </a:txBody>
+                  <a:tcPr marL="45720" marR="45720" marT="18288" marB="18288" anchor="ctr">
+                    <a:solidFill>
+                      <a:srgbClr val="FFFFFF"/>
+                    </a:solidFill>
+                  </a:tcPr>
+                </a:tc>
+                <a:tc>
+                  <a:txBody>
+                    <a:bodyPr/>
+                    <a:lstStyle/>
+                    <a:p>
+                      <a:pPr algn="ctr"/>
+                      <a:r>
+                        <a:rPr sz="1200" b="0">
+                          <a:solidFill>
+                            <a:srgbClr val="6B7885"/>
+                          </a:solidFill>
+                          <a:latin typeface="Microsoft JhengHei"/>
+                        </a:rPr>
+                        <a:t>否決G2·複核營運主管</a:t>
                       </a:r>
                     </a:p>
                   </a:txBody>
@@ -7070,7 +7051,7 @@
                           </a:solidFill>
                           <a:latin typeface="Microsoft JhengHei"/>
                         </a:rPr>
-                        <a:t>③ 人機協作</a:t>
+                        <a:t>⑫ 訓練資料可追溯率</a:t>
                       </a:r>
                     </a:p>
                   </a:txBody>
@@ -7093,7 +7074,7 @@
                           </a:solidFill>
                           <a:latin typeface="Microsoft JhengHei"/>
                         </a:rPr>
-                        <a:t>機器輔助 · 人判定</a:t>
+                        <a:t>0%</a:t>
                       </a:r>
                     </a:p>
                   </a:txBody>
@@ -7116,7 +7097,30 @@
                           </a:solidFill>
                           <a:latin typeface="Microsoft JhengHei"/>
                         </a:rPr>
-                        <a:t>觸碰時間/P90 回覆/判定品質</a:t>
+                        <a:t>100%,無中間值</a:t>
+                      </a:r>
+                    </a:p>
+                  </a:txBody>
+                  <a:tcPr marL="45720" marR="45720" marT="18288" marB="18288" anchor="ctr">
+                    <a:solidFill>
+                      <a:srgbClr val="FFFFFF"/>
+                    </a:solidFill>
+                  </a:tcPr>
+                </a:tc>
+                <a:tc>
+                  <a:txBody>
+                    <a:bodyPr/>
+                    <a:lstStyle/>
+                    <a:p>
+                      <a:pPr algn="ctr"/>
+                      <a:r>
+                        <a:rPr sz="1200" b="0">
+                          <a:solidFill>
+                            <a:srgbClr val="6B7885"/>
+                          </a:solidFill>
+                          <a:latin typeface="Microsoft JhengHei"/>
+                        </a:rPr>
+                        <a:t>未達 100% 不移交</a:t>
                       </a:r>
                     </a:p>
                   </a:txBody>
@@ -7141,7 +7145,7 @@
                           </a:solidFill>
                           <a:latin typeface="Microsoft JhengHei"/>
                         </a:rPr>
-                        <a:t>④ 影子模式</a:t>
+                        <a:t>⑬ 漏濾率(本輪新增)</a:t>
                       </a:r>
                     </a:p>
                   </a:txBody>
@@ -7164,7 +7168,7 @@
                           </a:solidFill>
                           <a:latin typeface="Microsoft JhengHei"/>
                         </a:rPr>
-                        <a:t>機器結案不對外送｜人逐筆判</a:t>
+                        <a:t>不存在｜機制尚未建立</a:t>
                       </a:r>
                     </a:p>
                   </a:txBody>
@@ -7187,7 +7191,30 @@
                           </a:solidFill>
                           <a:latin typeface="Microsoft JhengHei"/>
                         </a:rPr>
-                        <a:t>自動結案漏放率｜唯一算得出</a:t>
+                        <a:t>W12 差值 95% CI</a:t>
+                      </a:r>
+                    </a:p>
+                  </a:txBody>
+                  <a:tcPr marL="45720" marR="45720" marT="18288" marB="18288" anchor="ctr">
+                    <a:solidFill>
+                      <a:srgbClr val="FBEFEF"/>
+                    </a:solidFill>
+                  </a:tcPr>
+                </a:tc>
+                <a:tc>
+                  <a:txBody>
+                    <a:bodyPr/>
+                    <a:lstStyle/>
+                    <a:p>
+                      <a:pPr algn="ctr"/>
+                      <a:r>
+                        <a:rPr sz="1200" b="0">
+                          <a:solidFill>
+                            <a:srgbClr val="C00000"/>
+                          </a:solidFill>
+                          <a:latin typeface="Microsoft JhengHei"/>
+                        </a:rPr>
+                        <a:t>否決對外｜技術負責人</a:t>
                       </a:r>
                     </a:p>
                   </a:txBody>
@@ -7293,7 +7320,7 @@
                 </a:solidFill>
                 <a:latin typeface="Microsoft JhengHei"/>
               </a:rPr>
-              <a:t>成本主體是人,而自動化的代價我們自己先算了</a:t>
+              <a:t>六個月分三段付,每一段都可以喊停</a:t>
             </a:r>
           </a:p>
         </p:txBody>
@@ -7332,7 +7359,7 @@
                 </a:solidFill>
                 <a:latin typeface="Microsoft JhengHei"/>
               </a:rPr>
-              <a:t>請求核准第一段 4.85 人月 / NT$42–47 萬,並指定贊助人</a:t>
+              <a:t>六包只有一包是 AI —— 評估集 → 標註 → 特徵 → 地端 VLM;三道門各自寫明什麼條件下停</a:t>
             </a:r>
           </a:p>
         </p:txBody>
@@ -7390,13 +7417,13 @@
         <p:spPr>
           <a:xfrm>
             <a:off x="658368" y="1783080"/>
-            <a:ext cx="45720" cy="750658"/>
+            <a:ext cx="45720" cy="301752"/>
           </a:xfrm>
           <a:prstGeom prst="rect">
             <a:avLst/>
           </a:prstGeom>
           <a:solidFill>
-            <a:srgbClr val="C00000"/>
+            <a:srgbClr val="1F4E79"/>
           </a:solidFill>
           <a:ln>
             <a:noFill/>
@@ -7434,7 +7461,7 @@
         <p:spPr>
           <a:xfrm>
             <a:off x="804672" y="1755648"/>
-            <a:ext cx="2408822" cy="842098"/>
+            <a:ext cx="2408822" cy="393192"/>
           </a:xfrm>
           <a:prstGeom prst="rect">
             <a:avLst/>
@@ -7459,7 +7486,7 @@
                 </a:solidFill>
                 <a:latin typeface="Microsoft JhengHei"/>
               </a:rPr>
-              <a:t>地端設備(一台起步)</a:t>
+              <a:t>WP-A 評估底座｜AI 的前置</a:t>
             </a:r>
           </a:p>
         </p:txBody>
@@ -7473,7 +7500,7 @@
         <p:spPr>
           <a:xfrm>
             <a:off x="3268358" y="1755648"/>
-            <a:ext cx="3152759" cy="842098"/>
+            <a:ext cx="977767" cy="393192"/>
           </a:xfrm>
           <a:prstGeom prst="rect">
             <a:avLst/>
@@ -7494,11 +7521,11 @@
             <a:r>
               <a:rPr sz="1500" b="1">
                 <a:solidFill>
-                  <a:srgbClr val="C00000"/>
+                  <a:srgbClr val="1F4E79"/>
                 </a:solidFill>
                 <a:latin typeface="Microsoft JhengHei"/>
               </a:rPr>
-              <a:t>NT$16–20 萬 / 台(一次性)</a:t>
+              <a:t>W1–6</a:t>
             </a:r>
           </a:p>
         </p:txBody>
@@ -7511,8 +7538,8 @@
         </p:nvSpPr>
         <p:spPr>
           <a:xfrm>
-            <a:off x="6530845" y="1755648"/>
-            <a:ext cx="4892753" cy="842098"/>
+            <a:off x="4355854" y="1755648"/>
+            <a:ext cx="7067745" cy="393192"/>
           </a:xfrm>
           <a:prstGeom prst="rect">
             <a:avLst/>
@@ -7537,7 +7564,7 @@
                 </a:solidFill>
                 <a:latin typeface="Microsoft JhengHei"/>
               </a:rPr>
-              <a:t>市場採購量級,非核定採購價;本頁唯一不由算式推得的金額。選型於 G1 依 W1–6 定案。設備 = 初階工程師年成本(104–117 萬)的 14%–19%,硬體佔已估成本 8%–12%</a:t>
+              <a:t>交:公司第一份可稽核的錯誤率(含 95% CI)· 冷凍評估集 · 兩條工作流單位工時基準 · 每案結案方向黃金答案標籤 · 時間拆解與到件分布</a:t>
             </a:r>
           </a:p>
         </p:txBody>
@@ -7550,8 +7577,8 @@
         </p:nvSpPr>
         <p:spPr>
           <a:xfrm>
-            <a:off x="658368" y="2716618"/>
-            <a:ext cx="45720" cy="750658"/>
+            <a:off x="658368" y="2267712"/>
+            <a:ext cx="45720" cy="301752"/>
           </a:xfrm>
           <a:prstGeom prst="rect">
             <a:avLst/>
@@ -7594,8 +7621,8 @@
         </p:nvSpPr>
         <p:spPr>
           <a:xfrm>
-            <a:off x="804672" y="2689186"/>
-            <a:ext cx="2408822" cy="842098"/>
+            <a:off x="804672" y="2240280"/>
+            <a:ext cx="2408822" cy="393192"/>
           </a:xfrm>
           <a:prstGeom prst="rect">
             <a:avLst/>
@@ -7620,7 +7647,7 @@
                 </a:solidFill>
                 <a:latin typeface="Microsoft JhengHei"/>
               </a:rPr>
-              <a:t>🔴 稽核稅 —— 自動化不是免費的</a:t>
+              <a:t>WP-E 地端 VLM 事件判讀｜🔴 本案唯一的 AI 主體</a:t>
             </a:r>
           </a:p>
         </p:txBody>
@@ -7633,8 +7660,8 @@
         </p:nvSpPr>
         <p:spPr>
           <a:xfrm>
-            <a:off x="3268358" y="2689186"/>
-            <a:ext cx="3152759" cy="842098"/>
+            <a:off x="3268358" y="2240280"/>
+            <a:ext cx="977767" cy="393192"/>
           </a:xfrm>
           <a:prstGeom prst="rect">
             <a:avLst/>
@@ -7659,7 +7686,7 @@
                 </a:solidFill>
                 <a:latin typeface="Microsoft JhengHei"/>
               </a:rPr>
-              <a:t>吃掉毛節省的 3%–52%</a:t>
+              <a:t>W8–24</a:t>
             </a:r>
           </a:p>
         </p:txBody>
@@ -7672,8 +7699,8 @@
         </p:nvSpPr>
         <p:spPr>
           <a:xfrm>
-            <a:off x="6530845" y="2689186"/>
-            <a:ext cx="4892753" cy="842098"/>
+            <a:off x="4355854" y="2240280"/>
+            <a:ext cx="7067745" cy="393192"/>
           </a:xfrm>
           <a:prstGeom prst="rect">
             <a:avLst/>
@@ -7698,7 +7725,7 @@
                 </a:solidFill>
                 <a:latin typeface="Microsoft JhengHei"/>
               </a:rPr>
-              <a:t>毛節省 48.3–96.7 人時/天 = 6.0–12.1 FTE;但自動結案須抽樣盲測稽核(±1% 需 753 筆/月 = 0.39 FTE;分層 8 類 6,024 筆 = 3.14 FTE)→ 淨 2.9–11.7 FTE。推估非實測</a:t>
+              <a:t>地端 VLM,篩檢與深挖由同一台設備分時;選型見第 5 頁;量化規格與台數由 G1 依 W1–6 量測複核定案。W8–12 離線試驗 → W12–24 只跑影子模式:機器出結論不對外送,人照常判</a:t>
             </a:r>
           </a:p>
         </p:txBody>
@@ -7711,7 +7738,7 @@
         </p:nvSpPr>
         <p:spPr>
           <a:xfrm>
-            <a:off x="658368" y="3659300"/>
+            <a:off x="658368" y="2761488"/>
             <a:ext cx="3527450" cy="2121408"/>
           </a:xfrm>
           <a:prstGeom prst="roundRect">
@@ -7720,11 +7747,11 @@
             </a:avLst>
           </a:prstGeom>
           <a:solidFill>
-            <a:srgbClr val="EAF1F8"/>
+            <a:srgbClr val="FFFFFF"/>
           </a:solidFill>
-          <a:ln w="38100">
+          <a:ln w="20320">
             <a:solidFill>
-              <a:srgbClr val="1F4E79"/>
+              <a:srgbClr val="C00000"/>
             </a:solidFill>
           </a:ln>
           <a:effectLst/>
@@ -7759,7 +7786,7 @@
         </p:nvSpPr>
         <p:spPr>
           <a:xfrm>
-            <a:off x="768096" y="3787316"/>
+            <a:off x="768096" y="2889504"/>
             <a:ext cx="3307994" cy="566928"/>
           </a:xfrm>
           <a:prstGeom prst="rect">
@@ -7785,7 +7812,7 @@
                 </a:solidFill>
                 <a:latin typeface="Microsoft JhengHei"/>
               </a:rPr>
-              <a:t>我請求核准的錢</a:t>
+              <a:t>G1 · 第 6 週｜因果判定門</a:t>
             </a:r>
           </a:p>
         </p:txBody>
@@ -7798,8 +7825,8 @@
         </p:nvSpPr>
         <p:spPr>
           <a:xfrm>
-            <a:off x="1855927" y="4409108"/>
-            <a:ext cx="1132332" cy="274320"/>
+            <a:off x="2010613" y="3511296"/>
+            <a:ext cx="822960" cy="274320"/>
           </a:xfrm>
           <a:prstGeom prst="roundRect">
             <a:avLst>
@@ -7807,7 +7834,7 @@
             </a:avLst>
           </a:prstGeom>
           <a:solidFill>
-            <a:srgbClr val="1F4E79"/>
+            <a:srgbClr val="C00000"/>
           </a:solidFill>
           <a:ln>
             <a:noFill/>
@@ -7844,8 +7871,8 @@
         </p:nvSpPr>
         <p:spPr>
           <a:xfrm>
-            <a:off x="1855927" y="4409108"/>
-            <a:ext cx="1132332" cy="274320"/>
+            <a:off x="2010613" y="3511296"/>
+            <a:ext cx="822960" cy="274320"/>
           </a:xfrm>
           <a:prstGeom prst="rect">
             <a:avLst/>
@@ -7870,7 +7897,7 @@
                 </a:solidFill>
                 <a:latin typeface="Microsoft JhengHei"/>
               </a:rPr>
-              <a:t>第一段 W1–6</a:t>
+              <a:t>可喊停</a:t>
             </a:r>
           </a:p>
         </p:txBody>
@@ -7883,7 +7910,7 @@
         </p:nvSpPr>
         <p:spPr>
           <a:xfrm>
-            <a:off x="768096" y="4793156"/>
+            <a:off x="768096" y="3895344"/>
             <a:ext cx="3307994" cy="859535"/>
           </a:xfrm>
           <a:prstGeom prst="rect">
@@ -7909,7 +7936,7 @@
                 </a:solidFill>
                 <a:latin typeface="Microsoft JhengHei"/>
               </a:rPr>
-              <a:t>第一段 4.85 人月 · NT$42–47 萬</a:t>
+              <a:t>停:證據工作非主延遲 → 轉排班+尖峰人力池</a:t>
             </a:r>
           </a:p>
           <a:p>
@@ -7925,7 +7952,7 @@
                 </a:solidFill>
                 <a:latin typeface="Microsoft JhengHei"/>
               </a:rPr>
-              <a:t>〔規劃非核定預算〕G1 決定續行</a:t>
+              <a:t>停:評估底座未產出 → 剩餘工作全數不續行</a:t>
             </a:r>
           </a:p>
         </p:txBody>
@@ -7938,7 +7965,7 @@
         </p:nvSpPr>
         <p:spPr>
           <a:xfrm>
-            <a:off x="4332122" y="3659300"/>
+            <a:off x="4332122" y="2761488"/>
             <a:ext cx="3527450" cy="2121408"/>
           </a:xfrm>
           <a:prstGeom prst="roundRect">
@@ -7947,11 +7974,11 @@
             </a:avLst>
           </a:prstGeom>
           <a:solidFill>
-            <a:srgbClr val="EAF1F8"/>
+            <a:srgbClr val="FFFFFF"/>
           </a:solidFill>
-          <a:ln w="38100">
+          <a:ln w="20320">
             <a:solidFill>
-              <a:srgbClr val="1F4E79"/>
+              <a:srgbClr val="E8833A"/>
             </a:solidFill>
           </a:ln>
           <a:effectLst/>
@@ -7986,7 +8013,7 @@
         </p:nvSpPr>
         <p:spPr>
           <a:xfrm>
-            <a:off x="4441850" y="3787316"/>
+            <a:off x="4441850" y="2889504"/>
             <a:ext cx="3307994" cy="566928"/>
           </a:xfrm>
           <a:prstGeom prst="rect">
@@ -8012,7 +8039,7 @@
                 </a:solidFill>
                 <a:latin typeface="Microsoft JhengHei"/>
               </a:rPr>
-              <a:t>我請求核准的人</a:t>
+              <a:t>G2 · 第 12 週｜四臂比較門</a:t>
             </a:r>
           </a:p>
         </p:txBody>
@@ -8025,8 +8052,8 @@
         </p:nvSpPr>
         <p:spPr>
           <a:xfrm>
-            <a:off x="5586831" y="4409108"/>
-            <a:ext cx="1018032" cy="274320"/>
+            <a:off x="5087721" y="3511296"/>
+            <a:ext cx="2016252" cy="274320"/>
           </a:xfrm>
           <a:prstGeom prst="roundRect">
             <a:avLst>
@@ -8034,7 +8061,7 @@
             </a:avLst>
           </a:prstGeom>
           <a:solidFill>
-            <a:srgbClr val="1F4E79"/>
+            <a:srgbClr val="E8833A"/>
           </a:solidFill>
           <a:ln>
             <a:noFill/>
@@ -8071,8 +8098,8 @@
         </p:nvSpPr>
         <p:spPr>
           <a:xfrm>
-            <a:off x="5586831" y="4409108"/>
-            <a:ext cx="1018032" cy="274320"/>
+            <a:off x="5087721" y="3511296"/>
+            <a:ext cx="2016252" cy="274320"/>
           </a:xfrm>
           <a:prstGeom prst="rect">
             <a:avLst/>
@@ -8097,7 +8124,7 @@
                 </a:solidFill>
                 <a:latin typeface="Microsoft JhengHei"/>
               </a:rPr>
-              <a:t>指定贊助人</a:t>
+              <a:t>只能改規模,不能取消實驗</a:t>
             </a:r>
           </a:p>
         </p:txBody>
@@ -8110,7 +8137,7 @@
         </p:nvSpPr>
         <p:spPr>
           <a:xfrm>
-            <a:off x="4441850" y="4793156"/>
+            <a:off x="4441850" y="3895344"/>
             <a:ext cx="3307994" cy="859535"/>
           </a:xfrm>
           <a:prstGeom prst="rect">
@@ -8136,7 +8163,7 @@
                 </a:solidFill>
                 <a:latin typeface="Microsoft JhengHei"/>
               </a:rPr>
-              <a:t>請委員會指定項目贊助人</a:t>
+              <a:t>兩軌:工具品質軌 · 結案判定軌;停不掉實驗</a:t>
             </a:r>
           </a:p>
           <a:p>
@@ -8152,7 +8179,7 @@
                 </a:solidFill>
                 <a:latin typeface="Microsoft JhengHei"/>
               </a:rPr>
-              <a:t>G1 前確認與既有雲端規劃的邊界</a:t>
+              <a:t>只能改規模;對外自動結案不由 G2/G3 決定</a:t>
             </a:r>
           </a:p>
         </p:txBody>
@@ -8165,7 +8192,7 @@
         </p:nvSpPr>
         <p:spPr>
           <a:xfrm>
-            <a:off x="8005876" y="3659300"/>
+            <a:off x="8005876" y="2761488"/>
             <a:ext cx="3527450" cy="2121408"/>
           </a:xfrm>
           <a:prstGeom prst="roundRect">
@@ -8178,7 +8205,7 @@
           </a:solidFill>
           <a:ln w="20320">
             <a:solidFill>
-              <a:srgbClr val="6B7885"/>
+              <a:srgbClr val="C00000"/>
             </a:solidFill>
           </a:ln>
           <a:effectLst/>
@@ -8213,7 +8240,7 @@
         </p:nvSpPr>
         <p:spPr>
           <a:xfrm>
-            <a:off x="8115604" y="3787316"/>
+            <a:off x="8115604" y="2889504"/>
             <a:ext cx="3307994" cy="566928"/>
           </a:xfrm>
           <a:prstGeom prst="rect">
@@ -8239,7 +8266,7 @@
                 </a:solidFill>
                 <a:latin typeface="Microsoft JhengHei"/>
               </a:rPr>
-              <a:t>六個月之後你手上多三樣</a:t>
+              <a:t>G3 · 第 24 週｜部署決定門</a:t>
             </a:r>
           </a:p>
         </p:txBody>
@@ -8252,8 +8279,8 @@
         </p:nvSpPr>
         <p:spPr>
           <a:xfrm>
-            <a:off x="9336786" y="4409108"/>
-            <a:ext cx="865632" cy="274320"/>
+            <a:off x="9358122" y="3511296"/>
+            <a:ext cx="822960" cy="274320"/>
           </a:xfrm>
           <a:prstGeom prst="roundRect">
             <a:avLst>
@@ -8261,7 +8288,7 @@
             </a:avLst>
           </a:prstGeom>
           <a:solidFill>
-            <a:srgbClr val="6B7885"/>
+            <a:srgbClr val="C00000"/>
           </a:solidFill>
           <a:ln>
             <a:noFill/>
@@ -8298,8 +8325,8 @@
         </p:nvSpPr>
         <p:spPr>
           <a:xfrm>
-            <a:off x="9336786" y="4409108"/>
-            <a:ext cx="865632" cy="274320"/>
+            <a:off x="9358122" y="3511296"/>
+            <a:ext cx="822960" cy="274320"/>
           </a:xfrm>
           <a:prstGeom prst="rect">
             <a:avLst/>
@@ -8324,7 +8351,7 @@
                 </a:solidFill>
                 <a:latin typeface="Microsoft JhengHei"/>
               </a:rPr>
-              <a:t>誠實收尾</a:t>
+              <a:t>可喊停</a:t>
             </a:r>
           </a:p>
         </p:txBody>
@@ -8337,7 +8364,7 @@
         </p:nvSpPr>
         <p:spPr>
           <a:xfrm>
-            <a:off x="8115604" y="4793156"/>
+            <a:off x="8115604" y="3895344"/>
             <a:ext cx="3307994" cy="859535"/>
           </a:xfrm>
           <a:prstGeom prst="rect">
@@ -8363,7 +8390,7 @@
                 </a:solidFill>
                 <a:latin typeface="Microsoft JhengHei"/>
               </a:rPr>
-              <a:t>六個月後你手上多三樣:可稽核錯誤率 ·</a:t>
+              <a:t>🔴 停:對照重訓證不出增量 → 模型端不部署</a:t>
             </a:r>
           </a:p>
           <a:p>
@@ -8379,112 +8406,393 @@
                 </a:solidFill>
                 <a:latin typeface="Microsoft JhengHei"/>
               </a:rPr>
-              <a:t>脈絡判斷層 · 對照實驗結果</a:t>
-            </a:r>
-          </a:p>
-          <a:p>
-            <a:pPr algn="ctr">
-              <a:lnSpc>
-                <a:spcPct val="135000"/>
-              </a:lnSpc>
-            </a:pPr>
-            <a:r>
-              <a:rPr sz="1200" b="0">
-                <a:solidFill>
-                  <a:srgbClr val="6B7885"/>
-                </a:solidFill>
-                <a:latin typeface="Microsoft JhengHei"/>
-              </a:rPr>
-              <a:t>不做:客戶續等 · 小客戶無人看過</a:t>
-            </a:r>
-          </a:p>
-        </p:txBody>
-      </p:sp>
-      <p:sp>
-        <p:nvSpPr>
-          <p:cNvPr id="29" name="Rounded Rectangle 28"/>
-          <p:cNvSpPr/>
-          <p:nvPr/>
-        </p:nvSpPr>
-        <p:spPr>
-          <a:xfrm>
-            <a:off x="658368" y="5908724"/>
-            <a:ext cx="9658807" cy="601803"/>
-          </a:xfrm>
-          <a:prstGeom prst="roundRect">
-            <a:avLst>
-              <a:gd name="adj" fmla="val 6000"/>
-            </a:avLst>
-          </a:prstGeom>
-          <a:solidFill>
-            <a:srgbClr val="C00000"/>
-          </a:solidFill>
-          <a:ln>
-            <a:noFill/>
-          </a:ln>
-          <a:effectLst/>
-        </p:spPr>
-        <p:style>
-          <a:lnRef idx="1">
-            <a:schemeClr val="accent1"/>
-          </a:lnRef>
-          <a:fillRef idx="3">
-            <a:schemeClr val="accent1"/>
-          </a:fillRef>
-          <a:effectRef idx="2">
-            <a:schemeClr val="accent1"/>
-          </a:effectRef>
-          <a:fontRef idx="minor">
-            <a:schemeClr val="lt1"/>
-          </a:fontRef>
-        </p:style>
-        <p:txBody>
-          <a:bodyPr rtlCol="0" anchor="ctr"/>
-          <a:lstStyle/>
-          <a:p>
-            <a:pPr algn="ctr"/>
-          </a:p>
-        </p:txBody>
-      </p:sp>
-      <p:sp>
-        <p:nvSpPr>
-          <p:cNvPr id="30" name="TextBox 29"/>
-          <p:cNvSpPr txBox="1"/>
-          <p:nvPr/>
-        </p:nvSpPr>
-        <p:spPr>
-          <a:xfrm>
-            <a:off x="841247" y="5908724"/>
-            <a:ext cx="9293047" cy="601803"/>
-          </a:xfrm>
-          <a:prstGeom prst="rect">
-            <a:avLst/>
-          </a:prstGeom>
-          <a:noFill/>
-        </p:spPr>
-        <p:txBody>
-          <a:bodyPr wrap="square" lIns="0" rIns="0" tIns="0" bIns="0" anchor="ctr">
-            <a:spAutoFit/>
-          </a:bodyPr>
-          <a:lstStyle/>
-          <a:p>
-            <a:pPr algn="ctr">
-              <a:lnSpc>
-                <a:spcPct val="125000"/>
-              </a:lnSpc>
-            </a:pPr>
-            <a:r>
-              <a:rPr sz="1700" b="1">
-                <a:solidFill>
-                  <a:srgbClr val="FFFFFF"/>
-                </a:solidFill>
-                <a:latin typeface="Microsoft JhengHei"/>
-              </a:rPr>
-              <a:t>放行條件:擴編暴露非承諾節省 · 須 G2 證明可避免/延後 + 業務確認容量轉換才放行後續預算</a:t>
-            </a:r>
-          </a:p>
-        </p:txBody>
-      </p:sp>
+              <a:t>就算證不出,評估與標註品質流程仍留下</a:t>
+            </a:r>
+          </a:p>
+        </p:txBody>
+      </p:sp>
+      <p:graphicFrame>
+        <p:nvGraphicFramePr>
+          <p:cNvPr id="29" name="Table 28"/>
+          <p:cNvGraphicFramePr>
+            <a:graphicFrameLocks noGrp="1"/>
+          </p:cNvGraphicFramePr>
+          <p:nvPr/>
+        </p:nvGraphicFramePr>
+        <p:xfrm>
+          <a:off x="658368" y="5010912"/>
+          <a:ext cx="9658806" cy="1499616"/>
+        </p:xfrm>
+        <a:graphic>
+          <a:graphicData uri="http://schemas.openxmlformats.org/drawingml/2006/table">
+            <a:tbl>
+              <a:tblPr firstRow="1">
+                <a:tableStyleId>{5C22544A-7EE6-4342-B048-85BDC9FD1C3A}</a:tableStyleId>
+              </a:tblPr>
+              <a:tblGrid>
+                <a:gridCol w="2897642"/>
+                <a:gridCol w="3380582"/>
+                <a:gridCol w="3380582"/>
+              </a:tblGrid>
+              <a:tr h="329184">
+                <a:tc>
+                  <a:txBody>
+                    <a:bodyPr/>
+                    <a:lstStyle/>
+                    <a:p>
+                      <a:pPr algn="l"/>
+                      <a:r>
+                        <a:rPr sz="1200" b="1">
+                          <a:solidFill>
+                            <a:srgbClr val="FFFFFF"/>
+                          </a:solidFill>
+                          <a:latin typeface="Microsoft JhengHei"/>
+                        </a:rPr>
+                        <a:t/>
+                      </a:r>
+                    </a:p>
+                  </a:txBody>
+                  <a:tcPr marL="45720" marR="45720" marT="18288" marB="18288" anchor="ctr">
+                    <a:solidFill>
+                      <a:srgbClr val="1F4E79"/>
+                    </a:solidFill>
+                  </a:tcPr>
+                </a:tc>
+                <a:tc>
+                  <a:txBody>
+                    <a:bodyPr/>
+                    <a:lstStyle/>
+                    <a:p>
+                      <a:pPr algn="ctr"/>
+                      <a:r>
+                        <a:rPr sz="1200" b="1">
+                          <a:solidFill>
+                            <a:srgbClr val="FFFFFF"/>
+                          </a:solidFill>
+                          <a:latin typeface="Microsoft JhengHei"/>
+                        </a:rPr>
+                        <a:t>G2 的四臂(同一凍結評估集)</a:t>
+                      </a:r>
+                    </a:p>
+                  </a:txBody>
+                  <a:tcPr marL="45720" marR="45720" marT="18288" marB="18288" anchor="ctr">
+                    <a:solidFill>
+                      <a:srgbClr val="1F4E79"/>
+                    </a:solidFill>
+                  </a:tcPr>
+                </a:tc>
+                <a:tc>
+                  <a:txBody>
+                    <a:bodyPr/>
+                    <a:lstStyle/>
+                    <a:p>
+                      <a:pPr algn="ctr"/>
+                      <a:r>
+                        <a:rPr sz="1200" b="1">
+                          <a:solidFill>
+                            <a:srgbClr val="FFFFFF"/>
+                          </a:solidFill>
+                          <a:latin typeface="Microsoft JhengHei"/>
+                        </a:rPr>
+                        <a:t>這一臂誰在判</a:t>
+                      </a:r>
+                    </a:p>
+                  </a:txBody>
+                  <a:tcPr marL="45720" marR="45720" marT="18288" marB="18288" anchor="ctr">
+                    <a:solidFill>
+                      <a:srgbClr val="1F4E79"/>
+                    </a:solidFill>
+                  </a:tcPr>
+                </a:tc>
+              </a:tr>
+              <a:tr h="292608">
+                <a:tc>
+                  <a:txBody>
+                    <a:bodyPr/>
+                    <a:lstStyle/>
+                    <a:p>
+                      <a:pPr algn="l"/>
+                      <a:r>
+                        <a:rPr sz="1200" b="0">
+                          <a:solidFill>
+                            <a:srgbClr val="16212E"/>
+                          </a:solidFill>
+                          <a:latin typeface="Microsoft JhengHei"/>
+                        </a:rPr>
+                        <a:t>① 現行影像模型</a:t>
+                      </a:r>
+                    </a:p>
+                  </a:txBody>
+                  <a:tcPr marL="45720" marR="45720" marT="18288" marB="18288" anchor="ctr">
+                    <a:solidFill>
+                      <a:srgbClr val="FFFFFF"/>
+                    </a:solidFill>
+                  </a:tcPr>
+                </a:tc>
+                <a:tc>
+                  <a:txBody>
+                    <a:bodyPr/>
+                    <a:lstStyle/>
+                    <a:p>
+                      <a:pPr algn="ctr"/>
+                      <a:r>
+                        <a:rPr sz="1200" b="0">
+                          <a:solidFill>
+                            <a:srgbClr val="6B7885"/>
+                          </a:solidFill>
+                          <a:latin typeface="Microsoft JhengHei"/>
+                        </a:rPr>
+                        <a:t>機器初判 · 人全數複核</a:t>
+                      </a:r>
+                    </a:p>
+                  </a:txBody>
+                  <a:tcPr marL="45720" marR="45720" marT="18288" marB="18288" anchor="ctr">
+                    <a:solidFill>
+                      <a:srgbClr val="FFFFFF"/>
+                    </a:solidFill>
+                  </a:tcPr>
+                </a:tc>
+                <a:tc>
+                  <a:txBody>
+                    <a:bodyPr/>
+                    <a:lstStyle/>
+                    <a:p>
+                      <a:pPr algn="ctr"/>
+                      <a:r>
+                        <a:rPr sz="1200" b="0">
+                          <a:solidFill>
+                            <a:srgbClr val="6B7885"/>
+                          </a:solidFill>
+                          <a:latin typeface="Microsoft JhengHei"/>
+                        </a:rPr>
+                        <a:t>現況基線｜沒它三臂無從比</a:t>
+                      </a:r>
+                    </a:p>
+                  </a:txBody>
+                  <a:tcPr marL="45720" marR="45720" marT="18288" marB="18288" anchor="ctr">
+                    <a:solidFill>
+                      <a:srgbClr val="FFFFFF"/>
+                    </a:solidFill>
+                  </a:tcPr>
+                </a:tc>
+              </a:tr>
+              <a:tr h="292608">
+                <a:tc>
+                  <a:txBody>
+                    <a:bodyPr/>
+                    <a:lstStyle/>
+                    <a:p>
+                      <a:pPr algn="l"/>
+                      <a:r>
+                        <a:rPr sz="1200" b="0">
+                          <a:solidFill>
+                            <a:srgbClr val="16212E"/>
+                          </a:solidFill>
+                          <a:latin typeface="Microsoft JhengHei"/>
+                        </a:rPr>
+                        <a:t>② 規則式脈絡基線</a:t>
+                      </a:r>
+                    </a:p>
+                  </a:txBody>
+                  <a:tcPr marL="45720" marR="45720" marT="18288" marB="18288" anchor="ctr">
+                    <a:solidFill>
+                      <a:srgbClr val="FFFFFF"/>
+                    </a:solidFill>
+                  </a:tcPr>
+                </a:tc>
+                <a:tc>
+                  <a:txBody>
+                    <a:bodyPr/>
+                    <a:lstStyle/>
+                    <a:p>
+                      <a:pPr algn="ctr"/>
+                      <a:r>
+                        <a:rPr sz="1200" b="0">
+                          <a:solidFill>
+                            <a:srgbClr val="6B7885"/>
+                          </a:solidFill>
+                          <a:latin typeface="Microsoft JhengHei"/>
+                        </a:rPr>
+                        <a:t>規則式脈絡層 + 人全數複核</a:t>
+                      </a:r>
+                    </a:p>
+                  </a:txBody>
+                  <a:tcPr marL="45720" marR="45720" marT="18288" marB="18288" anchor="ctr">
+                    <a:solidFill>
+                      <a:srgbClr val="FFFFFF"/>
+                    </a:solidFill>
+                  </a:tcPr>
+                </a:tc>
+                <a:tc>
+                  <a:txBody>
+                    <a:bodyPr/>
+                    <a:lstStyle/>
+                    <a:p>
+                      <a:pPr algn="ctr"/>
+                      <a:r>
+                        <a:rPr sz="1200" b="0">
+                          <a:solidFill>
+                            <a:srgbClr val="6B7885"/>
+                          </a:solidFill>
+                          <a:latin typeface="Microsoft JhengHei"/>
+                        </a:rPr>
+                        <a:t>不含模型誤報降幅｜對照基線</a:t>
+                      </a:r>
+                    </a:p>
+                  </a:txBody>
+                  <a:tcPr marL="45720" marR="45720" marT="18288" marB="18288" anchor="ctr">
+                    <a:solidFill>
+                      <a:srgbClr val="FFFFFF"/>
+                    </a:solidFill>
+                  </a:tcPr>
+                </a:tc>
+              </a:tr>
+              <a:tr h="292608">
+                <a:tc>
+                  <a:txBody>
+                    <a:bodyPr/>
+                    <a:lstStyle/>
+                    <a:p>
+                      <a:pPr algn="l"/>
+                      <a:r>
+                        <a:rPr sz="1200" b="0">
+                          <a:solidFill>
+                            <a:srgbClr val="16212E"/>
+                          </a:solidFill>
+                          <a:latin typeface="Microsoft JhengHei"/>
+                        </a:rPr>
+                        <a:t>③ 人機協作</a:t>
+                      </a:r>
+                    </a:p>
+                  </a:txBody>
+                  <a:tcPr marL="45720" marR="45720" marT="18288" marB="18288" anchor="ctr">
+                    <a:solidFill>
+                      <a:srgbClr val="FFFFFF"/>
+                    </a:solidFill>
+                  </a:tcPr>
+                </a:tc>
+                <a:tc>
+                  <a:txBody>
+                    <a:bodyPr/>
+                    <a:lstStyle/>
+                    <a:p>
+                      <a:pPr algn="ctr"/>
+                      <a:r>
+                        <a:rPr sz="1200" b="0">
+                          <a:solidFill>
+                            <a:srgbClr val="6B7885"/>
+                          </a:solidFill>
+                          <a:latin typeface="Microsoft JhengHei"/>
+                        </a:rPr>
+                        <a:t>機器輔助 · 人判定</a:t>
+                      </a:r>
+                    </a:p>
+                  </a:txBody>
+                  <a:tcPr marL="45720" marR="45720" marT="18288" marB="18288" anchor="ctr">
+                    <a:solidFill>
+                      <a:srgbClr val="FFFFFF"/>
+                    </a:solidFill>
+                  </a:tcPr>
+                </a:tc>
+                <a:tc>
+                  <a:txBody>
+                    <a:bodyPr/>
+                    <a:lstStyle/>
+                    <a:p>
+                      <a:pPr algn="ctr"/>
+                      <a:r>
+                        <a:rPr sz="1200" b="0">
+                          <a:solidFill>
+                            <a:srgbClr val="6B7885"/>
+                          </a:solidFill>
+                          <a:latin typeface="Microsoft JhengHei"/>
+                        </a:rPr>
+                        <a:t>觸碰時間/P90 回覆/判定品質</a:t>
+                      </a:r>
+                    </a:p>
+                  </a:txBody>
+                  <a:tcPr marL="45720" marR="45720" marT="18288" marB="18288" anchor="ctr">
+                    <a:solidFill>
+                      <a:srgbClr val="FFFFFF"/>
+                    </a:solidFill>
+                  </a:tcPr>
+                </a:tc>
+              </a:tr>
+              <a:tr h="292608">
+                <a:tc>
+                  <a:txBody>
+                    <a:bodyPr/>
+                    <a:lstStyle/>
+                    <a:p>
+                      <a:pPr algn="l"/>
+                      <a:r>
+                        <a:rPr sz="1200" b="1">
+                          <a:solidFill>
+                            <a:srgbClr val="C00000"/>
+                          </a:solidFill>
+                          <a:latin typeface="Microsoft JhengHei"/>
+                        </a:rPr>
+                        <a:t>④ 影子模式</a:t>
+                      </a:r>
+                    </a:p>
+                  </a:txBody>
+                  <a:tcPr marL="45720" marR="45720" marT="18288" marB="18288" anchor="ctr">
+                    <a:solidFill>
+                      <a:srgbClr val="FBEFEF"/>
+                    </a:solidFill>
+                  </a:tcPr>
+                </a:tc>
+                <a:tc>
+                  <a:txBody>
+                    <a:bodyPr/>
+                    <a:lstStyle/>
+                    <a:p>
+                      <a:pPr algn="ctr"/>
+                      <a:r>
+                        <a:rPr sz="1200" b="0">
+                          <a:solidFill>
+                            <a:srgbClr val="C00000"/>
+                          </a:solidFill>
+                          <a:latin typeface="Microsoft JhengHei"/>
+                        </a:rPr>
+                        <a:t>機器結案不對外送｜人逐筆判</a:t>
+                      </a:r>
+                    </a:p>
+                  </a:txBody>
+                  <a:tcPr marL="45720" marR="45720" marT="18288" marB="18288" anchor="ctr">
+                    <a:solidFill>
+                      <a:srgbClr val="FBEFEF"/>
+                    </a:solidFill>
+                  </a:tcPr>
+                </a:tc>
+                <a:tc>
+                  <a:txBody>
+                    <a:bodyPr/>
+                    <a:lstStyle/>
+                    <a:p>
+                      <a:pPr algn="ctr"/>
+                      <a:r>
+                        <a:rPr sz="1200" b="0">
+                          <a:solidFill>
+                            <a:srgbClr val="C00000"/>
+                          </a:solidFill>
+                          <a:latin typeface="Microsoft JhengHei"/>
+                        </a:rPr>
+                        <a:t>自動結案漏放率｜唯一算得出</a:t>
+                      </a:r>
+                    </a:p>
+                  </a:txBody>
+                  <a:tcPr marL="45720" marR="45720" marT="18288" marB="18288" anchor="ctr">
+                    <a:solidFill>
+                      <a:srgbClr val="FBEFEF"/>
+                    </a:solidFill>
+                  </a:tcPr>
+                </a:tc>
+              </a:tr>
+            </a:tbl>
+          </a:graphicData>
+        </a:graphic>
+      </p:graphicFrame>
     </p:spTree>
   </p:cSld>
   <p:clrMapOvr>
@@ -8511,6 +8819,1289 @@
         </p:nvSpPr>
         <p:spPr>
           <a:xfrm>
+            <a:off x="658368" y="384048"/>
+            <a:ext cx="5486400" cy="274320"/>
+          </a:xfrm>
+          <a:prstGeom prst="rect">
+            <a:avLst/>
+          </a:prstGeom>
+          <a:noFill/>
+        </p:spPr>
+        <p:txBody>
+          <a:bodyPr wrap="square" lIns="0" rIns="0" tIns="0" bIns="0" anchor="t">
+            <a:spAutoFit/>
+          </a:bodyPr>
+          <a:lstStyle/>
+          <a:p>
+            <a:pPr algn="l">
+              <a:lnSpc>
+                <a:spcPct val="125000"/>
+              </a:lnSpc>
+            </a:pPr>
+            <a:r>
+              <a:rPr sz="1300" b="1">
+                <a:solidFill>
+                  <a:srgbClr val="E8833A"/>
+                </a:solidFill>
+                <a:latin typeface="Microsoft JhengHei"/>
+              </a:rPr>
+              <a:t>項目計畫</a:t>
+            </a:r>
+          </a:p>
+        </p:txBody>
+      </p:sp>
+      <p:sp>
+        <p:nvSpPr>
+          <p:cNvPr id="3" name="TextBox 2"/>
+          <p:cNvSpPr txBox="1"/>
+          <p:nvPr/>
+        </p:nvSpPr>
+        <p:spPr>
+          <a:xfrm>
+            <a:off x="658368" y="676656"/>
+            <a:ext cx="11030407" cy="566928"/>
+          </a:xfrm>
+          <a:prstGeom prst="rect">
+            <a:avLst/>
+          </a:prstGeom>
+          <a:noFill/>
+        </p:spPr>
+        <p:txBody>
+          <a:bodyPr wrap="square" lIns="0" rIns="0" tIns="0" bIns="0" anchor="t">
+            <a:spAutoFit/>
+          </a:bodyPr>
+          <a:lstStyle/>
+          <a:p>
+            <a:pPr algn="l">
+              <a:lnSpc>
+                <a:spcPct val="125000"/>
+              </a:lnSpc>
+            </a:pPr>
+            <a:r>
+              <a:rPr sz="2700" b="1">
+                <a:solidFill>
+                  <a:srgbClr val="1F4E79"/>
+                </a:solidFill>
+                <a:latin typeface="Microsoft JhengHei"/>
+              </a:rPr>
+              <a:t>成本主體是人,而自動化的代價我們自己先算了</a:t>
+            </a:r>
+          </a:p>
+        </p:txBody>
+      </p:sp>
+      <p:sp>
+        <p:nvSpPr>
+          <p:cNvPr id="4" name="TextBox 3"/>
+          <p:cNvSpPr txBox="1"/>
+          <p:nvPr/>
+        </p:nvSpPr>
+        <p:spPr>
+          <a:xfrm>
+            <a:off x="658368" y="1298448"/>
+            <a:ext cx="11030407" cy="365760"/>
+          </a:xfrm>
+          <a:prstGeom prst="rect">
+            <a:avLst/>
+          </a:prstGeom>
+          <a:noFill/>
+        </p:spPr>
+        <p:txBody>
+          <a:bodyPr wrap="square" lIns="0" rIns="0" tIns="0" bIns="0" anchor="t">
+            <a:spAutoFit/>
+          </a:bodyPr>
+          <a:lstStyle/>
+          <a:p>
+            <a:pPr algn="l">
+              <a:lnSpc>
+                <a:spcPct val="125000"/>
+              </a:lnSpc>
+            </a:pPr>
+            <a:r>
+              <a:rPr sz="1500" b="0">
+                <a:solidFill>
+                  <a:srgbClr val="6B7885"/>
+                </a:solidFill>
+                <a:latin typeface="Microsoft JhengHei"/>
+              </a:rPr>
+              <a:t>請求核准第一段 4.85 人月 / NT$42–47 萬,並指定贊助人</a:t>
+            </a:r>
+          </a:p>
+        </p:txBody>
+      </p:sp>
+      <p:sp>
+        <p:nvSpPr>
+          <p:cNvPr id="5" name="Rectangle 4"/>
+          <p:cNvSpPr/>
+          <p:nvPr/>
+        </p:nvSpPr>
+        <p:spPr>
+          <a:xfrm>
+            <a:off x="658368" y="1517904"/>
+            <a:ext cx="10874959" cy="32004"/>
+          </a:xfrm>
+          <a:prstGeom prst="rect">
+            <a:avLst/>
+          </a:prstGeom>
+          <a:solidFill>
+            <a:srgbClr val="1F4E79"/>
+          </a:solidFill>
+          <a:ln>
+            <a:noFill/>
+          </a:ln>
+          <a:effectLst/>
+        </p:spPr>
+        <p:style>
+          <a:lnRef idx="1">
+            <a:schemeClr val="accent1"/>
+          </a:lnRef>
+          <a:fillRef idx="3">
+            <a:schemeClr val="accent1"/>
+          </a:fillRef>
+          <a:effectRef idx="2">
+            <a:schemeClr val="accent1"/>
+          </a:effectRef>
+          <a:fontRef idx="minor">
+            <a:schemeClr val="lt1"/>
+          </a:fontRef>
+        </p:style>
+        <p:txBody>
+          <a:bodyPr rtlCol="0" anchor="ctr"/>
+          <a:lstStyle/>
+          <a:p>
+            <a:pPr algn="ctr"/>
+          </a:p>
+        </p:txBody>
+      </p:sp>
+      <p:sp>
+        <p:nvSpPr>
+          <p:cNvPr id="6" name="Rectangle 5"/>
+          <p:cNvSpPr/>
+          <p:nvPr/>
+        </p:nvSpPr>
+        <p:spPr>
+          <a:xfrm>
+            <a:off x="658368" y="1783080"/>
+            <a:ext cx="45720" cy="750658"/>
+          </a:xfrm>
+          <a:prstGeom prst="rect">
+            <a:avLst/>
+          </a:prstGeom>
+          <a:solidFill>
+            <a:srgbClr val="C00000"/>
+          </a:solidFill>
+          <a:ln>
+            <a:noFill/>
+          </a:ln>
+          <a:effectLst/>
+        </p:spPr>
+        <p:style>
+          <a:lnRef idx="1">
+            <a:schemeClr val="accent1"/>
+          </a:lnRef>
+          <a:fillRef idx="3">
+            <a:schemeClr val="accent1"/>
+          </a:fillRef>
+          <a:effectRef idx="2">
+            <a:schemeClr val="accent1"/>
+          </a:effectRef>
+          <a:fontRef idx="minor">
+            <a:schemeClr val="lt1"/>
+          </a:fontRef>
+        </p:style>
+        <p:txBody>
+          <a:bodyPr rtlCol="0" anchor="ctr"/>
+          <a:lstStyle/>
+          <a:p>
+            <a:pPr algn="ctr"/>
+          </a:p>
+        </p:txBody>
+      </p:sp>
+      <p:sp>
+        <p:nvSpPr>
+          <p:cNvPr id="7" name="TextBox 6"/>
+          <p:cNvSpPr txBox="1"/>
+          <p:nvPr/>
+        </p:nvSpPr>
+        <p:spPr>
+          <a:xfrm>
+            <a:off x="804672" y="1755648"/>
+            <a:ext cx="2408822" cy="842098"/>
+          </a:xfrm>
+          <a:prstGeom prst="rect">
+            <a:avLst/>
+          </a:prstGeom>
+          <a:noFill/>
+        </p:spPr>
+        <p:txBody>
+          <a:bodyPr wrap="square" lIns="0" rIns="0" tIns="0" bIns="0" anchor="ctr">
+            <a:spAutoFit/>
+          </a:bodyPr>
+          <a:lstStyle/>
+          <a:p>
+            <a:pPr algn="l">
+              <a:lnSpc>
+                <a:spcPct val="125000"/>
+              </a:lnSpc>
+            </a:pPr>
+            <a:r>
+              <a:rPr sz="1400" b="1">
+                <a:solidFill>
+                  <a:srgbClr val="16212E"/>
+                </a:solidFill>
+                <a:latin typeface="Microsoft JhengHei"/>
+              </a:rPr>
+              <a:t>地端設備(一台起步)</a:t>
+            </a:r>
+          </a:p>
+        </p:txBody>
+      </p:sp>
+      <p:sp>
+        <p:nvSpPr>
+          <p:cNvPr id="8" name="TextBox 7"/>
+          <p:cNvSpPr txBox="1"/>
+          <p:nvPr/>
+        </p:nvSpPr>
+        <p:spPr>
+          <a:xfrm>
+            <a:off x="3268358" y="1755648"/>
+            <a:ext cx="3152759" cy="842098"/>
+          </a:xfrm>
+          <a:prstGeom prst="rect">
+            <a:avLst/>
+          </a:prstGeom>
+          <a:noFill/>
+        </p:spPr>
+        <p:txBody>
+          <a:bodyPr wrap="square" lIns="0" rIns="0" tIns="0" bIns="0" anchor="ctr">
+            <a:spAutoFit/>
+          </a:bodyPr>
+          <a:lstStyle/>
+          <a:p>
+            <a:pPr algn="l">
+              <a:lnSpc>
+                <a:spcPct val="125000"/>
+              </a:lnSpc>
+            </a:pPr>
+            <a:r>
+              <a:rPr sz="1500" b="1">
+                <a:solidFill>
+                  <a:srgbClr val="C00000"/>
+                </a:solidFill>
+                <a:latin typeface="Microsoft JhengHei"/>
+              </a:rPr>
+              <a:t>NT$16–20 萬 / 台(一次性)</a:t>
+            </a:r>
+          </a:p>
+        </p:txBody>
+      </p:sp>
+      <p:sp>
+        <p:nvSpPr>
+          <p:cNvPr id="9" name="TextBox 8"/>
+          <p:cNvSpPr txBox="1"/>
+          <p:nvPr/>
+        </p:nvSpPr>
+        <p:spPr>
+          <a:xfrm>
+            <a:off x="6530845" y="1755648"/>
+            <a:ext cx="4892753" cy="842098"/>
+          </a:xfrm>
+          <a:prstGeom prst="rect">
+            <a:avLst/>
+          </a:prstGeom>
+          <a:noFill/>
+        </p:spPr>
+        <p:txBody>
+          <a:bodyPr wrap="square" lIns="0" rIns="0" tIns="0" bIns="0" anchor="ctr">
+            <a:spAutoFit/>
+          </a:bodyPr>
+          <a:lstStyle/>
+          <a:p>
+            <a:pPr algn="l">
+              <a:lnSpc>
+                <a:spcPct val="120000"/>
+              </a:lnSpc>
+            </a:pPr>
+            <a:r>
+              <a:rPr sz="1200" b="0">
+                <a:solidFill>
+                  <a:srgbClr val="6B7885"/>
+                </a:solidFill>
+                <a:latin typeface="Microsoft JhengHei"/>
+              </a:rPr>
+              <a:t>市場採購量級,非核定採購價;本頁唯一不由算式推得的金額。台數由 G1 依 W1–6 定案;全客戶量需第二台。設備 = 初階工程師年成本的 14%–19%</a:t>
+            </a:r>
+          </a:p>
+        </p:txBody>
+      </p:sp>
+      <p:sp>
+        <p:nvSpPr>
+          <p:cNvPr id="10" name="Rectangle 9"/>
+          <p:cNvSpPr/>
+          <p:nvPr/>
+        </p:nvSpPr>
+        <p:spPr>
+          <a:xfrm>
+            <a:off x="658368" y="2716618"/>
+            <a:ext cx="45720" cy="750658"/>
+          </a:xfrm>
+          <a:prstGeom prst="rect">
+            <a:avLst/>
+          </a:prstGeom>
+          <a:solidFill>
+            <a:srgbClr val="C00000"/>
+          </a:solidFill>
+          <a:ln>
+            <a:noFill/>
+          </a:ln>
+          <a:effectLst/>
+        </p:spPr>
+        <p:style>
+          <a:lnRef idx="1">
+            <a:schemeClr val="accent1"/>
+          </a:lnRef>
+          <a:fillRef idx="3">
+            <a:schemeClr val="accent1"/>
+          </a:fillRef>
+          <a:effectRef idx="2">
+            <a:schemeClr val="accent1"/>
+          </a:effectRef>
+          <a:fontRef idx="minor">
+            <a:schemeClr val="lt1"/>
+          </a:fontRef>
+        </p:style>
+        <p:txBody>
+          <a:bodyPr rtlCol="0" anchor="ctr"/>
+          <a:lstStyle/>
+          <a:p>
+            <a:pPr algn="ctr"/>
+          </a:p>
+        </p:txBody>
+      </p:sp>
+      <p:sp>
+        <p:nvSpPr>
+          <p:cNvPr id="11" name="TextBox 10"/>
+          <p:cNvSpPr txBox="1"/>
+          <p:nvPr/>
+        </p:nvSpPr>
+        <p:spPr>
+          <a:xfrm>
+            <a:off x="804672" y="2689186"/>
+            <a:ext cx="2408822" cy="842098"/>
+          </a:xfrm>
+          <a:prstGeom prst="rect">
+            <a:avLst/>
+          </a:prstGeom>
+          <a:noFill/>
+        </p:spPr>
+        <p:txBody>
+          <a:bodyPr wrap="square" lIns="0" rIns="0" tIns="0" bIns="0" anchor="ctr">
+            <a:spAutoFit/>
+          </a:bodyPr>
+          <a:lstStyle/>
+          <a:p>
+            <a:pPr algn="l">
+              <a:lnSpc>
+                <a:spcPct val="125000"/>
+              </a:lnSpc>
+            </a:pPr>
+            <a:r>
+              <a:rPr sz="1400" b="1">
+                <a:solidFill>
+                  <a:srgbClr val="16212E"/>
+                </a:solidFill>
+                <a:latin typeface="Microsoft JhengHei"/>
+              </a:rPr>
+              <a:t>🔴 稽核稅 —— 自動化不是免費的</a:t>
+            </a:r>
+          </a:p>
+        </p:txBody>
+      </p:sp>
+      <p:sp>
+        <p:nvSpPr>
+          <p:cNvPr id="12" name="TextBox 11"/>
+          <p:cNvSpPr txBox="1"/>
+          <p:nvPr/>
+        </p:nvSpPr>
+        <p:spPr>
+          <a:xfrm>
+            <a:off x="3268358" y="2689186"/>
+            <a:ext cx="3152759" cy="842098"/>
+          </a:xfrm>
+          <a:prstGeom prst="rect">
+            <a:avLst/>
+          </a:prstGeom>
+          <a:noFill/>
+        </p:spPr>
+        <p:txBody>
+          <a:bodyPr wrap="square" lIns="0" rIns="0" tIns="0" bIns="0" anchor="ctr">
+            <a:spAutoFit/>
+          </a:bodyPr>
+          <a:lstStyle/>
+          <a:p>
+            <a:pPr algn="l">
+              <a:lnSpc>
+                <a:spcPct val="125000"/>
+              </a:lnSpc>
+            </a:pPr>
+            <a:r>
+              <a:rPr sz="1500" b="1">
+                <a:solidFill>
+                  <a:srgbClr val="C00000"/>
+                </a:solidFill>
+                <a:latin typeface="Microsoft JhengHei"/>
+              </a:rPr>
+              <a:t>吃掉毛節省的 3%–52%</a:t>
+            </a:r>
+          </a:p>
+        </p:txBody>
+      </p:sp>
+      <p:sp>
+        <p:nvSpPr>
+          <p:cNvPr id="13" name="TextBox 12"/>
+          <p:cNvSpPr txBox="1"/>
+          <p:nvPr/>
+        </p:nvSpPr>
+        <p:spPr>
+          <a:xfrm>
+            <a:off x="6530845" y="2689186"/>
+            <a:ext cx="4892753" cy="842098"/>
+          </a:xfrm>
+          <a:prstGeom prst="rect">
+            <a:avLst/>
+          </a:prstGeom>
+          <a:noFill/>
+        </p:spPr>
+        <p:txBody>
+          <a:bodyPr wrap="square" lIns="0" rIns="0" tIns="0" bIns="0" anchor="ctr">
+            <a:spAutoFit/>
+          </a:bodyPr>
+          <a:lstStyle/>
+          <a:p>
+            <a:pPr algn="l">
+              <a:lnSpc>
+                <a:spcPct val="120000"/>
+              </a:lnSpc>
+            </a:pPr>
+            <a:r>
+              <a:rPr sz="1200" b="0">
+                <a:solidFill>
+                  <a:srgbClr val="6B7885"/>
+                </a:solidFill>
+                <a:latin typeface="Microsoft JhengHei"/>
+              </a:rPr>
+              <a:t>毛節省 48.3–96.7 人時/天 = 6.0–12.1 FTE;但自動結案須抽樣盲測稽核(±1% 需 753 筆/月 = 0.39 FTE;分層 8 類 6,024 筆 = 3.14 FTE)→ 淨 2.9–11.7 FTE。推估非實測</a:t>
+            </a:r>
+          </a:p>
+        </p:txBody>
+      </p:sp>
+      <p:sp>
+        <p:nvSpPr>
+          <p:cNvPr id="14" name="Rounded Rectangle 13"/>
+          <p:cNvSpPr/>
+          <p:nvPr/>
+        </p:nvSpPr>
+        <p:spPr>
+          <a:xfrm>
+            <a:off x="658368" y="3659300"/>
+            <a:ext cx="3527450" cy="2121408"/>
+          </a:xfrm>
+          <a:prstGeom prst="roundRect">
+            <a:avLst>
+              <a:gd name="adj" fmla="val 6000"/>
+            </a:avLst>
+          </a:prstGeom>
+          <a:solidFill>
+            <a:srgbClr val="EAF1F8"/>
+          </a:solidFill>
+          <a:ln w="38100">
+            <a:solidFill>
+              <a:srgbClr val="1F4E79"/>
+            </a:solidFill>
+          </a:ln>
+          <a:effectLst/>
+        </p:spPr>
+        <p:style>
+          <a:lnRef idx="1">
+            <a:schemeClr val="accent1"/>
+          </a:lnRef>
+          <a:fillRef idx="3">
+            <a:schemeClr val="accent1"/>
+          </a:fillRef>
+          <a:effectRef idx="2">
+            <a:schemeClr val="accent1"/>
+          </a:effectRef>
+          <a:fontRef idx="minor">
+            <a:schemeClr val="lt1"/>
+          </a:fontRef>
+        </p:style>
+        <p:txBody>
+          <a:bodyPr rtlCol="0" anchor="ctr"/>
+          <a:lstStyle/>
+          <a:p>
+            <a:pPr algn="ctr"/>
+          </a:p>
+        </p:txBody>
+      </p:sp>
+      <p:sp>
+        <p:nvSpPr>
+          <p:cNvPr id="15" name="TextBox 14"/>
+          <p:cNvSpPr txBox="1"/>
+          <p:nvPr/>
+        </p:nvSpPr>
+        <p:spPr>
+          <a:xfrm>
+            <a:off x="768096" y="3787316"/>
+            <a:ext cx="3307994" cy="566928"/>
+          </a:xfrm>
+          <a:prstGeom prst="rect">
+            <a:avLst/>
+          </a:prstGeom>
+          <a:noFill/>
+        </p:spPr>
+        <p:txBody>
+          <a:bodyPr wrap="square" lIns="0" rIns="0" tIns="0" bIns="0" anchor="t">
+            <a:spAutoFit/>
+          </a:bodyPr>
+          <a:lstStyle/>
+          <a:p>
+            <a:pPr algn="ctr">
+              <a:lnSpc>
+                <a:spcPct val="125000"/>
+              </a:lnSpc>
+            </a:pPr>
+            <a:r>
+              <a:rPr sz="1500" b="1">
+                <a:solidFill>
+                  <a:srgbClr val="16212E"/>
+                </a:solidFill>
+                <a:latin typeface="Microsoft JhengHei"/>
+              </a:rPr>
+              <a:t>我請求核准的錢</a:t>
+            </a:r>
+          </a:p>
+        </p:txBody>
+      </p:sp>
+      <p:sp>
+        <p:nvSpPr>
+          <p:cNvPr id="16" name="Rounded Rectangle 15"/>
+          <p:cNvSpPr/>
+          <p:nvPr/>
+        </p:nvSpPr>
+        <p:spPr>
+          <a:xfrm>
+            <a:off x="1855927" y="4409108"/>
+            <a:ext cx="1132332" cy="274320"/>
+          </a:xfrm>
+          <a:prstGeom prst="roundRect">
+            <a:avLst>
+              <a:gd name="adj" fmla="val 6000"/>
+            </a:avLst>
+          </a:prstGeom>
+          <a:solidFill>
+            <a:srgbClr val="1F4E79"/>
+          </a:solidFill>
+          <a:ln>
+            <a:noFill/>
+          </a:ln>
+          <a:effectLst/>
+        </p:spPr>
+        <p:style>
+          <a:lnRef idx="1">
+            <a:schemeClr val="accent1"/>
+          </a:lnRef>
+          <a:fillRef idx="3">
+            <a:schemeClr val="accent1"/>
+          </a:fillRef>
+          <a:effectRef idx="2">
+            <a:schemeClr val="accent1"/>
+          </a:effectRef>
+          <a:fontRef idx="minor">
+            <a:schemeClr val="lt1"/>
+          </a:fontRef>
+        </p:style>
+        <p:txBody>
+          <a:bodyPr rtlCol="0" anchor="ctr"/>
+          <a:lstStyle/>
+          <a:p>
+            <a:pPr algn="ctr"/>
+          </a:p>
+        </p:txBody>
+      </p:sp>
+      <p:sp>
+        <p:nvSpPr>
+          <p:cNvPr id="17" name="TextBox 16"/>
+          <p:cNvSpPr txBox="1"/>
+          <p:nvPr/>
+        </p:nvSpPr>
+        <p:spPr>
+          <a:xfrm>
+            <a:off x="1855927" y="4409108"/>
+            <a:ext cx="1132332" cy="274320"/>
+          </a:xfrm>
+          <a:prstGeom prst="rect">
+            <a:avLst/>
+          </a:prstGeom>
+          <a:noFill/>
+        </p:spPr>
+        <p:txBody>
+          <a:bodyPr wrap="square" lIns="0" rIns="0" tIns="0" bIns="0" anchor="ctr">
+            <a:spAutoFit/>
+          </a:bodyPr>
+          <a:lstStyle/>
+          <a:p>
+            <a:pPr algn="ctr">
+              <a:lnSpc>
+                <a:spcPct val="125000"/>
+              </a:lnSpc>
+            </a:pPr>
+            <a:r>
+              <a:rPr sz="1200" b="1">
+                <a:solidFill>
+                  <a:srgbClr val="FFFFFF"/>
+                </a:solidFill>
+                <a:latin typeface="Microsoft JhengHei"/>
+              </a:rPr>
+              <a:t>第一段 W1–6</a:t>
+            </a:r>
+          </a:p>
+        </p:txBody>
+      </p:sp>
+      <p:sp>
+        <p:nvSpPr>
+          <p:cNvPr id="18" name="TextBox 17"/>
+          <p:cNvSpPr txBox="1"/>
+          <p:nvPr/>
+        </p:nvSpPr>
+        <p:spPr>
+          <a:xfrm>
+            <a:off x="768096" y="4793156"/>
+            <a:ext cx="3307994" cy="859535"/>
+          </a:xfrm>
+          <a:prstGeom prst="rect">
+            <a:avLst/>
+          </a:prstGeom>
+          <a:noFill/>
+        </p:spPr>
+        <p:txBody>
+          <a:bodyPr wrap="square" lIns="0" rIns="0" tIns="0" bIns="0" anchor="t">
+            <a:spAutoFit/>
+          </a:bodyPr>
+          <a:lstStyle/>
+          <a:p>
+            <a:pPr algn="ctr">
+              <a:lnSpc>
+                <a:spcPct val="135000"/>
+              </a:lnSpc>
+            </a:pPr>
+            <a:r>
+              <a:rPr sz="1200" b="0">
+                <a:solidFill>
+                  <a:srgbClr val="6B7885"/>
+                </a:solidFill>
+                <a:latin typeface="Microsoft JhengHei"/>
+              </a:rPr>
+              <a:t>第一段 4.85 人月 · NT$42–47 萬</a:t>
+            </a:r>
+          </a:p>
+          <a:p>
+            <a:pPr algn="ctr">
+              <a:lnSpc>
+                <a:spcPct val="135000"/>
+              </a:lnSpc>
+            </a:pPr>
+            <a:r>
+              <a:rPr sz="1200" b="0">
+                <a:solidFill>
+                  <a:srgbClr val="6B7885"/>
+                </a:solidFill>
+                <a:latin typeface="Microsoft JhengHei"/>
+              </a:rPr>
+              <a:t>〔規劃非核定預算〕G1 決定續行</a:t>
+            </a:r>
+          </a:p>
+        </p:txBody>
+      </p:sp>
+      <p:sp>
+        <p:nvSpPr>
+          <p:cNvPr id="19" name="Rounded Rectangle 18"/>
+          <p:cNvSpPr/>
+          <p:nvPr/>
+        </p:nvSpPr>
+        <p:spPr>
+          <a:xfrm>
+            <a:off x="4332122" y="3659300"/>
+            <a:ext cx="3527450" cy="2121408"/>
+          </a:xfrm>
+          <a:prstGeom prst="roundRect">
+            <a:avLst>
+              <a:gd name="adj" fmla="val 6000"/>
+            </a:avLst>
+          </a:prstGeom>
+          <a:solidFill>
+            <a:srgbClr val="EAF1F8"/>
+          </a:solidFill>
+          <a:ln w="38100">
+            <a:solidFill>
+              <a:srgbClr val="1F4E79"/>
+            </a:solidFill>
+          </a:ln>
+          <a:effectLst/>
+        </p:spPr>
+        <p:style>
+          <a:lnRef idx="1">
+            <a:schemeClr val="accent1"/>
+          </a:lnRef>
+          <a:fillRef idx="3">
+            <a:schemeClr val="accent1"/>
+          </a:fillRef>
+          <a:effectRef idx="2">
+            <a:schemeClr val="accent1"/>
+          </a:effectRef>
+          <a:fontRef idx="minor">
+            <a:schemeClr val="lt1"/>
+          </a:fontRef>
+        </p:style>
+        <p:txBody>
+          <a:bodyPr rtlCol="0" anchor="ctr"/>
+          <a:lstStyle/>
+          <a:p>
+            <a:pPr algn="ctr"/>
+          </a:p>
+        </p:txBody>
+      </p:sp>
+      <p:sp>
+        <p:nvSpPr>
+          <p:cNvPr id="20" name="TextBox 19"/>
+          <p:cNvSpPr txBox="1"/>
+          <p:nvPr/>
+        </p:nvSpPr>
+        <p:spPr>
+          <a:xfrm>
+            <a:off x="4441850" y="3787316"/>
+            <a:ext cx="3307994" cy="566928"/>
+          </a:xfrm>
+          <a:prstGeom prst="rect">
+            <a:avLst/>
+          </a:prstGeom>
+          <a:noFill/>
+        </p:spPr>
+        <p:txBody>
+          <a:bodyPr wrap="square" lIns="0" rIns="0" tIns="0" bIns="0" anchor="t">
+            <a:spAutoFit/>
+          </a:bodyPr>
+          <a:lstStyle/>
+          <a:p>
+            <a:pPr algn="ctr">
+              <a:lnSpc>
+                <a:spcPct val="125000"/>
+              </a:lnSpc>
+            </a:pPr>
+            <a:r>
+              <a:rPr sz="1500" b="1">
+                <a:solidFill>
+                  <a:srgbClr val="16212E"/>
+                </a:solidFill>
+                <a:latin typeface="Microsoft JhengHei"/>
+              </a:rPr>
+              <a:t>我請求核准的人</a:t>
+            </a:r>
+          </a:p>
+        </p:txBody>
+      </p:sp>
+      <p:sp>
+        <p:nvSpPr>
+          <p:cNvPr id="21" name="Rounded Rectangle 20"/>
+          <p:cNvSpPr/>
+          <p:nvPr/>
+        </p:nvSpPr>
+        <p:spPr>
+          <a:xfrm>
+            <a:off x="5586831" y="4409108"/>
+            <a:ext cx="1018032" cy="274320"/>
+          </a:xfrm>
+          <a:prstGeom prst="roundRect">
+            <a:avLst>
+              <a:gd name="adj" fmla="val 6000"/>
+            </a:avLst>
+          </a:prstGeom>
+          <a:solidFill>
+            <a:srgbClr val="1F4E79"/>
+          </a:solidFill>
+          <a:ln>
+            <a:noFill/>
+          </a:ln>
+          <a:effectLst/>
+        </p:spPr>
+        <p:style>
+          <a:lnRef idx="1">
+            <a:schemeClr val="accent1"/>
+          </a:lnRef>
+          <a:fillRef idx="3">
+            <a:schemeClr val="accent1"/>
+          </a:fillRef>
+          <a:effectRef idx="2">
+            <a:schemeClr val="accent1"/>
+          </a:effectRef>
+          <a:fontRef idx="minor">
+            <a:schemeClr val="lt1"/>
+          </a:fontRef>
+        </p:style>
+        <p:txBody>
+          <a:bodyPr rtlCol="0" anchor="ctr"/>
+          <a:lstStyle/>
+          <a:p>
+            <a:pPr algn="ctr"/>
+          </a:p>
+        </p:txBody>
+      </p:sp>
+      <p:sp>
+        <p:nvSpPr>
+          <p:cNvPr id="22" name="TextBox 21"/>
+          <p:cNvSpPr txBox="1"/>
+          <p:nvPr/>
+        </p:nvSpPr>
+        <p:spPr>
+          <a:xfrm>
+            <a:off x="5586831" y="4409108"/>
+            <a:ext cx="1018032" cy="274320"/>
+          </a:xfrm>
+          <a:prstGeom prst="rect">
+            <a:avLst/>
+          </a:prstGeom>
+          <a:noFill/>
+        </p:spPr>
+        <p:txBody>
+          <a:bodyPr wrap="square" lIns="0" rIns="0" tIns="0" bIns="0" anchor="ctr">
+            <a:spAutoFit/>
+          </a:bodyPr>
+          <a:lstStyle/>
+          <a:p>
+            <a:pPr algn="ctr">
+              <a:lnSpc>
+                <a:spcPct val="125000"/>
+              </a:lnSpc>
+            </a:pPr>
+            <a:r>
+              <a:rPr sz="1200" b="1">
+                <a:solidFill>
+                  <a:srgbClr val="FFFFFF"/>
+                </a:solidFill>
+                <a:latin typeface="Microsoft JhengHei"/>
+              </a:rPr>
+              <a:t>指定贊助人</a:t>
+            </a:r>
+          </a:p>
+        </p:txBody>
+      </p:sp>
+      <p:sp>
+        <p:nvSpPr>
+          <p:cNvPr id="23" name="TextBox 22"/>
+          <p:cNvSpPr txBox="1"/>
+          <p:nvPr/>
+        </p:nvSpPr>
+        <p:spPr>
+          <a:xfrm>
+            <a:off x="4441850" y="4793156"/>
+            <a:ext cx="3307994" cy="859535"/>
+          </a:xfrm>
+          <a:prstGeom prst="rect">
+            <a:avLst/>
+          </a:prstGeom>
+          <a:noFill/>
+        </p:spPr>
+        <p:txBody>
+          <a:bodyPr wrap="square" lIns="0" rIns="0" tIns="0" bIns="0" anchor="t">
+            <a:spAutoFit/>
+          </a:bodyPr>
+          <a:lstStyle/>
+          <a:p>
+            <a:pPr algn="ctr">
+              <a:lnSpc>
+                <a:spcPct val="135000"/>
+              </a:lnSpc>
+            </a:pPr>
+            <a:r>
+              <a:rPr sz="1200" b="0">
+                <a:solidFill>
+                  <a:srgbClr val="6B7885"/>
+                </a:solidFill>
+                <a:latin typeface="Microsoft JhengHei"/>
+              </a:rPr>
+              <a:t>請委員會指定項目贊助人</a:t>
+            </a:r>
+          </a:p>
+          <a:p>
+            <a:pPr algn="ctr">
+              <a:lnSpc>
+                <a:spcPct val="135000"/>
+              </a:lnSpc>
+            </a:pPr>
+            <a:r>
+              <a:rPr sz="1200" b="0">
+                <a:solidFill>
+                  <a:srgbClr val="6B7885"/>
+                </a:solidFill>
+                <a:latin typeface="Microsoft JhengHei"/>
+              </a:rPr>
+              <a:t>G1 前確認與既有雲端規劃的邊界</a:t>
+            </a:r>
+          </a:p>
+        </p:txBody>
+      </p:sp>
+      <p:sp>
+        <p:nvSpPr>
+          <p:cNvPr id="24" name="Rounded Rectangle 23"/>
+          <p:cNvSpPr/>
+          <p:nvPr/>
+        </p:nvSpPr>
+        <p:spPr>
+          <a:xfrm>
+            <a:off x="8005876" y="3659300"/>
+            <a:ext cx="3527450" cy="2121408"/>
+          </a:xfrm>
+          <a:prstGeom prst="roundRect">
+            <a:avLst>
+              <a:gd name="adj" fmla="val 6000"/>
+            </a:avLst>
+          </a:prstGeom>
+          <a:solidFill>
+            <a:srgbClr val="FFFFFF"/>
+          </a:solidFill>
+          <a:ln w="20320">
+            <a:solidFill>
+              <a:srgbClr val="6B7885"/>
+            </a:solidFill>
+          </a:ln>
+          <a:effectLst/>
+        </p:spPr>
+        <p:style>
+          <a:lnRef idx="1">
+            <a:schemeClr val="accent1"/>
+          </a:lnRef>
+          <a:fillRef idx="3">
+            <a:schemeClr val="accent1"/>
+          </a:fillRef>
+          <a:effectRef idx="2">
+            <a:schemeClr val="accent1"/>
+          </a:effectRef>
+          <a:fontRef idx="minor">
+            <a:schemeClr val="lt1"/>
+          </a:fontRef>
+        </p:style>
+        <p:txBody>
+          <a:bodyPr rtlCol="0" anchor="ctr"/>
+          <a:lstStyle/>
+          <a:p>
+            <a:pPr algn="ctr"/>
+          </a:p>
+        </p:txBody>
+      </p:sp>
+      <p:sp>
+        <p:nvSpPr>
+          <p:cNvPr id="25" name="TextBox 24"/>
+          <p:cNvSpPr txBox="1"/>
+          <p:nvPr/>
+        </p:nvSpPr>
+        <p:spPr>
+          <a:xfrm>
+            <a:off x="8115604" y="3787316"/>
+            <a:ext cx="3307994" cy="566928"/>
+          </a:xfrm>
+          <a:prstGeom prst="rect">
+            <a:avLst/>
+          </a:prstGeom>
+          <a:noFill/>
+        </p:spPr>
+        <p:txBody>
+          <a:bodyPr wrap="square" lIns="0" rIns="0" tIns="0" bIns="0" anchor="t">
+            <a:spAutoFit/>
+          </a:bodyPr>
+          <a:lstStyle/>
+          <a:p>
+            <a:pPr algn="ctr">
+              <a:lnSpc>
+                <a:spcPct val="125000"/>
+              </a:lnSpc>
+            </a:pPr>
+            <a:r>
+              <a:rPr sz="1500" b="1">
+                <a:solidFill>
+                  <a:srgbClr val="16212E"/>
+                </a:solidFill>
+                <a:latin typeface="Microsoft JhengHei"/>
+              </a:rPr>
+              <a:t>六個月之後你手上多三樣</a:t>
+            </a:r>
+          </a:p>
+        </p:txBody>
+      </p:sp>
+      <p:sp>
+        <p:nvSpPr>
+          <p:cNvPr id="26" name="Rounded Rectangle 25"/>
+          <p:cNvSpPr/>
+          <p:nvPr/>
+        </p:nvSpPr>
+        <p:spPr>
+          <a:xfrm>
+            <a:off x="9336786" y="4409108"/>
+            <a:ext cx="865632" cy="274320"/>
+          </a:xfrm>
+          <a:prstGeom prst="roundRect">
+            <a:avLst>
+              <a:gd name="adj" fmla="val 6000"/>
+            </a:avLst>
+          </a:prstGeom>
+          <a:solidFill>
+            <a:srgbClr val="6B7885"/>
+          </a:solidFill>
+          <a:ln>
+            <a:noFill/>
+          </a:ln>
+          <a:effectLst/>
+        </p:spPr>
+        <p:style>
+          <a:lnRef idx="1">
+            <a:schemeClr val="accent1"/>
+          </a:lnRef>
+          <a:fillRef idx="3">
+            <a:schemeClr val="accent1"/>
+          </a:fillRef>
+          <a:effectRef idx="2">
+            <a:schemeClr val="accent1"/>
+          </a:effectRef>
+          <a:fontRef idx="minor">
+            <a:schemeClr val="lt1"/>
+          </a:fontRef>
+        </p:style>
+        <p:txBody>
+          <a:bodyPr rtlCol="0" anchor="ctr"/>
+          <a:lstStyle/>
+          <a:p>
+            <a:pPr algn="ctr"/>
+          </a:p>
+        </p:txBody>
+      </p:sp>
+      <p:sp>
+        <p:nvSpPr>
+          <p:cNvPr id="27" name="TextBox 26"/>
+          <p:cNvSpPr txBox="1"/>
+          <p:nvPr/>
+        </p:nvSpPr>
+        <p:spPr>
+          <a:xfrm>
+            <a:off x="9336786" y="4409108"/>
+            <a:ext cx="865632" cy="274320"/>
+          </a:xfrm>
+          <a:prstGeom prst="rect">
+            <a:avLst/>
+          </a:prstGeom>
+          <a:noFill/>
+        </p:spPr>
+        <p:txBody>
+          <a:bodyPr wrap="square" lIns="0" rIns="0" tIns="0" bIns="0" anchor="ctr">
+            <a:spAutoFit/>
+          </a:bodyPr>
+          <a:lstStyle/>
+          <a:p>
+            <a:pPr algn="ctr">
+              <a:lnSpc>
+                <a:spcPct val="125000"/>
+              </a:lnSpc>
+            </a:pPr>
+            <a:r>
+              <a:rPr sz="1200" b="1">
+                <a:solidFill>
+                  <a:srgbClr val="FFFFFF"/>
+                </a:solidFill>
+                <a:latin typeface="Microsoft JhengHei"/>
+              </a:rPr>
+              <a:t>誠實收尾</a:t>
+            </a:r>
+          </a:p>
+        </p:txBody>
+      </p:sp>
+      <p:sp>
+        <p:nvSpPr>
+          <p:cNvPr id="28" name="TextBox 27"/>
+          <p:cNvSpPr txBox="1"/>
+          <p:nvPr/>
+        </p:nvSpPr>
+        <p:spPr>
+          <a:xfrm>
+            <a:off x="8115604" y="4793156"/>
+            <a:ext cx="3307994" cy="859535"/>
+          </a:xfrm>
+          <a:prstGeom prst="rect">
+            <a:avLst/>
+          </a:prstGeom>
+          <a:noFill/>
+        </p:spPr>
+        <p:txBody>
+          <a:bodyPr wrap="square" lIns="0" rIns="0" tIns="0" bIns="0" anchor="t">
+            <a:spAutoFit/>
+          </a:bodyPr>
+          <a:lstStyle/>
+          <a:p>
+            <a:pPr algn="ctr">
+              <a:lnSpc>
+                <a:spcPct val="135000"/>
+              </a:lnSpc>
+            </a:pPr>
+            <a:r>
+              <a:rPr sz="1200" b="0">
+                <a:solidFill>
+                  <a:srgbClr val="6B7885"/>
+                </a:solidFill>
+                <a:latin typeface="Microsoft JhengHei"/>
+              </a:rPr>
+              <a:t>六個月後你手上多三樣:可稽核錯誤率 ·</a:t>
+            </a:r>
+          </a:p>
+          <a:p>
+            <a:pPr algn="ctr">
+              <a:lnSpc>
+                <a:spcPct val="135000"/>
+              </a:lnSpc>
+            </a:pPr>
+            <a:r>
+              <a:rPr sz="1200" b="0">
+                <a:solidFill>
+                  <a:srgbClr val="6B7885"/>
+                </a:solidFill>
+                <a:latin typeface="Microsoft JhengHei"/>
+              </a:rPr>
+              <a:t>脈絡判斷層 · 對照實驗結果</a:t>
+            </a:r>
+          </a:p>
+          <a:p>
+            <a:pPr algn="ctr">
+              <a:lnSpc>
+                <a:spcPct val="135000"/>
+              </a:lnSpc>
+            </a:pPr>
+            <a:r>
+              <a:rPr sz="1200" b="0">
+                <a:solidFill>
+                  <a:srgbClr val="6B7885"/>
+                </a:solidFill>
+                <a:latin typeface="Microsoft JhengHei"/>
+              </a:rPr>
+              <a:t>不做:客戶續等 · 小客戶無人看過</a:t>
+            </a:r>
+          </a:p>
+        </p:txBody>
+      </p:sp>
+      <p:sp>
+        <p:nvSpPr>
+          <p:cNvPr id="29" name="Rounded Rectangle 28"/>
+          <p:cNvSpPr/>
+          <p:nvPr/>
+        </p:nvSpPr>
+        <p:spPr>
+          <a:xfrm>
+            <a:off x="658368" y="5908724"/>
+            <a:ext cx="9658807" cy="601803"/>
+          </a:xfrm>
+          <a:prstGeom prst="roundRect">
+            <a:avLst>
+              <a:gd name="adj" fmla="val 6000"/>
+            </a:avLst>
+          </a:prstGeom>
+          <a:solidFill>
+            <a:srgbClr val="C00000"/>
+          </a:solidFill>
+          <a:ln>
+            <a:noFill/>
+          </a:ln>
+          <a:effectLst/>
+        </p:spPr>
+        <p:style>
+          <a:lnRef idx="1">
+            <a:schemeClr val="accent1"/>
+          </a:lnRef>
+          <a:fillRef idx="3">
+            <a:schemeClr val="accent1"/>
+          </a:fillRef>
+          <a:effectRef idx="2">
+            <a:schemeClr val="accent1"/>
+          </a:effectRef>
+          <a:fontRef idx="minor">
+            <a:schemeClr val="lt1"/>
+          </a:fontRef>
+        </p:style>
+        <p:txBody>
+          <a:bodyPr rtlCol="0" anchor="ctr"/>
+          <a:lstStyle/>
+          <a:p>
+            <a:pPr algn="ctr"/>
+          </a:p>
+        </p:txBody>
+      </p:sp>
+      <p:sp>
+        <p:nvSpPr>
+          <p:cNvPr id="30" name="TextBox 29"/>
+          <p:cNvSpPr txBox="1"/>
+          <p:nvPr/>
+        </p:nvSpPr>
+        <p:spPr>
+          <a:xfrm>
+            <a:off x="841247" y="5908724"/>
+            <a:ext cx="9293047" cy="601803"/>
+          </a:xfrm>
+          <a:prstGeom prst="rect">
+            <a:avLst/>
+          </a:prstGeom>
+          <a:noFill/>
+        </p:spPr>
+        <p:txBody>
+          <a:bodyPr wrap="square" lIns="0" rIns="0" tIns="0" bIns="0" anchor="ctr">
+            <a:spAutoFit/>
+          </a:bodyPr>
+          <a:lstStyle/>
+          <a:p>
+            <a:pPr algn="ctr">
+              <a:lnSpc>
+                <a:spcPct val="125000"/>
+              </a:lnSpc>
+            </a:pPr>
+            <a:r>
+              <a:rPr sz="1700" b="1">
+                <a:solidFill>
+                  <a:srgbClr val="FFFFFF"/>
+                </a:solidFill>
+                <a:latin typeface="Microsoft JhengHei"/>
+              </a:rPr>
+              <a:t>放行條件:擴編暴露非承諾節省 · 須 G2 證明可避免/延後 + 業務確認容量轉換才放行後續預算</a:t>
+            </a:r>
+          </a:p>
+        </p:txBody>
+      </p:sp>
+    </p:spTree>
+  </p:cSld>
+  <p:clrMapOvr>
+    <a:masterClrMapping/>
+  </p:clrMapOvr>
+</p:sld>
+</file>
+
+<file path=ppt/slides/slide13.xml><?xml version="1.0" encoding="utf-8"?>
+<p:sld xmlns:a="http://schemas.openxmlformats.org/drawingml/2006/main" xmlns:p="http://schemas.openxmlformats.org/presentationml/2006/main" xmlns:r="http://schemas.openxmlformats.org/officeDocument/2006/relationships">
+  <p:cSld>
+    <p:spTree>
+      <p:nvGrpSpPr>
+        <p:cNvPr id="1" name=""/>
+        <p:cNvGrpSpPr/>
+        <p:nvPr/>
+      </p:nvGrpSpPr>
+      <p:grpSpPr/>
+      <p:sp>
+        <p:nvSpPr>
+          <p:cNvPr id="2" name="TextBox 1"/>
+          <p:cNvSpPr txBox="1"/>
+          <p:nvPr/>
+        </p:nvSpPr>
+        <p:spPr>
+          <a:xfrm>
             <a:off x="658368" y="640080"/>
             <a:ext cx="5486400" cy="548640"/>
           </a:xfrm>
@@ -12971,6 +14562,1277 @@
                 </a:solidFill>
                 <a:latin typeface="Microsoft JhengHei"/>
               </a:rPr>
+              <a:t>兩層模型、一台設備分時跑 —— 同一個車隊,機器一天只用掉三成</a:t>
+            </a:r>
+          </a:p>
+        </p:txBody>
+      </p:sp>
+      <p:sp>
+        <p:nvSpPr>
+          <p:cNvPr id="4" name="TextBox 3"/>
+          <p:cNvSpPr txBox="1"/>
+          <p:nvPr/>
+        </p:nvSpPr>
+        <p:spPr>
+          <a:xfrm>
+            <a:off x="658368" y="1298448"/>
+            <a:ext cx="11030407" cy="365760"/>
+          </a:xfrm>
+          <a:prstGeom prst="rect">
+            <a:avLst/>
+          </a:prstGeom>
+          <a:noFill/>
+        </p:spPr>
+        <p:txBody>
+          <a:bodyPr wrap="square" lIns="0" rIns="0" tIns="0" bIns="0" anchor="t">
+            <a:spAutoFit/>
+          </a:bodyPr>
+          <a:lstStyle/>
+          <a:p>
+            <a:pPr algn="l">
+              <a:lnSpc>
+                <a:spcPct val="125000"/>
+              </a:lnSpc>
+            </a:pPr>
+            <a:r>
+              <a:rPr sz="1500" b="0">
+                <a:solidFill>
+                  <a:srgbClr val="6B7885"/>
+                </a:solidFill>
+                <a:latin typeface="Microsoft JhengHei"/>
+              </a:rPr>
+              <a:t>NVIDIA DGX Spark · 128 GB 統一記憶體 · NT$16–20 萬/台;瓶頸不是算力,是 273 GB/s 的記憶體頻寬</a:t>
+            </a:r>
+          </a:p>
+        </p:txBody>
+      </p:sp>
+      <p:sp>
+        <p:nvSpPr>
+          <p:cNvPr id="5" name="Rectangle 4"/>
+          <p:cNvSpPr/>
+          <p:nvPr/>
+        </p:nvSpPr>
+        <p:spPr>
+          <a:xfrm>
+            <a:off x="658368" y="1517904"/>
+            <a:ext cx="10874959" cy="32004"/>
+          </a:xfrm>
+          <a:prstGeom prst="rect">
+            <a:avLst/>
+          </a:prstGeom>
+          <a:solidFill>
+            <a:srgbClr val="1F4E79"/>
+          </a:solidFill>
+          <a:ln>
+            <a:noFill/>
+          </a:ln>
+          <a:effectLst/>
+        </p:spPr>
+        <p:style>
+          <a:lnRef idx="1">
+            <a:schemeClr val="accent1"/>
+          </a:lnRef>
+          <a:fillRef idx="3">
+            <a:schemeClr val="accent1"/>
+          </a:fillRef>
+          <a:effectRef idx="2">
+            <a:schemeClr val="accent1"/>
+          </a:effectRef>
+          <a:fontRef idx="minor">
+            <a:schemeClr val="lt1"/>
+          </a:fontRef>
+        </p:style>
+        <p:txBody>
+          <a:bodyPr rtlCol="0" anchor="ctr"/>
+          <a:lstStyle/>
+          <a:p>
+            <a:pPr algn="ctr"/>
+          </a:p>
+        </p:txBody>
+      </p:sp>
+      <p:graphicFrame>
+        <p:nvGraphicFramePr>
+          <p:cNvPr id="6" name="Table 5"/>
+          <p:cNvGraphicFramePr>
+            <a:graphicFrameLocks noGrp="1"/>
+          </p:cNvGraphicFramePr>
+          <p:nvPr/>
+        </p:nvGraphicFramePr>
+        <p:xfrm>
+          <a:off x="658368" y="1755648"/>
+          <a:ext cx="10874959" cy="2084832"/>
+        </p:xfrm>
+        <a:graphic>
+          <a:graphicData uri="http://schemas.openxmlformats.org/drawingml/2006/table">
+            <a:tbl>
+              <a:tblPr firstRow="1">
+                <a:tableStyleId>{5C22544A-7EE6-4342-B048-85BDC9FD1C3A}</a:tableStyleId>
+              </a:tblPr>
+              <a:tblGrid>
+                <a:gridCol w="2392491"/>
+                <a:gridCol w="4241234"/>
+                <a:gridCol w="4241234"/>
+              </a:tblGrid>
+              <a:tr h="329184">
+                <a:tc>
+                  <a:txBody>
+                    <a:bodyPr/>
+                    <a:lstStyle/>
+                    <a:p>
+                      <a:pPr algn="l"/>
+                      <a:r>
+                        <a:rPr sz="1200" b="1">
+                          <a:solidFill>
+                            <a:srgbClr val="FFFFFF"/>
+                          </a:solidFill>
+                          <a:latin typeface="Microsoft JhengHei"/>
+                        </a:rPr>
+                        <a:t/>
+                      </a:r>
+                    </a:p>
+                  </a:txBody>
+                  <a:tcPr marL="45720" marR="45720" marT="18288" marB="18288" anchor="ctr">
+                    <a:solidFill>
+                      <a:srgbClr val="1F4E79"/>
+                    </a:solidFill>
+                  </a:tcPr>
+                </a:tc>
+                <a:tc>
+                  <a:txBody>
+                    <a:bodyPr/>
+                    <a:lstStyle/>
+                    <a:p>
+                      <a:pPr algn="ctr"/>
+                      <a:r>
+                        <a:rPr sz="1200" b="1">
+                          <a:solidFill>
+                            <a:srgbClr val="FFFFFF"/>
+                          </a:solidFill>
+                          <a:latin typeface="Microsoft JhengHei"/>
+                        </a:rPr>
+                        <a:t>篩檢層 · 全量掃過</a:t>
+                      </a:r>
+                    </a:p>
+                  </a:txBody>
+                  <a:tcPr marL="45720" marR="45720" marT="18288" marB="18288" anchor="ctr">
+                    <a:solidFill>
+                      <a:srgbClr val="1F4E79"/>
+                    </a:solidFill>
+                  </a:tcPr>
+                </a:tc>
+                <a:tc>
+                  <a:txBody>
+                    <a:bodyPr/>
+                    <a:lstStyle/>
+                    <a:p>
+                      <a:pPr algn="ctr"/>
+                      <a:r>
+                        <a:rPr sz="1200" b="1">
+                          <a:solidFill>
+                            <a:srgbClr val="FFFFFF"/>
+                          </a:solidFill>
+                          <a:latin typeface="Microsoft JhengHei"/>
+                        </a:rPr>
+                        <a:t>深挖層 · 只跑爭議</a:t>
+                      </a:r>
+                    </a:p>
+                  </a:txBody>
+                  <a:tcPr marL="45720" marR="45720" marT="18288" marB="18288" anchor="ctr">
+                    <a:solidFill>
+                      <a:srgbClr val="1F4E79"/>
+                    </a:solidFill>
+                  </a:tcPr>
+                </a:tc>
+              </a:tr>
+              <a:tr h="292608">
+                <a:tc>
+                  <a:txBody>
+                    <a:bodyPr/>
+                    <a:lstStyle/>
+                    <a:p>
+                      <a:pPr algn="l"/>
+                      <a:r>
+                        <a:rPr sz="1200" b="0">
+                          <a:solidFill>
+                            <a:srgbClr val="16212E"/>
+                          </a:solidFill>
+                          <a:latin typeface="Microsoft JhengHei"/>
+                        </a:rPr>
+                        <a:t>模型</a:t>
+                      </a:r>
+                    </a:p>
+                  </a:txBody>
+                  <a:tcPr marL="45720" marR="45720" marT="18288" marB="18288" anchor="ctr">
+                    <a:solidFill>
+                      <a:srgbClr val="FFFFFF"/>
+                    </a:solidFill>
+                  </a:tcPr>
+                </a:tc>
+                <a:tc>
+                  <a:txBody>
+                    <a:bodyPr/>
+                    <a:lstStyle/>
+                    <a:p>
+                      <a:pPr algn="ctr"/>
+                      <a:r>
+                        <a:rPr sz="1200" b="0">
+                          <a:solidFill>
+                            <a:srgbClr val="6B7885"/>
+                          </a:solidFill>
+                          <a:latin typeface="Microsoft JhengHei"/>
+                        </a:rPr>
+                        <a:t>Qwen3.5 122B-A10B(4-bit)</a:t>
+                      </a:r>
+                    </a:p>
+                  </a:txBody>
+                  <a:tcPr marL="45720" marR="45720" marT="18288" marB="18288" anchor="ctr">
+                    <a:solidFill>
+                      <a:srgbClr val="FFFFFF"/>
+                    </a:solidFill>
+                  </a:tcPr>
+                </a:tc>
+                <a:tc>
+                  <a:txBody>
+                    <a:bodyPr/>
+                    <a:lstStyle/>
+                    <a:p>
+                      <a:pPr algn="ctr"/>
+                      <a:r>
+                        <a:rPr sz="1200" b="0">
+                          <a:solidFill>
+                            <a:srgbClr val="6B7885"/>
+                          </a:solidFill>
+                          <a:latin typeface="Microsoft JhengHei"/>
+                        </a:rPr>
+                        <a:t>Qwen2.5-VL 72B(8-bit)</a:t>
+                      </a:r>
+                    </a:p>
+                  </a:txBody>
+                  <a:tcPr marL="45720" marR="45720" marT="18288" marB="18288" anchor="ctr">
+                    <a:solidFill>
+                      <a:srgbClr val="FFFFFF"/>
+                    </a:solidFill>
+                  </a:tcPr>
+                </a:tc>
+              </a:tr>
+              <a:tr h="292608">
+                <a:tc>
+                  <a:txBody>
+                    <a:bodyPr/>
+                    <a:lstStyle/>
+                    <a:p>
+                      <a:pPr algn="l"/>
+                      <a:r>
+                        <a:rPr sz="1200" b="0">
+                          <a:solidFill>
+                            <a:srgbClr val="16212E"/>
+                          </a:solidFill>
+                          <a:latin typeface="Microsoft JhengHei"/>
+                        </a:rPr>
+                        <a:t>為什麼是它</a:t>
+                      </a:r>
+                    </a:p>
+                  </a:txBody>
+                  <a:tcPr marL="45720" marR="45720" marT="18288" marB="18288" anchor="ctr">
+                    <a:solidFill>
+                      <a:srgbClr val="FFFFFF"/>
+                    </a:solidFill>
+                  </a:tcPr>
+                </a:tc>
+                <a:tc>
+                  <a:txBody>
+                    <a:bodyPr/>
+                    <a:lstStyle/>
+                    <a:p>
+                      <a:pPr algn="ctr"/>
+                      <a:r>
+                        <a:rPr sz="1200" b="0">
+                          <a:solidFill>
+                            <a:srgbClr val="6B7885"/>
+                          </a:solidFill>
+                          <a:latin typeface="Microsoft JhengHei"/>
+                        </a:rPr>
+                        <a:t>MoE 只活化 10B,算得快</a:t>
+                      </a:r>
+                    </a:p>
+                  </a:txBody>
+                  <a:tcPr marL="45720" marR="45720" marT="18288" marB="18288" anchor="ctr">
+                    <a:solidFill>
+                      <a:srgbClr val="FFFFFF"/>
+                    </a:solidFill>
+                  </a:tcPr>
+                </a:tc>
+                <a:tc>
+                  <a:txBody>
+                    <a:bodyPr/>
+                    <a:lstStyle/>
+                    <a:p>
+                      <a:pPr algn="ctr"/>
+                      <a:r>
+                        <a:rPr sz="1200" b="0">
+                          <a:solidFill>
+                            <a:srgbClr val="6B7885"/>
+                          </a:solidFill>
+                          <a:latin typeface="Microsoft JhengHei"/>
+                        </a:rPr>
+                        <a:t>保留較多細節,讀得到小字</a:t>
+                      </a:r>
+                    </a:p>
+                  </a:txBody>
+                  <a:tcPr marL="45720" marR="45720" marT="18288" marB="18288" anchor="ctr">
+                    <a:solidFill>
+                      <a:srgbClr val="FFFFFF"/>
+                    </a:solidFill>
+                  </a:tcPr>
+                </a:tc>
+              </a:tr>
+              <a:tr h="292608">
+                <a:tc>
+                  <a:txBody>
+                    <a:bodyPr/>
+                    <a:lstStyle/>
+                    <a:p>
+                      <a:pPr algn="l"/>
+                      <a:r>
+                        <a:rPr sz="1200" b="1">
+                          <a:solidFill>
+                            <a:srgbClr val="C00000"/>
+                          </a:solidFill>
+                          <a:latin typeface="Microsoft JhengHei"/>
+                        </a:rPr>
+                        <a:t>這一層只做</a:t>
+                      </a:r>
+                    </a:p>
+                  </a:txBody>
+                  <a:tcPr marL="45720" marR="45720" marT="18288" marB="18288" anchor="ctr">
+                    <a:solidFill>
+                      <a:srgbClr val="FBEFEF"/>
+                    </a:solidFill>
+                  </a:tcPr>
+                </a:tc>
+                <a:tc>
+                  <a:txBody>
+                    <a:bodyPr/>
+                    <a:lstStyle/>
+                    <a:p>
+                      <a:pPr algn="ctr"/>
+                      <a:r>
+                        <a:rPr sz="1200" b="0">
+                          <a:solidFill>
+                            <a:srgbClr val="C00000"/>
+                          </a:solidFill>
+                          <a:latin typeface="Microsoft JhengHei"/>
+                        </a:rPr>
+                        <a:t>決定「這筆要不要深看」</a:t>
+                      </a:r>
+                    </a:p>
+                  </a:txBody>
+                  <a:tcPr marL="45720" marR="45720" marT="18288" marB="18288" anchor="ctr">
+                    <a:solidFill>
+                      <a:srgbClr val="FBEFEF"/>
+                    </a:solidFill>
+                  </a:tcPr>
+                </a:tc>
+                <a:tc>
+                  <a:txBody>
+                    <a:bodyPr/>
+                    <a:lstStyle/>
+                    <a:p>
+                      <a:pPr algn="ctr"/>
+                      <a:r>
+                        <a:rPr sz="1200" b="0">
+                          <a:solidFill>
+                            <a:srgbClr val="C00000"/>
+                          </a:solidFill>
+                          <a:latin typeface="Microsoft JhengHei"/>
+                        </a:rPr>
+                        <a:t>讀交通標誌,產出證據包</a:t>
+                      </a:r>
+                    </a:p>
+                  </a:txBody>
+                  <a:tcPr marL="45720" marR="45720" marT="18288" marB="18288" anchor="ctr">
+                    <a:solidFill>
+                      <a:srgbClr val="FBEFEF"/>
+                    </a:solidFill>
+                  </a:tcPr>
+                </a:tc>
+              </a:tr>
+              <a:tr h="292608">
+                <a:tc>
+                  <a:txBody>
+                    <a:bodyPr/>
+                    <a:lstStyle/>
+                    <a:p>
+                      <a:pPr algn="l"/>
+                      <a:r>
+                        <a:rPr sz="1200" b="0">
+                          <a:solidFill>
+                            <a:srgbClr val="16212E"/>
+                          </a:solidFill>
+                          <a:latin typeface="Microsoft JhengHei"/>
+                        </a:rPr>
+                        <a:t>解析度 · 抽幀</a:t>
+                      </a:r>
+                    </a:p>
+                  </a:txBody>
+                  <a:tcPr marL="45720" marR="45720" marT="18288" marB="18288" anchor="ctr">
+                    <a:solidFill>
+                      <a:srgbClr val="FFFFFF"/>
+                    </a:solidFill>
+                  </a:tcPr>
+                </a:tc>
+                <a:tc>
+                  <a:txBody>
+                    <a:bodyPr/>
+                    <a:lstStyle/>
+                    <a:p>
+                      <a:pPr algn="ctr"/>
+                      <a:r>
+                        <a:rPr sz="1200" b="0">
+                          <a:solidFill>
+                            <a:srgbClr val="6B7885"/>
+                          </a:solidFill>
+                          <a:latin typeface="Microsoft JhengHei"/>
+                        </a:rPr>
+                        <a:t>640×360 · 1 FPS</a:t>
+                      </a:r>
+                    </a:p>
+                  </a:txBody>
+                  <a:tcPr marL="45720" marR="45720" marT="18288" marB="18288" anchor="ctr">
+                    <a:solidFill>
+                      <a:srgbClr val="FFFFFF"/>
+                    </a:solidFill>
+                  </a:tcPr>
+                </a:tc>
+                <a:tc>
+                  <a:txBody>
+                    <a:bodyPr/>
+                    <a:lstStyle/>
+                    <a:p>
+                      <a:pPr algn="ctr"/>
+                      <a:r>
+                        <a:rPr sz="1200" b="0">
+                          <a:solidFill>
+                            <a:srgbClr val="6B7885"/>
+                          </a:solidFill>
+                          <a:latin typeface="Microsoft JhengHei"/>
+                        </a:rPr>
+                        <a:t>1080p · 1 FPS</a:t>
+                      </a:r>
+                    </a:p>
+                  </a:txBody>
+                  <a:tcPr marL="45720" marR="45720" marT="18288" marB="18288" anchor="ctr">
+                    <a:solidFill>
+                      <a:srgbClr val="FFFFFF"/>
+                    </a:solidFill>
+                  </a:tcPr>
+                </a:tc>
+              </a:tr>
+              <a:tr h="292608">
+                <a:tc>
+                  <a:txBody>
+                    <a:bodyPr/>
+                    <a:lstStyle/>
+                    <a:p>
+                      <a:pPr algn="l"/>
+                      <a:r>
+                        <a:rPr sz="1200" b="0">
+                          <a:solidFill>
+                            <a:srgbClr val="16212E"/>
+                          </a:solidFill>
+                          <a:latin typeface="Microsoft JhengHei"/>
+                        </a:rPr>
+                        <a:t>每筆(推算)</a:t>
+                      </a:r>
+                    </a:p>
+                  </a:txBody>
+                  <a:tcPr marL="45720" marR="45720" marT="18288" marB="18288" anchor="ctr">
+                    <a:solidFill>
+                      <a:srgbClr val="FFFFFF"/>
+                    </a:solidFill>
+                  </a:tcPr>
+                </a:tc>
+                <a:tc>
+                  <a:txBody>
+                    <a:bodyPr/>
+                    <a:lstStyle/>
+                    <a:p>
+                      <a:pPr algn="ctr"/>
+                      <a:r>
+                        <a:rPr sz="1200" b="0">
+                          <a:solidFill>
+                            <a:srgbClr val="6B7885"/>
+                          </a:solidFill>
+                          <a:latin typeface="Microsoft JhengHei"/>
+                        </a:rPr>
+                        <a:t>約 3.4 秒(Batch=8)</a:t>
+                      </a:r>
+                    </a:p>
+                  </a:txBody>
+                  <a:tcPr marL="45720" marR="45720" marT="18288" marB="18288" anchor="ctr">
+                    <a:solidFill>
+                      <a:srgbClr val="FFFFFF"/>
+                    </a:solidFill>
+                  </a:tcPr>
+                </a:tc>
+                <a:tc>
+                  <a:txBody>
+                    <a:bodyPr/>
+                    <a:lstStyle/>
+                    <a:p>
+                      <a:pPr algn="ctr"/>
+                      <a:r>
+                        <a:rPr sz="1200" b="0">
+                          <a:solidFill>
+                            <a:srgbClr val="6B7885"/>
+                          </a:solidFill>
+                          <a:latin typeface="Microsoft JhengHei"/>
+                        </a:rPr>
+                        <a:t>約 62 秒(Batch=4)</a:t>
+                      </a:r>
+                    </a:p>
+                  </a:txBody>
+                  <a:tcPr marL="45720" marR="45720" marT="18288" marB="18288" anchor="ctr">
+                    <a:solidFill>
+                      <a:srgbClr val="FFFFFF"/>
+                    </a:solidFill>
+                  </a:tcPr>
+                </a:tc>
+              </a:tr>
+              <a:tr h="292608">
+                <a:tc>
+                  <a:txBody>
+                    <a:bodyPr/>
+                    <a:lstStyle/>
+                    <a:p>
+                      <a:pPr algn="l"/>
+                      <a:r>
+                        <a:rPr sz="1200" b="1">
+                          <a:solidFill>
+                            <a:srgbClr val="C00000"/>
+                          </a:solidFill>
+                          <a:latin typeface="Microsoft JhengHei"/>
+                        </a:rPr>
+                        <a:t>一個車隊一天</a:t>
+                      </a:r>
+                    </a:p>
+                  </a:txBody>
+                  <a:tcPr marL="45720" marR="45720" marT="18288" marB="18288" anchor="ctr">
+                    <a:solidFill>
+                      <a:srgbClr val="FBEFEF"/>
+                    </a:solidFill>
+                  </a:tcPr>
+                </a:tc>
+                <a:tc>
+                  <a:txBody>
+                    <a:bodyPr/>
+                    <a:lstStyle/>
+                    <a:p>
+                      <a:pPr algn="ctr"/>
+                      <a:r>
+                        <a:rPr sz="1200" b="0">
+                          <a:solidFill>
+                            <a:srgbClr val="C00000"/>
+                          </a:solidFill>
+                          <a:latin typeface="Microsoft JhengHei"/>
+                        </a:rPr>
+                        <a:t>3,000 筆 → 2.8 小時</a:t>
+                      </a:r>
+                    </a:p>
+                  </a:txBody>
+                  <a:tcPr marL="45720" marR="45720" marT="18288" marB="18288" anchor="ctr">
+                    <a:solidFill>
+                      <a:srgbClr val="FBEFEF"/>
+                    </a:solidFill>
+                  </a:tcPr>
+                </a:tc>
+                <a:tc>
+                  <a:txBody>
+                    <a:bodyPr/>
+                    <a:lstStyle/>
+                    <a:p>
+                      <a:pPr algn="ctr"/>
+                      <a:r>
+                        <a:rPr sz="1200" b="0">
+                          <a:solidFill>
+                            <a:srgbClr val="C00000"/>
+                          </a:solidFill>
+                          <a:latin typeface="Microsoft JhengHei"/>
+                        </a:rPr>
+                        <a:t>150–300 筆 → 2.6–5.1 小時</a:t>
+                      </a:r>
+                    </a:p>
+                  </a:txBody>
+                  <a:tcPr marL="45720" marR="45720" marT="18288" marB="18288" anchor="ctr">
+                    <a:solidFill>
+                      <a:srgbClr val="FBEFEF"/>
+                    </a:solidFill>
+                  </a:tcPr>
+                </a:tc>
+              </a:tr>
+            </a:tbl>
+          </a:graphicData>
+        </a:graphic>
+      </p:graphicFrame>
+      <p:sp>
+        <p:nvSpPr>
+          <p:cNvPr id="7" name="Rectangle 6"/>
+          <p:cNvSpPr/>
+          <p:nvPr/>
+        </p:nvSpPr>
+        <p:spPr>
+          <a:xfrm>
+            <a:off x="658368" y="3995928"/>
+            <a:ext cx="45720" cy="321468"/>
+          </a:xfrm>
+          <a:prstGeom prst="rect">
+            <a:avLst/>
+          </a:prstGeom>
+          <a:solidFill>
+            <a:srgbClr val="1F4E79"/>
+          </a:solidFill>
+          <a:ln>
+            <a:noFill/>
+          </a:ln>
+          <a:effectLst/>
+        </p:spPr>
+        <p:style>
+          <a:lnRef idx="1">
+            <a:schemeClr val="accent1"/>
+          </a:lnRef>
+          <a:fillRef idx="3">
+            <a:schemeClr val="accent1"/>
+          </a:fillRef>
+          <a:effectRef idx="2">
+            <a:schemeClr val="accent1"/>
+          </a:effectRef>
+          <a:fontRef idx="minor">
+            <a:schemeClr val="lt1"/>
+          </a:fontRef>
+        </p:style>
+        <p:txBody>
+          <a:bodyPr rtlCol="0" anchor="ctr"/>
+          <a:lstStyle/>
+          <a:p>
+            <a:pPr algn="ctr"/>
+          </a:p>
+        </p:txBody>
+      </p:sp>
+      <p:sp>
+        <p:nvSpPr>
+          <p:cNvPr id="8" name="TextBox 7"/>
+          <p:cNvSpPr txBox="1"/>
+          <p:nvPr/>
+        </p:nvSpPr>
+        <p:spPr>
+          <a:xfrm>
+            <a:off x="804672" y="3968496"/>
+            <a:ext cx="2408822" cy="412908"/>
+          </a:xfrm>
+          <a:prstGeom prst="rect">
+            <a:avLst/>
+          </a:prstGeom>
+          <a:noFill/>
+        </p:spPr>
+        <p:txBody>
+          <a:bodyPr wrap="square" lIns="0" rIns="0" tIns="0" bIns="0" anchor="ctr">
+            <a:spAutoFit/>
+          </a:bodyPr>
+          <a:lstStyle/>
+          <a:p>
+            <a:pPr algn="l">
+              <a:lnSpc>
+                <a:spcPct val="125000"/>
+              </a:lnSpc>
+            </a:pPr>
+            <a:r>
+              <a:rPr sz="1400" b="1">
+                <a:solidFill>
+                  <a:srgbClr val="16212E"/>
+                </a:solidFill>
+                <a:latin typeface="Microsoft JhengHei"/>
+              </a:rPr>
+              <a:t>為什麼分兩層</a:t>
+            </a:r>
+          </a:p>
+        </p:txBody>
+      </p:sp>
+      <p:sp>
+        <p:nvSpPr>
+          <p:cNvPr id="9" name="TextBox 8"/>
+          <p:cNvSpPr txBox="1"/>
+          <p:nvPr/>
+        </p:nvSpPr>
+        <p:spPr>
+          <a:xfrm>
+            <a:off x="3268358" y="3968496"/>
+            <a:ext cx="2881503" cy="412908"/>
+          </a:xfrm>
+          <a:prstGeom prst="rect">
+            <a:avLst/>
+          </a:prstGeom>
+          <a:noFill/>
+        </p:spPr>
+        <p:txBody>
+          <a:bodyPr wrap="square" lIns="0" rIns="0" tIns="0" bIns="0" anchor="ctr">
+            <a:spAutoFit/>
+          </a:bodyPr>
+          <a:lstStyle/>
+          <a:p>
+            <a:pPr algn="l">
+              <a:lnSpc>
+                <a:spcPct val="125000"/>
+              </a:lnSpc>
+            </a:pPr>
+            <a:r>
+              <a:rPr sz="1500" b="1">
+                <a:solidFill>
+                  <a:srgbClr val="1F4E79"/>
+                </a:solidFill>
+                <a:latin typeface="Microsoft JhengHei"/>
+              </a:rPr>
+              <a:t>讀小字要高解析度,高解析度就慢</a:t>
+            </a:r>
+          </a:p>
+        </p:txBody>
+      </p:sp>
+      <p:sp>
+        <p:nvSpPr>
+          <p:cNvPr id="10" name="TextBox 9"/>
+          <p:cNvSpPr txBox="1"/>
+          <p:nvPr/>
+        </p:nvSpPr>
+        <p:spPr>
+          <a:xfrm>
+            <a:off x="6259589" y="3968496"/>
+            <a:ext cx="5164009" cy="412908"/>
+          </a:xfrm>
+          <a:prstGeom prst="rect">
+            <a:avLst/>
+          </a:prstGeom>
+          <a:noFill/>
+        </p:spPr>
+        <p:txBody>
+          <a:bodyPr wrap="square" lIns="0" rIns="0" tIns="0" bIns="0" anchor="ctr">
+            <a:spAutoFit/>
+          </a:bodyPr>
+          <a:lstStyle/>
+          <a:p>
+            <a:pPr algn="l">
+              <a:lnSpc>
+                <a:spcPct val="120000"/>
+              </a:lnSpc>
+            </a:pPr>
+            <a:r>
+              <a:rPr sz="1200" b="0">
+                <a:solidFill>
+                  <a:srgbClr val="6B7885"/>
+                </a:solidFill>
+                <a:latin typeface="Microsoft JhengHei"/>
+              </a:rPr>
+              <a:t>篩檢不讀小字,只挑出要深看的;讀小字只花在爭議那 5–10%</a:t>
+            </a:r>
+          </a:p>
+        </p:txBody>
+      </p:sp>
+      <p:sp>
+        <p:nvSpPr>
+          <p:cNvPr id="11" name="Rectangle 10"/>
+          <p:cNvSpPr/>
+          <p:nvPr/>
+        </p:nvSpPr>
+        <p:spPr>
+          <a:xfrm>
+            <a:off x="658368" y="4500276"/>
+            <a:ext cx="45720" cy="321468"/>
+          </a:xfrm>
+          <a:prstGeom prst="rect">
+            <a:avLst/>
+          </a:prstGeom>
+          <a:solidFill>
+            <a:srgbClr val="1F4E79"/>
+          </a:solidFill>
+          <a:ln>
+            <a:noFill/>
+          </a:ln>
+          <a:effectLst/>
+        </p:spPr>
+        <p:style>
+          <a:lnRef idx="1">
+            <a:schemeClr val="accent1"/>
+          </a:lnRef>
+          <a:fillRef idx="3">
+            <a:schemeClr val="accent1"/>
+          </a:fillRef>
+          <a:effectRef idx="2">
+            <a:schemeClr val="accent1"/>
+          </a:effectRef>
+          <a:fontRef idx="minor">
+            <a:schemeClr val="lt1"/>
+          </a:fontRef>
+        </p:style>
+        <p:txBody>
+          <a:bodyPr rtlCol="0" anchor="ctr"/>
+          <a:lstStyle/>
+          <a:p>
+            <a:pPr algn="ctr"/>
+          </a:p>
+        </p:txBody>
+      </p:sp>
+      <p:sp>
+        <p:nvSpPr>
+          <p:cNvPr id="12" name="TextBox 11"/>
+          <p:cNvSpPr txBox="1"/>
+          <p:nvPr/>
+        </p:nvSpPr>
+        <p:spPr>
+          <a:xfrm>
+            <a:off x="804672" y="4472844"/>
+            <a:ext cx="2408822" cy="412908"/>
+          </a:xfrm>
+          <a:prstGeom prst="rect">
+            <a:avLst/>
+          </a:prstGeom>
+          <a:noFill/>
+        </p:spPr>
+        <p:txBody>
+          <a:bodyPr wrap="square" lIns="0" rIns="0" tIns="0" bIns="0" anchor="ctr">
+            <a:spAutoFit/>
+          </a:bodyPr>
+          <a:lstStyle/>
+          <a:p>
+            <a:pPr algn="l">
+              <a:lnSpc>
+                <a:spcPct val="125000"/>
+              </a:lnSpc>
+            </a:pPr>
+            <a:r>
+              <a:rPr sz="1400" b="1">
+                <a:solidFill>
+                  <a:srgbClr val="16212E"/>
+                </a:solidFill>
+                <a:latin typeface="Microsoft JhengHei"/>
+              </a:rPr>
+              <a:t>為什麼分時載入</a:t>
+            </a:r>
+          </a:p>
+        </p:txBody>
+      </p:sp>
+      <p:sp>
+        <p:nvSpPr>
+          <p:cNvPr id="13" name="TextBox 12"/>
+          <p:cNvSpPr txBox="1"/>
+          <p:nvPr/>
+        </p:nvSpPr>
+        <p:spPr>
+          <a:xfrm>
+            <a:off x="3268358" y="4472844"/>
+            <a:ext cx="2881503" cy="412908"/>
+          </a:xfrm>
+          <a:prstGeom prst="rect">
+            <a:avLst/>
+          </a:prstGeom>
+          <a:noFill/>
+        </p:spPr>
+        <p:txBody>
+          <a:bodyPr wrap="square" lIns="0" rIns="0" tIns="0" bIns="0" anchor="ctr">
+            <a:spAutoFit/>
+          </a:bodyPr>
+          <a:lstStyle/>
+          <a:p>
+            <a:pPr algn="l">
+              <a:lnSpc>
+                <a:spcPct val="125000"/>
+              </a:lnSpc>
+            </a:pPr>
+            <a:r>
+              <a:rPr sz="1500" b="1">
+                <a:solidFill>
+                  <a:srgbClr val="1F4E79"/>
+                </a:solidFill>
+                <a:latin typeface="Microsoft JhengHei"/>
+              </a:rPr>
+              <a:t>75 + 75 GB &gt; 128 GB</a:t>
+            </a:r>
+          </a:p>
+        </p:txBody>
+      </p:sp>
+      <p:sp>
+        <p:nvSpPr>
+          <p:cNvPr id="14" name="TextBox 13"/>
+          <p:cNvSpPr txBox="1"/>
+          <p:nvPr/>
+        </p:nvSpPr>
+        <p:spPr>
+          <a:xfrm>
+            <a:off x="6259589" y="4472844"/>
+            <a:ext cx="5164009" cy="412908"/>
+          </a:xfrm>
+          <a:prstGeom prst="rect">
+            <a:avLst/>
+          </a:prstGeom>
+          <a:noFill/>
+        </p:spPr>
+        <p:txBody>
+          <a:bodyPr wrap="square" lIns="0" rIns="0" tIns="0" bIns="0" anchor="ctr">
+            <a:spAutoFit/>
+          </a:bodyPr>
+          <a:lstStyle/>
+          <a:p>
+            <a:pPr algn="l">
+              <a:lnSpc>
+                <a:spcPct val="120000"/>
+              </a:lnSpc>
+            </a:pPr>
+            <a:r>
+              <a:rPr sz="1200" b="0">
+                <a:solidFill>
+                  <a:srgbClr val="6B7885"/>
+                </a:solidFill>
+                <a:latin typeface="Microsoft JhengHei"/>
+              </a:rPr>
+              <a:t>兩個模型不同時常駐,同一台設備輪流載入</a:t>
+            </a:r>
+          </a:p>
+        </p:txBody>
+      </p:sp>
+      <p:sp>
+        <p:nvSpPr>
+          <p:cNvPr id="15" name="Rectangle 14"/>
+          <p:cNvSpPr/>
+          <p:nvPr/>
+        </p:nvSpPr>
+        <p:spPr>
+          <a:xfrm>
+            <a:off x="658368" y="5004625"/>
+            <a:ext cx="45720" cy="321468"/>
+          </a:xfrm>
+          <a:prstGeom prst="rect">
+            <a:avLst/>
+          </a:prstGeom>
+          <a:solidFill>
+            <a:srgbClr val="1F4E79"/>
+          </a:solidFill>
+          <a:ln>
+            <a:noFill/>
+          </a:ln>
+          <a:effectLst/>
+        </p:spPr>
+        <p:style>
+          <a:lnRef idx="1">
+            <a:schemeClr val="accent1"/>
+          </a:lnRef>
+          <a:fillRef idx="3">
+            <a:schemeClr val="accent1"/>
+          </a:fillRef>
+          <a:effectRef idx="2">
+            <a:schemeClr val="accent1"/>
+          </a:effectRef>
+          <a:fontRef idx="minor">
+            <a:schemeClr val="lt1"/>
+          </a:fontRef>
+        </p:style>
+        <p:txBody>
+          <a:bodyPr rtlCol="0" anchor="ctr"/>
+          <a:lstStyle/>
+          <a:p>
+            <a:pPr algn="ctr"/>
+          </a:p>
+        </p:txBody>
+      </p:sp>
+      <p:sp>
+        <p:nvSpPr>
+          <p:cNvPr id="16" name="TextBox 15"/>
+          <p:cNvSpPr txBox="1"/>
+          <p:nvPr/>
+        </p:nvSpPr>
+        <p:spPr>
+          <a:xfrm>
+            <a:off x="804672" y="4977193"/>
+            <a:ext cx="2408822" cy="412908"/>
+          </a:xfrm>
+          <a:prstGeom prst="rect">
+            <a:avLst/>
+          </a:prstGeom>
+          <a:noFill/>
+        </p:spPr>
+        <p:txBody>
+          <a:bodyPr wrap="square" lIns="0" rIns="0" tIns="0" bIns="0" anchor="ctr">
+            <a:spAutoFit/>
+          </a:bodyPr>
+          <a:lstStyle/>
+          <a:p>
+            <a:pPr algn="l">
+              <a:lnSpc>
+                <a:spcPct val="125000"/>
+              </a:lnSpc>
+            </a:pPr>
+            <a:r>
+              <a:rPr sz="1400" b="1">
+                <a:solidFill>
+                  <a:srgbClr val="16212E"/>
+                </a:solidFill>
+                <a:latin typeface="Microsoft JhengHei"/>
+              </a:rPr>
+              <a:t>擴到全客戶時</a:t>
+            </a:r>
+          </a:p>
+        </p:txBody>
+      </p:sp>
+      <p:sp>
+        <p:nvSpPr>
+          <p:cNvPr id="17" name="TextBox 16"/>
+          <p:cNvSpPr txBox="1"/>
+          <p:nvPr/>
+        </p:nvSpPr>
+        <p:spPr>
+          <a:xfrm>
+            <a:off x="3268358" y="4977193"/>
+            <a:ext cx="2881503" cy="412908"/>
+          </a:xfrm>
+          <a:prstGeom prst="rect">
+            <a:avLst/>
+          </a:prstGeom>
+          <a:noFill/>
+        </p:spPr>
+        <p:txBody>
+          <a:bodyPr wrap="square" lIns="0" rIns="0" tIns="0" bIns="0" anchor="ctr">
+            <a:spAutoFit/>
+          </a:bodyPr>
+          <a:lstStyle/>
+          <a:p>
+            <a:pPr algn="l">
+              <a:lnSpc>
+                <a:spcPct val="125000"/>
+              </a:lnSpc>
+            </a:pPr>
+            <a:r>
+              <a:rPr sz="1500" b="1">
+                <a:solidFill>
+                  <a:srgbClr val="1F4E79"/>
+                </a:solidFill>
+                <a:latin typeface="Microsoft JhengHei"/>
+              </a:rPr>
+              <a:t>13,000 筆/天 → 一台不夠</a:t>
+            </a:r>
+          </a:p>
+        </p:txBody>
+      </p:sp>
+      <p:sp>
+        <p:nvSpPr>
+          <p:cNvPr id="18" name="TextBox 17"/>
+          <p:cNvSpPr txBox="1"/>
+          <p:nvPr/>
+        </p:nvSpPr>
+        <p:spPr>
+          <a:xfrm>
+            <a:off x="6259589" y="4977193"/>
+            <a:ext cx="5164009" cy="412908"/>
+          </a:xfrm>
+          <a:prstGeom prst="rect">
+            <a:avLst/>
+          </a:prstGeom>
+          <a:noFill/>
+        </p:spPr>
+        <p:txBody>
+          <a:bodyPr wrap="square" lIns="0" rIns="0" tIns="0" bIns="0" anchor="ctr">
+            <a:spAutoFit/>
+          </a:bodyPr>
+          <a:lstStyle/>
+          <a:p>
+            <a:pPr algn="l">
+              <a:lnSpc>
+                <a:spcPct val="120000"/>
+              </a:lnSpc>
+            </a:pPr>
+            <a:r>
+              <a:rPr sz="1200" b="0">
+                <a:solidFill>
+                  <a:srgbClr val="6B7885"/>
+                </a:solidFill>
+                <a:latin typeface="Microsoft JhengHei"/>
+              </a:rPr>
+              <a:t>23–35 小時/天;串第二台 → 256 GB,設備成本翻倍,G1 決定</a:t>
+            </a:r>
+          </a:p>
+        </p:txBody>
+      </p:sp>
+      <p:sp>
+        <p:nvSpPr>
+          <p:cNvPr id="19" name="Rounded Rectangle 18"/>
+          <p:cNvSpPr/>
+          <p:nvPr/>
+        </p:nvSpPr>
+        <p:spPr>
+          <a:xfrm>
+            <a:off x="658368" y="5831778"/>
+            <a:ext cx="9658807" cy="678749"/>
+          </a:xfrm>
+          <a:prstGeom prst="roundRect">
+            <a:avLst>
+              <a:gd name="adj" fmla="val 6000"/>
+            </a:avLst>
+          </a:prstGeom>
+          <a:solidFill>
+            <a:srgbClr val="1F4E79"/>
+          </a:solidFill>
+          <a:ln>
+            <a:noFill/>
+          </a:ln>
+          <a:effectLst/>
+        </p:spPr>
+        <p:style>
+          <a:lnRef idx="1">
+            <a:schemeClr val="accent1"/>
+          </a:lnRef>
+          <a:fillRef idx="3">
+            <a:schemeClr val="accent1"/>
+          </a:fillRef>
+          <a:effectRef idx="2">
+            <a:schemeClr val="accent1"/>
+          </a:effectRef>
+          <a:fontRef idx="minor">
+            <a:schemeClr val="lt1"/>
+          </a:fontRef>
+        </p:style>
+        <p:txBody>
+          <a:bodyPr rtlCol="0" anchor="ctr"/>
+          <a:lstStyle/>
+          <a:p>
+            <a:pPr algn="ctr"/>
+          </a:p>
+        </p:txBody>
+      </p:sp>
+      <p:sp>
+        <p:nvSpPr>
+          <p:cNvPr id="20" name="TextBox 19"/>
+          <p:cNvSpPr txBox="1"/>
+          <p:nvPr/>
+        </p:nvSpPr>
+        <p:spPr>
+          <a:xfrm>
+            <a:off x="841247" y="5831778"/>
+            <a:ext cx="9293047" cy="678749"/>
+          </a:xfrm>
+          <a:prstGeom prst="rect">
+            <a:avLst/>
+          </a:prstGeom>
+          <a:noFill/>
+        </p:spPr>
+        <p:txBody>
+          <a:bodyPr wrap="square" lIns="0" rIns="0" tIns="0" bIns="0" anchor="ctr">
+            <a:spAutoFit/>
+          </a:bodyPr>
+          <a:lstStyle/>
+          <a:p>
+            <a:pPr algn="ctr">
+              <a:lnSpc>
+                <a:spcPct val="125000"/>
+              </a:lnSpc>
+            </a:pPr>
+            <a:r>
+              <a:rPr sz="1700" b="1">
+                <a:solidFill>
+                  <a:srgbClr val="FFFFFF"/>
+                </a:solidFill>
+                <a:latin typeface="Microsoft JhengHei"/>
+              </a:rPr>
+              <a:t>同一車隊、同一天:人 29.8–42.9 人時(產能 40)· 機器 5.4–8.0 小時,一台,佔用 23%–33%</a:t>
+            </a:r>
+          </a:p>
+        </p:txBody>
+      </p:sp>
+    </p:spTree>
+  </p:cSld>
+  <p:clrMapOvr>
+    <a:masterClrMapping/>
+  </p:clrMapOvr>
+</p:sld>
+</file>
+
+<file path=ppt/slides/slide6.xml><?xml version="1.0" encoding="utf-8"?>
+<p:sld xmlns:a="http://schemas.openxmlformats.org/drawingml/2006/main" xmlns:p="http://schemas.openxmlformats.org/presentationml/2006/main" xmlns:r="http://schemas.openxmlformats.org/officeDocument/2006/relationships">
+  <p:cSld>
+    <p:spTree>
+      <p:nvGrpSpPr>
+        <p:cNvPr id="1" name=""/>
+        <p:cNvGrpSpPr/>
+        <p:nvPr/>
+      </p:nvGrpSpPr>
+      <p:grpSpPr/>
+      <p:sp>
+        <p:nvSpPr>
+          <p:cNvPr id="2" name="TextBox 1"/>
+          <p:cNvSpPr txBox="1"/>
+          <p:nvPr/>
+        </p:nvSpPr>
+        <p:spPr>
+          <a:xfrm>
+            <a:off x="658368" y="384048"/>
+            <a:ext cx="5486400" cy="274320"/>
+          </a:xfrm>
+          <a:prstGeom prst="rect">
+            <a:avLst/>
+          </a:prstGeom>
+          <a:noFill/>
+        </p:spPr>
+        <p:txBody>
+          <a:bodyPr wrap="square" lIns="0" rIns="0" tIns="0" bIns="0" anchor="t">
+            <a:spAutoFit/>
+          </a:bodyPr>
+          <a:lstStyle/>
+          <a:p>
+            <a:pPr algn="l">
+              <a:lnSpc>
+                <a:spcPct val="125000"/>
+              </a:lnSpc>
+            </a:pPr>
+            <a:r>
+              <a:rPr sz="1300" b="1">
+                <a:solidFill>
+                  <a:srgbClr val="E8833A"/>
+                </a:solidFill>
+                <a:latin typeface="Microsoft JhengHei"/>
+              </a:rPr>
+              <a:t>AI 機會</a:t>
+            </a:r>
+          </a:p>
+        </p:txBody>
+      </p:sp>
+      <p:sp>
+        <p:nvSpPr>
+          <p:cNvPr id="3" name="TextBox 2"/>
+          <p:cNvSpPr txBox="1"/>
+          <p:nvPr/>
+        </p:nvSpPr>
+        <p:spPr>
+          <a:xfrm>
+            <a:off x="658368" y="676656"/>
+            <a:ext cx="11030407" cy="566928"/>
+          </a:xfrm>
+          <a:prstGeom prst="rect">
+            <a:avLst/>
+          </a:prstGeom>
+          <a:noFill/>
+        </p:spPr>
+        <p:txBody>
+          <a:bodyPr wrap="square" lIns="0" rIns="0" tIns="0" bIns="0" anchor="t">
+            <a:spAutoFit/>
+          </a:bodyPr>
+          <a:lstStyle/>
+          <a:p>
+            <a:pPr algn="l">
+              <a:lnSpc>
+                <a:spcPct val="125000"/>
+              </a:lnSpc>
+            </a:pPr>
+            <a:r>
+              <a:rPr sz="2700" b="1">
+                <a:solidFill>
+                  <a:srgbClr val="1F4E79"/>
+                </a:solidFill>
+                <a:latin typeface="Microsoft JhengHei"/>
+              </a:rPr>
               <a:t>量得到的是誤報,量不到的是漏放</a:t>
             </a:r>
           </a:p>
@@ -14100,7 +16962,7 @@
 </p:sld>
 </file>
 
-<file path=ppt/slides/slide6.xml><?xml version="1.0" encoding="utf-8"?>
+<file path=ppt/slides/slide7.xml><?xml version="1.0" encoding="utf-8"?>
 <p:sld xmlns:a="http://schemas.openxmlformats.org/drawingml/2006/main" xmlns:p="http://schemas.openxmlformats.org/presentationml/2006/main" xmlns:r="http://schemas.openxmlformats.org/officeDocument/2006/relationships">
   <p:cSld>
     <p:spTree>
@@ -15824,7 +18686,7 @@
 </p:sld>
 </file>
 
-<file path=ppt/slides/slide7.xml><?xml version="1.0" encoding="utf-8"?>
+<file path=ppt/slides/slide8.xml><?xml version="1.0" encoding="utf-8"?>
 <p:sld xmlns:a="http://schemas.openxmlformats.org/drawingml/2006/main" xmlns:p="http://schemas.openxmlformats.org/presentationml/2006/main" xmlns:r="http://schemas.openxmlformats.org/officeDocument/2006/relationships">
   <p:cSld>
     <p:spTree>
@@ -17150,7 +20012,7 @@
 </p:sld>
 </file>
 
-<file path=ppt/slides/slide8.xml><?xml version="1.0" encoding="utf-8"?>
+<file path=ppt/slides/slide9.xml><?xml version="1.0" encoding="utf-8"?>
 <p:sld xmlns:a="http://schemas.openxmlformats.org/drawingml/2006/main" xmlns:p="http://schemas.openxmlformats.org/presentationml/2006/main" xmlns:r="http://schemas.openxmlformats.org/officeDocument/2006/relationships">
   <p:cSld>
     <p:spTree>
@@ -18072,1434 +20934,6 @@
           </a:p>
         </p:txBody>
       </p:sp>
-    </p:spTree>
-  </p:cSld>
-  <p:clrMapOvr>
-    <a:masterClrMapping/>
-  </p:clrMapOvr>
-</p:sld>
-</file>
-
-<file path=ppt/slides/slide9.xml><?xml version="1.0" encoding="utf-8"?>
-<p:sld xmlns:a="http://schemas.openxmlformats.org/drawingml/2006/main" xmlns:p="http://schemas.openxmlformats.org/presentationml/2006/main" xmlns:r="http://schemas.openxmlformats.org/officeDocument/2006/relationships">
-  <p:cSld>
-    <p:spTree>
-      <p:nvGrpSpPr>
-        <p:cNvPr id="1" name=""/>
-        <p:cNvGrpSpPr/>
-        <p:nvPr/>
-      </p:nvGrpSpPr>
-      <p:grpSpPr/>
-      <p:sp>
-        <p:nvSpPr>
-          <p:cNvPr id="2" name="TextBox 1"/>
-          <p:cNvSpPr txBox="1"/>
-          <p:nvPr/>
-        </p:nvSpPr>
-        <p:spPr>
-          <a:xfrm>
-            <a:off x="658368" y="384048"/>
-            <a:ext cx="5486400" cy="274320"/>
-          </a:xfrm>
-          <a:prstGeom prst="rect">
-            <a:avLst/>
-          </a:prstGeom>
-          <a:noFill/>
-        </p:spPr>
-        <p:txBody>
-          <a:bodyPr wrap="square" lIns="0" rIns="0" tIns="0" bIns="0" anchor="t">
-            <a:spAutoFit/>
-          </a:bodyPr>
-          <a:lstStyle/>
-          <a:p>
-            <a:pPr algn="l">
-              <a:lnSpc>
-                <a:spcPct val="125000"/>
-              </a:lnSpc>
-            </a:pPr>
-            <a:r>
-              <a:rPr sz="1300" b="1">
-                <a:solidFill>
-                  <a:srgbClr val="E8833A"/>
-                </a:solidFill>
-                <a:latin typeface="Microsoft JhengHei"/>
-              </a:rPr>
-              <a:t>效益與衡量</a:t>
-            </a:r>
-          </a:p>
-        </p:txBody>
-      </p:sp>
-      <p:sp>
-        <p:nvSpPr>
-          <p:cNvPr id="3" name="TextBox 2"/>
-          <p:cNvSpPr txBox="1"/>
-          <p:nvPr/>
-        </p:nvSpPr>
-        <p:spPr>
-          <a:xfrm>
-            <a:off x="658368" y="676656"/>
-            <a:ext cx="11030407" cy="566928"/>
-          </a:xfrm>
-          <a:prstGeom prst="rect">
-            <a:avLst/>
-          </a:prstGeom>
-          <a:noFill/>
-        </p:spPr>
-        <p:txBody>
-          <a:bodyPr wrap="square" lIns="0" rIns="0" tIns="0" bIns="0" anchor="t">
-            <a:spAutoFit/>
-          </a:bodyPr>
-          <a:lstStyle/>
-          <a:p>
-            <a:pPr algn="l">
-              <a:lnSpc>
-                <a:spcPct val="125000"/>
-              </a:lnSpc>
-            </a:pPr>
-            <a:r>
-              <a:rPr sz="2700" b="1">
-                <a:solidFill>
-                  <a:srgbClr val="1F4E79"/>
-                </a:solidFill>
-                <a:latin typeface="Microsoft JhengHei"/>
-              </a:rPr>
-              <a:t>你買到的三層效益,和四條隨時喊停的權力</a:t>
-            </a:r>
-          </a:p>
-        </p:txBody>
-      </p:sp>
-      <p:sp>
-        <p:nvSpPr>
-          <p:cNvPr id="4" name="TextBox 3"/>
-          <p:cNvSpPr txBox="1"/>
-          <p:nvPr/>
-        </p:nvSpPr>
-        <p:spPr>
-          <a:xfrm>
-            <a:off x="658368" y="1298448"/>
-            <a:ext cx="11030407" cy="365760"/>
-          </a:xfrm>
-          <a:prstGeom prst="rect">
-            <a:avLst/>
-          </a:prstGeom>
-          <a:noFill/>
-        </p:spPr>
-        <p:txBody>
-          <a:bodyPr wrap="square" lIns="0" rIns="0" tIns="0" bIns="0" anchor="t">
-            <a:spAutoFit/>
-          </a:bodyPr>
-          <a:lstStyle/>
-          <a:p>
-            <a:pPr algn="l">
-              <a:lnSpc>
-                <a:spcPct val="125000"/>
-              </a:lnSpc>
-            </a:pPr>
-            <a:r>
-              <a:rPr sz="1500" b="0">
-                <a:solidFill>
-                  <a:srgbClr val="6B7885"/>
-                </a:solidFill>
-                <a:latin typeface="Microsoft JhengHei"/>
-              </a:rPr>
-              <a:t>三層 KPI 是效益,四道護欄一票否決;訂不出的目標值寫明由哪道門訂</a:t>
-            </a:r>
-          </a:p>
-        </p:txBody>
-      </p:sp>
-      <p:sp>
-        <p:nvSpPr>
-          <p:cNvPr id="5" name="Rectangle 4"/>
-          <p:cNvSpPr/>
-          <p:nvPr/>
-        </p:nvSpPr>
-        <p:spPr>
-          <a:xfrm>
-            <a:off x="658368" y="1517904"/>
-            <a:ext cx="10874959" cy="32004"/>
-          </a:xfrm>
-          <a:prstGeom prst="rect">
-            <a:avLst/>
-          </a:prstGeom>
-          <a:solidFill>
-            <a:srgbClr val="1F4E79"/>
-          </a:solidFill>
-          <a:ln>
-            <a:noFill/>
-          </a:ln>
-          <a:effectLst/>
-        </p:spPr>
-        <p:style>
-          <a:lnRef idx="1">
-            <a:schemeClr val="accent1"/>
-          </a:lnRef>
-          <a:fillRef idx="3">
-            <a:schemeClr val="accent1"/>
-          </a:fillRef>
-          <a:effectRef idx="2">
-            <a:schemeClr val="accent1"/>
-          </a:effectRef>
-          <a:fontRef idx="minor">
-            <a:schemeClr val="lt1"/>
-          </a:fontRef>
-        </p:style>
-        <p:txBody>
-          <a:bodyPr rtlCol="0" anchor="ctr"/>
-          <a:lstStyle/>
-          <a:p>
-            <a:pPr algn="ctr"/>
-          </a:p>
-        </p:txBody>
-      </p:sp>
-      <p:sp>
-        <p:nvSpPr>
-          <p:cNvPr id="6" name="Rounded Rectangle 5"/>
-          <p:cNvSpPr/>
-          <p:nvPr/>
-        </p:nvSpPr>
-        <p:spPr>
-          <a:xfrm>
-            <a:off x="658368" y="1755648"/>
-            <a:ext cx="10874959" cy="329184"/>
-          </a:xfrm>
-          <a:prstGeom prst="roundRect">
-            <a:avLst>
-              <a:gd name="adj" fmla="val 6000"/>
-            </a:avLst>
-          </a:prstGeom>
-          <a:solidFill>
-            <a:srgbClr val="1F4E79"/>
-          </a:solidFill>
-          <a:ln>
-            <a:noFill/>
-          </a:ln>
-          <a:effectLst/>
-        </p:spPr>
-        <p:style>
-          <a:lnRef idx="1">
-            <a:schemeClr val="accent1"/>
-          </a:lnRef>
-          <a:fillRef idx="3">
-            <a:schemeClr val="accent1"/>
-          </a:fillRef>
-          <a:effectRef idx="2">
-            <a:schemeClr val="accent1"/>
-          </a:effectRef>
-          <a:fontRef idx="minor">
-            <a:schemeClr val="lt1"/>
-          </a:fontRef>
-        </p:style>
-        <p:txBody>
-          <a:bodyPr rtlCol="0" anchor="ctr"/>
-          <a:lstStyle/>
-          <a:p>
-            <a:pPr algn="ctr"/>
-          </a:p>
-        </p:txBody>
-      </p:sp>
-      <p:sp>
-        <p:nvSpPr>
-          <p:cNvPr id="7" name="TextBox 6"/>
-          <p:cNvSpPr txBox="1"/>
-          <p:nvPr/>
-        </p:nvSpPr>
-        <p:spPr>
-          <a:xfrm>
-            <a:off x="841247" y="1755648"/>
-            <a:ext cx="10509199" cy="329184"/>
-          </a:xfrm>
-          <a:prstGeom prst="rect">
-            <a:avLst/>
-          </a:prstGeom>
-          <a:noFill/>
-        </p:spPr>
-        <p:txBody>
-          <a:bodyPr wrap="square" lIns="0" rIns="0" tIns="0" bIns="0" anchor="ctr">
-            <a:spAutoFit/>
-          </a:bodyPr>
-          <a:lstStyle/>
-          <a:p>
-            <a:pPr algn="ctr">
-              <a:lnSpc>
-                <a:spcPct val="125000"/>
-              </a:lnSpc>
-            </a:pPr>
-            <a:r>
-              <a:rPr sz="1700" b="1">
-                <a:solidFill>
-                  <a:srgbClr val="FFFFFF"/>
-                </a:solidFill>
-                <a:latin typeface="Microsoft JhengHei"/>
-              </a:rPr>
-              <a:t>這頁不是外掛的合規章節:護欄任一未達標,上兩層成績一律不採計;否決型是本案決定,非文獻主張</a:t>
-            </a:r>
-          </a:p>
-        </p:txBody>
-      </p:sp>
-      <p:graphicFrame>
-        <p:nvGraphicFramePr>
-          <p:cNvPr id="8" name="Table 7"/>
-          <p:cNvGraphicFramePr>
-            <a:graphicFrameLocks noGrp="1"/>
-          </p:cNvGraphicFramePr>
-          <p:nvPr/>
-        </p:nvGraphicFramePr>
-        <p:xfrm>
-          <a:off x="658368" y="2212848"/>
-          <a:ext cx="10874957" cy="2670048"/>
-        </p:xfrm>
-        <a:graphic>
-          <a:graphicData uri="http://schemas.openxmlformats.org/drawingml/2006/table">
-            <a:tbl>
-              <a:tblPr firstRow="1">
-                <a:tableStyleId>{5C22544A-7EE6-4342-B048-85BDC9FD1C3A}</a:tableStyleId>
-              </a:tblPr>
-              <a:tblGrid>
-                <a:gridCol w="3262487"/>
-                <a:gridCol w="3806235"/>
-                <a:gridCol w="3806235"/>
-              </a:tblGrid>
-              <a:tr h="329184">
-                <a:tc>
-                  <a:txBody>
-                    <a:bodyPr/>
-                    <a:lstStyle/>
-                    <a:p>
-                      <a:pPr algn="l"/>
-                      <a:r>
-                        <a:rPr sz="1200" b="1">
-                          <a:solidFill>
-                            <a:srgbClr val="FFFFFF"/>
-                          </a:solidFill>
-                          <a:latin typeface="Microsoft JhengHei"/>
-                        </a:rPr>
-                        <a:t/>
-                      </a:r>
-                    </a:p>
-                  </a:txBody>
-                  <a:tcPr marL="45720" marR="45720" marT="18288" marB="18288" anchor="ctr">
-                    <a:solidFill>
-                      <a:srgbClr val="1F4E79"/>
-                    </a:solidFill>
-                  </a:tcPr>
-                </a:tc>
-                <a:tc>
-                  <a:txBody>
-                    <a:bodyPr/>
-                    <a:lstStyle/>
-                    <a:p>
-                      <a:pPr algn="ctr"/>
-                      <a:r>
-                        <a:rPr sz="1200" b="1">
-                          <a:solidFill>
-                            <a:srgbClr val="FFFFFF"/>
-                          </a:solidFill>
-                          <a:latin typeface="Microsoft JhengHei"/>
-                        </a:rPr>
-                        <a:t>指標(層別)</a:t>
-                      </a:r>
-                    </a:p>
-                  </a:txBody>
-                  <a:tcPr marL="45720" marR="45720" marT="18288" marB="18288" anchor="ctr">
-                    <a:solidFill>
-                      <a:srgbClr val="1F4E79"/>
-                    </a:solidFill>
-                  </a:tcPr>
-                </a:tc>
-                <a:tc>
-                  <a:txBody>
-                    <a:bodyPr/>
-                    <a:lstStyle/>
-                    <a:p>
-                      <a:pPr algn="ctr"/>
-                      <a:r>
-                        <a:rPr sz="1200" b="1">
-                          <a:solidFill>
-                            <a:srgbClr val="FFFFFF"/>
-                          </a:solidFill>
-                          <a:latin typeface="Microsoft JhengHei"/>
-                        </a:rPr>
-                        <a:t>今天的基準 · 母體</a:t>
-                      </a:r>
-                    </a:p>
-                  </a:txBody>
-                  <a:tcPr marL="45720" marR="45720" marT="18288" marB="18288" anchor="ctr">
-                    <a:solidFill>
-                      <a:srgbClr val="1F4E79"/>
-                    </a:solidFill>
-                  </a:tcPr>
-                </a:tc>
-              </a:tr>
-              <a:tr h="292608">
-                <a:tc>
-                  <a:txBody>
-                    <a:bodyPr/>
-                    <a:lstStyle/>
-                    <a:p>
-                      <a:pPr algn="l"/>
-                      <a:r>
-                        <a:rPr sz="1200" b="1">
-                          <a:solidFill>
-                            <a:srgbClr val="C00000"/>
-                          </a:solidFill>
-                          <a:latin typeface="Microsoft JhengHei"/>
-                        </a:rPr>
-                        <a:t>業務① 爭議回覆時效｜主價值指標</a:t>
-                      </a:r>
-                    </a:p>
-                  </a:txBody>
-                  <a:tcPr marL="45720" marR="45720" marT="18288" marB="18288" anchor="ctr">
-                    <a:solidFill>
-                      <a:srgbClr val="FBEFEF"/>
-                    </a:solidFill>
-                  </a:tcPr>
-                </a:tc>
-                <a:tc>
-                  <a:txBody>
-                    <a:bodyPr/>
-                    <a:lstStyle/>
-                    <a:p>
-                      <a:pPr algn="ctr"/>
-                      <a:r>
-                        <a:rPr sz="1200" b="0">
-                          <a:solidFill>
-                            <a:srgbClr val="C00000"/>
-                          </a:solidFill>
-                          <a:latin typeface="Microsoft JhengHei"/>
-                        </a:rPr>
-                        <a:t>全鏈路 2–5 天｜估計非量測</a:t>
-                      </a:r>
-                    </a:p>
-                  </a:txBody>
-                  <a:tcPr marL="45720" marR="45720" marT="18288" marB="18288" anchor="ctr">
-                    <a:solidFill>
-                      <a:srgbClr val="FBEFEF"/>
-                    </a:solidFill>
-                  </a:tcPr>
-                </a:tc>
-                <a:tc>
-                  <a:txBody>
-                    <a:bodyPr/>
-                    <a:lstStyle/>
-                    <a:p>
-                      <a:pPr algn="ctr"/>
-                      <a:r>
-                        <a:rPr sz="1200" b="0">
-                          <a:solidFill>
-                            <a:srgbClr val="C00000"/>
-                          </a:solidFill>
-                          <a:latin typeface="Microsoft JhengHei"/>
-                        </a:rPr>
-                        <a:t>2 天內｜提案目標 未簽協議</a:t>
-                      </a:r>
-                    </a:p>
-                  </a:txBody>
-                  <a:tcPr marL="45720" marR="45720" marT="18288" marB="18288" anchor="ctr">
-                    <a:solidFill>
-                      <a:srgbClr val="FBEFEF"/>
-                    </a:solidFill>
-                  </a:tcPr>
-                </a:tc>
-              </a:tr>
-              <a:tr h="292608">
-                <a:tc>
-                  <a:txBody>
-                    <a:bodyPr/>
-                    <a:lstStyle/>
-                    <a:p>
-                      <a:pPr algn="l"/>
-                      <a:r>
-                        <a:rPr sz="1200" b="0">
-                          <a:solidFill>
-                            <a:srgbClr val="16212E"/>
-                          </a:solidFill>
-                          <a:latin typeface="Microsoft JhengHei"/>
-                        </a:rPr>
-                        <a:t>業務② 人工驗證客戶涵蓋率</a:t>
-                      </a:r>
-                    </a:p>
-                  </a:txBody>
-                  <a:tcPr marL="45720" marR="45720" marT="18288" marB="18288" anchor="ctr">
-                    <a:solidFill>
-                      <a:srgbClr val="FFFFFF"/>
-                    </a:solidFill>
-                  </a:tcPr>
-                </a:tc>
-                <a:tc>
-                  <a:txBody>
-                    <a:bodyPr/>
-                    <a:lstStyle/>
-                    <a:p>
-                      <a:pPr algn="ctr"/>
-                      <a:r>
-                        <a:rPr sz="1200" b="0">
-                          <a:solidFill>
-                            <a:srgbClr val="6B7885"/>
-                          </a:solidFill>
-                          <a:latin typeface="Microsoft JhengHei"/>
-                        </a:rPr>
-                        <a:t>配給制｜無紀錄 · W6 建立</a:t>
-                      </a:r>
-                    </a:p>
-                  </a:txBody>
-                  <a:tcPr marL="45720" marR="45720" marT="18288" marB="18288" anchor="ctr">
-                    <a:solidFill>
-                      <a:srgbClr val="FFFFFF"/>
-                    </a:solidFill>
-                  </a:tcPr>
-                </a:tc>
-                <a:tc>
-                  <a:txBody>
-                    <a:bodyPr/>
-                    <a:lstStyle/>
-                    <a:p>
-                      <a:pPr algn="ctr"/>
-                      <a:r>
-                        <a:rPr sz="1200" b="0">
-                          <a:solidFill>
-                            <a:srgbClr val="6B7885"/>
-                          </a:solidFill>
-                          <a:latin typeface="Microsoft JhengHei"/>
-                        </a:rPr>
-                        <a:t>期內 100% → 移交後約 15%</a:t>
-                      </a:r>
-                    </a:p>
-                  </a:txBody>
-                  <a:tcPr marL="45720" marR="45720" marT="18288" marB="18288" anchor="ctr">
-                    <a:solidFill>
-                      <a:srgbClr val="FFFFFF"/>
-                    </a:solidFill>
-                  </a:tcPr>
-                </a:tc>
-              </a:tr>
-              <a:tr h="292608">
-                <a:tc>
-                  <a:txBody>
-                    <a:bodyPr/>
-                    <a:lstStyle/>
-                    <a:p>
-                      <a:pPr algn="l"/>
-                      <a:r>
-                        <a:rPr sz="1200" b="0">
-                          <a:solidFill>
-                            <a:srgbClr val="16212E"/>
-                          </a:solidFill>
-                          <a:latin typeface="Microsoft JhengHei"/>
-                        </a:rPr>
-                        <a:t>業務③ 每日事件量上限</a:t>
-                      </a:r>
-                    </a:p>
-                  </a:txBody>
-                  <a:tcPr marL="45720" marR="45720" marT="18288" marB="18288" anchor="ctr">
-                    <a:solidFill>
-                      <a:srgbClr val="FFFFFF"/>
-                    </a:solidFill>
-                  </a:tcPr>
-                </a:tc>
-                <a:tc>
-                  <a:txBody>
-                    <a:bodyPr/>
-                    <a:lstStyle/>
-                    <a:p>
-                      <a:pPr algn="ctr"/>
-                      <a:r>
-                        <a:rPr sz="1200" b="0">
-                          <a:solidFill>
-                            <a:srgbClr val="6B7885"/>
-                          </a:solidFill>
-                          <a:latin typeface="Microsoft JhengHei"/>
-                        </a:rPr>
-                        <a:t>單一大型車隊約 3,000 筆/天</a:t>
-                      </a:r>
-                    </a:p>
-                  </a:txBody>
-                  <a:tcPr marL="45720" marR="45720" marT="18288" marB="18288" anchor="ctr">
-                    <a:solidFill>
-                      <a:srgbClr val="FFFFFF"/>
-                    </a:solidFill>
-                  </a:tcPr>
-                </a:tc>
-                <a:tc>
-                  <a:txBody>
-                    <a:bodyPr/>
-                    <a:lstStyle/>
-                    <a:p>
-                      <a:pPr algn="ctr"/>
-                      <a:r>
-                        <a:rPr sz="1200" b="0">
-                          <a:solidFill>
-                            <a:srgbClr val="6B7885"/>
-                          </a:solidFill>
-                          <a:latin typeface="Microsoft JhengHei"/>
-                        </a:rPr>
-                        <a:t>全客戶 13,000+ 筆/天(提案)</a:t>
-                      </a:r>
-                    </a:p>
-                  </a:txBody>
-                  <a:tcPr marL="45720" marR="45720" marT="18288" marB="18288" anchor="ctr">
-                    <a:solidFill>
-                      <a:srgbClr val="FFFFFF"/>
-                    </a:solidFill>
-                  </a:tcPr>
-                </a:tc>
-              </a:tr>
-              <a:tr h="292608">
-                <a:tc>
-                  <a:txBody>
-                    <a:bodyPr/>
-                    <a:lstStyle/>
-                    <a:p>
-                      <a:pPr algn="l"/>
-                      <a:r>
-                        <a:rPr sz="1200" b="1">
-                          <a:solidFill>
-                            <a:srgbClr val="C00000"/>
-                          </a:solidFill>
-                          <a:latin typeface="Microsoft JhengHei"/>
-                        </a:rPr>
-                        <a:t>業務④ 可避免年度增聘成本</a:t>
-                      </a:r>
-                    </a:p>
-                  </a:txBody>
-                  <a:tcPr marL="45720" marR="45720" marT="18288" marB="18288" anchor="ctr">
-                    <a:solidFill>
-                      <a:srgbClr val="FBEFEF"/>
-                    </a:solidFill>
-                  </a:tcPr>
-                </a:tc>
-                <a:tc>
-                  <a:txBody>
-                    <a:bodyPr/>
-                    <a:lstStyle/>
-                    <a:p>
-                      <a:pPr algn="ctr"/>
-                      <a:r>
-                        <a:rPr sz="1200" b="0">
-                          <a:solidFill>
-                            <a:srgbClr val="C00000"/>
-                          </a:solidFill>
-                          <a:latin typeface="Microsoft JhengHei"/>
-                        </a:rPr>
-                        <a:t>不做本案 17–24 人｜現有5人</a:t>
-                      </a:r>
-                    </a:p>
-                  </a:txBody>
-                  <a:tcPr marL="45720" marR="45720" marT="18288" marB="18288" anchor="ctr">
-                    <a:solidFill>
-                      <a:srgbClr val="FBEFEF"/>
-                    </a:solidFill>
-                  </a:tcPr>
-                </a:tc>
-                <a:tc>
-                  <a:txBody>
-                    <a:bodyPr/>
-                    <a:lstStyle/>
-                    <a:p>
-                      <a:pPr algn="ctr"/>
-                      <a:r>
-                        <a:rPr sz="1200" b="0">
-                          <a:solidFill>
-                            <a:srgbClr val="C00000"/>
-                          </a:solidFill>
-                          <a:latin typeface="Microsoft JhengHei"/>
-                        </a:rPr>
-                        <a:t>省5–13人≈NT$520–1,521萬</a:t>
-                      </a:r>
-                    </a:p>
-                  </a:txBody>
-                  <a:tcPr marL="45720" marR="45720" marT="18288" marB="18288" anchor="ctr">
-                    <a:solidFill>
-                      <a:srgbClr val="FBEFEF"/>
-                    </a:solidFill>
-                  </a:tcPr>
-                </a:tc>
-              </a:tr>
-              <a:tr h="292608">
-                <a:tc>
-                  <a:txBody>
-                    <a:bodyPr/>
-                    <a:lstStyle/>
-                    <a:p>
-                      <a:pPr algn="l"/>
-                      <a:r>
-                        <a:rPr sz="1200" b="0">
-                          <a:solidFill>
-                            <a:srgbClr val="16212E"/>
-                          </a:solidFill>
-                          <a:latin typeface="Microsoft JhengHei"/>
-                        </a:rPr>
-                        <a:t>營運⑤⑥ 兩條工作流每筆工時</a:t>
-                      </a:r>
-                    </a:p>
-                  </a:txBody>
-                  <a:tcPr marL="45720" marR="45720" marT="18288" marB="18288" anchor="ctr">
-                    <a:solidFill>
-                      <a:srgbClr val="FFFFFF"/>
-                    </a:solidFill>
-                  </a:tcPr>
-                </a:tc>
-                <a:tc>
-                  <a:txBody>
-                    <a:bodyPr/>
-                    <a:lstStyle/>
-                    <a:p>
-                      <a:pPr algn="ctr"/>
-                      <a:r>
-                        <a:rPr sz="1200" b="0">
-                          <a:solidFill>
-                            <a:srgbClr val="6B7885"/>
-                          </a:solidFill>
-                          <a:latin typeface="Microsoft JhengHei"/>
-                        </a:rPr>
-                        <a:t>批次20秒估·判讀5.25分單批</a:t>
-                      </a:r>
-                    </a:p>
-                  </a:txBody>
-                  <a:tcPr marL="45720" marR="45720" marT="18288" marB="18288" anchor="ctr">
-                    <a:solidFill>
-                      <a:srgbClr val="FFFFFF"/>
-                    </a:solidFill>
-                  </a:tcPr>
-                </a:tc>
-                <a:tc>
-                  <a:txBody>
-                    <a:bodyPr/>
-                    <a:lstStyle/>
-                    <a:p>
-                      <a:pPr algn="ctr"/>
-                      <a:r>
-                        <a:rPr sz="1200" b="0">
-                          <a:solidFill>
-                            <a:srgbClr val="6B7885"/>
-                          </a:solidFill>
-                          <a:latin typeface="Microsoft JhengHei"/>
-                        </a:rPr>
-                        <a:t>W6 交正式量測｜G1 訂目標</a:t>
-                      </a:r>
-                    </a:p>
-                  </a:txBody>
-                  <a:tcPr marL="45720" marR="45720" marT="18288" marB="18288" anchor="ctr">
-                    <a:solidFill>
-                      <a:srgbClr val="FFFFFF"/>
-                    </a:solidFill>
-                  </a:tcPr>
-                </a:tc>
-              </a:tr>
-              <a:tr h="292608">
-                <a:tc>
-                  <a:txBody>
-                    <a:bodyPr/>
-                    <a:lstStyle/>
-                    <a:p>
-                      <a:pPr algn="l"/>
-                      <a:r>
-                        <a:rPr sz="1200" b="0">
-                          <a:solidFill>
-                            <a:srgbClr val="16212E"/>
-                          </a:solidFill>
-                          <a:latin typeface="Microsoft JhengHei"/>
-                        </a:rPr>
-                        <a:t>營運⑦ ADAS 行車輔助誤報率</a:t>
-                      </a:r>
-                    </a:p>
-                  </a:txBody>
-                  <a:tcPr marL="45720" marR="45720" marT="18288" marB="18288" anchor="ctr">
-                    <a:solidFill>
-                      <a:srgbClr val="FFFFFF"/>
-                    </a:solidFill>
-                  </a:tcPr>
-                </a:tc>
-                <a:tc>
-                  <a:txBody>
-                    <a:bodyPr/>
-                    <a:lstStyle/>
-                    <a:p>
-                      <a:pPr algn="ctr"/>
-                      <a:r>
-                        <a:rPr sz="1200" b="0">
-                          <a:solidFill>
-                            <a:srgbClr val="6B7885"/>
-                          </a:solidFill>
-                          <a:latin typeface="Microsoft JhengHei"/>
-                        </a:rPr>
-                        <a:t>單月樣本 104/1,029≈10.1%</a:t>
-                      </a:r>
-                    </a:p>
-                  </a:txBody>
-                  <a:tcPr marL="45720" marR="45720" marT="18288" marB="18288" anchor="ctr">
-                    <a:solidFill>
-                      <a:srgbClr val="FFFFFF"/>
-                    </a:solidFill>
-                  </a:tcPr>
-                </a:tc>
-                <a:tc>
-                  <a:txBody>
-                    <a:bodyPr/>
-                    <a:lstStyle/>
-                    <a:p>
-                      <a:pPr algn="ctr"/>
-                      <a:r>
-                        <a:rPr sz="1200" b="0">
-                          <a:solidFill>
-                            <a:srgbClr val="6B7885"/>
-                          </a:solidFill>
-                          <a:latin typeface="Microsoft JhengHei"/>
-                        </a:rPr>
-                        <a:t>→7%以下(提案)｜人機軌W12判</a:t>
-                      </a:r>
-                    </a:p>
-                  </a:txBody>
-                  <a:tcPr marL="45720" marR="45720" marT="18288" marB="18288" anchor="ctr">
-                    <a:solidFill>
-                      <a:srgbClr val="FFFFFF"/>
-                    </a:solidFill>
-                  </a:tcPr>
-                </a:tc>
-              </a:tr>
-              <a:tr h="292608">
-                <a:tc>
-                  <a:txBody>
-                    <a:bodyPr/>
-                    <a:lstStyle/>
-                    <a:p>
-                      <a:pPr algn="l"/>
-                      <a:r>
-                        <a:rPr sz="1200" b="0">
-                          <a:solidFill>
-                            <a:srgbClr val="16212E"/>
-                          </a:solidFill>
-                          <a:latin typeface="Microsoft JhengHei"/>
-                        </a:rPr>
-                        <a:t>營運⑧ 客戶回頭標記率(越低越好)</a:t>
-                      </a:r>
-                    </a:p>
-                  </a:txBody>
-                  <a:tcPr marL="45720" marR="45720" marT="18288" marB="18288" anchor="ctr">
-                    <a:solidFill>
-                      <a:srgbClr val="FFFFFF"/>
-                    </a:solidFill>
-                  </a:tcPr>
-                </a:tc>
-                <a:tc>
-                  <a:txBody>
-                    <a:bodyPr/>
-                    <a:lstStyle/>
-                    <a:p>
-                      <a:pPr algn="ctr"/>
-                      <a:r>
-                        <a:rPr sz="1200" b="0">
-                          <a:solidFill>
-                            <a:srgbClr val="6B7885"/>
-                          </a:solidFill>
-                          <a:latin typeface="Microsoft JhengHei"/>
-                        </a:rPr>
-                        <a:t>5–10%｜駕駛無效警示代理</a:t>
-                      </a:r>
-                    </a:p>
-                  </a:txBody>
-                  <a:tcPr marL="45720" marR="45720" marT="18288" marB="18288" anchor="ctr">
-                    <a:solidFill>
-                      <a:srgbClr val="FFFFFF"/>
-                    </a:solidFill>
-                  </a:tcPr>
-                </a:tc>
-                <a:tc>
-                  <a:txBody>
-                    <a:bodyPr/>
-                    <a:lstStyle/>
-                    <a:p>
-                      <a:pPr algn="ctr"/>
-                      <a:r>
-                        <a:rPr sz="1200" b="0">
-                          <a:solidFill>
-                            <a:srgbClr val="6B7885"/>
-                          </a:solidFill>
-                          <a:latin typeface="Microsoft JhengHei"/>
-                        </a:rPr>
-                        <a:t>降至 5% 以下(提案)</a:t>
-                      </a:r>
-                    </a:p>
-                  </a:txBody>
-                  <a:tcPr marL="45720" marR="45720" marT="18288" marB="18288" anchor="ctr">
-                    <a:solidFill>
-                      <a:srgbClr val="FFFFFF"/>
-                    </a:solidFill>
-                  </a:tcPr>
-                </a:tc>
-              </a:tr>
-              <a:tr h="292608">
-                <a:tc>
-                  <a:txBody>
-                    <a:bodyPr/>
-                    <a:lstStyle/>
-                    <a:p>
-                      <a:pPr algn="l"/>
-                      <a:r>
-                        <a:rPr sz="1200" b="0">
-                          <a:solidFill>
-                            <a:srgbClr val="16212E"/>
-                          </a:solidFill>
-                          <a:latin typeface="Microsoft JhengHei"/>
-                        </a:rPr>
-                        <a:t>營運⑨ 尖峰徵調研發人時</a:t>
-                      </a:r>
-                    </a:p>
-                  </a:txBody>
-                  <a:tcPr marL="45720" marR="45720" marT="18288" marB="18288" anchor="ctr">
-                    <a:solidFill>
-                      <a:srgbClr val="FFFFFF"/>
-                    </a:solidFill>
-                  </a:tcPr>
-                </a:tc>
-                <a:tc>
-                  <a:txBody>
-                    <a:bodyPr/>
-                    <a:lstStyle/>
-                    <a:p>
-                      <a:pPr algn="ctr"/>
-                      <a:r>
-                        <a:rPr sz="1200" b="0">
-                          <a:solidFill>
-                            <a:srgbClr val="6B7885"/>
-                          </a:solidFill>
-                          <a:latin typeface="Microsoft JhengHei"/>
-                        </a:rPr>
-                        <a:t>徵調 7 位研發｜非常態編制</a:t>
-                      </a:r>
-                    </a:p>
-                  </a:txBody>
-                  <a:tcPr marL="45720" marR="45720" marT="18288" marB="18288" anchor="ctr">
-                    <a:solidFill>
-                      <a:srgbClr val="FFFFFF"/>
-                    </a:solidFill>
-                  </a:tcPr>
-                </a:tc>
-                <a:tc>
-                  <a:txBody>
-                    <a:bodyPr/>
-                    <a:lstStyle/>
-                    <a:p>
-                      <a:pPr algn="ctr"/>
-                      <a:r>
-                        <a:rPr sz="1200" b="0">
-                          <a:solidFill>
-                            <a:srgbClr val="6B7885"/>
-                          </a:solidFill>
-                          <a:latin typeface="Microsoft JhengHei"/>
-                        </a:rPr>
-                        <a:t>期內建量測基準｜G2 訂目標</a:t>
-                      </a:r>
-                    </a:p>
-                  </a:txBody>
-                  <a:tcPr marL="45720" marR="45720" marT="18288" marB="18288" anchor="ctr">
-                    <a:solidFill>
-                      <a:srgbClr val="FFFFFF"/>
-                    </a:solidFill>
-                  </a:tcPr>
-                </a:tc>
-              </a:tr>
-            </a:tbl>
-          </a:graphicData>
-        </a:graphic>
-      </p:graphicFrame>
-      <p:graphicFrame>
-        <p:nvGraphicFramePr>
-          <p:cNvPr id="9" name="Table 8"/>
-          <p:cNvGraphicFramePr>
-            <a:graphicFrameLocks noGrp="1"/>
-          </p:cNvGraphicFramePr>
-          <p:nvPr/>
-        </p:nvGraphicFramePr>
-        <p:xfrm>
-          <a:off x="658368" y="5010912"/>
-          <a:ext cx="9658805" cy="1499616"/>
-        </p:xfrm>
-        <a:graphic>
-          <a:graphicData uri="http://schemas.openxmlformats.org/drawingml/2006/table">
-            <a:tbl>
-              <a:tblPr firstRow="1">
-                <a:tableStyleId>{5C22544A-7EE6-4342-B048-85BDC9FD1C3A}</a:tableStyleId>
-              </a:tblPr>
-              <a:tblGrid>
-                <a:gridCol w="2897642"/>
-                <a:gridCol w="2253721"/>
-                <a:gridCol w="2253721"/>
-                <a:gridCol w="2253721"/>
-              </a:tblGrid>
-              <a:tr h="329184">
-                <a:tc>
-                  <a:txBody>
-                    <a:bodyPr/>
-                    <a:lstStyle/>
-                    <a:p>
-                      <a:pPr algn="l"/>
-                      <a:r>
-                        <a:rPr sz="1200" b="1">
-                          <a:solidFill>
-                            <a:srgbClr val="FFFFFF"/>
-                          </a:solidFill>
-                          <a:latin typeface="Microsoft JhengHei"/>
-                        </a:rPr>
-                        <a:t/>
-                      </a:r>
-                    </a:p>
-                  </a:txBody>
-                  <a:tcPr marL="45720" marR="45720" marT="18288" marB="18288" anchor="ctr">
-                    <a:solidFill>
-                      <a:srgbClr val="1F4E79"/>
-                    </a:solidFill>
-                  </a:tcPr>
-                </a:tc>
-                <a:tc>
-                  <a:txBody>
-                    <a:bodyPr/>
-                    <a:lstStyle/>
-                    <a:p>
-                      <a:pPr algn="ctr"/>
-                      <a:r>
-                        <a:rPr sz="1200" b="1">
-                          <a:solidFill>
-                            <a:srgbClr val="FFFFFF"/>
-                          </a:solidFill>
-                          <a:latin typeface="Microsoft JhengHei"/>
-                        </a:rPr>
-                        <a:t>護欄層｜否決型 · 任一未達標不移交</a:t>
-                      </a:r>
-                    </a:p>
-                  </a:txBody>
-                  <a:tcPr marL="45720" marR="45720" marT="18288" marB="18288" anchor="ctr">
-                    <a:solidFill>
-                      <a:srgbClr val="1F4E79"/>
-                    </a:solidFill>
-                  </a:tcPr>
-                </a:tc>
-                <a:tc>
-                  <a:txBody>
-                    <a:bodyPr/>
-                    <a:lstStyle/>
-                    <a:p>
-                      <a:pPr algn="ctr"/>
-                      <a:r>
-                        <a:rPr sz="1200" b="1">
-                          <a:solidFill>
-                            <a:srgbClr val="FFFFFF"/>
-                          </a:solidFill>
-                          <a:latin typeface="Microsoft JhengHei"/>
-                        </a:rPr>
-                        <a:t>今天</a:t>
-                      </a:r>
-                    </a:p>
-                  </a:txBody>
-                  <a:tcPr marL="45720" marR="45720" marT="18288" marB="18288" anchor="ctr">
-                    <a:solidFill>
-                      <a:srgbClr val="1F4E79"/>
-                    </a:solidFill>
-                  </a:tcPr>
-                </a:tc>
-                <a:tc>
-                  <a:txBody>
-                    <a:bodyPr/>
-                    <a:lstStyle/>
-                    <a:p>
-                      <a:pPr algn="ctr"/>
-                      <a:r>
-                        <a:rPr sz="1200" b="1">
-                          <a:solidFill>
-                            <a:srgbClr val="FFFFFF"/>
-                          </a:solidFill>
-                          <a:latin typeface="Microsoft JhengHei"/>
-                        </a:rPr>
-                        <a:t>交什麼 · 第幾週</a:t>
-                      </a:r>
-                    </a:p>
-                  </a:txBody>
-                  <a:tcPr marL="45720" marR="45720" marT="18288" marB="18288" anchor="ctr">
-                    <a:solidFill>
-                      <a:srgbClr val="1F4E79"/>
-                    </a:solidFill>
-                  </a:tcPr>
-                </a:tc>
-              </a:tr>
-              <a:tr h="292608">
-                <a:tc>
-                  <a:txBody>
-                    <a:bodyPr/>
-                    <a:lstStyle/>
-                    <a:p>
-                      <a:pPr algn="l"/>
-                      <a:r>
-                        <a:rPr sz="1200" b="0">
-                          <a:solidFill>
-                            <a:srgbClr val="16212E"/>
-                          </a:solidFill>
-                          <a:latin typeface="Microsoft JhengHei"/>
-                        </a:rPr>
-                        <a:t>⑩ 漏放率</a:t>
-                      </a:r>
-                    </a:p>
-                  </a:txBody>
-                  <a:tcPr marL="45720" marR="45720" marT="18288" marB="18288" anchor="ctr">
-                    <a:solidFill>
-                      <a:srgbClr val="FFFFFF"/>
-                    </a:solidFill>
-                  </a:tcPr>
-                </a:tc>
-                <a:tc>
-                  <a:txBody>
-                    <a:bodyPr/>
-                    <a:lstStyle/>
-                    <a:p>
-                      <a:pPr algn="ctr"/>
-                      <a:r>
-                        <a:rPr sz="1200" b="0">
-                          <a:solidFill>
-                            <a:srgbClr val="6B7885"/>
-                          </a:solidFill>
-                          <a:latin typeface="Microsoft JhengHei"/>
-                        </a:rPr>
-                        <a:t>不存在｜39 筆·下限</a:t>
-                      </a:r>
-                    </a:p>
-                  </a:txBody>
-                  <a:tcPr marL="45720" marR="45720" marT="18288" marB="18288" anchor="ctr">
-                    <a:solidFill>
-                      <a:srgbClr val="FFFFFF"/>
-                    </a:solidFill>
-                  </a:tcPr>
-                </a:tc>
-                <a:tc>
-                  <a:txBody>
-                    <a:bodyPr/>
-                    <a:lstStyle/>
-                    <a:p>
-                      <a:pPr algn="ctr"/>
-                      <a:r>
-                        <a:rPr sz="1200" b="0">
-                          <a:solidFill>
-                            <a:srgbClr val="6B7885"/>
-                          </a:solidFill>
-                          <a:latin typeface="Microsoft JhengHei"/>
-                        </a:rPr>
-                        <a:t>W6 點估計｜95% CI</a:t>
-                      </a:r>
-                    </a:p>
-                  </a:txBody>
-                  <a:tcPr marL="45720" marR="45720" marT="18288" marB="18288" anchor="ctr">
-                    <a:solidFill>
-                      <a:srgbClr val="FFFFFF"/>
-                    </a:solidFill>
-                  </a:tcPr>
-                </a:tc>
-                <a:tc>
-                  <a:txBody>
-                    <a:bodyPr/>
-                    <a:lstStyle/>
-                    <a:p>
-                      <a:pPr algn="ctr"/>
-                      <a:r>
-                        <a:rPr sz="1200" b="0">
-                          <a:solidFill>
-                            <a:srgbClr val="6B7885"/>
-                          </a:solidFill>
-                          <a:latin typeface="Microsoft JhengHei"/>
-                        </a:rPr>
-                        <a:t>否決 G1｜技術負責人</a:t>
-                      </a:r>
-                    </a:p>
-                  </a:txBody>
-                  <a:tcPr marL="45720" marR="45720" marT="18288" marB="18288" anchor="ctr">
-                    <a:solidFill>
-                      <a:srgbClr val="FFFFFF"/>
-                    </a:solidFill>
-                  </a:tcPr>
-                </a:tc>
-              </a:tr>
-              <a:tr h="292608">
-                <a:tc>
-                  <a:txBody>
-                    <a:bodyPr/>
-                    <a:lstStyle/>
-                    <a:p>
-                      <a:pPr algn="l"/>
-                      <a:r>
-                        <a:rPr sz="1200" b="0">
-                          <a:solidFill>
-                            <a:srgbClr val="16212E"/>
-                          </a:solidFill>
-                          <a:latin typeface="Microsoft JhengHei"/>
-                        </a:rPr>
-                        <a:t>⑪ 複核者一致性</a:t>
-                      </a:r>
-                    </a:p>
-                  </a:txBody>
-                  <a:tcPr marL="45720" marR="45720" marT="18288" marB="18288" anchor="ctr">
-                    <a:solidFill>
-                      <a:srgbClr val="FFFFFF"/>
-                    </a:solidFill>
-                  </a:tcPr>
-                </a:tc>
-                <a:tc>
-                  <a:txBody>
-                    <a:bodyPr/>
-                    <a:lstStyle/>
-                    <a:p>
-                      <a:pPr algn="ctr"/>
-                      <a:r>
-                        <a:rPr sz="1200" b="0">
-                          <a:solidFill>
-                            <a:srgbClr val="6B7885"/>
-                          </a:solidFill>
-                          <a:latin typeface="Microsoft JhengHei"/>
-                        </a:rPr>
-                        <a:t>現況未量測</a:t>
-                      </a:r>
-                    </a:p>
-                  </a:txBody>
-                  <a:tcPr marL="45720" marR="45720" marT="18288" marB="18288" anchor="ctr">
-                    <a:solidFill>
-                      <a:srgbClr val="FFFFFF"/>
-                    </a:solidFill>
-                  </a:tcPr>
-                </a:tc>
-                <a:tc>
-                  <a:txBody>
-                    <a:bodyPr/>
-                    <a:lstStyle/>
-                    <a:p>
-                      <a:pPr algn="ctr"/>
-                      <a:r>
-                        <a:rPr sz="1200" b="0">
-                          <a:solidFill>
-                            <a:srgbClr val="6B7885"/>
-                          </a:solidFill>
-                          <a:latin typeface="Microsoft JhengHei"/>
-                        </a:rPr>
-                        <a:t>W10 前基線｜目標 G2</a:t>
-                      </a:r>
-                    </a:p>
-                  </a:txBody>
-                  <a:tcPr marL="45720" marR="45720" marT="18288" marB="18288" anchor="ctr">
-                    <a:solidFill>
-                      <a:srgbClr val="FFFFFF"/>
-                    </a:solidFill>
-                  </a:tcPr>
-                </a:tc>
-                <a:tc>
-                  <a:txBody>
-                    <a:bodyPr/>
-                    <a:lstStyle/>
-                    <a:p>
-                      <a:pPr algn="ctr"/>
-                      <a:r>
-                        <a:rPr sz="1200" b="0">
-                          <a:solidFill>
-                            <a:srgbClr val="6B7885"/>
-                          </a:solidFill>
-                          <a:latin typeface="Microsoft JhengHei"/>
-                        </a:rPr>
-                        <a:t>否決G2·複核營運主管</a:t>
-                      </a:r>
-                    </a:p>
-                  </a:txBody>
-                  <a:tcPr marL="45720" marR="45720" marT="18288" marB="18288" anchor="ctr">
-                    <a:solidFill>
-                      <a:srgbClr val="FFFFFF"/>
-                    </a:solidFill>
-                  </a:tcPr>
-                </a:tc>
-              </a:tr>
-              <a:tr h="292608">
-                <a:tc>
-                  <a:txBody>
-                    <a:bodyPr/>
-                    <a:lstStyle/>
-                    <a:p>
-                      <a:pPr algn="l"/>
-                      <a:r>
-                        <a:rPr sz="1200" b="0">
-                          <a:solidFill>
-                            <a:srgbClr val="16212E"/>
-                          </a:solidFill>
-                          <a:latin typeface="Microsoft JhengHei"/>
-                        </a:rPr>
-                        <a:t>⑫ 訓練資料可追溯率</a:t>
-                      </a:r>
-                    </a:p>
-                  </a:txBody>
-                  <a:tcPr marL="45720" marR="45720" marT="18288" marB="18288" anchor="ctr">
-                    <a:solidFill>
-                      <a:srgbClr val="FFFFFF"/>
-                    </a:solidFill>
-                  </a:tcPr>
-                </a:tc>
-                <a:tc>
-                  <a:txBody>
-                    <a:bodyPr/>
-                    <a:lstStyle/>
-                    <a:p>
-                      <a:pPr algn="ctr"/>
-                      <a:r>
-                        <a:rPr sz="1200" b="0">
-                          <a:solidFill>
-                            <a:srgbClr val="6B7885"/>
-                          </a:solidFill>
-                          <a:latin typeface="Microsoft JhengHei"/>
-                        </a:rPr>
-                        <a:t>0%</a:t>
-                      </a:r>
-                    </a:p>
-                  </a:txBody>
-                  <a:tcPr marL="45720" marR="45720" marT="18288" marB="18288" anchor="ctr">
-                    <a:solidFill>
-                      <a:srgbClr val="FFFFFF"/>
-                    </a:solidFill>
-                  </a:tcPr>
-                </a:tc>
-                <a:tc>
-                  <a:txBody>
-                    <a:bodyPr/>
-                    <a:lstStyle/>
-                    <a:p>
-                      <a:pPr algn="ctr"/>
-                      <a:r>
-                        <a:rPr sz="1200" b="0">
-                          <a:solidFill>
-                            <a:srgbClr val="6B7885"/>
-                          </a:solidFill>
-                          <a:latin typeface="Microsoft JhengHei"/>
-                        </a:rPr>
-                        <a:t>100%,無中間值</a:t>
-                      </a:r>
-                    </a:p>
-                  </a:txBody>
-                  <a:tcPr marL="45720" marR="45720" marT="18288" marB="18288" anchor="ctr">
-                    <a:solidFill>
-                      <a:srgbClr val="FFFFFF"/>
-                    </a:solidFill>
-                  </a:tcPr>
-                </a:tc>
-                <a:tc>
-                  <a:txBody>
-                    <a:bodyPr/>
-                    <a:lstStyle/>
-                    <a:p>
-                      <a:pPr algn="ctr"/>
-                      <a:r>
-                        <a:rPr sz="1200" b="0">
-                          <a:solidFill>
-                            <a:srgbClr val="6B7885"/>
-                          </a:solidFill>
-                          <a:latin typeface="Microsoft JhengHei"/>
-                        </a:rPr>
-                        <a:t>未達 100% 不移交</a:t>
-                      </a:r>
-                    </a:p>
-                  </a:txBody>
-                  <a:tcPr marL="45720" marR="45720" marT="18288" marB="18288" anchor="ctr">
-                    <a:solidFill>
-                      <a:srgbClr val="FFFFFF"/>
-                    </a:solidFill>
-                  </a:tcPr>
-                </a:tc>
-              </a:tr>
-              <a:tr h="292608">
-                <a:tc>
-                  <a:txBody>
-                    <a:bodyPr/>
-                    <a:lstStyle/>
-                    <a:p>
-                      <a:pPr algn="l"/>
-                      <a:r>
-                        <a:rPr sz="1200" b="1">
-                          <a:solidFill>
-                            <a:srgbClr val="C00000"/>
-                          </a:solidFill>
-                          <a:latin typeface="Microsoft JhengHei"/>
-                        </a:rPr>
-                        <a:t>⑬ 漏濾率(本輪新增)</a:t>
-                      </a:r>
-                    </a:p>
-                  </a:txBody>
-                  <a:tcPr marL="45720" marR="45720" marT="18288" marB="18288" anchor="ctr">
-                    <a:solidFill>
-                      <a:srgbClr val="FBEFEF"/>
-                    </a:solidFill>
-                  </a:tcPr>
-                </a:tc>
-                <a:tc>
-                  <a:txBody>
-                    <a:bodyPr/>
-                    <a:lstStyle/>
-                    <a:p>
-                      <a:pPr algn="ctr"/>
-                      <a:r>
-                        <a:rPr sz="1200" b="0">
-                          <a:solidFill>
-                            <a:srgbClr val="C00000"/>
-                          </a:solidFill>
-                          <a:latin typeface="Microsoft JhengHei"/>
-                        </a:rPr>
-                        <a:t>不存在｜機制尚未建立</a:t>
-                      </a:r>
-                    </a:p>
-                  </a:txBody>
-                  <a:tcPr marL="45720" marR="45720" marT="18288" marB="18288" anchor="ctr">
-                    <a:solidFill>
-                      <a:srgbClr val="FBEFEF"/>
-                    </a:solidFill>
-                  </a:tcPr>
-                </a:tc>
-                <a:tc>
-                  <a:txBody>
-                    <a:bodyPr/>
-                    <a:lstStyle/>
-                    <a:p>
-                      <a:pPr algn="ctr"/>
-                      <a:r>
-                        <a:rPr sz="1200" b="0">
-                          <a:solidFill>
-                            <a:srgbClr val="C00000"/>
-                          </a:solidFill>
-                          <a:latin typeface="Microsoft JhengHei"/>
-                        </a:rPr>
-                        <a:t>W12 差值 95% CI</a:t>
-                      </a:r>
-                    </a:p>
-                  </a:txBody>
-                  <a:tcPr marL="45720" marR="45720" marT="18288" marB="18288" anchor="ctr">
-                    <a:solidFill>
-                      <a:srgbClr val="FBEFEF"/>
-                    </a:solidFill>
-                  </a:tcPr>
-                </a:tc>
-                <a:tc>
-                  <a:txBody>
-                    <a:bodyPr/>
-                    <a:lstStyle/>
-                    <a:p>
-                      <a:pPr algn="ctr"/>
-                      <a:r>
-                        <a:rPr sz="1200" b="0">
-                          <a:solidFill>
-                            <a:srgbClr val="C00000"/>
-                          </a:solidFill>
-                          <a:latin typeface="Microsoft JhengHei"/>
-                        </a:rPr>
-                        <a:t>否決對外｜技術負責人</a:t>
-                      </a:r>
-                    </a:p>
-                  </a:txBody>
-                  <a:tcPr marL="45720" marR="45720" marT="18288" marB="18288" anchor="ctr">
-                    <a:solidFill>
-                      <a:srgbClr val="FBEFEF"/>
-                    </a:solidFill>
-                  </a:tcPr>
-                </a:tc>
-              </a:tr>
-            </a:tbl>
-          </a:graphicData>
-        </a:graphic>
-      </p:graphicFrame>
     </p:spTree>
   </p:cSld>
   <p:clrMapOvr>

--- a/Artificial Intelligence for Enterprises/Assessment3/Huang_26254793_421104_Assessment 3.pptx
+++ b/Artificial Intelligence for Enterprises/Assessment3/Huang_26254793_421104_Assessment 3.pptx
@@ -645,7 +645,7 @@
           <a:lstStyle/>
           <a:p>
             <a:r>
-              <a:t>【第 10 頁 · P8 · 怎麼算成功:三層 KPI,一條回圈】　目標 46 秒 · 累計 9:10</a:t>
+              <a:t>【第 10 頁 · P8 · 怎麼算成功:三層 KPI,一條回圈】　目標 46 秒 · 累計 9:11</a:t>
             </a:r>
           </a:p>
           <a:p/>
@@ -782,7 +782,7 @@
           <a:lstStyle/>
           <a:p>
             <a:r>
-              <a:t>【第 11 頁 · P9 · 六個月 · 六個工作包 · 三道決策門】　目標 47 秒 · 累計 9:58</a:t>
+              <a:t>【第 11 頁 · P9 · 六個月 · 六個工作包 · 三道決策門】　目標 47 秒 · 累計 9:59</a:t>
             </a:r>
           </a:p>
           <a:p/>
@@ -934,13 +934,13 @@
           <a:lstStyle/>
           <a:p>
             <a:r>
-              <a:t>【第 12 頁 · P10 · 資源、當責與請求】　目標 64 秒 · 累計 11:01</a:t>
+              <a:t>【第 12 頁 · P10 · 資源、當責與請求】　目標 64 秒 · 累計 11:02</a:t>
             </a:r>
           </a:p>
           <a:p/>
           <a:p>
             <a:r>
-              <a:t>★ 我請求核准第一段:四點八五人月、量級四十二到四十七萬,並指定一位贊助人。</a:t>
+              <a:t>★ 我請求核准第一段:四點八五人月、約一萬八千六到兩萬零八百澳幣,並指定一位贊助人。</a:t>
             </a:r>
           </a:p>
           <a:p/>
@@ -962,7 +962,7 @@
           <a:p/>
           <a:p>
             <a:r>
-              <a:t># 4.85 人月 · NT$42–47 萬(規劃,非核定預算)</a:t>
+              <a:t># 4.85 人月 · A$18,600–20,800(規劃,非核定預算)</a:t>
             </a:r>
           </a:p>
           <a:p>
@@ -978,7 +978,7 @@
           </a:p>
           <a:p>
             <a:r>
-              <a:t>⚠️ 🚫 520–1,521 萬是移交後的「可避免增聘」,不是本案承諾的節省額</a:t>
+              <a:t>⚠️ 🚫 A$23–67 萬是移交後的「可避免增聘」,不是本案承諾的節省額</a:t>
             </a:r>
           </a:p>
           <a:p>
@@ -1016,17 +1016,17 @@
           </a:p>
           <a:p>
             <a:r>
-              <a:t>【rows】{'label': '人力(18.2 人月,六包 × 五種角色 + 專案負責人)', 'value': '約 NT$158–177 萬', 'note': '18.2 人月 × 月薪 NT$6.7–7.5 萬 × 間接費率 1.3。薪資量級、費率、匯率(1 A$≈NT$21)三項都是提案人設定的假設 —— 是量級,不是報價'}</a:t>
-            </a:r>
-          </a:p>
-          <a:p>
-            <a:r>
-              <a:t>【rows】{'label': '三年可推算 TCO(兩個數字,🚫 不得合併)', 'value': '六個月專案期(影子模式)約 NT$50–118 萬(中案 72 萬)｜移交後(含稽核)約 NT$173–1,219 萬', 'note': '設備 16–20(一次性)+ 電力三年 0.7–1.9 + 延保三年 2.4–6.0 + 維運監控與模型更新三年 31.2–70.2。維運人力佔 59%–62%。上界跳這麼大不是估算失準,是治理成本的形狀'}</a:t>
-            </a:r>
-          </a:p>
-          <a:p>
-            <a:r>
-              <a:t>【rows】{'label': '可避免的年度增聘(移交後,不是六個月的交付)', 'value': '5–13 人 ≈ NT$520–1,521 萬/年', 'note': '不做本案覆蓋全客戶需 17–24 人(現有 5 人);做本案、移交後開到天花板仍需 11–12 人 —— 仍須增聘 6–7 人,不是不用增聘。公開薪資量級推算,非本案承諾的節省額'}</a:t>
+              <a:t>【rows】{'label': '人力(18.2 人月,六包 × 五種角色 + 專案負責人)', 'value': '約 A$7.0–7.9 萬', 'note': '18.2 人月 × 月薪 A$2,970–3,320 × 間接費率 1.3。薪資量級、費率、匯率(1 A$=NT$22.6,2026-08)三項都是提案人設定的假設 —— 是量級,不是報價'}</a:t>
+            </a:r>
+          </a:p>
+          <a:p>
+            <a:r>
+              <a:t>【rows】{'label': '三年可推算 TCO(兩個數字,🚫 不得合併)', 'value': '六個月專案期(影子模式)約 A$2.2–5.2 萬(中案 3.2 萬)｜移交後(含稽核)約 A$7.7–53.9 萬', 'note': '設備 16–20(一次性)+ 電力三年 0.7–1.9 + 延保三年 2.4–6.0 + 維運監控與模型更新三年 31.2–70.2。維運人力佔 59%–62%。上界跳這麼大不是估算失準,是治理成本的形狀'}</a:t>
+            </a:r>
+          </a:p>
+          <a:p>
+            <a:r>
+              <a:t>【rows】{'label': '可避免的年度增聘(移交後,不是六個月的交付)', 'value': '5–13 人 ≈ A$23–67 萬/年', 'note': '不做本案覆蓋全客戶需 17–24 人(現有 5 人);做本案、移交後開到天花板仍需 11–12 人 —— 仍須增聘 6–7 人,不是不用增聘。公開薪資量級推算,非本案承諾的節省額'}</a:t>
             </a:r>
           </a:p>
           <a:p>
@@ -1106,7 +1106,7 @@
           <a:lstStyle/>
           <a:p>
             <a:r>
-              <a:t>【第 13 頁 · 參考文獻(第 11 頁 — 不佔十頁額度)】　目標 5 秒 · 累計 11:06</a:t>
+              <a:t>【第 13 頁 · 參考文獻(第 11 頁 — 不佔十頁額度)】　目標 5 秒 · 累計 11:07</a:t>
             </a:r>
           </a:p>
           <a:p/>
@@ -1676,7 +1676,7 @@
           <a:lstStyle/>
           <a:p>
             <a:r>
-              <a:t>【第 5 頁 · 選型與部署:兩層模型、一台設備】　目標 66 秒 · 累計 5:01</a:t>
+              <a:t>【第 5 頁 · 選型與部署:兩層模型、一台設備】　目標 67 秒 · 累計 5:02</a:t>
             </a:r>
           </a:p>
           <a:p/>
@@ -1704,7 +1704,7 @@
           <a:p/>
           <a:p>
             <a:r>
-              <a:t># DGX Spark · 128 GB 統一記憶體 · 273 GB/s · NT$16–20 萬/台</a:t>
+              <a:t># DGX Spark · 128 GB 統一記憶體 · 273 GB/s · A$7,100–8,900/台</a:t>
             </a:r>
           </a:p>
           <a:p>
@@ -1714,7 +1714,7 @@
           </a:p>
           <a:p>
             <a:r>
-              <a:t># 一台合計 5.4–8.0 小時/天(佔用率 23%–33%);全客戶 13,000 筆時才需要第二台</a:t>
+              <a:t># 一台合計 5.4–8.0 小時/天(佔用率 23%–33%)· 1 台一個車隊 / 2 台全客戶 / 3 台若篩檢要 720p</a:t>
             </a:r>
           </a:p>
           <a:p/>
@@ -1738,6 +1738,16 @@
               <a:t>⚠️ 他若問「4-bit 讀不讀得到小字」:讀不到 —— 所以那是深挖層的工作,篩檢層只做分流</a:t>
             </a:r>
           </a:p>
+          <a:p>
+            <a:r>
+              <a:t>⚠️ 🔑 **設備採購在 G1 之後,不在第一段額度內** —— 今天要批的 A$18,600–20,800 本來就不含設備。一台還兩台,是第六週拿到量測才決定的</a:t>
+            </a:r>
+          </a:p>
+          <a:p>
+            <a:r>
+              <a:t>⚠️ 🚫 **不得寫成「用 A$1.4–1.8 萬取代數十萬的增聘」,也不得與設備價相減成 ROI** ——那是全片最堅持避開的話術;兩台仍只佔一個初階工程師年成本的 27%–38%</a:t>
+            </a:r>
+          </a:p>
           <a:p/>
           <a:p>
             <a:r>
@@ -1747,12 +1757,12 @@
           <a:p/>
           <a:p>
             <a:r>
-              <a:t>── 逐字備援 · 292 字(忘詞才看,不是拿來唸的)──</a:t>
-            </a:r>
-          </a:p>
-          <a:p>
-            <a:r>
-              <a:t>那要用什麼跑?兩個開源的視覺語言模型,都在地端,影像不外傳。篩檢層是 MoE,一百二十二 B 只活化十 B,算得快;它不讀小字,只決定這筆要不要深看。深挖層讀得到交通標誌上的字,只跑客戶回頭爭議的那百分之五到十。分兩層的理由就在這:讀小字要高解析度,而高解析度就慢。設備是 DGX Spark,一百二十八 G 統一記憶體,一台十六到二十萬;它的瓶頸不是算力,是記憶體頻寬 —— 那決定吐字的速度。兩個模型各佔約七十五 G,加起來超過一百二十八,所以分時載入。各位看最下面這一行:同一個車隊、同一天,人要二十九點八到四十二點九人時,而我們的產能只有四十;機器五點四到八小時,一台就跑完,佔用率不到三成。擴到全客戶一萬三千筆的時候一台就不夠了 —— 那時候串第二台,那是第一道門的決定。</a:t>
+              <a:t>── 逐字備援 · 296 字(忘詞才看,不是拿來唸的)──</a:t>
+            </a:r>
+          </a:p>
+          <a:p>
+            <a:r>
+              <a:t>那要用什麼跑?兩個開源的視覺語言模型,都在地端,影像不外傳。篩檢層是 MoE,一百二十二 B 只活化十 B,算得快;它不讀小字,只決定這筆要不要深看。深挖層讀得到交通標誌上的字,只跑客戶回頭爭議的那百分之五到十。分兩層的理由就在這:讀小字要高解析度,而高解析度就慢。設備是 DGX Spark,一百二十八 G 統一記憶體,一台約七千一到八千九澳幣;它的瓶頸不是算力,是記憶體頻寬 —— 那決定吐字的速度。兩個模型各佔約七十五 G,加起來超過一百二十八,所以分時載入。各位看最下面這一行:同一個車隊、同一天,人要二十九點八到四十二點九人時,而我們的產能只有四十;機器五點四到八小時,一台就跑完,佔用率不到三成。擴到全客戶一萬三千筆的時候一台就不夠了 —— 那時候串第二台,那是第一道門的決定。</a:t>
             </a:r>
           </a:p>
           <a:p/>
@@ -1833,7 +1843,7 @@
           <a:lstStyle/>
           <a:p>
             <a:r>
-              <a:t>【第 6 頁 · P4 · 我們看不見的那一半:有資料,沒有習慣】　目標 59 秒 · 累計 6:00</a:t>
+              <a:t>【第 6 頁 · P4 · 我們看不見的那一半:有資料,沒有習慣】　目標 59 秒 · 累計 6:01</a:t>
             </a:r>
           </a:p>
           <a:p/>
@@ -2015,7 +2025,7 @@
           <a:lstStyle/>
           <a:p>
             <a:r>
-              <a:t>【第 7 頁 · P5 · 五條路,含三條不用 AI】　目標 44 秒 · 累計 6:44</a:t>
+              <a:t>【第 7 頁 · P5 · 五條路,含三條不用 AI】　目標 44 秒 · 累計 6:45</a:t>
             </a:r>
           </a:p>
           <a:p/>
@@ -2157,7 +2167,7 @@
           <a:lstStyle/>
           <a:p>
             <a:r>
-              <a:t>【第 8 頁 · P6 · 風險:七類十條,緩解位移與殘餘風險】　目標 51 秒 · 累計 7:35</a:t>
+              <a:t>【第 8 頁 · P6 · 風險:七類十條,緩解位移與殘餘風險】　目標 51 秒 · 累計 7:36</a:t>
             </a:r>
           </a:p>
           <a:p/>
@@ -2310,7 +2320,7 @@
           <a:lstStyle/>
           <a:p>
             <a:r>
-              <a:t>【第 9 頁 · P7 · 倫理與可申訴性:對照澳洲 AI 倫理八原則】　目標 50 秒 · 累計 8:25</a:t>
+              <a:t>【第 9 頁 · P7 · 倫理與可申訴性:對照澳洲 AI 倫理八原則】　目標 50 秒 · 累計 8:26</a:t>
             </a:r>
           </a:p>
           <a:p/>
@@ -6432,7 +6442,7 @@
                           </a:solidFill>
                           <a:latin typeface="Microsoft JhengHei"/>
                         </a:rPr>
-                        <a:t>省5–13人≈NT$520–1,521萬</a:t>
+                        <a:t>省5–13人≈A$23–67 萬</a:t>
                       </a:r>
                     </a:p>
                   </a:txBody>
@@ -8923,7 +8933,7 @@
                 </a:solidFill>
                 <a:latin typeface="Microsoft JhengHei"/>
               </a:rPr>
-              <a:t>請求核准第一段 4.85 人月 / NT$42–47 萬,並指定贊助人</a:t>
+              <a:t>請求核准第一段 4.85 人月 / A$18,600–20,800,並指定贊助人</a:t>
             </a:r>
           </a:p>
         </p:txBody>
@@ -8981,7 +8991,7 @@
         <p:spPr>
           <a:xfrm>
             <a:off x="658368" y="1783080"/>
-            <a:ext cx="45720" cy="750658"/>
+            <a:ext cx="45720" cy="321468"/>
           </a:xfrm>
           <a:prstGeom prst="rect">
             <a:avLst/>
@@ -9025,7 +9035,7 @@
         <p:spPr>
           <a:xfrm>
             <a:off x="804672" y="1755648"/>
-            <a:ext cx="2408822" cy="842098"/>
+            <a:ext cx="2408822" cy="412908"/>
           </a:xfrm>
           <a:prstGeom prst="rect">
             <a:avLst/>
@@ -9050,7 +9060,7 @@
                 </a:solidFill>
                 <a:latin typeface="Microsoft JhengHei"/>
               </a:rPr>
-              <a:t>地端設備(一台起步)</a:t>
+              <a:t>地端設備</a:t>
             </a:r>
           </a:p>
         </p:txBody>
@@ -9064,7 +9074,7 @@
         <p:spPr>
           <a:xfrm>
             <a:off x="3268358" y="1755648"/>
-            <a:ext cx="3152759" cy="842098"/>
+            <a:ext cx="3152759" cy="412908"/>
           </a:xfrm>
           <a:prstGeom prst="rect">
             <a:avLst/>
@@ -9089,7 +9099,7 @@
                 </a:solidFill>
                 <a:latin typeface="Microsoft JhengHei"/>
               </a:rPr>
-              <a:t>NT$16–20 萬 / 台(一次性)</a:t>
+              <a:t>1–2 台 · A$7,100–17,700</a:t>
             </a:r>
           </a:p>
         </p:txBody>
@@ -9103,7 +9113,7 @@
         <p:spPr>
           <a:xfrm>
             <a:off x="6530845" y="1755648"/>
-            <a:ext cx="4892753" cy="842098"/>
+            <a:ext cx="4892753" cy="412908"/>
           </a:xfrm>
           <a:prstGeom prst="rect">
             <a:avLst/>
@@ -9128,7 +9138,7 @@
                 </a:solidFill>
                 <a:latin typeface="Microsoft JhengHei"/>
               </a:rPr>
-              <a:t>市場採購量級,非核定採購價;本頁唯一不由算式推得的金額。台數由 G1 依 W1–6 定案;全客戶量需第二台。設備 = 初階工程師年成本的 14%–19%</a:t>
+              <a:t>1 台一個車隊 / 2 台全客戶;採購在 G1 之後,不在第一段額度內</a:t>
             </a:r>
           </a:p>
         </p:txBody>
@@ -9141,8 +9151,8 @@
         </p:nvSpPr>
         <p:spPr>
           <a:xfrm>
-            <a:off x="658368" y="2716618"/>
-            <a:ext cx="45720" cy="750658"/>
+            <a:off x="658368" y="2287428"/>
+            <a:ext cx="45720" cy="750085"/>
           </a:xfrm>
           <a:prstGeom prst="rect">
             <a:avLst/>
@@ -9185,8 +9195,8 @@
         </p:nvSpPr>
         <p:spPr>
           <a:xfrm>
-            <a:off x="804672" y="2689186"/>
-            <a:ext cx="2408822" cy="842098"/>
+            <a:off x="804672" y="2259996"/>
+            <a:ext cx="2408822" cy="841525"/>
           </a:xfrm>
           <a:prstGeom prst="rect">
             <a:avLst/>
@@ -9224,8 +9234,8 @@
         </p:nvSpPr>
         <p:spPr>
           <a:xfrm>
-            <a:off x="3268358" y="2689186"/>
-            <a:ext cx="3152759" cy="842098"/>
+            <a:off x="3268358" y="2259996"/>
+            <a:ext cx="3152759" cy="841525"/>
           </a:xfrm>
           <a:prstGeom prst="rect">
             <a:avLst/>
@@ -9263,8 +9273,8 @@
         </p:nvSpPr>
         <p:spPr>
           <a:xfrm>
-            <a:off x="6530845" y="2689186"/>
-            <a:ext cx="4892753" cy="842098"/>
+            <a:off x="6530845" y="2259996"/>
+            <a:ext cx="4892753" cy="841525"/>
           </a:xfrm>
           <a:prstGeom prst="rect">
             <a:avLst/>
@@ -9302,7 +9312,7 @@
         </p:nvSpPr>
         <p:spPr>
           <a:xfrm>
-            <a:off x="658368" y="3659300"/>
+            <a:off x="658368" y="3658154"/>
             <a:ext cx="3527450" cy="2121408"/>
           </a:xfrm>
           <a:prstGeom prst="roundRect">
@@ -9350,7 +9360,7 @@
         </p:nvSpPr>
         <p:spPr>
           <a:xfrm>
-            <a:off x="768096" y="3787316"/>
+            <a:off x="768096" y="3786170"/>
             <a:ext cx="3307994" cy="566928"/>
           </a:xfrm>
           <a:prstGeom prst="rect">
@@ -9389,7 +9399,7 @@
         </p:nvSpPr>
         <p:spPr>
           <a:xfrm>
-            <a:off x="1855927" y="4409108"/>
+            <a:off x="1855927" y="4407962"/>
             <a:ext cx="1132332" cy="274320"/>
           </a:xfrm>
           <a:prstGeom prst="roundRect">
@@ -9435,7 +9445,7 @@
         </p:nvSpPr>
         <p:spPr>
           <a:xfrm>
-            <a:off x="1855927" y="4409108"/>
+            <a:off x="1855927" y="4407962"/>
             <a:ext cx="1132332" cy="274320"/>
           </a:xfrm>
           <a:prstGeom prst="rect">
@@ -9474,7 +9484,7 @@
         </p:nvSpPr>
         <p:spPr>
           <a:xfrm>
-            <a:off x="768096" y="4793156"/>
+            <a:off x="768096" y="4792010"/>
             <a:ext cx="3307994" cy="859535"/>
           </a:xfrm>
           <a:prstGeom prst="rect">
@@ -9500,7 +9510,7 @@
                 </a:solidFill>
                 <a:latin typeface="Microsoft JhengHei"/>
               </a:rPr>
-              <a:t>第一段 4.85 人月 · NT$42–47 萬</a:t>
+              <a:t>第一段 4.85 人月 · A$18,600–20,800</a:t>
             </a:r>
           </a:p>
           <a:p>
@@ -9529,7 +9539,7 @@
         </p:nvSpPr>
         <p:spPr>
           <a:xfrm>
-            <a:off x="4332122" y="3659300"/>
+            <a:off x="4332122" y="3658154"/>
             <a:ext cx="3527450" cy="2121408"/>
           </a:xfrm>
           <a:prstGeom prst="roundRect">
@@ -9577,7 +9587,7 @@
         </p:nvSpPr>
         <p:spPr>
           <a:xfrm>
-            <a:off x="4441850" y="3787316"/>
+            <a:off x="4441850" y="3786170"/>
             <a:ext cx="3307994" cy="566928"/>
           </a:xfrm>
           <a:prstGeom prst="rect">
@@ -9616,7 +9626,7 @@
         </p:nvSpPr>
         <p:spPr>
           <a:xfrm>
-            <a:off x="5586831" y="4409108"/>
+            <a:off x="5586831" y="4407962"/>
             <a:ext cx="1018032" cy="274320"/>
           </a:xfrm>
           <a:prstGeom prst="roundRect">
@@ -9662,7 +9672,7 @@
         </p:nvSpPr>
         <p:spPr>
           <a:xfrm>
-            <a:off x="5586831" y="4409108"/>
+            <a:off x="5586831" y="4407962"/>
             <a:ext cx="1018032" cy="274320"/>
           </a:xfrm>
           <a:prstGeom prst="rect">
@@ -9701,7 +9711,7 @@
         </p:nvSpPr>
         <p:spPr>
           <a:xfrm>
-            <a:off x="4441850" y="4793156"/>
+            <a:off x="4441850" y="4792010"/>
             <a:ext cx="3307994" cy="859535"/>
           </a:xfrm>
           <a:prstGeom prst="rect">
@@ -9756,7 +9766,7 @@
         </p:nvSpPr>
         <p:spPr>
           <a:xfrm>
-            <a:off x="8005876" y="3659300"/>
+            <a:off x="8005876" y="3658154"/>
             <a:ext cx="3527450" cy="2121408"/>
           </a:xfrm>
           <a:prstGeom prst="roundRect">
@@ -9804,7 +9814,7 @@
         </p:nvSpPr>
         <p:spPr>
           <a:xfrm>
-            <a:off x="8115604" y="3787316"/>
+            <a:off x="8115604" y="3786170"/>
             <a:ext cx="3307994" cy="566928"/>
           </a:xfrm>
           <a:prstGeom prst="rect">
@@ -9843,7 +9853,7 @@
         </p:nvSpPr>
         <p:spPr>
           <a:xfrm>
-            <a:off x="9336786" y="4409108"/>
+            <a:off x="9336786" y="4407962"/>
             <a:ext cx="865632" cy="274320"/>
           </a:xfrm>
           <a:prstGeom prst="roundRect">
@@ -9889,7 +9899,7 @@
         </p:nvSpPr>
         <p:spPr>
           <a:xfrm>
-            <a:off x="9336786" y="4409108"/>
+            <a:off x="9336786" y="4407962"/>
             <a:ext cx="865632" cy="274320"/>
           </a:xfrm>
           <a:prstGeom prst="rect">
@@ -9928,7 +9938,7 @@
         </p:nvSpPr>
         <p:spPr>
           <a:xfrm>
-            <a:off x="8115604" y="4793156"/>
+            <a:off x="8115604" y="4792010"/>
             <a:ext cx="3307994" cy="859535"/>
           </a:xfrm>
           <a:prstGeom prst="rect">
@@ -9999,8 +10009,8 @@
         </p:nvSpPr>
         <p:spPr>
           <a:xfrm>
-            <a:off x="658368" y="5908724"/>
-            <a:ext cx="9658807" cy="601803"/>
+            <a:off x="658368" y="5907578"/>
+            <a:ext cx="9658807" cy="602949"/>
           </a:xfrm>
           <a:prstGeom prst="roundRect">
             <a:avLst>
@@ -10045,8 +10055,8 @@
         </p:nvSpPr>
         <p:spPr>
           <a:xfrm>
-            <a:off x="841247" y="5908724"/>
-            <a:ext cx="9293047" cy="601803"/>
+            <a:off x="841247" y="5907578"/>
+            <a:ext cx="9293047" cy="602949"/>
           </a:xfrm>
           <a:prstGeom prst="rect">
             <a:avLst/>
@@ -14601,7 +14611,7 @@
                 </a:solidFill>
                 <a:latin typeface="Microsoft JhengHei"/>
               </a:rPr>
-              <a:t>NVIDIA DGX Spark · 128 GB 統一記憶體 · NT$16–20 萬/台;瓶頸不是算力,是 273 GB/s 的記憶體頻寬</a:t>
+              <a:t>NVIDIA DGX Spark · 128 GB 統一記憶體 · A$7,100–8,900/台;瓶頸不是算力,是 273 GB/s 的記憶體頻寬</a:t>
             </a:r>
           </a:p>
         </p:txBody>
@@ -15511,7 +15521,7 @@
             <a:avLst/>
           </a:prstGeom>
           <a:solidFill>
-            <a:srgbClr val="1F4E79"/>
+            <a:srgbClr val="C00000"/>
           </a:solidFill>
           <a:ln>
             <a:noFill/>
@@ -15574,7 +15584,7 @@
                 </a:solidFill>
                 <a:latin typeface="Microsoft JhengHei"/>
               </a:rPr>
-              <a:t>擴到全客戶時</a:t>
+              <a:t>要幾台</a:t>
             </a:r>
           </a:p>
         </p:txBody>
@@ -15609,11 +15619,11 @@
             <a:r>
               <a:rPr sz="1500" b="1">
                 <a:solidFill>
-                  <a:srgbClr val="1F4E79"/>
+                  <a:srgbClr val="C00000"/>
                 </a:solidFill>
                 <a:latin typeface="Microsoft JhengHei"/>
               </a:rPr>
-              <a:t>13,000 筆/天 → 一台不夠</a:t>
+              <a:t>1 台一個車隊 · 2 台全客戶</a:t>
             </a:r>
           </a:p>
         </p:txBody>
@@ -15652,7 +15662,7 @@
                 </a:solidFill>
                 <a:latin typeface="Microsoft JhengHei"/>
               </a:rPr>
-              <a:t>23–35 小時/天;串第二台 → 256 GB,設備成本翻倍,G1 決定</a:t>
+              <a:t>一個車隊 1 台 · 全客戶 2 台 · 720p 篩檢 3 台,G1 定</a:t>
             </a:r>
           </a:p>
         </p:txBody>

--- a/Artificial Intelligence for Enterprises/Assessment3/Huang_26254793_421104_Assessment 3.pptx
+++ b/Artificial Intelligence for Enterprises/Assessment3/Huang_26254793_421104_Assessment 3.pptx
@@ -1444,7 +1444,7 @@
           </a:p>
           <a:p>
             <a:r>
-              <a:t>【這一頁的作用】這頁回答委員會最會問的兩題:為什麼是現在、為什麼是 AI 而不是加人。五段天數必須印出來,委員會才親眼看到 43%–78% 落在模型碰得到的那兩段;而那條因果句(兩段慢的原因是同一個技術缺陷)把整頁從營運圖表升級成 AI 立案 —— 沒有它,這只證明「有件事很花時間」。同一頁又自己標明證據等級(營運端估計,非量測)並給出反向出口(推翻就轉排班),把核准變成一個低風險決定;右側的利用率上緣破百與徵調 7 位研發,則把時效缺口接回錢與機會成本。</a:t>
+              <a:t>【這一頁的作用】這頁回答委員會最會問的兩題:為什麼是現在、為什麼是 AI 而不是加人。五段天數必須印出來,委員會才親眼看到 50%–87.5% 落在模型碰得到的那兩段;而那條因果句(兩段慢的原因是同一個技術缺陷)把整頁從營運圖表升級成 AI 立案 —— 沒有它,這只證明「有件事很花時間」。同一頁又自己標明證據等級(營運端估計,非量測)並給出反向出口(推翻就轉排班),把核准變成一個低風險決定;右側的利用率上緣破百與徵調 7 位研發,則把時效缺口接回錢與機會成本。</a:t>
             </a:r>
           </a:p>
         </p:txBody>

--- a/Artificial Intelligence for Enterprises/Assessment3/Huang_26254793_421104_Assessment 3.pptx
+++ b/Artificial Intelligence for Enterprises/Assessment3/Huang_26254793_421104_Assessment 3.pptx
@@ -645,7 +645,7 @@
           <a:lstStyle/>
           <a:p>
             <a:r>
-              <a:t>【第 10 頁 · P8 · 怎麼算成功:三層 KPI,一條回圈】　目標 46 秒 · 累計 9:11</a:t>
+              <a:t>【第 10 頁 · P8 · 怎麼算成功:三層 KPI,一條回圈】　目標 46 秒 · 累計 9:10</a:t>
             </a:r>
           </a:p>
           <a:p/>
@@ -782,7 +782,7 @@
           <a:lstStyle/>
           <a:p>
             <a:r>
-              <a:t>【第 11 頁 · P9 · 六個月 · 六個工作包 · 三道決策門】　目標 47 秒 · 累計 9:59</a:t>
+              <a:t>【第 11 頁 · P9 · 六個月 · 六個工作包 · 三道決策門】　目標 47 秒 · 累計 9:58</a:t>
             </a:r>
           </a:p>
           <a:p/>
@@ -934,7 +934,7 @@
           <a:lstStyle/>
           <a:p>
             <a:r>
-              <a:t>【第 12 頁 · P10 · 資源、當責與請求】　目標 64 秒 · 累計 11:02</a:t>
+              <a:t>【第 12 頁 · P10 · 資源、當責與請求】　目標 64 秒 · 累計 11:01</a:t>
             </a:r>
           </a:p>
           <a:p/>
@@ -1106,7 +1106,7 @@
           <a:lstStyle/>
           <a:p>
             <a:r>
-              <a:t>【第 13 頁 · 參考文獻(第 11 頁 — 不佔十頁額度)】　目標 5 秒 · 累計 11:07</a:t>
+              <a:t>【第 13 頁 · 參考文獻(第 11 頁 — 不佔十頁額度)】　目標 5 秒 · 累計 11:06</a:t>
             </a:r>
           </a:p>
           <a:p/>
@@ -1676,35 +1676,35 @@
           <a:lstStyle/>
           <a:p>
             <a:r>
-              <a:t>【第 5 頁 · 選型與部署:兩層模型、一台設備】　目標 67 秒 · 累計 5:02</a:t>
+              <a:t>【第 5 頁 · 選型與部署:兩層模型、一台設備】　目標 66 秒 · 累計 5:01</a:t>
             </a:r>
           </a:p>
           <a:p/>
           <a:p>
             <a:r>
-              <a:t>★ 同一個車隊、同一天:人要 29.8–42.9 人時而產能只有 40,機器一台跑完只用掉三成。</a:t>
+              <a:t>★ 兩台設備、兩層模型各自常駐 —— 同一個車隊,人的產能已經滿了,機器各只用掉一到二成。</a:t>
             </a:r>
           </a:p>
           <a:p/>
           <a:p>
             <a:r>
-              <a:t>· 篩檢層 Qwen3.5 122B-A10B(4-bit,MoE 活化 10B):不讀小字,只決定要不要深看</a:t>
-            </a:r>
-          </a:p>
-          <a:p>
-            <a:r>
-              <a:t>· 深挖層 Qwen2.5-VL 72B(8-bit):讀交通標誌,只跑爭議那 5–10%</a:t>
-            </a:r>
-          </a:p>
-          <a:p>
-            <a:r>
-              <a:t>· 分兩層的理由:讀小字要高解析度,高解析度就慢 —— 全量用高解析度跑不完</a:t>
+              <a:t>· ① 篩檢台 Qwen3.5 122B-A10B(4-bit,MoE 活化 10B):不讀小字,只決定要不要深看</a:t>
+            </a:r>
+          </a:p>
+          <a:p>
+            <a:r>
+              <a:t>· ② 深挖台 Qwen2.5-VL 72B(8-bit):讀交通標誌,只跑爭議那 5–10%</a:t>
+            </a:r>
+          </a:p>
+          <a:p>
+            <a:r>
+              <a:t>· 為什麼兩台:兩個模型各約 75 GB,一台 128 GB 得輪流載入;兩台各自常駐,不用換載</a:t>
             </a:r>
           </a:p>
           <a:p/>
           <a:p>
             <a:r>
-              <a:t># DGX Spark · 128 GB 統一記憶體 · 273 GB/s · A$7,100–8,900/台</a:t>
+              <a:t># DGX Spark × 2 · 各 128 GB · 273 GB/s · 合計 A$14,200–17,700</a:t>
             </a:r>
           </a:p>
           <a:p>
@@ -1714,7 +1714,7 @@
           </a:p>
           <a:p>
             <a:r>
-              <a:t># 一台合計 5.4–8.0 小時/天(佔用率 23%–33%)· 1 台一個車隊 / 2 台全客戶 / 3 台若篩檢要 720p</a:t>
+              <a:t># 一個車隊:篩檢台佔 12%、深挖台佔 11%–21% · 全客戶 13,000 筆:51% 與 46%–93%</a:t>
             </a:r>
           </a:p>
           <a:p/>
@@ -1748,6 +1748,11 @@
               <a:t>⚠️ 🚫 **不得寫成「用 A$1.4–1.8 萬取代數十萬的增聘」,也不得與設備價相減成 ROI** ——那是全片最堅持避開的話術;兩台仍只佔一個初階工程師年成本的 27%–38%</a:t>
             </a:r>
           </a:p>
+          <a:p>
+            <a:r>
+              <a:t>⚠️ 他若問「為什麼一次買兩台不先買一台」:一台裝不下兩個模型(各約 75 GB),要輪流載入;兩台各自常駐,而且擴到全客戶也不用再加購</a:t>
+            </a:r>
+          </a:p>
           <a:p/>
           <a:p>
             <a:r>
@@ -1757,12 +1762,12 @@
           <a:p/>
           <a:p>
             <a:r>
-              <a:t>── 逐字備援 · 296 字(忘詞才看,不是拿來唸的)──</a:t>
-            </a:r>
-          </a:p>
-          <a:p>
-            <a:r>
-              <a:t>那要用什麼跑?兩個開源的視覺語言模型,都在地端,影像不外傳。篩檢層是 MoE,一百二十二 B 只活化十 B,算得快;它不讀小字,只決定這筆要不要深看。深挖層讀得到交通標誌上的字,只跑客戶回頭爭議的那百分之五到十。分兩層的理由就在這:讀小字要高解析度,而高解析度就慢。設備是 DGX Spark,一百二十八 G 統一記憶體,一台約七千一到八千九澳幣;它的瓶頸不是算力,是記憶體頻寬 —— 那決定吐字的速度。兩個模型各佔約七十五 G,加起來超過一百二十八,所以分時載入。各位看最下面這一行:同一個車隊、同一天,人要二十九點八到四十二點九人時,而我們的產能只有四十;機器五點四到八小時,一台就跑完,佔用率不到三成。擴到全客戶一萬三千筆的時候一台就不夠了 —— 那時候串第二台,那是第一道門的決定。</a:t>
+              <a:t>── 逐字備援 · 292 字(忘詞才看,不是拿來唸的)──</a:t>
+            </a:r>
+          </a:p>
+          <a:p>
+            <a:r>
+              <a:t>那要用什麼跑?兩個開源的視覺語言模型,都在地端,影像不外傳。第一台跑篩檢:它是 MoE,一百二十二 B 只活化十 B,算得快;它不讀小字,只做一件事 —— 決定這筆要不要深看。第二台跑深挖:讀得到交通標誌上的字,只處理客戶回頭爭議的那百分之五到十。為什麼是兩台不是一台?兩個模型各佔約七十五 G,而一台只有一百二十八 G ——一台就得輪流載入,兩台各自常駐,不用換載。設備是 NVIDIA DGX Spark,兩台合計約一萬四千二到一萬七千七澳幣;它的瓶頸不是算力,是記憶體頻寬,那決定吐字的速度。各位看最下面這一行:同一個車隊、同一天,人要二十九點八到四十二點九人時,而我們的產能只有四十;兩台機器各只用掉一到二成。而且擴到全客戶一萬三千筆,這兩台還撐得住 —— 再上去才需要第三台。</a:t>
             </a:r>
           </a:p>
           <a:p/>
@@ -1843,7 +1848,7 @@
           <a:lstStyle/>
           <a:p>
             <a:r>
-              <a:t>【第 6 頁 · P4 · 我們看不見的那一半:有資料,沒有習慣】　目標 59 秒 · 累計 6:01</a:t>
+              <a:t>【第 6 頁 · P4 · 我們看不見的那一半:有資料,沒有習慣】　目標 59 秒 · 累計 6:00</a:t>
             </a:r>
           </a:p>
           <a:p/>
@@ -2025,7 +2030,7 @@
           <a:lstStyle/>
           <a:p>
             <a:r>
-              <a:t>【第 7 頁 · P5 · 五條路,含三條不用 AI】　目標 44 秒 · 累計 6:45</a:t>
+              <a:t>【第 7 頁 · P5 · 五條路,含三條不用 AI】　目標 44 秒 · 累計 6:44</a:t>
             </a:r>
           </a:p>
           <a:p/>
@@ -2167,7 +2172,7 @@
           <a:lstStyle/>
           <a:p>
             <a:r>
-              <a:t>【第 8 頁 · P6 · 風險:七類十條,緩解位移與殘餘風險】　目標 51 秒 · 累計 7:36</a:t>
+              <a:t>【第 8 頁 · P6 · 風險:七類十條,緩解位移與殘餘風險】　目標 51 秒 · 累計 7:35</a:t>
             </a:r>
           </a:p>
           <a:p/>
@@ -2320,7 +2325,7 @@
           <a:lstStyle/>
           <a:p>
             <a:r>
-              <a:t>【第 9 頁 · P7 · 倫理與可申訴性:對照澳洲 AI 倫理八原則】　目標 50 秒 · 累計 8:26</a:t>
+              <a:t>【第 9 頁 · P7 · 倫理與可申訴性:對照澳洲 AI 倫理八原則】　目標 50 秒 · 累計 8:25</a:t>
             </a:r>
           </a:p>
           <a:p/>
@@ -9099,7 +9104,7 @@
                 </a:solidFill>
                 <a:latin typeface="Microsoft JhengHei"/>
               </a:rPr>
-              <a:t>1–2 台 · A$7,100–17,700</a:t>
+              <a:t>2 台 · A$14,200–17,700</a:t>
             </a:r>
           </a:p>
         </p:txBody>
@@ -9138,7 +9143,7 @@
                 </a:solidFill>
                 <a:latin typeface="Microsoft JhengHei"/>
               </a:rPr>
-              <a:t>1 台一個車隊 / 2 台全客戶;採購在 G1 之後,不在第一段額度內</a:t>
+              <a:t>篩檢台 + 深挖台各一;採購在 G1 之後,不在第一段額度內</a:t>
             </a:r>
           </a:p>
         </p:txBody>
@@ -9152,7 +9157,7 @@
         <p:spPr>
           <a:xfrm>
             <a:off x="658368" y="2287428"/>
-            <a:ext cx="45720" cy="750085"/>
+            <a:ext cx="45720" cy="749630"/>
           </a:xfrm>
           <a:prstGeom prst="rect">
             <a:avLst/>
@@ -9196,7 +9201,7 @@
         <p:spPr>
           <a:xfrm>
             <a:off x="804672" y="2259996"/>
-            <a:ext cx="2408822" cy="841525"/>
+            <a:ext cx="2408822" cy="841070"/>
           </a:xfrm>
           <a:prstGeom prst="rect">
             <a:avLst/>
@@ -9235,7 +9240,7 @@
         <p:spPr>
           <a:xfrm>
             <a:off x="3268358" y="2259996"/>
-            <a:ext cx="3152759" cy="841525"/>
+            <a:ext cx="3152759" cy="841070"/>
           </a:xfrm>
           <a:prstGeom prst="rect">
             <a:avLst/>
@@ -9274,7 +9279,7 @@
         <p:spPr>
           <a:xfrm>
             <a:off x="6530845" y="2259996"/>
-            <a:ext cx="4892753" cy="841525"/>
+            <a:ext cx="4892753" cy="841070"/>
           </a:xfrm>
           <a:prstGeom prst="rect">
             <a:avLst/>
@@ -9312,7 +9317,7 @@
         </p:nvSpPr>
         <p:spPr>
           <a:xfrm>
-            <a:off x="658368" y="3658154"/>
+            <a:off x="658368" y="3657244"/>
             <a:ext cx="3527450" cy="2121408"/>
           </a:xfrm>
           <a:prstGeom prst="roundRect">
@@ -9360,7 +9365,7 @@
         </p:nvSpPr>
         <p:spPr>
           <a:xfrm>
-            <a:off x="768096" y="3786170"/>
+            <a:off x="768096" y="3785260"/>
             <a:ext cx="3307994" cy="566928"/>
           </a:xfrm>
           <a:prstGeom prst="rect">
@@ -9399,7 +9404,7 @@
         </p:nvSpPr>
         <p:spPr>
           <a:xfrm>
-            <a:off x="1855927" y="4407962"/>
+            <a:off x="1855927" y="4407052"/>
             <a:ext cx="1132332" cy="274320"/>
           </a:xfrm>
           <a:prstGeom prst="roundRect">
@@ -9445,7 +9450,7 @@
         </p:nvSpPr>
         <p:spPr>
           <a:xfrm>
-            <a:off x="1855927" y="4407962"/>
+            <a:off x="1855927" y="4407052"/>
             <a:ext cx="1132332" cy="274320"/>
           </a:xfrm>
           <a:prstGeom prst="rect">
@@ -9484,7 +9489,7 @@
         </p:nvSpPr>
         <p:spPr>
           <a:xfrm>
-            <a:off x="768096" y="4792010"/>
+            <a:off x="768096" y="4791100"/>
             <a:ext cx="3307994" cy="859535"/>
           </a:xfrm>
           <a:prstGeom prst="rect">
@@ -9539,7 +9544,7 @@
         </p:nvSpPr>
         <p:spPr>
           <a:xfrm>
-            <a:off x="4332122" y="3658154"/>
+            <a:off x="4332122" y="3657244"/>
             <a:ext cx="3527450" cy="2121408"/>
           </a:xfrm>
           <a:prstGeom prst="roundRect">
@@ -9587,7 +9592,7 @@
         </p:nvSpPr>
         <p:spPr>
           <a:xfrm>
-            <a:off x="4441850" y="3786170"/>
+            <a:off x="4441850" y="3785260"/>
             <a:ext cx="3307994" cy="566928"/>
           </a:xfrm>
           <a:prstGeom prst="rect">
@@ -9626,7 +9631,7 @@
         </p:nvSpPr>
         <p:spPr>
           <a:xfrm>
-            <a:off x="5586831" y="4407962"/>
+            <a:off x="5586831" y="4407052"/>
             <a:ext cx="1018032" cy="274320"/>
           </a:xfrm>
           <a:prstGeom prst="roundRect">
@@ -9672,7 +9677,7 @@
         </p:nvSpPr>
         <p:spPr>
           <a:xfrm>
-            <a:off x="5586831" y="4407962"/>
+            <a:off x="5586831" y="4407052"/>
             <a:ext cx="1018032" cy="274320"/>
           </a:xfrm>
           <a:prstGeom prst="rect">
@@ -9711,7 +9716,7 @@
         </p:nvSpPr>
         <p:spPr>
           <a:xfrm>
-            <a:off x="4441850" y="4792010"/>
+            <a:off x="4441850" y="4791100"/>
             <a:ext cx="3307994" cy="859535"/>
           </a:xfrm>
           <a:prstGeom prst="rect">
@@ -9766,7 +9771,7 @@
         </p:nvSpPr>
         <p:spPr>
           <a:xfrm>
-            <a:off x="8005876" y="3658154"/>
+            <a:off x="8005876" y="3657244"/>
             <a:ext cx="3527450" cy="2121408"/>
           </a:xfrm>
           <a:prstGeom prst="roundRect">
@@ -9814,7 +9819,7 @@
         </p:nvSpPr>
         <p:spPr>
           <a:xfrm>
-            <a:off x="8115604" y="3786170"/>
+            <a:off x="8115604" y="3785260"/>
             <a:ext cx="3307994" cy="566928"/>
           </a:xfrm>
           <a:prstGeom prst="rect">
@@ -9853,7 +9858,7 @@
         </p:nvSpPr>
         <p:spPr>
           <a:xfrm>
-            <a:off x="9336786" y="4407962"/>
+            <a:off x="9336786" y="4407052"/>
             <a:ext cx="865632" cy="274320"/>
           </a:xfrm>
           <a:prstGeom prst="roundRect">
@@ -9899,7 +9904,7 @@
         </p:nvSpPr>
         <p:spPr>
           <a:xfrm>
-            <a:off x="9336786" y="4407962"/>
+            <a:off x="9336786" y="4407052"/>
             <a:ext cx="865632" cy="274320"/>
           </a:xfrm>
           <a:prstGeom prst="rect">
@@ -9938,7 +9943,7 @@
         </p:nvSpPr>
         <p:spPr>
           <a:xfrm>
-            <a:off x="8115604" y="4792010"/>
+            <a:off x="8115604" y="4791100"/>
             <a:ext cx="3307994" cy="859535"/>
           </a:xfrm>
           <a:prstGeom prst="rect">
@@ -10009,8 +10014,8 @@
         </p:nvSpPr>
         <p:spPr>
           <a:xfrm>
-            <a:off x="658368" y="5907578"/>
-            <a:ext cx="9658807" cy="602949"/>
+            <a:off x="658368" y="5906668"/>
+            <a:ext cx="9658807" cy="603859"/>
           </a:xfrm>
           <a:prstGeom prst="roundRect">
             <a:avLst>
@@ -10055,8 +10060,8 @@
         </p:nvSpPr>
         <p:spPr>
           <a:xfrm>
-            <a:off x="841247" y="5907578"/>
-            <a:ext cx="9293047" cy="602949"/>
+            <a:off x="841247" y="5906668"/>
+            <a:ext cx="9293047" cy="603859"/>
           </a:xfrm>
           <a:prstGeom prst="rect">
             <a:avLst/>
@@ -14572,7 +14577,7 @@
                 </a:solidFill>
                 <a:latin typeface="Microsoft JhengHei"/>
               </a:rPr>
-              <a:t>兩層模型、一台設備分時跑 —— 同一個車隊,機器一天只用掉三成</a:t>
+              <a:t>兩台設備、兩層模型各自常駐 —— 不用換載,也留得下成長空間</a:t>
             </a:r>
           </a:p>
         </p:txBody>
@@ -14611,7 +14616,7 @@
                 </a:solidFill>
                 <a:latin typeface="Microsoft JhengHei"/>
               </a:rPr>
-              <a:t>NVIDIA DGX Spark · 128 GB 統一記憶體 · A$7,100–8,900/台;瓶頸不是算力,是 273 GB/s 的記憶體頻寬</a:t>
+              <a:t>NVIDIA DGX Spark × 2 · 各 128 GB 統一記憶體 · A$14,200–17,700;瓶頸不是算力,是 273 GB/s 的記憶體頻寬</a:t>
             </a:r>
           </a:p>
         </p:txBody>
@@ -14720,7 +14725,7 @@
                           </a:solidFill>
                           <a:latin typeface="Microsoft JhengHei"/>
                         </a:rPr>
-                        <a:t>篩檢層 · 全量掃過</a:t>
+                        <a:t>① 篩檢台 · 全量掃過</a:t>
                       </a:r>
                     </a:p>
                   </a:txBody>
@@ -14743,7 +14748,7 @@
                           </a:solidFill>
                           <a:latin typeface="Microsoft JhengHei"/>
                         </a:rPr>
-                        <a:t>深挖層 · 只跑爭議</a:t>
+                        <a:t>② 深挖台 · 只跑爭議</a:t>
                       </a:r>
                     </a:p>
                   </a:txBody>
@@ -14768,7 +14773,7 @@
                           </a:solidFill>
                           <a:latin typeface="Microsoft JhengHei"/>
                         </a:rPr>
-                        <a:t>模型</a:t>
+                        <a:t>常駐模型</a:t>
                       </a:r>
                     </a:p>
                   </a:txBody>
@@ -14910,7 +14915,7 @@
                           </a:solidFill>
                           <a:latin typeface="Microsoft JhengHei"/>
                         </a:rPr>
-                        <a:t>這一層只做</a:t>
+                        <a:t>這一台只做</a:t>
                       </a:r>
                     </a:p>
                   </a:txBody>
@@ -15146,7 +15151,7 @@
                           </a:solidFill>
                           <a:latin typeface="Microsoft JhengHei"/>
                         </a:rPr>
-                        <a:t>3,000 筆 → 2.8 小時</a:t>
+                        <a:t>3,000 筆 → 2.8 小時(佔 12%)</a:t>
                       </a:r>
                     </a:p>
                   </a:txBody>
@@ -15169,7 +15174,7 @@
                           </a:solidFill>
                           <a:latin typeface="Microsoft JhengHei"/>
                         </a:rPr>
-                        <a:t>150–300 筆 → 2.6–5.1 小時</a:t>
+                        <a:t>150–300 筆 → 2.6–5.1 小時(佔 11–21%)</a:t>
                       </a:r>
                     </a:p>
                   </a:txBody>
@@ -15199,7 +15204,7 @@
             <a:avLst/>
           </a:prstGeom>
           <a:solidFill>
-            <a:srgbClr val="1F4E79"/>
+            <a:srgbClr val="C00000"/>
           </a:solidFill>
           <a:ln>
             <a:noFill/>
@@ -15262,7 +15267,7 @@
                 </a:solidFill>
                 <a:latin typeface="Microsoft JhengHei"/>
               </a:rPr>
-              <a:t>為什麼分兩層</a:t>
+              <a:t>為什麼兩台不是一台</a:t>
             </a:r>
           </a:p>
         </p:txBody>
@@ -15297,11 +15302,11 @@
             <a:r>
               <a:rPr sz="1500" b="1">
                 <a:solidFill>
-                  <a:srgbClr val="1F4E79"/>
+                  <a:srgbClr val="C00000"/>
                 </a:solidFill>
                 <a:latin typeface="Microsoft JhengHei"/>
               </a:rPr>
-              <a:t>讀小字要高解析度,高解析度就慢</a:t>
+              <a:t>兩個模型各佔約 75 GB</a:t>
             </a:r>
           </a:p>
         </p:txBody>
@@ -15340,7 +15345,7 @@
                 </a:solidFill>
                 <a:latin typeface="Microsoft JhengHei"/>
               </a:rPr>
-              <a:t>篩檢不讀小字,只挑出要深看的;讀小字只花在爭議那 5–10%</a:t>
+              <a:t>一台只有 128 GB,兩個模型得輪流載入;兩台就各自常駐,不用換載</a:t>
             </a:r>
           </a:p>
         </p:txBody>
@@ -15423,7 +15428,7 @@
                 </a:solidFill>
                 <a:latin typeface="Microsoft JhengHei"/>
               </a:rPr>
-              <a:t>為什麼分時載入</a:t>
+              <a:t>為什麼分兩層</a:t>
             </a:r>
           </a:p>
         </p:txBody>
@@ -15462,7 +15467,7 @@
                 </a:solidFill>
                 <a:latin typeface="Microsoft JhengHei"/>
               </a:rPr>
-              <a:t>75 + 75 GB &gt; 128 GB</a:t>
+              <a:t>讀小字要高解析度,高解析度就慢</a:t>
             </a:r>
           </a:p>
         </p:txBody>
@@ -15501,7 +15506,7 @@
                 </a:solidFill>
                 <a:latin typeface="Microsoft JhengHei"/>
               </a:rPr>
-              <a:t>兩個模型不同時常駐,同一台設備輪流載入</a:t>
+              <a:t>篩檢不讀小字,只挑出要深看的;讀小字只花在爭議那 5–10%</a:t>
             </a:r>
           </a:p>
         </p:txBody>
@@ -15521,7 +15526,7 @@
             <a:avLst/>
           </a:prstGeom>
           <a:solidFill>
-            <a:srgbClr val="C00000"/>
+            <a:srgbClr val="1F4E79"/>
           </a:solidFill>
           <a:ln>
             <a:noFill/>
@@ -15584,7 +15589,7 @@
                 </a:solidFill>
                 <a:latin typeface="Microsoft JhengHei"/>
               </a:rPr>
-              <a:t>要幾台</a:t>
+              <a:t>成長空間</a:t>
             </a:r>
           </a:p>
         </p:txBody>
@@ -15619,11 +15624,11 @@
             <a:r>
               <a:rPr sz="1500" b="1">
                 <a:solidFill>
-                  <a:srgbClr val="C00000"/>
+                  <a:srgbClr val="1F4E79"/>
                 </a:solidFill>
                 <a:latin typeface="Microsoft JhengHei"/>
               </a:rPr>
-              <a:t>1 台一個車隊 · 2 台全客戶</a:t>
+              <a:t>全客戶 13,000 筆/天也撐得住</a:t>
             </a:r>
           </a:p>
         </p:txBody>
@@ -15662,7 +15667,7 @@
                 </a:solidFill>
                 <a:latin typeface="Microsoft JhengHei"/>
               </a:rPr>
-              <a:t>一個車隊 1 台 · 全客戶 2 台 · 720p 篩檢 3 台,G1 定</a:t>
+              <a:t>篩檢台佔 51%、深挖台佔 46%–93%;再上去才需要第三台</a:t>
             </a:r>
           </a:p>
         </p:txBody>
@@ -15675,8 +15680,8 @@
         </p:nvSpPr>
         <p:spPr>
           <a:xfrm>
-            <a:off x="658368" y="5831778"/>
-            <a:ext cx="9658807" cy="678749"/>
+            <a:off x="658368" y="5864354"/>
+            <a:ext cx="9658807" cy="646173"/>
           </a:xfrm>
           <a:prstGeom prst="roundRect">
             <a:avLst>
@@ -15721,8 +15726,8 @@
         </p:nvSpPr>
         <p:spPr>
           <a:xfrm>
-            <a:off x="841247" y="5831778"/>
-            <a:ext cx="9293047" cy="678749"/>
+            <a:off x="841247" y="5864354"/>
+            <a:ext cx="9293047" cy="646173"/>
           </a:xfrm>
           <a:prstGeom prst="rect">
             <a:avLst/>
@@ -15747,7 +15752,7 @@
                 </a:solidFill>
                 <a:latin typeface="Microsoft JhengHei"/>
               </a:rPr>
-              <a:t>同一車隊、同一天:人 29.8–42.9 人時(產能 40)· 機器 5.4–8.0 小時,一台,佔用 23%–33%</a:t>
+              <a:t>同一車隊、同一天:人 29.8–42.9 人時(產能 40)· 兩台機器各只用掉一到二成</a:t>
             </a:r>
           </a:p>
         </p:txBody>

--- a/Artificial Intelligence for Enterprises/Assessment3/Huang_26254793_421104_Assessment 3.pptx
+++ b/Artificial Intelligence for Enterprises/Assessment3/Huang_26254793_421104_Assessment 3.pptx
@@ -645,7 +645,7 @@
           <a:lstStyle/>
           <a:p>
             <a:r>
-              <a:t>【第 10 頁 · P8 · 怎麼算成功:三層 KPI,一條回圈】　目標 46 秒 · 累計 9:10</a:t>
+              <a:t>【第 10 頁 · P8 · 怎麼算成功:三層 KPI,一條回圈】　目標 46 秒 · 累計 9:21</a:t>
             </a:r>
           </a:p>
           <a:p/>
@@ -782,7 +782,7 @@
           <a:lstStyle/>
           <a:p>
             <a:r>
-              <a:t>【第 11 頁 · P9 · 六個月 · 六個工作包 · 三道決策門】　目標 47 秒 · 累計 9:58</a:t>
+              <a:t>【第 11 頁 · P9 · 六個月 · 六個工作包 · 三道決策門】　目標 47 秒 · 累計 10:08</a:t>
             </a:r>
           </a:p>
           <a:p/>
@@ -934,7 +934,7 @@
           <a:lstStyle/>
           <a:p>
             <a:r>
-              <a:t>【第 12 頁 · P10 · 資源、當責與請求】　目標 64 秒 · 累計 11:01</a:t>
+              <a:t>【第 12 頁 · P10 · 資源、當責與請求】　目標 64 秒 · 累計 11:12</a:t>
             </a:r>
           </a:p>
           <a:p/>
@@ -1106,7 +1106,7 @@
           <a:lstStyle/>
           <a:p>
             <a:r>
-              <a:t>【第 13 頁 · 參考文獻(第 11 頁 — 不佔十頁額度)】　目標 5 秒 · 累計 11:06</a:t>
+              <a:t>【第 13 頁 · 參考文獻(第 11 頁 — 不佔十頁額度)】　目標 5 秒 · 累計 11:16</a:t>
             </a:r>
           </a:p>
           <a:p/>
@@ -1514,35 +1514,40 @@
           <a:lstStyle/>
           <a:p>
             <a:r>
-              <a:t>【第 4 頁 · P3 · 發現過程:兩種病,兩個缺口】　目標 52 秒 · 累計 3:55</a:t>
+              <a:t>【第 4 頁 · P3 · 發現過程:兩種病,兩個缺口】　目標 62 秒 · 累計 4:05</a:t>
             </a:r>
           </a:p>
           <a:p/>
           <a:p>
             <a:r>
-              <a:t>★ 一百二十四筆誤報,一百零三筆是同一個根因 —— 而修它要的速限資料,公司手上已經有了。</a:t>
+              <a:t>★ 每台車每工作日 17.9 筆 —— 五個人吃得下 5–7 個小車隊,但一個大型車隊就滿了。</a:t>
             </a:r>
           </a:p>
           <a:p/>
           <a:p>
             <a:r>
-              <a:t>· 行車輔助錯的是模型(缺脈絡),駕駛監控錯的是人(缺判準)—— 兩種病,兩種修法</a:t>
-            </a:r>
-          </a:p>
-          <a:p>
-            <a:r>
-              <a:t>· 兩個比例共用同一把尺,而尺的一致性從來沒量過</a:t>
-            </a:r>
-          </a:p>
-          <a:p>
-            <a:r>
-              <a:t>· 解它要的東西是速限資料 —— 公司既有資產,不用等新技術也不用買</a:t>
+              <a:t>· 兩種病要兩種修法:行車輔助缺脈絡(WP-C)、駕駛監控缺判準(WP-B)——這就是為什麼標註跟脈絡排在 AI 前面</a:t>
+            </a:r>
+          </a:p>
+          <a:p>
+            <a:r>
+              <a:t>· 同比例放大:4 台 1,647 筆 → 30 台 12,352 筆 → 168 台 69,174 筆(月,23 工作天)</a:t>
+            </a:r>
+          </a:p>
+          <a:p>
+            <a:r>
+              <a:t>· 誤報 124 筆裡 103 筆同一個根因;修它要的速限資料是公司既有資產</a:t>
             </a:r>
           </a:p>
           <a:p/>
           <a:p>
             <a:r>
-              <a:t># 4 台車 · 23 天 · 1,647 筆</a:t>
+              <a:t># 每台車每工作日 17.9 筆(1,647 ÷ 23 ÷ 4)</a:t>
+            </a:r>
+          </a:p>
+          <a:p>
+            <a:r>
+              <a:t># 人工佔產能 2%–3% → 13%–19% → 75%–108%</a:t>
             </a:r>
           </a:p>
           <a:p>
@@ -1550,11 +1555,6 @@
               <a:t># 103 / 124 = 83%</a:t>
             </a:r>
           </a:p>
-          <a:p>
-            <a:r>
-              <a:t># 5 人 × 3.6 個分析日 × 8 小時 = 144 人時 ÷ 1,647 筆 = 5.25 分</a:t>
-            </a:r>
-          </a:p>
           <a:p/>
           <a:p>
             <a:r>
@@ -1563,7 +1563,7 @@
           </a:p>
           <a:p>
             <a:r>
-              <a:t>⚠️ 5.25 分是「單一批次的實際節奏,不是長期平均」</a:t>
+              <a:t>⚠️ 放大列一定要接「同比例外推,W1–6 驗」——4 台車的錯誤樣態能不能代表 168 台,正是第六週要量的第一件事</a:t>
             </a:r>
           </a:p>
           <a:p>
@@ -1571,6 +1571,11 @@
               <a:t>⚠️ 🚫 不可把 83% 跟第 2 頁的 2:8 相乘 —— 不同樣本、都是估計</a:t>
             </a:r>
           </a:p>
+          <a:p>
+            <a:r>
+              <a:t>⚠️ 他若問「168 台哪來的」:3,000 筆/天 ÷ 每車每工作日 17.9 筆</a:t>
+            </a:r>
+          </a:p>
           <a:p/>
           <a:p>
             <a:r>
@@ -1580,28 +1585,18 @@
           <a:p/>
           <a:p>
             <a:r>
-              <a:t>── 逐字備援 · 230 字(忘詞才看,不是拿來唸的)──</a:t>
-            </a:r>
-          </a:p>
-          <a:p>
-            <a:r>
-              <a:t>那我們的時間到底花在哪裡?我把最近一份判讀拆開來看。四台車、二十三天、一千六百四十七筆,一個小型車隊一個月,比例僅在此樣本內成立。行車輔助錯的是模型,駕駛監控錯的是人。一邊缺脈絡,判定依據不在畫面裡;一邊缺判準,同一段影片兩人不同答案。這兩個比例共用同一把尺,而那把尺的一致性我們從來沒量過——標註品質那一包第十週建立基線,G2 訂目標值。這個樣本一百二十四筆誤報,一百零三筆同一個根因:交通標誌辨識,八成三。漏放那一側只有一份很薄的樣本,下一頁講。修好它,誤報跟漏放一起改善——而誤報,就是我們今天在人工端花掉的時間。</a:t>
+              <a:t>── 逐字備援 · 275 字(忘詞才看,不是拿來唸的)──</a:t>
+            </a:r>
+          </a:p>
+          <a:p>
+            <a:r>
+              <a:t>那我們的時間到底花在哪裡?我把最近一份判讀拆開來看 ——四台車、二十三個工作天、一千六百四十七筆,一個小型車隊一個月;以下所有比例僅在這個樣本內成立。上面這張表是兩種病:行車輔助錯的是模型,缺的是脈絡;駕駛監控錯的是人,缺的是判準 —— 兩種病要兩種修法,所以標註跟脈絡是兩個不同的工作包,而且都排在 AI 前面。下面這張是同比例放大:每台車每個工作日大約十七點九筆。各位看最後一列,人工佔產能從百分之二三,到百分之十三到十九,再到一個大型車隊的百分之七十五到一百零八 ——五個人吃得下五到七個小車隊,但一個大型車隊就滿了。而這一百二十四筆誤報裡,一百零三筆是同一個根因:交通標誌辨識,八成三。修它要的速限資料,公司手上就有。</a:t>
             </a:r>
           </a:p>
           <a:p/>
           <a:p>
             <a:r>
               <a:t>── 備查(不唸,答辯用)──</a:t>
-            </a:r>
-          </a:p>
-          <a:p>
-            <a:r>
-              <a:t>【rows】{'label': '該樣本全部誤報', 'value': '124 筆 = 行車輔助 104 + 駕駛監控 20', 'note': '母體換算:效益與衡量那頁用的「104 / 1,029 ≈ 10.1%」只算 ADAS 那一側 —— 兩頁分子不同不是矛盾,是母體不同', 'hot': False}</a:t>
-            </a:r>
-          </a:p>
-          <a:p>
-            <a:r>
-              <a:t>【rows】{'label': '漏放那一側', 'value': '只有一份很薄的獨立樣本', 'note': '另一個母體,不與本頁比例混用;下一頁講', 'hot': False}</a:t>
             </a:r>
           </a:p>
           <a:p>
@@ -1676,7 +1671,7 @@
           <a:lstStyle/>
           <a:p>
             <a:r>
-              <a:t>【第 5 頁 · 選型與部署:兩層模型、一台設備】　目標 66 秒 · 累計 5:01</a:t>
+              <a:t>【第 5 頁 · 選型與部署:兩層模型、一台設備】　目標 66 秒 · 累計 5:11</a:t>
             </a:r>
           </a:p>
           <a:p/>
@@ -1848,7 +1843,7 @@
           <a:lstStyle/>
           <a:p>
             <a:r>
-              <a:t>【第 6 頁 · P4 · 我們看不見的那一半:有資料,沒有習慣】　目標 59 秒 · 累計 6:00</a:t>
+              <a:t>【第 6 頁 · P4 · 我們看不見的那一半:有資料,沒有習慣】　目標 59 秒 · 累計 6:10</a:t>
             </a:r>
           </a:p>
           <a:p/>
@@ -2030,7 +2025,7 @@
           <a:lstStyle/>
           <a:p>
             <a:r>
-              <a:t>【第 7 頁 · P5 · 五條路,含三條不用 AI】　目標 44 秒 · 累計 6:44</a:t>
+              <a:t>【第 7 頁 · P5 · 五條路,含三條不用 AI】　目標 44 秒 · 累計 6:54</a:t>
             </a:r>
           </a:p>
           <a:p/>
@@ -2172,7 +2167,7 @@
           <a:lstStyle/>
           <a:p>
             <a:r>
-              <a:t>【第 8 頁 · P6 · 風險:七類十條,緩解位移與殘餘風險】　目標 51 秒 · 累計 7:35</a:t>
+              <a:t>【第 8 頁 · P6 · 風險:七類十條,緩解位移與殘餘風險】　目標 51 秒 · 累計 7:45</a:t>
             </a:r>
           </a:p>
           <a:p/>
@@ -2325,7 +2320,7 @@
           <a:lstStyle/>
           <a:p>
             <a:r>
-              <a:t>【第 9 頁 · P7 · 倫理與可申訴性:對照澳洲 AI 倫理八原則】　目標 50 秒 · 累計 8:25</a:t>
+              <a:t>【第 9 頁 · P7 · 倫理與可申訴性:對照澳洲 AI 倫理八原則】　目標 50 秒 · 累計 8:35</a:t>
             </a:r>
           </a:p>
           <a:p/>
@@ -13467,7 +13462,7 @@
                 </a:solidFill>
                 <a:latin typeface="Microsoft JhengHei"/>
               </a:rPr>
-              <a:t>誤報的八成三,回到同一個根因</a:t>
+              <a:t>誤報的八成三回到同一個根因 —— 修它要的速限資料我們手上就有</a:t>
             </a:r>
           </a:p>
         </p:txBody>
@@ -13506,7 +13501,7 @@
                 </a:solidFill>
                 <a:latin typeface="Microsoft JhengHei"/>
               </a:rPr>
-              <a:t>這一件 1,647 筆的判讀吃掉 5 人 3.6 個工作日 = 144 人時</a:t>
+              <a:t>樣本:4 台車 · 23 個工作天 · 1,647 筆;以下比例僅在此樣本內成立,W1–6 驗</a:t>
             </a:r>
           </a:p>
         </p:txBody>
@@ -13555,16 +13550,967 @@
           </a:p>
         </p:txBody>
       </p:sp>
-      <p:sp>
-        <p:nvSpPr>
-          <p:cNvPr id="6" name="Rounded Rectangle 5"/>
+      <p:graphicFrame>
+        <p:nvGraphicFramePr>
+          <p:cNvPr id="6" name="Table 5"/>
+          <p:cNvGraphicFramePr>
+            <a:graphicFrameLocks noGrp="1"/>
+          </p:cNvGraphicFramePr>
+          <p:nvPr/>
+        </p:nvGraphicFramePr>
+        <p:xfrm>
+          <a:off x="658368" y="1755648"/>
+          <a:ext cx="10874959" cy="1792224"/>
+        </p:xfrm>
+        <a:graphic>
+          <a:graphicData uri="http://schemas.openxmlformats.org/drawingml/2006/table">
+            <a:tbl>
+              <a:tblPr firstRow="1">
+                <a:tableStyleId>{5C22544A-7EE6-4342-B048-85BDC9FD1C3A}</a:tableStyleId>
+              </a:tblPr>
+              <a:tblGrid>
+                <a:gridCol w="2392491"/>
+                <a:gridCol w="4241234"/>
+                <a:gridCol w="4241234"/>
+              </a:tblGrid>
+              <a:tr h="329184">
+                <a:tc>
+                  <a:txBody>
+                    <a:bodyPr/>
+                    <a:lstStyle/>
+                    <a:p>
+                      <a:pPr algn="l"/>
+                      <a:r>
+                        <a:rPr sz="1200" b="1">
+                          <a:solidFill>
+                            <a:srgbClr val="FFFFFF"/>
+                          </a:solidFill>
+                          <a:latin typeface="Microsoft JhengHei"/>
+                        </a:rPr>
+                        <a:t>兩種病</a:t>
+                      </a:r>
+                    </a:p>
+                  </a:txBody>
+                  <a:tcPr marL="45720" marR="45720" marT="18288" marB="18288" anchor="ctr">
+                    <a:solidFill>
+                      <a:srgbClr val="1F4E79"/>
+                    </a:solidFill>
+                  </a:tcPr>
+                </a:tc>
+                <a:tc>
+                  <a:txBody>
+                    <a:bodyPr/>
+                    <a:lstStyle/>
+                    <a:p>
+                      <a:pPr algn="ctr"/>
+                      <a:r>
+                        <a:rPr sz="1200" b="1">
+                          <a:solidFill>
+                            <a:srgbClr val="FFFFFF"/>
+                          </a:solidFill>
+                          <a:latin typeface="Microsoft JhengHei"/>
+                        </a:rPr>
+                        <a:t>ADAS · 行車輔助</a:t>
+                      </a:r>
+                    </a:p>
+                  </a:txBody>
+                  <a:tcPr marL="45720" marR="45720" marT="18288" marB="18288" anchor="ctr">
+                    <a:solidFill>
+                      <a:srgbClr val="1F4E79"/>
+                    </a:solidFill>
+                  </a:tcPr>
+                </a:tc>
+                <a:tc>
+                  <a:txBody>
+                    <a:bodyPr/>
+                    <a:lstStyle/>
+                    <a:p>
+                      <a:pPr algn="ctr"/>
+                      <a:r>
+                        <a:rPr sz="1200" b="1">
+                          <a:solidFill>
+                            <a:srgbClr val="FFFFFF"/>
+                          </a:solidFill>
+                          <a:latin typeface="Microsoft JhengHei"/>
+                        </a:rPr>
+                        <a:t>DMS · 駕駛監控</a:t>
+                      </a:r>
+                    </a:p>
+                  </a:txBody>
+                  <a:tcPr marL="45720" marR="45720" marT="18288" marB="18288" anchor="ctr">
+                    <a:solidFill>
+                      <a:srgbClr val="1F4E79"/>
+                    </a:solidFill>
+                  </a:tcPr>
+                </a:tc>
+              </a:tr>
+              <a:tr h="292608">
+                <a:tc>
+                  <a:txBody>
+                    <a:bodyPr/>
+                    <a:lstStyle/>
+                    <a:p>
+                      <a:pPr algn="l"/>
+                      <a:r>
+                        <a:rPr sz="1200" b="0">
+                          <a:solidFill>
+                            <a:srgbClr val="16212E"/>
+                          </a:solidFill>
+                          <a:latin typeface="Microsoft JhengHei"/>
+                        </a:rPr>
+                        <a:t>事件量(該樣本)</a:t>
+                      </a:r>
+                    </a:p>
+                  </a:txBody>
+                  <a:tcPr marL="45720" marR="45720" marT="18288" marB="18288" anchor="ctr">
+                    <a:solidFill>
+                      <a:srgbClr val="FFFFFF"/>
+                    </a:solidFill>
+                  </a:tcPr>
+                </a:tc>
+                <a:tc>
+                  <a:txBody>
+                    <a:bodyPr/>
+                    <a:lstStyle/>
+                    <a:p>
+                      <a:pPr algn="ctr"/>
+                      <a:r>
+                        <a:rPr sz="1200" b="0">
+                          <a:solidFill>
+                            <a:srgbClr val="6B7885"/>
+                          </a:solidFill>
+                          <a:latin typeface="Microsoft JhengHei"/>
+                        </a:rPr>
+                        <a:t>1,029 筆</a:t>
+                      </a:r>
+                    </a:p>
+                  </a:txBody>
+                  <a:tcPr marL="45720" marR="45720" marT="18288" marB="18288" anchor="ctr">
+                    <a:solidFill>
+                      <a:srgbClr val="FFFFFF"/>
+                    </a:solidFill>
+                  </a:tcPr>
+                </a:tc>
+                <a:tc>
+                  <a:txBody>
+                    <a:bodyPr/>
+                    <a:lstStyle/>
+                    <a:p>
+                      <a:pPr algn="ctr"/>
+                      <a:r>
+                        <a:rPr sz="1200" b="0">
+                          <a:solidFill>
+                            <a:srgbClr val="6B7885"/>
+                          </a:solidFill>
+                          <a:latin typeface="Microsoft JhengHei"/>
+                        </a:rPr>
+                        <a:t>618 筆</a:t>
+                      </a:r>
+                    </a:p>
+                  </a:txBody>
+                  <a:tcPr marL="45720" marR="45720" marT="18288" marB="18288" anchor="ctr">
+                    <a:solidFill>
+                      <a:srgbClr val="FFFFFF"/>
+                    </a:solidFill>
+                  </a:tcPr>
+                </a:tc>
+              </a:tr>
+              <a:tr h="292608">
+                <a:tc>
+                  <a:txBody>
+                    <a:bodyPr/>
+                    <a:lstStyle/>
+                    <a:p>
+                      <a:pPr algn="l"/>
+                      <a:r>
+                        <a:rPr sz="1200" b="1">
+                          <a:solidFill>
+                            <a:srgbClr val="C00000"/>
+                          </a:solidFill>
+                          <a:latin typeface="Microsoft JhengHei"/>
+                        </a:rPr>
+                        <a:t>其中誤報</a:t>
+                      </a:r>
+                    </a:p>
+                  </a:txBody>
+                  <a:tcPr marL="45720" marR="45720" marT="18288" marB="18288" anchor="ctr">
+                    <a:solidFill>
+                      <a:srgbClr val="FBEFEF"/>
+                    </a:solidFill>
+                  </a:tcPr>
+                </a:tc>
+                <a:tc>
+                  <a:txBody>
+                    <a:bodyPr/>
+                    <a:lstStyle/>
+                    <a:p>
+                      <a:pPr algn="ctr"/>
+                      <a:r>
+                        <a:rPr sz="1200" b="0">
+                          <a:solidFill>
+                            <a:srgbClr val="C00000"/>
+                          </a:solidFill>
+                          <a:latin typeface="Microsoft JhengHei"/>
+                        </a:rPr>
+                        <a:t>104 筆(10.1%)</a:t>
+                      </a:r>
+                    </a:p>
+                  </a:txBody>
+                  <a:tcPr marL="45720" marR="45720" marT="18288" marB="18288" anchor="ctr">
+                    <a:solidFill>
+                      <a:srgbClr val="FBEFEF"/>
+                    </a:solidFill>
+                  </a:tcPr>
+                </a:tc>
+                <a:tc>
+                  <a:txBody>
+                    <a:bodyPr/>
+                    <a:lstStyle/>
+                    <a:p>
+                      <a:pPr algn="ctr"/>
+                      <a:r>
+                        <a:rPr sz="1200" b="0">
+                          <a:solidFill>
+                            <a:srgbClr val="C00000"/>
+                          </a:solidFill>
+                          <a:latin typeface="Microsoft JhengHei"/>
+                        </a:rPr>
+                        <a:t>20 筆(3.2%)</a:t>
+                      </a:r>
+                    </a:p>
+                  </a:txBody>
+                  <a:tcPr marL="45720" marR="45720" marT="18288" marB="18288" anchor="ctr">
+                    <a:solidFill>
+                      <a:srgbClr val="FBEFEF"/>
+                    </a:solidFill>
+                  </a:tcPr>
+                </a:tc>
+              </a:tr>
+              <a:tr h="292608">
+                <a:tc>
+                  <a:txBody>
+                    <a:bodyPr/>
+                    <a:lstStyle/>
+                    <a:p>
+                      <a:pPr algn="l"/>
+                      <a:r>
+                        <a:rPr sz="1200" b="1">
+                          <a:solidFill>
+                            <a:srgbClr val="C00000"/>
+                          </a:solidFill>
+                          <a:latin typeface="Microsoft JhengHei"/>
+                        </a:rPr>
+                        <a:t>錯的是誰</a:t>
+                      </a:r>
+                    </a:p>
+                  </a:txBody>
+                  <a:tcPr marL="45720" marR="45720" marT="18288" marB="18288" anchor="ctr">
+                    <a:solidFill>
+                      <a:srgbClr val="FBEFEF"/>
+                    </a:solidFill>
+                  </a:tcPr>
+                </a:tc>
+                <a:tc>
+                  <a:txBody>
+                    <a:bodyPr/>
+                    <a:lstStyle/>
+                    <a:p>
+                      <a:pPr algn="ctr"/>
+                      <a:r>
+                        <a:rPr sz="1200" b="0">
+                          <a:solidFill>
+                            <a:srgbClr val="C00000"/>
+                          </a:solidFill>
+                          <a:latin typeface="Microsoft JhengHei"/>
+                        </a:rPr>
+                        <a:t>模型</a:t>
+                      </a:r>
+                    </a:p>
+                  </a:txBody>
+                  <a:tcPr marL="45720" marR="45720" marT="18288" marB="18288" anchor="ctr">
+                    <a:solidFill>
+                      <a:srgbClr val="FBEFEF"/>
+                    </a:solidFill>
+                  </a:tcPr>
+                </a:tc>
+                <a:tc>
+                  <a:txBody>
+                    <a:bodyPr/>
+                    <a:lstStyle/>
+                    <a:p>
+                      <a:pPr algn="ctr"/>
+                      <a:r>
+                        <a:rPr sz="1200" b="0">
+                          <a:solidFill>
+                            <a:srgbClr val="C00000"/>
+                          </a:solidFill>
+                          <a:latin typeface="Microsoft JhengHei"/>
+                        </a:rPr>
+                        <a:t>人</a:t>
+                      </a:r>
+                    </a:p>
+                  </a:txBody>
+                  <a:tcPr marL="45720" marR="45720" marT="18288" marB="18288" anchor="ctr">
+                    <a:solidFill>
+                      <a:srgbClr val="FBEFEF"/>
+                    </a:solidFill>
+                  </a:tcPr>
+                </a:tc>
+              </a:tr>
+              <a:tr h="292608">
+                <a:tc>
+                  <a:txBody>
+                    <a:bodyPr/>
+                    <a:lstStyle/>
+                    <a:p>
+                      <a:pPr algn="l"/>
+                      <a:r>
+                        <a:rPr sz="1200" b="0">
+                          <a:solidFill>
+                            <a:srgbClr val="16212E"/>
+                          </a:solidFill>
+                          <a:latin typeface="Microsoft JhengHei"/>
+                        </a:rPr>
+                        <a:t>缺什麼</a:t>
+                      </a:r>
+                    </a:p>
+                  </a:txBody>
+                  <a:tcPr marL="45720" marR="45720" marT="18288" marB="18288" anchor="ctr">
+                    <a:solidFill>
+                      <a:srgbClr val="FFFFFF"/>
+                    </a:solidFill>
+                  </a:tcPr>
+                </a:tc>
+                <a:tc>
+                  <a:txBody>
+                    <a:bodyPr/>
+                    <a:lstStyle/>
+                    <a:p>
+                      <a:pPr algn="ctr"/>
+                      <a:r>
+                        <a:rPr sz="1200" b="0">
+                          <a:solidFill>
+                            <a:srgbClr val="6B7885"/>
+                          </a:solidFill>
+                          <a:latin typeface="Microsoft JhengHei"/>
+                        </a:rPr>
+                        <a:t>脈絡:判定依據不在畫面裡</a:t>
+                      </a:r>
+                    </a:p>
+                  </a:txBody>
+                  <a:tcPr marL="45720" marR="45720" marT="18288" marB="18288" anchor="ctr">
+                    <a:solidFill>
+                      <a:srgbClr val="FFFFFF"/>
+                    </a:solidFill>
+                  </a:tcPr>
+                </a:tc>
+                <a:tc>
+                  <a:txBody>
+                    <a:bodyPr/>
+                    <a:lstStyle/>
+                    <a:p>
+                      <a:pPr algn="ctr"/>
+                      <a:r>
+                        <a:rPr sz="1200" b="0">
+                          <a:solidFill>
+                            <a:srgbClr val="6B7885"/>
+                          </a:solidFill>
+                          <a:latin typeface="Microsoft JhengHei"/>
+                        </a:rPr>
+                        <a:t>判準:同一段影片,兩人不同標籤</a:t>
+                      </a:r>
+                    </a:p>
+                  </a:txBody>
+                  <a:tcPr marL="45720" marR="45720" marT="18288" marB="18288" anchor="ctr">
+                    <a:solidFill>
+                      <a:srgbClr val="FFFFFF"/>
+                    </a:solidFill>
+                  </a:tcPr>
+                </a:tc>
+              </a:tr>
+              <a:tr h="292608">
+                <a:tc>
+                  <a:txBody>
+                    <a:bodyPr/>
+                    <a:lstStyle/>
+                    <a:p>
+                      <a:pPr algn="l"/>
+                      <a:r>
+                        <a:rPr sz="1200" b="0">
+                          <a:solidFill>
+                            <a:srgbClr val="16212E"/>
+                          </a:solidFill>
+                          <a:latin typeface="Microsoft JhengHei"/>
+                        </a:rPr>
+                        <a:t>對應哪一包</a:t>
+                      </a:r>
+                    </a:p>
+                  </a:txBody>
+                  <a:tcPr marL="45720" marR="45720" marT="18288" marB="18288" anchor="ctr">
+                    <a:solidFill>
+                      <a:srgbClr val="FFFFFF"/>
+                    </a:solidFill>
+                  </a:tcPr>
+                </a:tc>
+                <a:tc>
+                  <a:txBody>
+                    <a:bodyPr/>
+                    <a:lstStyle/>
+                    <a:p>
+                      <a:pPr algn="ctr"/>
+                      <a:r>
+                        <a:rPr sz="1200" b="0">
+                          <a:solidFill>
+                            <a:srgbClr val="6B7885"/>
+                          </a:solidFill>
+                          <a:latin typeface="Microsoft JhengHei"/>
+                        </a:rPr>
+                        <a:t>WP-C 脈絡特徵</a:t>
+                      </a:r>
+                    </a:p>
+                  </a:txBody>
+                  <a:tcPr marL="45720" marR="45720" marT="18288" marB="18288" anchor="ctr">
+                    <a:solidFill>
+                      <a:srgbClr val="FFFFFF"/>
+                    </a:solidFill>
+                  </a:tcPr>
+                </a:tc>
+                <a:tc>
+                  <a:txBody>
+                    <a:bodyPr/>
+                    <a:lstStyle/>
+                    <a:p>
+                      <a:pPr algn="ctr"/>
+                      <a:r>
+                        <a:rPr sz="1200" b="0">
+                          <a:solidFill>
+                            <a:srgbClr val="6B7885"/>
+                          </a:solidFill>
+                          <a:latin typeface="Microsoft JhengHei"/>
+                        </a:rPr>
+                        <a:t>WP-B 標註品質</a:t>
+                      </a:r>
+                    </a:p>
+                  </a:txBody>
+                  <a:tcPr marL="45720" marR="45720" marT="18288" marB="18288" anchor="ctr">
+                    <a:solidFill>
+                      <a:srgbClr val="FFFFFF"/>
+                    </a:solidFill>
+                  </a:tcPr>
+                </a:tc>
+              </a:tr>
+            </a:tbl>
+          </a:graphicData>
+        </a:graphic>
+      </p:graphicFrame>
+      <p:graphicFrame>
+        <p:nvGraphicFramePr>
+          <p:cNvPr id="7" name="Table 6"/>
+          <p:cNvGraphicFramePr>
+            <a:graphicFrameLocks noGrp="1"/>
+          </p:cNvGraphicFramePr>
+          <p:nvPr/>
+        </p:nvGraphicFramePr>
+        <p:xfrm>
+          <a:off x="658368" y="3675887"/>
+          <a:ext cx="10874958" cy="1499616"/>
+        </p:xfrm>
+        <a:graphic>
+          <a:graphicData uri="http://schemas.openxmlformats.org/drawingml/2006/table">
+            <a:tbl>
+              <a:tblPr firstRow="1">
+                <a:tableStyleId>{5C22544A-7EE6-4342-B048-85BDC9FD1C3A}</a:tableStyleId>
+              </a:tblPr>
+              <a:tblGrid>
+                <a:gridCol w="2174991"/>
+                <a:gridCol w="2899989"/>
+                <a:gridCol w="2899989"/>
+                <a:gridCol w="2899989"/>
+              </a:tblGrid>
+              <a:tr h="329184">
+                <a:tc>
+                  <a:txBody>
+                    <a:bodyPr/>
+                    <a:lstStyle/>
+                    <a:p>
+                      <a:pPr algn="l"/>
+                      <a:r>
+                        <a:rPr sz="1200" b="1">
+                          <a:solidFill>
+                            <a:srgbClr val="FFFFFF"/>
+                          </a:solidFill>
+                          <a:latin typeface="Microsoft JhengHei"/>
+                        </a:rPr>
+                        <a:t>同比例放大</a:t>
+                      </a:r>
+                    </a:p>
+                  </a:txBody>
+                  <a:tcPr marL="45720" marR="45720" marT="18288" marB="18288" anchor="ctr">
+                    <a:solidFill>
+                      <a:srgbClr val="1F4E79"/>
+                    </a:solidFill>
+                  </a:tcPr>
+                </a:tc>
+                <a:tc>
+                  <a:txBody>
+                    <a:bodyPr/>
+                    <a:lstStyle/>
+                    <a:p>
+                      <a:pPr algn="ctr"/>
+                      <a:r>
+                        <a:rPr sz="1200" b="1">
+                          <a:solidFill>
+                            <a:srgbClr val="FFFFFF"/>
+                          </a:solidFill>
+                          <a:latin typeface="Microsoft JhengHei"/>
+                        </a:rPr>
+                        <a:t>4 台(樣本)</a:t>
+                      </a:r>
+                    </a:p>
+                  </a:txBody>
+                  <a:tcPr marL="45720" marR="45720" marT="18288" marB="18288" anchor="ctr">
+                    <a:solidFill>
+                      <a:srgbClr val="1F4E79"/>
+                    </a:solidFill>
+                  </a:tcPr>
+                </a:tc>
+                <a:tc>
+                  <a:txBody>
+                    <a:bodyPr/>
+                    <a:lstStyle/>
+                    <a:p>
+                      <a:pPr algn="ctr"/>
+                      <a:r>
+                        <a:rPr sz="1200" b="1">
+                          <a:solidFill>
+                            <a:srgbClr val="FFFFFF"/>
+                          </a:solidFill>
+                          <a:latin typeface="Microsoft JhengHei"/>
+                        </a:rPr>
+                        <a:t>30 台(小車隊)</a:t>
+                      </a:r>
+                    </a:p>
+                  </a:txBody>
+                  <a:tcPr marL="45720" marR="45720" marT="18288" marB="18288" anchor="ctr">
+                    <a:solidFill>
+                      <a:srgbClr val="1F4E79"/>
+                    </a:solidFill>
+                  </a:tcPr>
+                </a:tc>
+                <a:tc>
+                  <a:txBody>
+                    <a:bodyPr/>
+                    <a:lstStyle/>
+                    <a:p>
+                      <a:pPr algn="ctr"/>
+                      <a:r>
+                        <a:rPr sz="1200" b="1">
+                          <a:solidFill>
+                            <a:srgbClr val="FFFFFF"/>
+                          </a:solidFill>
+                          <a:latin typeface="Microsoft JhengHei"/>
+                        </a:rPr>
+                        <a:t>168 台(大型車隊)</a:t>
+                      </a:r>
+                    </a:p>
+                  </a:txBody>
+                  <a:tcPr marL="45720" marR="45720" marT="18288" marB="18288" anchor="ctr">
+                    <a:solidFill>
+                      <a:srgbClr val="1F4E79"/>
+                    </a:solidFill>
+                  </a:tcPr>
+                </a:tc>
+              </a:tr>
+              <a:tr h="292608">
+                <a:tc>
+                  <a:txBody>
+                    <a:bodyPr/>
+                    <a:lstStyle/>
+                    <a:p>
+                      <a:pPr algn="l"/>
+                      <a:r>
+                        <a:rPr sz="1200" b="0">
+                          <a:solidFill>
+                            <a:srgbClr val="16212E"/>
+                          </a:solidFill>
+                          <a:latin typeface="Microsoft JhengHei"/>
+                        </a:rPr>
+                        <a:t>月事件(23 工作天)</a:t>
+                      </a:r>
+                    </a:p>
+                  </a:txBody>
+                  <a:tcPr marL="45720" marR="45720" marT="18288" marB="18288" anchor="ctr">
+                    <a:solidFill>
+                      <a:srgbClr val="FFFFFF"/>
+                    </a:solidFill>
+                  </a:tcPr>
+                </a:tc>
+                <a:tc>
+                  <a:txBody>
+                    <a:bodyPr/>
+                    <a:lstStyle/>
+                    <a:p>
+                      <a:pPr algn="ctr"/>
+                      <a:r>
+                        <a:rPr sz="1200" b="0">
+                          <a:solidFill>
+                            <a:srgbClr val="6B7885"/>
+                          </a:solidFill>
+                          <a:latin typeface="Microsoft JhengHei"/>
+                        </a:rPr>
+                        <a:t>1,647 筆</a:t>
+                      </a:r>
+                    </a:p>
+                  </a:txBody>
+                  <a:tcPr marL="45720" marR="45720" marT="18288" marB="18288" anchor="ctr">
+                    <a:solidFill>
+                      <a:srgbClr val="FFFFFF"/>
+                    </a:solidFill>
+                  </a:tcPr>
+                </a:tc>
+                <a:tc>
+                  <a:txBody>
+                    <a:bodyPr/>
+                    <a:lstStyle/>
+                    <a:p>
+                      <a:pPr algn="ctr"/>
+                      <a:r>
+                        <a:rPr sz="1200" b="0">
+                          <a:solidFill>
+                            <a:srgbClr val="6B7885"/>
+                          </a:solidFill>
+                          <a:latin typeface="Microsoft JhengHei"/>
+                        </a:rPr>
+                        <a:t>12,352 筆</a:t>
+                      </a:r>
+                    </a:p>
+                  </a:txBody>
+                  <a:tcPr marL="45720" marR="45720" marT="18288" marB="18288" anchor="ctr">
+                    <a:solidFill>
+                      <a:srgbClr val="FFFFFF"/>
+                    </a:solidFill>
+                  </a:tcPr>
+                </a:tc>
+                <a:tc>
+                  <a:txBody>
+                    <a:bodyPr/>
+                    <a:lstStyle/>
+                    <a:p>
+                      <a:pPr algn="ctr"/>
+                      <a:r>
+                        <a:rPr sz="1200" b="0">
+                          <a:solidFill>
+                            <a:srgbClr val="6B7885"/>
+                          </a:solidFill>
+                          <a:latin typeface="Microsoft JhengHei"/>
+                        </a:rPr>
+                        <a:t>69,174 筆</a:t>
+                      </a:r>
+                    </a:p>
+                  </a:txBody>
+                  <a:tcPr marL="45720" marR="45720" marT="18288" marB="18288" anchor="ctr">
+                    <a:solidFill>
+                      <a:srgbClr val="FFFFFF"/>
+                    </a:solidFill>
+                  </a:tcPr>
+                </a:tc>
+              </a:tr>
+              <a:tr h="292608">
+                <a:tc>
+                  <a:txBody>
+                    <a:bodyPr/>
+                    <a:lstStyle/>
+                    <a:p>
+                      <a:pPr algn="l"/>
+                      <a:r>
+                        <a:rPr sz="1200" b="0">
+                          <a:solidFill>
+                            <a:srgbClr val="16212E"/>
+                          </a:solidFill>
+                          <a:latin typeface="Microsoft JhengHei"/>
+                        </a:rPr>
+                        <a:t>每天</a:t>
+                      </a:r>
+                    </a:p>
+                  </a:txBody>
+                  <a:tcPr marL="45720" marR="45720" marT="18288" marB="18288" anchor="ctr">
+                    <a:solidFill>
+                      <a:srgbClr val="FFFFFF"/>
+                    </a:solidFill>
+                  </a:tcPr>
+                </a:tc>
+                <a:tc>
+                  <a:txBody>
+                    <a:bodyPr/>
+                    <a:lstStyle/>
+                    <a:p>
+                      <a:pPr algn="ctr"/>
+                      <a:r>
+                        <a:rPr sz="1200" b="0">
+                          <a:solidFill>
+                            <a:srgbClr val="6B7885"/>
+                          </a:solidFill>
+                          <a:latin typeface="Microsoft JhengHei"/>
+                        </a:rPr>
+                        <a:t>72 筆</a:t>
+                      </a:r>
+                    </a:p>
+                  </a:txBody>
+                  <a:tcPr marL="45720" marR="45720" marT="18288" marB="18288" anchor="ctr">
+                    <a:solidFill>
+                      <a:srgbClr val="FFFFFF"/>
+                    </a:solidFill>
+                  </a:tcPr>
+                </a:tc>
+                <a:tc>
+                  <a:txBody>
+                    <a:bodyPr/>
+                    <a:lstStyle/>
+                    <a:p>
+                      <a:pPr algn="ctr"/>
+                      <a:r>
+                        <a:rPr sz="1200" b="0">
+                          <a:solidFill>
+                            <a:srgbClr val="6B7885"/>
+                          </a:solidFill>
+                          <a:latin typeface="Microsoft JhengHei"/>
+                        </a:rPr>
+                        <a:t>537 筆</a:t>
+                      </a:r>
+                    </a:p>
+                  </a:txBody>
+                  <a:tcPr marL="45720" marR="45720" marT="18288" marB="18288" anchor="ctr">
+                    <a:solidFill>
+                      <a:srgbClr val="FFFFFF"/>
+                    </a:solidFill>
+                  </a:tcPr>
+                </a:tc>
+                <a:tc>
+                  <a:txBody>
+                    <a:bodyPr/>
+                    <a:lstStyle/>
+                    <a:p>
+                      <a:pPr algn="ctr"/>
+                      <a:r>
+                        <a:rPr sz="1200" b="0">
+                          <a:solidFill>
+                            <a:srgbClr val="6B7885"/>
+                          </a:solidFill>
+                          <a:latin typeface="Microsoft JhengHei"/>
+                        </a:rPr>
+                        <a:t>3,008 筆</a:t>
+                      </a:r>
+                    </a:p>
+                  </a:txBody>
+                  <a:tcPr marL="45720" marR="45720" marT="18288" marB="18288" anchor="ctr">
+                    <a:solidFill>
+                      <a:srgbClr val="FFFFFF"/>
+                    </a:solidFill>
+                  </a:tcPr>
+                </a:tc>
+              </a:tr>
+              <a:tr h="292608">
+                <a:tc>
+                  <a:txBody>
+                    <a:bodyPr/>
+                    <a:lstStyle/>
+                    <a:p>
+                      <a:pPr algn="l"/>
+                      <a:r>
+                        <a:rPr sz="1200" b="1">
+                          <a:solidFill>
+                            <a:srgbClr val="C00000"/>
+                          </a:solidFill>
+                          <a:latin typeface="Microsoft JhengHei"/>
+                        </a:rPr>
+                        <a:t>月誤報 · 同根因</a:t>
+                      </a:r>
+                    </a:p>
+                  </a:txBody>
+                  <a:tcPr marL="45720" marR="45720" marT="18288" marB="18288" anchor="ctr">
+                    <a:solidFill>
+                      <a:srgbClr val="FBEFEF"/>
+                    </a:solidFill>
+                  </a:tcPr>
+                </a:tc>
+                <a:tc>
+                  <a:txBody>
+                    <a:bodyPr/>
+                    <a:lstStyle/>
+                    <a:p>
+                      <a:pPr algn="ctr"/>
+                      <a:r>
+                        <a:rPr sz="1200" b="0">
+                          <a:solidFill>
+                            <a:srgbClr val="C00000"/>
+                          </a:solidFill>
+                          <a:latin typeface="Microsoft JhengHei"/>
+                        </a:rPr>
+                        <a:t>124 · 103</a:t>
+                      </a:r>
+                    </a:p>
+                  </a:txBody>
+                  <a:tcPr marL="45720" marR="45720" marT="18288" marB="18288" anchor="ctr">
+                    <a:solidFill>
+                      <a:srgbClr val="FBEFEF"/>
+                    </a:solidFill>
+                  </a:tcPr>
+                </a:tc>
+                <a:tc>
+                  <a:txBody>
+                    <a:bodyPr/>
+                    <a:lstStyle/>
+                    <a:p>
+                      <a:pPr algn="ctr"/>
+                      <a:r>
+                        <a:rPr sz="1200" b="0">
+                          <a:solidFill>
+                            <a:srgbClr val="C00000"/>
+                          </a:solidFill>
+                          <a:latin typeface="Microsoft JhengHei"/>
+                        </a:rPr>
+                        <a:t>930 · 772</a:t>
+                      </a:r>
+                    </a:p>
+                  </a:txBody>
+                  <a:tcPr marL="45720" marR="45720" marT="18288" marB="18288" anchor="ctr">
+                    <a:solidFill>
+                      <a:srgbClr val="FBEFEF"/>
+                    </a:solidFill>
+                  </a:tcPr>
+                </a:tc>
+                <a:tc>
+                  <a:txBody>
+                    <a:bodyPr/>
+                    <a:lstStyle/>
+                    <a:p>
+                      <a:pPr algn="ctr"/>
+                      <a:r>
+                        <a:rPr sz="1200" b="0">
+                          <a:solidFill>
+                            <a:srgbClr val="C00000"/>
+                          </a:solidFill>
+                          <a:latin typeface="Microsoft JhengHei"/>
+                        </a:rPr>
+                        <a:t>5,208 · 4,326</a:t>
+                      </a:r>
+                    </a:p>
+                  </a:txBody>
+                  <a:tcPr marL="45720" marR="45720" marT="18288" marB="18288" anchor="ctr">
+                    <a:solidFill>
+                      <a:srgbClr val="FBEFEF"/>
+                    </a:solidFill>
+                  </a:tcPr>
+                </a:tc>
+              </a:tr>
+              <a:tr h="292608">
+                <a:tc>
+                  <a:txBody>
+                    <a:bodyPr/>
+                    <a:lstStyle/>
+                    <a:p>
+                      <a:pPr algn="l"/>
+                      <a:r>
+                        <a:rPr sz="1200" b="1">
+                          <a:solidFill>
+                            <a:srgbClr val="C00000"/>
+                          </a:solidFill>
+                          <a:latin typeface="Microsoft JhengHei"/>
+                        </a:rPr>
+                        <a:t>人工佔產能</a:t>
+                      </a:r>
+                    </a:p>
+                  </a:txBody>
+                  <a:tcPr marL="45720" marR="45720" marT="18288" marB="18288" anchor="ctr">
+                    <a:solidFill>
+                      <a:srgbClr val="FBEFEF"/>
+                    </a:solidFill>
+                  </a:tcPr>
+                </a:tc>
+                <a:tc>
+                  <a:txBody>
+                    <a:bodyPr/>
+                    <a:lstStyle/>
+                    <a:p>
+                      <a:pPr algn="ctr"/>
+                      <a:r>
+                        <a:rPr sz="1200" b="0">
+                          <a:solidFill>
+                            <a:srgbClr val="C00000"/>
+                          </a:solidFill>
+                          <a:latin typeface="Microsoft JhengHei"/>
+                        </a:rPr>
+                        <a:t>2%–3%</a:t>
+                      </a:r>
+                    </a:p>
+                  </a:txBody>
+                  <a:tcPr marL="45720" marR="45720" marT="18288" marB="18288" anchor="ctr">
+                    <a:solidFill>
+                      <a:srgbClr val="FBEFEF"/>
+                    </a:solidFill>
+                  </a:tcPr>
+                </a:tc>
+                <a:tc>
+                  <a:txBody>
+                    <a:bodyPr/>
+                    <a:lstStyle/>
+                    <a:p>
+                      <a:pPr algn="ctr"/>
+                      <a:r>
+                        <a:rPr sz="1200" b="0">
+                          <a:solidFill>
+                            <a:srgbClr val="C00000"/>
+                          </a:solidFill>
+                          <a:latin typeface="Microsoft JhengHei"/>
+                        </a:rPr>
+                        <a:t>13%–19%</a:t>
+                      </a:r>
+                    </a:p>
+                  </a:txBody>
+                  <a:tcPr marL="45720" marR="45720" marT="18288" marB="18288" anchor="ctr">
+                    <a:solidFill>
+                      <a:srgbClr val="FBEFEF"/>
+                    </a:solidFill>
+                  </a:tcPr>
+                </a:tc>
+                <a:tc>
+                  <a:txBody>
+                    <a:bodyPr/>
+                    <a:lstStyle/>
+                    <a:p>
+                      <a:pPr algn="ctr"/>
+                      <a:r>
+                        <a:rPr sz="1200" b="0">
+                          <a:solidFill>
+                            <a:srgbClr val="C00000"/>
+                          </a:solidFill>
+                          <a:latin typeface="Microsoft JhengHei"/>
+                        </a:rPr>
+                        <a:t>75%–108%</a:t>
+                      </a:r>
+                    </a:p>
+                  </a:txBody>
+                  <a:tcPr marL="45720" marR="45720" marT="18288" marB="18288" anchor="ctr">
+                    <a:solidFill>
+                      <a:srgbClr val="FBEFEF"/>
+                    </a:solidFill>
+                  </a:tcPr>
+                </a:tc>
+              </a:tr>
+            </a:tbl>
+          </a:graphicData>
+        </a:graphic>
+      </p:graphicFrame>
+      <p:sp>
+        <p:nvSpPr>
+          <p:cNvPr id="8" name="Rounded Rectangle 7"/>
           <p:cNvSpPr/>
           <p:nvPr/>
         </p:nvSpPr>
         <p:spPr>
           <a:xfrm>
-            <a:off x="658368" y="1755648"/>
-            <a:ext cx="10874959" cy="593376"/>
+            <a:off x="658368" y="5303520"/>
+            <a:ext cx="9658807" cy="1207008"/>
           </a:xfrm>
           <a:prstGeom prst="roundRect">
             <a:avLst>
@@ -13572,7 +14518,7 @@
             </a:avLst>
           </a:prstGeom>
           <a:solidFill>
-            <a:srgbClr val="6B7885"/>
+            <a:srgbClr val="1F4E79"/>
           </a:solidFill>
           <a:ln>
             <a:noFill/>
@@ -13603,14 +14549,14 @@
       </p:sp>
       <p:sp>
         <p:nvSpPr>
-          <p:cNvPr id="7" name="TextBox 6"/>
+          <p:cNvPr id="9" name="TextBox 8"/>
           <p:cNvSpPr txBox="1"/>
           <p:nvPr/>
         </p:nvSpPr>
         <p:spPr>
           <a:xfrm>
-            <a:off x="841247" y="1755648"/>
-            <a:ext cx="10509199" cy="593376"/>
+            <a:off x="841247" y="5303520"/>
+            <a:ext cx="9293047" cy="1207008"/>
           </a:xfrm>
           <a:prstGeom prst="rect">
             <a:avLst/>
@@ -13635,853 +14581,7 @@
                 </a:solidFill>
                 <a:latin typeface="Microsoft JhengHei"/>
               </a:rPr>
-              <a:t>樣本 4 台車 · 23 天 · 1,647 筆 = 一個小型車隊、一個月｜以下所有比例僅在此樣本內成立</a:t>
-            </a:r>
-          </a:p>
-        </p:txBody>
-      </p:sp>
-      <p:graphicFrame>
-        <p:nvGraphicFramePr>
-          <p:cNvPr id="8" name="Table 7"/>
-          <p:cNvGraphicFramePr>
-            <a:graphicFrameLocks noGrp="1"/>
-          </p:cNvGraphicFramePr>
-          <p:nvPr/>
-        </p:nvGraphicFramePr>
-        <p:xfrm>
-          <a:off x="658368" y="2477040"/>
-          <a:ext cx="10874957" cy="2084832"/>
-        </p:xfrm>
-        <a:graphic>
-          <a:graphicData uri="http://schemas.openxmlformats.org/drawingml/2006/table">
-            <a:tbl>
-              <a:tblPr firstRow="1">
-                <a:tableStyleId>{5C22544A-7EE6-4342-B048-85BDC9FD1C3A}</a:tableStyleId>
-              </a:tblPr>
-              <a:tblGrid>
-                <a:gridCol w="3262487"/>
-                <a:gridCol w="3806235"/>
-                <a:gridCol w="3806235"/>
-              </a:tblGrid>
-              <a:tr h="329184">
-                <a:tc>
-                  <a:txBody>
-                    <a:bodyPr/>
-                    <a:lstStyle/>
-                    <a:p>
-                      <a:pPr algn="l"/>
-                      <a:r>
-                        <a:rPr sz="1200" b="1">
-                          <a:solidFill>
-                            <a:srgbClr val="FFFFFF"/>
-                          </a:solidFill>
-                          <a:latin typeface="Microsoft JhengHei"/>
-                        </a:rPr>
-                        <a:t/>
-                      </a:r>
-                    </a:p>
-                  </a:txBody>
-                  <a:tcPr marL="45720" marR="45720" marT="18288" marB="18288" anchor="ctr">
-                    <a:solidFill>
-                      <a:srgbClr val="1F4E79"/>
-                    </a:solidFill>
-                  </a:tcPr>
-                </a:tc>
-                <a:tc>
-                  <a:txBody>
-                    <a:bodyPr/>
-                    <a:lstStyle/>
-                    <a:p>
-                      <a:pPr algn="ctr"/>
-                      <a:r>
-                        <a:rPr sz="1200" b="1">
-                          <a:solidFill>
-                            <a:srgbClr val="FFFFFF"/>
-                          </a:solidFill>
-                          <a:latin typeface="Microsoft JhengHei"/>
-                        </a:rPr>
-                        <a:t>ADAS · 行車輔助</a:t>
-                      </a:r>
-                    </a:p>
-                  </a:txBody>
-                  <a:tcPr marL="45720" marR="45720" marT="18288" marB="18288" anchor="ctr">
-                    <a:solidFill>
-                      <a:srgbClr val="1F4E79"/>
-                    </a:solidFill>
-                  </a:tcPr>
-                </a:tc>
-                <a:tc>
-                  <a:txBody>
-                    <a:bodyPr/>
-                    <a:lstStyle/>
-                    <a:p>
-                      <a:pPr algn="ctr"/>
-                      <a:r>
-                        <a:rPr sz="1200" b="1">
-                          <a:solidFill>
-                            <a:srgbClr val="FFFFFF"/>
-                          </a:solidFill>
-                          <a:latin typeface="Microsoft JhengHei"/>
-                        </a:rPr>
-                        <a:t>DMS · 駕駛監控</a:t>
-                      </a:r>
-                    </a:p>
-                  </a:txBody>
-                  <a:tcPr marL="45720" marR="45720" marT="18288" marB="18288" anchor="ctr">
-                    <a:solidFill>
-                      <a:srgbClr val="1F4E79"/>
-                    </a:solidFill>
-                  </a:tcPr>
-                </a:tc>
-              </a:tr>
-              <a:tr h="292608">
-                <a:tc>
-                  <a:txBody>
-                    <a:bodyPr/>
-                    <a:lstStyle/>
-                    <a:p>
-                      <a:pPr algn="l"/>
-                      <a:r>
-                        <a:rPr sz="1200" b="0">
-                          <a:solidFill>
-                            <a:srgbClr val="16212E"/>
-                          </a:solidFill>
-                          <a:latin typeface="Microsoft JhengHei"/>
-                        </a:rPr>
-                        <a:t>事件量(該樣本)</a:t>
-                      </a:r>
-                    </a:p>
-                  </a:txBody>
-                  <a:tcPr marL="45720" marR="45720" marT="18288" marB="18288" anchor="ctr">
-                    <a:solidFill>
-                      <a:srgbClr val="FFFFFF"/>
-                    </a:solidFill>
-                  </a:tcPr>
-                </a:tc>
-                <a:tc>
-                  <a:txBody>
-                    <a:bodyPr/>
-                    <a:lstStyle/>
-                    <a:p>
-                      <a:pPr algn="ctr"/>
-                      <a:r>
-                        <a:rPr sz="1200" b="0">
-                          <a:solidFill>
-                            <a:srgbClr val="6B7885"/>
-                          </a:solidFill>
-                          <a:latin typeface="Microsoft JhengHei"/>
-                        </a:rPr>
-                        <a:t>1,029 筆</a:t>
-                      </a:r>
-                    </a:p>
-                  </a:txBody>
-                  <a:tcPr marL="45720" marR="45720" marT="18288" marB="18288" anchor="ctr">
-                    <a:solidFill>
-                      <a:srgbClr val="FFFFFF"/>
-                    </a:solidFill>
-                  </a:tcPr>
-                </a:tc>
-                <a:tc>
-                  <a:txBody>
-                    <a:bodyPr/>
-                    <a:lstStyle/>
-                    <a:p>
-                      <a:pPr algn="ctr"/>
-                      <a:r>
-                        <a:rPr sz="1200" b="0">
-                          <a:solidFill>
-                            <a:srgbClr val="6B7885"/>
-                          </a:solidFill>
-                          <a:latin typeface="Microsoft JhengHei"/>
-                        </a:rPr>
-                        <a:t>618 筆</a:t>
-                      </a:r>
-                    </a:p>
-                  </a:txBody>
-                  <a:tcPr marL="45720" marR="45720" marT="18288" marB="18288" anchor="ctr">
-                    <a:solidFill>
-                      <a:srgbClr val="FFFFFF"/>
-                    </a:solidFill>
-                  </a:tcPr>
-                </a:tc>
-              </a:tr>
-              <a:tr h="292608">
-                <a:tc>
-                  <a:txBody>
-                    <a:bodyPr/>
-                    <a:lstStyle/>
-                    <a:p>
-                      <a:pPr algn="l"/>
-                      <a:r>
-                        <a:rPr sz="1200" b="1">
-                          <a:solidFill>
-                            <a:srgbClr val="C00000"/>
-                          </a:solidFill>
-                          <a:latin typeface="Microsoft JhengHei"/>
-                        </a:rPr>
-                        <a:t>其中誤報</a:t>
-                      </a:r>
-                    </a:p>
-                  </a:txBody>
-                  <a:tcPr marL="45720" marR="45720" marT="18288" marB="18288" anchor="ctr">
-                    <a:solidFill>
-                      <a:srgbClr val="FBEFEF"/>
-                    </a:solidFill>
-                  </a:tcPr>
-                </a:tc>
-                <a:tc>
-                  <a:txBody>
-                    <a:bodyPr/>
-                    <a:lstStyle/>
-                    <a:p>
-                      <a:pPr algn="ctr"/>
-                      <a:r>
-                        <a:rPr sz="1200" b="0">
-                          <a:solidFill>
-                            <a:srgbClr val="C00000"/>
-                          </a:solidFill>
-                          <a:latin typeface="Microsoft JhengHei"/>
-                        </a:rPr>
-                        <a:t>104 筆</a:t>
-                      </a:r>
-                    </a:p>
-                  </a:txBody>
-                  <a:tcPr marL="45720" marR="45720" marT="18288" marB="18288" anchor="ctr">
-                    <a:solidFill>
-                      <a:srgbClr val="FBEFEF"/>
-                    </a:solidFill>
-                  </a:tcPr>
-                </a:tc>
-                <a:tc>
-                  <a:txBody>
-                    <a:bodyPr/>
-                    <a:lstStyle/>
-                    <a:p>
-                      <a:pPr algn="ctr"/>
-                      <a:r>
-                        <a:rPr sz="1200" b="0">
-                          <a:solidFill>
-                            <a:srgbClr val="C00000"/>
-                          </a:solidFill>
-                          <a:latin typeface="Microsoft JhengHei"/>
-                        </a:rPr>
-                        <a:t>20 筆</a:t>
-                      </a:r>
-                    </a:p>
-                  </a:txBody>
-                  <a:tcPr marL="45720" marR="45720" marT="18288" marB="18288" anchor="ctr">
-                    <a:solidFill>
-                      <a:srgbClr val="FBEFEF"/>
-                    </a:solidFill>
-                  </a:tcPr>
-                </a:tc>
-              </a:tr>
-              <a:tr h="292608">
-                <a:tc>
-                  <a:txBody>
-                    <a:bodyPr/>
-                    <a:lstStyle/>
-                    <a:p>
-                      <a:pPr algn="l"/>
-                      <a:r>
-                        <a:rPr sz="1200" b="0">
-                          <a:solidFill>
-                            <a:srgbClr val="16212E"/>
-                          </a:solidFill>
-                          <a:latin typeface="Microsoft JhengHei"/>
-                        </a:rPr>
-                        <a:t>該樣本人工判定為正確</a:t>
-                      </a:r>
-                    </a:p>
-                  </a:txBody>
-                  <a:tcPr marL="45720" marR="45720" marT="18288" marB="18288" anchor="ctr">
-                    <a:solidFill>
-                      <a:srgbClr val="FFFFFF"/>
-                    </a:solidFill>
-                  </a:tcPr>
-                </a:tc>
-                <a:tc>
-                  <a:txBody>
-                    <a:bodyPr/>
-                    <a:lstStyle/>
-                    <a:p>
-                      <a:pPr algn="ctr"/>
-                      <a:r>
-                        <a:rPr sz="1200" b="0">
-                          <a:solidFill>
-                            <a:srgbClr val="6B7885"/>
-                          </a:solidFill>
-                          <a:latin typeface="Microsoft JhengHei"/>
-                        </a:rPr>
-                        <a:t>89.9%</a:t>
-                      </a:r>
-                    </a:p>
-                  </a:txBody>
-                  <a:tcPr marL="45720" marR="45720" marT="18288" marB="18288" anchor="ctr">
-                    <a:solidFill>
-                      <a:srgbClr val="FFFFFF"/>
-                    </a:solidFill>
-                  </a:tcPr>
-                </a:tc>
-                <a:tc>
-                  <a:txBody>
-                    <a:bodyPr/>
-                    <a:lstStyle/>
-                    <a:p>
-                      <a:pPr algn="ctr"/>
-                      <a:r>
-                        <a:rPr sz="1200" b="0">
-                          <a:solidFill>
-                            <a:srgbClr val="6B7885"/>
-                          </a:solidFill>
-                          <a:latin typeface="Microsoft JhengHei"/>
-                        </a:rPr>
-                        <a:t>96.8%</a:t>
-                      </a:r>
-                    </a:p>
-                  </a:txBody>
-                  <a:tcPr marL="45720" marR="45720" marT="18288" marB="18288" anchor="ctr">
-                    <a:solidFill>
-                      <a:srgbClr val="FFFFFF"/>
-                    </a:solidFill>
-                  </a:tcPr>
-                </a:tc>
-              </a:tr>
-              <a:tr h="292608">
-                <a:tc>
-                  <a:txBody>
-                    <a:bodyPr/>
-                    <a:lstStyle/>
-                    <a:p>
-                      <a:pPr algn="l"/>
-                      <a:r>
-                        <a:rPr sz="1200" b="0">
-                          <a:solidFill>
-                            <a:srgbClr val="16212E"/>
-                          </a:solidFill>
-                          <a:latin typeface="Microsoft JhengHei"/>
-                        </a:rPr>
-                        <a:t>這兩個比例共用同一把尺</a:t>
-                      </a:r>
-                    </a:p>
-                  </a:txBody>
-                  <a:tcPr marL="45720" marR="45720" marT="18288" marB="18288" anchor="ctr">
-                    <a:solidFill>
-                      <a:srgbClr val="FFFFFF"/>
-                    </a:solidFill>
-                  </a:tcPr>
-                </a:tc>
-                <a:tc>
-                  <a:txBody>
-                    <a:bodyPr/>
-                    <a:lstStyle/>
-                    <a:p>
-                      <a:pPr algn="ctr"/>
-                      <a:r>
-                        <a:rPr sz="1200" b="0">
-                          <a:solidFill>
-                            <a:srgbClr val="6B7885"/>
-                          </a:solidFill>
-                          <a:latin typeface="Microsoft JhengHei"/>
-                        </a:rPr>
-                        <a:t>一致性從未量測｜不比誰準,只指錯的性質不同</a:t>
-                      </a:r>
-                    </a:p>
-                  </a:txBody>
-                  <a:tcPr marL="45720" marR="45720" marT="18288" marB="18288" anchor="ctr">
-                    <a:solidFill>
-                      <a:srgbClr val="FFFFFF"/>
-                    </a:solidFill>
-                  </a:tcPr>
-                </a:tc>
-                <a:tc>
-                  <a:txBody>
-                    <a:bodyPr/>
-                    <a:lstStyle/>
-                    <a:p>
-                      <a:pPr algn="ctr"/>
-                      <a:r>
-                        <a:rPr sz="1200" b="0">
-                          <a:solidFill>
-                            <a:srgbClr val="6B7885"/>
-                          </a:solidFill>
-                          <a:latin typeface="Microsoft JhengHei"/>
-                        </a:rPr>
-                        <a:t>標註品質包｜第 10 週建立基線，G2 訂目標值</a:t>
-                      </a:r>
-                    </a:p>
-                  </a:txBody>
-                  <a:tcPr marL="45720" marR="45720" marT="18288" marB="18288" anchor="ctr">
-                    <a:solidFill>
-                      <a:srgbClr val="FFFFFF"/>
-                    </a:solidFill>
-                  </a:tcPr>
-                </a:tc>
-              </a:tr>
-              <a:tr h="292608">
-                <a:tc>
-                  <a:txBody>
-                    <a:bodyPr/>
-                    <a:lstStyle/>
-                    <a:p>
-                      <a:pPr algn="l"/>
-                      <a:r>
-                        <a:rPr sz="1200" b="1">
-                          <a:solidFill>
-                            <a:srgbClr val="C00000"/>
-                          </a:solidFill>
-                          <a:latin typeface="Microsoft JhengHei"/>
-                        </a:rPr>
-                        <a:t>錯的是誰</a:t>
-                      </a:r>
-                    </a:p>
-                  </a:txBody>
-                  <a:tcPr marL="45720" marR="45720" marT="18288" marB="18288" anchor="ctr">
-                    <a:solidFill>
-                      <a:srgbClr val="FBEFEF"/>
-                    </a:solidFill>
-                  </a:tcPr>
-                </a:tc>
-                <a:tc>
-                  <a:txBody>
-                    <a:bodyPr/>
-                    <a:lstStyle/>
-                    <a:p>
-                      <a:pPr algn="ctr"/>
-                      <a:r>
-                        <a:rPr sz="1200" b="0">
-                          <a:solidFill>
-                            <a:srgbClr val="C00000"/>
-                          </a:solidFill>
-                          <a:latin typeface="Microsoft JhengHei"/>
-                        </a:rPr>
-                        <a:t>模型</a:t>
-                      </a:r>
-                    </a:p>
-                  </a:txBody>
-                  <a:tcPr marL="45720" marR="45720" marT="18288" marB="18288" anchor="ctr">
-                    <a:solidFill>
-                      <a:srgbClr val="FBEFEF"/>
-                    </a:solidFill>
-                  </a:tcPr>
-                </a:tc>
-                <a:tc>
-                  <a:txBody>
-                    <a:bodyPr/>
-                    <a:lstStyle/>
-                    <a:p>
-                      <a:pPr algn="ctr"/>
-                      <a:r>
-                        <a:rPr sz="1200" b="0">
-                          <a:solidFill>
-                            <a:srgbClr val="C00000"/>
-                          </a:solidFill>
-                          <a:latin typeface="Microsoft JhengHei"/>
-                        </a:rPr>
-                        <a:t>人</a:t>
-                      </a:r>
-                    </a:p>
-                  </a:txBody>
-                  <a:tcPr marL="45720" marR="45720" marT="18288" marB="18288" anchor="ctr">
-                    <a:solidFill>
-                      <a:srgbClr val="FBEFEF"/>
-                    </a:solidFill>
-                  </a:tcPr>
-                </a:tc>
-              </a:tr>
-              <a:tr h="292608">
-                <a:tc>
-                  <a:txBody>
-                    <a:bodyPr/>
-                    <a:lstStyle/>
-                    <a:p>
-                      <a:pPr algn="l"/>
-                      <a:r>
-                        <a:rPr sz="1200" b="0">
-                          <a:solidFill>
-                            <a:srgbClr val="16212E"/>
-                          </a:solidFill>
-                          <a:latin typeface="Microsoft JhengHei"/>
-                        </a:rPr>
-                        <a:t>缺口</a:t>
-                      </a:r>
-                    </a:p>
-                  </a:txBody>
-                  <a:tcPr marL="45720" marR="45720" marT="18288" marB="18288" anchor="ctr">
-                    <a:solidFill>
-                      <a:srgbClr val="FFFFFF"/>
-                    </a:solidFill>
-                  </a:tcPr>
-                </a:tc>
-                <a:tc>
-                  <a:txBody>
-                    <a:bodyPr/>
-                    <a:lstStyle/>
-                    <a:p>
-                      <a:pPr algn="ctr"/>
-                      <a:r>
-                        <a:rPr sz="1200" b="0">
-                          <a:solidFill>
-                            <a:srgbClr val="6B7885"/>
-                          </a:solidFill>
-                          <a:latin typeface="Microsoft JhengHei"/>
-                        </a:rPr>
-                        <a:t>脈絡:判定依據不在畫面裡</a:t>
-                      </a:r>
-                    </a:p>
-                  </a:txBody>
-                  <a:tcPr marL="45720" marR="45720" marT="18288" marB="18288" anchor="ctr">
-                    <a:solidFill>
-                      <a:srgbClr val="FFFFFF"/>
-                    </a:solidFill>
-                  </a:tcPr>
-                </a:tc>
-                <a:tc>
-                  <a:txBody>
-                    <a:bodyPr/>
-                    <a:lstStyle/>
-                    <a:p>
-                      <a:pPr algn="ctr"/>
-                      <a:r>
-                        <a:rPr sz="1200" b="0">
-                          <a:solidFill>
-                            <a:srgbClr val="6B7885"/>
-                          </a:solidFill>
-                          <a:latin typeface="Microsoft JhengHei"/>
-                        </a:rPr>
-                        <a:t>判準:同一段影片,不同複核者給不同標籤</a:t>
-                      </a:r>
-                    </a:p>
-                  </a:txBody>
-                  <a:tcPr marL="45720" marR="45720" marT="18288" marB="18288" anchor="ctr">
-                    <a:solidFill>
-                      <a:srgbClr val="FFFFFF"/>
-                    </a:solidFill>
-                  </a:tcPr>
-                </a:tc>
-              </a:tr>
-            </a:tbl>
-          </a:graphicData>
-        </a:graphic>
-      </p:graphicFrame>
-      <p:sp>
-        <p:nvSpPr>
-          <p:cNvPr id="9" name="Rectangle 8"/>
-          <p:cNvSpPr/>
-          <p:nvPr/>
-        </p:nvSpPr>
-        <p:spPr>
-          <a:xfrm>
-            <a:off x="658368" y="4717320"/>
-            <a:ext cx="45720" cy="642937"/>
-          </a:xfrm>
-          <a:prstGeom prst="rect">
-            <a:avLst/>
-          </a:prstGeom>
-          <a:solidFill>
-            <a:srgbClr val="C00000"/>
-          </a:solidFill>
-          <a:ln>
-            <a:noFill/>
-          </a:ln>
-          <a:effectLst/>
-        </p:spPr>
-        <p:style>
-          <a:lnRef idx="1">
-            <a:schemeClr val="accent1"/>
-          </a:lnRef>
-          <a:fillRef idx="3">
-            <a:schemeClr val="accent1"/>
-          </a:fillRef>
-          <a:effectRef idx="2">
-            <a:schemeClr val="accent1"/>
-          </a:effectRef>
-          <a:fontRef idx="minor">
-            <a:schemeClr val="lt1"/>
-          </a:fontRef>
-        </p:style>
-        <p:txBody>
-          <a:bodyPr rtlCol="0" anchor="ctr"/>
-          <a:lstStyle/>
-          <a:p>
-            <a:pPr algn="ctr"/>
-          </a:p>
-        </p:txBody>
-      </p:sp>
-      <p:sp>
-        <p:nvSpPr>
-          <p:cNvPr id="10" name="TextBox 9"/>
-          <p:cNvSpPr txBox="1"/>
-          <p:nvPr/>
-        </p:nvSpPr>
-        <p:spPr>
-          <a:xfrm>
-            <a:off x="804672" y="4689888"/>
-            <a:ext cx="2116945" cy="734377"/>
-          </a:xfrm>
-          <a:prstGeom prst="rect">
-            <a:avLst/>
-          </a:prstGeom>
-          <a:noFill/>
-        </p:spPr>
-        <p:txBody>
-          <a:bodyPr wrap="square" lIns="0" rIns="0" tIns="0" bIns="0" anchor="ctr">
-            <a:spAutoFit/>
-          </a:bodyPr>
-          <a:lstStyle/>
-          <a:p>
-            <a:pPr algn="l">
-              <a:lnSpc>
-                <a:spcPct val="125000"/>
-              </a:lnSpc>
-            </a:pPr>
-            <a:r>
-              <a:rPr sz="1400" b="1">
-                <a:solidFill>
-                  <a:srgbClr val="16212E"/>
-                </a:solidFill>
-                <a:latin typeface="Microsoft JhengHei"/>
-              </a:rPr>
-              <a:t>同一個根因</a:t>
-            </a:r>
-          </a:p>
-        </p:txBody>
-      </p:sp>
-      <p:sp>
-        <p:nvSpPr>
-          <p:cNvPr id="11" name="TextBox 10"/>
-          <p:cNvSpPr txBox="1"/>
-          <p:nvPr/>
-        </p:nvSpPr>
-        <p:spPr>
-          <a:xfrm>
-            <a:off x="2976481" y="4689888"/>
-            <a:ext cx="2787914" cy="734377"/>
-          </a:xfrm>
-          <a:prstGeom prst="rect">
-            <a:avLst/>
-          </a:prstGeom>
-          <a:noFill/>
-        </p:spPr>
-        <p:txBody>
-          <a:bodyPr wrap="square" lIns="0" rIns="0" tIns="0" bIns="0" anchor="ctr">
-            <a:spAutoFit/>
-          </a:bodyPr>
-          <a:lstStyle/>
-          <a:p>
-            <a:pPr algn="l">
-              <a:lnSpc>
-                <a:spcPct val="125000"/>
-              </a:lnSpc>
-            </a:pPr>
-            <a:r>
-              <a:rPr sz="1500" b="1">
-                <a:solidFill>
-                  <a:srgbClr val="C00000"/>
-                </a:solidFill>
-                <a:latin typeface="Microsoft JhengHei"/>
-              </a:rPr>
-              <a:t>交通標誌辨識 103 / 124 = 83%</a:t>
-            </a:r>
-          </a:p>
-        </p:txBody>
-      </p:sp>
-      <p:sp>
-        <p:nvSpPr>
-          <p:cNvPr id="12" name="TextBox 11"/>
-          <p:cNvSpPr txBox="1"/>
-          <p:nvPr/>
-        </p:nvSpPr>
-        <p:spPr>
-          <a:xfrm>
-            <a:off x="5874123" y="4689888"/>
-            <a:ext cx="4333323" cy="734377"/>
-          </a:xfrm>
-          <a:prstGeom prst="rect">
-            <a:avLst/>
-          </a:prstGeom>
-          <a:noFill/>
-        </p:spPr>
-        <p:txBody>
-          <a:bodyPr wrap="square" lIns="0" rIns="0" tIns="0" bIns="0" anchor="ctr">
-            <a:spAutoFit/>
-          </a:bodyPr>
-          <a:lstStyle/>
-          <a:p>
-            <a:pPr algn="l">
-              <a:lnSpc>
-                <a:spcPct val="120000"/>
-              </a:lnSpc>
-            </a:pPr>
-            <a:r>
-              <a:rPr sz="1200" b="0">
-                <a:solidFill>
-                  <a:srgbClr val="6B7885"/>
-                </a:solidFill>
-                <a:latin typeface="Microsoft JhengHei"/>
-              </a:rPr>
-              <a:t>該樣本全部誤報中,根因為交通標誌辨識者;公司自己的口徑</a:t>
-            </a:r>
-          </a:p>
-        </p:txBody>
-      </p:sp>
-      <p:sp>
-        <p:nvSpPr>
-          <p:cNvPr id="13" name="Rectangle 12"/>
-          <p:cNvSpPr/>
-          <p:nvPr/>
-        </p:nvSpPr>
-        <p:spPr>
-          <a:xfrm>
-            <a:off x="658368" y="5543138"/>
-            <a:ext cx="45720" cy="321468"/>
-          </a:xfrm>
-          <a:prstGeom prst="rect">
-            <a:avLst/>
-          </a:prstGeom>
-          <a:solidFill>
-            <a:srgbClr val="C00000"/>
-          </a:solidFill>
-          <a:ln>
-            <a:noFill/>
-          </a:ln>
-          <a:effectLst/>
-        </p:spPr>
-        <p:style>
-          <a:lnRef idx="1">
-            <a:schemeClr val="accent1"/>
-          </a:lnRef>
-          <a:fillRef idx="3">
-            <a:schemeClr val="accent1"/>
-          </a:fillRef>
-          <a:effectRef idx="2">
-            <a:schemeClr val="accent1"/>
-          </a:effectRef>
-          <a:fontRef idx="minor">
-            <a:schemeClr val="lt1"/>
-          </a:fontRef>
-        </p:style>
-        <p:txBody>
-          <a:bodyPr rtlCol="0" anchor="ctr"/>
-          <a:lstStyle/>
-          <a:p>
-            <a:pPr algn="ctr"/>
-          </a:p>
-        </p:txBody>
-      </p:sp>
-      <p:sp>
-        <p:nvSpPr>
-          <p:cNvPr id="14" name="TextBox 13"/>
-          <p:cNvSpPr txBox="1"/>
-          <p:nvPr/>
-        </p:nvSpPr>
-        <p:spPr>
-          <a:xfrm>
-            <a:off x="804672" y="5515706"/>
-            <a:ext cx="2116945" cy="412908"/>
-          </a:xfrm>
-          <a:prstGeom prst="rect">
-            <a:avLst/>
-          </a:prstGeom>
-          <a:noFill/>
-        </p:spPr>
-        <p:txBody>
-          <a:bodyPr wrap="square" lIns="0" rIns="0" tIns="0" bIns="0" anchor="ctr">
-            <a:spAutoFit/>
-          </a:bodyPr>
-          <a:lstStyle/>
-          <a:p>
-            <a:pPr algn="l">
-              <a:lnSpc>
-                <a:spcPct val="125000"/>
-              </a:lnSpc>
-            </a:pPr>
-            <a:r>
-              <a:rPr sz="1400" b="1">
-                <a:solidFill>
-                  <a:srgbClr val="16212E"/>
-                </a:solidFill>
-                <a:latin typeface="Microsoft JhengHei"/>
-              </a:rPr>
-              <a:t>解它要的東西</a:t>
-            </a:r>
-          </a:p>
-        </p:txBody>
-      </p:sp>
-      <p:sp>
-        <p:nvSpPr>
-          <p:cNvPr id="15" name="TextBox 14"/>
-          <p:cNvSpPr txBox="1"/>
-          <p:nvPr/>
-        </p:nvSpPr>
-        <p:spPr>
-          <a:xfrm>
-            <a:off x="2976481" y="5515706"/>
-            <a:ext cx="2787914" cy="412908"/>
-          </a:xfrm>
-          <a:prstGeom prst="rect">
-            <a:avLst/>
-          </a:prstGeom>
-          <a:noFill/>
-        </p:spPr>
-        <p:txBody>
-          <a:bodyPr wrap="square" lIns="0" rIns="0" tIns="0" bIns="0" anchor="ctr">
-            <a:spAutoFit/>
-          </a:bodyPr>
-          <a:lstStyle/>
-          <a:p>
-            <a:pPr algn="l">
-              <a:lnSpc>
-                <a:spcPct val="125000"/>
-              </a:lnSpc>
-            </a:pPr>
-            <a:r>
-              <a:rPr sz="1500" b="1">
-                <a:solidFill>
-                  <a:srgbClr val="C00000"/>
-                </a:solidFill>
-                <a:latin typeface="Microsoft JhengHei"/>
-              </a:rPr>
-              <a:t>速限資料 —— 公司既有資產</a:t>
-            </a:r>
-          </a:p>
-        </p:txBody>
-      </p:sp>
-      <p:sp>
-        <p:nvSpPr>
-          <p:cNvPr id="16" name="TextBox 15"/>
-          <p:cNvSpPr txBox="1"/>
-          <p:nvPr/>
-        </p:nvSpPr>
-        <p:spPr>
-          <a:xfrm>
-            <a:off x="5874123" y="5515706"/>
-            <a:ext cx="4333323" cy="412908"/>
-          </a:xfrm>
-          <a:prstGeom prst="rect">
-            <a:avLst/>
-          </a:prstGeom>
-          <a:noFill/>
-        </p:spPr>
-        <p:txBody>
-          <a:bodyPr wrap="square" lIns="0" rIns="0" tIns="0" bIns="0" anchor="ctr">
-            <a:spAutoFit/>
-          </a:bodyPr>
-          <a:lstStyle/>
-          <a:p>
-            <a:pPr algn="l">
-              <a:lnSpc>
-                <a:spcPct val="120000"/>
-              </a:lnSpc>
-            </a:pPr>
-            <a:r>
-              <a:rPr sz="1200" b="0">
-                <a:solidFill>
-                  <a:srgbClr val="6B7885"/>
-                </a:solidFill>
-                <a:latin typeface="Microsoft JhengHei"/>
-              </a:rPr>
-              <a:t>不必外購、不必等新模型;這條今天就能動</a:t>
+              <a:t>每台車每工作日 17.9 筆 —— 五個人吃得下 5–7 個 30 台的車隊,但一個大型車隊就滿了</a:t>
             </a:r>
           </a:p>
         </p:txBody>

--- a/Artificial Intelligence for Enterprises/Assessment3/Huang_26254793_421104_Assessment 3.pptx
+++ b/Artificial Intelligence for Enterprises/Assessment3/Huang_26254793_421104_Assessment 3.pptx
@@ -645,7 +645,7 @@
           <a:lstStyle/>
           <a:p>
             <a:r>
-              <a:t>【第 10 頁 · P8 · 怎麼算成功:三層 KPI,一條回圈】　目標 46 秒 · 累計 9:21</a:t>
+              <a:t>【第 10 頁 · P8 · 怎麼算成功:三層 KPI,一條回圈】　目標 46 秒 · 累計 9:30</a:t>
             </a:r>
           </a:p>
           <a:p/>
@@ -782,7 +782,7 @@
           <a:lstStyle/>
           <a:p>
             <a:r>
-              <a:t>【第 11 頁 · P9 · 六個月 · 六個工作包 · 三道決策門】　目標 47 秒 · 累計 10:08</a:t>
+              <a:t>【第 11 頁 · P9 · 六個月 · 六個工作包 · 三道決策門】　目標 47 秒 · 累計 10:17</a:t>
             </a:r>
           </a:p>
           <a:p/>
@@ -934,7 +934,7 @@
           <a:lstStyle/>
           <a:p>
             <a:r>
-              <a:t>【第 12 頁 · P10 · 資源、當責與請求】　目標 64 秒 · 累計 11:12</a:t>
+              <a:t>【第 12 頁 · P10 · 資源、當責與請求】　目標 64 秒 · 累計 11:20</a:t>
             </a:r>
           </a:p>
           <a:p/>
@@ -1106,7 +1106,7 @@
           <a:lstStyle/>
           <a:p>
             <a:r>
-              <a:t>【第 13 頁 · 參考文獻(第 11 頁 — 不佔十頁額度)】　目標 5 秒 · 累計 11:16</a:t>
+              <a:t>【第 13 頁 · 參考文獻(第 11 頁 — 不佔十頁額度)】　目標 5 秒 · 累計 11:25</a:t>
             </a:r>
           </a:p>
           <a:p/>
@@ -1514,13 +1514,13 @@
           <a:lstStyle/>
           <a:p>
             <a:r>
-              <a:t>【第 4 頁 · P3 · 發現過程:兩種病,兩個缺口】　目標 62 秒 · 累計 4:05</a:t>
+              <a:t>【第 4 頁 · P3 · 發現過程:兩種病,兩個缺口】　目標 71 秒 · 累計 4:14</a:t>
             </a:r>
           </a:p>
           <a:p/>
           <a:p>
             <a:r>
-              <a:t>★ 每台車每工作日 17.9 筆 —— 五個人吃得下 5–7 個小車隊,但一個大型車隊就滿了。</a:t>
+              <a:t>★ 一天兩百二十六筆誤報,一百八十八筆是同一個根因 —— 而修它要的速限資料我們手上就有。</a:t>
             </a:r>
           </a:p>
           <a:p/>
@@ -1531,7 +1531,7 @@
           </a:p>
           <a:p>
             <a:r>
-              <a:t>· 同比例放大:4 台 1,647 筆 → 30 台 12,352 筆 → 168 台 69,174 筆(月,23 工作天)</a:t>
+              <a:t>· 片上數值已從樣本(4 台 · 23 工作天 · 1,647 筆)放大到 3,000 筆/天 的車隊(約 168 台)</a:t>
             </a:r>
           </a:p>
           <a:p>
@@ -1542,17 +1542,17 @@
           <a:p/>
           <a:p>
             <a:r>
-              <a:t># 每台車每工作日 17.9 筆(1,647 ÷ 23 ÷ 4)</a:t>
-            </a:r>
-          </a:p>
-          <a:p>
-            <a:r>
-              <a:t># 人工佔產能 2%–3% → 13%–19% → 75%–108%</a:t>
-            </a:r>
-          </a:p>
-          <a:p>
-            <a:r>
-              <a:t># 103 / 124 = 83%</a:t>
+              <a:t># ADAS 1,874 筆/天 → 誤報 189(10.1%) · DMS 1,126 筆/天 → 誤報 36(3.2%)</a:t>
+            </a:r>
+          </a:p>
+          <a:p>
+            <a:r>
+              <a:t># 全部誤報 226 筆/天 · 同根因 188 筆/天 = 83%</a:t>
+            </a:r>
+          </a:p>
+          <a:p>
+            <a:r>
+              <a:t># 放大倍數 41.9(樣本每台車每工作日 17.9 筆)</a:t>
             </a:r>
           </a:p>
           <a:p/>
@@ -1585,12 +1585,12 @@
           <a:p/>
           <a:p>
             <a:r>
-              <a:t>── 逐字備援 · 275 字(忘詞才看,不是拿來唸的)──</a:t>
-            </a:r>
-          </a:p>
-          <a:p>
-            <a:r>
-              <a:t>那我們的時間到底花在哪裡?我把最近一份判讀拆開來看 ——四台車、二十三個工作天、一千六百四十七筆,一個小型車隊一個月;以下所有比例僅在這個樣本內成立。上面這張表是兩種病:行車輔助錯的是模型,缺的是脈絡;駕駛監控錯的是人,缺的是判準 —— 兩種病要兩種修法,所以標註跟脈絡是兩個不同的工作包,而且都排在 AI 前面。下面這張是同比例放大:每台車每個工作日大約十七點九筆。各位看最後一列,人工佔產能從百分之二三,到百分之十三到十九,再到一個大型車隊的百分之七十五到一百零八 ——五個人吃得下五到七個小車隊,但一個大型車隊就滿了。而這一百二十四筆誤報裡,一百零三筆是同一個根因:交通標誌辨識,八成三。修它要的速限資料,公司手上就有。</a:t>
+              <a:t>── 逐字備援 · 314 字(忘詞才看,不是拿來唸的)──</a:t>
+            </a:r>
+          </a:p>
+          <a:p>
+            <a:r>
+              <a:t>那我們的時間到底花在哪裡?我把最近一份判讀拆開來看。這張表上的數字,已經從樣本同比例放大到一個三千筆一天的車隊,大約一百六十八台車。行車輔助一天一千八百七十四筆,其中一百八十九筆是誤報;駕駛監控一天一千一百二十六筆,誤報三十六筆。兩邊錯的不是同一件事:行車輔助錯的是模型,缺的是脈絡,判定依據不在畫面裡;駕駛監控錯的是人,缺的是判準,同一段影片兩個人給不同標籤。兩種病要兩種修法,所以標註跟脈絡是兩個不同的工作包,而且都排在 AI 前面。合起來一天兩百二十六筆誤報,而其中一百八十八筆是同一個根因:交通標誌辨識,八成三。修它要的速限資料,公司手上就有 —— 不用等新技術,也不用買。但我要說清楚:這些是從四台車、一千六百四十七筆同比例放大來的。這個比例能不能代表一百六十八台,正是第六週要量的第一件事。</a:t>
             </a:r>
           </a:p>
           <a:p/>
@@ -1671,7 +1671,7 @@
           <a:lstStyle/>
           <a:p>
             <a:r>
-              <a:t>【第 5 頁 · 選型與部署:兩層模型、一台設備】　目標 66 秒 · 累計 5:11</a:t>
+              <a:t>【第 5 頁 · 選型與部署:兩層模型、一台設備】　目標 66 秒 · 累計 5:20</a:t>
             </a:r>
           </a:p>
           <a:p/>
@@ -1843,7 +1843,7 @@
           <a:lstStyle/>
           <a:p>
             <a:r>
-              <a:t>【第 6 頁 · P4 · 我們看不見的那一半:有資料,沒有習慣】　目標 59 秒 · 累計 6:10</a:t>
+              <a:t>【第 6 頁 · P4 · 我們看不見的那一半:有資料,沒有習慣】　目標 59 秒 · 累計 6:19</a:t>
             </a:r>
           </a:p>
           <a:p/>
@@ -2025,7 +2025,7 @@
           <a:lstStyle/>
           <a:p>
             <a:r>
-              <a:t>【第 7 頁 · P5 · 五條路,含三條不用 AI】　目標 44 秒 · 累計 6:54</a:t>
+              <a:t>【第 7 頁 · P5 · 五條路,含三條不用 AI】　目標 44 秒 · 累計 7:03</a:t>
             </a:r>
           </a:p>
           <a:p/>
@@ -2167,7 +2167,7 @@
           <a:lstStyle/>
           <a:p>
             <a:r>
-              <a:t>【第 8 頁 · P6 · 風險:七類十條,緩解位移與殘餘風險】　目標 51 秒 · 累計 7:45</a:t>
+              <a:t>【第 8 頁 · P6 · 風險:七類十條,緩解位移與殘餘風險】　目標 51 秒 · 累計 7:54</a:t>
             </a:r>
           </a:p>
           <a:p/>
@@ -2320,7 +2320,7 @@
           <a:lstStyle/>
           <a:p>
             <a:r>
-              <a:t>【第 9 頁 · P7 · 倫理與可申訴性:對照澳洲 AI 倫理八原則】　目標 50 秒 · 累計 8:35</a:t>
+              <a:t>【第 9 頁 · P7 · 倫理與可申訴性:對照澳洲 AI 倫理八原則】　目標 50 秒 · 累計 8:44</a:t>
             </a:r>
           </a:p>
           <a:p/>
@@ -13501,7 +13501,7 @@
                 </a:solidFill>
                 <a:latin typeface="Microsoft JhengHei"/>
               </a:rPr>
-              <a:t>樣本:4 台車 · 23 個工作天 · 1,647 筆;以下比例僅在此樣本內成立,W1–6 驗</a:t>
+              <a:t>數值已從樣本(4 台車 · 23 個工作天 · 1,647 筆)同比例放大到一個 3,000 筆/天 的車隊(約 168 台)</a:t>
             </a:r>
           </a:p>
         </p:txBody>
@@ -13560,7 +13560,7 @@
         </p:nvGraphicFramePr>
         <p:xfrm>
           <a:off x="658368" y="1755648"/>
-          <a:ext cx="10874959" cy="1792224"/>
+          <a:ext cx="10874958" cy="2084832"/>
         </p:xfrm>
         <a:graphic>
           <a:graphicData uri="http://schemas.openxmlformats.org/drawingml/2006/table">
@@ -13569,9 +13569,9 @@
                 <a:tableStyleId>{5C22544A-7EE6-4342-B048-85BDC9FD1C3A}</a:tableStyleId>
               </a:tblPr>
               <a:tblGrid>
-                <a:gridCol w="2392491"/>
-                <a:gridCol w="4241234"/>
-                <a:gridCol w="4241234"/>
+                <a:gridCol w="2609990"/>
+                <a:gridCol w="4132484"/>
+                <a:gridCol w="4132484"/>
               </a:tblGrid>
               <a:tr h="329184">
                 <a:tc>
@@ -13587,7 +13587,7 @@
                           </a:solidFill>
                           <a:latin typeface="Microsoft JhengHei"/>
                         </a:rPr>
-                        <a:t>兩種病</a:t>
+                        <a:t>一個 3,000 筆/天 的車隊</a:t>
                       </a:r>
                     </a:p>
                   </a:txBody>
@@ -13658,7 +13658,7 @@
                           </a:solidFill>
                           <a:latin typeface="Microsoft JhengHei"/>
                         </a:rPr>
-                        <a:t>事件量(該樣本)</a:t>
+                        <a:t>事件量</a:t>
                       </a:r>
                     </a:p>
                   </a:txBody>
@@ -13681,7 +13681,7 @@
                           </a:solidFill>
                           <a:latin typeface="Microsoft JhengHei"/>
                         </a:rPr>
-                        <a:t>1,029 筆</a:t>
+                        <a:t>1,874 筆/天</a:t>
                       </a:r>
                     </a:p>
                   </a:txBody>
@@ -13704,7 +13704,7 @@
                           </a:solidFill>
                           <a:latin typeface="Microsoft JhengHei"/>
                         </a:rPr>
-                        <a:t>618 筆</a:t>
+                        <a:t>1,126 筆/天</a:t>
                       </a:r>
                     </a:p>
                   </a:txBody>
@@ -13752,7 +13752,7 @@
                           </a:solidFill>
                           <a:latin typeface="Microsoft JhengHei"/>
                         </a:rPr>
-                        <a:t>104 筆(10.1%)</a:t>
+                        <a:t>189 筆/天(10.1%)</a:t>
                       </a:r>
                     </a:p>
                   </a:txBody>
@@ -13775,13 +13775,84 @@
                           </a:solidFill>
                           <a:latin typeface="Microsoft JhengHei"/>
                         </a:rPr>
-                        <a:t>20 筆(3.2%)</a:t>
+                        <a:t>36 筆/天(3.2%)</a:t>
                       </a:r>
                     </a:p>
                   </a:txBody>
                   <a:tcPr marL="45720" marR="45720" marT="18288" marB="18288" anchor="ctr">
                     <a:solidFill>
                       <a:srgbClr val="FBEFEF"/>
+                    </a:solidFill>
+                  </a:tcPr>
+                </a:tc>
+              </a:tr>
+              <a:tr h="292608">
+                <a:tc>
+                  <a:txBody>
+                    <a:bodyPr/>
+                    <a:lstStyle/>
+                    <a:p>
+                      <a:pPr algn="l"/>
+                      <a:r>
+                        <a:rPr sz="1200" b="0">
+                          <a:solidFill>
+                            <a:srgbClr val="16212E"/>
+                          </a:solidFill>
+                          <a:latin typeface="Microsoft JhengHei"/>
+                        </a:rPr>
+                        <a:t>人工判定為正確</a:t>
+                      </a:r>
+                    </a:p>
+                  </a:txBody>
+                  <a:tcPr marL="45720" marR="45720" marT="18288" marB="18288" anchor="ctr">
+                    <a:solidFill>
+                      <a:srgbClr val="FFFFFF"/>
+                    </a:solidFill>
+                  </a:tcPr>
+                </a:tc>
+                <a:tc>
+                  <a:txBody>
+                    <a:bodyPr/>
+                    <a:lstStyle/>
+                    <a:p>
+                      <a:pPr algn="ctr"/>
+                      <a:r>
+                        <a:rPr sz="1200" b="0">
+                          <a:solidFill>
+                            <a:srgbClr val="6B7885"/>
+                          </a:solidFill>
+                          <a:latin typeface="Microsoft JhengHei"/>
+                        </a:rPr>
+                        <a:t>89.9%</a:t>
+                      </a:r>
+                    </a:p>
+                  </a:txBody>
+                  <a:tcPr marL="45720" marR="45720" marT="18288" marB="18288" anchor="ctr">
+                    <a:solidFill>
+                      <a:srgbClr val="FFFFFF"/>
+                    </a:solidFill>
+                  </a:tcPr>
+                </a:tc>
+                <a:tc>
+                  <a:txBody>
+                    <a:bodyPr/>
+                    <a:lstStyle/>
+                    <a:p>
+                      <a:pPr algn="ctr"/>
+                      <a:r>
+                        <a:rPr sz="1200" b="0">
+                          <a:solidFill>
+                            <a:srgbClr val="6B7885"/>
+                          </a:solidFill>
+                          <a:latin typeface="Microsoft JhengHei"/>
+                        </a:rPr>
+                        <a:t>96.8%</a:t>
+                      </a:r>
+                    </a:p>
+                  </a:txBody>
+                  <a:tcPr marL="45720" marR="45720" marT="18288" marB="18288" anchor="ctr">
+                    <a:solidFill>
+                      <a:srgbClr val="FFFFFF"/>
                     </a:solidFill>
                   </a:tcPr>
                 </a:tc>
@@ -14003,519 +14074,19 @@
           </a:graphicData>
         </a:graphic>
       </p:graphicFrame>
-      <p:graphicFrame>
-        <p:nvGraphicFramePr>
-          <p:cNvPr id="7" name="Table 6"/>
-          <p:cNvGraphicFramePr>
-            <a:graphicFrameLocks noGrp="1"/>
-          </p:cNvGraphicFramePr>
-          <p:nvPr/>
-        </p:nvGraphicFramePr>
-        <p:xfrm>
-          <a:off x="658368" y="3675887"/>
-          <a:ext cx="10874958" cy="1499616"/>
-        </p:xfrm>
-        <a:graphic>
-          <a:graphicData uri="http://schemas.openxmlformats.org/drawingml/2006/table">
-            <a:tbl>
-              <a:tblPr firstRow="1">
-                <a:tableStyleId>{5C22544A-7EE6-4342-B048-85BDC9FD1C3A}</a:tableStyleId>
-              </a:tblPr>
-              <a:tblGrid>
-                <a:gridCol w="2174991"/>
-                <a:gridCol w="2899989"/>
-                <a:gridCol w="2899989"/>
-                <a:gridCol w="2899989"/>
-              </a:tblGrid>
-              <a:tr h="329184">
-                <a:tc>
-                  <a:txBody>
-                    <a:bodyPr/>
-                    <a:lstStyle/>
-                    <a:p>
-                      <a:pPr algn="l"/>
-                      <a:r>
-                        <a:rPr sz="1200" b="1">
-                          <a:solidFill>
-                            <a:srgbClr val="FFFFFF"/>
-                          </a:solidFill>
-                          <a:latin typeface="Microsoft JhengHei"/>
-                        </a:rPr>
-                        <a:t>同比例放大</a:t>
-                      </a:r>
-                    </a:p>
-                  </a:txBody>
-                  <a:tcPr marL="45720" marR="45720" marT="18288" marB="18288" anchor="ctr">
-                    <a:solidFill>
-                      <a:srgbClr val="1F4E79"/>
-                    </a:solidFill>
-                  </a:tcPr>
-                </a:tc>
-                <a:tc>
-                  <a:txBody>
-                    <a:bodyPr/>
-                    <a:lstStyle/>
-                    <a:p>
-                      <a:pPr algn="ctr"/>
-                      <a:r>
-                        <a:rPr sz="1200" b="1">
-                          <a:solidFill>
-                            <a:srgbClr val="FFFFFF"/>
-                          </a:solidFill>
-                          <a:latin typeface="Microsoft JhengHei"/>
-                        </a:rPr>
-                        <a:t>4 台(樣本)</a:t>
-                      </a:r>
-                    </a:p>
-                  </a:txBody>
-                  <a:tcPr marL="45720" marR="45720" marT="18288" marB="18288" anchor="ctr">
-                    <a:solidFill>
-                      <a:srgbClr val="1F4E79"/>
-                    </a:solidFill>
-                  </a:tcPr>
-                </a:tc>
-                <a:tc>
-                  <a:txBody>
-                    <a:bodyPr/>
-                    <a:lstStyle/>
-                    <a:p>
-                      <a:pPr algn="ctr"/>
-                      <a:r>
-                        <a:rPr sz="1200" b="1">
-                          <a:solidFill>
-                            <a:srgbClr val="FFFFFF"/>
-                          </a:solidFill>
-                          <a:latin typeface="Microsoft JhengHei"/>
-                        </a:rPr>
-                        <a:t>30 台(小車隊)</a:t>
-                      </a:r>
-                    </a:p>
-                  </a:txBody>
-                  <a:tcPr marL="45720" marR="45720" marT="18288" marB="18288" anchor="ctr">
-                    <a:solidFill>
-                      <a:srgbClr val="1F4E79"/>
-                    </a:solidFill>
-                  </a:tcPr>
-                </a:tc>
-                <a:tc>
-                  <a:txBody>
-                    <a:bodyPr/>
-                    <a:lstStyle/>
-                    <a:p>
-                      <a:pPr algn="ctr"/>
-                      <a:r>
-                        <a:rPr sz="1200" b="1">
-                          <a:solidFill>
-                            <a:srgbClr val="FFFFFF"/>
-                          </a:solidFill>
-                          <a:latin typeface="Microsoft JhengHei"/>
-                        </a:rPr>
-                        <a:t>168 台(大型車隊)</a:t>
-                      </a:r>
-                    </a:p>
-                  </a:txBody>
-                  <a:tcPr marL="45720" marR="45720" marT="18288" marB="18288" anchor="ctr">
-                    <a:solidFill>
-                      <a:srgbClr val="1F4E79"/>
-                    </a:solidFill>
-                  </a:tcPr>
-                </a:tc>
-              </a:tr>
-              <a:tr h="292608">
-                <a:tc>
-                  <a:txBody>
-                    <a:bodyPr/>
-                    <a:lstStyle/>
-                    <a:p>
-                      <a:pPr algn="l"/>
-                      <a:r>
-                        <a:rPr sz="1200" b="0">
-                          <a:solidFill>
-                            <a:srgbClr val="16212E"/>
-                          </a:solidFill>
-                          <a:latin typeface="Microsoft JhengHei"/>
-                        </a:rPr>
-                        <a:t>月事件(23 工作天)</a:t>
-                      </a:r>
-                    </a:p>
-                  </a:txBody>
-                  <a:tcPr marL="45720" marR="45720" marT="18288" marB="18288" anchor="ctr">
-                    <a:solidFill>
-                      <a:srgbClr val="FFFFFF"/>
-                    </a:solidFill>
-                  </a:tcPr>
-                </a:tc>
-                <a:tc>
-                  <a:txBody>
-                    <a:bodyPr/>
-                    <a:lstStyle/>
-                    <a:p>
-                      <a:pPr algn="ctr"/>
-                      <a:r>
-                        <a:rPr sz="1200" b="0">
-                          <a:solidFill>
-                            <a:srgbClr val="6B7885"/>
-                          </a:solidFill>
-                          <a:latin typeface="Microsoft JhengHei"/>
-                        </a:rPr>
-                        <a:t>1,647 筆</a:t>
-                      </a:r>
-                    </a:p>
-                  </a:txBody>
-                  <a:tcPr marL="45720" marR="45720" marT="18288" marB="18288" anchor="ctr">
-                    <a:solidFill>
-                      <a:srgbClr val="FFFFFF"/>
-                    </a:solidFill>
-                  </a:tcPr>
-                </a:tc>
-                <a:tc>
-                  <a:txBody>
-                    <a:bodyPr/>
-                    <a:lstStyle/>
-                    <a:p>
-                      <a:pPr algn="ctr"/>
-                      <a:r>
-                        <a:rPr sz="1200" b="0">
-                          <a:solidFill>
-                            <a:srgbClr val="6B7885"/>
-                          </a:solidFill>
-                          <a:latin typeface="Microsoft JhengHei"/>
-                        </a:rPr>
-                        <a:t>12,352 筆</a:t>
-                      </a:r>
-                    </a:p>
-                  </a:txBody>
-                  <a:tcPr marL="45720" marR="45720" marT="18288" marB="18288" anchor="ctr">
-                    <a:solidFill>
-                      <a:srgbClr val="FFFFFF"/>
-                    </a:solidFill>
-                  </a:tcPr>
-                </a:tc>
-                <a:tc>
-                  <a:txBody>
-                    <a:bodyPr/>
-                    <a:lstStyle/>
-                    <a:p>
-                      <a:pPr algn="ctr"/>
-                      <a:r>
-                        <a:rPr sz="1200" b="0">
-                          <a:solidFill>
-                            <a:srgbClr val="6B7885"/>
-                          </a:solidFill>
-                          <a:latin typeface="Microsoft JhengHei"/>
-                        </a:rPr>
-                        <a:t>69,174 筆</a:t>
-                      </a:r>
-                    </a:p>
-                  </a:txBody>
-                  <a:tcPr marL="45720" marR="45720" marT="18288" marB="18288" anchor="ctr">
-                    <a:solidFill>
-                      <a:srgbClr val="FFFFFF"/>
-                    </a:solidFill>
-                  </a:tcPr>
-                </a:tc>
-              </a:tr>
-              <a:tr h="292608">
-                <a:tc>
-                  <a:txBody>
-                    <a:bodyPr/>
-                    <a:lstStyle/>
-                    <a:p>
-                      <a:pPr algn="l"/>
-                      <a:r>
-                        <a:rPr sz="1200" b="0">
-                          <a:solidFill>
-                            <a:srgbClr val="16212E"/>
-                          </a:solidFill>
-                          <a:latin typeface="Microsoft JhengHei"/>
-                        </a:rPr>
-                        <a:t>每天</a:t>
-                      </a:r>
-                    </a:p>
-                  </a:txBody>
-                  <a:tcPr marL="45720" marR="45720" marT="18288" marB="18288" anchor="ctr">
-                    <a:solidFill>
-                      <a:srgbClr val="FFFFFF"/>
-                    </a:solidFill>
-                  </a:tcPr>
-                </a:tc>
-                <a:tc>
-                  <a:txBody>
-                    <a:bodyPr/>
-                    <a:lstStyle/>
-                    <a:p>
-                      <a:pPr algn="ctr"/>
-                      <a:r>
-                        <a:rPr sz="1200" b="0">
-                          <a:solidFill>
-                            <a:srgbClr val="6B7885"/>
-                          </a:solidFill>
-                          <a:latin typeface="Microsoft JhengHei"/>
-                        </a:rPr>
-                        <a:t>72 筆</a:t>
-                      </a:r>
-                    </a:p>
-                  </a:txBody>
-                  <a:tcPr marL="45720" marR="45720" marT="18288" marB="18288" anchor="ctr">
-                    <a:solidFill>
-                      <a:srgbClr val="FFFFFF"/>
-                    </a:solidFill>
-                  </a:tcPr>
-                </a:tc>
-                <a:tc>
-                  <a:txBody>
-                    <a:bodyPr/>
-                    <a:lstStyle/>
-                    <a:p>
-                      <a:pPr algn="ctr"/>
-                      <a:r>
-                        <a:rPr sz="1200" b="0">
-                          <a:solidFill>
-                            <a:srgbClr val="6B7885"/>
-                          </a:solidFill>
-                          <a:latin typeface="Microsoft JhengHei"/>
-                        </a:rPr>
-                        <a:t>537 筆</a:t>
-                      </a:r>
-                    </a:p>
-                  </a:txBody>
-                  <a:tcPr marL="45720" marR="45720" marT="18288" marB="18288" anchor="ctr">
-                    <a:solidFill>
-                      <a:srgbClr val="FFFFFF"/>
-                    </a:solidFill>
-                  </a:tcPr>
-                </a:tc>
-                <a:tc>
-                  <a:txBody>
-                    <a:bodyPr/>
-                    <a:lstStyle/>
-                    <a:p>
-                      <a:pPr algn="ctr"/>
-                      <a:r>
-                        <a:rPr sz="1200" b="0">
-                          <a:solidFill>
-                            <a:srgbClr val="6B7885"/>
-                          </a:solidFill>
-                          <a:latin typeface="Microsoft JhengHei"/>
-                        </a:rPr>
-                        <a:t>3,008 筆</a:t>
-                      </a:r>
-                    </a:p>
-                  </a:txBody>
-                  <a:tcPr marL="45720" marR="45720" marT="18288" marB="18288" anchor="ctr">
-                    <a:solidFill>
-                      <a:srgbClr val="FFFFFF"/>
-                    </a:solidFill>
-                  </a:tcPr>
-                </a:tc>
-              </a:tr>
-              <a:tr h="292608">
-                <a:tc>
-                  <a:txBody>
-                    <a:bodyPr/>
-                    <a:lstStyle/>
-                    <a:p>
-                      <a:pPr algn="l"/>
-                      <a:r>
-                        <a:rPr sz="1200" b="1">
-                          <a:solidFill>
-                            <a:srgbClr val="C00000"/>
-                          </a:solidFill>
-                          <a:latin typeface="Microsoft JhengHei"/>
-                        </a:rPr>
-                        <a:t>月誤報 · 同根因</a:t>
-                      </a:r>
-                    </a:p>
-                  </a:txBody>
-                  <a:tcPr marL="45720" marR="45720" marT="18288" marB="18288" anchor="ctr">
-                    <a:solidFill>
-                      <a:srgbClr val="FBEFEF"/>
-                    </a:solidFill>
-                  </a:tcPr>
-                </a:tc>
-                <a:tc>
-                  <a:txBody>
-                    <a:bodyPr/>
-                    <a:lstStyle/>
-                    <a:p>
-                      <a:pPr algn="ctr"/>
-                      <a:r>
-                        <a:rPr sz="1200" b="0">
-                          <a:solidFill>
-                            <a:srgbClr val="C00000"/>
-                          </a:solidFill>
-                          <a:latin typeface="Microsoft JhengHei"/>
-                        </a:rPr>
-                        <a:t>124 · 103</a:t>
-                      </a:r>
-                    </a:p>
-                  </a:txBody>
-                  <a:tcPr marL="45720" marR="45720" marT="18288" marB="18288" anchor="ctr">
-                    <a:solidFill>
-                      <a:srgbClr val="FBEFEF"/>
-                    </a:solidFill>
-                  </a:tcPr>
-                </a:tc>
-                <a:tc>
-                  <a:txBody>
-                    <a:bodyPr/>
-                    <a:lstStyle/>
-                    <a:p>
-                      <a:pPr algn="ctr"/>
-                      <a:r>
-                        <a:rPr sz="1200" b="0">
-                          <a:solidFill>
-                            <a:srgbClr val="C00000"/>
-                          </a:solidFill>
-                          <a:latin typeface="Microsoft JhengHei"/>
-                        </a:rPr>
-                        <a:t>930 · 772</a:t>
-                      </a:r>
-                    </a:p>
-                  </a:txBody>
-                  <a:tcPr marL="45720" marR="45720" marT="18288" marB="18288" anchor="ctr">
-                    <a:solidFill>
-                      <a:srgbClr val="FBEFEF"/>
-                    </a:solidFill>
-                  </a:tcPr>
-                </a:tc>
-                <a:tc>
-                  <a:txBody>
-                    <a:bodyPr/>
-                    <a:lstStyle/>
-                    <a:p>
-                      <a:pPr algn="ctr"/>
-                      <a:r>
-                        <a:rPr sz="1200" b="0">
-                          <a:solidFill>
-                            <a:srgbClr val="C00000"/>
-                          </a:solidFill>
-                          <a:latin typeface="Microsoft JhengHei"/>
-                        </a:rPr>
-                        <a:t>5,208 · 4,326</a:t>
-                      </a:r>
-                    </a:p>
-                  </a:txBody>
-                  <a:tcPr marL="45720" marR="45720" marT="18288" marB="18288" anchor="ctr">
-                    <a:solidFill>
-                      <a:srgbClr val="FBEFEF"/>
-                    </a:solidFill>
-                  </a:tcPr>
-                </a:tc>
-              </a:tr>
-              <a:tr h="292608">
-                <a:tc>
-                  <a:txBody>
-                    <a:bodyPr/>
-                    <a:lstStyle/>
-                    <a:p>
-                      <a:pPr algn="l"/>
-                      <a:r>
-                        <a:rPr sz="1200" b="1">
-                          <a:solidFill>
-                            <a:srgbClr val="C00000"/>
-                          </a:solidFill>
-                          <a:latin typeface="Microsoft JhengHei"/>
-                        </a:rPr>
-                        <a:t>人工佔產能</a:t>
-                      </a:r>
-                    </a:p>
-                  </a:txBody>
-                  <a:tcPr marL="45720" marR="45720" marT="18288" marB="18288" anchor="ctr">
-                    <a:solidFill>
-                      <a:srgbClr val="FBEFEF"/>
-                    </a:solidFill>
-                  </a:tcPr>
-                </a:tc>
-                <a:tc>
-                  <a:txBody>
-                    <a:bodyPr/>
-                    <a:lstStyle/>
-                    <a:p>
-                      <a:pPr algn="ctr"/>
-                      <a:r>
-                        <a:rPr sz="1200" b="0">
-                          <a:solidFill>
-                            <a:srgbClr val="C00000"/>
-                          </a:solidFill>
-                          <a:latin typeface="Microsoft JhengHei"/>
-                        </a:rPr>
-                        <a:t>2%–3%</a:t>
-                      </a:r>
-                    </a:p>
-                  </a:txBody>
-                  <a:tcPr marL="45720" marR="45720" marT="18288" marB="18288" anchor="ctr">
-                    <a:solidFill>
-                      <a:srgbClr val="FBEFEF"/>
-                    </a:solidFill>
-                  </a:tcPr>
-                </a:tc>
-                <a:tc>
-                  <a:txBody>
-                    <a:bodyPr/>
-                    <a:lstStyle/>
-                    <a:p>
-                      <a:pPr algn="ctr"/>
-                      <a:r>
-                        <a:rPr sz="1200" b="0">
-                          <a:solidFill>
-                            <a:srgbClr val="C00000"/>
-                          </a:solidFill>
-                          <a:latin typeface="Microsoft JhengHei"/>
-                        </a:rPr>
-                        <a:t>13%–19%</a:t>
-                      </a:r>
-                    </a:p>
-                  </a:txBody>
-                  <a:tcPr marL="45720" marR="45720" marT="18288" marB="18288" anchor="ctr">
-                    <a:solidFill>
-                      <a:srgbClr val="FBEFEF"/>
-                    </a:solidFill>
-                  </a:tcPr>
-                </a:tc>
-                <a:tc>
-                  <a:txBody>
-                    <a:bodyPr/>
-                    <a:lstStyle/>
-                    <a:p>
-                      <a:pPr algn="ctr"/>
-                      <a:r>
-                        <a:rPr sz="1200" b="0">
-                          <a:solidFill>
-                            <a:srgbClr val="C00000"/>
-                          </a:solidFill>
-                          <a:latin typeface="Microsoft JhengHei"/>
-                        </a:rPr>
-                        <a:t>75%–108%</a:t>
-                      </a:r>
-                    </a:p>
-                  </a:txBody>
-                  <a:tcPr marL="45720" marR="45720" marT="18288" marB="18288" anchor="ctr">
-                    <a:solidFill>
-                      <a:srgbClr val="FBEFEF"/>
-                    </a:solidFill>
-                  </a:tcPr>
-                </a:tc>
-              </a:tr>
-            </a:tbl>
-          </a:graphicData>
-        </a:graphic>
-      </p:graphicFrame>
-      <p:sp>
-        <p:nvSpPr>
-          <p:cNvPr id="8" name="Rounded Rectangle 7"/>
+      <p:sp>
+        <p:nvSpPr>
+          <p:cNvPr id="7" name="Rectangle 6"/>
           <p:cNvSpPr/>
           <p:nvPr/>
         </p:nvSpPr>
         <p:spPr>
           <a:xfrm>
-            <a:off x="658368" y="5303520"/>
-            <a:ext cx="9658807" cy="1207008"/>
-          </a:xfrm>
-          <a:prstGeom prst="roundRect">
-            <a:avLst>
-              <a:gd name="adj" fmla="val 6000"/>
-            </a:avLst>
+            <a:off x="658368" y="3995928"/>
+            <a:ext cx="45720" cy="321468"/>
+          </a:xfrm>
+          <a:prstGeom prst="rect">
+            <a:avLst/>
           </a:prstGeom>
           <a:solidFill>
             <a:srgbClr val="1F4E79"/>
@@ -14549,14 +14120,499 @@
       </p:sp>
       <p:sp>
         <p:nvSpPr>
+          <p:cNvPr id="8" name="TextBox 7"/>
+          <p:cNvSpPr txBox="1"/>
+          <p:nvPr/>
+        </p:nvSpPr>
+        <p:spPr>
+          <a:xfrm>
+            <a:off x="804672" y="3968496"/>
+            <a:ext cx="2408822" cy="412908"/>
+          </a:xfrm>
+          <a:prstGeom prst="rect">
+            <a:avLst/>
+          </a:prstGeom>
+          <a:noFill/>
+        </p:spPr>
+        <p:txBody>
+          <a:bodyPr wrap="square" lIns="0" rIns="0" tIns="0" bIns="0" anchor="ctr">
+            <a:spAutoFit/>
+          </a:bodyPr>
+          <a:lstStyle/>
+          <a:p>
+            <a:pPr algn="l">
+              <a:lnSpc>
+                <a:spcPct val="125000"/>
+              </a:lnSpc>
+            </a:pPr>
+            <a:r>
+              <a:rPr sz="1400" b="1">
+                <a:solidFill>
+                  <a:srgbClr val="16212E"/>
+                </a:solidFill>
+                <a:latin typeface="Microsoft JhengHei"/>
+              </a:rPr>
+              <a:t>全部誤報</a:t>
+            </a:r>
+          </a:p>
+        </p:txBody>
+      </p:sp>
+      <p:sp>
+        <p:nvSpPr>
           <p:cNvPr id="9" name="TextBox 8"/>
           <p:cNvSpPr txBox="1"/>
           <p:nvPr/>
         </p:nvSpPr>
         <p:spPr>
           <a:xfrm>
-            <a:off x="841247" y="5303520"/>
-            <a:ext cx="9293047" cy="1207008"/>
+            <a:off x="3268358" y="3968496"/>
+            <a:ext cx="2891028" cy="412908"/>
+          </a:xfrm>
+          <a:prstGeom prst="rect">
+            <a:avLst/>
+          </a:prstGeom>
+          <a:noFill/>
+        </p:spPr>
+        <p:txBody>
+          <a:bodyPr wrap="square" lIns="0" rIns="0" tIns="0" bIns="0" anchor="ctr">
+            <a:spAutoFit/>
+          </a:bodyPr>
+          <a:lstStyle/>
+          <a:p>
+            <a:pPr algn="l">
+              <a:lnSpc>
+                <a:spcPct val="125000"/>
+              </a:lnSpc>
+            </a:pPr>
+            <a:r>
+              <a:rPr sz="1500" b="1">
+                <a:solidFill>
+                  <a:srgbClr val="1F4E79"/>
+                </a:solidFill>
+                <a:latin typeface="Microsoft JhengHei"/>
+              </a:rPr>
+              <a:t>226 筆/天</a:t>
+            </a:r>
+          </a:p>
+        </p:txBody>
+      </p:sp>
+      <p:sp>
+        <p:nvSpPr>
+          <p:cNvPr id="10" name="TextBox 9"/>
+          <p:cNvSpPr txBox="1"/>
+          <p:nvPr/>
+        </p:nvSpPr>
+        <p:spPr>
+          <a:xfrm>
+            <a:off x="6269114" y="3968496"/>
+            <a:ext cx="5154484" cy="412908"/>
+          </a:xfrm>
+          <a:prstGeom prst="rect">
+            <a:avLst/>
+          </a:prstGeom>
+          <a:noFill/>
+        </p:spPr>
+        <p:txBody>
+          <a:bodyPr wrap="square" lIns="0" rIns="0" tIns="0" bIns="0" anchor="ctr">
+            <a:spAutoFit/>
+          </a:bodyPr>
+          <a:lstStyle/>
+          <a:p>
+            <a:pPr algn="l">
+              <a:lnSpc>
+                <a:spcPct val="120000"/>
+              </a:lnSpc>
+            </a:pPr>
+            <a:r>
+              <a:rPr sz="1200" b="0">
+                <a:solidFill>
+                  <a:srgbClr val="6B7885"/>
+                </a:solidFill>
+                <a:latin typeface="Microsoft JhengHei"/>
+              </a:rPr>
+              <a:t>行車輔助 189 + 駕駛監控 36〔同比例放大,W1–6 驗〕</a:t>
+            </a:r>
+          </a:p>
+        </p:txBody>
+      </p:sp>
+      <p:sp>
+        <p:nvSpPr>
+          <p:cNvPr id="11" name="Rectangle 10"/>
+          <p:cNvSpPr/>
+          <p:nvPr/>
+        </p:nvSpPr>
+        <p:spPr>
+          <a:xfrm>
+            <a:off x="658368" y="4500276"/>
+            <a:ext cx="45720" cy="321468"/>
+          </a:xfrm>
+          <a:prstGeom prst="rect">
+            <a:avLst/>
+          </a:prstGeom>
+          <a:solidFill>
+            <a:srgbClr val="C00000"/>
+          </a:solidFill>
+          <a:ln>
+            <a:noFill/>
+          </a:ln>
+          <a:effectLst/>
+        </p:spPr>
+        <p:style>
+          <a:lnRef idx="1">
+            <a:schemeClr val="accent1"/>
+          </a:lnRef>
+          <a:fillRef idx="3">
+            <a:schemeClr val="accent1"/>
+          </a:fillRef>
+          <a:effectRef idx="2">
+            <a:schemeClr val="accent1"/>
+          </a:effectRef>
+          <a:fontRef idx="minor">
+            <a:schemeClr val="lt1"/>
+          </a:fontRef>
+        </p:style>
+        <p:txBody>
+          <a:bodyPr rtlCol="0" anchor="ctr"/>
+          <a:lstStyle/>
+          <a:p>
+            <a:pPr algn="ctr"/>
+          </a:p>
+        </p:txBody>
+      </p:sp>
+      <p:sp>
+        <p:nvSpPr>
+          <p:cNvPr id="12" name="TextBox 11"/>
+          <p:cNvSpPr txBox="1"/>
+          <p:nvPr/>
+        </p:nvSpPr>
+        <p:spPr>
+          <a:xfrm>
+            <a:off x="804672" y="4472844"/>
+            <a:ext cx="2408822" cy="412908"/>
+          </a:xfrm>
+          <a:prstGeom prst="rect">
+            <a:avLst/>
+          </a:prstGeom>
+          <a:noFill/>
+        </p:spPr>
+        <p:txBody>
+          <a:bodyPr wrap="square" lIns="0" rIns="0" tIns="0" bIns="0" anchor="ctr">
+            <a:spAutoFit/>
+          </a:bodyPr>
+          <a:lstStyle/>
+          <a:p>
+            <a:pPr algn="l">
+              <a:lnSpc>
+                <a:spcPct val="125000"/>
+              </a:lnSpc>
+            </a:pPr>
+            <a:r>
+              <a:rPr sz="1400" b="1">
+                <a:solidFill>
+                  <a:srgbClr val="16212E"/>
+                </a:solidFill>
+                <a:latin typeface="Microsoft JhengHei"/>
+              </a:rPr>
+              <a:t>同一個根因</a:t>
+            </a:r>
+          </a:p>
+        </p:txBody>
+      </p:sp>
+      <p:sp>
+        <p:nvSpPr>
+          <p:cNvPr id="13" name="TextBox 12"/>
+          <p:cNvSpPr txBox="1"/>
+          <p:nvPr/>
+        </p:nvSpPr>
+        <p:spPr>
+          <a:xfrm>
+            <a:off x="3268358" y="4472844"/>
+            <a:ext cx="2891028" cy="412908"/>
+          </a:xfrm>
+          <a:prstGeom prst="rect">
+            <a:avLst/>
+          </a:prstGeom>
+          <a:noFill/>
+        </p:spPr>
+        <p:txBody>
+          <a:bodyPr wrap="square" lIns="0" rIns="0" tIns="0" bIns="0" anchor="ctr">
+            <a:spAutoFit/>
+          </a:bodyPr>
+          <a:lstStyle/>
+          <a:p>
+            <a:pPr algn="l">
+              <a:lnSpc>
+                <a:spcPct val="125000"/>
+              </a:lnSpc>
+            </a:pPr>
+            <a:r>
+              <a:rPr sz="1500" b="1">
+                <a:solidFill>
+                  <a:srgbClr val="C00000"/>
+                </a:solidFill>
+                <a:latin typeface="Microsoft JhengHei"/>
+              </a:rPr>
+              <a:t>交通標誌辨識 188 筆/天 = 83%</a:t>
+            </a:r>
+          </a:p>
+        </p:txBody>
+      </p:sp>
+      <p:sp>
+        <p:nvSpPr>
+          <p:cNvPr id="14" name="TextBox 13"/>
+          <p:cNvSpPr txBox="1"/>
+          <p:nvPr/>
+        </p:nvSpPr>
+        <p:spPr>
+          <a:xfrm>
+            <a:off x="6269114" y="4472844"/>
+            <a:ext cx="5154484" cy="412908"/>
+          </a:xfrm>
+          <a:prstGeom prst="rect">
+            <a:avLst/>
+          </a:prstGeom>
+          <a:noFill/>
+        </p:spPr>
+        <p:txBody>
+          <a:bodyPr wrap="square" lIns="0" rIns="0" tIns="0" bIns="0" anchor="ctr">
+            <a:spAutoFit/>
+          </a:bodyPr>
+          <a:lstStyle/>
+          <a:p>
+            <a:pPr algn="l">
+              <a:lnSpc>
+                <a:spcPct val="120000"/>
+              </a:lnSpc>
+            </a:pPr>
+            <a:r>
+              <a:rPr sz="1200" b="0">
+                <a:solidFill>
+                  <a:srgbClr val="6B7885"/>
+                </a:solidFill>
+                <a:latin typeface="Microsoft JhengHei"/>
+              </a:rPr>
+              <a:t>樣本原值 103 / 124;放大不改變比例</a:t>
+            </a:r>
+          </a:p>
+        </p:txBody>
+      </p:sp>
+      <p:sp>
+        <p:nvSpPr>
+          <p:cNvPr id="15" name="Rectangle 14"/>
+          <p:cNvSpPr/>
+          <p:nvPr/>
+        </p:nvSpPr>
+        <p:spPr>
+          <a:xfrm>
+            <a:off x="658368" y="5004625"/>
+            <a:ext cx="45720" cy="321468"/>
+          </a:xfrm>
+          <a:prstGeom prst="rect">
+            <a:avLst/>
+          </a:prstGeom>
+          <a:solidFill>
+            <a:srgbClr val="C00000"/>
+          </a:solidFill>
+          <a:ln>
+            <a:noFill/>
+          </a:ln>
+          <a:effectLst/>
+        </p:spPr>
+        <p:style>
+          <a:lnRef idx="1">
+            <a:schemeClr val="accent1"/>
+          </a:lnRef>
+          <a:fillRef idx="3">
+            <a:schemeClr val="accent1"/>
+          </a:fillRef>
+          <a:effectRef idx="2">
+            <a:schemeClr val="accent1"/>
+          </a:effectRef>
+          <a:fontRef idx="minor">
+            <a:schemeClr val="lt1"/>
+          </a:fontRef>
+        </p:style>
+        <p:txBody>
+          <a:bodyPr rtlCol="0" anchor="ctr"/>
+          <a:lstStyle/>
+          <a:p>
+            <a:pPr algn="ctr"/>
+          </a:p>
+        </p:txBody>
+      </p:sp>
+      <p:sp>
+        <p:nvSpPr>
+          <p:cNvPr id="16" name="TextBox 15"/>
+          <p:cNvSpPr txBox="1"/>
+          <p:nvPr/>
+        </p:nvSpPr>
+        <p:spPr>
+          <a:xfrm>
+            <a:off x="804672" y="4977193"/>
+            <a:ext cx="2408822" cy="412908"/>
+          </a:xfrm>
+          <a:prstGeom prst="rect">
+            <a:avLst/>
+          </a:prstGeom>
+          <a:noFill/>
+        </p:spPr>
+        <p:txBody>
+          <a:bodyPr wrap="square" lIns="0" rIns="0" tIns="0" bIns="0" anchor="ctr">
+            <a:spAutoFit/>
+          </a:bodyPr>
+          <a:lstStyle/>
+          <a:p>
+            <a:pPr algn="l">
+              <a:lnSpc>
+                <a:spcPct val="125000"/>
+              </a:lnSpc>
+            </a:pPr>
+            <a:r>
+              <a:rPr sz="1400" b="1">
+                <a:solidFill>
+                  <a:srgbClr val="16212E"/>
+                </a:solidFill>
+                <a:latin typeface="Microsoft JhengHei"/>
+              </a:rPr>
+              <a:t>解它要的東西</a:t>
+            </a:r>
+          </a:p>
+        </p:txBody>
+      </p:sp>
+      <p:sp>
+        <p:nvSpPr>
+          <p:cNvPr id="17" name="TextBox 16"/>
+          <p:cNvSpPr txBox="1"/>
+          <p:nvPr/>
+        </p:nvSpPr>
+        <p:spPr>
+          <a:xfrm>
+            <a:off x="3268358" y="4977193"/>
+            <a:ext cx="2891028" cy="412908"/>
+          </a:xfrm>
+          <a:prstGeom prst="rect">
+            <a:avLst/>
+          </a:prstGeom>
+          <a:noFill/>
+        </p:spPr>
+        <p:txBody>
+          <a:bodyPr wrap="square" lIns="0" rIns="0" tIns="0" bIns="0" anchor="ctr">
+            <a:spAutoFit/>
+          </a:bodyPr>
+          <a:lstStyle/>
+          <a:p>
+            <a:pPr algn="l">
+              <a:lnSpc>
+                <a:spcPct val="125000"/>
+              </a:lnSpc>
+            </a:pPr>
+            <a:r>
+              <a:rPr sz="1500" b="1">
+                <a:solidFill>
+                  <a:srgbClr val="C00000"/>
+                </a:solidFill>
+                <a:latin typeface="Microsoft JhengHei"/>
+              </a:rPr>
+              <a:t>速限資料 —— 公司既有資產</a:t>
+            </a:r>
+          </a:p>
+        </p:txBody>
+      </p:sp>
+      <p:sp>
+        <p:nvSpPr>
+          <p:cNvPr id="18" name="TextBox 17"/>
+          <p:cNvSpPr txBox="1"/>
+          <p:nvPr/>
+        </p:nvSpPr>
+        <p:spPr>
+          <a:xfrm>
+            <a:off x="6269114" y="4977193"/>
+            <a:ext cx="5154484" cy="412908"/>
+          </a:xfrm>
+          <a:prstGeom prst="rect">
+            <a:avLst/>
+          </a:prstGeom>
+          <a:noFill/>
+        </p:spPr>
+        <p:txBody>
+          <a:bodyPr wrap="square" lIns="0" rIns="0" tIns="0" bIns="0" anchor="ctr">
+            <a:spAutoFit/>
+          </a:bodyPr>
+          <a:lstStyle/>
+          <a:p>
+            <a:pPr algn="l">
+              <a:lnSpc>
+                <a:spcPct val="120000"/>
+              </a:lnSpc>
+            </a:pPr>
+            <a:r>
+              <a:rPr sz="1200" b="0">
+                <a:solidFill>
+                  <a:srgbClr val="6B7885"/>
+                </a:solidFill>
+                <a:latin typeface="Microsoft JhengHei"/>
+              </a:rPr>
+              <a:t>不用等新技術,也不用買</a:t>
+            </a:r>
+          </a:p>
+        </p:txBody>
+      </p:sp>
+      <p:sp>
+        <p:nvSpPr>
+          <p:cNvPr id="19" name="Rounded Rectangle 18"/>
+          <p:cNvSpPr/>
+          <p:nvPr/>
+        </p:nvSpPr>
+        <p:spPr>
+          <a:xfrm>
+            <a:off x="658368" y="5831778"/>
+            <a:ext cx="9658807" cy="678749"/>
+          </a:xfrm>
+          <a:prstGeom prst="roundRect">
+            <a:avLst>
+              <a:gd name="adj" fmla="val 6000"/>
+            </a:avLst>
+          </a:prstGeom>
+          <a:solidFill>
+            <a:srgbClr val="1F4E79"/>
+          </a:solidFill>
+          <a:ln>
+            <a:noFill/>
+          </a:ln>
+          <a:effectLst/>
+        </p:spPr>
+        <p:style>
+          <a:lnRef idx="1">
+            <a:schemeClr val="accent1"/>
+          </a:lnRef>
+          <a:fillRef idx="3">
+            <a:schemeClr val="accent1"/>
+          </a:fillRef>
+          <a:effectRef idx="2">
+            <a:schemeClr val="accent1"/>
+          </a:effectRef>
+          <a:fontRef idx="minor">
+            <a:schemeClr val="lt1"/>
+          </a:fontRef>
+        </p:style>
+        <p:txBody>
+          <a:bodyPr rtlCol="0" anchor="ctr"/>
+          <a:lstStyle/>
+          <a:p>
+            <a:pPr algn="ctr"/>
+          </a:p>
+        </p:txBody>
+      </p:sp>
+      <p:sp>
+        <p:nvSpPr>
+          <p:cNvPr id="20" name="TextBox 19"/>
+          <p:cNvSpPr txBox="1"/>
+          <p:nvPr/>
+        </p:nvSpPr>
+        <p:spPr>
+          <a:xfrm>
+            <a:off x="841247" y="5831778"/>
+            <a:ext cx="9293047" cy="678749"/>
           </a:xfrm>
           <a:prstGeom prst="rect">
             <a:avLst/>
@@ -14581,7 +14637,7 @@
                 </a:solidFill>
                 <a:latin typeface="Microsoft JhengHei"/>
               </a:rPr>
-              <a:t>每台車每工作日 17.9 筆 —— 五個人吃得下 5–7 個 30 台的車隊,但一個大型車隊就滿了</a:t>
+              <a:t>樣本只有 4 台車 · 1,647 筆 —— 比例能不能代表 168 台,正是第六週要量的第一件事</a:t>
             </a:r>
           </a:p>
         </p:txBody>

--- a/Artificial Intelligence for Enterprises/Assessment3/Huang_26254793_421104_Assessment 3.pptx
+++ b/Artificial Intelligence for Enterprises/Assessment3/Huang_26254793_421104_Assessment 3.pptx
@@ -645,7 +645,7 @@
           <a:lstStyle/>
           <a:p>
             <a:r>
-              <a:t>【第 10 頁 · P8 · 怎麼算成功:三層 KPI,一條回圈】　目標 46 秒 · 累計 9:30</a:t>
+              <a:t>【第 10 頁 · P8 · 怎麼算成功:三層 KPI,一條回圈】　目標 46 秒 · 累計 9:28</a:t>
             </a:r>
           </a:p>
           <a:p/>
@@ -782,7 +782,7 @@
           <a:lstStyle/>
           <a:p>
             <a:r>
-              <a:t>【第 11 頁 · P9 · 六個月 · 六個工作包 · 三道決策門】　目標 47 秒 · 累計 10:17</a:t>
+              <a:t>【第 11 頁 · P9 · 六個月 · 六個工作包 · 三道決策門】　目標 47 秒 · 累計 10:15</a:t>
             </a:r>
           </a:p>
           <a:p/>
@@ -934,7 +934,7 @@
           <a:lstStyle/>
           <a:p>
             <a:r>
-              <a:t>【第 12 頁 · P10 · 資源、當責與請求】　目標 64 秒 · 累計 11:20</a:t>
+              <a:t>【第 12 頁 · P10 · 資源、當責與請求】　目標 64 秒 · 累計 11:19</a:t>
             </a:r>
           </a:p>
           <a:p/>
@@ -1106,7 +1106,7 @@
           <a:lstStyle/>
           <a:p>
             <a:r>
-              <a:t>【第 13 頁 · 參考文獻(第 11 頁 — 不佔十頁額度)】　目標 5 秒 · 累計 11:25</a:t>
+              <a:t>【第 13 頁 · 參考文獻(第 11 頁 — 不佔十頁額度)】　目標 5 秒 · 累計 11:23</a:t>
             </a:r>
           </a:p>
           <a:p/>
@@ -1514,13 +1514,13 @@
           <a:lstStyle/>
           <a:p>
             <a:r>
-              <a:t>【第 4 頁 · P3 · 發現過程:兩種病,兩個缺口】　目標 71 秒 · 累計 4:14</a:t>
+              <a:t>【第 4 頁 · P3 · 發現過程:兩種病,兩個缺口】　目標 70 秒 · 累計 4:12</a:t>
             </a:r>
           </a:p>
           <a:p/>
           <a:p>
             <a:r>
-              <a:t>★ 一天兩百二十六筆誤報,一百八十八筆是同一個根因 —— 而修它要的速限資料我們手上就有。</a:t>
+              <a:t>★ 一個月九百三十筆誤報,七百七十二筆是同一個根因 —— 而修它要的速限資料我們手上就有。</a:t>
             </a:r>
           </a:p>
           <a:p/>
@@ -1531,7 +1531,7 @@
           </a:p>
           <a:p>
             <a:r>
-              <a:t>· 片上數值已從樣本(4 台 · 23 工作天 · 1,647 筆)放大到 3,000 筆/天 的車隊(約 168 台)</a:t>
+              <a:t>· 片上數值已從樣本(4 台 · 23 工作天 · 1,647 筆)放大到一個 30 台的小車隊</a:t>
             </a:r>
           </a:p>
           <a:p>
@@ -1542,17 +1542,17 @@
           <a:p/>
           <a:p>
             <a:r>
-              <a:t># ADAS 1,874 筆/天 → 誤報 189(10.1%) · DMS 1,126 筆/天 → 誤報 36(3.2%)</a:t>
-            </a:r>
-          </a:p>
-          <a:p>
-            <a:r>
-              <a:t># 全部誤報 226 筆/天 · 同根因 188 筆/天 = 83%</a:t>
-            </a:r>
-          </a:p>
-          <a:p>
-            <a:r>
-              <a:t># 放大倍數 41.9(樣本每台車每工作日 17.9 筆)</a:t>
+              <a:t># ADAS 7,718 筆/月 → 誤報 780(10.1%) · DMS 4,635 筆/月 → 誤報 150(3.2%)</a:t>
+            </a:r>
+          </a:p>
+          <a:p>
+            <a:r>
+              <a:t># 全部誤報 930 筆/月 · 同根因 772 筆/月 = 83% · 月事件 12,352 筆、每天 537 筆</a:t>
+            </a:r>
+          </a:p>
+          <a:p>
+            <a:r>
+              <a:t># 放大倍數 7.5(4 台 → 30 台);每台車每工作日 17.9 筆</a:t>
             </a:r>
           </a:p>
           <a:p/>
@@ -1573,7 +1573,7 @@
           </a:p>
           <a:p>
             <a:r>
-              <a:t>⚠️ 他若問「168 台哪來的」:3,000 筆/天 ÷ 每車每工作日 17.9 筆</a:t>
+              <a:t>⚠️ ⚠️ 這一頁的車隊是 **30 台的小車隊**,跟第 2、5 頁的 3,000 筆/天 大型車隊不是同一個 ——表頭已寫明,講的時候也要說「一個 30 台的小車隊」,不要讓人以為是同一個客戶</a:t>
             </a:r>
           </a:p>
           <a:p/>
@@ -1585,12 +1585,12 @@
           <a:p/>
           <a:p>
             <a:r>
-              <a:t>── 逐字備援 · 314 字(忘詞才看,不是拿來唸的)──</a:t>
-            </a:r>
-          </a:p>
-          <a:p>
-            <a:r>
-              <a:t>那我們的時間到底花在哪裡?我把最近一份判讀拆開來看。這張表上的數字,已經從樣本同比例放大到一個三千筆一天的車隊,大約一百六十八台車。行車輔助一天一千八百七十四筆,其中一百八十九筆是誤報;駕駛監控一天一千一百二十六筆,誤報三十六筆。兩邊錯的不是同一件事:行車輔助錯的是模型,缺的是脈絡,判定依據不在畫面裡;駕駛監控錯的是人,缺的是判準,同一段影片兩個人給不同標籤。兩種病要兩種修法,所以標註跟脈絡是兩個不同的工作包,而且都排在 AI 前面。合起來一天兩百二十六筆誤報,而其中一百八十八筆是同一個根因:交通標誌辨識,八成三。修它要的速限資料,公司手上就有 —— 不用等新技術,也不用買。但我要說清楚:這些是從四台車、一千六百四十七筆同比例放大來的。這個比例能不能代表一百六十八台,正是第六週要量的第一件事。</a:t>
+              <a:t>── 逐字備援 · 306 字(忘詞才看,不是拿來唸的)──</a:t>
+            </a:r>
+          </a:p>
+          <a:p>
+            <a:r>
+              <a:t>那我們的時間到底花在哪裡?我把最近一份判讀拆開來看。這張表上的數字,已經從樣本同比例放大到一個三十台的小車隊,一個月二十三個工作天。行車輔助一個月七千七百多筆,其中七百八十筆是誤報;駕駛監控四千六百多筆,誤報一百五十筆。兩邊錯的不是同一件事:行車輔助錯的是模型,缺的是脈絡,判定依據不在畫面裡;駕駛監控錯的是人,缺的是判準,同一段影片兩個人給不同標籤。兩種病要兩種修法,所以標註跟脈絡是兩個不同的工作包,而且都排在 AI 前面。合起來一個月九百三十筆誤報,而其中七百七十二筆是同一個根因:交通標誌辨識,八成三。修它要的速限資料,公司手上就有 —— 不用等新技術,也不用買。但我要說清楚:這些是從四台車、一千六百四十七筆同比例放大來的,這個比例能不能代表三十台,正是第六週要量的第一件事。</a:t>
             </a:r>
           </a:p>
           <a:p/>
@@ -1671,7 +1671,7 @@
           <a:lstStyle/>
           <a:p>
             <a:r>
-              <a:t>【第 5 頁 · 選型與部署:兩層模型、一台設備】　目標 66 秒 · 累計 5:20</a:t>
+              <a:t>【第 5 頁 · 選型與部署:兩層模型、一台設備】　目標 66 秒 · 累計 5:18</a:t>
             </a:r>
           </a:p>
           <a:p/>
@@ -1843,7 +1843,7 @@
           <a:lstStyle/>
           <a:p>
             <a:r>
-              <a:t>【第 6 頁 · P4 · 我們看不見的那一半:有資料,沒有習慣】　目標 59 秒 · 累計 6:19</a:t>
+              <a:t>【第 6 頁 · P4 · 我們看不見的那一半:有資料,沒有習慣】　目標 59 秒 · 累計 6:17</a:t>
             </a:r>
           </a:p>
           <a:p/>
@@ -2025,7 +2025,7 @@
           <a:lstStyle/>
           <a:p>
             <a:r>
-              <a:t>【第 7 頁 · P5 · 五條路,含三條不用 AI】　目標 44 秒 · 累計 7:03</a:t>
+              <a:t>【第 7 頁 · P5 · 五條路,含三條不用 AI】　目標 44 秒 · 累計 7:02</a:t>
             </a:r>
           </a:p>
           <a:p/>
@@ -2167,7 +2167,7 @@
           <a:lstStyle/>
           <a:p>
             <a:r>
-              <a:t>【第 8 頁 · P6 · 風險:七類十條,緩解位移與殘餘風險】　目標 51 秒 · 累計 7:54</a:t>
+              <a:t>【第 8 頁 · P6 · 風險:七類十條,緩解位移與殘餘風險】　目標 51 秒 · 累計 7:52</a:t>
             </a:r>
           </a:p>
           <a:p/>
@@ -2320,7 +2320,7 @@
           <a:lstStyle/>
           <a:p>
             <a:r>
-              <a:t>【第 9 頁 · P7 · 倫理與可申訴性:對照澳洲 AI 倫理八原則】　目標 50 秒 · 累計 8:44</a:t>
+              <a:t>【第 9 頁 · P7 · 倫理與可申訴性:對照澳洲 AI 倫理八原則】　目標 50 秒 · 累計 8:42</a:t>
             </a:r>
           </a:p>
           <a:p/>
@@ -13501,7 +13501,7 @@
                 </a:solidFill>
                 <a:latin typeface="Microsoft JhengHei"/>
               </a:rPr>
-              <a:t>數值已從樣本(4 台車 · 23 個工作天 · 1,647 筆)同比例放大到一個 3,000 筆/天 的車隊(約 168 台)</a:t>
+              <a:t>數值已從樣本(4 台車 · 23 個工作天 · 1,647 筆)同比例放大到一個 30 台的小車隊</a:t>
             </a:r>
           </a:p>
         </p:txBody>
@@ -13569,9 +13569,9 @@
                 <a:tableStyleId>{5C22544A-7EE6-4342-B048-85BDC9FD1C3A}</a:tableStyleId>
               </a:tblPr>
               <a:tblGrid>
-                <a:gridCol w="2609990"/>
-                <a:gridCol w="4132484"/>
-                <a:gridCol w="4132484"/>
+                <a:gridCol w="3044988"/>
+                <a:gridCol w="3914985"/>
+                <a:gridCol w="3914985"/>
               </a:tblGrid>
               <a:tr h="329184">
                 <a:tc>
@@ -13587,7 +13587,7 @@
                           </a:solidFill>
                           <a:latin typeface="Microsoft JhengHei"/>
                         </a:rPr>
-                        <a:t>一個 3,000 筆/天 的車隊</a:t>
+                        <a:t>一個 30 台的小車隊 · 每月(23 工作天)</a:t>
                       </a:r>
                     </a:p>
                   </a:txBody>
@@ -13681,7 +13681,7 @@
                           </a:solidFill>
                           <a:latin typeface="Microsoft JhengHei"/>
                         </a:rPr>
-                        <a:t>1,874 筆/天</a:t>
+                        <a:t>7,718 筆</a:t>
                       </a:r>
                     </a:p>
                   </a:txBody>
@@ -13704,7 +13704,7 @@
                           </a:solidFill>
                           <a:latin typeface="Microsoft JhengHei"/>
                         </a:rPr>
-                        <a:t>1,126 筆/天</a:t>
+                        <a:t>4,635 筆</a:t>
                       </a:r>
                     </a:p>
                   </a:txBody>
@@ -13752,7 +13752,7 @@
                           </a:solidFill>
                           <a:latin typeface="Microsoft JhengHei"/>
                         </a:rPr>
-                        <a:t>189 筆/天(10.1%)</a:t>
+                        <a:t>780 筆(10.1%)</a:t>
                       </a:r>
                     </a:p>
                   </a:txBody>
@@ -13775,7 +13775,7 @@
                           </a:solidFill>
                           <a:latin typeface="Microsoft JhengHei"/>
                         </a:rPr>
-                        <a:t>36 筆/天(3.2%)</a:t>
+                        <a:t>150 筆(3.2%)</a:t>
                       </a:r>
                     </a:p>
                   </a:txBody>
@@ -14191,7 +14191,7 @@
                 </a:solidFill>
                 <a:latin typeface="Microsoft JhengHei"/>
               </a:rPr>
-              <a:t>226 筆/天</a:t>
+              <a:t>930 筆/月(每天 40 筆)</a:t>
             </a:r>
           </a:p>
         </p:txBody>
@@ -14230,7 +14230,7 @@
                 </a:solidFill>
                 <a:latin typeface="Microsoft JhengHei"/>
               </a:rPr>
-              <a:t>行車輔助 189 + 駕駛監控 36〔同比例放大,W1–6 驗〕</a:t>
+              <a:t>行車輔助 780 + 駕駛監控 150;月事件 12,352 筆、每天 537 筆</a:t>
             </a:r>
           </a:p>
         </p:txBody>
@@ -14352,7 +14352,7 @@
                 </a:solidFill>
                 <a:latin typeface="Microsoft JhengHei"/>
               </a:rPr>
-              <a:t>交通標誌辨識 188 筆/天 = 83%</a:t>
+              <a:t>交通標誌辨識 772 筆/月 = 83%</a:t>
             </a:r>
           </a:p>
         </p:txBody>
@@ -14391,7 +14391,7 @@
                 </a:solidFill>
                 <a:latin typeface="Microsoft JhengHei"/>
               </a:rPr>
-              <a:t>樣本原值 103 / 124;放大不改變比例</a:t>
+              <a:t>樣本原值 103 / 124;同比例放大不改變比例</a:t>
             </a:r>
           </a:p>
         </p:txBody>
@@ -14565,8 +14565,8 @@
         </p:nvSpPr>
         <p:spPr>
           <a:xfrm>
-            <a:off x="658368" y="5831778"/>
-            <a:ext cx="9658807" cy="678749"/>
+            <a:off x="658368" y="5864354"/>
+            <a:ext cx="9658807" cy="646173"/>
           </a:xfrm>
           <a:prstGeom prst="roundRect">
             <a:avLst>
@@ -14611,8 +14611,8 @@
         </p:nvSpPr>
         <p:spPr>
           <a:xfrm>
-            <a:off x="841247" y="5831778"/>
-            <a:ext cx="9293047" cy="678749"/>
+            <a:off x="841247" y="5864354"/>
+            <a:ext cx="9293047" cy="646173"/>
           </a:xfrm>
           <a:prstGeom prst="rect">
             <a:avLst/>
@@ -14637,7 +14637,7 @@
                 </a:solidFill>
                 <a:latin typeface="Microsoft JhengHei"/>
               </a:rPr>
-              <a:t>樣本只有 4 台車 · 1,647 筆 —— 比例能不能代表 168 台,正是第六週要量的第一件事</a:t>
+              <a:t>樣本只有 4 台車 · 1,647 筆 —— 比例能不能代表 30 台,正是第六週要量的第一件事</a:t>
             </a:r>
           </a:p>
         </p:txBody>

--- a/Artificial Intelligence for Enterprises/Assessment3/Huang_26254793_421104_Assessment 3.pptx
+++ b/Artificial Intelligence for Enterprises/Assessment3/Huang_26254793_421104_Assessment 3.pptx
@@ -645,7 +645,7 @@
           <a:lstStyle/>
           <a:p>
             <a:r>
-              <a:t>【第 10 頁 · P8 · 怎麼算成功:三層 KPI,一條回圈】　目標 46 秒 · 累計 9:28</a:t>
+              <a:t>【第 10 頁 · P8 · 怎麼算成功:三層 KPI,一條回圈】　目標 46 秒 · 累計 9:19</a:t>
             </a:r>
           </a:p>
           <a:p/>
@@ -782,7 +782,7 @@
           <a:lstStyle/>
           <a:p>
             <a:r>
-              <a:t>【第 11 頁 · P9 · 六個月 · 六個工作包 · 三道決策門】　目標 47 秒 · 累計 10:15</a:t>
+              <a:t>【第 11 頁 · P9 · 六個月 · 六個工作包 · 三道決策門】　目標 47 秒 · 累計 10:07</a:t>
             </a:r>
           </a:p>
           <a:p/>
@@ -934,7 +934,7 @@
           <a:lstStyle/>
           <a:p>
             <a:r>
-              <a:t>【第 12 頁 · P10 · 資源、當責與請求】　目標 64 秒 · 累計 11:19</a:t>
+              <a:t>【第 12 頁 · P10 · 資源、當責與請求】　目標 64 秒 · 累計 11:10</a:t>
             </a:r>
           </a:p>
           <a:p/>
@@ -1106,7 +1106,7 @@
           <a:lstStyle/>
           <a:p>
             <a:r>
-              <a:t>【第 13 頁 · 參考文獻(第 11 頁 — 不佔十頁額度)】　目標 5 秒 · 累計 11:23</a:t>
+              <a:t>【第 13 頁 · 參考文獻(第 11 頁 — 不佔十頁額度)】　目標 5 秒 · 累計 11:15</a:t>
             </a:r>
           </a:p>
           <a:p/>
@@ -1514,19 +1514,19 @@
           <a:lstStyle/>
           <a:p>
             <a:r>
-              <a:t>【第 4 頁 · P3 · 發現過程:兩種病,兩個缺口】　目標 70 秒 · 累計 4:12</a:t>
+              <a:t>【第 4 頁 · P3 · 發現過程:兩種病,兩個缺口】　目標 61 秒 · 累計 4:04</a:t>
             </a:r>
           </a:p>
           <a:p/>
           <a:p>
             <a:r>
-              <a:t>★ 一個月九百三十筆誤報,七百七十二筆是同一個根因 —— 而修它要的速限資料我們手上就有。</a:t>
+              <a:t>★ 八成三的誤報回到交通標誌 —— 而速限資料公司手上就有,這就是新 AI 要針對訓練的。</a:t>
             </a:r>
           </a:p>
           <a:p/>
           <a:p>
             <a:r>
-              <a:t>· 兩種病要兩種修法:行車輔助缺脈絡(WP-C)、駕駛監控缺判準(WP-B)——這就是為什麼標註跟脈絡排在 AI 前面</a:t>
+              <a:t>· ADAS 錯的是模型 —— 看不到畫面外的速限 → 新 AI 要把地圖速限讀進來(多模態輸入)</a:t>
             </a:r>
           </a:p>
           <a:p>
@@ -1536,7 +1536,7 @@
           </a:p>
           <a:p>
             <a:r>
-              <a:t>· 誤報 124 筆裡 103 筆同一個根因;修它要的速限資料是公司既有資產</a:t>
+              <a:t>· DMS 錯的是人 —— 判準不一致的標籤餵進去,**訓練資料本身就是髒的**;所以標註品質排在模型前面不是保守,是必要</a:t>
             </a:r>
           </a:p>
           <a:p/>
@@ -1563,7 +1563,7 @@
           </a:p>
           <a:p>
             <a:r>
-              <a:t>⚠️ 放大列一定要接「同比例外推,W1–6 驗」——4 台車的錯誤樣態能不能代表 168 台,正是第六週要量的第一件事</a:t>
+              <a:t>⚠️ 放大列一定要接「同比例外推,W1–6 驗」——4 台車的錯誤樣態能不能代表 30 台,正是第六週要量的第一件事</a:t>
             </a:r>
           </a:p>
           <a:p>
@@ -1585,12 +1585,12 @@
           <a:p/>
           <a:p>
             <a:r>
-              <a:t>── 逐字備援 · 306 字(忘詞才看,不是拿來唸的)──</a:t>
-            </a:r>
-          </a:p>
-          <a:p>
-            <a:r>
-              <a:t>那我們的時間到底花在哪裡?我把最近一份判讀拆開來看。這張表上的數字,已經從樣本同比例放大到一個三十台的小車隊,一個月二十三個工作天。行車輔助一個月七千七百多筆,其中七百八十筆是誤報;駕駛監控四千六百多筆,誤報一百五十筆。兩邊錯的不是同一件事:行車輔助錯的是模型,缺的是脈絡,判定依據不在畫面裡;駕駛監控錯的是人,缺的是判準,同一段影片兩個人給不同標籤。兩種病要兩種修法,所以標註跟脈絡是兩個不同的工作包,而且都排在 AI 前面。合起來一個月九百三十筆誤報,而其中七百七十二筆是同一個根因:交通標誌辨識,八成三。修它要的速限資料,公司手上就有 —— 不用等新技術,也不用買。但我要說清楚:這些是從四台車、一千六百四十七筆同比例放大來的,這個比例能不能代表三十台,正是第六週要量的第一件事。</a:t>
+              <a:t>── 逐字備援 · 269 字(忘詞才看,不是拿來唸的)──</a:t>
+            </a:r>
+          </a:p>
+          <a:p>
+            <a:r>
+              <a:t>那機器現在到底判錯在哪裡?我把最近一份判讀拆開來看 ——表上的數字已經從樣本同比例放大到一個三十台的小車隊。行車輔助一個月七百八十筆誤報,錯的是模型:它看不到畫面外的速限。駕駛監控一百五十筆,錯的是人:同一段影片,兩個複核者給不同標籤。這兩件事對新的 AI 意義完全不同。第一件,把地圖速限讀進模型 —— 那正是多模態要解的:影片以外的東西也要讀進來。第二件更關鍵:判準不一致的標籤如果直接餵進去,訓練資料本身就是髒的。所以標註品質那一包排在模型前面,不是保守,是必要。合起來一個月九百三十筆誤報,而其中七百七十二筆是同一個根因:交通標誌辨識,八成三。速限資料公司手上就有 —— 這就是新的 AI 要針對訓練的東西。</a:t>
             </a:r>
           </a:p>
           <a:p/>
@@ -1671,7 +1671,7 @@
           <a:lstStyle/>
           <a:p>
             <a:r>
-              <a:t>【第 5 頁 · 選型與部署:兩層模型、一台設備】　目標 66 秒 · 累計 5:18</a:t>
+              <a:t>【第 5 頁 · 選型與部署:兩層模型、一台設備】　目標 66 秒 · 累計 5:10</a:t>
             </a:r>
           </a:p>
           <a:p/>
@@ -1843,7 +1843,7 @@
           <a:lstStyle/>
           <a:p>
             <a:r>
-              <a:t>【第 6 頁 · P4 · 我們看不見的那一半:有資料,沒有習慣】　目標 59 秒 · 累計 6:17</a:t>
+              <a:t>【第 6 頁 · P4 · 我們看不見的那一半:有資料,沒有習慣】　目標 59 秒 · 累計 6:09</a:t>
             </a:r>
           </a:p>
           <a:p/>
@@ -2025,7 +2025,7 @@
           <a:lstStyle/>
           <a:p>
             <a:r>
-              <a:t>【第 7 頁 · P5 · 五條路,含三條不用 AI】　目標 44 秒 · 累計 7:02</a:t>
+              <a:t>【第 7 頁 · P5 · 五條路,含三條不用 AI】　目標 44 秒 · 累計 6:53</a:t>
             </a:r>
           </a:p>
           <a:p/>
@@ -2167,7 +2167,7 @@
           <a:lstStyle/>
           <a:p>
             <a:r>
-              <a:t>【第 8 頁 · P6 · 風險:七類十條,緩解位移與殘餘風險】　目標 51 秒 · 累計 7:52</a:t>
+              <a:t>【第 8 頁 · P6 · 風險:七類十條,緩解位移與殘餘風險】　目標 51 秒 · 累計 7:44</a:t>
             </a:r>
           </a:p>
           <a:p/>
@@ -2320,7 +2320,7 @@
           <a:lstStyle/>
           <a:p>
             <a:r>
-              <a:t>【第 9 頁 · P7 · 倫理與可申訴性:對照澳洲 AI 倫理八原則】　目標 50 秒 · 累計 8:42</a:t>
+              <a:t>【第 9 頁 · P7 · 倫理與可申訴性:對照澳洲 AI 倫理八原則】　目標 50 秒 · 累計 8:34</a:t>
             </a:r>
           </a:p>
           <a:p/>
@@ -13462,7 +13462,7 @@
                 </a:solidFill>
                 <a:latin typeface="Microsoft JhengHei"/>
               </a:rPr>
-              <a:t>誤報的八成三回到同一個根因 —— 修它要的速限資料我們手上就有</a:t>
+              <a:t>AI 現在判錯的兩個原因 —— 一個缺脈絡,一個缺判準</a:t>
             </a:r>
           </a:p>
         </p:txBody>
@@ -13501,7 +13501,7 @@
                 </a:solidFill>
                 <a:latin typeface="Microsoft JhengHei"/>
               </a:rPr>
-              <a:t>數值已從樣本(4 台車 · 23 個工作天 · 1,647 筆)同比例放大到一個 30 台的小車隊</a:t>
+              <a:t>數值已從樣本(4 台車 · 23 個工作天 · 1,647 筆)同比例放大到一個 30 台的小車隊;比例能不能代表 30 台,W1–6 驗</a:t>
             </a:r>
           </a:p>
         </p:txBody>
@@ -13560,7 +13560,7 @@
         </p:nvGraphicFramePr>
         <p:xfrm>
           <a:off x="658368" y="1755648"/>
-          <a:ext cx="10874958" cy="2084832"/>
+          <a:ext cx="10874958" cy="2377440"/>
         </p:xfrm>
         <a:graphic>
           <a:graphicData uri="http://schemas.openxmlformats.org/drawingml/2006/table">
@@ -13569,9 +13569,9 @@
                 <a:tableStyleId>{5C22544A-7EE6-4342-B048-85BDC9FD1C3A}</a:tableStyleId>
               </a:tblPr>
               <a:tblGrid>
-                <a:gridCol w="3044988"/>
-                <a:gridCol w="3914985"/>
-                <a:gridCol w="3914985"/>
+                <a:gridCol w="2609990"/>
+                <a:gridCol w="4132484"/>
+                <a:gridCol w="4132484"/>
               </a:tblGrid>
               <a:tr h="329184">
                 <a:tc>
@@ -13865,9 +13865,9 @@
                     <a:p>
                       <a:pPr algn="l"/>
                       <a:r>
-                        <a:rPr sz="1200" b="1">
-                          <a:solidFill>
-                            <a:srgbClr val="C00000"/>
+                        <a:rPr sz="1200" b="0">
+                          <a:solidFill>
+                            <a:srgbClr val="16212E"/>
                           </a:solidFill>
                           <a:latin typeface="Microsoft JhengHei"/>
                         </a:rPr>
@@ -13877,7 +13877,7 @@
                   </a:txBody>
                   <a:tcPr marL="45720" marR="45720" marT="18288" marB="18288" anchor="ctr">
                     <a:solidFill>
-                      <a:srgbClr val="FBEFEF"/>
+                      <a:srgbClr val="FFFFFF"/>
                     </a:solidFill>
                   </a:tcPr>
                 </a:tc>
@@ -13890,7 +13890,7 @@
                       <a:r>
                         <a:rPr sz="1200" b="0">
                           <a:solidFill>
-                            <a:srgbClr val="C00000"/>
+                            <a:srgbClr val="6B7885"/>
                           </a:solidFill>
                           <a:latin typeface="Microsoft JhengHei"/>
                         </a:rPr>
@@ -13900,7 +13900,7 @@
                   </a:txBody>
                   <a:tcPr marL="45720" marR="45720" marT="18288" marB="18288" anchor="ctr">
                     <a:solidFill>
-                      <a:srgbClr val="FBEFEF"/>
+                      <a:srgbClr val="FFFFFF"/>
                     </a:solidFill>
                   </a:tcPr>
                 </a:tc>
@@ -13913,7 +13913,7 @@
                       <a:r>
                         <a:rPr sz="1200" b="0">
                           <a:solidFill>
-                            <a:srgbClr val="C00000"/>
+                            <a:srgbClr val="6B7885"/>
                           </a:solidFill>
                           <a:latin typeface="Microsoft JhengHei"/>
                         </a:rPr>
@@ -13923,7 +13923,7 @@
                   </a:txBody>
                   <a:tcPr marL="45720" marR="45720" marT="18288" marB="18288" anchor="ctr">
                     <a:solidFill>
-                      <a:srgbClr val="FBEFEF"/>
+                      <a:srgbClr val="FFFFFF"/>
                     </a:solidFill>
                   </a:tcPr>
                 </a:tc>
@@ -13942,7 +13942,7 @@
                           </a:solidFill>
                           <a:latin typeface="Microsoft JhengHei"/>
                         </a:rPr>
-                        <a:t>缺什麼</a:t>
+                        <a:t>為什麼現在判錯</a:t>
                       </a:r>
                     </a:p>
                   </a:txBody>
@@ -13965,7 +13965,7 @@
                           </a:solidFill>
                           <a:latin typeface="Microsoft JhengHei"/>
                         </a:rPr>
-                        <a:t>脈絡:判定依據不在畫面裡</a:t>
+                        <a:t>看不到畫面外的速限</a:t>
                       </a:r>
                     </a:p>
                   </a:txBody>
@@ -13988,13 +13988,84 @@
                           </a:solidFill>
                           <a:latin typeface="Microsoft JhengHei"/>
                         </a:rPr>
-                        <a:t>判準:同一段影片,兩人不同標籤</a:t>
+                        <a:t>同一段影片,兩人給不同標籤</a:t>
                       </a:r>
                     </a:p>
                   </a:txBody>
                   <a:tcPr marL="45720" marR="45720" marT="18288" marB="18288" anchor="ctr">
                     <a:solidFill>
                       <a:srgbClr val="FFFFFF"/>
+                    </a:solidFill>
+                  </a:tcPr>
+                </a:tc>
+              </a:tr>
+              <a:tr h="292608">
+                <a:tc>
+                  <a:txBody>
+                    <a:bodyPr/>
+                    <a:lstStyle/>
+                    <a:p>
+                      <a:pPr algn="l"/>
+                      <a:r>
+                        <a:rPr sz="1200" b="1">
+                          <a:solidFill>
+                            <a:srgbClr val="C00000"/>
+                          </a:solidFill>
+                          <a:latin typeface="Microsoft JhengHei"/>
+                        </a:rPr>
+                        <a:t>🔴 新 AI 要補什麼</a:t>
+                      </a:r>
+                    </a:p>
+                  </a:txBody>
+                  <a:tcPr marL="45720" marR="45720" marT="18288" marB="18288" anchor="ctr">
+                    <a:solidFill>
+                      <a:srgbClr val="FBEFEF"/>
+                    </a:solidFill>
+                  </a:tcPr>
+                </a:tc>
+                <a:tc>
+                  <a:txBody>
+                    <a:bodyPr/>
+                    <a:lstStyle/>
+                    <a:p>
+                      <a:pPr algn="ctr"/>
+                      <a:r>
+                        <a:rPr sz="1200" b="0">
+                          <a:solidFill>
+                            <a:srgbClr val="C00000"/>
+                          </a:solidFill>
+                          <a:latin typeface="Microsoft JhengHei"/>
+                        </a:rPr>
+                        <a:t>把地圖速限讀進模型(多模態輸入)</a:t>
+                      </a:r>
+                    </a:p>
+                  </a:txBody>
+                  <a:tcPr marL="45720" marR="45720" marT="18288" marB="18288" anchor="ctr">
+                    <a:solidFill>
+                      <a:srgbClr val="FBEFEF"/>
+                    </a:solidFill>
+                  </a:tcPr>
+                </a:tc>
+                <a:tc>
+                  <a:txBody>
+                    <a:bodyPr/>
+                    <a:lstStyle/>
+                    <a:p>
+                      <a:pPr algn="ctr"/>
+                      <a:r>
+                        <a:rPr sz="1200" b="0">
+                          <a:solidFill>
+                            <a:srgbClr val="C00000"/>
+                          </a:solidFill>
+                          <a:latin typeface="Microsoft JhengHei"/>
+                        </a:rPr>
+                        <a:t>先統一判準,否則訓練資料本身就是髒的</a:t>
+                      </a:r>
+                    </a:p>
+                  </a:txBody>
+                  <a:tcPr marL="45720" marR="45720" marT="18288" marB="18288" anchor="ctr">
+                    <a:solidFill>
+                      <a:srgbClr val="FBEFEF"/>
                     </a:solidFill>
                   </a:tcPr>
                 </a:tc>
@@ -14082,7 +14153,7 @@
         </p:nvSpPr>
         <p:spPr>
           <a:xfrm>
-            <a:off x="658368" y="3995928"/>
+            <a:off x="658368" y="4288536"/>
             <a:ext cx="45720" cy="321468"/>
           </a:xfrm>
           <a:prstGeom prst="rect">
@@ -14126,7 +14197,7 @@
         </p:nvSpPr>
         <p:spPr>
           <a:xfrm>
-            <a:off x="804672" y="3968496"/>
+            <a:off x="804672" y="4261104"/>
             <a:ext cx="2408822" cy="412908"/>
           </a:xfrm>
           <a:prstGeom prst="rect">
@@ -14165,7 +14236,7 @@
         </p:nvSpPr>
         <p:spPr>
           <a:xfrm>
-            <a:off x="3268358" y="3968496"/>
+            <a:off x="3268358" y="4261104"/>
             <a:ext cx="2891028" cy="412908"/>
           </a:xfrm>
           <a:prstGeom prst="rect">
@@ -14204,7 +14275,7 @@
         </p:nvSpPr>
         <p:spPr>
           <a:xfrm>
-            <a:off x="6269114" y="3968496"/>
+            <a:off x="6269114" y="4261104"/>
             <a:ext cx="5154484" cy="412908"/>
           </a:xfrm>
           <a:prstGeom prst="rect">
@@ -14243,7 +14314,7 @@
         </p:nvSpPr>
         <p:spPr>
           <a:xfrm>
-            <a:off x="658368" y="4500276"/>
+            <a:off x="658368" y="4792884"/>
             <a:ext cx="45720" cy="321468"/>
           </a:xfrm>
           <a:prstGeom prst="rect">
@@ -14287,7 +14358,7 @@
         </p:nvSpPr>
         <p:spPr>
           <a:xfrm>
-            <a:off x="804672" y="4472844"/>
+            <a:off x="804672" y="4765452"/>
             <a:ext cx="2408822" cy="412908"/>
           </a:xfrm>
           <a:prstGeom prst="rect">
@@ -14326,7 +14397,7 @@
         </p:nvSpPr>
         <p:spPr>
           <a:xfrm>
-            <a:off x="3268358" y="4472844"/>
+            <a:off x="3268358" y="4765452"/>
             <a:ext cx="2891028" cy="412908"/>
           </a:xfrm>
           <a:prstGeom prst="rect">
@@ -14365,7 +14436,7 @@
         </p:nvSpPr>
         <p:spPr>
           <a:xfrm>
-            <a:off x="6269114" y="4472844"/>
+            <a:off x="6269114" y="4765452"/>
             <a:ext cx="5154484" cy="412908"/>
           </a:xfrm>
           <a:prstGeom prst="rect">
@@ -14398,20 +14469,22 @@
       </p:sp>
       <p:sp>
         <p:nvSpPr>
-          <p:cNvPr id="15" name="Rectangle 14"/>
+          <p:cNvPr id="15" name="Rounded Rectangle 14"/>
           <p:cNvSpPr/>
           <p:nvPr/>
         </p:nvSpPr>
         <p:spPr>
           <a:xfrm>
-            <a:off x="658368" y="5004625"/>
-            <a:ext cx="45720" cy="321468"/>
-          </a:xfrm>
-          <a:prstGeom prst="rect">
-            <a:avLst/>
+            <a:off x="658368" y="5835868"/>
+            <a:ext cx="9658807" cy="674659"/>
+          </a:xfrm>
+          <a:prstGeom prst="roundRect">
+            <a:avLst>
+              <a:gd name="adj" fmla="val 6000"/>
+            </a:avLst>
           </a:prstGeom>
           <a:solidFill>
-            <a:srgbClr val="C00000"/>
+            <a:srgbClr val="1F4E79"/>
           </a:solidFill>
           <a:ln>
             <a:noFill/>
@@ -14448,171 +14521,8 @@
         </p:nvSpPr>
         <p:spPr>
           <a:xfrm>
-            <a:off x="804672" y="4977193"/>
-            <a:ext cx="2408822" cy="412908"/>
-          </a:xfrm>
-          <a:prstGeom prst="rect">
-            <a:avLst/>
-          </a:prstGeom>
-          <a:noFill/>
-        </p:spPr>
-        <p:txBody>
-          <a:bodyPr wrap="square" lIns="0" rIns="0" tIns="0" bIns="0" anchor="ctr">
-            <a:spAutoFit/>
-          </a:bodyPr>
-          <a:lstStyle/>
-          <a:p>
-            <a:pPr algn="l">
-              <a:lnSpc>
-                <a:spcPct val="125000"/>
-              </a:lnSpc>
-            </a:pPr>
-            <a:r>
-              <a:rPr sz="1400" b="1">
-                <a:solidFill>
-                  <a:srgbClr val="16212E"/>
-                </a:solidFill>
-                <a:latin typeface="Microsoft JhengHei"/>
-              </a:rPr>
-              <a:t>解它要的東西</a:t>
-            </a:r>
-          </a:p>
-        </p:txBody>
-      </p:sp>
-      <p:sp>
-        <p:nvSpPr>
-          <p:cNvPr id="17" name="TextBox 16"/>
-          <p:cNvSpPr txBox="1"/>
-          <p:nvPr/>
-        </p:nvSpPr>
-        <p:spPr>
-          <a:xfrm>
-            <a:off x="3268358" y="4977193"/>
-            <a:ext cx="2891028" cy="412908"/>
-          </a:xfrm>
-          <a:prstGeom prst="rect">
-            <a:avLst/>
-          </a:prstGeom>
-          <a:noFill/>
-        </p:spPr>
-        <p:txBody>
-          <a:bodyPr wrap="square" lIns="0" rIns="0" tIns="0" bIns="0" anchor="ctr">
-            <a:spAutoFit/>
-          </a:bodyPr>
-          <a:lstStyle/>
-          <a:p>
-            <a:pPr algn="l">
-              <a:lnSpc>
-                <a:spcPct val="125000"/>
-              </a:lnSpc>
-            </a:pPr>
-            <a:r>
-              <a:rPr sz="1500" b="1">
-                <a:solidFill>
-                  <a:srgbClr val="C00000"/>
-                </a:solidFill>
-                <a:latin typeface="Microsoft JhengHei"/>
-              </a:rPr>
-              <a:t>速限資料 —— 公司既有資產</a:t>
-            </a:r>
-          </a:p>
-        </p:txBody>
-      </p:sp>
-      <p:sp>
-        <p:nvSpPr>
-          <p:cNvPr id="18" name="TextBox 17"/>
-          <p:cNvSpPr txBox="1"/>
-          <p:nvPr/>
-        </p:nvSpPr>
-        <p:spPr>
-          <a:xfrm>
-            <a:off x="6269114" y="4977193"/>
-            <a:ext cx="5154484" cy="412908"/>
-          </a:xfrm>
-          <a:prstGeom prst="rect">
-            <a:avLst/>
-          </a:prstGeom>
-          <a:noFill/>
-        </p:spPr>
-        <p:txBody>
-          <a:bodyPr wrap="square" lIns="0" rIns="0" tIns="0" bIns="0" anchor="ctr">
-            <a:spAutoFit/>
-          </a:bodyPr>
-          <a:lstStyle/>
-          <a:p>
-            <a:pPr algn="l">
-              <a:lnSpc>
-                <a:spcPct val="120000"/>
-              </a:lnSpc>
-            </a:pPr>
-            <a:r>
-              <a:rPr sz="1200" b="0">
-                <a:solidFill>
-                  <a:srgbClr val="6B7885"/>
-                </a:solidFill>
-                <a:latin typeface="Microsoft JhengHei"/>
-              </a:rPr>
-              <a:t>不用等新技術,也不用買</a:t>
-            </a:r>
-          </a:p>
-        </p:txBody>
-      </p:sp>
-      <p:sp>
-        <p:nvSpPr>
-          <p:cNvPr id="19" name="Rounded Rectangle 18"/>
-          <p:cNvSpPr/>
-          <p:nvPr/>
-        </p:nvSpPr>
-        <p:spPr>
-          <a:xfrm>
-            <a:off x="658368" y="5864354"/>
-            <a:ext cx="9658807" cy="646173"/>
-          </a:xfrm>
-          <a:prstGeom prst="roundRect">
-            <a:avLst>
-              <a:gd name="adj" fmla="val 6000"/>
-            </a:avLst>
-          </a:prstGeom>
-          <a:solidFill>
-            <a:srgbClr val="1F4E79"/>
-          </a:solidFill>
-          <a:ln>
-            <a:noFill/>
-          </a:ln>
-          <a:effectLst/>
-        </p:spPr>
-        <p:style>
-          <a:lnRef idx="1">
-            <a:schemeClr val="accent1"/>
-          </a:lnRef>
-          <a:fillRef idx="3">
-            <a:schemeClr val="accent1"/>
-          </a:fillRef>
-          <a:effectRef idx="2">
-            <a:schemeClr val="accent1"/>
-          </a:effectRef>
-          <a:fontRef idx="minor">
-            <a:schemeClr val="lt1"/>
-          </a:fontRef>
-        </p:style>
-        <p:txBody>
-          <a:bodyPr rtlCol="0" anchor="ctr"/>
-          <a:lstStyle/>
-          <a:p>
-            <a:pPr algn="ctr"/>
-          </a:p>
-        </p:txBody>
-      </p:sp>
-      <p:sp>
-        <p:nvSpPr>
-          <p:cNvPr id="20" name="TextBox 19"/>
-          <p:cNvSpPr txBox="1"/>
-          <p:nvPr/>
-        </p:nvSpPr>
-        <p:spPr>
-          <a:xfrm>
-            <a:off x="841247" y="5864354"/>
-            <a:ext cx="9293047" cy="646173"/>
+            <a:off x="841247" y="5835868"/>
+            <a:ext cx="9293047" cy="674659"/>
           </a:xfrm>
           <a:prstGeom prst="rect">
             <a:avLst/>
@@ -14637,7 +14547,7 @@
                 </a:solidFill>
                 <a:latin typeface="Microsoft JhengHei"/>
               </a:rPr>
-              <a:t>樣本只有 4 台車 · 1,647 筆 —— 比例能不能代表 30 台,正是第六週要量的第一件事</a:t>
+              <a:t>八成三的誤報回到交通標誌 —— 而速限資料公司手上就有,這就是新 AI 要針對訓練的</a:t>
             </a:r>
           </a:p>
         </p:txBody>

--- a/Artificial Intelligence for Enterprises/Assessment3/Huang_26254793_421104_Assessment 3.pptx
+++ b/Artificial Intelligence for Enterprises/Assessment3/Huang_26254793_421104_Assessment 3.pptx
@@ -645,7 +645,7 @@
           <a:lstStyle/>
           <a:p>
             <a:r>
-              <a:t>【第 10 頁 · P8 · 怎麼算成功:三層 KPI,一條回圈】　目標 46 秒 · 累計 9:19</a:t>
+              <a:t>【第 10 頁 · P8 · 怎麼算成功:三層 KPI,一條回圈】　目標 46 秒 · 累計 9:23</a:t>
             </a:r>
           </a:p>
           <a:p/>
@@ -782,7 +782,7 @@
           <a:lstStyle/>
           <a:p>
             <a:r>
-              <a:t>【第 11 頁 · P9 · 六個月 · 六個工作包 · 三道決策門】　目標 47 秒 · 累計 10:07</a:t>
+              <a:t>【第 11 頁 · P9 · 六個月 · 六個工作包 · 三道決策門】　目標 47 秒 · 累計 10:10</a:t>
             </a:r>
           </a:p>
           <a:p/>
@@ -934,7 +934,7 @@
           <a:lstStyle/>
           <a:p>
             <a:r>
-              <a:t>【第 12 頁 · P10 · 資源、當責與請求】　目標 64 秒 · 累計 11:10</a:t>
+              <a:t>【第 12 頁 · P10 · 資源、當責與請求】　目標 64 秒 · 累計 11:14</a:t>
             </a:r>
           </a:p>
           <a:p/>
@@ -1106,7 +1106,7 @@
           <a:lstStyle/>
           <a:p>
             <a:r>
-              <a:t>【第 13 頁 · 參考文獻(第 11 頁 — 不佔十頁額度)】　目標 5 秒 · 累計 11:15</a:t>
+              <a:t>【第 13 頁 · 參考文獻(第 11 頁 — 不佔十頁額度)】　目標 5 秒 · 累計 11:19</a:t>
             </a:r>
           </a:p>
           <a:p/>
@@ -1514,7 +1514,7 @@
           <a:lstStyle/>
           <a:p>
             <a:r>
-              <a:t>【第 4 頁 · P3 · 發現過程:兩種病,兩個缺口】　目標 61 秒 · 累計 4:04</a:t>
+              <a:t>【第 4 頁 · P3 · 發現過程:兩種病,兩個缺口】　目標 65 秒 · 累計 4:07</a:t>
             </a:r>
           </a:p>
           <a:p/>
@@ -1526,7 +1526,7 @@
           <a:p/>
           <a:p>
             <a:r>
-              <a:t>· ADAS 錯的是模型 —— 看不到畫面外的速限 → 新 AI 要把地圖速限讀進來(多模態輸入)</a:t>
+              <a:t>· 誤報分兩種:假判錯(客戶不懂判定邏輯,機器其實判對)與真判錯 —— 兩條產品線都有</a:t>
             </a:r>
           </a:p>
           <a:p>
@@ -1536,7 +1536,7 @@
           </a:p>
           <a:p>
             <a:r>
-              <a:t>· DMS 錯的是人 —— 判準不一致的標籤餵進去,**訓練資料本身就是髒的**;所以標註品質排在模型前面不是保守,是必要</a:t>
+              <a:t>· 真判錯又分兩類:**畫面外**(速限讀不到 → 地圖資料補得上)與**畫面裡**(陰影光影、物體誤判 → 要更強的視覺模型);DMS 還多一條:判準不一致的標籤餵進去,訓練資料本身就是髒的</a:t>
             </a:r>
           </a:p>
           <a:p/>
@@ -1585,12 +1585,12 @@
           <a:p/>
           <a:p>
             <a:r>
-              <a:t>── 逐字備援 · 269 字(忘詞才看,不是拿來唸的)──</a:t>
-            </a:r>
-          </a:p>
-          <a:p>
-            <a:r>
-              <a:t>那機器現在到底判錯在哪裡?我把最近一份判讀拆開來看 ——表上的數字已經從樣本同比例放大到一個三十台的小車隊。行車輔助一個月七百八十筆誤報,錯的是模型:它看不到畫面外的速限。駕駛監控一百五十筆,錯的是人:同一段影片,兩個複核者給不同標籤。這兩件事對新的 AI 意義完全不同。第一件,把地圖速限讀進模型 —— 那正是多模態要解的:影片以外的東西也要讀進來。第二件更關鍵:判準不一致的標籤如果直接餵進去,訓練資料本身就是髒的。所以標註品質那一包排在模型前面,不是保守,是必要。合起來一個月九百三十筆誤報,而其中七百七十二筆是同一個根因:交通標誌辨識,八成三。速限資料公司手上就有 —— 這就是新的 AI 要針對訓練的東西。</a:t>
+              <a:t>── 逐字備援 · 286 字(忘詞才看,不是拿來唸的)──</a:t>
+            </a:r>
+          </a:p>
+          <a:p>
+            <a:r>
+              <a:t>那機器現在到底判錯在哪裡?這張表把兩條產品線的誤報拆開。先講假判錯:客戶不懂我們的判定邏輯,其實機器判對了 —— 兩邊都有。真判錯才是要修的:行車輔助是速限數值錯判、車前陰影光影、前車物體錯判;駕駛監控是駕駛行為因光線被誤判、還有物件誤判。這些指向不一樣的修法。速限被錯判是**畫面外**的問題 ——那面牌讀不出來,但地圖上有,把它讀進模型就補得上。光影跟物體誤判是**畫面裡**的問題,那要靠更強的視覺模型。駕駛監控還多一件事:判準不一致的標籤直接餵進去,訓練資料本身就是髒的,所以標註品質那一包排在模型前面,不是保守,是必要。合起來一個月九百三十筆誤報,其中七百七十二筆是同一個根因:交通標誌辨識,八成三。速限資料公司手上就有 —— 這就是新的 AI 要針對訓練的。</a:t>
             </a:r>
           </a:p>
           <a:p/>
@@ -1671,7 +1671,7 @@
           <a:lstStyle/>
           <a:p>
             <a:r>
-              <a:t>【第 5 頁 · 選型與部署:兩層模型、一台設備】　目標 66 秒 · 累計 5:10</a:t>
+              <a:t>【第 5 頁 · 選型與部署:兩層模型、一台設備】　目標 66 秒 · 累計 5:14</a:t>
             </a:r>
           </a:p>
           <a:p/>
@@ -1843,7 +1843,7 @@
           <a:lstStyle/>
           <a:p>
             <a:r>
-              <a:t>【第 6 頁 · P4 · 我們看不見的那一半:有資料,沒有習慣】　目標 59 秒 · 累計 6:09</a:t>
+              <a:t>【第 6 頁 · P4 · 我們看不見的那一半:有資料,沒有習慣】　目標 59 秒 · 累計 6:13</a:t>
             </a:r>
           </a:p>
           <a:p/>
@@ -2025,7 +2025,7 @@
           <a:lstStyle/>
           <a:p>
             <a:r>
-              <a:t>【第 7 頁 · P5 · 五條路,含三條不用 AI】　目標 44 秒 · 累計 6:53</a:t>
+              <a:t>【第 7 頁 · P5 · 五條路,含三條不用 AI】　目標 44 秒 · 累計 6:57</a:t>
             </a:r>
           </a:p>
           <a:p/>
@@ -2167,7 +2167,7 @@
           <a:lstStyle/>
           <a:p>
             <a:r>
-              <a:t>【第 8 頁 · P6 · 風險:七類十條,緩解位移與殘餘風險】　目標 51 秒 · 累計 7:44</a:t>
+              <a:t>【第 8 頁 · P6 · 風險:七類十條,緩解位移與殘餘風險】　目標 51 秒 · 累計 7:48</a:t>
             </a:r>
           </a:p>
           <a:p/>
@@ -2320,7 +2320,7 @@
           <a:lstStyle/>
           <a:p>
             <a:r>
-              <a:t>【第 9 頁 · P7 · 倫理與可申訴性:對照澳洲 AI 倫理八原則】　目標 50 秒 · 累計 8:34</a:t>
+              <a:t>【第 9 頁 · P7 · 倫理與可申訴性:對照澳洲 AI 倫理八原則】　目標 50 秒 · 累計 8:37</a:t>
             </a:r>
           </a:p>
           <a:p/>
@@ -13871,7 +13871,7 @@
                           </a:solidFill>
                           <a:latin typeface="Microsoft JhengHei"/>
                         </a:rPr>
-                        <a:t>錯的是誰</a:t>
+                        <a:t>假判錯</a:t>
                       </a:r>
                     </a:p>
                   </a:txBody>
@@ -13894,7 +13894,7 @@
                           </a:solidFill>
                           <a:latin typeface="Microsoft JhengHei"/>
                         </a:rPr>
-                        <a:t>模型</a:t>
+                        <a:t>客戶不懂判定邏輯</a:t>
                       </a:r>
                     </a:p>
                   </a:txBody>
@@ -13917,7 +13917,7 @@
                           </a:solidFill>
                           <a:latin typeface="Microsoft JhengHei"/>
                         </a:rPr>
-                        <a:t>人</a:t>
+                        <a:t>客戶不懂判定邏輯</a:t>
                       </a:r>
                     </a:p>
                   </a:txBody>
@@ -13942,7 +13942,7 @@
                           </a:solidFill>
                           <a:latin typeface="Microsoft JhengHei"/>
                         </a:rPr>
-                        <a:t>為什麼現在判錯</a:t>
+                        <a:t>真判錯</a:t>
                       </a:r>
                     </a:p>
                   </a:txBody>
@@ -13965,7 +13965,7 @@
                           </a:solidFill>
                           <a:latin typeface="Microsoft JhengHei"/>
                         </a:rPr>
-                        <a:t>看不到畫面外的速限</a:t>
+                        <a:t>速限數值錯判 · 車前陰影光影 · 前車物體錯判</a:t>
                       </a:r>
                     </a:p>
                   </a:txBody>
@@ -13988,7 +13988,7 @@
                           </a:solidFill>
                           <a:latin typeface="Microsoft JhengHei"/>
                         </a:rPr>
-                        <a:t>同一段影片,兩人給不同標籤</a:t>
+                        <a:t>駕駛行為因光線誤判 · 物件誤判</a:t>
                       </a:r>
                     </a:p>
                   </a:txBody>
@@ -14036,7 +14036,7 @@
                           </a:solidFill>
                           <a:latin typeface="Microsoft JhengHei"/>
                         </a:rPr>
-                        <a:t>把地圖速限讀進模型(多模態輸入)</a:t>
+                        <a:t>速限→讀進地圖資料;光影/物體→更強的視覺模型</a:t>
                       </a:r>
                     </a:p>
                   </a:txBody>
@@ -14059,7 +14059,7 @@
                           </a:solidFill>
                           <a:latin typeface="Microsoft JhengHei"/>
                         </a:rPr>
-                        <a:t>先統一判準,否則訓練資料本身就是髒的</a:t>
+                        <a:t>光線/物件→更強的視覺模型;判準→先統一標註</a:t>
                       </a:r>
                     </a:p>
                   </a:txBody>
@@ -14107,7 +14107,7 @@
                           </a:solidFill>
                           <a:latin typeface="Microsoft JhengHei"/>
                         </a:rPr>
-                        <a:t>WP-C 脈絡特徵</a:t>
+                        <a:t>WP-C 脈絡特徵 + WP-E 地端 VLM</a:t>
                       </a:r>
                     </a:p>
                   </a:txBody>
@@ -14130,7 +14130,7 @@
                           </a:solidFill>
                           <a:latin typeface="Microsoft JhengHei"/>
                         </a:rPr>
-                        <a:t>WP-B 標註品質</a:t>
+                        <a:t>WP-B 標註品質 + WP-E 地端 VLM</a:t>
                       </a:r>
                     </a:p>
                   </a:txBody>

--- a/Artificial Intelligence for Enterprises/Assessment3/Huang_26254793_421104_Assessment 3.pptx
+++ b/Artificial Intelligence for Enterprises/Assessment3/Huang_26254793_421104_Assessment 3.pptx
@@ -17,7 +17,6 @@
     <p:sldId id="265" r:id="rId17"/>
     <p:sldId id="266" r:id="rId18"/>
     <p:sldId id="267" r:id="rId19"/>
-    <p:sldId id="268" r:id="rId20"/>
   </p:sldIdLst>
   <p:sldSz cx="12191695" cy="6858000" type="screen4x3"/>
   <p:notesSz cx="6858000" cy="9144000"/>
@@ -645,46 +644,41 @@
           <a:lstStyle/>
           <a:p>
             <a:r>
-              <a:t>【第 10 頁 · P8 · 怎麼算成功:三層 KPI,一條回圈】　目標 46 秒 · 累計 9:23</a:t>
+              <a:t>【第 10 頁 · P9 · 六個月 · 六個工作包 · 三道決策門】　目標 47 秒 · 累計 9:12</a:t>
             </a:r>
           </a:p>
           <a:p/>
           <a:p>
             <a:r>
-              <a:t>★ 上面兩層是你買到的東西,下面四條是你隨時喊停的權力 —— 而煞車是我自己裝的。</a:t>
+              <a:t>★ 六個月分三段付,每一段都有明確的喊停條件 —— 你不必一次押六個月。</a:t>
             </a:r>
           </a:p>
           <a:p/>
           <a:p>
             <a:r>
-              <a:t>· 效益層:爭議回覆時效、可避免的年度增聘、兩條工作流的單位工時</a:t>
-            </a:r>
-          </a:p>
-          <a:p>
-            <a:r>
-              <a:t>· 護欄層任一未達標,上面兩層的成績一律不採計</a:t>
-            </a:r>
-          </a:p>
-          <a:p>
-            <a:r>
-              <a:t>· 訂不出目標值的,寫明由哪一道門訂</a:t>
+              <a:t>· 六包只有一包是 AI,而且排在最後:評估集 → 標註 → 特徵 → 地端 VLM</a:t>
+            </a:r>
+          </a:p>
+          <a:p>
+            <a:r>
+              <a:t>· 三道門各自寫明什麼條件下停,不是寫什麼條件下過</a:t>
+            </a:r>
+          </a:p>
+          <a:p>
+            <a:r>
+              <a:t>· G2 四臂同場比,第四臂是影子模式</a:t>
             </a:r>
           </a:p>
           <a:p/>
           <a:p>
             <a:r>
-              <a:t># ⑩ 漏放率 W6 交 95% CI · ⑬ 漏濾率 W12 交差值 95% CI</a:t>
-            </a:r>
-          </a:p>
-          <a:p>
-            <a:r>
-              <a:t># δ 由委員會在 G1 事前預註冊 —— 判準寫在跑實驗之前</a:t>
+              <a:t># G1 第 6 週 · G2 第 12 週 · G3 第 24 週</a:t>
             </a:r>
           </a:p>
           <a:p/>
           <a:p>
             <a:r>
-              <a:t>⚠️ ⑬ 的母體是那 850 筆(有把握桶),🚫 不是剩下的 150 筆</a:t>
+              <a:t>⚠️ 前三臂全部含人,而要部署的是無人系統 —— 這就是為什麼要有第四臂</a:t>
             </a:r>
           </a:p>
           <a:p/>
@@ -696,12 +690,12 @@
           <a:p/>
           <a:p>
             <a:r>
-              <a:t>── 逐字備援 · 201 字(忘詞才看,不是拿來唸的)──</a:t>
-            </a:r>
-          </a:p>
-          <a:p>
-            <a:r>
-              <a:t>講完該不該做,接下來是怎麼算做成了。最上層第一個指標,是客戶等多久拿到分析,這是這個專案要買的東西。現況兩到五天,目標兩天內、單純案件當天;是客戶期望,不是已簽的服務水準協議。護欄層是否決型,今天多一條:漏濾率——機器說有把握、直接結案的那一桶裡,有多少其實該讓人看。第十二週交出它跟人工的差值,門檻第六週就要先訂,不能看完數據再訂。錯誤攔截比例我算不出來,分母還不存在,那正是護欄層要交的能力。訂不出目標值的,我寫的是它什麼時候被訂出來、由哪一道門訂。</a:t>
+              <a:t>── 逐字備援 · 208 字(忘詞才看,不是拿來唸的)──</a:t>
+            </a:r>
+          </a:p>
+          <a:p>
+            <a:r>
+              <a:t>六個月,六個工作包,三道門。順序不能換:評估集、標註、特徵,最後才是地端模型。第六週是因果判定門:交出時間拆解、兩天逾時率跟到件分布。證據搜尋跟誤報量佔主要延遲,才續行;不是,就轉排班。第十二週同一組凍結集比四臂:現行模型、規則式基線、人機協作,加一臂影子模式——機器自己結案、不對外送,跟人的判定比對。自動結案的漏放率,只有這一臂算得出來。這道門不能取消實驗,只能調整規模;要不要真的對外自動結案,不在這六個月決定。規則式今天就能做,為什麼排第五週?沒有前六週的基準線,證不出有效。</a:t>
             </a:r>
           </a:p>
           <a:p/>
@@ -712,7 +706,27 @@
           </a:p>
           <a:p>
             <a:r>
-              <a:t>【這一頁的作用】這頁把「衡量」從外掛的合規章節,改寫成 AI 提案本身的兩個問題:怎麼證明它有效、什麼情況下喊停。對委員會的作用有三個:①上兩層告訴他們這筆錢買的是客戶等多久拿到分析(不是準確率),而且業務指標由營運指標支撐、有階序;②護欄層讓他們知道自己手上握著一票否決,尤其⑬漏濾率是自動結案能不能對外生效的唯一否決點 —— 提案人主動把刀柄遞出去;③每一個今天訂不出的目標值都寫明由哪道門、第幾週、誰負責訂,把「訂不出來」變成可稽核的紀律而不是含糊。</a:t>
+              <a:t>【rows】{'label': 'WP-B 標註品質｜AI 的前置', 'value': 'W3–10', 'note': '交:誤報的操作型定義 · 判準手冊 · 一致性儀表板。判準不一致的標註餵給模型就是垃圾進垃圾出 (Northcutt et al., 2021)'}</a:t>
+            </a:r>
+          </a:p>
+          <a:p>
+            <a:r>
+              <a:t>【rows】{'label': 'WP-C 脈絡特徵工程｜AI 的前置', 'value': 'W5–12', 'note': '交:規則式脈絡層(刻意先做不含模型的版本,它同時是地端 VLM 的對照基線)· 誤報下降量測。排第五週,是因為沒有前六週基準線就證不出它有效'}</a:t>
+            </a:r>
+          </a:p>
+          <a:p>
+            <a:r>
+              <a:t>【rows】{'label': 'WP-D 爭議回覆自動化｜併行的營運自動化', 'value': 'W8–16', 'note': '交:自動證據包 · 回覆時效改善。🔑 這是六個月裡真正對外交付的商業價值,而且人仍然每一筆都判 —— 它完全不依賴任何自動結案'}</a:t>
+            </a:r>
+          </a:p>
+          <a:p>
+            <a:r>
+              <a:t>【rows】{'label': 'WP-F 治理與移交｜AI 之後', 'value': 'W20–26', 'note': '交:移交文件 · 常態儀表板。六個里程碑 M1–M6 落在 W6 / W10 / W12 / W16 / W24 / W26,那是交東西的時點,不是可喊停的時點'}</a:t>
+            </a:r>
+          </a:p>
+          <a:p>
+            <a:r>
+              <a:t>【這一頁的作用】這頁要讓委員會相信兩件事,而不是相信「我有計畫」。第一:六包裡只有一包是 AI,其餘五包不是繞路 —— 沒有凍結評估集就量不出模型判得準不準,判準不一致的標註餵給模型就是垃圾進垃圾出,所以順序本身就是風險控制。第二:每一道門都寫出「什麼條件下這個案子會停」,包括 G1 可以整案轉向排班方案、G3 可以直接不部署模型端。四臂表則正面回答答辯必問的那一題:六個月怎麼可能算得出無人系統的風險 —— 答案是第四臂影子模式,前三臂全部含人,只有它算得出自動結案的漏放率。</a:t>
             </a:r>
           </a:p>
         </p:txBody>
@@ -782,41 +796,61 @@
           <a:lstStyle/>
           <a:p>
             <a:r>
-              <a:t>【第 11 頁 · P9 · 六個月 · 六個工作包 · 三道決策門】　目標 47 秒 · 累計 10:10</a:t>
+              <a:t>【第 11 頁 · P10 · 資源、當責與請求】　目標 64 秒 · 累計 10:15</a:t>
             </a:r>
           </a:p>
           <a:p/>
           <a:p>
             <a:r>
-              <a:t>★ 六個月分三段付,每一段都有明確的喊停條件 —— 你不必一次押六個月。</a:t>
+              <a:t>★ 我請求核准第一段:四點八五人月、約一萬八千六到兩萬零八百澳幣,並指定一位贊助人。</a:t>
             </a:r>
           </a:p>
           <a:p/>
           <a:p>
             <a:r>
-              <a:t>· 六包只有一包是 AI,而且排在最後:評估集 → 標註 → 特徵 → 地端 VLM</a:t>
-            </a:r>
-          </a:p>
-          <a:p>
-            <a:r>
-              <a:t>· 三道門各自寫明什麼條件下停,不是寫什麼條件下過</a:t>
-            </a:r>
-          </a:p>
-          <a:p>
-            <a:r>
-              <a:t>· G2 四臂同場比,第四臂是影子模式</a:t>
+              <a:t>· 成本主體是人,不是設備</a:t>
+            </a:r>
+          </a:p>
+          <a:p>
+            <a:r>
+              <a:t>· 稽核稅:自動化不是免費的 —— 毛節省要先扣掉盲測稽核</a:t>
+            </a:r>
+          </a:p>
+          <a:p>
+            <a:r>
+              <a:t>· 我要的不只是一筆錢,是一個贊助人跟三道門</a:t>
             </a:r>
           </a:p>
           <a:p/>
           <a:p>
             <a:r>
-              <a:t># G1 第 6 週 · G2 第 12 週 · G3 第 24 週</a:t>
+              <a:t># 4.85 人月 · A$18,600–20,800(規劃,非核定預算)</a:t>
+            </a:r>
+          </a:p>
+          <a:p>
+            <a:r>
+              <a:t># 毛 6.0–12.1 FTE → 稽核稅 0.39–3.14 FTE → 淨 2.9–11.7 FTE</a:t>
             </a:r>
           </a:p>
           <a:p/>
           <a:p>
             <a:r>
-              <a:t>⚠️ 前三臂全部含人,而要部署的是無人系統 —— 這就是為什麼要有第四臂</a:t>
+              <a:t>⚠️ 🔴 **最後一句講正面那三樣**(可稽核的錯誤率 · 脈絡判斷層 · 對照實驗結果)——🚫 不要停在「不做的代價」。全片的最後一個印象就是這一句</a:t>
+            </a:r>
+          </a:p>
+          <a:p>
+            <a:r>
+              <a:t>⚠️ 🚫 A$23–67 萬是移交後的「可避免增聘」,不是本案承諾的節省額</a:t>
+            </a:r>
+          </a:p>
+          <a:p>
+            <a:r>
+              <a:t>⚠️ 🚫 不得與設備價相減成 ROI</a:t>
+            </a:r>
+          </a:p>
+          <a:p>
+            <a:r>
+              <a:t>⚠️ 在稽核稅、申訴重判與漂移調查三項齊備前,不宣稱任何節省額</a:t>
             </a:r>
           </a:p>
           <a:p/>
@@ -828,12 +862,12 @@
           <a:p/>
           <a:p>
             <a:r>
-              <a:t>── 逐字備援 · 208 字(忘詞才看,不是拿來唸的)──</a:t>
-            </a:r>
-          </a:p>
-          <a:p>
-            <a:r>
-              <a:t>六個月,六個工作包,三道門。順序不能換:評估集、標註、特徵,最後才是地端模型。第六週是因果判定門:交出時間拆解、兩天逾時率跟到件分布。證據搜尋跟誤報量佔主要延遲,才續行;不是,就轉排班。第十二週同一組凍結集比四臂:現行模型、規則式基線、人機協作,加一臂影子模式——機器自己結案、不對外送,跟人的判定比對。自動結案的漏放率,只有這一臂算得出來。這道門不能取消實驗,只能調整規模;要不要真的對外自動結案,不在這六個月決定。規則式今天就能做,為什麼排第五週?沒有前六週的基準線,證不出有效。</a:t>
+              <a:t>── 逐字備援 · 280 字(忘詞才看,不是拿來唸的)──</a:t>
+            </a:r>
+          </a:p>
+          <a:p>
+            <a:r>
+              <a:t>三個輸入都印在上面,它是量級,不是報價。設備一台十六到二十萬,一次性,不到一個人一年成本的五分之一;這個專案的成本主體是人,不是設備。它也不是為單一用途買的:第二個應用是內部規格文件的技術問答,不在本次請求範圍內,但硬體的攤提對象不只一個。那筆擴編暴露不是承諾的節省;要第十二週實測證明能避免或延後至少一點四到一點七個 loaded FTE-year,業務也確認會轉成少招人或少徵調研發,才放行後續預算。我要的不只預算,是贊助人跟三道門。我請求核准六個月額度輪廓、分段釋出;第一段四點八五人月、量級新台幣四十二到四十七萬,第六週由贊助人決定續不續行。第二十四週我會回到這裡,交出三方比較結果:地端 VLM 有增量,或者沒有。</a:t>
             </a:r>
           </a:p>
           <a:p/>
@@ -844,27 +878,27 @@
           </a:p>
           <a:p>
             <a:r>
-              <a:t>【rows】{'label': 'WP-B 標註品質｜AI 的前置', 'value': 'W3–10', 'note': '交:誤報的操作型定義 · 判準手冊 · 一致性儀表板。判準不一致的標註餵給模型就是垃圾進垃圾出 (Northcutt et al., 2021)'}</a:t>
-            </a:r>
-          </a:p>
-          <a:p>
-            <a:r>
-              <a:t>【rows】{'label': 'WP-C 脈絡特徵工程｜AI 的前置', 'value': 'W5–12', 'note': '交:規則式脈絡層(刻意先做不含模型的版本,它同時是地端 VLM 的對照基線)· 誤報下降量測。排第五週,是因為沒有前六週基準線就證不出它有效'}</a:t>
-            </a:r>
-          </a:p>
-          <a:p>
-            <a:r>
-              <a:t>【rows】{'label': 'WP-D 爭議回覆自動化｜併行的營運自動化', 'value': 'W8–16', 'note': '交:自動證據包 · 回覆時效改善。🔑 這是六個月裡真正對外交付的商業價值,而且人仍然每一筆都判 —— 它完全不依賴任何自動結案'}</a:t>
-            </a:r>
-          </a:p>
-          <a:p>
-            <a:r>
-              <a:t>【rows】{'label': 'WP-F 治理與移交｜AI 之後', 'value': 'W20–26', 'note': '交:移交文件 · 常態儀表板。六個里程碑 M1–M6 落在 W6 / W10 / W12 / W16 / W24 / W26,那是交東西的時點,不是可喊停的時點'}</a:t>
-            </a:r>
-          </a:p>
-          <a:p>
-            <a:r>
-              <a:t>【這一頁的作用】這頁要讓委員會相信兩件事,而不是相信「我有計畫」。第一:六包裡只有一包是 AI,其餘五包不是繞路 —— 沒有凍結評估集就量不出模型判得準不準,判準不一致的標註餵給模型就是垃圾進垃圾出,所以順序本身就是風險控制。第二:每一道門都寫出「什麼條件下這個案子會停」,包括 G1 可以整案轉向排班方案、G3 可以直接不部署模型端。四臂表則正面回答答辯必問的那一題:六個月怎麼可能算得出無人系統的風險 —— 答案是第四臂影子模式,前三臂全部含人,只有它算得出自動結案的漏放率。</a:t>
+              <a:t>【rows】{'label': '人力(18.2 人月,六包 × 五種角色 + 專案負責人)', 'value': '約 A$7.0–7.9 萬', 'note': '18.2 人月 × 月薪 A$2,970–3,320 × 間接費率 1.3。薪資量級、費率、匯率(1 A$=NT$22.6,2026-08)三項都是提案人設定的假設 —— 是量級,不是報價'}</a:t>
+            </a:r>
+          </a:p>
+          <a:p>
+            <a:r>
+              <a:t>【rows】{'label': '三年可推算 TCO(兩個數字,🚫 不得合併)', 'value': '六個月專案期(影子模式)約 A$2.2–5.2 萬(中案 3.2 萬)｜移交後(含稽核)約 A$7.7–53.9 萬', 'note': '設備 16–20(一次性)+ 電力三年 0.7–1.9 + 延保三年 2.4–6.0 + 維運監控與模型更新三年 31.2–70.2。維運人力佔 59%–62%。上界跳這麼大不是估算失準,是治理成本的形狀'}</a:t>
+            </a:r>
+          </a:p>
+          <a:p>
+            <a:r>
+              <a:t>【rows】{'label': '可避免的年度增聘(移交後,不是六個月的交付)', 'value': '5–13 人 ≈ A$23–67 萬/年', 'note': '不做本案覆蓋全客戶需 17–24 人(現有 5 人);做本案、移交後開到天花板仍需 11–12 人 —— 仍須增聘 6–7 人,不是不用增聘。公開薪資量級推算,非本案承諾的節省額'}</a:t>
+            </a:r>
+          </a:p>
+          <a:p>
+            <a:r>
+              <a:t>【rows】{'label': '已辨識、尚未估價的五項非人力成本', 'value': '不編金額', 'note': '① 影片儲存 ② 雲端運算 ③ 圖資更新 ④ 測試環境 ⑤ AI 訓練資料蒐集。技術與數據負責人於 G1 前補齊量級。因這五項未估價,人力+設備只能稱「已估成本」'}</a:t>
+            </a:r>
+          </a:p>
+          <a:p>
+            <a:r>
+              <a:t>【這一頁的作用】這頁要在委員會心裡完成三次收斂。第一次:看到「地端 AI」就問「那台機器多少錢」—— 設備價、它相對一個人年成本的 14%–19%、它在已估成本裡的 8%–12%,三秒內收斂成「成本主體是人,不是設備」,避免答辯變成硬體採購的離題辯論。第二次:所有金額都標明是量級不是報價、三個假設輸入都印在畫面上、五項未估價成本逐項列名、TCO 拆成兩個不合併的數字 —— 誠實度不能在唯一的金額上破功。第三次也是最關鍵的一次:稽核稅那一格由提案人自己算出自動化的代價(吃掉毛節省 3%–52%),而放行條件框把「年度擴編暴露」明講成反事實成本、綁上 G2 的可驗證門檻 —— 委員會因此看到的不是一個在推銷 AI 的人,而是一個先幫他們算好帳、並把喊停的權力交回去的人。最後的請求只有兩樣:核准第一段 W1–6,以及指定一個贊助人。</a:t>
             </a:r>
           </a:p>
         </p:txBody>
@@ -934,179 +968,7 @@
           <a:lstStyle/>
           <a:p>
             <a:r>
-              <a:t>【第 12 頁 · P10 · 資源、當責與請求】　目標 64 秒 · 累計 11:14</a:t>
-            </a:r>
-          </a:p>
-          <a:p/>
-          <a:p>
-            <a:r>
-              <a:t>★ 我請求核准第一段:四點八五人月、約一萬八千六到兩萬零八百澳幣,並指定一位贊助人。</a:t>
-            </a:r>
-          </a:p>
-          <a:p/>
-          <a:p>
-            <a:r>
-              <a:t>· 成本主體是人,不是設備</a:t>
-            </a:r>
-          </a:p>
-          <a:p>
-            <a:r>
-              <a:t>· 稽核稅:自動化不是免費的 —— 毛節省要先扣掉盲測稽核</a:t>
-            </a:r>
-          </a:p>
-          <a:p>
-            <a:r>
-              <a:t>· 我要的不只是一筆錢,是一個贊助人跟三道門</a:t>
-            </a:r>
-          </a:p>
-          <a:p/>
-          <a:p>
-            <a:r>
-              <a:t># 4.85 人月 · A$18,600–20,800(規劃,非核定預算)</a:t>
-            </a:r>
-          </a:p>
-          <a:p>
-            <a:r>
-              <a:t># 毛 6.0–12.1 FTE → 稽核稅 0.39–3.14 FTE → 淨 2.9–11.7 FTE</a:t>
-            </a:r>
-          </a:p>
-          <a:p/>
-          <a:p>
-            <a:r>
-              <a:t>⚠️ 🔴 **最後一句講正面那三樣**(可稽核的錯誤率 · 脈絡判斷層 · 對照實驗結果)——🚫 不要停在「不做的代價」。全片的最後一個印象就是這一句</a:t>
-            </a:r>
-          </a:p>
-          <a:p>
-            <a:r>
-              <a:t>⚠️ 🚫 A$23–67 萬是移交後的「可避免增聘」,不是本案承諾的節省額</a:t>
-            </a:r>
-          </a:p>
-          <a:p>
-            <a:r>
-              <a:t>⚠️ 🚫 不得與設備價相減成 ROI</a:t>
-            </a:r>
-          </a:p>
-          <a:p>
-            <a:r>
-              <a:t>⚠️ 在稽核稅、申訴重判與漂移調查三項齊備前,不宣稱任何節省額</a:t>
-            </a:r>
-          </a:p>
-          <a:p/>
-          <a:p>
-            <a:r>
-              <a:t>→ 換下一頁</a:t>
-            </a:r>
-          </a:p>
-          <a:p/>
-          <a:p>
-            <a:r>
-              <a:t>── 逐字備援 · 280 字(忘詞才看,不是拿來唸的)──</a:t>
-            </a:r>
-          </a:p>
-          <a:p>
-            <a:r>
-              <a:t>三個輸入都印在上面,它是量級,不是報價。設備一台十六到二十萬,一次性,不到一個人一年成本的五分之一;這個專案的成本主體是人,不是設備。它也不是為單一用途買的:第二個應用是內部規格文件的技術問答,不在本次請求範圍內,但硬體的攤提對象不只一個。那筆擴編暴露不是承諾的節省;要第十二週實測證明能避免或延後至少一點四到一點七個 loaded FTE-year,業務也確認會轉成少招人或少徵調研發,才放行後續預算。我要的不只預算,是贊助人跟三道門。我請求核准六個月額度輪廓、分段釋出;第一段四點八五人月、量級新台幣四十二到四十七萬,第六週由贊助人決定續不續行。第二十四週我會回到這裡,交出三方比較結果:地端 VLM 有增量,或者沒有。</a:t>
-            </a:r>
-          </a:p>
-          <a:p/>
-          <a:p>
-            <a:r>
-              <a:t>── 備查(不唸,答辯用)──</a:t>
-            </a:r>
-          </a:p>
-          <a:p>
-            <a:r>
-              <a:t>【rows】{'label': '人力(18.2 人月,六包 × 五種角色 + 專案負責人)', 'value': '約 A$7.0–7.9 萬', 'note': '18.2 人月 × 月薪 A$2,970–3,320 × 間接費率 1.3。薪資量級、費率、匯率(1 A$=NT$22.6,2026-08)三項都是提案人設定的假設 —— 是量級,不是報價'}</a:t>
-            </a:r>
-          </a:p>
-          <a:p>
-            <a:r>
-              <a:t>【rows】{'label': '三年可推算 TCO(兩個數字,🚫 不得合併)', 'value': '六個月專案期(影子模式)約 A$2.2–5.2 萬(中案 3.2 萬)｜移交後(含稽核)約 A$7.7–53.9 萬', 'note': '設備 16–20(一次性)+ 電力三年 0.7–1.9 + 延保三年 2.4–6.0 + 維運監控與模型更新三年 31.2–70.2。維運人力佔 59%–62%。上界跳這麼大不是估算失準,是治理成本的形狀'}</a:t>
-            </a:r>
-          </a:p>
-          <a:p>
-            <a:r>
-              <a:t>【rows】{'label': '可避免的年度增聘(移交後,不是六個月的交付)', 'value': '5–13 人 ≈ A$23–67 萬/年', 'note': '不做本案覆蓋全客戶需 17–24 人(現有 5 人);做本案、移交後開到天花板仍需 11–12 人 —— 仍須增聘 6–7 人,不是不用增聘。公開薪資量級推算,非本案承諾的節省額'}</a:t>
-            </a:r>
-          </a:p>
-          <a:p>
-            <a:r>
-              <a:t>【rows】{'label': '已辨識、尚未估價的五項非人力成本', 'value': '不編金額', 'note': '① 影片儲存 ② 雲端運算 ③ 圖資更新 ④ 測試環境 ⑤ AI 訓練資料蒐集。技術與數據負責人於 G1 前補齊量級。因這五項未估價,人力+設備只能稱「已估成本」'}</a:t>
-            </a:r>
-          </a:p>
-          <a:p>
-            <a:r>
-              <a:t>【這一頁的作用】這頁要在委員會心裡完成三次收斂。第一次:看到「地端 AI」就問「那台機器多少錢」—— 設備價、它相對一個人年成本的 14%–19%、它在已估成本裡的 8%–12%,三秒內收斂成「成本主體是人,不是設備」,避免答辯變成硬體採購的離題辯論。第二次:所有金額都標明是量級不是報價、三個假設輸入都印在畫面上、五項未估價成本逐項列名、TCO 拆成兩個不合併的數字 —— 誠實度不能在唯一的金額上破功。第三次也是最關鍵的一次:稽核稅那一格由提案人自己算出自動化的代價(吃掉毛節省 3%–52%),而放行條件框把「年度擴編暴露」明講成反事實成本、綁上 G2 的可驗證門檻 —— 委員會因此看到的不是一個在推銷 AI 的人,而是一個先幫他們算好帳、並把喊停的權力交回去的人。最後的請求只有兩樣:核准第一段 W1–6,以及指定一個贊助人。</a:t>
-            </a:r>
-          </a:p>
-        </p:txBody>
-      </p:sp>
-      <p:sp>
-        <p:nvSpPr>
-          <p:cNvPr id="4" name="Slide Number Placeholder 3"/>
-          <p:cNvSpPr>
-            <a:spLocks noGrp="1"/>
-          </p:cNvSpPr>
-          <p:nvPr>
-            <p:ph type="sldNum" idx="5" sz="quarter"/>
-          </p:nvPr>
-        </p:nvSpPr>
-        <p:spPr/>
-      </p:sp>
-    </p:spTree>
-  </p:cSld>
-  <p:clrMapOvr>
-    <a:masterClrMapping/>
-  </p:clrMapOvr>
-</p:notes>
-</file>
-
-<file path=ppt/notesSlides/notesSlide13.xml><?xml version="1.0" encoding="utf-8"?>
-<p:notes xmlns:a="http://schemas.openxmlformats.org/drawingml/2006/main" xmlns:p="http://schemas.openxmlformats.org/presentationml/2006/main" xmlns:r="http://schemas.openxmlformats.org/officeDocument/2006/relationships">
-  <p:cSld>
-    <p:spTree>
-      <p:nvGrpSpPr>
-        <p:cNvPr id="1" name=""/>
-        <p:cNvGrpSpPr/>
-        <p:nvPr/>
-      </p:nvGrpSpPr>
-      <p:grpSpPr>
-        <a:xfrm>
-          <a:off x="0" y="0"/>
-          <a:ext cx="0" cy="0"/>
-          <a:chOff x="0" y="0"/>
-          <a:chExt cx="0" cy="0"/>
-        </a:xfrm>
-      </p:grpSpPr>
-      <p:sp>
-        <p:nvSpPr>
-          <p:cNvPr id="2" name="Slide Image Placeholder 1"/>
-          <p:cNvSpPr>
-            <a:spLocks noGrp="1"/>
-          </p:cNvSpPr>
-          <p:nvPr>
-            <p:ph type="sldImg" idx="2"/>
-          </p:nvPr>
-        </p:nvSpPr>
-        <p:spPr/>
-      </p:sp>
-      <p:sp>
-        <p:nvSpPr>
-          <p:cNvPr id="3" name="Notes Placeholder 2"/>
-          <p:cNvSpPr>
-            <a:spLocks noGrp="1"/>
-          </p:cNvSpPr>
-          <p:nvPr>
-            <p:ph type="body" idx="3" sz="quarter"/>
-          </p:nvPr>
-        </p:nvSpPr>
-        <p:spPr/>
-        <p:txBody>
-          <a:bodyPr/>
-          <a:lstStyle/>
-          <a:p>
-            <a:r>
-              <a:t>【第 13 頁 · 參考文獻(第 11 頁 — 不佔十頁額度)】　目標 5 秒 · 累計 11:19</a:t>
+              <a:t>【第 12 頁 · 參考文獻(第 11 頁 — 不佔十頁額度)】　目標 5 秒 · 累計 10:20</a:t>
             </a:r>
           </a:p>
           <a:p/>
@@ -1249,7 +1111,7 @@
           </a:p>
           <a:p>
             <a:r>
-              <a:t>⚠️ 🚫 不可說「減少人力」「縮編」—— 第 12 頁寫的是仍須增聘 6–7 人。這一頁的主張是**同樣人力、更高產出**</a:t>
+              <a:t>⚠️ 🚫 不可說「減少人力」「縮編」—— 第 11 頁寫的是仍須增聘 6–7 人。這一頁的主張是**同樣人力、更高產出**</a:t>
             </a:r>
           </a:p>
           <a:p>
@@ -1406,7 +1268,7 @@
           <a:p/>
           <a:p>
             <a:r>
-              <a:t>⚠️ 分母是 2.0–5.0 天(內部覆核與回信各 0.25 天)—— 這下跟第 10 頁 KPI 的「全鏈路 2–5 天」一致了</a:t>
+              <a:t>⚠️ 分母是 2.0–5.0 天(內部覆核與回信各 0.25 天)—— 這下跟第 9 頁 KPI 的「全鏈路 2–5 天」一致了</a:t>
             </a:r>
           </a:p>
           <a:p>
@@ -1843,46 +1705,51 @@
           <a:lstStyle/>
           <a:p>
             <a:r>
-              <a:t>【第 6 頁 · P4 · 我們看不見的那一半:有資料,沒有習慣】　目標 59 秒 · 累計 6:13</a:t>
+              <a:t>【第 6 頁 · P5 · 五條路,含三條不用 AI】　目標 44 秒 · 累計 5:58</a:t>
             </a:r>
           </a:p>
           <a:p/>
           <a:p>
             <a:r>
-              <a:t>★ 我們有資料,沒有習慣 —— 被判否決的那一流,沒有人回看。</a:t>
+              <a:t>★ 這六個月,它一筆都不對外生效。</a:t>
             </a:r>
           </a:p>
           <a:p/>
           <a:p>
             <a:r>
-              <a:t>· 唯一的漏放量測是一份很薄的人工觸發測試</a:t>
-            </a:r>
-          </a:p>
-          <a:p>
-            <a:r>
-              <a:t>· 報告上公司自己註明:那是下限</a:t>
-            </a:r>
-          </a:p>
-          <a:p>
-            <a:r>
-              <a:t>· 誤報只花我們的人時,漏放是駕駛沒收到那次警示</a:t>
+              <a:t>· 五條路裡三條不用 AI —— 加人、調班、既有雲端規劃,我都沒有先否決</a:t>
+            </a:r>
+          </a:p>
+          <a:p>
+            <a:r>
+              <a:t>· 採用案是地端視覺語言模型;前兩包是它的必要前置</a:t>
+            </a:r>
+          </a:p>
+          <a:p>
+            <a:r>
+              <a:t>· 影子模式:機器照出結論但不對外送,人照常判,兩邊比對</a:t>
             </a:r>
           </a:p>
           <a:p/>
           <a:p>
             <a:r>
-              <a:t># 39 筆測試 · 漏偵 12 筆 · 另 10 筆無法歸類(約 1/4)</a:t>
+              <a:t># 85% 是分流率(推估非實測) · 六個月對外覆蓋率 0%</a:t>
             </a:r>
           </a:p>
           <a:p/>
           <a:p>
             <a:r>
-              <a:t>⚠️ 說「最強的線索,不是結論」—— W1–6 做成帶 95% 信賴區間的估計,不成立就換靶心</a:t>
-            </a:r>
-          </a:p>
-          <a:p>
-            <a:r>
-              <a:t>⚠️ 🚫 83% 是第 4 頁的事,不要跟這一頁的漏放混講</a:t>
+              <a:t>⚠️ 三層一層都不可省:能力層 850 筆終局判定 / 本案層 對外 0% / 放行層 須過另一道獨立門</a:t>
+            </a:r>
+          </a:p>
+          <a:p>
+            <a:r>
+              <a:t>⚠️ 🚫 不可說「AI 不做判定」—— 正確講法是「AI 會做結案判定,但這六個月不對外生效」</a:t>
+            </a:r>
+          </a:p>
+          <a:p>
+            <a:r>
+              <a:t>⚠️ 🚫 85% 是分流率,不是準確率,不可與誤報率並排相減</a:t>
             </a:r>
           </a:p>
           <a:p/>
@@ -1894,12 +1761,12 @@
           <a:p/>
           <a:p>
             <a:r>
-              <a:t>── 逐字備援 · 259 字(忘詞才看,不是拿來唸的)──</a:t>
-            </a:r>
-          </a:p>
-          <a:p>
-            <a:r>
-              <a:t>這是我們看得見的一半。看不見的那一半更麻煩。被判否決的那一流,沒有人回看。我們有資料,沒有習慣。唯一的漏放量測,是一份三十九筆的人工觸發測試,獨立樣本:漏偵十二筆,另外十筆無法歸類,約四分之一;報告上我們自己註明,十二是下限。這是我目前手上最強的線索,不是結論;前六週由評估底座那一包做成帶信賴區間的估計,不成立就換靶心,G1 判。這兩種錯的代價不對稱:誤報只花我們的人時,漏放是駕駛沒收到那次警示。所以漏放這一側就算樣本再薄,也要先把它量出來。這批資料難在三件事:收得不完整、標註本身就會錯、內部對同一個標籤還沒有一致的理解。文獻上講的「沒有真實資料就只能靠代理指標」,就是這件事。</a:t>
+              <a:t>── 逐字備援 · 195 字(忘詞才看,不是拿來唸的)──</a:t>
+            </a:r>
+          </a:p>
+          <a:p>
+            <a:r>
+              <a:t>路有五條。加人,迴路轉得更久,不會停。更便宜的是調班加人力池,我不先否決;六週後那道門用正式量測判:AI能處理的那段佔主要延遲才放行,否則轉排班。採用案是地端視覺語言模型讀事件影片。前兩包是它的必要前置:沒量測底座,就不知道它判得對不對。預期八成五的爭議件,機器有把握、直接結案,人不再看。這是推估不是實測;而人現在判得多準,我們沒量過。所以這六個月,它一筆都不對外生效——機器照出結論,人照常判,兩邊比對。這是唯一算得出自動結案漏放率的設計。</a:t>
             </a:r>
           </a:p>
           <a:p/>
@@ -1910,52 +1777,7 @@
           </a:p>
           <a:p>
             <a:r>
-              <a:t>【compare:看得見的一半:誤報 - 量得到】該樣本全部誤報 124 筆中,103 筆根因同一個 = 83%(公司自己的口徑;比例僅在此樣本內成立)</a:t>
-            </a:r>
-          </a:p>
-          <a:p>
-            <a:r>
-              <a:t>【compare:看得見的一半:誤報 - 量得到】為什麼量得到:誤報是「已經送出去、被人看到」的錯 - 人工複核那一流,每一筆都被人看過</a:t>
-            </a:r>
-          </a:p>
-          <a:p>
-            <a:r>
-              <a:t>【compare:看不見的一半:漏放 - 量不到】能力有、流程沒有:記憶卡存整天分段影片,遠端調閱一台裝置一整天約 10-15 分鐘、有流量成本;但沒有任何常設流程去回看被判否決的那一流</a:t>
-            </a:r>
-          </a:p>
-          <a:p>
-            <a:r>
-              <a:t>【compare:看不見的一半:漏放 - 量不到】所以錯誤會留下來:沒有人回看 → 那一區永遠不產生新標註 → 模型在那個區域學不到東西 → 漏放繼續發生,而且不進任何一份報表(Ensign et al., 2018)</a:t>
-            </a:r>
-          </a:p>
-          <a:p>
-            <a:r>
-              <a:t>【compare:看不見的一半:漏放 - 量不到】代價:漏放是駕駛沒收到那次警示 - 落在安全側,不落在報表上</a:t>
-            </a:r>
-          </a:p>
-          <a:p>
-            <a:r>
-              <a:t>【rows】{'label': '這份測試是什麼', 'value': '39 筆人工觸發測試', 'note': '獨立樣本,非 1,647 筆母體;一次性測試,不是常設量測 - 這是公司到今天唯一的漏放數字', 'hot': False}</a:t>
-            </a:r>
-          </a:p>
-          <a:p>
-            <a:r>
-              <a:t>【rows】{'label': '正確偵測', 'value': '17 / 39', 'note': '人工觸發後有被偵測到', 'hot': False}</a:t>
-            </a:r>
-          </a:p>
-          <a:p>
-            <a:r>
-              <a:t>【rows】{'label': '待客戶說明用途,無法歸類', 'value': '10 / 39 ≈ 四分之一', 'note': '四分之一的樣本連歸類都做不到 - 這一列本身就是「樣本有多薄」的證據', 'hot': False}</a:t>
-            </a:r>
-          </a:p>
-          <a:p>
-            <a:r>
-              <a:t>【rows】{'label': '我對這條線索的定性', 'value': '線索,不是結論', 'note': 'W1-6 由評估底座那一包做成帶信賴區間的估計;不成立就換靶心,G1(第 6 週)判', 'hot': True}</a:t>
-            </a:r>
-          </a:p>
-          <a:p>
-            <a:r>
-              <a:t>【這一頁的作用】這一頁把「為什麼第一筆錢要買量測,而不是買模型」變成委員會看得見的東西:左邊誤報有母體、有比例、有根因,右邊漏放只有一份 39 筆、自註為下限、還有四分之一無法歸類 - 兩側證據強度的落差本身就是提案的理由。同時它用真實案例數據(1,647 筆樣本、103/124、39 筆測試、6/12)證明痛點不是修辭,再用 Ensign 的回饋迴路說明「沒有人回看的那一流」為什麼會讓錯誤永久留下,把痛點從『這次判錯了』升級成『這個錯誤系統性地不會被發現』。最後主動把最強的線索降級成假說並綁到 G1,誠實度因此是被證明的而不是被宣稱的。</a:t>
+              <a:t>【這一頁的作用】這一頁要讓委員會相信兩件事。第一,這個 AI 提案是被比較過的:五條路用同一組欄位並排 - 做什麼、成本形狀、能不能停、為什麼 - 差別因此不再是五段等長的描述,而是四種可以一眼分辨的曲線(線性 / 線性但削峰 / 一次性下移一階 / 次線性 / 尚未開始),而唯一不是線性的那一條就是採用案。第二,這個提案是可以被否決的:最便宜的調班沒有被畫醜也沒有被預先否決,選項 0 用最保守、對本案最不利的算法拒絕,G1 有兩個同粗的出口,其中一個出口通向不做本案。最後把 85% 降級成一個要在 W12 被凍結測試集驗、而且六個月內一筆都不對外生效的推估 - 委員會今天核准的是一道可以否決自己的量測,不是一個 85% 的承諾。</a:t>
             </a:r>
           </a:p>
         </p:txBody>
@@ -2025,68 +1847,79 @@
           <a:lstStyle/>
           <a:p>
             <a:r>
-              <a:t>【第 7 頁 · P5 · 五條路,含三條不用 AI】　目標 44 秒 · 累計 6:57</a:t>
+              <a:t>【第 7 頁 · P6 · 風險:七類十條,緩解位移與殘餘風險】　目標 51 秒 · 累計 6:49</a:t>
             </a:r>
           </a:p>
           <a:p/>
           <a:p>
             <a:r>
-              <a:t>★ 這六個月,它一筆都不對外生效。</a:t>
+              <a:t>★ 每一條風險我都附了偵測訊號 —— 你不會在事後才知道它發生了。</a:t>
             </a:r>
           </a:p>
           <a:p/>
           <a:p>
             <a:r>
-              <a:t>· 五條路裡三條不用 AI —— 加人、調班、既有雲端規劃,我都沒有先否決</a:t>
-            </a:r>
-          </a:p>
-          <a:p>
-            <a:r>
-              <a:t>· 採用案是地端視覺語言模型;前兩包是它的必要前置</a:t>
-            </a:r>
-          </a:p>
-          <a:p>
-            <a:r>
-              <a:t>· 影子模式:機器照出結論但不對外送,人照常判,兩邊比對</a:t>
+              <a:t>· 七類十條,兩條是這個方案自己造成的 —— 我沒有藏,自己標出來</a:t>
+            </a:r>
+          </a:p>
+          <a:p>
+            <a:r>
+              <a:t>· 自動化偏差:介面一顯示模型信心,人就直接蓋章 → 我的決策是不顯示</a:t>
+            </a:r>
+          </a:p>
+          <a:p>
+            <a:r>
+              <a:t>· 但那個緩解只擋得住人還在看的那些 —— 移交後那八成五沒有介面也沒有人,所以我另外加了 R9、R10 兩條,掛在自動結案那道門上</a:t>
             </a:r>
           </a:p>
           <a:p/>
           <a:p>
             <a:r>
-              <a:t># 85% 是分流率(推估非實測) · 六個月對外覆蓋率 0%</a:t>
+              <a:t># 七類十條 · R9 自動結案的漏放 · R10 自動結案的冤枉</a:t>
             </a:r>
           </a:p>
           <a:p/>
           <a:p>
             <a:r>
-              <a:t>⚠️ 三層一層都不可省:能力層 850 筆終局判定 / 本案層 對外 0% / 放行層 須過另一道獨立門</a:t>
-            </a:r>
-          </a:p>
-          <a:p>
-            <a:r>
-              <a:t>⚠️ 🚫 不可說「AI 不做判定」—— 正確講法是「AI 會做結案判定,但這六個月不對外生效」</a:t>
-            </a:r>
-          </a:p>
-          <a:p>
-            <a:r>
-              <a:t>⚠️ 🚫 85% 是分流率,不是準確率,不可與誤報率並排相減</a:t>
+              <a:t>⚠️ R8 法律面我沒有答案 —— 由法務在 G1(第 6 週)前給書面意見</a:t>
+            </a:r>
+          </a:p>
+          <a:p>
+            <a:r>
+              <a:t>⚠️ 每一條沒有答案的事,都要當場交代誰在第幾週給</a:t>
             </a:r>
           </a:p>
           <a:p/>
           <a:p>
             <a:r>
+              <a:t>── 錄影提示(不唸)──</a:t>
+            </a:r>
+          </a:p>
+          <a:p>
+            <a:r>
+              <a:t>· 錄影標記:唸完「這題我沒有答案,它由法務在 G1 前給書面意見」整句後,畫面停在 R8 的紅色虛線圈上靜止 2 秒、口白不出聲,再切下一頁。停頓點在整句句尾,不在「我沒有答案」之後 —— 每一條沒有答案的事都要當場交代誰在什麼時候給答案,停頓要停在那句話說完之後,長度仍為 2 秒。</a:t>
+            </a:r>
+          </a:p>
+          <a:p>
+            <a:r>
+              <a:t>· 唸完法務那句後,畫面停在 R8 紅圈上靜止 2 秒</a:t>
+            </a:r>
+          </a:p>
+          <a:p/>
+          <a:p>
+            <a:r>
               <a:t>→ 換下一頁</a:t>
             </a:r>
           </a:p>
           <a:p/>
           <a:p>
             <a:r>
-              <a:t>── 逐字備援 · 195 字(忘詞才看,不是拿來唸的)──</a:t>
-            </a:r>
-          </a:p>
-          <a:p>
-            <a:r>
-              <a:t>路有五條。加人,迴路轉得更久,不會停。更便宜的是調班加人力池,我不先否決;六週後那道門用正式量測判:AI能處理的那段佔主要延遲才放行,否則轉排班。採用案是地端視覺語言模型讀事件影片。前兩包是它的必要前置:沒量測底座,就不知道它判得對不對。預期八成五的爭議件,機器有把握、直接結案,人不再看。這是推估不是實測;而人現在判得多準,我們沒量過。所以這六個月,它一筆都不對外生效——機器照出結論,人照常判,兩邊比對。這是唯一算得出自動結案漏放率的設計。</a:t>
+              <a:t>── 逐字備援 · 223 字(忘詞才看,不是拿來唸的)──</a:t>
+            </a:r>
+          </a:p>
+          <a:p>
+            <a:r>
+              <a:t>選了這條,我先講它會出什麼事。風險歸成七類十條,我只講三條。第一,資料級聯:複核判準不一致會變成訓練標籤,脈絡資料有錯也會整批傳下去。第二,自動化偏差:介面一顯示模型信心,人就直接蓋章。我的決策是介面不顯示信心。但這個緩解只擋得住人還在看的那些 —— 移交後開到天花板,那八成五沒有介面、也沒有人。所以我另外加了兩條:機器把真的危險事件判成誤報,跟機器單方面駁回駕駛。兩條都掛在自動結案那道門上,不在這六個月裡。第三,法律面:曾判為誤報的紀錄,在事故舉證裡算什麼。這題我沒有答案,它由法務在 G1 前給書面意見。</a:t>
             </a:r>
           </a:p>
           <a:p/>
@@ -2097,7 +1930,7 @@
           </a:p>
           <a:p>
             <a:r>
-              <a:t>【這一頁的作用】這一頁要讓委員會相信兩件事。第一,這個 AI 提案是被比較過的:五條路用同一組欄位並排 - 做什麼、成本形狀、能不能停、為什麼 - 差別因此不再是五段等長的描述,而是四種可以一眼分辨的曲線(線性 / 線性但削峰 / 一次性下移一階 / 次線性 / 尚未開始),而唯一不是線性的那一條就是採用案。第二,這個提案是可以被否決的:最便宜的調班沒有被畫醜也沒有被預先否決,選項 0 用最保守、對本案最不利的算法拒絕,G1 有兩個同粗的出口,其中一個出口通向不做本案。最後把 85% 降級成一個要在 W12 被凍結測試集驗、而且六個月內一筆都不對外生效的推估 - 委員會今天核准的是一道可以否決自己的量測,不是一個 85% 的承諾。</a:t>
+              <a:t>【這一頁的作用】直接修 Kenny 第 6 點:原版 2D 位移圖看得到「移動了多少」卻看不到「哪一條對應什麼解法」。改成一列一條風險、同一列並排緩解 → 緩解自己的代價 → 偵測訊號,委員會用眼睛掃一行就答得出「這條誰負責、怎麼知道它壞了」。三條紅底是本頁的說服力來源:R8 承認沒有解、R9/R10 承認是這個 AI 方案自己製造的新風險(自動結案的漏放與冤枉),並且把它們的放行責任明確推到本案之外那道門 —— 主動揭露換取委員會對其餘七條的信任。成功可能性標在每條風險名右側,補上評分要求的第三個維度。</a:t>
             </a:r>
           </a:p>
         </p:txBody>
@@ -2167,46 +2000,46 @@
           <a:lstStyle/>
           <a:p>
             <a:r>
-              <a:t>【第 8 頁 · P6 · 風險:七類十條,緩解位移與殘餘風險】　目標 51 秒 · 累計 7:48</a:t>
+              <a:t>【第 8 頁 · P7 · 倫理與可申訴性:對照澳洲 AI 倫理八原則】　目標 50 秒 · 累計 7:39</a:t>
             </a:r>
           </a:p>
           <a:p/>
           <a:p>
             <a:r>
-              <a:t>★ 每一條風險我都附了偵測訊號 —— 你不會在事後才知道它發生了。</a:t>
+              <a:t>★ 這一頁就是我要求六個月不對外生效的理由 —— 那 850 筆沒有人看,所以要先量得出它錯多少。</a:t>
             </a:r>
           </a:p>
           <a:p/>
           <a:p>
             <a:r>
-              <a:t>· 七類十條,兩條是這個方案自己造成的 —— 我沒有藏,自己標出來</a:t>
-            </a:r>
-          </a:p>
-          <a:p>
-            <a:r>
-              <a:t>· 自動化偏差:介面一顯示模型信心,人就直接蓋章 → 我的決策是不顯示</a:t>
-            </a:r>
-          </a:p>
-          <a:p>
-            <a:r>
-              <a:t>· 但那個緩解只擋得住人還在看的那些 —— 移交後那八成五沒有介面也沒有人,所以我另外加了 R9、R10 兩條,掛在自動結案那道門上</a:t>
+              <a:t>· 同一張表兩欄:專案期一種顏色,移交後另一種 —— 今天要批的是左邊那欄</a:t>
+            </a:r>
+          </a:p>
+          <a:p>
+            <a:r>
+              <a:t>· 第 7 條可申訴性 —— 我把它升為部署否決條件</a:t>
+            </a:r>
+          </a:p>
+          <a:p>
+            <a:r>
+              <a:t>· 第 8 條問責性:那 850 筆裡某一筆判錯,沒有人簽過名</a:t>
             </a:r>
           </a:p>
           <a:p/>
           <a:p>
             <a:r>
-              <a:t># 七類十條 · R9 自動結案的漏放 · R10 自動結案的冤枉</a:t>
+              <a:t># 專案期 綠 0 琥珀 7 紅 1 → 移交後 綠 0 琥珀 1 紅 7</a:t>
             </a:r>
           </a:p>
           <a:p/>
           <a:p>
             <a:r>
-              <a:t>⚠️ R8 法律面我沒有答案 —— 由法務在 G1(第 6 週)前給書面意見</a:t>
-            </a:r>
-          </a:p>
-          <a:p>
-            <a:r>
-              <a:t>⚠️ 每一條沒有答案的事,都要當場交代誰在第幾週給</a:t>
+              <a:t>⚠️ 「沒有人簽過名」是**承認洞**,🚫 不要臨場補一個人上去</a:t>
+            </a:r>
+          </a:p>
+          <a:p>
+            <a:r>
+              <a:t>⚠️ 第 4 條隱私是唯一不因自動結案惡化的一條 —— 刻意不標紅,不是漏標</a:t>
             </a:r>
           </a:p>
           <a:p/>
@@ -2217,12 +2050,12 @@
           </a:p>
           <a:p>
             <a:r>
-              <a:t>· 錄影標記:唸完「這題我沒有答案,它由法務在 G1 前給書面意見」整句後,畫面停在 R8 的紅色虛線圈上靜止 2 秒、口白不出聲,再切下一頁。停頓點在整句句尾,不在「我沒有答案」之後 —— 每一條沒有答案的事都要當場交代誰在什麼時候給答案,停頓要停在那句話說完之後,長度仍為 2 秒。</a:t>
-            </a:r>
-          </a:p>
-          <a:p>
-            <a:r>
-              <a:t>· 唸完法務那句後,畫面停在 R8 紅圈上靜止 2 秒</a:t>
+              <a:t>· 錄影標記:唸到「可申訴性,我們不及格」時切全螢幕人像,唸完該句後切回畫中畫。</a:t>
+            </a:r>
+          </a:p>
+          <a:p>
+            <a:r>
+              <a:t>· 交界移交:P7 → P8 的接縫句為「講完該不該做,接下來是怎麼算做成了。」依總則檔 §6b,該句寫成 P8 口白的第一句、字數計入 P8,故不列入本頁 224 字。</a:t>
             </a:r>
           </a:p>
           <a:p/>
@@ -2234,12 +2067,12 @@
           <a:p/>
           <a:p>
             <a:r>
-              <a:t>── 逐字備援 · 223 字(忘詞才看,不是拿來唸的)──</a:t>
-            </a:r>
-          </a:p>
-          <a:p>
-            <a:r>
-              <a:t>選了這條,我先講它會出什麼事。風險歸成七類十條,我只講三條。第一,資料級聯:複核判準不一致會變成訓練標籤,脈絡資料有錯也會整批傳下去。第二,自動化偏差:介面一顯示模型信心,人就直接蓋章。我的決策是介面不顯示信心。但這個緩解只擋得住人還在看的那些 —— 移交後開到天花板,那八成五沒有介面、也沒有人。所以我另外加了兩條:機器把真的危險事件判成誤報,跟機器單方面駁回駕駛。兩條都掛在自動結案那道門上,不在這六個月裡。第三,法律面:曾判為誤報的紀錄,在事故舉證裡算什麼。這題我沒有答案,它由法務在 G1 前給書面意見。</a:t>
+              <a:t>── 逐字備援 · 219 字(忘詞才看,不是拿來唸的)──</a:t>
+            </a:r>
+          </a:p>
+          <a:p>
+            <a:r>
+              <a:t>還有一條,是我們自己造成的。這道人工防線的產能有限,所以它是配給的 —— 依客戶的購買量排序。同樣一個誤判,發生在大客戶身上會被人攔下來,小客戶身上不會。分配依據是客戶大小,不是風險大小。這六個月我能做的,是第一次量得出它覆蓋了誰。但我要說清楚:這個方案開到天花板之後,配給的依據會從客戶大小換成機器的信心,而那八成五沒有人看過 —— 那是我造成的新問題,不是我解掉的舊問題。所以八原則裡的問責跟可申訴性,我這一頁全部標紅,而它們掛在第二十四週那道門上。申訴機制到位前,本案產出不供個人考核使用。</a:t>
             </a:r>
           </a:p>
           <a:p/>
@@ -2250,7 +2083,7 @@
           </a:p>
           <a:p>
             <a:r>
-              <a:t>【這一頁的作用】直接修 Kenny 第 6 點:原版 2D 位移圖看得到「移動了多少」卻看不到「哪一條對應什麼解法」。改成一列一條風險、同一列並排緩解 → 緩解自己的代價 → 偵測訊號,委員會用眼睛掃一行就答得出「這條誰負責、怎麼知道它壞了」。三條紅底是本頁的說服力來源:R8 承認沒有解、R9/R10 承認是這個 AI 方案自己製造的新風險(自動結案的漏放與冤枉),並且把它們的放行責任明確推到本案之外那道門 —— 主動揭露換取委員會對其餘七條的信任。成功可能性標在每條風險名右側,補上評分要求的第三個維度。</a:t>
+              <a:t>【這一頁的作用】直接修 Kenny 第 7 點的後半:這一頁先用標題回答「為什麼一個 AI 提案要談倫理」—— 因為這個方案的產出就是把每 1,000 筆爭議裡約 850 筆變成沒有人看過的判定,那是它的代價,不是外掛的合規章節。雙欄評等讓委員會當場知道自己今天批的是哪一欄(專案期,影子模式,人仍逐筆判),而移交後那七盞紅燈全部掛在第 24 週那道門上;第 4 條保持白底是刻意的對照 —— 它是唯一不因自動結案而惡化的一條。全頁綠燈零條不是失分,是把「移交條件」寫成可稽核的待辦清單,也把前六週的預算正當化成把紅燈變回琥珀的唯一路徑。</a:t>
             </a:r>
           </a:p>
         </p:txBody>
@@ -2320,90 +2153,74 @@
           <a:lstStyle/>
           <a:p>
             <a:r>
-              <a:t>【第 9 頁 · P7 · 倫理與可申訴性:對照澳洲 AI 倫理八原則】　目標 50 秒 · 累計 8:37</a:t>
+              <a:t>【第 9 頁 · P8 · 怎麼算成功:三層 KPI,一條回圈】　目標 46 秒 · 累計 8:24</a:t>
             </a:r>
           </a:p>
           <a:p/>
           <a:p>
             <a:r>
-              <a:t>★ 這一頁就是我要求六個月不對外生效的理由 —— 那 850 筆沒有人看,所以要先量得出它錯多少。</a:t>
+              <a:t>★ 上面兩層是你買到的東西,下面四條是你隨時喊停的權力 —— 而煞車是我自己裝的。</a:t>
             </a:r>
           </a:p>
           <a:p/>
           <a:p>
             <a:r>
-              <a:t>· 同一張表兩欄:專案期一種顏色,移交後另一種 —— 今天要批的是左邊那欄</a:t>
-            </a:r>
-          </a:p>
-          <a:p>
-            <a:r>
-              <a:t>· 第 7 條可申訴性 —— 我把它升為部署否決條件</a:t>
-            </a:r>
-          </a:p>
-          <a:p>
-            <a:r>
-              <a:t>· 第 8 條問責性:那 850 筆裡某一筆判錯,沒有人簽過名</a:t>
+              <a:t>· 效益層:爭議回覆時效、可避免的年度增聘、兩條工作流的單位工時</a:t>
+            </a:r>
+          </a:p>
+          <a:p>
+            <a:r>
+              <a:t>· 護欄層任一未達標,上面兩層的成績一律不採計</a:t>
+            </a:r>
+          </a:p>
+          <a:p>
+            <a:r>
+              <a:t>· 訂不出目標值的,寫明由哪一道門訂</a:t>
             </a:r>
           </a:p>
           <a:p/>
           <a:p>
             <a:r>
-              <a:t># 專案期 綠 0 琥珀 7 紅 1 → 移交後 綠 0 琥珀 1 紅 7</a:t>
+              <a:t># ⑩ 漏放率 W6 交 95% CI · ⑬ 漏濾率 W12 交差值 95% CI</a:t>
+            </a:r>
+          </a:p>
+          <a:p>
+            <a:r>
+              <a:t># δ 由委員會在 G1 事前預註冊 —— 判準寫在跑實驗之前</a:t>
             </a:r>
           </a:p>
           <a:p/>
           <a:p>
             <a:r>
-              <a:t>⚠️ 「沒有人簽過名」是**承認洞**,🚫 不要臨場補一個人上去</a:t>
-            </a:r>
-          </a:p>
-          <a:p>
-            <a:r>
-              <a:t>⚠️ 第 4 條隱私是唯一不因自動結案惡化的一條 —— 刻意不標紅,不是漏標</a:t>
+              <a:t>⚠️ ⑬ 的母體是那 850 筆(有把握桶),🚫 不是剩下的 150 筆</a:t>
             </a:r>
           </a:p>
           <a:p/>
           <a:p>
             <a:r>
-              <a:t>── 錄影提示(不唸)──</a:t>
-            </a:r>
-          </a:p>
-          <a:p>
-            <a:r>
-              <a:t>· 錄影標記:唸到「可申訴性,我們不及格」時切全螢幕人像,唸完該句後切回畫中畫。</a:t>
-            </a:r>
-          </a:p>
-          <a:p>
-            <a:r>
-              <a:t>· 交界移交:P7 → P8 的接縫句為「講完該不該做,接下來是怎麼算做成了。」依總則檔 §6b,該句寫成 P8 口白的第一句、字數計入 P8,故不列入本頁 224 字。</a:t>
+              <a:t>→ 換下一頁</a:t>
             </a:r>
           </a:p>
           <a:p/>
           <a:p>
             <a:r>
-              <a:t>→ 換下一頁</a:t>
+              <a:t>── 逐字備援 · 201 字(忘詞才看,不是拿來唸的)──</a:t>
+            </a:r>
+          </a:p>
+          <a:p>
+            <a:r>
+              <a:t>講完該不該做,接下來是怎麼算做成了。最上層第一個指標,是客戶等多久拿到分析,這是這個專案要買的東西。現況兩到五天,目標兩天內、單純案件當天;是客戶期望,不是已簽的服務水準協議。護欄層是否決型,今天多一條:漏濾率——機器說有把握、直接結案的那一桶裡,有多少其實該讓人看。第十二週交出它跟人工的差值,門檻第六週就要先訂,不能看完數據再訂。錯誤攔截比例我算不出來,分母還不存在,那正是護欄層要交的能力。訂不出目標值的,我寫的是它什麼時候被訂出來、由哪一道門訂。</a:t>
             </a:r>
           </a:p>
           <a:p/>
           <a:p>
             <a:r>
-              <a:t>── 逐字備援 · 219 字(忘詞才看,不是拿來唸的)──</a:t>
-            </a:r>
-          </a:p>
-          <a:p>
-            <a:r>
-              <a:t>還有一條,是我們自己造成的。這道人工防線的產能有限,所以它是配給的 —— 依客戶的購買量排序。同樣一個誤判,發生在大客戶身上會被人攔下來,小客戶身上不會。分配依據是客戶大小,不是風險大小。這六個月我能做的,是第一次量得出它覆蓋了誰。但我要說清楚:這個方案開到天花板之後,配給的依據會從客戶大小換成機器的信心,而那八成五沒有人看過 —— 那是我造成的新問題,不是我解掉的舊問題。所以八原則裡的問責跟可申訴性,我這一頁全部標紅,而它們掛在第二十四週那道門上。申訴機制到位前,本案產出不供個人考核使用。</a:t>
-            </a:r>
-          </a:p>
-          <a:p/>
-          <a:p>
-            <a:r>
               <a:t>── 備查(不唸,答辯用)──</a:t>
             </a:r>
           </a:p>
           <a:p>
             <a:r>
-              <a:t>【這一頁的作用】直接修 Kenny 第 7 點的後半:這一頁先用標題回答「為什麼一個 AI 提案要談倫理」—— 因為這個方案的產出就是把每 1,000 筆爭議裡約 850 筆變成沒有人看過的判定,那是它的代價,不是外掛的合規章節。雙欄評等讓委員會當場知道自己今天批的是哪一欄(專案期,影子模式,人仍逐筆判),而移交後那七盞紅燈全部掛在第 24 週那道門上;第 4 條保持白底是刻意的對照 —— 它是唯一不因自動結案而惡化的一條。全頁綠燈零條不是失分,是把「移交條件」寫成可稽核的待辦清單,也把前六週的預算正當化成把紅燈變回琥珀的唯一路徑。</a:t>
+              <a:t>【這一頁的作用】這頁把「衡量」從外掛的合規章節,改寫成 AI 提案本身的兩個問題:怎麼證明它有效、什麼情況下喊停。對委員會的作用有三個:①上兩層告訴他們這筆錢買的是客戶等多久拿到分析(不是準確率),而且業務指標由營運指標支撐、有階序;②護欄層讓他們知道自己手上握著一票否決,尤其⑬漏濾率是自動結案能不能對外生效的唯一否決點 —— 提案人主動把刀柄遞出去;③每一個今天訂不出的目標值都寫明由哪道門、第幾週、誰負責訂,把「訂不出來」變成可稽核的紀律而不是含糊。</a:t>
             </a:r>
           </a:p>
         </p:txBody>
@@ -5820,1434 +5637,6 @@
 </file>
 
 <file path=ppt/slides/slide10.xml><?xml version="1.0" encoding="utf-8"?>
-<p:sld xmlns:a="http://schemas.openxmlformats.org/drawingml/2006/main" xmlns:p="http://schemas.openxmlformats.org/presentationml/2006/main" xmlns:r="http://schemas.openxmlformats.org/officeDocument/2006/relationships">
-  <p:cSld>
-    <p:spTree>
-      <p:nvGrpSpPr>
-        <p:cNvPr id="1" name=""/>
-        <p:cNvGrpSpPr/>
-        <p:nvPr/>
-      </p:nvGrpSpPr>
-      <p:grpSpPr/>
-      <p:sp>
-        <p:nvSpPr>
-          <p:cNvPr id="2" name="TextBox 1"/>
-          <p:cNvSpPr txBox="1"/>
-          <p:nvPr/>
-        </p:nvSpPr>
-        <p:spPr>
-          <a:xfrm>
-            <a:off x="658368" y="384048"/>
-            <a:ext cx="5486400" cy="274320"/>
-          </a:xfrm>
-          <a:prstGeom prst="rect">
-            <a:avLst/>
-          </a:prstGeom>
-          <a:noFill/>
-        </p:spPr>
-        <p:txBody>
-          <a:bodyPr wrap="square" lIns="0" rIns="0" tIns="0" bIns="0" anchor="t">
-            <a:spAutoFit/>
-          </a:bodyPr>
-          <a:lstStyle/>
-          <a:p>
-            <a:pPr algn="l">
-              <a:lnSpc>
-                <a:spcPct val="125000"/>
-              </a:lnSpc>
-            </a:pPr>
-            <a:r>
-              <a:rPr sz="1300" b="1">
-                <a:solidFill>
-                  <a:srgbClr val="E8833A"/>
-                </a:solidFill>
-                <a:latin typeface="Microsoft JhengHei"/>
-              </a:rPr>
-              <a:t>效益與衡量</a:t>
-            </a:r>
-          </a:p>
-        </p:txBody>
-      </p:sp>
-      <p:sp>
-        <p:nvSpPr>
-          <p:cNvPr id="3" name="TextBox 2"/>
-          <p:cNvSpPr txBox="1"/>
-          <p:nvPr/>
-        </p:nvSpPr>
-        <p:spPr>
-          <a:xfrm>
-            <a:off x="658368" y="676656"/>
-            <a:ext cx="11030407" cy="566928"/>
-          </a:xfrm>
-          <a:prstGeom prst="rect">
-            <a:avLst/>
-          </a:prstGeom>
-          <a:noFill/>
-        </p:spPr>
-        <p:txBody>
-          <a:bodyPr wrap="square" lIns="0" rIns="0" tIns="0" bIns="0" anchor="t">
-            <a:spAutoFit/>
-          </a:bodyPr>
-          <a:lstStyle/>
-          <a:p>
-            <a:pPr algn="l">
-              <a:lnSpc>
-                <a:spcPct val="125000"/>
-              </a:lnSpc>
-            </a:pPr>
-            <a:r>
-              <a:rPr sz="2700" b="1">
-                <a:solidFill>
-                  <a:srgbClr val="1F4E79"/>
-                </a:solidFill>
-                <a:latin typeface="Microsoft JhengHei"/>
-              </a:rPr>
-              <a:t>你買到的三層效益,和四條隨時喊停的權力</a:t>
-            </a:r>
-          </a:p>
-        </p:txBody>
-      </p:sp>
-      <p:sp>
-        <p:nvSpPr>
-          <p:cNvPr id="4" name="TextBox 3"/>
-          <p:cNvSpPr txBox="1"/>
-          <p:nvPr/>
-        </p:nvSpPr>
-        <p:spPr>
-          <a:xfrm>
-            <a:off x="658368" y="1298448"/>
-            <a:ext cx="11030407" cy="365760"/>
-          </a:xfrm>
-          <a:prstGeom prst="rect">
-            <a:avLst/>
-          </a:prstGeom>
-          <a:noFill/>
-        </p:spPr>
-        <p:txBody>
-          <a:bodyPr wrap="square" lIns="0" rIns="0" tIns="0" bIns="0" anchor="t">
-            <a:spAutoFit/>
-          </a:bodyPr>
-          <a:lstStyle/>
-          <a:p>
-            <a:pPr algn="l">
-              <a:lnSpc>
-                <a:spcPct val="125000"/>
-              </a:lnSpc>
-            </a:pPr>
-            <a:r>
-              <a:rPr sz="1500" b="0">
-                <a:solidFill>
-                  <a:srgbClr val="6B7885"/>
-                </a:solidFill>
-                <a:latin typeface="Microsoft JhengHei"/>
-              </a:rPr>
-              <a:t>三層 KPI 是效益,四道護欄一票否決;訂不出的目標值寫明由哪道門訂</a:t>
-            </a:r>
-          </a:p>
-        </p:txBody>
-      </p:sp>
-      <p:sp>
-        <p:nvSpPr>
-          <p:cNvPr id="5" name="Rectangle 4"/>
-          <p:cNvSpPr/>
-          <p:nvPr/>
-        </p:nvSpPr>
-        <p:spPr>
-          <a:xfrm>
-            <a:off x="658368" y="1517904"/>
-            <a:ext cx="10874959" cy="32004"/>
-          </a:xfrm>
-          <a:prstGeom prst="rect">
-            <a:avLst/>
-          </a:prstGeom>
-          <a:solidFill>
-            <a:srgbClr val="1F4E79"/>
-          </a:solidFill>
-          <a:ln>
-            <a:noFill/>
-          </a:ln>
-          <a:effectLst/>
-        </p:spPr>
-        <p:style>
-          <a:lnRef idx="1">
-            <a:schemeClr val="accent1"/>
-          </a:lnRef>
-          <a:fillRef idx="3">
-            <a:schemeClr val="accent1"/>
-          </a:fillRef>
-          <a:effectRef idx="2">
-            <a:schemeClr val="accent1"/>
-          </a:effectRef>
-          <a:fontRef idx="minor">
-            <a:schemeClr val="lt1"/>
-          </a:fontRef>
-        </p:style>
-        <p:txBody>
-          <a:bodyPr rtlCol="0" anchor="ctr"/>
-          <a:lstStyle/>
-          <a:p>
-            <a:pPr algn="ctr"/>
-          </a:p>
-        </p:txBody>
-      </p:sp>
-      <p:sp>
-        <p:nvSpPr>
-          <p:cNvPr id="6" name="Rounded Rectangle 5"/>
-          <p:cNvSpPr/>
-          <p:nvPr/>
-        </p:nvSpPr>
-        <p:spPr>
-          <a:xfrm>
-            <a:off x="658368" y="1755648"/>
-            <a:ext cx="10874959" cy="329184"/>
-          </a:xfrm>
-          <a:prstGeom prst="roundRect">
-            <a:avLst>
-              <a:gd name="adj" fmla="val 6000"/>
-            </a:avLst>
-          </a:prstGeom>
-          <a:solidFill>
-            <a:srgbClr val="1F4E79"/>
-          </a:solidFill>
-          <a:ln>
-            <a:noFill/>
-          </a:ln>
-          <a:effectLst/>
-        </p:spPr>
-        <p:style>
-          <a:lnRef idx="1">
-            <a:schemeClr val="accent1"/>
-          </a:lnRef>
-          <a:fillRef idx="3">
-            <a:schemeClr val="accent1"/>
-          </a:fillRef>
-          <a:effectRef idx="2">
-            <a:schemeClr val="accent1"/>
-          </a:effectRef>
-          <a:fontRef idx="minor">
-            <a:schemeClr val="lt1"/>
-          </a:fontRef>
-        </p:style>
-        <p:txBody>
-          <a:bodyPr rtlCol="0" anchor="ctr"/>
-          <a:lstStyle/>
-          <a:p>
-            <a:pPr algn="ctr"/>
-          </a:p>
-        </p:txBody>
-      </p:sp>
-      <p:sp>
-        <p:nvSpPr>
-          <p:cNvPr id="7" name="TextBox 6"/>
-          <p:cNvSpPr txBox="1"/>
-          <p:nvPr/>
-        </p:nvSpPr>
-        <p:spPr>
-          <a:xfrm>
-            <a:off x="841247" y="1755648"/>
-            <a:ext cx="10509199" cy="329184"/>
-          </a:xfrm>
-          <a:prstGeom prst="rect">
-            <a:avLst/>
-          </a:prstGeom>
-          <a:noFill/>
-        </p:spPr>
-        <p:txBody>
-          <a:bodyPr wrap="square" lIns="0" rIns="0" tIns="0" bIns="0" anchor="ctr">
-            <a:spAutoFit/>
-          </a:bodyPr>
-          <a:lstStyle/>
-          <a:p>
-            <a:pPr algn="ctr">
-              <a:lnSpc>
-                <a:spcPct val="125000"/>
-              </a:lnSpc>
-            </a:pPr>
-            <a:r>
-              <a:rPr sz="1700" b="1">
-                <a:solidFill>
-                  <a:srgbClr val="FFFFFF"/>
-                </a:solidFill>
-                <a:latin typeface="Microsoft JhengHei"/>
-              </a:rPr>
-              <a:t>這頁不是外掛的合規章節:護欄任一未達標,上兩層成績一律不採計;否決型是本案決定,非文獻主張</a:t>
-            </a:r>
-          </a:p>
-        </p:txBody>
-      </p:sp>
-      <p:graphicFrame>
-        <p:nvGraphicFramePr>
-          <p:cNvPr id="8" name="Table 7"/>
-          <p:cNvGraphicFramePr>
-            <a:graphicFrameLocks noGrp="1"/>
-          </p:cNvGraphicFramePr>
-          <p:nvPr/>
-        </p:nvGraphicFramePr>
-        <p:xfrm>
-          <a:off x="658368" y="2212848"/>
-          <a:ext cx="10874957" cy="2670048"/>
-        </p:xfrm>
-        <a:graphic>
-          <a:graphicData uri="http://schemas.openxmlformats.org/drawingml/2006/table">
-            <a:tbl>
-              <a:tblPr firstRow="1">
-                <a:tableStyleId>{5C22544A-7EE6-4342-B048-85BDC9FD1C3A}</a:tableStyleId>
-              </a:tblPr>
-              <a:tblGrid>
-                <a:gridCol w="3262487"/>
-                <a:gridCol w="3806235"/>
-                <a:gridCol w="3806235"/>
-              </a:tblGrid>
-              <a:tr h="329184">
-                <a:tc>
-                  <a:txBody>
-                    <a:bodyPr/>
-                    <a:lstStyle/>
-                    <a:p>
-                      <a:pPr algn="l"/>
-                      <a:r>
-                        <a:rPr sz="1200" b="1">
-                          <a:solidFill>
-                            <a:srgbClr val="FFFFFF"/>
-                          </a:solidFill>
-                          <a:latin typeface="Microsoft JhengHei"/>
-                        </a:rPr>
-                        <a:t/>
-                      </a:r>
-                    </a:p>
-                  </a:txBody>
-                  <a:tcPr marL="45720" marR="45720" marT="18288" marB="18288" anchor="ctr">
-                    <a:solidFill>
-                      <a:srgbClr val="1F4E79"/>
-                    </a:solidFill>
-                  </a:tcPr>
-                </a:tc>
-                <a:tc>
-                  <a:txBody>
-                    <a:bodyPr/>
-                    <a:lstStyle/>
-                    <a:p>
-                      <a:pPr algn="ctr"/>
-                      <a:r>
-                        <a:rPr sz="1200" b="1">
-                          <a:solidFill>
-                            <a:srgbClr val="FFFFFF"/>
-                          </a:solidFill>
-                          <a:latin typeface="Microsoft JhengHei"/>
-                        </a:rPr>
-                        <a:t>指標(層別)</a:t>
-                      </a:r>
-                    </a:p>
-                  </a:txBody>
-                  <a:tcPr marL="45720" marR="45720" marT="18288" marB="18288" anchor="ctr">
-                    <a:solidFill>
-                      <a:srgbClr val="1F4E79"/>
-                    </a:solidFill>
-                  </a:tcPr>
-                </a:tc>
-                <a:tc>
-                  <a:txBody>
-                    <a:bodyPr/>
-                    <a:lstStyle/>
-                    <a:p>
-                      <a:pPr algn="ctr"/>
-                      <a:r>
-                        <a:rPr sz="1200" b="1">
-                          <a:solidFill>
-                            <a:srgbClr val="FFFFFF"/>
-                          </a:solidFill>
-                          <a:latin typeface="Microsoft JhengHei"/>
-                        </a:rPr>
-                        <a:t>今天的基準 · 母體</a:t>
-                      </a:r>
-                    </a:p>
-                  </a:txBody>
-                  <a:tcPr marL="45720" marR="45720" marT="18288" marB="18288" anchor="ctr">
-                    <a:solidFill>
-                      <a:srgbClr val="1F4E79"/>
-                    </a:solidFill>
-                  </a:tcPr>
-                </a:tc>
-              </a:tr>
-              <a:tr h="292608">
-                <a:tc>
-                  <a:txBody>
-                    <a:bodyPr/>
-                    <a:lstStyle/>
-                    <a:p>
-                      <a:pPr algn="l"/>
-                      <a:r>
-                        <a:rPr sz="1200" b="1">
-                          <a:solidFill>
-                            <a:srgbClr val="C00000"/>
-                          </a:solidFill>
-                          <a:latin typeface="Microsoft JhengHei"/>
-                        </a:rPr>
-                        <a:t>業務① 爭議回覆時效｜主價值指標</a:t>
-                      </a:r>
-                    </a:p>
-                  </a:txBody>
-                  <a:tcPr marL="45720" marR="45720" marT="18288" marB="18288" anchor="ctr">
-                    <a:solidFill>
-                      <a:srgbClr val="FBEFEF"/>
-                    </a:solidFill>
-                  </a:tcPr>
-                </a:tc>
-                <a:tc>
-                  <a:txBody>
-                    <a:bodyPr/>
-                    <a:lstStyle/>
-                    <a:p>
-                      <a:pPr algn="ctr"/>
-                      <a:r>
-                        <a:rPr sz="1200" b="0">
-                          <a:solidFill>
-                            <a:srgbClr val="C00000"/>
-                          </a:solidFill>
-                          <a:latin typeface="Microsoft JhengHei"/>
-                        </a:rPr>
-                        <a:t>全鏈路 2–5 天｜估計非量測</a:t>
-                      </a:r>
-                    </a:p>
-                  </a:txBody>
-                  <a:tcPr marL="45720" marR="45720" marT="18288" marB="18288" anchor="ctr">
-                    <a:solidFill>
-                      <a:srgbClr val="FBEFEF"/>
-                    </a:solidFill>
-                  </a:tcPr>
-                </a:tc>
-                <a:tc>
-                  <a:txBody>
-                    <a:bodyPr/>
-                    <a:lstStyle/>
-                    <a:p>
-                      <a:pPr algn="ctr"/>
-                      <a:r>
-                        <a:rPr sz="1200" b="0">
-                          <a:solidFill>
-                            <a:srgbClr val="C00000"/>
-                          </a:solidFill>
-                          <a:latin typeface="Microsoft JhengHei"/>
-                        </a:rPr>
-                        <a:t>2 天內｜提案目標 未簽協議</a:t>
-                      </a:r>
-                    </a:p>
-                  </a:txBody>
-                  <a:tcPr marL="45720" marR="45720" marT="18288" marB="18288" anchor="ctr">
-                    <a:solidFill>
-                      <a:srgbClr val="FBEFEF"/>
-                    </a:solidFill>
-                  </a:tcPr>
-                </a:tc>
-              </a:tr>
-              <a:tr h="292608">
-                <a:tc>
-                  <a:txBody>
-                    <a:bodyPr/>
-                    <a:lstStyle/>
-                    <a:p>
-                      <a:pPr algn="l"/>
-                      <a:r>
-                        <a:rPr sz="1200" b="0">
-                          <a:solidFill>
-                            <a:srgbClr val="16212E"/>
-                          </a:solidFill>
-                          <a:latin typeface="Microsoft JhengHei"/>
-                        </a:rPr>
-                        <a:t>業務② 人工驗證客戶涵蓋率</a:t>
-                      </a:r>
-                    </a:p>
-                  </a:txBody>
-                  <a:tcPr marL="45720" marR="45720" marT="18288" marB="18288" anchor="ctr">
-                    <a:solidFill>
-                      <a:srgbClr val="FFFFFF"/>
-                    </a:solidFill>
-                  </a:tcPr>
-                </a:tc>
-                <a:tc>
-                  <a:txBody>
-                    <a:bodyPr/>
-                    <a:lstStyle/>
-                    <a:p>
-                      <a:pPr algn="ctr"/>
-                      <a:r>
-                        <a:rPr sz="1200" b="0">
-                          <a:solidFill>
-                            <a:srgbClr val="6B7885"/>
-                          </a:solidFill>
-                          <a:latin typeface="Microsoft JhengHei"/>
-                        </a:rPr>
-                        <a:t>配給制｜無紀錄 · W6 建立</a:t>
-                      </a:r>
-                    </a:p>
-                  </a:txBody>
-                  <a:tcPr marL="45720" marR="45720" marT="18288" marB="18288" anchor="ctr">
-                    <a:solidFill>
-                      <a:srgbClr val="FFFFFF"/>
-                    </a:solidFill>
-                  </a:tcPr>
-                </a:tc>
-                <a:tc>
-                  <a:txBody>
-                    <a:bodyPr/>
-                    <a:lstStyle/>
-                    <a:p>
-                      <a:pPr algn="ctr"/>
-                      <a:r>
-                        <a:rPr sz="1200" b="0">
-                          <a:solidFill>
-                            <a:srgbClr val="6B7885"/>
-                          </a:solidFill>
-                          <a:latin typeface="Microsoft JhengHei"/>
-                        </a:rPr>
-                        <a:t>期內 100% → 移交後約 15%</a:t>
-                      </a:r>
-                    </a:p>
-                  </a:txBody>
-                  <a:tcPr marL="45720" marR="45720" marT="18288" marB="18288" anchor="ctr">
-                    <a:solidFill>
-                      <a:srgbClr val="FFFFFF"/>
-                    </a:solidFill>
-                  </a:tcPr>
-                </a:tc>
-              </a:tr>
-              <a:tr h="292608">
-                <a:tc>
-                  <a:txBody>
-                    <a:bodyPr/>
-                    <a:lstStyle/>
-                    <a:p>
-                      <a:pPr algn="l"/>
-                      <a:r>
-                        <a:rPr sz="1200" b="0">
-                          <a:solidFill>
-                            <a:srgbClr val="16212E"/>
-                          </a:solidFill>
-                          <a:latin typeface="Microsoft JhengHei"/>
-                        </a:rPr>
-                        <a:t>業務③ 每日事件量上限</a:t>
-                      </a:r>
-                    </a:p>
-                  </a:txBody>
-                  <a:tcPr marL="45720" marR="45720" marT="18288" marB="18288" anchor="ctr">
-                    <a:solidFill>
-                      <a:srgbClr val="FFFFFF"/>
-                    </a:solidFill>
-                  </a:tcPr>
-                </a:tc>
-                <a:tc>
-                  <a:txBody>
-                    <a:bodyPr/>
-                    <a:lstStyle/>
-                    <a:p>
-                      <a:pPr algn="ctr"/>
-                      <a:r>
-                        <a:rPr sz="1200" b="0">
-                          <a:solidFill>
-                            <a:srgbClr val="6B7885"/>
-                          </a:solidFill>
-                          <a:latin typeface="Microsoft JhengHei"/>
-                        </a:rPr>
-                        <a:t>單一大型車隊約 3,000 筆/天</a:t>
-                      </a:r>
-                    </a:p>
-                  </a:txBody>
-                  <a:tcPr marL="45720" marR="45720" marT="18288" marB="18288" anchor="ctr">
-                    <a:solidFill>
-                      <a:srgbClr val="FFFFFF"/>
-                    </a:solidFill>
-                  </a:tcPr>
-                </a:tc>
-                <a:tc>
-                  <a:txBody>
-                    <a:bodyPr/>
-                    <a:lstStyle/>
-                    <a:p>
-                      <a:pPr algn="ctr"/>
-                      <a:r>
-                        <a:rPr sz="1200" b="0">
-                          <a:solidFill>
-                            <a:srgbClr val="6B7885"/>
-                          </a:solidFill>
-                          <a:latin typeface="Microsoft JhengHei"/>
-                        </a:rPr>
-                        <a:t>全客戶 13,000+ 筆/天(提案)</a:t>
-                      </a:r>
-                    </a:p>
-                  </a:txBody>
-                  <a:tcPr marL="45720" marR="45720" marT="18288" marB="18288" anchor="ctr">
-                    <a:solidFill>
-                      <a:srgbClr val="FFFFFF"/>
-                    </a:solidFill>
-                  </a:tcPr>
-                </a:tc>
-              </a:tr>
-              <a:tr h="292608">
-                <a:tc>
-                  <a:txBody>
-                    <a:bodyPr/>
-                    <a:lstStyle/>
-                    <a:p>
-                      <a:pPr algn="l"/>
-                      <a:r>
-                        <a:rPr sz="1200" b="1">
-                          <a:solidFill>
-                            <a:srgbClr val="C00000"/>
-                          </a:solidFill>
-                          <a:latin typeface="Microsoft JhengHei"/>
-                        </a:rPr>
-                        <a:t>業務④ 可避免年度增聘成本</a:t>
-                      </a:r>
-                    </a:p>
-                  </a:txBody>
-                  <a:tcPr marL="45720" marR="45720" marT="18288" marB="18288" anchor="ctr">
-                    <a:solidFill>
-                      <a:srgbClr val="FBEFEF"/>
-                    </a:solidFill>
-                  </a:tcPr>
-                </a:tc>
-                <a:tc>
-                  <a:txBody>
-                    <a:bodyPr/>
-                    <a:lstStyle/>
-                    <a:p>
-                      <a:pPr algn="ctr"/>
-                      <a:r>
-                        <a:rPr sz="1200" b="0">
-                          <a:solidFill>
-                            <a:srgbClr val="C00000"/>
-                          </a:solidFill>
-                          <a:latin typeface="Microsoft JhengHei"/>
-                        </a:rPr>
-                        <a:t>不做本案 17–24 人｜現有5人</a:t>
-                      </a:r>
-                    </a:p>
-                  </a:txBody>
-                  <a:tcPr marL="45720" marR="45720" marT="18288" marB="18288" anchor="ctr">
-                    <a:solidFill>
-                      <a:srgbClr val="FBEFEF"/>
-                    </a:solidFill>
-                  </a:tcPr>
-                </a:tc>
-                <a:tc>
-                  <a:txBody>
-                    <a:bodyPr/>
-                    <a:lstStyle/>
-                    <a:p>
-                      <a:pPr algn="ctr"/>
-                      <a:r>
-                        <a:rPr sz="1200" b="0">
-                          <a:solidFill>
-                            <a:srgbClr val="C00000"/>
-                          </a:solidFill>
-                          <a:latin typeface="Microsoft JhengHei"/>
-                        </a:rPr>
-                        <a:t>省5–13人≈A$23–67 萬</a:t>
-                      </a:r>
-                    </a:p>
-                  </a:txBody>
-                  <a:tcPr marL="45720" marR="45720" marT="18288" marB="18288" anchor="ctr">
-                    <a:solidFill>
-                      <a:srgbClr val="FBEFEF"/>
-                    </a:solidFill>
-                  </a:tcPr>
-                </a:tc>
-              </a:tr>
-              <a:tr h="292608">
-                <a:tc>
-                  <a:txBody>
-                    <a:bodyPr/>
-                    <a:lstStyle/>
-                    <a:p>
-                      <a:pPr algn="l"/>
-                      <a:r>
-                        <a:rPr sz="1200" b="0">
-                          <a:solidFill>
-                            <a:srgbClr val="16212E"/>
-                          </a:solidFill>
-                          <a:latin typeface="Microsoft JhengHei"/>
-                        </a:rPr>
-                        <a:t>營運⑤⑥ 兩條工作流每筆工時</a:t>
-                      </a:r>
-                    </a:p>
-                  </a:txBody>
-                  <a:tcPr marL="45720" marR="45720" marT="18288" marB="18288" anchor="ctr">
-                    <a:solidFill>
-                      <a:srgbClr val="FFFFFF"/>
-                    </a:solidFill>
-                  </a:tcPr>
-                </a:tc>
-                <a:tc>
-                  <a:txBody>
-                    <a:bodyPr/>
-                    <a:lstStyle/>
-                    <a:p>
-                      <a:pPr algn="ctr"/>
-                      <a:r>
-                        <a:rPr sz="1200" b="0">
-                          <a:solidFill>
-                            <a:srgbClr val="6B7885"/>
-                          </a:solidFill>
-                          <a:latin typeface="Microsoft JhengHei"/>
-                        </a:rPr>
-                        <a:t>批次20秒估·判讀5.25分單批</a:t>
-                      </a:r>
-                    </a:p>
-                  </a:txBody>
-                  <a:tcPr marL="45720" marR="45720" marT="18288" marB="18288" anchor="ctr">
-                    <a:solidFill>
-                      <a:srgbClr val="FFFFFF"/>
-                    </a:solidFill>
-                  </a:tcPr>
-                </a:tc>
-                <a:tc>
-                  <a:txBody>
-                    <a:bodyPr/>
-                    <a:lstStyle/>
-                    <a:p>
-                      <a:pPr algn="ctr"/>
-                      <a:r>
-                        <a:rPr sz="1200" b="0">
-                          <a:solidFill>
-                            <a:srgbClr val="6B7885"/>
-                          </a:solidFill>
-                          <a:latin typeface="Microsoft JhengHei"/>
-                        </a:rPr>
-                        <a:t>W6 交正式量測｜G1 訂目標</a:t>
-                      </a:r>
-                    </a:p>
-                  </a:txBody>
-                  <a:tcPr marL="45720" marR="45720" marT="18288" marB="18288" anchor="ctr">
-                    <a:solidFill>
-                      <a:srgbClr val="FFFFFF"/>
-                    </a:solidFill>
-                  </a:tcPr>
-                </a:tc>
-              </a:tr>
-              <a:tr h="292608">
-                <a:tc>
-                  <a:txBody>
-                    <a:bodyPr/>
-                    <a:lstStyle/>
-                    <a:p>
-                      <a:pPr algn="l"/>
-                      <a:r>
-                        <a:rPr sz="1200" b="0">
-                          <a:solidFill>
-                            <a:srgbClr val="16212E"/>
-                          </a:solidFill>
-                          <a:latin typeface="Microsoft JhengHei"/>
-                        </a:rPr>
-                        <a:t>營運⑦ ADAS 行車輔助誤報率</a:t>
-                      </a:r>
-                    </a:p>
-                  </a:txBody>
-                  <a:tcPr marL="45720" marR="45720" marT="18288" marB="18288" anchor="ctr">
-                    <a:solidFill>
-                      <a:srgbClr val="FFFFFF"/>
-                    </a:solidFill>
-                  </a:tcPr>
-                </a:tc>
-                <a:tc>
-                  <a:txBody>
-                    <a:bodyPr/>
-                    <a:lstStyle/>
-                    <a:p>
-                      <a:pPr algn="ctr"/>
-                      <a:r>
-                        <a:rPr sz="1200" b="0">
-                          <a:solidFill>
-                            <a:srgbClr val="6B7885"/>
-                          </a:solidFill>
-                          <a:latin typeface="Microsoft JhengHei"/>
-                        </a:rPr>
-                        <a:t>單月樣本 104/1,029≈10.1%</a:t>
-                      </a:r>
-                    </a:p>
-                  </a:txBody>
-                  <a:tcPr marL="45720" marR="45720" marT="18288" marB="18288" anchor="ctr">
-                    <a:solidFill>
-                      <a:srgbClr val="FFFFFF"/>
-                    </a:solidFill>
-                  </a:tcPr>
-                </a:tc>
-                <a:tc>
-                  <a:txBody>
-                    <a:bodyPr/>
-                    <a:lstStyle/>
-                    <a:p>
-                      <a:pPr algn="ctr"/>
-                      <a:r>
-                        <a:rPr sz="1200" b="0">
-                          <a:solidFill>
-                            <a:srgbClr val="6B7885"/>
-                          </a:solidFill>
-                          <a:latin typeface="Microsoft JhengHei"/>
-                        </a:rPr>
-                        <a:t>→7%以下(提案)｜人機軌W12判</a:t>
-                      </a:r>
-                    </a:p>
-                  </a:txBody>
-                  <a:tcPr marL="45720" marR="45720" marT="18288" marB="18288" anchor="ctr">
-                    <a:solidFill>
-                      <a:srgbClr val="FFFFFF"/>
-                    </a:solidFill>
-                  </a:tcPr>
-                </a:tc>
-              </a:tr>
-              <a:tr h="292608">
-                <a:tc>
-                  <a:txBody>
-                    <a:bodyPr/>
-                    <a:lstStyle/>
-                    <a:p>
-                      <a:pPr algn="l"/>
-                      <a:r>
-                        <a:rPr sz="1200" b="0">
-                          <a:solidFill>
-                            <a:srgbClr val="16212E"/>
-                          </a:solidFill>
-                          <a:latin typeface="Microsoft JhengHei"/>
-                        </a:rPr>
-                        <a:t>營運⑧ 客戶回頭標記率(越低越好)</a:t>
-                      </a:r>
-                    </a:p>
-                  </a:txBody>
-                  <a:tcPr marL="45720" marR="45720" marT="18288" marB="18288" anchor="ctr">
-                    <a:solidFill>
-                      <a:srgbClr val="FFFFFF"/>
-                    </a:solidFill>
-                  </a:tcPr>
-                </a:tc>
-                <a:tc>
-                  <a:txBody>
-                    <a:bodyPr/>
-                    <a:lstStyle/>
-                    <a:p>
-                      <a:pPr algn="ctr"/>
-                      <a:r>
-                        <a:rPr sz="1200" b="0">
-                          <a:solidFill>
-                            <a:srgbClr val="6B7885"/>
-                          </a:solidFill>
-                          <a:latin typeface="Microsoft JhengHei"/>
-                        </a:rPr>
-                        <a:t>5–10%｜駕駛無效警示代理</a:t>
-                      </a:r>
-                    </a:p>
-                  </a:txBody>
-                  <a:tcPr marL="45720" marR="45720" marT="18288" marB="18288" anchor="ctr">
-                    <a:solidFill>
-                      <a:srgbClr val="FFFFFF"/>
-                    </a:solidFill>
-                  </a:tcPr>
-                </a:tc>
-                <a:tc>
-                  <a:txBody>
-                    <a:bodyPr/>
-                    <a:lstStyle/>
-                    <a:p>
-                      <a:pPr algn="ctr"/>
-                      <a:r>
-                        <a:rPr sz="1200" b="0">
-                          <a:solidFill>
-                            <a:srgbClr val="6B7885"/>
-                          </a:solidFill>
-                          <a:latin typeface="Microsoft JhengHei"/>
-                        </a:rPr>
-                        <a:t>降至 5% 以下(提案)</a:t>
-                      </a:r>
-                    </a:p>
-                  </a:txBody>
-                  <a:tcPr marL="45720" marR="45720" marT="18288" marB="18288" anchor="ctr">
-                    <a:solidFill>
-                      <a:srgbClr val="FFFFFF"/>
-                    </a:solidFill>
-                  </a:tcPr>
-                </a:tc>
-              </a:tr>
-              <a:tr h="292608">
-                <a:tc>
-                  <a:txBody>
-                    <a:bodyPr/>
-                    <a:lstStyle/>
-                    <a:p>
-                      <a:pPr algn="l"/>
-                      <a:r>
-                        <a:rPr sz="1200" b="0">
-                          <a:solidFill>
-                            <a:srgbClr val="16212E"/>
-                          </a:solidFill>
-                          <a:latin typeface="Microsoft JhengHei"/>
-                        </a:rPr>
-                        <a:t>營運⑨ 尖峰徵調研發人時</a:t>
-                      </a:r>
-                    </a:p>
-                  </a:txBody>
-                  <a:tcPr marL="45720" marR="45720" marT="18288" marB="18288" anchor="ctr">
-                    <a:solidFill>
-                      <a:srgbClr val="FFFFFF"/>
-                    </a:solidFill>
-                  </a:tcPr>
-                </a:tc>
-                <a:tc>
-                  <a:txBody>
-                    <a:bodyPr/>
-                    <a:lstStyle/>
-                    <a:p>
-                      <a:pPr algn="ctr"/>
-                      <a:r>
-                        <a:rPr sz="1200" b="0">
-                          <a:solidFill>
-                            <a:srgbClr val="6B7885"/>
-                          </a:solidFill>
-                          <a:latin typeface="Microsoft JhengHei"/>
-                        </a:rPr>
-                        <a:t>徵調 7 位研發｜非常態編制</a:t>
-                      </a:r>
-                    </a:p>
-                  </a:txBody>
-                  <a:tcPr marL="45720" marR="45720" marT="18288" marB="18288" anchor="ctr">
-                    <a:solidFill>
-                      <a:srgbClr val="FFFFFF"/>
-                    </a:solidFill>
-                  </a:tcPr>
-                </a:tc>
-                <a:tc>
-                  <a:txBody>
-                    <a:bodyPr/>
-                    <a:lstStyle/>
-                    <a:p>
-                      <a:pPr algn="ctr"/>
-                      <a:r>
-                        <a:rPr sz="1200" b="0">
-                          <a:solidFill>
-                            <a:srgbClr val="6B7885"/>
-                          </a:solidFill>
-                          <a:latin typeface="Microsoft JhengHei"/>
-                        </a:rPr>
-                        <a:t>期內建量測基準｜G2 訂目標</a:t>
-                      </a:r>
-                    </a:p>
-                  </a:txBody>
-                  <a:tcPr marL="45720" marR="45720" marT="18288" marB="18288" anchor="ctr">
-                    <a:solidFill>
-                      <a:srgbClr val="FFFFFF"/>
-                    </a:solidFill>
-                  </a:tcPr>
-                </a:tc>
-              </a:tr>
-            </a:tbl>
-          </a:graphicData>
-        </a:graphic>
-      </p:graphicFrame>
-      <p:graphicFrame>
-        <p:nvGraphicFramePr>
-          <p:cNvPr id="9" name="Table 8"/>
-          <p:cNvGraphicFramePr>
-            <a:graphicFrameLocks noGrp="1"/>
-          </p:cNvGraphicFramePr>
-          <p:nvPr/>
-        </p:nvGraphicFramePr>
-        <p:xfrm>
-          <a:off x="658368" y="5010912"/>
-          <a:ext cx="9658805" cy="1499616"/>
-        </p:xfrm>
-        <a:graphic>
-          <a:graphicData uri="http://schemas.openxmlformats.org/drawingml/2006/table">
-            <a:tbl>
-              <a:tblPr firstRow="1">
-                <a:tableStyleId>{5C22544A-7EE6-4342-B048-85BDC9FD1C3A}</a:tableStyleId>
-              </a:tblPr>
-              <a:tblGrid>
-                <a:gridCol w="2897642"/>
-                <a:gridCol w="2253721"/>
-                <a:gridCol w="2253721"/>
-                <a:gridCol w="2253721"/>
-              </a:tblGrid>
-              <a:tr h="329184">
-                <a:tc>
-                  <a:txBody>
-                    <a:bodyPr/>
-                    <a:lstStyle/>
-                    <a:p>
-                      <a:pPr algn="l"/>
-                      <a:r>
-                        <a:rPr sz="1200" b="1">
-                          <a:solidFill>
-                            <a:srgbClr val="FFFFFF"/>
-                          </a:solidFill>
-                          <a:latin typeface="Microsoft JhengHei"/>
-                        </a:rPr>
-                        <a:t/>
-                      </a:r>
-                    </a:p>
-                  </a:txBody>
-                  <a:tcPr marL="45720" marR="45720" marT="18288" marB="18288" anchor="ctr">
-                    <a:solidFill>
-                      <a:srgbClr val="1F4E79"/>
-                    </a:solidFill>
-                  </a:tcPr>
-                </a:tc>
-                <a:tc>
-                  <a:txBody>
-                    <a:bodyPr/>
-                    <a:lstStyle/>
-                    <a:p>
-                      <a:pPr algn="ctr"/>
-                      <a:r>
-                        <a:rPr sz="1200" b="1">
-                          <a:solidFill>
-                            <a:srgbClr val="FFFFFF"/>
-                          </a:solidFill>
-                          <a:latin typeface="Microsoft JhengHei"/>
-                        </a:rPr>
-                        <a:t>護欄層｜否決型 · 任一未達標不移交</a:t>
-                      </a:r>
-                    </a:p>
-                  </a:txBody>
-                  <a:tcPr marL="45720" marR="45720" marT="18288" marB="18288" anchor="ctr">
-                    <a:solidFill>
-                      <a:srgbClr val="1F4E79"/>
-                    </a:solidFill>
-                  </a:tcPr>
-                </a:tc>
-                <a:tc>
-                  <a:txBody>
-                    <a:bodyPr/>
-                    <a:lstStyle/>
-                    <a:p>
-                      <a:pPr algn="ctr"/>
-                      <a:r>
-                        <a:rPr sz="1200" b="1">
-                          <a:solidFill>
-                            <a:srgbClr val="FFFFFF"/>
-                          </a:solidFill>
-                          <a:latin typeface="Microsoft JhengHei"/>
-                        </a:rPr>
-                        <a:t>今天</a:t>
-                      </a:r>
-                    </a:p>
-                  </a:txBody>
-                  <a:tcPr marL="45720" marR="45720" marT="18288" marB="18288" anchor="ctr">
-                    <a:solidFill>
-                      <a:srgbClr val="1F4E79"/>
-                    </a:solidFill>
-                  </a:tcPr>
-                </a:tc>
-                <a:tc>
-                  <a:txBody>
-                    <a:bodyPr/>
-                    <a:lstStyle/>
-                    <a:p>
-                      <a:pPr algn="ctr"/>
-                      <a:r>
-                        <a:rPr sz="1200" b="1">
-                          <a:solidFill>
-                            <a:srgbClr val="FFFFFF"/>
-                          </a:solidFill>
-                          <a:latin typeface="Microsoft JhengHei"/>
-                        </a:rPr>
-                        <a:t>交什麼 · 第幾週</a:t>
-                      </a:r>
-                    </a:p>
-                  </a:txBody>
-                  <a:tcPr marL="45720" marR="45720" marT="18288" marB="18288" anchor="ctr">
-                    <a:solidFill>
-                      <a:srgbClr val="1F4E79"/>
-                    </a:solidFill>
-                  </a:tcPr>
-                </a:tc>
-              </a:tr>
-              <a:tr h="292608">
-                <a:tc>
-                  <a:txBody>
-                    <a:bodyPr/>
-                    <a:lstStyle/>
-                    <a:p>
-                      <a:pPr algn="l"/>
-                      <a:r>
-                        <a:rPr sz="1200" b="0">
-                          <a:solidFill>
-                            <a:srgbClr val="16212E"/>
-                          </a:solidFill>
-                          <a:latin typeface="Microsoft JhengHei"/>
-                        </a:rPr>
-                        <a:t>⑩ 漏放率</a:t>
-                      </a:r>
-                    </a:p>
-                  </a:txBody>
-                  <a:tcPr marL="45720" marR="45720" marT="18288" marB="18288" anchor="ctr">
-                    <a:solidFill>
-                      <a:srgbClr val="FFFFFF"/>
-                    </a:solidFill>
-                  </a:tcPr>
-                </a:tc>
-                <a:tc>
-                  <a:txBody>
-                    <a:bodyPr/>
-                    <a:lstStyle/>
-                    <a:p>
-                      <a:pPr algn="ctr"/>
-                      <a:r>
-                        <a:rPr sz="1200" b="0">
-                          <a:solidFill>
-                            <a:srgbClr val="6B7885"/>
-                          </a:solidFill>
-                          <a:latin typeface="Microsoft JhengHei"/>
-                        </a:rPr>
-                        <a:t>不存在｜39 筆·下限</a:t>
-                      </a:r>
-                    </a:p>
-                  </a:txBody>
-                  <a:tcPr marL="45720" marR="45720" marT="18288" marB="18288" anchor="ctr">
-                    <a:solidFill>
-                      <a:srgbClr val="FFFFFF"/>
-                    </a:solidFill>
-                  </a:tcPr>
-                </a:tc>
-                <a:tc>
-                  <a:txBody>
-                    <a:bodyPr/>
-                    <a:lstStyle/>
-                    <a:p>
-                      <a:pPr algn="ctr"/>
-                      <a:r>
-                        <a:rPr sz="1200" b="0">
-                          <a:solidFill>
-                            <a:srgbClr val="6B7885"/>
-                          </a:solidFill>
-                          <a:latin typeface="Microsoft JhengHei"/>
-                        </a:rPr>
-                        <a:t>W6 點估計｜95% CI</a:t>
-                      </a:r>
-                    </a:p>
-                  </a:txBody>
-                  <a:tcPr marL="45720" marR="45720" marT="18288" marB="18288" anchor="ctr">
-                    <a:solidFill>
-                      <a:srgbClr val="FFFFFF"/>
-                    </a:solidFill>
-                  </a:tcPr>
-                </a:tc>
-                <a:tc>
-                  <a:txBody>
-                    <a:bodyPr/>
-                    <a:lstStyle/>
-                    <a:p>
-                      <a:pPr algn="ctr"/>
-                      <a:r>
-                        <a:rPr sz="1200" b="0">
-                          <a:solidFill>
-                            <a:srgbClr val="6B7885"/>
-                          </a:solidFill>
-                          <a:latin typeface="Microsoft JhengHei"/>
-                        </a:rPr>
-                        <a:t>否決 G1｜技術負責人</a:t>
-                      </a:r>
-                    </a:p>
-                  </a:txBody>
-                  <a:tcPr marL="45720" marR="45720" marT="18288" marB="18288" anchor="ctr">
-                    <a:solidFill>
-                      <a:srgbClr val="FFFFFF"/>
-                    </a:solidFill>
-                  </a:tcPr>
-                </a:tc>
-              </a:tr>
-              <a:tr h="292608">
-                <a:tc>
-                  <a:txBody>
-                    <a:bodyPr/>
-                    <a:lstStyle/>
-                    <a:p>
-                      <a:pPr algn="l"/>
-                      <a:r>
-                        <a:rPr sz="1200" b="0">
-                          <a:solidFill>
-                            <a:srgbClr val="16212E"/>
-                          </a:solidFill>
-                          <a:latin typeface="Microsoft JhengHei"/>
-                        </a:rPr>
-                        <a:t>⑪ 複核者一致性</a:t>
-                      </a:r>
-                    </a:p>
-                  </a:txBody>
-                  <a:tcPr marL="45720" marR="45720" marT="18288" marB="18288" anchor="ctr">
-                    <a:solidFill>
-                      <a:srgbClr val="FFFFFF"/>
-                    </a:solidFill>
-                  </a:tcPr>
-                </a:tc>
-                <a:tc>
-                  <a:txBody>
-                    <a:bodyPr/>
-                    <a:lstStyle/>
-                    <a:p>
-                      <a:pPr algn="ctr"/>
-                      <a:r>
-                        <a:rPr sz="1200" b="0">
-                          <a:solidFill>
-                            <a:srgbClr val="6B7885"/>
-                          </a:solidFill>
-                          <a:latin typeface="Microsoft JhengHei"/>
-                        </a:rPr>
-                        <a:t>現況未量測</a:t>
-                      </a:r>
-                    </a:p>
-                  </a:txBody>
-                  <a:tcPr marL="45720" marR="45720" marT="18288" marB="18288" anchor="ctr">
-                    <a:solidFill>
-                      <a:srgbClr val="FFFFFF"/>
-                    </a:solidFill>
-                  </a:tcPr>
-                </a:tc>
-                <a:tc>
-                  <a:txBody>
-                    <a:bodyPr/>
-                    <a:lstStyle/>
-                    <a:p>
-                      <a:pPr algn="ctr"/>
-                      <a:r>
-                        <a:rPr sz="1200" b="0">
-                          <a:solidFill>
-                            <a:srgbClr val="6B7885"/>
-                          </a:solidFill>
-                          <a:latin typeface="Microsoft JhengHei"/>
-                        </a:rPr>
-                        <a:t>W10 前基線｜目標 G2</a:t>
-                      </a:r>
-                    </a:p>
-                  </a:txBody>
-                  <a:tcPr marL="45720" marR="45720" marT="18288" marB="18288" anchor="ctr">
-                    <a:solidFill>
-                      <a:srgbClr val="FFFFFF"/>
-                    </a:solidFill>
-                  </a:tcPr>
-                </a:tc>
-                <a:tc>
-                  <a:txBody>
-                    <a:bodyPr/>
-                    <a:lstStyle/>
-                    <a:p>
-                      <a:pPr algn="ctr"/>
-                      <a:r>
-                        <a:rPr sz="1200" b="0">
-                          <a:solidFill>
-                            <a:srgbClr val="6B7885"/>
-                          </a:solidFill>
-                          <a:latin typeface="Microsoft JhengHei"/>
-                        </a:rPr>
-                        <a:t>否決G2·複核營運主管</a:t>
-                      </a:r>
-                    </a:p>
-                  </a:txBody>
-                  <a:tcPr marL="45720" marR="45720" marT="18288" marB="18288" anchor="ctr">
-                    <a:solidFill>
-                      <a:srgbClr val="FFFFFF"/>
-                    </a:solidFill>
-                  </a:tcPr>
-                </a:tc>
-              </a:tr>
-              <a:tr h="292608">
-                <a:tc>
-                  <a:txBody>
-                    <a:bodyPr/>
-                    <a:lstStyle/>
-                    <a:p>
-                      <a:pPr algn="l"/>
-                      <a:r>
-                        <a:rPr sz="1200" b="0">
-                          <a:solidFill>
-                            <a:srgbClr val="16212E"/>
-                          </a:solidFill>
-                          <a:latin typeface="Microsoft JhengHei"/>
-                        </a:rPr>
-                        <a:t>⑫ 訓練資料可追溯率</a:t>
-                      </a:r>
-                    </a:p>
-                  </a:txBody>
-                  <a:tcPr marL="45720" marR="45720" marT="18288" marB="18288" anchor="ctr">
-                    <a:solidFill>
-                      <a:srgbClr val="FFFFFF"/>
-                    </a:solidFill>
-                  </a:tcPr>
-                </a:tc>
-                <a:tc>
-                  <a:txBody>
-                    <a:bodyPr/>
-                    <a:lstStyle/>
-                    <a:p>
-                      <a:pPr algn="ctr"/>
-                      <a:r>
-                        <a:rPr sz="1200" b="0">
-                          <a:solidFill>
-                            <a:srgbClr val="6B7885"/>
-                          </a:solidFill>
-                          <a:latin typeface="Microsoft JhengHei"/>
-                        </a:rPr>
-                        <a:t>0%</a:t>
-                      </a:r>
-                    </a:p>
-                  </a:txBody>
-                  <a:tcPr marL="45720" marR="45720" marT="18288" marB="18288" anchor="ctr">
-                    <a:solidFill>
-                      <a:srgbClr val="FFFFFF"/>
-                    </a:solidFill>
-                  </a:tcPr>
-                </a:tc>
-                <a:tc>
-                  <a:txBody>
-                    <a:bodyPr/>
-                    <a:lstStyle/>
-                    <a:p>
-                      <a:pPr algn="ctr"/>
-                      <a:r>
-                        <a:rPr sz="1200" b="0">
-                          <a:solidFill>
-                            <a:srgbClr val="6B7885"/>
-                          </a:solidFill>
-                          <a:latin typeface="Microsoft JhengHei"/>
-                        </a:rPr>
-                        <a:t>100%,無中間值</a:t>
-                      </a:r>
-                    </a:p>
-                  </a:txBody>
-                  <a:tcPr marL="45720" marR="45720" marT="18288" marB="18288" anchor="ctr">
-                    <a:solidFill>
-                      <a:srgbClr val="FFFFFF"/>
-                    </a:solidFill>
-                  </a:tcPr>
-                </a:tc>
-                <a:tc>
-                  <a:txBody>
-                    <a:bodyPr/>
-                    <a:lstStyle/>
-                    <a:p>
-                      <a:pPr algn="ctr"/>
-                      <a:r>
-                        <a:rPr sz="1200" b="0">
-                          <a:solidFill>
-                            <a:srgbClr val="6B7885"/>
-                          </a:solidFill>
-                          <a:latin typeface="Microsoft JhengHei"/>
-                        </a:rPr>
-                        <a:t>未達 100% 不移交</a:t>
-                      </a:r>
-                    </a:p>
-                  </a:txBody>
-                  <a:tcPr marL="45720" marR="45720" marT="18288" marB="18288" anchor="ctr">
-                    <a:solidFill>
-                      <a:srgbClr val="FFFFFF"/>
-                    </a:solidFill>
-                  </a:tcPr>
-                </a:tc>
-              </a:tr>
-              <a:tr h="292608">
-                <a:tc>
-                  <a:txBody>
-                    <a:bodyPr/>
-                    <a:lstStyle/>
-                    <a:p>
-                      <a:pPr algn="l"/>
-                      <a:r>
-                        <a:rPr sz="1200" b="1">
-                          <a:solidFill>
-                            <a:srgbClr val="C00000"/>
-                          </a:solidFill>
-                          <a:latin typeface="Microsoft JhengHei"/>
-                        </a:rPr>
-                        <a:t>⑬ 漏濾率(本輪新增)</a:t>
-                      </a:r>
-                    </a:p>
-                  </a:txBody>
-                  <a:tcPr marL="45720" marR="45720" marT="18288" marB="18288" anchor="ctr">
-                    <a:solidFill>
-                      <a:srgbClr val="FBEFEF"/>
-                    </a:solidFill>
-                  </a:tcPr>
-                </a:tc>
-                <a:tc>
-                  <a:txBody>
-                    <a:bodyPr/>
-                    <a:lstStyle/>
-                    <a:p>
-                      <a:pPr algn="ctr"/>
-                      <a:r>
-                        <a:rPr sz="1200" b="0">
-                          <a:solidFill>
-                            <a:srgbClr val="C00000"/>
-                          </a:solidFill>
-                          <a:latin typeface="Microsoft JhengHei"/>
-                        </a:rPr>
-                        <a:t>不存在｜機制尚未建立</a:t>
-                      </a:r>
-                    </a:p>
-                  </a:txBody>
-                  <a:tcPr marL="45720" marR="45720" marT="18288" marB="18288" anchor="ctr">
-                    <a:solidFill>
-                      <a:srgbClr val="FBEFEF"/>
-                    </a:solidFill>
-                  </a:tcPr>
-                </a:tc>
-                <a:tc>
-                  <a:txBody>
-                    <a:bodyPr/>
-                    <a:lstStyle/>
-                    <a:p>
-                      <a:pPr algn="ctr"/>
-                      <a:r>
-                        <a:rPr sz="1200" b="0">
-                          <a:solidFill>
-                            <a:srgbClr val="C00000"/>
-                          </a:solidFill>
-                          <a:latin typeface="Microsoft JhengHei"/>
-                        </a:rPr>
-                        <a:t>W12 差值 95% CI</a:t>
-                      </a:r>
-                    </a:p>
-                  </a:txBody>
-                  <a:tcPr marL="45720" marR="45720" marT="18288" marB="18288" anchor="ctr">
-                    <a:solidFill>
-                      <a:srgbClr val="FBEFEF"/>
-                    </a:solidFill>
-                  </a:tcPr>
-                </a:tc>
-                <a:tc>
-                  <a:txBody>
-                    <a:bodyPr/>
-                    <a:lstStyle/>
-                    <a:p>
-                      <a:pPr algn="ctr"/>
-                      <a:r>
-                        <a:rPr sz="1200" b="0">
-                          <a:solidFill>
-                            <a:srgbClr val="C00000"/>
-                          </a:solidFill>
-                          <a:latin typeface="Microsoft JhengHei"/>
-                        </a:rPr>
-                        <a:t>否決對外｜技術負責人</a:t>
-                      </a:r>
-                    </a:p>
-                  </a:txBody>
-                  <a:tcPr marL="45720" marR="45720" marT="18288" marB="18288" anchor="ctr">
-                    <a:solidFill>
-                      <a:srgbClr val="FBEFEF"/>
-                    </a:solidFill>
-                  </a:tcPr>
-                </a:tc>
-              </a:tr>
-            </a:tbl>
-          </a:graphicData>
-        </a:graphic>
-      </p:graphicFrame>
-    </p:spTree>
-  </p:cSld>
-  <p:clrMapOvr>
-    <a:masterClrMapping/>
-  </p:clrMapOvr>
-</p:sld>
-</file>
-
-<file path=ppt/slides/slide11.xml><?xml version="1.0" encoding="utf-8"?>
 <p:sld xmlns:a="http://schemas.openxmlformats.org/drawingml/2006/main" xmlns:p="http://schemas.openxmlformats.org/presentationml/2006/main" xmlns:r="http://schemas.openxmlformats.org/officeDocument/2006/relationships">
   <p:cSld>
     <p:spTree>
@@ -8811,7 +7200,7 @@
 </p:sld>
 </file>
 
-<file path=ppt/slides/slide12.xml><?xml version="1.0" encoding="utf-8"?>
+<file path=ppt/slides/slide11.xml><?xml version="1.0" encoding="utf-8"?>
 <p:sld xmlns:a="http://schemas.openxmlformats.org/drawingml/2006/main" xmlns:p="http://schemas.openxmlformats.org/presentationml/2006/main" xmlns:r="http://schemas.openxmlformats.org/officeDocument/2006/relationships">
   <p:cSld>
     <p:spTree>
@@ -10094,7 +8483,7 @@
 </p:sld>
 </file>
 
-<file path=ppt/slides/slide13.xml><?xml version="1.0" encoding="utf-8"?>
+<file path=ppt/slides/slide12.xml><?xml version="1.0" encoding="utf-8"?>
 <p:sld xmlns:a="http://schemas.openxmlformats.org/drawingml/2006/main" xmlns:p="http://schemas.openxmlformats.org/presentationml/2006/main" xmlns:r="http://schemas.openxmlformats.org/officeDocument/2006/relationships">
   <p:cSld>
     <p:spTree>
@@ -14469,19 +12858,17 @@
       </p:sp>
       <p:sp>
         <p:nvSpPr>
-          <p:cNvPr id="15" name="Rounded Rectangle 14"/>
+          <p:cNvPr id="15" name="Rectangle 14"/>
           <p:cNvSpPr/>
           <p:nvPr/>
         </p:nvSpPr>
         <p:spPr>
           <a:xfrm>
-            <a:off x="658368" y="5835868"/>
-            <a:ext cx="9658807" cy="674659"/>
-          </a:xfrm>
-          <a:prstGeom prst="roundRect">
-            <a:avLst>
-              <a:gd name="adj" fmla="val 6000"/>
-            </a:avLst>
+            <a:off x="658368" y="5297233"/>
+            <a:ext cx="45720" cy="321468"/>
+          </a:xfrm>
+          <a:prstGeom prst="rect">
+            <a:avLst/>
           </a:prstGeom>
           <a:solidFill>
             <a:srgbClr val="1F4E79"/>
@@ -14521,8 +12908,171 @@
         </p:nvSpPr>
         <p:spPr>
           <a:xfrm>
-            <a:off x="841247" y="5835868"/>
-            <a:ext cx="9293047" cy="674659"/>
+            <a:off x="804672" y="5269801"/>
+            <a:ext cx="2408822" cy="412908"/>
+          </a:xfrm>
+          <a:prstGeom prst="rect">
+            <a:avLst/>
+          </a:prstGeom>
+          <a:noFill/>
+        </p:spPr>
+        <p:txBody>
+          <a:bodyPr wrap="square" lIns="0" rIns="0" tIns="0" bIns="0" anchor="ctr">
+            <a:spAutoFit/>
+          </a:bodyPr>
+          <a:lstStyle/>
+          <a:p>
+            <a:pPr algn="l">
+              <a:lnSpc>
+                <a:spcPct val="125000"/>
+              </a:lnSpc>
+            </a:pPr>
+            <a:r>
+              <a:rPr sz="1400" b="1">
+                <a:solidFill>
+                  <a:srgbClr val="16212E"/>
+                </a:solidFill>
+                <a:latin typeface="Microsoft JhengHei"/>
+              </a:rPr>
+              <a:t>🚫 不在本案範圍</a:t>
+            </a:r>
+          </a:p>
+        </p:txBody>
+      </p:sp>
+      <p:sp>
+        <p:nvSpPr>
+          <p:cNvPr id="17" name="TextBox 16"/>
+          <p:cNvSpPr txBox="1"/>
+          <p:nvPr/>
+        </p:nvSpPr>
+        <p:spPr>
+          <a:xfrm>
+            <a:off x="3268358" y="5269801"/>
+            <a:ext cx="2891028" cy="412908"/>
+          </a:xfrm>
+          <a:prstGeom prst="rect">
+            <a:avLst/>
+          </a:prstGeom>
+          <a:noFill/>
+        </p:spPr>
+        <p:txBody>
+          <a:bodyPr wrap="square" lIns="0" rIns="0" tIns="0" bIns="0" anchor="ctr">
+            <a:spAutoFit/>
+          </a:bodyPr>
+          <a:lstStyle/>
+          <a:p>
+            <a:pPr algn="l">
+              <a:lnSpc>
+                <a:spcPct val="125000"/>
+              </a:lnSpc>
+            </a:pPr>
+            <a:r>
+              <a:rPr sz="1500" b="1">
+                <a:solidFill>
+                  <a:srgbClr val="1F4E79"/>
+                </a:solidFill>
+                <a:latin typeface="Microsoft JhengHei"/>
+              </a:rPr>
+              <a:t>漏報 —— 該報沒報</a:t>
+            </a:r>
+          </a:p>
+        </p:txBody>
+      </p:sp>
+      <p:sp>
+        <p:nvSpPr>
+          <p:cNvPr id="18" name="TextBox 17"/>
+          <p:cNvSpPr txBox="1"/>
+          <p:nvPr/>
+        </p:nvSpPr>
+        <p:spPr>
+          <a:xfrm>
+            <a:off x="6269114" y="5269801"/>
+            <a:ext cx="5154484" cy="412908"/>
+          </a:xfrm>
+          <a:prstGeom prst="rect">
+            <a:avLst/>
+          </a:prstGeom>
+          <a:noFill/>
+        </p:spPr>
+        <p:txBody>
+          <a:bodyPr wrap="square" lIns="0" rIns="0" tIns="0" bIns="0" anchor="ctr">
+            <a:spAutoFit/>
+          </a:bodyPr>
+          <a:lstStyle/>
+          <a:p>
+            <a:pPr algn="l">
+              <a:lnSpc>
+                <a:spcPct val="120000"/>
+              </a:lnSpc>
+            </a:pPr>
+            <a:r>
+              <a:rPr sz="1200" b="0">
+                <a:solidFill>
+                  <a:srgbClr val="6B7885"/>
+                </a:solidFill>
+                <a:latin typeface="Microsoft JhengHei"/>
+              </a:rPr>
+              <a:t>發生在 Edge AI 端,沒有事件紀錄;只有客戶回報才知道,要靠前端重訓</a:t>
+            </a:r>
+          </a:p>
+        </p:txBody>
+      </p:sp>
+      <p:sp>
+        <p:nvSpPr>
+          <p:cNvPr id="19" name="Rounded Rectangle 18"/>
+          <p:cNvSpPr/>
+          <p:nvPr/>
+        </p:nvSpPr>
+        <p:spPr>
+          <a:xfrm>
+            <a:off x="658368" y="5906779"/>
+            <a:ext cx="9658807" cy="603748"/>
+          </a:xfrm>
+          <a:prstGeom prst="roundRect">
+            <a:avLst>
+              <a:gd name="adj" fmla="val 6000"/>
+            </a:avLst>
+          </a:prstGeom>
+          <a:solidFill>
+            <a:srgbClr val="1F4E79"/>
+          </a:solidFill>
+          <a:ln>
+            <a:noFill/>
+          </a:ln>
+          <a:effectLst/>
+        </p:spPr>
+        <p:style>
+          <a:lnRef idx="1">
+            <a:schemeClr val="accent1"/>
+          </a:lnRef>
+          <a:fillRef idx="3">
+            <a:schemeClr val="accent1"/>
+          </a:fillRef>
+          <a:effectRef idx="2">
+            <a:schemeClr val="accent1"/>
+          </a:effectRef>
+          <a:fontRef idx="minor">
+            <a:schemeClr val="lt1"/>
+          </a:fontRef>
+        </p:style>
+        <p:txBody>
+          <a:bodyPr rtlCol="0" anchor="ctr"/>
+          <a:lstStyle/>
+          <a:p>
+            <a:pPr algn="ctr"/>
+          </a:p>
+        </p:txBody>
+      </p:sp>
+      <p:sp>
+        <p:nvSpPr>
+          <p:cNvPr id="20" name="TextBox 19"/>
+          <p:cNvSpPr txBox="1"/>
+          <p:nvPr/>
+        </p:nvSpPr>
+        <p:spPr>
+          <a:xfrm>
+            <a:off x="841247" y="5906779"/>
+            <a:ext cx="9293047" cy="603748"/>
           </a:xfrm>
           <a:prstGeom prst="rect">
             <a:avLst/>
@@ -15832,1218 +14382,6 @@
 </file>
 
 <file path=ppt/slides/slide6.xml><?xml version="1.0" encoding="utf-8"?>
-<p:sld xmlns:a="http://schemas.openxmlformats.org/drawingml/2006/main" xmlns:p="http://schemas.openxmlformats.org/presentationml/2006/main" xmlns:r="http://schemas.openxmlformats.org/officeDocument/2006/relationships">
-  <p:cSld>
-    <p:spTree>
-      <p:nvGrpSpPr>
-        <p:cNvPr id="1" name=""/>
-        <p:cNvGrpSpPr/>
-        <p:nvPr/>
-      </p:nvGrpSpPr>
-      <p:grpSpPr/>
-      <p:sp>
-        <p:nvSpPr>
-          <p:cNvPr id="2" name="TextBox 1"/>
-          <p:cNvSpPr txBox="1"/>
-          <p:nvPr/>
-        </p:nvSpPr>
-        <p:spPr>
-          <a:xfrm>
-            <a:off x="658368" y="384048"/>
-            <a:ext cx="5486400" cy="274320"/>
-          </a:xfrm>
-          <a:prstGeom prst="rect">
-            <a:avLst/>
-          </a:prstGeom>
-          <a:noFill/>
-        </p:spPr>
-        <p:txBody>
-          <a:bodyPr wrap="square" lIns="0" rIns="0" tIns="0" bIns="0" anchor="t">
-            <a:spAutoFit/>
-          </a:bodyPr>
-          <a:lstStyle/>
-          <a:p>
-            <a:pPr algn="l">
-              <a:lnSpc>
-                <a:spcPct val="125000"/>
-              </a:lnSpc>
-            </a:pPr>
-            <a:r>
-              <a:rPr sz="1300" b="1">
-                <a:solidFill>
-                  <a:srgbClr val="E8833A"/>
-                </a:solidFill>
-                <a:latin typeface="Microsoft JhengHei"/>
-              </a:rPr>
-              <a:t>AI 機會</a:t>
-            </a:r>
-          </a:p>
-        </p:txBody>
-      </p:sp>
-      <p:sp>
-        <p:nvSpPr>
-          <p:cNvPr id="3" name="TextBox 2"/>
-          <p:cNvSpPr txBox="1"/>
-          <p:nvPr/>
-        </p:nvSpPr>
-        <p:spPr>
-          <a:xfrm>
-            <a:off x="658368" y="676656"/>
-            <a:ext cx="11030407" cy="566928"/>
-          </a:xfrm>
-          <a:prstGeom prst="rect">
-            <a:avLst/>
-          </a:prstGeom>
-          <a:noFill/>
-        </p:spPr>
-        <p:txBody>
-          <a:bodyPr wrap="square" lIns="0" rIns="0" tIns="0" bIns="0" anchor="t">
-            <a:spAutoFit/>
-          </a:bodyPr>
-          <a:lstStyle/>
-          <a:p>
-            <a:pPr algn="l">
-              <a:lnSpc>
-                <a:spcPct val="125000"/>
-              </a:lnSpc>
-            </a:pPr>
-            <a:r>
-              <a:rPr sz="2700" b="1">
-                <a:solidFill>
-                  <a:srgbClr val="1F4E79"/>
-                </a:solidFill>
-                <a:latin typeface="Microsoft JhengHei"/>
-              </a:rPr>
-              <a:t>量得到的是誤報,量不到的是漏放</a:t>
-            </a:r>
-          </a:p>
-        </p:txBody>
-      </p:sp>
-      <p:sp>
-        <p:nvSpPr>
-          <p:cNvPr id="4" name="TextBox 3"/>
-          <p:cNvSpPr txBox="1"/>
-          <p:nvPr/>
-        </p:nvSpPr>
-        <p:spPr>
-          <a:xfrm>
-            <a:off x="658368" y="1298448"/>
-            <a:ext cx="11030407" cy="365760"/>
-          </a:xfrm>
-          <a:prstGeom prst="rect">
-            <a:avLst/>
-          </a:prstGeom>
-          <a:noFill/>
-        </p:spPr>
-        <p:txBody>
-          <a:bodyPr wrap="square" lIns="0" rIns="0" tIns="0" bIns="0" anchor="t">
-            <a:spAutoFit/>
-          </a:bodyPr>
-          <a:lstStyle/>
-          <a:p>
-            <a:pPr algn="l">
-              <a:lnSpc>
-                <a:spcPct val="125000"/>
-              </a:lnSpc>
-            </a:pPr>
-            <a:r>
-              <a:rPr sz="1500" b="0">
-                <a:solidFill>
-                  <a:srgbClr val="6B7885"/>
-                </a:solidFill>
-                <a:latin typeface="Microsoft JhengHei"/>
-              </a:rPr>
-              <a:t>被判否決的那一流沒有人回看 - 我們有資料,沒有習慣</a:t>
-            </a:r>
-          </a:p>
-        </p:txBody>
-      </p:sp>
-      <p:sp>
-        <p:nvSpPr>
-          <p:cNvPr id="5" name="Rectangle 4"/>
-          <p:cNvSpPr/>
-          <p:nvPr/>
-        </p:nvSpPr>
-        <p:spPr>
-          <a:xfrm>
-            <a:off x="658368" y="1517904"/>
-            <a:ext cx="10874959" cy="32004"/>
-          </a:xfrm>
-          <a:prstGeom prst="rect">
-            <a:avLst/>
-          </a:prstGeom>
-          <a:solidFill>
-            <a:srgbClr val="1F4E79"/>
-          </a:solidFill>
-          <a:ln>
-            <a:noFill/>
-          </a:ln>
-          <a:effectLst/>
-        </p:spPr>
-        <p:style>
-          <a:lnRef idx="1">
-            <a:schemeClr val="accent1"/>
-          </a:lnRef>
-          <a:fillRef idx="3">
-            <a:schemeClr val="accent1"/>
-          </a:fillRef>
-          <a:effectRef idx="2">
-            <a:schemeClr val="accent1"/>
-          </a:effectRef>
-          <a:fontRef idx="minor">
-            <a:schemeClr val="lt1"/>
-          </a:fontRef>
-        </p:style>
-        <p:txBody>
-          <a:bodyPr rtlCol="0" anchor="ctr"/>
-          <a:lstStyle/>
-          <a:p>
-            <a:pPr algn="ctr"/>
-          </a:p>
-        </p:txBody>
-      </p:sp>
-      <p:sp>
-        <p:nvSpPr>
-          <p:cNvPr id="6" name="Rounded Rectangle 5"/>
-          <p:cNvSpPr/>
-          <p:nvPr/>
-        </p:nvSpPr>
-        <p:spPr>
-          <a:xfrm>
-            <a:off x="658368" y="1755648"/>
-            <a:ext cx="5300319" cy="1527048"/>
-          </a:xfrm>
-          <a:prstGeom prst="roundRect">
-            <a:avLst>
-              <a:gd name="adj" fmla="val 6000"/>
-            </a:avLst>
-          </a:prstGeom>
-          <a:solidFill>
-            <a:srgbClr val="FFFFFF"/>
-          </a:solidFill>
-          <a:ln w="25400">
-            <a:solidFill>
-              <a:srgbClr val="1F4E79"/>
-            </a:solidFill>
-          </a:ln>
-          <a:effectLst/>
-        </p:spPr>
-        <p:style>
-          <a:lnRef idx="1">
-            <a:schemeClr val="accent1"/>
-          </a:lnRef>
-          <a:fillRef idx="3">
-            <a:schemeClr val="accent1"/>
-          </a:fillRef>
-          <a:effectRef idx="2">
-            <a:schemeClr val="accent1"/>
-          </a:effectRef>
-          <a:fontRef idx="minor">
-            <a:schemeClr val="lt1"/>
-          </a:fontRef>
-        </p:style>
-        <p:txBody>
-          <a:bodyPr rtlCol="0" anchor="ctr"/>
-          <a:lstStyle/>
-          <a:p>
-            <a:pPr algn="ctr"/>
-          </a:p>
-        </p:txBody>
-      </p:sp>
-      <p:sp>
-        <p:nvSpPr>
-          <p:cNvPr id="7" name="TextBox 6"/>
-          <p:cNvSpPr txBox="1"/>
-          <p:nvPr/>
-        </p:nvSpPr>
-        <p:spPr>
-          <a:xfrm>
-            <a:off x="804672" y="1901952"/>
-            <a:ext cx="5007711" cy="384048"/>
-          </a:xfrm>
-          <a:prstGeom prst="rect">
-            <a:avLst/>
-          </a:prstGeom>
-          <a:noFill/>
-        </p:spPr>
-        <p:txBody>
-          <a:bodyPr wrap="square" lIns="0" rIns="0" tIns="0" bIns="0" anchor="t">
-            <a:spAutoFit/>
-          </a:bodyPr>
-          <a:lstStyle/>
-          <a:p>
-            <a:pPr algn="ctr">
-              <a:lnSpc>
-                <a:spcPct val="125000"/>
-              </a:lnSpc>
-            </a:pPr>
-            <a:r>
-              <a:rPr sz="1700" b="1">
-                <a:solidFill>
-                  <a:srgbClr val="1F4E79"/>
-                </a:solidFill>
-                <a:latin typeface="Microsoft JhengHei"/>
-              </a:rPr>
-              <a:t>看得見的一半:誤報 - 量得到</a:t>
-            </a:r>
-          </a:p>
-        </p:txBody>
-      </p:sp>
-      <p:sp>
-        <p:nvSpPr>
-          <p:cNvPr id="8" name="TextBox 7"/>
-          <p:cNvSpPr txBox="1"/>
-          <p:nvPr/>
-        </p:nvSpPr>
-        <p:spPr>
-          <a:xfrm>
-            <a:off x="804672" y="2395728"/>
-            <a:ext cx="5007711" cy="704087"/>
-          </a:xfrm>
-          <a:prstGeom prst="rect">
-            <a:avLst/>
-          </a:prstGeom>
-          <a:noFill/>
-        </p:spPr>
-        <p:txBody>
-          <a:bodyPr wrap="square" lIns="0" rIns="0" tIns="0" bIns="0" anchor="t">
-            <a:spAutoFit/>
-          </a:bodyPr>
-          <a:lstStyle/>
-          <a:p>
-            <a:pPr algn="ctr">
-              <a:lnSpc>
-                <a:spcPct val="150000"/>
-              </a:lnSpc>
-            </a:pPr>
-            <a:r>
-              <a:rPr sz="1300" b="0">
-                <a:solidFill>
-                  <a:srgbClr val="16212E"/>
-                </a:solidFill>
-                <a:latin typeface="Microsoft JhengHei"/>
-              </a:rPr>
-              <a:t>母體:某小型車隊單月樣本(4 台車 · 23 天 · 1,647 筆人工複核)</a:t>
-            </a:r>
-          </a:p>
-          <a:p>
-            <a:pPr algn="ctr">
-              <a:lnSpc>
-                <a:spcPct val="150000"/>
-              </a:lnSpc>
-            </a:pPr>
-            <a:r>
-              <a:rPr sz="1300" b="0">
-                <a:solidFill>
-                  <a:srgbClr val="16212E"/>
-                </a:solidFill>
-                <a:latin typeface="Microsoft JhengHei"/>
-              </a:rPr>
-              <a:t>代價:誤報只花我們的人時,可以換算成錢</a:t>
-            </a:r>
-          </a:p>
-        </p:txBody>
-      </p:sp>
-      <p:sp>
-        <p:nvSpPr>
-          <p:cNvPr id="9" name="Rounded Rectangle 8"/>
-          <p:cNvSpPr/>
-          <p:nvPr/>
-        </p:nvSpPr>
-        <p:spPr>
-          <a:xfrm>
-            <a:off x="6233007" y="1755648"/>
-            <a:ext cx="5300319" cy="1527048"/>
-          </a:xfrm>
-          <a:prstGeom prst="roundRect">
-            <a:avLst>
-              <a:gd name="adj" fmla="val 6000"/>
-            </a:avLst>
-          </a:prstGeom>
-          <a:solidFill>
-            <a:srgbClr val="FFFFFF"/>
-          </a:solidFill>
-          <a:ln w="25400">
-            <a:solidFill>
-              <a:srgbClr val="1F4E79"/>
-            </a:solidFill>
-          </a:ln>
-          <a:effectLst/>
-        </p:spPr>
-        <p:style>
-          <a:lnRef idx="1">
-            <a:schemeClr val="accent1"/>
-          </a:lnRef>
-          <a:fillRef idx="3">
-            <a:schemeClr val="accent1"/>
-          </a:fillRef>
-          <a:effectRef idx="2">
-            <a:schemeClr val="accent1"/>
-          </a:effectRef>
-          <a:fontRef idx="minor">
-            <a:schemeClr val="lt1"/>
-          </a:fontRef>
-        </p:style>
-        <p:txBody>
-          <a:bodyPr rtlCol="0" anchor="ctr"/>
-          <a:lstStyle/>
-          <a:p>
-            <a:pPr algn="ctr"/>
-          </a:p>
-        </p:txBody>
-      </p:sp>
-      <p:sp>
-        <p:nvSpPr>
-          <p:cNvPr id="10" name="TextBox 9"/>
-          <p:cNvSpPr txBox="1"/>
-          <p:nvPr/>
-        </p:nvSpPr>
-        <p:spPr>
-          <a:xfrm>
-            <a:off x="6379311" y="1901952"/>
-            <a:ext cx="5007711" cy="384048"/>
-          </a:xfrm>
-          <a:prstGeom prst="rect">
-            <a:avLst/>
-          </a:prstGeom>
-          <a:noFill/>
-        </p:spPr>
-        <p:txBody>
-          <a:bodyPr wrap="square" lIns="0" rIns="0" tIns="0" bIns="0" anchor="t">
-            <a:spAutoFit/>
-          </a:bodyPr>
-          <a:lstStyle/>
-          <a:p>
-            <a:pPr algn="ctr">
-              <a:lnSpc>
-                <a:spcPct val="125000"/>
-              </a:lnSpc>
-            </a:pPr>
-            <a:r>
-              <a:rPr sz="1700" b="1">
-                <a:solidFill>
-                  <a:srgbClr val="1F4E79"/>
-                </a:solidFill>
-                <a:latin typeface="Microsoft JhengHei"/>
-              </a:rPr>
-              <a:t>看不見的一半:漏放 - 量不到</a:t>
-            </a:r>
-          </a:p>
-        </p:txBody>
-      </p:sp>
-      <p:sp>
-        <p:nvSpPr>
-          <p:cNvPr id="11" name="TextBox 10"/>
-          <p:cNvSpPr txBox="1"/>
-          <p:nvPr/>
-        </p:nvSpPr>
-        <p:spPr>
-          <a:xfrm>
-            <a:off x="6379311" y="2395728"/>
-            <a:ext cx="5007711" cy="704087"/>
-          </a:xfrm>
-          <a:prstGeom prst="rect">
-            <a:avLst/>
-          </a:prstGeom>
-          <a:noFill/>
-        </p:spPr>
-        <p:txBody>
-          <a:bodyPr wrap="square" lIns="0" rIns="0" tIns="0" bIns="0" anchor="t">
-            <a:spAutoFit/>
-          </a:bodyPr>
-          <a:lstStyle/>
-          <a:p>
-            <a:pPr algn="ctr">
-              <a:lnSpc>
-                <a:spcPct val="150000"/>
-              </a:lnSpc>
-            </a:pPr>
-            <a:r>
-              <a:rPr sz="1300" b="0">
-                <a:solidFill>
-                  <a:srgbClr val="16212E"/>
-                </a:solidFill>
-                <a:latin typeface="Microsoft JhengHei"/>
-              </a:rPr>
-              <a:t>唯一的量測:一份 39 筆的人工觸發測試(獨立樣本,非 1,647 筆母體)</a:t>
-            </a:r>
-          </a:p>
-        </p:txBody>
-      </p:sp>
-      <p:sp>
-        <p:nvSpPr>
-          <p:cNvPr id="12" name="TextBox 11"/>
-          <p:cNvSpPr txBox="1"/>
-          <p:nvPr/>
-        </p:nvSpPr>
-        <p:spPr>
-          <a:xfrm>
-            <a:off x="658368" y="3355848"/>
-            <a:ext cx="10874959" cy="347472"/>
-          </a:xfrm>
-          <a:prstGeom prst="rect">
-            <a:avLst/>
-          </a:prstGeom>
-          <a:noFill/>
-        </p:spPr>
-        <p:txBody>
-          <a:bodyPr wrap="square" lIns="0" rIns="0" tIns="0" bIns="0" anchor="t">
-            <a:spAutoFit/>
-          </a:bodyPr>
-          <a:lstStyle/>
-          <a:p>
-            <a:pPr algn="ctr">
-              <a:lnSpc>
-                <a:spcPct val="125000"/>
-              </a:lnSpc>
-            </a:pPr>
-            <a:r>
-              <a:rPr sz="1500" b="1">
-                <a:solidFill>
-                  <a:srgbClr val="16212E"/>
-                </a:solidFill>
-                <a:latin typeface="Microsoft JhengHei"/>
-              </a:rPr>
-              <a:t>我們有資料,沒有習慣。兩種錯的代價不對稱,所以漏放這一側就算樣本再薄,也要先把它量出來 - 本案把漏放列為否決型護欄。</a:t>
-            </a:r>
-          </a:p>
-        </p:txBody>
-      </p:sp>
-      <p:sp>
-        <p:nvSpPr>
-          <p:cNvPr id="13" name="Rectangle 12"/>
-          <p:cNvSpPr/>
-          <p:nvPr/>
-        </p:nvSpPr>
-        <p:spPr>
-          <a:xfrm>
-            <a:off x="658368" y="3877056"/>
-            <a:ext cx="45720" cy="321468"/>
-          </a:xfrm>
-          <a:prstGeom prst="rect">
-            <a:avLst/>
-          </a:prstGeom>
-          <a:solidFill>
-            <a:srgbClr val="C00000"/>
-          </a:solidFill>
-          <a:ln>
-            <a:noFill/>
-          </a:ln>
-          <a:effectLst/>
-        </p:spPr>
-        <p:style>
-          <a:lnRef idx="1">
-            <a:schemeClr val="accent1"/>
-          </a:lnRef>
-          <a:fillRef idx="3">
-            <a:schemeClr val="accent1"/>
-          </a:fillRef>
-          <a:effectRef idx="2">
-            <a:schemeClr val="accent1"/>
-          </a:effectRef>
-          <a:fontRef idx="minor">
-            <a:schemeClr val="lt1"/>
-          </a:fontRef>
-        </p:style>
-        <p:txBody>
-          <a:bodyPr rtlCol="0" anchor="ctr"/>
-          <a:lstStyle/>
-          <a:p>
-            <a:pPr algn="ctr"/>
-          </a:p>
-        </p:txBody>
-      </p:sp>
-      <p:sp>
-        <p:nvSpPr>
-          <p:cNvPr id="14" name="TextBox 13"/>
-          <p:cNvSpPr txBox="1"/>
-          <p:nvPr/>
-        </p:nvSpPr>
-        <p:spPr>
-          <a:xfrm>
-            <a:off x="804672" y="3849624"/>
-            <a:ext cx="2408822" cy="412908"/>
-          </a:xfrm>
-          <a:prstGeom prst="rect">
-            <a:avLst/>
-          </a:prstGeom>
-          <a:noFill/>
-        </p:spPr>
-        <p:txBody>
-          <a:bodyPr wrap="square" lIns="0" rIns="0" tIns="0" bIns="0" anchor="ctr">
-            <a:spAutoFit/>
-          </a:bodyPr>
-          <a:lstStyle/>
-          <a:p>
-            <a:pPr algn="l">
-              <a:lnSpc>
-                <a:spcPct val="125000"/>
-              </a:lnSpc>
-            </a:pPr>
-            <a:r>
-              <a:rPr sz="1400" b="1">
-                <a:solidFill>
-                  <a:srgbClr val="16212E"/>
-                </a:solidFill>
-                <a:latin typeface="Microsoft JhengHei"/>
-              </a:rPr>
-              <a:t>漏偵</a:t>
-            </a:r>
-          </a:p>
-        </p:txBody>
-      </p:sp>
-      <p:sp>
-        <p:nvSpPr>
-          <p:cNvPr id="15" name="TextBox 14"/>
-          <p:cNvSpPr txBox="1"/>
-          <p:nvPr/>
-        </p:nvSpPr>
-        <p:spPr>
-          <a:xfrm>
-            <a:off x="3268358" y="3849624"/>
-            <a:ext cx="1919478" cy="412908"/>
-          </a:xfrm>
-          <a:prstGeom prst="rect">
-            <a:avLst/>
-          </a:prstGeom>
-          <a:noFill/>
-        </p:spPr>
-        <p:txBody>
-          <a:bodyPr wrap="square" lIns="0" rIns="0" tIns="0" bIns="0" anchor="ctr">
-            <a:spAutoFit/>
-          </a:bodyPr>
-          <a:lstStyle/>
-          <a:p>
-            <a:pPr algn="l">
-              <a:lnSpc>
-                <a:spcPct val="125000"/>
-              </a:lnSpc>
-            </a:pPr>
-            <a:r>
-              <a:rPr sz="1500" b="1">
-                <a:solidFill>
-                  <a:srgbClr val="C00000"/>
-                </a:solidFill>
-                <a:latin typeface="Microsoft JhengHei"/>
-              </a:rPr>
-              <a:t>12 / 39</a:t>
-            </a:r>
-          </a:p>
-        </p:txBody>
-      </p:sp>
-      <p:sp>
-        <p:nvSpPr>
-          <p:cNvPr id="16" name="TextBox 15"/>
-          <p:cNvSpPr txBox="1"/>
-          <p:nvPr/>
-        </p:nvSpPr>
-        <p:spPr>
-          <a:xfrm>
-            <a:off x="5297564" y="3849624"/>
-            <a:ext cx="6126034" cy="412908"/>
-          </a:xfrm>
-          <a:prstGeom prst="rect">
-            <a:avLst/>
-          </a:prstGeom>
-          <a:noFill/>
-        </p:spPr>
-        <p:txBody>
-          <a:bodyPr wrap="square" lIns="0" rIns="0" tIns="0" bIns="0" anchor="ctr">
-            <a:spAutoFit/>
-          </a:bodyPr>
-          <a:lstStyle/>
-          <a:p>
-            <a:pPr algn="l">
-              <a:lnSpc>
-                <a:spcPct val="120000"/>
-              </a:lnSpc>
-            </a:pPr>
-            <a:r>
-              <a:rPr sz="1200" b="0">
-                <a:solidFill>
-                  <a:srgbClr val="6B7885"/>
-                </a:solidFill>
-                <a:latin typeface="Microsoft JhengHei"/>
-              </a:rPr>
-              <a:t>報告上我們自己註明:12 是下限</a:t>
-            </a:r>
-          </a:p>
-        </p:txBody>
-      </p:sp>
-      <p:sp>
-        <p:nvSpPr>
-          <p:cNvPr id="17" name="Rectangle 16"/>
-          <p:cNvSpPr/>
-          <p:nvPr/>
-        </p:nvSpPr>
-        <p:spPr>
-          <a:xfrm>
-            <a:off x="658368" y="4381404"/>
-            <a:ext cx="45720" cy="525780"/>
-          </a:xfrm>
-          <a:prstGeom prst="rect">
-            <a:avLst/>
-          </a:prstGeom>
-          <a:solidFill>
-            <a:srgbClr val="C00000"/>
-          </a:solidFill>
-          <a:ln>
-            <a:noFill/>
-          </a:ln>
-          <a:effectLst/>
-        </p:spPr>
-        <p:style>
-          <a:lnRef idx="1">
-            <a:schemeClr val="accent1"/>
-          </a:lnRef>
-          <a:fillRef idx="3">
-            <a:schemeClr val="accent1"/>
-          </a:fillRef>
-          <a:effectRef idx="2">
-            <a:schemeClr val="accent1"/>
-          </a:effectRef>
-          <a:fontRef idx="minor">
-            <a:schemeClr val="lt1"/>
-          </a:fontRef>
-        </p:style>
-        <p:txBody>
-          <a:bodyPr rtlCol="0" anchor="ctr"/>
-          <a:lstStyle/>
-          <a:p>
-            <a:pPr algn="ctr"/>
-          </a:p>
-        </p:txBody>
-      </p:sp>
-      <p:sp>
-        <p:nvSpPr>
-          <p:cNvPr id="18" name="TextBox 17"/>
-          <p:cNvSpPr txBox="1"/>
-          <p:nvPr/>
-        </p:nvSpPr>
-        <p:spPr>
-          <a:xfrm>
-            <a:off x="804672" y="4353972"/>
-            <a:ext cx="2408822" cy="617219"/>
-          </a:xfrm>
-          <a:prstGeom prst="rect">
-            <a:avLst/>
-          </a:prstGeom>
-          <a:noFill/>
-        </p:spPr>
-        <p:txBody>
-          <a:bodyPr wrap="square" lIns="0" rIns="0" tIns="0" bIns="0" anchor="ctr">
-            <a:spAutoFit/>
-          </a:bodyPr>
-          <a:lstStyle/>
-          <a:p>
-            <a:pPr algn="l">
-              <a:lnSpc>
-                <a:spcPct val="125000"/>
-              </a:lnSpc>
-            </a:pPr>
-            <a:r>
-              <a:rPr sz="1400" b="1">
-                <a:solidFill>
-                  <a:srgbClr val="16212E"/>
-                </a:solidFill>
-                <a:latin typeface="Microsoft JhengHei"/>
-              </a:rPr>
-              <a:t>其中:低光或雨天的超速標誌漏偵</a:t>
-            </a:r>
-          </a:p>
-        </p:txBody>
-      </p:sp>
-      <p:sp>
-        <p:nvSpPr>
-          <p:cNvPr id="19" name="TextBox 18"/>
-          <p:cNvSpPr txBox="1"/>
-          <p:nvPr/>
-        </p:nvSpPr>
-        <p:spPr>
-          <a:xfrm>
-            <a:off x="3268358" y="4353972"/>
-            <a:ext cx="1919478" cy="617219"/>
-          </a:xfrm>
-          <a:prstGeom prst="rect">
-            <a:avLst/>
-          </a:prstGeom>
-          <a:noFill/>
-        </p:spPr>
-        <p:txBody>
-          <a:bodyPr wrap="square" lIns="0" rIns="0" tIns="0" bIns="0" anchor="ctr">
-            <a:spAutoFit/>
-          </a:bodyPr>
-          <a:lstStyle/>
-          <a:p>
-            <a:pPr algn="l">
-              <a:lnSpc>
-                <a:spcPct val="125000"/>
-              </a:lnSpc>
-            </a:pPr>
-            <a:r>
-              <a:rPr sz="1500" b="1">
-                <a:solidFill>
-                  <a:srgbClr val="C00000"/>
-                </a:solidFill>
-                <a:latin typeface="Microsoft JhengHei"/>
-              </a:rPr>
-              <a:t>6 / 12 = 50%</a:t>
-            </a:r>
-          </a:p>
-        </p:txBody>
-      </p:sp>
-      <p:sp>
-        <p:nvSpPr>
-          <p:cNvPr id="20" name="TextBox 19"/>
-          <p:cNvSpPr txBox="1"/>
-          <p:nvPr/>
-        </p:nvSpPr>
-        <p:spPr>
-          <a:xfrm>
-            <a:off x="5297564" y="4353972"/>
-            <a:ext cx="6126034" cy="617219"/>
-          </a:xfrm>
-          <a:prstGeom prst="rect">
-            <a:avLst/>
-          </a:prstGeom>
-          <a:noFill/>
-        </p:spPr>
-        <p:txBody>
-          <a:bodyPr wrap="square" lIns="0" rIns="0" tIns="0" bIns="0" anchor="ctr">
-            <a:spAutoFit/>
-          </a:bodyPr>
-          <a:lstStyle/>
-          <a:p>
-            <a:pPr algn="l">
-              <a:lnSpc>
-                <a:spcPct val="120000"/>
-              </a:lnSpc>
-            </a:pPr>
-            <a:r>
-              <a:rPr sz="1200" b="0">
-                <a:solidFill>
-                  <a:srgbClr val="6B7885"/>
-                </a:solidFill>
-                <a:latin typeface="Microsoft JhengHei"/>
-              </a:rPr>
-              <a:t>與誤報第一大根因同源:交通標誌辨識 - 誤報與漏放接在同一條線索上</a:t>
-            </a:r>
-          </a:p>
-        </p:txBody>
-      </p:sp>
-      <p:graphicFrame>
-        <p:nvGraphicFramePr>
-          <p:cNvPr id="21" name="Table 20"/>
-          <p:cNvGraphicFramePr>
-            <a:graphicFrameLocks noGrp="1"/>
-          </p:cNvGraphicFramePr>
-          <p:nvPr/>
-        </p:nvGraphicFramePr>
-        <p:xfrm>
-          <a:off x="658368" y="5303520"/>
-          <a:ext cx="9658805" cy="1207008"/>
-        </p:xfrm>
-        <a:graphic>
-          <a:graphicData uri="http://schemas.openxmlformats.org/drawingml/2006/table">
-            <a:tbl>
-              <a:tblPr firstRow="1">
-                <a:tableStyleId>{5C22544A-7EE6-4342-B048-85BDC9FD1C3A}</a:tableStyleId>
-              </a:tblPr>
-              <a:tblGrid>
-                <a:gridCol w="2897642"/>
-                <a:gridCol w="2253721"/>
-                <a:gridCol w="2253721"/>
-                <a:gridCol w="2253721"/>
-              </a:tblGrid>
-              <a:tr h="329184">
-                <a:tc>
-                  <a:txBody>
-                    <a:bodyPr/>
-                    <a:lstStyle/>
-                    <a:p>
-                      <a:pPr algn="l"/>
-                      <a:r>
-                        <a:rPr sz="1200" b="1">
-                          <a:solidFill>
-                            <a:srgbClr val="FFFFFF"/>
-                          </a:solidFill>
-                          <a:latin typeface="Microsoft JhengHei"/>
-                        </a:rPr>
-                        <a:t/>
-                      </a:r>
-                    </a:p>
-                  </a:txBody>
-                  <a:tcPr marL="45720" marR="45720" marT="18288" marB="18288" anchor="ctr">
-                    <a:solidFill>
-                      <a:srgbClr val="1F4E79"/>
-                    </a:solidFill>
-                  </a:tcPr>
-                </a:tc>
-                <a:tc>
-                  <a:txBody>
-                    <a:bodyPr/>
-                    <a:lstStyle/>
-                    <a:p>
-                      <a:pPr algn="ctr"/>
-                      <a:r>
-                        <a:rPr sz="1200" b="1">
-                          <a:solidFill>
-                            <a:srgbClr val="FFFFFF"/>
-                          </a:solidFill>
-                          <a:latin typeface="Microsoft JhengHei"/>
-                        </a:rPr>
-                        <a:t>這一關難在哪(內部觀察)</a:t>
-                      </a:r>
-                    </a:p>
-                  </a:txBody>
-                  <a:tcPr marL="45720" marR="45720" marT="18288" marB="18288" anchor="ctr">
-                    <a:solidFill>
-                      <a:srgbClr val="1F4E79"/>
-                    </a:solidFill>
-                  </a:tcPr>
-                </a:tc>
-                <a:tc>
-                  <a:txBody>
-                    <a:bodyPr/>
-                    <a:lstStyle/>
-                    <a:p>
-                      <a:pPr algn="ctr"/>
-                      <a:r>
-                        <a:rPr sz="1200" b="1">
-                          <a:solidFill>
-                            <a:srgbClr val="FFFFFF"/>
-                          </a:solidFill>
-                          <a:latin typeface="Microsoft JhengHei"/>
-                        </a:rPr>
-                        <a:t>對應的資料品質屬性</a:t>
-                      </a:r>
-                    </a:p>
-                  </a:txBody>
-                  <a:tcPr marL="45720" marR="45720" marT="18288" marB="18288" anchor="ctr">
-                    <a:solidFill>
-                      <a:srgbClr val="1F4E79"/>
-                    </a:solidFill>
-                  </a:tcPr>
-                </a:tc>
-                <a:tc>
-                  <a:txBody>
-                    <a:bodyPr/>
-                    <a:lstStyle/>
-                    <a:p>
-                      <a:pPr algn="ctr"/>
-                      <a:r>
-                        <a:rPr sz="1200" b="1">
-                          <a:solidFill>
-                            <a:srgbClr val="FFFFFF"/>
-                          </a:solidFill>
-                          <a:latin typeface="Microsoft JhengHei"/>
-                        </a:rPr>
-                        <a:t>誰在什麼時候把它變成數字</a:t>
-                      </a:r>
-                    </a:p>
-                  </a:txBody>
-                  <a:tcPr marL="45720" marR="45720" marT="18288" marB="18288" anchor="ctr">
-                    <a:solidFill>
-                      <a:srgbClr val="1F4E79"/>
-                    </a:solidFill>
-                  </a:tcPr>
-                </a:tc>
-              </a:tr>
-              <a:tr h="292608">
-                <a:tc>
-                  <a:txBody>
-                    <a:bodyPr/>
-                    <a:lstStyle/>
-                    <a:p>
-                      <a:pPr algn="l"/>
-                      <a:r>
-                        <a:rPr sz="1200" b="0">
-                          <a:solidFill>
-                            <a:srgbClr val="16212E"/>
-                          </a:solidFill>
-                          <a:latin typeface="Microsoft JhengHei"/>
-                        </a:rPr>
-                        <a:t>收集</a:t>
-                      </a:r>
-                    </a:p>
-                  </a:txBody>
-                  <a:tcPr marL="45720" marR="45720" marT="18288" marB="18288" anchor="ctr">
-                    <a:solidFill>
-                      <a:srgbClr val="FFFFFF"/>
-                    </a:solidFill>
-                  </a:tcPr>
-                </a:tc>
-                <a:tc>
-                  <a:txBody>
-                    <a:bodyPr/>
-                    <a:lstStyle/>
-                    <a:p>
-                      <a:pPr algn="ctr"/>
-                      <a:r>
-                        <a:rPr sz="1200" b="0">
-                          <a:solidFill>
-                            <a:srgbClr val="6B7885"/>
-                          </a:solidFill>
-                          <a:latin typeface="Microsoft JhengHei"/>
-                        </a:rPr>
-                        <a:t>離線遮蔽無資料·上傳頻率不一</a:t>
-                      </a:r>
-                    </a:p>
-                  </a:txBody>
-                  <a:tcPr marL="45720" marR="45720" marT="18288" marB="18288" anchor="ctr">
-                    <a:solidFill>
-                      <a:srgbClr val="FFFFFF"/>
-                    </a:solidFill>
-                  </a:tcPr>
-                </a:tc>
-                <a:tc>
-                  <a:txBody>
-                    <a:bodyPr/>
-                    <a:lstStyle/>
-                    <a:p>
-                      <a:pPr algn="ctr"/>
-                      <a:r>
-                        <a:rPr sz="1200" b="0">
-                          <a:solidFill>
-                            <a:srgbClr val="6B7885"/>
-                          </a:solidFill>
-                          <a:latin typeface="Microsoft JhengHei"/>
-                        </a:rPr>
-                        <a:t>完整性 · 及時性</a:t>
-                      </a:r>
-                    </a:p>
-                  </a:txBody>
-                  <a:tcPr marL="45720" marR="45720" marT="18288" marB="18288" anchor="ctr">
-                    <a:solidFill>
-                      <a:srgbClr val="FFFFFF"/>
-                    </a:solidFill>
-                  </a:tcPr>
-                </a:tc>
-                <a:tc>
-                  <a:txBody>
-                    <a:bodyPr/>
-                    <a:lstStyle/>
-                    <a:p>
-                      <a:pPr algn="ctr"/>
-                      <a:r>
-                        <a:rPr sz="1200" b="0">
-                          <a:solidFill>
-                            <a:srgbClr val="6B7885"/>
-                          </a:solidFill>
-                          <a:latin typeface="Microsoft JhengHei"/>
-                        </a:rPr>
-                        <a:t>W1-6 評估底座:分層抽樣</a:t>
-                      </a:r>
-                    </a:p>
-                  </a:txBody>
-                  <a:tcPr marL="45720" marR="45720" marT="18288" marB="18288" anchor="ctr">
-                    <a:solidFill>
-                      <a:srgbClr val="FFFFFF"/>
-                    </a:solidFill>
-                  </a:tcPr>
-                </a:tc>
-              </a:tr>
-              <a:tr h="292608">
-                <a:tc>
-                  <a:txBody>
-                    <a:bodyPr/>
-                    <a:lstStyle/>
-                    <a:p>
-                      <a:pPr algn="l"/>
-                      <a:r>
-                        <a:rPr sz="1200" b="0">
-                          <a:solidFill>
-                            <a:srgbClr val="16212E"/>
-                          </a:solidFill>
-                          <a:latin typeface="Microsoft JhengHei"/>
-                        </a:rPr>
-                        <a:t>處理</a:t>
-                      </a:r>
-                    </a:p>
-                  </a:txBody>
-                  <a:tcPr marL="45720" marR="45720" marT="18288" marB="18288" anchor="ctr">
-                    <a:solidFill>
-                      <a:srgbClr val="FFFFFF"/>
-                    </a:solidFill>
-                  </a:tcPr>
-                </a:tc>
-                <a:tc>
-                  <a:txBody>
-                    <a:bodyPr/>
-                    <a:lstStyle/>
-                    <a:p>
-                      <a:pPr algn="ctr"/>
-                      <a:r>
-                        <a:rPr sz="1200" b="0">
-                          <a:solidFill>
-                            <a:srgbClr val="6B7885"/>
-                          </a:solidFill>
-                          <a:latin typeface="Microsoft JhengHei"/>
-                        </a:rPr>
-                        <a:t>感測器故障·標註錯·重複記錄</a:t>
-                      </a:r>
-                    </a:p>
-                  </a:txBody>
-                  <a:tcPr marL="45720" marR="45720" marT="18288" marB="18288" anchor="ctr">
-                    <a:solidFill>
-                      <a:srgbClr val="FFFFFF"/>
-                    </a:solidFill>
-                  </a:tcPr>
-                </a:tc>
-                <a:tc>
-                  <a:txBody>
-                    <a:bodyPr/>
-                    <a:lstStyle/>
-                    <a:p>
-                      <a:pPr algn="ctr"/>
-                      <a:r>
-                        <a:rPr sz="1200" b="0">
-                          <a:solidFill>
-                            <a:srgbClr val="6B7885"/>
-                          </a:solidFill>
-                          <a:latin typeface="Microsoft JhengHei"/>
-                        </a:rPr>
-                        <a:t>準確性 · 一致性</a:t>
-                      </a:r>
-                    </a:p>
-                  </a:txBody>
-                  <a:tcPr marL="45720" marR="45720" marT="18288" marB="18288" anchor="ctr">
-                    <a:solidFill>
-                      <a:srgbClr val="FFFFFF"/>
-                    </a:solidFill>
-                  </a:tcPr>
-                </a:tc>
-                <a:tc>
-                  <a:txBody>
-                    <a:bodyPr/>
-                    <a:lstStyle/>
-                    <a:p>
-                      <a:pPr algn="ctr"/>
-                      <a:r>
-                        <a:rPr sz="1200" b="0">
-                          <a:solidFill>
-                            <a:srgbClr val="6B7885"/>
-                          </a:solidFill>
-                          <a:latin typeface="Microsoft JhengHei"/>
-                        </a:rPr>
-                        <a:t>W3-10 標註品質:判準手冊</a:t>
-                      </a:r>
-                    </a:p>
-                  </a:txBody>
-                  <a:tcPr marL="45720" marR="45720" marT="18288" marB="18288" anchor="ctr">
-                    <a:solidFill>
-                      <a:srgbClr val="FFFFFF"/>
-                    </a:solidFill>
-                  </a:tcPr>
-                </a:tc>
-              </a:tr>
-              <a:tr h="292608">
-                <a:tc>
-                  <a:txBody>
-                    <a:bodyPr/>
-                    <a:lstStyle/>
-                    <a:p>
-                      <a:pPr algn="l"/>
-                      <a:r>
-                        <a:rPr sz="1200" b="1">
-                          <a:solidFill>
-                            <a:srgbClr val="C00000"/>
-                          </a:solidFill>
-                          <a:latin typeface="Microsoft JhengHei"/>
-                        </a:rPr>
-                        <a:t>處理後的理解程度</a:t>
-                      </a:r>
-                    </a:p>
-                  </a:txBody>
-                  <a:tcPr marL="45720" marR="45720" marT="18288" marB="18288" anchor="ctr">
-                    <a:solidFill>
-                      <a:srgbClr val="FBEFEF"/>
-                    </a:solidFill>
-                  </a:tcPr>
-                </a:tc>
-                <a:tc>
-                  <a:txBody>
-                    <a:bodyPr/>
-                    <a:lstStyle/>
-                    <a:p>
-                      <a:pPr algn="ctr"/>
-                      <a:r>
-                        <a:rPr sz="1200" b="0">
-                          <a:solidFill>
-                            <a:srgbClr val="C00000"/>
-                          </a:solidFill>
-                          <a:latin typeface="Microsoft JhengHei"/>
-                        </a:rPr>
-                        <a:t>複核者標籤不一致·從未量測</a:t>
-                      </a:r>
-                    </a:p>
-                  </a:txBody>
-                  <a:tcPr marL="45720" marR="45720" marT="18288" marB="18288" anchor="ctr">
-                    <a:solidFill>
-                      <a:srgbClr val="FBEFEF"/>
-                    </a:solidFill>
-                  </a:tcPr>
-                </a:tc>
-                <a:tc>
-                  <a:txBody>
-                    <a:bodyPr/>
-                    <a:lstStyle/>
-                    <a:p>
-                      <a:pPr algn="ctr"/>
-                      <a:r>
-                        <a:rPr sz="1200" b="0">
-                          <a:solidFill>
-                            <a:srgbClr val="C00000"/>
-                          </a:solidFill>
-                          <a:latin typeface="Microsoft JhengHei"/>
-                        </a:rPr>
-                        <a:t>可解釋性</a:t>
-                      </a:r>
-                    </a:p>
-                  </a:txBody>
-                  <a:tcPr marL="45720" marR="45720" marT="18288" marB="18288" anchor="ctr">
-                    <a:solidFill>
-                      <a:srgbClr val="FBEFEF"/>
-                    </a:solidFill>
-                  </a:tcPr>
-                </a:tc>
-                <a:tc>
-                  <a:txBody>
-                    <a:bodyPr/>
-                    <a:lstStyle/>
-                    <a:p>
-                      <a:pPr algn="ctr"/>
-                      <a:r>
-                        <a:rPr sz="1200" b="0">
-                          <a:solidFill>
-                            <a:srgbClr val="C00000"/>
-                          </a:solidFill>
-                          <a:latin typeface="Microsoft JhengHei"/>
-                        </a:rPr>
-                        <a:t>W10 前建立複核者一致性基線</a:t>
-                      </a:r>
-                    </a:p>
-                  </a:txBody>
-                  <a:tcPr marL="45720" marR="45720" marT="18288" marB="18288" anchor="ctr">
-                    <a:solidFill>
-                      <a:srgbClr val="FBEFEF"/>
-                    </a:solidFill>
-                  </a:tcPr>
-                </a:tc>
-              </a:tr>
-            </a:tbl>
-          </a:graphicData>
-        </a:graphic>
-      </p:graphicFrame>
-    </p:spTree>
-  </p:cSld>
-  <p:clrMapOvr>
-    <a:masterClrMapping/>
-  </p:clrMapOvr>
-</p:sld>
-</file>
-
-<file path=ppt/slides/slide7.xml><?xml version="1.0" encoding="utf-8"?>
 <p:sld xmlns:a="http://schemas.openxmlformats.org/drawingml/2006/main" xmlns:p="http://schemas.openxmlformats.org/presentationml/2006/main" xmlns:r="http://schemas.openxmlformats.org/officeDocument/2006/relationships">
   <p:cSld>
     <p:spTree>
@@ -18767,7 +16105,7 @@
 </p:sld>
 </file>
 
-<file path=ppt/slides/slide8.xml><?xml version="1.0" encoding="utf-8"?>
+<file path=ppt/slides/slide7.xml><?xml version="1.0" encoding="utf-8"?>
 <p:sld xmlns:a="http://schemas.openxmlformats.org/drawingml/2006/main" xmlns:p="http://schemas.openxmlformats.org/presentationml/2006/main" xmlns:r="http://schemas.openxmlformats.org/officeDocument/2006/relationships">
   <p:cSld>
     <p:spTree>
@@ -20093,7 +17431,7 @@
 </p:sld>
 </file>
 
-<file path=ppt/slides/slide9.xml><?xml version="1.0" encoding="utf-8"?>
+<file path=ppt/slides/slide8.xml><?xml version="1.0" encoding="utf-8"?>
 <p:sld xmlns:a="http://schemas.openxmlformats.org/drawingml/2006/main" xmlns:p="http://schemas.openxmlformats.org/presentationml/2006/main" xmlns:r="http://schemas.openxmlformats.org/officeDocument/2006/relationships">
   <p:cSld>
     <p:spTree>
@@ -20656,7 +17994,7 @@
                           </a:solidFill>
                           <a:latin typeface="Microsoft JhengHei"/>
                         </a:rPr>
-                        <a:t>5 可靠性與安全性｜漏放率目前不存在 · 僅 39 筆人工觸發測試〔自註為下限〕</a:t>
+                        <a:t>5 可靠性與安全性｜漏報發生在 Edge AI 端,無紀錄;本案碰不到,只能靠前端重訓</a:t>
                       </a:r>
                     </a:p>
                   </a:txBody>
@@ -21015,6 +18353,1340 @@
           </a:p>
         </p:txBody>
       </p:sp>
+    </p:spTree>
+  </p:cSld>
+  <p:clrMapOvr>
+    <a:masterClrMapping/>
+  </p:clrMapOvr>
+</p:sld>
+</file>
+
+<file path=ppt/slides/slide9.xml><?xml version="1.0" encoding="utf-8"?>
+<p:sld xmlns:a="http://schemas.openxmlformats.org/drawingml/2006/main" xmlns:p="http://schemas.openxmlformats.org/presentationml/2006/main" xmlns:r="http://schemas.openxmlformats.org/officeDocument/2006/relationships">
+  <p:cSld>
+    <p:spTree>
+      <p:nvGrpSpPr>
+        <p:cNvPr id="1" name=""/>
+        <p:cNvGrpSpPr/>
+        <p:nvPr/>
+      </p:nvGrpSpPr>
+      <p:grpSpPr/>
+      <p:sp>
+        <p:nvSpPr>
+          <p:cNvPr id="2" name="TextBox 1"/>
+          <p:cNvSpPr txBox="1"/>
+          <p:nvPr/>
+        </p:nvSpPr>
+        <p:spPr>
+          <a:xfrm>
+            <a:off x="658368" y="384048"/>
+            <a:ext cx="5486400" cy="274320"/>
+          </a:xfrm>
+          <a:prstGeom prst="rect">
+            <a:avLst/>
+          </a:prstGeom>
+          <a:noFill/>
+        </p:spPr>
+        <p:txBody>
+          <a:bodyPr wrap="square" lIns="0" rIns="0" tIns="0" bIns="0" anchor="t">
+            <a:spAutoFit/>
+          </a:bodyPr>
+          <a:lstStyle/>
+          <a:p>
+            <a:pPr algn="l">
+              <a:lnSpc>
+                <a:spcPct val="125000"/>
+              </a:lnSpc>
+            </a:pPr>
+            <a:r>
+              <a:rPr sz="1300" b="1">
+                <a:solidFill>
+                  <a:srgbClr val="E8833A"/>
+                </a:solidFill>
+                <a:latin typeface="Microsoft JhengHei"/>
+              </a:rPr>
+              <a:t>效益與衡量</a:t>
+            </a:r>
+          </a:p>
+        </p:txBody>
+      </p:sp>
+      <p:sp>
+        <p:nvSpPr>
+          <p:cNvPr id="3" name="TextBox 2"/>
+          <p:cNvSpPr txBox="1"/>
+          <p:nvPr/>
+        </p:nvSpPr>
+        <p:spPr>
+          <a:xfrm>
+            <a:off x="658368" y="676656"/>
+            <a:ext cx="11030407" cy="566928"/>
+          </a:xfrm>
+          <a:prstGeom prst="rect">
+            <a:avLst/>
+          </a:prstGeom>
+          <a:noFill/>
+        </p:spPr>
+        <p:txBody>
+          <a:bodyPr wrap="square" lIns="0" rIns="0" tIns="0" bIns="0" anchor="t">
+            <a:spAutoFit/>
+          </a:bodyPr>
+          <a:lstStyle/>
+          <a:p>
+            <a:pPr algn="l">
+              <a:lnSpc>
+                <a:spcPct val="125000"/>
+              </a:lnSpc>
+            </a:pPr>
+            <a:r>
+              <a:rPr sz="2700" b="1">
+                <a:solidFill>
+                  <a:srgbClr val="1F4E79"/>
+                </a:solidFill>
+                <a:latin typeface="Microsoft JhengHei"/>
+              </a:rPr>
+              <a:t>你買到的三層效益,和三條隨時喊停的權力</a:t>
+            </a:r>
+          </a:p>
+        </p:txBody>
+      </p:sp>
+      <p:sp>
+        <p:nvSpPr>
+          <p:cNvPr id="4" name="TextBox 3"/>
+          <p:cNvSpPr txBox="1"/>
+          <p:nvPr/>
+        </p:nvSpPr>
+        <p:spPr>
+          <a:xfrm>
+            <a:off x="658368" y="1298448"/>
+            <a:ext cx="11030407" cy="365760"/>
+          </a:xfrm>
+          <a:prstGeom prst="rect">
+            <a:avLst/>
+          </a:prstGeom>
+          <a:noFill/>
+        </p:spPr>
+        <p:txBody>
+          <a:bodyPr wrap="square" lIns="0" rIns="0" tIns="0" bIns="0" anchor="t">
+            <a:spAutoFit/>
+          </a:bodyPr>
+          <a:lstStyle/>
+          <a:p>
+            <a:pPr algn="l">
+              <a:lnSpc>
+                <a:spcPct val="125000"/>
+              </a:lnSpc>
+            </a:pPr>
+            <a:r>
+              <a:rPr sz="1500" b="0">
+                <a:solidFill>
+                  <a:srgbClr val="6B7885"/>
+                </a:solidFill>
+                <a:latin typeface="Microsoft JhengHei"/>
+              </a:rPr>
+              <a:t>三層 KPI 是效益,三道護欄一票否決;訂不出的目標值寫明由哪道門訂</a:t>
+            </a:r>
+          </a:p>
+        </p:txBody>
+      </p:sp>
+      <p:sp>
+        <p:nvSpPr>
+          <p:cNvPr id="5" name="Rectangle 4"/>
+          <p:cNvSpPr/>
+          <p:nvPr/>
+        </p:nvSpPr>
+        <p:spPr>
+          <a:xfrm>
+            <a:off x="658368" y="1517904"/>
+            <a:ext cx="10874959" cy="32004"/>
+          </a:xfrm>
+          <a:prstGeom prst="rect">
+            <a:avLst/>
+          </a:prstGeom>
+          <a:solidFill>
+            <a:srgbClr val="1F4E79"/>
+          </a:solidFill>
+          <a:ln>
+            <a:noFill/>
+          </a:ln>
+          <a:effectLst/>
+        </p:spPr>
+        <p:style>
+          <a:lnRef idx="1">
+            <a:schemeClr val="accent1"/>
+          </a:lnRef>
+          <a:fillRef idx="3">
+            <a:schemeClr val="accent1"/>
+          </a:fillRef>
+          <a:effectRef idx="2">
+            <a:schemeClr val="accent1"/>
+          </a:effectRef>
+          <a:fontRef idx="minor">
+            <a:schemeClr val="lt1"/>
+          </a:fontRef>
+        </p:style>
+        <p:txBody>
+          <a:bodyPr rtlCol="0" anchor="ctr"/>
+          <a:lstStyle/>
+          <a:p>
+            <a:pPr algn="ctr"/>
+          </a:p>
+        </p:txBody>
+      </p:sp>
+      <p:sp>
+        <p:nvSpPr>
+          <p:cNvPr id="6" name="Rounded Rectangle 5"/>
+          <p:cNvSpPr/>
+          <p:nvPr/>
+        </p:nvSpPr>
+        <p:spPr>
+          <a:xfrm>
+            <a:off x="658368" y="1755648"/>
+            <a:ext cx="10874959" cy="621792"/>
+          </a:xfrm>
+          <a:prstGeom prst="roundRect">
+            <a:avLst>
+              <a:gd name="adj" fmla="val 6000"/>
+            </a:avLst>
+          </a:prstGeom>
+          <a:solidFill>
+            <a:srgbClr val="1F4E79"/>
+          </a:solidFill>
+          <a:ln>
+            <a:noFill/>
+          </a:ln>
+          <a:effectLst/>
+        </p:spPr>
+        <p:style>
+          <a:lnRef idx="1">
+            <a:schemeClr val="accent1"/>
+          </a:lnRef>
+          <a:fillRef idx="3">
+            <a:schemeClr val="accent1"/>
+          </a:fillRef>
+          <a:effectRef idx="2">
+            <a:schemeClr val="accent1"/>
+          </a:effectRef>
+          <a:fontRef idx="minor">
+            <a:schemeClr val="lt1"/>
+          </a:fontRef>
+        </p:style>
+        <p:txBody>
+          <a:bodyPr rtlCol="0" anchor="ctr"/>
+          <a:lstStyle/>
+          <a:p>
+            <a:pPr algn="ctr"/>
+          </a:p>
+        </p:txBody>
+      </p:sp>
+      <p:sp>
+        <p:nvSpPr>
+          <p:cNvPr id="7" name="TextBox 6"/>
+          <p:cNvSpPr txBox="1"/>
+          <p:nvPr/>
+        </p:nvSpPr>
+        <p:spPr>
+          <a:xfrm>
+            <a:off x="841247" y="1755648"/>
+            <a:ext cx="10509199" cy="621792"/>
+          </a:xfrm>
+          <a:prstGeom prst="rect">
+            <a:avLst/>
+          </a:prstGeom>
+          <a:noFill/>
+        </p:spPr>
+        <p:txBody>
+          <a:bodyPr wrap="square" lIns="0" rIns="0" tIns="0" bIns="0" anchor="ctr">
+            <a:spAutoFit/>
+          </a:bodyPr>
+          <a:lstStyle/>
+          <a:p>
+            <a:pPr algn="ctr">
+              <a:lnSpc>
+                <a:spcPct val="125000"/>
+              </a:lnSpc>
+            </a:pPr>
+            <a:r>
+              <a:rPr sz="1700" b="1">
+                <a:solidFill>
+                  <a:srgbClr val="FFFFFF"/>
+                </a:solidFill>
+                <a:latin typeface="Microsoft JhengHei"/>
+              </a:rPr>
+              <a:t>這頁不是外掛的合規章節:護欄任一未達標,上兩層成績一律不採計;否決型是本案決定,非文獻主張</a:t>
+            </a:r>
+          </a:p>
+        </p:txBody>
+      </p:sp>
+      <p:graphicFrame>
+        <p:nvGraphicFramePr>
+          <p:cNvPr id="8" name="Table 7"/>
+          <p:cNvGraphicFramePr>
+            <a:graphicFrameLocks noGrp="1"/>
+          </p:cNvGraphicFramePr>
+          <p:nvPr/>
+        </p:nvGraphicFramePr>
+        <p:xfrm>
+          <a:off x="658368" y="2505456"/>
+          <a:ext cx="10874957" cy="2670048"/>
+        </p:xfrm>
+        <a:graphic>
+          <a:graphicData uri="http://schemas.openxmlformats.org/drawingml/2006/table">
+            <a:tbl>
+              <a:tblPr firstRow="1">
+                <a:tableStyleId>{5C22544A-7EE6-4342-B048-85BDC9FD1C3A}</a:tableStyleId>
+              </a:tblPr>
+              <a:tblGrid>
+                <a:gridCol w="3262487"/>
+                <a:gridCol w="3806235"/>
+                <a:gridCol w="3806235"/>
+              </a:tblGrid>
+              <a:tr h="329184">
+                <a:tc>
+                  <a:txBody>
+                    <a:bodyPr/>
+                    <a:lstStyle/>
+                    <a:p>
+                      <a:pPr algn="l"/>
+                      <a:r>
+                        <a:rPr sz="1200" b="1">
+                          <a:solidFill>
+                            <a:srgbClr val="FFFFFF"/>
+                          </a:solidFill>
+                          <a:latin typeface="Microsoft JhengHei"/>
+                        </a:rPr>
+                        <a:t/>
+                      </a:r>
+                    </a:p>
+                  </a:txBody>
+                  <a:tcPr marL="45720" marR="45720" marT="18288" marB="18288" anchor="ctr">
+                    <a:solidFill>
+                      <a:srgbClr val="1F4E79"/>
+                    </a:solidFill>
+                  </a:tcPr>
+                </a:tc>
+                <a:tc>
+                  <a:txBody>
+                    <a:bodyPr/>
+                    <a:lstStyle/>
+                    <a:p>
+                      <a:pPr algn="ctr"/>
+                      <a:r>
+                        <a:rPr sz="1200" b="1">
+                          <a:solidFill>
+                            <a:srgbClr val="FFFFFF"/>
+                          </a:solidFill>
+                          <a:latin typeface="Microsoft JhengHei"/>
+                        </a:rPr>
+                        <a:t>指標(層別)</a:t>
+                      </a:r>
+                    </a:p>
+                  </a:txBody>
+                  <a:tcPr marL="45720" marR="45720" marT="18288" marB="18288" anchor="ctr">
+                    <a:solidFill>
+                      <a:srgbClr val="1F4E79"/>
+                    </a:solidFill>
+                  </a:tcPr>
+                </a:tc>
+                <a:tc>
+                  <a:txBody>
+                    <a:bodyPr/>
+                    <a:lstStyle/>
+                    <a:p>
+                      <a:pPr algn="ctr"/>
+                      <a:r>
+                        <a:rPr sz="1200" b="1">
+                          <a:solidFill>
+                            <a:srgbClr val="FFFFFF"/>
+                          </a:solidFill>
+                          <a:latin typeface="Microsoft JhengHei"/>
+                        </a:rPr>
+                        <a:t>今天的基準 · 母體</a:t>
+                      </a:r>
+                    </a:p>
+                  </a:txBody>
+                  <a:tcPr marL="45720" marR="45720" marT="18288" marB="18288" anchor="ctr">
+                    <a:solidFill>
+                      <a:srgbClr val="1F4E79"/>
+                    </a:solidFill>
+                  </a:tcPr>
+                </a:tc>
+              </a:tr>
+              <a:tr h="292608">
+                <a:tc>
+                  <a:txBody>
+                    <a:bodyPr/>
+                    <a:lstStyle/>
+                    <a:p>
+                      <a:pPr algn="l"/>
+                      <a:r>
+                        <a:rPr sz="1200" b="1">
+                          <a:solidFill>
+                            <a:srgbClr val="C00000"/>
+                          </a:solidFill>
+                          <a:latin typeface="Microsoft JhengHei"/>
+                        </a:rPr>
+                        <a:t>業務① 爭議回覆時效｜主價值指標</a:t>
+                      </a:r>
+                    </a:p>
+                  </a:txBody>
+                  <a:tcPr marL="45720" marR="45720" marT="18288" marB="18288" anchor="ctr">
+                    <a:solidFill>
+                      <a:srgbClr val="FBEFEF"/>
+                    </a:solidFill>
+                  </a:tcPr>
+                </a:tc>
+                <a:tc>
+                  <a:txBody>
+                    <a:bodyPr/>
+                    <a:lstStyle/>
+                    <a:p>
+                      <a:pPr algn="ctr"/>
+                      <a:r>
+                        <a:rPr sz="1200" b="0">
+                          <a:solidFill>
+                            <a:srgbClr val="C00000"/>
+                          </a:solidFill>
+                          <a:latin typeface="Microsoft JhengHei"/>
+                        </a:rPr>
+                        <a:t>全鏈路 2–5 天｜估計非量測</a:t>
+                      </a:r>
+                    </a:p>
+                  </a:txBody>
+                  <a:tcPr marL="45720" marR="45720" marT="18288" marB="18288" anchor="ctr">
+                    <a:solidFill>
+                      <a:srgbClr val="FBEFEF"/>
+                    </a:solidFill>
+                  </a:tcPr>
+                </a:tc>
+                <a:tc>
+                  <a:txBody>
+                    <a:bodyPr/>
+                    <a:lstStyle/>
+                    <a:p>
+                      <a:pPr algn="ctr"/>
+                      <a:r>
+                        <a:rPr sz="1200" b="0">
+                          <a:solidFill>
+                            <a:srgbClr val="C00000"/>
+                          </a:solidFill>
+                          <a:latin typeface="Microsoft JhengHei"/>
+                        </a:rPr>
+                        <a:t>2 天內｜提案目標 未簽協議</a:t>
+                      </a:r>
+                    </a:p>
+                  </a:txBody>
+                  <a:tcPr marL="45720" marR="45720" marT="18288" marB="18288" anchor="ctr">
+                    <a:solidFill>
+                      <a:srgbClr val="FBEFEF"/>
+                    </a:solidFill>
+                  </a:tcPr>
+                </a:tc>
+              </a:tr>
+              <a:tr h="292608">
+                <a:tc>
+                  <a:txBody>
+                    <a:bodyPr/>
+                    <a:lstStyle/>
+                    <a:p>
+                      <a:pPr algn="l"/>
+                      <a:r>
+                        <a:rPr sz="1200" b="0">
+                          <a:solidFill>
+                            <a:srgbClr val="16212E"/>
+                          </a:solidFill>
+                          <a:latin typeface="Microsoft JhengHei"/>
+                        </a:rPr>
+                        <a:t>業務② 人工驗證客戶涵蓋率</a:t>
+                      </a:r>
+                    </a:p>
+                  </a:txBody>
+                  <a:tcPr marL="45720" marR="45720" marT="18288" marB="18288" anchor="ctr">
+                    <a:solidFill>
+                      <a:srgbClr val="FFFFFF"/>
+                    </a:solidFill>
+                  </a:tcPr>
+                </a:tc>
+                <a:tc>
+                  <a:txBody>
+                    <a:bodyPr/>
+                    <a:lstStyle/>
+                    <a:p>
+                      <a:pPr algn="ctr"/>
+                      <a:r>
+                        <a:rPr sz="1200" b="0">
+                          <a:solidFill>
+                            <a:srgbClr val="6B7885"/>
+                          </a:solidFill>
+                          <a:latin typeface="Microsoft JhengHei"/>
+                        </a:rPr>
+                        <a:t>配給制｜無紀錄 · W6 建立</a:t>
+                      </a:r>
+                    </a:p>
+                  </a:txBody>
+                  <a:tcPr marL="45720" marR="45720" marT="18288" marB="18288" anchor="ctr">
+                    <a:solidFill>
+                      <a:srgbClr val="FFFFFF"/>
+                    </a:solidFill>
+                  </a:tcPr>
+                </a:tc>
+                <a:tc>
+                  <a:txBody>
+                    <a:bodyPr/>
+                    <a:lstStyle/>
+                    <a:p>
+                      <a:pPr algn="ctr"/>
+                      <a:r>
+                        <a:rPr sz="1200" b="0">
+                          <a:solidFill>
+                            <a:srgbClr val="6B7885"/>
+                          </a:solidFill>
+                          <a:latin typeface="Microsoft JhengHei"/>
+                        </a:rPr>
+                        <a:t>期內 100% → 移交後約 15%</a:t>
+                      </a:r>
+                    </a:p>
+                  </a:txBody>
+                  <a:tcPr marL="45720" marR="45720" marT="18288" marB="18288" anchor="ctr">
+                    <a:solidFill>
+                      <a:srgbClr val="FFFFFF"/>
+                    </a:solidFill>
+                  </a:tcPr>
+                </a:tc>
+              </a:tr>
+              <a:tr h="292608">
+                <a:tc>
+                  <a:txBody>
+                    <a:bodyPr/>
+                    <a:lstStyle/>
+                    <a:p>
+                      <a:pPr algn="l"/>
+                      <a:r>
+                        <a:rPr sz="1200" b="0">
+                          <a:solidFill>
+                            <a:srgbClr val="16212E"/>
+                          </a:solidFill>
+                          <a:latin typeface="Microsoft JhengHei"/>
+                        </a:rPr>
+                        <a:t>業務③ 每日事件量上限</a:t>
+                      </a:r>
+                    </a:p>
+                  </a:txBody>
+                  <a:tcPr marL="45720" marR="45720" marT="18288" marB="18288" anchor="ctr">
+                    <a:solidFill>
+                      <a:srgbClr val="FFFFFF"/>
+                    </a:solidFill>
+                  </a:tcPr>
+                </a:tc>
+                <a:tc>
+                  <a:txBody>
+                    <a:bodyPr/>
+                    <a:lstStyle/>
+                    <a:p>
+                      <a:pPr algn="ctr"/>
+                      <a:r>
+                        <a:rPr sz="1200" b="0">
+                          <a:solidFill>
+                            <a:srgbClr val="6B7885"/>
+                          </a:solidFill>
+                          <a:latin typeface="Microsoft JhengHei"/>
+                        </a:rPr>
+                        <a:t>單一大型車隊約 3,000 筆/天</a:t>
+                      </a:r>
+                    </a:p>
+                  </a:txBody>
+                  <a:tcPr marL="45720" marR="45720" marT="18288" marB="18288" anchor="ctr">
+                    <a:solidFill>
+                      <a:srgbClr val="FFFFFF"/>
+                    </a:solidFill>
+                  </a:tcPr>
+                </a:tc>
+                <a:tc>
+                  <a:txBody>
+                    <a:bodyPr/>
+                    <a:lstStyle/>
+                    <a:p>
+                      <a:pPr algn="ctr"/>
+                      <a:r>
+                        <a:rPr sz="1200" b="0">
+                          <a:solidFill>
+                            <a:srgbClr val="6B7885"/>
+                          </a:solidFill>
+                          <a:latin typeface="Microsoft JhengHei"/>
+                        </a:rPr>
+                        <a:t>全客戶 13,000+ 筆/天(提案)</a:t>
+                      </a:r>
+                    </a:p>
+                  </a:txBody>
+                  <a:tcPr marL="45720" marR="45720" marT="18288" marB="18288" anchor="ctr">
+                    <a:solidFill>
+                      <a:srgbClr val="FFFFFF"/>
+                    </a:solidFill>
+                  </a:tcPr>
+                </a:tc>
+              </a:tr>
+              <a:tr h="292608">
+                <a:tc>
+                  <a:txBody>
+                    <a:bodyPr/>
+                    <a:lstStyle/>
+                    <a:p>
+                      <a:pPr algn="l"/>
+                      <a:r>
+                        <a:rPr sz="1200" b="1">
+                          <a:solidFill>
+                            <a:srgbClr val="C00000"/>
+                          </a:solidFill>
+                          <a:latin typeface="Microsoft JhengHei"/>
+                        </a:rPr>
+                        <a:t>業務④ 可避免年度增聘成本</a:t>
+                      </a:r>
+                    </a:p>
+                  </a:txBody>
+                  <a:tcPr marL="45720" marR="45720" marT="18288" marB="18288" anchor="ctr">
+                    <a:solidFill>
+                      <a:srgbClr val="FBEFEF"/>
+                    </a:solidFill>
+                  </a:tcPr>
+                </a:tc>
+                <a:tc>
+                  <a:txBody>
+                    <a:bodyPr/>
+                    <a:lstStyle/>
+                    <a:p>
+                      <a:pPr algn="ctr"/>
+                      <a:r>
+                        <a:rPr sz="1200" b="0">
+                          <a:solidFill>
+                            <a:srgbClr val="C00000"/>
+                          </a:solidFill>
+                          <a:latin typeface="Microsoft JhengHei"/>
+                        </a:rPr>
+                        <a:t>不做本案 17–24 人｜現有5人</a:t>
+                      </a:r>
+                    </a:p>
+                  </a:txBody>
+                  <a:tcPr marL="45720" marR="45720" marT="18288" marB="18288" anchor="ctr">
+                    <a:solidFill>
+                      <a:srgbClr val="FBEFEF"/>
+                    </a:solidFill>
+                  </a:tcPr>
+                </a:tc>
+                <a:tc>
+                  <a:txBody>
+                    <a:bodyPr/>
+                    <a:lstStyle/>
+                    <a:p>
+                      <a:pPr algn="ctr"/>
+                      <a:r>
+                        <a:rPr sz="1200" b="0">
+                          <a:solidFill>
+                            <a:srgbClr val="C00000"/>
+                          </a:solidFill>
+                          <a:latin typeface="Microsoft JhengHei"/>
+                        </a:rPr>
+                        <a:t>省5–13人≈A$23–67 萬</a:t>
+                      </a:r>
+                    </a:p>
+                  </a:txBody>
+                  <a:tcPr marL="45720" marR="45720" marT="18288" marB="18288" anchor="ctr">
+                    <a:solidFill>
+                      <a:srgbClr val="FBEFEF"/>
+                    </a:solidFill>
+                  </a:tcPr>
+                </a:tc>
+              </a:tr>
+              <a:tr h="292608">
+                <a:tc>
+                  <a:txBody>
+                    <a:bodyPr/>
+                    <a:lstStyle/>
+                    <a:p>
+                      <a:pPr algn="l"/>
+                      <a:r>
+                        <a:rPr sz="1200" b="0">
+                          <a:solidFill>
+                            <a:srgbClr val="16212E"/>
+                          </a:solidFill>
+                          <a:latin typeface="Microsoft JhengHei"/>
+                        </a:rPr>
+                        <a:t>營運⑤⑥ 兩條工作流每筆工時</a:t>
+                      </a:r>
+                    </a:p>
+                  </a:txBody>
+                  <a:tcPr marL="45720" marR="45720" marT="18288" marB="18288" anchor="ctr">
+                    <a:solidFill>
+                      <a:srgbClr val="FFFFFF"/>
+                    </a:solidFill>
+                  </a:tcPr>
+                </a:tc>
+                <a:tc>
+                  <a:txBody>
+                    <a:bodyPr/>
+                    <a:lstStyle/>
+                    <a:p>
+                      <a:pPr algn="ctr"/>
+                      <a:r>
+                        <a:rPr sz="1200" b="0">
+                          <a:solidFill>
+                            <a:srgbClr val="6B7885"/>
+                          </a:solidFill>
+                          <a:latin typeface="Microsoft JhengHei"/>
+                        </a:rPr>
+                        <a:t>批次20秒估·判讀5.25分單批</a:t>
+                      </a:r>
+                    </a:p>
+                  </a:txBody>
+                  <a:tcPr marL="45720" marR="45720" marT="18288" marB="18288" anchor="ctr">
+                    <a:solidFill>
+                      <a:srgbClr val="FFFFFF"/>
+                    </a:solidFill>
+                  </a:tcPr>
+                </a:tc>
+                <a:tc>
+                  <a:txBody>
+                    <a:bodyPr/>
+                    <a:lstStyle/>
+                    <a:p>
+                      <a:pPr algn="ctr"/>
+                      <a:r>
+                        <a:rPr sz="1200" b="0">
+                          <a:solidFill>
+                            <a:srgbClr val="6B7885"/>
+                          </a:solidFill>
+                          <a:latin typeface="Microsoft JhengHei"/>
+                        </a:rPr>
+                        <a:t>W6 交正式量測｜G1 訂目標</a:t>
+                      </a:r>
+                    </a:p>
+                  </a:txBody>
+                  <a:tcPr marL="45720" marR="45720" marT="18288" marB="18288" anchor="ctr">
+                    <a:solidFill>
+                      <a:srgbClr val="FFFFFF"/>
+                    </a:solidFill>
+                  </a:tcPr>
+                </a:tc>
+              </a:tr>
+              <a:tr h="292608">
+                <a:tc>
+                  <a:txBody>
+                    <a:bodyPr/>
+                    <a:lstStyle/>
+                    <a:p>
+                      <a:pPr algn="l"/>
+                      <a:r>
+                        <a:rPr sz="1200" b="0">
+                          <a:solidFill>
+                            <a:srgbClr val="16212E"/>
+                          </a:solidFill>
+                          <a:latin typeface="Microsoft JhengHei"/>
+                        </a:rPr>
+                        <a:t>營運⑦ ADAS 行車輔助誤報率</a:t>
+                      </a:r>
+                    </a:p>
+                  </a:txBody>
+                  <a:tcPr marL="45720" marR="45720" marT="18288" marB="18288" anchor="ctr">
+                    <a:solidFill>
+                      <a:srgbClr val="FFFFFF"/>
+                    </a:solidFill>
+                  </a:tcPr>
+                </a:tc>
+                <a:tc>
+                  <a:txBody>
+                    <a:bodyPr/>
+                    <a:lstStyle/>
+                    <a:p>
+                      <a:pPr algn="ctr"/>
+                      <a:r>
+                        <a:rPr sz="1200" b="0">
+                          <a:solidFill>
+                            <a:srgbClr val="6B7885"/>
+                          </a:solidFill>
+                          <a:latin typeface="Microsoft JhengHei"/>
+                        </a:rPr>
+                        <a:t>單月樣本 104/1,029≈10.1%</a:t>
+                      </a:r>
+                    </a:p>
+                  </a:txBody>
+                  <a:tcPr marL="45720" marR="45720" marT="18288" marB="18288" anchor="ctr">
+                    <a:solidFill>
+                      <a:srgbClr val="FFFFFF"/>
+                    </a:solidFill>
+                  </a:tcPr>
+                </a:tc>
+                <a:tc>
+                  <a:txBody>
+                    <a:bodyPr/>
+                    <a:lstStyle/>
+                    <a:p>
+                      <a:pPr algn="ctr"/>
+                      <a:r>
+                        <a:rPr sz="1200" b="0">
+                          <a:solidFill>
+                            <a:srgbClr val="6B7885"/>
+                          </a:solidFill>
+                          <a:latin typeface="Microsoft JhengHei"/>
+                        </a:rPr>
+                        <a:t>→7%以下(提案)｜人機軌W12判</a:t>
+                      </a:r>
+                    </a:p>
+                  </a:txBody>
+                  <a:tcPr marL="45720" marR="45720" marT="18288" marB="18288" anchor="ctr">
+                    <a:solidFill>
+                      <a:srgbClr val="FFFFFF"/>
+                    </a:solidFill>
+                  </a:tcPr>
+                </a:tc>
+              </a:tr>
+              <a:tr h="292608">
+                <a:tc>
+                  <a:txBody>
+                    <a:bodyPr/>
+                    <a:lstStyle/>
+                    <a:p>
+                      <a:pPr algn="l"/>
+                      <a:r>
+                        <a:rPr sz="1200" b="0">
+                          <a:solidFill>
+                            <a:srgbClr val="16212E"/>
+                          </a:solidFill>
+                          <a:latin typeface="Microsoft JhengHei"/>
+                        </a:rPr>
+                        <a:t>營運⑧ 客戶回頭標記率(越低越好)</a:t>
+                      </a:r>
+                    </a:p>
+                  </a:txBody>
+                  <a:tcPr marL="45720" marR="45720" marT="18288" marB="18288" anchor="ctr">
+                    <a:solidFill>
+                      <a:srgbClr val="FFFFFF"/>
+                    </a:solidFill>
+                  </a:tcPr>
+                </a:tc>
+                <a:tc>
+                  <a:txBody>
+                    <a:bodyPr/>
+                    <a:lstStyle/>
+                    <a:p>
+                      <a:pPr algn="ctr"/>
+                      <a:r>
+                        <a:rPr sz="1200" b="0">
+                          <a:solidFill>
+                            <a:srgbClr val="6B7885"/>
+                          </a:solidFill>
+                          <a:latin typeface="Microsoft JhengHei"/>
+                        </a:rPr>
+                        <a:t>5–10%｜駕駛無效警示代理</a:t>
+                      </a:r>
+                    </a:p>
+                  </a:txBody>
+                  <a:tcPr marL="45720" marR="45720" marT="18288" marB="18288" anchor="ctr">
+                    <a:solidFill>
+                      <a:srgbClr val="FFFFFF"/>
+                    </a:solidFill>
+                  </a:tcPr>
+                </a:tc>
+                <a:tc>
+                  <a:txBody>
+                    <a:bodyPr/>
+                    <a:lstStyle/>
+                    <a:p>
+                      <a:pPr algn="ctr"/>
+                      <a:r>
+                        <a:rPr sz="1200" b="0">
+                          <a:solidFill>
+                            <a:srgbClr val="6B7885"/>
+                          </a:solidFill>
+                          <a:latin typeface="Microsoft JhengHei"/>
+                        </a:rPr>
+                        <a:t>降至 5% 以下(提案)</a:t>
+                      </a:r>
+                    </a:p>
+                  </a:txBody>
+                  <a:tcPr marL="45720" marR="45720" marT="18288" marB="18288" anchor="ctr">
+                    <a:solidFill>
+                      <a:srgbClr val="FFFFFF"/>
+                    </a:solidFill>
+                  </a:tcPr>
+                </a:tc>
+              </a:tr>
+              <a:tr h="292608">
+                <a:tc>
+                  <a:txBody>
+                    <a:bodyPr/>
+                    <a:lstStyle/>
+                    <a:p>
+                      <a:pPr algn="l"/>
+                      <a:r>
+                        <a:rPr sz="1200" b="0">
+                          <a:solidFill>
+                            <a:srgbClr val="16212E"/>
+                          </a:solidFill>
+                          <a:latin typeface="Microsoft JhengHei"/>
+                        </a:rPr>
+                        <a:t>營運⑨ 尖峰徵調研發人時</a:t>
+                      </a:r>
+                    </a:p>
+                  </a:txBody>
+                  <a:tcPr marL="45720" marR="45720" marT="18288" marB="18288" anchor="ctr">
+                    <a:solidFill>
+                      <a:srgbClr val="FFFFFF"/>
+                    </a:solidFill>
+                  </a:tcPr>
+                </a:tc>
+                <a:tc>
+                  <a:txBody>
+                    <a:bodyPr/>
+                    <a:lstStyle/>
+                    <a:p>
+                      <a:pPr algn="ctr"/>
+                      <a:r>
+                        <a:rPr sz="1200" b="0">
+                          <a:solidFill>
+                            <a:srgbClr val="6B7885"/>
+                          </a:solidFill>
+                          <a:latin typeface="Microsoft JhengHei"/>
+                        </a:rPr>
+                        <a:t>徵調 7 位研發｜非常態編制</a:t>
+                      </a:r>
+                    </a:p>
+                  </a:txBody>
+                  <a:tcPr marL="45720" marR="45720" marT="18288" marB="18288" anchor="ctr">
+                    <a:solidFill>
+                      <a:srgbClr val="FFFFFF"/>
+                    </a:solidFill>
+                  </a:tcPr>
+                </a:tc>
+                <a:tc>
+                  <a:txBody>
+                    <a:bodyPr/>
+                    <a:lstStyle/>
+                    <a:p>
+                      <a:pPr algn="ctr"/>
+                      <a:r>
+                        <a:rPr sz="1200" b="0">
+                          <a:solidFill>
+                            <a:srgbClr val="6B7885"/>
+                          </a:solidFill>
+                          <a:latin typeface="Microsoft JhengHei"/>
+                        </a:rPr>
+                        <a:t>期內建量測基準｜G2 訂目標</a:t>
+                      </a:r>
+                    </a:p>
+                  </a:txBody>
+                  <a:tcPr marL="45720" marR="45720" marT="18288" marB="18288" anchor="ctr">
+                    <a:solidFill>
+                      <a:srgbClr val="FFFFFF"/>
+                    </a:solidFill>
+                  </a:tcPr>
+                </a:tc>
+              </a:tr>
+            </a:tbl>
+          </a:graphicData>
+        </a:graphic>
+      </p:graphicFrame>
+      <p:graphicFrame>
+        <p:nvGraphicFramePr>
+          <p:cNvPr id="9" name="Table 8"/>
+          <p:cNvGraphicFramePr>
+            <a:graphicFrameLocks noGrp="1"/>
+          </p:cNvGraphicFramePr>
+          <p:nvPr/>
+        </p:nvGraphicFramePr>
+        <p:xfrm>
+          <a:off x="658368" y="5303520"/>
+          <a:ext cx="9658805" cy="1207008"/>
+        </p:xfrm>
+        <a:graphic>
+          <a:graphicData uri="http://schemas.openxmlformats.org/drawingml/2006/table">
+            <a:tbl>
+              <a:tblPr firstRow="1">
+                <a:tableStyleId>{5C22544A-7EE6-4342-B048-85BDC9FD1C3A}</a:tableStyleId>
+              </a:tblPr>
+              <a:tblGrid>
+                <a:gridCol w="2897642"/>
+                <a:gridCol w="2253721"/>
+                <a:gridCol w="2253721"/>
+                <a:gridCol w="2253721"/>
+              </a:tblGrid>
+              <a:tr h="329184">
+                <a:tc>
+                  <a:txBody>
+                    <a:bodyPr/>
+                    <a:lstStyle/>
+                    <a:p>
+                      <a:pPr algn="l"/>
+                      <a:r>
+                        <a:rPr sz="1200" b="1">
+                          <a:solidFill>
+                            <a:srgbClr val="FFFFFF"/>
+                          </a:solidFill>
+                          <a:latin typeface="Microsoft JhengHei"/>
+                        </a:rPr>
+                        <a:t/>
+                      </a:r>
+                    </a:p>
+                  </a:txBody>
+                  <a:tcPr marL="45720" marR="45720" marT="18288" marB="18288" anchor="ctr">
+                    <a:solidFill>
+                      <a:srgbClr val="1F4E79"/>
+                    </a:solidFill>
+                  </a:tcPr>
+                </a:tc>
+                <a:tc>
+                  <a:txBody>
+                    <a:bodyPr/>
+                    <a:lstStyle/>
+                    <a:p>
+                      <a:pPr algn="ctr"/>
+                      <a:r>
+                        <a:rPr sz="1200" b="1">
+                          <a:solidFill>
+                            <a:srgbClr val="FFFFFF"/>
+                          </a:solidFill>
+                          <a:latin typeface="Microsoft JhengHei"/>
+                        </a:rPr>
+                        <a:t>護欄層｜否決型 · 任一未達標不移交</a:t>
+                      </a:r>
+                    </a:p>
+                  </a:txBody>
+                  <a:tcPr marL="45720" marR="45720" marT="18288" marB="18288" anchor="ctr">
+                    <a:solidFill>
+                      <a:srgbClr val="1F4E79"/>
+                    </a:solidFill>
+                  </a:tcPr>
+                </a:tc>
+                <a:tc>
+                  <a:txBody>
+                    <a:bodyPr/>
+                    <a:lstStyle/>
+                    <a:p>
+                      <a:pPr algn="ctr"/>
+                      <a:r>
+                        <a:rPr sz="1200" b="1">
+                          <a:solidFill>
+                            <a:srgbClr val="FFFFFF"/>
+                          </a:solidFill>
+                          <a:latin typeface="Microsoft JhengHei"/>
+                        </a:rPr>
+                        <a:t>今天</a:t>
+                      </a:r>
+                    </a:p>
+                  </a:txBody>
+                  <a:tcPr marL="45720" marR="45720" marT="18288" marB="18288" anchor="ctr">
+                    <a:solidFill>
+                      <a:srgbClr val="1F4E79"/>
+                    </a:solidFill>
+                  </a:tcPr>
+                </a:tc>
+                <a:tc>
+                  <a:txBody>
+                    <a:bodyPr/>
+                    <a:lstStyle/>
+                    <a:p>
+                      <a:pPr algn="ctr"/>
+                      <a:r>
+                        <a:rPr sz="1200" b="1">
+                          <a:solidFill>
+                            <a:srgbClr val="FFFFFF"/>
+                          </a:solidFill>
+                          <a:latin typeface="Microsoft JhengHei"/>
+                        </a:rPr>
+                        <a:t>交什麼 · 第幾週</a:t>
+                      </a:r>
+                    </a:p>
+                  </a:txBody>
+                  <a:tcPr marL="45720" marR="45720" marT="18288" marB="18288" anchor="ctr">
+                    <a:solidFill>
+                      <a:srgbClr val="1F4E79"/>
+                    </a:solidFill>
+                  </a:tcPr>
+                </a:tc>
+              </a:tr>
+              <a:tr h="292608">
+                <a:tc>
+                  <a:txBody>
+                    <a:bodyPr/>
+                    <a:lstStyle/>
+                    <a:p>
+                      <a:pPr algn="l"/>
+                      <a:r>
+                        <a:rPr sz="1200" b="0">
+                          <a:solidFill>
+                            <a:srgbClr val="16212E"/>
+                          </a:solidFill>
+                          <a:latin typeface="Microsoft JhengHei"/>
+                        </a:rPr>
+                        <a:t>⑪ 複核者一致性</a:t>
+                      </a:r>
+                    </a:p>
+                  </a:txBody>
+                  <a:tcPr marL="45720" marR="45720" marT="18288" marB="18288" anchor="ctr">
+                    <a:solidFill>
+                      <a:srgbClr val="FFFFFF"/>
+                    </a:solidFill>
+                  </a:tcPr>
+                </a:tc>
+                <a:tc>
+                  <a:txBody>
+                    <a:bodyPr/>
+                    <a:lstStyle/>
+                    <a:p>
+                      <a:pPr algn="ctr"/>
+                      <a:r>
+                        <a:rPr sz="1200" b="0">
+                          <a:solidFill>
+                            <a:srgbClr val="6B7885"/>
+                          </a:solidFill>
+                          <a:latin typeface="Microsoft JhengHei"/>
+                        </a:rPr>
+                        <a:t>現況未量測</a:t>
+                      </a:r>
+                    </a:p>
+                  </a:txBody>
+                  <a:tcPr marL="45720" marR="45720" marT="18288" marB="18288" anchor="ctr">
+                    <a:solidFill>
+                      <a:srgbClr val="FFFFFF"/>
+                    </a:solidFill>
+                  </a:tcPr>
+                </a:tc>
+                <a:tc>
+                  <a:txBody>
+                    <a:bodyPr/>
+                    <a:lstStyle/>
+                    <a:p>
+                      <a:pPr algn="ctr"/>
+                      <a:r>
+                        <a:rPr sz="1200" b="0">
+                          <a:solidFill>
+                            <a:srgbClr val="6B7885"/>
+                          </a:solidFill>
+                          <a:latin typeface="Microsoft JhengHei"/>
+                        </a:rPr>
+                        <a:t>W10 前基線｜目標 G2</a:t>
+                      </a:r>
+                    </a:p>
+                  </a:txBody>
+                  <a:tcPr marL="45720" marR="45720" marT="18288" marB="18288" anchor="ctr">
+                    <a:solidFill>
+                      <a:srgbClr val="FFFFFF"/>
+                    </a:solidFill>
+                  </a:tcPr>
+                </a:tc>
+                <a:tc>
+                  <a:txBody>
+                    <a:bodyPr/>
+                    <a:lstStyle/>
+                    <a:p>
+                      <a:pPr algn="ctr"/>
+                      <a:r>
+                        <a:rPr sz="1200" b="0">
+                          <a:solidFill>
+                            <a:srgbClr val="6B7885"/>
+                          </a:solidFill>
+                          <a:latin typeface="Microsoft JhengHei"/>
+                        </a:rPr>
+                        <a:t>否決G2·複核營運主管</a:t>
+                      </a:r>
+                    </a:p>
+                  </a:txBody>
+                  <a:tcPr marL="45720" marR="45720" marT="18288" marB="18288" anchor="ctr">
+                    <a:solidFill>
+                      <a:srgbClr val="FFFFFF"/>
+                    </a:solidFill>
+                  </a:tcPr>
+                </a:tc>
+              </a:tr>
+              <a:tr h="292608">
+                <a:tc>
+                  <a:txBody>
+                    <a:bodyPr/>
+                    <a:lstStyle/>
+                    <a:p>
+                      <a:pPr algn="l"/>
+                      <a:r>
+                        <a:rPr sz="1200" b="0">
+                          <a:solidFill>
+                            <a:srgbClr val="16212E"/>
+                          </a:solidFill>
+                          <a:latin typeface="Microsoft JhengHei"/>
+                        </a:rPr>
+                        <a:t>⑫ 訓練資料可追溯率</a:t>
+                      </a:r>
+                    </a:p>
+                  </a:txBody>
+                  <a:tcPr marL="45720" marR="45720" marT="18288" marB="18288" anchor="ctr">
+                    <a:solidFill>
+                      <a:srgbClr val="FFFFFF"/>
+                    </a:solidFill>
+                  </a:tcPr>
+                </a:tc>
+                <a:tc>
+                  <a:txBody>
+                    <a:bodyPr/>
+                    <a:lstStyle/>
+                    <a:p>
+                      <a:pPr algn="ctr"/>
+                      <a:r>
+                        <a:rPr sz="1200" b="0">
+                          <a:solidFill>
+                            <a:srgbClr val="6B7885"/>
+                          </a:solidFill>
+                          <a:latin typeface="Microsoft JhengHei"/>
+                        </a:rPr>
+                        <a:t>0%</a:t>
+                      </a:r>
+                    </a:p>
+                  </a:txBody>
+                  <a:tcPr marL="45720" marR="45720" marT="18288" marB="18288" anchor="ctr">
+                    <a:solidFill>
+                      <a:srgbClr val="FFFFFF"/>
+                    </a:solidFill>
+                  </a:tcPr>
+                </a:tc>
+                <a:tc>
+                  <a:txBody>
+                    <a:bodyPr/>
+                    <a:lstStyle/>
+                    <a:p>
+                      <a:pPr algn="ctr"/>
+                      <a:r>
+                        <a:rPr sz="1200" b="0">
+                          <a:solidFill>
+                            <a:srgbClr val="6B7885"/>
+                          </a:solidFill>
+                          <a:latin typeface="Microsoft JhengHei"/>
+                        </a:rPr>
+                        <a:t>100%,無中間值</a:t>
+                      </a:r>
+                    </a:p>
+                  </a:txBody>
+                  <a:tcPr marL="45720" marR="45720" marT="18288" marB="18288" anchor="ctr">
+                    <a:solidFill>
+                      <a:srgbClr val="FFFFFF"/>
+                    </a:solidFill>
+                  </a:tcPr>
+                </a:tc>
+                <a:tc>
+                  <a:txBody>
+                    <a:bodyPr/>
+                    <a:lstStyle/>
+                    <a:p>
+                      <a:pPr algn="ctr"/>
+                      <a:r>
+                        <a:rPr sz="1200" b="0">
+                          <a:solidFill>
+                            <a:srgbClr val="6B7885"/>
+                          </a:solidFill>
+                          <a:latin typeface="Microsoft JhengHei"/>
+                        </a:rPr>
+                        <a:t>未達 100% 不移交</a:t>
+                      </a:r>
+                    </a:p>
+                  </a:txBody>
+                  <a:tcPr marL="45720" marR="45720" marT="18288" marB="18288" anchor="ctr">
+                    <a:solidFill>
+                      <a:srgbClr val="FFFFFF"/>
+                    </a:solidFill>
+                  </a:tcPr>
+                </a:tc>
+              </a:tr>
+              <a:tr h="292608">
+                <a:tc>
+                  <a:txBody>
+                    <a:bodyPr/>
+                    <a:lstStyle/>
+                    <a:p>
+                      <a:pPr algn="l"/>
+                      <a:r>
+                        <a:rPr sz="1200" b="1">
+                          <a:solidFill>
+                            <a:srgbClr val="C00000"/>
+                          </a:solidFill>
+                          <a:latin typeface="Microsoft JhengHei"/>
+                        </a:rPr>
+                        <a:t>⑬ 漏濾率(本輪新增)</a:t>
+                      </a:r>
+                    </a:p>
+                  </a:txBody>
+                  <a:tcPr marL="45720" marR="45720" marT="18288" marB="18288" anchor="ctr">
+                    <a:solidFill>
+                      <a:srgbClr val="FBEFEF"/>
+                    </a:solidFill>
+                  </a:tcPr>
+                </a:tc>
+                <a:tc>
+                  <a:txBody>
+                    <a:bodyPr/>
+                    <a:lstStyle/>
+                    <a:p>
+                      <a:pPr algn="ctr"/>
+                      <a:r>
+                        <a:rPr sz="1200" b="0">
+                          <a:solidFill>
+                            <a:srgbClr val="C00000"/>
+                          </a:solidFill>
+                          <a:latin typeface="Microsoft JhengHei"/>
+                        </a:rPr>
+                        <a:t>不存在｜機制尚未建立</a:t>
+                      </a:r>
+                    </a:p>
+                  </a:txBody>
+                  <a:tcPr marL="45720" marR="45720" marT="18288" marB="18288" anchor="ctr">
+                    <a:solidFill>
+                      <a:srgbClr val="FBEFEF"/>
+                    </a:solidFill>
+                  </a:tcPr>
+                </a:tc>
+                <a:tc>
+                  <a:txBody>
+                    <a:bodyPr/>
+                    <a:lstStyle/>
+                    <a:p>
+                      <a:pPr algn="ctr"/>
+                      <a:r>
+                        <a:rPr sz="1200" b="0">
+                          <a:solidFill>
+                            <a:srgbClr val="C00000"/>
+                          </a:solidFill>
+                          <a:latin typeface="Microsoft JhengHei"/>
+                        </a:rPr>
+                        <a:t>W12 差值 95% CI</a:t>
+                      </a:r>
+                    </a:p>
+                  </a:txBody>
+                  <a:tcPr marL="45720" marR="45720" marT="18288" marB="18288" anchor="ctr">
+                    <a:solidFill>
+                      <a:srgbClr val="FBEFEF"/>
+                    </a:solidFill>
+                  </a:tcPr>
+                </a:tc>
+                <a:tc>
+                  <a:txBody>
+                    <a:bodyPr/>
+                    <a:lstStyle/>
+                    <a:p>
+                      <a:pPr algn="ctr"/>
+                      <a:r>
+                        <a:rPr sz="1200" b="0">
+                          <a:solidFill>
+                            <a:srgbClr val="C00000"/>
+                          </a:solidFill>
+                          <a:latin typeface="Microsoft JhengHei"/>
+                        </a:rPr>
+                        <a:t>否決對外｜技術負責人</a:t>
+                      </a:r>
+                    </a:p>
+                  </a:txBody>
+                  <a:tcPr marL="45720" marR="45720" marT="18288" marB="18288" anchor="ctr">
+                    <a:solidFill>
+                      <a:srgbClr val="FBEFEF"/>
+                    </a:solidFill>
+                  </a:tcPr>
+                </a:tc>
+              </a:tr>
+            </a:tbl>
+          </a:graphicData>
+        </a:graphic>
+      </p:graphicFrame>
     </p:spTree>
   </p:cSld>
   <p:clrMapOvr>

--- a/Artificial Intelligence for Enterprises/Assessment3/Huang_26254793_421104_Assessment 3.pptx
+++ b/Artificial Intelligence for Enterprises/Assessment3/Huang_26254793_421104_Assessment 3.pptx
@@ -11949,7 +11949,7 @@
         </p:nvGraphicFramePr>
         <p:xfrm>
           <a:off x="658368" y="1755648"/>
-          <a:ext cx="10874958" cy="2377440"/>
+          <a:ext cx="10874958" cy="2084832"/>
         </p:xfrm>
         <a:graphic>
           <a:graphicData uri="http://schemas.openxmlformats.org/drawingml/2006/table">
@@ -12459,77 +12459,6 @@
                   </a:tcPr>
                 </a:tc>
               </a:tr>
-              <a:tr h="292608">
-                <a:tc>
-                  <a:txBody>
-                    <a:bodyPr/>
-                    <a:lstStyle/>
-                    <a:p>
-                      <a:pPr algn="l"/>
-                      <a:r>
-                        <a:rPr sz="1200" b="0">
-                          <a:solidFill>
-                            <a:srgbClr val="16212E"/>
-                          </a:solidFill>
-                          <a:latin typeface="Microsoft JhengHei"/>
-                        </a:rPr>
-                        <a:t>對應哪一包</a:t>
-                      </a:r>
-                    </a:p>
-                  </a:txBody>
-                  <a:tcPr marL="45720" marR="45720" marT="18288" marB="18288" anchor="ctr">
-                    <a:solidFill>
-                      <a:srgbClr val="FFFFFF"/>
-                    </a:solidFill>
-                  </a:tcPr>
-                </a:tc>
-                <a:tc>
-                  <a:txBody>
-                    <a:bodyPr/>
-                    <a:lstStyle/>
-                    <a:p>
-                      <a:pPr algn="ctr"/>
-                      <a:r>
-                        <a:rPr sz="1200" b="0">
-                          <a:solidFill>
-                            <a:srgbClr val="6B7885"/>
-                          </a:solidFill>
-                          <a:latin typeface="Microsoft JhengHei"/>
-                        </a:rPr>
-                        <a:t>WP-C 脈絡特徵 + WP-E 地端 VLM</a:t>
-                      </a:r>
-                    </a:p>
-                  </a:txBody>
-                  <a:tcPr marL="45720" marR="45720" marT="18288" marB="18288" anchor="ctr">
-                    <a:solidFill>
-                      <a:srgbClr val="FFFFFF"/>
-                    </a:solidFill>
-                  </a:tcPr>
-                </a:tc>
-                <a:tc>
-                  <a:txBody>
-                    <a:bodyPr/>
-                    <a:lstStyle/>
-                    <a:p>
-                      <a:pPr algn="ctr"/>
-                      <a:r>
-                        <a:rPr sz="1200" b="0">
-                          <a:solidFill>
-                            <a:srgbClr val="6B7885"/>
-                          </a:solidFill>
-                          <a:latin typeface="Microsoft JhengHei"/>
-                        </a:rPr>
-                        <a:t>WP-B 標註品質 + WP-E 地端 VLM</a:t>
-                      </a:r>
-                    </a:p>
-                  </a:txBody>
-                  <a:tcPr marL="45720" marR="45720" marT="18288" marB="18288" anchor="ctr">
-                    <a:solidFill>
-                      <a:srgbClr val="FFFFFF"/>
-                    </a:solidFill>
-                  </a:tcPr>
-                </a:tc>
-              </a:tr>
             </a:tbl>
           </a:graphicData>
         </a:graphic>
@@ -12542,7 +12471,7 @@
         </p:nvSpPr>
         <p:spPr>
           <a:xfrm>
-            <a:off x="658368" y="4288536"/>
+            <a:off x="658368" y="3995928"/>
             <a:ext cx="45720" cy="321468"/>
           </a:xfrm>
           <a:prstGeom prst="rect">
@@ -12586,7 +12515,7 @@
         </p:nvSpPr>
         <p:spPr>
           <a:xfrm>
-            <a:off x="804672" y="4261104"/>
+            <a:off x="804672" y="3968496"/>
             <a:ext cx="2408822" cy="412908"/>
           </a:xfrm>
           <a:prstGeom prst="rect">
@@ -12625,7 +12554,7 @@
         </p:nvSpPr>
         <p:spPr>
           <a:xfrm>
-            <a:off x="3268358" y="4261104"/>
+            <a:off x="3268358" y="3968496"/>
             <a:ext cx="2891028" cy="412908"/>
           </a:xfrm>
           <a:prstGeom prst="rect">
@@ -12664,7 +12593,7 @@
         </p:nvSpPr>
         <p:spPr>
           <a:xfrm>
-            <a:off x="6269114" y="4261104"/>
+            <a:off x="6269114" y="3968496"/>
             <a:ext cx="5154484" cy="412908"/>
           </a:xfrm>
           <a:prstGeom prst="rect">
@@ -12703,7 +12632,7 @@
         </p:nvSpPr>
         <p:spPr>
           <a:xfrm>
-            <a:off x="658368" y="4792884"/>
+            <a:off x="658368" y="4500276"/>
             <a:ext cx="45720" cy="321468"/>
           </a:xfrm>
           <a:prstGeom prst="rect">
@@ -12747,7 +12676,7 @@
         </p:nvSpPr>
         <p:spPr>
           <a:xfrm>
-            <a:off x="804672" y="4765452"/>
+            <a:off x="804672" y="4472844"/>
             <a:ext cx="2408822" cy="412908"/>
           </a:xfrm>
           <a:prstGeom prst="rect">
@@ -12786,7 +12715,7 @@
         </p:nvSpPr>
         <p:spPr>
           <a:xfrm>
-            <a:off x="3268358" y="4765452"/>
+            <a:off x="3268358" y="4472844"/>
             <a:ext cx="2891028" cy="412908"/>
           </a:xfrm>
           <a:prstGeom prst="rect">
@@ -12825,7 +12754,7 @@
         </p:nvSpPr>
         <p:spPr>
           <a:xfrm>
-            <a:off x="6269114" y="4765452"/>
+            <a:off x="6269114" y="4472844"/>
             <a:ext cx="5154484" cy="412908"/>
           </a:xfrm>
           <a:prstGeom prst="rect">
@@ -12864,7 +12793,7 @@
         </p:nvSpPr>
         <p:spPr>
           <a:xfrm>
-            <a:off x="658368" y="5297233"/>
+            <a:off x="658368" y="5004625"/>
             <a:ext cx="45720" cy="321468"/>
           </a:xfrm>
           <a:prstGeom prst="rect">
@@ -12908,7 +12837,7 @@
         </p:nvSpPr>
         <p:spPr>
           <a:xfrm>
-            <a:off x="804672" y="5269801"/>
+            <a:off x="804672" y="4977193"/>
             <a:ext cx="2408822" cy="412908"/>
           </a:xfrm>
           <a:prstGeom prst="rect">
@@ -12947,7 +12876,7 @@
         </p:nvSpPr>
         <p:spPr>
           <a:xfrm>
-            <a:off x="3268358" y="5269801"/>
+            <a:off x="3268358" y="4977193"/>
             <a:ext cx="2891028" cy="412908"/>
           </a:xfrm>
           <a:prstGeom prst="rect">
@@ -12986,7 +12915,7 @@
         </p:nvSpPr>
         <p:spPr>
           <a:xfrm>
-            <a:off x="6269114" y="5269801"/>
+            <a:off x="6269114" y="4977193"/>
             <a:ext cx="5154484" cy="412908"/>
           </a:xfrm>
           <a:prstGeom prst="rect">
@@ -13025,8 +12954,8 @@
         </p:nvSpPr>
         <p:spPr>
           <a:xfrm>
-            <a:off x="658368" y="5906779"/>
-            <a:ext cx="9658807" cy="603748"/>
+            <a:off x="658368" y="5882232"/>
+            <a:ext cx="9658807" cy="628295"/>
           </a:xfrm>
           <a:prstGeom prst="roundRect">
             <a:avLst>
@@ -13071,8 +13000,8 @@
         </p:nvSpPr>
         <p:spPr>
           <a:xfrm>
-            <a:off x="841247" y="5906779"/>
-            <a:ext cx="9293047" cy="603748"/>
+            <a:off x="841247" y="5882232"/>
+            <a:ext cx="9293047" cy="628295"/>
           </a:xfrm>
           <a:prstGeom prst="rect">
             <a:avLst/>

--- a/Artificial Intelligence for Enterprises/Assessment3/Huang_26254793_421104_Assessment 3.pptx
+++ b/Artificial Intelligence for Enterprises/Assessment3/Huang_26254793_421104_Assessment 3.pptx
@@ -644,7 +644,7 @@
           <a:lstStyle/>
           <a:p>
             <a:r>
-              <a:t>【第 10 頁 · P9 · 六個月 · 六個工作包 · 三道決策門】　目標 47 秒 · 累計 9:12</a:t>
+              <a:t>【第 10 頁 · P9 · 六個月 · 六個工作包 · 三道決策門】　目標 47 秒 · 累計 9:41</a:t>
             </a:r>
           </a:p>
           <a:p/>
@@ -796,7 +796,7 @@
           <a:lstStyle/>
           <a:p>
             <a:r>
-              <a:t>【第 11 頁 · P10 · 資源、當責與請求】　目標 64 秒 · 累計 10:15</a:t>
+              <a:t>【第 11 頁 · P10 · 資源、當責與請求】　目標 64 秒 · 累計 10:45</a:t>
             </a:r>
           </a:p>
           <a:p/>
@@ -968,7 +968,7 @@
           <a:lstStyle/>
           <a:p>
             <a:r>
-              <a:t>【第 12 頁 · 參考文獻(第 11 頁 — 不佔十頁額度)】　目標 5 秒 · 累計 10:20</a:t>
+              <a:t>【第 12 頁 · 參考文獻(第 11 頁 — 不佔十頁額度)】　目標 5 秒 · 累計 10:49</a:t>
             </a:r>
           </a:p>
           <a:p/>
@@ -1705,51 +1705,56 @@
           <a:lstStyle/>
           <a:p>
             <a:r>
-              <a:t>【第 6 頁 · P5 · 五條路,含三條不用 AI】　目標 44 秒 · 累計 5:58</a:t>
+              <a:t>【第 6 頁 · P5 · 五條路,含三條不用 AI】　目標 66 秒 · 累計 6:19</a:t>
             </a:r>
           </a:p>
           <a:p/>
           <a:p>
             <a:r>
-              <a:t>★ 這六個月,它一筆都不對外生效。</a:t>
+              <a:t>★ 差別不在做什麼 —— 在量變大的時候會怎樣,以及能不能反悔。</a:t>
             </a:r>
           </a:p>
           <a:p/>
           <a:p>
             <a:r>
-              <a:t>· 五條路裡三條不用 AI —— 加人、調班、既有雲端規劃,我都沒有先否決</a:t>
-            </a:r>
-          </a:p>
-          <a:p>
-            <a:r>
-              <a:t>· 採用案是地端視覺語言模型;前兩包是它的必要前置</a:t>
-            </a:r>
-          </a:p>
-          <a:p>
-            <a:r>
-              <a:t>· 影子模式:機器照出結論但不對外送,人照常判,兩邊比對</a:t>
+              <a:t>· 加人:量幾倍人就幾倍(17–24 人),而且編制停不下來 → 拒絕</a:t>
+            </a:r>
+          </a:p>
+          <a:p>
+            <a:r>
+              <a:t>· 調班 + 尖峰支援:一樣跟量走但便宜、隨時可停 → 不預先否決,第 6 週決定</a:t>
+            </a:r>
+          </a:p>
+          <a:p>
+            <a:r>
+              <a:t>· 地端 AI:前期投入一次,之後量長也不等比長,而且三個檢查點都能停 → 採用</a:t>
             </a:r>
           </a:p>
           <a:p/>
           <a:p>
             <a:r>
-              <a:t># 85% 是分流率(推估非實測) · 六個月對外覆蓋率 0%</a:t>
+              <a:t># 144 人時 ÷ 1,647 筆 = 5.25 分/筆 · 129.1–185.9 ÷ 8 = 17–24 人</a:t>
+            </a:r>
+          </a:p>
+          <a:p>
+            <a:r>
+              <a:t># 第 6 週檢查點:找證據 + 判讀真的是主要延遲才往下做</a:t>
             </a:r>
           </a:p>
           <a:p/>
           <a:p>
             <a:r>
-              <a:t>⚠️ 三層一層都不可省:能力層 850 筆終局判定 / 本案層 對外 0% / 放行層 須過另一道獨立門</a:t>
-            </a:r>
-          </a:p>
-          <a:p>
-            <a:r>
-              <a:t>⚠️ 🚫 不可說「AI 不做判定」—— 正確講法是「AI 會做結案判定,但這六個月不對外生效」</a:t>
-            </a:r>
-          </a:p>
-          <a:p>
-            <a:r>
-              <a:t>⚠️ 🚫 85% 是分流率,不是準確率,不可與誤報率並排相減</a:t>
+              <a:t>⚠️ 🚫 不要說「次線性」「成本形狀」—— 講「量再長也不會等比長」</a:t>
+            </a:r>
+          </a:p>
+          <a:p>
+            <a:r>
+              <a:t>⚠️ 規則式(③)是**先做**不是備案 —— 83% 同根因,而速限資料手上就有</a:t>
+            </a:r>
+          </a:p>
+          <a:p>
+            <a:r>
+              <a:t>⚠️ ⑤ 公司既有雲端規劃是**前置條件不是競爭** —— 這句要講,免得像在搶案子</a:t>
             </a:r>
           </a:p>
           <a:p/>
@@ -1761,18 +1766,33 @@
           <a:p/>
           <a:p>
             <a:r>
-              <a:t>── 逐字備援 · 195 字(忘詞才看,不是拿來唸的)──</a:t>
-            </a:r>
-          </a:p>
-          <a:p>
-            <a:r>
-              <a:t>路有五條。加人,迴路轉得更久,不會停。更便宜的是調班加人力池,我不先否決;六週後那道門用正式量測判:AI能處理的那段佔主要延遲才放行,否則轉排班。採用案是地端視覺語言模型讀事件影片。前兩包是它的必要前置:沒量測底座,就不知道它判得對不對。預期八成五的爭議件,機器有把握、直接結案,人不再看。這是推估不是實測;而人現在判得多準,我們沒量過。所以這六個月,它一筆都不對外生效——機器照出結論,人照常判,兩邊比對。這是唯一算得出自動結案漏放率的設計。</a:t>
+              <a:t>── 逐字備援 · 289 字(忘詞才看,不是拿來唸的)──</a:t>
+            </a:r>
+          </a:p>
+          <a:p>
+            <a:r>
+              <a:t>路有五條,我都算過。加人最直覺,但它的成本跟量一起長 —— 量幾倍,人就要幾倍,覆蓋全客戶要十七到二十四個人。而且編制是常態支出,停不下來。所以我拒絕它。第二條是調班加尖峰支援,把現在徵調的七位研發轉成正式編組。它一樣跟量走,只是便宜一點,但隨時可以停,退回原班表 —— 這條我不預先否決,第六週再決定。第三條是規則式比對:定位加地圖速限硬比對,不用模型。這條我建議先做。第四條才是本案:地端 AI 事件判讀,讀懂事件脈絡、產出證據包。它的成本形狀不一樣 —— 前期投入一次,之後量再長也不會等比長,而且三個檢查點都可以停。第五條是公司既有的雲端判讀規劃,那還在研擬,不在本案範圍,是前置條件不是競爭。各位看最下面那一句:差別不在做什麼,在量變大的時候會怎樣,以及能不能反悔。</a:t>
             </a:r>
           </a:p>
           <a:p/>
           <a:p>
             <a:r>
               <a:t>── 備查(不唸,答辯用)──</a:t>
+            </a:r>
+          </a:p>
+          <a:p>
+            <a:r>
+              <a:t>【matrix-cell】量幾倍,人就幾倍 → 要 17–24 人</a:t>
+            </a:r>
+          </a:p>
+          <a:p>
+            <a:r>
+              <a:t>【matrix-cell】定位 + 地圖速限硬比對,不用模型</a:t>
+            </a:r>
+          </a:p>
+          <a:p>
+            <a:r>
+              <a:t>【matrix-cell】前期投入一次,之後量長也不等比長</a:t>
             </a:r>
           </a:p>
           <a:p>
@@ -1847,46 +1867,51 @@
           <a:lstStyle/>
           <a:p>
             <a:r>
-              <a:t>【第 7 頁 · P6 · 風險:七類十條,緩解位移與殘餘風險】　目標 51 秒 · 累計 6:49</a:t>
+              <a:t>【第 7 頁 · P6 · 風險:七類十條,緩解位移與殘餘風險】　目標 65 秒 · 累計 7:25</a:t>
             </a:r>
           </a:p>
           <a:p/>
           <a:p>
             <a:r>
-              <a:t>★ 每一條風險我都附了偵測訊號 —— 你不會在事後才知道它發生了。</a:t>
+              <a:t>★ 八條風險,前三條是 AI 特有的 —— 而每一條我都寫了怎麼知道它發生了。</a:t>
             </a:r>
           </a:p>
           <a:p/>
           <a:p>
             <a:r>
-              <a:t>· 七類十條,兩條是這個方案自己造成的 —— 我沒有藏,自己標出來</a:t>
-            </a:r>
-          </a:p>
-          <a:p>
-            <a:r>
-              <a:t>· 自動化偏差:介面一顯示模型信心,人就直接蓋章 → 我的決策是不顯示</a:t>
-            </a:r>
-          </a:p>
-          <a:p>
-            <a:r>
-              <a:t>· 但那個緩解只擋得住人還在看的那些 —— 移交後那八成五沒有介面也沒有人,所以我另外加了 R9、R10 兩條,掛在自動結案那道門上</a:t>
+              <a:t>· 機器會講錯但講得很順 → 每一句都要標出引用的證據在第幾秒</a:t>
+            </a:r>
+          </a:p>
+          <a:p>
+            <a:r>
+              <a:t>· 髒標註會一路傳下去 → 黃金題 + 抽樣雙人複核</a:t>
+            </a:r>
+          </a:p>
+          <a:p>
+            <a:r>
+              <a:t>· 人看到答案就不再自己想 → 我的決定是介面不顯示機器的信心分數</a:t>
             </a:r>
           </a:p>
           <a:p/>
           <a:p>
             <a:r>
-              <a:t># 七類十條 · R9 自動結案的漏放 · R10 自動結案的冤枉</a:t>
+              <a:t># 八條風險 · 只有第 8 條(法律舉證)沒有解</a:t>
             </a:r>
           </a:p>
           <a:p/>
           <a:p>
             <a:r>
-              <a:t>⚠️ R8 法律面我沒有答案 —— 由法務在 G1(第 6 週)前給書面意見</a:t>
-            </a:r>
-          </a:p>
-          <a:p>
-            <a:r>
-              <a:t>⚠️ 每一條沒有答案的事,都要當場交代誰在第幾週給</a:t>
+              <a:t>⚠️ 🚫 不要說「緩解」「偵測訊號」「NIST」—— 講「怎麼防」「怎麼知道它發生了」</a:t>
+            </a:r>
+          </a:p>
+          <a:p>
+            <a:r>
+              <a:t>⚠️ 防法的**代價**要一起講(不顯示信心會拖慢複核)—— 那才顯得是真的想過</a:t>
+            </a:r>
+          </a:p>
+          <a:p>
+            <a:r>
+              <a:t>⚠️ 第 8 條要說「我沒有答案,法務第 6 週前給書面意見」—— 承認比硬掰有力</a:t>
             </a:r>
           </a:p>
           <a:p/>
@@ -1900,11 +1925,6 @@
               <a:t>· 錄影標記:唸完「這題我沒有答案,它由法務在 G1 前給書面意見」整句後,畫面停在 R8 的紅色虛線圈上靜止 2 秒、口白不出聲,再切下一頁。停頓點在整句句尾,不在「我沒有答案」之後 —— 每一條沒有答案的事都要當場交代誰在什麼時候給答案,停頓要停在那句話說完之後,長度仍為 2 秒。</a:t>
             </a:r>
           </a:p>
-          <a:p>
-            <a:r>
-              <a:t>· 唸完法務那句後,畫面停在 R8 紅圈上靜止 2 秒</a:t>
-            </a:r>
-          </a:p>
           <a:p/>
           <a:p>
             <a:r>
@@ -1914,12 +1934,12 @@
           <a:p/>
           <a:p>
             <a:r>
-              <a:t>── 逐字備援 · 223 字(忘詞才看,不是拿來唸的)──</a:t>
-            </a:r>
-          </a:p>
-          <a:p>
-            <a:r>
-              <a:t>選了這條,我先講它會出什麼事。風險歸成七類十條,我只講三條。第一,資料級聯:複核判準不一致會變成訓練標籤,脈絡資料有錯也會整批傳下去。第二,自動化偏差:介面一顯示模型信心,人就直接蓋章。我的決策是介面不顯示信心。但這個緩解只擋得住人還在看的那些 —— 移交後開到天花板,那八成五沒有介面、也沒有人。所以我另外加了兩條:機器把真的危險事件判成誤報,跟機器單方面駁回駕駛。兩條都掛在自動結案那道門上,不在這六個月裡。第三,法律面:曾判為誤報的紀錄,在事故舉證裡算什麼。這題我沒有答案,它由法務在 G1 前給書面意見。</a:t>
+              <a:t>── 逐字備援 · 287 字(忘詞才看,不是拿來唸的)──</a:t>
+            </a:r>
+          </a:p>
+          <a:p>
+            <a:r>
+              <a:t>選了這條路,我先講它會出什麼事。八條風險,前三條是 AI 特有的。第一,機器會講錯,但講得很順 —— 錯的描述跟對的一樣通順,比一個錯的數字更難察覺。所以我要求它輸出的每一句都要標出引用的證據在第幾秒。第二,髒標註會一路傳下去。判準不一致的標籤餵進去,錯誤會沿著訓練流程放大。第三,人看到機器給的答案就不再自己想。所以我的決定是:介面不顯示機器的信心分數。但那個防法有代價 —— 不顯示會拖慢複核,衝到時效。這一格我也寫在表上。剩下五條是專案風險:駕駛不能申訴、複核人員的角色會變、六個月證不出回本、高階不參與就會擱置,以及第八條 —— 曾判為誤報的紀錄在法律舉證裡算什麼。第八條我沒有答案,由法務在第六週前給書面意見。其餘七條,每一條我都寫了「怎麼知道它發生了」。</a:t>
             </a:r>
           </a:p>
           <a:p/>
@@ -2000,46 +2020,46 @@
           <a:lstStyle/>
           <a:p>
             <a:r>
-              <a:t>【第 8 頁 · P7 · 倫理與可申訴性:對照澳洲 AI 倫理八原則】　目標 50 秒 · 累計 7:39</a:t>
+              <a:t>【第 8 頁 · P7 · 倫理與可申訴性:對照澳洲 AI 倫理八原則】　目標 43 秒 · 累計 8:08</a:t>
             </a:r>
           </a:p>
           <a:p/>
           <a:p>
             <a:r>
-              <a:t>★ 這一頁就是我要求六個月不對外生效的理由 —— 那 850 筆沒有人看,所以要先量得出它錯多少。</a:t>
+              <a:t>★ 八條原則沒有一條是綠燈 —— 而會變差的只有兩條,我沒有藏。</a:t>
             </a:r>
           </a:p>
           <a:p/>
           <a:p>
             <a:r>
-              <a:t>· 同一張表兩欄:專案期一種顏色,移交後另一種 —— 今天要批的是左邊那欄</a:t>
-            </a:r>
-          </a:p>
-          <a:p>
-            <a:r>
-              <a:t>· 第 7 條可申訴性 —— 我把它升為部署否決條件</a:t>
-            </a:r>
-          </a:p>
-          <a:p>
-            <a:r>
-              <a:t>· 第 8 條問責性:那 850 筆裡某一筆判錯,沒有人簽過名</a:t>
+              <a:t>· 人還是逐筆判 → 以人為本不變;同樣人力接得住更多 → 福祉與公平性改善</a:t>
+            </a:r>
+          </a:p>
+          <a:p>
+            <a:r>
+              <a:t>· 🔴 第 4 條隱私**會變差**:為了讀脈絡,影像調閱與紀錄保存都要擴大</a:t>
+            </a:r>
+          </a:p>
+          <a:p>
+            <a:r>
+              <a:t>· 🔴 第 7 條可申訴性**從頭到尾不及格**:駕駛本人不能對一筆判定提出質疑</a:t>
             </a:r>
           </a:p>
           <a:p/>
           <a:p>
             <a:r>
-              <a:t># 專案期 綠 0 琥珀 7 紅 1 → 移交後 綠 0 琥珀 1 紅 7</a:t>
+              <a:t># 澳洲 AI 倫理八原則(2019)</a:t>
             </a:r>
           </a:p>
           <a:p/>
           <a:p>
             <a:r>
-              <a:t>⚠️ 「沒有人簽過名」是**承認洞**,🚫 不要臨場補一個人上去</a:t>
-            </a:r>
-          </a:p>
-          <a:p>
-            <a:r>
-              <a:t>⚠️ 第 4 條隱私是唯一不因自動結案惡化的一條 —— 刻意不標紅,不是漏標</a:t>
+              <a:t>⚠️ 🚫 不要再講「移交後」「天花板」「850 筆沒人看過」—— 那條線已經拿掉了</a:t>
+            </a:r>
+          </a:p>
+          <a:p>
+            <a:r>
+              <a:t>⚠️ 這一頁的價值在**主動揭露**:兩條變差的自己講出來,其餘六條才會被信</a:t>
             </a:r>
           </a:p>
           <a:p/>
@@ -2067,12 +2087,12 @@
           <a:p/>
           <a:p>
             <a:r>
-              <a:t>── 逐字備援 · 219 字(忘詞才看,不是拿來唸的)──</a:t>
-            </a:r>
-          </a:p>
-          <a:p>
-            <a:r>
-              <a:t>還有一條,是我們自己造成的。這道人工防線的產能有限,所以它是配給的 —— 依客戶的購買量排序。同樣一個誤判,發生在大客戶身上會被人攔下來,小客戶身上不會。分配依據是客戶大小,不是風險大小。這六個月我能做的,是第一次量得出它覆蓋了誰。但我要說清楚:這個方案開到天花板之後,配給的依據會從客戶大小換成機器的信心,而那八成五沒有人看過 —— 那是我造成的新問題,不是我解掉的舊問題。所以八原則裡的問責跟可申訴性,我這一頁全部標紅,而它們掛在第二十四週那道門上。申訴機制到位前,本案產出不供個人考核使用。</a:t>
+              <a:t>── 逐字備援 · 190 字(忘詞才看,不是拿來唸的)──</a:t>
+            </a:r>
+          </a:p>
+          <a:p>
+            <a:r>
+              <a:t>這一頁是這個方案的代價。我拿澳洲 AI 倫理八原則逐條對過,沒有一條是綠燈。多數是持平或改善:人還是逐筆判,所以以人為本那條不變;同樣人力接得住更多、涵蓋率提高,福祉跟公平性反而改善。但有兩條要盯。第四條隱私會變差 —— 為了讀脈絡,影像調閱範圍跟判定紀錄的保存都會擴大。第七條可申訴性,從頭到尾不及格:只有車隊安全主管能標記,駕駛本人不能對一筆判定提出質疑,導入之後還是不能。我沒有把這兩條藏起來,因為它們是這個方案真正的代價。</a:t>
             </a:r>
           </a:p>
           <a:p/>
@@ -2153,7 +2173,7 @@
           <a:lstStyle/>
           <a:p>
             <a:r>
-              <a:t>【第 9 頁 · P8 · 怎麼算成功:三層 KPI,一條回圈】　目標 46 秒 · 累計 8:24</a:t>
+              <a:t>【第 9 頁 · P8 · 怎麼算成功:三層 KPI,一條回圈】　目標 46 秒 · 累計 8:54</a:t>
             </a:r>
           </a:p>
           <a:p/>
@@ -14393,7 +14413,7 @@
                 </a:solidFill>
                 <a:latin typeface="Microsoft JhengHei"/>
               </a:rPr>
-              <a:t>五條路的差別在成本形狀,不在做什麼</a:t>
+              <a:t>五條路我都算過 —— 加人的成本跟量一起長,AI 是前期投入一次</a:t>
             </a:r>
           </a:p>
         </p:txBody>
@@ -14432,7 +14452,7 @@
                 </a:solidFill>
                 <a:latin typeface="Microsoft JhengHei"/>
               </a:rPr>
-              <a:t>三條不用 AI;採用案要過三道門,六個月內不對外生效</a:t>
+              <a:t>三條不用 AI;而差別不在做什麼,在「量變大的時候會怎樣」跟「能不能反悔」</a:t>
             </a:r>
           </a:p>
         </p:txBody>
@@ -14500,11 +14520,11 @@
                 <a:tableStyleId>{5C22544A-7EE6-4342-B048-85BDC9FD1C3A}</a:tableStyleId>
               </a:tblPr>
               <a:tblGrid>
-                <a:gridCol w="3262487"/>
-                <a:gridCol w="1903117"/>
-                <a:gridCol w="1903117"/>
-                <a:gridCol w="1903117"/>
-                <a:gridCol w="1903117"/>
+                <a:gridCol w="2174991"/>
+                <a:gridCol w="2174991"/>
+                <a:gridCol w="2174991"/>
+                <a:gridCol w="2174991"/>
+                <a:gridCol w="2174991"/>
               </a:tblGrid>
               <a:tr h="329184">
                 <a:tc>
@@ -14566,7 +14586,7 @@
                           </a:solidFill>
                           <a:latin typeface="Microsoft JhengHei"/>
                         </a:rPr>
-                        <a:t>成本形狀(隨每日事件量怎麼長)</a:t>
+                        <a:t>量變大時成本怎麼長</a:t>
                       </a:r>
                     </a:p>
                   </a:txBody>
@@ -14589,7 +14609,7 @@
                           </a:solidFill>
                           <a:latin typeface="Microsoft JhengHei"/>
                         </a:rPr>
-                        <a:t>能不能停 · 反悔成本</a:t>
+                        <a:t>能不能反悔</a:t>
                       </a:r>
                     </a:p>
                   </a:txBody>
@@ -14612,7 +14632,7 @@
                           </a:solidFill>
                           <a:latin typeface="Microsoft JhengHei"/>
                         </a:rPr>
-                        <a:t>判決 · 為什麼</a:t>
+                        <a:t>判決</a:t>
                       </a:r>
                     </a:p>
                   </a:txBody>
@@ -14631,13 +14651,130 @@
                     <a:p>
                       <a:pPr algn="l"/>
                       <a:r>
+                        <a:rPr sz="1200" b="1">
+                          <a:solidFill>
+                            <a:srgbClr val="C00000"/>
+                          </a:solidFill>
+                          <a:latin typeface="Microsoft JhengHei"/>
+                        </a:rPr>
+                        <a:t>① 加人</a:t>
+                      </a:r>
+                    </a:p>
+                  </a:txBody>
+                  <a:tcPr marL="45720" marR="45720" marT="18288" marB="18288" anchor="ctr">
+                    <a:solidFill>
+                      <a:srgbClr val="FBEFEF"/>
+                    </a:solidFill>
+                  </a:tcPr>
+                </a:tc>
+                <a:tc>
+                  <a:txBody>
+                    <a:bodyPr/>
+                    <a:lstStyle/>
+                    <a:p>
+                      <a:pPr algn="ctr"/>
+                      <a:r>
+                        <a:rPr sz="1200" b="0">
+                          <a:solidFill>
+                            <a:srgbClr val="C00000"/>
+                          </a:solidFill>
+                          <a:latin typeface="Microsoft JhengHei"/>
+                        </a:rPr>
+                        <a:t>增聘複核人力,覆蓋全客戶</a:t>
+                      </a:r>
+                    </a:p>
+                  </a:txBody>
+                  <a:tcPr marL="45720" marR="45720" marT="18288" marB="18288" anchor="ctr">
+                    <a:solidFill>
+                      <a:srgbClr val="FBEFEF"/>
+                    </a:solidFill>
+                  </a:tcPr>
+                </a:tc>
+                <a:tc>
+                  <a:txBody>
+                    <a:bodyPr/>
+                    <a:lstStyle/>
+                    <a:p>
+                      <a:pPr algn="ctr"/>
+                      <a:r>
+                        <a:rPr sz="1200" b="0">
+                          <a:solidFill>
+                            <a:srgbClr val="C00000"/>
+                          </a:solidFill>
+                          <a:latin typeface="Microsoft JhengHei"/>
+                        </a:rPr>
+                        <a:t>量幾倍,人就幾倍 → 要 17…</a:t>
+                      </a:r>
+                    </a:p>
+                  </a:txBody>
+                  <a:tcPr marL="45720" marR="45720" marT="18288" marB="18288" anchor="ctr">
+                    <a:solidFill>
+                      <a:srgbClr val="FBEFEF"/>
+                    </a:solidFill>
+                  </a:tcPr>
+                </a:tc>
+                <a:tc>
+                  <a:txBody>
+                    <a:bodyPr/>
+                    <a:lstStyle/>
+                    <a:p>
+                      <a:pPr algn="ctr"/>
+                      <a:r>
+                        <a:rPr sz="1200" b="0">
+                          <a:solidFill>
+                            <a:srgbClr val="C00000"/>
+                          </a:solidFill>
+                          <a:latin typeface="Microsoft JhengHei"/>
+                        </a:rPr>
+                        <a:t>停不下來,編制是常態支出</a:t>
+                      </a:r>
+                    </a:p>
+                  </a:txBody>
+                  <a:tcPr marL="45720" marR="45720" marT="18288" marB="18288" anchor="ctr">
+                    <a:solidFill>
+                      <a:srgbClr val="FBEFEF"/>
+                    </a:solidFill>
+                  </a:tcPr>
+                </a:tc>
+                <a:tc>
+                  <a:txBody>
+                    <a:bodyPr/>
+                    <a:lstStyle/>
+                    <a:p>
+                      <a:pPr algn="ctr"/>
+                      <a:r>
+                        <a:rPr sz="1200" b="0">
+                          <a:solidFill>
+                            <a:srgbClr val="C00000"/>
+                          </a:solidFill>
+                          <a:latin typeface="Microsoft JhengHei"/>
+                        </a:rPr>
+                        <a:t>❌ 拒絕</a:t>
+                      </a:r>
+                    </a:p>
+                  </a:txBody>
+                  <a:tcPr marL="45720" marR="45720" marT="18288" marB="18288" anchor="ctr">
+                    <a:solidFill>
+                      <a:srgbClr val="FBEFEF"/>
+                    </a:solidFill>
+                  </a:tcPr>
+                </a:tc>
+              </a:tr>
+              <a:tr h="292608">
+                <a:tc>
+                  <a:txBody>
+                    <a:bodyPr/>
+                    <a:lstStyle/>
+                    <a:p>
+                      <a:pPr algn="l"/>
+                      <a:r>
                         <a:rPr sz="1200" b="0">
                           <a:solidFill>
                             <a:srgbClr val="16212E"/>
                           </a:solidFill>
                           <a:latin typeface="Microsoft JhengHei"/>
                         </a:rPr>
-                        <a:t>選項 0｜加人</a:t>
+                        <a:t>② 調班 + 尖峰支援</a:t>
                       </a:r>
                     </a:p>
                   </a:txBody>
@@ -14660,7 +14797,7 @@
                           </a:solidFill>
                           <a:latin typeface="Microsoft JhengHei"/>
                         </a:rPr>
-                        <a:t>增聘複核人力 全客戶</a:t>
+                        <a:t>徵調的 7 位研發轉正式編組</a:t>
                       </a:r>
                     </a:p>
                   </a:txBody>
@@ -14683,7 +14820,7 @@
                           </a:solidFill>
                           <a:latin typeface="Microsoft JhengHei"/>
                         </a:rPr>
-                        <a:t>線性→17-24 人 推算</a:t>
+                        <a:t>一樣跟量走,只是便宜一點</a:t>
                       </a:r>
                     </a:p>
                   </a:txBody>
@@ -14706,7 +14843,7 @@
                           </a:solidFill>
                           <a:latin typeface="Microsoft JhengHei"/>
                         </a:rPr>
-                        <a:t>停不下來 常態支出</a:t>
+                        <a:t>隨時可停,退回原班表</a:t>
                       </a:r>
                     </a:p>
                   </a:txBody>
@@ -14729,7 +14866,7 @@
                           </a:solidFill>
                           <a:latin typeface="Microsoft JhengHei"/>
                         </a:rPr>
-                        <a:t>拒絕 同一條成本曲線</a:t>
+                        <a:t>待第 6 週決定</a:t>
                       </a:r>
                     </a:p>
                   </a:txBody>
@@ -14754,7 +14891,7 @@
                           </a:solidFill>
                           <a:latin typeface="Microsoft JhengHei"/>
                         </a:rPr>
-                        <a:t>選項 0b｜調班 + 尖峰人力池</a:t>
+                        <a:t>③ 規則式比對</a:t>
                       </a:r>
                     </a:p>
                   </a:txBody>
@@ -14777,7 +14914,7 @@
                           </a:solidFill>
                           <a:latin typeface="Microsoft JhengHei"/>
                         </a:rPr>
-                        <a:t>徵調 7 位轉正式編組</a:t>
+                        <a:t>定位 + 地圖速限硬比對…</a:t>
                       </a:r>
                     </a:p>
                   </a:txBody>
@@ -14800,7 +14937,7 @@
                           </a:solidFill>
                           <a:latin typeface="Microsoft JhengHei"/>
                         </a:rPr>
-                        <a:t>仍線性 略低 未量測</a:t>
+                        <a:t>降一階,但還是跟量走</a:t>
                       </a:r>
                     </a:p>
                   </a:txBody>
@@ -14823,7 +14960,7 @@
                           </a:solidFill>
                           <a:latin typeface="Microsoft JhengHei"/>
                         </a:rPr>
-                        <a:t>隨時可停 退回原班表</a:t>
+                        <a:t>可逐條檢查、可回退</a:t>
                       </a:r>
                     </a:p>
                   </a:txBody>
@@ -14846,124 +14983,7 @@
                           </a:solidFill>
                           <a:latin typeface="Microsoft JhengHei"/>
                         </a:rPr>
-                        <a:t>待 G1｜不預先否決</a:t>
-                      </a:r>
-                    </a:p>
-                  </a:txBody>
-                  <a:tcPr marL="45720" marR="45720" marT="18288" marB="18288" anchor="ctr">
-                    <a:solidFill>
-                      <a:srgbClr val="FFFFFF"/>
-                    </a:solidFill>
-                  </a:tcPr>
-                </a:tc>
-              </a:tr>
-              <a:tr h="292608">
-                <a:tc>
-                  <a:txBody>
-                    <a:bodyPr/>
-                    <a:lstStyle/>
-                    <a:p>
-                      <a:pPr algn="l"/>
-                      <a:r>
-                        <a:rPr sz="1200" b="0">
-                          <a:solidFill>
-                            <a:srgbClr val="16212E"/>
-                          </a:solidFill>
-                          <a:latin typeface="Microsoft JhengHei"/>
-                        </a:rPr>
-                        <a:t>選項 1｜規則式脈絡融合</a:t>
-                      </a:r>
-                    </a:p>
-                  </a:txBody>
-                  <a:tcPr marL="45720" marR="45720" marT="18288" marB="18288" anchor="ctr">
-                    <a:solidFill>
-                      <a:srgbClr val="FFFFFF"/>
-                    </a:solidFill>
-                  </a:tcPr>
-                </a:tc>
-                <a:tc>
-                  <a:txBody>
-                    <a:bodyPr/>
-                    <a:lstStyle/>
-                    <a:p>
-                      <a:pPr algn="ctr"/>
-                      <a:r>
-                        <a:rPr sz="1200" b="0">
-                          <a:solidFill>
-                            <a:srgbClr val="6B7885"/>
-                          </a:solidFill>
-                          <a:latin typeface="Microsoft JhengHei"/>
-                        </a:rPr>
-                        <a:t>定位+地圖速限硬規則</a:t>
-                      </a:r>
-                    </a:p>
-                  </a:txBody>
-                  <a:tcPr marL="45720" marR="45720" marT="18288" marB="18288" anchor="ctr">
-                    <a:solidFill>
-                      <a:srgbClr val="FFFFFF"/>
-                    </a:solidFill>
-                  </a:tcPr>
-                </a:tc>
-                <a:tc>
-                  <a:txBody>
-                    <a:bodyPr/>
-                    <a:lstStyle/>
-                    <a:p>
-                      <a:pPr algn="ctr"/>
-                      <a:r>
-                        <a:rPr sz="1200" b="0">
-                          <a:solidFill>
-                            <a:srgbClr val="6B7885"/>
-                          </a:solidFill>
-                          <a:latin typeface="Microsoft JhengHei"/>
-                        </a:rPr>
-                        <a:t>下移一階 後仍線性</a:t>
-                      </a:r>
-                    </a:p>
-                  </a:txBody>
-                  <a:tcPr marL="45720" marR="45720" marT="18288" marB="18288" anchor="ctr">
-                    <a:solidFill>
-                      <a:srgbClr val="FFFFFF"/>
-                    </a:solidFill>
-                  </a:tcPr>
-                </a:tc>
-                <a:tc>
-                  <a:txBody>
-                    <a:bodyPr/>
-                    <a:lstStyle/>
-                    <a:p>
-                      <a:pPr algn="ctr"/>
-                      <a:r>
-                        <a:rPr sz="1200" b="0">
-                          <a:solidFill>
-                            <a:srgbClr val="6B7885"/>
-                          </a:solidFill>
-                          <a:latin typeface="Microsoft JhengHei"/>
-                        </a:rPr>
-                        <a:t>可逐條檢查 可回退</a:t>
-                      </a:r>
-                    </a:p>
-                  </a:txBody>
-                  <a:tcPr marL="45720" marR="45720" marT="18288" marB="18288" anchor="ctr">
-                    <a:solidFill>
-                      <a:srgbClr val="FFFFFF"/>
-                    </a:solidFill>
-                  </a:tcPr>
-                </a:tc>
-                <a:tc>
-                  <a:txBody>
-                    <a:bodyPr/>
-                    <a:lstStyle/>
-                    <a:p>
-                      <a:pPr algn="ctr"/>
-                      <a:r>
-                        <a:rPr sz="1200" b="0">
-                          <a:solidFill>
-                            <a:srgbClr val="6B7885"/>
-                          </a:solidFill>
-                          <a:latin typeface="Microsoft JhengHei"/>
-                        </a:rPr>
-                        <a:t>先做 樣本83%同根因</a:t>
+                        <a:t>✅ 先做</a:t>
                       </a:r>
                     </a:p>
                   </a:txBody>
@@ -14988,7 +15008,7 @@
                           </a:solidFill>
                           <a:latin typeface="Microsoft JhengHei"/>
                         </a:rPr>
-                        <a:t>選項 2｜地端視覺語言模型事件判讀</a:t>
+                        <a:t>④ 地端 AI 事件判讀</a:t>
                       </a:r>
                     </a:p>
                   </a:txBody>
@@ -15011,7 +15031,7 @@
                           </a:solidFill>
                           <a:latin typeface="Microsoft JhengHei"/>
                         </a:rPr>
-                        <a:t>讀懂事件脈絡 證據包</a:t>
+                        <a:t>讀懂事件脈絡,產出證據包</a:t>
                       </a:r>
                     </a:p>
                   </a:txBody>
@@ -15034,7 +15054,7 @@
                           </a:solidFill>
                           <a:latin typeface="Microsoft JhengHei"/>
                         </a:rPr>
-                        <a:t>前期投入 之後次線性</a:t>
+                        <a:t>前期投入一次,之後量長也…</a:t>
                       </a:r>
                     </a:p>
                   </a:txBody>
@@ -15057,7 +15077,7 @@
                           </a:solidFill>
                           <a:latin typeface="Microsoft JhengHei"/>
                         </a:rPr>
-                        <a:t>可停:G1G2G3 對外0%</a:t>
+                        <a:t>三個檢查點都可以停</a:t>
                       </a:r>
                     </a:p>
                   </a:txBody>
@@ -15080,7 +15100,7 @@
                           </a:solidFill>
                           <a:latin typeface="Microsoft JhengHei"/>
                         </a:rPr>
-                        <a:t>採用 前三包=評估</a:t>
+                        <a:t>✅ 採用</a:t>
                       </a:r>
                     </a:p>
                   </a:txBody>
@@ -15105,7 +15125,7 @@
                           </a:solidFill>
                           <a:latin typeface="Microsoft JhengHei"/>
                         </a:rPr>
-                        <a:t>選項 3｜公司既有雲端判讀規劃</a:t>
+                        <a:t>⑤ 公司既有雲端規劃</a:t>
                       </a:r>
                     </a:p>
                   </a:txBody>
@@ -15151,7 +15171,7 @@
                           </a:solidFill>
                           <a:latin typeface="Microsoft JhengHei"/>
                         </a:rPr>
-                        <a:t>尚未開始 曲線未定</a:t>
+                        <a:t>還沒開始,曲線未定</a:t>
                       </a:r>
                     </a:p>
                   </a:txBody>
@@ -15174,7 +15194,7 @@
                           </a:solidFill>
                           <a:latin typeface="Microsoft JhengHei"/>
                         </a:rPr>
-                        <a:t>本案外 技術長辦公室</a:t>
+                        <a:t>不在本案範圍</a:t>
                       </a:r>
                     </a:p>
                   </a:txBody>
@@ -15197,7 +15217,7 @@
                           </a:solidFill>
                           <a:latin typeface="Microsoft JhengHei"/>
                         </a:rPr>
-                        <a:t>前置條件 非競爭關係</a:t>
+                        <a:t>前置條件,不是競爭</a:t>
                       </a:r>
                     </a:p>
                   </a:txBody>
@@ -15221,7 +15241,7 @@
         <p:spPr>
           <a:xfrm>
             <a:off x="658368" y="3675887"/>
-            <a:ext cx="3527450" cy="2121408"/>
+            <a:ext cx="5364327" cy="2121408"/>
           </a:xfrm>
           <a:prstGeom prst="roundRect">
             <a:avLst>
@@ -15233,7 +15253,7 @@
           </a:solidFill>
           <a:ln w="20320">
             <a:solidFill>
-              <a:srgbClr val="C00000"/>
+              <a:srgbClr val="1F4E79"/>
             </a:solidFill>
           </a:ln>
           <a:effectLst/>
@@ -15269,7 +15289,7 @@
         <p:spPr>
           <a:xfrm>
             <a:off x="768096" y="3803903"/>
-            <a:ext cx="3307994" cy="566928"/>
+            <a:ext cx="5144871" cy="566928"/>
           </a:xfrm>
           <a:prstGeom prst="rect">
             <a:avLst/>
@@ -15294,7 +15314,7 @@
                 </a:solidFill>
                 <a:latin typeface="Microsoft JhengHei"/>
               </a:rPr>
-              <a:t>選項 0 的算式(照印,含對本案不利的部分)</a:t>
+              <a:t>① 加人要幾個人 —— 算式照印</a:t>
             </a:r>
           </a:p>
         </p:txBody>
@@ -15307,8 +15327,8 @@
         </p:nvSpPr>
         <p:spPr>
           <a:xfrm>
-            <a:off x="1566367" y="4425696"/>
-            <a:ext cx="1711452" cy="274320"/>
+            <a:off x="2637205" y="4425696"/>
+            <a:ext cx="1406652" cy="274320"/>
           </a:xfrm>
           <a:prstGeom prst="roundRect">
             <a:avLst>
@@ -15316,7 +15336,7 @@
             </a:avLst>
           </a:prstGeom>
           <a:solidFill>
-            <a:srgbClr val="C00000"/>
+            <a:srgbClr val="1F4E79"/>
           </a:solidFill>
           <a:ln>
             <a:noFill/>
@@ -15353,8 +15373,8 @@
         </p:nvSpPr>
         <p:spPr>
           <a:xfrm>
-            <a:off x="1566367" y="4425696"/>
-            <a:ext cx="1711452" cy="274320"/>
+            <a:off x="2637205" y="4425696"/>
+            <a:ext cx="1406652" cy="274320"/>
           </a:xfrm>
           <a:prstGeom prst="rect">
             <a:avLst/>
@@ -15379,7 +15399,7 @@
                 </a:solidFill>
                 <a:latin typeface="Microsoft JhengHei"/>
               </a:rPr>
-              <a:t>提案推算,非核定編制</a:t>
+              <a:t>推算,非核定編制</a:t>
             </a:r>
           </a:p>
         </p:txBody>
@@ -15393,7 +15413,7 @@
         <p:spPr>
           <a:xfrm>
             <a:off x="768096" y="4809744"/>
-            <a:ext cx="3307994" cy="859535"/>
+            <a:ext cx="5144871" cy="859535"/>
           </a:xfrm>
           <a:prstGeom prst="rect">
             <a:avLst/>
@@ -15418,7 +15438,7 @@
                 </a:solidFill>
                 <a:latin typeface="Microsoft JhengHei"/>
               </a:rPr>
-              <a:t>144 人時÷1,647 筆=5.25 分〔非長期均值〕</a:t>
+              <a:t>144 人時 ÷ 1,647 筆 = 5.25 分/筆〔單一批次,非長期均值〕</a:t>
             </a:r>
           </a:p>
           <a:p>
@@ -15434,7 +15454,7 @@
                 </a:solidFill>
                 <a:latin typeface="Microsoft JhengHei"/>
               </a:rPr>
-              <a:t>129.1-185.9÷8=16.14-23.24 → 17-24 人</a:t>
+              <a:t>129.1–185.9 人時 ÷ 8 小時 = 16.14–23.24 → 取整 17–24 人</a:t>
             </a:r>
           </a:p>
           <a:p>
@@ -15450,7 +15470,7 @@
                 </a:solidFill>
                 <a:latin typeface="Microsoft JhengHei"/>
               </a:rPr>
-              <a:t>兩假設未驗證:20 秒/筆 · 全客戶同案件組合</a:t>
+              <a:t>兩個假設還沒驗:20 秒/筆 · 全客戶同樣的案件組合</a:t>
             </a:r>
           </a:p>
         </p:txBody>
@@ -15463,8 +15483,8 @@
         </p:nvSpPr>
         <p:spPr>
           <a:xfrm>
-            <a:off x="4332122" y="3675887"/>
-            <a:ext cx="3527450" cy="2121408"/>
+            <a:off x="6168999" y="3675887"/>
+            <a:ext cx="5364327" cy="2121408"/>
           </a:xfrm>
           <a:prstGeom prst="roundRect">
             <a:avLst>
@@ -15476,7 +15496,7 @@
           </a:solidFill>
           <a:ln w="20320">
             <a:solidFill>
-              <a:srgbClr val="1F4E79"/>
+              <a:srgbClr val="E8833A"/>
             </a:solidFill>
           </a:ln>
           <a:effectLst/>
@@ -15511,8 +15531,8 @@
         </p:nvSpPr>
         <p:spPr>
           <a:xfrm>
-            <a:off x="4441850" y="3803903"/>
-            <a:ext cx="3307994" cy="566928"/>
+            <a:off x="6278727" y="3803903"/>
+            <a:ext cx="5144871" cy="566928"/>
           </a:xfrm>
           <a:prstGeom prst="rect">
             <a:avLst/>
@@ -15537,7 +15557,7 @@
                 </a:solidFill>
                 <a:latin typeface="Microsoft JhengHei"/>
               </a:rPr>
-              <a:t>G1(第 6 週)= 因果判定門</a:t>
+              <a:t>第 6 週的檢查點 —— 這一關沒過就不往下做</a:t>
             </a:r>
           </a:p>
         </p:txBody>
@@ -15550,7 +15570,7 @@
         </p:nvSpPr>
         <p:spPr>
           <a:xfrm>
-            <a:off x="5684367" y="4425696"/>
+            <a:off x="8439683" y="4425696"/>
             <a:ext cx="822960" cy="274320"/>
           </a:xfrm>
           <a:prstGeom prst="roundRect">
@@ -15559,7 +15579,7 @@
             </a:avLst>
           </a:prstGeom>
           <a:solidFill>
-            <a:srgbClr val="1F4E79"/>
+            <a:srgbClr val="E8833A"/>
           </a:solidFill>
           <a:ln>
             <a:noFill/>
@@ -15596,7 +15616,7 @@
         </p:nvSpPr>
         <p:spPr>
           <a:xfrm>
-            <a:off x="5684367" y="4425696"/>
+            <a:off x="8439683" y="4425696"/>
             <a:ext cx="822960" cy="274320"/>
           </a:xfrm>
           <a:prstGeom prst="rect">
@@ -15635,8 +15655,8 @@
         </p:nvSpPr>
         <p:spPr>
           <a:xfrm>
-            <a:off x="4441850" y="4809744"/>
-            <a:ext cx="3307994" cy="859535"/>
+            <a:off x="6278727" y="4809744"/>
+            <a:ext cx="5144871" cy="859535"/>
           </a:xfrm>
           <a:prstGeom prst="rect">
             <a:avLst/>
@@ -15661,7 +15681,7 @@
                 </a:solidFill>
                 <a:latin typeface="Microsoft JhengHei"/>
               </a:rPr>
-              <a:t>W1-6 交:時間拆解 · 兩天逾時率 · 到件分布</a:t>
+              <a:t>前六週要交:一件爭議的時間拆解 · 兩天逾時率 · 到件分布</a:t>
             </a:r>
           </a:p>
           <a:p>
@@ -15677,7 +15697,7 @@
                 </a:solidFill>
                 <a:latin typeface="Microsoft JhengHei"/>
               </a:rPr>
-              <a:t>出口 A:AI 段佔主延遲 → 放行 1/2｜B → 0b</a:t>
+              <a:t>如果「找證據 + 判讀」真的是主要延遲 → 往下做 ③ 跟 ④</a:t>
             </a:r>
           </a:p>
           <a:p>
@@ -15693,7 +15713,7 @@
                 </a:solidFill>
                 <a:latin typeface="Microsoft JhengHei"/>
               </a:rPr>
-              <a:t>50%-87.5% 為初估,非系統量測;判準不放寬</a:t>
+              <a:t>如果不是 → 改做 ② 調班方案,後面全部不執行</a:t>
             </a:r>
           </a:p>
         </p:txBody>
@@ -15706,8 +15726,8 @@
         </p:nvSpPr>
         <p:spPr>
           <a:xfrm>
-            <a:off x="8005876" y="3675887"/>
-            <a:ext cx="3527450" cy="2121408"/>
+            <a:off x="658368" y="5925312"/>
+            <a:ext cx="9658807" cy="585215"/>
           </a:xfrm>
           <a:prstGeom prst="roundRect">
             <a:avLst>
@@ -15715,12 +15735,10 @@
             </a:avLst>
           </a:prstGeom>
           <a:solidFill>
-            <a:srgbClr val="EAF1F8"/>
+            <a:srgbClr val="1F4E79"/>
           </a:solidFill>
-          <a:ln w="38100">
-            <a:solidFill>
-              <a:srgbClr val="1F4E79"/>
-            </a:solidFill>
+          <a:ln>
+            <a:noFill/>
           </a:ln>
           <a:effectLst/>
         </p:spPr>
@@ -15754,249 +15772,8 @@
         </p:nvSpPr>
         <p:spPr>
           <a:xfrm>
-            <a:off x="8115604" y="3803903"/>
-            <a:ext cx="3307994" cy="566928"/>
-          </a:xfrm>
-          <a:prstGeom prst="rect">
-            <a:avLst/>
-          </a:prstGeom>
-          <a:noFill/>
-        </p:spPr>
-        <p:txBody>
-          <a:bodyPr wrap="square" lIns="0" rIns="0" tIns="0" bIns="0" anchor="t">
-            <a:spAutoFit/>
-          </a:bodyPr>
-          <a:lstStyle/>
-          <a:p>
-            <a:pPr algn="ctr">
-              <a:lnSpc>
-                <a:spcPct val="125000"/>
-              </a:lnSpc>
-            </a:pPr>
-            <a:r>
-              <a:rPr sz="1500" b="1">
-                <a:solidFill>
-                  <a:srgbClr val="16212E"/>
-                </a:solidFill>
-                <a:latin typeface="Microsoft JhengHei"/>
-              </a:rPr>
-              <a:t>這 85% 到底是什麼(三層,一層都不可省)</a:t>
-            </a:r>
-          </a:p>
-        </p:txBody>
-      </p:sp>
-      <p:sp>
-        <p:nvSpPr>
-          <p:cNvPr id="19" name="Rounded Rectangle 18"/>
-          <p:cNvSpPr/>
-          <p:nvPr/>
-        </p:nvSpPr>
-        <p:spPr>
-          <a:xfrm>
-            <a:off x="9066276" y="4425696"/>
-            <a:ext cx="1406652" cy="274320"/>
-          </a:xfrm>
-          <a:prstGeom prst="roundRect">
-            <a:avLst>
-              <a:gd name="adj" fmla="val 6000"/>
-            </a:avLst>
-          </a:prstGeom>
-          <a:solidFill>
-            <a:srgbClr val="1F4E79"/>
-          </a:solidFill>
-          <a:ln>
-            <a:noFill/>
-          </a:ln>
-          <a:effectLst/>
-        </p:spPr>
-        <p:style>
-          <a:lnRef idx="1">
-            <a:schemeClr val="accent1"/>
-          </a:lnRef>
-          <a:fillRef idx="3">
-            <a:schemeClr val="accent1"/>
-          </a:fillRef>
-          <a:effectRef idx="2">
-            <a:schemeClr val="accent1"/>
-          </a:effectRef>
-          <a:fontRef idx="minor">
-            <a:schemeClr val="lt1"/>
-          </a:fontRef>
-        </p:style>
-        <p:txBody>
-          <a:bodyPr rtlCol="0" anchor="ctr"/>
-          <a:lstStyle/>
-          <a:p>
-            <a:pPr algn="ctr"/>
-          </a:p>
-        </p:txBody>
-      </p:sp>
-      <p:sp>
-        <p:nvSpPr>
-          <p:cNvPr id="20" name="TextBox 19"/>
-          <p:cNvSpPr txBox="1"/>
-          <p:nvPr/>
-        </p:nvSpPr>
-        <p:spPr>
-          <a:xfrm>
-            <a:off x="9066276" y="4425696"/>
-            <a:ext cx="1406652" cy="274320"/>
-          </a:xfrm>
-          <a:prstGeom prst="rect">
-            <a:avLst/>
-          </a:prstGeom>
-          <a:noFill/>
-        </p:spPr>
-        <p:txBody>
-          <a:bodyPr wrap="square" lIns="0" rIns="0" tIns="0" bIns="0" anchor="ctr">
-            <a:spAutoFit/>
-          </a:bodyPr>
-          <a:lstStyle/>
-          <a:p>
-            <a:pPr algn="ctr">
-              <a:lnSpc>
-                <a:spcPct val="125000"/>
-              </a:lnSpc>
-            </a:pPr>
-            <a:r>
-              <a:rPr sz="1200" b="1">
-                <a:solidFill>
-                  <a:srgbClr val="FFFFFF"/>
-                </a:solidFill>
-                <a:latin typeface="Microsoft JhengHei"/>
-              </a:rPr>
-              <a:t>提案推估,非實測</a:t>
-            </a:r>
-          </a:p>
-        </p:txBody>
-      </p:sp>
-      <p:sp>
-        <p:nvSpPr>
-          <p:cNvPr id="21" name="TextBox 20"/>
-          <p:cNvSpPr txBox="1"/>
-          <p:nvPr/>
-        </p:nvSpPr>
-        <p:spPr>
-          <a:xfrm>
-            <a:off x="8115604" y="4809744"/>
-            <a:ext cx="3307994" cy="859535"/>
-          </a:xfrm>
-          <a:prstGeom prst="rect">
-            <a:avLst/>
-          </a:prstGeom>
-          <a:noFill/>
-        </p:spPr>
-        <p:txBody>
-          <a:bodyPr wrap="square" lIns="0" rIns="0" tIns="0" bIns="0" anchor="t">
-            <a:spAutoFit/>
-          </a:bodyPr>
-          <a:lstStyle/>
-          <a:p>
-            <a:pPr algn="ctr">
-              <a:lnSpc>
-                <a:spcPct val="135000"/>
-              </a:lnSpc>
-            </a:pPr>
-            <a:r>
-              <a:rPr sz="1200" b="0">
-                <a:solidFill>
-                  <a:srgbClr val="6B7885"/>
-                </a:solidFill>
-                <a:latin typeface="Microsoft JhengHei"/>
-              </a:rPr>
-              <a:t>能力層:約 850 筆機器結案=終局判定</a:t>
-            </a:r>
-          </a:p>
-          <a:p>
-            <a:pPr algn="ctr">
-              <a:lnSpc>
-                <a:spcPct val="135000"/>
-              </a:lnSpc>
-            </a:pPr>
-            <a:r>
-              <a:rPr sz="1200" b="0">
-                <a:solidFill>
-                  <a:srgbClr val="6B7885"/>
-                </a:solidFill>
-                <a:latin typeface="Microsoft JhengHei"/>
-              </a:rPr>
-              <a:t>本案層:六個月對外 0%,只跑影子模式</a:t>
-            </a:r>
-          </a:p>
-          <a:p>
-            <a:pPr algn="ctr">
-              <a:lnSpc>
-                <a:spcPct val="135000"/>
-              </a:lnSpc>
-            </a:pPr>
-            <a:r>
-              <a:rPr sz="1200" b="0">
-                <a:solidFill>
-                  <a:srgbClr val="6B7885"/>
-                </a:solidFill>
-                <a:latin typeface="Microsoft JhengHei"/>
-              </a:rPr>
-              <a:t>放行層:生效須過本案之外一道獨立門</a:t>
-            </a:r>
-          </a:p>
-        </p:txBody>
-      </p:sp>
-      <p:sp>
-        <p:nvSpPr>
-          <p:cNvPr id="22" name="Rounded Rectangle 21"/>
-          <p:cNvSpPr/>
-          <p:nvPr/>
-        </p:nvSpPr>
-        <p:spPr>
-          <a:xfrm>
-            <a:off x="658368" y="5925312"/>
-            <a:ext cx="9658807" cy="585216"/>
-          </a:xfrm>
-          <a:prstGeom prst="roundRect">
-            <a:avLst>
-              <a:gd name="adj" fmla="val 6000"/>
-            </a:avLst>
-          </a:prstGeom>
-          <a:solidFill>
-            <a:srgbClr val="C00000"/>
-          </a:solidFill>
-          <a:ln>
-            <a:noFill/>
-          </a:ln>
-          <a:effectLst/>
-        </p:spPr>
-        <p:style>
-          <a:lnRef idx="1">
-            <a:schemeClr val="accent1"/>
-          </a:lnRef>
-          <a:fillRef idx="3">
-            <a:schemeClr val="accent1"/>
-          </a:fillRef>
-          <a:effectRef idx="2">
-            <a:schemeClr val="accent1"/>
-          </a:effectRef>
-          <a:fontRef idx="minor">
-            <a:schemeClr val="lt1"/>
-          </a:fontRef>
-        </p:style>
-        <p:txBody>
-          <a:bodyPr rtlCol="0" anchor="ctr"/>
-          <a:lstStyle/>
-          <a:p>
-            <a:pPr algn="ctr"/>
-          </a:p>
-        </p:txBody>
-      </p:sp>
-      <p:sp>
-        <p:nvSpPr>
-          <p:cNvPr id="23" name="TextBox 22"/>
-          <p:cNvSpPr txBox="1"/>
-          <p:nvPr/>
-        </p:nvSpPr>
-        <p:spPr>
-          <a:xfrm>
             <a:off x="841247" y="5925312"/>
-            <a:ext cx="9293047" cy="585216"/>
+            <a:ext cx="9293047" cy="585215"/>
           </a:xfrm>
           <a:prstGeom prst="rect">
             <a:avLst/>
@@ -16021,7 +15798,7 @@
                 </a:solidFill>
                 <a:latin typeface="Microsoft JhengHei"/>
               </a:rPr>
-              <a:t>⚠️ 85% 是分流率 → 要不要人細看,不是是不是誤報;不可與誤報率相減 · 人判得多準沒量過</a:t>
+              <a:t>加人的成本跟量一起長,而且停不下來;AI 是前期投入一次,而且三個檢查點都能喊停</a:t>
             </a:r>
           </a:p>
         </p:txBody>
@@ -16117,7 +15894,7 @@
                 </a:solidFill>
                 <a:latin typeface="Microsoft JhengHei"/>
               </a:rPr>
-              <a:t>十條風險,兩條是這個方案自己造成的</a:t>
+              <a:t>八條風險,前三條是 AI 特有的 —— 每一條都寫了怎麼知道它發生了</a:t>
             </a:r>
           </a:p>
         </p:txBody>
@@ -16156,7 +15933,7 @@
                 </a:solidFill>
                 <a:latin typeface="Microsoft JhengHei"/>
               </a:rPr>
-              <a:t>七類十條,每列並排緩解 → 代價 → 偵測訊號(成功 = 緩解成功可能性)</a:t>
+              <a:t>R9 · R10(自動結案造成的)已隨那條線一起拿掉;剩下八條,只有 R8 沒有解</a:t>
             </a:r>
           </a:p>
         </p:txBody>
@@ -16215,7 +15992,7 @@
         </p:nvGraphicFramePr>
         <p:xfrm>
           <a:off x="658368" y="1755648"/>
-          <a:ext cx="10874956" cy="3255264"/>
+          <a:ext cx="10874956" cy="2670048"/>
         </p:xfrm>
         <a:graphic>
           <a:graphicData uri="http://schemas.openxmlformats.org/drawingml/2006/table">
@@ -16266,7 +16043,7 @@
                           </a:solidFill>
                           <a:latin typeface="Microsoft JhengHei"/>
                         </a:rPr>
-                        <a:t>緩解(治理四道)</a:t>
+                        <a:t>怎麼防</a:t>
                       </a:r>
                     </a:p>
                   </a:txBody>
@@ -16289,7 +16066,7 @@
                           </a:solidFill>
                           <a:latin typeface="Microsoft JhengHei"/>
                         </a:rPr>
-                        <a:t>緩解自己的代價</a:t>
+                        <a:t>防的代價</a:t>
                       </a:r>
                     </a:p>
                   </a:txBody>
@@ -16312,7 +16089,1121 @@
                           </a:solidFill>
                           <a:latin typeface="Microsoft JhengHei"/>
                         </a:rPr>
-                        <a:t>偵測訊號 (NIST, 2023)</a:t>
+                        <a:t>怎麼知道它發生了</a:t>
+                      </a:r>
+                    </a:p>
+                  </a:txBody>
+                  <a:tcPr marL="45720" marR="45720" marT="18288" marB="18288" anchor="ctr">
+                    <a:solidFill>
+                      <a:srgbClr val="1F4E79"/>
+                    </a:solidFill>
+                  </a:tcPr>
+                </a:tc>
+              </a:tr>
+              <a:tr h="292608">
+                <a:tc>
+                  <a:txBody>
+                    <a:bodyPr/>
+                    <a:lstStyle/>
+                    <a:p>
+                      <a:pPr algn="l"/>
+                      <a:r>
+                        <a:rPr sz="1200" b="1">
+                          <a:solidFill>
+                            <a:srgbClr val="C00000"/>
+                          </a:solidFill>
+                          <a:latin typeface="Microsoft JhengHei"/>
+                        </a:rPr>
+                        <a:t>1 機器講錯但講得很順</a:t>
+                      </a:r>
+                    </a:p>
+                  </a:txBody>
+                  <a:tcPr marL="45720" marR="45720" marT="18288" marB="18288" anchor="ctr">
+                    <a:solidFill>
+                      <a:srgbClr val="FBEFEF"/>
+                    </a:solidFill>
+                  </a:tcPr>
+                </a:tc>
+                <a:tc>
+                  <a:txBody>
+                    <a:bodyPr/>
+                    <a:lstStyle/>
+                    <a:p>
+                      <a:pPr algn="ctr"/>
+                      <a:r>
+                        <a:rPr sz="1200" b="0">
+                          <a:solidFill>
+                            <a:srgbClr val="C00000"/>
+                          </a:solidFill>
+                          <a:latin typeface="Microsoft JhengHei"/>
+                        </a:rPr>
+                        <a:t>輸出可讀描述 + 標出引用的證據</a:t>
+                      </a:r>
+                    </a:p>
+                  </a:txBody>
+                  <a:tcPr marL="45720" marR="45720" marT="18288" marB="18288" anchor="ctr">
+                    <a:solidFill>
+                      <a:srgbClr val="FBEFEF"/>
+                    </a:solidFill>
+                  </a:tcPr>
+                </a:tc>
+                <a:tc>
+                  <a:txBody>
+                    <a:bodyPr/>
+                    <a:lstStyle/>
+                    <a:p>
+                      <a:pPr algn="ctr"/>
+                      <a:r>
+                        <a:rPr sz="1200" b="0">
+                          <a:solidFill>
+                            <a:srgbClr val="C00000"/>
+                          </a:solidFill>
+                          <a:latin typeface="Microsoft JhengHei"/>
+                        </a:rPr>
+                        <a:t>錯的描述一樣通順,比錯數字難察覺</a:t>
+                      </a:r>
+                    </a:p>
+                  </a:txBody>
+                  <a:tcPr marL="45720" marR="45720" marT="18288" marB="18288" anchor="ctr">
+                    <a:solidFill>
+                      <a:srgbClr val="FBEFEF"/>
+                    </a:solidFill>
+                  </a:tcPr>
+                </a:tc>
+                <a:tc>
+                  <a:txBody>
+                    <a:bodyPr/>
+                    <a:lstStyle/>
+                    <a:p>
+                      <a:pPr algn="ctr"/>
+                      <a:r>
+                        <a:rPr sz="1200" b="0">
+                          <a:solidFill>
+                            <a:srgbClr val="C00000"/>
+                          </a:solidFill>
+                          <a:latin typeface="Microsoft JhengHei"/>
+                        </a:rPr>
+                        <a:t>人推翻機器判定的比例不降</a:t>
+                      </a:r>
+                    </a:p>
+                  </a:txBody>
+                  <a:tcPr marL="45720" marR="45720" marT="18288" marB="18288" anchor="ctr">
+                    <a:solidFill>
+                      <a:srgbClr val="FBEFEF"/>
+                    </a:solidFill>
+                  </a:tcPr>
+                </a:tc>
+              </a:tr>
+              <a:tr h="292608">
+                <a:tc>
+                  <a:txBody>
+                    <a:bodyPr/>
+                    <a:lstStyle/>
+                    <a:p>
+                      <a:pPr algn="l"/>
+                      <a:r>
+                        <a:rPr sz="1200" b="1">
+                          <a:solidFill>
+                            <a:srgbClr val="C00000"/>
+                          </a:solidFill>
+                          <a:latin typeface="Microsoft JhengHei"/>
+                        </a:rPr>
+                        <a:t>2 髒標註會一路傳下去</a:t>
+                      </a:r>
+                    </a:p>
+                  </a:txBody>
+                  <a:tcPr marL="45720" marR="45720" marT="18288" marB="18288" anchor="ctr">
+                    <a:solidFill>
+                      <a:srgbClr val="FBEFEF"/>
+                    </a:solidFill>
+                  </a:tcPr>
+                </a:tc>
+                <a:tc>
+                  <a:txBody>
+                    <a:bodyPr/>
+                    <a:lstStyle/>
+                    <a:p>
+                      <a:pPr algn="ctr"/>
+                      <a:r>
+                        <a:rPr sz="1200" b="0">
+                          <a:solidFill>
+                            <a:srgbClr val="C00000"/>
+                          </a:solidFill>
+                          <a:latin typeface="Microsoft JhengHei"/>
+                        </a:rPr>
+                        <a:t>黃金題 + 抽樣雙人複核 + 快照</a:t>
+                      </a:r>
+                    </a:p>
+                  </a:txBody>
+                  <a:tcPr marL="45720" marR="45720" marT="18288" marB="18288" anchor="ctr">
+                    <a:solidFill>
+                      <a:srgbClr val="FBEFEF"/>
+                    </a:solidFill>
+                  </a:tcPr>
+                </a:tc>
+                <a:tc>
+                  <a:txBody>
+                    <a:bodyPr/>
+                    <a:lstStyle/>
+                    <a:p>
+                      <a:pPr algn="ctr"/>
+                      <a:r>
+                        <a:rPr sz="1200" b="0">
+                          <a:solidFill>
+                            <a:srgbClr val="C00000"/>
+                          </a:solidFill>
+                          <a:latin typeface="Microsoft JhengHei"/>
+                        </a:rPr>
+                        <a:t>雙人複核成本近倍增,靠抽樣控</a:t>
+                      </a:r>
+                    </a:p>
+                  </a:txBody>
+                  <a:tcPr marL="45720" marR="45720" marT="18288" marB="18288" anchor="ctr">
+                    <a:solidFill>
+                      <a:srgbClr val="FBEFEF"/>
+                    </a:solidFill>
+                  </a:tcPr>
+                </a:tc>
+                <a:tc>
+                  <a:txBody>
+                    <a:bodyPr/>
+                    <a:lstStyle/>
+                    <a:p>
+                      <a:pPr algn="ctr"/>
+                      <a:r>
+                        <a:rPr sz="1200" b="0">
+                          <a:solidFill>
+                            <a:srgbClr val="C00000"/>
+                          </a:solidFill>
+                          <a:latin typeface="Microsoft JhengHei"/>
+                        </a:rPr>
+                        <a:t>交通標誌根因佔比偏離 83%</a:t>
+                      </a:r>
+                    </a:p>
+                  </a:txBody>
+                  <a:tcPr marL="45720" marR="45720" marT="18288" marB="18288" anchor="ctr">
+                    <a:solidFill>
+                      <a:srgbClr val="FBEFEF"/>
+                    </a:solidFill>
+                  </a:tcPr>
+                </a:tc>
+              </a:tr>
+              <a:tr h="292608">
+                <a:tc>
+                  <a:txBody>
+                    <a:bodyPr/>
+                    <a:lstStyle/>
+                    <a:p>
+                      <a:pPr algn="l"/>
+                      <a:r>
+                        <a:rPr sz="1200" b="1">
+                          <a:solidFill>
+                            <a:srgbClr val="C00000"/>
+                          </a:solidFill>
+                          <a:latin typeface="Microsoft JhengHei"/>
+                        </a:rPr>
+                        <a:t>3 人看到答案就不再自己想</a:t>
+                      </a:r>
+                    </a:p>
+                  </a:txBody>
+                  <a:tcPr marL="45720" marR="45720" marT="18288" marB="18288" anchor="ctr">
+                    <a:solidFill>
+                      <a:srgbClr val="FBEFEF"/>
+                    </a:solidFill>
+                  </a:tcPr>
+                </a:tc>
+                <a:tc>
+                  <a:txBody>
+                    <a:bodyPr/>
+                    <a:lstStyle/>
+                    <a:p>
+                      <a:pPr algn="ctr"/>
+                      <a:r>
+                        <a:rPr sz="1200" b="0">
+                          <a:solidFill>
+                            <a:srgbClr val="C00000"/>
+                          </a:solidFill>
+                          <a:latin typeface="Microsoft JhengHei"/>
+                        </a:rPr>
+                        <a:t>介面不顯示機器的信心分數</a:t>
+                      </a:r>
+                    </a:p>
+                  </a:txBody>
+                  <a:tcPr marL="45720" marR="45720" marT="18288" marB="18288" anchor="ctr">
+                    <a:solidFill>
+                      <a:srgbClr val="FBEFEF"/>
+                    </a:solidFill>
+                  </a:tcPr>
+                </a:tc>
+                <a:tc>
+                  <a:txBody>
+                    <a:bodyPr/>
+                    <a:lstStyle/>
+                    <a:p>
+                      <a:pPr algn="ctr"/>
+                      <a:r>
+                        <a:rPr sz="1200" b="0">
+                          <a:solidFill>
+                            <a:srgbClr val="C00000"/>
+                          </a:solidFill>
+                          <a:latin typeface="Microsoft JhengHei"/>
+                        </a:rPr>
+                        <a:t>不顯示會拖慢複核,衝到時效</a:t>
+                      </a:r>
+                    </a:p>
+                  </a:txBody>
+                  <a:tcPr marL="45720" marR="45720" marT="18288" marB="18288" anchor="ctr">
+                    <a:solidFill>
+                      <a:srgbClr val="FBEFEF"/>
+                    </a:solidFill>
+                  </a:tcPr>
+                </a:tc>
+                <a:tc>
+                  <a:txBody>
+                    <a:bodyPr/>
+                    <a:lstStyle/>
+                    <a:p>
+                      <a:pPr algn="ctr"/>
+                      <a:r>
+                        <a:rPr sz="1200" b="0">
+                          <a:solidFill>
+                            <a:srgbClr val="C00000"/>
+                          </a:solidFill>
+                          <a:latin typeface="Microsoft JhengHei"/>
+                        </a:rPr>
+                        <a:t>盲測組與對照組差異超過容忍值</a:t>
+                      </a:r>
+                    </a:p>
+                  </a:txBody>
+                  <a:tcPr marL="45720" marR="45720" marT="18288" marB="18288" anchor="ctr">
+                    <a:solidFill>
+                      <a:srgbClr val="FBEFEF"/>
+                    </a:solidFill>
+                  </a:tcPr>
+                </a:tc>
+              </a:tr>
+              <a:tr h="292608">
+                <a:tc>
+                  <a:txBody>
+                    <a:bodyPr/>
+                    <a:lstStyle/>
+                    <a:p>
+                      <a:pPr algn="l"/>
+                      <a:r>
+                        <a:rPr sz="1200" b="0">
+                          <a:solidFill>
+                            <a:srgbClr val="16212E"/>
+                          </a:solidFill>
+                          <a:latin typeface="Microsoft JhengHei"/>
+                        </a:rPr>
+                        <a:t>4 駕駛本人不能申訴</a:t>
+                      </a:r>
+                    </a:p>
+                  </a:txBody>
+                  <a:tcPr marL="45720" marR="45720" marT="18288" marB="18288" anchor="ctr">
+                    <a:solidFill>
+                      <a:srgbClr val="FFFFFF"/>
+                    </a:solidFill>
+                  </a:tcPr>
+                </a:tc>
+                <a:tc>
+                  <a:txBody>
+                    <a:bodyPr/>
+                    <a:lstStyle/>
+                    <a:p>
+                      <a:pPr algn="ctr"/>
+                      <a:r>
+                        <a:rPr sz="1200" b="0">
+                          <a:solidFill>
+                            <a:srgbClr val="6B7885"/>
+                          </a:solidFill>
+                          <a:latin typeface="Microsoft JhengHei"/>
+                        </a:rPr>
+                        <a:t>申訴管道到位前,產出不供個人考核</a:t>
+                      </a:r>
+                    </a:p>
+                  </a:txBody>
+                  <a:tcPr marL="45720" marR="45720" marT="18288" marB="18288" anchor="ctr">
+                    <a:solidFill>
+                      <a:srgbClr val="FFFFFF"/>
+                    </a:solidFill>
+                  </a:tcPr>
+                </a:tc>
+                <a:tc>
+                  <a:txBody>
+                    <a:bodyPr/>
+                    <a:lstStyle/>
+                    <a:p>
+                      <a:pPr algn="ctr"/>
+                      <a:r>
+                        <a:rPr sz="1200" b="0">
+                          <a:solidFill>
+                            <a:srgbClr val="6B7885"/>
+                          </a:solidFill>
+                          <a:latin typeface="Microsoft JhengHei"/>
+                        </a:rPr>
+                        <a:t>限制用途會降低客戶採用意願</a:t>
+                      </a:r>
+                    </a:p>
+                  </a:txBody>
+                  <a:tcPr marL="45720" marR="45720" marT="18288" marB="18288" anchor="ctr">
+                    <a:solidFill>
+                      <a:srgbClr val="FFFFFF"/>
+                    </a:solidFill>
+                  </a:tcPr>
+                </a:tc>
+                <a:tc>
+                  <a:txBody>
+                    <a:bodyPr/>
+                    <a:lstStyle/>
+                    <a:p>
+                      <a:pPr algn="ctr"/>
+                      <a:r>
+                        <a:rPr sz="1200" b="0">
+                          <a:solidFill>
+                            <a:srgbClr val="6B7885"/>
+                          </a:solidFill>
+                          <a:latin typeface="Microsoft JhengHei"/>
+                        </a:rPr>
+                        <a:t>駕駛申訴無處可收,件數恆為零</a:t>
+                      </a:r>
+                    </a:p>
+                  </a:txBody>
+                  <a:tcPr marL="45720" marR="45720" marT="18288" marB="18288" anchor="ctr">
+                    <a:solidFill>
+                      <a:srgbClr val="FFFFFF"/>
+                    </a:solidFill>
+                  </a:tcPr>
+                </a:tc>
+              </a:tr>
+              <a:tr h="292608">
+                <a:tc>
+                  <a:txBody>
+                    <a:bodyPr/>
+                    <a:lstStyle/>
+                    <a:p>
+                      <a:pPr algn="l"/>
+                      <a:r>
+                        <a:rPr sz="1200" b="0">
+                          <a:solidFill>
+                            <a:srgbClr val="16212E"/>
+                          </a:solidFill>
+                          <a:latin typeface="Microsoft JhengHei"/>
+                        </a:rPr>
+                        <a:t>5 複核人員的角色會變</a:t>
+                      </a:r>
+                    </a:p>
+                  </a:txBody>
+                  <a:tcPr marL="45720" marR="45720" marT="18288" marB="18288" anchor="ctr">
+                    <a:solidFill>
+                      <a:srgbClr val="FFFFFF"/>
+                    </a:solidFill>
+                  </a:tcPr>
+                </a:tc>
+                <a:tc>
+                  <a:txBody>
+                    <a:bodyPr/>
+                    <a:lstStyle/>
+                    <a:p>
+                      <a:pPr algn="ctr"/>
+                      <a:r>
+                        <a:rPr sz="1200" b="0">
+                          <a:solidFill>
+                            <a:srgbClr val="6B7885"/>
+                          </a:solidFill>
+                          <a:latin typeface="Microsoft JhengHei"/>
+                        </a:rPr>
+                        <a:t>轉型說明 + 判準手冊一起編</a:t>
+                      </a:r>
+                    </a:p>
+                  </a:txBody>
+                  <a:tcPr marL="45720" marR="45720" marT="18288" marB="18288" anchor="ctr">
+                    <a:solidFill>
+                      <a:srgbClr val="FFFFFF"/>
+                    </a:solidFill>
+                  </a:tcPr>
+                </a:tc>
+                <a:tc>
+                  <a:txBody>
+                    <a:bodyPr/>
+                    <a:lstStyle/>
+                    <a:p>
+                      <a:pPr algn="ctr"/>
+                      <a:r>
+                        <a:rPr sz="1200" b="0">
+                          <a:solidFill>
+                            <a:srgbClr val="6B7885"/>
+                          </a:solidFill>
+                          <a:latin typeface="Microsoft JhengHei"/>
+                        </a:rPr>
+                        <a:t>一起編會拉長判準定案的時間</a:t>
+                      </a:r>
+                    </a:p>
+                  </a:txBody>
+                  <a:tcPr marL="45720" marR="45720" marT="18288" marB="18288" anchor="ctr">
+                    <a:solidFill>
+                      <a:srgbClr val="FFFFFF"/>
+                    </a:solidFill>
+                  </a:tcPr>
+                </a:tc>
+                <a:tc>
+                  <a:txBody>
+                    <a:bodyPr/>
+                    <a:lstStyle/>
+                    <a:p>
+                      <a:pPr algn="ctr"/>
+                      <a:r>
+                        <a:rPr sz="1200" b="0">
+                          <a:solidFill>
+                            <a:srgbClr val="6B7885"/>
+                          </a:solidFill>
+                          <a:latin typeface="Microsoft JhengHei"/>
+                        </a:rPr>
+                        <a:t>團隊留任率或參與率下滑</a:t>
+                      </a:r>
+                    </a:p>
+                  </a:txBody>
+                  <a:tcPr marL="45720" marR="45720" marT="18288" marB="18288" anchor="ctr">
+                    <a:solidFill>
+                      <a:srgbClr val="FFFFFF"/>
+                    </a:solidFill>
+                  </a:tcPr>
+                </a:tc>
+              </a:tr>
+              <a:tr h="292608">
+                <a:tc>
+                  <a:txBody>
+                    <a:bodyPr/>
+                    <a:lstStyle/>
+                    <a:p>
+                      <a:pPr algn="l"/>
+                      <a:r>
+                        <a:rPr sz="1200" b="0">
+                          <a:solidFill>
+                            <a:srgbClr val="16212E"/>
+                          </a:solidFill>
+                          <a:latin typeface="Microsoft JhengHei"/>
+                        </a:rPr>
+                        <a:t>6 六個月內證不出回本</a:t>
+                      </a:r>
+                    </a:p>
+                  </a:txBody>
+                  <a:tcPr marL="45720" marR="45720" marT="18288" marB="18288" anchor="ctr">
+                    <a:solidFill>
+                      <a:srgbClr val="FFFFFF"/>
+                    </a:solidFill>
+                  </a:tcPr>
+                </a:tc>
+                <a:tc>
+                  <a:txBody>
+                    <a:bodyPr/>
+                    <a:lstStyle/>
+                    <a:p>
+                      <a:pPr algn="ctr"/>
+                      <a:r>
+                        <a:rPr sz="1200" b="0">
+                          <a:solidFill>
+                            <a:srgbClr val="6B7885"/>
+                          </a:solidFill>
+                          <a:latin typeface="Microsoft JhengHei"/>
+                        </a:rPr>
+                        <a:t>三個檢查點分段給錢</a:t>
+                      </a:r>
+                    </a:p>
+                  </a:txBody>
+                  <a:tcPr marL="45720" marR="45720" marT="18288" marB="18288" anchor="ctr">
+                    <a:solidFill>
+                      <a:srgbClr val="FFFFFF"/>
+                    </a:solidFill>
+                  </a:tcPr>
+                </a:tc>
+                <a:tc>
+                  <a:txBody>
+                    <a:bodyPr/>
+                    <a:lstStyle/>
+                    <a:p>
+                      <a:pPr algn="ctr"/>
+                      <a:r>
+                        <a:rPr sz="1200" b="0">
+                          <a:solidFill>
+                            <a:srgbClr val="6B7885"/>
+                          </a:solidFill>
+                          <a:latin typeface="Microsoft JhengHei"/>
+                        </a:rPr>
+                        <a:t>分段給錢讓長週期的工作難排人</a:t>
+                      </a:r>
+                    </a:p>
+                  </a:txBody>
+                  <a:tcPr marL="45720" marR="45720" marT="18288" marB="18288" anchor="ctr">
+                    <a:solidFill>
+                      <a:srgbClr val="FFFFFF"/>
+                    </a:solidFill>
+                  </a:tcPr>
+                </a:tc>
+                <a:tc>
+                  <a:txBody>
+                    <a:bodyPr/>
+                    <a:lstStyle/>
+                    <a:p>
+                      <a:pPr algn="ctr"/>
+                      <a:r>
+                        <a:rPr sz="1200" b="0">
+                          <a:solidFill>
+                            <a:srgbClr val="6B7885"/>
+                          </a:solidFill>
+                          <a:latin typeface="Microsoft JhengHei"/>
+                        </a:rPr>
+                        <a:t>檢查點的單位成本改善低於門檻</a:t>
+                      </a:r>
+                    </a:p>
+                  </a:txBody>
+                  <a:tcPr marL="45720" marR="45720" marT="18288" marB="18288" anchor="ctr">
+                    <a:solidFill>
+                      <a:srgbClr val="FFFFFF"/>
+                    </a:solidFill>
+                  </a:tcPr>
+                </a:tc>
+              </a:tr>
+              <a:tr h="292608">
+                <a:tc>
+                  <a:txBody>
+                    <a:bodyPr/>
+                    <a:lstStyle/>
+                    <a:p>
+                      <a:pPr algn="l"/>
+                      <a:r>
+                        <a:rPr sz="1200" b="0">
+                          <a:solidFill>
+                            <a:srgbClr val="16212E"/>
+                          </a:solidFill>
+                          <a:latin typeface="Microsoft JhengHei"/>
+                        </a:rPr>
+                        <a:t>7 高階不參與就會擱置</a:t>
+                      </a:r>
+                    </a:p>
+                  </a:txBody>
+                  <a:tcPr marL="45720" marR="45720" marT="18288" marB="18288" anchor="ctr">
+                    <a:solidFill>
+                      <a:srgbClr val="FFFFFF"/>
+                    </a:solidFill>
+                  </a:tcPr>
+                </a:tc>
+                <a:tc>
+                  <a:txBody>
+                    <a:bodyPr/>
+                    <a:lstStyle/>
+                    <a:p>
+                      <a:pPr algn="ctr"/>
+                      <a:r>
+                        <a:rPr sz="1200" b="0">
+                          <a:solidFill>
+                            <a:srgbClr val="6B7885"/>
+                          </a:solidFill>
+                          <a:latin typeface="Microsoft JhengHei"/>
+                        </a:rPr>
+                        <a:t>指定贊助人,他出席才放行</a:t>
+                      </a:r>
+                    </a:p>
+                  </a:txBody>
+                  <a:tcPr marL="45720" marR="45720" marT="18288" marB="18288" anchor="ctr">
+                    <a:solidFill>
+                      <a:srgbClr val="FFFFFF"/>
+                    </a:solidFill>
+                  </a:tcPr>
+                </a:tc>
+                <a:tc>
+                  <a:txBody>
+                    <a:bodyPr/>
+                    <a:lstStyle/>
+                    <a:p>
+                      <a:pPr algn="ctr"/>
+                      <a:r>
+                        <a:rPr sz="1200" b="0">
+                          <a:solidFill>
+                            <a:srgbClr val="6B7885"/>
+                          </a:solidFill>
+                          <a:latin typeface="Microsoft JhengHei"/>
+                        </a:rPr>
+                        <a:t>檢查點增加會議與治理成本</a:t>
+                      </a:r>
+                    </a:p>
+                  </a:txBody>
+                  <a:tcPr marL="45720" marR="45720" marT="18288" marB="18288" anchor="ctr">
+                    <a:solidFill>
+                      <a:srgbClr val="FFFFFF"/>
+                    </a:solidFill>
+                  </a:tcPr>
+                </a:tc>
+                <a:tc>
+                  <a:txBody>
+                    <a:bodyPr/>
+                    <a:lstStyle/>
+                    <a:p>
+                      <a:pPr algn="ctr"/>
+                      <a:r>
+                        <a:rPr sz="1200" b="0">
+                          <a:solidFill>
+                            <a:srgbClr val="6B7885"/>
+                          </a:solidFill>
+                          <a:latin typeface="Microsoft JhengHei"/>
+                        </a:rPr>
+                        <a:t>連續兩次檢查點沒有高階出席</a:t>
+                      </a:r>
+                    </a:p>
+                  </a:txBody>
+                  <a:tcPr marL="45720" marR="45720" marT="18288" marB="18288" anchor="ctr">
+                    <a:solidFill>
+                      <a:srgbClr val="FFFFFF"/>
+                    </a:solidFill>
+                  </a:tcPr>
+                </a:tc>
+              </a:tr>
+              <a:tr h="292608">
+                <a:tc>
+                  <a:txBody>
+                    <a:bodyPr/>
+                    <a:lstStyle/>
+                    <a:p>
+                      <a:pPr algn="l"/>
+                      <a:r>
+                        <a:rPr sz="1200" b="1">
+                          <a:solidFill>
+                            <a:srgbClr val="C00000"/>
+                          </a:solidFill>
+                          <a:latin typeface="Microsoft JhengHei"/>
+                        </a:rPr>
+                        <a:t>8 曾判為誤報的紀錄,法律上算什麼</a:t>
+                      </a:r>
+                    </a:p>
+                  </a:txBody>
+                  <a:tcPr marL="45720" marR="45720" marT="18288" marB="18288" anchor="ctr">
+                    <a:solidFill>
+                      <a:srgbClr val="FBEFEF"/>
+                    </a:solidFill>
+                  </a:tcPr>
+                </a:tc>
+                <a:tc>
+                  <a:txBody>
+                    <a:bodyPr/>
+                    <a:lstStyle/>
+                    <a:p>
+                      <a:pPr algn="ctr"/>
+                      <a:r>
+                        <a:rPr sz="1200" b="0">
+                          <a:solidFill>
+                            <a:srgbClr val="C00000"/>
+                          </a:solidFill>
+                          <a:latin typeface="Microsoft JhengHei"/>
+                        </a:rPr>
+                        <a:t>法務書面意見在第 6 週前到位</a:t>
+                      </a:r>
+                    </a:p>
+                  </a:txBody>
+                  <a:tcPr marL="45720" marR="45720" marT="18288" marB="18288" anchor="ctr">
+                    <a:solidFill>
+                      <a:srgbClr val="FBEFEF"/>
+                    </a:solidFill>
+                  </a:tcPr>
+                </a:tc>
+                <a:tc>
+                  <a:txBody>
+                    <a:bodyPr/>
+                    <a:lstStyle/>
+                    <a:p>
+                      <a:pPr algn="ctr"/>
+                      <a:r>
+                        <a:rPr sz="1200" b="0">
+                          <a:solidFill>
+                            <a:srgbClr val="C00000"/>
+                          </a:solidFill>
+                          <a:latin typeface="Microsoft JhengHei"/>
+                        </a:rPr>
+                        <a:t>🔴 目前沒有可執行的緩解</a:t>
+                      </a:r>
+                    </a:p>
+                  </a:txBody>
+                  <a:tcPr marL="45720" marR="45720" marT="18288" marB="18288" anchor="ctr">
+                    <a:solidFill>
+                      <a:srgbClr val="FBEFEF"/>
+                    </a:solidFill>
+                  </a:tcPr>
+                </a:tc>
+                <a:tc>
+                  <a:txBody>
+                    <a:bodyPr/>
+                    <a:lstStyle/>
+                    <a:p>
+                      <a:pPr algn="ctr"/>
+                      <a:r>
+                        <a:rPr sz="1200" b="0">
+                          <a:solidFill>
+                            <a:srgbClr val="C00000"/>
+                          </a:solidFill>
+                          <a:latin typeface="Microsoft JhengHei"/>
+                        </a:rPr>
+                        <a:t>客戶回頭標記時援引我方誤報</a:t>
+                      </a:r>
+                    </a:p>
+                  </a:txBody>
+                  <a:tcPr marL="45720" marR="45720" marT="18288" marB="18288" anchor="ctr">
+                    <a:solidFill>
+                      <a:srgbClr val="FBEFEF"/>
+                    </a:solidFill>
+                  </a:tcPr>
+                </a:tc>
+              </a:tr>
+            </a:tbl>
+          </a:graphicData>
+        </a:graphic>
+      </p:graphicFrame>
+      <p:sp>
+        <p:nvSpPr>
+          <p:cNvPr id="7" name="Rounded Rectangle 6"/>
+          <p:cNvSpPr/>
+          <p:nvPr/>
+        </p:nvSpPr>
+        <p:spPr>
+          <a:xfrm>
+            <a:off x="658368" y="4553712"/>
+            <a:ext cx="9658807" cy="1956816"/>
+          </a:xfrm>
+          <a:prstGeom prst="roundRect">
+            <a:avLst>
+              <a:gd name="adj" fmla="val 6000"/>
+            </a:avLst>
+          </a:prstGeom>
+          <a:solidFill>
+            <a:srgbClr val="1F4E79"/>
+          </a:solidFill>
+          <a:ln>
+            <a:noFill/>
+          </a:ln>
+          <a:effectLst/>
+        </p:spPr>
+        <p:style>
+          <a:lnRef idx="1">
+            <a:schemeClr val="accent1"/>
+          </a:lnRef>
+          <a:fillRef idx="3">
+            <a:schemeClr val="accent1"/>
+          </a:fillRef>
+          <a:effectRef idx="2">
+            <a:schemeClr val="accent1"/>
+          </a:effectRef>
+          <a:fontRef idx="minor">
+            <a:schemeClr val="lt1"/>
+          </a:fontRef>
+        </p:style>
+        <p:txBody>
+          <a:bodyPr rtlCol="0" anchor="ctr"/>
+          <a:lstStyle/>
+          <a:p>
+            <a:pPr algn="ctr"/>
+          </a:p>
+        </p:txBody>
+      </p:sp>
+      <p:sp>
+        <p:nvSpPr>
+          <p:cNvPr id="8" name="TextBox 7"/>
+          <p:cNvSpPr txBox="1"/>
+          <p:nvPr/>
+        </p:nvSpPr>
+        <p:spPr>
+          <a:xfrm>
+            <a:off x="841247" y="4553712"/>
+            <a:ext cx="9293047" cy="1956816"/>
+          </a:xfrm>
+          <a:prstGeom prst="rect">
+            <a:avLst/>
+          </a:prstGeom>
+          <a:noFill/>
+        </p:spPr>
+        <p:txBody>
+          <a:bodyPr wrap="square" lIns="0" rIns="0" tIns="0" bIns="0" anchor="ctr">
+            <a:spAutoFit/>
+          </a:bodyPr>
+          <a:lstStyle/>
+          <a:p>
+            <a:pPr algn="ctr">
+              <a:lnSpc>
+                <a:spcPct val="125000"/>
+              </a:lnSpc>
+            </a:pPr>
+            <a:r>
+              <a:rPr sz="1700" b="1">
+                <a:solidFill>
+                  <a:srgbClr val="FFFFFF"/>
+                </a:solidFill>
+                <a:latin typeface="Microsoft JhengHei"/>
+              </a:rPr>
+              <a:t>第 8 條我沒有答案 —— 由法務在第 6 週前給書面意見;其餘七條都寫明了怎麼知道它發生了</a:t>
+            </a:r>
+          </a:p>
+        </p:txBody>
+      </p:sp>
+    </p:spTree>
+  </p:cSld>
+  <p:clrMapOvr>
+    <a:masterClrMapping/>
+  </p:clrMapOvr>
+</p:sld>
+</file>
+
+<file path=ppt/slides/slide8.xml><?xml version="1.0" encoding="utf-8"?>
+<p:sld xmlns:a="http://schemas.openxmlformats.org/drawingml/2006/main" xmlns:p="http://schemas.openxmlformats.org/presentationml/2006/main" xmlns:r="http://schemas.openxmlformats.org/officeDocument/2006/relationships">
+  <p:cSld>
+    <p:spTree>
+      <p:nvGrpSpPr>
+        <p:cNvPr id="1" name=""/>
+        <p:cNvGrpSpPr/>
+        <p:nvPr/>
+      </p:nvGrpSpPr>
+      <p:grpSpPr/>
+      <p:sp>
+        <p:nvSpPr>
+          <p:cNvPr id="2" name="TextBox 1"/>
+          <p:cNvSpPr txBox="1"/>
+          <p:nvPr/>
+        </p:nvSpPr>
+        <p:spPr>
+          <a:xfrm>
+            <a:off x="658368" y="384048"/>
+            <a:ext cx="5486400" cy="274320"/>
+          </a:xfrm>
+          <a:prstGeom prst="rect">
+            <a:avLst/>
+          </a:prstGeom>
+          <a:noFill/>
+        </p:spPr>
+        <p:txBody>
+          <a:bodyPr wrap="square" lIns="0" rIns="0" tIns="0" bIns="0" anchor="t">
+            <a:spAutoFit/>
+          </a:bodyPr>
+          <a:lstStyle/>
+          <a:p>
+            <a:pPr algn="l">
+              <a:lnSpc>
+                <a:spcPct val="125000"/>
+              </a:lnSpc>
+            </a:pPr>
+            <a:r>
+              <a:rPr sz="1300" b="1">
+                <a:solidFill>
+                  <a:srgbClr val="E8833A"/>
+                </a:solidFill>
+                <a:latin typeface="Microsoft JhengHei"/>
+              </a:rPr>
+              <a:t>業務影響</a:t>
+            </a:r>
+          </a:p>
+        </p:txBody>
+      </p:sp>
+      <p:sp>
+        <p:nvSpPr>
+          <p:cNvPr id="3" name="TextBox 2"/>
+          <p:cNvSpPr txBox="1"/>
+          <p:nvPr/>
+        </p:nvSpPr>
+        <p:spPr>
+          <a:xfrm>
+            <a:off x="658368" y="676656"/>
+            <a:ext cx="11030407" cy="566928"/>
+          </a:xfrm>
+          <a:prstGeom prst="rect">
+            <a:avLst/>
+          </a:prstGeom>
+          <a:noFill/>
+        </p:spPr>
+        <p:txBody>
+          <a:bodyPr wrap="square" lIns="0" rIns="0" tIns="0" bIns="0" anchor="t">
+            <a:spAutoFit/>
+          </a:bodyPr>
+          <a:lstStyle/>
+          <a:p>
+            <a:pPr algn="l">
+              <a:lnSpc>
+                <a:spcPct val="125000"/>
+              </a:lnSpc>
+            </a:pPr>
+            <a:r>
+              <a:rPr sz="2700" b="1">
+                <a:solidFill>
+                  <a:srgbClr val="1F4E79"/>
+                </a:solidFill>
+                <a:latin typeface="Microsoft JhengHei"/>
+              </a:rPr>
+              <a:t>這個方案的倫理代價 —— 我逐條對過八原則,沒有一條是綠燈</a:t>
+            </a:r>
+          </a:p>
+        </p:txBody>
+      </p:sp>
+      <p:sp>
+        <p:nvSpPr>
+          <p:cNvPr id="4" name="TextBox 3"/>
+          <p:cNvSpPr txBox="1"/>
+          <p:nvPr/>
+        </p:nvSpPr>
+        <p:spPr>
+          <a:xfrm>
+            <a:off x="658368" y="1298448"/>
+            <a:ext cx="11030407" cy="365760"/>
+          </a:xfrm>
+          <a:prstGeom prst="rect">
+            <a:avLst/>
+          </a:prstGeom>
+          <a:noFill/>
+        </p:spPr>
+        <p:txBody>
+          <a:bodyPr wrap="square" lIns="0" rIns="0" tIns="0" bIns="0" anchor="t">
+            <a:spAutoFit/>
+          </a:bodyPr>
+          <a:lstStyle/>
+          <a:p>
+            <a:pPr algn="l">
+              <a:lnSpc>
+                <a:spcPct val="125000"/>
+              </a:lnSpc>
+            </a:pPr>
+            <a:r>
+              <a:rPr sz="1500" b="0">
+                <a:solidFill>
+                  <a:srgbClr val="6B7885"/>
+                </a:solidFill>
+                <a:latin typeface="Microsoft JhengHei"/>
+              </a:rPr>
+              <a:t>澳洲 AI 倫理八原則(2019)。人仍逐筆判,所以多數持平或改善;但有兩條會變差</a:t>
+            </a:r>
+          </a:p>
+        </p:txBody>
+      </p:sp>
+      <p:sp>
+        <p:nvSpPr>
+          <p:cNvPr id="5" name="Rectangle 4"/>
+          <p:cNvSpPr/>
+          <p:nvPr/>
+        </p:nvSpPr>
+        <p:spPr>
+          <a:xfrm>
+            <a:off x="658368" y="1517904"/>
+            <a:ext cx="10874959" cy="32004"/>
+          </a:xfrm>
+          <a:prstGeom prst="rect">
+            <a:avLst/>
+          </a:prstGeom>
+          <a:solidFill>
+            <a:srgbClr val="1F4E79"/>
+          </a:solidFill>
+          <a:ln>
+            <a:n